--- a/site/downloads/pixan-bank-deck-short-fi.pptx
+++ b/site/downloads/pixan-bank-deck-short-fi.pptx
@@ -3362,7 +3362,7 @@
                 </a:solidFill>
                 <a:latin typeface="Aptos"/>
               </a:rPr>
-              <a:t>2026.07.22-7</a:t>
+              <a:t>2026.07.22-8</a:t>
             </a:r>
           </a:p>
         </p:txBody>
@@ -3716,7 +3716,7 @@
                 </a:solidFill>
                 <a:latin typeface="Aptos"/>
               </a:rPr>
-              <a:t>Julkinen riippumaton evidenssikooste · 2026.07.22-7 · 2026-07-22 · Lähteet: EPO, Saksan viralliset tuomiot, WIPO</a:t>
+              <a:t>Julkinen riippumaton evidenssikooste · 2026.07.22-8 · 2026-07-22 · Lähteet: EPO; Saksa — viralliset tuomiot; WIPO</a:t>
             </a:r>
           </a:p>
         </p:txBody>
@@ -3828,7 +3828,7 @@
               </a:defRPr>
             </a:pPr>
             <a:r>
-              <a:t>•  EPO pysytti patentin muutettuna; B2-julkaisu sisältää 9 vaatimusta.</a:t>
+              <a:t>•  EPO-rekisteri: patentti pysytetty muutettuna väitemenettelyn jälkeen; B2-patenttijulkaisu julkaistu. EP3032975B2 sisältää 9 vaatimusta.</a:t>
             </a:r>
           </a:p>
           <a:p>
@@ -3847,7 +3847,7 @@
               </a:defRPr>
             </a:pPr>
             <a:r>
-              <a:t>•  Saksassa on virallinen mitätöinti- ja loukkausratkaisu, mutta lopullisuus- ja aluerajat säilyvät.</a:t>
+              <a:t>•  Saksa: kaksi virallista ratkaisua; lopullisuus- ja aluerajat säilyvät.</a:t>
             </a:r>
           </a:p>
           <a:p>
@@ -4196,7 +4196,7 @@
                 </a:solidFill>
                 <a:latin typeface="Aptos"/>
               </a:rPr>
-              <a:t>Julkinen riippumaton evidenssikooste · 2026.07.22-7 · 2026-07-22 · Lähteet: EPO Register; EP3032975B2; DE 8 Ni 18/24; DE 7 O 3341/24</a:t>
+              <a:t>Julkinen riippumaton evidenssikooste · 2026.07.22-8 · 2026-07-22 · Lähteet: EPO Register; EP3032975B2; 8 Ni 18/24 (EP); 7 O 3341/24</a:t>
             </a:r>
           </a:p>
         </p:txBody>
@@ -4582,7 +4582,7 @@
                 </a:solidFill>
                 <a:latin typeface="Aptos"/>
               </a:rPr>
-              <a:t>virallista Saksan ratkaisua</a:t>
+              <a:t>virallista ratkaisua: Saksa</a:t>
             </a:r>
           </a:p>
         </p:txBody>
@@ -4947,7 +4947,7 @@
                 </a:solidFill>
                 <a:latin typeface="Aptos"/>
               </a:rPr>
-              <a:t>Julkinen riippumaton evidenssikooste · 2026.07.22-7 · 2026-07-22 · Lähteet: Health Canada; Destatis; FI/PL/SE viralliset lähteet</a:t>
+              <a:t>Julkinen riippumaton evidenssikooste · 2026.07.22-8 · 2026-07-22 · Lähteet: Health Canada; Destatis; Vero; Sejm; Ruotsin hallitus</a:t>
             </a:r>
           </a:p>
         </p:txBody>
@@ -5368,7 +5368,7 @@
                 </a:solidFill>
                 <a:latin typeface="Aptos"/>
               </a:rPr>
-              <a:t>Kaupallinen $26,0–46,32 mrd haarukka on sanity check — ei atlaksen oma maailmanestimaatti.</a:t>
+              <a:t>Kaupallinen 26,0–46,32 mrd USD haarukka on sanity check — ei atlaksen oma maailmanestimaatti.</a:t>
             </a:r>
           </a:p>
         </p:txBody>
@@ -5485,7 +5485,7 @@
                 </a:solidFill>
                 <a:latin typeface="Aptos"/>
               </a:rPr>
-              <a:t>Kanada: 1.16 mrd CAD toimitusarvo. Saksa: 1.518 milj. l verotettua nestettä vuonna 2025 (alustava). Mittareita ei summata keskenään.</a:t>
+              <a:t>Kanada: 1,16 mrd CAD toimitusarvo. Saksa: 1,518 milj. l verotettua nestettä vuonna 2025 (alustava). Mittareita ei summata keskenään.</a:t>
             </a:r>
           </a:p>
         </p:txBody>
@@ -5698,7 +5698,7 @@
                 </a:solidFill>
                 <a:latin typeface="Aptos"/>
               </a:rPr>
-              <a:t>Julkinen riippumaton evidenssikooste · 2026.07.22-7 · 2026-07-22 · Lähteet: Evidence Register; WIPO IP valuation</a:t>
+              <a:t>Julkinen riippumaton evidenssikooste · 2026.07.22-8 · 2026-07-22 · Lähteet: Evidence Register; WIPO IP valuation</a:t>
             </a:r>
           </a:p>
         </p:txBody>
@@ -6395,7 +6395,7 @@
                 </a:solidFill>
                 <a:latin typeface="Aptos"/>
               </a:rPr>
-              <a:t>Versio 2026.07.22-7 · 2026-07-22 · 6 / 6</a:t>
+              <a:t>Versio 2026.07.22-8 · 2026-07-22 · 6 / 6</a:t>
             </a:r>
           </a:p>
         </p:txBody>

--- a/site/downloads/pixan-bank-deck-short-fi.pptx
+++ b/site/downloads/pixan-bank-deck-short-fi.pptx
@@ -3362,7 +3362,7 @@
                 </a:solidFill>
                 <a:latin typeface="Aptos"/>
               </a:rPr>
-              <a:t>2026.07.22-8</a:t>
+              <a:t>2026.07.22-9</a:t>
             </a:r>
           </a:p>
         </p:txBody>
@@ -3716,7 +3716,7 @@
                 </a:solidFill>
                 <a:latin typeface="Aptos"/>
               </a:rPr>
-              <a:t>Julkinen riippumaton evidenssikooste · 2026.07.22-8 · 2026-07-22 · Lähteet: EPO; Saksa — viralliset tuomiot; WIPO</a:t>
+              <a:t>Julkinen riippumaton evidenssikooste · 2026.07.22-9 · 2026-07-22 · Lähteet: EPO; Saksa — viralliset tuomiot; WIPO</a:t>
             </a:r>
           </a:p>
         </p:txBody>
@@ -4196,7 +4196,7 @@
                 </a:solidFill>
                 <a:latin typeface="Aptos"/>
               </a:rPr>
-              <a:t>Julkinen riippumaton evidenssikooste · 2026.07.22-8 · 2026-07-22 · Lähteet: EPO Register; EP3032975B2; 8 Ni 18/24 (EP); 7 O 3341/24</a:t>
+              <a:t>Julkinen riippumaton evidenssikooste · 2026.07.22-9 · 2026-07-22 · Lähteet: EPO Register; EP3032975B2; 8 Ni 18/24 (EP); 7 O 3341/24</a:t>
             </a:r>
           </a:p>
         </p:txBody>
@@ -4947,7 +4947,7 @@
                 </a:solidFill>
                 <a:latin typeface="Aptos"/>
               </a:rPr>
-              <a:t>Julkinen riippumaton evidenssikooste · 2026.07.22-8 · 2026-07-22 · Lähteet: Health Canada; Destatis; Vero; Sejm; Ruotsin hallitus</a:t>
+              <a:t>Julkinen riippumaton evidenssikooste · 2026.07.22-9 · 2026-07-22 · Lähteet: Health Canada; Destatis; Vero; Sejm; Ruotsin hallitus</a:t>
             </a:r>
           </a:p>
         </p:txBody>
@@ -5698,7 +5698,7 @@
                 </a:solidFill>
                 <a:latin typeface="Aptos"/>
               </a:rPr>
-              <a:t>Julkinen riippumaton evidenssikooste · 2026.07.22-8 · 2026-07-22 · Lähteet: Evidence Register; WIPO IP valuation</a:t>
+              <a:t>Julkinen riippumaton evidenssikooste · 2026.07.22-9 · 2026-07-22 · Lähteet: Evidence Register; WIPO IP valuation</a:t>
             </a:r>
           </a:p>
         </p:txBody>
@@ -6395,7 +6395,7 @@
                 </a:solidFill>
                 <a:latin typeface="Aptos"/>
               </a:rPr>
-              <a:t>Versio 2026.07.22-8 · 2026-07-22 · 6 / 6</a:t>
+              <a:t>Versio 2026.07.22-9 · 2026-07-22 · 6 / 6</a:t>
             </a:r>
           </a:p>
         </p:txBody>

--- a/site/downloads/pixan-bank-deck-short-fi.pptx
+++ b/site/downloads/pixan-bank-deck-short-fi.pptx
@@ -3362,7 +3362,7 @@
                 </a:solidFill>
                 <a:latin typeface="Aptos"/>
               </a:rPr>
-              <a:t>2026.07.22-9</a:t>
+              <a:t>2026.07.23-10</a:t>
             </a:r>
           </a:p>
         </p:txBody>
@@ -3716,7 +3716,7 @@
                 </a:solidFill>
                 <a:latin typeface="Aptos"/>
               </a:rPr>
-              <a:t>Julkinen riippumaton evidenssikooste · 2026.07.22-9 · 2026-07-22 · Lähteet: EPO; Saksa — viralliset tuomiot; WIPO</a:t>
+              <a:t>Julkinen riippumaton evidenssikooste · 2026.07.23-10 · 2026-07-22 · Lähteet: EPO; Saksa — viralliset tuomiot; WIPO</a:t>
             </a:r>
           </a:p>
         </p:txBody>
@@ -4196,7 +4196,7 @@
                 </a:solidFill>
                 <a:latin typeface="Aptos"/>
               </a:rPr>
-              <a:t>Julkinen riippumaton evidenssikooste · 2026.07.22-9 · 2026-07-22 · Lähteet: EPO Register; EP3032975B2; 8 Ni 18/24 (EP); 7 O 3341/24</a:t>
+              <a:t>Julkinen riippumaton evidenssikooste · 2026.07.23-10 · 2026-07-22 · Lähteet: EPO Register; EP3032975B2; 8 Ni 18/24 (EP); 7 O 3341/24</a:t>
             </a:r>
           </a:p>
         </p:txBody>
@@ -4947,7 +4947,7 @@
                 </a:solidFill>
                 <a:latin typeface="Aptos"/>
               </a:rPr>
-              <a:t>Julkinen riippumaton evidenssikooste · 2026.07.22-9 · 2026-07-22 · Lähteet: Health Canada; Destatis; Vero; Sejm; Ruotsin hallitus</a:t>
+              <a:t>Julkinen riippumaton evidenssikooste · 2026.07.23-10 · 2026-07-22 · Lähteet: Health Canada; Destatis; Vero; Sejm; Ruotsin hallitus</a:t>
             </a:r>
           </a:p>
         </p:txBody>
@@ -5698,7 +5698,7 @@
                 </a:solidFill>
                 <a:latin typeface="Aptos"/>
               </a:rPr>
-              <a:t>Julkinen riippumaton evidenssikooste · 2026.07.22-9 · 2026-07-22 · Lähteet: Evidence Register; WIPO IP valuation</a:t>
+              <a:t>Julkinen riippumaton evidenssikooste · 2026.07.23-10 · 2026-07-22 · Lähteet: Evidence Register; WIPO IP valuation</a:t>
             </a:r>
           </a:p>
         </p:txBody>
@@ -6395,7 +6395,7 @@
                 </a:solidFill>
                 <a:latin typeface="Aptos"/>
               </a:rPr>
-              <a:t>Versio 2026.07.22-9 · 2026-07-22 · 6 / 6</a:t>
+              <a:t>Versio 2026.07.23-10 · 2026-07-22 · 6 / 6</a:t>
             </a:r>
           </a:p>
         </p:txBody>

--- a/site/downloads/pixan-bank-deck-short-fi.pptx
+++ b/site/downloads/pixan-bank-deck-short-fi.pptx
@@ -3362,7 +3362,7 @@
                 </a:solidFill>
                 <a:latin typeface="Aptos"/>
               </a:rPr>
-              <a:t>2026.07.23-10</a:t>
+              <a:t>2026.07.23-11</a:t>
             </a:r>
           </a:p>
         </p:txBody>
@@ -3716,7 +3716,7 @@
                 </a:solidFill>
                 <a:latin typeface="Aptos"/>
               </a:rPr>
-              <a:t>Julkinen riippumaton evidenssikooste · 2026.07.23-10 · 2026-07-22 · Lähteet: EPO; Saksa — viralliset tuomiot; WIPO</a:t>
+              <a:t>Julkinen riippumaton evidenssikooste · 2026.07.23-11 · 2026-07-22 · Lähteet: EPO; Saksa — viralliset tuomiot; WIPO</a:t>
             </a:r>
           </a:p>
         </p:txBody>
@@ -4196,7 +4196,7 @@
                 </a:solidFill>
                 <a:latin typeface="Aptos"/>
               </a:rPr>
-              <a:t>Julkinen riippumaton evidenssikooste · 2026.07.23-10 · 2026-07-22 · Lähteet: EPO Register; EP3032975B2; 8 Ni 18/24 (EP); 7 O 3341/24</a:t>
+              <a:t>Julkinen riippumaton evidenssikooste · 2026.07.23-11 · 2026-07-22 · Lähteet: EPO Register; EP3032975B2; 8 Ni 18/24 (EP); 7 O 3341/24</a:t>
             </a:r>
           </a:p>
         </p:txBody>
@@ -4947,7 +4947,7 @@
                 </a:solidFill>
                 <a:latin typeface="Aptos"/>
               </a:rPr>
-              <a:t>Julkinen riippumaton evidenssikooste · 2026.07.23-10 · 2026-07-22 · Lähteet: Health Canada; Destatis; Vero; Sejm; Ruotsin hallitus</a:t>
+              <a:t>Julkinen riippumaton evidenssikooste · 2026.07.23-11 · 2026-07-22 · Lähteet: Health Canada; Destatis; Vero; Sejm; Ruotsin hallitus</a:t>
             </a:r>
           </a:p>
         </p:txBody>
@@ -5698,7 +5698,7 @@
                 </a:solidFill>
                 <a:latin typeface="Aptos"/>
               </a:rPr>
-              <a:t>Julkinen riippumaton evidenssikooste · 2026.07.23-10 · 2026-07-22 · Lähteet: Evidence Register; WIPO IP valuation</a:t>
+              <a:t>Julkinen riippumaton evidenssikooste · 2026.07.23-11 · 2026-07-22 · Lähteet: Evidence Register; WIPO IP valuation</a:t>
             </a:r>
           </a:p>
         </p:txBody>
@@ -6395,7 +6395,7 @@
                 </a:solidFill>
                 <a:latin typeface="Aptos"/>
               </a:rPr>
-              <a:t>Versio 2026.07.23-10 · 2026-07-22 · 6 / 6</a:t>
+              <a:t>Versio 2026.07.23-11 · 2026-07-22 · 6 / 6</a:t>
             </a:r>
           </a:p>
         </p:txBody>

--- a/site/downloads/pixan-bank-deck-short-fi.pptx
+++ b/site/downloads/pixan-bank-deck-short-fi.pptx
@@ -3362,7 +3362,7 @@
                 </a:solidFill>
                 <a:latin typeface="Aptos"/>
               </a:rPr>
-              <a:t>2026.07.23-11</a:t>
+              <a:t>2026.07.23-12</a:t>
             </a:r>
           </a:p>
         </p:txBody>
@@ -3716,7 +3716,7 @@
                 </a:solidFill>
                 <a:latin typeface="Aptos"/>
               </a:rPr>
-              <a:t>Julkinen riippumaton evidenssikooste · 2026.07.23-11 · 2026-07-22 · Lähteet: EPO; Saksa — viralliset tuomiot; WIPO</a:t>
+              <a:t>Julkinen riippumaton evidenssikooste · 2026.07.23-12 · 2026-07-22 · Lähteet: EPO; Saksa — viralliset tuomiot; WIPO</a:t>
             </a:r>
           </a:p>
         </p:txBody>
@@ -4196,7 +4196,7 @@
                 </a:solidFill>
                 <a:latin typeface="Aptos"/>
               </a:rPr>
-              <a:t>Julkinen riippumaton evidenssikooste · 2026.07.23-11 · 2026-07-22 · Lähteet: EPO Register; EP3032975B2; 8 Ni 18/24 (EP); 7 O 3341/24</a:t>
+              <a:t>Julkinen riippumaton evidenssikooste · 2026.07.23-12 · 2026-07-22 · Lähteet: EPO Register; EP3032975B2; 8 Ni 18/24 (EP); 7 O 3341/24</a:t>
             </a:r>
           </a:p>
         </p:txBody>
@@ -4947,7 +4947,7 @@
                 </a:solidFill>
                 <a:latin typeface="Aptos"/>
               </a:rPr>
-              <a:t>Julkinen riippumaton evidenssikooste · 2026.07.23-11 · 2026-07-22 · Lähteet: Health Canada; Destatis; Vero; Sejm; Ruotsin hallitus</a:t>
+              <a:t>Julkinen riippumaton evidenssikooste · 2026.07.23-12 · 2026-07-22 · Lähteet: Health Canada; Destatis; Vero; Sejm; Ruotsin hallitus</a:t>
             </a:r>
           </a:p>
         </p:txBody>
@@ -5698,7 +5698,7 @@
                 </a:solidFill>
                 <a:latin typeface="Aptos"/>
               </a:rPr>
-              <a:t>Julkinen riippumaton evidenssikooste · 2026.07.23-11 · 2026-07-22 · Lähteet: Evidence Register; WIPO IP valuation</a:t>
+              <a:t>Julkinen riippumaton evidenssikooste · 2026.07.23-12 · 2026-07-22 · Lähteet: Evidence Register; WIPO IP valuation</a:t>
             </a:r>
           </a:p>
         </p:txBody>
@@ -6395,7 +6395,7 @@
                 </a:solidFill>
                 <a:latin typeface="Aptos"/>
               </a:rPr>
-              <a:t>Versio 2026.07.23-11 · 2026-07-22 · 6 / 6</a:t>
+              <a:t>Versio 2026.07.23-12 · 2026-07-22 · 6 / 6</a:t>
             </a:r>
           </a:p>
         </p:txBody>

--- a/site/downloads/pixan-bank-deck-short-fi.pptx
+++ b/site/downloads/pixan-bank-deck-short-fi.pptx
@@ -3362,7 +3362,7 @@
                 </a:solidFill>
                 <a:latin typeface="Aptos"/>
               </a:rPr>
-              <a:t>2026.07.23-12</a:t>
+              <a:t>2026.07.23-13</a:t>
             </a:r>
           </a:p>
         </p:txBody>
@@ -3716,7 +3716,7 @@
                 </a:solidFill>
                 <a:latin typeface="Aptos"/>
               </a:rPr>
-              <a:t>Julkinen riippumaton evidenssikooste · 2026.07.23-12 · 2026-07-22 · Lähteet: EPO; Saksa — viralliset tuomiot; WIPO</a:t>
+              <a:t>Julkinen riippumaton evidenssikooste · 2026.07.23-13 · 2026-07-22 · Lähteet: EPO; Saksa — viralliset tuomiot; WIPO</a:t>
             </a:r>
           </a:p>
         </p:txBody>
@@ -4196,7 +4196,7 @@
                 </a:solidFill>
                 <a:latin typeface="Aptos"/>
               </a:rPr>
-              <a:t>Julkinen riippumaton evidenssikooste · 2026.07.23-12 · 2026-07-22 · Lähteet: EPO Register; EP3032975B2; 8 Ni 18/24 (EP); 7 O 3341/24</a:t>
+              <a:t>Julkinen riippumaton evidenssikooste · 2026.07.23-13 · 2026-07-22 · Lähteet: EPO Register; EP3032975B2; 8 Ni 18/24 (EP); 7 O 3341/24</a:t>
             </a:r>
           </a:p>
         </p:txBody>
@@ -4947,7 +4947,7 @@
                 </a:solidFill>
                 <a:latin typeface="Aptos"/>
               </a:rPr>
-              <a:t>Julkinen riippumaton evidenssikooste · 2026.07.23-12 · 2026-07-22 · Lähteet: Health Canada; Destatis; Vero; Sejm; Ruotsin hallitus</a:t>
+              <a:t>Julkinen riippumaton evidenssikooste · 2026.07.23-13 · 2026-07-22 · Lähteet: Health Canada; Destatis; Vero; Sejm; Ruotsin hallitus</a:t>
             </a:r>
           </a:p>
         </p:txBody>
@@ -5698,7 +5698,7 @@
                 </a:solidFill>
                 <a:latin typeface="Aptos"/>
               </a:rPr>
-              <a:t>Julkinen riippumaton evidenssikooste · 2026.07.23-12 · 2026-07-22 · Lähteet: Evidence Register; WIPO IP valuation</a:t>
+              <a:t>Julkinen riippumaton evidenssikooste · 2026.07.23-13 · 2026-07-22 · Lähteet: Evidence Register; WIPO IP valuation</a:t>
             </a:r>
           </a:p>
         </p:txBody>
@@ -6395,7 +6395,7 @@
                 </a:solidFill>
                 <a:latin typeface="Aptos"/>
               </a:rPr>
-              <a:t>Versio 2026.07.23-12 · 2026-07-22 · 6 / 6</a:t>
+              <a:t>Versio 2026.07.23-13 · 2026-07-22 · 6 / 6</a:t>
             </a:r>
           </a:p>
         </p:txBody>

--- a/site/downloads/pixan-bank-deck-short-fi.pptx
+++ b/site/downloads/pixan-bank-deck-short-fi.pptx
@@ -3362,7 +3362,7 @@
                 </a:solidFill>
                 <a:latin typeface="Aptos"/>
               </a:rPr>
-              <a:t>2026.07.23-13</a:t>
+              <a:t>2026.07.23-14</a:t>
             </a:r>
           </a:p>
         </p:txBody>
@@ -3716,7 +3716,7 @@
                 </a:solidFill>
                 <a:latin typeface="Aptos"/>
               </a:rPr>
-              <a:t>Julkinen riippumaton evidenssikooste · 2026.07.23-13 · 2026-07-22 · Lähteet: EPO; Saksa — viralliset tuomiot; WIPO</a:t>
+              <a:t>Julkinen riippumaton evidenssikooste · 2026.07.23-14 · 2026-07-22 · Lähteet: EPO; Saksa — viralliset tuomiot; WIPO</a:t>
             </a:r>
           </a:p>
         </p:txBody>
@@ -4196,7 +4196,7 @@
                 </a:solidFill>
                 <a:latin typeface="Aptos"/>
               </a:rPr>
-              <a:t>Julkinen riippumaton evidenssikooste · 2026.07.23-13 · 2026-07-22 · Lähteet: EPO Register; EP3032975B2; 8 Ni 18/24 (EP); 7 O 3341/24</a:t>
+              <a:t>Julkinen riippumaton evidenssikooste · 2026.07.23-14 · 2026-07-22 · Lähteet: EPO Register; EP3032975B2; 8 Ni 18/24 (EP); 7 O 3341/24</a:t>
             </a:r>
           </a:p>
         </p:txBody>
@@ -4947,7 +4947,7 @@
                 </a:solidFill>
                 <a:latin typeface="Aptos"/>
               </a:rPr>
-              <a:t>Julkinen riippumaton evidenssikooste · 2026.07.23-13 · 2026-07-22 · Lähteet: Health Canada; Destatis; Vero; Sejm; Ruotsin hallitus</a:t>
+              <a:t>Julkinen riippumaton evidenssikooste · 2026.07.23-14 · 2026-07-22 · Lähteet: Health Canada; Destatis; Vero; Sejm; Ruotsin hallitus</a:t>
             </a:r>
           </a:p>
         </p:txBody>
@@ -5698,7 +5698,7 @@
                 </a:solidFill>
                 <a:latin typeface="Aptos"/>
               </a:rPr>
-              <a:t>Julkinen riippumaton evidenssikooste · 2026.07.23-13 · 2026-07-22 · Lähteet: Evidence Register; WIPO IP valuation</a:t>
+              <a:t>Julkinen riippumaton evidenssikooste · 2026.07.23-14 · 2026-07-22 · Lähteet: Evidence Register; WIPO IP valuation</a:t>
             </a:r>
           </a:p>
         </p:txBody>
@@ -6395,7 +6395,7 @@
                 </a:solidFill>
                 <a:latin typeface="Aptos"/>
               </a:rPr>
-              <a:t>Versio 2026.07.23-13 · 2026-07-22 · 6 / 6</a:t>
+              <a:t>Versio 2026.07.23-14 · 2026-07-22 · 6 / 6</a:t>
             </a:r>
           </a:p>
         </p:txBody>

--- a/site/downloads/pixan-bank-deck-short-fi.pptx
+++ b/site/downloads/pixan-bank-deck-short-fi.pptx
@@ -3362,7 +3362,7 @@
                 </a:solidFill>
                 <a:latin typeface="Aptos"/>
               </a:rPr>
-              <a:t>2026.07.23-14</a:t>
+              <a:t>2026.07.23-15</a:t>
             </a:r>
           </a:p>
         </p:txBody>
@@ -3716,7 +3716,7 @@
                 </a:solidFill>
                 <a:latin typeface="Aptos"/>
               </a:rPr>
-              <a:t>Julkinen riippumaton evidenssikooste · 2026.07.23-14 · 2026-07-22 · Lähteet: EPO; Saksa — viralliset tuomiot; WIPO</a:t>
+              <a:t>Julkinen riippumaton evidenssikooste · 2026.07.23-15 · 2026-07-22 · Lähteet: EPO; Saksa — viralliset tuomiot; WIPO</a:t>
             </a:r>
           </a:p>
         </p:txBody>
@@ -4196,7 +4196,7 @@
                 </a:solidFill>
                 <a:latin typeface="Aptos"/>
               </a:rPr>
-              <a:t>Julkinen riippumaton evidenssikooste · 2026.07.23-14 · 2026-07-22 · Lähteet: EPO Register; EP3032975B2; 8 Ni 18/24 (EP); 7 O 3341/24</a:t>
+              <a:t>Julkinen riippumaton evidenssikooste · 2026.07.23-15 · 2026-07-22 · Lähteet: EPO Register; EP3032975B2; 8 Ni 18/24 (EP); 7 O 3341/24</a:t>
             </a:r>
           </a:p>
         </p:txBody>
@@ -4947,7 +4947,7 @@
                 </a:solidFill>
                 <a:latin typeface="Aptos"/>
               </a:rPr>
-              <a:t>Julkinen riippumaton evidenssikooste · 2026.07.23-14 · 2026-07-22 · Lähteet: Health Canada; Destatis; Vero; Sejm; Ruotsin hallitus</a:t>
+              <a:t>Julkinen riippumaton evidenssikooste · 2026.07.23-15 · 2026-07-22 · Lähteet: Health Canada; Destatis; Vero; Sejm; Ruotsin hallitus</a:t>
             </a:r>
           </a:p>
         </p:txBody>
@@ -5552,7 +5552,7 @@
         <p:spPr>
           <a:xfrm>
             <a:off x="502920" y="621792"/>
-            <a:ext cx="11109960" cy="548640"/>
+            <a:ext cx="11109960" cy="804672"/>
           </a:xfrm>
           <a:prstGeom prst="rect">
             <a:avLst/>
@@ -5567,7 +5567,7 @@
           <a:p>
             <a:pPr algn="l"/>
             <a:r>
-              <a:rPr sz="3400" b="1">
+              <a:rPr sz="3000" b="1">
                 <a:solidFill>
                   <a:srgbClr val="071A2B"/>
                 </a:solidFill>
@@ -5586,7 +5586,7 @@
         </p:nvSpPr>
         <p:spPr>
           <a:xfrm>
-            <a:off x="502920" y="1225296"/>
+            <a:off x="502920" y="1444752"/>
             <a:ext cx="960120" cy="50292"/>
           </a:xfrm>
           <a:prstGeom prst="rect">
@@ -5698,7 +5698,7 @@
                 </a:solidFill>
                 <a:latin typeface="Aptos"/>
               </a:rPr>
-              <a:t>Julkinen riippumaton evidenssikooste · 2026.07.23-14 · 2026-07-22 · Lähteet: Evidence Register; WIPO IP valuation</a:t>
+              <a:t>Julkinen riippumaton evidenssikooste · 2026.07.23-15 · 2026-07-22 · Lähteet: Evidence Register; WIPO IP valuation</a:t>
             </a:r>
           </a:p>
         </p:txBody>
@@ -5747,8 +5747,8 @@
           <p:nvPr/>
         </p:nvGraphicFramePr>
         <p:xfrm>
-          <a:off x="530352" y="1536192"/>
-          <a:ext cx="11109958" cy="3977636"/>
+          <a:off x="530352" y="1719072"/>
+          <a:ext cx="11109958" cy="3794760"/>
         </p:xfrm>
         <a:graphic>
           <a:graphicData uri="http://schemas.openxmlformats.org/drawingml/2006/table">
@@ -5835,7 +5835,7 @@
                   </a:tcPr>
                 </a:tc>
               </a:tr>
-              <a:tr h="884681">
+              <a:tr h="838962">
                 <a:tc>
                   <a:txBody>
                     <a:bodyPr/>
@@ -5909,7 +5909,7 @@
                   </a:tcPr>
                 </a:tc>
               </a:tr>
-              <a:tr h="884681">
+              <a:tr h="838962">
                 <a:tc>
                   <a:txBody>
                     <a:bodyPr/>
@@ -5983,7 +5983,7 @@
                   </a:tcPr>
                 </a:tc>
               </a:tr>
-              <a:tr h="884681">
+              <a:tr h="838962">
                 <a:tc>
                   <a:txBody>
                     <a:bodyPr/>
@@ -6057,7 +6057,7 @@
                   </a:tcPr>
                 </a:tc>
               </a:tr>
-              <a:tr h="884681">
+              <a:tr h="838962">
                 <a:tc>
                   <a:txBody>
                     <a:bodyPr/>
@@ -6395,7 +6395,7 @@
                 </a:solidFill>
                 <a:latin typeface="Aptos"/>
               </a:rPr>
-              <a:t>Versio 2026.07.23-14 · 2026-07-22 · 6 / 6</a:t>
+              <a:t>Versio 2026.07.23-15 · 2026-07-22 · 6 / 6</a:t>
             </a:r>
           </a:p>
         </p:txBody>

--- a/site/downloads/pixan-bank-deck-short-fi.pptx
+++ b/site/downloads/pixan-bank-deck-short-fi.pptx
@@ -3362,7 +3362,7 @@
                 </a:solidFill>
                 <a:latin typeface="Aptos"/>
               </a:rPr>
-              <a:t>2026.07.23-15</a:t>
+              <a:t>2026.07.23-16</a:t>
             </a:r>
           </a:p>
         </p:txBody>
@@ -3716,7 +3716,7 @@
                 </a:solidFill>
                 <a:latin typeface="Aptos"/>
               </a:rPr>
-              <a:t>Julkinen riippumaton evidenssikooste · 2026.07.23-15 · 2026-07-22 · Lähteet: EPO; Saksa — viralliset tuomiot; WIPO</a:t>
+              <a:t>Julkinen riippumaton evidenssikooste · 2026.07.23-16 · 2026-07-22 · Lähteet: EPO; Saksa — viralliset tuomiot; WIPO</a:t>
             </a:r>
           </a:p>
         </p:txBody>
@@ -4196,7 +4196,7 @@
                 </a:solidFill>
                 <a:latin typeface="Aptos"/>
               </a:rPr>
-              <a:t>Julkinen riippumaton evidenssikooste · 2026.07.23-15 · 2026-07-22 · Lähteet: EPO Register; EP3032975B2; 8 Ni 18/24 (EP); 7 O 3341/24</a:t>
+              <a:t>Julkinen riippumaton evidenssikooste · 2026.07.23-16 · 2026-07-22 · Lähteet: EPO Register; EP3032975B2; 8 Ni 18/24 (EP); 7 O 3341/24</a:t>
             </a:r>
           </a:p>
         </p:txBody>
@@ -4947,7 +4947,7 @@
                 </a:solidFill>
                 <a:latin typeface="Aptos"/>
               </a:rPr>
-              <a:t>Julkinen riippumaton evidenssikooste · 2026.07.23-15 · 2026-07-22 · Lähteet: Health Canada; Destatis; Vero; Sejm; Ruotsin hallitus</a:t>
+              <a:t>Julkinen riippumaton evidenssikooste · 2026.07.23-16 · 2026-07-22 · Lähteet: Health Canada; Destatis; Vero; Sejm; Ruotsin hallitus</a:t>
             </a:r>
           </a:p>
         </p:txBody>
@@ -5698,7 +5698,7 @@
                 </a:solidFill>
                 <a:latin typeface="Aptos"/>
               </a:rPr>
-              <a:t>Julkinen riippumaton evidenssikooste · 2026.07.23-15 · 2026-07-22 · Lähteet: Evidence Register; WIPO IP valuation</a:t>
+              <a:t>Julkinen riippumaton evidenssikooste · 2026.07.23-16 · 2026-07-22 · Lähteet: Evidence Register; WIPO IP valuation</a:t>
             </a:r>
           </a:p>
         </p:txBody>
@@ -6395,7 +6395,7 @@
                 </a:solidFill>
                 <a:latin typeface="Aptos"/>
               </a:rPr>
-              <a:t>Versio 2026.07.23-15 · 2026-07-22 · 6 / 6</a:t>
+              <a:t>Versio 2026.07.23-16 · 2026-07-22 · 6 / 6</a:t>
             </a:r>
           </a:p>
         </p:txBody>

--- a/site/downloads/pixan-bank-deck-short-fi.pptx
+++ b/site/downloads/pixan-bank-deck-short-fi.pptx
@@ -3362,7 +3362,7 @@
                 </a:solidFill>
                 <a:latin typeface="Aptos"/>
               </a:rPr>
-              <a:t>2026.07.23-16</a:t>
+              <a:t>2026.07.24-17</a:t>
             </a:r>
           </a:p>
         </p:txBody>
@@ -3397,7 +3397,7 @@
                 </a:solidFill>
                 <a:latin typeface="Aptos"/>
               </a:rPr>
-              <a:t>Päivitetty 2026-07-22
+              <a:t>Päivitetty 2026-07-24
 6 diaa · suomeksi</a:t>
             </a:r>
           </a:p>
@@ -3716,7 +3716,7 @@
                 </a:solidFill>
                 <a:latin typeface="Aptos"/>
               </a:rPr>
-              <a:t>Julkinen riippumaton evidenssikooste · 2026.07.23-16 · 2026-07-22 · Lähteet: EPO; Saksa — viralliset tuomiot; WIPO</a:t>
+              <a:t>Julkinen riippumaton evidenssikooste · 2026.07.24-17 · 2026-07-24 · Lähteet: EPO; Saksa — viralliset tuomiot; WIPO</a:t>
             </a:r>
           </a:p>
         </p:txBody>
@@ -4196,7 +4196,7 @@
                 </a:solidFill>
                 <a:latin typeface="Aptos"/>
               </a:rPr>
-              <a:t>Julkinen riippumaton evidenssikooste · 2026.07.23-16 · 2026-07-22 · Lähteet: EPO Register; EP3032975B2; 8 Ni 18/24 (EP); 7 O 3341/24</a:t>
+              <a:t>Julkinen riippumaton evidenssikooste · 2026.07.24-17 · 2026-07-24 · Lähteet: EPO Register; EP3032975B2; 8 Ni 18/24 (EP); 7 O 3341/24</a:t>
             </a:r>
           </a:p>
         </p:txBody>
@@ -4947,7 +4947,7 @@
                 </a:solidFill>
                 <a:latin typeface="Aptos"/>
               </a:rPr>
-              <a:t>Julkinen riippumaton evidenssikooste · 2026.07.23-16 · 2026-07-22 · Lähteet: Health Canada; Destatis; Vero; Sejm; Ruotsin hallitus</a:t>
+              <a:t>Julkinen riippumaton evidenssikooste · 2026.07.24-17 · 2026-07-24 · Lähteet: Health Canada; New Zealand Ministry of Health; Destatis; Vero; Sejm; Ruotsin hallitus; European Commission; IMARC; GVR; Fortune</a:t>
             </a:r>
           </a:p>
         </p:txBody>
@@ -5064,7 +5064,7 @@
                 </a:solidFill>
                 <a:latin typeface="Aptos"/>
               </a:rPr>
-              <a:t>195</a:t>
+              <a:t>20</a:t>
             </a:r>
           </a:p>
         </p:txBody>
@@ -5099,7 +5099,7 @@
                 </a:solidFill>
                 <a:latin typeface="Aptos"/>
               </a:rPr>
-              <a:t>maan tutkimusuniversumi</a:t>
+              <a:t>virallista vuosihavaintoa 6 maasta</a:t>
             </a:r>
           </a:p>
         </p:txBody>
@@ -5175,13 +5175,13 @@
           <a:p>
             <a:pPr algn="l"/>
             <a:r>
-              <a:rPr sz="2700" b="1">
+              <a:rPr sz="2250" b="1">
                 <a:solidFill>
                   <a:srgbClr val="0D5F86"/>
                 </a:solidFill>
                 <a:latin typeface="Aptos"/>
               </a:rPr>
-              <a:t>5</a:t>
+              <a:t>280,685 milj. NZD</a:t>
             </a:r>
           </a:p>
         </p:txBody>
@@ -5216,7 +5216,7 @@
                 </a:solidFill>
                 <a:latin typeface="Aptos"/>
               </a:rPr>
-              <a:t>maata virallisilla vuosihavainnoilla</a:t>
+              <a:t>Uusi-Seelanti 2024: 29 tiedoston raakasumma</a:t>
             </a:r>
           </a:p>
         </p:txBody>
@@ -5298,7 +5298,7 @@
                 </a:solidFill>
                 <a:latin typeface="Aptos"/>
               </a:rPr>
-              <a:t>0</a:t>
+              <a:t>4,99 mrd EUR</a:t>
             </a:r>
           </a:p>
         </p:txBody>
@@ -5333,7 +5333,7 @@
                 </a:solidFill>
                 <a:latin typeface="Aptos"/>
               </a:rPr>
-              <a:t>hyväksyttyä retail-arvon luovuttajaa</a:t>
+              <a:t>EU 2023: komission julkaisema vertailuarvo</a:t>
             </a:r>
           </a:p>
         </p:txBody>
@@ -5368,7 +5368,7 @@
                 </a:solidFill>
                 <a:latin typeface="Aptos"/>
               </a:rPr>
-              <a:t>Kaupallinen 26,0–46,32 mrd USD haarukka on sanity check — ei atlaksen oma maailmanestimaatti.</a:t>
+              <a:t>4/4 ehdokasta hylättiin D1–D10-protokollassa; hyväksytty donor-portti on 0/3.</a:t>
             </a:r>
           </a:p>
         </p:txBody>
@@ -5485,7 +5485,7 @@
                 </a:solidFill>
                 <a:latin typeface="Aptos"/>
               </a:rPr>
-              <a:t>Kanada: 1,16 mrd CAD toimitusarvo. Saksa: 1,518 milj. l verotettua nestettä vuonna 2025 (alustava). Mittareita ei summata keskenään.</a:t>
+              <a:t>Uuden-Seelannin raakasumma täsmää viralliseen ≥280 milj. NZD otsikkoon. Täsmälleen toistuvien rivien poistamisen 264,561 milj. NZD herkkyys ei ole korjattu estimaatti; tunnistettu vaping-raakasumma on 274,18 milj. NZD. EU-luku on kaupalliseen Euromonitor 2025 -aineistoon perustuva tuettu vertailuarvo; Kypros, Luxemburg ja Malta puuttuvat. Kaupallinen 26,0–46,32 mrd USD on vain sanity check; mittareita ei summata.</a:t>
             </a:r>
           </a:p>
         </p:txBody>
@@ -5586,7 +5586,7 @@
         </p:nvSpPr>
         <p:spPr>
           <a:xfrm>
-            <a:off x="502920" y="1444752"/>
+            <a:off x="502920" y="1554480"/>
             <a:ext cx="960120" cy="50292"/>
           </a:xfrm>
           <a:prstGeom prst="rect">
@@ -5698,7 +5698,7 @@
                 </a:solidFill>
                 <a:latin typeface="Aptos"/>
               </a:rPr>
-              <a:t>Julkinen riippumaton evidenssikooste · 2026.07.23-16 · 2026-07-22 · Lähteet: Evidence Register; WIPO IP valuation</a:t>
+              <a:t>Julkinen riippumaton evidenssikooste · 2026.07.24-17 · 2026-07-24 · Lähteet: Evidence Register; WIPO IP valuation</a:t>
             </a:r>
           </a:p>
         </p:txBody>
@@ -6395,7 +6395,7 @@
                 </a:solidFill>
                 <a:latin typeface="Aptos"/>
               </a:rPr>
-              <a:t>Versio 2026.07.23-16 · 2026-07-22 · 6 / 6</a:t>
+              <a:t>Versio 2026.07.24-17 · 2026-07-24 · 6 / 6</a:t>
             </a:r>
           </a:p>
         </p:txBody>

--- a/site/downloads/pixan-bank-deck-short-fi.pptx
+++ b/site/downloads/pixan-bank-deck-short-fi.pptx
@@ -2,18 +2,18 @@
 <file path=ppt/presentation.xml><?xml version="1.0" encoding="utf-8"?>
 <p:presentation xmlns:p="http://schemas.openxmlformats.org/presentationml/2006/main">
   <p:sldMasterIdLst>
-    <p:sldMasterId xmlns:r="http://schemas.openxmlformats.org/officeDocument/2006/relationships" id="2147483648" r:id="Re07ca2346b7e4193"/>
+    <p:sldMasterId xmlns:r="http://schemas.openxmlformats.org/officeDocument/2006/relationships" id="2147483648" r:id="R270f0a7e6201459d"/>
   </p:sldMasterIdLst>
   <p:notesMasterIdLst>
-    <p:notesMasterId xmlns:r="http://schemas.openxmlformats.org/officeDocument/2006/relationships" r:id="Rff2c33de753047cc"/>
+    <p:notesMasterId xmlns:r="http://schemas.openxmlformats.org/officeDocument/2006/relationships" r:id="Ra231a30539554092"/>
   </p:notesMasterIdLst>
   <p:sldIdLst>
-    <p:sldId xmlns:r="http://schemas.openxmlformats.org/officeDocument/2006/relationships" id="256" r:id="R43cafbcd43e14f27"/>
-    <p:sldId xmlns:r="http://schemas.openxmlformats.org/officeDocument/2006/relationships" id="257" r:id="R582c99c3fc844702"/>
-    <p:sldId xmlns:r="http://schemas.openxmlformats.org/officeDocument/2006/relationships" id="258" r:id="R5bd94b2402864ec8"/>
-    <p:sldId xmlns:r="http://schemas.openxmlformats.org/officeDocument/2006/relationships" id="259" r:id="Rca47356bfdfa4144"/>
-    <p:sldId xmlns:r="http://schemas.openxmlformats.org/officeDocument/2006/relationships" id="260" r:id="Rf96cf7b5c7344599"/>
-    <p:sldId xmlns:r="http://schemas.openxmlformats.org/officeDocument/2006/relationships" id="261" r:id="Rc2bb07b6ef154b47"/>
+    <p:sldId xmlns:r="http://schemas.openxmlformats.org/officeDocument/2006/relationships" id="256" r:id="R9ee0c84f658c4081"/>
+    <p:sldId xmlns:r="http://schemas.openxmlformats.org/officeDocument/2006/relationships" id="257" r:id="R890014d7b6de498d"/>
+    <p:sldId xmlns:r="http://schemas.openxmlformats.org/officeDocument/2006/relationships" id="258" r:id="R204e372f49274a8c"/>
+    <p:sldId xmlns:r="http://schemas.openxmlformats.org/officeDocument/2006/relationships" id="259" r:id="Re1f356c433514515"/>
+    <p:sldId xmlns:r="http://schemas.openxmlformats.org/officeDocument/2006/relationships" id="260" r:id="R7dbf899226c44120"/>
+    <p:sldId xmlns:r="http://schemas.openxmlformats.org/officeDocument/2006/relationships" id="261" r:id="R5a13010a15e048da"/>
   </p:sldIdLst>
   <p:sldSz cx="12191999" cy="6858000"/>
   <p:notesSz cx="6858000" cy="9144000"/>
@@ -500,6 +500,11 @@
           </a:p>
           <a:p xmlns:a="http://schemas.openxmlformats.org/drawingml/2006/main">
             <a:r>
+              <a:t>- https://www150.statcan.gc.ca/t1/tbl1/en/tv.action?pid=2010007101</a:t>
+            </a:r>
+          </a:p>
+          <a:p xmlns:a="http://schemas.openxmlformats.org/drawingml/2006/main">
+            <a:r>
               <a:t>- https://www.ftc.gov/reports/e-cigarette-report-2021</a:t>
             </a:r>
           </a:p>
@@ -530,6 +535,11 @@
           </a:p>
           <a:p xmlns:a="http://schemas.openxmlformats.org/drawingml/2006/main">
             <a:r>
+              <a:t>- https://data-api.ecb.europa.eu/service/data/EXR/A.CAD.EUR.SP00.A?startPeriod=2024&amp;endPeriod=2024&amp;format=csvdata</a:t>
+            </a:r>
+          </a:p>
+          <a:p xmlns:a="http://schemas.openxmlformats.org/drawingml/2006/main">
+            <a:r>
               <a:t/>
             </a:r>
           </a:p>
@@ -556,6 +566,11 @@
           <a:p xmlns:a="http://schemas.openxmlformats.org/drawingml/2006/main">
             <a:r>
               <a:t>- USD 2021: ECB-EXR-A-USD-EUR-SP00-A-2021 · 1.1827403100775 currency units per EUR</a:t>
+            </a:r>
+          </a:p>
+          <a:p xmlns:a="http://schemas.openxmlformats.org/drawingml/2006/main">
+            <a:r>
+              <a:t>- CAD 2024: ECB-EXR-A-CAD-EUR-SP00-A-2024 · 1.482110546875 currency units per EUR</a:t>
             </a:r>
           </a:p>
         </p:txBody>
@@ -655,6 +670,11 @@
           </a:p>
           <a:p xmlns:a="http://schemas.openxmlformats.org/drawingml/2006/main">
             <a:r>
+              <a:t>- https://www150.statcan.gc.ca/t1/tbl1/en/tv.action?pid=2010007101</a:t>
+            </a:r>
+          </a:p>
+          <a:p xmlns:a="http://schemas.openxmlformats.org/drawingml/2006/main">
+            <a:r>
               <a:t>- https://www.ftc.gov/reports/e-cigarette-report-2021</a:t>
             </a:r>
           </a:p>
@@ -685,6 +705,11 @@
           </a:p>
           <a:p xmlns:a="http://schemas.openxmlformats.org/drawingml/2006/main">
             <a:r>
+              <a:t>- https://data-api.ecb.europa.eu/service/data/EXR/A.CAD.EUR.SP00.A?startPeriod=2024&amp;endPeriod=2024&amp;format=csvdata</a:t>
+            </a:r>
+          </a:p>
+          <a:p xmlns:a="http://schemas.openxmlformats.org/drawingml/2006/main">
+            <a:r>
               <a:t/>
             </a:r>
           </a:p>
@@ -711,6 +736,11 @@
           <a:p xmlns:a="http://schemas.openxmlformats.org/drawingml/2006/main">
             <a:r>
               <a:t>- USD 2021: ECB-EXR-A-USD-EUR-SP00-A-2021 · 1.1827403100775 currency units per EUR</a:t>
+            </a:r>
+          </a:p>
+          <a:p xmlns:a="http://schemas.openxmlformats.org/drawingml/2006/main">
+            <a:r>
+              <a:t>- CAD 2024: ECB-EXR-A-CAD-EUR-SP00-A-2024 · 1.482110546875 currency units per EUR</a:t>
             </a:r>
           </a:p>
         </p:txBody>
@@ -810,6 +840,11 @@
           </a:p>
           <a:p xmlns:a="http://schemas.openxmlformats.org/drawingml/2006/main">
             <a:r>
+              <a:t>- https://www150.statcan.gc.ca/t1/tbl1/en/tv.action?pid=2010007101</a:t>
+            </a:r>
+          </a:p>
+          <a:p xmlns:a="http://schemas.openxmlformats.org/drawingml/2006/main">
+            <a:r>
               <a:t>- https://www.ftc.gov/reports/e-cigarette-report-2021</a:t>
             </a:r>
           </a:p>
@@ -840,6 +875,11 @@
           </a:p>
           <a:p xmlns:a="http://schemas.openxmlformats.org/drawingml/2006/main">
             <a:r>
+              <a:t>- https://data-api.ecb.europa.eu/service/data/EXR/A.CAD.EUR.SP00.A?startPeriod=2024&amp;endPeriod=2024&amp;format=csvdata</a:t>
+            </a:r>
+          </a:p>
+          <a:p xmlns:a="http://schemas.openxmlformats.org/drawingml/2006/main">
+            <a:r>
               <a:t/>
             </a:r>
           </a:p>
@@ -866,6 +906,11 @@
           <a:p xmlns:a="http://schemas.openxmlformats.org/drawingml/2006/main">
             <a:r>
               <a:t>- USD 2021: ECB-EXR-A-USD-EUR-SP00-A-2021 · 1.1827403100775 currency units per EUR</a:t>
+            </a:r>
+          </a:p>
+          <a:p xmlns:a="http://schemas.openxmlformats.org/drawingml/2006/main">
+            <a:r>
+              <a:t>- CAD 2024: ECB-EXR-A-CAD-EUR-SP00-A-2024 · 1.482110546875 currency units per EUR</a:t>
             </a:r>
           </a:p>
         </p:txBody>
@@ -965,6 +1010,11 @@
           </a:p>
           <a:p xmlns:a="http://schemas.openxmlformats.org/drawingml/2006/main">
             <a:r>
+              <a:t>- https://www150.statcan.gc.ca/t1/tbl1/en/tv.action?pid=2010007101</a:t>
+            </a:r>
+          </a:p>
+          <a:p xmlns:a="http://schemas.openxmlformats.org/drawingml/2006/main">
+            <a:r>
               <a:t>- https://www.ftc.gov/reports/e-cigarette-report-2021</a:t>
             </a:r>
           </a:p>
@@ -995,6 +1045,11 @@
           </a:p>
           <a:p xmlns:a="http://schemas.openxmlformats.org/drawingml/2006/main">
             <a:r>
+              <a:t>- https://data-api.ecb.europa.eu/service/data/EXR/A.CAD.EUR.SP00.A?startPeriod=2024&amp;endPeriod=2024&amp;format=csvdata</a:t>
+            </a:r>
+          </a:p>
+          <a:p xmlns:a="http://schemas.openxmlformats.org/drawingml/2006/main">
+            <a:r>
               <a:t/>
             </a:r>
           </a:p>
@@ -1021,6 +1076,11 @@
           <a:p xmlns:a="http://schemas.openxmlformats.org/drawingml/2006/main">
             <a:r>
               <a:t>- USD 2021: ECB-EXR-A-USD-EUR-SP00-A-2021 · 1.1827403100775 currency units per EUR</a:t>
+            </a:r>
+          </a:p>
+          <a:p xmlns:a="http://schemas.openxmlformats.org/drawingml/2006/main">
+            <a:r>
+              <a:t>- CAD 2024: ECB-EXR-A-CAD-EUR-SP00-A-2024 · 1.482110546875 currency units per EUR</a:t>
             </a:r>
           </a:p>
         </p:txBody>
@@ -1120,6 +1180,11 @@
           </a:p>
           <a:p xmlns:a="http://schemas.openxmlformats.org/drawingml/2006/main">
             <a:r>
+              <a:t>- https://www150.statcan.gc.ca/t1/tbl1/en/tv.action?pid=2010007101</a:t>
+            </a:r>
+          </a:p>
+          <a:p xmlns:a="http://schemas.openxmlformats.org/drawingml/2006/main">
+            <a:r>
               <a:t>- https://www.ftc.gov/reports/e-cigarette-report-2021</a:t>
             </a:r>
           </a:p>
@@ -1150,6 +1215,11 @@
           </a:p>
           <a:p xmlns:a="http://schemas.openxmlformats.org/drawingml/2006/main">
             <a:r>
+              <a:t>- https://data-api.ecb.europa.eu/service/data/EXR/A.CAD.EUR.SP00.A?startPeriod=2024&amp;endPeriod=2024&amp;format=csvdata</a:t>
+            </a:r>
+          </a:p>
+          <a:p xmlns:a="http://schemas.openxmlformats.org/drawingml/2006/main">
+            <a:r>
               <a:t/>
             </a:r>
           </a:p>
@@ -1176,6 +1246,11 @@
           <a:p xmlns:a="http://schemas.openxmlformats.org/drawingml/2006/main">
             <a:r>
               <a:t>- USD 2021: ECB-EXR-A-USD-EUR-SP00-A-2021 · 1.1827403100775 currency units per EUR</a:t>
+            </a:r>
+          </a:p>
+          <a:p xmlns:a="http://schemas.openxmlformats.org/drawingml/2006/main">
+            <a:r>
+              <a:t>- CAD 2024: ECB-EXR-A-CAD-EUR-SP00-A-2024 · 1.482110546875 currency units per EUR</a:t>
             </a:r>
           </a:p>
         </p:txBody>
@@ -1275,6 +1350,11 @@
           </a:p>
           <a:p xmlns:a="http://schemas.openxmlformats.org/drawingml/2006/main">
             <a:r>
+              <a:t>- https://www150.statcan.gc.ca/t1/tbl1/en/tv.action?pid=2010007101</a:t>
+            </a:r>
+          </a:p>
+          <a:p xmlns:a="http://schemas.openxmlformats.org/drawingml/2006/main">
+            <a:r>
               <a:t>- https://www.ftc.gov/reports/e-cigarette-report-2021</a:t>
             </a:r>
           </a:p>
@@ -1305,6 +1385,11 @@
           </a:p>
           <a:p xmlns:a="http://schemas.openxmlformats.org/drawingml/2006/main">
             <a:r>
+              <a:t>- https://data-api.ecb.europa.eu/service/data/EXR/A.CAD.EUR.SP00.A?startPeriod=2024&amp;endPeriod=2024&amp;format=csvdata</a:t>
+            </a:r>
+          </a:p>
+          <a:p xmlns:a="http://schemas.openxmlformats.org/drawingml/2006/main">
+            <a:r>
               <a:t/>
             </a:r>
           </a:p>
@@ -1331,6 +1416,11 @@
           <a:p xmlns:a="http://schemas.openxmlformats.org/drawingml/2006/main">
             <a:r>
               <a:t>- USD 2021: ECB-EXR-A-USD-EUR-SP00-A-2021 · 1.1827403100775 currency units per EUR</a:t>
+            </a:r>
+          </a:p>
+          <a:p xmlns:a="http://schemas.openxmlformats.org/drawingml/2006/main">
+            <a:r>
+              <a:t>- CAD 2024: ECB-EXR-A-CAD-EUR-SP00-A-2024 · 1.482110546875 currency units per EUR</a:t>
             </a:r>
           </a:p>
         </p:txBody>
@@ -1377,7 +1467,7 @@
           <p:cNvPr id="2" name="Title 1">
             <a:extLst xmlns:a="http://schemas.openxmlformats.org/drawingml/2006/main">
               <a:ext uri="{FF2B5EF4-FFF2-40B4-BE49-F238E27FC236}">
-                <a16:creationId xmlns:a16="http://schemas.microsoft.com/office/drawing/2014/main" id="{374159D5-8B9D-415C-B03D-8DB76FFA3842}"/>
+                <a16:creationId xmlns:a16="http://schemas.microsoft.com/office/drawing/2014/main" id="{BB16B4AA-45C1-4105-BD93-00A67DDAC367}"/>
               </a:ext>
             </a:extLst>
           </p:cNvPr>
@@ -1409,7 +1499,7 @@
           <p:cNvPr id="3" name="Subtitle 2">
             <a:extLst xmlns:a="http://schemas.openxmlformats.org/drawingml/2006/main">
               <a:ext uri="{FF2B5EF4-FFF2-40B4-BE49-F238E27FC236}">
-                <a16:creationId xmlns:a16="http://schemas.microsoft.com/office/drawing/2014/main" id="{D4A834B5-FA72-43B5-988F-C6B04D36C66F}"/>
+                <a16:creationId xmlns:a16="http://schemas.microsoft.com/office/drawing/2014/main" id="{81EB4079-2775-45AD-BC34-DBDE964F76C2}"/>
               </a:ext>
             </a:extLst>
           </p:cNvPr>
@@ -1532,7 +1622,7 @@
           <p:cNvPr id="4" name="Date Placeholder 3">
             <a:extLst xmlns:a="http://schemas.openxmlformats.org/drawingml/2006/main">
               <a:ext uri="{FF2B5EF4-FFF2-40B4-BE49-F238E27FC236}">
-                <a16:creationId xmlns:a16="http://schemas.microsoft.com/office/drawing/2014/main" id="{5595390A-E452-4477-9733-8A9F987A0D3F}"/>
+                <a16:creationId xmlns:a16="http://schemas.microsoft.com/office/drawing/2014/main" id="{86FE6301-6E40-4CBD-AC53-400320C1CBB5}"/>
               </a:ext>
             </a:extLst>
           </p:cNvPr>
@@ -1559,7 +1649,7 @@
           <p:cNvPr id="5" name="Footer Placeholder 4">
             <a:extLst xmlns:a="http://schemas.openxmlformats.org/drawingml/2006/main">
               <a:ext uri="{FF2B5EF4-FFF2-40B4-BE49-F238E27FC236}">
-                <a16:creationId xmlns:a16="http://schemas.microsoft.com/office/drawing/2014/main" id="{E342DC13-D752-41F3-88DC-59BA27A55354}"/>
+                <a16:creationId xmlns:a16="http://schemas.microsoft.com/office/drawing/2014/main" id="{C263CD3B-65B9-4D56-B8F0-B46DC57FE9EF}"/>
               </a:ext>
             </a:extLst>
           </p:cNvPr>
@@ -1582,7 +1672,7 @@
           <p:cNvPr id="6" name="Slide Number Placeholder 5">
             <a:extLst xmlns:a="http://schemas.openxmlformats.org/drawingml/2006/main">
               <a:ext uri="{FF2B5EF4-FFF2-40B4-BE49-F238E27FC236}">
-                <a16:creationId xmlns:a16="http://schemas.microsoft.com/office/drawing/2014/main" id="{C7570975-FCF4-4094-BE38-450ECD8487B0}"/>
+                <a16:creationId xmlns:a16="http://schemas.microsoft.com/office/drawing/2014/main" id="{7DB3E248-9368-4B4F-8300-3011D55FEBE8}"/>
               </a:ext>
             </a:extLst>
           </p:cNvPr>
@@ -1626,7 +1716,7 @@
           <p:cNvPr id="2" name="Title 1">
             <a:extLst xmlns:a="http://schemas.openxmlformats.org/drawingml/2006/main">
               <a:ext uri="{FF2B5EF4-FFF2-40B4-BE49-F238E27FC236}">
-                <a16:creationId xmlns:a16="http://schemas.microsoft.com/office/drawing/2014/main" id="{A1F27DC8-0093-400F-81D9-5BB33A3EA9B0}"/>
+                <a16:creationId xmlns:a16="http://schemas.microsoft.com/office/drawing/2014/main" id="{87E0CD7E-D70F-4A78-81B9-3836871442B9}"/>
               </a:ext>
             </a:extLst>
           </p:cNvPr>
@@ -1653,7 +1743,7 @@
           <p:cNvPr id="3" name="Vertical Text Placeholder 2">
             <a:extLst xmlns:a="http://schemas.openxmlformats.org/drawingml/2006/main">
               <a:ext uri="{FF2B5EF4-FFF2-40B4-BE49-F238E27FC236}">
-                <a16:creationId xmlns:a16="http://schemas.microsoft.com/office/drawing/2014/main" id="{3C770E7D-4CF0-4CEA-8346-E417E9124716}"/>
+                <a16:creationId xmlns:a16="http://schemas.microsoft.com/office/drawing/2014/main" id="{CCC723A5-8DEF-459B-96CE-DE457B4FFFBB}"/>
               </a:ext>
             </a:extLst>
           </p:cNvPr>
@@ -1715,7 +1805,7 @@
           <p:cNvPr id="4" name="Date Placeholder 3">
             <a:extLst xmlns:a="http://schemas.openxmlformats.org/drawingml/2006/main">
               <a:ext uri="{FF2B5EF4-FFF2-40B4-BE49-F238E27FC236}">
-                <a16:creationId xmlns:a16="http://schemas.microsoft.com/office/drawing/2014/main" id="{49938BB6-13FE-4FE4-97CD-9A8451BED6CC}"/>
+                <a16:creationId xmlns:a16="http://schemas.microsoft.com/office/drawing/2014/main" id="{1FEDF1BE-EE4E-47A9-94D4-E301ACE82759}"/>
               </a:ext>
             </a:extLst>
           </p:cNvPr>
@@ -1742,7 +1832,7 @@
           <p:cNvPr id="5" name="Footer Placeholder 4">
             <a:extLst xmlns:a="http://schemas.openxmlformats.org/drawingml/2006/main">
               <a:ext uri="{FF2B5EF4-FFF2-40B4-BE49-F238E27FC236}">
-                <a16:creationId xmlns:a16="http://schemas.microsoft.com/office/drawing/2014/main" id="{25E6ADE9-26E4-4863-BED9-0248CE39ED8B}"/>
+                <a16:creationId xmlns:a16="http://schemas.microsoft.com/office/drawing/2014/main" id="{9AB90C42-C25F-4C24-A60E-A3F52377821F}"/>
               </a:ext>
             </a:extLst>
           </p:cNvPr>
@@ -1765,7 +1855,7 @@
           <p:cNvPr id="6" name="Slide Number Placeholder 5">
             <a:extLst xmlns:a="http://schemas.openxmlformats.org/drawingml/2006/main">
               <a:ext uri="{FF2B5EF4-FFF2-40B4-BE49-F238E27FC236}">
-                <a16:creationId xmlns:a16="http://schemas.microsoft.com/office/drawing/2014/main" id="{FE1B3DDF-CE99-4BDD-A2E1-E185F119E2A8}"/>
+                <a16:creationId xmlns:a16="http://schemas.microsoft.com/office/drawing/2014/main" id="{D671425C-31BA-4A8D-8A09-7F1B904EC0F1}"/>
               </a:ext>
             </a:extLst>
           </p:cNvPr>
@@ -1809,7 +1899,7 @@
           <p:cNvPr id="2" name="Vertical Title 1">
             <a:extLst xmlns:a="http://schemas.openxmlformats.org/drawingml/2006/main">
               <a:ext uri="{FF2B5EF4-FFF2-40B4-BE49-F238E27FC236}">
-                <a16:creationId xmlns:a16="http://schemas.microsoft.com/office/drawing/2014/main" id="{BA271B38-2892-497E-9FD6-246D14D5157C}"/>
+                <a16:creationId xmlns:a16="http://schemas.microsoft.com/office/drawing/2014/main" id="{7FD805C2-1E21-4862-98B4-8B7EEC47B857}"/>
               </a:ext>
             </a:extLst>
           </p:cNvPr>
@@ -1841,7 +1931,7 @@
           <p:cNvPr id="3" name="Vertical Text Placeholder 2">
             <a:extLst xmlns:a="http://schemas.openxmlformats.org/drawingml/2006/main">
               <a:ext uri="{FF2B5EF4-FFF2-40B4-BE49-F238E27FC236}">
-                <a16:creationId xmlns:a16="http://schemas.microsoft.com/office/drawing/2014/main" id="{F3859F5F-1E3C-4DDF-9957-7602E8D9861E}"/>
+                <a16:creationId xmlns:a16="http://schemas.microsoft.com/office/drawing/2014/main" id="{300B3AFA-AA99-4073-BA66-B704FC437DCE}"/>
               </a:ext>
             </a:extLst>
           </p:cNvPr>
@@ -1908,7 +1998,7 @@
           <p:cNvPr id="4" name="Date Placeholder 3">
             <a:extLst xmlns:a="http://schemas.openxmlformats.org/drawingml/2006/main">
               <a:ext uri="{FF2B5EF4-FFF2-40B4-BE49-F238E27FC236}">
-                <a16:creationId xmlns:a16="http://schemas.microsoft.com/office/drawing/2014/main" id="{D6641683-A1FE-494E-909C-1DF62289C366}"/>
+                <a16:creationId xmlns:a16="http://schemas.microsoft.com/office/drawing/2014/main" id="{0EAD76EA-D515-4866-9554-6EF589BC1DA4}"/>
               </a:ext>
             </a:extLst>
           </p:cNvPr>
@@ -1935,7 +2025,7 @@
           <p:cNvPr id="5" name="Footer Placeholder 4">
             <a:extLst xmlns:a="http://schemas.openxmlformats.org/drawingml/2006/main">
               <a:ext uri="{FF2B5EF4-FFF2-40B4-BE49-F238E27FC236}">
-                <a16:creationId xmlns:a16="http://schemas.microsoft.com/office/drawing/2014/main" id="{797C7B92-00BE-41AD-9FE7-23A28CE1D809}"/>
+                <a16:creationId xmlns:a16="http://schemas.microsoft.com/office/drawing/2014/main" id="{866410CC-FF0C-45E0-9DA5-AD0AF94F12F7}"/>
               </a:ext>
             </a:extLst>
           </p:cNvPr>
@@ -1958,7 +2048,7 @@
           <p:cNvPr id="6" name="Slide Number Placeholder 5">
             <a:extLst xmlns:a="http://schemas.openxmlformats.org/drawingml/2006/main">
               <a:ext uri="{FF2B5EF4-FFF2-40B4-BE49-F238E27FC236}">
-                <a16:creationId xmlns:a16="http://schemas.microsoft.com/office/drawing/2014/main" id="{CC6A08DC-9E5C-422A-85BB-77EF513E5B70}"/>
+                <a16:creationId xmlns:a16="http://schemas.microsoft.com/office/drawing/2014/main" id="{B53FD6FB-35F5-4C8B-BB31-C64E28B15567}"/>
               </a:ext>
             </a:extLst>
           </p:cNvPr>
@@ -2002,7 +2092,7 @@
           <p:cNvPr id="2" name="Title 1">
             <a:extLst xmlns:a="http://schemas.openxmlformats.org/drawingml/2006/main">
               <a:ext uri="{FF2B5EF4-FFF2-40B4-BE49-F238E27FC236}">
-                <a16:creationId xmlns:a16="http://schemas.microsoft.com/office/drawing/2014/main" id="{92252092-D6EB-4DCA-8927-4DE2DB7F267B}"/>
+                <a16:creationId xmlns:a16="http://schemas.microsoft.com/office/drawing/2014/main" id="{112377E1-AEE7-4AD3-B144-EC040DCDBE23}"/>
               </a:ext>
             </a:extLst>
           </p:cNvPr>
@@ -2029,7 +2119,7 @@
           <p:cNvPr id="3" name="Content Placeholder 2">
             <a:extLst xmlns:a="http://schemas.openxmlformats.org/drawingml/2006/main">
               <a:ext uri="{FF2B5EF4-FFF2-40B4-BE49-F238E27FC236}">
-                <a16:creationId xmlns:a16="http://schemas.microsoft.com/office/drawing/2014/main" id="{3F371549-E797-4555-B65A-9C6070A3ED7D}"/>
+                <a16:creationId xmlns:a16="http://schemas.microsoft.com/office/drawing/2014/main" id="{9E26A700-B18E-40F7-9696-88A6FC2470A6}"/>
               </a:ext>
             </a:extLst>
           </p:cNvPr>
@@ -2091,7 +2181,7 @@
           <p:cNvPr id="4" name="Date Placeholder 3">
             <a:extLst xmlns:a="http://schemas.openxmlformats.org/drawingml/2006/main">
               <a:ext uri="{FF2B5EF4-FFF2-40B4-BE49-F238E27FC236}">
-                <a16:creationId xmlns:a16="http://schemas.microsoft.com/office/drawing/2014/main" id="{C6241D85-5590-4BD9-86FD-4E82B38A6106}"/>
+                <a16:creationId xmlns:a16="http://schemas.microsoft.com/office/drawing/2014/main" id="{6E1A9790-EE62-4129-B9A6-1A8AEEA3F8F8}"/>
               </a:ext>
             </a:extLst>
           </p:cNvPr>
@@ -2118,7 +2208,7 @@
           <p:cNvPr id="5" name="Footer Placeholder 4">
             <a:extLst xmlns:a="http://schemas.openxmlformats.org/drawingml/2006/main">
               <a:ext uri="{FF2B5EF4-FFF2-40B4-BE49-F238E27FC236}">
-                <a16:creationId xmlns:a16="http://schemas.microsoft.com/office/drawing/2014/main" id="{D9CE1446-8A56-4774-A635-C22A6BF559A0}"/>
+                <a16:creationId xmlns:a16="http://schemas.microsoft.com/office/drawing/2014/main" id="{3F7A641D-7E1F-46B4-B0C6-04F8FA72744A}"/>
               </a:ext>
             </a:extLst>
           </p:cNvPr>
@@ -2141,7 +2231,7 @@
           <p:cNvPr id="6" name="Slide Number Placeholder 5">
             <a:extLst xmlns:a="http://schemas.openxmlformats.org/drawingml/2006/main">
               <a:ext uri="{FF2B5EF4-FFF2-40B4-BE49-F238E27FC236}">
-                <a16:creationId xmlns:a16="http://schemas.microsoft.com/office/drawing/2014/main" id="{8A00A28B-4FAE-4138-BA6F-45091A6919AD}"/>
+                <a16:creationId xmlns:a16="http://schemas.microsoft.com/office/drawing/2014/main" id="{61370E23-EA59-4579-8978-824398208099}"/>
               </a:ext>
             </a:extLst>
           </p:cNvPr>
@@ -2185,7 +2275,7 @@
           <p:cNvPr id="2" name="Title 1">
             <a:extLst xmlns:a="http://schemas.openxmlformats.org/drawingml/2006/main">
               <a:ext uri="{FF2B5EF4-FFF2-40B4-BE49-F238E27FC236}">
-                <a16:creationId xmlns:a16="http://schemas.microsoft.com/office/drawing/2014/main" id="{C1DA78F3-2554-43DC-AEEF-EED83A954D20}"/>
+                <a16:creationId xmlns:a16="http://schemas.microsoft.com/office/drawing/2014/main" id="{AB6F0782-D155-40EE-BE15-79FB405E08E0}"/>
               </a:ext>
             </a:extLst>
           </p:cNvPr>
@@ -2222,7 +2312,7 @@
           <p:cNvPr id="3" name="Text Placeholder 2">
             <a:extLst xmlns:a="http://schemas.openxmlformats.org/drawingml/2006/main">
               <a:ext uri="{FF2B5EF4-FFF2-40B4-BE49-F238E27FC236}">
-                <a16:creationId xmlns:a16="http://schemas.microsoft.com/office/drawing/2014/main" id="{5F91AB52-8B9D-45CC-B7EB-36D2A43F90C4}"/>
+                <a16:creationId xmlns:a16="http://schemas.microsoft.com/office/drawing/2014/main" id="{2BE30FC5-A958-45A8-8BB6-9E887B1ACE7F}"/>
               </a:ext>
             </a:extLst>
           </p:cNvPr>
@@ -2348,7 +2438,7 @@
           <p:cNvPr id="4" name="Date Placeholder 3">
             <a:extLst xmlns:a="http://schemas.openxmlformats.org/drawingml/2006/main">
               <a:ext uri="{FF2B5EF4-FFF2-40B4-BE49-F238E27FC236}">
-                <a16:creationId xmlns:a16="http://schemas.microsoft.com/office/drawing/2014/main" id="{21B14646-CF69-466C-9317-73E45F667D55}"/>
+                <a16:creationId xmlns:a16="http://schemas.microsoft.com/office/drawing/2014/main" id="{49F714EC-AFFB-4733-91C8-353246110695}"/>
               </a:ext>
             </a:extLst>
           </p:cNvPr>
@@ -2375,7 +2465,7 @@
           <p:cNvPr id="5" name="Footer Placeholder 4">
             <a:extLst xmlns:a="http://schemas.openxmlformats.org/drawingml/2006/main">
               <a:ext uri="{FF2B5EF4-FFF2-40B4-BE49-F238E27FC236}">
-                <a16:creationId xmlns:a16="http://schemas.microsoft.com/office/drawing/2014/main" id="{A549412F-8150-4924-9B77-E6B31354023A}"/>
+                <a16:creationId xmlns:a16="http://schemas.microsoft.com/office/drawing/2014/main" id="{464ED3D8-2FE2-42B1-B54E-25F7FD3D76CB}"/>
               </a:ext>
             </a:extLst>
           </p:cNvPr>
@@ -2398,7 +2488,7 @@
           <p:cNvPr id="6" name="Slide Number Placeholder 5">
             <a:extLst xmlns:a="http://schemas.openxmlformats.org/drawingml/2006/main">
               <a:ext uri="{FF2B5EF4-FFF2-40B4-BE49-F238E27FC236}">
-                <a16:creationId xmlns:a16="http://schemas.microsoft.com/office/drawing/2014/main" id="{700A04E8-3DB5-4D15-816D-FE8ABA7339A2}"/>
+                <a16:creationId xmlns:a16="http://schemas.microsoft.com/office/drawing/2014/main" id="{1EDC7EFB-CACF-4329-AF3F-7620E11C4BA0}"/>
               </a:ext>
             </a:extLst>
           </p:cNvPr>
@@ -2442,7 +2532,7 @@
           <p:cNvPr id="2" name="Title 1">
             <a:extLst xmlns:a="http://schemas.openxmlformats.org/drawingml/2006/main">
               <a:ext uri="{FF2B5EF4-FFF2-40B4-BE49-F238E27FC236}">
-                <a16:creationId xmlns:a16="http://schemas.microsoft.com/office/drawing/2014/main" id="{1CD611C7-7E99-4016-B5B1-9FC52CA67BFF}"/>
+                <a16:creationId xmlns:a16="http://schemas.microsoft.com/office/drawing/2014/main" id="{08652C11-BD5B-4E1A-AC0F-6BCD5B109298}"/>
               </a:ext>
             </a:extLst>
           </p:cNvPr>
@@ -2469,7 +2559,7 @@
           <p:cNvPr id="3" name="Content Placeholder 2">
             <a:extLst xmlns:a="http://schemas.openxmlformats.org/drawingml/2006/main">
               <a:ext uri="{FF2B5EF4-FFF2-40B4-BE49-F238E27FC236}">
-                <a16:creationId xmlns:a16="http://schemas.microsoft.com/office/drawing/2014/main" id="{2C4F3664-8A37-48AA-BE39-2E5B6CECDF21}"/>
+                <a16:creationId xmlns:a16="http://schemas.microsoft.com/office/drawing/2014/main" id="{73FB1C00-FDB7-4400-AC90-9331DE3A6A34}"/>
               </a:ext>
             </a:extLst>
           </p:cNvPr>
@@ -2573,7 +2663,7 @@
           <p:cNvPr id="4" name="Content Placeholder 3">
             <a:extLst xmlns:a="http://schemas.openxmlformats.org/drawingml/2006/main">
               <a:ext uri="{FF2B5EF4-FFF2-40B4-BE49-F238E27FC236}">
-                <a16:creationId xmlns:a16="http://schemas.microsoft.com/office/drawing/2014/main" id="{43A82B00-60D4-40FC-A7A4-CDD9EED56A3F}"/>
+                <a16:creationId xmlns:a16="http://schemas.microsoft.com/office/drawing/2014/main" id="{FE0E78B5-79CD-47FD-B2E8-32BE9C84AA12}"/>
               </a:ext>
             </a:extLst>
           </p:cNvPr>
@@ -2677,7 +2767,7 @@
           <p:cNvPr id="5" name="Date Placeholder 4">
             <a:extLst xmlns:a="http://schemas.openxmlformats.org/drawingml/2006/main">
               <a:ext uri="{FF2B5EF4-FFF2-40B4-BE49-F238E27FC236}">
-                <a16:creationId xmlns:a16="http://schemas.microsoft.com/office/drawing/2014/main" id="{564573C5-A108-4288-A840-363B3E12F58C}"/>
+                <a16:creationId xmlns:a16="http://schemas.microsoft.com/office/drawing/2014/main" id="{EE69C8D5-E905-48B3-9A5F-35891A283A7F}"/>
               </a:ext>
             </a:extLst>
           </p:cNvPr>
@@ -2704,7 +2794,7 @@
           <p:cNvPr id="6" name="Footer Placeholder 5">
             <a:extLst xmlns:a="http://schemas.openxmlformats.org/drawingml/2006/main">
               <a:ext uri="{FF2B5EF4-FFF2-40B4-BE49-F238E27FC236}">
-                <a16:creationId xmlns:a16="http://schemas.microsoft.com/office/drawing/2014/main" id="{8A2D001C-FEA7-47DE-BABF-1EE5CC83456A}"/>
+                <a16:creationId xmlns:a16="http://schemas.microsoft.com/office/drawing/2014/main" id="{2B90D626-ABD8-4AD6-8FB6-80BB5E3956F5}"/>
               </a:ext>
             </a:extLst>
           </p:cNvPr>
@@ -2727,7 +2817,7 @@
           <p:cNvPr id="7" name="Slide Number Placeholder 6">
             <a:extLst xmlns:a="http://schemas.openxmlformats.org/drawingml/2006/main">
               <a:ext uri="{FF2B5EF4-FFF2-40B4-BE49-F238E27FC236}">
-                <a16:creationId xmlns:a16="http://schemas.microsoft.com/office/drawing/2014/main" id="{B20E0D25-17EF-4F49-A6D6-6488DD72726D}"/>
+                <a16:creationId xmlns:a16="http://schemas.microsoft.com/office/drawing/2014/main" id="{14B99F44-D884-44E8-950C-584BFCE959C5}"/>
               </a:ext>
             </a:extLst>
           </p:cNvPr>
@@ -2771,7 +2861,7 @@
           <p:cNvPr id="2" name="Title 1">
             <a:extLst xmlns:a="http://schemas.openxmlformats.org/drawingml/2006/main">
               <a:ext uri="{FF2B5EF4-FFF2-40B4-BE49-F238E27FC236}">
-                <a16:creationId xmlns:a16="http://schemas.microsoft.com/office/drawing/2014/main" id="{AB1C8B23-237F-4EED-AE08-0E6D8DFABF76}"/>
+                <a16:creationId xmlns:a16="http://schemas.microsoft.com/office/drawing/2014/main" id="{3DF884AD-BA6A-42E6-8008-6D0411661573}"/>
               </a:ext>
             </a:extLst>
           </p:cNvPr>
@@ -2803,7 +2893,7 @@
           <p:cNvPr id="3" name="Text Placeholder 2">
             <a:extLst xmlns:a="http://schemas.openxmlformats.org/drawingml/2006/main">
               <a:ext uri="{FF2B5EF4-FFF2-40B4-BE49-F238E27FC236}">
-                <a16:creationId xmlns:a16="http://schemas.microsoft.com/office/drawing/2014/main" id="{4CC89973-A5D3-44BA-AF4D-4B28617CEA18}"/>
+                <a16:creationId xmlns:a16="http://schemas.microsoft.com/office/drawing/2014/main" id="{5327600C-6C70-4BE4-9E1F-A81B419715B0}"/>
               </a:ext>
             </a:extLst>
           </p:cNvPr>
@@ -2875,7 +2965,7 @@
           <p:cNvPr id="4" name="Content Placeholder 3">
             <a:extLst xmlns:a="http://schemas.openxmlformats.org/drawingml/2006/main">
               <a:ext uri="{FF2B5EF4-FFF2-40B4-BE49-F238E27FC236}">
-                <a16:creationId xmlns:a16="http://schemas.microsoft.com/office/drawing/2014/main" id="{D5741970-9218-4C77-A58B-C8AB13B4D9BE}"/>
+                <a16:creationId xmlns:a16="http://schemas.microsoft.com/office/drawing/2014/main" id="{4108B206-9A95-4BE8-88C2-6CD4A52BFF88}"/>
               </a:ext>
             </a:extLst>
           </p:cNvPr>
@@ -2979,7 +3069,7 @@
           <p:cNvPr id="5" name="Text Placeholder 4">
             <a:extLst xmlns:a="http://schemas.openxmlformats.org/drawingml/2006/main">
               <a:ext uri="{FF2B5EF4-FFF2-40B4-BE49-F238E27FC236}">
-                <a16:creationId xmlns:a16="http://schemas.microsoft.com/office/drawing/2014/main" id="{51CE756B-1D42-4E98-897F-D3D89E85DD31}"/>
+                <a16:creationId xmlns:a16="http://schemas.microsoft.com/office/drawing/2014/main" id="{E6F19DD1-52E0-447F-9FDD-394622A033F0}"/>
               </a:ext>
             </a:extLst>
           </p:cNvPr>
@@ -3051,7 +3141,7 @@
           <p:cNvPr id="6" name="Content Placeholder 5">
             <a:extLst xmlns:a="http://schemas.openxmlformats.org/drawingml/2006/main">
               <a:ext uri="{FF2B5EF4-FFF2-40B4-BE49-F238E27FC236}">
-                <a16:creationId xmlns:a16="http://schemas.microsoft.com/office/drawing/2014/main" id="{336D8FFB-3868-4F9D-8D99-4949D22D9C86}"/>
+                <a16:creationId xmlns:a16="http://schemas.microsoft.com/office/drawing/2014/main" id="{51793ECC-677D-4F84-AEF2-2F4CA5E6682C}"/>
               </a:ext>
             </a:extLst>
           </p:cNvPr>
@@ -3155,7 +3245,7 @@
           <p:cNvPr id="7" name="Date Placeholder 6">
             <a:extLst xmlns:a="http://schemas.openxmlformats.org/drawingml/2006/main">
               <a:ext uri="{FF2B5EF4-FFF2-40B4-BE49-F238E27FC236}">
-                <a16:creationId xmlns:a16="http://schemas.microsoft.com/office/drawing/2014/main" id="{DFDB0450-48D1-4C7B-960D-B612760BD470}"/>
+                <a16:creationId xmlns:a16="http://schemas.microsoft.com/office/drawing/2014/main" id="{8D57D979-7D0E-42FF-8CA2-710447D0E95F}"/>
               </a:ext>
             </a:extLst>
           </p:cNvPr>
@@ -3182,7 +3272,7 @@
           <p:cNvPr id="8" name="Footer Placeholder 7">
             <a:extLst xmlns:a="http://schemas.openxmlformats.org/drawingml/2006/main">
               <a:ext uri="{FF2B5EF4-FFF2-40B4-BE49-F238E27FC236}">
-                <a16:creationId xmlns:a16="http://schemas.microsoft.com/office/drawing/2014/main" id="{F24CD5F0-81B7-4193-949B-6F2ACD2E240F}"/>
+                <a16:creationId xmlns:a16="http://schemas.microsoft.com/office/drawing/2014/main" id="{1A279BA1-CC95-41D3-835C-887A02A8F40E}"/>
               </a:ext>
             </a:extLst>
           </p:cNvPr>
@@ -3205,7 +3295,7 @@
           <p:cNvPr id="9" name="Slide Number Placeholder 8">
             <a:extLst xmlns:a="http://schemas.openxmlformats.org/drawingml/2006/main">
               <a:ext uri="{FF2B5EF4-FFF2-40B4-BE49-F238E27FC236}">
-                <a16:creationId xmlns:a16="http://schemas.microsoft.com/office/drawing/2014/main" id="{33B0162C-AA7F-4438-83B2-4AE20E6BE3DE}"/>
+                <a16:creationId xmlns:a16="http://schemas.microsoft.com/office/drawing/2014/main" id="{00701220-C537-4DE9-867F-E5D7CB2C1D32}"/>
               </a:ext>
             </a:extLst>
           </p:cNvPr>
@@ -3249,7 +3339,7 @@
           <p:cNvPr id="2" name="Title 1">
             <a:extLst xmlns:a="http://schemas.openxmlformats.org/drawingml/2006/main">
               <a:ext uri="{FF2B5EF4-FFF2-40B4-BE49-F238E27FC236}">
-                <a16:creationId xmlns:a16="http://schemas.microsoft.com/office/drawing/2014/main" id="{2EE6905B-C646-4AC5-9D3E-F28BEAEDBD5D}"/>
+                <a16:creationId xmlns:a16="http://schemas.microsoft.com/office/drawing/2014/main" id="{0E514756-BD73-4CDD-A6FE-3DEDB7021B4F}"/>
               </a:ext>
             </a:extLst>
           </p:cNvPr>
@@ -3276,7 +3366,7 @@
           <p:cNvPr id="3" name="Date Placeholder 2">
             <a:extLst xmlns:a="http://schemas.openxmlformats.org/drawingml/2006/main">
               <a:ext uri="{FF2B5EF4-FFF2-40B4-BE49-F238E27FC236}">
-                <a16:creationId xmlns:a16="http://schemas.microsoft.com/office/drawing/2014/main" id="{C3630277-7FF9-400D-A97B-F221DF6EED7A}"/>
+                <a16:creationId xmlns:a16="http://schemas.microsoft.com/office/drawing/2014/main" id="{BC3CEDCC-09C1-4084-8F17-BB18A86EF407}"/>
               </a:ext>
             </a:extLst>
           </p:cNvPr>
@@ -3303,7 +3393,7 @@
           <p:cNvPr id="4" name="Footer Placeholder 3">
             <a:extLst xmlns:a="http://schemas.openxmlformats.org/drawingml/2006/main">
               <a:ext uri="{FF2B5EF4-FFF2-40B4-BE49-F238E27FC236}">
-                <a16:creationId xmlns:a16="http://schemas.microsoft.com/office/drawing/2014/main" id="{2F4DCCEA-FE63-463F-BD06-A6D5D8D257E4}"/>
+                <a16:creationId xmlns:a16="http://schemas.microsoft.com/office/drawing/2014/main" id="{C9264694-A6C5-48C4-800F-BF9B30898C21}"/>
               </a:ext>
             </a:extLst>
           </p:cNvPr>
@@ -3326,7 +3416,7 @@
           <p:cNvPr id="5" name="Slide Number Placeholder 4">
             <a:extLst xmlns:a="http://schemas.openxmlformats.org/drawingml/2006/main">
               <a:ext uri="{FF2B5EF4-FFF2-40B4-BE49-F238E27FC236}">
-                <a16:creationId xmlns:a16="http://schemas.microsoft.com/office/drawing/2014/main" id="{AF9FB0CF-9D76-47DA-9448-56E48D58C9F9}"/>
+                <a16:creationId xmlns:a16="http://schemas.microsoft.com/office/drawing/2014/main" id="{3DEF0BE7-DE02-4986-BC19-10A33ABC9E0C}"/>
               </a:ext>
             </a:extLst>
           </p:cNvPr>
@@ -3370,7 +3460,7 @@
           <p:cNvPr id="2" name="Date Placeholder 1">
             <a:extLst xmlns:a="http://schemas.openxmlformats.org/drawingml/2006/main">
               <a:ext uri="{FF2B5EF4-FFF2-40B4-BE49-F238E27FC236}">
-                <a16:creationId xmlns:a16="http://schemas.microsoft.com/office/drawing/2014/main" id="{DA03C3E1-3C99-4D76-872B-00D7B53461AA}"/>
+                <a16:creationId xmlns:a16="http://schemas.microsoft.com/office/drawing/2014/main" id="{9736AFB1-D6F8-4C78-8353-5C51F7427596}"/>
               </a:ext>
             </a:extLst>
           </p:cNvPr>
@@ -3397,7 +3487,7 @@
           <p:cNvPr id="3" name="Footer Placeholder 2">
             <a:extLst xmlns:a="http://schemas.openxmlformats.org/drawingml/2006/main">
               <a:ext uri="{FF2B5EF4-FFF2-40B4-BE49-F238E27FC236}">
-                <a16:creationId xmlns:a16="http://schemas.microsoft.com/office/drawing/2014/main" id="{E5947DC1-C8E4-4B7B-A6BC-0B0B9880D92C}"/>
+                <a16:creationId xmlns:a16="http://schemas.microsoft.com/office/drawing/2014/main" id="{7E5D8294-AC13-4ABB-87C4-B77EB9870C34}"/>
               </a:ext>
             </a:extLst>
           </p:cNvPr>
@@ -3420,7 +3510,7 @@
           <p:cNvPr id="4" name="Slide Number Placeholder 3">
             <a:extLst xmlns:a="http://schemas.openxmlformats.org/drawingml/2006/main">
               <a:ext uri="{FF2B5EF4-FFF2-40B4-BE49-F238E27FC236}">
-                <a16:creationId xmlns:a16="http://schemas.microsoft.com/office/drawing/2014/main" id="{74E883C5-9FB3-4707-91BB-20B8C97E9AEC}"/>
+                <a16:creationId xmlns:a16="http://schemas.microsoft.com/office/drawing/2014/main" id="{5AB396FF-9A71-465B-A592-805918551B0E}"/>
               </a:ext>
             </a:extLst>
           </p:cNvPr>
@@ -3464,7 +3554,7 @@
           <p:cNvPr id="2" name="Title 1">
             <a:extLst xmlns:a="http://schemas.openxmlformats.org/drawingml/2006/main">
               <a:ext uri="{FF2B5EF4-FFF2-40B4-BE49-F238E27FC236}">
-                <a16:creationId xmlns:a16="http://schemas.microsoft.com/office/drawing/2014/main" id="{6E0AB524-982A-4DAB-A13E-D7C567D83D06}"/>
+                <a16:creationId xmlns:a16="http://schemas.microsoft.com/office/drawing/2014/main" id="{05BF5981-7149-4570-A9F8-48BEA6803354}"/>
               </a:ext>
             </a:extLst>
           </p:cNvPr>
@@ -3501,7 +3591,7 @@
           <p:cNvPr id="3" name="Content Placeholder 2">
             <a:extLst xmlns:a="http://schemas.openxmlformats.org/drawingml/2006/main">
               <a:ext uri="{FF2B5EF4-FFF2-40B4-BE49-F238E27FC236}">
-                <a16:creationId xmlns:a16="http://schemas.microsoft.com/office/drawing/2014/main" id="{38F1B93F-2027-4826-9A1F-4EA92351090A}"/>
+                <a16:creationId xmlns:a16="http://schemas.microsoft.com/office/drawing/2014/main" id="{95A379DE-4952-412F-9AB6-1A9FA3A69528}"/>
               </a:ext>
             </a:extLst>
           </p:cNvPr>
@@ -3605,7 +3695,7 @@
           <p:cNvPr id="4" name="Text Placeholder 3">
             <a:extLst xmlns:a="http://schemas.openxmlformats.org/drawingml/2006/main">
               <a:ext uri="{FF2B5EF4-FFF2-40B4-BE49-F238E27FC236}">
-                <a16:creationId xmlns:a16="http://schemas.microsoft.com/office/drawing/2014/main" id="{45B8E70E-13CD-4829-B686-82426468C5FE}"/>
+                <a16:creationId xmlns:a16="http://schemas.microsoft.com/office/drawing/2014/main" id="{697AD7DB-0893-4D54-AE6D-B30FFF69EE83}"/>
               </a:ext>
             </a:extLst>
           </p:cNvPr>
@@ -3677,7 +3767,7 @@
           <p:cNvPr id="5" name="Date Placeholder 4">
             <a:extLst xmlns:a="http://schemas.openxmlformats.org/drawingml/2006/main">
               <a:ext uri="{FF2B5EF4-FFF2-40B4-BE49-F238E27FC236}">
-                <a16:creationId xmlns:a16="http://schemas.microsoft.com/office/drawing/2014/main" id="{5F2E08B8-D984-4BC1-A864-6A954F4A19B6}"/>
+                <a16:creationId xmlns:a16="http://schemas.microsoft.com/office/drawing/2014/main" id="{C28989BC-98D2-4E5C-9A3C-B0A41D170751}"/>
               </a:ext>
             </a:extLst>
           </p:cNvPr>
@@ -3704,7 +3794,7 @@
           <p:cNvPr id="6" name="Footer Placeholder 5">
             <a:extLst xmlns:a="http://schemas.openxmlformats.org/drawingml/2006/main">
               <a:ext uri="{FF2B5EF4-FFF2-40B4-BE49-F238E27FC236}">
-                <a16:creationId xmlns:a16="http://schemas.microsoft.com/office/drawing/2014/main" id="{B8577CB7-06A1-4E63-86F1-CA9DC78B0ACC}"/>
+                <a16:creationId xmlns:a16="http://schemas.microsoft.com/office/drawing/2014/main" id="{FD285CF2-5C05-4837-9C34-1EBF0C1121B1}"/>
               </a:ext>
             </a:extLst>
           </p:cNvPr>
@@ -3727,7 +3817,7 @@
           <p:cNvPr id="7" name="Slide Number Placeholder 6">
             <a:extLst xmlns:a="http://schemas.openxmlformats.org/drawingml/2006/main">
               <a:ext uri="{FF2B5EF4-FFF2-40B4-BE49-F238E27FC236}">
-                <a16:creationId xmlns:a16="http://schemas.microsoft.com/office/drawing/2014/main" id="{63737D30-1592-4446-955E-4EF9E9598187}"/>
+                <a16:creationId xmlns:a16="http://schemas.microsoft.com/office/drawing/2014/main" id="{D1EAE05A-213C-4821-A6AD-08CCC1223397}"/>
               </a:ext>
             </a:extLst>
           </p:cNvPr>
@@ -3771,7 +3861,7 @@
           <p:cNvPr id="2" name="Title 1">
             <a:extLst xmlns:a="http://schemas.openxmlformats.org/drawingml/2006/main">
               <a:ext uri="{FF2B5EF4-FFF2-40B4-BE49-F238E27FC236}">
-                <a16:creationId xmlns:a16="http://schemas.microsoft.com/office/drawing/2014/main" id="{87C1C342-6C64-4D8B-BADC-4CB92AE963F4}"/>
+                <a16:creationId xmlns:a16="http://schemas.microsoft.com/office/drawing/2014/main" id="{5D3308C6-EB71-4694-B554-1B9B714E79CB}"/>
               </a:ext>
             </a:extLst>
           </p:cNvPr>
@@ -3808,7 +3898,7 @@
           <p:cNvPr id="3" name="Picture Placeholder 2">
             <a:extLst xmlns:a="http://schemas.openxmlformats.org/drawingml/2006/main">
               <a:ext uri="{FF2B5EF4-FFF2-40B4-BE49-F238E27FC236}">
-                <a16:creationId xmlns:a16="http://schemas.microsoft.com/office/drawing/2014/main" id="{2442D87F-AD82-4BF0-B8E3-7699574F17D3}"/>
+                <a16:creationId xmlns:a16="http://schemas.microsoft.com/office/drawing/2014/main" id="{08DD804F-4F23-49DD-85F0-BE6D511B0510}"/>
               </a:ext>
             </a:extLst>
           </p:cNvPr>
@@ -3873,7 +3963,7 @@
           <p:cNvPr id="4" name="Text Placeholder 3">
             <a:extLst xmlns:a="http://schemas.openxmlformats.org/drawingml/2006/main">
               <a:ext uri="{FF2B5EF4-FFF2-40B4-BE49-F238E27FC236}">
-                <a16:creationId xmlns:a16="http://schemas.microsoft.com/office/drawing/2014/main" id="{9A5B41A2-56E8-4FC2-B00B-ADC10429D65A}"/>
+                <a16:creationId xmlns:a16="http://schemas.microsoft.com/office/drawing/2014/main" id="{BB1C5B86-11AB-4723-8595-BD7916C0047F}"/>
               </a:ext>
             </a:extLst>
           </p:cNvPr>
@@ -3945,7 +4035,7 @@
           <p:cNvPr id="5" name="Date Placeholder 4">
             <a:extLst xmlns:a="http://schemas.openxmlformats.org/drawingml/2006/main">
               <a:ext uri="{FF2B5EF4-FFF2-40B4-BE49-F238E27FC236}">
-                <a16:creationId xmlns:a16="http://schemas.microsoft.com/office/drawing/2014/main" id="{AC7BF2B0-3209-450F-BEC4-033DAF77990E}"/>
+                <a16:creationId xmlns:a16="http://schemas.microsoft.com/office/drawing/2014/main" id="{22C85694-A78A-4DDE-8B61-DA2E48EEF5F3}"/>
               </a:ext>
             </a:extLst>
           </p:cNvPr>
@@ -3972,7 +4062,7 @@
           <p:cNvPr id="6" name="Footer Placeholder 5">
             <a:extLst xmlns:a="http://schemas.openxmlformats.org/drawingml/2006/main">
               <a:ext uri="{FF2B5EF4-FFF2-40B4-BE49-F238E27FC236}">
-                <a16:creationId xmlns:a16="http://schemas.microsoft.com/office/drawing/2014/main" id="{AD0C5089-1BA1-450B-88D2-912F1C957AAB}"/>
+                <a16:creationId xmlns:a16="http://schemas.microsoft.com/office/drawing/2014/main" id="{FFAA36F8-DB2B-457C-AB6E-AC308785686E}"/>
               </a:ext>
             </a:extLst>
           </p:cNvPr>
@@ -3995,7 +4085,7 @@
           <p:cNvPr id="7" name="Slide Number Placeholder 6">
             <a:extLst xmlns:a="http://schemas.openxmlformats.org/drawingml/2006/main">
               <a:ext uri="{FF2B5EF4-FFF2-40B4-BE49-F238E27FC236}">
-                <a16:creationId xmlns:a16="http://schemas.microsoft.com/office/drawing/2014/main" id="{E87C7389-A8E2-4AA6-A011-367D574B9FF1}"/>
+                <a16:creationId xmlns:a16="http://schemas.microsoft.com/office/drawing/2014/main" id="{A39C661E-0EC2-4560-81EC-DE8389215EB2}"/>
               </a:ext>
             </a:extLst>
           </p:cNvPr>
@@ -4044,7 +4134,7 @@
           <p:cNvPr id="2" name="Title Placeholder 1">
             <a:extLst xmlns:a="http://schemas.openxmlformats.org/drawingml/2006/main">
               <a:ext uri="{FF2B5EF4-FFF2-40B4-BE49-F238E27FC236}">
-                <a16:creationId xmlns:a16="http://schemas.microsoft.com/office/drawing/2014/main" id="{A3B74534-915D-4184-AF42-A09497DD3E4F}"/>
+                <a16:creationId xmlns:a16="http://schemas.microsoft.com/office/drawing/2014/main" id="{6AC4CAC8-0027-4153-B15B-71107BBD8E25}"/>
               </a:ext>
             </a:extLst>
           </p:cNvPr>
@@ -4081,7 +4171,7 @@
           <p:cNvPr id="3" name="Text Placeholder 2">
             <a:extLst xmlns:a="http://schemas.openxmlformats.org/drawingml/2006/main">
               <a:ext uri="{FF2B5EF4-FFF2-40B4-BE49-F238E27FC236}">
-                <a16:creationId xmlns:a16="http://schemas.microsoft.com/office/drawing/2014/main" id="{2310ACB7-A4F0-4479-8BF7-EA04A8A874EA}"/>
+                <a16:creationId xmlns:a16="http://schemas.microsoft.com/office/drawing/2014/main" id="{FAC6C2DD-3197-4CD9-81A8-3A2E760596A4}"/>
               </a:ext>
             </a:extLst>
           </p:cNvPr>
@@ -4153,7 +4243,7 @@
           <p:cNvPr id="4" name="Date Placeholder 3">
             <a:extLst xmlns:a="http://schemas.openxmlformats.org/drawingml/2006/main">
               <a:ext uri="{FF2B5EF4-FFF2-40B4-BE49-F238E27FC236}">
-                <a16:creationId xmlns:a16="http://schemas.microsoft.com/office/drawing/2014/main" id="{22A1DAEE-FC4E-4251-A879-CAB5412EA322}"/>
+                <a16:creationId xmlns:a16="http://schemas.microsoft.com/office/drawing/2014/main" id="{EFDE49EC-C340-4E90-816D-3900DF63D937}"/>
               </a:ext>
             </a:extLst>
           </p:cNvPr>
@@ -4199,7 +4289,7 @@
           <p:cNvPr id="5" name="Footer Placeholder 4">
             <a:extLst xmlns:a="http://schemas.openxmlformats.org/drawingml/2006/main">
               <a:ext uri="{FF2B5EF4-FFF2-40B4-BE49-F238E27FC236}">
-                <a16:creationId xmlns:a16="http://schemas.microsoft.com/office/drawing/2014/main" id="{C99B8E79-B395-49A4-9689-8052E63E9B83}"/>
+                <a16:creationId xmlns:a16="http://schemas.microsoft.com/office/drawing/2014/main" id="{C5173322-901C-41BD-A4F7-8735BD16CD73}"/>
               </a:ext>
             </a:extLst>
           </p:cNvPr>
@@ -4241,7 +4331,7 @@
           <p:cNvPr id="6" name="Slide Number Placeholder 5">
             <a:extLst xmlns:a="http://schemas.openxmlformats.org/drawingml/2006/main">
               <a:ext uri="{FF2B5EF4-FFF2-40B4-BE49-F238E27FC236}">
-                <a16:creationId xmlns:a16="http://schemas.microsoft.com/office/drawing/2014/main" id="{D508D121-A2FF-4D1B-AA7C-530A6383D780}"/>
+                <a16:creationId xmlns:a16="http://schemas.microsoft.com/office/drawing/2014/main" id="{94271B4E-0C13-4B2F-9F67-6E630C86C10C}"/>
               </a:ext>
             </a:extLst>
           </p:cNvPr>
@@ -4286,17 +4376,17 @@
   </p:cSld>
   <p:clrMap bg1="lt1" tx1="dk1" bg2="lt2" tx2="dk2" accent1="accent1" accent2="accent2" accent3="accent3" accent4="accent4" accent5="accent5" accent6="accent6" hlink="hlink" folHlink="folHlink"/>
   <p:sldLayoutIdLst>
-    <p:sldLayoutId xmlns:r="http://schemas.openxmlformats.org/officeDocument/2006/relationships" id="2147483649" r:id="Raf733428e2884851"/>
-    <p:sldLayoutId xmlns:r="http://schemas.openxmlformats.org/officeDocument/2006/relationships" id="2147483650" r:id="Rf3d0160f450f4bf5"/>
-    <p:sldLayoutId xmlns:r="http://schemas.openxmlformats.org/officeDocument/2006/relationships" id="2147483651" r:id="Rfa9e1def3bb44b12"/>
-    <p:sldLayoutId xmlns:r="http://schemas.openxmlformats.org/officeDocument/2006/relationships" id="2147483652" r:id="Rafec17275a4c4caf"/>
-    <p:sldLayoutId xmlns:r="http://schemas.openxmlformats.org/officeDocument/2006/relationships" id="2147483653" r:id="R027a04e1533b4010"/>
-    <p:sldLayoutId xmlns:r="http://schemas.openxmlformats.org/officeDocument/2006/relationships" id="2147483654" r:id="R61c7a525b50e4d54"/>
-    <p:sldLayoutId xmlns:r="http://schemas.openxmlformats.org/officeDocument/2006/relationships" id="2147483655" r:id="R60ab96d9c03248fc"/>
-    <p:sldLayoutId xmlns:r="http://schemas.openxmlformats.org/officeDocument/2006/relationships" id="2147483656" r:id="R89425c40179f490c"/>
-    <p:sldLayoutId xmlns:r="http://schemas.openxmlformats.org/officeDocument/2006/relationships" id="2147483657" r:id="Rffb94d307b07472d"/>
-    <p:sldLayoutId xmlns:r="http://schemas.openxmlformats.org/officeDocument/2006/relationships" id="2147483658" r:id="Ra58cf1ab9bf44aff"/>
-    <p:sldLayoutId xmlns:r="http://schemas.openxmlformats.org/officeDocument/2006/relationships" id="2147483659" r:id="Rc69d41c2bcd0450a"/>
+    <p:sldLayoutId xmlns:r="http://schemas.openxmlformats.org/officeDocument/2006/relationships" id="2147483649" r:id="R572fc59d9dc0430c"/>
+    <p:sldLayoutId xmlns:r="http://schemas.openxmlformats.org/officeDocument/2006/relationships" id="2147483650" r:id="R39d5e48ada9a488f"/>
+    <p:sldLayoutId xmlns:r="http://schemas.openxmlformats.org/officeDocument/2006/relationships" id="2147483651" r:id="R53ff10749e5f418e"/>
+    <p:sldLayoutId xmlns:r="http://schemas.openxmlformats.org/officeDocument/2006/relationships" id="2147483652" r:id="R163ced5d0c7d4749"/>
+    <p:sldLayoutId xmlns:r="http://schemas.openxmlformats.org/officeDocument/2006/relationships" id="2147483653" r:id="R5b018e5d0dc84f6e"/>
+    <p:sldLayoutId xmlns:r="http://schemas.openxmlformats.org/officeDocument/2006/relationships" id="2147483654" r:id="R25996a4dac0344d4"/>
+    <p:sldLayoutId xmlns:r="http://schemas.openxmlformats.org/officeDocument/2006/relationships" id="2147483655" r:id="R8a548a0512d041c2"/>
+    <p:sldLayoutId xmlns:r="http://schemas.openxmlformats.org/officeDocument/2006/relationships" id="2147483656" r:id="Rad7dc8172a384544"/>
+    <p:sldLayoutId xmlns:r="http://schemas.openxmlformats.org/officeDocument/2006/relationships" id="2147483657" r:id="R1b169204eaab4a37"/>
+    <p:sldLayoutId xmlns:r="http://schemas.openxmlformats.org/officeDocument/2006/relationships" id="2147483658" r:id="R63e36bfe7d944f2f"/>
+    <p:sldLayoutId xmlns:r="http://schemas.openxmlformats.org/officeDocument/2006/relationships" id="2147483659" r:id="R18732eaafa04442f"/>
   </p:sldLayoutIdLst>
   <p:txStyles>
     <p:titleStyle>
@@ -4849,7 +4939,7 @@
           <p:cNvPr id="2" name="Rectangle 1">
             <a:extLst xmlns:a="http://schemas.openxmlformats.org/drawingml/2006/main">
               <a:ext uri="{FF2B5EF4-FFF2-40B4-BE49-F238E27FC236}">
-                <a16:creationId xmlns:a16="http://schemas.microsoft.com/office/drawing/2014/main" id="{B02A9AF2-9575-4BBD-981D-C7C1D6F50F63}"/>
+                <a16:creationId xmlns:a16="http://schemas.microsoft.com/office/drawing/2014/main" id="{1BBEDC2E-7014-472D-ABCC-AEFDB90D7F8A}"/>
               </a:ext>
             </a:extLst>
           </p:cNvPr>
@@ -4904,7 +4994,7 @@
           <p:cNvPr id="3" name="TextBox 2">
             <a:extLst xmlns:a="http://schemas.openxmlformats.org/drawingml/2006/main">
               <a:ext uri="{FF2B5EF4-FFF2-40B4-BE49-F238E27FC236}">
-                <a16:creationId xmlns:a16="http://schemas.microsoft.com/office/drawing/2014/main" id="{FA9A8F7F-B162-4836-8AA8-FACDF2FC47DE}"/>
+                <a16:creationId xmlns:a16="http://schemas.microsoft.com/office/drawing/2014/main" id="{4F4E36A1-093B-4E20-BA30-C74A7999DCF3}"/>
               </a:ext>
             </a:extLst>
           </p:cNvPr>
@@ -4951,7 +5041,7 @@
           <p:cNvPr id="4" name="TextBox 3">
             <a:extLst xmlns:a="http://schemas.openxmlformats.org/drawingml/2006/main">
               <a:ext uri="{FF2B5EF4-FFF2-40B4-BE49-F238E27FC236}">
-                <a16:creationId xmlns:a16="http://schemas.microsoft.com/office/drawing/2014/main" id="{950D7BF2-0F71-4FD4-94E3-803C4FA86C04}"/>
+                <a16:creationId xmlns:a16="http://schemas.microsoft.com/office/drawing/2014/main" id="{545B1CBB-14A0-4C4C-8FD3-51E06DB06A70}"/>
               </a:ext>
             </a:extLst>
           </p:cNvPr>
@@ -4999,7 +5089,7 @@
           <p:cNvPr id="5" name="TextBox 4">
             <a:extLst xmlns:a="http://schemas.openxmlformats.org/drawingml/2006/main">
               <a:ext uri="{FF2B5EF4-FFF2-40B4-BE49-F238E27FC236}">
-                <a16:creationId xmlns:a16="http://schemas.microsoft.com/office/drawing/2014/main" id="{EE37D7C6-35D6-433C-A3C2-8D460841F028}"/>
+                <a16:creationId xmlns:a16="http://schemas.microsoft.com/office/drawing/2014/main" id="{3418F372-6BDF-468A-BE18-8B382BB31516}"/>
               </a:ext>
             </a:extLst>
           </p:cNvPr>
@@ -5046,7 +5136,7 @@
           <p:cNvPr id="6" name="Rectangle 5">
             <a:extLst xmlns:a="http://schemas.openxmlformats.org/drawingml/2006/main">
               <a:ext uri="{FF2B5EF4-FFF2-40B4-BE49-F238E27FC236}">
-                <a16:creationId xmlns:a16="http://schemas.microsoft.com/office/drawing/2014/main" id="{DD478873-1C72-4AA3-88F7-49662E87A5C2}"/>
+                <a16:creationId xmlns:a16="http://schemas.microsoft.com/office/drawing/2014/main" id="{B843D3D0-9B45-4872-95AB-A48B90E3CEA7}"/>
               </a:ext>
             </a:extLst>
           </p:cNvPr>
@@ -5101,7 +5191,7 @@
           <p:cNvPr id="7" name="TextBox 6">
             <a:extLst xmlns:a="http://schemas.openxmlformats.org/drawingml/2006/main">
               <a:ext uri="{FF2B5EF4-FFF2-40B4-BE49-F238E27FC236}">
-                <a16:creationId xmlns:a16="http://schemas.microsoft.com/office/drawing/2014/main" id="{278F3E0A-7D74-46B6-A025-8EA38B3AC098}"/>
+                <a16:creationId xmlns:a16="http://schemas.microsoft.com/office/drawing/2014/main" id="{ECC61E5F-CE81-4BBA-A7B1-F80F495FE67B}"/>
               </a:ext>
             </a:extLst>
           </p:cNvPr>
@@ -5148,7 +5238,7 @@
           <p:cNvPr id="8" name="TextBox 7">
             <a:extLst xmlns:a="http://schemas.openxmlformats.org/drawingml/2006/main">
               <a:ext uri="{FF2B5EF4-FFF2-40B4-BE49-F238E27FC236}">
-                <a16:creationId xmlns:a16="http://schemas.microsoft.com/office/drawing/2014/main" id="{1DD47B74-74AF-4D6F-8F4B-0D0BF0BB7484}"/>
+                <a16:creationId xmlns:a16="http://schemas.microsoft.com/office/drawing/2014/main" id="{16BCFD7F-0BA8-44E9-B00B-2794DA4BB8C2}"/>
               </a:ext>
             </a:extLst>
           </p:cNvPr>
@@ -5185,7 +5275,7 @@
                 <a:ea typeface="Aptos"/>
                 <a:cs typeface="Aptos"/>
               </a:rPr>
-              <a:t>2026.07.24-18</a:t>
+              <a:t>2026.07.24-19</a:t>
             </a:r>
           </a:p>
         </p:txBody>
@@ -5195,7 +5285,7 @@
           <p:cNvPr id="9" name="TextBox 8">
             <a:extLst xmlns:a="http://schemas.openxmlformats.org/drawingml/2006/main">
               <a:ext uri="{FF2B5EF4-FFF2-40B4-BE49-F238E27FC236}">
-                <a16:creationId xmlns:a16="http://schemas.microsoft.com/office/drawing/2014/main" id="{63152279-9A2C-4166-80E0-9170258EC739}"/>
+                <a16:creationId xmlns:a16="http://schemas.microsoft.com/office/drawing/2014/main" id="{1DB16063-B9FA-4077-82BD-4C94A1306662}"/>
               </a:ext>
             </a:extLst>
           </p:cNvPr>
@@ -5243,7 +5333,7 @@
           <p:cNvPr id="10" name="TextBox 9">
             <a:extLst xmlns:a="http://schemas.openxmlformats.org/drawingml/2006/main">
               <a:ext uri="{FF2B5EF4-FFF2-40B4-BE49-F238E27FC236}">
-                <a16:creationId xmlns:a16="http://schemas.microsoft.com/office/drawing/2014/main" id="{60C00D40-767A-405A-AED5-1FC543AD37BA}"/>
+                <a16:creationId xmlns:a16="http://schemas.microsoft.com/office/drawing/2014/main" id="{B16E4F45-19C9-40C6-BA63-CA9E56E84FC1}"/>
               </a:ext>
             </a:extLst>
           </p:cNvPr>
@@ -5290,7 +5380,7 @@
           <p:cNvPr id="11" name="TextBox 10">
             <a:extLst xmlns:a="http://schemas.openxmlformats.org/drawingml/2006/main">
               <a:ext uri="{FF2B5EF4-FFF2-40B4-BE49-F238E27FC236}">
-                <a16:creationId xmlns:a16="http://schemas.microsoft.com/office/drawing/2014/main" id="{AB19598B-DB8E-4172-8249-38E5BF2259DD}"/>
+                <a16:creationId xmlns:a16="http://schemas.microsoft.com/office/drawing/2014/main" id="{0B74CA69-AF87-4C47-BAD5-70A0F2344174}"/>
               </a:ext>
             </a:extLst>
           </p:cNvPr>
@@ -5337,7 +5427,7 @@
           <p:cNvPr id="12" name="TextBox 11">
             <a:extLst xmlns:a="http://schemas.openxmlformats.org/drawingml/2006/main">
               <a:ext uri="{FF2B5EF4-FFF2-40B4-BE49-F238E27FC236}">
-                <a16:creationId xmlns:a16="http://schemas.microsoft.com/office/drawing/2014/main" id="{154D9CAF-0DD4-4094-91E8-8899726068F6}"/>
+                <a16:creationId xmlns:a16="http://schemas.microsoft.com/office/drawing/2014/main" id="{46054E92-4680-4EE1-9BA2-50E94149D967}"/>
               </a:ext>
             </a:extLst>
           </p:cNvPr>
@@ -5382,7 +5472,7 @@
     </p:spTree>
     <p:extLst>
       <p:ext uri="{BB962C8B-B14F-4D97-AF65-F5344CB8AC3E}">
-        <p14:creationId xmlns:p14="http://schemas.microsoft.com/office/powerpoint/2010/main" val="345149902"/>
+        <p14:creationId xmlns:p14="http://schemas.microsoft.com/office/powerpoint/2010/main" val="1470319129"/>
       </p:ext>
     </p:extLst>
   </p:cSld>
@@ -5406,7 +5496,7 @@
           <p:cNvPr id="2" name="TextBox 1">
             <a:extLst xmlns:a="http://schemas.openxmlformats.org/drawingml/2006/main">
               <a:ext uri="{FF2B5EF4-FFF2-40B4-BE49-F238E27FC236}">
-                <a16:creationId xmlns:a16="http://schemas.microsoft.com/office/drawing/2014/main" id="{B17E52FC-72EC-474F-A092-E5E13CCC3BB9}"/>
+                <a16:creationId xmlns:a16="http://schemas.microsoft.com/office/drawing/2014/main" id="{CF8B2D1D-C0FF-4918-B12F-A7712DBE8CC6}"/>
               </a:ext>
             </a:extLst>
           </p:cNvPr>
@@ -5453,7 +5543,7 @@
           <p:cNvPr id="3" name="TextBox 2">
             <a:extLst xmlns:a="http://schemas.openxmlformats.org/drawingml/2006/main">
               <a:ext uri="{FF2B5EF4-FFF2-40B4-BE49-F238E27FC236}">
-                <a16:creationId xmlns:a16="http://schemas.microsoft.com/office/drawing/2014/main" id="{269E5561-1493-4EA4-90A4-5B476017B520}"/>
+                <a16:creationId xmlns:a16="http://schemas.microsoft.com/office/drawing/2014/main" id="{AF5A0800-D495-4E03-9786-8F587082DB36}"/>
               </a:ext>
             </a:extLst>
           </p:cNvPr>
@@ -5465,7 +5555,7 @@
         <p:spPr>
           <a:xfrm xmlns:a="http://schemas.openxmlformats.org/drawingml/2006/main">
             <a:off x="502920" y="621792"/>
-            <a:ext cx="11109960" cy="548640"/>
+            <a:ext cx="11109960" cy="591312"/>
           </a:xfrm>
           <a:prstGeom xmlns:a="http://schemas.openxmlformats.org/drawingml/2006/main" prst="rect">
             <a:avLst/>
@@ -5473,8 +5563,8 @@
           <a:noFill xmlns:a="http://schemas.openxmlformats.org/drawingml/2006/main"/>
         </p:spPr>
         <p:txBody>
-          <a:bodyPr xmlns:a="http://schemas.openxmlformats.org/drawingml/2006/main" wrap="square" lIns="36576" tIns="36576" rIns="36576" bIns="36576" anchor="t">
-            <a:spAutoFit/>
+          <a:bodyPr xmlns:a="http://schemas.openxmlformats.org/drawingml/2006/main" wrap="none" lIns="36576" tIns="36576" rIns="36576" bIns="36576" anchor="t">
+            <a:normAutofit fontScale="100000"/>
           </a:bodyPr>
           <a:lstStyle xmlns:a="http://schemas.openxmlformats.org/drawingml/2006/main"/>
           <a:p xmlns:a="http://schemas.openxmlformats.org/drawingml/2006/main">
@@ -5482,7 +5572,7 @@
               <a:buNone/>
             </a:pPr>
             <a:r>
-              <a:rPr sz="3400" b="1">
+              <a:rPr sz="2400" b="1">
                 <a:solidFill>
                   <a:srgbClr val="071A2B"/>
                 </a:solidFill>
@@ -5490,7 +5580,7 @@
                 <a:ea typeface="Aptos"/>
                 <a:cs typeface="Aptos"/>
               </a:rPr>
-              <a:t>Rahoitusteesi perustuu näyttöön — ei markkinahypeen</a:t>
+              <a:t>Rahoitusteesi perustuu näyttöön</a:t>
             </a:r>
           </a:p>
         </p:txBody>
@@ -5500,7 +5590,7 @@
           <p:cNvPr id="4" name="Rectangle 3">
             <a:extLst xmlns:a="http://schemas.openxmlformats.org/drawingml/2006/main">
               <a:ext uri="{FF2B5EF4-FFF2-40B4-BE49-F238E27FC236}">
-                <a16:creationId xmlns:a16="http://schemas.microsoft.com/office/drawing/2014/main" id="{A322022F-0C14-4221-B39D-57673CC0AC91}"/>
+                <a16:creationId xmlns:a16="http://schemas.microsoft.com/office/drawing/2014/main" id="{40B864A0-7889-4DFA-A2CD-E1BD0A3C6EDE}"/>
               </a:ext>
             </a:extLst>
           </p:cNvPr>
@@ -5555,7 +5645,7 @@
           <p:cNvPr id="5" name="Rectangle 4">
             <a:extLst xmlns:a="http://schemas.openxmlformats.org/drawingml/2006/main">
               <a:ext uri="{FF2B5EF4-FFF2-40B4-BE49-F238E27FC236}">
-                <a16:creationId xmlns:a16="http://schemas.microsoft.com/office/drawing/2014/main" id="{3660A4C1-EAF9-49A3-AD3D-C81A1C52A517}"/>
+                <a16:creationId xmlns:a16="http://schemas.microsoft.com/office/drawing/2014/main" id="{978C01A3-30FD-462B-993E-1A8DFD0C7D15}"/>
               </a:ext>
             </a:extLst>
           </p:cNvPr>
@@ -5610,7 +5700,7 @@
           <p:cNvPr id="6" name="TextBox 5">
             <a:extLst xmlns:a="http://schemas.openxmlformats.org/drawingml/2006/main">
               <a:ext uri="{FF2B5EF4-FFF2-40B4-BE49-F238E27FC236}">
-                <a16:creationId xmlns:a16="http://schemas.microsoft.com/office/drawing/2014/main" id="{8DE51EA3-6CA5-4A58-BF13-84FDAA6FC453}"/>
+                <a16:creationId xmlns:a16="http://schemas.microsoft.com/office/drawing/2014/main" id="{5B81B556-8C98-4C01-95B9-0D60FFF26E19}"/>
               </a:ext>
             </a:extLst>
           </p:cNvPr>
@@ -5647,7 +5737,7 @@
                 <a:ea typeface="Aptos"/>
                 <a:cs typeface="Aptos"/>
               </a:rPr>
-              <a:t>Julkinen riippumaton evidenssikooste · 2026.07.24-18 · 2026-07-24 · Lähteet: EPO; Saksa — viralliset tuomiot; WIPO</a:t>
+              <a:t>Julkinen riippumaton evidenssikooste · 2026.07.24-19 · 2026-07-24 · Lähteet: EPO; Saksa — viralliset tuomiot; WIPO</a:t>
             </a:r>
           </a:p>
         </p:txBody>
@@ -5657,7 +5747,7 @@
           <p:cNvPr id="7" name="TextBox 6">
             <a:extLst xmlns:a="http://schemas.openxmlformats.org/drawingml/2006/main">
               <a:ext uri="{FF2B5EF4-FFF2-40B4-BE49-F238E27FC236}">
-                <a16:creationId xmlns:a16="http://schemas.microsoft.com/office/drawing/2014/main" id="{E4D4290E-5D5C-4491-A493-5E319BA5F115}"/>
+                <a16:creationId xmlns:a16="http://schemas.microsoft.com/office/drawing/2014/main" id="{21DCE5C7-5C14-4DB6-ABB9-80F6EA596DDB}"/>
               </a:ext>
             </a:extLst>
           </p:cNvPr>
@@ -5704,7 +5794,7 @@
           <p:cNvPr id="8" name="TextBox 7">
             <a:extLst xmlns:a="http://schemas.openxmlformats.org/drawingml/2006/main">
               <a:ext uri="{FF2B5EF4-FFF2-40B4-BE49-F238E27FC236}">
-                <a16:creationId xmlns:a16="http://schemas.microsoft.com/office/drawing/2014/main" id="{3D6E9808-97A5-4CF5-9A93-63D258F0D757}"/>
+                <a16:creationId xmlns:a16="http://schemas.microsoft.com/office/drawing/2014/main" id="{711489FA-E5B6-4051-97AA-1FC503CEC77A}"/>
               </a:ext>
             </a:extLst>
           </p:cNvPr>
@@ -5751,7 +5841,7 @@
           <p:cNvPr id="9" name="TextBox 8">
             <a:extLst xmlns:a="http://schemas.openxmlformats.org/drawingml/2006/main">
               <a:ext uri="{FF2B5EF4-FFF2-40B4-BE49-F238E27FC236}">
-                <a16:creationId xmlns:a16="http://schemas.microsoft.com/office/drawing/2014/main" id="{AB028846-51B3-492E-8094-9E4A4816A167}"/>
+                <a16:creationId xmlns:a16="http://schemas.microsoft.com/office/drawing/2014/main" id="{C73B838D-40E1-42E4-90D4-DCE9D712FD8E}"/>
               </a:ext>
             </a:extLst>
           </p:cNvPr>
@@ -5848,7 +5938,7 @@
           <p:cNvPr id="10" name="Rounded Rectangle 9">
             <a:extLst xmlns:a="http://schemas.openxmlformats.org/drawingml/2006/main">
               <a:ext uri="{FF2B5EF4-FFF2-40B4-BE49-F238E27FC236}">
-                <a16:creationId xmlns:a16="http://schemas.microsoft.com/office/drawing/2014/main" id="{3FB1CCDD-3FD6-42EF-99CC-73B9DE6269C3}"/>
+                <a16:creationId xmlns:a16="http://schemas.microsoft.com/office/drawing/2014/main" id="{840533DC-9743-40D8-86CA-1C79F8F3C462}"/>
               </a:ext>
             </a:extLst>
           </p:cNvPr>
@@ -5905,7 +5995,7 @@
           <p:cNvPr id="11" name="TextBox 10">
             <a:extLst xmlns:a="http://schemas.openxmlformats.org/drawingml/2006/main">
               <a:ext uri="{FF2B5EF4-FFF2-40B4-BE49-F238E27FC236}">
-                <a16:creationId xmlns:a16="http://schemas.microsoft.com/office/drawing/2014/main" id="{82E7429D-6EA8-4E89-AC5E-AA57945B0024}"/>
+                <a16:creationId xmlns:a16="http://schemas.microsoft.com/office/drawing/2014/main" id="{EDA2F288-1A06-418A-BA26-47244A32F086}"/>
               </a:ext>
             </a:extLst>
           </p:cNvPr>
@@ -5952,7 +6042,7 @@
           <p:cNvPr id="12" name="TextBox 11">
             <a:extLst xmlns:a="http://schemas.openxmlformats.org/drawingml/2006/main">
               <a:ext uri="{FF2B5EF4-FFF2-40B4-BE49-F238E27FC236}">
-                <a16:creationId xmlns:a16="http://schemas.microsoft.com/office/drawing/2014/main" id="{AC1C96DD-947F-4A21-8B6C-0AAC5DC233E6}"/>
+                <a16:creationId xmlns:a16="http://schemas.microsoft.com/office/drawing/2014/main" id="{ECCFD158-02C9-4BBE-8F2C-3BB2DA802DFA}"/>
               </a:ext>
             </a:extLst>
           </p:cNvPr>
@@ -5997,7 +6087,7 @@
     </p:spTree>
     <p:extLst>
       <p:ext uri="{BB962C8B-B14F-4D97-AF65-F5344CB8AC3E}">
-        <p14:creationId xmlns:p14="http://schemas.microsoft.com/office/powerpoint/2010/main" val="2076134459"/>
+        <p14:creationId xmlns:p14="http://schemas.microsoft.com/office/powerpoint/2010/main" val="1656816560"/>
       </p:ext>
     </p:extLst>
   </p:cSld>
@@ -6021,7 +6111,7 @@
           <p:cNvPr id="2" name="TextBox 1">
             <a:extLst xmlns:a="http://schemas.openxmlformats.org/drawingml/2006/main">
               <a:ext uri="{FF2B5EF4-FFF2-40B4-BE49-F238E27FC236}">
-                <a16:creationId xmlns:a16="http://schemas.microsoft.com/office/drawing/2014/main" id="{7BA69EDD-3847-4A61-A421-D302E9613358}"/>
+                <a16:creationId xmlns:a16="http://schemas.microsoft.com/office/drawing/2014/main" id="{78B7ACF6-8E19-4794-9B96-282B549EC9D4}"/>
               </a:ext>
             </a:extLst>
           </p:cNvPr>
@@ -6068,7 +6158,7 @@
           <p:cNvPr id="3" name="TextBox 2">
             <a:extLst xmlns:a="http://schemas.openxmlformats.org/drawingml/2006/main">
               <a:ext uri="{FF2B5EF4-FFF2-40B4-BE49-F238E27FC236}">
-                <a16:creationId xmlns:a16="http://schemas.microsoft.com/office/drawing/2014/main" id="{00B567B0-698C-4773-BD34-5C12D22CA310}"/>
+                <a16:creationId xmlns:a16="http://schemas.microsoft.com/office/drawing/2014/main" id="{715B9817-7148-466B-BCCF-705B7730F2F5}"/>
               </a:ext>
             </a:extLst>
           </p:cNvPr>
@@ -6115,7 +6205,7 @@
           <p:cNvPr id="4" name="Rectangle 3">
             <a:extLst xmlns:a="http://schemas.openxmlformats.org/drawingml/2006/main">
               <a:ext uri="{FF2B5EF4-FFF2-40B4-BE49-F238E27FC236}">
-                <a16:creationId xmlns:a16="http://schemas.microsoft.com/office/drawing/2014/main" id="{FA945705-B7E1-409C-BE2E-C60D35E30586}"/>
+                <a16:creationId xmlns:a16="http://schemas.microsoft.com/office/drawing/2014/main" id="{81F6B468-7BEA-4F4D-A773-0B057A2C84BC}"/>
               </a:ext>
             </a:extLst>
           </p:cNvPr>
@@ -6170,7 +6260,7 @@
           <p:cNvPr id="5" name="Rectangle 4">
             <a:extLst xmlns:a="http://schemas.openxmlformats.org/drawingml/2006/main">
               <a:ext uri="{FF2B5EF4-FFF2-40B4-BE49-F238E27FC236}">
-                <a16:creationId xmlns:a16="http://schemas.microsoft.com/office/drawing/2014/main" id="{0EE6FDCE-3882-46DF-85C5-F6E17FFE750C}"/>
+                <a16:creationId xmlns:a16="http://schemas.microsoft.com/office/drawing/2014/main" id="{5B61527F-8D59-4C63-AC4A-BB061A0FDB63}"/>
               </a:ext>
             </a:extLst>
           </p:cNvPr>
@@ -6225,7 +6315,7 @@
           <p:cNvPr id="6" name="TextBox 5">
             <a:extLst xmlns:a="http://schemas.openxmlformats.org/drawingml/2006/main">
               <a:ext uri="{FF2B5EF4-FFF2-40B4-BE49-F238E27FC236}">
-                <a16:creationId xmlns:a16="http://schemas.microsoft.com/office/drawing/2014/main" id="{560A58FD-21BA-48C0-9BD6-9BC2558029D7}"/>
+                <a16:creationId xmlns:a16="http://schemas.microsoft.com/office/drawing/2014/main" id="{B1FD4116-3EBD-44E5-B846-A9318639DA8F}"/>
               </a:ext>
             </a:extLst>
           </p:cNvPr>
@@ -6262,7 +6352,7 @@
                 <a:ea typeface="Aptos"/>
                 <a:cs typeface="Aptos"/>
               </a:rPr>
-              <a:t>Julkinen riippumaton evidenssikooste · 2026.07.24-18 · 2026-07-24 · Lähteet: EPO Register; EP3032975B2; 8 Ni 18/24 (EP); 7 O 3341/24</a:t>
+              <a:t>Julkinen riippumaton evidenssikooste · 2026.07.24-19 · 2026-07-24 · Lähteet: EPO Register; EP3032975B2; 8 Ni 18/24 (EP); 7 O 3341/24</a:t>
             </a:r>
           </a:p>
         </p:txBody>
@@ -6272,7 +6362,7 @@
           <p:cNvPr id="7" name="TextBox 6">
             <a:extLst xmlns:a="http://schemas.openxmlformats.org/drawingml/2006/main">
               <a:ext uri="{FF2B5EF4-FFF2-40B4-BE49-F238E27FC236}">
-                <a16:creationId xmlns:a16="http://schemas.microsoft.com/office/drawing/2014/main" id="{1A095F32-5963-4DE3-AF38-A4EBD310B6A9}"/>
+                <a16:creationId xmlns:a16="http://schemas.microsoft.com/office/drawing/2014/main" id="{7931D011-D6B8-4569-8C68-142E70C1E7BA}"/>
               </a:ext>
             </a:extLst>
           </p:cNvPr>
@@ -6319,7 +6409,7 @@
           <p:cNvPr id="8" name="Rounded Rectangle 7">
             <a:extLst xmlns:a="http://schemas.openxmlformats.org/drawingml/2006/main">
               <a:ext uri="{FF2B5EF4-FFF2-40B4-BE49-F238E27FC236}">
-                <a16:creationId xmlns:a16="http://schemas.microsoft.com/office/drawing/2014/main" id="{F369EE14-365E-41B3-86E8-44816A61F015}"/>
+                <a16:creationId xmlns:a16="http://schemas.microsoft.com/office/drawing/2014/main" id="{7D6BE880-CA2B-4089-B736-C6E92CFEC825}"/>
               </a:ext>
             </a:extLst>
           </p:cNvPr>
@@ -6376,7 +6466,7 @@
           <p:cNvPr id="9" name="TextBox 8">
             <a:extLst xmlns:a="http://schemas.openxmlformats.org/drawingml/2006/main">
               <a:ext uri="{FF2B5EF4-FFF2-40B4-BE49-F238E27FC236}">
-                <a16:creationId xmlns:a16="http://schemas.microsoft.com/office/drawing/2014/main" id="{D192A503-64B3-4794-A89A-2E59D743A605}"/>
+                <a16:creationId xmlns:a16="http://schemas.microsoft.com/office/drawing/2014/main" id="{CD3502AC-6F4C-4AD0-8C2F-69EDDD4EF16E}"/>
               </a:ext>
             </a:extLst>
           </p:cNvPr>
@@ -6423,7 +6513,7 @@
           <p:cNvPr id="10" name="TextBox 9">
             <a:extLst xmlns:a="http://schemas.openxmlformats.org/drawingml/2006/main">
               <a:ext uri="{FF2B5EF4-FFF2-40B4-BE49-F238E27FC236}">
-                <a16:creationId xmlns:a16="http://schemas.microsoft.com/office/drawing/2014/main" id="{0950117D-1DD5-4403-988F-311C25CA7544}"/>
+                <a16:creationId xmlns:a16="http://schemas.microsoft.com/office/drawing/2014/main" id="{DE08C145-BB5E-4B30-AB45-84ACC33AD8D6}"/>
               </a:ext>
             </a:extLst>
           </p:cNvPr>
@@ -6470,7 +6560,7 @@
           <p:cNvPr id="11" name="Rounded Rectangle 10">
             <a:extLst xmlns:a="http://schemas.openxmlformats.org/drawingml/2006/main">
               <a:ext uri="{FF2B5EF4-FFF2-40B4-BE49-F238E27FC236}">
-                <a16:creationId xmlns:a16="http://schemas.microsoft.com/office/drawing/2014/main" id="{8E01709C-2624-4810-902C-EB2937563E68}"/>
+                <a16:creationId xmlns:a16="http://schemas.microsoft.com/office/drawing/2014/main" id="{D4FEA2DB-3DE1-4C26-A075-4F86166A2842}"/>
               </a:ext>
             </a:extLst>
           </p:cNvPr>
@@ -6527,7 +6617,7 @@
           <p:cNvPr id="12" name="TextBox 11">
             <a:extLst xmlns:a="http://schemas.openxmlformats.org/drawingml/2006/main">
               <a:ext uri="{FF2B5EF4-FFF2-40B4-BE49-F238E27FC236}">
-                <a16:creationId xmlns:a16="http://schemas.microsoft.com/office/drawing/2014/main" id="{C6CB73A0-2C31-4C54-9691-6A40E4DB1884}"/>
+                <a16:creationId xmlns:a16="http://schemas.microsoft.com/office/drawing/2014/main" id="{B972346F-7865-4CE6-9CCD-ACF32A0D8B28}"/>
               </a:ext>
             </a:extLst>
           </p:cNvPr>
@@ -6574,7 +6664,7 @@
           <p:cNvPr id="13" name="TextBox 12">
             <a:extLst xmlns:a="http://schemas.openxmlformats.org/drawingml/2006/main">
               <a:ext uri="{FF2B5EF4-FFF2-40B4-BE49-F238E27FC236}">
-                <a16:creationId xmlns:a16="http://schemas.microsoft.com/office/drawing/2014/main" id="{5C0A10FF-4BA3-4E07-A689-D76920E7DA79}"/>
+                <a16:creationId xmlns:a16="http://schemas.microsoft.com/office/drawing/2014/main" id="{D22AA670-1DF0-467E-93A1-A79207A48411}"/>
               </a:ext>
             </a:extLst>
           </p:cNvPr>
@@ -6621,7 +6711,7 @@
           <p:cNvPr id="14" name="Rounded Rectangle 13">
             <a:extLst xmlns:a="http://schemas.openxmlformats.org/drawingml/2006/main">
               <a:ext uri="{FF2B5EF4-FFF2-40B4-BE49-F238E27FC236}">
-                <a16:creationId xmlns:a16="http://schemas.microsoft.com/office/drawing/2014/main" id="{DB80E3D8-1D0C-4744-BF10-16D412349E1A}"/>
+                <a16:creationId xmlns:a16="http://schemas.microsoft.com/office/drawing/2014/main" id="{0DC7AB65-8A3F-4F99-8C1D-9B0A0AD88CC4}"/>
               </a:ext>
             </a:extLst>
           </p:cNvPr>
@@ -6678,7 +6768,7 @@
           <p:cNvPr id="15" name="TextBox 14">
             <a:extLst xmlns:a="http://schemas.openxmlformats.org/drawingml/2006/main">
               <a:ext uri="{FF2B5EF4-FFF2-40B4-BE49-F238E27FC236}">
-                <a16:creationId xmlns:a16="http://schemas.microsoft.com/office/drawing/2014/main" id="{EC5AE420-6ADA-4AE7-8C27-62AA2A352248}"/>
+                <a16:creationId xmlns:a16="http://schemas.microsoft.com/office/drawing/2014/main" id="{8EC3D69E-9A43-4BB7-9D79-5A95E0EFB9CA}"/>
               </a:ext>
             </a:extLst>
           </p:cNvPr>
@@ -6725,7 +6815,7 @@
           <p:cNvPr id="16" name="TextBox 15">
             <a:extLst xmlns:a="http://schemas.openxmlformats.org/drawingml/2006/main">
               <a:ext uri="{FF2B5EF4-FFF2-40B4-BE49-F238E27FC236}">
-                <a16:creationId xmlns:a16="http://schemas.microsoft.com/office/drawing/2014/main" id="{FA5BF788-369C-4FB2-BD74-059017C5100E}"/>
+                <a16:creationId xmlns:a16="http://schemas.microsoft.com/office/drawing/2014/main" id="{56B80351-4179-400C-8520-A1C190219F65}"/>
               </a:ext>
             </a:extLst>
           </p:cNvPr>
@@ -6772,7 +6862,7 @@
           <p:cNvPr id="17" name="TextBox 16">
             <a:extLst xmlns:a="http://schemas.openxmlformats.org/drawingml/2006/main">
               <a:ext uri="{FF2B5EF4-FFF2-40B4-BE49-F238E27FC236}">
-                <a16:creationId xmlns:a16="http://schemas.microsoft.com/office/drawing/2014/main" id="{5E95A349-B18D-4BC7-8980-C21850BA6EB1}"/>
+                <a16:creationId xmlns:a16="http://schemas.microsoft.com/office/drawing/2014/main" id="{7656E69D-EBBD-4204-B99E-0F4941B7ADA5}"/>
               </a:ext>
             </a:extLst>
           </p:cNvPr>
@@ -6819,7 +6909,7 @@
           <p:cNvPr id="18" name="Rounded Rectangle 17">
             <a:extLst xmlns:a="http://schemas.openxmlformats.org/drawingml/2006/main">
               <a:ext uri="{FF2B5EF4-FFF2-40B4-BE49-F238E27FC236}">
-                <a16:creationId xmlns:a16="http://schemas.microsoft.com/office/drawing/2014/main" id="{861E862F-0B3F-489A-99F1-804FE7E50BFC}"/>
+                <a16:creationId xmlns:a16="http://schemas.microsoft.com/office/drawing/2014/main" id="{58F5A8E6-A9C7-4892-99DA-6C4709D3B930}"/>
               </a:ext>
             </a:extLst>
           </p:cNvPr>
@@ -6876,7 +6966,7 @@
           <p:cNvPr id="19" name="TextBox 18">
             <a:extLst xmlns:a="http://schemas.openxmlformats.org/drawingml/2006/main">
               <a:ext uri="{FF2B5EF4-FFF2-40B4-BE49-F238E27FC236}">
-                <a16:creationId xmlns:a16="http://schemas.microsoft.com/office/drawing/2014/main" id="{E4E165FC-6F4A-47CD-B59A-803985E278A0}"/>
+                <a16:creationId xmlns:a16="http://schemas.microsoft.com/office/drawing/2014/main" id="{CB223BD5-A409-4B4B-8D34-3C6F3683FAED}"/>
               </a:ext>
             </a:extLst>
           </p:cNvPr>
@@ -6923,7 +7013,7 @@
           <p:cNvPr id="20" name="TextBox 19">
             <a:extLst xmlns:a="http://schemas.openxmlformats.org/drawingml/2006/main">
               <a:ext uri="{FF2B5EF4-FFF2-40B4-BE49-F238E27FC236}">
-                <a16:creationId xmlns:a16="http://schemas.microsoft.com/office/drawing/2014/main" id="{BC6965B2-31E4-4234-87FB-B51366A94994}"/>
+                <a16:creationId xmlns:a16="http://schemas.microsoft.com/office/drawing/2014/main" id="{9F0E355C-AA8B-4A17-B242-DA66981CDABE}"/>
               </a:ext>
             </a:extLst>
           </p:cNvPr>
@@ -6968,7 +7058,7 @@
     </p:spTree>
     <p:extLst>
       <p:ext uri="{BB962C8B-B14F-4D97-AF65-F5344CB8AC3E}">
-        <p14:creationId xmlns:p14="http://schemas.microsoft.com/office/powerpoint/2010/main" val="379056883"/>
+        <p14:creationId xmlns:p14="http://schemas.microsoft.com/office/powerpoint/2010/main" val="251220599"/>
       </p:ext>
     </p:extLst>
   </p:cSld>
@@ -6992,7 +7082,7 @@
           <p:cNvPr id="2" name="TextBox 1">
             <a:extLst xmlns:a="http://schemas.openxmlformats.org/drawingml/2006/main">
               <a:ext uri="{FF2B5EF4-FFF2-40B4-BE49-F238E27FC236}">
-                <a16:creationId xmlns:a16="http://schemas.microsoft.com/office/drawing/2014/main" id="{35B3A4C5-6AE2-46D5-BD4A-912D8C2888F7}"/>
+                <a16:creationId xmlns:a16="http://schemas.microsoft.com/office/drawing/2014/main" id="{4C5B1369-2977-4BF9-907C-E16C3A6D1124}"/>
               </a:ext>
             </a:extLst>
           </p:cNvPr>
@@ -7039,7 +7129,7 @@
           <p:cNvPr id="3" name="TextBox 2">
             <a:extLst xmlns:a="http://schemas.openxmlformats.org/drawingml/2006/main">
               <a:ext uri="{FF2B5EF4-FFF2-40B4-BE49-F238E27FC236}">
-                <a16:creationId xmlns:a16="http://schemas.microsoft.com/office/drawing/2014/main" id="{BD9B30FB-00B4-4687-8284-79EAD69C394F}"/>
+                <a16:creationId xmlns:a16="http://schemas.microsoft.com/office/drawing/2014/main" id="{EF6EE112-76F0-48AF-ABE6-45E15493A848}"/>
               </a:ext>
             </a:extLst>
           </p:cNvPr>
@@ -7086,7 +7176,7 @@
           <p:cNvPr id="4" name="Rectangle 3">
             <a:extLst xmlns:a="http://schemas.openxmlformats.org/drawingml/2006/main">
               <a:ext uri="{FF2B5EF4-FFF2-40B4-BE49-F238E27FC236}">
-                <a16:creationId xmlns:a16="http://schemas.microsoft.com/office/drawing/2014/main" id="{9E44694F-5A51-4DD6-938A-D97F0FACEDD2}"/>
+                <a16:creationId xmlns:a16="http://schemas.microsoft.com/office/drawing/2014/main" id="{971EA3E6-D6B0-47EC-A955-82E816137A98}"/>
               </a:ext>
             </a:extLst>
           </p:cNvPr>
@@ -7141,7 +7231,7 @@
           <p:cNvPr id="5" name="Rectangle 4">
             <a:extLst xmlns:a="http://schemas.openxmlformats.org/drawingml/2006/main">
               <a:ext uri="{FF2B5EF4-FFF2-40B4-BE49-F238E27FC236}">
-                <a16:creationId xmlns:a16="http://schemas.microsoft.com/office/drawing/2014/main" id="{880E5463-9A59-4268-9DEC-D23FF5FFC307}"/>
+                <a16:creationId xmlns:a16="http://schemas.microsoft.com/office/drawing/2014/main" id="{90E8D63B-CF9A-48DE-A07F-73844FA7F29F}"/>
               </a:ext>
             </a:extLst>
           </p:cNvPr>
@@ -7196,7 +7286,7 @@
           <p:cNvPr id="6" name="TextBox 5">
             <a:extLst xmlns:a="http://schemas.openxmlformats.org/drawingml/2006/main">
               <a:ext uri="{FF2B5EF4-FFF2-40B4-BE49-F238E27FC236}">
-                <a16:creationId xmlns:a16="http://schemas.microsoft.com/office/drawing/2014/main" id="{241095C9-20B4-40A1-80C8-7A43A5210417}"/>
+                <a16:creationId xmlns:a16="http://schemas.microsoft.com/office/drawing/2014/main" id="{F0D009FE-4BDA-4A11-95C5-C6DCFDA49B23}"/>
               </a:ext>
             </a:extLst>
           </p:cNvPr>
@@ -7208,7 +7298,7 @@
         <p:spPr>
           <a:xfrm xmlns:a="http://schemas.openxmlformats.org/drawingml/2006/main">
             <a:off x="384048" y="6556248"/>
-            <a:ext cx="10835640" cy="202692"/>
+            <a:ext cx="10835640" cy="332232"/>
           </a:xfrm>
           <a:prstGeom xmlns:a="http://schemas.openxmlformats.org/drawingml/2006/main" prst="rect">
             <a:avLst/>
@@ -7233,7 +7323,7 @@
                 <a:ea typeface="Aptos"/>
                 <a:cs typeface="Aptos"/>
               </a:rPr>
-              <a:t>Julkinen riippumaton evidenssikooste · 2026.07.24-18 · 2026-07-24 · Lähteet: Health Canada; New Zealand Ministry of Health; Destatis; Vero; Sejm; Ruotsin hallitus; FTC; European Commission; IMARC; GVR; Fortune</a:t>
+              <a:t>Julkinen riippumaton evidenssikooste · 2026.07.24-19 · 2026-07-24 · Lähteet: Statistics Canada; Health Canada; New Zealand Ministry of Health; Destatis; Vero; Sejm; Ruotsin hallitus; FTC; European Commission; IMARC; GVR; Fortune</a:t>
             </a:r>
           </a:p>
         </p:txBody>
@@ -7243,7 +7333,7 @@
           <p:cNvPr id="7" name="TextBox 6">
             <a:extLst xmlns:a="http://schemas.openxmlformats.org/drawingml/2006/main">
               <a:ext uri="{FF2B5EF4-FFF2-40B4-BE49-F238E27FC236}">
-                <a16:creationId xmlns:a16="http://schemas.microsoft.com/office/drawing/2014/main" id="{4A9E4824-48B0-4CC8-885C-BC9E3B138C0F}"/>
+                <a16:creationId xmlns:a16="http://schemas.microsoft.com/office/drawing/2014/main" id="{8EA6F9BE-264F-41C3-942C-38A45AB75881}"/>
               </a:ext>
             </a:extLst>
           </p:cNvPr>
@@ -7290,7 +7380,7 @@
           <p:cNvPr id="8" name="Rounded Rectangle 7">
             <a:extLst xmlns:a="http://schemas.openxmlformats.org/drawingml/2006/main">
               <a:ext uri="{FF2B5EF4-FFF2-40B4-BE49-F238E27FC236}">
-                <a16:creationId xmlns:a16="http://schemas.microsoft.com/office/drawing/2014/main" id="{F48DB205-E8F4-45C9-9216-DDE92A70066A}"/>
+                <a16:creationId xmlns:a16="http://schemas.microsoft.com/office/drawing/2014/main" id="{70FB1117-9BA6-47DD-9C79-15909803579E}"/>
               </a:ext>
             </a:extLst>
           </p:cNvPr>
@@ -7347,7 +7437,7 @@
           <p:cNvPr id="9" name="TextBox 8">
             <a:extLst xmlns:a="http://schemas.openxmlformats.org/drawingml/2006/main">
               <a:ext uri="{FF2B5EF4-FFF2-40B4-BE49-F238E27FC236}">
-                <a16:creationId xmlns:a16="http://schemas.microsoft.com/office/drawing/2014/main" id="{25231051-9C25-4124-8E70-4A6F668491B0}"/>
+                <a16:creationId xmlns:a16="http://schemas.microsoft.com/office/drawing/2014/main" id="{8D6724A3-F956-4573-A380-1CBB9D16FD2E}"/>
               </a:ext>
             </a:extLst>
           </p:cNvPr>
@@ -7384,7 +7474,7 @@
                 <a:ea typeface="Aptos"/>
                 <a:cs typeface="Aptos"/>
               </a:rPr>
-              <a:t>27</a:t>
+              <a:t>34</a:t>
             </a:r>
           </a:p>
         </p:txBody>
@@ -7394,7 +7484,7 @@
           <p:cNvPr id="10" name="TextBox 9">
             <a:extLst xmlns:a="http://schemas.openxmlformats.org/drawingml/2006/main">
               <a:ext uri="{FF2B5EF4-FFF2-40B4-BE49-F238E27FC236}">
-                <a16:creationId xmlns:a16="http://schemas.microsoft.com/office/drawing/2014/main" id="{3A15512D-4629-4762-A1A0-3C28F9DF6DC3}"/>
+                <a16:creationId xmlns:a16="http://schemas.microsoft.com/office/drawing/2014/main" id="{C66BF791-255A-4E33-A763-D8A9D30BD8A2}"/>
               </a:ext>
             </a:extLst>
           </p:cNvPr>
@@ -7441,7 +7531,7 @@
           <p:cNvPr id="11" name="Rounded Rectangle 10">
             <a:extLst xmlns:a="http://schemas.openxmlformats.org/drawingml/2006/main">
               <a:ext uri="{FF2B5EF4-FFF2-40B4-BE49-F238E27FC236}">
-                <a16:creationId xmlns:a16="http://schemas.microsoft.com/office/drawing/2014/main" id="{640D3303-CB00-4094-8F37-6A6DF1E92C42}"/>
+                <a16:creationId xmlns:a16="http://schemas.microsoft.com/office/drawing/2014/main" id="{84CAA8F9-AEC0-4F97-BA1D-37855D66376C}"/>
               </a:ext>
             </a:extLst>
           </p:cNvPr>
@@ -7498,7 +7588,7 @@
           <p:cNvPr id="12" name="TextBox 11">
             <a:extLst xmlns:a="http://schemas.openxmlformats.org/drawingml/2006/main">
               <a:ext uri="{FF2B5EF4-FFF2-40B4-BE49-F238E27FC236}">
-                <a16:creationId xmlns:a16="http://schemas.microsoft.com/office/drawing/2014/main" id="{89EF1210-E09A-4587-B7F3-390F5E06A743}"/>
+                <a16:creationId xmlns:a16="http://schemas.microsoft.com/office/drawing/2014/main" id="{1F2D3100-FCFC-4CF9-9C7A-25DA71800573}"/>
               </a:ext>
             </a:extLst>
           </p:cNvPr>
@@ -7545,7 +7635,7 @@
           <p:cNvPr id="13" name="TextBox 12">
             <a:extLst xmlns:a="http://schemas.openxmlformats.org/drawingml/2006/main">
               <a:ext uri="{FF2B5EF4-FFF2-40B4-BE49-F238E27FC236}">
-                <a16:creationId xmlns:a16="http://schemas.microsoft.com/office/drawing/2014/main" id="{2FFE59D2-6387-43E7-BBC9-B6E5DD3C73B5}"/>
+                <a16:creationId xmlns:a16="http://schemas.microsoft.com/office/drawing/2014/main" id="{7DE0E709-CA03-4CF2-9E21-32521B20DC6C}"/>
               </a:ext>
             </a:extLst>
           </p:cNvPr>
@@ -7592,7 +7682,7 @@
           <p:cNvPr id="14" name="Rounded Rectangle 13">
             <a:extLst xmlns:a="http://schemas.openxmlformats.org/drawingml/2006/main">
               <a:ext uri="{FF2B5EF4-FFF2-40B4-BE49-F238E27FC236}">
-                <a16:creationId xmlns:a16="http://schemas.microsoft.com/office/drawing/2014/main" id="{CD1AB598-E069-4E35-A9CE-DCC236BB6291}"/>
+                <a16:creationId xmlns:a16="http://schemas.microsoft.com/office/drawing/2014/main" id="{317A1F12-D6FB-4D7E-89F4-6E81B35199C8}"/>
               </a:ext>
             </a:extLst>
           </p:cNvPr>
@@ -7649,7 +7739,7 @@
           <p:cNvPr id="15" name="TextBox 14">
             <a:extLst xmlns:a="http://schemas.openxmlformats.org/drawingml/2006/main">
               <a:ext uri="{FF2B5EF4-FFF2-40B4-BE49-F238E27FC236}">
-                <a16:creationId xmlns:a16="http://schemas.microsoft.com/office/drawing/2014/main" id="{99E1F715-23F0-4BEC-AC13-DF3D7F452DCD}"/>
+                <a16:creationId xmlns:a16="http://schemas.microsoft.com/office/drawing/2014/main" id="{7175DE55-3C06-4B96-9244-ECE8E67DACC0}"/>
               </a:ext>
             </a:extLst>
           </p:cNvPr>
@@ -7696,7 +7786,7 @@
           <p:cNvPr id="16" name="TextBox 15">
             <a:extLst xmlns:a="http://schemas.openxmlformats.org/drawingml/2006/main">
               <a:ext uri="{FF2B5EF4-FFF2-40B4-BE49-F238E27FC236}">
-                <a16:creationId xmlns:a16="http://schemas.microsoft.com/office/drawing/2014/main" id="{81EAE20C-0CD2-4D91-85A2-B43429741E58}"/>
+                <a16:creationId xmlns:a16="http://schemas.microsoft.com/office/drawing/2014/main" id="{81F5DAE4-84FA-4D27-981F-E3631FCE716A}"/>
               </a:ext>
             </a:extLst>
           </p:cNvPr>
@@ -7743,7 +7833,7 @@
           <p:cNvPr id="17" name="TextBox 16">
             <a:extLst xmlns:a="http://schemas.openxmlformats.org/drawingml/2006/main">
               <a:ext uri="{FF2B5EF4-FFF2-40B4-BE49-F238E27FC236}">
-                <a16:creationId xmlns:a16="http://schemas.microsoft.com/office/drawing/2014/main" id="{2838B5FA-39C9-43E5-9819-865161691C1C}"/>
+                <a16:creationId xmlns:a16="http://schemas.microsoft.com/office/drawing/2014/main" id="{D00692AA-6F99-479A-90D6-4FF41D10EF13}"/>
               </a:ext>
             </a:extLst>
           </p:cNvPr>
@@ -7790,7 +7880,7 @@
           <p:cNvPr id="18" name="Rounded Rectangle 17">
             <a:extLst xmlns:a="http://schemas.openxmlformats.org/drawingml/2006/main">
               <a:ext uri="{FF2B5EF4-FFF2-40B4-BE49-F238E27FC236}">
-                <a16:creationId xmlns:a16="http://schemas.microsoft.com/office/drawing/2014/main" id="{FB84B3D4-52E3-4848-9383-28EB66115BCB}"/>
+                <a16:creationId xmlns:a16="http://schemas.microsoft.com/office/drawing/2014/main" id="{2D610834-0FBF-4040-9B63-565372E05D6B}"/>
               </a:ext>
             </a:extLst>
           </p:cNvPr>
@@ -7847,7 +7937,7 @@
           <p:cNvPr id="19" name="TextBox 18">
             <a:extLst xmlns:a="http://schemas.openxmlformats.org/drawingml/2006/main">
               <a:ext uri="{FF2B5EF4-FFF2-40B4-BE49-F238E27FC236}">
-                <a16:creationId xmlns:a16="http://schemas.microsoft.com/office/drawing/2014/main" id="{57DB7C3D-2DA2-41BD-9764-9DEED583BF63}"/>
+                <a16:creationId xmlns:a16="http://schemas.microsoft.com/office/drawing/2014/main" id="{F4C4D643-4611-4C06-B2DF-8C374BD31C66}"/>
               </a:ext>
             </a:extLst>
           </p:cNvPr>
@@ -7894,7 +7984,7 @@
           <p:cNvPr id="20" name="TextBox 19">
             <a:extLst xmlns:a="http://schemas.openxmlformats.org/drawingml/2006/main">
               <a:ext uri="{FF2B5EF4-FFF2-40B4-BE49-F238E27FC236}">
-                <a16:creationId xmlns:a16="http://schemas.microsoft.com/office/drawing/2014/main" id="{53B7D3B5-204C-47AC-BAFE-28D36C009C4B}"/>
+                <a16:creationId xmlns:a16="http://schemas.microsoft.com/office/drawing/2014/main" id="{407C2A4C-0A93-4680-AC95-29F727077C0A}"/>
               </a:ext>
             </a:extLst>
           </p:cNvPr>
@@ -7906,7 +7996,7 @@
         <p:spPr>
           <a:xfrm xmlns:a="http://schemas.openxmlformats.org/drawingml/2006/main">
             <a:off x="731520" y="5038344"/>
-            <a:ext cx="10597896" cy="530352"/>
+            <a:ext cx="10597896" cy="758952"/>
           </a:xfrm>
           <a:prstGeom xmlns:a="http://schemas.openxmlformats.org/drawingml/2006/main" prst="rect">
             <a:avLst/>
@@ -7923,7 +8013,7 @@
               <a:buNone/>
             </a:pPr>
             <a:r>
-              <a:rPr sz="1500" b="0">
+              <a:rPr sz="1350" b="0">
                 <a:solidFill>
                   <a:srgbClr val="182935"/>
                 </a:solidFill>
@@ -7931,7 +8021,7 @@
                 <a:ea typeface="Aptos"/>
                 <a:cs typeface="Aptos"/>
               </a:rPr>
-              <a:t>NZ 2024: 533,7–731,2 milj. NZD (≈298,5–408,9 milj. EUR; ECB 2024) on tuettu malli. FTC 2021: 2,763 mrd USD (≈2,336 mrd EUR; ECB 2021) on valmistajaraportointia. EU- ja kaupallisia lukuja ei summata.</a:t>
+              <a:t>Kanada 2024: retail 1,219 mrd CAD (≈822,6 milj. EUR; ECB 2024); toimitukset 1,161 mrd CAD (≈783,2 milj. EUR; ECB 2024); kaikki retail-neljännekset E-laatua. NZ on malli; FTC 2021 2,763 mrd USD (≈2,336 mrd EUR; ECB 2021) on valmistajaraportointia. Mittareita ei summata.</a:t>
             </a:r>
           </a:p>
         </p:txBody>
@@ -7939,7 +8029,7 @@
     </p:spTree>
     <p:extLst>
       <p:ext uri="{BB962C8B-B14F-4D97-AF65-F5344CB8AC3E}">
-        <p14:creationId xmlns:p14="http://schemas.microsoft.com/office/powerpoint/2010/main" val="1447991158"/>
+        <p14:creationId xmlns:p14="http://schemas.microsoft.com/office/powerpoint/2010/main" val="516382949"/>
       </p:ext>
     </p:extLst>
   </p:cSld>
@@ -7963,7 +8053,7 @@
           <p:cNvPr id="2" name="TextBox 1">
             <a:extLst xmlns:a="http://schemas.openxmlformats.org/drawingml/2006/main">
               <a:ext uri="{FF2B5EF4-FFF2-40B4-BE49-F238E27FC236}">
-                <a16:creationId xmlns:a16="http://schemas.microsoft.com/office/drawing/2014/main" id="{C2B75F4D-CFA5-4990-BCEA-891A49976302}"/>
+                <a16:creationId xmlns:a16="http://schemas.microsoft.com/office/drawing/2014/main" id="{E5AA089E-CC4B-4073-8F47-9C989671F854}"/>
               </a:ext>
             </a:extLst>
           </p:cNvPr>
@@ -8010,7 +8100,7 @@
           <p:cNvPr id="3" name="TextBox 2">
             <a:extLst xmlns:a="http://schemas.openxmlformats.org/drawingml/2006/main">
               <a:ext uri="{FF2B5EF4-FFF2-40B4-BE49-F238E27FC236}">
-                <a16:creationId xmlns:a16="http://schemas.microsoft.com/office/drawing/2014/main" id="{411240B2-0C43-4B1D-86B0-64C1D1907A7D}"/>
+                <a16:creationId xmlns:a16="http://schemas.microsoft.com/office/drawing/2014/main" id="{E37AF433-1CC9-4156-A247-C0C8AB54BB15}"/>
               </a:ext>
             </a:extLst>
           </p:cNvPr>
@@ -8057,7 +8147,7 @@
           <p:cNvPr id="4" name="Rectangle 3">
             <a:extLst xmlns:a="http://schemas.openxmlformats.org/drawingml/2006/main">
               <a:ext uri="{FF2B5EF4-FFF2-40B4-BE49-F238E27FC236}">
-                <a16:creationId xmlns:a16="http://schemas.microsoft.com/office/drawing/2014/main" id="{1FE674ED-8309-4D32-8E19-DDD4839A025C}"/>
+                <a16:creationId xmlns:a16="http://schemas.microsoft.com/office/drawing/2014/main" id="{A47A7434-C54B-4B82-8923-9C5B42E5C00D}"/>
               </a:ext>
             </a:extLst>
           </p:cNvPr>
@@ -8112,7 +8202,7 @@
           <p:cNvPr id="5" name="Rectangle 4">
             <a:extLst xmlns:a="http://schemas.openxmlformats.org/drawingml/2006/main">
               <a:ext uri="{FF2B5EF4-FFF2-40B4-BE49-F238E27FC236}">
-                <a16:creationId xmlns:a16="http://schemas.microsoft.com/office/drawing/2014/main" id="{F21D7D4A-8E23-423A-A677-B887CE53BD86}"/>
+                <a16:creationId xmlns:a16="http://schemas.microsoft.com/office/drawing/2014/main" id="{9E6BF123-8D9E-434B-A862-85C261756AFA}"/>
               </a:ext>
             </a:extLst>
           </p:cNvPr>
@@ -8167,7 +8257,7 @@
           <p:cNvPr id="6" name="TextBox 5">
             <a:extLst xmlns:a="http://schemas.openxmlformats.org/drawingml/2006/main">
               <a:ext uri="{FF2B5EF4-FFF2-40B4-BE49-F238E27FC236}">
-                <a16:creationId xmlns:a16="http://schemas.microsoft.com/office/drawing/2014/main" id="{285B2DA1-2513-4F96-9124-244D3EDA0DD5}"/>
+                <a16:creationId xmlns:a16="http://schemas.microsoft.com/office/drawing/2014/main" id="{D03CE3F8-6C59-48AB-8BC5-EF73BF45AB4F}"/>
               </a:ext>
             </a:extLst>
           </p:cNvPr>
@@ -8204,7 +8294,7 @@
                 <a:ea typeface="Aptos"/>
                 <a:cs typeface="Aptos"/>
               </a:rPr>
-              <a:t>Julkinen riippumaton evidenssikooste · 2026.07.24-18 · 2026-07-24 · Lähteet: Evidence Register; WIPO IP valuation</a:t>
+              <a:t>Julkinen riippumaton evidenssikooste · 2026.07.24-19 · 2026-07-24 · Lähteet: Evidence Register; WIPO IP valuation</a:t>
             </a:r>
           </a:p>
         </p:txBody>
@@ -8214,7 +8304,7 @@
           <p:cNvPr id="7" name="TextBox 6">
             <a:extLst xmlns:a="http://schemas.openxmlformats.org/drawingml/2006/main">
               <a:ext uri="{FF2B5EF4-FFF2-40B4-BE49-F238E27FC236}">
-                <a16:creationId xmlns:a16="http://schemas.microsoft.com/office/drawing/2014/main" id="{094AF5B1-4FD1-4116-A06D-976EBEA51C14}"/>
+                <a16:creationId xmlns:a16="http://schemas.microsoft.com/office/drawing/2014/main" id="{8D6EE813-CBA8-4580-AEFE-1391F090E1B2}"/>
               </a:ext>
             </a:extLst>
           </p:cNvPr>
@@ -8701,7 +8791,7 @@
           <p:cNvPr id="9" name="TextBox 8">
             <a:extLst xmlns:a="http://schemas.openxmlformats.org/drawingml/2006/main">
               <a:ext uri="{FF2B5EF4-FFF2-40B4-BE49-F238E27FC236}">
-                <a16:creationId xmlns:a16="http://schemas.microsoft.com/office/drawing/2014/main" id="{4CBB80BC-B978-424F-8988-4F8787D02EF3}"/>
+                <a16:creationId xmlns:a16="http://schemas.microsoft.com/office/drawing/2014/main" id="{1950D416-1788-48C0-A08D-FC85FD4F6176}"/>
               </a:ext>
             </a:extLst>
           </p:cNvPr>
@@ -8746,7 +8836,7 @@
     </p:spTree>
     <p:extLst>
       <p:ext uri="{BB962C8B-B14F-4D97-AF65-F5344CB8AC3E}">
-        <p14:creationId xmlns:p14="http://schemas.microsoft.com/office/powerpoint/2010/main" val="135524241"/>
+        <p14:creationId xmlns:p14="http://schemas.microsoft.com/office/powerpoint/2010/main" val="863007302"/>
       </p:ext>
     </p:extLst>
   </p:cSld>
@@ -8777,7 +8867,7 @@
           <p:cNvPr id="2" name="TextBox 1">
             <a:extLst xmlns:a="http://schemas.openxmlformats.org/drawingml/2006/main">
               <a:ext uri="{FF2B5EF4-FFF2-40B4-BE49-F238E27FC236}">
-                <a16:creationId xmlns:a16="http://schemas.microsoft.com/office/drawing/2014/main" id="{54F2721C-ECF1-4AE1-ADC5-76A3474E5F36}"/>
+                <a16:creationId xmlns:a16="http://schemas.microsoft.com/office/drawing/2014/main" id="{074870F6-D7FD-454F-A073-A84F6193C581}"/>
               </a:ext>
             </a:extLst>
           </p:cNvPr>
@@ -8824,7 +8914,7 @@
           <p:cNvPr id="3" name="TextBox 2">
             <a:extLst xmlns:a="http://schemas.openxmlformats.org/drawingml/2006/main">
               <a:ext uri="{FF2B5EF4-FFF2-40B4-BE49-F238E27FC236}">
-                <a16:creationId xmlns:a16="http://schemas.microsoft.com/office/drawing/2014/main" id="{43B05424-A531-4C03-9C0D-73EEDB8D10CE}"/>
+                <a16:creationId xmlns:a16="http://schemas.microsoft.com/office/drawing/2014/main" id="{CD642566-D1C2-4190-8DFE-3D0EA8BB2000}"/>
               </a:ext>
             </a:extLst>
           </p:cNvPr>
@@ -8871,7 +8961,7 @@
           <p:cNvPr id="4" name="TextBox 3">
             <a:extLst xmlns:a="http://schemas.openxmlformats.org/drawingml/2006/main">
               <a:ext uri="{FF2B5EF4-FFF2-40B4-BE49-F238E27FC236}">
-                <a16:creationId xmlns:a16="http://schemas.microsoft.com/office/drawing/2014/main" id="{FA99DFA7-A1E4-47B6-81B5-574AECC1650C}"/>
+                <a16:creationId xmlns:a16="http://schemas.microsoft.com/office/drawing/2014/main" id="{53D121C3-7BDE-40A4-8C1B-E3593E29E106}"/>
               </a:ext>
             </a:extLst>
           </p:cNvPr>
@@ -8990,7 +9080,7 @@
           <p:cNvPr id="5" name="TextBox 4">
             <a:extLst xmlns:a="http://schemas.openxmlformats.org/drawingml/2006/main">
               <a:ext uri="{FF2B5EF4-FFF2-40B4-BE49-F238E27FC236}">
-                <a16:creationId xmlns:a16="http://schemas.microsoft.com/office/drawing/2014/main" id="{E3624B88-34F5-4187-B829-653617DA1CA5}"/>
+                <a16:creationId xmlns:a16="http://schemas.microsoft.com/office/drawing/2014/main" id="{F388E819-C651-404B-A09F-6A6A4815CCB8}"/>
               </a:ext>
             </a:extLst>
           </p:cNvPr>
@@ -9027,7 +9117,7 @@
                 <a:ea typeface="Aptos"/>
                 <a:cs typeface="Aptos"/>
               </a:rPr>
-              <a:t>Versio 2026.07.24-18 · 2026-07-24 · 6 / 6</a:t>
+              <a:t>Versio 2026.07.24-19 · 2026-07-24 · 6 / 6</a:t>
             </a:r>
           </a:p>
         </p:txBody>
@@ -9035,7 +9125,7 @@
     </p:spTree>
     <p:extLst>
       <p:ext uri="{BB962C8B-B14F-4D97-AF65-F5344CB8AC3E}">
-        <p14:creationId xmlns:p14="http://schemas.microsoft.com/office/powerpoint/2010/main" val="514067841"/>
+        <p14:creationId xmlns:p14="http://schemas.microsoft.com/office/powerpoint/2010/main" val="1291491522"/>
       </p:ext>
     </p:extLst>
   </p:cSld>

--- a/site/downloads/pixan-bank-deck-short-fi.pptx
+++ b/site/downloads/pixan-bank-deck-short-fi.pptx
@@ -2,18 +2,18 @@
 <file path=ppt/presentation.xml><?xml version="1.0" encoding="utf-8"?>
 <p:presentation xmlns:p="http://schemas.openxmlformats.org/presentationml/2006/main">
   <p:sldMasterIdLst>
-    <p:sldMasterId xmlns:r="http://schemas.openxmlformats.org/officeDocument/2006/relationships" id="2147483648" r:id="R270f0a7e6201459d"/>
+    <p:sldMasterId xmlns:r="http://schemas.openxmlformats.org/officeDocument/2006/relationships" id="2147483648" r:id="R570db31ceff84f9b"/>
   </p:sldMasterIdLst>
   <p:notesMasterIdLst>
-    <p:notesMasterId xmlns:r="http://schemas.openxmlformats.org/officeDocument/2006/relationships" r:id="Ra231a30539554092"/>
+    <p:notesMasterId xmlns:r="http://schemas.openxmlformats.org/officeDocument/2006/relationships" r:id="R3a219f7fc93a409e"/>
   </p:notesMasterIdLst>
   <p:sldIdLst>
-    <p:sldId xmlns:r="http://schemas.openxmlformats.org/officeDocument/2006/relationships" id="256" r:id="R9ee0c84f658c4081"/>
-    <p:sldId xmlns:r="http://schemas.openxmlformats.org/officeDocument/2006/relationships" id="257" r:id="R890014d7b6de498d"/>
-    <p:sldId xmlns:r="http://schemas.openxmlformats.org/officeDocument/2006/relationships" id="258" r:id="R204e372f49274a8c"/>
-    <p:sldId xmlns:r="http://schemas.openxmlformats.org/officeDocument/2006/relationships" id="259" r:id="Re1f356c433514515"/>
-    <p:sldId xmlns:r="http://schemas.openxmlformats.org/officeDocument/2006/relationships" id="260" r:id="R7dbf899226c44120"/>
-    <p:sldId xmlns:r="http://schemas.openxmlformats.org/officeDocument/2006/relationships" id="261" r:id="R5a13010a15e048da"/>
+    <p:sldId xmlns:r="http://schemas.openxmlformats.org/officeDocument/2006/relationships" id="256" r:id="Re1b0ecc346af4e18"/>
+    <p:sldId xmlns:r="http://schemas.openxmlformats.org/officeDocument/2006/relationships" id="257" r:id="Rea540f94ba724ec9"/>
+    <p:sldId xmlns:r="http://schemas.openxmlformats.org/officeDocument/2006/relationships" id="258" r:id="R266ed892bb984b85"/>
+    <p:sldId xmlns:r="http://schemas.openxmlformats.org/officeDocument/2006/relationships" id="259" r:id="Rd21d6231a48544f6"/>
+    <p:sldId xmlns:r="http://schemas.openxmlformats.org/officeDocument/2006/relationships" id="260" r:id="Rb849968b354642ac"/>
+    <p:sldId xmlns:r="http://schemas.openxmlformats.org/officeDocument/2006/relationships" id="261" r:id="R7ef07302953a4e46"/>
   </p:sldIdLst>
   <p:sldSz cx="12191999" cy="6858000"/>
   <p:notesSz cx="6858000" cy="9144000"/>
@@ -1467,7 +1467,7 @@
           <p:cNvPr id="2" name="Title 1">
             <a:extLst xmlns:a="http://schemas.openxmlformats.org/drawingml/2006/main">
               <a:ext uri="{FF2B5EF4-FFF2-40B4-BE49-F238E27FC236}">
-                <a16:creationId xmlns:a16="http://schemas.microsoft.com/office/drawing/2014/main" id="{BB16B4AA-45C1-4105-BD93-00A67DDAC367}"/>
+                <a16:creationId xmlns:a16="http://schemas.microsoft.com/office/drawing/2014/main" id="{240750F6-50B6-48C0-B8EE-CAEDD15CA3CC}"/>
               </a:ext>
             </a:extLst>
           </p:cNvPr>
@@ -1499,7 +1499,7 @@
           <p:cNvPr id="3" name="Subtitle 2">
             <a:extLst xmlns:a="http://schemas.openxmlformats.org/drawingml/2006/main">
               <a:ext uri="{FF2B5EF4-FFF2-40B4-BE49-F238E27FC236}">
-                <a16:creationId xmlns:a16="http://schemas.microsoft.com/office/drawing/2014/main" id="{81EB4079-2775-45AD-BC34-DBDE964F76C2}"/>
+                <a16:creationId xmlns:a16="http://schemas.microsoft.com/office/drawing/2014/main" id="{4EEF18DE-CB26-4E12-B00D-4F1E0C61C76F}"/>
               </a:ext>
             </a:extLst>
           </p:cNvPr>
@@ -1622,7 +1622,7 @@
           <p:cNvPr id="4" name="Date Placeholder 3">
             <a:extLst xmlns:a="http://schemas.openxmlformats.org/drawingml/2006/main">
               <a:ext uri="{FF2B5EF4-FFF2-40B4-BE49-F238E27FC236}">
-                <a16:creationId xmlns:a16="http://schemas.microsoft.com/office/drawing/2014/main" id="{86FE6301-6E40-4CBD-AC53-400320C1CBB5}"/>
+                <a16:creationId xmlns:a16="http://schemas.microsoft.com/office/drawing/2014/main" id="{38DEF414-B9CE-4D87-83BE-AAB62E4EC7FB}"/>
               </a:ext>
             </a:extLst>
           </p:cNvPr>
@@ -1649,7 +1649,7 @@
           <p:cNvPr id="5" name="Footer Placeholder 4">
             <a:extLst xmlns:a="http://schemas.openxmlformats.org/drawingml/2006/main">
               <a:ext uri="{FF2B5EF4-FFF2-40B4-BE49-F238E27FC236}">
-                <a16:creationId xmlns:a16="http://schemas.microsoft.com/office/drawing/2014/main" id="{C263CD3B-65B9-4D56-B8F0-B46DC57FE9EF}"/>
+                <a16:creationId xmlns:a16="http://schemas.microsoft.com/office/drawing/2014/main" id="{690B57E5-8671-4BC5-9873-1BA74A4A145C}"/>
               </a:ext>
             </a:extLst>
           </p:cNvPr>
@@ -1672,7 +1672,7 @@
           <p:cNvPr id="6" name="Slide Number Placeholder 5">
             <a:extLst xmlns:a="http://schemas.openxmlformats.org/drawingml/2006/main">
               <a:ext uri="{FF2B5EF4-FFF2-40B4-BE49-F238E27FC236}">
-                <a16:creationId xmlns:a16="http://schemas.microsoft.com/office/drawing/2014/main" id="{7DB3E248-9368-4B4F-8300-3011D55FEBE8}"/>
+                <a16:creationId xmlns:a16="http://schemas.microsoft.com/office/drawing/2014/main" id="{A32CF037-A20D-4CB8-8DF0-B6F2C1E7DD3D}"/>
               </a:ext>
             </a:extLst>
           </p:cNvPr>
@@ -1716,7 +1716,7 @@
           <p:cNvPr id="2" name="Title 1">
             <a:extLst xmlns:a="http://schemas.openxmlformats.org/drawingml/2006/main">
               <a:ext uri="{FF2B5EF4-FFF2-40B4-BE49-F238E27FC236}">
-                <a16:creationId xmlns:a16="http://schemas.microsoft.com/office/drawing/2014/main" id="{87E0CD7E-D70F-4A78-81B9-3836871442B9}"/>
+                <a16:creationId xmlns:a16="http://schemas.microsoft.com/office/drawing/2014/main" id="{F34D2434-7184-4899-8D32-750E57EDAD9B}"/>
               </a:ext>
             </a:extLst>
           </p:cNvPr>
@@ -1743,7 +1743,7 @@
           <p:cNvPr id="3" name="Vertical Text Placeholder 2">
             <a:extLst xmlns:a="http://schemas.openxmlformats.org/drawingml/2006/main">
               <a:ext uri="{FF2B5EF4-FFF2-40B4-BE49-F238E27FC236}">
-                <a16:creationId xmlns:a16="http://schemas.microsoft.com/office/drawing/2014/main" id="{CCC723A5-8DEF-459B-96CE-DE457B4FFFBB}"/>
+                <a16:creationId xmlns:a16="http://schemas.microsoft.com/office/drawing/2014/main" id="{12AD9361-9A6B-410B-8D83-FDDF4EF194CC}"/>
               </a:ext>
             </a:extLst>
           </p:cNvPr>
@@ -1805,7 +1805,7 @@
           <p:cNvPr id="4" name="Date Placeholder 3">
             <a:extLst xmlns:a="http://schemas.openxmlformats.org/drawingml/2006/main">
               <a:ext uri="{FF2B5EF4-FFF2-40B4-BE49-F238E27FC236}">
-                <a16:creationId xmlns:a16="http://schemas.microsoft.com/office/drawing/2014/main" id="{1FEDF1BE-EE4E-47A9-94D4-E301ACE82759}"/>
+                <a16:creationId xmlns:a16="http://schemas.microsoft.com/office/drawing/2014/main" id="{4726D479-25F2-44D8-8B24-BB7509C1A164}"/>
               </a:ext>
             </a:extLst>
           </p:cNvPr>
@@ -1832,7 +1832,7 @@
           <p:cNvPr id="5" name="Footer Placeholder 4">
             <a:extLst xmlns:a="http://schemas.openxmlformats.org/drawingml/2006/main">
               <a:ext uri="{FF2B5EF4-FFF2-40B4-BE49-F238E27FC236}">
-                <a16:creationId xmlns:a16="http://schemas.microsoft.com/office/drawing/2014/main" id="{9AB90C42-C25F-4C24-A60E-A3F52377821F}"/>
+                <a16:creationId xmlns:a16="http://schemas.microsoft.com/office/drawing/2014/main" id="{4F821784-CA8B-4DFA-9433-94928852C7B0}"/>
               </a:ext>
             </a:extLst>
           </p:cNvPr>
@@ -1855,7 +1855,7 @@
           <p:cNvPr id="6" name="Slide Number Placeholder 5">
             <a:extLst xmlns:a="http://schemas.openxmlformats.org/drawingml/2006/main">
               <a:ext uri="{FF2B5EF4-FFF2-40B4-BE49-F238E27FC236}">
-                <a16:creationId xmlns:a16="http://schemas.microsoft.com/office/drawing/2014/main" id="{D671425C-31BA-4A8D-8A09-7F1B904EC0F1}"/>
+                <a16:creationId xmlns:a16="http://schemas.microsoft.com/office/drawing/2014/main" id="{CA76DC72-A6B9-4668-BC63-4B3F4C0B09F5}"/>
               </a:ext>
             </a:extLst>
           </p:cNvPr>
@@ -1899,7 +1899,7 @@
           <p:cNvPr id="2" name="Vertical Title 1">
             <a:extLst xmlns:a="http://schemas.openxmlformats.org/drawingml/2006/main">
               <a:ext uri="{FF2B5EF4-FFF2-40B4-BE49-F238E27FC236}">
-                <a16:creationId xmlns:a16="http://schemas.microsoft.com/office/drawing/2014/main" id="{7FD805C2-1E21-4862-98B4-8B7EEC47B857}"/>
+                <a16:creationId xmlns:a16="http://schemas.microsoft.com/office/drawing/2014/main" id="{1FB43D0D-BDF8-48C8-B986-D01C6DF039AF}"/>
               </a:ext>
             </a:extLst>
           </p:cNvPr>
@@ -1931,7 +1931,7 @@
           <p:cNvPr id="3" name="Vertical Text Placeholder 2">
             <a:extLst xmlns:a="http://schemas.openxmlformats.org/drawingml/2006/main">
               <a:ext uri="{FF2B5EF4-FFF2-40B4-BE49-F238E27FC236}">
-                <a16:creationId xmlns:a16="http://schemas.microsoft.com/office/drawing/2014/main" id="{300B3AFA-AA99-4073-BA66-B704FC437DCE}"/>
+                <a16:creationId xmlns:a16="http://schemas.microsoft.com/office/drawing/2014/main" id="{226B7A72-E71B-46FD-9FC6-4D9E3B8373C7}"/>
               </a:ext>
             </a:extLst>
           </p:cNvPr>
@@ -1998,7 +1998,7 @@
           <p:cNvPr id="4" name="Date Placeholder 3">
             <a:extLst xmlns:a="http://schemas.openxmlformats.org/drawingml/2006/main">
               <a:ext uri="{FF2B5EF4-FFF2-40B4-BE49-F238E27FC236}">
-                <a16:creationId xmlns:a16="http://schemas.microsoft.com/office/drawing/2014/main" id="{0EAD76EA-D515-4866-9554-6EF589BC1DA4}"/>
+                <a16:creationId xmlns:a16="http://schemas.microsoft.com/office/drawing/2014/main" id="{3DB0B876-1AD4-4227-9054-0F530F92AC98}"/>
               </a:ext>
             </a:extLst>
           </p:cNvPr>
@@ -2025,7 +2025,7 @@
           <p:cNvPr id="5" name="Footer Placeholder 4">
             <a:extLst xmlns:a="http://schemas.openxmlformats.org/drawingml/2006/main">
               <a:ext uri="{FF2B5EF4-FFF2-40B4-BE49-F238E27FC236}">
-                <a16:creationId xmlns:a16="http://schemas.microsoft.com/office/drawing/2014/main" id="{866410CC-FF0C-45E0-9DA5-AD0AF94F12F7}"/>
+                <a16:creationId xmlns:a16="http://schemas.microsoft.com/office/drawing/2014/main" id="{C1FE4112-7D11-43E4-BAA8-7512F40FD83E}"/>
               </a:ext>
             </a:extLst>
           </p:cNvPr>
@@ -2048,7 +2048,7 @@
           <p:cNvPr id="6" name="Slide Number Placeholder 5">
             <a:extLst xmlns:a="http://schemas.openxmlformats.org/drawingml/2006/main">
               <a:ext uri="{FF2B5EF4-FFF2-40B4-BE49-F238E27FC236}">
-                <a16:creationId xmlns:a16="http://schemas.microsoft.com/office/drawing/2014/main" id="{B53FD6FB-35F5-4C8B-BB31-C64E28B15567}"/>
+                <a16:creationId xmlns:a16="http://schemas.microsoft.com/office/drawing/2014/main" id="{E7E92B1E-8327-4B79-8B5E-9BE43D095A10}"/>
               </a:ext>
             </a:extLst>
           </p:cNvPr>
@@ -2092,7 +2092,7 @@
           <p:cNvPr id="2" name="Title 1">
             <a:extLst xmlns:a="http://schemas.openxmlformats.org/drawingml/2006/main">
               <a:ext uri="{FF2B5EF4-FFF2-40B4-BE49-F238E27FC236}">
-                <a16:creationId xmlns:a16="http://schemas.microsoft.com/office/drawing/2014/main" id="{112377E1-AEE7-4AD3-B144-EC040DCDBE23}"/>
+                <a16:creationId xmlns:a16="http://schemas.microsoft.com/office/drawing/2014/main" id="{B6852606-1F75-4F9A-B43A-F4BD3C4D3ED0}"/>
               </a:ext>
             </a:extLst>
           </p:cNvPr>
@@ -2119,7 +2119,7 @@
           <p:cNvPr id="3" name="Content Placeholder 2">
             <a:extLst xmlns:a="http://schemas.openxmlformats.org/drawingml/2006/main">
               <a:ext uri="{FF2B5EF4-FFF2-40B4-BE49-F238E27FC236}">
-                <a16:creationId xmlns:a16="http://schemas.microsoft.com/office/drawing/2014/main" id="{9E26A700-B18E-40F7-9696-88A6FC2470A6}"/>
+                <a16:creationId xmlns:a16="http://schemas.microsoft.com/office/drawing/2014/main" id="{8111959C-96EC-4E4D-8104-34FF9543CB70}"/>
               </a:ext>
             </a:extLst>
           </p:cNvPr>
@@ -2181,7 +2181,7 @@
           <p:cNvPr id="4" name="Date Placeholder 3">
             <a:extLst xmlns:a="http://schemas.openxmlformats.org/drawingml/2006/main">
               <a:ext uri="{FF2B5EF4-FFF2-40B4-BE49-F238E27FC236}">
-                <a16:creationId xmlns:a16="http://schemas.microsoft.com/office/drawing/2014/main" id="{6E1A9790-EE62-4129-B9A6-1A8AEEA3F8F8}"/>
+                <a16:creationId xmlns:a16="http://schemas.microsoft.com/office/drawing/2014/main" id="{3627AD8E-811A-4CD7-9E14-3D2908229E31}"/>
               </a:ext>
             </a:extLst>
           </p:cNvPr>
@@ -2208,7 +2208,7 @@
           <p:cNvPr id="5" name="Footer Placeholder 4">
             <a:extLst xmlns:a="http://schemas.openxmlformats.org/drawingml/2006/main">
               <a:ext uri="{FF2B5EF4-FFF2-40B4-BE49-F238E27FC236}">
-                <a16:creationId xmlns:a16="http://schemas.microsoft.com/office/drawing/2014/main" id="{3F7A641D-7E1F-46B4-B0C6-04F8FA72744A}"/>
+                <a16:creationId xmlns:a16="http://schemas.microsoft.com/office/drawing/2014/main" id="{346E46D8-1A7E-43BF-A294-B78E5EE906BA}"/>
               </a:ext>
             </a:extLst>
           </p:cNvPr>
@@ -2231,7 +2231,7 @@
           <p:cNvPr id="6" name="Slide Number Placeholder 5">
             <a:extLst xmlns:a="http://schemas.openxmlformats.org/drawingml/2006/main">
               <a:ext uri="{FF2B5EF4-FFF2-40B4-BE49-F238E27FC236}">
-                <a16:creationId xmlns:a16="http://schemas.microsoft.com/office/drawing/2014/main" id="{61370E23-EA59-4579-8978-824398208099}"/>
+                <a16:creationId xmlns:a16="http://schemas.microsoft.com/office/drawing/2014/main" id="{8F6927CD-6702-4227-8B8A-9E6D56CF8C41}"/>
               </a:ext>
             </a:extLst>
           </p:cNvPr>
@@ -2275,7 +2275,7 @@
           <p:cNvPr id="2" name="Title 1">
             <a:extLst xmlns:a="http://schemas.openxmlformats.org/drawingml/2006/main">
               <a:ext uri="{FF2B5EF4-FFF2-40B4-BE49-F238E27FC236}">
-                <a16:creationId xmlns:a16="http://schemas.microsoft.com/office/drawing/2014/main" id="{AB6F0782-D155-40EE-BE15-79FB405E08E0}"/>
+                <a16:creationId xmlns:a16="http://schemas.microsoft.com/office/drawing/2014/main" id="{735789A7-9079-46E3-9611-5D2F881FF898}"/>
               </a:ext>
             </a:extLst>
           </p:cNvPr>
@@ -2312,7 +2312,7 @@
           <p:cNvPr id="3" name="Text Placeholder 2">
             <a:extLst xmlns:a="http://schemas.openxmlformats.org/drawingml/2006/main">
               <a:ext uri="{FF2B5EF4-FFF2-40B4-BE49-F238E27FC236}">
-                <a16:creationId xmlns:a16="http://schemas.microsoft.com/office/drawing/2014/main" id="{2BE30FC5-A958-45A8-8BB6-9E887B1ACE7F}"/>
+                <a16:creationId xmlns:a16="http://schemas.microsoft.com/office/drawing/2014/main" id="{B090203C-7420-4618-9ED5-B5ED3C6C3F60}"/>
               </a:ext>
             </a:extLst>
           </p:cNvPr>
@@ -2438,7 +2438,7 @@
           <p:cNvPr id="4" name="Date Placeholder 3">
             <a:extLst xmlns:a="http://schemas.openxmlformats.org/drawingml/2006/main">
               <a:ext uri="{FF2B5EF4-FFF2-40B4-BE49-F238E27FC236}">
-                <a16:creationId xmlns:a16="http://schemas.microsoft.com/office/drawing/2014/main" id="{49F714EC-AFFB-4733-91C8-353246110695}"/>
+                <a16:creationId xmlns:a16="http://schemas.microsoft.com/office/drawing/2014/main" id="{6804BC80-0DE4-41BE-9FC0-9B3D65A7DCCB}"/>
               </a:ext>
             </a:extLst>
           </p:cNvPr>
@@ -2465,7 +2465,7 @@
           <p:cNvPr id="5" name="Footer Placeholder 4">
             <a:extLst xmlns:a="http://schemas.openxmlformats.org/drawingml/2006/main">
               <a:ext uri="{FF2B5EF4-FFF2-40B4-BE49-F238E27FC236}">
-                <a16:creationId xmlns:a16="http://schemas.microsoft.com/office/drawing/2014/main" id="{464ED3D8-2FE2-42B1-B54E-25F7FD3D76CB}"/>
+                <a16:creationId xmlns:a16="http://schemas.microsoft.com/office/drawing/2014/main" id="{E87FADC7-D49B-4714-863A-1DC10AC97669}"/>
               </a:ext>
             </a:extLst>
           </p:cNvPr>
@@ -2488,7 +2488,7 @@
           <p:cNvPr id="6" name="Slide Number Placeholder 5">
             <a:extLst xmlns:a="http://schemas.openxmlformats.org/drawingml/2006/main">
               <a:ext uri="{FF2B5EF4-FFF2-40B4-BE49-F238E27FC236}">
-                <a16:creationId xmlns:a16="http://schemas.microsoft.com/office/drawing/2014/main" id="{1EDC7EFB-CACF-4329-AF3F-7620E11C4BA0}"/>
+                <a16:creationId xmlns:a16="http://schemas.microsoft.com/office/drawing/2014/main" id="{488DA217-D1C2-4D7B-9843-9200F31040E8}"/>
               </a:ext>
             </a:extLst>
           </p:cNvPr>
@@ -2532,7 +2532,7 @@
           <p:cNvPr id="2" name="Title 1">
             <a:extLst xmlns:a="http://schemas.openxmlformats.org/drawingml/2006/main">
               <a:ext uri="{FF2B5EF4-FFF2-40B4-BE49-F238E27FC236}">
-                <a16:creationId xmlns:a16="http://schemas.microsoft.com/office/drawing/2014/main" id="{08652C11-BD5B-4E1A-AC0F-6BCD5B109298}"/>
+                <a16:creationId xmlns:a16="http://schemas.microsoft.com/office/drawing/2014/main" id="{136D3912-208D-40D2-A2AB-E5F951456387}"/>
               </a:ext>
             </a:extLst>
           </p:cNvPr>
@@ -2559,7 +2559,7 @@
           <p:cNvPr id="3" name="Content Placeholder 2">
             <a:extLst xmlns:a="http://schemas.openxmlformats.org/drawingml/2006/main">
               <a:ext uri="{FF2B5EF4-FFF2-40B4-BE49-F238E27FC236}">
-                <a16:creationId xmlns:a16="http://schemas.microsoft.com/office/drawing/2014/main" id="{73FB1C00-FDB7-4400-AC90-9331DE3A6A34}"/>
+                <a16:creationId xmlns:a16="http://schemas.microsoft.com/office/drawing/2014/main" id="{49C3FD4D-DB0F-478F-84A7-B8090EBE23CF}"/>
               </a:ext>
             </a:extLst>
           </p:cNvPr>
@@ -2663,7 +2663,7 @@
           <p:cNvPr id="4" name="Content Placeholder 3">
             <a:extLst xmlns:a="http://schemas.openxmlformats.org/drawingml/2006/main">
               <a:ext uri="{FF2B5EF4-FFF2-40B4-BE49-F238E27FC236}">
-                <a16:creationId xmlns:a16="http://schemas.microsoft.com/office/drawing/2014/main" id="{FE0E78B5-79CD-47FD-B2E8-32BE9C84AA12}"/>
+                <a16:creationId xmlns:a16="http://schemas.microsoft.com/office/drawing/2014/main" id="{DCFC402B-50B0-47BE-8691-7D355FCAABF7}"/>
               </a:ext>
             </a:extLst>
           </p:cNvPr>
@@ -2767,7 +2767,7 @@
           <p:cNvPr id="5" name="Date Placeholder 4">
             <a:extLst xmlns:a="http://schemas.openxmlformats.org/drawingml/2006/main">
               <a:ext uri="{FF2B5EF4-FFF2-40B4-BE49-F238E27FC236}">
-                <a16:creationId xmlns:a16="http://schemas.microsoft.com/office/drawing/2014/main" id="{EE69C8D5-E905-48B3-9A5F-35891A283A7F}"/>
+                <a16:creationId xmlns:a16="http://schemas.microsoft.com/office/drawing/2014/main" id="{FA3589F1-73C5-418C-A415-51F97EEB8228}"/>
               </a:ext>
             </a:extLst>
           </p:cNvPr>
@@ -2794,7 +2794,7 @@
           <p:cNvPr id="6" name="Footer Placeholder 5">
             <a:extLst xmlns:a="http://schemas.openxmlformats.org/drawingml/2006/main">
               <a:ext uri="{FF2B5EF4-FFF2-40B4-BE49-F238E27FC236}">
-                <a16:creationId xmlns:a16="http://schemas.microsoft.com/office/drawing/2014/main" id="{2B90D626-ABD8-4AD6-8FB6-80BB5E3956F5}"/>
+                <a16:creationId xmlns:a16="http://schemas.microsoft.com/office/drawing/2014/main" id="{AF72A5A3-B9BE-4FAD-A945-E0BD4C01A43E}"/>
               </a:ext>
             </a:extLst>
           </p:cNvPr>
@@ -2817,7 +2817,7 @@
           <p:cNvPr id="7" name="Slide Number Placeholder 6">
             <a:extLst xmlns:a="http://schemas.openxmlformats.org/drawingml/2006/main">
               <a:ext uri="{FF2B5EF4-FFF2-40B4-BE49-F238E27FC236}">
-                <a16:creationId xmlns:a16="http://schemas.microsoft.com/office/drawing/2014/main" id="{14B99F44-D884-44E8-950C-584BFCE959C5}"/>
+                <a16:creationId xmlns:a16="http://schemas.microsoft.com/office/drawing/2014/main" id="{9728271E-259A-4BD0-9B2B-D0B6CF89D51D}"/>
               </a:ext>
             </a:extLst>
           </p:cNvPr>
@@ -2861,7 +2861,7 @@
           <p:cNvPr id="2" name="Title 1">
             <a:extLst xmlns:a="http://schemas.openxmlformats.org/drawingml/2006/main">
               <a:ext uri="{FF2B5EF4-FFF2-40B4-BE49-F238E27FC236}">
-                <a16:creationId xmlns:a16="http://schemas.microsoft.com/office/drawing/2014/main" id="{3DF884AD-BA6A-42E6-8008-6D0411661573}"/>
+                <a16:creationId xmlns:a16="http://schemas.microsoft.com/office/drawing/2014/main" id="{5C287E09-8D1F-40AD-B90D-D0F8076858F1}"/>
               </a:ext>
             </a:extLst>
           </p:cNvPr>
@@ -2893,7 +2893,7 @@
           <p:cNvPr id="3" name="Text Placeholder 2">
             <a:extLst xmlns:a="http://schemas.openxmlformats.org/drawingml/2006/main">
               <a:ext uri="{FF2B5EF4-FFF2-40B4-BE49-F238E27FC236}">
-                <a16:creationId xmlns:a16="http://schemas.microsoft.com/office/drawing/2014/main" id="{5327600C-6C70-4BE4-9E1F-A81B419715B0}"/>
+                <a16:creationId xmlns:a16="http://schemas.microsoft.com/office/drawing/2014/main" id="{534F91AC-518D-4364-8F1D-B2FB2A22CFDF}"/>
               </a:ext>
             </a:extLst>
           </p:cNvPr>
@@ -2965,7 +2965,7 @@
           <p:cNvPr id="4" name="Content Placeholder 3">
             <a:extLst xmlns:a="http://schemas.openxmlformats.org/drawingml/2006/main">
               <a:ext uri="{FF2B5EF4-FFF2-40B4-BE49-F238E27FC236}">
-                <a16:creationId xmlns:a16="http://schemas.microsoft.com/office/drawing/2014/main" id="{4108B206-9A95-4BE8-88C2-6CD4A52BFF88}"/>
+                <a16:creationId xmlns:a16="http://schemas.microsoft.com/office/drawing/2014/main" id="{39B2A7FE-2B51-44D9-96B7-C3F139730394}"/>
               </a:ext>
             </a:extLst>
           </p:cNvPr>
@@ -3069,7 +3069,7 @@
           <p:cNvPr id="5" name="Text Placeholder 4">
             <a:extLst xmlns:a="http://schemas.openxmlformats.org/drawingml/2006/main">
               <a:ext uri="{FF2B5EF4-FFF2-40B4-BE49-F238E27FC236}">
-                <a16:creationId xmlns:a16="http://schemas.microsoft.com/office/drawing/2014/main" id="{E6F19DD1-52E0-447F-9FDD-394622A033F0}"/>
+                <a16:creationId xmlns:a16="http://schemas.microsoft.com/office/drawing/2014/main" id="{040A73D5-577E-4E58-A5D9-C90FDCAB0EF7}"/>
               </a:ext>
             </a:extLst>
           </p:cNvPr>
@@ -3141,7 +3141,7 @@
           <p:cNvPr id="6" name="Content Placeholder 5">
             <a:extLst xmlns:a="http://schemas.openxmlformats.org/drawingml/2006/main">
               <a:ext uri="{FF2B5EF4-FFF2-40B4-BE49-F238E27FC236}">
-                <a16:creationId xmlns:a16="http://schemas.microsoft.com/office/drawing/2014/main" id="{51793ECC-677D-4F84-AEF2-2F4CA5E6682C}"/>
+                <a16:creationId xmlns:a16="http://schemas.microsoft.com/office/drawing/2014/main" id="{B7B1CF4A-990A-411B-97A4-F37245AF3F5B}"/>
               </a:ext>
             </a:extLst>
           </p:cNvPr>
@@ -3245,7 +3245,7 @@
           <p:cNvPr id="7" name="Date Placeholder 6">
             <a:extLst xmlns:a="http://schemas.openxmlformats.org/drawingml/2006/main">
               <a:ext uri="{FF2B5EF4-FFF2-40B4-BE49-F238E27FC236}">
-                <a16:creationId xmlns:a16="http://schemas.microsoft.com/office/drawing/2014/main" id="{8D57D979-7D0E-42FF-8CA2-710447D0E95F}"/>
+                <a16:creationId xmlns:a16="http://schemas.microsoft.com/office/drawing/2014/main" id="{E03A21FA-93C2-4180-994C-A2DD5E175B60}"/>
               </a:ext>
             </a:extLst>
           </p:cNvPr>
@@ -3272,7 +3272,7 @@
           <p:cNvPr id="8" name="Footer Placeholder 7">
             <a:extLst xmlns:a="http://schemas.openxmlformats.org/drawingml/2006/main">
               <a:ext uri="{FF2B5EF4-FFF2-40B4-BE49-F238E27FC236}">
-                <a16:creationId xmlns:a16="http://schemas.microsoft.com/office/drawing/2014/main" id="{1A279BA1-CC95-41D3-835C-887A02A8F40E}"/>
+                <a16:creationId xmlns:a16="http://schemas.microsoft.com/office/drawing/2014/main" id="{7C623962-9342-4258-A905-F672A3CBC869}"/>
               </a:ext>
             </a:extLst>
           </p:cNvPr>
@@ -3295,7 +3295,7 @@
           <p:cNvPr id="9" name="Slide Number Placeholder 8">
             <a:extLst xmlns:a="http://schemas.openxmlformats.org/drawingml/2006/main">
               <a:ext uri="{FF2B5EF4-FFF2-40B4-BE49-F238E27FC236}">
-                <a16:creationId xmlns:a16="http://schemas.microsoft.com/office/drawing/2014/main" id="{00701220-C537-4DE9-867F-E5D7CB2C1D32}"/>
+                <a16:creationId xmlns:a16="http://schemas.microsoft.com/office/drawing/2014/main" id="{BE6B1F4E-24B3-4406-81DE-6287C0045A24}"/>
               </a:ext>
             </a:extLst>
           </p:cNvPr>
@@ -3339,7 +3339,7 @@
           <p:cNvPr id="2" name="Title 1">
             <a:extLst xmlns:a="http://schemas.openxmlformats.org/drawingml/2006/main">
               <a:ext uri="{FF2B5EF4-FFF2-40B4-BE49-F238E27FC236}">
-                <a16:creationId xmlns:a16="http://schemas.microsoft.com/office/drawing/2014/main" id="{0E514756-BD73-4CDD-A6FE-3DEDB7021B4F}"/>
+                <a16:creationId xmlns:a16="http://schemas.microsoft.com/office/drawing/2014/main" id="{98EB719F-9CDC-4F86-ADFA-90C284844A94}"/>
               </a:ext>
             </a:extLst>
           </p:cNvPr>
@@ -3366,7 +3366,7 @@
           <p:cNvPr id="3" name="Date Placeholder 2">
             <a:extLst xmlns:a="http://schemas.openxmlformats.org/drawingml/2006/main">
               <a:ext uri="{FF2B5EF4-FFF2-40B4-BE49-F238E27FC236}">
-                <a16:creationId xmlns:a16="http://schemas.microsoft.com/office/drawing/2014/main" id="{BC3CEDCC-09C1-4084-8F17-BB18A86EF407}"/>
+                <a16:creationId xmlns:a16="http://schemas.microsoft.com/office/drawing/2014/main" id="{BA9F91A5-C301-470D-B56A-4959954F9CE2}"/>
               </a:ext>
             </a:extLst>
           </p:cNvPr>
@@ -3393,7 +3393,7 @@
           <p:cNvPr id="4" name="Footer Placeholder 3">
             <a:extLst xmlns:a="http://schemas.openxmlformats.org/drawingml/2006/main">
               <a:ext uri="{FF2B5EF4-FFF2-40B4-BE49-F238E27FC236}">
-                <a16:creationId xmlns:a16="http://schemas.microsoft.com/office/drawing/2014/main" id="{C9264694-A6C5-48C4-800F-BF9B30898C21}"/>
+                <a16:creationId xmlns:a16="http://schemas.microsoft.com/office/drawing/2014/main" id="{130A8CA3-F5B7-41F6-BE65-8AAEC3026BBB}"/>
               </a:ext>
             </a:extLst>
           </p:cNvPr>
@@ -3416,7 +3416,7 @@
           <p:cNvPr id="5" name="Slide Number Placeholder 4">
             <a:extLst xmlns:a="http://schemas.openxmlformats.org/drawingml/2006/main">
               <a:ext uri="{FF2B5EF4-FFF2-40B4-BE49-F238E27FC236}">
-                <a16:creationId xmlns:a16="http://schemas.microsoft.com/office/drawing/2014/main" id="{3DEF0BE7-DE02-4986-BC19-10A33ABC9E0C}"/>
+                <a16:creationId xmlns:a16="http://schemas.microsoft.com/office/drawing/2014/main" id="{B5C74457-78A3-4D72-9A76-B87A3486BB94}"/>
               </a:ext>
             </a:extLst>
           </p:cNvPr>
@@ -3460,7 +3460,7 @@
           <p:cNvPr id="2" name="Date Placeholder 1">
             <a:extLst xmlns:a="http://schemas.openxmlformats.org/drawingml/2006/main">
               <a:ext uri="{FF2B5EF4-FFF2-40B4-BE49-F238E27FC236}">
-                <a16:creationId xmlns:a16="http://schemas.microsoft.com/office/drawing/2014/main" id="{9736AFB1-D6F8-4C78-8353-5C51F7427596}"/>
+                <a16:creationId xmlns:a16="http://schemas.microsoft.com/office/drawing/2014/main" id="{E862871A-00A3-4612-8C9D-120798182B42}"/>
               </a:ext>
             </a:extLst>
           </p:cNvPr>
@@ -3487,7 +3487,7 @@
           <p:cNvPr id="3" name="Footer Placeholder 2">
             <a:extLst xmlns:a="http://schemas.openxmlformats.org/drawingml/2006/main">
               <a:ext uri="{FF2B5EF4-FFF2-40B4-BE49-F238E27FC236}">
-                <a16:creationId xmlns:a16="http://schemas.microsoft.com/office/drawing/2014/main" id="{7E5D8294-AC13-4ABB-87C4-B77EB9870C34}"/>
+                <a16:creationId xmlns:a16="http://schemas.microsoft.com/office/drawing/2014/main" id="{BD570D98-AFDB-465E-B258-685237E217AC}"/>
               </a:ext>
             </a:extLst>
           </p:cNvPr>
@@ -3510,7 +3510,7 @@
           <p:cNvPr id="4" name="Slide Number Placeholder 3">
             <a:extLst xmlns:a="http://schemas.openxmlformats.org/drawingml/2006/main">
               <a:ext uri="{FF2B5EF4-FFF2-40B4-BE49-F238E27FC236}">
-                <a16:creationId xmlns:a16="http://schemas.microsoft.com/office/drawing/2014/main" id="{5AB396FF-9A71-465B-A592-805918551B0E}"/>
+                <a16:creationId xmlns:a16="http://schemas.microsoft.com/office/drawing/2014/main" id="{0B2E33C6-D6F1-4B77-97F6-730507D87B34}"/>
               </a:ext>
             </a:extLst>
           </p:cNvPr>
@@ -3554,7 +3554,7 @@
           <p:cNvPr id="2" name="Title 1">
             <a:extLst xmlns:a="http://schemas.openxmlformats.org/drawingml/2006/main">
               <a:ext uri="{FF2B5EF4-FFF2-40B4-BE49-F238E27FC236}">
-                <a16:creationId xmlns:a16="http://schemas.microsoft.com/office/drawing/2014/main" id="{05BF5981-7149-4570-A9F8-48BEA6803354}"/>
+                <a16:creationId xmlns:a16="http://schemas.microsoft.com/office/drawing/2014/main" id="{2AE834F7-E88E-41FF-97B3-4D4C5B6AB4C3}"/>
               </a:ext>
             </a:extLst>
           </p:cNvPr>
@@ -3591,7 +3591,7 @@
           <p:cNvPr id="3" name="Content Placeholder 2">
             <a:extLst xmlns:a="http://schemas.openxmlformats.org/drawingml/2006/main">
               <a:ext uri="{FF2B5EF4-FFF2-40B4-BE49-F238E27FC236}">
-                <a16:creationId xmlns:a16="http://schemas.microsoft.com/office/drawing/2014/main" id="{95A379DE-4952-412F-9AB6-1A9FA3A69528}"/>
+                <a16:creationId xmlns:a16="http://schemas.microsoft.com/office/drawing/2014/main" id="{86A404A8-FAFA-43B4-B0B4-08DA63511308}"/>
               </a:ext>
             </a:extLst>
           </p:cNvPr>
@@ -3695,7 +3695,7 @@
           <p:cNvPr id="4" name="Text Placeholder 3">
             <a:extLst xmlns:a="http://schemas.openxmlformats.org/drawingml/2006/main">
               <a:ext uri="{FF2B5EF4-FFF2-40B4-BE49-F238E27FC236}">
-                <a16:creationId xmlns:a16="http://schemas.microsoft.com/office/drawing/2014/main" id="{697AD7DB-0893-4D54-AE6D-B30FFF69EE83}"/>
+                <a16:creationId xmlns:a16="http://schemas.microsoft.com/office/drawing/2014/main" id="{3F63DF3C-945A-43BE-9B0D-188C84D3F4F5}"/>
               </a:ext>
             </a:extLst>
           </p:cNvPr>
@@ -3767,7 +3767,7 @@
           <p:cNvPr id="5" name="Date Placeholder 4">
             <a:extLst xmlns:a="http://schemas.openxmlformats.org/drawingml/2006/main">
               <a:ext uri="{FF2B5EF4-FFF2-40B4-BE49-F238E27FC236}">
-                <a16:creationId xmlns:a16="http://schemas.microsoft.com/office/drawing/2014/main" id="{C28989BC-98D2-4E5C-9A3C-B0A41D170751}"/>
+                <a16:creationId xmlns:a16="http://schemas.microsoft.com/office/drawing/2014/main" id="{69ED1688-A667-4C42-AB22-DEDC8099BDF9}"/>
               </a:ext>
             </a:extLst>
           </p:cNvPr>
@@ -3794,7 +3794,7 @@
           <p:cNvPr id="6" name="Footer Placeholder 5">
             <a:extLst xmlns:a="http://schemas.openxmlformats.org/drawingml/2006/main">
               <a:ext uri="{FF2B5EF4-FFF2-40B4-BE49-F238E27FC236}">
-                <a16:creationId xmlns:a16="http://schemas.microsoft.com/office/drawing/2014/main" id="{FD285CF2-5C05-4837-9C34-1EBF0C1121B1}"/>
+                <a16:creationId xmlns:a16="http://schemas.microsoft.com/office/drawing/2014/main" id="{8C6207AF-664D-44D8-9385-3DEB092F2091}"/>
               </a:ext>
             </a:extLst>
           </p:cNvPr>
@@ -3817,7 +3817,7 @@
           <p:cNvPr id="7" name="Slide Number Placeholder 6">
             <a:extLst xmlns:a="http://schemas.openxmlformats.org/drawingml/2006/main">
               <a:ext uri="{FF2B5EF4-FFF2-40B4-BE49-F238E27FC236}">
-                <a16:creationId xmlns:a16="http://schemas.microsoft.com/office/drawing/2014/main" id="{D1EAE05A-213C-4821-A6AD-08CCC1223397}"/>
+                <a16:creationId xmlns:a16="http://schemas.microsoft.com/office/drawing/2014/main" id="{23E2EBB8-8F27-4F45-B8FD-62D2B6C54CC6}"/>
               </a:ext>
             </a:extLst>
           </p:cNvPr>
@@ -3861,7 +3861,7 @@
           <p:cNvPr id="2" name="Title 1">
             <a:extLst xmlns:a="http://schemas.openxmlformats.org/drawingml/2006/main">
               <a:ext uri="{FF2B5EF4-FFF2-40B4-BE49-F238E27FC236}">
-                <a16:creationId xmlns:a16="http://schemas.microsoft.com/office/drawing/2014/main" id="{5D3308C6-EB71-4694-B554-1B9B714E79CB}"/>
+                <a16:creationId xmlns:a16="http://schemas.microsoft.com/office/drawing/2014/main" id="{733C7F83-AC7F-4958-9553-34D38AD290E6}"/>
               </a:ext>
             </a:extLst>
           </p:cNvPr>
@@ -3898,7 +3898,7 @@
           <p:cNvPr id="3" name="Picture Placeholder 2">
             <a:extLst xmlns:a="http://schemas.openxmlformats.org/drawingml/2006/main">
               <a:ext uri="{FF2B5EF4-FFF2-40B4-BE49-F238E27FC236}">
-                <a16:creationId xmlns:a16="http://schemas.microsoft.com/office/drawing/2014/main" id="{08DD804F-4F23-49DD-85F0-BE6D511B0510}"/>
+                <a16:creationId xmlns:a16="http://schemas.microsoft.com/office/drawing/2014/main" id="{FAF75820-0DCA-4506-9CE3-137485AB73CC}"/>
               </a:ext>
             </a:extLst>
           </p:cNvPr>
@@ -3963,7 +3963,7 @@
           <p:cNvPr id="4" name="Text Placeholder 3">
             <a:extLst xmlns:a="http://schemas.openxmlformats.org/drawingml/2006/main">
               <a:ext uri="{FF2B5EF4-FFF2-40B4-BE49-F238E27FC236}">
-                <a16:creationId xmlns:a16="http://schemas.microsoft.com/office/drawing/2014/main" id="{BB1C5B86-11AB-4723-8595-BD7916C0047F}"/>
+                <a16:creationId xmlns:a16="http://schemas.microsoft.com/office/drawing/2014/main" id="{ED412A85-AA0A-4925-B075-2EB0DD9A07E6}"/>
               </a:ext>
             </a:extLst>
           </p:cNvPr>
@@ -4035,7 +4035,7 @@
           <p:cNvPr id="5" name="Date Placeholder 4">
             <a:extLst xmlns:a="http://schemas.openxmlformats.org/drawingml/2006/main">
               <a:ext uri="{FF2B5EF4-FFF2-40B4-BE49-F238E27FC236}">
-                <a16:creationId xmlns:a16="http://schemas.microsoft.com/office/drawing/2014/main" id="{22C85694-A78A-4DDE-8B61-DA2E48EEF5F3}"/>
+                <a16:creationId xmlns:a16="http://schemas.microsoft.com/office/drawing/2014/main" id="{2549C7A1-803B-4AF5-B126-0D2E485D8F85}"/>
               </a:ext>
             </a:extLst>
           </p:cNvPr>
@@ -4062,7 +4062,7 @@
           <p:cNvPr id="6" name="Footer Placeholder 5">
             <a:extLst xmlns:a="http://schemas.openxmlformats.org/drawingml/2006/main">
               <a:ext uri="{FF2B5EF4-FFF2-40B4-BE49-F238E27FC236}">
-                <a16:creationId xmlns:a16="http://schemas.microsoft.com/office/drawing/2014/main" id="{FFAA36F8-DB2B-457C-AB6E-AC308785686E}"/>
+                <a16:creationId xmlns:a16="http://schemas.microsoft.com/office/drawing/2014/main" id="{B752B5FD-9362-403B-92B2-5F0127DFEE92}"/>
               </a:ext>
             </a:extLst>
           </p:cNvPr>
@@ -4085,7 +4085,7 @@
           <p:cNvPr id="7" name="Slide Number Placeholder 6">
             <a:extLst xmlns:a="http://schemas.openxmlformats.org/drawingml/2006/main">
               <a:ext uri="{FF2B5EF4-FFF2-40B4-BE49-F238E27FC236}">
-                <a16:creationId xmlns:a16="http://schemas.microsoft.com/office/drawing/2014/main" id="{A39C661E-0EC2-4560-81EC-DE8389215EB2}"/>
+                <a16:creationId xmlns:a16="http://schemas.microsoft.com/office/drawing/2014/main" id="{2E183086-6B5B-45E0-88A0-F47E06F630CA}"/>
               </a:ext>
             </a:extLst>
           </p:cNvPr>
@@ -4134,7 +4134,7 @@
           <p:cNvPr id="2" name="Title Placeholder 1">
             <a:extLst xmlns:a="http://schemas.openxmlformats.org/drawingml/2006/main">
               <a:ext uri="{FF2B5EF4-FFF2-40B4-BE49-F238E27FC236}">
-                <a16:creationId xmlns:a16="http://schemas.microsoft.com/office/drawing/2014/main" id="{6AC4CAC8-0027-4153-B15B-71107BBD8E25}"/>
+                <a16:creationId xmlns:a16="http://schemas.microsoft.com/office/drawing/2014/main" id="{C90C14AE-D4AC-449B-BB33-4F47E5CAF96E}"/>
               </a:ext>
             </a:extLst>
           </p:cNvPr>
@@ -4171,7 +4171,7 @@
           <p:cNvPr id="3" name="Text Placeholder 2">
             <a:extLst xmlns:a="http://schemas.openxmlformats.org/drawingml/2006/main">
               <a:ext uri="{FF2B5EF4-FFF2-40B4-BE49-F238E27FC236}">
-                <a16:creationId xmlns:a16="http://schemas.microsoft.com/office/drawing/2014/main" id="{FAC6C2DD-3197-4CD9-81A8-3A2E760596A4}"/>
+                <a16:creationId xmlns:a16="http://schemas.microsoft.com/office/drawing/2014/main" id="{301179C1-6876-4709-8FB6-1D5343147941}"/>
               </a:ext>
             </a:extLst>
           </p:cNvPr>
@@ -4243,7 +4243,7 @@
           <p:cNvPr id="4" name="Date Placeholder 3">
             <a:extLst xmlns:a="http://schemas.openxmlformats.org/drawingml/2006/main">
               <a:ext uri="{FF2B5EF4-FFF2-40B4-BE49-F238E27FC236}">
-                <a16:creationId xmlns:a16="http://schemas.microsoft.com/office/drawing/2014/main" id="{EFDE49EC-C340-4E90-816D-3900DF63D937}"/>
+                <a16:creationId xmlns:a16="http://schemas.microsoft.com/office/drawing/2014/main" id="{E5D2B63C-6B00-406C-B051-952178C3C129}"/>
               </a:ext>
             </a:extLst>
           </p:cNvPr>
@@ -4289,7 +4289,7 @@
           <p:cNvPr id="5" name="Footer Placeholder 4">
             <a:extLst xmlns:a="http://schemas.openxmlformats.org/drawingml/2006/main">
               <a:ext uri="{FF2B5EF4-FFF2-40B4-BE49-F238E27FC236}">
-                <a16:creationId xmlns:a16="http://schemas.microsoft.com/office/drawing/2014/main" id="{C5173322-901C-41BD-A4F7-8735BD16CD73}"/>
+                <a16:creationId xmlns:a16="http://schemas.microsoft.com/office/drawing/2014/main" id="{294C9BF8-D3E6-4BC9-8E1F-CB19C130A506}"/>
               </a:ext>
             </a:extLst>
           </p:cNvPr>
@@ -4331,7 +4331,7 @@
           <p:cNvPr id="6" name="Slide Number Placeholder 5">
             <a:extLst xmlns:a="http://schemas.openxmlformats.org/drawingml/2006/main">
               <a:ext uri="{FF2B5EF4-FFF2-40B4-BE49-F238E27FC236}">
-                <a16:creationId xmlns:a16="http://schemas.microsoft.com/office/drawing/2014/main" id="{94271B4E-0C13-4B2F-9F67-6E630C86C10C}"/>
+                <a16:creationId xmlns:a16="http://schemas.microsoft.com/office/drawing/2014/main" id="{B8220A19-E37A-405D-8531-3E8561C45C70}"/>
               </a:ext>
             </a:extLst>
           </p:cNvPr>
@@ -4376,17 +4376,17 @@
   </p:cSld>
   <p:clrMap bg1="lt1" tx1="dk1" bg2="lt2" tx2="dk2" accent1="accent1" accent2="accent2" accent3="accent3" accent4="accent4" accent5="accent5" accent6="accent6" hlink="hlink" folHlink="folHlink"/>
   <p:sldLayoutIdLst>
-    <p:sldLayoutId xmlns:r="http://schemas.openxmlformats.org/officeDocument/2006/relationships" id="2147483649" r:id="R572fc59d9dc0430c"/>
-    <p:sldLayoutId xmlns:r="http://schemas.openxmlformats.org/officeDocument/2006/relationships" id="2147483650" r:id="R39d5e48ada9a488f"/>
-    <p:sldLayoutId xmlns:r="http://schemas.openxmlformats.org/officeDocument/2006/relationships" id="2147483651" r:id="R53ff10749e5f418e"/>
-    <p:sldLayoutId xmlns:r="http://schemas.openxmlformats.org/officeDocument/2006/relationships" id="2147483652" r:id="R163ced5d0c7d4749"/>
-    <p:sldLayoutId xmlns:r="http://schemas.openxmlformats.org/officeDocument/2006/relationships" id="2147483653" r:id="R5b018e5d0dc84f6e"/>
-    <p:sldLayoutId xmlns:r="http://schemas.openxmlformats.org/officeDocument/2006/relationships" id="2147483654" r:id="R25996a4dac0344d4"/>
-    <p:sldLayoutId xmlns:r="http://schemas.openxmlformats.org/officeDocument/2006/relationships" id="2147483655" r:id="R8a548a0512d041c2"/>
-    <p:sldLayoutId xmlns:r="http://schemas.openxmlformats.org/officeDocument/2006/relationships" id="2147483656" r:id="Rad7dc8172a384544"/>
-    <p:sldLayoutId xmlns:r="http://schemas.openxmlformats.org/officeDocument/2006/relationships" id="2147483657" r:id="R1b169204eaab4a37"/>
-    <p:sldLayoutId xmlns:r="http://schemas.openxmlformats.org/officeDocument/2006/relationships" id="2147483658" r:id="R63e36bfe7d944f2f"/>
-    <p:sldLayoutId xmlns:r="http://schemas.openxmlformats.org/officeDocument/2006/relationships" id="2147483659" r:id="R18732eaafa04442f"/>
+    <p:sldLayoutId xmlns:r="http://schemas.openxmlformats.org/officeDocument/2006/relationships" id="2147483649" r:id="R4a58fe1f70054a57"/>
+    <p:sldLayoutId xmlns:r="http://schemas.openxmlformats.org/officeDocument/2006/relationships" id="2147483650" r:id="Rc2f999f1e4664ecd"/>
+    <p:sldLayoutId xmlns:r="http://schemas.openxmlformats.org/officeDocument/2006/relationships" id="2147483651" r:id="Rfc4f42f532424d68"/>
+    <p:sldLayoutId xmlns:r="http://schemas.openxmlformats.org/officeDocument/2006/relationships" id="2147483652" r:id="R130f8e4fdbea431a"/>
+    <p:sldLayoutId xmlns:r="http://schemas.openxmlformats.org/officeDocument/2006/relationships" id="2147483653" r:id="Red44a00dfb3b4498"/>
+    <p:sldLayoutId xmlns:r="http://schemas.openxmlformats.org/officeDocument/2006/relationships" id="2147483654" r:id="R9ba4f96023cc4a4a"/>
+    <p:sldLayoutId xmlns:r="http://schemas.openxmlformats.org/officeDocument/2006/relationships" id="2147483655" r:id="R69f99b6b156e492a"/>
+    <p:sldLayoutId xmlns:r="http://schemas.openxmlformats.org/officeDocument/2006/relationships" id="2147483656" r:id="R2fb042067e4549d6"/>
+    <p:sldLayoutId xmlns:r="http://schemas.openxmlformats.org/officeDocument/2006/relationships" id="2147483657" r:id="Rfd865b01d9334004"/>
+    <p:sldLayoutId xmlns:r="http://schemas.openxmlformats.org/officeDocument/2006/relationships" id="2147483658" r:id="R5c78c84c64294b56"/>
+    <p:sldLayoutId xmlns:r="http://schemas.openxmlformats.org/officeDocument/2006/relationships" id="2147483659" r:id="R445119cf05204c55"/>
   </p:sldLayoutIdLst>
   <p:txStyles>
     <p:titleStyle>
@@ -4939,7 +4939,7 @@
           <p:cNvPr id="2" name="Rectangle 1">
             <a:extLst xmlns:a="http://schemas.openxmlformats.org/drawingml/2006/main">
               <a:ext uri="{FF2B5EF4-FFF2-40B4-BE49-F238E27FC236}">
-                <a16:creationId xmlns:a16="http://schemas.microsoft.com/office/drawing/2014/main" id="{1BBEDC2E-7014-472D-ABCC-AEFDB90D7F8A}"/>
+                <a16:creationId xmlns:a16="http://schemas.microsoft.com/office/drawing/2014/main" id="{D14B8800-6B76-4D73-BE1F-1E6217784125}"/>
               </a:ext>
             </a:extLst>
           </p:cNvPr>
@@ -4994,7 +4994,7 @@
           <p:cNvPr id="3" name="TextBox 2">
             <a:extLst xmlns:a="http://schemas.openxmlformats.org/drawingml/2006/main">
               <a:ext uri="{FF2B5EF4-FFF2-40B4-BE49-F238E27FC236}">
-                <a16:creationId xmlns:a16="http://schemas.microsoft.com/office/drawing/2014/main" id="{4F4E36A1-093B-4E20-BA30-C74A7999DCF3}"/>
+                <a16:creationId xmlns:a16="http://schemas.microsoft.com/office/drawing/2014/main" id="{11F288B1-5160-4E71-BF21-BB4E8502DD9F}"/>
               </a:ext>
             </a:extLst>
           </p:cNvPr>
@@ -5041,7 +5041,7 @@
           <p:cNvPr id="4" name="TextBox 3">
             <a:extLst xmlns:a="http://schemas.openxmlformats.org/drawingml/2006/main">
               <a:ext uri="{FF2B5EF4-FFF2-40B4-BE49-F238E27FC236}">
-                <a16:creationId xmlns:a16="http://schemas.microsoft.com/office/drawing/2014/main" id="{545B1CBB-14A0-4C4C-8FD3-51E06DB06A70}"/>
+                <a16:creationId xmlns:a16="http://schemas.microsoft.com/office/drawing/2014/main" id="{ECFD1DE9-13B0-4D66-B15B-EFE570B2C492}"/>
               </a:ext>
             </a:extLst>
           </p:cNvPr>
@@ -5089,7 +5089,7 @@
           <p:cNvPr id="5" name="TextBox 4">
             <a:extLst xmlns:a="http://schemas.openxmlformats.org/drawingml/2006/main">
               <a:ext uri="{FF2B5EF4-FFF2-40B4-BE49-F238E27FC236}">
-                <a16:creationId xmlns:a16="http://schemas.microsoft.com/office/drawing/2014/main" id="{3418F372-6BDF-468A-BE18-8B382BB31516}"/>
+                <a16:creationId xmlns:a16="http://schemas.microsoft.com/office/drawing/2014/main" id="{8D07CF33-365F-461F-8A63-BE2485F17CC8}"/>
               </a:ext>
             </a:extLst>
           </p:cNvPr>
@@ -5136,7 +5136,7 @@
           <p:cNvPr id="6" name="Rectangle 5">
             <a:extLst xmlns:a="http://schemas.openxmlformats.org/drawingml/2006/main">
               <a:ext uri="{FF2B5EF4-FFF2-40B4-BE49-F238E27FC236}">
-                <a16:creationId xmlns:a16="http://schemas.microsoft.com/office/drawing/2014/main" id="{B843D3D0-9B45-4872-95AB-A48B90E3CEA7}"/>
+                <a16:creationId xmlns:a16="http://schemas.microsoft.com/office/drawing/2014/main" id="{348D2882-918D-497C-AF53-BF916EA9AC28}"/>
               </a:ext>
             </a:extLst>
           </p:cNvPr>
@@ -5191,7 +5191,7 @@
           <p:cNvPr id="7" name="TextBox 6">
             <a:extLst xmlns:a="http://schemas.openxmlformats.org/drawingml/2006/main">
               <a:ext uri="{FF2B5EF4-FFF2-40B4-BE49-F238E27FC236}">
-                <a16:creationId xmlns:a16="http://schemas.microsoft.com/office/drawing/2014/main" id="{ECC61E5F-CE81-4BBA-A7B1-F80F495FE67B}"/>
+                <a16:creationId xmlns:a16="http://schemas.microsoft.com/office/drawing/2014/main" id="{753C7496-848A-4AFE-A746-0AF698E0EAEE}"/>
               </a:ext>
             </a:extLst>
           </p:cNvPr>
@@ -5238,7 +5238,7 @@
           <p:cNvPr id="8" name="TextBox 7">
             <a:extLst xmlns:a="http://schemas.openxmlformats.org/drawingml/2006/main">
               <a:ext uri="{FF2B5EF4-FFF2-40B4-BE49-F238E27FC236}">
-                <a16:creationId xmlns:a16="http://schemas.microsoft.com/office/drawing/2014/main" id="{16BCFD7F-0BA8-44E9-B00B-2794DA4BB8C2}"/>
+                <a16:creationId xmlns:a16="http://schemas.microsoft.com/office/drawing/2014/main" id="{907C17B7-31ED-44C5-8108-FF558B4438F0}"/>
               </a:ext>
             </a:extLst>
           </p:cNvPr>
@@ -5275,7 +5275,7 @@
                 <a:ea typeface="Aptos"/>
                 <a:cs typeface="Aptos"/>
               </a:rPr>
-              <a:t>2026.07.24-19</a:t>
+              <a:t>2026.07.24-20</a:t>
             </a:r>
           </a:p>
         </p:txBody>
@@ -5285,7 +5285,7 @@
           <p:cNvPr id="9" name="TextBox 8">
             <a:extLst xmlns:a="http://schemas.openxmlformats.org/drawingml/2006/main">
               <a:ext uri="{FF2B5EF4-FFF2-40B4-BE49-F238E27FC236}">
-                <a16:creationId xmlns:a16="http://schemas.microsoft.com/office/drawing/2014/main" id="{1DB16063-B9FA-4077-82BD-4C94A1306662}"/>
+                <a16:creationId xmlns:a16="http://schemas.microsoft.com/office/drawing/2014/main" id="{51979D69-C9D5-4D8E-AE47-69E778C53358}"/>
               </a:ext>
             </a:extLst>
           </p:cNvPr>
@@ -5333,7 +5333,7 @@
           <p:cNvPr id="10" name="TextBox 9">
             <a:extLst xmlns:a="http://schemas.openxmlformats.org/drawingml/2006/main">
               <a:ext uri="{FF2B5EF4-FFF2-40B4-BE49-F238E27FC236}">
-                <a16:creationId xmlns:a16="http://schemas.microsoft.com/office/drawing/2014/main" id="{B16E4F45-19C9-40C6-BA63-CA9E56E84FC1}"/>
+                <a16:creationId xmlns:a16="http://schemas.microsoft.com/office/drawing/2014/main" id="{3225A716-FA27-46FB-BF73-CE39715C1A65}"/>
               </a:ext>
             </a:extLst>
           </p:cNvPr>
@@ -5380,7 +5380,7 @@
           <p:cNvPr id="11" name="TextBox 10">
             <a:extLst xmlns:a="http://schemas.openxmlformats.org/drawingml/2006/main">
               <a:ext uri="{FF2B5EF4-FFF2-40B4-BE49-F238E27FC236}">
-                <a16:creationId xmlns:a16="http://schemas.microsoft.com/office/drawing/2014/main" id="{0B74CA69-AF87-4C47-BAD5-70A0F2344174}"/>
+                <a16:creationId xmlns:a16="http://schemas.microsoft.com/office/drawing/2014/main" id="{54C9ACC7-F264-44F7-B8A3-A728479AB9D7}"/>
               </a:ext>
             </a:extLst>
           </p:cNvPr>
@@ -5427,7 +5427,7 @@
           <p:cNvPr id="12" name="TextBox 11">
             <a:extLst xmlns:a="http://schemas.openxmlformats.org/drawingml/2006/main">
               <a:ext uri="{FF2B5EF4-FFF2-40B4-BE49-F238E27FC236}">
-                <a16:creationId xmlns:a16="http://schemas.microsoft.com/office/drawing/2014/main" id="{46054E92-4680-4EE1-9BA2-50E94149D967}"/>
+                <a16:creationId xmlns:a16="http://schemas.microsoft.com/office/drawing/2014/main" id="{30D4D5CB-819D-4729-BDAD-411A843FAE53}"/>
               </a:ext>
             </a:extLst>
           </p:cNvPr>
@@ -5472,7 +5472,7 @@
     </p:spTree>
     <p:extLst>
       <p:ext uri="{BB962C8B-B14F-4D97-AF65-F5344CB8AC3E}">
-        <p14:creationId xmlns:p14="http://schemas.microsoft.com/office/powerpoint/2010/main" val="1470319129"/>
+        <p14:creationId xmlns:p14="http://schemas.microsoft.com/office/powerpoint/2010/main" val="1464668514"/>
       </p:ext>
     </p:extLst>
   </p:cSld>
@@ -5496,7 +5496,7 @@
           <p:cNvPr id="2" name="TextBox 1">
             <a:extLst xmlns:a="http://schemas.openxmlformats.org/drawingml/2006/main">
               <a:ext uri="{FF2B5EF4-FFF2-40B4-BE49-F238E27FC236}">
-                <a16:creationId xmlns:a16="http://schemas.microsoft.com/office/drawing/2014/main" id="{CF8B2D1D-C0FF-4918-B12F-A7712DBE8CC6}"/>
+                <a16:creationId xmlns:a16="http://schemas.microsoft.com/office/drawing/2014/main" id="{B626B9E0-FCF9-4670-B73F-CB31F45966D9}"/>
               </a:ext>
             </a:extLst>
           </p:cNvPr>
@@ -5543,7 +5543,7 @@
           <p:cNvPr id="3" name="TextBox 2">
             <a:extLst xmlns:a="http://schemas.openxmlformats.org/drawingml/2006/main">
               <a:ext uri="{FF2B5EF4-FFF2-40B4-BE49-F238E27FC236}">
-                <a16:creationId xmlns:a16="http://schemas.microsoft.com/office/drawing/2014/main" id="{AF5A0800-D495-4E03-9786-8F587082DB36}"/>
+                <a16:creationId xmlns:a16="http://schemas.microsoft.com/office/drawing/2014/main" id="{E56A377A-F072-4984-A5BE-C1394AC40D3B}"/>
               </a:ext>
             </a:extLst>
           </p:cNvPr>
@@ -5590,7 +5590,7 @@
           <p:cNvPr id="4" name="Rectangle 3">
             <a:extLst xmlns:a="http://schemas.openxmlformats.org/drawingml/2006/main">
               <a:ext uri="{FF2B5EF4-FFF2-40B4-BE49-F238E27FC236}">
-                <a16:creationId xmlns:a16="http://schemas.microsoft.com/office/drawing/2014/main" id="{40B864A0-7889-4DFA-A2CD-E1BD0A3C6EDE}"/>
+                <a16:creationId xmlns:a16="http://schemas.microsoft.com/office/drawing/2014/main" id="{0A3DA214-F788-41A3-8C74-6F5749DA7BED}"/>
               </a:ext>
             </a:extLst>
           </p:cNvPr>
@@ -5645,7 +5645,7 @@
           <p:cNvPr id="5" name="Rectangle 4">
             <a:extLst xmlns:a="http://schemas.openxmlformats.org/drawingml/2006/main">
               <a:ext uri="{FF2B5EF4-FFF2-40B4-BE49-F238E27FC236}">
-                <a16:creationId xmlns:a16="http://schemas.microsoft.com/office/drawing/2014/main" id="{978C01A3-30FD-462B-993E-1A8DFD0C7D15}"/>
+                <a16:creationId xmlns:a16="http://schemas.microsoft.com/office/drawing/2014/main" id="{37295BAE-2FB7-4BBF-B9D4-E3A76776EEC2}"/>
               </a:ext>
             </a:extLst>
           </p:cNvPr>
@@ -5700,7 +5700,7 @@
           <p:cNvPr id="6" name="TextBox 5">
             <a:extLst xmlns:a="http://schemas.openxmlformats.org/drawingml/2006/main">
               <a:ext uri="{FF2B5EF4-FFF2-40B4-BE49-F238E27FC236}">
-                <a16:creationId xmlns:a16="http://schemas.microsoft.com/office/drawing/2014/main" id="{5B81B556-8C98-4C01-95B9-0D60FFF26E19}"/>
+                <a16:creationId xmlns:a16="http://schemas.microsoft.com/office/drawing/2014/main" id="{53BB5CA9-3529-4188-8BB8-567E81B0CE1D}"/>
               </a:ext>
             </a:extLst>
           </p:cNvPr>
@@ -5737,7 +5737,7 @@
                 <a:ea typeface="Aptos"/>
                 <a:cs typeface="Aptos"/>
               </a:rPr>
-              <a:t>Julkinen riippumaton evidenssikooste · 2026.07.24-19 · 2026-07-24 · Lähteet: EPO; Saksa — viralliset tuomiot; WIPO</a:t>
+              <a:t>Julkinen riippumaton evidenssikooste · 2026.07.24-20 · 2026-07-24 · Lähteet: EPO; Saksa — viralliset tuomiot; WIPO</a:t>
             </a:r>
           </a:p>
         </p:txBody>
@@ -5747,7 +5747,7 @@
           <p:cNvPr id="7" name="TextBox 6">
             <a:extLst xmlns:a="http://schemas.openxmlformats.org/drawingml/2006/main">
               <a:ext uri="{FF2B5EF4-FFF2-40B4-BE49-F238E27FC236}">
-                <a16:creationId xmlns:a16="http://schemas.microsoft.com/office/drawing/2014/main" id="{21DCE5C7-5C14-4DB6-ABB9-80F6EA596DDB}"/>
+                <a16:creationId xmlns:a16="http://schemas.microsoft.com/office/drawing/2014/main" id="{4EB5F0C1-4D43-40B8-AB26-E92A0296CEB2}"/>
               </a:ext>
             </a:extLst>
           </p:cNvPr>
@@ -5794,7 +5794,7 @@
           <p:cNvPr id="8" name="TextBox 7">
             <a:extLst xmlns:a="http://schemas.openxmlformats.org/drawingml/2006/main">
               <a:ext uri="{FF2B5EF4-FFF2-40B4-BE49-F238E27FC236}">
-                <a16:creationId xmlns:a16="http://schemas.microsoft.com/office/drawing/2014/main" id="{711489FA-E5B6-4051-97AA-1FC503CEC77A}"/>
+                <a16:creationId xmlns:a16="http://schemas.microsoft.com/office/drawing/2014/main" id="{946DC005-AFD8-4525-AEBC-0FA6D3D3EBF1}"/>
               </a:ext>
             </a:extLst>
           </p:cNvPr>
@@ -5841,7 +5841,7 @@
           <p:cNvPr id="9" name="TextBox 8">
             <a:extLst xmlns:a="http://schemas.openxmlformats.org/drawingml/2006/main">
               <a:ext uri="{FF2B5EF4-FFF2-40B4-BE49-F238E27FC236}">
-                <a16:creationId xmlns:a16="http://schemas.microsoft.com/office/drawing/2014/main" id="{C73B838D-40E1-42E4-90D4-DCE9D712FD8E}"/>
+                <a16:creationId xmlns:a16="http://schemas.microsoft.com/office/drawing/2014/main" id="{E22AD3D4-240D-4CC3-9ED1-48106FD62182}"/>
               </a:ext>
             </a:extLst>
           </p:cNvPr>
@@ -5938,7 +5938,7 @@
           <p:cNvPr id="10" name="Rounded Rectangle 9">
             <a:extLst xmlns:a="http://schemas.openxmlformats.org/drawingml/2006/main">
               <a:ext uri="{FF2B5EF4-FFF2-40B4-BE49-F238E27FC236}">
-                <a16:creationId xmlns:a16="http://schemas.microsoft.com/office/drawing/2014/main" id="{840533DC-9743-40D8-86CA-1C79F8F3C462}"/>
+                <a16:creationId xmlns:a16="http://schemas.microsoft.com/office/drawing/2014/main" id="{5D5980A7-CA3B-4B08-9E30-526BD0D9EDC2}"/>
               </a:ext>
             </a:extLst>
           </p:cNvPr>
@@ -5995,7 +5995,7 @@
           <p:cNvPr id="11" name="TextBox 10">
             <a:extLst xmlns:a="http://schemas.openxmlformats.org/drawingml/2006/main">
               <a:ext uri="{FF2B5EF4-FFF2-40B4-BE49-F238E27FC236}">
-                <a16:creationId xmlns:a16="http://schemas.microsoft.com/office/drawing/2014/main" id="{EDA2F288-1A06-418A-BA26-47244A32F086}"/>
+                <a16:creationId xmlns:a16="http://schemas.microsoft.com/office/drawing/2014/main" id="{87118E2C-17E0-4701-BA30-2B5B6840666C}"/>
               </a:ext>
             </a:extLst>
           </p:cNvPr>
@@ -6042,7 +6042,7 @@
           <p:cNvPr id="12" name="TextBox 11">
             <a:extLst xmlns:a="http://schemas.openxmlformats.org/drawingml/2006/main">
               <a:ext uri="{FF2B5EF4-FFF2-40B4-BE49-F238E27FC236}">
-                <a16:creationId xmlns:a16="http://schemas.microsoft.com/office/drawing/2014/main" id="{ECCFD158-02C9-4BBE-8F2C-3BB2DA802DFA}"/>
+                <a16:creationId xmlns:a16="http://schemas.microsoft.com/office/drawing/2014/main" id="{2750DF61-0A04-4471-8062-EC14FC8D6B3C}"/>
               </a:ext>
             </a:extLst>
           </p:cNvPr>
@@ -6087,7 +6087,7 @@
     </p:spTree>
     <p:extLst>
       <p:ext uri="{BB962C8B-B14F-4D97-AF65-F5344CB8AC3E}">
-        <p14:creationId xmlns:p14="http://schemas.microsoft.com/office/powerpoint/2010/main" val="1656816560"/>
+        <p14:creationId xmlns:p14="http://schemas.microsoft.com/office/powerpoint/2010/main" val="1237222428"/>
       </p:ext>
     </p:extLst>
   </p:cSld>
@@ -6111,7 +6111,7 @@
           <p:cNvPr id="2" name="TextBox 1">
             <a:extLst xmlns:a="http://schemas.openxmlformats.org/drawingml/2006/main">
               <a:ext uri="{FF2B5EF4-FFF2-40B4-BE49-F238E27FC236}">
-                <a16:creationId xmlns:a16="http://schemas.microsoft.com/office/drawing/2014/main" id="{78B7ACF6-8E19-4794-9B96-282B549EC9D4}"/>
+                <a16:creationId xmlns:a16="http://schemas.microsoft.com/office/drawing/2014/main" id="{4CD39106-AAA2-4702-996D-E155BF2A9F67}"/>
               </a:ext>
             </a:extLst>
           </p:cNvPr>
@@ -6158,7 +6158,7 @@
           <p:cNvPr id="3" name="TextBox 2">
             <a:extLst xmlns:a="http://schemas.openxmlformats.org/drawingml/2006/main">
               <a:ext uri="{FF2B5EF4-FFF2-40B4-BE49-F238E27FC236}">
-                <a16:creationId xmlns:a16="http://schemas.microsoft.com/office/drawing/2014/main" id="{715B9817-7148-466B-BCCF-705B7730F2F5}"/>
+                <a16:creationId xmlns:a16="http://schemas.microsoft.com/office/drawing/2014/main" id="{9EBE2BC3-DB24-4E63-A022-19FC4110FD5E}"/>
               </a:ext>
             </a:extLst>
           </p:cNvPr>
@@ -6205,7 +6205,7 @@
           <p:cNvPr id="4" name="Rectangle 3">
             <a:extLst xmlns:a="http://schemas.openxmlformats.org/drawingml/2006/main">
               <a:ext uri="{FF2B5EF4-FFF2-40B4-BE49-F238E27FC236}">
-                <a16:creationId xmlns:a16="http://schemas.microsoft.com/office/drawing/2014/main" id="{81F6B468-7BEA-4F4D-A773-0B057A2C84BC}"/>
+                <a16:creationId xmlns:a16="http://schemas.microsoft.com/office/drawing/2014/main" id="{FE2701EF-3E41-4B41-8DD6-069132FB0B69}"/>
               </a:ext>
             </a:extLst>
           </p:cNvPr>
@@ -6260,7 +6260,7 @@
           <p:cNvPr id="5" name="Rectangle 4">
             <a:extLst xmlns:a="http://schemas.openxmlformats.org/drawingml/2006/main">
               <a:ext uri="{FF2B5EF4-FFF2-40B4-BE49-F238E27FC236}">
-                <a16:creationId xmlns:a16="http://schemas.microsoft.com/office/drawing/2014/main" id="{5B61527F-8D59-4C63-AC4A-BB061A0FDB63}"/>
+                <a16:creationId xmlns:a16="http://schemas.microsoft.com/office/drawing/2014/main" id="{C9EF208B-E627-4649-A274-81EFF447BEBA}"/>
               </a:ext>
             </a:extLst>
           </p:cNvPr>
@@ -6315,7 +6315,7 @@
           <p:cNvPr id="6" name="TextBox 5">
             <a:extLst xmlns:a="http://schemas.openxmlformats.org/drawingml/2006/main">
               <a:ext uri="{FF2B5EF4-FFF2-40B4-BE49-F238E27FC236}">
-                <a16:creationId xmlns:a16="http://schemas.microsoft.com/office/drawing/2014/main" id="{B1FD4116-3EBD-44E5-B846-A9318639DA8F}"/>
+                <a16:creationId xmlns:a16="http://schemas.microsoft.com/office/drawing/2014/main" id="{088A913D-F805-473B-9134-1E42A82B3A7F}"/>
               </a:ext>
             </a:extLst>
           </p:cNvPr>
@@ -6352,7 +6352,7 @@
                 <a:ea typeface="Aptos"/>
                 <a:cs typeface="Aptos"/>
               </a:rPr>
-              <a:t>Julkinen riippumaton evidenssikooste · 2026.07.24-19 · 2026-07-24 · Lähteet: EPO Register; EP3032975B2; 8 Ni 18/24 (EP); 7 O 3341/24</a:t>
+              <a:t>Julkinen riippumaton evidenssikooste · 2026.07.24-20 · 2026-07-24 · Lähteet: EPO Register; EP3032975B2; 8 Ni 18/24 (EP); 7 O 3341/24</a:t>
             </a:r>
           </a:p>
         </p:txBody>
@@ -6362,7 +6362,7 @@
           <p:cNvPr id="7" name="TextBox 6">
             <a:extLst xmlns:a="http://schemas.openxmlformats.org/drawingml/2006/main">
               <a:ext uri="{FF2B5EF4-FFF2-40B4-BE49-F238E27FC236}">
-                <a16:creationId xmlns:a16="http://schemas.microsoft.com/office/drawing/2014/main" id="{7931D011-D6B8-4569-8C68-142E70C1E7BA}"/>
+                <a16:creationId xmlns:a16="http://schemas.microsoft.com/office/drawing/2014/main" id="{10146B47-8360-4CD2-9E8D-B5B5CCB01F3B}"/>
               </a:ext>
             </a:extLst>
           </p:cNvPr>
@@ -6409,7 +6409,7 @@
           <p:cNvPr id="8" name="Rounded Rectangle 7">
             <a:extLst xmlns:a="http://schemas.openxmlformats.org/drawingml/2006/main">
               <a:ext uri="{FF2B5EF4-FFF2-40B4-BE49-F238E27FC236}">
-                <a16:creationId xmlns:a16="http://schemas.microsoft.com/office/drawing/2014/main" id="{7D6BE880-CA2B-4089-B736-C6E92CFEC825}"/>
+                <a16:creationId xmlns:a16="http://schemas.microsoft.com/office/drawing/2014/main" id="{D8C7802E-E61F-4413-8A28-28847097DEC2}"/>
               </a:ext>
             </a:extLst>
           </p:cNvPr>
@@ -6466,7 +6466,7 @@
           <p:cNvPr id="9" name="TextBox 8">
             <a:extLst xmlns:a="http://schemas.openxmlformats.org/drawingml/2006/main">
               <a:ext uri="{FF2B5EF4-FFF2-40B4-BE49-F238E27FC236}">
-                <a16:creationId xmlns:a16="http://schemas.microsoft.com/office/drawing/2014/main" id="{CD3502AC-6F4C-4AD0-8C2F-69EDDD4EF16E}"/>
+                <a16:creationId xmlns:a16="http://schemas.microsoft.com/office/drawing/2014/main" id="{159A4455-6B48-4533-BDC1-1A35B0167EE2}"/>
               </a:ext>
             </a:extLst>
           </p:cNvPr>
@@ -6513,7 +6513,7 @@
           <p:cNvPr id="10" name="TextBox 9">
             <a:extLst xmlns:a="http://schemas.openxmlformats.org/drawingml/2006/main">
               <a:ext uri="{FF2B5EF4-FFF2-40B4-BE49-F238E27FC236}">
-                <a16:creationId xmlns:a16="http://schemas.microsoft.com/office/drawing/2014/main" id="{DE08C145-BB5E-4B30-AB45-84ACC33AD8D6}"/>
+                <a16:creationId xmlns:a16="http://schemas.microsoft.com/office/drawing/2014/main" id="{4885AE3A-D0B1-4400-9A4D-BEEC05C04AE8}"/>
               </a:ext>
             </a:extLst>
           </p:cNvPr>
@@ -6560,7 +6560,7 @@
           <p:cNvPr id="11" name="Rounded Rectangle 10">
             <a:extLst xmlns:a="http://schemas.openxmlformats.org/drawingml/2006/main">
               <a:ext uri="{FF2B5EF4-FFF2-40B4-BE49-F238E27FC236}">
-                <a16:creationId xmlns:a16="http://schemas.microsoft.com/office/drawing/2014/main" id="{D4FEA2DB-3DE1-4C26-A075-4F86166A2842}"/>
+                <a16:creationId xmlns:a16="http://schemas.microsoft.com/office/drawing/2014/main" id="{5235D55F-AECB-40EF-8F0F-81FE54D9219A}"/>
               </a:ext>
             </a:extLst>
           </p:cNvPr>
@@ -6617,7 +6617,7 @@
           <p:cNvPr id="12" name="TextBox 11">
             <a:extLst xmlns:a="http://schemas.openxmlformats.org/drawingml/2006/main">
               <a:ext uri="{FF2B5EF4-FFF2-40B4-BE49-F238E27FC236}">
-                <a16:creationId xmlns:a16="http://schemas.microsoft.com/office/drawing/2014/main" id="{B972346F-7865-4CE6-9CCD-ACF32A0D8B28}"/>
+                <a16:creationId xmlns:a16="http://schemas.microsoft.com/office/drawing/2014/main" id="{50FA5F06-AB6A-442A-8105-E4A2E84B155D}"/>
               </a:ext>
             </a:extLst>
           </p:cNvPr>
@@ -6664,7 +6664,7 @@
           <p:cNvPr id="13" name="TextBox 12">
             <a:extLst xmlns:a="http://schemas.openxmlformats.org/drawingml/2006/main">
               <a:ext uri="{FF2B5EF4-FFF2-40B4-BE49-F238E27FC236}">
-                <a16:creationId xmlns:a16="http://schemas.microsoft.com/office/drawing/2014/main" id="{D22AA670-1DF0-467E-93A1-A79207A48411}"/>
+                <a16:creationId xmlns:a16="http://schemas.microsoft.com/office/drawing/2014/main" id="{8C3E8E8B-0134-4DAE-AB02-ED7BC8CFA515}"/>
               </a:ext>
             </a:extLst>
           </p:cNvPr>
@@ -6711,7 +6711,7 @@
           <p:cNvPr id="14" name="Rounded Rectangle 13">
             <a:extLst xmlns:a="http://schemas.openxmlformats.org/drawingml/2006/main">
               <a:ext uri="{FF2B5EF4-FFF2-40B4-BE49-F238E27FC236}">
-                <a16:creationId xmlns:a16="http://schemas.microsoft.com/office/drawing/2014/main" id="{0DC7AB65-8A3F-4F99-8C1D-9B0A0AD88CC4}"/>
+                <a16:creationId xmlns:a16="http://schemas.microsoft.com/office/drawing/2014/main" id="{C5497B23-F7AB-4DEB-9BC5-12A509D64825}"/>
               </a:ext>
             </a:extLst>
           </p:cNvPr>
@@ -6768,7 +6768,7 @@
           <p:cNvPr id="15" name="TextBox 14">
             <a:extLst xmlns:a="http://schemas.openxmlformats.org/drawingml/2006/main">
               <a:ext uri="{FF2B5EF4-FFF2-40B4-BE49-F238E27FC236}">
-                <a16:creationId xmlns:a16="http://schemas.microsoft.com/office/drawing/2014/main" id="{8EC3D69E-9A43-4BB7-9D79-5A95E0EFB9CA}"/>
+                <a16:creationId xmlns:a16="http://schemas.microsoft.com/office/drawing/2014/main" id="{271199EB-89BE-4265-81E4-C6E6FCF001A0}"/>
               </a:ext>
             </a:extLst>
           </p:cNvPr>
@@ -6815,7 +6815,7 @@
           <p:cNvPr id="16" name="TextBox 15">
             <a:extLst xmlns:a="http://schemas.openxmlformats.org/drawingml/2006/main">
               <a:ext uri="{FF2B5EF4-FFF2-40B4-BE49-F238E27FC236}">
-                <a16:creationId xmlns:a16="http://schemas.microsoft.com/office/drawing/2014/main" id="{56B80351-4179-400C-8520-A1C190219F65}"/>
+                <a16:creationId xmlns:a16="http://schemas.microsoft.com/office/drawing/2014/main" id="{F37F5C80-E9B1-417F-A16A-BAB4E06B3B9C}"/>
               </a:ext>
             </a:extLst>
           </p:cNvPr>
@@ -6862,7 +6862,7 @@
           <p:cNvPr id="17" name="TextBox 16">
             <a:extLst xmlns:a="http://schemas.openxmlformats.org/drawingml/2006/main">
               <a:ext uri="{FF2B5EF4-FFF2-40B4-BE49-F238E27FC236}">
-                <a16:creationId xmlns:a16="http://schemas.microsoft.com/office/drawing/2014/main" id="{7656E69D-EBBD-4204-B99E-0F4941B7ADA5}"/>
+                <a16:creationId xmlns:a16="http://schemas.microsoft.com/office/drawing/2014/main" id="{ABDCEBDE-5688-41FA-A46C-F023B6F48F4C}"/>
               </a:ext>
             </a:extLst>
           </p:cNvPr>
@@ -6909,7 +6909,7 @@
           <p:cNvPr id="18" name="Rounded Rectangle 17">
             <a:extLst xmlns:a="http://schemas.openxmlformats.org/drawingml/2006/main">
               <a:ext uri="{FF2B5EF4-FFF2-40B4-BE49-F238E27FC236}">
-                <a16:creationId xmlns:a16="http://schemas.microsoft.com/office/drawing/2014/main" id="{58F5A8E6-A9C7-4892-99DA-6C4709D3B930}"/>
+                <a16:creationId xmlns:a16="http://schemas.microsoft.com/office/drawing/2014/main" id="{8D39A3AA-7C12-415B-B1F7-3BD46A77199D}"/>
               </a:ext>
             </a:extLst>
           </p:cNvPr>
@@ -6966,7 +6966,7 @@
           <p:cNvPr id="19" name="TextBox 18">
             <a:extLst xmlns:a="http://schemas.openxmlformats.org/drawingml/2006/main">
               <a:ext uri="{FF2B5EF4-FFF2-40B4-BE49-F238E27FC236}">
-                <a16:creationId xmlns:a16="http://schemas.microsoft.com/office/drawing/2014/main" id="{CB223BD5-A409-4B4B-8D34-3C6F3683FAED}"/>
+                <a16:creationId xmlns:a16="http://schemas.microsoft.com/office/drawing/2014/main" id="{DD1AE486-5DC4-47F9-9345-136A5A03668D}"/>
               </a:ext>
             </a:extLst>
           </p:cNvPr>
@@ -7013,7 +7013,7 @@
           <p:cNvPr id="20" name="TextBox 19">
             <a:extLst xmlns:a="http://schemas.openxmlformats.org/drawingml/2006/main">
               <a:ext uri="{FF2B5EF4-FFF2-40B4-BE49-F238E27FC236}">
-                <a16:creationId xmlns:a16="http://schemas.microsoft.com/office/drawing/2014/main" id="{9F0E355C-AA8B-4A17-B242-DA66981CDABE}"/>
+                <a16:creationId xmlns:a16="http://schemas.microsoft.com/office/drawing/2014/main" id="{55328512-A4C0-469C-A8DA-7E033ED3A819}"/>
               </a:ext>
             </a:extLst>
           </p:cNvPr>
@@ -7058,7 +7058,7 @@
     </p:spTree>
     <p:extLst>
       <p:ext uri="{BB962C8B-B14F-4D97-AF65-F5344CB8AC3E}">
-        <p14:creationId xmlns:p14="http://schemas.microsoft.com/office/powerpoint/2010/main" val="251220599"/>
+        <p14:creationId xmlns:p14="http://schemas.microsoft.com/office/powerpoint/2010/main" val="92434998"/>
       </p:ext>
     </p:extLst>
   </p:cSld>
@@ -7082,7 +7082,7 @@
           <p:cNvPr id="2" name="TextBox 1">
             <a:extLst xmlns:a="http://schemas.openxmlformats.org/drawingml/2006/main">
               <a:ext uri="{FF2B5EF4-FFF2-40B4-BE49-F238E27FC236}">
-                <a16:creationId xmlns:a16="http://schemas.microsoft.com/office/drawing/2014/main" id="{4C5B1369-2977-4BF9-907C-E16C3A6D1124}"/>
+                <a16:creationId xmlns:a16="http://schemas.microsoft.com/office/drawing/2014/main" id="{2EACCFE2-D7AD-40AD-AEB6-BBDCDBEFD4B3}"/>
               </a:ext>
             </a:extLst>
           </p:cNvPr>
@@ -7129,7 +7129,7 @@
           <p:cNvPr id="3" name="TextBox 2">
             <a:extLst xmlns:a="http://schemas.openxmlformats.org/drawingml/2006/main">
               <a:ext uri="{FF2B5EF4-FFF2-40B4-BE49-F238E27FC236}">
-                <a16:creationId xmlns:a16="http://schemas.microsoft.com/office/drawing/2014/main" id="{EF6EE112-76F0-48AF-ABE6-45E15493A848}"/>
+                <a16:creationId xmlns:a16="http://schemas.microsoft.com/office/drawing/2014/main" id="{9153FBBC-99CB-41B8-8D03-01B3BA647D35}"/>
               </a:ext>
             </a:extLst>
           </p:cNvPr>
@@ -7176,7 +7176,7 @@
           <p:cNvPr id="4" name="Rectangle 3">
             <a:extLst xmlns:a="http://schemas.openxmlformats.org/drawingml/2006/main">
               <a:ext uri="{FF2B5EF4-FFF2-40B4-BE49-F238E27FC236}">
-                <a16:creationId xmlns:a16="http://schemas.microsoft.com/office/drawing/2014/main" id="{971EA3E6-D6B0-47EC-A955-82E816137A98}"/>
+                <a16:creationId xmlns:a16="http://schemas.microsoft.com/office/drawing/2014/main" id="{F9132A36-ED2F-43A4-8F80-8E017C97F89D}"/>
               </a:ext>
             </a:extLst>
           </p:cNvPr>
@@ -7231,7 +7231,7 @@
           <p:cNvPr id="5" name="Rectangle 4">
             <a:extLst xmlns:a="http://schemas.openxmlformats.org/drawingml/2006/main">
               <a:ext uri="{FF2B5EF4-FFF2-40B4-BE49-F238E27FC236}">
-                <a16:creationId xmlns:a16="http://schemas.microsoft.com/office/drawing/2014/main" id="{90E8D63B-CF9A-48DE-A07F-73844FA7F29F}"/>
+                <a16:creationId xmlns:a16="http://schemas.microsoft.com/office/drawing/2014/main" id="{D0983595-18A8-456A-99D6-F58B6211FD7C}"/>
               </a:ext>
             </a:extLst>
           </p:cNvPr>
@@ -7286,7 +7286,7 @@
           <p:cNvPr id="6" name="TextBox 5">
             <a:extLst xmlns:a="http://schemas.openxmlformats.org/drawingml/2006/main">
               <a:ext uri="{FF2B5EF4-FFF2-40B4-BE49-F238E27FC236}">
-                <a16:creationId xmlns:a16="http://schemas.microsoft.com/office/drawing/2014/main" id="{F0D009FE-4BDA-4A11-95C5-C6DCFDA49B23}"/>
+                <a16:creationId xmlns:a16="http://schemas.microsoft.com/office/drawing/2014/main" id="{9FF4E917-1411-444F-92B1-F1AFAD76428C}"/>
               </a:ext>
             </a:extLst>
           </p:cNvPr>
@@ -7323,7 +7323,7 @@
                 <a:ea typeface="Aptos"/>
                 <a:cs typeface="Aptos"/>
               </a:rPr>
-              <a:t>Julkinen riippumaton evidenssikooste · 2026.07.24-19 · 2026-07-24 · Lähteet: Statistics Canada; Health Canada; New Zealand Ministry of Health; Destatis; Vero; Sejm; Ruotsin hallitus; FTC; European Commission; IMARC; GVR; Fortune</a:t>
+              <a:t>Julkinen riippumaton evidenssikooste · 2026.07.24-20 · 2026-07-24 · Lähteet: Statistics Canada; Health Canada; New Zealand Ministry of Health; Destatis; Vero; Sejm; Ruotsin hallitus; FTC; European Commission; IMARC; GVR; Fortune</a:t>
             </a:r>
           </a:p>
         </p:txBody>
@@ -7333,7 +7333,7 @@
           <p:cNvPr id="7" name="TextBox 6">
             <a:extLst xmlns:a="http://schemas.openxmlformats.org/drawingml/2006/main">
               <a:ext uri="{FF2B5EF4-FFF2-40B4-BE49-F238E27FC236}">
-                <a16:creationId xmlns:a16="http://schemas.microsoft.com/office/drawing/2014/main" id="{8EA6F9BE-264F-41C3-942C-38A45AB75881}"/>
+                <a16:creationId xmlns:a16="http://schemas.microsoft.com/office/drawing/2014/main" id="{183B3B37-517A-45D6-B85D-60406698055E}"/>
               </a:ext>
             </a:extLst>
           </p:cNvPr>
@@ -7380,7 +7380,7 @@
           <p:cNvPr id="8" name="Rounded Rectangle 7">
             <a:extLst xmlns:a="http://schemas.openxmlformats.org/drawingml/2006/main">
               <a:ext uri="{FF2B5EF4-FFF2-40B4-BE49-F238E27FC236}">
-                <a16:creationId xmlns:a16="http://schemas.microsoft.com/office/drawing/2014/main" id="{70FB1117-9BA6-47DD-9C79-15909803579E}"/>
+                <a16:creationId xmlns:a16="http://schemas.microsoft.com/office/drawing/2014/main" id="{630F5ACC-9492-4B5F-961D-05F8CB745A45}"/>
               </a:ext>
             </a:extLst>
           </p:cNvPr>
@@ -7437,7 +7437,7 @@
           <p:cNvPr id="9" name="TextBox 8">
             <a:extLst xmlns:a="http://schemas.openxmlformats.org/drawingml/2006/main">
               <a:ext uri="{FF2B5EF4-FFF2-40B4-BE49-F238E27FC236}">
-                <a16:creationId xmlns:a16="http://schemas.microsoft.com/office/drawing/2014/main" id="{8D6724A3-F956-4573-A380-1CBB9D16FD2E}"/>
+                <a16:creationId xmlns:a16="http://schemas.microsoft.com/office/drawing/2014/main" id="{B1678B53-D057-44E1-B8BB-577F1160D2B8}"/>
               </a:ext>
             </a:extLst>
           </p:cNvPr>
@@ -7484,7 +7484,7 @@
           <p:cNvPr id="10" name="TextBox 9">
             <a:extLst xmlns:a="http://schemas.openxmlformats.org/drawingml/2006/main">
               <a:ext uri="{FF2B5EF4-FFF2-40B4-BE49-F238E27FC236}">
-                <a16:creationId xmlns:a16="http://schemas.microsoft.com/office/drawing/2014/main" id="{C66BF791-255A-4E33-A763-D8A9D30BD8A2}"/>
+                <a16:creationId xmlns:a16="http://schemas.microsoft.com/office/drawing/2014/main" id="{0BC3E1E0-A986-42B2-8B98-144A1E3FB186}"/>
               </a:ext>
             </a:extLst>
           </p:cNvPr>
@@ -7531,7 +7531,7 @@
           <p:cNvPr id="11" name="Rounded Rectangle 10">
             <a:extLst xmlns:a="http://schemas.openxmlformats.org/drawingml/2006/main">
               <a:ext uri="{FF2B5EF4-FFF2-40B4-BE49-F238E27FC236}">
-                <a16:creationId xmlns:a16="http://schemas.microsoft.com/office/drawing/2014/main" id="{84CAA8F9-AEC0-4F97-BA1D-37855D66376C}"/>
+                <a16:creationId xmlns:a16="http://schemas.microsoft.com/office/drawing/2014/main" id="{C09F52FE-619E-4F43-9358-200A8A682656}"/>
               </a:ext>
             </a:extLst>
           </p:cNvPr>
@@ -7588,7 +7588,7 @@
           <p:cNvPr id="12" name="TextBox 11">
             <a:extLst xmlns:a="http://schemas.openxmlformats.org/drawingml/2006/main">
               <a:ext uri="{FF2B5EF4-FFF2-40B4-BE49-F238E27FC236}">
-                <a16:creationId xmlns:a16="http://schemas.microsoft.com/office/drawing/2014/main" id="{1F2D3100-FCFC-4CF9-9C7A-25DA71800573}"/>
+                <a16:creationId xmlns:a16="http://schemas.microsoft.com/office/drawing/2014/main" id="{4C6C6A8F-52BC-4DC1-A1F2-5851472620D8}"/>
               </a:ext>
             </a:extLst>
           </p:cNvPr>
@@ -7635,7 +7635,7 @@
           <p:cNvPr id="13" name="TextBox 12">
             <a:extLst xmlns:a="http://schemas.openxmlformats.org/drawingml/2006/main">
               <a:ext uri="{FF2B5EF4-FFF2-40B4-BE49-F238E27FC236}">
-                <a16:creationId xmlns:a16="http://schemas.microsoft.com/office/drawing/2014/main" id="{7DE0E709-CA03-4CF2-9E21-32521B20DC6C}"/>
+                <a16:creationId xmlns:a16="http://schemas.microsoft.com/office/drawing/2014/main" id="{5F6DB08C-84F1-4585-9D91-525399FA6E49}"/>
               </a:ext>
             </a:extLst>
           </p:cNvPr>
@@ -7682,7 +7682,7 @@
           <p:cNvPr id="14" name="Rounded Rectangle 13">
             <a:extLst xmlns:a="http://schemas.openxmlformats.org/drawingml/2006/main">
               <a:ext uri="{FF2B5EF4-FFF2-40B4-BE49-F238E27FC236}">
-                <a16:creationId xmlns:a16="http://schemas.microsoft.com/office/drawing/2014/main" id="{317A1F12-D6FB-4D7E-89F4-6E81B35199C8}"/>
+                <a16:creationId xmlns:a16="http://schemas.microsoft.com/office/drawing/2014/main" id="{0BC786D0-A189-41C8-ADDF-491314E64E90}"/>
               </a:ext>
             </a:extLst>
           </p:cNvPr>
@@ -7739,7 +7739,7 @@
           <p:cNvPr id="15" name="TextBox 14">
             <a:extLst xmlns:a="http://schemas.openxmlformats.org/drawingml/2006/main">
               <a:ext uri="{FF2B5EF4-FFF2-40B4-BE49-F238E27FC236}">
-                <a16:creationId xmlns:a16="http://schemas.microsoft.com/office/drawing/2014/main" id="{7175DE55-3C06-4B96-9244-ECE8E67DACC0}"/>
+                <a16:creationId xmlns:a16="http://schemas.microsoft.com/office/drawing/2014/main" id="{B7308962-2EB2-4748-BD54-56F86F59D4E3}"/>
               </a:ext>
             </a:extLst>
           </p:cNvPr>
@@ -7786,7 +7786,7 @@
           <p:cNvPr id="16" name="TextBox 15">
             <a:extLst xmlns:a="http://schemas.openxmlformats.org/drawingml/2006/main">
               <a:ext uri="{FF2B5EF4-FFF2-40B4-BE49-F238E27FC236}">
-                <a16:creationId xmlns:a16="http://schemas.microsoft.com/office/drawing/2014/main" id="{81F5DAE4-84FA-4D27-981F-E3631FCE716A}"/>
+                <a16:creationId xmlns:a16="http://schemas.microsoft.com/office/drawing/2014/main" id="{2697B8AC-D143-442A-BE8F-7CF7EA26506D}"/>
               </a:ext>
             </a:extLst>
           </p:cNvPr>
@@ -7833,7 +7833,7 @@
           <p:cNvPr id="17" name="TextBox 16">
             <a:extLst xmlns:a="http://schemas.openxmlformats.org/drawingml/2006/main">
               <a:ext uri="{FF2B5EF4-FFF2-40B4-BE49-F238E27FC236}">
-                <a16:creationId xmlns:a16="http://schemas.microsoft.com/office/drawing/2014/main" id="{D00692AA-6F99-479A-90D6-4FF41D10EF13}"/>
+                <a16:creationId xmlns:a16="http://schemas.microsoft.com/office/drawing/2014/main" id="{FB62BA8F-7956-4382-840E-8ACD8D5F833B}"/>
               </a:ext>
             </a:extLst>
           </p:cNvPr>
@@ -7880,7 +7880,7 @@
           <p:cNvPr id="18" name="Rounded Rectangle 17">
             <a:extLst xmlns:a="http://schemas.openxmlformats.org/drawingml/2006/main">
               <a:ext uri="{FF2B5EF4-FFF2-40B4-BE49-F238E27FC236}">
-                <a16:creationId xmlns:a16="http://schemas.microsoft.com/office/drawing/2014/main" id="{2D610834-0FBF-4040-9B63-565372E05D6B}"/>
+                <a16:creationId xmlns:a16="http://schemas.microsoft.com/office/drawing/2014/main" id="{CB381D6B-9290-405F-A3FA-B151A3441881}"/>
               </a:ext>
             </a:extLst>
           </p:cNvPr>
@@ -7937,7 +7937,7 @@
           <p:cNvPr id="19" name="TextBox 18">
             <a:extLst xmlns:a="http://schemas.openxmlformats.org/drawingml/2006/main">
               <a:ext uri="{FF2B5EF4-FFF2-40B4-BE49-F238E27FC236}">
-                <a16:creationId xmlns:a16="http://schemas.microsoft.com/office/drawing/2014/main" id="{F4C4D643-4611-4C06-B2DF-8C374BD31C66}"/>
+                <a16:creationId xmlns:a16="http://schemas.microsoft.com/office/drawing/2014/main" id="{1A8FB526-A3C5-486B-9403-8BFD0D2BA4BE}"/>
               </a:ext>
             </a:extLst>
           </p:cNvPr>
@@ -7984,7 +7984,7 @@
           <p:cNvPr id="20" name="TextBox 19">
             <a:extLst xmlns:a="http://schemas.openxmlformats.org/drawingml/2006/main">
               <a:ext uri="{FF2B5EF4-FFF2-40B4-BE49-F238E27FC236}">
-                <a16:creationId xmlns:a16="http://schemas.microsoft.com/office/drawing/2014/main" id="{407C2A4C-0A93-4680-AC95-29F727077C0A}"/>
+                <a16:creationId xmlns:a16="http://schemas.microsoft.com/office/drawing/2014/main" id="{B8F2CC95-9C00-41FB-BFB8-46171CB3108F}"/>
               </a:ext>
             </a:extLst>
           </p:cNvPr>
@@ -8029,7 +8029,7 @@
     </p:spTree>
     <p:extLst>
       <p:ext uri="{BB962C8B-B14F-4D97-AF65-F5344CB8AC3E}">
-        <p14:creationId xmlns:p14="http://schemas.microsoft.com/office/powerpoint/2010/main" val="516382949"/>
+        <p14:creationId xmlns:p14="http://schemas.microsoft.com/office/powerpoint/2010/main" val="1595099941"/>
       </p:ext>
     </p:extLst>
   </p:cSld>
@@ -8053,7 +8053,7 @@
           <p:cNvPr id="2" name="TextBox 1">
             <a:extLst xmlns:a="http://schemas.openxmlformats.org/drawingml/2006/main">
               <a:ext uri="{FF2B5EF4-FFF2-40B4-BE49-F238E27FC236}">
-                <a16:creationId xmlns:a16="http://schemas.microsoft.com/office/drawing/2014/main" id="{E5AA089E-CC4B-4073-8F47-9C989671F854}"/>
+                <a16:creationId xmlns:a16="http://schemas.microsoft.com/office/drawing/2014/main" id="{3705D192-BE67-4424-AC14-4EC6372DADA1}"/>
               </a:ext>
             </a:extLst>
           </p:cNvPr>
@@ -8100,7 +8100,7 @@
           <p:cNvPr id="3" name="TextBox 2">
             <a:extLst xmlns:a="http://schemas.openxmlformats.org/drawingml/2006/main">
               <a:ext uri="{FF2B5EF4-FFF2-40B4-BE49-F238E27FC236}">
-                <a16:creationId xmlns:a16="http://schemas.microsoft.com/office/drawing/2014/main" id="{E37AF433-1CC9-4156-A247-C0C8AB54BB15}"/>
+                <a16:creationId xmlns:a16="http://schemas.microsoft.com/office/drawing/2014/main" id="{E45AA2FC-FC7A-4315-B00C-C655600F44AC}"/>
               </a:ext>
             </a:extLst>
           </p:cNvPr>
@@ -8147,7 +8147,7 @@
           <p:cNvPr id="4" name="Rectangle 3">
             <a:extLst xmlns:a="http://schemas.openxmlformats.org/drawingml/2006/main">
               <a:ext uri="{FF2B5EF4-FFF2-40B4-BE49-F238E27FC236}">
-                <a16:creationId xmlns:a16="http://schemas.microsoft.com/office/drawing/2014/main" id="{A47A7434-C54B-4B82-8923-9C5B42E5C00D}"/>
+                <a16:creationId xmlns:a16="http://schemas.microsoft.com/office/drawing/2014/main" id="{A52B3FB8-EF6B-4D34-8BAD-5D20C4C5B364}"/>
               </a:ext>
             </a:extLst>
           </p:cNvPr>
@@ -8202,7 +8202,7 @@
           <p:cNvPr id="5" name="Rectangle 4">
             <a:extLst xmlns:a="http://schemas.openxmlformats.org/drawingml/2006/main">
               <a:ext uri="{FF2B5EF4-FFF2-40B4-BE49-F238E27FC236}">
-                <a16:creationId xmlns:a16="http://schemas.microsoft.com/office/drawing/2014/main" id="{9E6BF123-8D9E-434B-A862-85C261756AFA}"/>
+                <a16:creationId xmlns:a16="http://schemas.microsoft.com/office/drawing/2014/main" id="{31A4FF8D-C956-4C92-8214-BDD814165924}"/>
               </a:ext>
             </a:extLst>
           </p:cNvPr>
@@ -8257,7 +8257,7 @@
           <p:cNvPr id="6" name="TextBox 5">
             <a:extLst xmlns:a="http://schemas.openxmlformats.org/drawingml/2006/main">
               <a:ext uri="{FF2B5EF4-FFF2-40B4-BE49-F238E27FC236}">
-                <a16:creationId xmlns:a16="http://schemas.microsoft.com/office/drawing/2014/main" id="{D03CE3F8-6C59-48AB-8BC5-EF73BF45AB4F}"/>
+                <a16:creationId xmlns:a16="http://schemas.microsoft.com/office/drawing/2014/main" id="{5F8E099E-2193-4FE2-9DDD-00D9131B2A0C}"/>
               </a:ext>
             </a:extLst>
           </p:cNvPr>
@@ -8294,7 +8294,7 @@
                 <a:ea typeface="Aptos"/>
                 <a:cs typeface="Aptos"/>
               </a:rPr>
-              <a:t>Julkinen riippumaton evidenssikooste · 2026.07.24-19 · 2026-07-24 · Lähteet: Evidence Register; WIPO IP valuation</a:t>
+              <a:t>Julkinen riippumaton evidenssikooste · 2026.07.24-20 · 2026-07-24 · Lähteet: Evidence Register; WIPO IP valuation</a:t>
             </a:r>
           </a:p>
         </p:txBody>
@@ -8304,7 +8304,7 @@
           <p:cNvPr id="7" name="TextBox 6">
             <a:extLst xmlns:a="http://schemas.openxmlformats.org/drawingml/2006/main">
               <a:ext uri="{FF2B5EF4-FFF2-40B4-BE49-F238E27FC236}">
-                <a16:creationId xmlns:a16="http://schemas.microsoft.com/office/drawing/2014/main" id="{8D6EE813-CBA8-4580-AEFE-1391F090E1B2}"/>
+                <a16:creationId xmlns:a16="http://schemas.microsoft.com/office/drawing/2014/main" id="{1B124105-FD74-45A9-B338-D522DC3B790B}"/>
               </a:ext>
             </a:extLst>
           </p:cNvPr>
@@ -8791,7 +8791,7 @@
           <p:cNvPr id="9" name="TextBox 8">
             <a:extLst xmlns:a="http://schemas.openxmlformats.org/drawingml/2006/main">
               <a:ext uri="{FF2B5EF4-FFF2-40B4-BE49-F238E27FC236}">
-                <a16:creationId xmlns:a16="http://schemas.microsoft.com/office/drawing/2014/main" id="{1950D416-1788-48C0-A08D-FC85FD4F6176}"/>
+                <a16:creationId xmlns:a16="http://schemas.microsoft.com/office/drawing/2014/main" id="{6CEF35B6-B04D-4984-93B1-B861F53D9377}"/>
               </a:ext>
             </a:extLst>
           </p:cNvPr>
@@ -8836,7 +8836,7 @@
     </p:spTree>
     <p:extLst>
       <p:ext uri="{BB962C8B-B14F-4D97-AF65-F5344CB8AC3E}">
-        <p14:creationId xmlns:p14="http://schemas.microsoft.com/office/powerpoint/2010/main" val="863007302"/>
+        <p14:creationId xmlns:p14="http://schemas.microsoft.com/office/powerpoint/2010/main" val="692796903"/>
       </p:ext>
     </p:extLst>
   </p:cSld>
@@ -8867,7 +8867,7 @@
           <p:cNvPr id="2" name="TextBox 1">
             <a:extLst xmlns:a="http://schemas.openxmlformats.org/drawingml/2006/main">
               <a:ext uri="{FF2B5EF4-FFF2-40B4-BE49-F238E27FC236}">
-                <a16:creationId xmlns:a16="http://schemas.microsoft.com/office/drawing/2014/main" id="{074870F6-D7FD-454F-A073-A84F6193C581}"/>
+                <a16:creationId xmlns:a16="http://schemas.microsoft.com/office/drawing/2014/main" id="{631F088B-841E-44D9-8646-9CD8767BB10D}"/>
               </a:ext>
             </a:extLst>
           </p:cNvPr>
@@ -8914,7 +8914,7 @@
           <p:cNvPr id="3" name="TextBox 2">
             <a:extLst xmlns:a="http://schemas.openxmlformats.org/drawingml/2006/main">
               <a:ext uri="{FF2B5EF4-FFF2-40B4-BE49-F238E27FC236}">
-                <a16:creationId xmlns:a16="http://schemas.microsoft.com/office/drawing/2014/main" id="{CD642566-D1C2-4190-8DFE-3D0EA8BB2000}"/>
+                <a16:creationId xmlns:a16="http://schemas.microsoft.com/office/drawing/2014/main" id="{DD87E08A-FD7A-44B0-845D-FCA1122E394E}"/>
               </a:ext>
             </a:extLst>
           </p:cNvPr>
@@ -8961,7 +8961,7 @@
           <p:cNvPr id="4" name="TextBox 3">
             <a:extLst xmlns:a="http://schemas.openxmlformats.org/drawingml/2006/main">
               <a:ext uri="{FF2B5EF4-FFF2-40B4-BE49-F238E27FC236}">
-                <a16:creationId xmlns:a16="http://schemas.microsoft.com/office/drawing/2014/main" id="{53D121C3-7BDE-40A4-8C1B-E3593E29E106}"/>
+                <a16:creationId xmlns:a16="http://schemas.microsoft.com/office/drawing/2014/main" id="{3B466AE5-4083-4409-878F-B9D1A2151568}"/>
               </a:ext>
             </a:extLst>
           </p:cNvPr>
@@ -9080,7 +9080,7 @@
           <p:cNvPr id="5" name="TextBox 4">
             <a:extLst xmlns:a="http://schemas.openxmlformats.org/drawingml/2006/main">
               <a:ext uri="{FF2B5EF4-FFF2-40B4-BE49-F238E27FC236}">
-                <a16:creationId xmlns:a16="http://schemas.microsoft.com/office/drawing/2014/main" id="{F388E819-C651-404B-A09F-6A6A4815CCB8}"/>
+                <a16:creationId xmlns:a16="http://schemas.microsoft.com/office/drawing/2014/main" id="{6FE61E4C-AA84-4E4F-B9F2-BDFFDD168442}"/>
               </a:ext>
             </a:extLst>
           </p:cNvPr>
@@ -9117,7 +9117,7 @@
                 <a:ea typeface="Aptos"/>
                 <a:cs typeface="Aptos"/>
               </a:rPr>
-              <a:t>Versio 2026.07.24-19 · 2026-07-24 · 6 / 6</a:t>
+              <a:t>Versio 2026.07.24-20 · 2026-07-24 · 6 / 6</a:t>
             </a:r>
           </a:p>
         </p:txBody>
@@ -9125,7 +9125,7 @@
     </p:spTree>
     <p:extLst>
       <p:ext uri="{BB962C8B-B14F-4D97-AF65-F5344CB8AC3E}">
-        <p14:creationId xmlns:p14="http://schemas.microsoft.com/office/powerpoint/2010/main" val="1291491522"/>
+        <p14:creationId xmlns:p14="http://schemas.microsoft.com/office/powerpoint/2010/main" val="1967554821"/>
       </p:ext>
     </p:extLst>
   </p:cSld>

--- a/site/downloads/pixan-bank-deck-short-fi.pptx
+++ b/site/downloads/pixan-bank-deck-short-fi.pptx
@@ -2,18 +2,18 @@
 <file path=ppt/presentation.xml><?xml version="1.0" encoding="utf-8"?>
 <p:presentation xmlns:p="http://schemas.openxmlformats.org/presentationml/2006/main">
   <p:sldMasterIdLst>
-    <p:sldMasterId xmlns:r="http://schemas.openxmlformats.org/officeDocument/2006/relationships" id="2147483648" r:id="R570db31ceff84f9b"/>
+    <p:sldMasterId xmlns:r="http://schemas.openxmlformats.org/officeDocument/2006/relationships" id="2147483648" r:id="R3a081733302c4ecc"/>
   </p:sldMasterIdLst>
   <p:notesMasterIdLst>
-    <p:notesMasterId xmlns:r="http://schemas.openxmlformats.org/officeDocument/2006/relationships" r:id="R3a219f7fc93a409e"/>
+    <p:notesMasterId xmlns:r="http://schemas.openxmlformats.org/officeDocument/2006/relationships" r:id="Rf6764764743d486c"/>
   </p:notesMasterIdLst>
   <p:sldIdLst>
-    <p:sldId xmlns:r="http://schemas.openxmlformats.org/officeDocument/2006/relationships" id="256" r:id="Re1b0ecc346af4e18"/>
-    <p:sldId xmlns:r="http://schemas.openxmlformats.org/officeDocument/2006/relationships" id="257" r:id="Rea540f94ba724ec9"/>
-    <p:sldId xmlns:r="http://schemas.openxmlformats.org/officeDocument/2006/relationships" id="258" r:id="R266ed892bb984b85"/>
-    <p:sldId xmlns:r="http://schemas.openxmlformats.org/officeDocument/2006/relationships" id="259" r:id="Rd21d6231a48544f6"/>
-    <p:sldId xmlns:r="http://schemas.openxmlformats.org/officeDocument/2006/relationships" id="260" r:id="Rb849968b354642ac"/>
-    <p:sldId xmlns:r="http://schemas.openxmlformats.org/officeDocument/2006/relationships" id="261" r:id="R7ef07302953a4e46"/>
+    <p:sldId xmlns:r="http://schemas.openxmlformats.org/officeDocument/2006/relationships" id="256" r:id="R79eddae8f3454045"/>
+    <p:sldId xmlns:r="http://schemas.openxmlformats.org/officeDocument/2006/relationships" id="257" r:id="Rd79334ab891142b2"/>
+    <p:sldId xmlns:r="http://schemas.openxmlformats.org/officeDocument/2006/relationships" id="258" r:id="R7e7f556107bf4725"/>
+    <p:sldId xmlns:r="http://schemas.openxmlformats.org/officeDocument/2006/relationships" id="259" r:id="Rcf93cd0a1aef4672"/>
+    <p:sldId xmlns:r="http://schemas.openxmlformats.org/officeDocument/2006/relationships" id="260" r:id="R8988a1679f344d7d"/>
+    <p:sldId xmlns:r="http://schemas.openxmlformats.org/officeDocument/2006/relationships" id="261" r:id="R2f7faa58dc4a4dc2"/>
   </p:sldIdLst>
   <p:sldSz cx="12191999" cy="6858000"/>
   <p:notesSz cx="6858000" cy="9144000"/>
@@ -1467,7 +1467,7 @@
           <p:cNvPr id="2" name="Title 1">
             <a:extLst xmlns:a="http://schemas.openxmlformats.org/drawingml/2006/main">
               <a:ext uri="{FF2B5EF4-FFF2-40B4-BE49-F238E27FC236}">
-                <a16:creationId xmlns:a16="http://schemas.microsoft.com/office/drawing/2014/main" id="{240750F6-50B6-48C0-B8EE-CAEDD15CA3CC}"/>
+                <a16:creationId xmlns:a16="http://schemas.microsoft.com/office/drawing/2014/main" id="{35CCB85A-D7B9-4E4D-A62A-8412E2CB9680}"/>
               </a:ext>
             </a:extLst>
           </p:cNvPr>
@@ -1499,7 +1499,7 @@
           <p:cNvPr id="3" name="Subtitle 2">
             <a:extLst xmlns:a="http://schemas.openxmlformats.org/drawingml/2006/main">
               <a:ext uri="{FF2B5EF4-FFF2-40B4-BE49-F238E27FC236}">
-                <a16:creationId xmlns:a16="http://schemas.microsoft.com/office/drawing/2014/main" id="{4EEF18DE-CB26-4E12-B00D-4F1E0C61C76F}"/>
+                <a16:creationId xmlns:a16="http://schemas.microsoft.com/office/drawing/2014/main" id="{3FA74759-FE51-4781-A1CF-D129C4E81109}"/>
               </a:ext>
             </a:extLst>
           </p:cNvPr>
@@ -1622,7 +1622,7 @@
           <p:cNvPr id="4" name="Date Placeholder 3">
             <a:extLst xmlns:a="http://schemas.openxmlformats.org/drawingml/2006/main">
               <a:ext uri="{FF2B5EF4-FFF2-40B4-BE49-F238E27FC236}">
-                <a16:creationId xmlns:a16="http://schemas.microsoft.com/office/drawing/2014/main" id="{38DEF414-B9CE-4D87-83BE-AAB62E4EC7FB}"/>
+                <a16:creationId xmlns:a16="http://schemas.microsoft.com/office/drawing/2014/main" id="{EBF682D1-C9B5-4991-8768-C7690805ADEF}"/>
               </a:ext>
             </a:extLst>
           </p:cNvPr>
@@ -1649,7 +1649,7 @@
           <p:cNvPr id="5" name="Footer Placeholder 4">
             <a:extLst xmlns:a="http://schemas.openxmlformats.org/drawingml/2006/main">
               <a:ext uri="{FF2B5EF4-FFF2-40B4-BE49-F238E27FC236}">
-                <a16:creationId xmlns:a16="http://schemas.microsoft.com/office/drawing/2014/main" id="{690B57E5-8671-4BC5-9873-1BA74A4A145C}"/>
+                <a16:creationId xmlns:a16="http://schemas.microsoft.com/office/drawing/2014/main" id="{84C4FBF7-8A05-4088-A012-B76A03616CC7}"/>
               </a:ext>
             </a:extLst>
           </p:cNvPr>
@@ -1672,7 +1672,7 @@
           <p:cNvPr id="6" name="Slide Number Placeholder 5">
             <a:extLst xmlns:a="http://schemas.openxmlformats.org/drawingml/2006/main">
               <a:ext uri="{FF2B5EF4-FFF2-40B4-BE49-F238E27FC236}">
-                <a16:creationId xmlns:a16="http://schemas.microsoft.com/office/drawing/2014/main" id="{A32CF037-A20D-4CB8-8DF0-B6F2C1E7DD3D}"/>
+                <a16:creationId xmlns:a16="http://schemas.microsoft.com/office/drawing/2014/main" id="{3EB39326-2955-4D31-8314-38116C2CE383}"/>
               </a:ext>
             </a:extLst>
           </p:cNvPr>
@@ -1716,7 +1716,7 @@
           <p:cNvPr id="2" name="Title 1">
             <a:extLst xmlns:a="http://schemas.openxmlformats.org/drawingml/2006/main">
               <a:ext uri="{FF2B5EF4-FFF2-40B4-BE49-F238E27FC236}">
-                <a16:creationId xmlns:a16="http://schemas.microsoft.com/office/drawing/2014/main" id="{F34D2434-7184-4899-8D32-750E57EDAD9B}"/>
+                <a16:creationId xmlns:a16="http://schemas.microsoft.com/office/drawing/2014/main" id="{25F25644-8ACB-4CBA-BE6D-59C9C087A6B5}"/>
               </a:ext>
             </a:extLst>
           </p:cNvPr>
@@ -1743,7 +1743,7 @@
           <p:cNvPr id="3" name="Vertical Text Placeholder 2">
             <a:extLst xmlns:a="http://schemas.openxmlformats.org/drawingml/2006/main">
               <a:ext uri="{FF2B5EF4-FFF2-40B4-BE49-F238E27FC236}">
-                <a16:creationId xmlns:a16="http://schemas.microsoft.com/office/drawing/2014/main" id="{12AD9361-9A6B-410B-8D83-FDDF4EF194CC}"/>
+                <a16:creationId xmlns:a16="http://schemas.microsoft.com/office/drawing/2014/main" id="{90E2EF74-EE6A-469A-B176-8E22BCDEFB02}"/>
               </a:ext>
             </a:extLst>
           </p:cNvPr>
@@ -1805,7 +1805,7 @@
           <p:cNvPr id="4" name="Date Placeholder 3">
             <a:extLst xmlns:a="http://schemas.openxmlformats.org/drawingml/2006/main">
               <a:ext uri="{FF2B5EF4-FFF2-40B4-BE49-F238E27FC236}">
-                <a16:creationId xmlns:a16="http://schemas.microsoft.com/office/drawing/2014/main" id="{4726D479-25F2-44D8-8B24-BB7509C1A164}"/>
+                <a16:creationId xmlns:a16="http://schemas.microsoft.com/office/drawing/2014/main" id="{077D5CAB-2176-478E-9C9D-11C8822065BA}"/>
               </a:ext>
             </a:extLst>
           </p:cNvPr>
@@ -1832,7 +1832,7 @@
           <p:cNvPr id="5" name="Footer Placeholder 4">
             <a:extLst xmlns:a="http://schemas.openxmlformats.org/drawingml/2006/main">
               <a:ext uri="{FF2B5EF4-FFF2-40B4-BE49-F238E27FC236}">
-                <a16:creationId xmlns:a16="http://schemas.microsoft.com/office/drawing/2014/main" id="{4F821784-CA8B-4DFA-9433-94928852C7B0}"/>
+                <a16:creationId xmlns:a16="http://schemas.microsoft.com/office/drawing/2014/main" id="{682C8F63-594B-46A4-89F0-6317F4B50F13}"/>
               </a:ext>
             </a:extLst>
           </p:cNvPr>
@@ -1855,7 +1855,7 @@
           <p:cNvPr id="6" name="Slide Number Placeholder 5">
             <a:extLst xmlns:a="http://schemas.openxmlformats.org/drawingml/2006/main">
               <a:ext uri="{FF2B5EF4-FFF2-40B4-BE49-F238E27FC236}">
-                <a16:creationId xmlns:a16="http://schemas.microsoft.com/office/drawing/2014/main" id="{CA76DC72-A6B9-4668-BC63-4B3F4C0B09F5}"/>
+                <a16:creationId xmlns:a16="http://schemas.microsoft.com/office/drawing/2014/main" id="{09EA9EDB-17CB-441B-A77B-C017FC881ED4}"/>
               </a:ext>
             </a:extLst>
           </p:cNvPr>
@@ -1899,7 +1899,7 @@
           <p:cNvPr id="2" name="Vertical Title 1">
             <a:extLst xmlns:a="http://schemas.openxmlformats.org/drawingml/2006/main">
               <a:ext uri="{FF2B5EF4-FFF2-40B4-BE49-F238E27FC236}">
-                <a16:creationId xmlns:a16="http://schemas.microsoft.com/office/drawing/2014/main" id="{1FB43D0D-BDF8-48C8-B986-D01C6DF039AF}"/>
+                <a16:creationId xmlns:a16="http://schemas.microsoft.com/office/drawing/2014/main" id="{2BE58A86-7269-4D8A-B9A7-04B93DDA2223}"/>
               </a:ext>
             </a:extLst>
           </p:cNvPr>
@@ -1931,7 +1931,7 @@
           <p:cNvPr id="3" name="Vertical Text Placeholder 2">
             <a:extLst xmlns:a="http://schemas.openxmlformats.org/drawingml/2006/main">
               <a:ext uri="{FF2B5EF4-FFF2-40B4-BE49-F238E27FC236}">
-                <a16:creationId xmlns:a16="http://schemas.microsoft.com/office/drawing/2014/main" id="{226B7A72-E71B-46FD-9FC6-4D9E3B8373C7}"/>
+                <a16:creationId xmlns:a16="http://schemas.microsoft.com/office/drawing/2014/main" id="{D0E452E3-ADB0-4DAB-B39C-89F2E048857C}"/>
               </a:ext>
             </a:extLst>
           </p:cNvPr>
@@ -1998,7 +1998,7 @@
           <p:cNvPr id="4" name="Date Placeholder 3">
             <a:extLst xmlns:a="http://schemas.openxmlformats.org/drawingml/2006/main">
               <a:ext uri="{FF2B5EF4-FFF2-40B4-BE49-F238E27FC236}">
-                <a16:creationId xmlns:a16="http://schemas.microsoft.com/office/drawing/2014/main" id="{3DB0B876-1AD4-4227-9054-0F530F92AC98}"/>
+                <a16:creationId xmlns:a16="http://schemas.microsoft.com/office/drawing/2014/main" id="{515A2181-3218-4A91-92CF-3B1C3E18C820}"/>
               </a:ext>
             </a:extLst>
           </p:cNvPr>
@@ -2025,7 +2025,7 @@
           <p:cNvPr id="5" name="Footer Placeholder 4">
             <a:extLst xmlns:a="http://schemas.openxmlformats.org/drawingml/2006/main">
               <a:ext uri="{FF2B5EF4-FFF2-40B4-BE49-F238E27FC236}">
-                <a16:creationId xmlns:a16="http://schemas.microsoft.com/office/drawing/2014/main" id="{C1FE4112-7D11-43E4-BAA8-7512F40FD83E}"/>
+                <a16:creationId xmlns:a16="http://schemas.microsoft.com/office/drawing/2014/main" id="{29E133F5-5E27-4E2E-9FB3-FBE9F4B5903F}"/>
               </a:ext>
             </a:extLst>
           </p:cNvPr>
@@ -2048,7 +2048,7 @@
           <p:cNvPr id="6" name="Slide Number Placeholder 5">
             <a:extLst xmlns:a="http://schemas.openxmlformats.org/drawingml/2006/main">
               <a:ext uri="{FF2B5EF4-FFF2-40B4-BE49-F238E27FC236}">
-                <a16:creationId xmlns:a16="http://schemas.microsoft.com/office/drawing/2014/main" id="{E7E92B1E-8327-4B79-8B5E-9BE43D095A10}"/>
+                <a16:creationId xmlns:a16="http://schemas.microsoft.com/office/drawing/2014/main" id="{8A5B937C-5EEB-46FA-933D-FFF11A177BD6}"/>
               </a:ext>
             </a:extLst>
           </p:cNvPr>
@@ -2092,7 +2092,7 @@
           <p:cNvPr id="2" name="Title 1">
             <a:extLst xmlns:a="http://schemas.openxmlformats.org/drawingml/2006/main">
               <a:ext uri="{FF2B5EF4-FFF2-40B4-BE49-F238E27FC236}">
-                <a16:creationId xmlns:a16="http://schemas.microsoft.com/office/drawing/2014/main" id="{B6852606-1F75-4F9A-B43A-F4BD3C4D3ED0}"/>
+                <a16:creationId xmlns:a16="http://schemas.microsoft.com/office/drawing/2014/main" id="{179BD4E4-42D2-4237-9992-AF4946857BBB}"/>
               </a:ext>
             </a:extLst>
           </p:cNvPr>
@@ -2119,7 +2119,7 @@
           <p:cNvPr id="3" name="Content Placeholder 2">
             <a:extLst xmlns:a="http://schemas.openxmlformats.org/drawingml/2006/main">
               <a:ext uri="{FF2B5EF4-FFF2-40B4-BE49-F238E27FC236}">
-                <a16:creationId xmlns:a16="http://schemas.microsoft.com/office/drawing/2014/main" id="{8111959C-96EC-4E4D-8104-34FF9543CB70}"/>
+                <a16:creationId xmlns:a16="http://schemas.microsoft.com/office/drawing/2014/main" id="{123A5673-65E6-4484-B44A-F1122C51C32F}"/>
               </a:ext>
             </a:extLst>
           </p:cNvPr>
@@ -2181,7 +2181,7 @@
           <p:cNvPr id="4" name="Date Placeholder 3">
             <a:extLst xmlns:a="http://schemas.openxmlformats.org/drawingml/2006/main">
               <a:ext uri="{FF2B5EF4-FFF2-40B4-BE49-F238E27FC236}">
-                <a16:creationId xmlns:a16="http://schemas.microsoft.com/office/drawing/2014/main" id="{3627AD8E-811A-4CD7-9E14-3D2908229E31}"/>
+                <a16:creationId xmlns:a16="http://schemas.microsoft.com/office/drawing/2014/main" id="{A61E9994-96F1-4555-AB95-0C615CDBB7C1}"/>
               </a:ext>
             </a:extLst>
           </p:cNvPr>
@@ -2208,7 +2208,7 @@
           <p:cNvPr id="5" name="Footer Placeholder 4">
             <a:extLst xmlns:a="http://schemas.openxmlformats.org/drawingml/2006/main">
               <a:ext uri="{FF2B5EF4-FFF2-40B4-BE49-F238E27FC236}">
-                <a16:creationId xmlns:a16="http://schemas.microsoft.com/office/drawing/2014/main" id="{346E46D8-1A7E-43BF-A294-B78E5EE906BA}"/>
+                <a16:creationId xmlns:a16="http://schemas.microsoft.com/office/drawing/2014/main" id="{08FD51DA-725F-4419-9953-B0AEA7FC2A1A}"/>
               </a:ext>
             </a:extLst>
           </p:cNvPr>
@@ -2231,7 +2231,7 @@
           <p:cNvPr id="6" name="Slide Number Placeholder 5">
             <a:extLst xmlns:a="http://schemas.openxmlformats.org/drawingml/2006/main">
               <a:ext uri="{FF2B5EF4-FFF2-40B4-BE49-F238E27FC236}">
-                <a16:creationId xmlns:a16="http://schemas.microsoft.com/office/drawing/2014/main" id="{8F6927CD-6702-4227-8B8A-9E6D56CF8C41}"/>
+                <a16:creationId xmlns:a16="http://schemas.microsoft.com/office/drawing/2014/main" id="{D27D3143-2CC0-4D25-8689-E4FC4E36F7D9}"/>
               </a:ext>
             </a:extLst>
           </p:cNvPr>
@@ -2275,7 +2275,7 @@
           <p:cNvPr id="2" name="Title 1">
             <a:extLst xmlns:a="http://schemas.openxmlformats.org/drawingml/2006/main">
               <a:ext uri="{FF2B5EF4-FFF2-40B4-BE49-F238E27FC236}">
-                <a16:creationId xmlns:a16="http://schemas.microsoft.com/office/drawing/2014/main" id="{735789A7-9079-46E3-9611-5D2F881FF898}"/>
+                <a16:creationId xmlns:a16="http://schemas.microsoft.com/office/drawing/2014/main" id="{954F7CA8-EE0D-4323-ACC5-8BE3F3F9A41B}"/>
               </a:ext>
             </a:extLst>
           </p:cNvPr>
@@ -2312,7 +2312,7 @@
           <p:cNvPr id="3" name="Text Placeholder 2">
             <a:extLst xmlns:a="http://schemas.openxmlformats.org/drawingml/2006/main">
               <a:ext uri="{FF2B5EF4-FFF2-40B4-BE49-F238E27FC236}">
-                <a16:creationId xmlns:a16="http://schemas.microsoft.com/office/drawing/2014/main" id="{B090203C-7420-4618-9ED5-B5ED3C6C3F60}"/>
+                <a16:creationId xmlns:a16="http://schemas.microsoft.com/office/drawing/2014/main" id="{E4DED96E-F0E5-449F-BBA8-746DB509211A}"/>
               </a:ext>
             </a:extLst>
           </p:cNvPr>
@@ -2438,7 +2438,7 @@
           <p:cNvPr id="4" name="Date Placeholder 3">
             <a:extLst xmlns:a="http://schemas.openxmlformats.org/drawingml/2006/main">
               <a:ext uri="{FF2B5EF4-FFF2-40B4-BE49-F238E27FC236}">
-                <a16:creationId xmlns:a16="http://schemas.microsoft.com/office/drawing/2014/main" id="{6804BC80-0DE4-41BE-9FC0-9B3D65A7DCCB}"/>
+                <a16:creationId xmlns:a16="http://schemas.microsoft.com/office/drawing/2014/main" id="{60147888-BE80-4E50-81F6-3C623F3D59F2}"/>
               </a:ext>
             </a:extLst>
           </p:cNvPr>
@@ -2465,7 +2465,7 @@
           <p:cNvPr id="5" name="Footer Placeholder 4">
             <a:extLst xmlns:a="http://schemas.openxmlformats.org/drawingml/2006/main">
               <a:ext uri="{FF2B5EF4-FFF2-40B4-BE49-F238E27FC236}">
-                <a16:creationId xmlns:a16="http://schemas.microsoft.com/office/drawing/2014/main" id="{E87FADC7-D49B-4714-863A-1DC10AC97669}"/>
+                <a16:creationId xmlns:a16="http://schemas.microsoft.com/office/drawing/2014/main" id="{7D9C98D4-5A77-4A1F-AD82-FE5C63F0931F}"/>
               </a:ext>
             </a:extLst>
           </p:cNvPr>
@@ -2488,7 +2488,7 @@
           <p:cNvPr id="6" name="Slide Number Placeholder 5">
             <a:extLst xmlns:a="http://schemas.openxmlformats.org/drawingml/2006/main">
               <a:ext uri="{FF2B5EF4-FFF2-40B4-BE49-F238E27FC236}">
-                <a16:creationId xmlns:a16="http://schemas.microsoft.com/office/drawing/2014/main" id="{488DA217-D1C2-4D7B-9843-9200F31040E8}"/>
+                <a16:creationId xmlns:a16="http://schemas.microsoft.com/office/drawing/2014/main" id="{393953B9-74D3-4780-B0D8-D347E9EFF9DA}"/>
               </a:ext>
             </a:extLst>
           </p:cNvPr>
@@ -2532,7 +2532,7 @@
           <p:cNvPr id="2" name="Title 1">
             <a:extLst xmlns:a="http://schemas.openxmlformats.org/drawingml/2006/main">
               <a:ext uri="{FF2B5EF4-FFF2-40B4-BE49-F238E27FC236}">
-                <a16:creationId xmlns:a16="http://schemas.microsoft.com/office/drawing/2014/main" id="{136D3912-208D-40D2-A2AB-E5F951456387}"/>
+                <a16:creationId xmlns:a16="http://schemas.microsoft.com/office/drawing/2014/main" id="{1AB2513C-2672-4EA3-AA6F-0183EEF8AFBC}"/>
               </a:ext>
             </a:extLst>
           </p:cNvPr>
@@ -2559,7 +2559,7 @@
           <p:cNvPr id="3" name="Content Placeholder 2">
             <a:extLst xmlns:a="http://schemas.openxmlformats.org/drawingml/2006/main">
               <a:ext uri="{FF2B5EF4-FFF2-40B4-BE49-F238E27FC236}">
-                <a16:creationId xmlns:a16="http://schemas.microsoft.com/office/drawing/2014/main" id="{49C3FD4D-DB0F-478F-84A7-B8090EBE23CF}"/>
+                <a16:creationId xmlns:a16="http://schemas.microsoft.com/office/drawing/2014/main" id="{10BEFD39-31D1-40BA-B078-C83E1B2F5C7B}"/>
               </a:ext>
             </a:extLst>
           </p:cNvPr>
@@ -2663,7 +2663,7 @@
           <p:cNvPr id="4" name="Content Placeholder 3">
             <a:extLst xmlns:a="http://schemas.openxmlformats.org/drawingml/2006/main">
               <a:ext uri="{FF2B5EF4-FFF2-40B4-BE49-F238E27FC236}">
-                <a16:creationId xmlns:a16="http://schemas.microsoft.com/office/drawing/2014/main" id="{DCFC402B-50B0-47BE-8691-7D355FCAABF7}"/>
+                <a16:creationId xmlns:a16="http://schemas.microsoft.com/office/drawing/2014/main" id="{3E9878AA-A6E8-4348-8267-77E0D20267F5}"/>
               </a:ext>
             </a:extLst>
           </p:cNvPr>
@@ -2767,7 +2767,7 @@
           <p:cNvPr id="5" name="Date Placeholder 4">
             <a:extLst xmlns:a="http://schemas.openxmlformats.org/drawingml/2006/main">
               <a:ext uri="{FF2B5EF4-FFF2-40B4-BE49-F238E27FC236}">
-                <a16:creationId xmlns:a16="http://schemas.microsoft.com/office/drawing/2014/main" id="{FA3589F1-73C5-418C-A415-51F97EEB8228}"/>
+                <a16:creationId xmlns:a16="http://schemas.microsoft.com/office/drawing/2014/main" id="{82702E96-B71B-4204-8398-DD76CD1C48A8}"/>
               </a:ext>
             </a:extLst>
           </p:cNvPr>
@@ -2794,7 +2794,7 @@
           <p:cNvPr id="6" name="Footer Placeholder 5">
             <a:extLst xmlns:a="http://schemas.openxmlformats.org/drawingml/2006/main">
               <a:ext uri="{FF2B5EF4-FFF2-40B4-BE49-F238E27FC236}">
-                <a16:creationId xmlns:a16="http://schemas.microsoft.com/office/drawing/2014/main" id="{AF72A5A3-B9BE-4FAD-A945-E0BD4C01A43E}"/>
+                <a16:creationId xmlns:a16="http://schemas.microsoft.com/office/drawing/2014/main" id="{E2FB6750-9726-4467-99DC-6A56269780F7}"/>
               </a:ext>
             </a:extLst>
           </p:cNvPr>
@@ -2817,7 +2817,7 @@
           <p:cNvPr id="7" name="Slide Number Placeholder 6">
             <a:extLst xmlns:a="http://schemas.openxmlformats.org/drawingml/2006/main">
               <a:ext uri="{FF2B5EF4-FFF2-40B4-BE49-F238E27FC236}">
-                <a16:creationId xmlns:a16="http://schemas.microsoft.com/office/drawing/2014/main" id="{9728271E-259A-4BD0-9B2B-D0B6CF89D51D}"/>
+                <a16:creationId xmlns:a16="http://schemas.microsoft.com/office/drawing/2014/main" id="{7A1B73CA-EF54-456D-9CEF-4D4C50A16B97}"/>
               </a:ext>
             </a:extLst>
           </p:cNvPr>
@@ -2861,7 +2861,7 @@
           <p:cNvPr id="2" name="Title 1">
             <a:extLst xmlns:a="http://schemas.openxmlformats.org/drawingml/2006/main">
               <a:ext uri="{FF2B5EF4-FFF2-40B4-BE49-F238E27FC236}">
-                <a16:creationId xmlns:a16="http://schemas.microsoft.com/office/drawing/2014/main" id="{5C287E09-8D1F-40AD-B90D-D0F8076858F1}"/>
+                <a16:creationId xmlns:a16="http://schemas.microsoft.com/office/drawing/2014/main" id="{ABD9D161-1E4E-44EC-8B5C-7F4123CD4951}"/>
               </a:ext>
             </a:extLst>
           </p:cNvPr>
@@ -2893,7 +2893,7 @@
           <p:cNvPr id="3" name="Text Placeholder 2">
             <a:extLst xmlns:a="http://schemas.openxmlformats.org/drawingml/2006/main">
               <a:ext uri="{FF2B5EF4-FFF2-40B4-BE49-F238E27FC236}">
-                <a16:creationId xmlns:a16="http://schemas.microsoft.com/office/drawing/2014/main" id="{534F91AC-518D-4364-8F1D-B2FB2A22CFDF}"/>
+                <a16:creationId xmlns:a16="http://schemas.microsoft.com/office/drawing/2014/main" id="{2074F0AF-A951-4B5E-BF6F-DC122B98F086}"/>
               </a:ext>
             </a:extLst>
           </p:cNvPr>
@@ -2965,7 +2965,7 @@
           <p:cNvPr id="4" name="Content Placeholder 3">
             <a:extLst xmlns:a="http://schemas.openxmlformats.org/drawingml/2006/main">
               <a:ext uri="{FF2B5EF4-FFF2-40B4-BE49-F238E27FC236}">
-                <a16:creationId xmlns:a16="http://schemas.microsoft.com/office/drawing/2014/main" id="{39B2A7FE-2B51-44D9-96B7-C3F139730394}"/>
+                <a16:creationId xmlns:a16="http://schemas.microsoft.com/office/drawing/2014/main" id="{18B19E2C-8413-4256-BA7B-C2AB7D5B0BC4}"/>
               </a:ext>
             </a:extLst>
           </p:cNvPr>
@@ -3069,7 +3069,7 @@
           <p:cNvPr id="5" name="Text Placeholder 4">
             <a:extLst xmlns:a="http://schemas.openxmlformats.org/drawingml/2006/main">
               <a:ext uri="{FF2B5EF4-FFF2-40B4-BE49-F238E27FC236}">
-                <a16:creationId xmlns:a16="http://schemas.microsoft.com/office/drawing/2014/main" id="{040A73D5-577E-4E58-A5D9-C90FDCAB0EF7}"/>
+                <a16:creationId xmlns:a16="http://schemas.microsoft.com/office/drawing/2014/main" id="{81D13CC7-9C77-4EFE-A18B-9A72FE76E506}"/>
               </a:ext>
             </a:extLst>
           </p:cNvPr>
@@ -3141,7 +3141,7 @@
           <p:cNvPr id="6" name="Content Placeholder 5">
             <a:extLst xmlns:a="http://schemas.openxmlformats.org/drawingml/2006/main">
               <a:ext uri="{FF2B5EF4-FFF2-40B4-BE49-F238E27FC236}">
-                <a16:creationId xmlns:a16="http://schemas.microsoft.com/office/drawing/2014/main" id="{B7B1CF4A-990A-411B-97A4-F37245AF3F5B}"/>
+                <a16:creationId xmlns:a16="http://schemas.microsoft.com/office/drawing/2014/main" id="{2B583814-8188-46DB-A195-46FC500F6CA0}"/>
               </a:ext>
             </a:extLst>
           </p:cNvPr>
@@ -3245,7 +3245,7 @@
           <p:cNvPr id="7" name="Date Placeholder 6">
             <a:extLst xmlns:a="http://schemas.openxmlformats.org/drawingml/2006/main">
               <a:ext uri="{FF2B5EF4-FFF2-40B4-BE49-F238E27FC236}">
-                <a16:creationId xmlns:a16="http://schemas.microsoft.com/office/drawing/2014/main" id="{E03A21FA-93C2-4180-994C-A2DD5E175B60}"/>
+                <a16:creationId xmlns:a16="http://schemas.microsoft.com/office/drawing/2014/main" id="{F60026E7-9654-40C5-9D34-718D381C88D0}"/>
               </a:ext>
             </a:extLst>
           </p:cNvPr>
@@ -3272,7 +3272,7 @@
           <p:cNvPr id="8" name="Footer Placeholder 7">
             <a:extLst xmlns:a="http://schemas.openxmlformats.org/drawingml/2006/main">
               <a:ext uri="{FF2B5EF4-FFF2-40B4-BE49-F238E27FC236}">
-                <a16:creationId xmlns:a16="http://schemas.microsoft.com/office/drawing/2014/main" id="{7C623962-9342-4258-A905-F672A3CBC869}"/>
+                <a16:creationId xmlns:a16="http://schemas.microsoft.com/office/drawing/2014/main" id="{F67D6CBF-BCDE-4B39-81A5-C0E3B71734D8}"/>
               </a:ext>
             </a:extLst>
           </p:cNvPr>
@@ -3295,7 +3295,7 @@
           <p:cNvPr id="9" name="Slide Number Placeholder 8">
             <a:extLst xmlns:a="http://schemas.openxmlformats.org/drawingml/2006/main">
               <a:ext uri="{FF2B5EF4-FFF2-40B4-BE49-F238E27FC236}">
-                <a16:creationId xmlns:a16="http://schemas.microsoft.com/office/drawing/2014/main" id="{BE6B1F4E-24B3-4406-81DE-6287C0045A24}"/>
+                <a16:creationId xmlns:a16="http://schemas.microsoft.com/office/drawing/2014/main" id="{D99B82AD-C4B9-40B5-8376-FF96EF3A5954}"/>
               </a:ext>
             </a:extLst>
           </p:cNvPr>
@@ -3339,7 +3339,7 @@
           <p:cNvPr id="2" name="Title 1">
             <a:extLst xmlns:a="http://schemas.openxmlformats.org/drawingml/2006/main">
               <a:ext uri="{FF2B5EF4-FFF2-40B4-BE49-F238E27FC236}">
-                <a16:creationId xmlns:a16="http://schemas.microsoft.com/office/drawing/2014/main" id="{98EB719F-9CDC-4F86-ADFA-90C284844A94}"/>
+                <a16:creationId xmlns:a16="http://schemas.microsoft.com/office/drawing/2014/main" id="{B2F35C66-B478-434B-BACF-DCD55233B95E}"/>
               </a:ext>
             </a:extLst>
           </p:cNvPr>
@@ -3366,7 +3366,7 @@
           <p:cNvPr id="3" name="Date Placeholder 2">
             <a:extLst xmlns:a="http://schemas.openxmlformats.org/drawingml/2006/main">
               <a:ext uri="{FF2B5EF4-FFF2-40B4-BE49-F238E27FC236}">
-                <a16:creationId xmlns:a16="http://schemas.microsoft.com/office/drawing/2014/main" id="{BA9F91A5-C301-470D-B56A-4959954F9CE2}"/>
+                <a16:creationId xmlns:a16="http://schemas.microsoft.com/office/drawing/2014/main" id="{87A83E79-9EAE-4D87-86BE-2ECC997762AF}"/>
               </a:ext>
             </a:extLst>
           </p:cNvPr>
@@ -3393,7 +3393,7 @@
           <p:cNvPr id="4" name="Footer Placeholder 3">
             <a:extLst xmlns:a="http://schemas.openxmlformats.org/drawingml/2006/main">
               <a:ext uri="{FF2B5EF4-FFF2-40B4-BE49-F238E27FC236}">
-                <a16:creationId xmlns:a16="http://schemas.microsoft.com/office/drawing/2014/main" id="{130A8CA3-F5B7-41F6-BE65-8AAEC3026BBB}"/>
+                <a16:creationId xmlns:a16="http://schemas.microsoft.com/office/drawing/2014/main" id="{1985AD2D-C609-4FBC-BF2D-EE1DADADB932}"/>
               </a:ext>
             </a:extLst>
           </p:cNvPr>
@@ -3416,7 +3416,7 @@
           <p:cNvPr id="5" name="Slide Number Placeholder 4">
             <a:extLst xmlns:a="http://schemas.openxmlformats.org/drawingml/2006/main">
               <a:ext uri="{FF2B5EF4-FFF2-40B4-BE49-F238E27FC236}">
-                <a16:creationId xmlns:a16="http://schemas.microsoft.com/office/drawing/2014/main" id="{B5C74457-78A3-4D72-9A76-B87A3486BB94}"/>
+                <a16:creationId xmlns:a16="http://schemas.microsoft.com/office/drawing/2014/main" id="{0DE447E8-D467-44BB-AD8E-73FDE6A0BB16}"/>
               </a:ext>
             </a:extLst>
           </p:cNvPr>
@@ -3460,7 +3460,7 @@
           <p:cNvPr id="2" name="Date Placeholder 1">
             <a:extLst xmlns:a="http://schemas.openxmlformats.org/drawingml/2006/main">
               <a:ext uri="{FF2B5EF4-FFF2-40B4-BE49-F238E27FC236}">
-                <a16:creationId xmlns:a16="http://schemas.microsoft.com/office/drawing/2014/main" id="{E862871A-00A3-4612-8C9D-120798182B42}"/>
+                <a16:creationId xmlns:a16="http://schemas.microsoft.com/office/drawing/2014/main" id="{842DC740-5E70-49A0-8D6D-F9CF45DB177E}"/>
               </a:ext>
             </a:extLst>
           </p:cNvPr>
@@ -3487,7 +3487,7 @@
           <p:cNvPr id="3" name="Footer Placeholder 2">
             <a:extLst xmlns:a="http://schemas.openxmlformats.org/drawingml/2006/main">
               <a:ext uri="{FF2B5EF4-FFF2-40B4-BE49-F238E27FC236}">
-                <a16:creationId xmlns:a16="http://schemas.microsoft.com/office/drawing/2014/main" id="{BD570D98-AFDB-465E-B258-685237E217AC}"/>
+                <a16:creationId xmlns:a16="http://schemas.microsoft.com/office/drawing/2014/main" id="{DA7EECAE-5B88-4C64-BD46-7375E2805724}"/>
               </a:ext>
             </a:extLst>
           </p:cNvPr>
@@ -3510,7 +3510,7 @@
           <p:cNvPr id="4" name="Slide Number Placeholder 3">
             <a:extLst xmlns:a="http://schemas.openxmlformats.org/drawingml/2006/main">
               <a:ext uri="{FF2B5EF4-FFF2-40B4-BE49-F238E27FC236}">
-                <a16:creationId xmlns:a16="http://schemas.microsoft.com/office/drawing/2014/main" id="{0B2E33C6-D6F1-4B77-97F6-730507D87B34}"/>
+                <a16:creationId xmlns:a16="http://schemas.microsoft.com/office/drawing/2014/main" id="{579AFDE5-3BEE-483E-8E86-E6F46325535A}"/>
               </a:ext>
             </a:extLst>
           </p:cNvPr>
@@ -3554,7 +3554,7 @@
           <p:cNvPr id="2" name="Title 1">
             <a:extLst xmlns:a="http://schemas.openxmlformats.org/drawingml/2006/main">
               <a:ext uri="{FF2B5EF4-FFF2-40B4-BE49-F238E27FC236}">
-                <a16:creationId xmlns:a16="http://schemas.microsoft.com/office/drawing/2014/main" id="{2AE834F7-E88E-41FF-97B3-4D4C5B6AB4C3}"/>
+                <a16:creationId xmlns:a16="http://schemas.microsoft.com/office/drawing/2014/main" id="{0A74DFFE-1261-469E-B138-D805D514ABE2}"/>
               </a:ext>
             </a:extLst>
           </p:cNvPr>
@@ -3591,7 +3591,7 @@
           <p:cNvPr id="3" name="Content Placeholder 2">
             <a:extLst xmlns:a="http://schemas.openxmlformats.org/drawingml/2006/main">
               <a:ext uri="{FF2B5EF4-FFF2-40B4-BE49-F238E27FC236}">
-                <a16:creationId xmlns:a16="http://schemas.microsoft.com/office/drawing/2014/main" id="{86A404A8-FAFA-43B4-B0B4-08DA63511308}"/>
+                <a16:creationId xmlns:a16="http://schemas.microsoft.com/office/drawing/2014/main" id="{623262CF-62A3-43C1-85F7-9465FA3198F8}"/>
               </a:ext>
             </a:extLst>
           </p:cNvPr>
@@ -3695,7 +3695,7 @@
           <p:cNvPr id="4" name="Text Placeholder 3">
             <a:extLst xmlns:a="http://schemas.openxmlformats.org/drawingml/2006/main">
               <a:ext uri="{FF2B5EF4-FFF2-40B4-BE49-F238E27FC236}">
-                <a16:creationId xmlns:a16="http://schemas.microsoft.com/office/drawing/2014/main" id="{3F63DF3C-945A-43BE-9B0D-188C84D3F4F5}"/>
+                <a16:creationId xmlns:a16="http://schemas.microsoft.com/office/drawing/2014/main" id="{07F0F543-15BB-4E2D-98DF-852EEB57AC76}"/>
               </a:ext>
             </a:extLst>
           </p:cNvPr>
@@ -3767,7 +3767,7 @@
           <p:cNvPr id="5" name="Date Placeholder 4">
             <a:extLst xmlns:a="http://schemas.openxmlformats.org/drawingml/2006/main">
               <a:ext uri="{FF2B5EF4-FFF2-40B4-BE49-F238E27FC236}">
-                <a16:creationId xmlns:a16="http://schemas.microsoft.com/office/drawing/2014/main" id="{69ED1688-A667-4C42-AB22-DEDC8099BDF9}"/>
+                <a16:creationId xmlns:a16="http://schemas.microsoft.com/office/drawing/2014/main" id="{B332BACD-B2E2-4A3D-82C2-2628851AABD1}"/>
               </a:ext>
             </a:extLst>
           </p:cNvPr>
@@ -3794,7 +3794,7 @@
           <p:cNvPr id="6" name="Footer Placeholder 5">
             <a:extLst xmlns:a="http://schemas.openxmlformats.org/drawingml/2006/main">
               <a:ext uri="{FF2B5EF4-FFF2-40B4-BE49-F238E27FC236}">
-                <a16:creationId xmlns:a16="http://schemas.microsoft.com/office/drawing/2014/main" id="{8C6207AF-664D-44D8-9385-3DEB092F2091}"/>
+                <a16:creationId xmlns:a16="http://schemas.microsoft.com/office/drawing/2014/main" id="{7CD157C7-AFD6-43EE-9E80-817B1DEEF601}"/>
               </a:ext>
             </a:extLst>
           </p:cNvPr>
@@ -3817,7 +3817,7 @@
           <p:cNvPr id="7" name="Slide Number Placeholder 6">
             <a:extLst xmlns:a="http://schemas.openxmlformats.org/drawingml/2006/main">
               <a:ext uri="{FF2B5EF4-FFF2-40B4-BE49-F238E27FC236}">
-                <a16:creationId xmlns:a16="http://schemas.microsoft.com/office/drawing/2014/main" id="{23E2EBB8-8F27-4F45-B8FD-62D2B6C54CC6}"/>
+                <a16:creationId xmlns:a16="http://schemas.microsoft.com/office/drawing/2014/main" id="{52E2F009-7FE7-40B8-9802-CA000F0F7E13}"/>
               </a:ext>
             </a:extLst>
           </p:cNvPr>
@@ -3861,7 +3861,7 @@
           <p:cNvPr id="2" name="Title 1">
             <a:extLst xmlns:a="http://schemas.openxmlformats.org/drawingml/2006/main">
               <a:ext uri="{FF2B5EF4-FFF2-40B4-BE49-F238E27FC236}">
-                <a16:creationId xmlns:a16="http://schemas.microsoft.com/office/drawing/2014/main" id="{733C7F83-AC7F-4958-9553-34D38AD290E6}"/>
+                <a16:creationId xmlns:a16="http://schemas.microsoft.com/office/drawing/2014/main" id="{02A69065-710C-49F0-8173-04F10F1C7D88}"/>
               </a:ext>
             </a:extLst>
           </p:cNvPr>
@@ -3898,7 +3898,7 @@
           <p:cNvPr id="3" name="Picture Placeholder 2">
             <a:extLst xmlns:a="http://schemas.openxmlformats.org/drawingml/2006/main">
               <a:ext uri="{FF2B5EF4-FFF2-40B4-BE49-F238E27FC236}">
-                <a16:creationId xmlns:a16="http://schemas.microsoft.com/office/drawing/2014/main" id="{FAF75820-0DCA-4506-9CE3-137485AB73CC}"/>
+                <a16:creationId xmlns:a16="http://schemas.microsoft.com/office/drawing/2014/main" id="{930FC308-87BD-42A0-832E-06DE9DBD9DA6}"/>
               </a:ext>
             </a:extLst>
           </p:cNvPr>
@@ -3963,7 +3963,7 @@
           <p:cNvPr id="4" name="Text Placeholder 3">
             <a:extLst xmlns:a="http://schemas.openxmlformats.org/drawingml/2006/main">
               <a:ext uri="{FF2B5EF4-FFF2-40B4-BE49-F238E27FC236}">
-                <a16:creationId xmlns:a16="http://schemas.microsoft.com/office/drawing/2014/main" id="{ED412A85-AA0A-4925-B075-2EB0DD9A07E6}"/>
+                <a16:creationId xmlns:a16="http://schemas.microsoft.com/office/drawing/2014/main" id="{034F9E07-4C26-4F39-9E7E-1B57657A07FB}"/>
               </a:ext>
             </a:extLst>
           </p:cNvPr>
@@ -4035,7 +4035,7 @@
           <p:cNvPr id="5" name="Date Placeholder 4">
             <a:extLst xmlns:a="http://schemas.openxmlformats.org/drawingml/2006/main">
               <a:ext uri="{FF2B5EF4-FFF2-40B4-BE49-F238E27FC236}">
-                <a16:creationId xmlns:a16="http://schemas.microsoft.com/office/drawing/2014/main" id="{2549C7A1-803B-4AF5-B126-0D2E485D8F85}"/>
+                <a16:creationId xmlns:a16="http://schemas.microsoft.com/office/drawing/2014/main" id="{D4AAB1A8-65D8-4CFD-90ED-0FDF38AB3361}"/>
               </a:ext>
             </a:extLst>
           </p:cNvPr>
@@ -4062,7 +4062,7 @@
           <p:cNvPr id="6" name="Footer Placeholder 5">
             <a:extLst xmlns:a="http://schemas.openxmlformats.org/drawingml/2006/main">
               <a:ext uri="{FF2B5EF4-FFF2-40B4-BE49-F238E27FC236}">
-                <a16:creationId xmlns:a16="http://schemas.microsoft.com/office/drawing/2014/main" id="{B752B5FD-9362-403B-92B2-5F0127DFEE92}"/>
+                <a16:creationId xmlns:a16="http://schemas.microsoft.com/office/drawing/2014/main" id="{8BCD8DF7-6032-4804-B475-345973A49770}"/>
               </a:ext>
             </a:extLst>
           </p:cNvPr>
@@ -4085,7 +4085,7 @@
           <p:cNvPr id="7" name="Slide Number Placeholder 6">
             <a:extLst xmlns:a="http://schemas.openxmlformats.org/drawingml/2006/main">
               <a:ext uri="{FF2B5EF4-FFF2-40B4-BE49-F238E27FC236}">
-                <a16:creationId xmlns:a16="http://schemas.microsoft.com/office/drawing/2014/main" id="{2E183086-6B5B-45E0-88A0-F47E06F630CA}"/>
+                <a16:creationId xmlns:a16="http://schemas.microsoft.com/office/drawing/2014/main" id="{D9F60AD1-E57A-4440-A4A6-E82B8525F758}"/>
               </a:ext>
             </a:extLst>
           </p:cNvPr>
@@ -4134,7 +4134,7 @@
           <p:cNvPr id="2" name="Title Placeholder 1">
             <a:extLst xmlns:a="http://schemas.openxmlformats.org/drawingml/2006/main">
               <a:ext uri="{FF2B5EF4-FFF2-40B4-BE49-F238E27FC236}">
-                <a16:creationId xmlns:a16="http://schemas.microsoft.com/office/drawing/2014/main" id="{C90C14AE-D4AC-449B-BB33-4F47E5CAF96E}"/>
+                <a16:creationId xmlns:a16="http://schemas.microsoft.com/office/drawing/2014/main" id="{03F9585E-969D-4B83-BF98-FE1A014963AB}"/>
               </a:ext>
             </a:extLst>
           </p:cNvPr>
@@ -4171,7 +4171,7 @@
           <p:cNvPr id="3" name="Text Placeholder 2">
             <a:extLst xmlns:a="http://schemas.openxmlformats.org/drawingml/2006/main">
               <a:ext uri="{FF2B5EF4-FFF2-40B4-BE49-F238E27FC236}">
-                <a16:creationId xmlns:a16="http://schemas.microsoft.com/office/drawing/2014/main" id="{301179C1-6876-4709-8FB6-1D5343147941}"/>
+                <a16:creationId xmlns:a16="http://schemas.microsoft.com/office/drawing/2014/main" id="{CA6E10B1-D079-47E0-BC1D-AC55EEFE8B47}"/>
               </a:ext>
             </a:extLst>
           </p:cNvPr>
@@ -4243,7 +4243,7 @@
           <p:cNvPr id="4" name="Date Placeholder 3">
             <a:extLst xmlns:a="http://schemas.openxmlformats.org/drawingml/2006/main">
               <a:ext uri="{FF2B5EF4-FFF2-40B4-BE49-F238E27FC236}">
-                <a16:creationId xmlns:a16="http://schemas.microsoft.com/office/drawing/2014/main" id="{E5D2B63C-6B00-406C-B051-952178C3C129}"/>
+                <a16:creationId xmlns:a16="http://schemas.microsoft.com/office/drawing/2014/main" id="{D2BD0F4E-C820-4FAB-AC7B-B971A4058DFC}"/>
               </a:ext>
             </a:extLst>
           </p:cNvPr>
@@ -4289,7 +4289,7 @@
           <p:cNvPr id="5" name="Footer Placeholder 4">
             <a:extLst xmlns:a="http://schemas.openxmlformats.org/drawingml/2006/main">
               <a:ext uri="{FF2B5EF4-FFF2-40B4-BE49-F238E27FC236}">
-                <a16:creationId xmlns:a16="http://schemas.microsoft.com/office/drawing/2014/main" id="{294C9BF8-D3E6-4BC9-8E1F-CB19C130A506}"/>
+                <a16:creationId xmlns:a16="http://schemas.microsoft.com/office/drawing/2014/main" id="{9A1CB7F5-5DF4-40BF-AD0D-321EF3E58D73}"/>
               </a:ext>
             </a:extLst>
           </p:cNvPr>
@@ -4331,7 +4331,7 @@
           <p:cNvPr id="6" name="Slide Number Placeholder 5">
             <a:extLst xmlns:a="http://schemas.openxmlformats.org/drawingml/2006/main">
               <a:ext uri="{FF2B5EF4-FFF2-40B4-BE49-F238E27FC236}">
-                <a16:creationId xmlns:a16="http://schemas.microsoft.com/office/drawing/2014/main" id="{B8220A19-E37A-405D-8531-3E8561C45C70}"/>
+                <a16:creationId xmlns:a16="http://schemas.microsoft.com/office/drawing/2014/main" id="{4899628B-BBAA-4DD2-A8A6-FE4620B346D3}"/>
               </a:ext>
             </a:extLst>
           </p:cNvPr>
@@ -4376,17 +4376,17 @@
   </p:cSld>
   <p:clrMap bg1="lt1" tx1="dk1" bg2="lt2" tx2="dk2" accent1="accent1" accent2="accent2" accent3="accent3" accent4="accent4" accent5="accent5" accent6="accent6" hlink="hlink" folHlink="folHlink"/>
   <p:sldLayoutIdLst>
-    <p:sldLayoutId xmlns:r="http://schemas.openxmlformats.org/officeDocument/2006/relationships" id="2147483649" r:id="R4a58fe1f70054a57"/>
-    <p:sldLayoutId xmlns:r="http://schemas.openxmlformats.org/officeDocument/2006/relationships" id="2147483650" r:id="Rc2f999f1e4664ecd"/>
-    <p:sldLayoutId xmlns:r="http://schemas.openxmlformats.org/officeDocument/2006/relationships" id="2147483651" r:id="Rfc4f42f532424d68"/>
-    <p:sldLayoutId xmlns:r="http://schemas.openxmlformats.org/officeDocument/2006/relationships" id="2147483652" r:id="R130f8e4fdbea431a"/>
-    <p:sldLayoutId xmlns:r="http://schemas.openxmlformats.org/officeDocument/2006/relationships" id="2147483653" r:id="Red44a00dfb3b4498"/>
-    <p:sldLayoutId xmlns:r="http://schemas.openxmlformats.org/officeDocument/2006/relationships" id="2147483654" r:id="R9ba4f96023cc4a4a"/>
-    <p:sldLayoutId xmlns:r="http://schemas.openxmlformats.org/officeDocument/2006/relationships" id="2147483655" r:id="R69f99b6b156e492a"/>
-    <p:sldLayoutId xmlns:r="http://schemas.openxmlformats.org/officeDocument/2006/relationships" id="2147483656" r:id="R2fb042067e4549d6"/>
-    <p:sldLayoutId xmlns:r="http://schemas.openxmlformats.org/officeDocument/2006/relationships" id="2147483657" r:id="Rfd865b01d9334004"/>
-    <p:sldLayoutId xmlns:r="http://schemas.openxmlformats.org/officeDocument/2006/relationships" id="2147483658" r:id="R5c78c84c64294b56"/>
-    <p:sldLayoutId xmlns:r="http://schemas.openxmlformats.org/officeDocument/2006/relationships" id="2147483659" r:id="R445119cf05204c55"/>
+    <p:sldLayoutId xmlns:r="http://schemas.openxmlformats.org/officeDocument/2006/relationships" id="2147483649" r:id="R8f23a0fb8f21476d"/>
+    <p:sldLayoutId xmlns:r="http://schemas.openxmlformats.org/officeDocument/2006/relationships" id="2147483650" r:id="Re6b792a4121f438f"/>
+    <p:sldLayoutId xmlns:r="http://schemas.openxmlformats.org/officeDocument/2006/relationships" id="2147483651" r:id="R1ab8f9d0f0ba4fbd"/>
+    <p:sldLayoutId xmlns:r="http://schemas.openxmlformats.org/officeDocument/2006/relationships" id="2147483652" r:id="R44b4bd2603424829"/>
+    <p:sldLayoutId xmlns:r="http://schemas.openxmlformats.org/officeDocument/2006/relationships" id="2147483653" r:id="Rd2db3f01a4ae460b"/>
+    <p:sldLayoutId xmlns:r="http://schemas.openxmlformats.org/officeDocument/2006/relationships" id="2147483654" r:id="Rec218654c70d4b74"/>
+    <p:sldLayoutId xmlns:r="http://schemas.openxmlformats.org/officeDocument/2006/relationships" id="2147483655" r:id="Rf6bdb71452ab474f"/>
+    <p:sldLayoutId xmlns:r="http://schemas.openxmlformats.org/officeDocument/2006/relationships" id="2147483656" r:id="R3f1d8e5116084dbe"/>
+    <p:sldLayoutId xmlns:r="http://schemas.openxmlformats.org/officeDocument/2006/relationships" id="2147483657" r:id="R1a206197ab23430f"/>
+    <p:sldLayoutId xmlns:r="http://schemas.openxmlformats.org/officeDocument/2006/relationships" id="2147483658" r:id="R75d5b39f621945a3"/>
+    <p:sldLayoutId xmlns:r="http://schemas.openxmlformats.org/officeDocument/2006/relationships" id="2147483659" r:id="Rb5fcbc065d404401"/>
   </p:sldLayoutIdLst>
   <p:txStyles>
     <p:titleStyle>
@@ -4939,7 +4939,7 @@
           <p:cNvPr id="2" name="Rectangle 1">
             <a:extLst xmlns:a="http://schemas.openxmlformats.org/drawingml/2006/main">
               <a:ext uri="{FF2B5EF4-FFF2-40B4-BE49-F238E27FC236}">
-                <a16:creationId xmlns:a16="http://schemas.microsoft.com/office/drawing/2014/main" id="{D14B8800-6B76-4D73-BE1F-1E6217784125}"/>
+                <a16:creationId xmlns:a16="http://schemas.microsoft.com/office/drawing/2014/main" id="{D705E60A-B455-4103-9EF8-20663E142BE9}"/>
               </a:ext>
             </a:extLst>
           </p:cNvPr>
@@ -4994,7 +4994,7 @@
           <p:cNvPr id="3" name="TextBox 2">
             <a:extLst xmlns:a="http://schemas.openxmlformats.org/drawingml/2006/main">
               <a:ext uri="{FF2B5EF4-FFF2-40B4-BE49-F238E27FC236}">
-                <a16:creationId xmlns:a16="http://schemas.microsoft.com/office/drawing/2014/main" id="{11F288B1-5160-4E71-BF21-BB4E8502DD9F}"/>
+                <a16:creationId xmlns:a16="http://schemas.microsoft.com/office/drawing/2014/main" id="{1E489C93-251A-420A-9027-BD92D1625781}"/>
               </a:ext>
             </a:extLst>
           </p:cNvPr>
@@ -5041,7 +5041,7 @@
           <p:cNvPr id="4" name="TextBox 3">
             <a:extLst xmlns:a="http://schemas.openxmlformats.org/drawingml/2006/main">
               <a:ext uri="{FF2B5EF4-FFF2-40B4-BE49-F238E27FC236}">
-                <a16:creationId xmlns:a16="http://schemas.microsoft.com/office/drawing/2014/main" id="{ECFD1DE9-13B0-4D66-B15B-EFE570B2C492}"/>
+                <a16:creationId xmlns:a16="http://schemas.microsoft.com/office/drawing/2014/main" id="{93ABDD0D-2F99-4D49-BC60-43DE5C4C39E0}"/>
               </a:ext>
             </a:extLst>
           </p:cNvPr>
@@ -5089,7 +5089,7 @@
           <p:cNvPr id="5" name="TextBox 4">
             <a:extLst xmlns:a="http://schemas.openxmlformats.org/drawingml/2006/main">
               <a:ext uri="{FF2B5EF4-FFF2-40B4-BE49-F238E27FC236}">
-                <a16:creationId xmlns:a16="http://schemas.microsoft.com/office/drawing/2014/main" id="{8D07CF33-365F-461F-8A63-BE2485F17CC8}"/>
+                <a16:creationId xmlns:a16="http://schemas.microsoft.com/office/drawing/2014/main" id="{53E5AA34-E36B-4A79-B24E-7AF35430AE16}"/>
               </a:ext>
             </a:extLst>
           </p:cNvPr>
@@ -5136,7 +5136,7 @@
           <p:cNvPr id="6" name="Rectangle 5">
             <a:extLst xmlns:a="http://schemas.openxmlformats.org/drawingml/2006/main">
               <a:ext uri="{FF2B5EF4-FFF2-40B4-BE49-F238E27FC236}">
-                <a16:creationId xmlns:a16="http://schemas.microsoft.com/office/drawing/2014/main" id="{348D2882-918D-497C-AF53-BF916EA9AC28}"/>
+                <a16:creationId xmlns:a16="http://schemas.microsoft.com/office/drawing/2014/main" id="{263C5F9C-4B90-4B00-882D-66191FCD4AF0}"/>
               </a:ext>
             </a:extLst>
           </p:cNvPr>
@@ -5191,7 +5191,7 @@
           <p:cNvPr id="7" name="TextBox 6">
             <a:extLst xmlns:a="http://schemas.openxmlformats.org/drawingml/2006/main">
               <a:ext uri="{FF2B5EF4-FFF2-40B4-BE49-F238E27FC236}">
-                <a16:creationId xmlns:a16="http://schemas.microsoft.com/office/drawing/2014/main" id="{753C7496-848A-4AFE-A746-0AF698E0EAEE}"/>
+                <a16:creationId xmlns:a16="http://schemas.microsoft.com/office/drawing/2014/main" id="{05947525-8745-41D9-ADBE-D92127EB9727}"/>
               </a:ext>
             </a:extLst>
           </p:cNvPr>
@@ -5238,7 +5238,7 @@
           <p:cNvPr id="8" name="TextBox 7">
             <a:extLst xmlns:a="http://schemas.openxmlformats.org/drawingml/2006/main">
               <a:ext uri="{FF2B5EF4-FFF2-40B4-BE49-F238E27FC236}">
-                <a16:creationId xmlns:a16="http://schemas.microsoft.com/office/drawing/2014/main" id="{907C17B7-31ED-44C5-8108-FF558B4438F0}"/>
+                <a16:creationId xmlns:a16="http://schemas.microsoft.com/office/drawing/2014/main" id="{44B7C642-C55C-41C6-89F9-A62CB83685AE}"/>
               </a:ext>
             </a:extLst>
           </p:cNvPr>
@@ -5275,7 +5275,7 @@
                 <a:ea typeface="Aptos"/>
                 <a:cs typeface="Aptos"/>
               </a:rPr>
-              <a:t>2026.07.24-20</a:t>
+              <a:t>2026.07.24-21</a:t>
             </a:r>
           </a:p>
         </p:txBody>
@@ -5285,7 +5285,7 @@
           <p:cNvPr id="9" name="TextBox 8">
             <a:extLst xmlns:a="http://schemas.openxmlformats.org/drawingml/2006/main">
               <a:ext uri="{FF2B5EF4-FFF2-40B4-BE49-F238E27FC236}">
-                <a16:creationId xmlns:a16="http://schemas.microsoft.com/office/drawing/2014/main" id="{51979D69-C9D5-4D8E-AE47-69E778C53358}"/>
+                <a16:creationId xmlns:a16="http://schemas.microsoft.com/office/drawing/2014/main" id="{BC2F6E47-2BF5-40C9-A2D5-3C39AA8C46CD}"/>
               </a:ext>
             </a:extLst>
           </p:cNvPr>
@@ -5333,7 +5333,7 @@
           <p:cNvPr id="10" name="TextBox 9">
             <a:extLst xmlns:a="http://schemas.openxmlformats.org/drawingml/2006/main">
               <a:ext uri="{FF2B5EF4-FFF2-40B4-BE49-F238E27FC236}">
-                <a16:creationId xmlns:a16="http://schemas.microsoft.com/office/drawing/2014/main" id="{3225A716-FA27-46FB-BF73-CE39715C1A65}"/>
+                <a16:creationId xmlns:a16="http://schemas.microsoft.com/office/drawing/2014/main" id="{1DA059B7-2C75-405D-8661-BE9353AD5883}"/>
               </a:ext>
             </a:extLst>
           </p:cNvPr>
@@ -5380,7 +5380,7 @@
           <p:cNvPr id="11" name="TextBox 10">
             <a:extLst xmlns:a="http://schemas.openxmlformats.org/drawingml/2006/main">
               <a:ext uri="{FF2B5EF4-FFF2-40B4-BE49-F238E27FC236}">
-                <a16:creationId xmlns:a16="http://schemas.microsoft.com/office/drawing/2014/main" id="{54C9ACC7-F264-44F7-B8A3-A728479AB9D7}"/>
+                <a16:creationId xmlns:a16="http://schemas.microsoft.com/office/drawing/2014/main" id="{408C045D-5F16-4792-83C6-47C670FD5AEB}"/>
               </a:ext>
             </a:extLst>
           </p:cNvPr>
@@ -5427,7 +5427,7 @@
           <p:cNvPr id="12" name="TextBox 11">
             <a:extLst xmlns:a="http://schemas.openxmlformats.org/drawingml/2006/main">
               <a:ext uri="{FF2B5EF4-FFF2-40B4-BE49-F238E27FC236}">
-                <a16:creationId xmlns:a16="http://schemas.microsoft.com/office/drawing/2014/main" id="{30D4D5CB-819D-4729-BDAD-411A843FAE53}"/>
+                <a16:creationId xmlns:a16="http://schemas.microsoft.com/office/drawing/2014/main" id="{E8D1B836-11CD-4AB8-BF60-6173086A977E}"/>
               </a:ext>
             </a:extLst>
           </p:cNvPr>
@@ -5472,7 +5472,7 @@
     </p:spTree>
     <p:extLst>
       <p:ext uri="{BB962C8B-B14F-4D97-AF65-F5344CB8AC3E}">
-        <p14:creationId xmlns:p14="http://schemas.microsoft.com/office/powerpoint/2010/main" val="1464668514"/>
+        <p14:creationId xmlns:p14="http://schemas.microsoft.com/office/powerpoint/2010/main" val="1406413995"/>
       </p:ext>
     </p:extLst>
   </p:cSld>
@@ -5496,7 +5496,7 @@
           <p:cNvPr id="2" name="TextBox 1">
             <a:extLst xmlns:a="http://schemas.openxmlformats.org/drawingml/2006/main">
               <a:ext uri="{FF2B5EF4-FFF2-40B4-BE49-F238E27FC236}">
-                <a16:creationId xmlns:a16="http://schemas.microsoft.com/office/drawing/2014/main" id="{B626B9E0-FCF9-4670-B73F-CB31F45966D9}"/>
+                <a16:creationId xmlns:a16="http://schemas.microsoft.com/office/drawing/2014/main" id="{61CB84B5-59F0-45E5-AE4E-F16FE0D1A069}"/>
               </a:ext>
             </a:extLst>
           </p:cNvPr>
@@ -5543,7 +5543,7 @@
           <p:cNvPr id="3" name="TextBox 2">
             <a:extLst xmlns:a="http://schemas.openxmlformats.org/drawingml/2006/main">
               <a:ext uri="{FF2B5EF4-FFF2-40B4-BE49-F238E27FC236}">
-                <a16:creationId xmlns:a16="http://schemas.microsoft.com/office/drawing/2014/main" id="{E56A377A-F072-4984-A5BE-C1394AC40D3B}"/>
+                <a16:creationId xmlns:a16="http://schemas.microsoft.com/office/drawing/2014/main" id="{6BD90804-F913-46AF-8C5B-5C50559F84E1}"/>
               </a:ext>
             </a:extLst>
           </p:cNvPr>
@@ -5590,7 +5590,7 @@
           <p:cNvPr id="4" name="Rectangle 3">
             <a:extLst xmlns:a="http://schemas.openxmlformats.org/drawingml/2006/main">
               <a:ext uri="{FF2B5EF4-FFF2-40B4-BE49-F238E27FC236}">
-                <a16:creationId xmlns:a16="http://schemas.microsoft.com/office/drawing/2014/main" id="{0A3DA214-F788-41A3-8C74-6F5749DA7BED}"/>
+                <a16:creationId xmlns:a16="http://schemas.microsoft.com/office/drawing/2014/main" id="{03FB62B3-8FD7-4B7C-9B6D-06B87F8EE445}"/>
               </a:ext>
             </a:extLst>
           </p:cNvPr>
@@ -5645,7 +5645,7 @@
           <p:cNvPr id="5" name="Rectangle 4">
             <a:extLst xmlns:a="http://schemas.openxmlformats.org/drawingml/2006/main">
               <a:ext uri="{FF2B5EF4-FFF2-40B4-BE49-F238E27FC236}">
-                <a16:creationId xmlns:a16="http://schemas.microsoft.com/office/drawing/2014/main" id="{37295BAE-2FB7-4BBF-B9D4-E3A76776EEC2}"/>
+                <a16:creationId xmlns:a16="http://schemas.microsoft.com/office/drawing/2014/main" id="{0419AF0C-3C17-4C21-B467-39AE7644B865}"/>
               </a:ext>
             </a:extLst>
           </p:cNvPr>
@@ -5700,7 +5700,7 @@
           <p:cNvPr id="6" name="TextBox 5">
             <a:extLst xmlns:a="http://schemas.openxmlformats.org/drawingml/2006/main">
               <a:ext uri="{FF2B5EF4-FFF2-40B4-BE49-F238E27FC236}">
-                <a16:creationId xmlns:a16="http://schemas.microsoft.com/office/drawing/2014/main" id="{53BB5CA9-3529-4188-8BB8-567E81B0CE1D}"/>
+                <a16:creationId xmlns:a16="http://schemas.microsoft.com/office/drawing/2014/main" id="{64595D22-4E4D-46D2-B465-CFF656EEF531}"/>
               </a:ext>
             </a:extLst>
           </p:cNvPr>
@@ -5737,7 +5737,7 @@
                 <a:ea typeface="Aptos"/>
                 <a:cs typeface="Aptos"/>
               </a:rPr>
-              <a:t>Julkinen riippumaton evidenssikooste · 2026.07.24-20 · 2026-07-24 · Lähteet: EPO; Saksa — viralliset tuomiot; WIPO</a:t>
+              <a:t>Julkinen riippumaton evidenssikooste · 2026.07.24-21 · 2026-07-24 · Lähteet: EPO; Saksa — viralliset tuomiot; WIPO</a:t>
             </a:r>
           </a:p>
         </p:txBody>
@@ -5747,7 +5747,7 @@
           <p:cNvPr id="7" name="TextBox 6">
             <a:extLst xmlns:a="http://schemas.openxmlformats.org/drawingml/2006/main">
               <a:ext uri="{FF2B5EF4-FFF2-40B4-BE49-F238E27FC236}">
-                <a16:creationId xmlns:a16="http://schemas.microsoft.com/office/drawing/2014/main" id="{4EB5F0C1-4D43-40B8-AB26-E92A0296CEB2}"/>
+                <a16:creationId xmlns:a16="http://schemas.microsoft.com/office/drawing/2014/main" id="{412E093F-E3BA-4567-8E68-C9D2E1643B57}"/>
               </a:ext>
             </a:extLst>
           </p:cNvPr>
@@ -5794,7 +5794,7 @@
           <p:cNvPr id="8" name="TextBox 7">
             <a:extLst xmlns:a="http://schemas.openxmlformats.org/drawingml/2006/main">
               <a:ext uri="{FF2B5EF4-FFF2-40B4-BE49-F238E27FC236}">
-                <a16:creationId xmlns:a16="http://schemas.microsoft.com/office/drawing/2014/main" id="{946DC005-AFD8-4525-AEBC-0FA6D3D3EBF1}"/>
+                <a16:creationId xmlns:a16="http://schemas.microsoft.com/office/drawing/2014/main" id="{732ADA79-D429-4933-A1A4-D29DC8FE3C86}"/>
               </a:ext>
             </a:extLst>
           </p:cNvPr>
@@ -5841,7 +5841,7 @@
           <p:cNvPr id="9" name="TextBox 8">
             <a:extLst xmlns:a="http://schemas.openxmlformats.org/drawingml/2006/main">
               <a:ext uri="{FF2B5EF4-FFF2-40B4-BE49-F238E27FC236}">
-                <a16:creationId xmlns:a16="http://schemas.microsoft.com/office/drawing/2014/main" id="{E22AD3D4-240D-4CC3-9ED1-48106FD62182}"/>
+                <a16:creationId xmlns:a16="http://schemas.microsoft.com/office/drawing/2014/main" id="{4B7A88C6-1DD1-413E-AE68-090AA12E10E7}"/>
               </a:ext>
             </a:extLst>
           </p:cNvPr>
@@ -5938,7 +5938,7 @@
           <p:cNvPr id="10" name="Rounded Rectangle 9">
             <a:extLst xmlns:a="http://schemas.openxmlformats.org/drawingml/2006/main">
               <a:ext uri="{FF2B5EF4-FFF2-40B4-BE49-F238E27FC236}">
-                <a16:creationId xmlns:a16="http://schemas.microsoft.com/office/drawing/2014/main" id="{5D5980A7-CA3B-4B08-9E30-526BD0D9EDC2}"/>
+                <a16:creationId xmlns:a16="http://schemas.microsoft.com/office/drawing/2014/main" id="{623DBA9D-ACC4-4E9F-AC77-E72E3B2E088E}"/>
               </a:ext>
             </a:extLst>
           </p:cNvPr>
@@ -5995,7 +5995,7 @@
           <p:cNvPr id="11" name="TextBox 10">
             <a:extLst xmlns:a="http://schemas.openxmlformats.org/drawingml/2006/main">
               <a:ext uri="{FF2B5EF4-FFF2-40B4-BE49-F238E27FC236}">
-                <a16:creationId xmlns:a16="http://schemas.microsoft.com/office/drawing/2014/main" id="{87118E2C-17E0-4701-BA30-2B5B6840666C}"/>
+                <a16:creationId xmlns:a16="http://schemas.microsoft.com/office/drawing/2014/main" id="{DF34D202-0C7B-406D-AEFF-A543E624441F}"/>
               </a:ext>
             </a:extLst>
           </p:cNvPr>
@@ -6042,7 +6042,7 @@
           <p:cNvPr id="12" name="TextBox 11">
             <a:extLst xmlns:a="http://schemas.openxmlformats.org/drawingml/2006/main">
               <a:ext uri="{FF2B5EF4-FFF2-40B4-BE49-F238E27FC236}">
-                <a16:creationId xmlns:a16="http://schemas.microsoft.com/office/drawing/2014/main" id="{2750DF61-0A04-4471-8062-EC14FC8D6B3C}"/>
+                <a16:creationId xmlns:a16="http://schemas.microsoft.com/office/drawing/2014/main" id="{748B61A0-61E3-4C57-9C66-7C696067E9A3}"/>
               </a:ext>
             </a:extLst>
           </p:cNvPr>
@@ -6087,7 +6087,7 @@
     </p:spTree>
     <p:extLst>
       <p:ext uri="{BB962C8B-B14F-4D97-AF65-F5344CB8AC3E}">
-        <p14:creationId xmlns:p14="http://schemas.microsoft.com/office/powerpoint/2010/main" val="1237222428"/>
+        <p14:creationId xmlns:p14="http://schemas.microsoft.com/office/powerpoint/2010/main" val="518363395"/>
       </p:ext>
     </p:extLst>
   </p:cSld>
@@ -6111,7 +6111,7 @@
           <p:cNvPr id="2" name="TextBox 1">
             <a:extLst xmlns:a="http://schemas.openxmlformats.org/drawingml/2006/main">
               <a:ext uri="{FF2B5EF4-FFF2-40B4-BE49-F238E27FC236}">
-                <a16:creationId xmlns:a16="http://schemas.microsoft.com/office/drawing/2014/main" id="{4CD39106-AAA2-4702-996D-E155BF2A9F67}"/>
+                <a16:creationId xmlns:a16="http://schemas.microsoft.com/office/drawing/2014/main" id="{1FE3B254-C69E-4F71-AB0E-CE65C24283BF}"/>
               </a:ext>
             </a:extLst>
           </p:cNvPr>
@@ -6158,7 +6158,7 @@
           <p:cNvPr id="3" name="TextBox 2">
             <a:extLst xmlns:a="http://schemas.openxmlformats.org/drawingml/2006/main">
               <a:ext uri="{FF2B5EF4-FFF2-40B4-BE49-F238E27FC236}">
-                <a16:creationId xmlns:a16="http://schemas.microsoft.com/office/drawing/2014/main" id="{9EBE2BC3-DB24-4E63-A022-19FC4110FD5E}"/>
+                <a16:creationId xmlns:a16="http://schemas.microsoft.com/office/drawing/2014/main" id="{AACA02E5-2288-4BB5-A441-2064F8D69563}"/>
               </a:ext>
             </a:extLst>
           </p:cNvPr>
@@ -6205,7 +6205,7 @@
           <p:cNvPr id="4" name="Rectangle 3">
             <a:extLst xmlns:a="http://schemas.openxmlformats.org/drawingml/2006/main">
               <a:ext uri="{FF2B5EF4-FFF2-40B4-BE49-F238E27FC236}">
-                <a16:creationId xmlns:a16="http://schemas.microsoft.com/office/drawing/2014/main" id="{FE2701EF-3E41-4B41-8DD6-069132FB0B69}"/>
+                <a16:creationId xmlns:a16="http://schemas.microsoft.com/office/drawing/2014/main" id="{44CDE51F-CA25-4631-90A7-9F982FB76C7C}"/>
               </a:ext>
             </a:extLst>
           </p:cNvPr>
@@ -6260,7 +6260,7 @@
           <p:cNvPr id="5" name="Rectangle 4">
             <a:extLst xmlns:a="http://schemas.openxmlformats.org/drawingml/2006/main">
               <a:ext uri="{FF2B5EF4-FFF2-40B4-BE49-F238E27FC236}">
-                <a16:creationId xmlns:a16="http://schemas.microsoft.com/office/drawing/2014/main" id="{C9EF208B-E627-4649-A274-81EFF447BEBA}"/>
+                <a16:creationId xmlns:a16="http://schemas.microsoft.com/office/drawing/2014/main" id="{374C3D1E-021D-4241-8193-38251A4B787E}"/>
               </a:ext>
             </a:extLst>
           </p:cNvPr>
@@ -6315,7 +6315,7 @@
           <p:cNvPr id="6" name="TextBox 5">
             <a:extLst xmlns:a="http://schemas.openxmlformats.org/drawingml/2006/main">
               <a:ext uri="{FF2B5EF4-FFF2-40B4-BE49-F238E27FC236}">
-                <a16:creationId xmlns:a16="http://schemas.microsoft.com/office/drawing/2014/main" id="{088A913D-F805-473B-9134-1E42A82B3A7F}"/>
+                <a16:creationId xmlns:a16="http://schemas.microsoft.com/office/drawing/2014/main" id="{C51F530A-FBC1-4D10-84BD-C81C166EC816}"/>
               </a:ext>
             </a:extLst>
           </p:cNvPr>
@@ -6352,7 +6352,7 @@
                 <a:ea typeface="Aptos"/>
                 <a:cs typeface="Aptos"/>
               </a:rPr>
-              <a:t>Julkinen riippumaton evidenssikooste · 2026.07.24-20 · 2026-07-24 · Lähteet: EPO Register; EP3032975B2; 8 Ni 18/24 (EP); 7 O 3341/24</a:t>
+              <a:t>Julkinen riippumaton evidenssikooste · 2026.07.24-21 · 2026-07-24 · Lähteet: EPO Register; EP3032975B2; 8 Ni 18/24 (EP); 7 O 3341/24</a:t>
             </a:r>
           </a:p>
         </p:txBody>
@@ -6362,7 +6362,7 @@
           <p:cNvPr id="7" name="TextBox 6">
             <a:extLst xmlns:a="http://schemas.openxmlformats.org/drawingml/2006/main">
               <a:ext uri="{FF2B5EF4-FFF2-40B4-BE49-F238E27FC236}">
-                <a16:creationId xmlns:a16="http://schemas.microsoft.com/office/drawing/2014/main" id="{10146B47-8360-4CD2-9E8D-B5B5CCB01F3B}"/>
+                <a16:creationId xmlns:a16="http://schemas.microsoft.com/office/drawing/2014/main" id="{37D036D5-9241-4CD4-8178-4CF09A6FE61B}"/>
               </a:ext>
             </a:extLst>
           </p:cNvPr>
@@ -6409,7 +6409,7 @@
           <p:cNvPr id="8" name="Rounded Rectangle 7">
             <a:extLst xmlns:a="http://schemas.openxmlformats.org/drawingml/2006/main">
               <a:ext uri="{FF2B5EF4-FFF2-40B4-BE49-F238E27FC236}">
-                <a16:creationId xmlns:a16="http://schemas.microsoft.com/office/drawing/2014/main" id="{D8C7802E-E61F-4413-8A28-28847097DEC2}"/>
+                <a16:creationId xmlns:a16="http://schemas.microsoft.com/office/drawing/2014/main" id="{22A9F8EA-169E-48DA-AEFF-D65CB275EE75}"/>
               </a:ext>
             </a:extLst>
           </p:cNvPr>
@@ -6466,7 +6466,7 @@
           <p:cNvPr id="9" name="TextBox 8">
             <a:extLst xmlns:a="http://schemas.openxmlformats.org/drawingml/2006/main">
               <a:ext uri="{FF2B5EF4-FFF2-40B4-BE49-F238E27FC236}">
-                <a16:creationId xmlns:a16="http://schemas.microsoft.com/office/drawing/2014/main" id="{159A4455-6B48-4533-BDC1-1A35B0167EE2}"/>
+                <a16:creationId xmlns:a16="http://schemas.microsoft.com/office/drawing/2014/main" id="{923B6BB3-FB30-4151-B8C3-A7A23A3BDB31}"/>
               </a:ext>
             </a:extLst>
           </p:cNvPr>
@@ -6513,7 +6513,7 @@
           <p:cNvPr id="10" name="TextBox 9">
             <a:extLst xmlns:a="http://schemas.openxmlformats.org/drawingml/2006/main">
               <a:ext uri="{FF2B5EF4-FFF2-40B4-BE49-F238E27FC236}">
-                <a16:creationId xmlns:a16="http://schemas.microsoft.com/office/drawing/2014/main" id="{4885AE3A-D0B1-4400-9A4D-BEEC05C04AE8}"/>
+                <a16:creationId xmlns:a16="http://schemas.microsoft.com/office/drawing/2014/main" id="{F8439126-82B0-4784-B9B3-4AFB9A1816D5}"/>
               </a:ext>
             </a:extLst>
           </p:cNvPr>
@@ -6560,7 +6560,7 @@
           <p:cNvPr id="11" name="Rounded Rectangle 10">
             <a:extLst xmlns:a="http://schemas.openxmlformats.org/drawingml/2006/main">
               <a:ext uri="{FF2B5EF4-FFF2-40B4-BE49-F238E27FC236}">
-                <a16:creationId xmlns:a16="http://schemas.microsoft.com/office/drawing/2014/main" id="{5235D55F-AECB-40EF-8F0F-81FE54D9219A}"/>
+                <a16:creationId xmlns:a16="http://schemas.microsoft.com/office/drawing/2014/main" id="{1E1F3484-E988-4CC2-A609-2C02704B17B2}"/>
               </a:ext>
             </a:extLst>
           </p:cNvPr>
@@ -6617,7 +6617,7 @@
           <p:cNvPr id="12" name="TextBox 11">
             <a:extLst xmlns:a="http://schemas.openxmlformats.org/drawingml/2006/main">
               <a:ext uri="{FF2B5EF4-FFF2-40B4-BE49-F238E27FC236}">
-                <a16:creationId xmlns:a16="http://schemas.microsoft.com/office/drawing/2014/main" id="{50FA5F06-AB6A-442A-8105-E4A2E84B155D}"/>
+                <a16:creationId xmlns:a16="http://schemas.microsoft.com/office/drawing/2014/main" id="{C12EC278-FD13-4459-A9E6-90B58E9403A2}"/>
               </a:ext>
             </a:extLst>
           </p:cNvPr>
@@ -6664,7 +6664,7 @@
           <p:cNvPr id="13" name="TextBox 12">
             <a:extLst xmlns:a="http://schemas.openxmlformats.org/drawingml/2006/main">
               <a:ext uri="{FF2B5EF4-FFF2-40B4-BE49-F238E27FC236}">
-                <a16:creationId xmlns:a16="http://schemas.microsoft.com/office/drawing/2014/main" id="{8C3E8E8B-0134-4DAE-AB02-ED7BC8CFA515}"/>
+                <a16:creationId xmlns:a16="http://schemas.microsoft.com/office/drawing/2014/main" id="{A156844F-32B6-4A80-9D67-915F2CE2290A}"/>
               </a:ext>
             </a:extLst>
           </p:cNvPr>
@@ -6711,7 +6711,7 @@
           <p:cNvPr id="14" name="Rounded Rectangle 13">
             <a:extLst xmlns:a="http://schemas.openxmlformats.org/drawingml/2006/main">
               <a:ext uri="{FF2B5EF4-FFF2-40B4-BE49-F238E27FC236}">
-                <a16:creationId xmlns:a16="http://schemas.microsoft.com/office/drawing/2014/main" id="{C5497B23-F7AB-4DEB-9BC5-12A509D64825}"/>
+                <a16:creationId xmlns:a16="http://schemas.microsoft.com/office/drawing/2014/main" id="{DFBBF1BC-97D2-4EC7-9825-462F346FA45D}"/>
               </a:ext>
             </a:extLst>
           </p:cNvPr>
@@ -6768,7 +6768,7 @@
           <p:cNvPr id="15" name="TextBox 14">
             <a:extLst xmlns:a="http://schemas.openxmlformats.org/drawingml/2006/main">
               <a:ext uri="{FF2B5EF4-FFF2-40B4-BE49-F238E27FC236}">
-                <a16:creationId xmlns:a16="http://schemas.microsoft.com/office/drawing/2014/main" id="{271199EB-89BE-4265-81E4-C6E6FCF001A0}"/>
+                <a16:creationId xmlns:a16="http://schemas.microsoft.com/office/drawing/2014/main" id="{BAB466A8-2C9C-499A-BB66-0A25FECDC259}"/>
               </a:ext>
             </a:extLst>
           </p:cNvPr>
@@ -6815,7 +6815,7 @@
           <p:cNvPr id="16" name="TextBox 15">
             <a:extLst xmlns:a="http://schemas.openxmlformats.org/drawingml/2006/main">
               <a:ext uri="{FF2B5EF4-FFF2-40B4-BE49-F238E27FC236}">
-                <a16:creationId xmlns:a16="http://schemas.microsoft.com/office/drawing/2014/main" id="{F37F5C80-E9B1-417F-A16A-BAB4E06B3B9C}"/>
+                <a16:creationId xmlns:a16="http://schemas.microsoft.com/office/drawing/2014/main" id="{E6812EAA-43F1-4E9E-9B32-58BDC8D7D7A0}"/>
               </a:ext>
             </a:extLst>
           </p:cNvPr>
@@ -6862,7 +6862,7 @@
           <p:cNvPr id="17" name="TextBox 16">
             <a:extLst xmlns:a="http://schemas.openxmlformats.org/drawingml/2006/main">
               <a:ext uri="{FF2B5EF4-FFF2-40B4-BE49-F238E27FC236}">
-                <a16:creationId xmlns:a16="http://schemas.microsoft.com/office/drawing/2014/main" id="{ABDCEBDE-5688-41FA-A46C-F023B6F48F4C}"/>
+                <a16:creationId xmlns:a16="http://schemas.microsoft.com/office/drawing/2014/main" id="{2CB970C9-4AB3-4731-B629-A090402C450B}"/>
               </a:ext>
             </a:extLst>
           </p:cNvPr>
@@ -6909,7 +6909,7 @@
           <p:cNvPr id="18" name="Rounded Rectangle 17">
             <a:extLst xmlns:a="http://schemas.openxmlformats.org/drawingml/2006/main">
               <a:ext uri="{FF2B5EF4-FFF2-40B4-BE49-F238E27FC236}">
-                <a16:creationId xmlns:a16="http://schemas.microsoft.com/office/drawing/2014/main" id="{8D39A3AA-7C12-415B-B1F7-3BD46A77199D}"/>
+                <a16:creationId xmlns:a16="http://schemas.microsoft.com/office/drawing/2014/main" id="{39FAF564-2747-4434-BC72-B4F50CB9ACF6}"/>
               </a:ext>
             </a:extLst>
           </p:cNvPr>
@@ -6966,7 +6966,7 @@
           <p:cNvPr id="19" name="TextBox 18">
             <a:extLst xmlns:a="http://schemas.openxmlformats.org/drawingml/2006/main">
               <a:ext uri="{FF2B5EF4-FFF2-40B4-BE49-F238E27FC236}">
-                <a16:creationId xmlns:a16="http://schemas.microsoft.com/office/drawing/2014/main" id="{DD1AE486-5DC4-47F9-9345-136A5A03668D}"/>
+                <a16:creationId xmlns:a16="http://schemas.microsoft.com/office/drawing/2014/main" id="{37F82876-A82B-45E1-8542-A56164910DA1}"/>
               </a:ext>
             </a:extLst>
           </p:cNvPr>
@@ -7013,7 +7013,7 @@
           <p:cNvPr id="20" name="TextBox 19">
             <a:extLst xmlns:a="http://schemas.openxmlformats.org/drawingml/2006/main">
               <a:ext uri="{FF2B5EF4-FFF2-40B4-BE49-F238E27FC236}">
-                <a16:creationId xmlns:a16="http://schemas.microsoft.com/office/drawing/2014/main" id="{55328512-A4C0-469C-A8DA-7E033ED3A819}"/>
+                <a16:creationId xmlns:a16="http://schemas.microsoft.com/office/drawing/2014/main" id="{2E4FA507-3ED3-4E4E-8710-DAF6FF7A06D8}"/>
               </a:ext>
             </a:extLst>
           </p:cNvPr>
@@ -7058,7 +7058,7 @@
     </p:spTree>
     <p:extLst>
       <p:ext uri="{BB962C8B-B14F-4D97-AF65-F5344CB8AC3E}">
-        <p14:creationId xmlns:p14="http://schemas.microsoft.com/office/powerpoint/2010/main" val="92434998"/>
+        <p14:creationId xmlns:p14="http://schemas.microsoft.com/office/powerpoint/2010/main" val="1809252940"/>
       </p:ext>
     </p:extLst>
   </p:cSld>
@@ -7082,7 +7082,7 @@
           <p:cNvPr id="2" name="TextBox 1">
             <a:extLst xmlns:a="http://schemas.openxmlformats.org/drawingml/2006/main">
               <a:ext uri="{FF2B5EF4-FFF2-40B4-BE49-F238E27FC236}">
-                <a16:creationId xmlns:a16="http://schemas.microsoft.com/office/drawing/2014/main" id="{2EACCFE2-D7AD-40AD-AEB6-BBDCDBEFD4B3}"/>
+                <a16:creationId xmlns:a16="http://schemas.microsoft.com/office/drawing/2014/main" id="{F8448F0F-DCD1-453C-A9A2-5F42C1B6C13F}"/>
               </a:ext>
             </a:extLst>
           </p:cNvPr>
@@ -7129,7 +7129,7 @@
           <p:cNvPr id="3" name="TextBox 2">
             <a:extLst xmlns:a="http://schemas.openxmlformats.org/drawingml/2006/main">
               <a:ext uri="{FF2B5EF4-FFF2-40B4-BE49-F238E27FC236}">
-                <a16:creationId xmlns:a16="http://schemas.microsoft.com/office/drawing/2014/main" id="{9153FBBC-99CB-41B8-8D03-01B3BA647D35}"/>
+                <a16:creationId xmlns:a16="http://schemas.microsoft.com/office/drawing/2014/main" id="{81E1A73B-4C6A-4EEB-941A-A3362EE1C73B}"/>
               </a:ext>
             </a:extLst>
           </p:cNvPr>
@@ -7176,7 +7176,7 @@
           <p:cNvPr id="4" name="Rectangle 3">
             <a:extLst xmlns:a="http://schemas.openxmlformats.org/drawingml/2006/main">
               <a:ext uri="{FF2B5EF4-FFF2-40B4-BE49-F238E27FC236}">
-                <a16:creationId xmlns:a16="http://schemas.microsoft.com/office/drawing/2014/main" id="{F9132A36-ED2F-43A4-8F80-8E017C97F89D}"/>
+                <a16:creationId xmlns:a16="http://schemas.microsoft.com/office/drawing/2014/main" id="{FB946633-34C2-4B78-9884-B118CB37142E}"/>
               </a:ext>
             </a:extLst>
           </p:cNvPr>
@@ -7231,7 +7231,7 @@
           <p:cNvPr id="5" name="Rectangle 4">
             <a:extLst xmlns:a="http://schemas.openxmlformats.org/drawingml/2006/main">
               <a:ext uri="{FF2B5EF4-FFF2-40B4-BE49-F238E27FC236}">
-                <a16:creationId xmlns:a16="http://schemas.microsoft.com/office/drawing/2014/main" id="{D0983595-18A8-456A-99D6-F58B6211FD7C}"/>
+                <a16:creationId xmlns:a16="http://schemas.microsoft.com/office/drawing/2014/main" id="{F79A8DE7-EC29-4BC2-BC00-79474418CFEB}"/>
               </a:ext>
             </a:extLst>
           </p:cNvPr>
@@ -7286,7 +7286,7 @@
           <p:cNvPr id="6" name="TextBox 5">
             <a:extLst xmlns:a="http://schemas.openxmlformats.org/drawingml/2006/main">
               <a:ext uri="{FF2B5EF4-FFF2-40B4-BE49-F238E27FC236}">
-                <a16:creationId xmlns:a16="http://schemas.microsoft.com/office/drawing/2014/main" id="{9FF4E917-1411-444F-92B1-F1AFAD76428C}"/>
+                <a16:creationId xmlns:a16="http://schemas.microsoft.com/office/drawing/2014/main" id="{17A7C40A-6A25-444D-873D-82C1AE2FEDED}"/>
               </a:ext>
             </a:extLst>
           </p:cNvPr>
@@ -7323,7 +7323,7 @@
                 <a:ea typeface="Aptos"/>
                 <a:cs typeface="Aptos"/>
               </a:rPr>
-              <a:t>Julkinen riippumaton evidenssikooste · 2026.07.24-20 · 2026-07-24 · Lähteet: Statistics Canada; Health Canada; New Zealand Ministry of Health; Destatis; Vero; Sejm; Ruotsin hallitus; FTC; European Commission; IMARC; GVR; Fortune</a:t>
+              <a:t>Julkinen riippumaton evidenssikooste · 2026.07.24-21 · 2026-07-24 · Lähteet: Statistics Canada; Health Canada; New Zealand Ministry of Health; Destatis; Vero; Sejm; Ruotsin hallitus; FTC; European Commission; IMARC; GVR; Fortune</a:t>
             </a:r>
           </a:p>
         </p:txBody>
@@ -7333,7 +7333,7 @@
           <p:cNvPr id="7" name="TextBox 6">
             <a:extLst xmlns:a="http://schemas.openxmlformats.org/drawingml/2006/main">
               <a:ext uri="{FF2B5EF4-FFF2-40B4-BE49-F238E27FC236}">
-                <a16:creationId xmlns:a16="http://schemas.microsoft.com/office/drawing/2014/main" id="{183B3B37-517A-45D6-B85D-60406698055E}"/>
+                <a16:creationId xmlns:a16="http://schemas.microsoft.com/office/drawing/2014/main" id="{9248C6E9-E586-41E3-A894-1FF75CBE5D58}"/>
               </a:ext>
             </a:extLst>
           </p:cNvPr>
@@ -7380,7 +7380,7 @@
           <p:cNvPr id="8" name="Rounded Rectangle 7">
             <a:extLst xmlns:a="http://schemas.openxmlformats.org/drawingml/2006/main">
               <a:ext uri="{FF2B5EF4-FFF2-40B4-BE49-F238E27FC236}">
-                <a16:creationId xmlns:a16="http://schemas.microsoft.com/office/drawing/2014/main" id="{630F5ACC-9492-4B5F-961D-05F8CB745A45}"/>
+                <a16:creationId xmlns:a16="http://schemas.microsoft.com/office/drawing/2014/main" id="{8BE997B9-2B89-4B95-8025-1A653688C4F0}"/>
               </a:ext>
             </a:extLst>
           </p:cNvPr>
@@ -7437,7 +7437,7 @@
           <p:cNvPr id="9" name="TextBox 8">
             <a:extLst xmlns:a="http://schemas.openxmlformats.org/drawingml/2006/main">
               <a:ext uri="{FF2B5EF4-FFF2-40B4-BE49-F238E27FC236}">
-                <a16:creationId xmlns:a16="http://schemas.microsoft.com/office/drawing/2014/main" id="{B1678B53-D057-44E1-B8BB-577F1160D2B8}"/>
+                <a16:creationId xmlns:a16="http://schemas.microsoft.com/office/drawing/2014/main" id="{135ACC81-ABFC-4C74-AC06-0CDC83FD56CA}"/>
               </a:ext>
             </a:extLst>
           </p:cNvPr>
@@ -7484,7 +7484,7 @@
           <p:cNvPr id="10" name="TextBox 9">
             <a:extLst xmlns:a="http://schemas.openxmlformats.org/drawingml/2006/main">
               <a:ext uri="{FF2B5EF4-FFF2-40B4-BE49-F238E27FC236}">
-                <a16:creationId xmlns:a16="http://schemas.microsoft.com/office/drawing/2014/main" id="{0BC3E1E0-A986-42B2-8B98-144A1E3FB186}"/>
+                <a16:creationId xmlns:a16="http://schemas.microsoft.com/office/drawing/2014/main" id="{B6BE29E3-7F53-4911-AE68-30AA54B164C8}"/>
               </a:ext>
             </a:extLst>
           </p:cNvPr>
@@ -7531,7 +7531,7 @@
           <p:cNvPr id="11" name="Rounded Rectangle 10">
             <a:extLst xmlns:a="http://schemas.openxmlformats.org/drawingml/2006/main">
               <a:ext uri="{FF2B5EF4-FFF2-40B4-BE49-F238E27FC236}">
-                <a16:creationId xmlns:a16="http://schemas.microsoft.com/office/drawing/2014/main" id="{C09F52FE-619E-4F43-9358-200A8A682656}"/>
+                <a16:creationId xmlns:a16="http://schemas.microsoft.com/office/drawing/2014/main" id="{3F93CE74-BAF6-48CE-89F2-2950820F48C8}"/>
               </a:ext>
             </a:extLst>
           </p:cNvPr>
@@ -7588,7 +7588,7 @@
           <p:cNvPr id="12" name="TextBox 11">
             <a:extLst xmlns:a="http://schemas.openxmlformats.org/drawingml/2006/main">
               <a:ext uri="{FF2B5EF4-FFF2-40B4-BE49-F238E27FC236}">
-                <a16:creationId xmlns:a16="http://schemas.microsoft.com/office/drawing/2014/main" id="{4C6C6A8F-52BC-4DC1-A1F2-5851472620D8}"/>
+                <a16:creationId xmlns:a16="http://schemas.microsoft.com/office/drawing/2014/main" id="{54DA82CC-0160-4548-9FA9-819818B05CC1}"/>
               </a:ext>
             </a:extLst>
           </p:cNvPr>
@@ -7635,7 +7635,7 @@
           <p:cNvPr id="13" name="TextBox 12">
             <a:extLst xmlns:a="http://schemas.openxmlformats.org/drawingml/2006/main">
               <a:ext uri="{FF2B5EF4-FFF2-40B4-BE49-F238E27FC236}">
-                <a16:creationId xmlns:a16="http://schemas.microsoft.com/office/drawing/2014/main" id="{5F6DB08C-84F1-4585-9D91-525399FA6E49}"/>
+                <a16:creationId xmlns:a16="http://schemas.microsoft.com/office/drawing/2014/main" id="{D950F391-F49A-4705-A32A-7053FBF6A23C}"/>
               </a:ext>
             </a:extLst>
           </p:cNvPr>
@@ -7682,7 +7682,7 @@
           <p:cNvPr id="14" name="Rounded Rectangle 13">
             <a:extLst xmlns:a="http://schemas.openxmlformats.org/drawingml/2006/main">
               <a:ext uri="{FF2B5EF4-FFF2-40B4-BE49-F238E27FC236}">
-                <a16:creationId xmlns:a16="http://schemas.microsoft.com/office/drawing/2014/main" id="{0BC786D0-A189-41C8-ADDF-491314E64E90}"/>
+                <a16:creationId xmlns:a16="http://schemas.microsoft.com/office/drawing/2014/main" id="{28377AF5-5029-4047-81AD-480D481F7B10}"/>
               </a:ext>
             </a:extLst>
           </p:cNvPr>
@@ -7739,7 +7739,7 @@
           <p:cNvPr id="15" name="TextBox 14">
             <a:extLst xmlns:a="http://schemas.openxmlformats.org/drawingml/2006/main">
               <a:ext uri="{FF2B5EF4-FFF2-40B4-BE49-F238E27FC236}">
-                <a16:creationId xmlns:a16="http://schemas.microsoft.com/office/drawing/2014/main" id="{B7308962-2EB2-4748-BD54-56F86F59D4E3}"/>
+                <a16:creationId xmlns:a16="http://schemas.microsoft.com/office/drawing/2014/main" id="{87E91956-0485-41BA-A9A6-CBE03E728419}"/>
               </a:ext>
             </a:extLst>
           </p:cNvPr>
@@ -7786,7 +7786,7 @@
           <p:cNvPr id="16" name="TextBox 15">
             <a:extLst xmlns:a="http://schemas.openxmlformats.org/drawingml/2006/main">
               <a:ext uri="{FF2B5EF4-FFF2-40B4-BE49-F238E27FC236}">
-                <a16:creationId xmlns:a16="http://schemas.microsoft.com/office/drawing/2014/main" id="{2697B8AC-D143-442A-BE8F-7CF7EA26506D}"/>
+                <a16:creationId xmlns:a16="http://schemas.microsoft.com/office/drawing/2014/main" id="{4079A11C-CB2E-4700-A3B9-8C143732E4DD}"/>
               </a:ext>
             </a:extLst>
           </p:cNvPr>
@@ -7833,7 +7833,7 @@
           <p:cNvPr id="17" name="TextBox 16">
             <a:extLst xmlns:a="http://schemas.openxmlformats.org/drawingml/2006/main">
               <a:ext uri="{FF2B5EF4-FFF2-40B4-BE49-F238E27FC236}">
-                <a16:creationId xmlns:a16="http://schemas.microsoft.com/office/drawing/2014/main" id="{FB62BA8F-7956-4382-840E-8ACD8D5F833B}"/>
+                <a16:creationId xmlns:a16="http://schemas.microsoft.com/office/drawing/2014/main" id="{4CB4B26B-503E-4748-A4D6-D2B88D8BE69B}"/>
               </a:ext>
             </a:extLst>
           </p:cNvPr>
@@ -7880,7 +7880,7 @@
           <p:cNvPr id="18" name="Rounded Rectangle 17">
             <a:extLst xmlns:a="http://schemas.openxmlformats.org/drawingml/2006/main">
               <a:ext uri="{FF2B5EF4-FFF2-40B4-BE49-F238E27FC236}">
-                <a16:creationId xmlns:a16="http://schemas.microsoft.com/office/drawing/2014/main" id="{CB381D6B-9290-405F-A3FA-B151A3441881}"/>
+                <a16:creationId xmlns:a16="http://schemas.microsoft.com/office/drawing/2014/main" id="{93C1D2FC-5975-417F-B956-1E9FCA7561B4}"/>
               </a:ext>
             </a:extLst>
           </p:cNvPr>
@@ -7937,7 +7937,7 @@
           <p:cNvPr id="19" name="TextBox 18">
             <a:extLst xmlns:a="http://schemas.openxmlformats.org/drawingml/2006/main">
               <a:ext uri="{FF2B5EF4-FFF2-40B4-BE49-F238E27FC236}">
-                <a16:creationId xmlns:a16="http://schemas.microsoft.com/office/drawing/2014/main" id="{1A8FB526-A3C5-486B-9403-8BFD0D2BA4BE}"/>
+                <a16:creationId xmlns:a16="http://schemas.microsoft.com/office/drawing/2014/main" id="{81AFB5DA-F302-4624-AEE6-CCDC8274EF64}"/>
               </a:ext>
             </a:extLst>
           </p:cNvPr>
@@ -7984,7 +7984,7 @@
           <p:cNvPr id="20" name="TextBox 19">
             <a:extLst xmlns:a="http://schemas.openxmlformats.org/drawingml/2006/main">
               <a:ext uri="{FF2B5EF4-FFF2-40B4-BE49-F238E27FC236}">
-                <a16:creationId xmlns:a16="http://schemas.microsoft.com/office/drawing/2014/main" id="{B8F2CC95-9C00-41FB-BFB8-46171CB3108F}"/>
+                <a16:creationId xmlns:a16="http://schemas.microsoft.com/office/drawing/2014/main" id="{5F825DA8-57E5-4AD7-B2EE-740BB7CEA6F6}"/>
               </a:ext>
             </a:extLst>
           </p:cNvPr>
@@ -8029,7 +8029,7 @@
     </p:spTree>
     <p:extLst>
       <p:ext uri="{BB962C8B-B14F-4D97-AF65-F5344CB8AC3E}">
-        <p14:creationId xmlns:p14="http://schemas.microsoft.com/office/powerpoint/2010/main" val="1595099941"/>
+        <p14:creationId xmlns:p14="http://schemas.microsoft.com/office/powerpoint/2010/main" val="1606885973"/>
       </p:ext>
     </p:extLst>
   </p:cSld>
@@ -8053,7 +8053,7 @@
           <p:cNvPr id="2" name="TextBox 1">
             <a:extLst xmlns:a="http://schemas.openxmlformats.org/drawingml/2006/main">
               <a:ext uri="{FF2B5EF4-FFF2-40B4-BE49-F238E27FC236}">
-                <a16:creationId xmlns:a16="http://schemas.microsoft.com/office/drawing/2014/main" id="{3705D192-BE67-4424-AC14-4EC6372DADA1}"/>
+                <a16:creationId xmlns:a16="http://schemas.microsoft.com/office/drawing/2014/main" id="{1ED27F1A-972A-4FDD-9934-06B1264B431E}"/>
               </a:ext>
             </a:extLst>
           </p:cNvPr>
@@ -8100,7 +8100,7 @@
           <p:cNvPr id="3" name="TextBox 2">
             <a:extLst xmlns:a="http://schemas.openxmlformats.org/drawingml/2006/main">
               <a:ext uri="{FF2B5EF4-FFF2-40B4-BE49-F238E27FC236}">
-                <a16:creationId xmlns:a16="http://schemas.microsoft.com/office/drawing/2014/main" id="{E45AA2FC-FC7A-4315-B00C-C655600F44AC}"/>
+                <a16:creationId xmlns:a16="http://schemas.microsoft.com/office/drawing/2014/main" id="{05506E7B-0240-4B75-814D-BF06CBA8EA3D}"/>
               </a:ext>
             </a:extLst>
           </p:cNvPr>
@@ -8147,7 +8147,7 @@
           <p:cNvPr id="4" name="Rectangle 3">
             <a:extLst xmlns:a="http://schemas.openxmlformats.org/drawingml/2006/main">
               <a:ext uri="{FF2B5EF4-FFF2-40B4-BE49-F238E27FC236}">
-                <a16:creationId xmlns:a16="http://schemas.microsoft.com/office/drawing/2014/main" id="{A52B3FB8-EF6B-4D34-8BAD-5D20C4C5B364}"/>
+                <a16:creationId xmlns:a16="http://schemas.microsoft.com/office/drawing/2014/main" id="{CFE4B9F8-55A7-4616-9261-89BEB5D32C67}"/>
               </a:ext>
             </a:extLst>
           </p:cNvPr>
@@ -8202,7 +8202,7 @@
           <p:cNvPr id="5" name="Rectangle 4">
             <a:extLst xmlns:a="http://schemas.openxmlformats.org/drawingml/2006/main">
               <a:ext uri="{FF2B5EF4-FFF2-40B4-BE49-F238E27FC236}">
-                <a16:creationId xmlns:a16="http://schemas.microsoft.com/office/drawing/2014/main" id="{31A4FF8D-C956-4C92-8214-BDD814165924}"/>
+                <a16:creationId xmlns:a16="http://schemas.microsoft.com/office/drawing/2014/main" id="{AE6B8F45-4940-42D4-A026-652A83BE5775}"/>
               </a:ext>
             </a:extLst>
           </p:cNvPr>
@@ -8257,7 +8257,7 @@
           <p:cNvPr id="6" name="TextBox 5">
             <a:extLst xmlns:a="http://schemas.openxmlformats.org/drawingml/2006/main">
               <a:ext uri="{FF2B5EF4-FFF2-40B4-BE49-F238E27FC236}">
-                <a16:creationId xmlns:a16="http://schemas.microsoft.com/office/drawing/2014/main" id="{5F8E099E-2193-4FE2-9DDD-00D9131B2A0C}"/>
+                <a16:creationId xmlns:a16="http://schemas.microsoft.com/office/drawing/2014/main" id="{FC0E5D48-6905-46EB-B654-302859C06CAF}"/>
               </a:ext>
             </a:extLst>
           </p:cNvPr>
@@ -8294,7 +8294,7 @@
                 <a:ea typeface="Aptos"/>
                 <a:cs typeface="Aptos"/>
               </a:rPr>
-              <a:t>Julkinen riippumaton evidenssikooste · 2026.07.24-20 · 2026-07-24 · Lähteet: Evidence Register; WIPO IP valuation</a:t>
+              <a:t>Julkinen riippumaton evidenssikooste · 2026.07.24-21 · 2026-07-24 · Lähteet: Evidence Register; WIPO IP valuation</a:t>
             </a:r>
           </a:p>
         </p:txBody>
@@ -8304,7 +8304,7 @@
           <p:cNvPr id="7" name="TextBox 6">
             <a:extLst xmlns:a="http://schemas.openxmlformats.org/drawingml/2006/main">
               <a:ext uri="{FF2B5EF4-FFF2-40B4-BE49-F238E27FC236}">
-                <a16:creationId xmlns:a16="http://schemas.microsoft.com/office/drawing/2014/main" id="{1B124105-FD74-45A9-B338-D522DC3B790B}"/>
+                <a16:creationId xmlns:a16="http://schemas.microsoft.com/office/drawing/2014/main" id="{9F350514-D338-4164-BDAA-9ED33C52FD6B}"/>
               </a:ext>
             </a:extLst>
           </p:cNvPr>
@@ -8791,7 +8791,7 @@
           <p:cNvPr id="9" name="TextBox 8">
             <a:extLst xmlns:a="http://schemas.openxmlformats.org/drawingml/2006/main">
               <a:ext uri="{FF2B5EF4-FFF2-40B4-BE49-F238E27FC236}">
-                <a16:creationId xmlns:a16="http://schemas.microsoft.com/office/drawing/2014/main" id="{6CEF35B6-B04D-4984-93B1-B861F53D9377}"/>
+                <a16:creationId xmlns:a16="http://schemas.microsoft.com/office/drawing/2014/main" id="{3CAFAFAE-D748-43E8-8CFC-8EE7A38BB6A4}"/>
               </a:ext>
             </a:extLst>
           </p:cNvPr>
@@ -8836,7 +8836,7 @@
     </p:spTree>
     <p:extLst>
       <p:ext uri="{BB962C8B-B14F-4D97-AF65-F5344CB8AC3E}">
-        <p14:creationId xmlns:p14="http://schemas.microsoft.com/office/powerpoint/2010/main" val="692796903"/>
+        <p14:creationId xmlns:p14="http://schemas.microsoft.com/office/powerpoint/2010/main" val="444771676"/>
       </p:ext>
     </p:extLst>
   </p:cSld>
@@ -8867,7 +8867,7 @@
           <p:cNvPr id="2" name="TextBox 1">
             <a:extLst xmlns:a="http://schemas.openxmlformats.org/drawingml/2006/main">
               <a:ext uri="{FF2B5EF4-FFF2-40B4-BE49-F238E27FC236}">
-                <a16:creationId xmlns:a16="http://schemas.microsoft.com/office/drawing/2014/main" id="{631F088B-841E-44D9-8646-9CD8767BB10D}"/>
+                <a16:creationId xmlns:a16="http://schemas.microsoft.com/office/drawing/2014/main" id="{622A54CE-CBF6-4314-9081-7EE7A154EADF}"/>
               </a:ext>
             </a:extLst>
           </p:cNvPr>
@@ -8914,7 +8914,7 @@
           <p:cNvPr id="3" name="TextBox 2">
             <a:extLst xmlns:a="http://schemas.openxmlformats.org/drawingml/2006/main">
               <a:ext uri="{FF2B5EF4-FFF2-40B4-BE49-F238E27FC236}">
-                <a16:creationId xmlns:a16="http://schemas.microsoft.com/office/drawing/2014/main" id="{DD87E08A-FD7A-44B0-845D-FCA1122E394E}"/>
+                <a16:creationId xmlns:a16="http://schemas.microsoft.com/office/drawing/2014/main" id="{8B91A155-DA37-487C-978F-9D4BC1CEAD95}"/>
               </a:ext>
             </a:extLst>
           </p:cNvPr>
@@ -8961,7 +8961,7 @@
           <p:cNvPr id="4" name="TextBox 3">
             <a:extLst xmlns:a="http://schemas.openxmlformats.org/drawingml/2006/main">
               <a:ext uri="{FF2B5EF4-FFF2-40B4-BE49-F238E27FC236}">
-                <a16:creationId xmlns:a16="http://schemas.microsoft.com/office/drawing/2014/main" id="{3B466AE5-4083-4409-878F-B9D1A2151568}"/>
+                <a16:creationId xmlns:a16="http://schemas.microsoft.com/office/drawing/2014/main" id="{84F7386F-856E-48B8-A8A2-16FC1740D4FB}"/>
               </a:ext>
             </a:extLst>
           </p:cNvPr>
@@ -9080,7 +9080,7 @@
           <p:cNvPr id="5" name="TextBox 4">
             <a:extLst xmlns:a="http://schemas.openxmlformats.org/drawingml/2006/main">
               <a:ext uri="{FF2B5EF4-FFF2-40B4-BE49-F238E27FC236}">
-                <a16:creationId xmlns:a16="http://schemas.microsoft.com/office/drawing/2014/main" id="{6FE61E4C-AA84-4E4F-B9F2-BDFFDD168442}"/>
+                <a16:creationId xmlns:a16="http://schemas.microsoft.com/office/drawing/2014/main" id="{DA3EE5EF-2542-46A2-B980-6E2E1BA88CE8}"/>
               </a:ext>
             </a:extLst>
           </p:cNvPr>
@@ -9117,7 +9117,7 @@
                 <a:ea typeface="Aptos"/>
                 <a:cs typeface="Aptos"/>
               </a:rPr>
-              <a:t>Versio 2026.07.24-20 · 2026-07-24 · 6 / 6</a:t>
+              <a:t>Versio 2026.07.24-21 · 2026-07-24 · 6 / 6</a:t>
             </a:r>
           </a:p>
         </p:txBody>
@@ -9125,7 +9125,7 @@
     </p:spTree>
     <p:extLst>
       <p:ext uri="{BB962C8B-B14F-4D97-AF65-F5344CB8AC3E}">
-        <p14:creationId xmlns:p14="http://schemas.microsoft.com/office/powerpoint/2010/main" val="1967554821"/>
+        <p14:creationId xmlns:p14="http://schemas.microsoft.com/office/powerpoint/2010/main" val="817670123"/>
       </p:ext>
     </p:extLst>
   </p:cSld>

--- a/site/downloads/pixan-bank-deck-short-fi.pptx
+++ b/site/downloads/pixan-bank-deck-short-fi.pptx
@@ -2,18 +2,18 @@
 <file path=ppt/presentation.xml><?xml version="1.0" encoding="utf-8"?>
 <p:presentation xmlns:p="http://schemas.openxmlformats.org/presentationml/2006/main">
   <p:sldMasterIdLst>
-    <p:sldMasterId xmlns:r="http://schemas.openxmlformats.org/officeDocument/2006/relationships" id="2147483648" r:id="R3a081733302c4ecc"/>
+    <p:sldMasterId xmlns:r="http://schemas.openxmlformats.org/officeDocument/2006/relationships" id="2147483648" r:id="R09da2fbcfbd54360"/>
   </p:sldMasterIdLst>
   <p:notesMasterIdLst>
-    <p:notesMasterId xmlns:r="http://schemas.openxmlformats.org/officeDocument/2006/relationships" r:id="Rf6764764743d486c"/>
+    <p:notesMasterId xmlns:r="http://schemas.openxmlformats.org/officeDocument/2006/relationships" r:id="Re73bcbd0504b45bd"/>
   </p:notesMasterIdLst>
   <p:sldIdLst>
-    <p:sldId xmlns:r="http://schemas.openxmlformats.org/officeDocument/2006/relationships" id="256" r:id="R79eddae8f3454045"/>
-    <p:sldId xmlns:r="http://schemas.openxmlformats.org/officeDocument/2006/relationships" id="257" r:id="Rd79334ab891142b2"/>
-    <p:sldId xmlns:r="http://schemas.openxmlformats.org/officeDocument/2006/relationships" id="258" r:id="R7e7f556107bf4725"/>
-    <p:sldId xmlns:r="http://schemas.openxmlformats.org/officeDocument/2006/relationships" id="259" r:id="Rcf93cd0a1aef4672"/>
-    <p:sldId xmlns:r="http://schemas.openxmlformats.org/officeDocument/2006/relationships" id="260" r:id="R8988a1679f344d7d"/>
-    <p:sldId xmlns:r="http://schemas.openxmlformats.org/officeDocument/2006/relationships" id="261" r:id="R2f7faa58dc4a4dc2"/>
+    <p:sldId xmlns:r="http://schemas.openxmlformats.org/officeDocument/2006/relationships" id="256" r:id="Re7945358a0494f41"/>
+    <p:sldId xmlns:r="http://schemas.openxmlformats.org/officeDocument/2006/relationships" id="257" r:id="R72ace29e08d445d2"/>
+    <p:sldId xmlns:r="http://schemas.openxmlformats.org/officeDocument/2006/relationships" id="258" r:id="R88b6277eb541452e"/>
+    <p:sldId xmlns:r="http://schemas.openxmlformats.org/officeDocument/2006/relationships" id="259" r:id="R90e6e009caa04630"/>
+    <p:sldId xmlns:r="http://schemas.openxmlformats.org/officeDocument/2006/relationships" id="260" r:id="Rabc471eb1ead4d41"/>
+    <p:sldId xmlns:r="http://schemas.openxmlformats.org/officeDocument/2006/relationships" id="261" r:id="R6dd8c005c5034401"/>
   </p:sldIdLst>
   <p:sldSz cx="12191999" cy="6858000"/>
   <p:notesSz cx="6858000" cy="9144000"/>
@@ -510,6 +510,11 @@
           </a:p>
           <a:p xmlns:a="http://schemas.openxmlformats.org/drawingml/2006/main">
             <a:r>
+              <a:t>- https://www.folkhalsomyndigheten.se/regler-och-tillsyn/tobak-och-nikotinprodukter-regler-for-tillverkning-handel-och-hantering/elektroniska-cigaretter-och-pafyllningsbehallare-sa-foljer-du-reglerna/</a:t>
+            </a:r>
+          </a:p>
+          <a:p xmlns:a="http://schemas.openxmlformats.org/drawingml/2006/main">
+            <a:r>
               <a:t>- https://www.wipo.int/en/web/ip-financing</a:t>
             </a:r>
           </a:p>
@@ -680,6 +685,11 @@
           </a:p>
           <a:p xmlns:a="http://schemas.openxmlformats.org/drawingml/2006/main">
             <a:r>
+              <a:t>- https://www.folkhalsomyndigheten.se/regler-och-tillsyn/tobak-och-nikotinprodukter-regler-for-tillverkning-handel-och-hantering/elektroniska-cigaretter-och-pafyllningsbehallare-sa-foljer-du-reglerna/</a:t>
+            </a:r>
+          </a:p>
+          <a:p xmlns:a="http://schemas.openxmlformats.org/drawingml/2006/main">
+            <a:r>
               <a:t>- https://www.wipo.int/en/web/ip-financing</a:t>
             </a:r>
           </a:p>
@@ -850,6 +860,11 @@
           </a:p>
           <a:p xmlns:a="http://schemas.openxmlformats.org/drawingml/2006/main">
             <a:r>
+              <a:t>- https://www.folkhalsomyndigheten.se/regler-och-tillsyn/tobak-och-nikotinprodukter-regler-for-tillverkning-handel-och-hantering/elektroniska-cigaretter-och-pafyllningsbehallare-sa-foljer-du-reglerna/</a:t>
+            </a:r>
+          </a:p>
+          <a:p xmlns:a="http://schemas.openxmlformats.org/drawingml/2006/main">
+            <a:r>
               <a:t>- https://www.wipo.int/en/web/ip-financing</a:t>
             </a:r>
           </a:p>
@@ -1020,6 +1035,11 @@
           </a:p>
           <a:p xmlns:a="http://schemas.openxmlformats.org/drawingml/2006/main">
             <a:r>
+              <a:t>- https://www.folkhalsomyndigheten.se/regler-och-tillsyn/tobak-och-nikotinprodukter-regler-for-tillverkning-handel-och-hantering/elektroniska-cigaretter-och-pafyllningsbehallare-sa-foljer-du-reglerna/</a:t>
+            </a:r>
+          </a:p>
+          <a:p xmlns:a="http://schemas.openxmlformats.org/drawingml/2006/main">
+            <a:r>
               <a:t>- https://www.wipo.int/en/web/ip-financing</a:t>
             </a:r>
           </a:p>
@@ -1190,6 +1210,11 @@
           </a:p>
           <a:p xmlns:a="http://schemas.openxmlformats.org/drawingml/2006/main">
             <a:r>
+              <a:t>- https://www.folkhalsomyndigheten.se/regler-och-tillsyn/tobak-och-nikotinprodukter-regler-for-tillverkning-handel-och-hantering/elektroniska-cigaretter-och-pafyllningsbehallare-sa-foljer-du-reglerna/</a:t>
+            </a:r>
+          </a:p>
+          <a:p xmlns:a="http://schemas.openxmlformats.org/drawingml/2006/main">
+            <a:r>
               <a:t>- https://www.wipo.int/en/web/ip-financing</a:t>
             </a:r>
           </a:p>
@@ -1360,6 +1385,11 @@
           </a:p>
           <a:p xmlns:a="http://schemas.openxmlformats.org/drawingml/2006/main">
             <a:r>
+              <a:t>- https://www.folkhalsomyndigheten.se/regler-och-tillsyn/tobak-och-nikotinprodukter-regler-for-tillverkning-handel-och-hantering/elektroniska-cigaretter-och-pafyllningsbehallare-sa-foljer-du-reglerna/</a:t>
+            </a:r>
+          </a:p>
+          <a:p xmlns:a="http://schemas.openxmlformats.org/drawingml/2006/main">
+            <a:r>
               <a:t>- https://www.wipo.int/en/web/ip-financing</a:t>
             </a:r>
           </a:p>
@@ -1467,7 +1497,7 @@
           <p:cNvPr id="2" name="Title 1">
             <a:extLst xmlns:a="http://schemas.openxmlformats.org/drawingml/2006/main">
               <a:ext uri="{FF2B5EF4-FFF2-40B4-BE49-F238E27FC236}">
-                <a16:creationId xmlns:a16="http://schemas.microsoft.com/office/drawing/2014/main" id="{35CCB85A-D7B9-4E4D-A62A-8412E2CB9680}"/>
+                <a16:creationId xmlns:a16="http://schemas.microsoft.com/office/drawing/2014/main" id="{1DD82515-7B44-4F58-AF3A-987F19BC98B5}"/>
               </a:ext>
             </a:extLst>
           </p:cNvPr>
@@ -1499,7 +1529,7 @@
           <p:cNvPr id="3" name="Subtitle 2">
             <a:extLst xmlns:a="http://schemas.openxmlformats.org/drawingml/2006/main">
               <a:ext uri="{FF2B5EF4-FFF2-40B4-BE49-F238E27FC236}">
-                <a16:creationId xmlns:a16="http://schemas.microsoft.com/office/drawing/2014/main" id="{3FA74759-FE51-4781-A1CF-D129C4E81109}"/>
+                <a16:creationId xmlns:a16="http://schemas.microsoft.com/office/drawing/2014/main" id="{892F44C5-515C-49BC-9028-6A2198592715}"/>
               </a:ext>
             </a:extLst>
           </p:cNvPr>
@@ -1622,7 +1652,7 @@
           <p:cNvPr id="4" name="Date Placeholder 3">
             <a:extLst xmlns:a="http://schemas.openxmlformats.org/drawingml/2006/main">
               <a:ext uri="{FF2B5EF4-FFF2-40B4-BE49-F238E27FC236}">
-                <a16:creationId xmlns:a16="http://schemas.microsoft.com/office/drawing/2014/main" id="{EBF682D1-C9B5-4991-8768-C7690805ADEF}"/>
+                <a16:creationId xmlns:a16="http://schemas.microsoft.com/office/drawing/2014/main" id="{872FDBC8-3091-4711-BCE2-EAEC1D7F518C}"/>
               </a:ext>
             </a:extLst>
           </p:cNvPr>
@@ -1649,7 +1679,7 @@
           <p:cNvPr id="5" name="Footer Placeholder 4">
             <a:extLst xmlns:a="http://schemas.openxmlformats.org/drawingml/2006/main">
               <a:ext uri="{FF2B5EF4-FFF2-40B4-BE49-F238E27FC236}">
-                <a16:creationId xmlns:a16="http://schemas.microsoft.com/office/drawing/2014/main" id="{84C4FBF7-8A05-4088-A012-B76A03616CC7}"/>
+                <a16:creationId xmlns:a16="http://schemas.microsoft.com/office/drawing/2014/main" id="{62A6DF81-06F2-4AA1-B3B7-4F2BB4EBFFE6}"/>
               </a:ext>
             </a:extLst>
           </p:cNvPr>
@@ -1672,7 +1702,7 @@
           <p:cNvPr id="6" name="Slide Number Placeholder 5">
             <a:extLst xmlns:a="http://schemas.openxmlformats.org/drawingml/2006/main">
               <a:ext uri="{FF2B5EF4-FFF2-40B4-BE49-F238E27FC236}">
-                <a16:creationId xmlns:a16="http://schemas.microsoft.com/office/drawing/2014/main" id="{3EB39326-2955-4D31-8314-38116C2CE383}"/>
+                <a16:creationId xmlns:a16="http://schemas.microsoft.com/office/drawing/2014/main" id="{2E28FBEF-14BE-4259-B8E8-72AC4F2A8FE9}"/>
               </a:ext>
             </a:extLst>
           </p:cNvPr>
@@ -1716,7 +1746,7 @@
           <p:cNvPr id="2" name="Title 1">
             <a:extLst xmlns:a="http://schemas.openxmlformats.org/drawingml/2006/main">
               <a:ext uri="{FF2B5EF4-FFF2-40B4-BE49-F238E27FC236}">
-                <a16:creationId xmlns:a16="http://schemas.microsoft.com/office/drawing/2014/main" id="{25F25644-8ACB-4CBA-BE6D-59C9C087A6B5}"/>
+                <a16:creationId xmlns:a16="http://schemas.microsoft.com/office/drawing/2014/main" id="{EE0FB42D-64D2-4864-A2C9-43EDDB668F07}"/>
               </a:ext>
             </a:extLst>
           </p:cNvPr>
@@ -1743,7 +1773,7 @@
           <p:cNvPr id="3" name="Vertical Text Placeholder 2">
             <a:extLst xmlns:a="http://schemas.openxmlformats.org/drawingml/2006/main">
               <a:ext uri="{FF2B5EF4-FFF2-40B4-BE49-F238E27FC236}">
-                <a16:creationId xmlns:a16="http://schemas.microsoft.com/office/drawing/2014/main" id="{90E2EF74-EE6A-469A-B176-8E22BCDEFB02}"/>
+                <a16:creationId xmlns:a16="http://schemas.microsoft.com/office/drawing/2014/main" id="{E9DBF126-FEE6-4C63-9B3B-C664193D7FE0}"/>
               </a:ext>
             </a:extLst>
           </p:cNvPr>
@@ -1805,7 +1835,7 @@
           <p:cNvPr id="4" name="Date Placeholder 3">
             <a:extLst xmlns:a="http://schemas.openxmlformats.org/drawingml/2006/main">
               <a:ext uri="{FF2B5EF4-FFF2-40B4-BE49-F238E27FC236}">
-                <a16:creationId xmlns:a16="http://schemas.microsoft.com/office/drawing/2014/main" id="{077D5CAB-2176-478E-9C9D-11C8822065BA}"/>
+                <a16:creationId xmlns:a16="http://schemas.microsoft.com/office/drawing/2014/main" id="{1B96A587-C15A-45E0-8B17-D8AE060B299F}"/>
               </a:ext>
             </a:extLst>
           </p:cNvPr>
@@ -1832,7 +1862,7 @@
           <p:cNvPr id="5" name="Footer Placeholder 4">
             <a:extLst xmlns:a="http://schemas.openxmlformats.org/drawingml/2006/main">
               <a:ext uri="{FF2B5EF4-FFF2-40B4-BE49-F238E27FC236}">
-                <a16:creationId xmlns:a16="http://schemas.microsoft.com/office/drawing/2014/main" id="{682C8F63-594B-46A4-89F0-6317F4B50F13}"/>
+                <a16:creationId xmlns:a16="http://schemas.microsoft.com/office/drawing/2014/main" id="{F887D78A-47AE-453E-8AE7-68666849B7EC}"/>
               </a:ext>
             </a:extLst>
           </p:cNvPr>
@@ -1855,7 +1885,7 @@
           <p:cNvPr id="6" name="Slide Number Placeholder 5">
             <a:extLst xmlns:a="http://schemas.openxmlformats.org/drawingml/2006/main">
               <a:ext uri="{FF2B5EF4-FFF2-40B4-BE49-F238E27FC236}">
-                <a16:creationId xmlns:a16="http://schemas.microsoft.com/office/drawing/2014/main" id="{09EA9EDB-17CB-441B-A77B-C017FC881ED4}"/>
+                <a16:creationId xmlns:a16="http://schemas.microsoft.com/office/drawing/2014/main" id="{E1C5AEE1-A914-431A-BFF0-76AB9DF103DA}"/>
               </a:ext>
             </a:extLst>
           </p:cNvPr>
@@ -1899,7 +1929,7 @@
           <p:cNvPr id="2" name="Vertical Title 1">
             <a:extLst xmlns:a="http://schemas.openxmlformats.org/drawingml/2006/main">
               <a:ext uri="{FF2B5EF4-FFF2-40B4-BE49-F238E27FC236}">
-                <a16:creationId xmlns:a16="http://schemas.microsoft.com/office/drawing/2014/main" id="{2BE58A86-7269-4D8A-B9A7-04B93DDA2223}"/>
+                <a16:creationId xmlns:a16="http://schemas.microsoft.com/office/drawing/2014/main" id="{FAB63F23-4FF4-4C8E-9BFE-879BC3067897}"/>
               </a:ext>
             </a:extLst>
           </p:cNvPr>
@@ -1931,7 +1961,7 @@
           <p:cNvPr id="3" name="Vertical Text Placeholder 2">
             <a:extLst xmlns:a="http://schemas.openxmlformats.org/drawingml/2006/main">
               <a:ext uri="{FF2B5EF4-FFF2-40B4-BE49-F238E27FC236}">
-                <a16:creationId xmlns:a16="http://schemas.microsoft.com/office/drawing/2014/main" id="{D0E452E3-ADB0-4DAB-B39C-89F2E048857C}"/>
+                <a16:creationId xmlns:a16="http://schemas.microsoft.com/office/drawing/2014/main" id="{EF2F34B2-C2F0-447E-8F8C-0E4873924160}"/>
               </a:ext>
             </a:extLst>
           </p:cNvPr>
@@ -1998,7 +2028,7 @@
           <p:cNvPr id="4" name="Date Placeholder 3">
             <a:extLst xmlns:a="http://schemas.openxmlformats.org/drawingml/2006/main">
               <a:ext uri="{FF2B5EF4-FFF2-40B4-BE49-F238E27FC236}">
-                <a16:creationId xmlns:a16="http://schemas.microsoft.com/office/drawing/2014/main" id="{515A2181-3218-4A91-92CF-3B1C3E18C820}"/>
+                <a16:creationId xmlns:a16="http://schemas.microsoft.com/office/drawing/2014/main" id="{2CF4CD82-5409-4CA0-B606-9DD40B73F6A5}"/>
               </a:ext>
             </a:extLst>
           </p:cNvPr>
@@ -2025,7 +2055,7 @@
           <p:cNvPr id="5" name="Footer Placeholder 4">
             <a:extLst xmlns:a="http://schemas.openxmlformats.org/drawingml/2006/main">
               <a:ext uri="{FF2B5EF4-FFF2-40B4-BE49-F238E27FC236}">
-                <a16:creationId xmlns:a16="http://schemas.microsoft.com/office/drawing/2014/main" id="{29E133F5-5E27-4E2E-9FB3-FBE9F4B5903F}"/>
+                <a16:creationId xmlns:a16="http://schemas.microsoft.com/office/drawing/2014/main" id="{5B52F546-7D5F-431E-989D-11D4502D5FB9}"/>
               </a:ext>
             </a:extLst>
           </p:cNvPr>
@@ -2048,7 +2078,7 @@
           <p:cNvPr id="6" name="Slide Number Placeholder 5">
             <a:extLst xmlns:a="http://schemas.openxmlformats.org/drawingml/2006/main">
               <a:ext uri="{FF2B5EF4-FFF2-40B4-BE49-F238E27FC236}">
-                <a16:creationId xmlns:a16="http://schemas.microsoft.com/office/drawing/2014/main" id="{8A5B937C-5EEB-46FA-933D-FFF11A177BD6}"/>
+                <a16:creationId xmlns:a16="http://schemas.microsoft.com/office/drawing/2014/main" id="{956FE6EE-497F-438B-9B52-186CEB86EB91}"/>
               </a:ext>
             </a:extLst>
           </p:cNvPr>
@@ -2092,7 +2122,7 @@
           <p:cNvPr id="2" name="Title 1">
             <a:extLst xmlns:a="http://schemas.openxmlformats.org/drawingml/2006/main">
               <a:ext uri="{FF2B5EF4-FFF2-40B4-BE49-F238E27FC236}">
-                <a16:creationId xmlns:a16="http://schemas.microsoft.com/office/drawing/2014/main" id="{179BD4E4-42D2-4237-9992-AF4946857BBB}"/>
+                <a16:creationId xmlns:a16="http://schemas.microsoft.com/office/drawing/2014/main" id="{B8E8AFCA-1BF9-4394-9E66-D37204C8D3E0}"/>
               </a:ext>
             </a:extLst>
           </p:cNvPr>
@@ -2119,7 +2149,7 @@
           <p:cNvPr id="3" name="Content Placeholder 2">
             <a:extLst xmlns:a="http://schemas.openxmlformats.org/drawingml/2006/main">
               <a:ext uri="{FF2B5EF4-FFF2-40B4-BE49-F238E27FC236}">
-                <a16:creationId xmlns:a16="http://schemas.microsoft.com/office/drawing/2014/main" id="{123A5673-65E6-4484-B44A-F1122C51C32F}"/>
+                <a16:creationId xmlns:a16="http://schemas.microsoft.com/office/drawing/2014/main" id="{9D4292DF-FFEC-4C07-9B0B-89FA840E5D2F}"/>
               </a:ext>
             </a:extLst>
           </p:cNvPr>
@@ -2181,7 +2211,7 @@
           <p:cNvPr id="4" name="Date Placeholder 3">
             <a:extLst xmlns:a="http://schemas.openxmlformats.org/drawingml/2006/main">
               <a:ext uri="{FF2B5EF4-FFF2-40B4-BE49-F238E27FC236}">
-                <a16:creationId xmlns:a16="http://schemas.microsoft.com/office/drawing/2014/main" id="{A61E9994-96F1-4555-AB95-0C615CDBB7C1}"/>
+                <a16:creationId xmlns:a16="http://schemas.microsoft.com/office/drawing/2014/main" id="{C0ECAD73-C9EE-4E40-9B8B-9508EA09A32F}"/>
               </a:ext>
             </a:extLst>
           </p:cNvPr>
@@ -2208,7 +2238,7 @@
           <p:cNvPr id="5" name="Footer Placeholder 4">
             <a:extLst xmlns:a="http://schemas.openxmlformats.org/drawingml/2006/main">
               <a:ext uri="{FF2B5EF4-FFF2-40B4-BE49-F238E27FC236}">
-                <a16:creationId xmlns:a16="http://schemas.microsoft.com/office/drawing/2014/main" id="{08FD51DA-725F-4419-9953-B0AEA7FC2A1A}"/>
+                <a16:creationId xmlns:a16="http://schemas.microsoft.com/office/drawing/2014/main" id="{1FFF9B44-B9C4-48A3-A960-7BABCB8674BD}"/>
               </a:ext>
             </a:extLst>
           </p:cNvPr>
@@ -2231,7 +2261,7 @@
           <p:cNvPr id="6" name="Slide Number Placeholder 5">
             <a:extLst xmlns:a="http://schemas.openxmlformats.org/drawingml/2006/main">
               <a:ext uri="{FF2B5EF4-FFF2-40B4-BE49-F238E27FC236}">
-                <a16:creationId xmlns:a16="http://schemas.microsoft.com/office/drawing/2014/main" id="{D27D3143-2CC0-4D25-8689-E4FC4E36F7D9}"/>
+                <a16:creationId xmlns:a16="http://schemas.microsoft.com/office/drawing/2014/main" id="{CC3E7D39-D721-461C-9806-A5E829BFDE56}"/>
               </a:ext>
             </a:extLst>
           </p:cNvPr>
@@ -2275,7 +2305,7 @@
           <p:cNvPr id="2" name="Title 1">
             <a:extLst xmlns:a="http://schemas.openxmlformats.org/drawingml/2006/main">
               <a:ext uri="{FF2B5EF4-FFF2-40B4-BE49-F238E27FC236}">
-                <a16:creationId xmlns:a16="http://schemas.microsoft.com/office/drawing/2014/main" id="{954F7CA8-EE0D-4323-ACC5-8BE3F3F9A41B}"/>
+                <a16:creationId xmlns:a16="http://schemas.microsoft.com/office/drawing/2014/main" id="{7985C2E7-7672-41E2-96C5-5A0AD56AC44A}"/>
               </a:ext>
             </a:extLst>
           </p:cNvPr>
@@ -2312,7 +2342,7 @@
           <p:cNvPr id="3" name="Text Placeholder 2">
             <a:extLst xmlns:a="http://schemas.openxmlformats.org/drawingml/2006/main">
               <a:ext uri="{FF2B5EF4-FFF2-40B4-BE49-F238E27FC236}">
-                <a16:creationId xmlns:a16="http://schemas.microsoft.com/office/drawing/2014/main" id="{E4DED96E-F0E5-449F-BBA8-746DB509211A}"/>
+                <a16:creationId xmlns:a16="http://schemas.microsoft.com/office/drawing/2014/main" id="{D3387AB2-B732-4CA2-9CC1-76709800F545}"/>
               </a:ext>
             </a:extLst>
           </p:cNvPr>
@@ -2438,7 +2468,7 @@
           <p:cNvPr id="4" name="Date Placeholder 3">
             <a:extLst xmlns:a="http://schemas.openxmlformats.org/drawingml/2006/main">
               <a:ext uri="{FF2B5EF4-FFF2-40B4-BE49-F238E27FC236}">
-                <a16:creationId xmlns:a16="http://schemas.microsoft.com/office/drawing/2014/main" id="{60147888-BE80-4E50-81F6-3C623F3D59F2}"/>
+                <a16:creationId xmlns:a16="http://schemas.microsoft.com/office/drawing/2014/main" id="{E33E1E20-FBFE-457E-ABE9-F50B03CCD064}"/>
               </a:ext>
             </a:extLst>
           </p:cNvPr>
@@ -2465,7 +2495,7 @@
           <p:cNvPr id="5" name="Footer Placeholder 4">
             <a:extLst xmlns:a="http://schemas.openxmlformats.org/drawingml/2006/main">
               <a:ext uri="{FF2B5EF4-FFF2-40B4-BE49-F238E27FC236}">
-                <a16:creationId xmlns:a16="http://schemas.microsoft.com/office/drawing/2014/main" id="{7D9C98D4-5A77-4A1F-AD82-FE5C63F0931F}"/>
+                <a16:creationId xmlns:a16="http://schemas.microsoft.com/office/drawing/2014/main" id="{8F1BBA18-773E-4D51-BDE9-C425A1E4ADCA}"/>
               </a:ext>
             </a:extLst>
           </p:cNvPr>
@@ -2488,7 +2518,7 @@
           <p:cNvPr id="6" name="Slide Number Placeholder 5">
             <a:extLst xmlns:a="http://schemas.openxmlformats.org/drawingml/2006/main">
               <a:ext uri="{FF2B5EF4-FFF2-40B4-BE49-F238E27FC236}">
-                <a16:creationId xmlns:a16="http://schemas.microsoft.com/office/drawing/2014/main" id="{393953B9-74D3-4780-B0D8-D347E9EFF9DA}"/>
+                <a16:creationId xmlns:a16="http://schemas.microsoft.com/office/drawing/2014/main" id="{8543150B-32E0-4BA8-9D36-2FAD698420B2}"/>
               </a:ext>
             </a:extLst>
           </p:cNvPr>
@@ -2532,7 +2562,7 @@
           <p:cNvPr id="2" name="Title 1">
             <a:extLst xmlns:a="http://schemas.openxmlformats.org/drawingml/2006/main">
               <a:ext uri="{FF2B5EF4-FFF2-40B4-BE49-F238E27FC236}">
-                <a16:creationId xmlns:a16="http://schemas.microsoft.com/office/drawing/2014/main" id="{1AB2513C-2672-4EA3-AA6F-0183EEF8AFBC}"/>
+                <a16:creationId xmlns:a16="http://schemas.microsoft.com/office/drawing/2014/main" id="{39946640-75E7-4AB1-9653-BB25509F8B66}"/>
               </a:ext>
             </a:extLst>
           </p:cNvPr>
@@ -2559,7 +2589,7 @@
           <p:cNvPr id="3" name="Content Placeholder 2">
             <a:extLst xmlns:a="http://schemas.openxmlformats.org/drawingml/2006/main">
               <a:ext uri="{FF2B5EF4-FFF2-40B4-BE49-F238E27FC236}">
-                <a16:creationId xmlns:a16="http://schemas.microsoft.com/office/drawing/2014/main" id="{10BEFD39-31D1-40BA-B078-C83E1B2F5C7B}"/>
+                <a16:creationId xmlns:a16="http://schemas.microsoft.com/office/drawing/2014/main" id="{1641E412-2C79-4B64-A8A0-D6A273F3FDA7}"/>
               </a:ext>
             </a:extLst>
           </p:cNvPr>
@@ -2663,7 +2693,7 @@
           <p:cNvPr id="4" name="Content Placeholder 3">
             <a:extLst xmlns:a="http://schemas.openxmlformats.org/drawingml/2006/main">
               <a:ext uri="{FF2B5EF4-FFF2-40B4-BE49-F238E27FC236}">
-                <a16:creationId xmlns:a16="http://schemas.microsoft.com/office/drawing/2014/main" id="{3E9878AA-A6E8-4348-8267-77E0D20267F5}"/>
+                <a16:creationId xmlns:a16="http://schemas.microsoft.com/office/drawing/2014/main" id="{789DE94F-7596-470E-A1A0-0AA861608043}"/>
               </a:ext>
             </a:extLst>
           </p:cNvPr>
@@ -2767,7 +2797,7 @@
           <p:cNvPr id="5" name="Date Placeholder 4">
             <a:extLst xmlns:a="http://schemas.openxmlformats.org/drawingml/2006/main">
               <a:ext uri="{FF2B5EF4-FFF2-40B4-BE49-F238E27FC236}">
-                <a16:creationId xmlns:a16="http://schemas.microsoft.com/office/drawing/2014/main" id="{82702E96-B71B-4204-8398-DD76CD1C48A8}"/>
+                <a16:creationId xmlns:a16="http://schemas.microsoft.com/office/drawing/2014/main" id="{BF357F2F-019C-44DB-ABA1-828E0CD1E7E4}"/>
               </a:ext>
             </a:extLst>
           </p:cNvPr>
@@ -2794,7 +2824,7 @@
           <p:cNvPr id="6" name="Footer Placeholder 5">
             <a:extLst xmlns:a="http://schemas.openxmlformats.org/drawingml/2006/main">
               <a:ext uri="{FF2B5EF4-FFF2-40B4-BE49-F238E27FC236}">
-                <a16:creationId xmlns:a16="http://schemas.microsoft.com/office/drawing/2014/main" id="{E2FB6750-9726-4467-99DC-6A56269780F7}"/>
+                <a16:creationId xmlns:a16="http://schemas.microsoft.com/office/drawing/2014/main" id="{CF06D586-BA7C-471B-B70D-9542E065C9B3}"/>
               </a:ext>
             </a:extLst>
           </p:cNvPr>
@@ -2817,7 +2847,7 @@
           <p:cNvPr id="7" name="Slide Number Placeholder 6">
             <a:extLst xmlns:a="http://schemas.openxmlformats.org/drawingml/2006/main">
               <a:ext uri="{FF2B5EF4-FFF2-40B4-BE49-F238E27FC236}">
-                <a16:creationId xmlns:a16="http://schemas.microsoft.com/office/drawing/2014/main" id="{7A1B73CA-EF54-456D-9CEF-4D4C50A16B97}"/>
+                <a16:creationId xmlns:a16="http://schemas.microsoft.com/office/drawing/2014/main" id="{A0F511AD-CAFD-4EB5-86AE-1CD28C99DBF8}"/>
               </a:ext>
             </a:extLst>
           </p:cNvPr>
@@ -2861,7 +2891,7 @@
           <p:cNvPr id="2" name="Title 1">
             <a:extLst xmlns:a="http://schemas.openxmlformats.org/drawingml/2006/main">
               <a:ext uri="{FF2B5EF4-FFF2-40B4-BE49-F238E27FC236}">
-                <a16:creationId xmlns:a16="http://schemas.microsoft.com/office/drawing/2014/main" id="{ABD9D161-1E4E-44EC-8B5C-7F4123CD4951}"/>
+                <a16:creationId xmlns:a16="http://schemas.microsoft.com/office/drawing/2014/main" id="{C8603F3B-CCA2-4856-AA22-E8946352E071}"/>
               </a:ext>
             </a:extLst>
           </p:cNvPr>
@@ -2893,7 +2923,7 @@
           <p:cNvPr id="3" name="Text Placeholder 2">
             <a:extLst xmlns:a="http://schemas.openxmlformats.org/drawingml/2006/main">
               <a:ext uri="{FF2B5EF4-FFF2-40B4-BE49-F238E27FC236}">
-                <a16:creationId xmlns:a16="http://schemas.microsoft.com/office/drawing/2014/main" id="{2074F0AF-A951-4B5E-BF6F-DC122B98F086}"/>
+                <a16:creationId xmlns:a16="http://schemas.microsoft.com/office/drawing/2014/main" id="{F18C858B-D112-4829-82D8-678EB68B9F69}"/>
               </a:ext>
             </a:extLst>
           </p:cNvPr>
@@ -2965,7 +2995,7 @@
           <p:cNvPr id="4" name="Content Placeholder 3">
             <a:extLst xmlns:a="http://schemas.openxmlformats.org/drawingml/2006/main">
               <a:ext uri="{FF2B5EF4-FFF2-40B4-BE49-F238E27FC236}">
-                <a16:creationId xmlns:a16="http://schemas.microsoft.com/office/drawing/2014/main" id="{18B19E2C-8413-4256-BA7B-C2AB7D5B0BC4}"/>
+                <a16:creationId xmlns:a16="http://schemas.microsoft.com/office/drawing/2014/main" id="{4B916BCD-CC44-4F04-8774-2FEB41586F75}"/>
               </a:ext>
             </a:extLst>
           </p:cNvPr>
@@ -3069,7 +3099,7 @@
           <p:cNvPr id="5" name="Text Placeholder 4">
             <a:extLst xmlns:a="http://schemas.openxmlformats.org/drawingml/2006/main">
               <a:ext uri="{FF2B5EF4-FFF2-40B4-BE49-F238E27FC236}">
-                <a16:creationId xmlns:a16="http://schemas.microsoft.com/office/drawing/2014/main" id="{81D13CC7-9C77-4EFE-A18B-9A72FE76E506}"/>
+                <a16:creationId xmlns:a16="http://schemas.microsoft.com/office/drawing/2014/main" id="{12386FEA-CD4E-4B75-ABFF-60267D529012}"/>
               </a:ext>
             </a:extLst>
           </p:cNvPr>
@@ -3141,7 +3171,7 @@
           <p:cNvPr id="6" name="Content Placeholder 5">
             <a:extLst xmlns:a="http://schemas.openxmlformats.org/drawingml/2006/main">
               <a:ext uri="{FF2B5EF4-FFF2-40B4-BE49-F238E27FC236}">
-                <a16:creationId xmlns:a16="http://schemas.microsoft.com/office/drawing/2014/main" id="{2B583814-8188-46DB-A195-46FC500F6CA0}"/>
+                <a16:creationId xmlns:a16="http://schemas.microsoft.com/office/drawing/2014/main" id="{17373570-B50D-4D5F-AA21-BF42F70BE9C8}"/>
               </a:ext>
             </a:extLst>
           </p:cNvPr>
@@ -3245,7 +3275,7 @@
           <p:cNvPr id="7" name="Date Placeholder 6">
             <a:extLst xmlns:a="http://schemas.openxmlformats.org/drawingml/2006/main">
               <a:ext uri="{FF2B5EF4-FFF2-40B4-BE49-F238E27FC236}">
-                <a16:creationId xmlns:a16="http://schemas.microsoft.com/office/drawing/2014/main" id="{F60026E7-9654-40C5-9D34-718D381C88D0}"/>
+                <a16:creationId xmlns:a16="http://schemas.microsoft.com/office/drawing/2014/main" id="{42DCBD7C-F854-435C-B101-50F84D309E3E}"/>
               </a:ext>
             </a:extLst>
           </p:cNvPr>
@@ -3272,7 +3302,7 @@
           <p:cNvPr id="8" name="Footer Placeholder 7">
             <a:extLst xmlns:a="http://schemas.openxmlformats.org/drawingml/2006/main">
               <a:ext uri="{FF2B5EF4-FFF2-40B4-BE49-F238E27FC236}">
-                <a16:creationId xmlns:a16="http://schemas.microsoft.com/office/drawing/2014/main" id="{F67D6CBF-BCDE-4B39-81A5-C0E3B71734D8}"/>
+                <a16:creationId xmlns:a16="http://schemas.microsoft.com/office/drawing/2014/main" id="{09EE59F2-3628-4A88-AA51-0BB098573D8B}"/>
               </a:ext>
             </a:extLst>
           </p:cNvPr>
@@ -3295,7 +3325,7 @@
           <p:cNvPr id="9" name="Slide Number Placeholder 8">
             <a:extLst xmlns:a="http://schemas.openxmlformats.org/drawingml/2006/main">
               <a:ext uri="{FF2B5EF4-FFF2-40B4-BE49-F238E27FC236}">
-                <a16:creationId xmlns:a16="http://schemas.microsoft.com/office/drawing/2014/main" id="{D99B82AD-C4B9-40B5-8376-FF96EF3A5954}"/>
+                <a16:creationId xmlns:a16="http://schemas.microsoft.com/office/drawing/2014/main" id="{4EF09F97-653D-48F3-8D1D-1272CF9F8A57}"/>
               </a:ext>
             </a:extLst>
           </p:cNvPr>
@@ -3339,7 +3369,7 @@
           <p:cNvPr id="2" name="Title 1">
             <a:extLst xmlns:a="http://schemas.openxmlformats.org/drawingml/2006/main">
               <a:ext uri="{FF2B5EF4-FFF2-40B4-BE49-F238E27FC236}">
-                <a16:creationId xmlns:a16="http://schemas.microsoft.com/office/drawing/2014/main" id="{B2F35C66-B478-434B-BACF-DCD55233B95E}"/>
+                <a16:creationId xmlns:a16="http://schemas.microsoft.com/office/drawing/2014/main" id="{CD58526E-DFF6-476B-9F56-BD777D8335E3}"/>
               </a:ext>
             </a:extLst>
           </p:cNvPr>
@@ -3366,7 +3396,7 @@
           <p:cNvPr id="3" name="Date Placeholder 2">
             <a:extLst xmlns:a="http://schemas.openxmlformats.org/drawingml/2006/main">
               <a:ext uri="{FF2B5EF4-FFF2-40B4-BE49-F238E27FC236}">
-                <a16:creationId xmlns:a16="http://schemas.microsoft.com/office/drawing/2014/main" id="{87A83E79-9EAE-4D87-86BE-2ECC997762AF}"/>
+                <a16:creationId xmlns:a16="http://schemas.microsoft.com/office/drawing/2014/main" id="{D474A441-E147-485D-A5B6-E4AB4DE53714}"/>
               </a:ext>
             </a:extLst>
           </p:cNvPr>
@@ -3393,7 +3423,7 @@
           <p:cNvPr id="4" name="Footer Placeholder 3">
             <a:extLst xmlns:a="http://schemas.openxmlformats.org/drawingml/2006/main">
               <a:ext uri="{FF2B5EF4-FFF2-40B4-BE49-F238E27FC236}">
-                <a16:creationId xmlns:a16="http://schemas.microsoft.com/office/drawing/2014/main" id="{1985AD2D-C609-4FBC-BF2D-EE1DADADB932}"/>
+                <a16:creationId xmlns:a16="http://schemas.microsoft.com/office/drawing/2014/main" id="{3E2414A4-F1AA-4165-A70D-6AEAD5CD8226}"/>
               </a:ext>
             </a:extLst>
           </p:cNvPr>
@@ -3416,7 +3446,7 @@
           <p:cNvPr id="5" name="Slide Number Placeholder 4">
             <a:extLst xmlns:a="http://schemas.openxmlformats.org/drawingml/2006/main">
               <a:ext uri="{FF2B5EF4-FFF2-40B4-BE49-F238E27FC236}">
-                <a16:creationId xmlns:a16="http://schemas.microsoft.com/office/drawing/2014/main" id="{0DE447E8-D467-44BB-AD8E-73FDE6A0BB16}"/>
+                <a16:creationId xmlns:a16="http://schemas.microsoft.com/office/drawing/2014/main" id="{EB1A3269-9EF7-424F-9CB8-075DB99C507B}"/>
               </a:ext>
             </a:extLst>
           </p:cNvPr>
@@ -3460,7 +3490,7 @@
           <p:cNvPr id="2" name="Date Placeholder 1">
             <a:extLst xmlns:a="http://schemas.openxmlformats.org/drawingml/2006/main">
               <a:ext uri="{FF2B5EF4-FFF2-40B4-BE49-F238E27FC236}">
-                <a16:creationId xmlns:a16="http://schemas.microsoft.com/office/drawing/2014/main" id="{842DC740-5E70-49A0-8D6D-F9CF45DB177E}"/>
+                <a16:creationId xmlns:a16="http://schemas.microsoft.com/office/drawing/2014/main" id="{D4B6AC33-707D-442D-8430-089EFFF41B5B}"/>
               </a:ext>
             </a:extLst>
           </p:cNvPr>
@@ -3487,7 +3517,7 @@
           <p:cNvPr id="3" name="Footer Placeholder 2">
             <a:extLst xmlns:a="http://schemas.openxmlformats.org/drawingml/2006/main">
               <a:ext uri="{FF2B5EF4-FFF2-40B4-BE49-F238E27FC236}">
-                <a16:creationId xmlns:a16="http://schemas.microsoft.com/office/drawing/2014/main" id="{DA7EECAE-5B88-4C64-BD46-7375E2805724}"/>
+                <a16:creationId xmlns:a16="http://schemas.microsoft.com/office/drawing/2014/main" id="{28E9AE35-7A88-4D34-A469-9CC5274FCA1C}"/>
               </a:ext>
             </a:extLst>
           </p:cNvPr>
@@ -3510,7 +3540,7 @@
           <p:cNvPr id="4" name="Slide Number Placeholder 3">
             <a:extLst xmlns:a="http://schemas.openxmlformats.org/drawingml/2006/main">
               <a:ext uri="{FF2B5EF4-FFF2-40B4-BE49-F238E27FC236}">
-                <a16:creationId xmlns:a16="http://schemas.microsoft.com/office/drawing/2014/main" id="{579AFDE5-3BEE-483E-8E86-E6F46325535A}"/>
+                <a16:creationId xmlns:a16="http://schemas.microsoft.com/office/drawing/2014/main" id="{97222BF3-B041-473B-B4C4-167AB03C6AE3}"/>
               </a:ext>
             </a:extLst>
           </p:cNvPr>
@@ -3554,7 +3584,7 @@
           <p:cNvPr id="2" name="Title 1">
             <a:extLst xmlns:a="http://schemas.openxmlformats.org/drawingml/2006/main">
               <a:ext uri="{FF2B5EF4-FFF2-40B4-BE49-F238E27FC236}">
-                <a16:creationId xmlns:a16="http://schemas.microsoft.com/office/drawing/2014/main" id="{0A74DFFE-1261-469E-B138-D805D514ABE2}"/>
+                <a16:creationId xmlns:a16="http://schemas.microsoft.com/office/drawing/2014/main" id="{61DFB6D8-F666-4DC5-82CB-CF0AEA858100}"/>
               </a:ext>
             </a:extLst>
           </p:cNvPr>
@@ -3591,7 +3621,7 @@
           <p:cNvPr id="3" name="Content Placeholder 2">
             <a:extLst xmlns:a="http://schemas.openxmlformats.org/drawingml/2006/main">
               <a:ext uri="{FF2B5EF4-FFF2-40B4-BE49-F238E27FC236}">
-                <a16:creationId xmlns:a16="http://schemas.microsoft.com/office/drawing/2014/main" id="{623262CF-62A3-43C1-85F7-9465FA3198F8}"/>
+                <a16:creationId xmlns:a16="http://schemas.microsoft.com/office/drawing/2014/main" id="{2C0689DF-61E5-4D60-B977-24B4681CAA3D}"/>
               </a:ext>
             </a:extLst>
           </p:cNvPr>
@@ -3695,7 +3725,7 @@
           <p:cNvPr id="4" name="Text Placeholder 3">
             <a:extLst xmlns:a="http://schemas.openxmlformats.org/drawingml/2006/main">
               <a:ext uri="{FF2B5EF4-FFF2-40B4-BE49-F238E27FC236}">
-                <a16:creationId xmlns:a16="http://schemas.microsoft.com/office/drawing/2014/main" id="{07F0F543-15BB-4E2D-98DF-852EEB57AC76}"/>
+                <a16:creationId xmlns:a16="http://schemas.microsoft.com/office/drawing/2014/main" id="{C5B154BC-7079-4ED4-8B52-2F59D71E965A}"/>
               </a:ext>
             </a:extLst>
           </p:cNvPr>
@@ -3767,7 +3797,7 @@
           <p:cNvPr id="5" name="Date Placeholder 4">
             <a:extLst xmlns:a="http://schemas.openxmlformats.org/drawingml/2006/main">
               <a:ext uri="{FF2B5EF4-FFF2-40B4-BE49-F238E27FC236}">
-                <a16:creationId xmlns:a16="http://schemas.microsoft.com/office/drawing/2014/main" id="{B332BACD-B2E2-4A3D-82C2-2628851AABD1}"/>
+                <a16:creationId xmlns:a16="http://schemas.microsoft.com/office/drawing/2014/main" id="{284F4DBF-CC79-4F2E-90CB-2C5A33A2C19F}"/>
               </a:ext>
             </a:extLst>
           </p:cNvPr>
@@ -3794,7 +3824,7 @@
           <p:cNvPr id="6" name="Footer Placeholder 5">
             <a:extLst xmlns:a="http://schemas.openxmlformats.org/drawingml/2006/main">
               <a:ext uri="{FF2B5EF4-FFF2-40B4-BE49-F238E27FC236}">
-                <a16:creationId xmlns:a16="http://schemas.microsoft.com/office/drawing/2014/main" id="{7CD157C7-AFD6-43EE-9E80-817B1DEEF601}"/>
+                <a16:creationId xmlns:a16="http://schemas.microsoft.com/office/drawing/2014/main" id="{F5D801F0-B723-420E-B762-3B3647B2BDC7}"/>
               </a:ext>
             </a:extLst>
           </p:cNvPr>
@@ -3817,7 +3847,7 @@
           <p:cNvPr id="7" name="Slide Number Placeholder 6">
             <a:extLst xmlns:a="http://schemas.openxmlformats.org/drawingml/2006/main">
               <a:ext uri="{FF2B5EF4-FFF2-40B4-BE49-F238E27FC236}">
-                <a16:creationId xmlns:a16="http://schemas.microsoft.com/office/drawing/2014/main" id="{52E2F009-7FE7-40B8-9802-CA000F0F7E13}"/>
+                <a16:creationId xmlns:a16="http://schemas.microsoft.com/office/drawing/2014/main" id="{DF99CBE9-4B88-4706-8B2E-01B67D33F014}"/>
               </a:ext>
             </a:extLst>
           </p:cNvPr>
@@ -3861,7 +3891,7 @@
           <p:cNvPr id="2" name="Title 1">
             <a:extLst xmlns:a="http://schemas.openxmlformats.org/drawingml/2006/main">
               <a:ext uri="{FF2B5EF4-FFF2-40B4-BE49-F238E27FC236}">
-                <a16:creationId xmlns:a16="http://schemas.microsoft.com/office/drawing/2014/main" id="{02A69065-710C-49F0-8173-04F10F1C7D88}"/>
+                <a16:creationId xmlns:a16="http://schemas.microsoft.com/office/drawing/2014/main" id="{618FED75-902F-405F-8E01-8F01D77563DC}"/>
               </a:ext>
             </a:extLst>
           </p:cNvPr>
@@ -3898,7 +3928,7 @@
           <p:cNvPr id="3" name="Picture Placeholder 2">
             <a:extLst xmlns:a="http://schemas.openxmlformats.org/drawingml/2006/main">
               <a:ext uri="{FF2B5EF4-FFF2-40B4-BE49-F238E27FC236}">
-                <a16:creationId xmlns:a16="http://schemas.microsoft.com/office/drawing/2014/main" id="{930FC308-87BD-42A0-832E-06DE9DBD9DA6}"/>
+                <a16:creationId xmlns:a16="http://schemas.microsoft.com/office/drawing/2014/main" id="{16AB7973-AF4D-46C2-BB0C-6A0A5D0C031E}"/>
               </a:ext>
             </a:extLst>
           </p:cNvPr>
@@ -3963,7 +3993,7 @@
           <p:cNvPr id="4" name="Text Placeholder 3">
             <a:extLst xmlns:a="http://schemas.openxmlformats.org/drawingml/2006/main">
               <a:ext uri="{FF2B5EF4-FFF2-40B4-BE49-F238E27FC236}">
-                <a16:creationId xmlns:a16="http://schemas.microsoft.com/office/drawing/2014/main" id="{034F9E07-4C26-4F39-9E7E-1B57657A07FB}"/>
+                <a16:creationId xmlns:a16="http://schemas.microsoft.com/office/drawing/2014/main" id="{9A5B26CD-2B8C-4DDC-8EC5-8A3E7DAC06D8}"/>
               </a:ext>
             </a:extLst>
           </p:cNvPr>
@@ -4035,7 +4065,7 @@
           <p:cNvPr id="5" name="Date Placeholder 4">
             <a:extLst xmlns:a="http://schemas.openxmlformats.org/drawingml/2006/main">
               <a:ext uri="{FF2B5EF4-FFF2-40B4-BE49-F238E27FC236}">
-                <a16:creationId xmlns:a16="http://schemas.microsoft.com/office/drawing/2014/main" id="{D4AAB1A8-65D8-4CFD-90ED-0FDF38AB3361}"/>
+                <a16:creationId xmlns:a16="http://schemas.microsoft.com/office/drawing/2014/main" id="{490E1ABF-7A0D-4141-B48F-95B487F2ED89}"/>
               </a:ext>
             </a:extLst>
           </p:cNvPr>
@@ -4062,7 +4092,7 @@
           <p:cNvPr id="6" name="Footer Placeholder 5">
             <a:extLst xmlns:a="http://schemas.openxmlformats.org/drawingml/2006/main">
               <a:ext uri="{FF2B5EF4-FFF2-40B4-BE49-F238E27FC236}">
-                <a16:creationId xmlns:a16="http://schemas.microsoft.com/office/drawing/2014/main" id="{8BCD8DF7-6032-4804-B475-345973A49770}"/>
+                <a16:creationId xmlns:a16="http://schemas.microsoft.com/office/drawing/2014/main" id="{4A96456A-9C53-4C5F-A96E-B4877023A8AE}"/>
               </a:ext>
             </a:extLst>
           </p:cNvPr>
@@ -4085,7 +4115,7 @@
           <p:cNvPr id="7" name="Slide Number Placeholder 6">
             <a:extLst xmlns:a="http://schemas.openxmlformats.org/drawingml/2006/main">
               <a:ext uri="{FF2B5EF4-FFF2-40B4-BE49-F238E27FC236}">
-                <a16:creationId xmlns:a16="http://schemas.microsoft.com/office/drawing/2014/main" id="{D9F60AD1-E57A-4440-A4A6-E82B8525F758}"/>
+                <a16:creationId xmlns:a16="http://schemas.microsoft.com/office/drawing/2014/main" id="{1E22554D-43A5-4809-9D4A-1B0ED83452D6}"/>
               </a:ext>
             </a:extLst>
           </p:cNvPr>
@@ -4134,7 +4164,7 @@
           <p:cNvPr id="2" name="Title Placeholder 1">
             <a:extLst xmlns:a="http://schemas.openxmlformats.org/drawingml/2006/main">
               <a:ext uri="{FF2B5EF4-FFF2-40B4-BE49-F238E27FC236}">
-                <a16:creationId xmlns:a16="http://schemas.microsoft.com/office/drawing/2014/main" id="{03F9585E-969D-4B83-BF98-FE1A014963AB}"/>
+                <a16:creationId xmlns:a16="http://schemas.microsoft.com/office/drawing/2014/main" id="{4CE2877E-F87F-4B03-8973-093C467BFA19}"/>
               </a:ext>
             </a:extLst>
           </p:cNvPr>
@@ -4171,7 +4201,7 @@
           <p:cNvPr id="3" name="Text Placeholder 2">
             <a:extLst xmlns:a="http://schemas.openxmlformats.org/drawingml/2006/main">
               <a:ext uri="{FF2B5EF4-FFF2-40B4-BE49-F238E27FC236}">
-                <a16:creationId xmlns:a16="http://schemas.microsoft.com/office/drawing/2014/main" id="{CA6E10B1-D079-47E0-BC1D-AC55EEFE8B47}"/>
+                <a16:creationId xmlns:a16="http://schemas.microsoft.com/office/drawing/2014/main" id="{D71697B0-E69F-499E-967C-1A20FF8E3C06}"/>
               </a:ext>
             </a:extLst>
           </p:cNvPr>
@@ -4243,7 +4273,7 @@
           <p:cNvPr id="4" name="Date Placeholder 3">
             <a:extLst xmlns:a="http://schemas.openxmlformats.org/drawingml/2006/main">
               <a:ext uri="{FF2B5EF4-FFF2-40B4-BE49-F238E27FC236}">
-                <a16:creationId xmlns:a16="http://schemas.microsoft.com/office/drawing/2014/main" id="{D2BD0F4E-C820-4FAB-AC7B-B971A4058DFC}"/>
+                <a16:creationId xmlns:a16="http://schemas.microsoft.com/office/drawing/2014/main" id="{7C2A9F46-F81F-4117-AEC5-9F3CC6353338}"/>
               </a:ext>
             </a:extLst>
           </p:cNvPr>
@@ -4289,7 +4319,7 @@
           <p:cNvPr id="5" name="Footer Placeholder 4">
             <a:extLst xmlns:a="http://schemas.openxmlformats.org/drawingml/2006/main">
               <a:ext uri="{FF2B5EF4-FFF2-40B4-BE49-F238E27FC236}">
-                <a16:creationId xmlns:a16="http://schemas.microsoft.com/office/drawing/2014/main" id="{9A1CB7F5-5DF4-40BF-AD0D-321EF3E58D73}"/>
+                <a16:creationId xmlns:a16="http://schemas.microsoft.com/office/drawing/2014/main" id="{6764F760-4CD8-4788-982E-608389043F84}"/>
               </a:ext>
             </a:extLst>
           </p:cNvPr>
@@ -4331,7 +4361,7 @@
           <p:cNvPr id="6" name="Slide Number Placeholder 5">
             <a:extLst xmlns:a="http://schemas.openxmlformats.org/drawingml/2006/main">
               <a:ext uri="{FF2B5EF4-FFF2-40B4-BE49-F238E27FC236}">
-                <a16:creationId xmlns:a16="http://schemas.microsoft.com/office/drawing/2014/main" id="{4899628B-BBAA-4DD2-A8A6-FE4620B346D3}"/>
+                <a16:creationId xmlns:a16="http://schemas.microsoft.com/office/drawing/2014/main" id="{88F3F8FD-75E0-46F5-AF85-2DD25ED65151}"/>
               </a:ext>
             </a:extLst>
           </p:cNvPr>
@@ -4376,17 +4406,17 @@
   </p:cSld>
   <p:clrMap bg1="lt1" tx1="dk1" bg2="lt2" tx2="dk2" accent1="accent1" accent2="accent2" accent3="accent3" accent4="accent4" accent5="accent5" accent6="accent6" hlink="hlink" folHlink="folHlink"/>
   <p:sldLayoutIdLst>
-    <p:sldLayoutId xmlns:r="http://schemas.openxmlformats.org/officeDocument/2006/relationships" id="2147483649" r:id="R8f23a0fb8f21476d"/>
-    <p:sldLayoutId xmlns:r="http://schemas.openxmlformats.org/officeDocument/2006/relationships" id="2147483650" r:id="Re6b792a4121f438f"/>
-    <p:sldLayoutId xmlns:r="http://schemas.openxmlformats.org/officeDocument/2006/relationships" id="2147483651" r:id="R1ab8f9d0f0ba4fbd"/>
-    <p:sldLayoutId xmlns:r="http://schemas.openxmlformats.org/officeDocument/2006/relationships" id="2147483652" r:id="R44b4bd2603424829"/>
-    <p:sldLayoutId xmlns:r="http://schemas.openxmlformats.org/officeDocument/2006/relationships" id="2147483653" r:id="Rd2db3f01a4ae460b"/>
-    <p:sldLayoutId xmlns:r="http://schemas.openxmlformats.org/officeDocument/2006/relationships" id="2147483654" r:id="Rec218654c70d4b74"/>
-    <p:sldLayoutId xmlns:r="http://schemas.openxmlformats.org/officeDocument/2006/relationships" id="2147483655" r:id="Rf6bdb71452ab474f"/>
-    <p:sldLayoutId xmlns:r="http://schemas.openxmlformats.org/officeDocument/2006/relationships" id="2147483656" r:id="R3f1d8e5116084dbe"/>
-    <p:sldLayoutId xmlns:r="http://schemas.openxmlformats.org/officeDocument/2006/relationships" id="2147483657" r:id="R1a206197ab23430f"/>
-    <p:sldLayoutId xmlns:r="http://schemas.openxmlformats.org/officeDocument/2006/relationships" id="2147483658" r:id="R75d5b39f621945a3"/>
-    <p:sldLayoutId xmlns:r="http://schemas.openxmlformats.org/officeDocument/2006/relationships" id="2147483659" r:id="Rb5fcbc065d404401"/>
+    <p:sldLayoutId xmlns:r="http://schemas.openxmlformats.org/officeDocument/2006/relationships" id="2147483649" r:id="Raf2e10326a0e4a21"/>
+    <p:sldLayoutId xmlns:r="http://schemas.openxmlformats.org/officeDocument/2006/relationships" id="2147483650" r:id="R70654df60dd848a6"/>
+    <p:sldLayoutId xmlns:r="http://schemas.openxmlformats.org/officeDocument/2006/relationships" id="2147483651" r:id="Rad02a8ac141e4f4f"/>
+    <p:sldLayoutId xmlns:r="http://schemas.openxmlformats.org/officeDocument/2006/relationships" id="2147483652" r:id="Rcf3c239252d94932"/>
+    <p:sldLayoutId xmlns:r="http://schemas.openxmlformats.org/officeDocument/2006/relationships" id="2147483653" r:id="R07a43196232c4a48"/>
+    <p:sldLayoutId xmlns:r="http://schemas.openxmlformats.org/officeDocument/2006/relationships" id="2147483654" r:id="R26d0d5f81e144583"/>
+    <p:sldLayoutId xmlns:r="http://schemas.openxmlformats.org/officeDocument/2006/relationships" id="2147483655" r:id="Rd18f5b315f9f466b"/>
+    <p:sldLayoutId xmlns:r="http://schemas.openxmlformats.org/officeDocument/2006/relationships" id="2147483656" r:id="R80573b0bafaf49bc"/>
+    <p:sldLayoutId xmlns:r="http://schemas.openxmlformats.org/officeDocument/2006/relationships" id="2147483657" r:id="R7f24a73c592744e5"/>
+    <p:sldLayoutId xmlns:r="http://schemas.openxmlformats.org/officeDocument/2006/relationships" id="2147483658" r:id="Rb459e1511f254aa2"/>
+    <p:sldLayoutId xmlns:r="http://schemas.openxmlformats.org/officeDocument/2006/relationships" id="2147483659" r:id="R332ba16d61604128"/>
   </p:sldLayoutIdLst>
   <p:txStyles>
     <p:titleStyle>
@@ -4939,7 +4969,7 @@
           <p:cNvPr id="2" name="Rectangle 1">
             <a:extLst xmlns:a="http://schemas.openxmlformats.org/drawingml/2006/main">
               <a:ext uri="{FF2B5EF4-FFF2-40B4-BE49-F238E27FC236}">
-                <a16:creationId xmlns:a16="http://schemas.microsoft.com/office/drawing/2014/main" id="{D705E60A-B455-4103-9EF8-20663E142BE9}"/>
+                <a16:creationId xmlns:a16="http://schemas.microsoft.com/office/drawing/2014/main" id="{0FEFCB1B-2294-4605-B317-235D89D741D6}"/>
               </a:ext>
             </a:extLst>
           </p:cNvPr>
@@ -4994,7 +5024,7 @@
           <p:cNvPr id="3" name="TextBox 2">
             <a:extLst xmlns:a="http://schemas.openxmlformats.org/drawingml/2006/main">
               <a:ext uri="{FF2B5EF4-FFF2-40B4-BE49-F238E27FC236}">
-                <a16:creationId xmlns:a16="http://schemas.microsoft.com/office/drawing/2014/main" id="{1E489C93-251A-420A-9027-BD92D1625781}"/>
+                <a16:creationId xmlns:a16="http://schemas.microsoft.com/office/drawing/2014/main" id="{DF37BFE5-B5FD-4256-B48C-73035B68E04D}"/>
               </a:ext>
             </a:extLst>
           </p:cNvPr>
@@ -5041,7 +5071,7 @@
           <p:cNvPr id="4" name="TextBox 3">
             <a:extLst xmlns:a="http://schemas.openxmlformats.org/drawingml/2006/main">
               <a:ext uri="{FF2B5EF4-FFF2-40B4-BE49-F238E27FC236}">
-                <a16:creationId xmlns:a16="http://schemas.microsoft.com/office/drawing/2014/main" id="{93ABDD0D-2F99-4D49-BC60-43DE5C4C39E0}"/>
+                <a16:creationId xmlns:a16="http://schemas.microsoft.com/office/drawing/2014/main" id="{11DAB578-154B-4C8A-A978-C75C81B8C37D}"/>
               </a:ext>
             </a:extLst>
           </p:cNvPr>
@@ -5089,7 +5119,7 @@
           <p:cNvPr id="5" name="TextBox 4">
             <a:extLst xmlns:a="http://schemas.openxmlformats.org/drawingml/2006/main">
               <a:ext uri="{FF2B5EF4-FFF2-40B4-BE49-F238E27FC236}">
-                <a16:creationId xmlns:a16="http://schemas.microsoft.com/office/drawing/2014/main" id="{53E5AA34-E36B-4A79-B24E-7AF35430AE16}"/>
+                <a16:creationId xmlns:a16="http://schemas.microsoft.com/office/drawing/2014/main" id="{4ACF1865-1044-448D-95CF-B194BD22A15C}"/>
               </a:ext>
             </a:extLst>
           </p:cNvPr>
@@ -5136,7 +5166,7 @@
           <p:cNvPr id="6" name="Rectangle 5">
             <a:extLst xmlns:a="http://schemas.openxmlformats.org/drawingml/2006/main">
               <a:ext uri="{FF2B5EF4-FFF2-40B4-BE49-F238E27FC236}">
-                <a16:creationId xmlns:a16="http://schemas.microsoft.com/office/drawing/2014/main" id="{263C5F9C-4B90-4B00-882D-66191FCD4AF0}"/>
+                <a16:creationId xmlns:a16="http://schemas.microsoft.com/office/drawing/2014/main" id="{77581F1B-51EB-4E22-A3FA-57ED6EC23996}"/>
               </a:ext>
             </a:extLst>
           </p:cNvPr>
@@ -5191,7 +5221,7 @@
           <p:cNvPr id="7" name="TextBox 6">
             <a:extLst xmlns:a="http://schemas.openxmlformats.org/drawingml/2006/main">
               <a:ext uri="{FF2B5EF4-FFF2-40B4-BE49-F238E27FC236}">
-                <a16:creationId xmlns:a16="http://schemas.microsoft.com/office/drawing/2014/main" id="{05947525-8745-41D9-ADBE-D92127EB9727}"/>
+                <a16:creationId xmlns:a16="http://schemas.microsoft.com/office/drawing/2014/main" id="{629F8AFF-A77A-4967-A431-9E809528C0B1}"/>
               </a:ext>
             </a:extLst>
           </p:cNvPr>
@@ -5238,7 +5268,7 @@
           <p:cNvPr id="8" name="TextBox 7">
             <a:extLst xmlns:a="http://schemas.openxmlformats.org/drawingml/2006/main">
               <a:ext uri="{FF2B5EF4-FFF2-40B4-BE49-F238E27FC236}">
-                <a16:creationId xmlns:a16="http://schemas.microsoft.com/office/drawing/2014/main" id="{44B7C642-C55C-41C6-89F9-A62CB83685AE}"/>
+                <a16:creationId xmlns:a16="http://schemas.microsoft.com/office/drawing/2014/main" id="{60CC191D-595C-4F97-B614-10EDE15BB179}"/>
               </a:ext>
             </a:extLst>
           </p:cNvPr>
@@ -5275,7 +5305,7 @@
                 <a:ea typeface="Aptos"/>
                 <a:cs typeface="Aptos"/>
               </a:rPr>
-              <a:t>2026.07.24-21</a:t>
+              <a:t>2026.07.24-22</a:t>
             </a:r>
           </a:p>
         </p:txBody>
@@ -5285,7 +5315,7 @@
           <p:cNvPr id="9" name="TextBox 8">
             <a:extLst xmlns:a="http://schemas.openxmlformats.org/drawingml/2006/main">
               <a:ext uri="{FF2B5EF4-FFF2-40B4-BE49-F238E27FC236}">
-                <a16:creationId xmlns:a16="http://schemas.microsoft.com/office/drawing/2014/main" id="{BC2F6E47-2BF5-40C9-A2D5-3C39AA8C46CD}"/>
+                <a16:creationId xmlns:a16="http://schemas.microsoft.com/office/drawing/2014/main" id="{5F9D6C30-CF69-4355-98FD-A908CA9E8E21}"/>
               </a:ext>
             </a:extLst>
           </p:cNvPr>
@@ -5333,7 +5363,7 @@
           <p:cNvPr id="10" name="TextBox 9">
             <a:extLst xmlns:a="http://schemas.openxmlformats.org/drawingml/2006/main">
               <a:ext uri="{FF2B5EF4-FFF2-40B4-BE49-F238E27FC236}">
-                <a16:creationId xmlns:a16="http://schemas.microsoft.com/office/drawing/2014/main" id="{1DA059B7-2C75-405D-8661-BE9353AD5883}"/>
+                <a16:creationId xmlns:a16="http://schemas.microsoft.com/office/drawing/2014/main" id="{E6616C31-2850-4894-9648-10238C655793}"/>
               </a:ext>
             </a:extLst>
           </p:cNvPr>
@@ -5380,7 +5410,7 @@
           <p:cNvPr id="11" name="TextBox 10">
             <a:extLst xmlns:a="http://schemas.openxmlformats.org/drawingml/2006/main">
               <a:ext uri="{FF2B5EF4-FFF2-40B4-BE49-F238E27FC236}">
-                <a16:creationId xmlns:a16="http://schemas.microsoft.com/office/drawing/2014/main" id="{408C045D-5F16-4792-83C6-47C670FD5AEB}"/>
+                <a16:creationId xmlns:a16="http://schemas.microsoft.com/office/drawing/2014/main" id="{6136A82D-DCAB-4746-9296-675B25C3F477}"/>
               </a:ext>
             </a:extLst>
           </p:cNvPr>
@@ -5427,7 +5457,7 @@
           <p:cNvPr id="12" name="TextBox 11">
             <a:extLst xmlns:a="http://schemas.openxmlformats.org/drawingml/2006/main">
               <a:ext uri="{FF2B5EF4-FFF2-40B4-BE49-F238E27FC236}">
-                <a16:creationId xmlns:a16="http://schemas.microsoft.com/office/drawing/2014/main" id="{E8D1B836-11CD-4AB8-BF60-6173086A977E}"/>
+                <a16:creationId xmlns:a16="http://schemas.microsoft.com/office/drawing/2014/main" id="{6E131D5C-89BE-48B2-8C33-EAB4D78CBA01}"/>
               </a:ext>
             </a:extLst>
           </p:cNvPr>
@@ -5472,7 +5502,7 @@
     </p:spTree>
     <p:extLst>
       <p:ext uri="{BB962C8B-B14F-4D97-AF65-F5344CB8AC3E}">
-        <p14:creationId xmlns:p14="http://schemas.microsoft.com/office/powerpoint/2010/main" val="1406413995"/>
+        <p14:creationId xmlns:p14="http://schemas.microsoft.com/office/powerpoint/2010/main" val="1132757658"/>
       </p:ext>
     </p:extLst>
   </p:cSld>
@@ -5496,7 +5526,7 @@
           <p:cNvPr id="2" name="TextBox 1">
             <a:extLst xmlns:a="http://schemas.openxmlformats.org/drawingml/2006/main">
               <a:ext uri="{FF2B5EF4-FFF2-40B4-BE49-F238E27FC236}">
-                <a16:creationId xmlns:a16="http://schemas.microsoft.com/office/drawing/2014/main" id="{61CB84B5-59F0-45E5-AE4E-F16FE0D1A069}"/>
+                <a16:creationId xmlns:a16="http://schemas.microsoft.com/office/drawing/2014/main" id="{5C386DC1-E611-48F6-A0D3-36C77047C0AC}"/>
               </a:ext>
             </a:extLst>
           </p:cNvPr>
@@ -5543,7 +5573,7 @@
           <p:cNvPr id="3" name="TextBox 2">
             <a:extLst xmlns:a="http://schemas.openxmlformats.org/drawingml/2006/main">
               <a:ext uri="{FF2B5EF4-FFF2-40B4-BE49-F238E27FC236}">
-                <a16:creationId xmlns:a16="http://schemas.microsoft.com/office/drawing/2014/main" id="{6BD90804-F913-46AF-8C5B-5C50559F84E1}"/>
+                <a16:creationId xmlns:a16="http://schemas.microsoft.com/office/drawing/2014/main" id="{691EB735-9515-4055-A123-071002E283D2}"/>
               </a:ext>
             </a:extLst>
           </p:cNvPr>
@@ -5590,7 +5620,7 @@
           <p:cNvPr id="4" name="Rectangle 3">
             <a:extLst xmlns:a="http://schemas.openxmlformats.org/drawingml/2006/main">
               <a:ext uri="{FF2B5EF4-FFF2-40B4-BE49-F238E27FC236}">
-                <a16:creationId xmlns:a16="http://schemas.microsoft.com/office/drawing/2014/main" id="{03FB62B3-8FD7-4B7C-9B6D-06B87F8EE445}"/>
+                <a16:creationId xmlns:a16="http://schemas.microsoft.com/office/drawing/2014/main" id="{1D38B867-BF18-4C9B-817E-3052B6983721}"/>
               </a:ext>
             </a:extLst>
           </p:cNvPr>
@@ -5645,7 +5675,7 @@
           <p:cNvPr id="5" name="Rectangle 4">
             <a:extLst xmlns:a="http://schemas.openxmlformats.org/drawingml/2006/main">
               <a:ext uri="{FF2B5EF4-FFF2-40B4-BE49-F238E27FC236}">
-                <a16:creationId xmlns:a16="http://schemas.microsoft.com/office/drawing/2014/main" id="{0419AF0C-3C17-4C21-B467-39AE7644B865}"/>
+                <a16:creationId xmlns:a16="http://schemas.microsoft.com/office/drawing/2014/main" id="{5ED5E969-BF1A-44BA-A7F8-E830693FE31C}"/>
               </a:ext>
             </a:extLst>
           </p:cNvPr>
@@ -5700,7 +5730,7 @@
           <p:cNvPr id="6" name="TextBox 5">
             <a:extLst xmlns:a="http://schemas.openxmlformats.org/drawingml/2006/main">
               <a:ext uri="{FF2B5EF4-FFF2-40B4-BE49-F238E27FC236}">
-                <a16:creationId xmlns:a16="http://schemas.microsoft.com/office/drawing/2014/main" id="{64595D22-4E4D-46D2-B465-CFF656EEF531}"/>
+                <a16:creationId xmlns:a16="http://schemas.microsoft.com/office/drawing/2014/main" id="{A3A075CF-8678-4953-89CA-136ABF9534BB}"/>
               </a:ext>
             </a:extLst>
           </p:cNvPr>
@@ -5737,7 +5767,7 @@
                 <a:ea typeface="Aptos"/>
                 <a:cs typeface="Aptos"/>
               </a:rPr>
-              <a:t>Julkinen riippumaton evidenssikooste · 2026.07.24-21 · 2026-07-24 · Lähteet: EPO; Saksa — viralliset tuomiot; WIPO</a:t>
+              <a:t>Julkinen riippumaton evidenssikooste · 2026.07.24-22 · 2026-07-24 · Lähteet: EPO; Saksa — viralliset tuomiot; WIPO</a:t>
             </a:r>
           </a:p>
         </p:txBody>
@@ -5747,7 +5777,7 @@
           <p:cNvPr id="7" name="TextBox 6">
             <a:extLst xmlns:a="http://schemas.openxmlformats.org/drawingml/2006/main">
               <a:ext uri="{FF2B5EF4-FFF2-40B4-BE49-F238E27FC236}">
-                <a16:creationId xmlns:a16="http://schemas.microsoft.com/office/drawing/2014/main" id="{412E093F-E3BA-4567-8E68-C9D2E1643B57}"/>
+                <a16:creationId xmlns:a16="http://schemas.microsoft.com/office/drawing/2014/main" id="{A71C65F7-EC52-4DFC-A363-D07FB33743D6}"/>
               </a:ext>
             </a:extLst>
           </p:cNvPr>
@@ -5794,7 +5824,7 @@
           <p:cNvPr id="8" name="TextBox 7">
             <a:extLst xmlns:a="http://schemas.openxmlformats.org/drawingml/2006/main">
               <a:ext uri="{FF2B5EF4-FFF2-40B4-BE49-F238E27FC236}">
-                <a16:creationId xmlns:a16="http://schemas.microsoft.com/office/drawing/2014/main" id="{732ADA79-D429-4933-A1A4-D29DC8FE3C86}"/>
+                <a16:creationId xmlns:a16="http://schemas.microsoft.com/office/drawing/2014/main" id="{4B2AFF59-860A-4DD3-9A18-64217E916435}"/>
               </a:ext>
             </a:extLst>
           </p:cNvPr>
@@ -5841,7 +5871,7 @@
           <p:cNvPr id="9" name="TextBox 8">
             <a:extLst xmlns:a="http://schemas.openxmlformats.org/drawingml/2006/main">
               <a:ext uri="{FF2B5EF4-FFF2-40B4-BE49-F238E27FC236}">
-                <a16:creationId xmlns:a16="http://schemas.microsoft.com/office/drawing/2014/main" id="{4B7A88C6-1DD1-413E-AE68-090AA12E10E7}"/>
+                <a16:creationId xmlns:a16="http://schemas.microsoft.com/office/drawing/2014/main" id="{7271CB82-D0CC-4819-9901-D4FE11C1CD92}"/>
               </a:ext>
             </a:extLst>
           </p:cNvPr>
@@ -5938,7 +5968,7 @@
           <p:cNvPr id="10" name="Rounded Rectangle 9">
             <a:extLst xmlns:a="http://schemas.openxmlformats.org/drawingml/2006/main">
               <a:ext uri="{FF2B5EF4-FFF2-40B4-BE49-F238E27FC236}">
-                <a16:creationId xmlns:a16="http://schemas.microsoft.com/office/drawing/2014/main" id="{623DBA9D-ACC4-4E9F-AC77-E72E3B2E088E}"/>
+                <a16:creationId xmlns:a16="http://schemas.microsoft.com/office/drawing/2014/main" id="{D0BFC0EE-D4F5-44C0-B1E3-B09DE9380A23}"/>
               </a:ext>
             </a:extLst>
           </p:cNvPr>
@@ -5995,7 +6025,7 @@
           <p:cNvPr id="11" name="TextBox 10">
             <a:extLst xmlns:a="http://schemas.openxmlformats.org/drawingml/2006/main">
               <a:ext uri="{FF2B5EF4-FFF2-40B4-BE49-F238E27FC236}">
-                <a16:creationId xmlns:a16="http://schemas.microsoft.com/office/drawing/2014/main" id="{DF34D202-0C7B-406D-AEFF-A543E624441F}"/>
+                <a16:creationId xmlns:a16="http://schemas.microsoft.com/office/drawing/2014/main" id="{B224276E-5815-4BD7-952F-0E5617C45FB3}"/>
               </a:ext>
             </a:extLst>
           </p:cNvPr>
@@ -6042,7 +6072,7 @@
           <p:cNvPr id="12" name="TextBox 11">
             <a:extLst xmlns:a="http://schemas.openxmlformats.org/drawingml/2006/main">
               <a:ext uri="{FF2B5EF4-FFF2-40B4-BE49-F238E27FC236}">
-                <a16:creationId xmlns:a16="http://schemas.microsoft.com/office/drawing/2014/main" id="{748B61A0-61E3-4C57-9C66-7C696067E9A3}"/>
+                <a16:creationId xmlns:a16="http://schemas.microsoft.com/office/drawing/2014/main" id="{EE28D38E-943D-47B2-8CA4-C52B3B5BB218}"/>
               </a:ext>
             </a:extLst>
           </p:cNvPr>
@@ -6087,7 +6117,7 @@
     </p:spTree>
     <p:extLst>
       <p:ext uri="{BB962C8B-B14F-4D97-AF65-F5344CB8AC3E}">
-        <p14:creationId xmlns:p14="http://schemas.microsoft.com/office/powerpoint/2010/main" val="518363395"/>
+        <p14:creationId xmlns:p14="http://schemas.microsoft.com/office/powerpoint/2010/main" val="708200995"/>
       </p:ext>
     </p:extLst>
   </p:cSld>
@@ -6111,7 +6141,7 @@
           <p:cNvPr id="2" name="TextBox 1">
             <a:extLst xmlns:a="http://schemas.openxmlformats.org/drawingml/2006/main">
               <a:ext uri="{FF2B5EF4-FFF2-40B4-BE49-F238E27FC236}">
-                <a16:creationId xmlns:a16="http://schemas.microsoft.com/office/drawing/2014/main" id="{1FE3B254-C69E-4F71-AB0E-CE65C24283BF}"/>
+                <a16:creationId xmlns:a16="http://schemas.microsoft.com/office/drawing/2014/main" id="{6F861DF7-CD32-4F87-B7C2-849E82C07276}"/>
               </a:ext>
             </a:extLst>
           </p:cNvPr>
@@ -6158,7 +6188,7 @@
           <p:cNvPr id="3" name="TextBox 2">
             <a:extLst xmlns:a="http://schemas.openxmlformats.org/drawingml/2006/main">
               <a:ext uri="{FF2B5EF4-FFF2-40B4-BE49-F238E27FC236}">
-                <a16:creationId xmlns:a16="http://schemas.microsoft.com/office/drawing/2014/main" id="{AACA02E5-2288-4BB5-A441-2064F8D69563}"/>
+                <a16:creationId xmlns:a16="http://schemas.microsoft.com/office/drawing/2014/main" id="{9AF1F086-3214-40DB-B63F-EFD549878430}"/>
               </a:ext>
             </a:extLst>
           </p:cNvPr>
@@ -6205,7 +6235,7 @@
           <p:cNvPr id="4" name="Rectangle 3">
             <a:extLst xmlns:a="http://schemas.openxmlformats.org/drawingml/2006/main">
               <a:ext uri="{FF2B5EF4-FFF2-40B4-BE49-F238E27FC236}">
-                <a16:creationId xmlns:a16="http://schemas.microsoft.com/office/drawing/2014/main" id="{44CDE51F-CA25-4631-90A7-9F982FB76C7C}"/>
+                <a16:creationId xmlns:a16="http://schemas.microsoft.com/office/drawing/2014/main" id="{627CC81B-1D6D-44D4-A613-6561CC8442B9}"/>
               </a:ext>
             </a:extLst>
           </p:cNvPr>
@@ -6260,7 +6290,7 @@
           <p:cNvPr id="5" name="Rectangle 4">
             <a:extLst xmlns:a="http://schemas.openxmlformats.org/drawingml/2006/main">
               <a:ext uri="{FF2B5EF4-FFF2-40B4-BE49-F238E27FC236}">
-                <a16:creationId xmlns:a16="http://schemas.microsoft.com/office/drawing/2014/main" id="{374C3D1E-021D-4241-8193-38251A4B787E}"/>
+                <a16:creationId xmlns:a16="http://schemas.microsoft.com/office/drawing/2014/main" id="{9900FE13-1399-40BF-A0DC-DA76E682A850}"/>
               </a:ext>
             </a:extLst>
           </p:cNvPr>
@@ -6315,7 +6345,7 @@
           <p:cNvPr id="6" name="TextBox 5">
             <a:extLst xmlns:a="http://schemas.openxmlformats.org/drawingml/2006/main">
               <a:ext uri="{FF2B5EF4-FFF2-40B4-BE49-F238E27FC236}">
-                <a16:creationId xmlns:a16="http://schemas.microsoft.com/office/drawing/2014/main" id="{C51F530A-FBC1-4D10-84BD-C81C166EC816}"/>
+                <a16:creationId xmlns:a16="http://schemas.microsoft.com/office/drawing/2014/main" id="{CAB46D60-59B1-4EEA-8ADC-004DF09087CF}"/>
               </a:ext>
             </a:extLst>
           </p:cNvPr>
@@ -6352,7 +6382,7 @@
                 <a:ea typeface="Aptos"/>
                 <a:cs typeface="Aptos"/>
               </a:rPr>
-              <a:t>Julkinen riippumaton evidenssikooste · 2026.07.24-21 · 2026-07-24 · Lähteet: EPO Register; EP3032975B2; 8 Ni 18/24 (EP); 7 O 3341/24</a:t>
+              <a:t>Julkinen riippumaton evidenssikooste · 2026.07.24-22 · 2026-07-24 · Lähteet: EPO Register; EP3032975B2; 8 Ni 18/24 (EP); 7 O 3341/24</a:t>
             </a:r>
           </a:p>
         </p:txBody>
@@ -6362,7 +6392,7 @@
           <p:cNvPr id="7" name="TextBox 6">
             <a:extLst xmlns:a="http://schemas.openxmlformats.org/drawingml/2006/main">
               <a:ext uri="{FF2B5EF4-FFF2-40B4-BE49-F238E27FC236}">
-                <a16:creationId xmlns:a16="http://schemas.microsoft.com/office/drawing/2014/main" id="{37D036D5-9241-4CD4-8178-4CF09A6FE61B}"/>
+                <a16:creationId xmlns:a16="http://schemas.microsoft.com/office/drawing/2014/main" id="{B15D1301-9ED2-4EF6-BBAB-AFF5D145B3BB}"/>
               </a:ext>
             </a:extLst>
           </p:cNvPr>
@@ -6409,7 +6439,7 @@
           <p:cNvPr id="8" name="Rounded Rectangle 7">
             <a:extLst xmlns:a="http://schemas.openxmlformats.org/drawingml/2006/main">
               <a:ext uri="{FF2B5EF4-FFF2-40B4-BE49-F238E27FC236}">
-                <a16:creationId xmlns:a16="http://schemas.microsoft.com/office/drawing/2014/main" id="{22A9F8EA-169E-48DA-AEFF-D65CB275EE75}"/>
+                <a16:creationId xmlns:a16="http://schemas.microsoft.com/office/drawing/2014/main" id="{7D3EBB29-4F9B-4713-9F99-B48B859A9806}"/>
               </a:ext>
             </a:extLst>
           </p:cNvPr>
@@ -6466,7 +6496,7 @@
           <p:cNvPr id="9" name="TextBox 8">
             <a:extLst xmlns:a="http://schemas.openxmlformats.org/drawingml/2006/main">
               <a:ext uri="{FF2B5EF4-FFF2-40B4-BE49-F238E27FC236}">
-                <a16:creationId xmlns:a16="http://schemas.microsoft.com/office/drawing/2014/main" id="{923B6BB3-FB30-4151-B8C3-A7A23A3BDB31}"/>
+                <a16:creationId xmlns:a16="http://schemas.microsoft.com/office/drawing/2014/main" id="{BC793DB1-3884-4E9A-883D-2BD4C62C5F5F}"/>
               </a:ext>
             </a:extLst>
           </p:cNvPr>
@@ -6513,7 +6543,7 @@
           <p:cNvPr id="10" name="TextBox 9">
             <a:extLst xmlns:a="http://schemas.openxmlformats.org/drawingml/2006/main">
               <a:ext uri="{FF2B5EF4-FFF2-40B4-BE49-F238E27FC236}">
-                <a16:creationId xmlns:a16="http://schemas.microsoft.com/office/drawing/2014/main" id="{F8439126-82B0-4784-B9B3-4AFB9A1816D5}"/>
+                <a16:creationId xmlns:a16="http://schemas.microsoft.com/office/drawing/2014/main" id="{CAF0C968-6333-4EDD-A521-E40BE53961C0}"/>
               </a:ext>
             </a:extLst>
           </p:cNvPr>
@@ -6560,7 +6590,7 @@
           <p:cNvPr id="11" name="Rounded Rectangle 10">
             <a:extLst xmlns:a="http://schemas.openxmlformats.org/drawingml/2006/main">
               <a:ext uri="{FF2B5EF4-FFF2-40B4-BE49-F238E27FC236}">
-                <a16:creationId xmlns:a16="http://schemas.microsoft.com/office/drawing/2014/main" id="{1E1F3484-E988-4CC2-A609-2C02704B17B2}"/>
+                <a16:creationId xmlns:a16="http://schemas.microsoft.com/office/drawing/2014/main" id="{6DC7BF09-B1A7-4224-A6D7-698ECCC10B57}"/>
               </a:ext>
             </a:extLst>
           </p:cNvPr>
@@ -6617,7 +6647,7 @@
           <p:cNvPr id="12" name="TextBox 11">
             <a:extLst xmlns:a="http://schemas.openxmlformats.org/drawingml/2006/main">
               <a:ext uri="{FF2B5EF4-FFF2-40B4-BE49-F238E27FC236}">
-                <a16:creationId xmlns:a16="http://schemas.microsoft.com/office/drawing/2014/main" id="{C12EC278-FD13-4459-A9E6-90B58E9403A2}"/>
+                <a16:creationId xmlns:a16="http://schemas.microsoft.com/office/drawing/2014/main" id="{B55B1D39-7EB8-4223-A7D7-9F17C4C10E2E}"/>
               </a:ext>
             </a:extLst>
           </p:cNvPr>
@@ -6664,7 +6694,7 @@
           <p:cNvPr id="13" name="TextBox 12">
             <a:extLst xmlns:a="http://schemas.openxmlformats.org/drawingml/2006/main">
               <a:ext uri="{FF2B5EF4-FFF2-40B4-BE49-F238E27FC236}">
-                <a16:creationId xmlns:a16="http://schemas.microsoft.com/office/drawing/2014/main" id="{A156844F-32B6-4A80-9D67-915F2CE2290A}"/>
+                <a16:creationId xmlns:a16="http://schemas.microsoft.com/office/drawing/2014/main" id="{C200ED3C-D1D9-4C3D-BD02-B2D441885670}"/>
               </a:ext>
             </a:extLst>
           </p:cNvPr>
@@ -6711,7 +6741,7 @@
           <p:cNvPr id="14" name="Rounded Rectangle 13">
             <a:extLst xmlns:a="http://schemas.openxmlformats.org/drawingml/2006/main">
               <a:ext uri="{FF2B5EF4-FFF2-40B4-BE49-F238E27FC236}">
-                <a16:creationId xmlns:a16="http://schemas.microsoft.com/office/drawing/2014/main" id="{DFBBF1BC-97D2-4EC7-9825-462F346FA45D}"/>
+                <a16:creationId xmlns:a16="http://schemas.microsoft.com/office/drawing/2014/main" id="{8178706C-7A1F-4A50-BAB2-6B650FC50A19}"/>
               </a:ext>
             </a:extLst>
           </p:cNvPr>
@@ -6768,7 +6798,7 @@
           <p:cNvPr id="15" name="TextBox 14">
             <a:extLst xmlns:a="http://schemas.openxmlformats.org/drawingml/2006/main">
               <a:ext uri="{FF2B5EF4-FFF2-40B4-BE49-F238E27FC236}">
-                <a16:creationId xmlns:a16="http://schemas.microsoft.com/office/drawing/2014/main" id="{BAB466A8-2C9C-499A-BB66-0A25FECDC259}"/>
+                <a16:creationId xmlns:a16="http://schemas.microsoft.com/office/drawing/2014/main" id="{D20C78BE-2DB4-4A04-961F-F04714C45D9F}"/>
               </a:ext>
             </a:extLst>
           </p:cNvPr>
@@ -6815,7 +6845,7 @@
           <p:cNvPr id="16" name="TextBox 15">
             <a:extLst xmlns:a="http://schemas.openxmlformats.org/drawingml/2006/main">
               <a:ext uri="{FF2B5EF4-FFF2-40B4-BE49-F238E27FC236}">
-                <a16:creationId xmlns:a16="http://schemas.microsoft.com/office/drawing/2014/main" id="{E6812EAA-43F1-4E9E-9B32-58BDC8D7D7A0}"/>
+                <a16:creationId xmlns:a16="http://schemas.microsoft.com/office/drawing/2014/main" id="{776808E6-F61C-4041-B935-C8963CBC349B}"/>
               </a:ext>
             </a:extLst>
           </p:cNvPr>
@@ -6862,7 +6892,7 @@
           <p:cNvPr id="17" name="TextBox 16">
             <a:extLst xmlns:a="http://schemas.openxmlformats.org/drawingml/2006/main">
               <a:ext uri="{FF2B5EF4-FFF2-40B4-BE49-F238E27FC236}">
-                <a16:creationId xmlns:a16="http://schemas.microsoft.com/office/drawing/2014/main" id="{2CB970C9-4AB3-4731-B629-A090402C450B}"/>
+                <a16:creationId xmlns:a16="http://schemas.microsoft.com/office/drawing/2014/main" id="{01CE1279-DFA0-430D-A5A4-C8DD53779DD5}"/>
               </a:ext>
             </a:extLst>
           </p:cNvPr>
@@ -6909,7 +6939,7 @@
           <p:cNvPr id="18" name="Rounded Rectangle 17">
             <a:extLst xmlns:a="http://schemas.openxmlformats.org/drawingml/2006/main">
               <a:ext uri="{FF2B5EF4-FFF2-40B4-BE49-F238E27FC236}">
-                <a16:creationId xmlns:a16="http://schemas.microsoft.com/office/drawing/2014/main" id="{39FAF564-2747-4434-BC72-B4F50CB9ACF6}"/>
+                <a16:creationId xmlns:a16="http://schemas.microsoft.com/office/drawing/2014/main" id="{CA5ADE2A-0A54-464D-9932-2A757C4373EA}"/>
               </a:ext>
             </a:extLst>
           </p:cNvPr>
@@ -6966,7 +6996,7 @@
           <p:cNvPr id="19" name="TextBox 18">
             <a:extLst xmlns:a="http://schemas.openxmlformats.org/drawingml/2006/main">
               <a:ext uri="{FF2B5EF4-FFF2-40B4-BE49-F238E27FC236}">
-                <a16:creationId xmlns:a16="http://schemas.microsoft.com/office/drawing/2014/main" id="{37F82876-A82B-45E1-8542-A56164910DA1}"/>
+                <a16:creationId xmlns:a16="http://schemas.microsoft.com/office/drawing/2014/main" id="{1FFFFCAD-AF52-41A9-8465-4C398E5737EE}"/>
               </a:ext>
             </a:extLst>
           </p:cNvPr>
@@ -7013,7 +7043,7 @@
           <p:cNvPr id="20" name="TextBox 19">
             <a:extLst xmlns:a="http://schemas.openxmlformats.org/drawingml/2006/main">
               <a:ext uri="{FF2B5EF4-FFF2-40B4-BE49-F238E27FC236}">
-                <a16:creationId xmlns:a16="http://schemas.microsoft.com/office/drawing/2014/main" id="{2E4FA507-3ED3-4E4E-8710-DAF6FF7A06D8}"/>
+                <a16:creationId xmlns:a16="http://schemas.microsoft.com/office/drawing/2014/main" id="{7D00E3CE-7C74-49E4-A5F3-B79877AC7D62}"/>
               </a:ext>
             </a:extLst>
           </p:cNvPr>
@@ -7058,7 +7088,7 @@
     </p:spTree>
     <p:extLst>
       <p:ext uri="{BB962C8B-B14F-4D97-AF65-F5344CB8AC3E}">
-        <p14:creationId xmlns:p14="http://schemas.microsoft.com/office/powerpoint/2010/main" val="1809252940"/>
+        <p14:creationId xmlns:p14="http://schemas.microsoft.com/office/powerpoint/2010/main" val="905611960"/>
       </p:ext>
     </p:extLst>
   </p:cSld>
@@ -7082,7 +7112,7 @@
           <p:cNvPr id="2" name="TextBox 1">
             <a:extLst xmlns:a="http://schemas.openxmlformats.org/drawingml/2006/main">
               <a:ext uri="{FF2B5EF4-FFF2-40B4-BE49-F238E27FC236}">
-                <a16:creationId xmlns:a16="http://schemas.microsoft.com/office/drawing/2014/main" id="{F8448F0F-DCD1-453C-A9A2-5F42C1B6C13F}"/>
+                <a16:creationId xmlns:a16="http://schemas.microsoft.com/office/drawing/2014/main" id="{11AF7E79-D035-4EAC-87F8-88D43959B054}"/>
               </a:ext>
             </a:extLst>
           </p:cNvPr>
@@ -7129,7 +7159,7 @@
           <p:cNvPr id="3" name="TextBox 2">
             <a:extLst xmlns:a="http://schemas.openxmlformats.org/drawingml/2006/main">
               <a:ext uri="{FF2B5EF4-FFF2-40B4-BE49-F238E27FC236}">
-                <a16:creationId xmlns:a16="http://schemas.microsoft.com/office/drawing/2014/main" id="{81E1A73B-4C6A-4EEB-941A-A3362EE1C73B}"/>
+                <a16:creationId xmlns:a16="http://schemas.microsoft.com/office/drawing/2014/main" id="{CDE4B9C6-C841-498C-A665-34F3E55D47C7}"/>
               </a:ext>
             </a:extLst>
           </p:cNvPr>
@@ -7176,7 +7206,7 @@
           <p:cNvPr id="4" name="Rectangle 3">
             <a:extLst xmlns:a="http://schemas.openxmlformats.org/drawingml/2006/main">
               <a:ext uri="{FF2B5EF4-FFF2-40B4-BE49-F238E27FC236}">
-                <a16:creationId xmlns:a16="http://schemas.microsoft.com/office/drawing/2014/main" id="{FB946633-34C2-4B78-9884-B118CB37142E}"/>
+                <a16:creationId xmlns:a16="http://schemas.microsoft.com/office/drawing/2014/main" id="{76B6F57B-8A2E-4FCF-9968-7E7ECBBDB451}"/>
               </a:ext>
             </a:extLst>
           </p:cNvPr>
@@ -7231,7 +7261,7 @@
           <p:cNvPr id="5" name="Rectangle 4">
             <a:extLst xmlns:a="http://schemas.openxmlformats.org/drawingml/2006/main">
               <a:ext uri="{FF2B5EF4-FFF2-40B4-BE49-F238E27FC236}">
-                <a16:creationId xmlns:a16="http://schemas.microsoft.com/office/drawing/2014/main" id="{F79A8DE7-EC29-4BC2-BC00-79474418CFEB}"/>
+                <a16:creationId xmlns:a16="http://schemas.microsoft.com/office/drawing/2014/main" id="{C3786350-878A-4A74-8E0B-712819ACBE83}"/>
               </a:ext>
             </a:extLst>
           </p:cNvPr>
@@ -7286,7 +7316,7 @@
           <p:cNvPr id="6" name="TextBox 5">
             <a:extLst xmlns:a="http://schemas.openxmlformats.org/drawingml/2006/main">
               <a:ext uri="{FF2B5EF4-FFF2-40B4-BE49-F238E27FC236}">
-                <a16:creationId xmlns:a16="http://schemas.microsoft.com/office/drawing/2014/main" id="{17A7C40A-6A25-444D-873D-82C1AE2FEDED}"/>
+                <a16:creationId xmlns:a16="http://schemas.microsoft.com/office/drawing/2014/main" id="{E36572B2-FF16-49D3-AC15-A78A971F96D4}"/>
               </a:ext>
             </a:extLst>
           </p:cNvPr>
@@ -7323,7 +7353,7 @@
                 <a:ea typeface="Aptos"/>
                 <a:cs typeface="Aptos"/>
               </a:rPr>
-              <a:t>Julkinen riippumaton evidenssikooste · 2026.07.24-21 · 2026-07-24 · Lähteet: Statistics Canada; Health Canada; New Zealand Ministry of Health; Destatis; Vero; Sejm; Ruotsin hallitus; FTC; European Commission; IMARC; GVR; Fortune</a:t>
+              <a:t>Julkinen riippumaton evidenssikooste · 2026.07.24-22 · 2026-07-24 · Lähteet: Statistics Canada; Health Canada; New Zealand Ministry of Health; Destatis; Vero; Sejm; Ruotsin hallitus; FHM; FTC; European Commission; IMARC; GVR; Fortune</a:t>
             </a:r>
           </a:p>
         </p:txBody>
@@ -7333,7 +7363,7 @@
           <p:cNvPr id="7" name="TextBox 6">
             <a:extLst xmlns:a="http://schemas.openxmlformats.org/drawingml/2006/main">
               <a:ext uri="{FF2B5EF4-FFF2-40B4-BE49-F238E27FC236}">
-                <a16:creationId xmlns:a16="http://schemas.microsoft.com/office/drawing/2014/main" id="{9248C6E9-E586-41E3-A894-1FF75CBE5D58}"/>
+                <a16:creationId xmlns:a16="http://schemas.microsoft.com/office/drawing/2014/main" id="{4FB51E6A-A092-45A2-BA30-48409AB80AC1}"/>
               </a:ext>
             </a:extLst>
           </p:cNvPr>
@@ -7380,7 +7410,7 @@
           <p:cNvPr id="8" name="Rounded Rectangle 7">
             <a:extLst xmlns:a="http://schemas.openxmlformats.org/drawingml/2006/main">
               <a:ext uri="{FF2B5EF4-FFF2-40B4-BE49-F238E27FC236}">
-                <a16:creationId xmlns:a16="http://schemas.microsoft.com/office/drawing/2014/main" id="{8BE997B9-2B89-4B95-8025-1A653688C4F0}"/>
+                <a16:creationId xmlns:a16="http://schemas.microsoft.com/office/drawing/2014/main" id="{4B28CC68-65C2-4B57-A23A-71800B1A6A2A}"/>
               </a:ext>
             </a:extLst>
           </p:cNvPr>
@@ -7437,7 +7467,7 @@
           <p:cNvPr id="9" name="TextBox 8">
             <a:extLst xmlns:a="http://schemas.openxmlformats.org/drawingml/2006/main">
               <a:ext uri="{FF2B5EF4-FFF2-40B4-BE49-F238E27FC236}">
-                <a16:creationId xmlns:a16="http://schemas.microsoft.com/office/drawing/2014/main" id="{135ACC81-ABFC-4C74-AC06-0CDC83FD56CA}"/>
+                <a16:creationId xmlns:a16="http://schemas.microsoft.com/office/drawing/2014/main" id="{5D092583-FC92-417D-981C-A67C5EE30756}"/>
               </a:ext>
             </a:extLst>
           </p:cNvPr>
@@ -7474,7 +7504,7 @@
                 <a:ea typeface="Aptos"/>
                 <a:cs typeface="Aptos"/>
               </a:rPr>
-              <a:t>34</a:t>
+              <a:t>34 + 36</a:t>
             </a:r>
           </a:p>
         </p:txBody>
@@ -7484,7 +7514,7 @@
           <p:cNvPr id="10" name="TextBox 9">
             <a:extLst xmlns:a="http://schemas.openxmlformats.org/drawingml/2006/main">
               <a:ext uri="{FF2B5EF4-FFF2-40B4-BE49-F238E27FC236}">
-                <a16:creationId xmlns:a16="http://schemas.microsoft.com/office/drawing/2014/main" id="{B6BE29E3-7F53-4911-AE68-30AA54B164C8}"/>
+                <a16:creationId xmlns:a16="http://schemas.microsoft.com/office/drawing/2014/main" id="{CCB3A33B-E4E0-4406-8481-756A39EF26BB}"/>
               </a:ext>
             </a:extLst>
           </p:cNvPr>
@@ -7496,7 +7526,7 @@
         <p:spPr>
           <a:xfrm xmlns:a="http://schemas.openxmlformats.org/drawingml/2006/main">
             <a:off x="694944" y="2468879"/>
-            <a:ext cx="3203448" cy="438912"/>
+            <a:ext cx="3203448" cy="499872"/>
           </a:xfrm>
           <a:prstGeom xmlns:a="http://schemas.openxmlformats.org/drawingml/2006/main" prst="rect">
             <a:avLst/>
@@ -7521,7 +7551,7 @@
                 <a:ea typeface="Aptos"/>
                 <a:cs typeface="Aptos"/>
               </a:rPr>
-              <a:t>virallista vuosihavaintoa 7 maasta</a:t>
+              <a:t>34 markkinamittaria 7 maasta + 36 Ruotsin FHM-rekisterilukua; ei myyntiä</a:t>
             </a:r>
           </a:p>
         </p:txBody>
@@ -7531,7 +7561,7 @@
           <p:cNvPr id="11" name="Rounded Rectangle 10">
             <a:extLst xmlns:a="http://schemas.openxmlformats.org/drawingml/2006/main">
               <a:ext uri="{FF2B5EF4-FFF2-40B4-BE49-F238E27FC236}">
-                <a16:creationId xmlns:a16="http://schemas.microsoft.com/office/drawing/2014/main" id="{3F93CE74-BAF6-48CE-89F2-2950820F48C8}"/>
+                <a16:creationId xmlns:a16="http://schemas.microsoft.com/office/drawing/2014/main" id="{9FE31A6B-3A7E-4020-AE03-DAECC4BF4E69}"/>
               </a:ext>
             </a:extLst>
           </p:cNvPr>
@@ -7588,7 +7618,7 @@
           <p:cNvPr id="12" name="TextBox 11">
             <a:extLst xmlns:a="http://schemas.openxmlformats.org/drawingml/2006/main">
               <a:ext uri="{FF2B5EF4-FFF2-40B4-BE49-F238E27FC236}">
-                <a16:creationId xmlns:a16="http://schemas.microsoft.com/office/drawing/2014/main" id="{54DA82CC-0160-4548-9FA9-819818B05CC1}"/>
+                <a16:creationId xmlns:a16="http://schemas.microsoft.com/office/drawing/2014/main" id="{E7C1C4B6-C0C0-4F4F-9B06-561FC46AB50F}"/>
               </a:ext>
             </a:extLst>
           </p:cNvPr>
@@ -7635,7 +7665,7 @@
           <p:cNvPr id="13" name="TextBox 12">
             <a:extLst xmlns:a="http://schemas.openxmlformats.org/drawingml/2006/main">
               <a:ext uri="{FF2B5EF4-FFF2-40B4-BE49-F238E27FC236}">
-                <a16:creationId xmlns:a16="http://schemas.microsoft.com/office/drawing/2014/main" id="{D950F391-F49A-4705-A32A-7053FBF6A23C}"/>
+                <a16:creationId xmlns:a16="http://schemas.microsoft.com/office/drawing/2014/main" id="{3C1FD322-BA21-45E7-AA9A-FF47F6E89AC9}"/>
               </a:ext>
             </a:extLst>
           </p:cNvPr>
@@ -7682,7 +7712,7 @@
           <p:cNvPr id="14" name="Rounded Rectangle 13">
             <a:extLst xmlns:a="http://schemas.openxmlformats.org/drawingml/2006/main">
               <a:ext uri="{FF2B5EF4-FFF2-40B4-BE49-F238E27FC236}">
-                <a16:creationId xmlns:a16="http://schemas.microsoft.com/office/drawing/2014/main" id="{28377AF5-5029-4047-81AD-480D481F7B10}"/>
+                <a16:creationId xmlns:a16="http://schemas.microsoft.com/office/drawing/2014/main" id="{2B5A8FFF-630A-4456-8299-4875EBE2FBAD}"/>
               </a:ext>
             </a:extLst>
           </p:cNvPr>
@@ -7739,7 +7769,7 @@
           <p:cNvPr id="15" name="TextBox 14">
             <a:extLst xmlns:a="http://schemas.openxmlformats.org/drawingml/2006/main">
               <a:ext uri="{FF2B5EF4-FFF2-40B4-BE49-F238E27FC236}">
-                <a16:creationId xmlns:a16="http://schemas.microsoft.com/office/drawing/2014/main" id="{87E91956-0485-41BA-A9A6-CBE03E728419}"/>
+                <a16:creationId xmlns:a16="http://schemas.microsoft.com/office/drawing/2014/main" id="{3B379030-465A-453A-A3FD-F4B04C363142}"/>
               </a:ext>
             </a:extLst>
           </p:cNvPr>
@@ -7786,7 +7816,7 @@
           <p:cNvPr id="16" name="TextBox 15">
             <a:extLst xmlns:a="http://schemas.openxmlformats.org/drawingml/2006/main">
               <a:ext uri="{FF2B5EF4-FFF2-40B4-BE49-F238E27FC236}">
-                <a16:creationId xmlns:a16="http://schemas.microsoft.com/office/drawing/2014/main" id="{4079A11C-CB2E-4700-A3B9-8C143732E4DD}"/>
+                <a16:creationId xmlns:a16="http://schemas.microsoft.com/office/drawing/2014/main" id="{EB0B31DA-1511-4C44-87A4-83E42A7681C1}"/>
               </a:ext>
             </a:extLst>
           </p:cNvPr>
@@ -7833,7 +7863,7 @@
           <p:cNvPr id="17" name="TextBox 16">
             <a:extLst xmlns:a="http://schemas.openxmlformats.org/drawingml/2006/main">
               <a:ext uri="{FF2B5EF4-FFF2-40B4-BE49-F238E27FC236}">
-                <a16:creationId xmlns:a16="http://schemas.microsoft.com/office/drawing/2014/main" id="{4CB4B26B-503E-4748-A4D6-D2B88D8BE69B}"/>
+                <a16:creationId xmlns:a16="http://schemas.microsoft.com/office/drawing/2014/main" id="{0D464800-ACEA-4FDF-8327-BADC55116E9F}"/>
               </a:ext>
             </a:extLst>
           </p:cNvPr>
@@ -7880,7 +7910,7 @@
           <p:cNvPr id="18" name="Rounded Rectangle 17">
             <a:extLst xmlns:a="http://schemas.openxmlformats.org/drawingml/2006/main">
               <a:ext uri="{FF2B5EF4-FFF2-40B4-BE49-F238E27FC236}">
-                <a16:creationId xmlns:a16="http://schemas.microsoft.com/office/drawing/2014/main" id="{93C1D2FC-5975-417F-B956-1E9FCA7561B4}"/>
+                <a16:creationId xmlns:a16="http://schemas.microsoft.com/office/drawing/2014/main" id="{35726557-00DD-4284-AFF2-D13417EFF1CC}"/>
               </a:ext>
             </a:extLst>
           </p:cNvPr>
@@ -7937,7 +7967,7 @@
           <p:cNvPr id="19" name="TextBox 18">
             <a:extLst xmlns:a="http://schemas.openxmlformats.org/drawingml/2006/main">
               <a:ext uri="{FF2B5EF4-FFF2-40B4-BE49-F238E27FC236}">
-                <a16:creationId xmlns:a16="http://schemas.microsoft.com/office/drawing/2014/main" id="{81AFB5DA-F302-4624-AEE6-CCDC8274EF64}"/>
+                <a16:creationId xmlns:a16="http://schemas.microsoft.com/office/drawing/2014/main" id="{5AB05CF5-6DC4-45F0-B121-CCA57EAB531B}"/>
               </a:ext>
             </a:extLst>
           </p:cNvPr>
@@ -7984,7 +8014,7 @@
           <p:cNvPr id="20" name="TextBox 19">
             <a:extLst xmlns:a="http://schemas.openxmlformats.org/drawingml/2006/main">
               <a:ext uri="{FF2B5EF4-FFF2-40B4-BE49-F238E27FC236}">
-                <a16:creationId xmlns:a16="http://schemas.microsoft.com/office/drawing/2014/main" id="{5F825DA8-57E5-4AD7-B2EE-740BB7CEA6F6}"/>
+                <a16:creationId xmlns:a16="http://schemas.microsoft.com/office/drawing/2014/main" id="{0571925A-AE3B-4F8A-B22D-30ABABBA77A3}"/>
               </a:ext>
             </a:extLst>
           </p:cNvPr>
@@ -8029,7 +8059,7 @@
     </p:spTree>
     <p:extLst>
       <p:ext uri="{BB962C8B-B14F-4D97-AF65-F5344CB8AC3E}">
-        <p14:creationId xmlns:p14="http://schemas.microsoft.com/office/powerpoint/2010/main" val="1606885973"/>
+        <p14:creationId xmlns:p14="http://schemas.microsoft.com/office/powerpoint/2010/main" val="1745179374"/>
       </p:ext>
     </p:extLst>
   </p:cSld>
@@ -8053,7 +8083,7 @@
           <p:cNvPr id="2" name="TextBox 1">
             <a:extLst xmlns:a="http://schemas.openxmlformats.org/drawingml/2006/main">
               <a:ext uri="{FF2B5EF4-FFF2-40B4-BE49-F238E27FC236}">
-                <a16:creationId xmlns:a16="http://schemas.microsoft.com/office/drawing/2014/main" id="{1ED27F1A-972A-4FDD-9934-06B1264B431E}"/>
+                <a16:creationId xmlns:a16="http://schemas.microsoft.com/office/drawing/2014/main" id="{D266565B-CA01-4D28-87E4-B8BDD5299A1A}"/>
               </a:ext>
             </a:extLst>
           </p:cNvPr>
@@ -8100,7 +8130,7 @@
           <p:cNvPr id="3" name="TextBox 2">
             <a:extLst xmlns:a="http://schemas.openxmlformats.org/drawingml/2006/main">
               <a:ext uri="{FF2B5EF4-FFF2-40B4-BE49-F238E27FC236}">
-                <a16:creationId xmlns:a16="http://schemas.microsoft.com/office/drawing/2014/main" id="{05506E7B-0240-4B75-814D-BF06CBA8EA3D}"/>
+                <a16:creationId xmlns:a16="http://schemas.microsoft.com/office/drawing/2014/main" id="{2B39683A-42A6-4616-863B-A04C2AEC05FC}"/>
               </a:ext>
             </a:extLst>
           </p:cNvPr>
@@ -8147,7 +8177,7 @@
           <p:cNvPr id="4" name="Rectangle 3">
             <a:extLst xmlns:a="http://schemas.openxmlformats.org/drawingml/2006/main">
               <a:ext uri="{FF2B5EF4-FFF2-40B4-BE49-F238E27FC236}">
-                <a16:creationId xmlns:a16="http://schemas.microsoft.com/office/drawing/2014/main" id="{CFE4B9F8-55A7-4616-9261-89BEB5D32C67}"/>
+                <a16:creationId xmlns:a16="http://schemas.microsoft.com/office/drawing/2014/main" id="{6ABFD16D-36C6-4FBA-AD44-9C9E20680021}"/>
               </a:ext>
             </a:extLst>
           </p:cNvPr>
@@ -8202,7 +8232,7 @@
           <p:cNvPr id="5" name="Rectangle 4">
             <a:extLst xmlns:a="http://schemas.openxmlformats.org/drawingml/2006/main">
               <a:ext uri="{FF2B5EF4-FFF2-40B4-BE49-F238E27FC236}">
-                <a16:creationId xmlns:a16="http://schemas.microsoft.com/office/drawing/2014/main" id="{AE6B8F45-4940-42D4-A026-652A83BE5775}"/>
+                <a16:creationId xmlns:a16="http://schemas.microsoft.com/office/drawing/2014/main" id="{4C6919FE-EC1C-4210-BF2A-1279143D4329}"/>
               </a:ext>
             </a:extLst>
           </p:cNvPr>
@@ -8257,7 +8287,7 @@
           <p:cNvPr id="6" name="TextBox 5">
             <a:extLst xmlns:a="http://schemas.openxmlformats.org/drawingml/2006/main">
               <a:ext uri="{FF2B5EF4-FFF2-40B4-BE49-F238E27FC236}">
-                <a16:creationId xmlns:a16="http://schemas.microsoft.com/office/drawing/2014/main" id="{FC0E5D48-6905-46EB-B654-302859C06CAF}"/>
+                <a16:creationId xmlns:a16="http://schemas.microsoft.com/office/drawing/2014/main" id="{8ED8FB51-E2A2-4659-9230-5684A3DACB8A}"/>
               </a:ext>
             </a:extLst>
           </p:cNvPr>
@@ -8294,7 +8324,7 @@
                 <a:ea typeface="Aptos"/>
                 <a:cs typeface="Aptos"/>
               </a:rPr>
-              <a:t>Julkinen riippumaton evidenssikooste · 2026.07.24-21 · 2026-07-24 · Lähteet: Evidence Register; WIPO IP valuation</a:t>
+              <a:t>Julkinen riippumaton evidenssikooste · 2026.07.24-22 · 2026-07-24 · Lähteet: Evidence Register; WIPO IP valuation</a:t>
             </a:r>
           </a:p>
         </p:txBody>
@@ -8304,7 +8334,7 @@
           <p:cNvPr id="7" name="TextBox 6">
             <a:extLst xmlns:a="http://schemas.openxmlformats.org/drawingml/2006/main">
               <a:ext uri="{FF2B5EF4-FFF2-40B4-BE49-F238E27FC236}">
-                <a16:creationId xmlns:a16="http://schemas.microsoft.com/office/drawing/2014/main" id="{9F350514-D338-4164-BDAA-9ED33C52FD6B}"/>
+                <a16:creationId xmlns:a16="http://schemas.microsoft.com/office/drawing/2014/main" id="{943D9C79-9B63-425A-8221-15B118A710DD}"/>
               </a:ext>
             </a:extLst>
           </p:cNvPr>
@@ -8791,7 +8821,7 @@
           <p:cNvPr id="9" name="TextBox 8">
             <a:extLst xmlns:a="http://schemas.openxmlformats.org/drawingml/2006/main">
               <a:ext uri="{FF2B5EF4-FFF2-40B4-BE49-F238E27FC236}">
-                <a16:creationId xmlns:a16="http://schemas.microsoft.com/office/drawing/2014/main" id="{3CAFAFAE-D748-43E8-8CFC-8EE7A38BB6A4}"/>
+                <a16:creationId xmlns:a16="http://schemas.microsoft.com/office/drawing/2014/main" id="{17220972-7E43-4D92-9A75-F338A1BED759}"/>
               </a:ext>
             </a:extLst>
           </p:cNvPr>
@@ -8836,7 +8866,7 @@
     </p:spTree>
     <p:extLst>
       <p:ext uri="{BB962C8B-B14F-4D97-AF65-F5344CB8AC3E}">
-        <p14:creationId xmlns:p14="http://schemas.microsoft.com/office/powerpoint/2010/main" val="444771676"/>
+        <p14:creationId xmlns:p14="http://schemas.microsoft.com/office/powerpoint/2010/main" val="1396874012"/>
       </p:ext>
     </p:extLst>
   </p:cSld>
@@ -8867,7 +8897,7 @@
           <p:cNvPr id="2" name="TextBox 1">
             <a:extLst xmlns:a="http://schemas.openxmlformats.org/drawingml/2006/main">
               <a:ext uri="{FF2B5EF4-FFF2-40B4-BE49-F238E27FC236}">
-                <a16:creationId xmlns:a16="http://schemas.microsoft.com/office/drawing/2014/main" id="{622A54CE-CBF6-4314-9081-7EE7A154EADF}"/>
+                <a16:creationId xmlns:a16="http://schemas.microsoft.com/office/drawing/2014/main" id="{2F30DFDA-C360-468C-B09D-2C2069A838AA}"/>
               </a:ext>
             </a:extLst>
           </p:cNvPr>
@@ -8914,7 +8944,7 @@
           <p:cNvPr id="3" name="TextBox 2">
             <a:extLst xmlns:a="http://schemas.openxmlformats.org/drawingml/2006/main">
               <a:ext uri="{FF2B5EF4-FFF2-40B4-BE49-F238E27FC236}">
-                <a16:creationId xmlns:a16="http://schemas.microsoft.com/office/drawing/2014/main" id="{8B91A155-DA37-487C-978F-9D4BC1CEAD95}"/>
+                <a16:creationId xmlns:a16="http://schemas.microsoft.com/office/drawing/2014/main" id="{DE45680E-CF15-4EDB-8C46-B170C6DB7620}"/>
               </a:ext>
             </a:extLst>
           </p:cNvPr>
@@ -8961,7 +8991,7 @@
           <p:cNvPr id="4" name="TextBox 3">
             <a:extLst xmlns:a="http://schemas.openxmlformats.org/drawingml/2006/main">
               <a:ext uri="{FF2B5EF4-FFF2-40B4-BE49-F238E27FC236}">
-                <a16:creationId xmlns:a16="http://schemas.microsoft.com/office/drawing/2014/main" id="{84F7386F-856E-48B8-A8A2-16FC1740D4FB}"/>
+                <a16:creationId xmlns:a16="http://schemas.microsoft.com/office/drawing/2014/main" id="{08144420-7802-4E12-AF06-52D4B675886D}"/>
               </a:ext>
             </a:extLst>
           </p:cNvPr>
@@ -9080,7 +9110,7 @@
           <p:cNvPr id="5" name="TextBox 4">
             <a:extLst xmlns:a="http://schemas.openxmlformats.org/drawingml/2006/main">
               <a:ext uri="{FF2B5EF4-FFF2-40B4-BE49-F238E27FC236}">
-                <a16:creationId xmlns:a16="http://schemas.microsoft.com/office/drawing/2014/main" id="{DA3EE5EF-2542-46A2-B980-6E2E1BA88CE8}"/>
+                <a16:creationId xmlns:a16="http://schemas.microsoft.com/office/drawing/2014/main" id="{32FD1CE5-11CE-4C12-A1E6-75D56192D33A}"/>
               </a:ext>
             </a:extLst>
           </p:cNvPr>
@@ -9117,7 +9147,7 @@
                 <a:ea typeface="Aptos"/>
                 <a:cs typeface="Aptos"/>
               </a:rPr>
-              <a:t>Versio 2026.07.24-21 · 2026-07-24 · 6 / 6</a:t>
+              <a:t>Versio 2026.07.24-22 · 2026-07-24 · 6 / 6</a:t>
             </a:r>
           </a:p>
         </p:txBody>
@@ -9125,7 +9155,7 @@
     </p:spTree>
     <p:extLst>
       <p:ext uri="{BB962C8B-B14F-4D97-AF65-F5344CB8AC3E}">
-        <p14:creationId xmlns:p14="http://schemas.microsoft.com/office/powerpoint/2010/main" val="817670123"/>
+        <p14:creationId xmlns:p14="http://schemas.microsoft.com/office/powerpoint/2010/main" val="171370082"/>
       </p:ext>
     </p:extLst>
   </p:cSld>

--- a/site/downloads/pixan-bank-deck-short-fi.pptx
+++ b/site/downloads/pixan-bank-deck-short-fi.pptx
@@ -2,18 +2,18 @@
 <file path=ppt/presentation.xml><?xml version="1.0" encoding="utf-8"?>
 <p:presentation xmlns:p="http://schemas.openxmlformats.org/presentationml/2006/main">
   <p:sldMasterIdLst>
-    <p:sldMasterId xmlns:r="http://schemas.openxmlformats.org/officeDocument/2006/relationships" id="2147483648" r:id="R09da2fbcfbd54360"/>
+    <p:sldMasterId xmlns:r="http://schemas.openxmlformats.org/officeDocument/2006/relationships" id="2147483648" r:id="R5a30cd331b044e05"/>
   </p:sldMasterIdLst>
   <p:notesMasterIdLst>
-    <p:notesMasterId xmlns:r="http://schemas.openxmlformats.org/officeDocument/2006/relationships" r:id="Re73bcbd0504b45bd"/>
+    <p:notesMasterId xmlns:r="http://schemas.openxmlformats.org/officeDocument/2006/relationships" r:id="R86dec381d10e4b56"/>
   </p:notesMasterIdLst>
   <p:sldIdLst>
-    <p:sldId xmlns:r="http://schemas.openxmlformats.org/officeDocument/2006/relationships" id="256" r:id="Re7945358a0494f41"/>
-    <p:sldId xmlns:r="http://schemas.openxmlformats.org/officeDocument/2006/relationships" id="257" r:id="R72ace29e08d445d2"/>
-    <p:sldId xmlns:r="http://schemas.openxmlformats.org/officeDocument/2006/relationships" id="258" r:id="R88b6277eb541452e"/>
-    <p:sldId xmlns:r="http://schemas.openxmlformats.org/officeDocument/2006/relationships" id="259" r:id="R90e6e009caa04630"/>
-    <p:sldId xmlns:r="http://schemas.openxmlformats.org/officeDocument/2006/relationships" id="260" r:id="Rabc471eb1ead4d41"/>
-    <p:sldId xmlns:r="http://schemas.openxmlformats.org/officeDocument/2006/relationships" id="261" r:id="R6dd8c005c5034401"/>
+    <p:sldId xmlns:r="http://schemas.openxmlformats.org/officeDocument/2006/relationships" id="256" r:id="Rb6ff2a0fbfc34799"/>
+    <p:sldId xmlns:r="http://schemas.openxmlformats.org/officeDocument/2006/relationships" id="257" r:id="R0d653f5752a048f2"/>
+    <p:sldId xmlns:r="http://schemas.openxmlformats.org/officeDocument/2006/relationships" id="258" r:id="Rb0676316a5e14ba9"/>
+    <p:sldId xmlns:r="http://schemas.openxmlformats.org/officeDocument/2006/relationships" id="259" r:id="R7ba28d222199424f"/>
+    <p:sldId xmlns:r="http://schemas.openxmlformats.org/officeDocument/2006/relationships" id="260" r:id="R3226085b73ab4441"/>
+    <p:sldId xmlns:r="http://schemas.openxmlformats.org/officeDocument/2006/relationships" id="261" r:id="R8956fe67f78e44d8"/>
   </p:sldIdLst>
   <p:sldSz cx="12191999" cy="6858000"/>
   <p:notesSz cx="6858000" cy="9144000"/>
@@ -505,6 +505,21 @@
           </a:p>
           <a:p xmlns:a="http://schemas.openxmlformats.org/drawingml/2006/main">
             <a:r>
+              <a:t>- https://www150.statcan.gc.ca/t1/tbl1/en/tv.action?pid=2010008001</a:t>
+            </a:r>
+          </a:p>
+          <a:p xmlns:a="http://schemas.openxmlformats.org/drawingml/2006/main">
+            <a:r>
+              <a:t>- https://www23.statcan.gc.ca/imdb/p2SV.pl?Function=getSurvey&amp;Id=1544050</a:t>
+            </a:r>
+          </a:p>
+          <a:p xmlns:a="http://schemas.openxmlformats.org/drawingml/2006/main">
+            <a:r>
+              <a:t>- https://www150.statcan.gc.ca/n1/pub/36-28-0001/2025004/article/00001-eng.pdf</a:t>
+            </a:r>
+          </a:p>
+          <a:p xmlns:a="http://schemas.openxmlformats.org/drawingml/2006/main">
+            <a:r>
               <a:t>- https://www.ftc.gov/reports/e-cigarette-report-2021</a:t>
             </a:r>
           </a:p>
@@ -680,6 +695,21 @@
           </a:p>
           <a:p xmlns:a="http://schemas.openxmlformats.org/drawingml/2006/main">
             <a:r>
+              <a:t>- https://www150.statcan.gc.ca/t1/tbl1/en/tv.action?pid=2010008001</a:t>
+            </a:r>
+          </a:p>
+          <a:p xmlns:a="http://schemas.openxmlformats.org/drawingml/2006/main">
+            <a:r>
+              <a:t>- https://www23.statcan.gc.ca/imdb/p2SV.pl?Function=getSurvey&amp;Id=1544050</a:t>
+            </a:r>
+          </a:p>
+          <a:p xmlns:a="http://schemas.openxmlformats.org/drawingml/2006/main">
+            <a:r>
+              <a:t>- https://www150.statcan.gc.ca/n1/pub/36-28-0001/2025004/article/00001-eng.pdf</a:t>
+            </a:r>
+          </a:p>
+          <a:p xmlns:a="http://schemas.openxmlformats.org/drawingml/2006/main">
+            <a:r>
               <a:t>- https://www.ftc.gov/reports/e-cigarette-report-2021</a:t>
             </a:r>
           </a:p>
@@ -855,6 +885,21 @@
           </a:p>
           <a:p xmlns:a="http://schemas.openxmlformats.org/drawingml/2006/main">
             <a:r>
+              <a:t>- https://www150.statcan.gc.ca/t1/tbl1/en/tv.action?pid=2010008001</a:t>
+            </a:r>
+          </a:p>
+          <a:p xmlns:a="http://schemas.openxmlformats.org/drawingml/2006/main">
+            <a:r>
+              <a:t>- https://www23.statcan.gc.ca/imdb/p2SV.pl?Function=getSurvey&amp;Id=1544050</a:t>
+            </a:r>
+          </a:p>
+          <a:p xmlns:a="http://schemas.openxmlformats.org/drawingml/2006/main">
+            <a:r>
+              <a:t>- https://www150.statcan.gc.ca/n1/pub/36-28-0001/2025004/article/00001-eng.pdf</a:t>
+            </a:r>
+          </a:p>
+          <a:p xmlns:a="http://schemas.openxmlformats.org/drawingml/2006/main">
+            <a:r>
               <a:t>- https://www.ftc.gov/reports/e-cigarette-report-2021</a:t>
             </a:r>
           </a:p>
@@ -1030,6 +1075,21 @@
           </a:p>
           <a:p xmlns:a="http://schemas.openxmlformats.org/drawingml/2006/main">
             <a:r>
+              <a:t>- https://www150.statcan.gc.ca/t1/tbl1/en/tv.action?pid=2010008001</a:t>
+            </a:r>
+          </a:p>
+          <a:p xmlns:a="http://schemas.openxmlformats.org/drawingml/2006/main">
+            <a:r>
+              <a:t>- https://www23.statcan.gc.ca/imdb/p2SV.pl?Function=getSurvey&amp;Id=1544050</a:t>
+            </a:r>
+          </a:p>
+          <a:p xmlns:a="http://schemas.openxmlformats.org/drawingml/2006/main">
+            <a:r>
+              <a:t>- https://www150.statcan.gc.ca/n1/pub/36-28-0001/2025004/article/00001-eng.pdf</a:t>
+            </a:r>
+          </a:p>
+          <a:p xmlns:a="http://schemas.openxmlformats.org/drawingml/2006/main">
+            <a:r>
               <a:t>- https://www.ftc.gov/reports/e-cigarette-report-2021</a:t>
             </a:r>
           </a:p>
@@ -1205,6 +1265,21 @@
           </a:p>
           <a:p xmlns:a="http://schemas.openxmlformats.org/drawingml/2006/main">
             <a:r>
+              <a:t>- https://www150.statcan.gc.ca/t1/tbl1/en/tv.action?pid=2010008001</a:t>
+            </a:r>
+          </a:p>
+          <a:p xmlns:a="http://schemas.openxmlformats.org/drawingml/2006/main">
+            <a:r>
+              <a:t>- https://www23.statcan.gc.ca/imdb/p2SV.pl?Function=getSurvey&amp;Id=1544050</a:t>
+            </a:r>
+          </a:p>
+          <a:p xmlns:a="http://schemas.openxmlformats.org/drawingml/2006/main">
+            <a:r>
+              <a:t>- https://www150.statcan.gc.ca/n1/pub/36-28-0001/2025004/article/00001-eng.pdf</a:t>
+            </a:r>
+          </a:p>
+          <a:p xmlns:a="http://schemas.openxmlformats.org/drawingml/2006/main">
+            <a:r>
               <a:t>- https://www.ftc.gov/reports/e-cigarette-report-2021</a:t>
             </a:r>
           </a:p>
@@ -1380,6 +1455,21 @@
           </a:p>
           <a:p xmlns:a="http://schemas.openxmlformats.org/drawingml/2006/main">
             <a:r>
+              <a:t>- https://www150.statcan.gc.ca/t1/tbl1/en/tv.action?pid=2010008001</a:t>
+            </a:r>
+          </a:p>
+          <a:p xmlns:a="http://schemas.openxmlformats.org/drawingml/2006/main">
+            <a:r>
+              <a:t>- https://www23.statcan.gc.ca/imdb/p2SV.pl?Function=getSurvey&amp;Id=1544050</a:t>
+            </a:r>
+          </a:p>
+          <a:p xmlns:a="http://schemas.openxmlformats.org/drawingml/2006/main">
+            <a:r>
+              <a:t>- https://www150.statcan.gc.ca/n1/pub/36-28-0001/2025004/article/00001-eng.pdf</a:t>
+            </a:r>
+          </a:p>
+          <a:p xmlns:a="http://schemas.openxmlformats.org/drawingml/2006/main">
+            <a:r>
               <a:t>- https://www.ftc.gov/reports/e-cigarette-report-2021</a:t>
             </a:r>
           </a:p>
@@ -1497,7 +1587,7 @@
           <p:cNvPr id="2" name="Title 1">
             <a:extLst xmlns:a="http://schemas.openxmlformats.org/drawingml/2006/main">
               <a:ext uri="{FF2B5EF4-FFF2-40B4-BE49-F238E27FC236}">
-                <a16:creationId xmlns:a16="http://schemas.microsoft.com/office/drawing/2014/main" id="{1DD82515-7B44-4F58-AF3A-987F19BC98B5}"/>
+                <a16:creationId xmlns:a16="http://schemas.microsoft.com/office/drawing/2014/main" id="{9A4BFDF2-B755-4FF4-8D4E-6D8ADED8FB1D}"/>
               </a:ext>
             </a:extLst>
           </p:cNvPr>
@@ -1529,7 +1619,7 @@
           <p:cNvPr id="3" name="Subtitle 2">
             <a:extLst xmlns:a="http://schemas.openxmlformats.org/drawingml/2006/main">
               <a:ext uri="{FF2B5EF4-FFF2-40B4-BE49-F238E27FC236}">
-                <a16:creationId xmlns:a16="http://schemas.microsoft.com/office/drawing/2014/main" id="{892F44C5-515C-49BC-9028-6A2198592715}"/>
+                <a16:creationId xmlns:a16="http://schemas.microsoft.com/office/drawing/2014/main" id="{5DBEF6E2-DBAB-4988-A984-43E889A3EDA5}"/>
               </a:ext>
             </a:extLst>
           </p:cNvPr>
@@ -1652,7 +1742,7 @@
           <p:cNvPr id="4" name="Date Placeholder 3">
             <a:extLst xmlns:a="http://schemas.openxmlformats.org/drawingml/2006/main">
               <a:ext uri="{FF2B5EF4-FFF2-40B4-BE49-F238E27FC236}">
-                <a16:creationId xmlns:a16="http://schemas.microsoft.com/office/drawing/2014/main" id="{872FDBC8-3091-4711-BCE2-EAEC1D7F518C}"/>
+                <a16:creationId xmlns:a16="http://schemas.microsoft.com/office/drawing/2014/main" id="{EF06886C-5DD2-4118-940A-53309E3D103D}"/>
               </a:ext>
             </a:extLst>
           </p:cNvPr>
@@ -1679,7 +1769,7 @@
           <p:cNvPr id="5" name="Footer Placeholder 4">
             <a:extLst xmlns:a="http://schemas.openxmlformats.org/drawingml/2006/main">
               <a:ext uri="{FF2B5EF4-FFF2-40B4-BE49-F238E27FC236}">
-                <a16:creationId xmlns:a16="http://schemas.microsoft.com/office/drawing/2014/main" id="{62A6DF81-06F2-4AA1-B3B7-4F2BB4EBFFE6}"/>
+                <a16:creationId xmlns:a16="http://schemas.microsoft.com/office/drawing/2014/main" id="{77408169-3C35-42F8-B9CB-AE2A727BB656}"/>
               </a:ext>
             </a:extLst>
           </p:cNvPr>
@@ -1702,7 +1792,7 @@
           <p:cNvPr id="6" name="Slide Number Placeholder 5">
             <a:extLst xmlns:a="http://schemas.openxmlformats.org/drawingml/2006/main">
               <a:ext uri="{FF2B5EF4-FFF2-40B4-BE49-F238E27FC236}">
-                <a16:creationId xmlns:a16="http://schemas.microsoft.com/office/drawing/2014/main" id="{2E28FBEF-14BE-4259-B8E8-72AC4F2A8FE9}"/>
+                <a16:creationId xmlns:a16="http://schemas.microsoft.com/office/drawing/2014/main" id="{C09F951A-CB1A-4BE0-8A16-AD19E54CD5B7}"/>
               </a:ext>
             </a:extLst>
           </p:cNvPr>
@@ -1746,7 +1836,7 @@
           <p:cNvPr id="2" name="Title 1">
             <a:extLst xmlns:a="http://schemas.openxmlformats.org/drawingml/2006/main">
               <a:ext uri="{FF2B5EF4-FFF2-40B4-BE49-F238E27FC236}">
-                <a16:creationId xmlns:a16="http://schemas.microsoft.com/office/drawing/2014/main" id="{EE0FB42D-64D2-4864-A2C9-43EDDB668F07}"/>
+                <a16:creationId xmlns:a16="http://schemas.microsoft.com/office/drawing/2014/main" id="{03FB4D90-8869-4125-9873-DBAC9EFDA7AB}"/>
               </a:ext>
             </a:extLst>
           </p:cNvPr>
@@ -1773,7 +1863,7 @@
           <p:cNvPr id="3" name="Vertical Text Placeholder 2">
             <a:extLst xmlns:a="http://schemas.openxmlformats.org/drawingml/2006/main">
               <a:ext uri="{FF2B5EF4-FFF2-40B4-BE49-F238E27FC236}">
-                <a16:creationId xmlns:a16="http://schemas.microsoft.com/office/drawing/2014/main" id="{E9DBF126-FEE6-4C63-9B3B-C664193D7FE0}"/>
+                <a16:creationId xmlns:a16="http://schemas.microsoft.com/office/drawing/2014/main" id="{88C14775-02CC-4DE8-969D-98D7CC77DF35}"/>
               </a:ext>
             </a:extLst>
           </p:cNvPr>
@@ -1835,7 +1925,7 @@
           <p:cNvPr id="4" name="Date Placeholder 3">
             <a:extLst xmlns:a="http://schemas.openxmlformats.org/drawingml/2006/main">
               <a:ext uri="{FF2B5EF4-FFF2-40B4-BE49-F238E27FC236}">
-                <a16:creationId xmlns:a16="http://schemas.microsoft.com/office/drawing/2014/main" id="{1B96A587-C15A-45E0-8B17-D8AE060B299F}"/>
+                <a16:creationId xmlns:a16="http://schemas.microsoft.com/office/drawing/2014/main" id="{72D7BD6E-ADE5-452D-8520-CFBCFF147130}"/>
               </a:ext>
             </a:extLst>
           </p:cNvPr>
@@ -1862,7 +1952,7 @@
           <p:cNvPr id="5" name="Footer Placeholder 4">
             <a:extLst xmlns:a="http://schemas.openxmlformats.org/drawingml/2006/main">
               <a:ext uri="{FF2B5EF4-FFF2-40B4-BE49-F238E27FC236}">
-                <a16:creationId xmlns:a16="http://schemas.microsoft.com/office/drawing/2014/main" id="{F887D78A-47AE-453E-8AE7-68666849B7EC}"/>
+                <a16:creationId xmlns:a16="http://schemas.microsoft.com/office/drawing/2014/main" id="{C221D296-E7AE-415A-B659-3EAC3E992F97}"/>
               </a:ext>
             </a:extLst>
           </p:cNvPr>
@@ -1885,7 +1975,7 @@
           <p:cNvPr id="6" name="Slide Number Placeholder 5">
             <a:extLst xmlns:a="http://schemas.openxmlformats.org/drawingml/2006/main">
               <a:ext uri="{FF2B5EF4-FFF2-40B4-BE49-F238E27FC236}">
-                <a16:creationId xmlns:a16="http://schemas.microsoft.com/office/drawing/2014/main" id="{E1C5AEE1-A914-431A-BFF0-76AB9DF103DA}"/>
+                <a16:creationId xmlns:a16="http://schemas.microsoft.com/office/drawing/2014/main" id="{D2EB2A8A-38DE-4FBA-99DF-89E3F06F8CA3}"/>
               </a:ext>
             </a:extLst>
           </p:cNvPr>
@@ -1929,7 +2019,7 @@
           <p:cNvPr id="2" name="Vertical Title 1">
             <a:extLst xmlns:a="http://schemas.openxmlformats.org/drawingml/2006/main">
               <a:ext uri="{FF2B5EF4-FFF2-40B4-BE49-F238E27FC236}">
-                <a16:creationId xmlns:a16="http://schemas.microsoft.com/office/drawing/2014/main" id="{FAB63F23-4FF4-4C8E-9BFE-879BC3067897}"/>
+                <a16:creationId xmlns:a16="http://schemas.microsoft.com/office/drawing/2014/main" id="{2307EEE4-5EF8-4B9E-974C-78EDF037CB2B}"/>
               </a:ext>
             </a:extLst>
           </p:cNvPr>
@@ -1961,7 +2051,7 @@
           <p:cNvPr id="3" name="Vertical Text Placeholder 2">
             <a:extLst xmlns:a="http://schemas.openxmlformats.org/drawingml/2006/main">
               <a:ext uri="{FF2B5EF4-FFF2-40B4-BE49-F238E27FC236}">
-                <a16:creationId xmlns:a16="http://schemas.microsoft.com/office/drawing/2014/main" id="{EF2F34B2-C2F0-447E-8F8C-0E4873924160}"/>
+                <a16:creationId xmlns:a16="http://schemas.microsoft.com/office/drawing/2014/main" id="{90CB1760-CBD5-4940-8478-DC000E5DFBE6}"/>
               </a:ext>
             </a:extLst>
           </p:cNvPr>
@@ -2028,7 +2118,7 @@
           <p:cNvPr id="4" name="Date Placeholder 3">
             <a:extLst xmlns:a="http://schemas.openxmlformats.org/drawingml/2006/main">
               <a:ext uri="{FF2B5EF4-FFF2-40B4-BE49-F238E27FC236}">
-                <a16:creationId xmlns:a16="http://schemas.microsoft.com/office/drawing/2014/main" id="{2CF4CD82-5409-4CA0-B606-9DD40B73F6A5}"/>
+                <a16:creationId xmlns:a16="http://schemas.microsoft.com/office/drawing/2014/main" id="{820B6B7C-36E9-41E8-8332-D9D02C64B3C9}"/>
               </a:ext>
             </a:extLst>
           </p:cNvPr>
@@ -2055,7 +2145,7 @@
           <p:cNvPr id="5" name="Footer Placeholder 4">
             <a:extLst xmlns:a="http://schemas.openxmlformats.org/drawingml/2006/main">
               <a:ext uri="{FF2B5EF4-FFF2-40B4-BE49-F238E27FC236}">
-                <a16:creationId xmlns:a16="http://schemas.microsoft.com/office/drawing/2014/main" id="{5B52F546-7D5F-431E-989D-11D4502D5FB9}"/>
+                <a16:creationId xmlns:a16="http://schemas.microsoft.com/office/drawing/2014/main" id="{7F4B386D-155D-4060-92FB-9E7E7B594D78}"/>
               </a:ext>
             </a:extLst>
           </p:cNvPr>
@@ -2078,7 +2168,7 @@
           <p:cNvPr id="6" name="Slide Number Placeholder 5">
             <a:extLst xmlns:a="http://schemas.openxmlformats.org/drawingml/2006/main">
               <a:ext uri="{FF2B5EF4-FFF2-40B4-BE49-F238E27FC236}">
-                <a16:creationId xmlns:a16="http://schemas.microsoft.com/office/drawing/2014/main" id="{956FE6EE-497F-438B-9B52-186CEB86EB91}"/>
+                <a16:creationId xmlns:a16="http://schemas.microsoft.com/office/drawing/2014/main" id="{AAC61983-C810-4BBF-B3A9-ACCF82D99BFE}"/>
               </a:ext>
             </a:extLst>
           </p:cNvPr>
@@ -2122,7 +2212,7 @@
           <p:cNvPr id="2" name="Title 1">
             <a:extLst xmlns:a="http://schemas.openxmlformats.org/drawingml/2006/main">
               <a:ext uri="{FF2B5EF4-FFF2-40B4-BE49-F238E27FC236}">
-                <a16:creationId xmlns:a16="http://schemas.microsoft.com/office/drawing/2014/main" id="{B8E8AFCA-1BF9-4394-9E66-D37204C8D3E0}"/>
+                <a16:creationId xmlns:a16="http://schemas.microsoft.com/office/drawing/2014/main" id="{A382905E-04CA-448B-9058-64D6FD213750}"/>
               </a:ext>
             </a:extLst>
           </p:cNvPr>
@@ -2149,7 +2239,7 @@
           <p:cNvPr id="3" name="Content Placeholder 2">
             <a:extLst xmlns:a="http://schemas.openxmlformats.org/drawingml/2006/main">
               <a:ext uri="{FF2B5EF4-FFF2-40B4-BE49-F238E27FC236}">
-                <a16:creationId xmlns:a16="http://schemas.microsoft.com/office/drawing/2014/main" id="{9D4292DF-FFEC-4C07-9B0B-89FA840E5D2F}"/>
+                <a16:creationId xmlns:a16="http://schemas.microsoft.com/office/drawing/2014/main" id="{96293339-322D-463F-B5E2-CD4A5829F105}"/>
               </a:ext>
             </a:extLst>
           </p:cNvPr>
@@ -2211,7 +2301,7 @@
           <p:cNvPr id="4" name="Date Placeholder 3">
             <a:extLst xmlns:a="http://schemas.openxmlformats.org/drawingml/2006/main">
               <a:ext uri="{FF2B5EF4-FFF2-40B4-BE49-F238E27FC236}">
-                <a16:creationId xmlns:a16="http://schemas.microsoft.com/office/drawing/2014/main" id="{C0ECAD73-C9EE-4E40-9B8B-9508EA09A32F}"/>
+                <a16:creationId xmlns:a16="http://schemas.microsoft.com/office/drawing/2014/main" id="{07AAE306-78D6-4CDF-B4FD-5DB9FC2205F1}"/>
               </a:ext>
             </a:extLst>
           </p:cNvPr>
@@ -2238,7 +2328,7 @@
           <p:cNvPr id="5" name="Footer Placeholder 4">
             <a:extLst xmlns:a="http://schemas.openxmlformats.org/drawingml/2006/main">
               <a:ext uri="{FF2B5EF4-FFF2-40B4-BE49-F238E27FC236}">
-                <a16:creationId xmlns:a16="http://schemas.microsoft.com/office/drawing/2014/main" id="{1FFF9B44-B9C4-48A3-A960-7BABCB8674BD}"/>
+                <a16:creationId xmlns:a16="http://schemas.microsoft.com/office/drawing/2014/main" id="{59C0609E-BD49-4B59-ADC6-40298DEABB76}"/>
               </a:ext>
             </a:extLst>
           </p:cNvPr>
@@ -2261,7 +2351,7 @@
           <p:cNvPr id="6" name="Slide Number Placeholder 5">
             <a:extLst xmlns:a="http://schemas.openxmlformats.org/drawingml/2006/main">
               <a:ext uri="{FF2B5EF4-FFF2-40B4-BE49-F238E27FC236}">
-                <a16:creationId xmlns:a16="http://schemas.microsoft.com/office/drawing/2014/main" id="{CC3E7D39-D721-461C-9806-A5E829BFDE56}"/>
+                <a16:creationId xmlns:a16="http://schemas.microsoft.com/office/drawing/2014/main" id="{5A1C2C6F-3A52-4CDA-A26A-1A4B34F42802}"/>
               </a:ext>
             </a:extLst>
           </p:cNvPr>
@@ -2305,7 +2395,7 @@
           <p:cNvPr id="2" name="Title 1">
             <a:extLst xmlns:a="http://schemas.openxmlformats.org/drawingml/2006/main">
               <a:ext uri="{FF2B5EF4-FFF2-40B4-BE49-F238E27FC236}">
-                <a16:creationId xmlns:a16="http://schemas.microsoft.com/office/drawing/2014/main" id="{7985C2E7-7672-41E2-96C5-5A0AD56AC44A}"/>
+                <a16:creationId xmlns:a16="http://schemas.microsoft.com/office/drawing/2014/main" id="{63E319C8-B965-4FC0-880E-6CB5B31FFB2B}"/>
               </a:ext>
             </a:extLst>
           </p:cNvPr>
@@ -2342,7 +2432,7 @@
           <p:cNvPr id="3" name="Text Placeholder 2">
             <a:extLst xmlns:a="http://schemas.openxmlformats.org/drawingml/2006/main">
               <a:ext uri="{FF2B5EF4-FFF2-40B4-BE49-F238E27FC236}">
-                <a16:creationId xmlns:a16="http://schemas.microsoft.com/office/drawing/2014/main" id="{D3387AB2-B732-4CA2-9CC1-76709800F545}"/>
+                <a16:creationId xmlns:a16="http://schemas.microsoft.com/office/drawing/2014/main" id="{190EECC1-15AA-489E-A5E2-4AC2C48F1E67}"/>
               </a:ext>
             </a:extLst>
           </p:cNvPr>
@@ -2468,7 +2558,7 @@
           <p:cNvPr id="4" name="Date Placeholder 3">
             <a:extLst xmlns:a="http://schemas.openxmlformats.org/drawingml/2006/main">
               <a:ext uri="{FF2B5EF4-FFF2-40B4-BE49-F238E27FC236}">
-                <a16:creationId xmlns:a16="http://schemas.microsoft.com/office/drawing/2014/main" id="{E33E1E20-FBFE-457E-ABE9-F50B03CCD064}"/>
+                <a16:creationId xmlns:a16="http://schemas.microsoft.com/office/drawing/2014/main" id="{0F448C5F-333D-434E-8AAD-9C529965CC97}"/>
               </a:ext>
             </a:extLst>
           </p:cNvPr>
@@ -2495,7 +2585,7 @@
           <p:cNvPr id="5" name="Footer Placeholder 4">
             <a:extLst xmlns:a="http://schemas.openxmlformats.org/drawingml/2006/main">
               <a:ext uri="{FF2B5EF4-FFF2-40B4-BE49-F238E27FC236}">
-                <a16:creationId xmlns:a16="http://schemas.microsoft.com/office/drawing/2014/main" id="{8F1BBA18-773E-4D51-BDE9-C425A1E4ADCA}"/>
+                <a16:creationId xmlns:a16="http://schemas.microsoft.com/office/drawing/2014/main" id="{D344736A-A7DA-49E8-89E5-26CFDC51D677}"/>
               </a:ext>
             </a:extLst>
           </p:cNvPr>
@@ -2518,7 +2608,7 @@
           <p:cNvPr id="6" name="Slide Number Placeholder 5">
             <a:extLst xmlns:a="http://schemas.openxmlformats.org/drawingml/2006/main">
               <a:ext uri="{FF2B5EF4-FFF2-40B4-BE49-F238E27FC236}">
-                <a16:creationId xmlns:a16="http://schemas.microsoft.com/office/drawing/2014/main" id="{8543150B-32E0-4BA8-9D36-2FAD698420B2}"/>
+                <a16:creationId xmlns:a16="http://schemas.microsoft.com/office/drawing/2014/main" id="{2E61DC2C-1A06-4E10-9651-6031F3054E88}"/>
               </a:ext>
             </a:extLst>
           </p:cNvPr>
@@ -2562,7 +2652,7 @@
           <p:cNvPr id="2" name="Title 1">
             <a:extLst xmlns:a="http://schemas.openxmlformats.org/drawingml/2006/main">
               <a:ext uri="{FF2B5EF4-FFF2-40B4-BE49-F238E27FC236}">
-                <a16:creationId xmlns:a16="http://schemas.microsoft.com/office/drawing/2014/main" id="{39946640-75E7-4AB1-9653-BB25509F8B66}"/>
+                <a16:creationId xmlns:a16="http://schemas.microsoft.com/office/drawing/2014/main" id="{10D1FE31-5CC2-408C-9FA0-EE11BB14A8AF}"/>
               </a:ext>
             </a:extLst>
           </p:cNvPr>
@@ -2589,7 +2679,7 @@
           <p:cNvPr id="3" name="Content Placeholder 2">
             <a:extLst xmlns:a="http://schemas.openxmlformats.org/drawingml/2006/main">
               <a:ext uri="{FF2B5EF4-FFF2-40B4-BE49-F238E27FC236}">
-                <a16:creationId xmlns:a16="http://schemas.microsoft.com/office/drawing/2014/main" id="{1641E412-2C79-4B64-A8A0-D6A273F3FDA7}"/>
+                <a16:creationId xmlns:a16="http://schemas.microsoft.com/office/drawing/2014/main" id="{4EC16D67-19A1-4A22-9453-9F8F8D3ECF91}"/>
               </a:ext>
             </a:extLst>
           </p:cNvPr>
@@ -2693,7 +2783,7 @@
           <p:cNvPr id="4" name="Content Placeholder 3">
             <a:extLst xmlns:a="http://schemas.openxmlformats.org/drawingml/2006/main">
               <a:ext uri="{FF2B5EF4-FFF2-40B4-BE49-F238E27FC236}">
-                <a16:creationId xmlns:a16="http://schemas.microsoft.com/office/drawing/2014/main" id="{789DE94F-7596-470E-A1A0-0AA861608043}"/>
+                <a16:creationId xmlns:a16="http://schemas.microsoft.com/office/drawing/2014/main" id="{314C6F2E-2D57-4A14-A2AF-5F7B9B4F08FE}"/>
               </a:ext>
             </a:extLst>
           </p:cNvPr>
@@ -2797,7 +2887,7 @@
           <p:cNvPr id="5" name="Date Placeholder 4">
             <a:extLst xmlns:a="http://schemas.openxmlformats.org/drawingml/2006/main">
               <a:ext uri="{FF2B5EF4-FFF2-40B4-BE49-F238E27FC236}">
-                <a16:creationId xmlns:a16="http://schemas.microsoft.com/office/drawing/2014/main" id="{BF357F2F-019C-44DB-ABA1-828E0CD1E7E4}"/>
+                <a16:creationId xmlns:a16="http://schemas.microsoft.com/office/drawing/2014/main" id="{A1DE465D-5B03-4099-859A-8145F5825AAA}"/>
               </a:ext>
             </a:extLst>
           </p:cNvPr>
@@ -2824,7 +2914,7 @@
           <p:cNvPr id="6" name="Footer Placeholder 5">
             <a:extLst xmlns:a="http://schemas.openxmlformats.org/drawingml/2006/main">
               <a:ext uri="{FF2B5EF4-FFF2-40B4-BE49-F238E27FC236}">
-                <a16:creationId xmlns:a16="http://schemas.microsoft.com/office/drawing/2014/main" id="{CF06D586-BA7C-471B-B70D-9542E065C9B3}"/>
+                <a16:creationId xmlns:a16="http://schemas.microsoft.com/office/drawing/2014/main" id="{A3FD7384-C97B-4D4D-B9A2-A7B40C24A7AC}"/>
               </a:ext>
             </a:extLst>
           </p:cNvPr>
@@ -2847,7 +2937,7 @@
           <p:cNvPr id="7" name="Slide Number Placeholder 6">
             <a:extLst xmlns:a="http://schemas.openxmlformats.org/drawingml/2006/main">
               <a:ext uri="{FF2B5EF4-FFF2-40B4-BE49-F238E27FC236}">
-                <a16:creationId xmlns:a16="http://schemas.microsoft.com/office/drawing/2014/main" id="{A0F511AD-CAFD-4EB5-86AE-1CD28C99DBF8}"/>
+                <a16:creationId xmlns:a16="http://schemas.microsoft.com/office/drawing/2014/main" id="{20533EC3-4DB1-4828-9E76-8B0E6CCDC3D2}"/>
               </a:ext>
             </a:extLst>
           </p:cNvPr>
@@ -2891,7 +2981,7 @@
           <p:cNvPr id="2" name="Title 1">
             <a:extLst xmlns:a="http://schemas.openxmlformats.org/drawingml/2006/main">
               <a:ext uri="{FF2B5EF4-FFF2-40B4-BE49-F238E27FC236}">
-                <a16:creationId xmlns:a16="http://schemas.microsoft.com/office/drawing/2014/main" id="{C8603F3B-CCA2-4856-AA22-E8946352E071}"/>
+                <a16:creationId xmlns:a16="http://schemas.microsoft.com/office/drawing/2014/main" id="{6AFE9685-B4F1-49F4-91C5-963F978DF73D}"/>
               </a:ext>
             </a:extLst>
           </p:cNvPr>
@@ -2923,7 +3013,7 @@
           <p:cNvPr id="3" name="Text Placeholder 2">
             <a:extLst xmlns:a="http://schemas.openxmlformats.org/drawingml/2006/main">
               <a:ext uri="{FF2B5EF4-FFF2-40B4-BE49-F238E27FC236}">
-                <a16:creationId xmlns:a16="http://schemas.microsoft.com/office/drawing/2014/main" id="{F18C858B-D112-4829-82D8-678EB68B9F69}"/>
+                <a16:creationId xmlns:a16="http://schemas.microsoft.com/office/drawing/2014/main" id="{43761092-4138-4C4A-8729-9C40041B4340}"/>
               </a:ext>
             </a:extLst>
           </p:cNvPr>
@@ -2995,7 +3085,7 @@
           <p:cNvPr id="4" name="Content Placeholder 3">
             <a:extLst xmlns:a="http://schemas.openxmlformats.org/drawingml/2006/main">
               <a:ext uri="{FF2B5EF4-FFF2-40B4-BE49-F238E27FC236}">
-                <a16:creationId xmlns:a16="http://schemas.microsoft.com/office/drawing/2014/main" id="{4B916BCD-CC44-4F04-8774-2FEB41586F75}"/>
+                <a16:creationId xmlns:a16="http://schemas.microsoft.com/office/drawing/2014/main" id="{A5057AA5-C864-4C54-AB90-3E6A07BD526D}"/>
               </a:ext>
             </a:extLst>
           </p:cNvPr>
@@ -3099,7 +3189,7 @@
           <p:cNvPr id="5" name="Text Placeholder 4">
             <a:extLst xmlns:a="http://schemas.openxmlformats.org/drawingml/2006/main">
               <a:ext uri="{FF2B5EF4-FFF2-40B4-BE49-F238E27FC236}">
-                <a16:creationId xmlns:a16="http://schemas.microsoft.com/office/drawing/2014/main" id="{12386FEA-CD4E-4B75-ABFF-60267D529012}"/>
+                <a16:creationId xmlns:a16="http://schemas.microsoft.com/office/drawing/2014/main" id="{5D89A88F-6CF3-4425-B366-A6911B9ACCD5}"/>
               </a:ext>
             </a:extLst>
           </p:cNvPr>
@@ -3171,7 +3261,7 @@
           <p:cNvPr id="6" name="Content Placeholder 5">
             <a:extLst xmlns:a="http://schemas.openxmlformats.org/drawingml/2006/main">
               <a:ext uri="{FF2B5EF4-FFF2-40B4-BE49-F238E27FC236}">
-                <a16:creationId xmlns:a16="http://schemas.microsoft.com/office/drawing/2014/main" id="{17373570-B50D-4D5F-AA21-BF42F70BE9C8}"/>
+                <a16:creationId xmlns:a16="http://schemas.microsoft.com/office/drawing/2014/main" id="{65B17DE4-BBD1-4CE8-9B70-24ED16E63086}"/>
               </a:ext>
             </a:extLst>
           </p:cNvPr>
@@ -3275,7 +3365,7 @@
           <p:cNvPr id="7" name="Date Placeholder 6">
             <a:extLst xmlns:a="http://schemas.openxmlformats.org/drawingml/2006/main">
               <a:ext uri="{FF2B5EF4-FFF2-40B4-BE49-F238E27FC236}">
-                <a16:creationId xmlns:a16="http://schemas.microsoft.com/office/drawing/2014/main" id="{42DCBD7C-F854-435C-B101-50F84D309E3E}"/>
+                <a16:creationId xmlns:a16="http://schemas.microsoft.com/office/drawing/2014/main" id="{70139570-83F5-475B-9BA5-C82C9E8028ED}"/>
               </a:ext>
             </a:extLst>
           </p:cNvPr>
@@ -3302,7 +3392,7 @@
           <p:cNvPr id="8" name="Footer Placeholder 7">
             <a:extLst xmlns:a="http://schemas.openxmlformats.org/drawingml/2006/main">
               <a:ext uri="{FF2B5EF4-FFF2-40B4-BE49-F238E27FC236}">
-                <a16:creationId xmlns:a16="http://schemas.microsoft.com/office/drawing/2014/main" id="{09EE59F2-3628-4A88-AA51-0BB098573D8B}"/>
+                <a16:creationId xmlns:a16="http://schemas.microsoft.com/office/drawing/2014/main" id="{6D11AD18-4E95-4442-BF5F-F0D7A4CDD892}"/>
               </a:ext>
             </a:extLst>
           </p:cNvPr>
@@ -3325,7 +3415,7 @@
           <p:cNvPr id="9" name="Slide Number Placeholder 8">
             <a:extLst xmlns:a="http://schemas.openxmlformats.org/drawingml/2006/main">
               <a:ext uri="{FF2B5EF4-FFF2-40B4-BE49-F238E27FC236}">
-                <a16:creationId xmlns:a16="http://schemas.microsoft.com/office/drawing/2014/main" id="{4EF09F97-653D-48F3-8D1D-1272CF9F8A57}"/>
+                <a16:creationId xmlns:a16="http://schemas.microsoft.com/office/drawing/2014/main" id="{8867993F-9B4A-4BD7-A636-4740498EC884}"/>
               </a:ext>
             </a:extLst>
           </p:cNvPr>
@@ -3369,7 +3459,7 @@
           <p:cNvPr id="2" name="Title 1">
             <a:extLst xmlns:a="http://schemas.openxmlformats.org/drawingml/2006/main">
               <a:ext uri="{FF2B5EF4-FFF2-40B4-BE49-F238E27FC236}">
-                <a16:creationId xmlns:a16="http://schemas.microsoft.com/office/drawing/2014/main" id="{CD58526E-DFF6-476B-9F56-BD777D8335E3}"/>
+                <a16:creationId xmlns:a16="http://schemas.microsoft.com/office/drawing/2014/main" id="{268C582E-FD3D-4EC8-A91A-CD9330D43AB7}"/>
               </a:ext>
             </a:extLst>
           </p:cNvPr>
@@ -3396,7 +3486,7 @@
           <p:cNvPr id="3" name="Date Placeholder 2">
             <a:extLst xmlns:a="http://schemas.openxmlformats.org/drawingml/2006/main">
               <a:ext uri="{FF2B5EF4-FFF2-40B4-BE49-F238E27FC236}">
-                <a16:creationId xmlns:a16="http://schemas.microsoft.com/office/drawing/2014/main" id="{D474A441-E147-485D-A5B6-E4AB4DE53714}"/>
+                <a16:creationId xmlns:a16="http://schemas.microsoft.com/office/drawing/2014/main" id="{CFA32572-8CC2-4546-8398-60DE982B904A}"/>
               </a:ext>
             </a:extLst>
           </p:cNvPr>
@@ -3423,7 +3513,7 @@
           <p:cNvPr id="4" name="Footer Placeholder 3">
             <a:extLst xmlns:a="http://schemas.openxmlformats.org/drawingml/2006/main">
               <a:ext uri="{FF2B5EF4-FFF2-40B4-BE49-F238E27FC236}">
-                <a16:creationId xmlns:a16="http://schemas.microsoft.com/office/drawing/2014/main" id="{3E2414A4-F1AA-4165-A70D-6AEAD5CD8226}"/>
+                <a16:creationId xmlns:a16="http://schemas.microsoft.com/office/drawing/2014/main" id="{27BAE3E7-FBFC-41E3-9E25-B57275D4AC7D}"/>
               </a:ext>
             </a:extLst>
           </p:cNvPr>
@@ -3446,7 +3536,7 @@
           <p:cNvPr id="5" name="Slide Number Placeholder 4">
             <a:extLst xmlns:a="http://schemas.openxmlformats.org/drawingml/2006/main">
               <a:ext uri="{FF2B5EF4-FFF2-40B4-BE49-F238E27FC236}">
-                <a16:creationId xmlns:a16="http://schemas.microsoft.com/office/drawing/2014/main" id="{EB1A3269-9EF7-424F-9CB8-075DB99C507B}"/>
+                <a16:creationId xmlns:a16="http://schemas.microsoft.com/office/drawing/2014/main" id="{584E9CE9-AC74-426A-8DBC-36475B775F14}"/>
               </a:ext>
             </a:extLst>
           </p:cNvPr>
@@ -3490,7 +3580,7 @@
           <p:cNvPr id="2" name="Date Placeholder 1">
             <a:extLst xmlns:a="http://schemas.openxmlformats.org/drawingml/2006/main">
               <a:ext uri="{FF2B5EF4-FFF2-40B4-BE49-F238E27FC236}">
-                <a16:creationId xmlns:a16="http://schemas.microsoft.com/office/drawing/2014/main" id="{D4B6AC33-707D-442D-8430-089EFFF41B5B}"/>
+                <a16:creationId xmlns:a16="http://schemas.microsoft.com/office/drawing/2014/main" id="{08D682A9-7760-47EC-A412-5EC842B40675}"/>
               </a:ext>
             </a:extLst>
           </p:cNvPr>
@@ -3517,7 +3607,7 @@
           <p:cNvPr id="3" name="Footer Placeholder 2">
             <a:extLst xmlns:a="http://schemas.openxmlformats.org/drawingml/2006/main">
               <a:ext uri="{FF2B5EF4-FFF2-40B4-BE49-F238E27FC236}">
-                <a16:creationId xmlns:a16="http://schemas.microsoft.com/office/drawing/2014/main" id="{28E9AE35-7A88-4D34-A469-9CC5274FCA1C}"/>
+                <a16:creationId xmlns:a16="http://schemas.microsoft.com/office/drawing/2014/main" id="{DCC9125C-BF9F-4BD4-9878-32B2D68A621F}"/>
               </a:ext>
             </a:extLst>
           </p:cNvPr>
@@ -3540,7 +3630,7 @@
           <p:cNvPr id="4" name="Slide Number Placeholder 3">
             <a:extLst xmlns:a="http://schemas.openxmlformats.org/drawingml/2006/main">
               <a:ext uri="{FF2B5EF4-FFF2-40B4-BE49-F238E27FC236}">
-                <a16:creationId xmlns:a16="http://schemas.microsoft.com/office/drawing/2014/main" id="{97222BF3-B041-473B-B4C4-167AB03C6AE3}"/>
+                <a16:creationId xmlns:a16="http://schemas.microsoft.com/office/drawing/2014/main" id="{DDD3C25C-A112-451F-9225-8A162ACAA737}"/>
               </a:ext>
             </a:extLst>
           </p:cNvPr>
@@ -3584,7 +3674,7 @@
           <p:cNvPr id="2" name="Title 1">
             <a:extLst xmlns:a="http://schemas.openxmlformats.org/drawingml/2006/main">
               <a:ext uri="{FF2B5EF4-FFF2-40B4-BE49-F238E27FC236}">
-                <a16:creationId xmlns:a16="http://schemas.microsoft.com/office/drawing/2014/main" id="{61DFB6D8-F666-4DC5-82CB-CF0AEA858100}"/>
+                <a16:creationId xmlns:a16="http://schemas.microsoft.com/office/drawing/2014/main" id="{31AA27E4-ACBE-4B2C-9966-DDB6F43E3DC8}"/>
               </a:ext>
             </a:extLst>
           </p:cNvPr>
@@ -3621,7 +3711,7 @@
           <p:cNvPr id="3" name="Content Placeholder 2">
             <a:extLst xmlns:a="http://schemas.openxmlformats.org/drawingml/2006/main">
               <a:ext uri="{FF2B5EF4-FFF2-40B4-BE49-F238E27FC236}">
-                <a16:creationId xmlns:a16="http://schemas.microsoft.com/office/drawing/2014/main" id="{2C0689DF-61E5-4D60-B977-24B4681CAA3D}"/>
+                <a16:creationId xmlns:a16="http://schemas.microsoft.com/office/drawing/2014/main" id="{8B87491C-D1F7-4B7E-873A-A5C20F170D4B}"/>
               </a:ext>
             </a:extLst>
           </p:cNvPr>
@@ -3725,7 +3815,7 @@
           <p:cNvPr id="4" name="Text Placeholder 3">
             <a:extLst xmlns:a="http://schemas.openxmlformats.org/drawingml/2006/main">
               <a:ext uri="{FF2B5EF4-FFF2-40B4-BE49-F238E27FC236}">
-                <a16:creationId xmlns:a16="http://schemas.microsoft.com/office/drawing/2014/main" id="{C5B154BC-7079-4ED4-8B52-2F59D71E965A}"/>
+                <a16:creationId xmlns:a16="http://schemas.microsoft.com/office/drawing/2014/main" id="{62B426AA-FDA7-4ED0-9BC2-20C11F6828EA}"/>
               </a:ext>
             </a:extLst>
           </p:cNvPr>
@@ -3797,7 +3887,7 @@
           <p:cNvPr id="5" name="Date Placeholder 4">
             <a:extLst xmlns:a="http://schemas.openxmlformats.org/drawingml/2006/main">
               <a:ext uri="{FF2B5EF4-FFF2-40B4-BE49-F238E27FC236}">
-                <a16:creationId xmlns:a16="http://schemas.microsoft.com/office/drawing/2014/main" id="{284F4DBF-CC79-4F2E-90CB-2C5A33A2C19F}"/>
+                <a16:creationId xmlns:a16="http://schemas.microsoft.com/office/drawing/2014/main" id="{A241A3A7-D35A-4CEB-9BAA-8CCC6EC7DB8C}"/>
               </a:ext>
             </a:extLst>
           </p:cNvPr>
@@ -3824,7 +3914,7 @@
           <p:cNvPr id="6" name="Footer Placeholder 5">
             <a:extLst xmlns:a="http://schemas.openxmlformats.org/drawingml/2006/main">
               <a:ext uri="{FF2B5EF4-FFF2-40B4-BE49-F238E27FC236}">
-                <a16:creationId xmlns:a16="http://schemas.microsoft.com/office/drawing/2014/main" id="{F5D801F0-B723-420E-B762-3B3647B2BDC7}"/>
+                <a16:creationId xmlns:a16="http://schemas.microsoft.com/office/drawing/2014/main" id="{A1B4EDDF-1299-419C-A2A2-D65AD48044F4}"/>
               </a:ext>
             </a:extLst>
           </p:cNvPr>
@@ -3847,7 +3937,7 @@
           <p:cNvPr id="7" name="Slide Number Placeholder 6">
             <a:extLst xmlns:a="http://schemas.openxmlformats.org/drawingml/2006/main">
               <a:ext uri="{FF2B5EF4-FFF2-40B4-BE49-F238E27FC236}">
-                <a16:creationId xmlns:a16="http://schemas.microsoft.com/office/drawing/2014/main" id="{DF99CBE9-4B88-4706-8B2E-01B67D33F014}"/>
+                <a16:creationId xmlns:a16="http://schemas.microsoft.com/office/drawing/2014/main" id="{F68E756A-8787-42F8-BB9B-EC71E0050352}"/>
               </a:ext>
             </a:extLst>
           </p:cNvPr>
@@ -3891,7 +3981,7 @@
           <p:cNvPr id="2" name="Title 1">
             <a:extLst xmlns:a="http://schemas.openxmlformats.org/drawingml/2006/main">
               <a:ext uri="{FF2B5EF4-FFF2-40B4-BE49-F238E27FC236}">
-                <a16:creationId xmlns:a16="http://schemas.microsoft.com/office/drawing/2014/main" id="{618FED75-902F-405F-8E01-8F01D77563DC}"/>
+                <a16:creationId xmlns:a16="http://schemas.microsoft.com/office/drawing/2014/main" id="{585D8984-FFB8-46D3-A8D3-376488FB7B20}"/>
               </a:ext>
             </a:extLst>
           </p:cNvPr>
@@ -3928,7 +4018,7 @@
           <p:cNvPr id="3" name="Picture Placeholder 2">
             <a:extLst xmlns:a="http://schemas.openxmlformats.org/drawingml/2006/main">
               <a:ext uri="{FF2B5EF4-FFF2-40B4-BE49-F238E27FC236}">
-                <a16:creationId xmlns:a16="http://schemas.microsoft.com/office/drawing/2014/main" id="{16AB7973-AF4D-46C2-BB0C-6A0A5D0C031E}"/>
+                <a16:creationId xmlns:a16="http://schemas.microsoft.com/office/drawing/2014/main" id="{FA85390D-EB02-4832-96C3-F92ED694097C}"/>
               </a:ext>
             </a:extLst>
           </p:cNvPr>
@@ -3993,7 +4083,7 @@
           <p:cNvPr id="4" name="Text Placeholder 3">
             <a:extLst xmlns:a="http://schemas.openxmlformats.org/drawingml/2006/main">
               <a:ext uri="{FF2B5EF4-FFF2-40B4-BE49-F238E27FC236}">
-                <a16:creationId xmlns:a16="http://schemas.microsoft.com/office/drawing/2014/main" id="{9A5B26CD-2B8C-4DDC-8EC5-8A3E7DAC06D8}"/>
+                <a16:creationId xmlns:a16="http://schemas.microsoft.com/office/drawing/2014/main" id="{E34A0E62-F881-4629-A4BD-D92FC12BA550}"/>
               </a:ext>
             </a:extLst>
           </p:cNvPr>
@@ -4065,7 +4155,7 @@
           <p:cNvPr id="5" name="Date Placeholder 4">
             <a:extLst xmlns:a="http://schemas.openxmlformats.org/drawingml/2006/main">
               <a:ext uri="{FF2B5EF4-FFF2-40B4-BE49-F238E27FC236}">
-                <a16:creationId xmlns:a16="http://schemas.microsoft.com/office/drawing/2014/main" id="{490E1ABF-7A0D-4141-B48F-95B487F2ED89}"/>
+                <a16:creationId xmlns:a16="http://schemas.microsoft.com/office/drawing/2014/main" id="{1C5809C3-A811-4BFF-849D-35E6590F32B1}"/>
               </a:ext>
             </a:extLst>
           </p:cNvPr>
@@ -4092,7 +4182,7 @@
           <p:cNvPr id="6" name="Footer Placeholder 5">
             <a:extLst xmlns:a="http://schemas.openxmlformats.org/drawingml/2006/main">
               <a:ext uri="{FF2B5EF4-FFF2-40B4-BE49-F238E27FC236}">
-                <a16:creationId xmlns:a16="http://schemas.microsoft.com/office/drawing/2014/main" id="{4A96456A-9C53-4C5F-A96E-B4877023A8AE}"/>
+                <a16:creationId xmlns:a16="http://schemas.microsoft.com/office/drawing/2014/main" id="{06D54DB0-90AC-43DA-B685-32E7C6C1528A}"/>
               </a:ext>
             </a:extLst>
           </p:cNvPr>
@@ -4115,7 +4205,7 @@
           <p:cNvPr id="7" name="Slide Number Placeholder 6">
             <a:extLst xmlns:a="http://schemas.openxmlformats.org/drawingml/2006/main">
               <a:ext uri="{FF2B5EF4-FFF2-40B4-BE49-F238E27FC236}">
-                <a16:creationId xmlns:a16="http://schemas.microsoft.com/office/drawing/2014/main" id="{1E22554D-43A5-4809-9D4A-1B0ED83452D6}"/>
+                <a16:creationId xmlns:a16="http://schemas.microsoft.com/office/drawing/2014/main" id="{A131A905-8D34-40D2-A8D7-C01E5F94EC96}"/>
               </a:ext>
             </a:extLst>
           </p:cNvPr>
@@ -4164,7 +4254,7 @@
           <p:cNvPr id="2" name="Title Placeholder 1">
             <a:extLst xmlns:a="http://schemas.openxmlformats.org/drawingml/2006/main">
               <a:ext uri="{FF2B5EF4-FFF2-40B4-BE49-F238E27FC236}">
-                <a16:creationId xmlns:a16="http://schemas.microsoft.com/office/drawing/2014/main" id="{4CE2877E-F87F-4B03-8973-093C467BFA19}"/>
+                <a16:creationId xmlns:a16="http://schemas.microsoft.com/office/drawing/2014/main" id="{EF0496B9-640E-4B51-A935-FC4672BAC549}"/>
               </a:ext>
             </a:extLst>
           </p:cNvPr>
@@ -4201,7 +4291,7 @@
           <p:cNvPr id="3" name="Text Placeholder 2">
             <a:extLst xmlns:a="http://schemas.openxmlformats.org/drawingml/2006/main">
               <a:ext uri="{FF2B5EF4-FFF2-40B4-BE49-F238E27FC236}">
-                <a16:creationId xmlns:a16="http://schemas.microsoft.com/office/drawing/2014/main" id="{D71697B0-E69F-499E-967C-1A20FF8E3C06}"/>
+                <a16:creationId xmlns:a16="http://schemas.microsoft.com/office/drawing/2014/main" id="{1AD61093-F349-4C77-A922-2736A93D49E0}"/>
               </a:ext>
             </a:extLst>
           </p:cNvPr>
@@ -4273,7 +4363,7 @@
           <p:cNvPr id="4" name="Date Placeholder 3">
             <a:extLst xmlns:a="http://schemas.openxmlformats.org/drawingml/2006/main">
               <a:ext uri="{FF2B5EF4-FFF2-40B4-BE49-F238E27FC236}">
-                <a16:creationId xmlns:a16="http://schemas.microsoft.com/office/drawing/2014/main" id="{7C2A9F46-F81F-4117-AEC5-9F3CC6353338}"/>
+                <a16:creationId xmlns:a16="http://schemas.microsoft.com/office/drawing/2014/main" id="{0344E7AA-4BD1-424D-BC95-AA67B1E04972}"/>
               </a:ext>
             </a:extLst>
           </p:cNvPr>
@@ -4319,7 +4409,7 @@
           <p:cNvPr id="5" name="Footer Placeholder 4">
             <a:extLst xmlns:a="http://schemas.openxmlformats.org/drawingml/2006/main">
               <a:ext uri="{FF2B5EF4-FFF2-40B4-BE49-F238E27FC236}">
-                <a16:creationId xmlns:a16="http://schemas.microsoft.com/office/drawing/2014/main" id="{6764F760-4CD8-4788-982E-608389043F84}"/>
+                <a16:creationId xmlns:a16="http://schemas.microsoft.com/office/drawing/2014/main" id="{3032AA7C-ADEC-4E3C-8425-4331ED07F161}"/>
               </a:ext>
             </a:extLst>
           </p:cNvPr>
@@ -4361,7 +4451,7 @@
           <p:cNvPr id="6" name="Slide Number Placeholder 5">
             <a:extLst xmlns:a="http://schemas.openxmlformats.org/drawingml/2006/main">
               <a:ext uri="{FF2B5EF4-FFF2-40B4-BE49-F238E27FC236}">
-                <a16:creationId xmlns:a16="http://schemas.microsoft.com/office/drawing/2014/main" id="{88F3F8FD-75E0-46F5-AF85-2DD25ED65151}"/>
+                <a16:creationId xmlns:a16="http://schemas.microsoft.com/office/drawing/2014/main" id="{7B606C35-E7CB-4F2A-801C-605DDE63C9F4}"/>
               </a:ext>
             </a:extLst>
           </p:cNvPr>
@@ -4406,17 +4496,17 @@
   </p:cSld>
   <p:clrMap bg1="lt1" tx1="dk1" bg2="lt2" tx2="dk2" accent1="accent1" accent2="accent2" accent3="accent3" accent4="accent4" accent5="accent5" accent6="accent6" hlink="hlink" folHlink="folHlink"/>
   <p:sldLayoutIdLst>
-    <p:sldLayoutId xmlns:r="http://schemas.openxmlformats.org/officeDocument/2006/relationships" id="2147483649" r:id="Raf2e10326a0e4a21"/>
-    <p:sldLayoutId xmlns:r="http://schemas.openxmlformats.org/officeDocument/2006/relationships" id="2147483650" r:id="R70654df60dd848a6"/>
-    <p:sldLayoutId xmlns:r="http://schemas.openxmlformats.org/officeDocument/2006/relationships" id="2147483651" r:id="Rad02a8ac141e4f4f"/>
-    <p:sldLayoutId xmlns:r="http://schemas.openxmlformats.org/officeDocument/2006/relationships" id="2147483652" r:id="Rcf3c239252d94932"/>
-    <p:sldLayoutId xmlns:r="http://schemas.openxmlformats.org/officeDocument/2006/relationships" id="2147483653" r:id="R07a43196232c4a48"/>
-    <p:sldLayoutId xmlns:r="http://schemas.openxmlformats.org/officeDocument/2006/relationships" id="2147483654" r:id="R26d0d5f81e144583"/>
-    <p:sldLayoutId xmlns:r="http://schemas.openxmlformats.org/officeDocument/2006/relationships" id="2147483655" r:id="Rd18f5b315f9f466b"/>
-    <p:sldLayoutId xmlns:r="http://schemas.openxmlformats.org/officeDocument/2006/relationships" id="2147483656" r:id="R80573b0bafaf49bc"/>
-    <p:sldLayoutId xmlns:r="http://schemas.openxmlformats.org/officeDocument/2006/relationships" id="2147483657" r:id="R7f24a73c592744e5"/>
-    <p:sldLayoutId xmlns:r="http://schemas.openxmlformats.org/officeDocument/2006/relationships" id="2147483658" r:id="Rb459e1511f254aa2"/>
-    <p:sldLayoutId xmlns:r="http://schemas.openxmlformats.org/officeDocument/2006/relationships" id="2147483659" r:id="R332ba16d61604128"/>
+    <p:sldLayoutId xmlns:r="http://schemas.openxmlformats.org/officeDocument/2006/relationships" id="2147483649" r:id="Rf67ed7c30ddd47de"/>
+    <p:sldLayoutId xmlns:r="http://schemas.openxmlformats.org/officeDocument/2006/relationships" id="2147483650" r:id="R80e1968537a2443e"/>
+    <p:sldLayoutId xmlns:r="http://schemas.openxmlformats.org/officeDocument/2006/relationships" id="2147483651" r:id="R85254fdbf5a041ef"/>
+    <p:sldLayoutId xmlns:r="http://schemas.openxmlformats.org/officeDocument/2006/relationships" id="2147483652" r:id="R2468c22676a642f5"/>
+    <p:sldLayoutId xmlns:r="http://schemas.openxmlformats.org/officeDocument/2006/relationships" id="2147483653" r:id="Rac6d1dc25df24707"/>
+    <p:sldLayoutId xmlns:r="http://schemas.openxmlformats.org/officeDocument/2006/relationships" id="2147483654" r:id="Rb368dde8912b4018"/>
+    <p:sldLayoutId xmlns:r="http://schemas.openxmlformats.org/officeDocument/2006/relationships" id="2147483655" r:id="R4cf7414be2be49b7"/>
+    <p:sldLayoutId xmlns:r="http://schemas.openxmlformats.org/officeDocument/2006/relationships" id="2147483656" r:id="R32e776c7c98041c8"/>
+    <p:sldLayoutId xmlns:r="http://schemas.openxmlformats.org/officeDocument/2006/relationships" id="2147483657" r:id="R7083d0b1296d4716"/>
+    <p:sldLayoutId xmlns:r="http://schemas.openxmlformats.org/officeDocument/2006/relationships" id="2147483658" r:id="Rd246d5e523474260"/>
+    <p:sldLayoutId xmlns:r="http://schemas.openxmlformats.org/officeDocument/2006/relationships" id="2147483659" r:id="R589329991fc44971"/>
   </p:sldLayoutIdLst>
   <p:txStyles>
     <p:titleStyle>
@@ -4969,7 +5059,7 @@
           <p:cNvPr id="2" name="Rectangle 1">
             <a:extLst xmlns:a="http://schemas.openxmlformats.org/drawingml/2006/main">
               <a:ext uri="{FF2B5EF4-FFF2-40B4-BE49-F238E27FC236}">
-                <a16:creationId xmlns:a16="http://schemas.microsoft.com/office/drawing/2014/main" id="{0FEFCB1B-2294-4605-B317-235D89D741D6}"/>
+                <a16:creationId xmlns:a16="http://schemas.microsoft.com/office/drawing/2014/main" id="{1BE3E3BD-05FB-4F39-80DA-35A35BEB9487}"/>
               </a:ext>
             </a:extLst>
           </p:cNvPr>
@@ -5024,7 +5114,7 @@
           <p:cNvPr id="3" name="TextBox 2">
             <a:extLst xmlns:a="http://schemas.openxmlformats.org/drawingml/2006/main">
               <a:ext uri="{FF2B5EF4-FFF2-40B4-BE49-F238E27FC236}">
-                <a16:creationId xmlns:a16="http://schemas.microsoft.com/office/drawing/2014/main" id="{DF37BFE5-B5FD-4256-B48C-73035B68E04D}"/>
+                <a16:creationId xmlns:a16="http://schemas.microsoft.com/office/drawing/2014/main" id="{0DA5FB15-8C47-4148-91A5-3C718304463E}"/>
               </a:ext>
             </a:extLst>
           </p:cNvPr>
@@ -5071,7 +5161,7 @@
           <p:cNvPr id="4" name="TextBox 3">
             <a:extLst xmlns:a="http://schemas.openxmlformats.org/drawingml/2006/main">
               <a:ext uri="{FF2B5EF4-FFF2-40B4-BE49-F238E27FC236}">
-                <a16:creationId xmlns:a16="http://schemas.microsoft.com/office/drawing/2014/main" id="{11DAB578-154B-4C8A-A978-C75C81B8C37D}"/>
+                <a16:creationId xmlns:a16="http://schemas.microsoft.com/office/drawing/2014/main" id="{ED61E61C-7B4E-4ACA-9626-AD33DF512039}"/>
               </a:ext>
             </a:extLst>
           </p:cNvPr>
@@ -5119,7 +5209,7 @@
           <p:cNvPr id="5" name="TextBox 4">
             <a:extLst xmlns:a="http://schemas.openxmlformats.org/drawingml/2006/main">
               <a:ext uri="{FF2B5EF4-FFF2-40B4-BE49-F238E27FC236}">
-                <a16:creationId xmlns:a16="http://schemas.microsoft.com/office/drawing/2014/main" id="{4ACF1865-1044-448D-95CF-B194BD22A15C}"/>
+                <a16:creationId xmlns:a16="http://schemas.microsoft.com/office/drawing/2014/main" id="{00AABEE0-4271-41D6-AB6D-5752202CEAD4}"/>
               </a:ext>
             </a:extLst>
           </p:cNvPr>
@@ -5166,7 +5256,7 @@
           <p:cNvPr id="6" name="Rectangle 5">
             <a:extLst xmlns:a="http://schemas.openxmlformats.org/drawingml/2006/main">
               <a:ext uri="{FF2B5EF4-FFF2-40B4-BE49-F238E27FC236}">
-                <a16:creationId xmlns:a16="http://schemas.microsoft.com/office/drawing/2014/main" id="{77581F1B-51EB-4E22-A3FA-57ED6EC23996}"/>
+                <a16:creationId xmlns:a16="http://schemas.microsoft.com/office/drawing/2014/main" id="{01C6261B-845A-4F34-B039-C4D853188C51}"/>
               </a:ext>
             </a:extLst>
           </p:cNvPr>
@@ -5221,7 +5311,7 @@
           <p:cNvPr id="7" name="TextBox 6">
             <a:extLst xmlns:a="http://schemas.openxmlformats.org/drawingml/2006/main">
               <a:ext uri="{FF2B5EF4-FFF2-40B4-BE49-F238E27FC236}">
-                <a16:creationId xmlns:a16="http://schemas.microsoft.com/office/drawing/2014/main" id="{629F8AFF-A77A-4967-A431-9E809528C0B1}"/>
+                <a16:creationId xmlns:a16="http://schemas.microsoft.com/office/drawing/2014/main" id="{8B280BD4-BCF6-439B-B46A-8C281918E7AC}"/>
               </a:ext>
             </a:extLst>
           </p:cNvPr>
@@ -5268,7 +5358,7 @@
           <p:cNvPr id="8" name="TextBox 7">
             <a:extLst xmlns:a="http://schemas.openxmlformats.org/drawingml/2006/main">
               <a:ext uri="{FF2B5EF4-FFF2-40B4-BE49-F238E27FC236}">
-                <a16:creationId xmlns:a16="http://schemas.microsoft.com/office/drawing/2014/main" id="{60CC191D-595C-4F97-B614-10EDE15BB179}"/>
+                <a16:creationId xmlns:a16="http://schemas.microsoft.com/office/drawing/2014/main" id="{21878655-49AB-4728-8199-F16A913E7A67}"/>
               </a:ext>
             </a:extLst>
           </p:cNvPr>
@@ -5305,7 +5395,7 @@
                 <a:ea typeface="Aptos"/>
                 <a:cs typeface="Aptos"/>
               </a:rPr>
-              <a:t>2026.07.24-22</a:t>
+              <a:t>2026.07.25-24</a:t>
             </a:r>
           </a:p>
         </p:txBody>
@@ -5315,7 +5405,7 @@
           <p:cNvPr id="9" name="TextBox 8">
             <a:extLst xmlns:a="http://schemas.openxmlformats.org/drawingml/2006/main">
               <a:ext uri="{FF2B5EF4-FFF2-40B4-BE49-F238E27FC236}">
-                <a16:creationId xmlns:a16="http://schemas.microsoft.com/office/drawing/2014/main" id="{5F9D6C30-CF69-4355-98FD-A908CA9E8E21}"/>
+                <a16:creationId xmlns:a16="http://schemas.microsoft.com/office/drawing/2014/main" id="{AE9B10F1-788C-4BF7-B7F1-9782898468E6}"/>
               </a:ext>
             </a:extLst>
           </p:cNvPr>
@@ -5363,7 +5453,7 @@
           <p:cNvPr id="10" name="TextBox 9">
             <a:extLst xmlns:a="http://schemas.openxmlformats.org/drawingml/2006/main">
               <a:ext uri="{FF2B5EF4-FFF2-40B4-BE49-F238E27FC236}">
-                <a16:creationId xmlns:a16="http://schemas.microsoft.com/office/drawing/2014/main" id="{E6616C31-2850-4894-9648-10238C655793}"/>
+                <a16:creationId xmlns:a16="http://schemas.microsoft.com/office/drawing/2014/main" id="{DEEF058E-AFCE-4CD4-862C-E8187E8F486A}"/>
               </a:ext>
             </a:extLst>
           </p:cNvPr>
@@ -5410,7 +5500,7 @@
           <p:cNvPr id="11" name="TextBox 10">
             <a:extLst xmlns:a="http://schemas.openxmlformats.org/drawingml/2006/main">
               <a:ext uri="{FF2B5EF4-FFF2-40B4-BE49-F238E27FC236}">
-                <a16:creationId xmlns:a16="http://schemas.microsoft.com/office/drawing/2014/main" id="{6136A82D-DCAB-4746-9296-675B25C3F477}"/>
+                <a16:creationId xmlns:a16="http://schemas.microsoft.com/office/drawing/2014/main" id="{05C7B258-25A5-4B7E-BA58-A97B3CB6C0EE}"/>
               </a:ext>
             </a:extLst>
           </p:cNvPr>
@@ -5457,7 +5547,7 @@
           <p:cNvPr id="12" name="TextBox 11">
             <a:extLst xmlns:a="http://schemas.openxmlformats.org/drawingml/2006/main">
               <a:ext uri="{FF2B5EF4-FFF2-40B4-BE49-F238E27FC236}">
-                <a16:creationId xmlns:a16="http://schemas.microsoft.com/office/drawing/2014/main" id="{6E131D5C-89BE-48B2-8C33-EAB4D78CBA01}"/>
+                <a16:creationId xmlns:a16="http://schemas.microsoft.com/office/drawing/2014/main" id="{F0FDC58F-1CEF-431C-9471-81884FC3E693}"/>
               </a:ext>
             </a:extLst>
           </p:cNvPr>
@@ -5502,7 +5592,7 @@
     </p:spTree>
     <p:extLst>
       <p:ext uri="{BB962C8B-B14F-4D97-AF65-F5344CB8AC3E}">
-        <p14:creationId xmlns:p14="http://schemas.microsoft.com/office/powerpoint/2010/main" val="1132757658"/>
+        <p14:creationId xmlns:p14="http://schemas.microsoft.com/office/powerpoint/2010/main" val="1258936087"/>
       </p:ext>
     </p:extLst>
   </p:cSld>
@@ -5526,7 +5616,7 @@
           <p:cNvPr id="2" name="TextBox 1">
             <a:extLst xmlns:a="http://schemas.openxmlformats.org/drawingml/2006/main">
               <a:ext uri="{FF2B5EF4-FFF2-40B4-BE49-F238E27FC236}">
-                <a16:creationId xmlns:a16="http://schemas.microsoft.com/office/drawing/2014/main" id="{5C386DC1-E611-48F6-A0D3-36C77047C0AC}"/>
+                <a16:creationId xmlns:a16="http://schemas.microsoft.com/office/drawing/2014/main" id="{6A73E209-8BB1-4BFF-B5C4-97A507230C4A}"/>
               </a:ext>
             </a:extLst>
           </p:cNvPr>
@@ -5573,7 +5663,7 @@
           <p:cNvPr id="3" name="TextBox 2">
             <a:extLst xmlns:a="http://schemas.openxmlformats.org/drawingml/2006/main">
               <a:ext uri="{FF2B5EF4-FFF2-40B4-BE49-F238E27FC236}">
-                <a16:creationId xmlns:a16="http://schemas.microsoft.com/office/drawing/2014/main" id="{691EB735-9515-4055-A123-071002E283D2}"/>
+                <a16:creationId xmlns:a16="http://schemas.microsoft.com/office/drawing/2014/main" id="{F1A5D2FF-427C-4672-81B9-B6AA5FBA1845}"/>
               </a:ext>
             </a:extLst>
           </p:cNvPr>
@@ -5620,7 +5710,7 @@
           <p:cNvPr id="4" name="Rectangle 3">
             <a:extLst xmlns:a="http://schemas.openxmlformats.org/drawingml/2006/main">
               <a:ext uri="{FF2B5EF4-FFF2-40B4-BE49-F238E27FC236}">
-                <a16:creationId xmlns:a16="http://schemas.microsoft.com/office/drawing/2014/main" id="{1D38B867-BF18-4C9B-817E-3052B6983721}"/>
+                <a16:creationId xmlns:a16="http://schemas.microsoft.com/office/drawing/2014/main" id="{9DAF8D45-D674-4E73-8B2E-970CDED6CD25}"/>
               </a:ext>
             </a:extLst>
           </p:cNvPr>
@@ -5675,7 +5765,7 @@
           <p:cNvPr id="5" name="Rectangle 4">
             <a:extLst xmlns:a="http://schemas.openxmlformats.org/drawingml/2006/main">
               <a:ext uri="{FF2B5EF4-FFF2-40B4-BE49-F238E27FC236}">
-                <a16:creationId xmlns:a16="http://schemas.microsoft.com/office/drawing/2014/main" id="{5ED5E969-BF1A-44BA-A7F8-E830693FE31C}"/>
+                <a16:creationId xmlns:a16="http://schemas.microsoft.com/office/drawing/2014/main" id="{584E3BA1-5965-4AFF-9255-FD6BB284FF85}"/>
               </a:ext>
             </a:extLst>
           </p:cNvPr>
@@ -5730,7 +5820,7 @@
           <p:cNvPr id="6" name="TextBox 5">
             <a:extLst xmlns:a="http://schemas.openxmlformats.org/drawingml/2006/main">
               <a:ext uri="{FF2B5EF4-FFF2-40B4-BE49-F238E27FC236}">
-                <a16:creationId xmlns:a16="http://schemas.microsoft.com/office/drawing/2014/main" id="{A3A075CF-8678-4953-89CA-136ABF9534BB}"/>
+                <a16:creationId xmlns:a16="http://schemas.microsoft.com/office/drawing/2014/main" id="{1E3817B8-CF8B-4C8A-9AE7-54D975E1B612}"/>
               </a:ext>
             </a:extLst>
           </p:cNvPr>
@@ -5767,7 +5857,7 @@
                 <a:ea typeface="Aptos"/>
                 <a:cs typeface="Aptos"/>
               </a:rPr>
-              <a:t>Julkinen riippumaton evidenssikooste · 2026.07.24-22 · 2026-07-24 · Lähteet: EPO; Saksa — viralliset tuomiot; WIPO</a:t>
+              <a:t>Julkinen riippumaton evidenssikooste · 2026.07.25-24 · 2026-07-24 · Lähteet: EPO; Saksa — viralliset tuomiot; WIPO</a:t>
             </a:r>
           </a:p>
         </p:txBody>
@@ -5777,7 +5867,7 @@
           <p:cNvPr id="7" name="TextBox 6">
             <a:extLst xmlns:a="http://schemas.openxmlformats.org/drawingml/2006/main">
               <a:ext uri="{FF2B5EF4-FFF2-40B4-BE49-F238E27FC236}">
-                <a16:creationId xmlns:a16="http://schemas.microsoft.com/office/drawing/2014/main" id="{A71C65F7-EC52-4DFC-A363-D07FB33743D6}"/>
+                <a16:creationId xmlns:a16="http://schemas.microsoft.com/office/drawing/2014/main" id="{B5519F99-8B53-4A6F-9788-DC263FCD4BED}"/>
               </a:ext>
             </a:extLst>
           </p:cNvPr>
@@ -5824,7 +5914,7 @@
           <p:cNvPr id="8" name="TextBox 7">
             <a:extLst xmlns:a="http://schemas.openxmlformats.org/drawingml/2006/main">
               <a:ext uri="{FF2B5EF4-FFF2-40B4-BE49-F238E27FC236}">
-                <a16:creationId xmlns:a16="http://schemas.microsoft.com/office/drawing/2014/main" id="{4B2AFF59-860A-4DD3-9A18-64217E916435}"/>
+                <a16:creationId xmlns:a16="http://schemas.microsoft.com/office/drawing/2014/main" id="{941C938F-0B40-4192-905B-EF0AB5328CB8}"/>
               </a:ext>
             </a:extLst>
           </p:cNvPr>
@@ -5871,7 +5961,7 @@
           <p:cNvPr id="9" name="TextBox 8">
             <a:extLst xmlns:a="http://schemas.openxmlformats.org/drawingml/2006/main">
               <a:ext uri="{FF2B5EF4-FFF2-40B4-BE49-F238E27FC236}">
-                <a16:creationId xmlns:a16="http://schemas.microsoft.com/office/drawing/2014/main" id="{7271CB82-D0CC-4819-9901-D4FE11C1CD92}"/>
+                <a16:creationId xmlns:a16="http://schemas.microsoft.com/office/drawing/2014/main" id="{45A50913-870B-44B2-86FB-F60A4981775E}"/>
               </a:ext>
             </a:extLst>
           </p:cNvPr>
@@ -5968,7 +6058,7 @@
           <p:cNvPr id="10" name="Rounded Rectangle 9">
             <a:extLst xmlns:a="http://schemas.openxmlformats.org/drawingml/2006/main">
               <a:ext uri="{FF2B5EF4-FFF2-40B4-BE49-F238E27FC236}">
-                <a16:creationId xmlns:a16="http://schemas.microsoft.com/office/drawing/2014/main" id="{D0BFC0EE-D4F5-44C0-B1E3-B09DE9380A23}"/>
+                <a16:creationId xmlns:a16="http://schemas.microsoft.com/office/drawing/2014/main" id="{B72D4B6E-A8B0-484C-87B6-51C88848EE08}"/>
               </a:ext>
             </a:extLst>
           </p:cNvPr>
@@ -6025,7 +6115,7 @@
           <p:cNvPr id="11" name="TextBox 10">
             <a:extLst xmlns:a="http://schemas.openxmlformats.org/drawingml/2006/main">
               <a:ext uri="{FF2B5EF4-FFF2-40B4-BE49-F238E27FC236}">
-                <a16:creationId xmlns:a16="http://schemas.microsoft.com/office/drawing/2014/main" id="{B224276E-5815-4BD7-952F-0E5617C45FB3}"/>
+                <a16:creationId xmlns:a16="http://schemas.microsoft.com/office/drawing/2014/main" id="{BF987FBC-0193-44BE-BC67-D62589E7B33A}"/>
               </a:ext>
             </a:extLst>
           </p:cNvPr>
@@ -6072,7 +6162,7 @@
           <p:cNvPr id="12" name="TextBox 11">
             <a:extLst xmlns:a="http://schemas.openxmlformats.org/drawingml/2006/main">
               <a:ext uri="{FF2B5EF4-FFF2-40B4-BE49-F238E27FC236}">
-                <a16:creationId xmlns:a16="http://schemas.microsoft.com/office/drawing/2014/main" id="{EE28D38E-943D-47B2-8CA4-C52B3B5BB218}"/>
+                <a16:creationId xmlns:a16="http://schemas.microsoft.com/office/drawing/2014/main" id="{E31CDE90-EDCA-452E-B104-669631339AA9}"/>
               </a:ext>
             </a:extLst>
           </p:cNvPr>
@@ -6117,7 +6207,7 @@
     </p:spTree>
     <p:extLst>
       <p:ext uri="{BB962C8B-B14F-4D97-AF65-F5344CB8AC3E}">
-        <p14:creationId xmlns:p14="http://schemas.microsoft.com/office/powerpoint/2010/main" val="708200995"/>
+        <p14:creationId xmlns:p14="http://schemas.microsoft.com/office/powerpoint/2010/main" val="1172940012"/>
       </p:ext>
     </p:extLst>
   </p:cSld>
@@ -6141,7 +6231,7 @@
           <p:cNvPr id="2" name="TextBox 1">
             <a:extLst xmlns:a="http://schemas.openxmlformats.org/drawingml/2006/main">
               <a:ext uri="{FF2B5EF4-FFF2-40B4-BE49-F238E27FC236}">
-                <a16:creationId xmlns:a16="http://schemas.microsoft.com/office/drawing/2014/main" id="{6F861DF7-CD32-4F87-B7C2-849E82C07276}"/>
+                <a16:creationId xmlns:a16="http://schemas.microsoft.com/office/drawing/2014/main" id="{515F4F0D-3421-4CAA-824C-35C25203632A}"/>
               </a:ext>
             </a:extLst>
           </p:cNvPr>
@@ -6188,7 +6278,7 @@
           <p:cNvPr id="3" name="TextBox 2">
             <a:extLst xmlns:a="http://schemas.openxmlformats.org/drawingml/2006/main">
               <a:ext uri="{FF2B5EF4-FFF2-40B4-BE49-F238E27FC236}">
-                <a16:creationId xmlns:a16="http://schemas.microsoft.com/office/drawing/2014/main" id="{9AF1F086-3214-40DB-B63F-EFD549878430}"/>
+                <a16:creationId xmlns:a16="http://schemas.microsoft.com/office/drawing/2014/main" id="{0F98845A-3197-4B9B-AAAD-97F61C3993BA}"/>
               </a:ext>
             </a:extLst>
           </p:cNvPr>
@@ -6235,7 +6325,7 @@
           <p:cNvPr id="4" name="Rectangle 3">
             <a:extLst xmlns:a="http://schemas.openxmlformats.org/drawingml/2006/main">
               <a:ext uri="{FF2B5EF4-FFF2-40B4-BE49-F238E27FC236}">
-                <a16:creationId xmlns:a16="http://schemas.microsoft.com/office/drawing/2014/main" id="{627CC81B-1D6D-44D4-A613-6561CC8442B9}"/>
+                <a16:creationId xmlns:a16="http://schemas.microsoft.com/office/drawing/2014/main" id="{B8C89E90-FFF6-4828-8748-44A202DCFB01}"/>
               </a:ext>
             </a:extLst>
           </p:cNvPr>
@@ -6290,7 +6380,7 @@
           <p:cNvPr id="5" name="Rectangle 4">
             <a:extLst xmlns:a="http://schemas.openxmlformats.org/drawingml/2006/main">
               <a:ext uri="{FF2B5EF4-FFF2-40B4-BE49-F238E27FC236}">
-                <a16:creationId xmlns:a16="http://schemas.microsoft.com/office/drawing/2014/main" id="{9900FE13-1399-40BF-A0DC-DA76E682A850}"/>
+                <a16:creationId xmlns:a16="http://schemas.microsoft.com/office/drawing/2014/main" id="{F30E95B1-55C7-481D-885A-4553A69C9502}"/>
               </a:ext>
             </a:extLst>
           </p:cNvPr>
@@ -6345,7 +6435,7 @@
           <p:cNvPr id="6" name="TextBox 5">
             <a:extLst xmlns:a="http://schemas.openxmlformats.org/drawingml/2006/main">
               <a:ext uri="{FF2B5EF4-FFF2-40B4-BE49-F238E27FC236}">
-                <a16:creationId xmlns:a16="http://schemas.microsoft.com/office/drawing/2014/main" id="{CAB46D60-59B1-4EEA-8ADC-004DF09087CF}"/>
+                <a16:creationId xmlns:a16="http://schemas.microsoft.com/office/drawing/2014/main" id="{C4AA1845-5215-49CB-AB70-2851C386EE06}"/>
               </a:ext>
             </a:extLst>
           </p:cNvPr>
@@ -6382,7 +6472,7 @@
                 <a:ea typeface="Aptos"/>
                 <a:cs typeface="Aptos"/>
               </a:rPr>
-              <a:t>Julkinen riippumaton evidenssikooste · 2026.07.24-22 · 2026-07-24 · Lähteet: EPO Register; EP3032975B2; 8 Ni 18/24 (EP); 7 O 3341/24</a:t>
+              <a:t>Julkinen riippumaton evidenssikooste · 2026.07.25-24 · 2026-07-24 · Lähteet: EPO Register; EP3032975B2; 8 Ni 18/24 (EP); 7 O 3341/24</a:t>
             </a:r>
           </a:p>
         </p:txBody>
@@ -6392,7 +6482,7 @@
           <p:cNvPr id="7" name="TextBox 6">
             <a:extLst xmlns:a="http://schemas.openxmlformats.org/drawingml/2006/main">
               <a:ext uri="{FF2B5EF4-FFF2-40B4-BE49-F238E27FC236}">
-                <a16:creationId xmlns:a16="http://schemas.microsoft.com/office/drawing/2014/main" id="{B15D1301-9ED2-4EF6-BBAB-AFF5D145B3BB}"/>
+                <a16:creationId xmlns:a16="http://schemas.microsoft.com/office/drawing/2014/main" id="{5284EC16-0E93-4198-863C-FB5688998E44}"/>
               </a:ext>
             </a:extLst>
           </p:cNvPr>
@@ -6439,7 +6529,7 @@
           <p:cNvPr id="8" name="Rounded Rectangle 7">
             <a:extLst xmlns:a="http://schemas.openxmlformats.org/drawingml/2006/main">
               <a:ext uri="{FF2B5EF4-FFF2-40B4-BE49-F238E27FC236}">
-                <a16:creationId xmlns:a16="http://schemas.microsoft.com/office/drawing/2014/main" id="{7D3EBB29-4F9B-4713-9F99-B48B859A9806}"/>
+                <a16:creationId xmlns:a16="http://schemas.microsoft.com/office/drawing/2014/main" id="{FEBCE235-3B73-4012-9303-EA8603188E05}"/>
               </a:ext>
             </a:extLst>
           </p:cNvPr>
@@ -6496,7 +6586,7 @@
           <p:cNvPr id="9" name="TextBox 8">
             <a:extLst xmlns:a="http://schemas.openxmlformats.org/drawingml/2006/main">
               <a:ext uri="{FF2B5EF4-FFF2-40B4-BE49-F238E27FC236}">
-                <a16:creationId xmlns:a16="http://schemas.microsoft.com/office/drawing/2014/main" id="{BC793DB1-3884-4E9A-883D-2BD4C62C5F5F}"/>
+                <a16:creationId xmlns:a16="http://schemas.microsoft.com/office/drawing/2014/main" id="{4BDFE0A6-AAC6-406B-8E92-7E6E04771C63}"/>
               </a:ext>
             </a:extLst>
           </p:cNvPr>
@@ -6543,7 +6633,7 @@
           <p:cNvPr id="10" name="TextBox 9">
             <a:extLst xmlns:a="http://schemas.openxmlformats.org/drawingml/2006/main">
               <a:ext uri="{FF2B5EF4-FFF2-40B4-BE49-F238E27FC236}">
-                <a16:creationId xmlns:a16="http://schemas.microsoft.com/office/drawing/2014/main" id="{CAF0C968-6333-4EDD-A521-E40BE53961C0}"/>
+                <a16:creationId xmlns:a16="http://schemas.microsoft.com/office/drawing/2014/main" id="{211CEF0B-93AF-41BD-86CD-66FB2C9AB3C5}"/>
               </a:ext>
             </a:extLst>
           </p:cNvPr>
@@ -6590,7 +6680,7 @@
           <p:cNvPr id="11" name="Rounded Rectangle 10">
             <a:extLst xmlns:a="http://schemas.openxmlformats.org/drawingml/2006/main">
               <a:ext uri="{FF2B5EF4-FFF2-40B4-BE49-F238E27FC236}">
-                <a16:creationId xmlns:a16="http://schemas.microsoft.com/office/drawing/2014/main" id="{6DC7BF09-B1A7-4224-A6D7-698ECCC10B57}"/>
+                <a16:creationId xmlns:a16="http://schemas.microsoft.com/office/drawing/2014/main" id="{5D9711A8-3896-49EB-B627-D2364132BEE3}"/>
               </a:ext>
             </a:extLst>
           </p:cNvPr>
@@ -6647,7 +6737,7 @@
           <p:cNvPr id="12" name="TextBox 11">
             <a:extLst xmlns:a="http://schemas.openxmlformats.org/drawingml/2006/main">
               <a:ext uri="{FF2B5EF4-FFF2-40B4-BE49-F238E27FC236}">
-                <a16:creationId xmlns:a16="http://schemas.microsoft.com/office/drawing/2014/main" id="{B55B1D39-7EB8-4223-A7D7-9F17C4C10E2E}"/>
+                <a16:creationId xmlns:a16="http://schemas.microsoft.com/office/drawing/2014/main" id="{7E585A47-EF35-43DA-9262-B93EAC7C3F44}"/>
               </a:ext>
             </a:extLst>
           </p:cNvPr>
@@ -6694,7 +6784,7 @@
           <p:cNvPr id="13" name="TextBox 12">
             <a:extLst xmlns:a="http://schemas.openxmlformats.org/drawingml/2006/main">
               <a:ext uri="{FF2B5EF4-FFF2-40B4-BE49-F238E27FC236}">
-                <a16:creationId xmlns:a16="http://schemas.microsoft.com/office/drawing/2014/main" id="{C200ED3C-D1D9-4C3D-BD02-B2D441885670}"/>
+                <a16:creationId xmlns:a16="http://schemas.microsoft.com/office/drawing/2014/main" id="{7467FB12-D7E8-452F-A2CF-B5D0F1091E99}"/>
               </a:ext>
             </a:extLst>
           </p:cNvPr>
@@ -6741,7 +6831,7 @@
           <p:cNvPr id="14" name="Rounded Rectangle 13">
             <a:extLst xmlns:a="http://schemas.openxmlformats.org/drawingml/2006/main">
               <a:ext uri="{FF2B5EF4-FFF2-40B4-BE49-F238E27FC236}">
-                <a16:creationId xmlns:a16="http://schemas.microsoft.com/office/drawing/2014/main" id="{8178706C-7A1F-4A50-BAB2-6B650FC50A19}"/>
+                <a16:creationId xmlns:a16="http://schemas.microsoft.com/office/drawing/2014/main" id="{EF7B8600-B947-46D0-A584-EA0F4CBE1896}"/>
               </a:ext>
             </a:extLst>
           </p:cNvPr>
@@ -6798,7 +6888,7 @@
           <p:cNvPr id="15" name="TextBox 14">
             <a:extLst xmlns:a="http://schemas.openxmlformats.org/drawingml/2006/main">
               <a:ext uri="{FF2B5EF4-FFF2-40B4-BE49-F238E27FC236}">
-                <a16:creationId xmlns:a16="http://schemas.microsoft.com/office/drawing/2014/main" id="{D20C78BE-2DB4-4A04-961F-F04714C45D9F}"/>
+                <a16:creationId xmlns:a16="http://schemas.microsoft.com/office/drawing/2014/main" id="{703B6E27-8C83-4E66-9289-331C12B29560}"/>
               </a:ext>
             </a:extLst>
           </p:cNvPr>
@@ -6845,7 +6935,7 @@
           <p:cNvPr id="16" name="TextBox 15">
             <a:extLst xmlns:a="http://schemas.openxmlformats.org/drawingml/2006/main">
               <a:ext uri="{FF2B5EF4-FFF2-40B4-BE49-F238E27FC236}">
-                <a16:creationId xmlns:a16="http://schemas.microsoft.com/office/drawing/2014/main" id="{776808E6-F61C-4041-B935-C8963CBC349B}"/>
+                <a16:creationId xmlns:a16="http://schemas.microsoft.com/office/drawing/2014/main" id="{10D18B0F-D719-46AF-8D2A-ACE0EB96D780}"/>
               </a:ext>
             </a:extLst>
           </p:cNvPr>
@@ -6892,7 +6982,7 @@
           <p:cNvPr id="17" name="TextBox 16">
             <a:extLst xmlns:a="http://schemas.openxmlformats.org/drawingml/2006/main">
               <a:ext uri="{FF2B5EF4-FFF2-40B4-BE49-F238E27FC236}">
-                <a16:creationId xmlns:a16="http://schemas.microsoft.com/office/drawing/2014/main" id="{01CE1279-DFA0-430D-A5A4-C8DD53779DD5}"/>
+                <a16:creationId xmlns:a16="http://schemas.microsoft.com/office/drawing/2014/main" id="{5917C130-EE00-417D-941A-E2F0A2C23926}"/>
               </a:ext>
             </a:extLst>
           </p:cNvPr>
@@ -6939,7 +7029,7 @@
           <p:cNvPr id="18" name="Rounded Rectangle 17">
             <a:extLst xmlns:a="http://schemas.openxmlformats.org/drawingml/2006/main">
               <a:ext uri="{FF2B5EF4-FFF2-40B4-BE49-F238E27FC236}">
-                <a16:creationId xmlns:a16="http://schemas.microsoft.com/office/drawing/2014/main" id="{CA5ADE2A-0A54-464D-9932-2A757C4373EA}"/>
+                <a16:creationId xmlns:a16="http://schemas.microsoft.com/office/drawing/2014/main" id="{3098A6AF-D80D-41B1-A5D6-FFA5270FA827}"/>
               </a:ext>
             </a:extLst>
           </p:cNvPr>
@@ -6996,7 +7086,7 @@
           <p:cNvPr id="19" name="TextBox 18">
             <a:extLst xmlns:a="http://schemas.openxmlformats.org/drawingml/2006/main">
               <a:ext uri="{FF2B5EF4-FFF2-40B4-BE49-F238E27FC236}">
-                <a16:creationId xmlns:a16="http://schemas.microsoft.com/office/drawing/2014/main" id="{1FFFFCAD-AF52-41A9-8465-4C398E5737EE}"/>
+                <a16:creationId xmlns:a16="http://schemas.microsoft.com/office/drawing/2014/main" id="{13AFCBEE-8045-4E9B-8389-EF40D2FF3E80}"/>
               </a:ext>
             </a:extLst>
           </p:cNvPr>
@@ -7043,7 +7133,7 @@
           <p:cNvPr id="20" name="TextBox 19">
             <a:extLst xmlns:a="http://schemas.openxmlformats.org/drawingml/2006/main">
               <a:ext uri="{FF2B5EF4-FFF2-40B4-BE49-F238E27FC236}">
-                <a16:creationId xmlns:a16="http://schemas.microsoft.com/office/drawing/2014/main" id="{7D00E3CE-7C74-49E4-A5F3-B79877AC7D62}"/>
+                <a16:creationId xmlns:a16="http://schemas.microsoft.com/office/drawing/2014/main" id="{7A4349F7-360A-47E4-8658-83D203F237BF}"/>
               </a:ext>
             </a:extLst>
           </p:cNvPr>
@@ -7088,7 +7178,7 @@
     </p:spTree>
     <p:extLst>
       <p:ext uri="{BB962C8B-B14F-4D97-AF65-F5344CB8AC3E}">
-        <p14:creationId xmlns:p14="http://schemas.microsoft.com/office/powerpoint/2010/main" val="905611960"/>
+        <p14:creationId xmlns:p14="http://schemas.microsoft.com/office/powerpoint/2010/main" val="1237373325"/>
       </p:ext>
     </p:extLst>
   </p:cSld>
@@ -7112,7 +7202,7 @@
           <p:cNvPr id="2" name="TextBox 1">
             <a:extLst xmlns:a="http://schemas.openxmlformats.org/drawingml/2006/main">
               <a:ext uri="{FF2B5EF4-FFF2-40B4-BE49-F238E27FC236}">
-                <a16:creationId xmlns:a16="http://schemas.microsoft.com/office/drawing/2014/main" id="{11AF7E79-D035-4EAC-87F8-88D43959B054}"/>
+                <a16:creationId xmlns:a16="http://schemas.microsoft.com/office/drawing/2014/main" id="{C106660E-22B1-41E6-B7BE-7EB5C0559DBF}"/>
               </a:ext>
             </a:extLst>
           </p:cNvPr>
@@ -7159,7 +7249,7 @@
           <p:cNvPr id="3" name="TextBox 2">
             <a:extLst xmlns:a="http://schemas.openxmlformats.org/drawingml/2006/main">
               <a:ext uri="{FF2B5EF4-FFF2-40B4-BE49-F238E27FC236}">
-                <a16:creationId xmlns:a16="http://schemas.microsoft.com/office/drawing/2014/main" id="{CDE4B9C6-C841-498C-A665-34F3E55D47C7}"/>
+                <a16:creationId xmlns:a16="http://schemas.microsoft.com/office/drawing/2014/main" id="{5228FD01-6AEC-4613-8DF7-D38AF9EADCC9}"/>
               </a:ext>
             </a:extLst>
           </p:cNvPr>
@@ -7206,7 +7296,7 @@
           <p:cNvPr id="4" name="Rectangle 3">
             <a:extLst xmlns:a="http://schemas.openxmlformats.org/drawingml/2006/main">
               <a:ext uri="{FF2B5EF4-FFF2-40B4-BE49-F238E27FC236}">
-                <a16:creationId xmlns:a16="http://schemas.microsoft.com/office/drawing/2014/main" id="{76B6F57B-8A2E-4FCF-9968-7E7ECBBDB451}"/>
+                <a16:creationId xmlns:a16="http://schemas.microsoft.com/office/drawing/2014/main" id="{870E7D62-D5AD-4B5A-BD69-E16F9F0B26EB}"/>
               </a:ext>
             </a:extLst>
           </p:cNvPr>
@@ -7261,7 +7351,7 @@
           <p:cNvPr id="5" name="Rectangle 4">
             <a:extLst xmlns:a="http://schemas.openxmlformats.org/drawingml/2006/main">
               <a:ext uri="{FF2B5EF4-FFF2-40B4-BE49-F238E27FC236}">
-                <a16:creationId xmlns:a16="http://schemas.microsoft.com/office/drawing/2014/main" id="{C3786350-878A-4A74-8E0B-712819ACBE83}"/>
+                <a16:creationId xmlns:a16="http://schemas.microsoft.com/office/drawing/2014/main" id="{A3EDD77E-6572-4BB7-AD62-7E788C2BC702}"/>
               </a:ext>
             </a:extLst>
           </p:cNvPr>
@@ -7316,7 +7406,7 @@
           <p:cNvPr id="6" name="TextBox 5">
             <a:extLst xmlns:a="http://schemas.openxmlformats.org/drawingml/2006/main">
               <a:ext uri="{FF2B5EF4-FFF2-40B4-BE49-F238E27FC236}">
-                <a16:creationId xmlns:a16="http://schemas.microsoft.com/office/drawing/2014/main" id="{E36572B2-FF16-49D3-AC15-A78A971F96D4}"/>
+                <a16:creationId xmlns:a16="http://schemas.microsoft.com/office/drawing/2014/main" id="{97A33B80-0DAA-4E20-8311-58516B8660BB}"/>
               </a:ext>
             </a:extLst>
           </p:cNvPr>
@@ -7328,7 +7418,7 @@
         <p:spPr>
           <a:xfrm xmlns:a="http://schemas.openxmlformats.org/drawingml/2006/main">
             <a:off x="384048" y="6556248"/>
-            <a:ext cx="10835640" cy="332232"/>
+            <a:ext cx="10835640" cy="202692"/>
           </a:xfrm>
           <a:prstGeom xmlns:a="http://schemas.openxmlformats.org/drawingml/2006/main" prst="rect">
             <a:avLst/>
@@ -7353,7 +7443,7 @@
                 <a:ea typeface="Aptos"/>
                 <a:cs typeface="Aptos"/>
               </a:rPr>
-              <a:t>Julkinen riippumaton evidenssikooste · 2026.07.24-22 · 2026-07-24 · Lähteet: Statistics Canada; Health Canada; New Zealand Ministry of Health; Destatis; Vero; Sejm; Ruotsin hallitus; FHM; FTC; European Commission; IMARC; GVR; Fortune</a:t>
+              <a:t>Julkinen riippumaton evidenssikooste · 2026.07.25-24 · 2026-07-25 · Lähteet: Statistics Canada; Health Canada; NZ Ministry of Health; European Commission; FHM; FTC</a:t>
             </a:r>
           </a:p>
         </p:txBody>
@@ -7363,7 +7453,7 @@
           <p:cNvPr id="7" name="TextBox 6">
             <a:extLst xmlns:a="http://schemas.openxmlformats.org/drawingml/2006/main">
               <a:ext uri="{FF2B5EF4-FFF2-40B4-BE49-F238E27FC236}">
-                <a16:creationId xmlns:a16="http://schemas.microsoft.com/office/drawing/2014/main" id="{4FB51E6A-A092-45A2-BA30-48409AB80AC1}"/>
+                <a16:creationId xmlns:a16="http://schemas.microsoft.com/office/drawing/2014/main" id="{433CF4E5-91C6-4908-9505-18CCDD9E3BDA}"/>
               </a:ext>
             </a:extLst>
           </p:cNvPr>
@@ -7410,7 +7500,7 @@
           <p:cNvPr id="8" name="Rounded Rectangle 7">
             <a:extLst xmlns:a="http://schemas.openxmlformats.org/drawingml/2006/main">
               <a:ext uri="{FF2B5EF4-FFF2-40B4-BE49-F238E27FC236}">
-                <a16:creationId xmlns:a16="http://schemas.microsoft.com/office/drawing/2014/main" id="{4B28CC68-65C2-4B57-A23A-71800B1A6A2A}"/>
+                <a16:creationId xmlns:a16="http://schemas.microsoft.com/office/drawing/2014/main" id="{E478A1A2-1E2D-4553-BE92-FE4B226B5F08}"/>
               </a:ext>
             </a:extLst>
           </p:cNvPr>
@@ -7467,7 +7557,7 @@
           <p:cNvPr id="9" name="TextBox 8">
             <a:extLst xmlns:a="http://schemas.openxmlformats.org/drawingml/2006/main">
               <a:ext uri="{FF2B5EF4-FFF2-40B4-BE49-F238E27FC236}">
-                <a16:creationId xmlns:a16="http://schemas.microsoft.com/office/drawing/2014/main" id="{5D092583-FC92-417D-981C-A67C5EE30756}"/>
+                <a16:creationId xmlns:a16="http://schemas.microsoft.com/office/drawing/2014/main" id="{44CE538B-5A7D-4BF0-84D8-30DE5C5AE21B}"/>
               </a:ext>
             </a:extLst>
           </p:cNvPr>
@@ -7514,7 +7604,7 @@
           <p:cNvPr id="10" name="TextBox 9">
             <a:extLst xmlns:a="http://schemas.openxmlformats.org/drawingml/2006/main">
               <a:ext uri="{FF2B5EF4-FFF2-40B4-BE49-F238E27FC236}">
-                <a16:creationId xmlns:a16="http://schemas.microsoft.com/office/drawing/2014/main" id="{CCB3A33B-E4E0-4406-8481-756A39EF26BB}"/>
+                <a16:creationId xmlns:a16="http://schemas.microsoft.com/office/drawing/2014/main" id="{51B1EC5B-BA68-413B-9868-F806254A1182}"/>
               </a:ext>
             </a:extLst>
           </p:cNvPr>
@@ -7561,7 +7651,7 @@
           <p:cNvPr id="11" name="Rounded Rectangle 10">
             <a:extLst xmlns:a="http://schemas.openxmlformats.org/drawingml/2006/main">
               <a:ext uri="{FF2B5EF4-FFF2-40B4-BE49-F238E27FC236}">
-                <a16:creationId xmlns:a16="http://schemas.microsoft.com/office/drawing/2014/main" id="{9FE31A6B-3A7E-4020-AE03-DAECC4BF4E69}"/>
+                <a16:creationId xmlns:a16="http://schemas.microsoft.com/office/drawing/2014/main" id="{5B9B84B7-6F05-498C-B1EE-1A46A5A56C5C}"/>
               </a:ext>
             </a:extLst>
           </p:cNvPr>
@@ -7618,7 +7708,7 @@
           <p:cNvPr id="12" name="TextBox 11">
             <a:extLst xmlns:a="http://schemas.openxmlformats.org/drawingml/2006/main">
               <a:ext uri="{FF2B5EF4-FFF2-40B4-BE49-F238E27FC236}">
-                <a16:creationId xmlns:a16="http://schemas.microsoft.com/office/drawing/2014/main" id="{E7C1C4B6-C0C0-4F4F-9B06-561FC46AB50F}"/>
+                <a16:creationId xmlns:a16="http://schemas.microsoft.com/office/drawing/2014/main" id="{2E5950AB-D33B-4758-9EB6-6848659CE7D8}"/>
               </a:ext>
             </a:extLst>
           </p:cNvPr>
@@ -7665,7 +7755,7 @@
           <p:cNvPr id="13" name="TextBox 12">
             <a:extLst xmlns:a="http://schemas.openxmlformats.org/drawingml/2006/main">
               <a:ext uri="{FF2B5EF4-FFF2-40B4-BE49-F238E27FC236}">
-                <a16:creationId xmlns:a16="http://schemas.microsoft.com/office/drawing/2014/main" id="{3C1FD322-BA21-45E7-AA9A-FF47F6E89AC9}"/>
+                <a16:creationId xmlns:a16="http://schemas.microsoft.com/office/drawing/2014/main" id="{019E2A81-3D23-41C3-92DD-A2DC2DE79CAE}"/>
               </a:ext>
             </a:extLst>
           </p:cNvPr>
@@ -7712,7 +7802,7 @@
           <p:cNvPr id="14" name="Rounded Rectangle 13">
             <a:extLst xmlns:a="http://schemas.openxmlformats.org/drawingml/2006/main">
               <a:ext uri="{FF2B5EF4-FFF2-40B4-BE49-F238E27FC236}">
-                <a16:creationId xmlns:a16="http://schemas.microsoft.com/office/drawing/2014/main" id="{2B5A8FFF-630A-4456-8299-4875EBE2FBAD}"/>
+                <a16:creationId xmlns:a16="http://schemas.microsoft.com/office/drawing/2014/main" id="{CAD83FC7-2C0D-46F6-9DE2-865D7DB8E201}"/>
               </a:ext>
             </a:extLst>
           </p:cNvPr>
@@ -7769,7 +7859,7 @@
           <p:cNvPr id="15" name="TextBox 14">
             <a:extLst xmlns:a="http://schemas.openxmlformats.org/drawingml/2006/main">
               <a:ext uri="{FF2B5EF4-FFF2-40B4-BE49-F238E27FC236}">
-                <a16:creationId xmlns:a16="http://schemas.microsoft.com/office/drawing/2014/main" id="{3B379030-465A-453A-A3FD-F4B04C363142}"/>
+                <a16:creationId xmlns:a16="http://schemas.microsoft.com/office/drawing/2014/main" id="{86DDF90D-E1A9-453C-89DC-56BD5C9B0C80}"/>
               </a:ext>
             </a:extLst>
           </p:cNvPr>
@@ -7816,7 +7906,7 @@
           <p:cNvPr id="16" name="TextBox 15">
             <a:extLst xmlns:a="http://schemas.openxmlformats.org/drawingml/2006/main">
               <a:ext uri="{FF2B5EF4-FFF2-40B4-BE49-F238E27FC236}">
-                <a16:creationId xmlns:a16="http://schemas.microsoft.com/office/drawing/2014/main" id="{EB0B31DA-1511-4C44-87A4-83E42A7681C1}"/>
+                <a16:creationId xmlns:a16="http://schemas.microsoft.com/office/drawing/2014/main" id="{610AE875-0B61-46A8-81A4-2061E4E96EDD}"/>
               </a:ext>
             </a:extLst>
           </p:cNvPr>
@@ -7863,7 +7953,7 @@
           <p:cNvPr id="17" name="TextBox 16">
             <a:extLst xmlns:a="http://schemas.openxmlformats.org/drawingml/2006/main">
               <a:ext uri="{FF2B5EF4-FFF2-40B4-BE49-F238E27FC236}">
-                <a16:creationId xmlns:a16="http://schemas.microsoft.com/office/drawing/2014/main" id="{0D464800-ACEA-4FDF-8327-BADC55116E9F}"/>
+                <a16:creationId xmlns:a16="http://schemas.microsoft.com/office/drawing/2014/main" id="{D51A6C17-E64E-4C50-9BCE-45A066B68FFA}"/>
               </a:ext>
             </a:extLst>
           </p:cNvPr>
@@ -7910,7 +8000,7 @@
           <p:cNvPr id="18" name="Rounded Rectangle 17">
             <a:extLst xmlns:a="http://schemas.openxmlformats.org/drawingml/2006/main">
               <a:ext uri="{FF2B5EF4-FFF2-40B4-BE49-F238E27FC236}">
-                <a16:creationId xmlns:a16="http://schemas.microsoft.com/office/drawing/2014/main" id="{35726557-00DD-4284-AFF2-D13417EFF1CC}"/>
+                <a16:creationId xmlns:a16="http://schemas.microsoft.com/office/drawing/2014/main" id="{EEF5ADF8-15E4-4F56-A7EF-0493BA935827}"/>
               </a:ext>
             </a:extLst>
           </p:cNvPr>
@@ -7967,7 +8057,7 @@
           <p:cNvPr id="19" name="TextBox 18">
             <a:extLst xmlns:a="http://schemas.openxmlformats.org/drawingml/2006/main">
               <a:ext uri="{FF2B5EF4-FFF2-40B4-BE49-F238E27FC236}">
-                <a16:creationId xmlns:a16="http://schemas.microsoft.com/office/drawing/2014/main" id="{5AB05CF5-6DC4-45F0-B121-CCA57EAB531B}"/>
+                <a16:creationId xmlns:a16="http://schemas.microsoft.com/office/drawing/2014/main" id="{2EF4E2D6-84A7-40C1-968C-1600E2B71274}"/>
               </a:ext>
             </a:extLst>
           </p:cNvPr>
@@ -8014,7 +8104,7 @@
           <p:cNvPr id="20" name="TextBox 19">
             <a:extLst xmlns:a="http://schemas.openxmlformats.org/drawingml/2006/main">
               <a:ext uri="{FF2B5EF4-FFF2-40B4-BE49-F238E27FC236}">
-                <a16:creationId xmlns:a16="http://schemas.microsoft.com/office/drawing/2014/main" id="{0571925A-AE3B-4F8A-B22D-30ABABBA77A3}"/>
+                <a16:creationId xmlns:a16="http://schemas.microsoft.com/office/drawing/2014/main" id="{15EC9568-E51B-494D-958A-E15BA5F38A2C}"/>
               </a:ext>
             </a:extLst>
           </p:cNvPr>
@@ -8051,7 +8141,7 @@
                 <a:ea typeface="Aptos"/>
                 <a:cs typeface="Aptos"/>
               </a:rPr>
-              <a:t>Kanada 2024: retail 1,219 mrd CAD (≈822,6 milj. EUR; ECB 2024); toimitukset 1,161 mrd CAD (≈783,2 milj. EUR; ECB 2024); kaikki retail-neljännekset E-laatua. NZ on malli; FTC 2021 2,763 mrd USD (≈2,336 mrd EUR; ECB 2021) on valmistajaraportointia. Mittareita ei summata.</a:t>
+              <a:t>Kanada 2024 — retail 1,219160 mrd CAD (≈822,6 milj. EUR; ECB 2024); toimitukset 1,160754 mrd CAD (≈783,2 milj. EUR; ECB 2024); 7/10 (D5/D7/D10 avoinna). FTC 2021: 2,763 mrd USD (≈2,336 mrd EUR; ECB 2021), valmistajaraportointia. Ei summata.</a:t>
             </a:r>
           </a:p>
         </p:txBody>
@@ -8059,7 +8149,7 @@
     </p:spTree>
     <p:extLst>
       <p:ext uri="{BB962C8B-B14F-4D97-AF65-F5344CB8AC3E}">
-        <p14:creationId xmlns:p14="http://schemas.microsoft.com/office/powerpoint/2010/main" val="1745179374"/>
+        <p14:creationId xmlns:p14="http://schemas.microsoft.com/office/powerpoint/2010/main" val="1733210326"/>
       </p:ext>
     </p:extLst>
   </p:cSld>
@@ -8083,7 +8173,7 @@
           <p:cNvPr id="2" name="TextBox 1">
             <a:extLst xmlns:a="http://schemas.openxmlformats.org/drawingml/2006/main">
               <a:ext uri="{FF2B5EF4-FFF2-40B4-BE49-F238E27FC236}">
-                <a16:creationId xmlns:a16="http://schemas.microsoft.com/office/drawing/2014/main" id="{D266565B-CA01-4D28-87E4-B8BDD5299A1A}"/>
+                <a16:creationId xmlns:a16="http://schemas.microsoft.com/office/drawing/2014/main" id="{F6D1683E-8C6F-4D4D-AF8F-A1701D374161}"/>
               </a:ext>
             </a:extLst>
           </p:cNvPr>
@@ -8130,7 +8220,7 @@
           <p:cNvPr id="3" name="TextBox 2">
             <a:extLst xmlns:a="http://schemas.openxmlformats.org/drawingml/2006/main">
               <a:ext uri="{FF2B5EF4-FFF2-40B4-BE49-F238E27FC236}">
-                <a16:creationId xmlns:a16="http://schemas.microsoft.com/office/drawing/2014/main" id="{2B39683A-42A6-4616-863B-A04C2AEC05FC}"/>
+                <a16:creationId xmlns:a16="http://schemas.microsoft.com/office/drawing/2014/main" id="{B95F7289-609F-4D8D-BC2D-0EC4CC4ED88D}"/>
               </a:ext>
             </a:extLst>
           </p:cNvPr>
@@ -8177,7 +8267,7 @@
           <p:cNvPr id="4" name="Rectangle 3">
             <a:extLst xmlns:a="http://schemas.openxmlformats.org/drawingml/2006/main">
               <a:ext uri="{FF2B5EF4-FFF2-40B4-BE49-F238E27FC236}">
-                <a16:creationId xmlns:a16="http://schemas.microsoft.com/office/drawing/2014/main" id="{6ABFD16D-36C6-4FBA-AD44-9C9E20680021}"/>
+                <a16:creationId xmlns:a16="http://schemas.microsoft.com/office/drawing/2014/main" id="{39AAABD6-1EFF-441C-ADF4-F3D0739B5D30}"/>
               </a:ext>
             </a:extLst>
           </p:cNvPr>
@@ -8232,7 +8322,7 @@
           <p:cNvPr id="5" name="Rectangle 4">
             <a:extLst xmlns:a="http://schemas.openxmlformats.org/drawingml/2006/main">
               <a:ext uri="{FF2B5EF4-FFF2-40B4-BE49-F238E27FC236}">
-                <a16:creationId xmlns:a16="http://schemas.microsoft.com/office/drawing/2014/main" id="{4C6919FE-EC1C-4210-BF2A-1279143D4329}"/>
+                <a16:creationId xmlns:a16="http://schemas.microsoft.com/office/drawing/2014/main" id="{489B362A-FA63-4F26-9C90-36728A2513B1}"/>
               </a:ext>
             </a:extLst>
           </p:cNvPr>
@@ -8287,7 +8377,7 @@
           <p:cNvPr id="6" name="TextBox 5">
             <a:extLst xmlns:a="http://schemas.openxmlformats.org/drawingml/2006/main">
               <a:ext uri="{FF2B5EF4-FFF2-40B4-BE49-F238E27FC236}">
-                <a16:creationId xmlns:a16="http://schemas.microsoft.com/office/drawing/2014/main" id="{8ED8FB51-E2A2-4659-9230-5684A3DACB8A}"/>
+                <a16:creationId xmlns:a16="http://schemas.microsoft.com/office/drawing/2014/main" id="{E743F574-4FC5-4A36-A6A2-02F478AEC56A}"/>
               </a:ext>
             </a:extLst>
           </p:cNvPr>
@@ -8324,7 +8414,7 @@
                 <a:ea typeface="Aptos"/>
                 <a:cs typeface="Aptos"/>
               </a:rPr>
-              <a:t>Julkinen riippumaton evidenssikooste · 2026.07.24-22 · 2026-07-24 · Lähteet: Evidence Register; WIPO IP valuation</a:t>
+              <a:t>Julkinen riippumaton evidenssikooste · 2026.07.25-24 · 2026-07-24 · Lähteet: Evidence Register; WIPO IP valuation</a:t>
             </a:r>
           </a:p>
         </p:txBody>
@@ -8334,7 +8424,7 @@
           <p:cNvPr id="7" name="TextBox 6">
             <a:extLst xmlns:a="http://schemas.openxmlformats.org/drawingml/2006/main">
               <a:ext uri="{FF2B5EF4-FFF2-40B4-BE49-F238E27FC236}">
-                <a16:creationId xmlns:a16="http://schemas.microsoft.com/office/drawing/2014/main" id="{943D9C79-9B63-425A-8221-15B118A710DD}"/>
+                <a16:creationId xmlns:a16="http://schemas.microsoft.com/office/drawing/2014/main" id="{310EB744-E45E-43A4-9E04-5547FABFF247}"/>
               </a:ext>
             </a:extLst>
           </p:cNvPr>
@@ -8821,7 +8911,7 @@
           <p:cNvPr id="9" name="TextBox 8">
             <a:extLst xmlns:a="http://schemas.openxmlformats.org/drawingml/2006/main">
               <a:ext uri="{FF2B5EF4-FFF2-40B4-BE49-F238E27FC236}">
-                <a16:creationId xmlns:a16="http://schemas.microsoft.com/office/drawing/2014/main" id="{17220972-7E43-4D92-9A75-F338A1BED759}"/>
+                <a16:creationId xmlns:a16="http://schemas.microsoft.com/office/drawing/2014/main" id="{8A9B071A-0DA9-4613-B9A6-4C1DE247D9DE}"/>
               </a:ext>
             </a:extLst>
           </p:cNvPr>
@@ -8866,7 +8956,7 @@
     </p:spTree>
     <p:extLst>
       <p:ext uri="{BB962C8B-B14F-4D97-AF65-F5344CB8AC3E}">
-        <p14:creationId xmlns:p14="http://schemas.microsoft.com/office/powerpoint/2010/main" val="1396874012"/>
+        <p14:creationId xmlns:p14="http://schemas.microsoft.com/office/powerpoint/2010/main" val="948176683"/>
       </p:ext>
     </p:extLst>
   </p:cSld>
@@ -8897,7 +8987,7 @@
           <p:cNvPr id="2" name="TextBox 1">
             <a:extLst xmlns:a="http://schemas.openxmlformats.org/drawingml/2006/main">
               <a:ext uri="{FF2B5EF4-FFF2-40B4-BE49-F238E27FC236}">
-                <a16:creationId xmlns:a16="http://schemas.microsoft.com/office/drawing/2014/main" id="{2F30DFDA-C360-468C-B09D-2C2069A838AA}"/>
+                <a16:creationId xmlns:a16="http://schemas.microsoft.com/office/drawing/2014/main" id="{7ECE3E98-754A-4DF6-9FC1-C8527483B193}"/>
               </a:ext>
             </a:extLst>
           </p:cNvPr>
@@ -8944,7 +9034,7 @@
           <p:cNvPr id="3" name="TextBox 2">
             <a:extLst xmlns:a="http://schemas.openxmlformats.org/drawingml/2006/main">
               <a:ext uri="{FF2B5EF4-FFF2-40B4-BE49-F238E27FC236}">
-                <a16:creationId xmlns:a16="http://schemas.microsoft.com/office/drawing/2014/main" id="{DE45680E-CF15-4EDB-8C46-B170C6DB7620}"/>
+                <a16:creationId xmlns:a16="http://schemas.microsoft.com/office/drawing/2014/main" id="{7804E52D-71DB-4D27-A500-6A9A4540AC37}"/>
               </a:ext>
             </a:extLst>
           </p:cNvPr>
@@ -8991,7 +9081,7 @@
           <p:cNvPr id="4" name="TextBox 3">
             <a:extLst xmlns:a="http://schemas.openxmlformats.org/drawingml/2006/main">
               <a:ext uri="{FF2B5EF4-FFF2-40B4-BE49-F238E27FC236}">
-                <a16:creationId xmlns:a16="http://schemas.microsoft.com/office/drawing/2014/main" id="{08144420-7802-4E12-AF06-52D4B675886D}"/>
+                <a16:creationId xmlns:a16="http://schemas.microsoft.com/office/drawing/2014/main" id="{12D65DCE-D224-4425-BF94-041F8682DF39}"/>
               </a:ext>
             </a:extLst>
           </p:cNvPr>
@@ -9110,7 +9200,7 @@
           <p:cNvPr id="5" name="TextBox 4">
             <a:extLst xmlns:a="http://schemas.openxmlformats.org/drawingml/2006/main">
               <a:ext uri="{FF2B5EF4-FFF2-40B4-BE49-F238E27FC236}">
-                <a16:creationId xmlns:a16="http://schemas.microsoft.com/office/drawing/2014/main" id="{32FD1CE5-11CE-4C12-A1E6-75D56192D33A}"/>
+                <a16:creationId xmlns:a16="http://schemas.microsoft.com/office/drawing/2014/main" id="{6F47CFFF-8A68-4A26-97F0-D2833C773B9B}"/>
               </a:ext>
             </a:extLst>
           </p:cNvPr>
@@ -9147,7 +9237,7 @@
                 <a:ea typeface="Aptos"/>
                 <a:cs typeface="Aptos"/>
               </a:rPr>
-              <a:t>Versio 2026.07.24-22 · 2026-07-24 · 6 / 6</a:t>
+              <a:t>Versio 2026.07.25-24 · 2026-07-24 · 6 / 6</a:t>
             </a:r>
           </a:p>
         </p:txBody>
@@ -9155,7 +9245,7 @@
     </p:spTree>
     <p:extLst>
       <p:ext uri="{BB962C8B-B14F-4D97-AF65-F5344CB8AC3E}">
-        <p14:creationId xmlns:p14="http://schemas.microsoft.com/office/powerpoint/2010/main" val="171370082"/>
+        <p14:creationId xmlns:p14="http://schemas.microsoft.com/office/powerpoint/2010/main" val="1599639040"/>
       </p:ext>
     </p:extLst>
   </p:cSld>

--- a/site/downloads/pixan-bank-deck-short-fi.pptx
+++ b/site/downloads/pixan-bank-deck-short-fi.pptx
@@ -2,18 +2,18 @@
 <file path=ppt/presentation.xml><?xml version="1.0" encoding="utf-8"?>
 <p:presentation xmlns:p="http://schemas.openxmlformats.org/presentationml/2006/main">
   <p:sldMasterIdLst>
-    <p:sldMasterId xmlns:r="http://schemas.openxmlformats.org/officeDocument/2006/relationships" id="2147483648" r:id="R5a30cd331b044e05"/>
+    <p:sldMasterId xmlns:r="http://schemas.openxmlformats.org/officeDocument/2006/relationships" id="2147483648" r:id="R75576e6f46b847a5"/>
   </p:sldMasterIdLst>
   <p:notesMasterIdLst>
-    <p:notesMasterId xmlns:r="http://schemas.openxmlformats.org/officeDocument/2006/relationships" r:id="R86dec381d10e4b56"/>
+    <p:notesMasterId xmlns:r="http://schemas.openxmlformats.org/officeDocument/2006/relationships" r:id="R675f4ed44f0143d8"/>
   </p:notesMasterIdLst>
   <p:sldIdLst>
-    <p:sldId xmlns:r="http://schemas.openxmlformats.org/officeDocument/2006/relationships" id="256" r:id="Rb6ff2a0fbfc34799"/>
-    <p:sldId xmlns:r="http://schemas.openxmlformats.org/officeDocument/2006/relationships" id="257" r:id="R0d653f5752a048f2"/>
-    <p:sldId xmlns:r="http://schemas.openxmlformats.org/officeDocument/2006/relationships" id="258" r:id="Rb0676316a5e14ba9"/>
-    <p:sldId xmlns:r="http://schemas.openxmlformats.org/officeDocument/2006/relationships" id="259" r:id="R7ba28d222199424f"/>
-    <p:sldId xmlns:r="http://schemas.openxmlformats.org/officeDocument/2006/relationships" id="260" r:id="R3226085b73ab4441"/>
-    <p:sldId xmlns:r="http://schemas.openxmlformats.org/officeDocument/2006/relationships" id="261" r:id="R8956fe67f78e44d8"/>
+    <p:sldId xmlns:r="http://schemas.openxmlformats.org/officeDocument/2006/relationships" id="256" r:id="Re2e64921747b4228"/>
+    <p:sldId xmlns:r="http://schemas.openxmlformats.org/officeDocument/2006/relationships" id="257" r:id="Rdd20fce9e8794f36"/>
+    <p:sldId xmlns:r="http://schemas.openxmlformats.org/officeDocument/2006/relationships" id="258" r:id="R3789be3bc022447b"/>
+    <p:sldId xmlns:r="http://schemas.openxmlformats.org/officeDocument/2006/relationships" id="259" r:id="R4515232679f64976"/>
+    <p:sldId xmlns:r="http://schemas.openxmlformats.org/officeDocument/2006/relationships" id="260" r:id="Rb46cccb3e4da4869"/>
+    <p:sldId xmlns:r="http://schemas.openxmlformats.org/officeDocument/2006/relationships" id="261" r:id="R334ba640266d48eb"/>
   </p:sldIdLst>
   <p:sldSz cx="12191999" cy="6858000"/>
   <p:notesSz cx="6858000" cy="9144000"/>
@@ -500,6 +500,16 @@
           </a:p>
           <a:p xmlns:a="http://schemas.openxmlformats.org/drawingml/2006/main">
             <a:r>
+              <a:t>- https://www.health.govt.nz/regulation-legislation/vaping-herbal-smoking-and-smokeless-tobacco/requirements/complete-a-notifiable-product-annual-return</a:t>
+            </a:r>
+          </a:p>
+          <a:p xmlns:a="http://schemas.openxmlformats.org/drawingml/2006/main">
+            <a:r>
+              <a:t>- https://www.health.govt.nz/system/files/2024-12/2024-annual-returns-user-guide.pdf</a:t>
+            </a:r>
+          </a:p>
+          <a:p xmlns:a="http://schemas.openxmlformats.org/drawingml/2006/main">
+            <a:r>
               <a:t>- https://www150.statcan.gc.ca/t1/tbl1/en/tv.action?pid=2010007101</a:t>
             </a:r>
           </a:p>
@@ -690,6 +700,16 @@
           </a:p>
           <a:p xmlns:a="http://schemas.openxmlformats.org/drawingml/2006/main">
             <a:r>
+              <a:t>- https://www.health.govt.nz/regulation-legislation/vaping-herbal-smoking-and-smokeless-tobacco/requirements/complete-a-notifiable-product-annual-return</a:t>
+            </a:r>
+          </a:p>
+          <a:p xmlns:a="http://schemas.openxmlformats.org/drawingml/2006/main">
+            <a:r>
+              <a:t>- https://www.health.govt.nz/system/files/2024-12/2024-annual-returns-user-guide.pdf</a:t>
+            </a:r>
+          </a:p>
+          <a:p xmlns:a="http://schemas.openxmlformats.org/drawingml/2006/main">
+            <a:r>
               <a:t>- https://www150.statcan.gc.ca/t1/tbl1/en/tv.action?pid=2010007101</a:t>
             </a:r>
           </a:p>
@@ -880,6 +900,16 @@
           </a:p>
           <a:p xmlns:a="http://schemas.openxmlformats.org/drawingml/2006/main">
             <a:r>
+              <a:t>- https://www.health.govt.nz/regulation-legislation/vaping-herbal-smoking-and-smokeless-tobacco/requirements/complete-a-notifiable-product-annual-return</a:t>
+            </a:r>
+          </a:p>
+          <a:p xmlns:a="http://schemas.openxmlformats.org/drawingml/2006/main">
+            <a:r>
+              <a:t>- https://www.health.govt.nz/system/files/2024-12/2024-annual-returns-user-guide.pdf</a:t>
+            </a:r>
+          </a:p>
+          <a:p xmlns:a="http://schemas.openxmlformats.org/drawingml/2006/main">
+            <a:r>
               <a:t>- https://www150.statcan.gc.ca/t1/tbl1/en/tv.action?pid=2010007101</a:t>
             </a:r>
           </a:p>
@@ -1070,6 +1100,16 @@
           </a:p>
           <a:p xmlns:a="http://schemas.openxmlformats.org/drawingml/2006/main">
             <a:r>
+              <a:t>- https://www.health.govt.nz/regulation-legislation/vaping-herbal-smoking-and-smokeless-tobacco/requirements/complete-a-notifiable-product-annual-return</a:t>
+            </a:r>
+          </a:p>
+          <a:p xmlns:a="http://schemas.openxmlformats.org/drawingml/2006/main">
+            <a:r>
+              <a:t>- https://www.health.govt.nz/system/files/2024-12/2024-annual-returns-user-guide.pdf</a:t>
+            </a:r>
+          </a:p>
+          <a:p xmlns:a="http://schemas.openxmlformats.org/drawingml/2006/main">
+            <a:r>
               <a:t>- https://www150.statcan.gc.ca/t1/tbl1/en/tv.action?pid=2010007101</a:t>
             </a:r>
           </a:p>
@@ -1260,6 +1300,16 @@
           </a:p>
           <a:p xmlns:a="http://schemas.openxmlformats.org/drawingml/2006/main">
             <a:r>
+              <a:t>- https://www.health.govt.nz/regulation-legislation/vaping-herbal-smoking-and-smokeless-tobacco/requirements/complete-a-notifiable-product-annual-return</a:t>
+            </a:r>
+          </a:p>
+          <a:p xmlns:a="http://schemas.openxmlformats.org/drawingml/2006/main">
+            <a:r>
+              <a:t>- https://www.health.govt.nz/system/files/2024-12/2024-annual-returns-user-guide.pdf</a:t>
+            </a:r>
+          </a:p>
+          <a:p xmlns:a="http://schemas.openxmlformats.org/drawingml/2006/main">
+            <a:r>
               <a:t>- https://www150.statcan.gc.ca/t1/tbl1/en/tv.action?pid=2010007101</a:t>
             </a:r>
           </a:p>
@@ -1450,6 +1500,16 @@
           </a:p>
           <a:p xmlns:a="http://schemas.openxmlformats.org/drawingml/2006/main">
             <a:r>
+              <a:t>- https://www.health.govt.nz/regulation-legislation/vaping-herbal-smoking-and-smokeless-tobacco/requirements/complete-a-notifiable-product-annual-return</a:t>
+            </a:r>
+          </a:p>
+          <a:p xmlns:a="http://schemas.openxmlformats.org/drawingml/2006/main">
+            <a:r>
+              <a:t>- https://www.health.govt.nz/system/files/2024-12/2024-annual-returns-user-guide.pdf</a:t>
+            </a:r>
+          </a:p>
+          <a:p xmlns:a="http://schemas.openxmlformats.org/drawingml/2006/main">
+            <a:r>
               <a:t>- https://www150.statcan.gc.ca/t1/tbl1/en/tv.action?pid=2010007101</a:t>
             </a:r>
           </a:p>
@@ -1587,7 +1647,7 @@
           <p:cNvPr id="2" name="Title 1">
             <a:extLst xmlns:a="http://schemas.openxmlformats.org/drawingml/2006/main">
               <a:ext uri="{FF2B5EF4-FFF2-40B4-BE49-F238E27FC236}">
-                <a16:creationId xmlns:a16="http://schemas.microsoft.com/office/drawing/2014/main" id="{9A4BFDF2-B755-4FF4-8D4E-6D8ADED8FB1D}"/>
+                <a16:creationId xmlns:a16="http://schemas.microsoft.com/office/drawing/2014/main" id="{9CD154D0-911B-4641-BC14-EA7522D11C42}"/>
               </a:ext>
             </a:extLst>
           </p:cNvPr>
@@ -1619,7 +1679,7 @@
           <p:cNvPr id="3" name="Subtitle 2">
             <a:extLst xmlns:a="http://schemas.openxmlformats.org/drawingml/2006/main">
               <a:ext uri="{FF2B5EF4-FFF2-40B4-BE49-F238E27FC236}">
-                <a16:creationId xmlns:a16="http://schemas.microsoft.com/office/drawing/2014/main" id="{5DBEF6E2-DBAB-4988-A984-43E889A3EDA5}"/>
+                <a16:creationId xmlns:a16="http://schemas.microsoft.com/office/drawing/2014/main" id="{E761DEF6-B685-4AAD-A7E1-19F711DF7C0C}"/>
               </a:ext>
             </a:extLst>
           </p:cNvPr>
@@ -1742,7 +1802,7 @@
           <p:cNvPr id="4" name="Date Placeholder 3">
             <a:extLst xmlns:a="http://schemas.openxmlformats.org/drawingml/2006/main">
               <a:ext uri="{FF2B5EF4-FFF2-40B4-BE49-F238E27FC236}">
-                <a16:creationId xmlns:a16="http://schemas.microsoft.com/office/drawing/2014/main" id="{EF06886C-5DD2-4118-940A-53309E3D103D}"/>
+                <a16:creationId xmlns:a16="http://schemas.microsoft.com/office/drawing/2014/main" id="{C84A1742-F0EB-4934-B16F-225DE08D4D3E}"/>
               </a:ext>
             </a:extLst>
           </p:cNvPr>
@@ -1769,7 +1829,7 @@
           <p:cNvPr id="5" name="Footer Placeholder 4">
             <a:extLst xmlns:a="http://schemas.openxmlformats.org/drawingml/2006/main">
               <a:ext uri="{FF2B5EF4-FFF2-40B4-BE49-F238E27FC236}">
-                <a16:creationId xmlns:a16="http://schemas.microsoft.com/office/drawing/2014/main" id="{77408169-3C35-42F8-B9CB-AE2A727BB656}"/>
+                <a16:creationId xmlns:a16="http://schemas.microsoft.com/office/drawing/2014/main" id="{064F1EB7-1DE7-4C46-A70C-2C8C18F5718D}"/>
               </a:ext>
             </a:extLst>
           </p:cNvPr>
@@ -1792,7 +1852,7 @@
           <p:cNvPr id="6" name="Slide Number Placeholder 5">
             <a:extLst xmlns:a="http://schemas.openxmlformats.org/drawingml/2006/main">
               <a:ext uri="{FF2B5EF4-FFF2-40B4-BE49-F238E27FC236}">
-                <a16:creationId xmlns:a16="http://schemas.microsoft.com/office/drawing/2014/main" id="{C09F951A-CB1A-4BE0-8A16-AD19E54CD5B7}"/>
+                <a16:creationId xmlns:a16="http://schemas.microsoft.com/office/drawing/2014/main" id="{638410A3-0DE6-4459-B516-EDC864861F1D}"/>
               </a:ext>
             </a:extLst>
           </p:cNvPr>
@@ -1836,7 +1896,7 @@
           <p:cNvPr id="2" name="Title 1">
             <a:extLst xmlns:a="http://schemas.openxmlformats.org/drawingml/2006/main">
               <a:ext uri="{FF2B5EF4-FFF2-40B4-BE49-F238E27FC236}">
-                <a16:creationId xmlns:a16="http://schemas.microsoft.com/office/drawing/2014/main" id="{03FB4D90-8869-4125-9873-DBAC9EFDA7AB}"/>
+                <a16:creationId xmlns:a16="http://schemas.microsoft.com/office/drawing/2014/main" id="{01670EB7-AB7D-466E-91DC-B8169FF02249}"/>
               </a:ext>
             </a:extLst>
           </p:cNvPr>
@@ -1863,7 +1923,7 @@
           <p:cNvPr id="3" name="Vertical Text Placeholder 2">
             <a:extLst xmlns:a="http://schemas.openxmlformats.org/drawingml/2006/main">
               <a:ext uri="{FF2B5EF4-FFF2-40B4-BE49-F238E27FC236}">
-                <a16:creationId xmlns:a16="http://schemas.microsoft.com/office/drawing/2014/main" id="{88C14775-02CC-4DE8-969D-98D7CC77DF35}"/>
+                <a16:creationId xmlns:a16="http://schemas.microsoft.com/office/drawing/2014/main" id="{62C14E57-74CE-47B4-90E7-28D7D605A992}"/>
               </a:ext>
             </a:extLst>
           </p:cNvPr>
@@ -1925,7 +1985,7 @@
           <p:cNvPr id="4" name="Date Placeholder 3">
             <a:extLst xmlns:a="http://schemas.openxmlformats.org/drawingml/2006/main">
               <a:ext uri="{FF2B5EF4-FFF2-40B4-BE49-F238E27FC236}">
-                <a16:creationId xmlns:a16="http://schemas.microsoft.com/office/drawing/2014/main" id="{72D7BD6E-ADE5-452D-8520-CFBCFF147130}"/>
+                <a16:creationId xmlns:a16="http://schemas.microsoft.com/office/drawing/2014/main" id="{4845A612-E906-4150-BA45-F085C7F82F0C}"/>
               </a:ext>
             </a:extLst>
           </p:cNvPr>
@@ -1952,7 +2012,7 @@
           <p:cNvPr id="5" name="Footer Placeholder 4">
             <a:extLst xmlns:a="http://schemas.openxmlformats.org/drawingml/2006/main">
               <a:ext uri="{FF2B5EF4-FFF2-40B4-BE49-F238E27FC236}">
-                <a16:creationId xmlns:a16="http://schemas.microsoft.com/office/drawing/2014/main" id="{C221D296-E7AE-415A-B659-3EAC3E992F97}"/>
+                <a16:creationId xmlns:a16="http://schemas.microsoft.com/office/drawing/2014/main" id="{A65BC30D-8DCB-4B40-93F0-B05FFD529815}"/>
               </a:ext>
             </a:extLst>
           </p:cNvPr>
@@ -1975,7 +2035,7 @@
           <p:cNvPr id="6" name="Slide Number Placeholder 5">
             <a:extLst xmlns:a="http://schemas.openxmlformats.org/drawingml/2006/main">
               <a:ext uri="{FF2B5EF4-FFF2-40B4-BE49-F238E27FC236}">
-                <a16:creationId xmlns:a16="http://schemas.microsoft.com/office/drawing/2014/main" id="{D2EB2A8A-38DE-4FBA-99DF-89E3F06F8CA3}"/>
+                <a16:creationId xmlns:a16="http://schemas.microsoft.com/office/drawing/2014/main" id="{65249076-5061-41A7-8086-F7C3A6F944DC}"/>
               </a:ext>
             </a:extLst>
           </p:cNvPr>
@@ -2019,7 +2079,7 @@
           <p:cNvPr id="2" name="Vertical Title 1">
             <a:extLst xmlns:a="http://schemas.openxmlformats.org/drawingml/2006/main">
               <a:ext uri="{FF2B5EF4-FFF2-40B4-BE49-F238E27FC236}">
-                <a16:creationId xmlns:a16="http://schemas.microsoft.com/office/drawing/2014/main" id="{2307EEE4-5EF8-4B9E-974C-78EDF037CB2B}"/>
+                <a16:creationId xmlns:a16="http://schemas.microsoft.com/office/drawing/2014/main" id="{9B898A81-12F2-4622-B7D7-C49FAC34360C}"/>
               </a:ext>
             </a:extLst>
           </p:cNvPr>
@@ -2051,7 +2111,7 @@
           <p:cNvPr id="3" name="Vertical Text Placeholder 2">
             <a:extLst xmlns:a="http://schemas.openxmlformats.org/drawingml/2006/main">
               <a:ext uri="{FF2B5EF4-FFF2-40B4-BE49-F238E27FC236}">
-                <a16:creationId xmlns:a16="http://schemas.microsoft.com/office/drawing/2014/main" id="{90CB1760-CBD5-4940-8478-DC000E5DFBE6}"/>
+                <a16:creationId xmlns:a16="http://schemas.microsoft.com/office/drawing/2014/main" id="{D4D330FA-8078-4FA1-B39A-FFC6FC4D0AB7}"/>
               </a:ext>
             </a:extLst>
           </p:cNvPr>
@@ -2118,7 +2178,7 @@
           <p:cNvPr id="4" name="Date Placeholder 3">
             <a:extLst xmlns:a="http://schemas.openxmlformats.org/drawingml/2006/main">
               <a:ext uri="{FF2B5EF4-FFF2-40B4-BE49-F238E27FC236}">
-                <a16:creationId xmlns:a16="http://schemas.microsoft.com/office/drawing/2014/main" id="{820B6B7C-36E9-41E8-8332-D9D02C64B3C9}"/>
+                <a16:creationId xmlns:a16="http://schemas.microsoft.com/office/drawing/2014/main" id="{308F5487-EAC3-48DD-85A4-E4A2F3CF0F33}"/>
               </a:ext>
             </a:extLst>
           </p:cNvPr>
@@ -2145,7 +2205,7 @@
           <p:cNvPr id="5" name="Footer Placeholder 4">
             <a:extLst xmlns:a="http://schemas.openxmlformats.org/drawingml/2006/main">
               <a:ext uri="{FF2B5EF4-FFF2-40B4-BE49-F238E27FC236}">
-                <a16:creationId xmlns:a16="http://schemas.microsoft.com/office/drawing/2014/main" id="{7F4B386D-155D-4060-92FB-9E7E7B594D78}"/>
+                <a16:creationId xmlns:a16="http://schemas.microsoft.com/office/drawing/2014/main" id="{48A1FC03-58C0-4442-B4CF-FECDE901CC3F}"/>
               </a:ext>
             </a:extLst>
           </p:cNvPr>
@@ -2168,7 +2228,7 @@
           <p:cNvPr id="6" name="Slide Number Placeholder 5">
             <a:extLst xmlns:a="http://schemas.openxmlformats.org/drawingml/2006/main">
               <a:ext uri="{FF2B5EF4-FFF2-40B4-BE49-F238E27FC236}">
-                <a16:creationId xmlns:a16="http://schemas.microsoft.com/office/drawing/2014/main" id="{AAC61983-C810-4BBF-B3A9-ACCF82D99BFE}"/>
+                <a16:creationId xmlns:a16="http://schemas.microsoft.com/office/drawing/2014/main" id="{C3C7D1F5-162B-4934-851E-6B139A4956BC}"/>
               </a:ext>
             </a:extLst>
           </p:cNvPr>
@@ -2212,7 +2272,7 @@
           <p:cNvPr id="2" name="Title 1">
             <a:extLst xmlns:a="http://schemas.openxmlformats.org/drawingml/2006/main">
               <a:ext uri="{FF2B5EF4-FFF2-40B4-BE49-F238E27FC236}">
-                <a16:creationId xmlns:a16="http://schemas.microsoft.com/office/drawing/2014/main" id="{A382905E-04CA-448B-9058-64D6FD213750}"/>
+                <a16:creationId xmlns:a16="http://schemas.microsoft.com/office/drawing/2014/main" id="{6D16D5AE-9E71-438B-8732-5A89E919FBF6}"/>
               </a:ext>
             </a:extLst>
           </p:cNvPr>
@@ -2239,7 +2299,7 @@
           <p:cNvPr id="3" name="Content Placeholder 2">
             <a:extLst xmlns:a="http://schemas.openxmlformats.org/drawingml/2006/main">
               <a:ext uri="{FF2B5EF4-FFF2-40B4-BE49-F238E27FC236}">
-                <a16:creationId xmlns:a16="http://schemas.microsoft.com/office/drawing/2014/main" id="{96293339-322D-463F-B5E2-CD4A5829F105}"/>
+                <a16:creationId xmlns:a16="http://schemas.microsoft.com/office/drawing/2014/main" id="{157E97FC-3A2A-40D6-9250-1C379ECC5EF7}"/>
               </a:ext>
             </a:extLst>
           </p:cNvPr>
@@ -2301,7 +2361,7 @@
           <p:cNvPr id="4" name="Date Placeholder 3">
             <a:extLst xmlns:a="http://schemas.openxmlformats.org/drawingml/2006/main">
               <a:ext uri="{FF2B5EF4-FFF2-40B4-BE49-F238E27FC236}">
-                <a16:creationId xmlns:a16="http://schemas.microsoft.com/office/drawing/2014/main" id="{07AAE306-78D6-4CDF-B4FD-5DB9FC2205F1}"/>
+                <a16:creationId xmlns:a16="http://schemas.microsoft.com/office/drawing/2014/main" id="{2AD00C01-B3BB-4BDD-900D-0A7C5AB3F301}"/>
               </a:ext>
             </a:extLst>
           </p:cNvPr>
@@ -2328,7 +2388,7 @@
           <p:cNvPr id="5" name="Footer Placeholder 4">
             <a:extLst xmlns:a="http://schemas.openxmlformats.org/drawingml/2006/main">
               <a:ext uri="{FF2B5EF4-FFF2-40B4-BE49-F238E27FC236}">
-                <a16:creationId xmlns:a16="http://schemas.microsoft.com/office/drawing/2014/main" id="{59C0609E-BD49-4B59-ADC6-40298DEABB76}"/>
+                <a16:creationId xmlns:a16="http://schemas.microsoft.com/office/drawing/2014/main" id="{7CDD0562-C32E-49F9-9C51-B396183C9889}"/>
               </a:ext>
             </a:extLst>
           </p:cNvPr>
@@ -2351,7 +2411,7 @@
           <p:cNvPr id="6" name="Slide Number Placeholder 5">
             <a:extLst xmlns:a="http://schemas.openxmlformats.org/drawingml/2006/main">
               <a:ext uri="{FF2B5EF4-FFF2-40B4-BE49-F238E27FC236}">
-                <a16:creationId xmlns:a16="http://schemas.microsoft.com/office/drawing/2014/main" id="{5A1C2C6F-3A52-4CDA-A26A-1A4B34F42802}"/>
+                <a16:creationId xmlns:a16="http://schemas.microsoft.com/office/drawing/2014/main" id="{7569BBBD-06E8-4C04-9CA2-49A3A60F8A71}"/>
               </a:ext>
             </a:extLst>
           </p:cNvPr>
@@ -2395,7 +2455,7 @@
           <p:cNvPr id="2" name="Title 1">
             <a:extLst xmlns:a="http://schemas.openxmlformats.org/drawingml/2006/main">
               <a:ext uri="{FF2B5EF4-FFF2-40B4-BE49-F238E27FC236}">
-                <a16:creationId xmlns:a16="http://schemas.microsoft.com/office/drawing/2014/main" id="{63E319C8-B965-4FC0-880E-6CB5B31FFB2B}"/>
+                <a16:creationId xmlns:a16="http://schemas.microsoft.com/office/drawing/2014/main" id="{308C84EC-F190-4F43-9A35-164D63159D9C}"/>
               </a:ext>
             </a:extLst>
           </p:cNvPr>
@@ -2432,7 +2492,7 @@
           <p:cNvPr id="3" name="Text Placeholder 2">
             <a:extLst xmlns:a="http://schemas.openxmlformats.org/drawingml/2006/main">
               <a:ext uri="{FF2B5EF4-FFF2-40B4-BE49-F238E27FC236}">
-                <a16:creationId xmlns:a16="http://schemas.microsoft.com/office/drawing/2014/main" id="{190EECC1-15AA-489E-A5E2-4AC2C48F1E67}"/>
+                <a16:creationId xmlns:a16="http://schemas.microsoft.com/office/drawing/2014/main" id="{4ACBDB3E-52F8-4CAE-A41F-A65B5B4B3A62}"/>
               </a:ext>
             </a:extLst>
           </p:cNvPr>
@@ -2558,7 +2618,7 @@
           <p:cNvPr id="4" name="Date Placeholder 3">
             <a:extLst xmlns:a="http://schemas.openxmlformats.org/drawingml/2006/main">
               <a:ext uri="{FF2B5EF4-FFF2-40B4-BE49-F238E27FC236}">
-                <a16:creationId xmlns:a16="http://schemas.microsoft.com/office/drawing/2014/main" id="{0F448C5F-333D-434E-8AAD-9C529965CC97}"/>
+                <a16:creationId xmlns:a16="http://schemas.microsoft.com/office/drawing/2014/main" id="{542B3C4B-64D7-4D1D-9605-CDC9562617B2}"/>
               </a:ext>
             </a:extLst>
           </p:cNvPr>
@@ -2585,7 +2645,7 @@
           <p:cNvPr id="5" name="Footer Placeholder 4">
             <a:extLst xmlns:a="http://schemas.openxmlformats.org/drawingml/2006/main">
               <a:ext uri="{FF2B5EF4-FFF2-40B4-BE49-F238E27FC236}">
-                <a16:creationId xmlns:a16="http://schemas.microsoft.com/office/drawing/2014/main" id="{D344736A-A7DA-49E8-89E5-26CFDC51D677}"/>
+                <a16:creationId xmlns:a16="http://schemas.microsoft.com/office/drawing/2014/main" id="{C00FAAF6-D7B2-4E06-9965-FAC9596AD826}"/>
               </a:ext>
             </a:extLst>
           </p:cNvPr>
@@ -2608,7 +2668,7 @@
           <p:cNvPr id="6" name="Slide Number Placeholder 5">
             <a:extLst xmlns:a="http://schemas.openxmlformats.org/drawingml/2006/main">
               <a:ext uri="{FF2B5EF4-FFF2-40B4-BE49-F238E27FC236}">
-                <a16:creationId xmlns:a16="http://schemas.microsoft.com/office/drawing/2014/main" id="{2E61DC2C-1A06-4E10-9651-6031F3054E88}"/>
+                <a16:creationId xmlns:a16="http://schemas.microsoft.com/office/drawing/2014/main" id="{D62B69C0-0D89-470E-8F9C-5C39CD5F2E44}"/>
               </a:ext>
             </a:extLst>
           </p:cNvPr>
@@ -2652,7 +2712,7 @@
           <p:cNvPr id="2" name="Title 1">
             <a:extLst xmlns:a="http://schemas.openxmlformats.org/drawingml/2006/main">
               <a:ext uri="{FF2B5EF4-FFF2-40B4-BE49-F238E27FC236}">
-                <a16:creationId xmlns:a16="http://schemas.microsoft.com/office/drawing/2014/main" id="{10D1FE31-5CC2-408C-9FA0-EE11BB14A8AF}"/>
+                <a16:creationId xmlns:a16="http://schemas.microsoft.com/office/drawing/2014/main" id="{776736AE-CFBC-4B09-9E19-CE2FFC1A63C1}"/>
               </a:ext>
             </a:extLst>
           </p:cNvPr>
@@ -2679,7 +2739,7 @@
           <p:cNvPr id="3" name="Content Placeholder 2">
             <a:extLst xmlns:a="http://schemas.openxmlformats.org/drawingml/2006/main">
               <a:ext uri="{FF2B5EF4-FFF2-40B4-BE49-F238E27FC236}">
-                <a16:creationId xmlns:a16="http://schemas.microsoft.com/office/drawing/2014/main" id="{4EC16D67-19A1-4A22-9453-9F8F8D3ECF91}"/>
+                <a16:creationId xmlns:a16="http://schemas.microsoft.com/office/drawing/2014/main" id="{61945838-1911-4847-A481-E403BA45A2F8}"/>
               </a:ext>
             </a:extLst>
           </p:cNvPr>
@@ -2783,7 +2843,7 @@
           <p:cNvPr id="4" name="Content Placeholder 3">
             <a:extLst xmlns:a="http://schemas.openxmlformats.org/drawingml/2006/main">
               <a:ext uri="{FF2B5EF4-FFF2-40B4-BE49-F238E27FC236}">
-                <a16:creationId xmlns:a16="http://schemas.microsoft.com/office/drawing/2014/main" id="{314C6F2E-2D57-4A14-A2AF-5F7B9B4F08FE}"/>
+                <a16:creationId xmlns:a16="http://schemas.microsoft.com/office/drawing/2014/main" id="{A9D78F72-5A49-4B3C-9298-1F555FDF402C}"/>
               </a:ext>
             </a:extLst>
           </p:cNvPr>
@@ -2887,7 +2947,7 @@
           <p:cNvPr id="5" name="Date Placeholder 4">
             <a:extLst xmlns:a="http://schemas.openxmlformats.org/drawingml/2006/main">
               <a:ext uri="{FF2B5EF4-FFF2-40B4-BE49-F238E27FC236}">
-                <a16:creationId xmlns:a16="http://schemas.microsoft.com/office/drawing/2014/main" id="{A1DE465D-5B03-4099-859A-8145F5825AAA}"/>
+                <a16:creationId xmlns:a16="http://schemas.microsoft.com/office/drawing/2014/main" id="{5B147C51-A2E2-465D-B7D3-F05528DF0112}"/>
               </a:ext>
             </a:extLst>
           </p:cNvPr>
@@ -2914,7 +2974,7 @@
           <p:cNvPr id="6" name="Footer Placeholder 5">
             <a:extLst xmlns:a="http://schemas.openxmlformats.org/drawingml/2006/main">
               <a:ext uri="{FF2B5EF4-FFF2-40B4-BE49-F238E27FC236}">
-                <a16:creationId xmlns:a16="http://schemas.microsoft.com/office/drawing/2014/main" id="{A3FD7384-C97B-4D4D-B9A2-A7B40C24A7AC}"/>
+                <a16:creationId xmlns:a16="http://schemas.microsoft.com/office/drawing/2014/main" id="{34BA766E-2329-4774-AC90-F9AFD6D12527}"/>
               </a:ext>
             </a:extLst>
           </p:cNvPr>
@@ -2937,7 +2997,7 @@
           <p:cNvPr id="7" name="Slide Number Placeholder 6">
             <a:extLst xmlns:a="http://schemas.openxmlformats.org/drawingml/2006/main">
               <a:ext uri="{FF2B5EF4-FFF2-40B4-BE49-F238E27FC236}">
-                <a16:creationId xmlns:a16="http://schemas.microsoft.com/office/drawing/2014/main" id="{20533EC3-4DB1-4828-9E76-8B0E6CCDC3D2}"/>
+                <a16:creationId xmlns:a16="http://schemas.microsoft.com/office/drawing/2014/main" id="{084512CA-34A2-4BC7-9666-3928F71F5FB1}"/>
               </a:ext>
             </a:extLst>
           </p:cNvPr>
@@ -2981,7 +3041,7 @@
           <p:cNvPr id="2" name="Title 1">
             <a:extLst xmlns:a="http://schemas.openxmlformats.org/drawingml/2006/main">
               <a:ext uri="{FF2B5EF4-FFF2-40B4-BE49-F238E27FC236}">
-                <a16:creationId xmlns:a16="http://schemas.microsoft.com/office/drawing/2014/main" id="{6AFE9685-B4F1-49F4-91C5-963F978DF73D}"/>
+                <a16:creationId xmlns:a16="http://schemas.microsoft.com/office/drawing/2014/main" id="{71E95CF6-67AE-4F4A-9C9C-021FE62D8F3E}"/>
               </a:ext>
             </a:extLst>
           </p:cNvPr>
@@ -3013,7 +3073,7 @@
           <p:cNvPr id="3" name="Text Placeholder 2">
             <a:extLst xmlns:a="http://schemas.openxmlformats.org/drawingml/2006/main">
               <a:ext uri="{FF2B5EF4-FFF2-40B4-BE49-F238E27FC236}">
-                <a16:creationId xmlns:a16="http://schemas.microsoft.com/office/drawing/2014/main" id="{43761092-4138-4C4A-8729-9C40041B4340}"/>
+                <a16:creationId xmlns:a16="http://schemas.microsoft.com/office/drawing/2014/main" id="{16102D88-8127-4EEA-82EF-9B9CDC5D01A8}"/>
               </a:ext>
             </a:extLst>
           </p:cNvPr>
@@ -3085,7 +3145,7 @@
           <p:cNvPr id="4" name="Content Placeholder 3">
             <a:extLst xmlns:a="http://schemas.openxmlformats.org/drawingml/2006/main">
               <a:ext uri="{FF2B5EF4-FFF2-40B4-BE49-F238E27FC236}">
-                <a16:creationId xmlns:a16="http://schemas.microsoft.com/office/drawing/2014/main" id="{A5057AA5-C864-4C54-AB90-3E6A07BD526D}"/>
+                <a16:creationId xmlns:a16="http://schemas.microsoft.com/office/drawing/2014/main" id="{0EF90C45-D02A-4798-ADC9-8360070A3DF7}"/>
               </a:ext>
             </a:extLst>
           </p:cNvPr>
@@ -3189,7 +3249,7 @@
           <p:cNvPr id="5" name="Text Placeholder 4">
             <a:extLst xmlns:a="http://schemas.openxmlformats.org/drawingml/2006/main">
               <a:ext uri="{FF2B5EF4-FFF2-40B4-BE49-F238E27FC236}">
-                <a16:creationId xmlns:a16="http://schemas.microsoft.com/office/drawing/2014/main" id="{5D89A88F-6CF3-4425-B366-A6911B9ACCD5}"/>
+                <a16:creationId xmlns:a16="http://schemas.microsoft.com/office/drawing/2014/main" id="{9096EE1B-3EAA-41E1-AD55-BB81EE64CDFC}"/>
               </a:ext>
             </a:extLst>
           </p:cNvPr>
@@ -3261,7 +3321,7 @@
           <p:cNvPr id="6" name="Content Placeholder 5">
             <a:extLst xmlns:a="http://schemas.openxmlformats.org/drawingml/2006/main">
               <a:ext uri="{FF2B5EF4-FFF2-40B4-BE49-F238E27FC236}">
-                <a16:creationId xmlns:a16="http://schemas.microsoft.com/office/drawing/2014/main" id="{65B17DE4-BBD1-4CE8-9B70-24ED16E63086}"/>
+                <a16:creationId xmlns:a16="http://schemas.microsoft.com/office/drawing/2014/main" id="{56947215-205A-4A60-897E-D44BE1016501}"/>
               </a:ext>
             </a:extLst>
           </p:cNvPr>
@@ -3365,7 +3425,7 @@
           <p:cNvPr id="7" name="Date Placeholder 6">
             <a:extLst xmlns:a="http://schemas.openxmlformats.org/drawingml/2006/main">
               <a:ext uri="{FF2B5EF4-FFF2-40B4-BE49-F238E27FC236}">
-                <a16:creationId xmlns:a16="http://schemas.microsoft.com/office/drawing/2014/main" id="{70139570-83F5-475B-9BA5-C82C9E8028ED}"/>
+                <a16:creationId xmlns:a16="http://schemas.microsoft.com/office/drawing/2014/main" id="{E379DC67-5776-4B77-90DB-3CFDC88FDE1E}"/>
               </a:ext>
             </a:extLst>
           </p:cNvPr>
@@ -3392,7 +3452,7 @@
           <p:cNvPr id="8" name="Footer Placeholder 7">
             <a:extLst xmlns:a="http://schemas.openxmlformats.org/drawingml/2006/main">
               <a:ext uri="{FF2B5EF4-FFF2-40B4-BE49-F238E27FC236}">
-                <a16:creationId xmlns:a16="http://schemas.microsoft.com/office/drawing/2014/main" id="{6D11AD18-4E95-4442-BF5F-F0D7A4CDD892}"/>
+                <a16:creationId xmlns:a16="http://schemas.microsoft.com/office/drawing/2014/main" id="{206C1CED-4C2E-4763-B808-4CB7FF8CE70C}"/>
               </a:ext>
             </a:extLst>
           </p:cNvPr>
@@ -3415,7 +3475,7 @@
           <p:cNvPr id="9" name="Slide Number Placeholder 8">
             <a:extLst xmlns:a="http://schemas.openxmlformats.org/drawingml/2006/main">
               <a:ext uri="{FF2B5EF4-FFF2-40B4-BE49-F238E27FC236}">
-                <a16:creationId xmlns:a16="http://schemas.microsoft.com/office/drawing/2014/main" id="{8867993F-9B4A-4BD7-A636-4740498EC884}"/>
+                <a16:creationId xmlns:a16="http://schemas.microsoft.com/office/drawing/2014/main" id="{808AA510-9EAD-4D98-88B1-67BC746B981E}"/>
               </a:ext>
             </a:extLst>
           </p:cNvPr>
@@ -3459,7 +3519,7 @@
           <p:cNvPr id="2" name="Title 1">
             <a:extLst xmlns:a="http://schemas.openxmlformats.org/drawingml/2006/main">
               <a:ext uri="{FF2B5EF4-FFF2-40B4-BE49-F238E27FC236}">
-                <a16:creationId xmlns:a16="http://schemas.microsoft.com/office/drawing/2014/main" id="{268C582E-FD3D-4EC8-A91A-CD9330D43AB7}"/>
+                <a16:creationId xmlns:a16="http://schemas.microsoft.com/office/drawing/2014/main" id="{94D30BBD-9076-4A58-81F9-B5AFDFE15BA3}"/>
               </a:ext>
             </a:extLst>
           </p:cNvPr>
@@ -3486,7 +3546,7 @@
           <p:cNvPr id="3" name="Date Placeholder 2">
             <a:extLst xmlns:a="http://schemas.openxmlformats.org/drawingml/2006/main">
               <a:ext uri="{FF2B5EF4-FFF2-40B4-BE49-F238E27FC236}">
-                <a16:creationId xmlns:a16="http://schemas.microsoft.com/office/drawing/2014/main" id="{CFA32572-8CC2-4546-8398-60DE982B904A}"/>
+                <a16:creationId xmlns:a16="http://schemas.microsoft.com/office/drawing/2014/main" id="{7AF66C8B-4FDD-4CBA-8AA3-330045970D38}"/>
               </a:ext>
             </a:extLst>
           </p:cNvPr>
@@ -3513,7 +3573,7 @@
           <p:cNvPr id="4" name="Footer Placeholder 3">
             <a:extLst xmlns:a="http://schemas.openxmlformats.org/drawingml/2006/main">
               <a:ext uri="{FF2B5EF4-FFF2-40B4-BE49-F238E27FC236}">
-                <a16:creationId xmlns:a16="http://schemas.microsoft.com/office/drawing/2014/main" id="{27BAE3E7-FBFC-41E3-9E25-B57275D4AC7D}"/>
+                <a16:creationId xmlns:a16="http://schemas.microsoft.com/office/drawing/2014/main" id="{6E39B9E1-D997-4EB9-AE60-87157D59BB2F}"/>
               </a:ext>
             </a:extLst>
           </p:cNvPr>
@@ -3536,7 +3596,7 @@
           <p:cNvPr id="5" name="Slide Number Placeholder 4">
             <a:extLst xmlns:a="http://schemas.openxmlformats.org/drawingml/2006/main">
               <a:ext uri="{FF2B5EF4-FFF2-40B4-BE49-F238E27FC236}">
-                <a16:creationId xmlns:a16="http://schemas.microsoft.com/office/drawing/2014/main" id="{584E9CE9-AC74-426A-8DBC-36475B775F14}"/>
+                <a16:creationId xmlns:a16="http://schemas.microsoft.com/office/drawing/2014/main" id="{88360BFB-59E2-45B0-BA53-311EE0C0B537}"/>
               </a:ext>
             </a:extLst>
           </p:cNvPr>
@@ -3580,7 +3640,7 @@
           <p:cNvPr id="2" name="Date Placeholder 1">
             <a:extLst xmlns:a="http://schemas.openxmlformats.org/drawingml/2006/main">
               <a:ext uri="{FF2B5EF4-FFF2-40B4-BE49-F238E27FC236}">
-                <a16:creationId xmlns:a16="http://schemas.microsoft.com/office/drawing/2014/main" id="{08D682A9-7760-47EC-A412-5EC842B40675}"/>
+                <a16:creationId xmlns:a16="http://schemas.microsoft.com/office/drawing/2014/main" id="{BCDFB27A-50A0-4584-A074-1C089CE0599C}"/>
               </a:ext>
             </a:extLst>
           </p:cNvPr>
@@ -3607,7 +3667,7 @@
           <p:cNvPr id="3" name="Footer Placeholder 2">
             <a:extLst xmlns:a="http://schemas.openxmlformats.org/drawingml/2006/main">
               <a:ext uri="{FF2B5EF4-FFF2-40B4-BE49-F238E27FC236}">
-                <a16:creationId xmlns:a16="http://schemas.microsoft.com/office/drawing/2014/main" id="{DCC9125C-BF9F-4BD4-9878-32B2D68A621F}"/>
+                <a16:creationId xmlns:a16="http://schemas.microsoft.com/office/drawing/2014/main" id="{CD6FF235-2518-492A-8751-B88F4C15D366}"/>
               </a:ext>
             </a:extLst>
           </p:cNvPr>
@@ -3630,7 +3690,7 @@
           <p:cNvPr id="4" name="Slide Number Placeholder 3">
             <a:extLst xmlns:a="http://schemas.openxmlformats.org/drawingml/2006/main">
               <a:ext uri="{FF2B5EF4-FFF2-40B4-BE49-F238E27FC236}">
-                <a16:creationId xmlns:a16="http://schemas.microsoft.com/office/drawing/2014/main" id="{DDD3C25C-A112-451F-9225-8A162ACAA737}"/>
+                <a16:creationId xmlns:a16="http://schemas.microsoft.com/office/drawing/2014/main" id="{4C252AE7-11BA-43E5-B4BB-0BF2DBCC795A}"/>
               </a:ext>
             </a:extLst>
           </p:cNvPr>
@@ -3674,7 +3734,7 @@
           <p:cNvPr id="2" name="Title 1">
             <a:extLst xmlns:a="http://schemas.openxmlformats.org/drawingml/2006/main">
               <a:ext uri="{FF2B5EF4-FFF2-40B4-BE49-F238E27FC236}">
-                <a16:creationId xmlns:a16="http://schemas.microsoft.com/office/drawing/2014/main" id="{31AA27E4-ACBE-4B2C-9966-DDB6F43E3DC8}"/>
+                <a16:creationId xmlns:a16="http://schemas.microsoft.com/office/drawing/2014/main" id="{5C6CBD09-DFF3-4B69-836B-3C85589DBE4B}"/>
               </a:ext>
             </a:extLst>
           </p:cNvPr>
@@ -3711,7 +3771,7 @@
           <p:cNvPr id="3" name="Content Placeholder 2">
             <a:extLst xmlns:a="http://schemas.openxmlformats.org/drawingml/2006/main">
               <a:ext uri="{FF2B5EF4-FFF2-40B4-BE49-F238E27FC236}">
-                <a16:creationId xmlns:a16="http://schemas.microsoft.com/office/drawing/2014/main" id="{8B87491C-D1F7-4B7E-873A-A5C20F170D4B}"/>
+                <a16:creationId xmlns:a16="http://schemas.microsoft.com/office/drawing/2014/main" id="{6CEBF79C-D146-41DC-A053-1CB5A7D3CC52}"/>
               </a:ext>
             </a:extLst>
           </p:cNvPr>
@@ -3815,7 +3875,7 @@
           <p:cNvPr id="4" name="Text Placeholder 3">
             <a:extLst xmlns:a="http://schemas.openxmlformats.org/drawingml/2006/main">
               <a:ext uri="{FF2B5EF4-FFF2-40B4-BE49-F238E27FC236}">
-                <a16:creationId xmlns:a16="http://schemas.microsoft.com/office/drawing/2014/main" id="{62B426AA-FDA7-4ED0-9BC2-20C11F6828EA}"/>
+                <a16:creationId xmlns:a16="http://schemas.microsoft.com/office/drawing/2014/main" id="{F364E366-4771-4DF3-8D64-7C2C71C7DFE1}"/>
               </a:ext>
             </a:extLst>
           </p:cNvPr>
@@ -3887,7 +3947,7 @@
           <p:cNvPr id="5" name="Date Placeholder 4">
             <a:extLst xmlns:a="http://schemas.openxmlformats.org/drawingml/2006/main">
               <a:ext uri="{FF2B5EF4-FFF2-40B4-BE49-F238E27FC236}">
-                <a16:creationId xmlns:a16="http://schemas.microsoft.com/office/drawing/2014/main" id="{A241A3A7-D35A-4CEB-9BAA-8CCC6EC7DB8C}"/>
+                <a16:creationId xmlns:a16="http://schemas.microsoft.com/office/drawing/2014/main" id="{A2E839BD-D55F-44AB-8DED-DD3FB1835588}"/>
               </a:ext>
             </a:extLst>
           </p:cNvPr>
@@ -3914,7 +3974,7 @@
           <p:cNvPr id="6" name="Footer Placeholder 5">
             <a:extLst xmlns:a="http://schemas.openxmlformats.org/drawingml/2006/main">
               <a:ext uri="{FF2B5EF4-FFF2-40B4-BE49-F238E27FC236}">
-                <a16:creationId xmlns:a16="http://schemas.microsoft.com/office/drawing/2014/main" id="{A1B4EDDF-1299-419C-A2A2-D65AD48044F4}"/>
+                <a16:creationId xmlns:a16="http://schemas.microsoft.com/office/drawing/2014/main" id="{5677866D-FF43-4B86-A984-E3186E305B2F}"/>
               </a:ext>
             </a:extLst>
           </p:cNvPr>
@@ -3937,7 +3997,7 @@
           <p:cNvPr id="7" name="Slide Number Placeholder 6">
             <a:extLst xmlns:a="http://schemas.openxmlformats.org/drawingml/2006/main">
               <a:ext uri="{FF2B5EF4-FFF2-40B4-BE49-F238E27FC236}">
-                <a16:creationId xmlns:a16="http://schemas.microsoft.com/office/drawing/2014/main" id="{F68E756A-8787-42F8-BB9B-EC71E0050352}"/>
+                <a16:creationId xmlns:a16="http://schemas.microsoft.com/office/drawing/2014/main" id="{748291BE-E81E-467A-A6F5-95B3CC79CC23}"/>
               </a:ext>
             </a:extLst>
           </p:cNvPr>
@@ -3981,7 +4041,7 @@
           <p:cNvPr id="2" name="Title 1">
             <a:extLst xmlns:a="http://schemas.openxmlformats.org/drawingml/2006/main">
               <a:ext uri="{FF2B5EF4-FFF2-40B4-BE49-F238E27FC236}">
-                <a16:creationId xmlns:a16="http://schemas.microsoft.com/office/drawing/2014/main" id="{585D8984-FFB8-46D3-A8D3-376488FB7B20}"/>
+                <a16:creationId xmlns:a16="http://schemas.microsoft.com/office/drawing/2014/main" id="{AFBCC81C-E8ED-4265-BABB-5AA1598FC5E8}"/>
               </a:ext>
             </a:extLst>
           </p:cNvPr>
@@ -4018,7 +4078,7 @@
           <p:cNvPr id="3" name="Picture Placeholder 2">
             <a:extLst xmlns:a="http://schemas.openxmlformats.org/drawingml/2006/main">
               <a:ext uri="{FF2B5EF4-FFF2-40B4-BE49-F238E27FC236}">
-                <a16:creationId xmlns:a16="http://schemas.microsoft.com/office/drawing/2014/main" id="{FA85390D-EB02-4832-96C3-F92ED694097C}"/>
+                <a16:creationId xmlns:a16="http://schemas.microsoft.com/office/drawing/2014/main" id="{3A9F4D24-DCA3-47DE-9A4F-2A680A709608}"/>
               </a:ext>
             </a:extLst>
           </p:cNvPr>
@@ -4083,7 +4143,7 @@
           <p:cNvPr id="4" name="Text Placeholder 3">
             <a:extLst xmlns:a="http://schemas.openxmlformats.org/drawingml/2006/main">
               <a:ext uri="{FF2B5EF4-FFF2-40B4-BE49-F238E27FC236}">
-                <a16:creationId xmlns:a16="http://schemas.microsoft.com/office/drawing/2014/main" id="{E34A0E62-F881-4629-A4BD-D92FC12BA550}"/>
+                <a16:creationId xmlns:a16="http://schemas.microsoft.com/office/drawing/2014/main" id="{3F4D969F-CA1B-44AD-998D-61FC6189AB94}"/>
               </a:ext>
             </a:extLst>
           </p:cNvPr>
@@ -4155,7 +4215,7 @@
           <p:cNvPr id="5" name="Date Placeholder 4">
             <a:extLst xmlns:a="http://schemas.openxmlformats.org/drawingml/2006/main">
               <a:ext uri="{FF2B5EF4-FFF2-40B4-BE49-F238E27FC236}">
-                <a16:creationId xmlns:a16="http://schemas.microsoft.com/office/drawing/2014/main" id="{1C5809C3-A811-4BFF-849D-35E6590F32B1}"/>
+                <a16:creationId xmlns:a16="http://schemas.microsoft.com/office/drawing/2014/main" id="{C0ED9CB9-438B-4308-AEA2-E13002957544}"/>
               </a:ext>
             </a:extLst>
           </p:cNvPr>
@@ -4182,7 +4242,7 @@
           <p:cNvPr id="6" name="Footer Placeholder 5">
             <a:extLst xmlns:a="http://schemas.openxmlformats.org/drawingml/2006/main">
               <a:ext uri="{FF2B5EF4-FFF2-40B4-BE49-F238E27FC236}">
-                <a16:creationId xmlns:a16="http://schemas.microsoft.com/office/drawing/2014/main" id="{06D54DB0-90AC-43DA-B685-32E7C6C1528A}"/>
+                <a16:creationId xmlns:a16="http://schemas.microsoft.com/office/drawing/2014/main" id="{1B392355-38C3-41DD-9314-BC13629F68EF}"/>
               </a:ext>
             </a:extLst>
           </p:cNvPr>
@@ -4205,7 +4265,7 @@
           <p:cNvPr id="7" name="Slide Number Placeholder 6">
             <a:extLst xmlns:a="http://schemas.openxmlformats.org/drawingml/2006/main">
               <a:ext uri="{FF2B5EF4-FFF2-40B4-BE49-F238E27FC236}">
-                <a16:creationId xmlns:a16="http://schemas.microsoft.com/office/drawing/2014/main" id="{A131A905-8D34-40D2-A8D7-C01E5F94EC96}"/>
+                <a16:creationId xmlns:a16="http://schemas.microsoft.com/office/drawing/2014/main" id="{6CD75D01-0967-4471-BDF4-CA79B87F9A81}"/>
               </a:ext>
             </a:extLst>
           </p:cNvPr>
@@ -4254,7 +4314,7 @@
           <p:cNvPr id="2" name="Title Placeholder 1">
             <a:extLst xmlns:a="http://schemas.openxmlformats.org/drawingml/2006/main">
               <a:ext uri="{FF2B5EF4-FFF2-40B4-BE49-F238E27FC236}">
-                <a16:creationId xmlns:a16="http://schemas.microsoft.com/office/drawing/2014/main" id="{EF0496B9-640E-4B51-A935-FC4672BAC549}"/>
+                <a16:creationId xmlns:a16="http://schemas.microsoft.com/office/drawing/2014/main" id="{CF02B2F6-326A-447F-9206-18056E829E54}"/>
               </a:ext>
             </a:extLst>
           </p:cNvPr>
@@ -4291,7 +4351,7 @@
           <p:cNvPr id="3" name="Text Placeholder 2">
             <a:extLst xmlns:a="http://schemas.openxmlformats.org/drawingml/2006/main">
               <a:ext uri="{FF2B5EF4-FFF2-40B4-BE49-F238E27FC236}">
-                <a16:creationId xmlns:a16="http://schemas.microsoft.com/office/drawing/2014/main" id="{1AD61093-F349-4C77-A922-2736A93D49E0}"/>
+                <a16:creationId xmlns:a16="http://schemas.microsoft.com/office/drawing/2014/main" id="{B66D276E-B9D4-42AA-A8F1-7C04972DF631}"/>
               </a:ext>
             </a:extLst>
           </p:cNvPr>
@@ -4363,7 +4423,7 @@
           <p:cNvPr id="4" name="Date Placeholder 3">
             <a:extLst xmlns:a="http://schemas.openxmlformats.org/drawingml/2006/main">
               <a:ext uri="{FF2B5EF4-FFF2-40B4-BE49-F238E27FC236}">
-                <a16:creationId xmlns:a16="http://schemas.microsoft.com/office/drawing/2014/main" id="{0344E7AA-4BD1-424D-BC95-AA67B1E04972}"/>
+                <a16:creationId xmlns:a16="http://schemas.microsoft.com/office/drawing/2014/main" id="{C2411B30-987D-4E4B-BCB1-41E80CAD9F73}"/>
               </a:ext>
             </a:extLst>
           </p:cNvPr>
@@ -4409,7 +4469,7 @@
           <p:cNvPr id="5" name="Footer Placeholder 4">
             <a:extLst xmlns:a="http://schemas.openxmlformats.org/drawingml/2006/main">
               <a:ext uri="{FF2B5EF4-FFF2-40B4-BE49-F238E27FC236}">
-                <a16:creationId xmlns:a16="http://schemas.microsoft.com/office/drawing/2014/main" id="{3032AA7C-ADEC-4E3C-8425-4331ED07F161}"/>
+                <a16:creationId xmlns:a16="http://schemas.microsoft.com/office/drawing/2014/main" id="{4365A289-9D6F-451A-9CA4-2A29F19BEA31}"/>
               </a:ext>
             </a:extLst>
           </p:cNvPr>
@@ -4451,7 +4511,7 @@
           <p:cNvPr id="6" name="Slide Number Placeholder 5">
             <a:extLst xmlns:a="http://schemas.openxmlformats.org/drawingml/2006/main">
               <a:ext uri="{FF2B5EF4-FFF2-40B4-BE49-F238E27FC236}">
-                <a16:creationId xmlns:a16="http://schemas.microsoft.com/office/drawing/2014/main" id="{7B606C35-E7CB-4F2A-801C-605DDE63C9F4}"/>
+                <a16:creationId xmlns:a16="http://schemas.microsoft.com/office/drawing/2014/main" id="{92A69ECF-B35A-417A-8B96-09725DCB3E1E}"/>
               </a:ext>
             </a:extLst>
           </p:cNvPr>
@@ -4496,17 +4556,17 @@
   </p:cSld>
   <p:clrMap bg1="lt1" tx1="dk1" bg2="lt2" tx2="dk2" accent1="accent1" accent2="accent2" accent3="accent3" accent4="accent4" accent5="accent5" accent6="accent6" hlink="hlink" folHlink="folHlink"/>
   <p:sldLayoutIdLst>
-    <p:sldLayoutId xmlns:r="http://schemas.openxmlformats.org/officeDocument/2006/relationships" id="2147483649" r:id="Rf67ed7c30ddd47de"/>
-    <p:sldLayoutId xmlns:r="http://schemas.openxmlformats.org/officeDocument/2006/relationships" id="2147483650" r:id="R80e1968537a2443e"/>
-    <p:sldLayoutId xmlns:r="http://schemas.openxmlformats.org/officeDocument/2006/relationships" id="2147483651" r:id="R85254fdbf5a041ef"/>
-    <p:sldLayoutId xmlns:r="http://schemas.openxmlformats.org/officeDocument/2006/relationships" id="2147483652" r:id="R2468c22676a642f5"/>
-    <p:sldLayoutId xmlns:r="http://schemas.openxmlformats.org/officeDocument/2006/relationships" id="2147483653" r:id="Rac6d1dc25df24707"/>
-    <p:sldLayoutId xmlns:r="http://schemas.openxmlformats.org/officeDocument/2006/relationships" id="2147483654" r:id="Rb368dde8912b4018"/>
-    <p:sldLayoutId xmlns:r="http://schemas.openxmlformats.org/officeDocument/2006/relationships" id="2147483655" r:id="R4cf7414be2be49b7"/>
-    <p:sldLayoutId xmlns:r="http://schemas.openxmlformats.org/officeDocument/2006/relationships" id="2147483656" r:id="R32e776c7c98041c8"/>
-    <p:sldLayoutId xmlns:r="http://schemas.openxmlformats.org/officeDocument/2006/relationships" id="2147483657" r:id="R7083d0b1296d4716"/>
-    <p:sldLayoutId xmlns:r="http://schemas.openxmlformats.org/officeDocument/2006/relationships" id="2147483658" r:id="Rd246d5e523474260"/>
-    <p:sldLayoutId xmlns:r="http://schemas.openxmlformats.org/officeDocument/2006/relationships" id="2147483659" r:id="R589329991fc44971"/>
+    <p:sldLayoutId xmlns:r="http://schemas.openxmlformats.org/officeDocument/2006/relationships" id="2147483649" r:id="R3bef32b8b74845bb"/>
+    <p:sldLayoutId xmlns:r="http://schemas.openxmlformats.org/officeDocument/2006/relationships" id="2147483650" r:id="Rdda00c96bd0146f2"/>
+    <p:sldLayoutId xmlns:r="http://schemas.openxmlformats.org/officeDocument/2006/relationships" id="2147483651" r:id="R347941bc160f43ad"/>
+    <p:sldLayoutId xmlns:r="http://schemas.openxmlformats.org/officeDocument/2006/relationships" id="2147483652" r:id="Rc7d79db4a35e4900"/>
+    <p:sldLayoutId xmlns:r="http://schemas.openxmlformats.org/officeDocument/2006/relationships" id="2147483653" r:id="R64deb1b2c8844652"/>
+    <p:sldLayoutId xmlns:r="http://schemas.openxmlformats.org/officeDocument/2006/relationships" id="2147483654" r:id="Rc483f7f322cc460a"/>
+    <p:sldLayoutId xmlns:r="http://schemas.openxmlformats.org/officeDocument/2006/relationships" id="2147483655" r:id="Rf915be265be14818"/>
+    <p:sldLayoutId xmlns:r="http://schemas.openxmlformats.org/officeDocument/2006/relationships" id="2147483656" r:id="R98a6b110b1334d8d"/>
+    <p:sldLayoutId xmlns:r="http://schemas.openxmlformats.org/officeDocument/2006/relationships" id="2147483657" r:id="Rd2adf64b8b1e464b"/>
+    <p:sldLayoutId xmlns:r="http://schemas.openxmlformats.org/officeDocument/2006/relationships" id="2147483658" r:id="Rfe3b8109930546a3"/>
+    <p:sldLayoutId xmlns:r="http://schemas.openxmlformats.org/officeDocument/2006/relationships" id="2147483659" r:id="Rc17bd2d3bd8048c0"/>
   </p:sldLayoutIdLst>
   <p:txStyles>
     <p:titleStyle>
@@ -5059,7 +5119,7 @@
           <p:cNvPr id="2" name="Rectangle 1">
             <a:extLst xmlns:a="http://schemas.openxmlformats.org/drawingml/2006/main">
               <a:ext uri="{FF2B5EF4-FFF2-40B4-BE49-F238E27FC236}">
-                <a16:creationId xmlns:a16="http://schemas.microsoft.com/office/drawing/2014/main" id="{1BE3E3BD-05FB-4F39-80DA-35A35BEB9487}"/>
+                <a16:creationId xmlns:a16="http://schemas.microsoft.com/office/drawing/2014/main" id="{2A891B4F-68E0-4A36-9F3C-D72D51DD6A0B}"/>
               </a:ext>
             </a:extLst>
           </p:cNvPr>
@@ -5114,7 +5174,7 @@
           <p:cNvPr id="3" name="TextBox 2">
             <a:extLst xmlns:a="http://schemas.openxmlformats.org/drawingml/2006/main">
               <a:ext uri="{FF2B5EF4-FFF2-40B4-BE49-F238E27FC236}">
-                <a16:creationId xmlns:a16="http://schemas.microsoft.com/office/drawing/2014/main" id="{0DA5FB15-8C47-4148-91A5-3C718304463E}"/>
+                <a16:creationId xmlns:a16="http://schemas.microsoft.com/office/drawing/2014/main" id="{DA554D5D-203E-4126-B734-8F81969E2C62}"/>
               </a:ext>
             </a:extLst>
           </p:cNvPr>
@@ -5161,7 +5221,7 @@
           <p:cNvPr id="4" name="TextBox 3">
             <a:extLst xmlns:a="http://schemas.openxmlformats.org/drawingml/2006/main">
               <a:ext uri="{FF2B5EF4-FFF2-40B4-BE49-F238E27FC236}">
-                <a16:creationId xmlns:a16="http://schemas.microsoft.com/office/drawing/2014/main" id="{ED61E61C-7B4E-4ACA-9626-AD33DF512039}"/>
+                <a16:creationId xmlns:a16="http://schemas.microsoft.com/office/drawing/2014/main" id="{B6139A11-F2ED-4A82-A7D1-BB61A6A47680}"/>
               </a:ext>
             </a:extLst>
           </p:cNvPr>
@@ -5209,7 +5269,7 @@
           <p:cNvPr id="5" name="TextBox 4">
             <a:extLst xmlns:a="http://schemas.openxmlformats.org/drawingml/2006/main">
               <a:ext uri="{FF2B5EF4-FFF2-40B4-BE49-F238E27FC236}">
-                <a16:creationId xmlns:a16="http://schemas.microsoft.com/office/drawing/2014/main" id="{00AABEE0-4271-41D6-AB6D-5752202CEAD4}"/>
+                <a16:creationId xmlns:a16="http://schemas.microsoft.com/office/drawing/2014/main" id="{BEB50592-8D38-4BE9-804B-0F616001ECBF}"/>
               </a:ext>
             </a:extLst>
           </p:cNvPr>
@@ -5256,7 +5316,7 @@
           <p:cNvPr id="6" name="Rectangle 5">
             <a:extLst xmlns:a="http://schemas.openxmlformats.org/drawingml/2006/main">
               <a:ext uri="{FF2B5EF4-FFF2-40B4-BE49-F238E27FC236}">
-                <a16:creationId xmlns:a16="http://schemas.microsoft.com/office/drawing/2014/main" id="{01C6261B-845A-4F34-B039-C4D853188C51}"/>
+                <a16:creationId xmlns:a16="http://schemas.microsoft.com/office/drawing/2014/main" id="{83FAA04A-D815-47B3-8358-B9069575385D}"/>
               </a:ext>
             </a:extLst>
           </p:cNvPr>
@@ -5311,7 +5371,7 @@
           <p:cNvPr id="7" name="TextBox 6">
             <a:extLst xmlns:a="http://schemas.openxmlformats.org/drawingml/2006/main">
               <a:ext uri="{FF2B5EF4-FFF2-40B4-BE49-F238E27FC236}">
-                <a16:creationId xmlns:a16="http://schemas.microsoft.com/office/drawing/2014/main" id="{8B280BD4-BCF6-439B-B46A-8C281918E7AC}"/>
+                <a16:creationId xmlns:a16="http://schemas.microsoft.com/office/drawing/2014/main" id="{F4047921-38A1-4453-9E25-9C3A552CBB3A}"/>
               </a:ext>
             </a:extLst>
           </p:cNvPr>
@@ -5358,7 +5418,7 @@
           <p:cNvPr id="8" name="TextBox 7">
             <a:extLst xmlns:a="http://schemas.openxmlformats.org/drawingml/2006/main">
               <a:ext uri="{FF2B5EF4-FFF2-40B4-BE49-F238E27FC236}">
-                <a16:creationId xmlns:a16="http://schemas.microsoft.com/office/drawing/2014/main" id="{21878655-49AB-4728-8199-F16A913E7A67}"/>
+                <a16:creationId xmlns:a16="http://schemas.microsoft.com/office/drawing/2014/main" id="{AAA40616-37E4-4231-BB6B-F938AD4D6F6C}"/>
               </a:ext>
             </a:extLst>
           </p:cNvPr>
@@ -5395,7 +5455,7 @@
                 <a:ea typeface="Aptos"/>
                 <a:cs typeface="Aptos"/>
               </a:rPr>
-              <a:t>2026.07.25-24</a:t>
+              <a:t>2026.07.26-25</a:t>
             </a:r>
           </a:p>
         </p:txBody>
@@ -5405,7 +5465,7 @@
           <p:cNvPr id="9" name="TextBox 8">
             <a:extLst xmlns:a="http://schemas.openxmlformats.org/drawingml/2006/main">
               <a:ext uri="{FF2B5EF4-FFF2-40B4-BE49-F238E27FC236}">
-                <a16:creationId xmlns:a16="http://schemas.microsoft.com/office/drawing/2014/main" id="{AE9B10F1-788C-4BF7-B7F1-9782898468E6}"/>
+                <a16:creationId xmlns:a16="http://schemas.microsoft.com/office/drawing/2014/main" id="{48E45D38-00B5-4575-BAC8-947A13D5FCFD}"/>
               </a:ext>
             </a:extLst>
           </p:cNvPr>
@@ -5442,8 +5502,28 @@
                 <a:ea typeface="Aptos"/>
                 <a:cs typeface="Aptos"/>
               </a:rPr>
-              <a:t>Päivitetty 2026-07-24
-6 diaa · suomeksi</a:t>
+              <a:t>Päivitetty 2026-07-26</a:t>
+            </a:r>
+            <a:br>
+              <a:rPr sz="1700" b="0">
+                <a:solidFill>
+                  <a:srgbClr val="FFFFFF"/>
+                </a:solidFill>
+                <a:latin typeface="Aptos"/>
+                <a:ea typeface="Aptos"/>
+                <a:cs typeface="Aptos"/>
+              </a:rPr>
+            </a:br>
+            <a:r>
+              <a:rPr sz="1700" b="0">
+                <a:solidFill>
+                  <a:srgbClr val="FFFFFF"/>
+                </a:solidFill>
+                <a:latin typeface="Aptos"/>
+                <a:ea typeface="Aptos"/>
+                <a:cs typeface="Aptos"/>
+              </a:rPr>
+              <a:t>6 diaa · suomeksi</a:t>
             </a:r>
           </a:p>
         </p:txBody>
@@ -5453,7 +5533,7 @@
           <p:cNvPr id="10" name="TextBox 9">
             <a:extLst xmlns:a="http://schemas.openxmlformats.org/drawingml/2006/main">
               <a:ext uri="{FF2B5EF4-FFF2-40B4-BE49-F238E27FC236}">
-                <a16:creationId xmlns:a16="http://schemas.microsoft.com/office/drawing/2014/main" id="{DEEF058E-AFCE-4CD4-862C-E8187E8F486A}"/>
+                <a16:creationId xmlns:a16="http://schemas.microsoft.com/office/drawing/2014/main" id="{8FB9AB26-ED01-4290-BB1F-AC8DB9FF0296}"/>
               </a:ext>
             </a:extLst>
           </p:cNvPr>
@@ -5500,7 +5580,7 @@
           <p:cNvPr id="11" name="TextBox 10">
             <a:extLst xmlns:a="http://schemas.openxmlformats.org/drawingml/2006/main">
               <a:ext uri="{FF2B5EF4-FFF2-40B4-BE49-F238E27FC236}">
-                <a16:creationId xmlns:a16="http://schemas.microsoft.com/office/drawing/2014/main" id="{05C7B258-25A5-4B7E-BA58-A97B3CB6C0EE}"/>
+                <a16:creationId xmlns:a16="http://schemas.microsoft.com/office/drawing/2014/main" id="{A1432AA0-CA82-4CED-BEA0-EB178C75FC5D}"/>
               </a:ext>
             </a:extLst>
           </p:cNvPr>
@@ -5547,7 +5627,7 @@
           <p:cNvPr id="12" name="TextBox 11">
             <a:extLst xmlns:a="http://schemas.openxmlformats.org/drawingml/2006/main">
               <a:ext uri="{FF2B5EF4-FFF2-40B4-BE49-F238E27FC236}">
-                <a16:creationId xmlns:a16="http://schemas.microsoft.com/office/drawing/2014/main" id="{F0FDC58F-1CEF-431C-9471-81884FC3E693}"/>
+                <a16:creationId xmlns:a16="http://schemas.microsoft.com/office/drawing/2014/main" id="{C929DCEB-6A5C-480E-BC21-BF458CE143CF}"/>
               </a:ext>
             </a:extLst>
           </p:cNvPr>
@@ -5592,7 +5672,7 @@
     </p:spTree>
     <p:extLst>
       <p:ext uri="{BB962C8B-B14F-4D97-AF65-F5344CB8AC3E}">
-        <p14:creationId xmlns:p14="http://schemas.microsoft.com/office/powerpoint/2010/main" val="1258936087"/>
+        <p14:creationId xmlns:p14="http://schemas.microsoft.com/office/powerpoint/2010/main" val="118936829"/>
       </p:ext>
     </p:extLst>
   </p:cSld>
@@ -5616,7 +5696,7 @@
           <p:cNvPr id="2" name="TextBox 1">
             <a:extLst xmlns:a="http://schemas.openxmlformats.org/drawingml/2006/main">
               <a:ext uri="{FF2B5EF4-FFF2-40B4-BE49-F238E27FC236}">
-                <a16:creationId xmlns:a16="http://schemas.microsoft.com/office/drawing/2014/main" id="{6A73E209-8BB1-4BFF-B5C4-97A507230C4A}"/>
+                <a16:creationId xmlns:a16="http://schemas.microsoft.com/office/drawing/2014/main" id="{1060F2D9-5FC2-4EB1-8637-1D877FF42F71}"/>
               </a:ext>
             </a:extLst>
           </p:cNvPr>
@@ -5663,7 +5743,7 @@
           <p:cNvPr id="3" name="TextBox 2">
             <a:extLst xmlns:a="http://schemas.openxmlformats.org/drawingml/2006/main">
               <a:ext uri="{FF2B5EF4-FFF2-40B4-BE49-F238E27FC236}">
-                <a16:creationId xmlns:a16="http://schemas.microsoft.com/office/drawing/2014/main" id="{F1A5D2FF-427C-4672-81B9-B6AA5FBA1845}"/>
+                <a16:creationId xmlns:a16="http://schemas.microsoft.com/office/drawing/2014/main" id="{59888A64-6A16-40D9-8B02-F86CD4376F11}"/>
               </a:ext>
             </a:extLst>
           </p:cNvPr>
@@ -5710,7 +5790,7 @@
           <p:cNvPr id="4" name="Rectangle 3">
             <a:extLst xmlns:a="http://schemas.openxmlformats.org/drawingml/2006/main">
               <a:ext uri="{FF2B5EF4-FFF2-40B4-BE49-F238E27FC236}">
-                <a16:creationId xmlns:a16="http://schemas.microsoft.com/office/drawing/2014/main" id="{9DAF8D45-D674-4E73-8B2E-970CDED6CD25}"/>
+                <a16:creationId xmlns:a16="http://schemas.microsoft.com/office/drawing/2014/main" id="{015FCB71-0F57-41D3-9907-502A02F51043}"/>
               </a:ext>
             </a:extLst>
           </p:cNvPr>
@@ -5765,7 +5845,7 @@
           <p:cNvPr id="5" name="Rectangle 4">
             <a:extLst xmlns:a="http://schemas.openxmlformats.org/drawingml/2006/main">
               <a:ext uri="{FF2B5EF4-FFF2-40B4-BE49-F238E27FC236}">
-                <a16:creationId xmlns:a16="http://schemas.microsoft.com/office/drawing/2014/main" id="{584E3BA1-5965-4AFF-9255-FD6BB284FF85}"/>
+                <a16:creationId xmlns:a16="http://schemas.microsoft.com/office/drawing/2014/main" id="{8FF50850-DB29-472E-88B5-7FF80A7D002F}"/>
               </a:ext>
             </a:extLst>
           </p:cNvPr>
@@ -5820,7 +5900,7 @@
           <p:cNvPr id="6" name="TextBox 5">
             <a:extLst xmlns:a="http://schemas.openxmlformats.org/drawingml/2006/main">
               <a:ext uri="{FF2B5EF4-FFF2-40B4-BE49-F238E27FC236}">
-                <a16:creationId xmlns:a16="http://schemas.microsoft.com/office/drawing/2014/main" id="{1E3817B8-CF8B-4C8A-9AE7-54D975E1B612}"/>
+                <a16:creationId xmlns:a16="http://schemas.microsoft.com/office/drawing/2014/main" id="{D591B238-1306-4B94-9430-3425D2CDDA1C}"/>
               </a:ext>
             </a:extLst>
           </p:cNvPr>
@@ -5857,7 +5937,7 @@
                 <a:ea typeface="Aptos"/>
                 <a:cs typeface="Aptos"/>
               </a:rPr>
-              <a:t>Julkinen riippumaton evidenssikooste · 2026.07.25-24 · 2026-07-24 · Lähteet: EPO; Saksa — viralliset tuomiot; WIPO</a:t>
+              <a:t>Julkinen riippumaton evidenssikooste · 2026.07.26-25 · 2026-07-26 · Lähteet: EPO; Saksa — viralliset tuomiot; WIPO</a:t>
             </a:r>
           </a:p>
         </p:txBody>
@@ -5867,7 +5947,7 @@
           <p:cNvPr id="7" name="TextBox 6">
             <a:extLst xmlns:a="http://schemas.openxmlformats.org/drawingml/2006/main">
               <a:ext uri="{FF2B5EF4-FFF2-40B4-BE49-F238E27FC236}">
-                <a16:creationId xmlns:a16="http://schemas.microsoft.com/office/drawing/2014/main" id="{B5519F99-8B53-4A6F-9788-DC263FCD4BED}"/>
+                <a16:creationId xmlns:a16="http://schemas.microsoft.com/office/drawing/2014/main" id="{C0F6250B-ED53-4E83-AF96-6B17BF53F50B}"/>
               </a:ext>
             </a:extLst>
           </p:cNvPr>
@@ -5914,7 +5994,7 @@
           <p:cNvPr id="8" name="TextBox 7">
             <a:extLst xmlns:a="http://schemas.openxmlformats.org/drawingml/2006/main">
               <a:ext uri="{FF2B5EF4-FFF2-40B4-BE49-F238E27FC236}">
-                <a16:creationId xmlns:a16="http://schemas.microsoft.com/office/drawing/2014/main" id="{941C938F-0B40-4192-905B-EF0AB5328CB8}"/>
+                <a16:creationId xmlns:a16="http://schemas.microsoft.com/office/drawing/2014/main" id="{E84A64F6-C027-42BB-9EA1-784A8FFED853}"/>
               </a:ext>
             </a:extLst>
           </p:cNvPr>
@@ -5961,7 +6041,7 @@
           <p:cNvPr id="9" name="TextBox 8">
             <a:extLst xmlns:a="http://schemas.openxmlformats.org/drawingml/2006/main">
               <a:ext uri="{FF2B5EF4-FFF2-40B4-BE49-F238E27FC236}">
-                <a16:creationId xmlns:a16="http://schemas.microsoft.com/office/drawing/2014/main" id="{45A50913-870B-44B2-86FB-F60A4981775E}"/>
+                <a16:creationId xmlns:a16="http://schemas.microsoft.com/office/drawing/2014/main" id="{695092AC-C05A-47E2-8941-7743566FB893}"/>
               </a:ext>
             </a:extLst>
           </p:cNvPr>
@@ -6058,7 +6138,7 @@
           <p:cNvPr id="10" name="Rounded Rectangle 9">
             <a:extLst xmlns:a="http://schemas.openxmlformats.org/drawingml/2006/main">
               <a:ext uri="{FF2B5EF4-FFF2-40B4-BE49-F238E27FC236}">
-                <a16:creationId xmlns:a16="http://schemas.microsoft.com/office/drawing/2014/main" id="{B72D4B6E-A8B0-484C-87B6-51C88848EE08}"/>
+                <a16:creationId xmlns:a16="http://schemas.microsoft.com/office/drawing/2014/main" id="{F62CB24F-C983-45FF-B236-6F0B0FD80E6E}"/>
               </a:ext>
             </a:extLst>
           </p:cNvPr>
@@ -6115,7 +6195,7 @@
           <p:cNvPr id="11" name="TextBox 10">
             <a:extLst xmlns:a="http://schemas.openxmlformats.org/drawingml/2006/main">
               <a:ext uri="{FF2B5EF4-FFF2-40B4-BE49-F238E27FC236}">
-                <a16:creationId xmlns:a16="http://schemas.microsoft.com/office/drawing/2014/main" id="{BF987FBC-0193-44BE-BC67-D62589E7B33A}"/>
+                <a16:creationId xmlns:a16="http://schemas.microsoft.com/office/drawing/2014/main" id="{034815CA-3955-4953-987F-2900028DBEF6}"/>
               </a:ext>
             </a:extLst>
           </p:cNvPr>
@@ -6162,7 +6242,7 @@
           <p:cNvPr id="12" name="TextBox 11">
             <a:extLst xmlns:a="http://schemas.openxmlformats.org/drawingml/2006/main">
               <a:ext uri="{FF2B5EF4-FFF2-40B4-BE49-F238E27FC236}">
-                <a16:creationId xmlns:a16="http://schemas.microsoft.com/office/drawing/2014/main" id="{E31CDE90-EDCA-452E-B104-669631339AA9}"/>
+                <a16:creationId xmlns:a16="http://schemas.microsoft.com/office/drawing/2014/main" id="{00E43CDE-2A67-4C9D-A003-93C1C6141E03}"/>
               </a:ext>
             </a:extLst>
           </p:cNvPr>
@@ -6207,7 +6287,7 @@
     </p:spTree>
     <p:extLst>
       <p:ext uri="{BB962C8B-B14F-4D97-AF65-F5344CB8AC3E}">
-        <p14:creationId xmlns:p14="http://schemas.microsoft.com/office/powerpoint/2010/main" val="1172940012"/>
+        <p14:creationId xmlns:p14="http://schemas.microsoft.com/office/powerpoint/2010/main" val="2097373423"/>
       </p:ext>
     </p:extLst>
   </p:cSld>
@@ -6231,7 +6311,7 @@
           <p:cNvPr id="2" name="TextBox 1">
             <a:extLst xmlns:a="http://schemas.openxmlformats.org/drawingml/2006/main">
               <a:ext uri="{FF2B5EF4-FFF2-40B4-BE49-F238E27FC236}">
-                <a16:creationId xmlns:a16="http://schemas.microsoft.com/office/drawing/2014/main" id="{515F4F0D-3421-4CAA-824C-35C25203632A}"/>
+                <a16:creationId xmlns:a16="http://schemas.microsoft.com/office/drawing/2014/main" id="{2488D4B0-5D15-4444-AF3B-16C50D51087E}"/>
               </a:ext>
             </a:extLst>
           </p:cNvPr>
@@ -6278,7 +6358,7 @@
           <p:cNvPr id="3" name="TextBox 2">
             <a:extLst xmlns:a="http://schemas.openxmlformats.org/drawingml/2006/main">
               <a:ext uri="{FF2B5EF4-FFF2-40B4-BE49-F238E27FC236}">
-                <a16:creationId xmlns:a16="http://schemas.microsoft.com/office/drawing/2014/main" id="{0F98845A-3197-4B9B-AAAD-97F61C3993BA}"/>
+                <a16:creationId xmlns:a16="http://schemas.microsoft.com/office/drawing/2014/main" id="{4733EE8B-5E9D-4FF3-AD7D-B3449DA5A3C0}"/>
               </a:ext>
             </a:extLst>
           </p:cNvPr>
@@ -6325,7 +6405,7 @@
           <p:cNvPr id="4" name="Rectangle 3">
             <a:extLst xmlns:a="http://schemas.openxmlformats.org/drawingml/2006/main">
               <a:ext uri="{FF2B5EF4-FFF2-40B4-BE49-F238E27FC236}">
-                <a16:creationId xmlns:a16="http://schemas.microsoft.com/office/drawing/2014/main" id="{B8C89E90-FFF6-4828-8748-44A202DCFB01}"/>
+                <a16:creationId xmlns:a16="http://schemas.microsoft.com/office/drawing/2014/main" id="{54C7836D-90C7-4137-BF84-3F685BBA1C59}"/>
               </a:ext>
             </a:extLst>
           </p:cNvPr>
@@ -6380,7 +6460,7 @@
           <p:cNvPr id="5" name="Rectangle 4">
             <a:extLst xmlns:a="http://schemas.openxmlformats.org/drawingml/2006/main">
               <a:ext uri="{FF2B5EF4-FFF2-40B4-BE49-F238E27FC236}">
-                <a16:creationId xmlns:a16="http://schemas.microsoft.com/office/drawing/2014/main" id="{F30E95B1-55C7-481D-885A-4553A69C9502}"/>
+                <a16:creationId xmlns:a16="http://schemas.microsoft.com/office/drawing/2014/main" id="{66A90AF2-485F-4042-8131-021E4D11E3DA}"/>
               </a:ext>
             </a:extLst>
           </p:cNvPr>
@@ -6435,7 +6515,7 @@
           <p:cNvPr id="6" name="TextBox 5">
             <a:extLst xmlns:a="http://schemas.openxmlformats.org/drawingml/2006/main">
               <a:ext uri="{FF2B5EF4-FFF2-40B4-BE49-F238E27FC236}">
-                <a16:creationId xmlns:a16="http://schemas.microsoft.com/office/drawing/2014/main" id="{C4AA1845-5215-49CB-AB70-2851C386EE06}"/>
+                <a16:creationId xmlns:a16="http://schemas.microsoft.com/office/drawing/2014/main" id="{DF0A1951-4E4A-4844-9A2B-1277865D8F14}"/>
               </a:ext>
             </a:extLst>
           </p:cNvPr>
@@ -6472,7 +6552,7 @@
                 <a:ea typeface="Aptos"/>
                 <a:cs typeface="Aptos"/>
               </a:rPr>
-              <a:t>Julkinen riippumaton evidenssikooste · 2026.07.25-24 · 2026-07-24 · Lähteet: EPO Register; EP3032975B2; 8 Ni 18/24 (EP); 7 O 3341/24</a:t>
+              <a:t>Julkinen riippumaton evidenssikooste · 2026.07.26-25 · 2026-07-26 · Lähteet: EPO Register; EP3032975B2; 8 Ni 18/24 (EP); 7 O 3341/24</a:t>
             </a:r>
           </a:p>
         </p:txBody>
@@ -6482,7 +6562,7 @@
           <p:cNvPr id="7" name="TextBox 6">
             <a:extLst xmlns:a="http://schemas.openxmlformats.org/drawingml/2006/main">
               <a:ext uri="{FF2B5EF4-FFF2-40B4-BE49-F238E27FC236}">
-                <a16:creationId xmlns:a16="http://schemas.microsoft.com/office/drawing/2014/main" id="{5284EC16-0E93-4198-863C-FB5688998E44}"/>
+                <a16:creationId xmlns:a16="http://schemas.microsoft.com/office/drawing/2014/main" id="{D34BBB20-4511-41D4-A571-980D08DD409D}"/>
               </a:ext>
             </a:extLst>
           </p:cNvPr>
@@ -6529,7 +6609,7 @@
           <p:cNvPr id="8" name="Rounded Rectangle 7">
             <a:extLst xmlns:a="http://schemas.openxmlformats.org/drawingml/2006/main">
               <a:ext uri="{FF2B5EF4-FFF2-40B4-BE49-F238E27FC236}">
-                <a16:creationId xmlns:a16="http://schemas.microsoft.com/office/drawing/2014/main" id="{FEBCE235-3B73-4012-9303-EA8603188E05}"/>
+                <a16:creationId xmlns:a16="http://schemas.microsoft.com/office/drawing/2014/main" id="{D019C82F-3C7D-40C5-9FC4-5C5C8D785D1A}"/>
               </a:ext>
             </a:extLst>
           </p:cNvPr>
@@ -6586,7 +6666,7 @@
           <p:cNvPr id="9" name="TextBox 8">
             <a:extLst xmlns:a="http://schemas.openxmlformats.org/drawingml/2006/main">
               <a:ext uri="{FF2B5EF4-FFF2-40B4-BE49-F238E27FC236}">
-                <a16:creationId xmlns:a16="http://schemas.microsoft.com/office/drawing/2014/main" id="{4BDFE0A6-AAC6-406B-8E92-7E6E04771C63}"/>
+                <a16:creationId xmlns:a16="http://schemas.microsoft.com/office/drawing/2014/main" id="{AFCDEDCF-0B57-43EE-8406-E44CBE9C8DAA}"/>
               </a:ext>
             </a:extLst>
           </p:cNvPr>
@@ -6633,7 +6713,7 @@
           <p:cNvPr id="10" name="TextBox 9">
             <a:extLst xmlns:a="http://schemas.openxmlformats.org/drawingml/2006/main">
               <a:ext uri="{FF2B5EF4-FFF2-40B4-BE49-F238E27FC236}">
-                <a16:creationId xmlns:a16="http://schemas.microsoft.com/office/drawing/2014/main" id="{211CEF0B-93AF-41BD-86CD-66FB2C9AB3C5}"/>
+                <a16:creationId xmlns:a16="http://schemas.microsoft.com/office/drawing/2014/main" id="{955B305D-C4AE-4604-847B-A16817F6E0F9}"/>
               </a:ext>
             </a:extLst>
           </p:cNvPr>
@@ -6680,7 +6760,7 @@
           <p:cNvPr id="11" name="Rounded Rectangle 10">
             <a:extLst xmlns:a="http://schemas.openxmlformats.org/drawingml/2006/main">
               <a:ext uri="{FF2B5EF4-FFF2-40B4-BE49-F238E27FC236}">
-                <a16:creationId xmlns:a16="http://schemas.microsoft.com/office/drawing/2014/main" id="{5D9711A8-3896-49EB-B627-D2364132BEE3}"/>
+                <a16:creationId xmlns:a16="http://schemas.microsoft.com/office/drawing/2014/main" id="{73A49292-415A-40CD-AA1C-C081C4EAF42A}"/>
               </a:ext>
             </a:extLst>
           </p:cNvPr>
@@ -6737,7 +6817,7 @@
           <p:cNvPr id="12" name="TextBox 11">
             <a:extLst xmlns:a="http://schemas.openxmlformats.org/drawingml/2006/main">
               <a:ext uri="{FF2B5EF4-FFF2-40B4-BE49-F238E27FC236}">
-                <a16:creationId xmlns:a16="http://schemas.microsoft.com/office/drawing/2014/main" id="{7E585A47-EF35-43DA-9262-B93EAC7C3F44}"/>
+                <a16:creationId xmlns:a16="http://schemas.microsoft.com/office/drawing/2014/main" id="{8B367321-302F-4DB7-B4A3-7D57351B96E5}"/>
               </a:ext>
             </a:extLst>
           </p:cNvPr>
@@ -6784,7 +6864,7 @@
           <p:cNvPr id="13" name="TextBox 12">
             <a:extLst xmlns:a="http://schemas.openxmlformats.org/drawingml/2006/main">
               <a:ext uri="{FF2B5EF4-FFF2-40B4-BE49-F238E27FC236}">
-                <a16:creationId xmlns:a16="http://schemas.microsoft.com/office/drawing/2014/main" id="{7467FB12-D7E8-452F-A2CF-B5D0F1091E99}"/>
+                <a16:creationId xmlns:a16="http://schemas.microsoft.com/office/drawing/2014/main" id="{FE4A6940-5B48-458A-907B-47400FE366FC}"/>
               </a:ext>
             </a:extLst>
           </p:cNvPr>
@@ -6831,7 +6911,7 @@
           <p:cNvPr id="14" name="Rounded Rectangle 13">
             <a:extLst xmlns:a="http://schemas.openxmlformats.org/drawingml/2006/main">
               <a:ext uri="{FF2B5EF4-FFF2-40B4-BE49-F238E27FC236}">
-                <a16:creationId xmlns:a16="http://schemas.microsoft.com/office/drawing/2014/main" id="{EF7B8600-B947-46D0-A584-EA0F4CBE1896}"/>
+                <a16:creationId xmlns:a16="http://schemas.microsoft.com/office/drawing/2014/main" id="{54A88110-EBD4-4232-ADBE-FB0B2D7DAEF7}"/>
               </a:ext>
             </a:extLst>
           </p:cNvPr>
@@ -6888,7 +6968,7 @@
           <p:cNvPr id="15" name="TextBox 14">
             <a:extLst xmlns:a="http://schemas.openxmlformats.org/drawingml/2006/main">
               <a:ext uri="{FF2B5EF4-FFF2-40B4-BE49-F238E27FC236}">
-                <a16:creationId xmlns:a16="http://schemas.microsoft.com/office/drawing/2014/main" id="{703B6E27-8C83-4E66-9289-331C12B29560}"/>
+                <a16:creationId xmlns:a16="http://schemas.microsoft.com/office/drawing/2014/main" id="{56966EBC-7D8F-41F3-BD92-DECD25586A88}"/>
               </a:ext>
             </a:extLst>
           </p:cNvPr>
@@ -6935,7 +7015,7 @@
           <p:cNvPr id="16" name="TextBox 15">
             <a:extLst xmlns:a="http://schemas.openxmlformats.org/drawingml/2006/main">
               <a:ext uri="{FF2B5EF4-FFF2-40B4-BE49-F238E27FC236}">
-                <a16:creationId xmlns:a16="http://schemas.microsoft.com/office/drawing/2014/main" id="{10D18B0F-D719-46AF-8D2A-ACE0EB96D780}"/>
+                <a16:creationId xmlns:a16="http://schemas.microsoft.com/office/drawing/2014/main" id="{19D992B4-83B9-46AE-ADFB-F94C61967BCE}"/>
               </a:ext>
             </a:extLst>
           </p:cNvPr>
@@ -6982,7 +7062,7 @@
           <p:cNvPr id="17" name="TextBox 16">
             <a:extLst xmlns:a="http://schemas.openxmlformats.org/drawingml/2006/main">
               <a:ext uri="{FF2B5EF4-FFF2-40B4-BE49-F238E27FC236}">
-                <a16:creationId xmlns:a16="http://schemas.microsoft.com/office/drawing/2014/main" id="{5917C130-EE00-417D-941A-E2F0A2C23926}"/>
+                <a16:creationId xmlns:a16="http://schemas.microsoft.com/office/drawing/2014/main" id="{1E8B6604-65E7-4DFD-B202-0BD496CB3881}"/>
               </a:ext>
             </a:extLst>
           </p:cNvPr>
@@ -7029,7 +7109,7 @@
           <p:cNvPr id="18" name="Rounded Rectangle 17">
             <a:extLst xmlns:a="http://schemas.openxmlformats.org/drawingml/2006/main">
               <a:ext uri="{FF2B5EF4-FFF2-40B4-BE49-F238E27FC236}">
-                <a16:creationId xmlns:a16="http://schemas.microsoft.com/office/drawing/2014/main" id="{3098A6AF-D80D-41B1-A5D6-FFA5270FA827}"/>
+                <a16:creationId xmlns:a16="http://schemas.microsoft.com/office/drawing/2014/main" id="{053CD1A2-C142-4FD0-AC3F-B0307D3F96AF}"/>
               </a:ext>
             </a:extLst>
           </p:cNvPr>
@@ -7086,7 +7166,7 @@
           <p:cNvPr id="19" name="TextBox 18">
             <a:extLst xmlns:a="http://schemas.openxmlformats.org/drawingml/2006/main">
               <a:ext uri="{FF2B5EF4-FFF2-40B4-BE49-F238E27FC236}">
-                <a16:creationId xmlns:a16="http://schemas.microsoft.com/office/drawing/2014/main" id="{13AFCBEE-8045-4E9B-8389-EF40D2FF3E80}"/>
+                <a16:creationId xmlns:a16="http://schemas.microsoft.com/office/drawing/2014/main" id="{7D318EFD-43D9-4BF0-AF49-EF1F5F2CA0DF}"/>
               </a:ext>
             </a:extLst>
           </p:cNvPr>
@@ -7133,7 +7213,7 @@
           <p:cNvPr id="20" name="TextBox 19">
             <a:extLst xmlns:a="http://schemas.openxmlformats.org/drawingml/2006/main">
               <a:ext uri="{FF2B5EF4-FFF2-40B4-BE49-F238E27FC236}">
-                <a16:creationId xmlns:a16="http://schemas.microsoft.com/office/drawing/2014/main" id="{7A4349F7-360A-47E4-8658-83D203F237BF}"/>
+                <a16:creationId xmlns:a16="http://schemas.microsoft.com/office/drawing/2014/main" id="{CB4CABB0-7D93-4800-91BD-2288A3599CE5}"/>
               </a:ext>
             </a:extLst>
           </p:cNvPr>
@@ -7178,7 +7258,7 @@
     </p:spTree>
     <p:extLst>
       <p:ext uri="{BB962C8B-B14F-4D97-AF65-F5344CB8AC3E}">
-        <p14:creationId xmlns:p14="http://schemas.microsoft.com/office/powerpoint/2010/main" val="1237373325"/>
+        <p14:creationId xmlns:p14="http://schemas.microsoft.com/office/powerpoint/2010/main" val="1040272519"/>
       </p:ext>
     </p:extLst>
   </p:cSld>
@@ -7202,7 +7282,7 @@
           <p:cNvPr id="2" name="TextBox 1">
             <a:extLst xmlns:a="http://schemas.openxmlformats.org/drawingml/2006/main">
               <a:ext uri="{FF2B5EF4-FFF2-40B4-BE49-F238E27FC236}">
-                <a16:creationId xmlns:a16="http://schemas.microsoft.com/office/drawing/2014/main" id="{C106660E-22B1-41E6-B7BE-7EB5C0559DBF}"/>
+                <a16:creationId xmlns:a16="http://schemas.microsoft.com/office/drawing/2014/main" id="{56C67245-296B-489D-88F8-4510E275C268}"/>
               </a:ext>
             </a:extLst>
           </p:cNvPr>
@@ -7249,7 +7329,7 @@
           <p:cNvPr id="3" name="TextBox 2">
             <a:extLst xmlns:a="http://schemas.openxmlformats.org/drawingml/2006/main">
               <a:ext uri="{FF2B5EF4-FFF2-40B4-BE49-F238E27FC236}">
-                <a16:creationId xmlns:a16="http://schemas.microsoft.com/office/drawing/2014/main" id="{5228FD01-6AEC-4613-8DF7-D38AF9EADCC9}"/>
+                <a16:creationId xmlns:a16="http://schemas.microsoft.com/office/drawing/2014/main" id="{69128FEF-7895-457E-94A8-0EC4057A9A07}"/>
               </a:ext>
             </a:extLst>
           </p:cNvPr>
@@ -7296,7 +7376,7 @@
           <p:cNvPr id="4" name="Rectangle 3">
             <a:extLst xmlns:a="http://schemas.openxmlformats.org/drawingml/2006/main">
               <a:ext uri="{FF2B5EF4-FFF2-40B4-BE49-F238E27FC236}">
-                <a16:creationId xmlns:a16="http://schemas.microsoft.com/office/drawing/2014/main" id="{870E7D62-D5AD-4B5A-BD69-E16F9F0B26EB}"/>
+                <a16:creationId xmlns:a16="http://schemas.microsoft.com/office/drawing/2014/main" id="{AF2A3E95-6F0A-4846-8AC0-1FDC3ABAA72E}"/>
               </a:ext>
             </a:extLst>
           </p:cNvPr>
@@ -7351,7 +7431,7 @@
           <p:cNvPr id="5" name="Rectangle 4">
             <a:extLst xmlns:a="http://schemas.openxmlformats.org/drawingml/2006/main">
               <a:ext uri="{FF2B5EF4-FFF2-40B4-BE49-F238E27FC236}">
-                <a16:creationId xmlns:a16="http://schemas.microsoft.com/office/drawing/2014/main" id="{A3EDD77E-6572-4BB7-AD62-7E788C2BC702}"/>
+                <a16:creationId xmlns:a16="http://schemas.microsoft.com/office/drawing/2014/main" id="{B906EC45-2166-4423-93FF-B00935D9EE27}"/>
               </a:ext>
             </a:extLst>
           </p:cNvPr>
@@ -7406,7 +7486,7 @@
           <p:cNvPr id="6" name="TextBox 5">
             <a:extLst xmlns:a="http://schemas.openxmlformats.org/drawingml/2006/main">
               <a:ext uri="{FF2B5EF4-FFF2-40B4-BE49-F238E27FC236}">
-                <a16:creationId xmlns:a16="http://schemas.microsoft.com/office/drawing/2014/main" id="{97A33B80-0DAA-4E20-8311-58516B8660BB}"/>
+                <a16:creationId xmlns:a16="http://schemas.microsoft.com/office/drawing/2014/main" id="{742125FE-A6EC-4D1F-B397-DEFDF0DE2654}"/>
               </a:ext>
             </a:extLst>
           </p:cNvPr>
@@ -7443,7 +7523,7 @@
                 <a:ea typeface="Aptos"/>
                 <a:cs typeface="Aptos"/>
               </a:rPr>
-              <a:t>Julkinen riippumaton evidenssikooste · 2026.07.25-24 · 2026-07-25 · Lähteet: Statistics Canada; Health Canada; NZ Ministry of Health; European Commission; FHM; FTC</a:t>
+              <a:t>Julkinen riippumaton evidenssikooste · 2026.07.26-25 · 2026-07-26 · Lähteet: Statistics Canada; Health Canada; NZ Ministry of Health; European Commission; FHM; FTC</a:t>
             </a:r>
           </a:p>
         </p:txBody>
@@ -7453,7 +7533,7 @@
           <p:cNvPr id="7" name="TextBox 6">
             <a:extLst xmlns:a="http://schemas.openxmlformats.org/drawingml/2006/main">
               <a:ext uri="{FF2B5EF4-FFF2-40B4-BE49-F238E27FC236}">
-                <a16:creationId xmlns:a16="http://schemas.microsoft.com/office/drawing/2014/main" id="{433CF4E5-91C6-4908-9505-18CCDD9E3BDA}"/>
+                <a16:creationId xmlns:a16="http://schemas.microsoft.com/office/drawing/2014/main" id="{74E6AB98-5DD0-419F-8069-4235FB9429CA}"/>
               </a:ext>
             </a:extLst>
           </p:cNvPr>
@@ -7500,7 +7580,7 @@
           <p:cNvPr id="8" name="Rounded Rectangle 7">
             <a:extLst xmlns:a="http://schemas.openxmlformats.org/drawingml/2006/main">
               <a:ext uri="{FF2B5EF4-FFF2-40B4-BE49-F238E27FC236}">
-                <a16:creationId xmlns:a16="http://schemas.microsoft.com/office/drawing/2014/main" id="{E478A1A2-1E2D-4553-BE92-FE4B226B5F08}"/>
+                <a16:creationId xmlns:a16="http://schemas.microsoft.com/office/drawing/2014/main" id="{FE800F0F-8779-4DFE-A79B-8B2775A18B2D}"/>
               </a:ext>
             </a:extLst>
           </p:cNvPr>
@@ -7557,7 +7637,7 @@
           <p:cNvPr id="9" name="TextBox 8">
             <a:extLst xmlns:a="http://schemas.openxmlformats.org/drawingml/2006/main">
               <a:ext uri="{FF2B5EF4-FFF2-40B4-BE49-F238E27FC236}">
-                <a16:creationId xmlns:a16="http://schemas.microsoft.com/office/drawing/2014/main" id="{44CE538B-5A7D-4BF0-84D8-30DE5C5AE21B}"/>
+                <a16:creationId xmlns:a16="http://schemas.microsoft.com/office/drawing/2014/main" id="{59FBBB43-B4B0-4963-9EA5-46D0CFD27B3B}"/>
               </a:ext>
             </a:extLst>
           </p:cNvPr>
@@ -7604,7 +7684,7 @@
           <p:cNvPr id="10" name="TextBox 9">
             <a:extLst xmlns:a="http://schemas.openxmlformats.org/drawingml/2006/main">
               <a:ext uri="{FF2B5EF4-FFF2-40B4-BE49-F238E27FC236}">
-                <a16:creationId xmlns:a16="http://schemas.microsoft.com/office/drawing/2014/main" id="{51B1EC5B-BA68-413B-9868-F806254A1182}"/>
+                <a16:creationId xmlns:a16="http://schemas.microsoft.com/office/drawing/2014/main" id="{5529487F-8C0E-447A-8875-94B2BCBEBA07}"/>
               </a:ext>
             </a:extLst>
           </p:cNvPr>
@@ -7651,7 +7731,7 @@
           <p:cNvPr id="11" name="Rounded Rectangle 10">
             <a:extLst xmlns:a="http://schemas.openxmlformats.org/drawingml/2006/main">
               <a:ext uri="{FF2B5EF4-FFF2-40B4-BE49-F238E27FC236}">
-                <a16:creationId xmlns:a16="http://schemas.microsoft.com/office/drawing/2014/main" id="{5B9B84B7-6F05-498C-B1EE-1A46A5A56C5C}"/>
+                <a16:creationId xmlns:a16="http://schemas.microsoft.com/office/drawing/2014/main" id="{40D29C5D-4A30-4E96-BD1D-0475545BD6E2}"/>
               </a:ext>
             </a:extLst>
           </p:cNvPr>
@@ -7708,7 +7788,7 @@
           <p:cNvPr id="12" name="TextBox 11">
             <a:extLst xmlns:a="http://schemas.openxmlformats.org/drawingml/2006/main">
               <a:ext uri="{FF2B5EF4-FFF2-40B4-BE49-F238E27FC236}">
-                <a16:creationId xmlns:a16="http://schemas.microsoft.com/office/drawing/2014/main" id="{2E5950AB-D33B-4758-9EB6-6848659CE7D8}"/>
+                <a16:creationId xmlns:a16="http://schemas.microsoft.com/office/drawing/2014/main" id="{AE91BF59-1A99-4CCE-954A-1F983648D33F}"/>
               </a:ext>
             </a:extLst>
           </p:cNvPr>
@@ -7745,7 +7825,7 @@
                 <a:ea typeface="Aptos"/>
                 <a:cs typeface="Aptos"/>
               </a:rPr>
-              <a:t>533,7–731,2 milj. NZD</a:t>
+              <a:t>274,180 milj. NZD</a:t>
             </a:r>
           </a:p>
         </p:txBody>
@@ -7755,7 +7835,7 @@
           <p:cNvPr id="13" name="TextBox 12">
             <a:extLst xmlns:a="http://schemas.openxmlformats.org/drawingml/2006/main">
               <a:ext uri="{FF2B5EF4-FFF2-40B4-BE49-F238E27FC236}">
-                <a16:creationId xmlns:a16="http://schemas.microsoft.com/office/drawing/2014/main" id="{019E2A81-3D23-41C3-92DD-A2DC2DE79CAE}"/>
+                <a16:creationId xmlns:a16="http://schemas.microsoft.com/office/drawing/2014/main" id="{DC4DF482-1E32-4F45-BAFD-10698D2C2779}"/>
               </a:ext>
             </a:extLst>
           </p:cNvPr>
@@ -7767,7 +7847,7 @@
         <p:spPr>
           <a:xfrm xmlns:a="http://schemas.openxmlformats.org/drawingml/2006/main">
             <a:off x="4483608" y="2468879"/>
-            <a:ext cx="3203448" cy="438912"/>
+            <a:ext cx="3203448" cy="499872"/>
           </a:xfrm>
           <a:prstGeom xmlns:a="http://schemas.openxmlformats.org/drawingml/2006/main" prst="rect">
             <a:avLst/>
@@ -7792,7 +7872,7 @@
                 <a:ea typeface="Aptos"/>
                 <a:cs typeface="Aptos"/>
               </a:rPr>
-              <a:t>≈298,5–408,9 milj. EUR · ECB 2024</a:t>
+              <a:t>tunnistettu AIS/AVP-summa · ≈153,3 milj. EUR</a:t>
             </a:r>
           </a:p>
         </p:txBody>
@@ -7802,7 +7882,7 @@
           <p:cNvPr id="14" name="Rounded Rectangle 13">
             <a:extLst xmlns:a="http://schemas.openxmlformats.org/drawingml/2006/main">
               <a:ext uri="{FF2B5EF4-FFF2-40B4-BE49-F238E27FC236}">
-                <a16:creationId xmlns:a16="http://schemas.microsoft.com/office/drawing/2014/main" id="{CAD83FC7-2C0D-46F6-9DE2-865D7DB8E201}"/>
+                <a16:creationId xmlns:a16="http://schemas.microsoft.com/office/drawing/2014/main" id="{3D55FC65-58C7-463B-8950-57786131E314}"/>
               </a:ext>
             </a:extLst>
           </p:cNvPr>
@@ -7859,7 +7939,7 @@
           <p:cNvPr id="15" name="TextBox 14">
             <a:extLst xmlns:a="http://schemas.openxmlformats.org/drawingml/2006/main">
               <a:ext uri="{FF2B5EF4-FFF2-40B4-BE49-F238E27FC236}">
-                <a16:creationId xmlns:a16="http://schemas.microsoft.com/office/drawing/2014/main" id="{86DDF90D-E1A9-453C-89DC-56BD5C9B0C80}"/>
+                <a16:creationId xmlns:a16="http://schemas.microsoft.com/office/drawing/2014/main" id="{4EEB73DA-A29D-4271-861B-2B623F600B12}"/>
               </a:ext>
             </a:extLst>
           </p:cNvPr>
@@ -7906,7 +7986,7 @@
           <p:cNvPr id="16" name="TextBox 15">
             <a:extLst xmlns:a="http://schemas.openxmlformats.org/drawingml/2006/main">
               <a:ext uri="{FF2B5EF4-FFF2-40B4-BE49-F238E27FC236}">
-                <a16:creationId xmlns:a16="http://schemas.microsoft.com/office/drawing/2014/main" id="{610AE875-0B61-46A8-81A4-2061E4E96EDD}"/>
+                <a16:creationId xmlns:a16="http://schemas.microsoft.com/office/drawing/2014/main" id="{ED8AEFE2-4D00-4A9A-9B99-C58F559DF1B4}"/>
               </a:ext>
             </a:extLst>
           </p:cNvPr>
@@ -7953,7 +8033,7 @@
           <p:cNvPr id="17" name="TextBox 16">
             <a:extLst xmlns:a="http://schemas.openxmlformats.org/drawingml/2006/main">
               <a:ext uri="{FF2B5EF4-FFF2-40B4-BE49-F238E27FC236}">
-                <a16:creationId xmlns:a16="http://schemas.microsoft.com/office/drawing/2014/main" id="{D51A6C17-E64E-4C50-9BCE-45A066B68FFA}"/>
+                <a16:creationId xmlns:a16="http://schemas.microsoft.com/office/drawing/2014/main" id="{85895BC1-AE9E-4428-9958-9D479576FD0C}"/>
               </a:ext>
             </a:extLst>
           </p:cNvPr>
@@ -7990,7 +8070,7 @@
                 <a:ea typeface="Aptos"/>
                 <a:cs typeface="Aptos"/>
               </a:rPr>
-              <a:t>5/5 ehdokasta jäi D1–D10-portin ulkopuolelle; hyväksytty donor-portti on 0/3.</a:t>
+              <a:t>Uusi-Seelanti läpäisee 7/10: D5 hylätty, D8 ja D10 avoinna. Ei hyväksytty; donor-portti 0/3.</a:t>
             </a:r>
           </a:p>
         </p:txBody>
@@ -8000,7 +8080,7 @@
           <p:cNvPr id="18" name="Rounded Rectangle 17">
             <a:extLst xmlns:a="http://schemas.openxmlformats.org/drawingml/2006/main">
               <a:ext uri="{FF2B5EF4-FFF2-40B4-BE49-F238E27FC236}">
-                <a16:creationId xmlns:a16="http://schemas.microsoft.com/office/drawing/2014/main" id="{EEF5ADF8-15E4-4F56-A7EF-0493BA935827}"/>
+                <a16:creationId xmlns:a16="http://schemas.microsoft.com/office/drawing/2014/main" id="{918E3489-E77A-4117-A4E7-FF4981D2C999}"/>
               </a:ext>
             </a:extLst>
           </p:cNvPr>
@@ -8057,7 +8137,7 @@
           <p:cNvPr id="19" name="TextBox 18">
             <a:extLst xmlns:a="http://schemas.openxmlformats.org/drawingml/2006/main">
               <a:ext uri="{FF2B5EF4-FFF2-40B4-BE49-F238E27FC236}">
-                <a16:creationId xmlns:a16="http://schemas.microsoft.com/office/drawing/2014/main" id="{2EF4E2D6-84A7-40C1-968C-1600E2B71274}"/>
+                <a16:creationId xmlns:a16="http://schemas.microsoft.com/office/drawing/2014/main" id="{C6487A17-6FAE-41B0-BF15-EE090E5FAEC4}"/>
               </a:ext>
             </a:extLst>
           </p:cNvPr>
@@ -8104,7 +8184,7 @@
           <p:cNvPr id="20" name="TextBox 19">
             <a:extLst xmlns:a="http://schemas.openxmlformats.org/drawingml/2006/main">
               <a:ext uri="{FF2B5EF4-FFF2-40B4-BE49-F238E27FC236}">
-                <a16:creationId xmlns:a16="http://schemas.microsoft.com/office/drawing/2014/main" id="{15EC9568-E51B-494D-958A-E15BA5F38A2C}"/>
+                <a16:creationId xmlns:a16="http://schemas.microsoft.com/office/drawing/2014/main" id="{DF6154F9-3EBE-40AF-B356-5DCC2C347938}"/>
               </a:ext>
             </a:extLst>
           </p:cNvPr>
@@ -8149,7 +8229,7 @@
     </p:spTree>
     <p:extLst>
       <p:ext uri="{BB962C8B-B14F-4D97-AF65-F5344CB8AC3E}">
-        <p14:creationId xmlns:p14="http://schemas.microsoft.com/office/powerpoint/2010/main" val="1733210326"/>
+        <p14:creationId xmlns:p14="http://schemas.microsoft.com/office/powerpoint/2010/main" val="1526795823"/>
       </p:ext>
     </p:extLst>
   </p:cSld>
@@ -8173,7 +8253,7 @@
           <p:cNvPr id="2" name="TextBox 1">
             <a:extLst xmlns:a="http://schemas.openxmlformats.org/drawingml/2006/main">
               <a:ext uri="{FF2B5EF4-FFF2-40B4-BE49-F238E27FC236}">
-                <a16:creationId xmlns:a16="http://schemas.microsoft.com/office/drawing/2014/main" id="{F6D1683E-8C6F-4D4D-AF8F-A1701D374161}"/>
+                <a16:creationId xmlns:a16="http://schemas.microsoft.com/office/drawing/2014/main" id="{F09C1313-782E-4EDA-9EB2-D0B1575B4AC6}"/>
               </a:ext>
             </a:extLst>
           </p:cNvPr>
@@ -8220,7 +8300,7 @@
           <p:cNvPr id="3" name="TextBox 2">
             <a:extLst xmlns:a="http://schemas.openxmlformats.org/drawingml/2006/main">
               <a:ext uri="{FF2B5EF4-FFF2-40B4-BE49-F238E27FC236}">
-                <a16:creationId xmlns:a16="http://schemas.microsoft.com/office/drawing/2014/main" id="{B95F7289-609F-4D8D-BC2D-0EC4CC4ED88D}"/>
+                <a16:creationId xmlns:a16="http://schemas.microsoft.com/office/drawing/2014/main" id="{4AF5FF88-A4A6-488D-B7FE-E046114915A3}"/>
               </a:ext>
             </a:extLst>
           </p:cNvPr>
@@ -8267,7 +8347,7 @@
           <p:cNvPr id="4" name="Rectangle 3">
             <a:extLst xmlns:a="http://schemas.openxmlformats.org/drawingml/2006/main">
               <a:ext uri="{FF2B5EF4-FFF2-40B4-BE49-F238E27FC236}">
-                <a16:creationId xmlns:a16="http://schemas.microsoft.com/office/drawing/2014/main" id="{39AAABD6-1EFF-441C-ADF4-F3D0739B5D30}"/>
+                <a16:creationId xmlns:a16="http://schemas.microsoft.com/office/drawing/2014/main" id="{4C0A9259-69FC-4C28-A14B-F9221D29FFC0}"/>
               </a:ext>
             </a:extLst>
           </p:cNvPr>
@@ -8322,7 +8402,7 @@
           <p:cNvPr id="5" name="Rectangle 4">
             <a:extLst xmlns:a="http://schemas.openxmlformats.org/drawingml/2006/main">
               <a:ext uri="{FF2B5EF4-FFF2-40B4-BE49-F238E27FC236}">
-                <a16:creationId xmlns:a16="http://schemas.microsoft.com/office/drawing/2014/main" id="{489B362A-FA63-4F26-9C90-36728A2513B1}"/>
+                <a16:creationId xmlns:a16="http://schemas.microsoft.com/office/drawing/2014/main" id="{9319B507-4EAD-4454-A794-F8B094D625C8}"/>
               </a:ext>
             </a:extLst>
           </p:cNvPr>
@@ -8377,7 +8457,7 @@
           <p:cNvPr id="6" name="TextBox 5">
             <a:extLst xmlns:a="http://schemas.openxmlformats.org/drawingml/2006/main">
               <a:ext uri="{FF2B5EF4-FFF2-40B4-BE49-F238E27FC236}">
-                <a16:creationId xmlns:a16="http://schemas.microsoft.com/office/drawing/2014/main" id="{E743F574-4FC5-4A36-A6A2-02F478AEC56A}"/>
+                <a16:creationId xmlns:a16="http://schemas.microsoft.com/office/drawing/2014/main" id="{8F0084D1-96DD-4F55-89D1-5F0F6BEE7593}"/>
               </a:ext>
             </a:extLst>
           </p:cNvPr>
@@ -8414,7 +8494,7 @@
                 <a:ea typeface="Aptos"/>
                 <a:cs typeface="Aptos"/>
               </a:rPr>
-              <a:t>Julkinen riippumaton evidenssikooste · 2026.07.25-24 · 2026-07-24 · Lähteet: Evidence Register; WIPO IP valuation</a:t>
+              <a:t>Julkinen riippumaton evidenssikooste · 2026.07.26-25 · 2026-07-26 · Lähteet: Evidence Register; WIPO IP valuation</a:t>
             </a:r>
           </a:p>
         </p:txBody>
@@ -8424,7 +8504,7 @@
           <p:cNvPr id="7" name="TextBox 6">
             <a:extLst xmlns:a="http://schemas.openxmlformats.org/drawingml/2006/main">
               <a:ext uri="{FF2B5EF4-FFF2-40B4-BE49-F238E27FC236}">
-                <a16:creationId xmlns:a16="http://schemas.microsoft.com/office/drawing/2014/main" id="{310EB744-E45E-43A4-9E04-5547FABFF247}"/>
+                <a16:creationId xmlns:a16="http://schemas.microsoft.com/office/drawing/2014/main" id="{D64C118D-9718-4964-837B-81DFF55350A3}"/>
               </a:ext>
             </a:extLst>
           </p:cNvPr>
@@ -8911,7 +8991,7 @@
           <p:cNvPr id="9" name="TextBox 8">
             <a:extLst xmlns:a="http://schemas.openxmlformats.org/drawingml/2006/main">
               <a:ext uri="{FF2B5EF4-FFF2-40B4-BE49-F238E27FC236}">
-                <a16:creationId xmlns:a16="http://schemas.microsoft.com/office/drawing/2014/main" id="{8A9B071A-0DA9-4613-B9A6-4C1DE247D9DE}"/>
+                <a16:creationId xmlns:a16="http://schemas.microsoft.com/office/drawing/2014/main" id="{483E74A2-9B33-420F-893F-F9B84149480E}"/>
               </a:ext>
             </a:extLst>
           </p:cNvPr>
@@ -8956,7 +9036,7 @@
     </p:spTree>
     <p:extLst>
       <p:ext uri="{BB962C8B-B14F-4D97-AF65-F5344CB8AC3E}">
-        <p14:creationId xmlns:p14="http://schemas.microsoft.com/office/powerpoint/2010/main" val="948176683"/>
+        <p14:creationId xmlns:p14="http://schemas.microsoft.com/office/powerpoint/2010/main" val="1620704266"/>
       </p:ext>
     </p:extLst>
   </p:cSld>
@@ -8987,7 +9067,7 @@
           <p:cNvPr id="2" name="TextBox 1">
             <a:extLst xmlns:a="http://schemas.openxmlformats.org/drawingml/2006/main">
               <a:ext uri="{FF2B5EF4-FFF2-40B4-BE49-F238E27FC236}">
-                <a16:creationId xmlns:a16="http://schemas.microsoft.com/office/drawing/2014/main" id="{7ECE3E98-754A-4DF6-9FC1-C8527483B193}"/>
+                <a16:creationId xmlns:a16="http://schemas.microsoft.com/office/drawing/2014/main" id="{E1AE46C2-A5E9-40E0-B486-7C61B6884271}"/>
               </a:ext>
             </a:extLst>
           </p:cNvPr>
@@ -9034,7 +9114,7 @@
           <p:cNvPr id="3" name="TextBox 2">
             <a:extLst xmlns:a="http://schemas.openxmlformats.org/drawingml/2006/main">
               <a:ext uri="{FF2B5EF4-FFF2-40B4-BE49-F238E27FC236}">
-                <a16:creationId xmlns:a16="http://schemas.microsoft.com/office/drawing/2014/main" id="{7804E52D-71DB-4D27-A500-6A9A4540AC37}"/>
+                <a16:creationId xmlns:a16="http://schemas.microsoft.com/office/drawing/2014/main" id="{EBCDA3C4-28C9-4D9A-9CA2-226CC55663D4}"/>
               </a:ext>
             </a:extLst>
           </p:cNvPr>
@@ -9081,7 +9161,7 @@
           <p:cNvPr id="4" name="TextBox 3">
             <a:extLst xmlns:a="http://schemas.openxmlformats.org/drawingml/2006/main">
               <a:ext uri="{FF2B5EF4-FFF2-40B4-BE49-F238E27FC236}">
-                <a16:creationId xmlns:a16="http://schemas.microsoft.com/office/drawing/2014/main" id="{12D65DCE-D224-4425-BF94-041F8682DF39}"/>
+                <a16:creationId xmlns:a16="http://schemas.microsoft.com/office/drawing/2014/main" id="{A7E46064-13EE-4639-8E7F-8181DC36350C}"/>
               </a:ext>
             </a:extLst>
           </p:cNvPr>
@@ -9200,7 +9280,7 @@
           <p:cNvPr id="5" name="TextBox 4">
             <a:extLst xmlns:a="http://schemas.openxmlformats.org/drawingml/2006/main">
               <a:ext uri="{FF2B5EF4-FFF2-40B4-BE49-F238E27FC236}">
-                <a16:creationId xmlns:a16="http://schemas.microsoft.com/office/drawing/2014/main" id="{6F47CFFF-8A68-4A26-97F0-D2833C773B9B}"/>
+                <a16:creationId xmlns:a16="http://schemas.microsoft.com/office/drawing/2014/main" id="{EBFC3421-7183-4F60-A6B3-C777428C9C5F}"/>
               </a:ext>
             </a:extLst>
           </p:cNvPr>
@@ -9237,7 +9317,7 @@
                 <a:ea typeface="Aptos"/>
                 <a:cs typeface="Aptos"/>
               </a:rPr>
-              <a:t>Versio 2026.07.25-24 · 2026-07-24 · 6 / 6</a:t>
+              <a:t>Versio 2026.07.26-25 · 2026-07-26 · 6 / 6</a:t>
             </a:r>
           </a:p>
         </p:txBody>
@@ -9245,7 +9325,7 @@
     </p:spTree>
     <p:extLst>
       <p:ext uri="{BB962C8B-B14F-4D97-AF65-F5344CB8AC3E}">
-        <p14:creationId xmlns:p14="http://schemas.microsoft.com/office/powerpoint/2010/main" val="1599639040"/>
+        <p14:creationId xmlns:p14="http://schemas.microsoft.com/office/powerpoint/2010/main" val="296789076"/>
       </p:ext>
     </p:extLst>
   </p:cSld>

--- a/site/downloads/pixan-bank-deck-short-fi.pptx
+++ b/site/downloads/pixan-bank-deck-short-fi.pptx
@@ -2,18 +2,18 @@
 <file path=ppt/presentation.xml><?xml version="1.0" encoding="utf-8"?>
 <p:presentation xmlns:p="http://schemas.openxmlformats.org/presentationml/2006/main">
   <p:sldMasterIdLst>
-    <p:sldMasterId xmlns:r="http://schemas.openxmlformats.org/officeDocument/2006/relationships" id="2147483648" r:id="R75576e6f46b847a5"/>
+    <p:sldMasterId xmlns:r="http://schemas.openxmlformats.org/officeDocument/2006/relationships" id="2147483648" r:id="R2ee08852562d475e"/>
   </p:sldMasterIdLst>
   <p:notesMasterIdLst>
-    <p:notesMasterId xmlns:r="http://schemas.openxmlformats.org/officeDocument/2006/relationships" r:id="R675f4ed44f0143d8"/>
+    <p:notesMasterId xmlns:r="http://schemas.openxmlformats.org/officeDocument/2006/relationships" r:id="Rdc9201e913f246c6"/>
   </p:notesMasterIdLst>
   <p:sldIdLst>
-    <p:sldId xmlns:r="http://schemas.openxmlformats.org/officeDocument/2006/relationships" id="256" r:id="Re2e64921747b4228"/>
-    <p:sldId xmlns:r="http://schemas.openxmlformats.org/officeDocument/2006/relationships" id="257" r:id="Rdd20fce9e8794f36"/>
-    <p:sldId xmlns:r="http://schemas.openxmlformats.org/officeDocument/2006/relationships" id="258" r:id="R3789be3bc022447b"/>
-    <p:sldId xmlns:r="http://schemas.openxmlformats.org/officeDocument/2006/relationships" id="259" r:id="R4515232679f64976"/>
-    <p:sldId xmlns:r="http://schemas.openxmlformats.org/officeDocument/2006/relationships" id="260" r:id="Rb46cccb3e4da4869"/>
-    <p:sldId xmlns:r="http://schemas.openxmlformats.org/officeDocument/2006/relationships" id="261" r:id="R334ba640266d48eb"/>
+    <p:sldId xmlns:r="http://schemas.openxmlformats.org/officeDocument/2006/relationships" id="256" r:id="R293d03ef4b0f4973"/>
+    <p:sldId xmlns:r="http://schemas.openxmlformats.org/officeDocument/2006/relationships" id="257" r:id="R7a2f45990af2488b"/>
+    <p:sldId xmlns:r="http://schemas.openxmlformats.org/officeDocument/2006/relationships" id="258" r:id="R443cdc8c21fe443c"/>
+    <p:sldId xmlns:r="http://schemas.openxmlformats.org/officeDocument/2006/relationships" id="259" r:id="R844286f1b812412f"/>
+    <p:sldId xmlns:r="http://schemas.openxmlformats.org/officeDocument/2006/relationships" id="260" r:id="R3489404a11d9463b"/>
+    <p:sldId xmlns:r="http://schemas.openxmlformats.org/officeDocument/2006/relationships" id="261" r:id="Rbd5a23c862bf44f4"/>
   </p:sldIdLst>
   <p:sldSz cx="12191999" cy="6858000"/>
   <p:notesSz cx="6858000" cy="9144000"/>
@@ -525,7 +525,27 @@
           </a:p>
           <a:p xmlns:a="http://schemas.openxmlformats.org/drawingml/2006/main">
             <a:r>
+              <a:t>- https://www23.statcan.gc.ca/imdb/p2SV.pl?Function=getSurvey&amp;SDDS=2008</a:t>
+            </a:r>
+          </a:p>
+          <a:p xmlns:a="http://schemas.openxmlformats.org/drawingml/2006/main">
+            <a:r>
+              <a:t>- https://www23.statcan.gc.ca/imdb/p2SV.pl?Function=getSurvey&amp;SDDS=2406</a:t>
+            </a:r>
+          </a:p>
+          <a:p xmlns:a="http://schemas.openxmlformats.org/drawingml/2006/main">
+            <a:r>
               <a:t>- https://www150.statcan.gc.ca/n1/pub/36-28-0001/2025004/article/00001-eng.pdf</a:t>
+            </a:r>
+          </a:p>
+          <a:p xmlns:a="http://schemas.openxmlformats.org/drawingml/2006/main">
+            <a:r>
+              <a:t>- https://www.gov.pl/web/chemical/notification-of-electronic-cigarettes-and-refill-containers</a:t>
+            </a:r>
+          </a:p>
+          <a:p xmlns:a="http://schemas.openxmlformats.org/drawingml/2006/main">
+            <a:r>
+              <a:t>- https://www.customs.govt.nz/about-us/news/important-notices-archive/important-notices-archive-2023/reminder-classification-of-vaping-devices-and-similar</a:t>
             </a:r>
           </a:p>
           <a:p xmlns:a="http://schemas.openxmlformats.org/drawingml/2006/main">
@@ -725,7 +745,27 @@
           </a:p>
           <a:p xmlns:a="http://schemas.openxmlformats.org/drawingml/2006/main">
             <a:r>
+              <a:t>- https://www23.statcan.gc.ca/imdb/p2SV.pl?Function=getSurvey&amp;SDDS=2008</a:t>
+            </a:r>
+          </a:p>
+          <a:p xmlns:a="http://schemas.openxmlformats.org/drawingml/2006/main">
+            <a:r>
+              <a:t>- https://www23.statcan.gc.ca/imdb/p2SV.pl?Function=getSurvey&amp;SDDS=2406</a:t>
+            </a:r>
+          </a:p>
+          <a:p xmlns:a="http://schemas.openxmlformats.org/drawingml/2006/main">
+            <a:r>
               <a:t>- https://www150.statcan.gc.ca/n1/pub/36-28-0001/2025004/article/00001-eng.pdf</a:t>
+            </a:r>
+          </a:p>
+          <a:p xmlns:a="http://schemas.openxmlformats.org/drawingml/2006/main">
+            <a:r>
+              <a:t>- https://www.gov.pl/web/chemical/notification-of-electronic-cigarettes-and-refill-containers</a:t>
+            </a:r>
+          </a:p>
+          <a:p xmlns:a="http://schemas.openxmlformats.org/drawingml/2006/main">
+            <a:r>
+              <a:t>- https://www.customs.govt.nz/about-us/news/important-notices-archive/important-notices-archive-2023/reminder-classification-of-vaping-devices-and-similar</a:t>
             </a:r>
           </a:p>
           <a:p xmlns:a="http://schemas.openxmlformats.org/drawingml/2006/main">
@@ -925,7 +965,27 @@
           </a:p>
           <a:p xmlns:a="http://schemas.openxmlformats.org/drawingml/2006/main">
             <a:r>
+              <a:t>- https://www23.statcan.gc.ca/imdb/p2SV.pl?Function=getSurvey&amp;SDDS=2008</a:t>
+            </a:r>
+          </a:p>
+          <a:p xmlns:a="http://schemas.openxmlformats.org/drawingml/2006/main">
+            <a:r>
+              <a:t>- https://www23.statcan.gc.ca/imdb/p2SV.pl?Function=getSurvey&amp;SDDS=2406</a:t>
+            </a:r>
+          </a:p>
+          <a:p xmlns:a="http://schemas.openxmlformats.org/drawingml/2006/main">
+            <a:r>
               <a:t>- https://www150.statcan.gc.ca/n1/pub/36-28-0001/2025004/article/00001-eng.pdf</a:t>
+            </a:r>
+          </a:p>
+          <a:p xmlns:a="http://schemas.openxmlformats.org/drawingml/2006/main">
+            <a:r>
+              <a:t>- https://www.gov.pl/web/chemical/notification-of-electronic-cigarettes-and-refill-containers</a:t>
+            </a:r>
+          </a:p>
+          <a:p xmlns:a="http://schemas.openxmlformats.org/drawingml/2006/main">
+            <a:r>
+              <a:t>- https://www.customs.govt.nz/about-us/news/important-notices-archive/important-notices-archive-2023/reminder-classification-of-vaping-devices-and-similar</a:t>
             </a:r>
           </a:p>
           <a:p xmlns:a="http://schemas.openxmlformats.org/drawingml/2006/main">
@@ -1125,7 +1185,27 @@
           </a:p>
           <a:p xmlns:a="http://schemas.openxmlformats.org/drawingml/2006/main">
             <a:r>
+              <a:t>- https://www23.statcan.gc.ca/imdb/p2SV.pl?Function=getSurvey&amp;SDDS=2008</a:t>
+            </a:r>
+          </a:p>
+          <a:p xmlns:a="http://schemas.openxmlformats.org/drawingml/2006/main">
+            <a:r>
+              <a:t>- https://www23.statcan.gc.ca/imdb/p2SV.pl?Function=getSurvey&amp;SDDS=2406</a:t>
+            </a:r>
+          </a:p>
+          <a:p xmlns:a="http://schemas.openxmlformats.org/drawingml/2006/main">
+            <a:r>
               <a:t>- https://www150.statcan.gc.ca/n1/pub/36-28-0001/2025004/article/00001-eng.pdf</a:t>
+            </a:r>
+          </a:p>
+          <a:p xmlns:a="http://schemas.openxmlformats.org/drawingml/2006/main">
+            <a:r>
+              <a:t>- https://www.gov.pl/web/chemical/notification-of-electronic-cigarettes-and-refill-containers</a:t>
+            </a:r>
+          </a:p>
+          <a:p xmlns:a="http://schemas.openxmlformats.org/drawingml/2006/main">
+            <a:r>
+              <a:t>- https://www.customs.govt.nz/about-us/news/important-notices-archive/important-notices-archive-2023/reminder-classification-of-vaping-devices-and-similar</a:t>
             </a:r>
           </a:p>
           <a:p xmlns:a="http://schemas.openxmlformats.org/drawingml/2006/main">
@@ -1325,7 +1405,27 @@
           </a:p>
           <a:p xmlns:a="http://schemas.openxmlformats.org/drawingml/2006/main">
             <a:r>
+              <a:t>- https://www23.statcan.gc.ca/imdb/p2SV.pl?Function=getSurvey&amp;SDDS=2008</a:t>
+            </a:r>
+          </a:p>
+          <a:p xmlns:a="http://schemas.openxmlformats.org/drawingml/2006/main">
+            <a:r>
+              <a:t>- https://www23.statcan.gc.ca/imdb/p2SV.pl?Function=getSurvey&amp;SDDS=2406</a:t>
+            </a:r>
+          </a:p>
+          <a:p xmlns:a="http://schemas.openxmlformats.org/drawingml/2006/main">
+            <a:r>
               <a:t>- https://www150.statcan.gc.ca/n1/pub/36-28-0001/2025004/article/00001-eng.pdf</a:t>
+            </a:r>
+          </a:p>
+          <a:p xmlns:a="http://schemas.openxmlformats.org/drawingml/2006/main">
+            <a:r>
+              <a:t>- https://www.gov.pl/web/chemical/notification-of-electronic-cigarettes-and-refill-containers</a:t>
+            </a:r>
+          </a:p>
+          <a:p xmlns:a="http://schemas.openxmlformats.org/drawingml/2006/main">
+            <a:r>
+              <a:t>- https://www.customs.govt.nz/about-us/news/important-notices-archive/important-notices-archive-2023/reminder-classification-of-vaping-devices-and-similar</a:t>
             </a:r>
           </a:p>
           <a:p xmlns:a="http://schemas.openxmlformats.org/drawingml/2006/main">
@@ -1525,7 +1625,27 @@
           </a:p>
           <a:p xmlns:a="http://schemas.openxmlformats.org/drawingml/2006/main">
             <a:r>
+              <a:t>- https://www23.statcan.gc.ca/imdb/p2SV.pl?Function=getSurvey&amp;SDDS=2008</a:t>
+            </a:r>
+          </a:p>
+          <a:p xmlns:a="http://schemas.openxmlformats.org/drawingml/2006/main">
+            <a:r>
+              <a:t>- https://www23.statcan.gc.ca/imdb/p2SV.pl?Function=getSurvey&amp;SDDS=2406</a:t>
+            </a:r>
+          </a:p>
+          <a:p xmlns:a="http://schemas.openxmlformats.org/drawingml/2006/main">
+            <a:r>
               <a:t>- https://www150.statcan.gc.ca/n1/pub/36-28-0001/2025004/article/00001-eng.pdf</a:t>
+            </a:r>
+          </a:p>
+          <a:p xmlns:a="http://schemas.openxmlformats.org/drawingml/2006/main">
+            <a:r>
+              <a:t>- https://www.gov.pl/web/chemical/notification-of-electronic-cigarettes-and-refill-containers</a:t>
+            </a:r>
+          </a:p>
+          <a:p xmlns:a="http://schemas.openxmlformats.org/drawingml/2006/main">
+            <a:r>
+              <a:t>- https://www.customs.govt.nz/about-us/news/important-notices-archive/important-notices-archive-2023/reminder-classification-of-vaping-devices-and-similar</a:t>
             </a:r>
           </a:p>
           <a:p xmlns:a="http://schemas.openxmlformats.org/drawingml/2006/main">
@@ -1647,7 +1767,7 @@
           <p:cNvPr id="2" name="Title 1">
             <a:extLst xmlns:a="http://schemas.openxmlformats.org/drawingml/2006/main">
               <a:ext uri="{FF2B5EF4-FFF2-40B4-BE49-F238E27FC236}">
-                <a16:creationId xmlns:a16="http://schemas.microsoft.com/office/drawing/2014/main" id="{9CD154D0-911B-4641-BC14-EA7522D11C42}"/>
+                <a16:creationId xmlns:a16="http://schemas.microsoft.com/office/drawing/2014/main" id="{B5FBE1A5-01F9-42FB-9054-3F9474062165}"/>
               </a:ext>
             </a:extLst>
           </p:cNvPr>
@@ -1679,7 +1799,7 @@
           <p:cNvPr id="3" name="Subtitle 2">
             <a:extLst xmlns:a="http://schemas.openxmlformats.org/drawingml/2006/main">
               <a:ext uri="{FF2B5EF4-FFF2-40B4-BE49-F238E27FC236}">
-                <a16:creationId xmlns:a16="http://schemas.microsoft.com/office/drawing/2014/main" id="{E761DEF6-B685-4AAD-A7E1-19F711DF7C0C}"/>
+                <a16:creationId xmlns:a16="http://schemas.microsoft.com/office/drawing/2014/main" id="{6719EEDD-0E40-47DD-85C9-5C64BBCF387E}"/>
               </a:ext>
             </a:extLst>
           </p:cNvPr>
@@ -1802,7 +1922,7 @@
           <p:cNvPr id="4" name="Date Placeholder 3">
             <a:extLst xmlns:a="http://schemas.openxmlformats.org/drawingml/2006/main">
               <a:ext uri="{FF2B5EF4-FFF2-40B4-BE49-F238E27FC236}">
-                <a16:creationId xmlns:a16="http://schemas.microsoft.com/office/drawing/2014/main" id="{C84A1742-F0EB-4934-B16F-225DE08D4D3E}"/>
+                <a16:creationId xmlns:a16="http://schemas.microsoft.com/office/drawing/2014/main" id="{34233F86-F5D1-446A-92C9-55F6E1B233B2}"/>
               </a:ext>
             </a:extLst>
           </p:cNvPr>
@@ -1829,7 +1949,7 @@
           <p:cNvPr id="5" name="Footer Placeholder 4">
             <a:extLst xmlns:a="http://schemas.openxmlformats.org/drawingml/2006/main">
               <a:ext uri="{FF2B5EF4-FFF2-40B4-BE49-F238E27FC236}">
-                <a16:creationId xmlns:a16="http://schemas.microsoft.com/office/drawing/2014/main" id="{064F1EB7-1DE7-4C46-A70C-2C8C18F5718D}"/>
+                <a16:creationId xmlns:a16="http://schemas.microsoft.com/office/drawing/2014/main" id="{E03D4533-ECCE-421B-9C95-AB2754D5C714}"/>
               </a:ext>
             </a:extLst>
           </p:cNvPr>
@@ -1852,7 +1972,7 @@
           <p:cNvPr id="6" name="Slide Number Placeholder 5">
             <a:extLst xmlns:a="http://schemas.openxmlformats.org/drawingml/2006/main">
               <a:ext uri="{FF2B5EF4-FFF2-40B4-BE49-F238E27FC236}">
-                <a16:creationId xmlns:a16="http://schemas.microsoft.com/office/drawing/2014/main" id="{638410A3-0DE6-4459-B516-EDC864861F1D}"/>
+                <a16:creationId xmlns:a16="http://schemas.microsoft.com/office/drawing/2014/main" id="{E413FEBC-DCF5-4C25-9E38-60500D0CCCA6}"/>
               </a:ext>
             </a:extLst>
           </p:cNvPr>
@@ -1896,7 +2016,7 @@
           <p:cNvPr id="2" name="Title 1">
             <a:extLst xmlns:a="http://schemas.openxmlformats.org/drawingml/2006/main">
               <a:ext uri="{FF2B5EF4-FFF2-40B4-BE49-F238E27FC236}">
-                <a16:creationId xmlns:a16="http://schemas.microsoft.com/office/drawing/2014/main" id="{01670EB7-AB7D-466E-91DC-B8169FF02249}"/>
+                <a16:creationId xmlns:a16="http://schemas.microsoft.com/office/drawing/2014/main" id="{D06AA750-F80B-4A58-A584-054929068BB1}"/>
               </a:ext>
             </a:extLst>
           </p:cNvPr>
@@ -1923,7 +2043,7 @@
           <p:cNvPr id="3" name="Vertical Text Placeholder 2">
             <a:extLst xmlns:a="http://schemas.openxmlformats.org/drawingml/2006/main">
               <a:ext uri="{FF2B5EF4-FFF2-40B4-BE49-F238E27FC236}">
-                <a16:creationId xmlns:a16="http://schemas.microsoft.com/office/drawing/2014/main" id="{62C14E57-74CE-47B4-90E7-28D7D605A992}"/>
+                <a16:creationId xmlns:a16="http://schemas.microsoft.com/office/drawing/2014/main" id="{F5F4CD04-F447-4182-AF69-5C76296C5765}"/>
               </a:ext>
             </a:extLst>
           </p:cNvPr>
@@ -1985,7 +2105,7 @@
           <p:cNvPr id="4" name="Date Placeholder 3">
             <a:extLst xmlns:a="http://schemas.openxmlformats.org/drawingml/2006/main">
               <a:ext uri="{FF2B5EF4-FFF2-40B4-BE49-F238E27FC236}">
-                <a16:creationId xmlns:a16="http://schemas.microsoft.com/office/drawing/2014/main" id="{4845A612-E906-4150-BA45-F085C7F82F0C}"/>
+                <a16:creationId xmlns:a16="http://schemas.microsoft.com/office/drawing/2014/main" id="{AE577D3E-2B3C-4104-8375-2C8EC6413FC8}"/>
               </a:ext>
             </a:extLst>
           </p:cNvPr>
@@ -2012,7 +2132,7 @@
           <p:cNvPr id="5" name="Footer Placeholder 4">
             <a:extLst xmlns:a="http://schemas.openxmlformats.org/drawingml/2006/main">
               <a:ext uri="{FF2B5EF4-FFF2-40B4-BE49-F238E27FC236}">
-                <a16:creationId xmlns:a16="http://schemas.microsoft.com/office/drawing/2014/main" id="{A65BC30D-8DCB-4B40-93F0-B05FFD529815}"/>
+                <a16:creationId xmlns:a16="http://schemas.microsoft.com/office/drawing/2014/main" id="{90616091-BEA7-4002-8CC8-145D7959DFC5}"/>
               </a:ext>
             </a:extLst>
           </p:cNvPr>
@@ -2035,7 +2155,7 @@
           <p:cNvPr id="6" name="Slide Number Placeholder 5">
             <a:extLst xmlns:a="http://schemas.openxmlformats.org/drawingml/2006/main">
               <a:ext uri="{FF2B5EF4-FFF2-40B4-BE49-F238E27FC236}">
-                <a16:creationId xmlns:a16="http://schemas.microsoft.com/office/drawing/2014/main" id="{65249076-5061-41A7-8086-F7C3A6F944DC}"/>
+                <a16:creationId xmlns:a16="http://schemas.microsoft.com/office/drawing/2014/main" id="{0867CF3A-9ECF-43F1-A498-6BF357457BB4}"/>
               </a:ext>
             </a:extLst>
           </p:cNvPr>
@@ -2079,7 +2199,7 @@
           <p:cNvPr id="2" name="Vertical Title 1">
             <a:extLst xmlns:a="http://schemas.openxmlformats.org/drawingml/2006/main">
               <a:ext uri="{FF2B5EF4-FFF2-40B4-BE49-F238E27FC236}">
-                <a16:creationId xmlns:a16="http://schemas.microsoft.com/office/drawing/2014/main" id="{9B898A81-12F2-4622-B7D7-C49FAC34360C}"/>
+                <a16:creationId xmlns:a16="http://schemas.microsoft.com/office/drawing/2014/main" id="{CE31897C-1E4A-4A5D-8D57-1B3DF947847B}"/>
               </a:ext>
             </a:extLst>
           </p:cNvPr>
@@ -2111,7 +2231,7 @@
           <p:cNvPr id="3" name="Vertical Text Placeholder 2">
             <a:extLst xmlns:a="http://schemas.openxmlformats.org/drawingml/2006/main">
               <a:ext uri="{FF2B5EF4-FFF2-40B4-BE49-F238E27FC236}">
-                <a16:creationId xmlns:a16="http://schemas.microsoft.com/office/drawing/2014/main" id="{D4D330FA-8078-4FA1-B39A-FFC6FC4D0AB7}"/>
+                <a16:creationId xmlns:a16="http://schemas.microsoft.com/office/drawing/2014/main" id="{20B6085C-3853-4D41-B830-FF71143C5B0B}"/>
               </a:ext>
             </a:extLst>
           </p:cNvPr>
@@ -2178,7 +2298,7 @@
           <p:cNvPr id="4" name="Date Placeholder 3">
             <a:extLst xmlns:a="http://schemas.openxmlformats.org/drawingml/2006/main">
               <a:ext uri="{FF2B5EF4-FFF2-40B4-BE49-F238E27FC236}">
-                <a16:creationId xmlns:a16="http://schemas.microsoft.com/office/drawing/2014/main" id="{308F5487-EAC3-48DD-85A4-E4A2F3CF0F33}"/>
+                <a16:creationId xmlns:a16="http://schemas.microsoft.com/office/drawing/2014/main" id="{F224CE84-22B6-419C-B2FB-EF47A6792BFD}"/>
               </a:ext>
             </a:extLst>
           </p:cNvPr>
@@ -2205,7 +2325,7 @@
           <p:cNvPr id="5" name="Footer Placeholder 4">
             <a:extLst xmlns:a="http://schemas.openxmlformats.org/drawingml/2006/main">
               <a:ext uri="{FF2B5EF4-FFF2-40B4-BE49-F238E27FC236}">
-                <a16:creationId xmlns:a16="http://schemas.microsoft.com/office/drawing/2014/main" id="{48A1FC03-58C0-4442-B4CF-FECDE901CC3F}"/>
+                <a16:creationId xmlns:a16="http://schemas.microsoft.com/office/drawing/2014/main" id="{0244D28B-7F9E-419C-A03F-58F30EF32398}"/>
               </a:ext>
             </a:extLst>
           </p:cNvPr>
@@ -2228,7 +2348,7 @@
           <p:cNvPr id="6" name="Slide Number Placeholder 5">
             <a:extLst xmlns:a="http://schemas.openxmlformats.org/drawingml/2006/main">
               <a:ext uri="{FF2B5EF4-FFF2-40B4-BE49-F238E27FC236}">
-                <a16:creationId xmlns:a16="http://schemas.microsoft.com/office/drawing/2014/main" id="{C3C7D1F5-162B-4934-851E-6B139A4956BC}"/>
+                <a16:creationId xmlns:a16="http://schemas.microsoft.com/office/drawing/2014/main" id="{AC672792-90F9-46BF-9A23-760A27747E73}"/>
               </a:ext>
             </a:extLst>
           </p:cNvPr>
@@ -2272,7 +2392,7 @@
           <p:cNvPr id="2" name="Title 1">
             <a:extLst xmlns:a="http://schemas.openxmlformats.org/drawingml/2006/main">
               <a:ext uri="{FF2B5EF4-FFF2-40B4-BE49-F238E27FC236}">
-                <a16:creationId xmlns:a16="http://schemas.microsoft.com/office/drawing/2014/main" id="{6D16D5AE-9E71-438B-8732-5A89E919FBF6}"/>
+                <a16:creationId xmlns:a16="http://schemas.microsoft.com/office/drawing/2014/main" id="{A61554F2-F665-4E2E-A474-169158918625}"/>
               </a:ext>
             </a:extLst>
           </p:cNvPr>
@@ -2299,7 +2419,7 @@
           <p:cNvPr id="3" name="Content Placeholder 2">
             <a:extLst xmlns:a="http://schemas.openxmlformats.org/drawingml/2006/main">
               <a:ext uri="{FF2B5EF4-FFF2-40B4-BE49-F238E27FC236}">
-                <a16:creationId xmlns:a16="http://schemas.microsoft.com/office/drawing/2014/main" id="{157E97FC-3A2A-40D6-9250-1C379ECC5EF7}"/>
+                <a16:creationId xmlns:a16="http://schemas.microsoft.com/office/drawing/2014/main" id="{500E1AFD-3149-4CCC-825A-AFCC14488719}"/>
               </a:ext>
             </a:extLst>
           </p:cNvPr>
@@ -2361,7 +2481,7 @@
           <p:cNvPr id="4" name="Date Placeholder 3">
             <a:extLst xmlns:a="http://schemas.openxmlformats.org/drawingml/2006/main">
               <a:ext uri="{FF2B5EF4-FFF2-40B4-BE49-F238E27FC236}">
-                <a16:creationId xmlns:a16="http://schemas.microsoft.com/office/drawing/2014/main" id="{2AD00C01-B3BB-4BDD-900D-0A7C5AB3F301}"/>
+                <a16:creationId xmlns:a16="http://schemas.microsoft.com/office/drawing/2014/main" id="{0CE18F6F-734F-48ED-B99B-E0CADF212AD5}"/>
               </a:ext>
             </a:extLst>
           </p:cNvPr>
@@ -2388,7 +2508,7 @@
           <p:cNvPr id="5" name="Footer Placeholder 4">
             <a:extLst xmlns:a="http://schemas.openxmlformats.org/drawingml/2006/main">
               <a:ext uri="{FF2B5EF4-FFF2-40B4-BE49-F238E27FC236}">
-                <a16:creationId xmlns:a16="http://schemas.microsoft.com/office/drawing/2014/main" id="{7CDD0562-C32E-49F9-9C51-B396183C9889}"/>
+                <a16:creationId xmlns:a16="http://schemas.microsoft.com/office/drawing/2014/main" id="{087A22DC-D09B-4924-9FF5-ABA4816F6E5F}"/>
               </a:ext>
             </a:extLst>
           </p:cNvPr>
@@ -2411,7 +2531,7 @@
           <p:cNvPr id="6" name="Slide Number Placeholder 5">
             <a:extLst xmlns:a="http://schemas.openxmlformats.org/drawingml/2006/main">
               <a:ext uri="{FF2B5EF4-FFF2-40B4-BE49-F238E27FC236}">
-                <a16:creationId xmlns:a16="http://schemas.microsoft.com/office/drawing/2014/main" id="{7569BBBD-06E8-4C04-9CA2-49A3A60F8A71}"/>
+                <a16:creationId xmlns:a16="http://schemas.microsoft.com/office/drawing/2014/main" id="{AA2619C2-C467-4939-ABAC-87234229C2D8}"/>
               </a:ext>
             </a:extLst>
           </p:cNvPr>
@@ -2455,7 +2575,7 @@
           <p:cNvPr id="2" name="Title 1">
             <a:extLst xmlns:a="http://schemas.openxmlformats.org/drawingml/2006/main">
               <a:ext uri="{FF2B5EF4-FFF2-40B4-BE49-F238E27FC236}">
-                <a16:creationId xmlns:a16="http://schemas.microsoft.com/office/drawing/2014/main" id="{308C84EC-F190-4F43-9A35-164D63159D9C}"/>
+                <a16:creationId xmlns:a16="http://schemas.microsoft.com/office/drawing/2014/main" id="{CC80C857-C29B-4BAE-8240-8B5198D98F08}"/>
               </a:ext>
             </a:extLst>
           </p:cNvPr>
@@ -2492,7 +2612,7 @@
           <p:cNvPr id="3" name="Text Placeholder 2">
             <a:extLst xmlns:a="http://schemas.openxmlformats.org/drawingml/2006/main">
               <a:ext uri="{FF2B5EF4-FFF2-40B4-BE49-F238E27FC236}">
-                <a16:creationId xmlns:a16="http://schemas.microsoft.com/office/drawing/2014/main" id="{4ACBDB3E-52F8-4CAE-A41F-A65B5B4B3A62}"/>
+                <a16:creationId xmlns:a16="http://schemas.microsoft.com/office/drawing/2014/main" id="{560A2DE8-4809-4702-AC8D-C561CDC785D9}"/>
               </a:ext>
             </a:extLst>
           </p:cNvPr>
@@ -2618,7 +2738,7 @@
           <p:cNvPr id="4" name="Date Placeholder 3">
             <a:extLst xmlns:a="http://schemas.openxmlformats.org/drawingml/2006/main">
               <a:ext uri="{FF2B5EF4-FFF2-40B4-BE49-F238E27FC236}">
-                <a16:creationId xmlns:a16="http://schemas.microsoft.com/office/drawing/2014/main" id="{542B3C4B-64D7-4D1D-9605-CDC9562617B2}"/>
+                <a16:creationId xmlns:a16="http://schemas.microsoft.com/office/drawing/2014/main" id="{9346FA6D-115D-4ABE-9999-BC0D51AF3272}"/>
               </a:ext>
             </a:extLst>
           </p:cNvPr>
@@ -2645,7 +2765,7 @@
           <p:cNvPr id="5" name="Footer Placeholder 4">
             <a:extLst xmlns:a="http://schemas.openxmlformats.org/drawingml/2006/main">
               <a:ext uri="{FF2B5EF4-FFF2-40B4-BE49-F238E27FC236}">
-                <a16:creationId xmlns:a16="http://schemas.microsoft.com/office/drawing/2014/main" id="{C00FAAF6-D7B2-4E06-9965-FAC9596AD826}"/>
+                <a16:creationId xmlns:a16="http://schemas.microsoft.com/office/drawing/2014/main" id="{CA756AB8-397F-404F-8308-5A06DDA1D7C6}"/>
               </a:ext>
             </a:extLst>
           </p:cNvPr>
@@ -2668,7 +2788,7 @@
           <p:cNvPr id="6" name="Slide Number Placeholder 5">
             <a:extLst xmlns:a="http://schemas.openxmlformats.org/drawingml/2006/main">
               <a:ext uri="{FF2B5EF4-FFF2-40B4-BE49-F238E27FC236}">
-                <a16:creationId xmlns:a16="http://schemas.microsoft.com/office/drawing/2014/main" id="{D62B69C0-0D89-470E-8F9C-5C39CD5F2E44}"/>
+                <a16:creationId xmlns:a16="http://schemas.microsoft.com/office/drawing/2014/main" id="{D8E20D85-F700-4B8D-8815-3AB71E91D591}"/>
               </a:ext>
             </a:extLst>
           </p:cNvPr>
@@ -2712,7 +2832,7 @@
           <p:cNvPr id="2" name="Title 1">
             <a:extLst xmlns:a="http://schemas.openxmlformats.org/drawingml/2006/main">
               <a:ext uri="{FF2B5EF4-FFF2-40B4-BE49-F238E27FC236}">
-                <a16:creationId xmlns:a16="http://schemas.microsoft.com/office/drawing/2014/main" id="{776736AE-CFBC-4B09-9E19-CE2FFC1A63C1}"/>
+                <a16:creationId xmlns:a16="http://schemas.microsoft.com/office/drawing/2014/main" id="{8D577763-4D04-418A-9D51-54B8D875738E}"/>
               </a:ext>
             </a:extLst>
           </p:cNvPr>
@@ -2739,7 +2859,7 @@
           <p:cNvPr id="3" name="Content Placeholder 2">
             <a:extLst xmlns:a="http://schemas.openxmlformats.org/drawingml/2006/main">
               <a:ext uri="{FF2B5EF4-FFF2-40B4-BE49-F238E27FC236}">
-                <a16:creationId xmlns:a16="http://schemas.microsoft.com/office/drawing/2014/main" id="{61945838-1911-4847-A481-E403BA45A2F8}"/>
+                <a16:creationId xmlns:a16="http://schemas.microsoft.com/office/drawing/2014/main" id="{9AE183A7-AC25-451B-B9C3-297DA1103C9E}"/>
               </a:ext>
             </a:extLst>
           </p:cNvPr>
@@ -2843,7 +2963,7 @@
           <p:cNvPr id="4" name="Content Placeholder 3">
             <a:extLst xmlns:a="http://schemas.openxmlformats.org/drawingml/2006/main">
               <a:ext uri="{FF2B5EF4-FFF2-40B4-BE49-F238E27FC236}">
-                <a16:creationId xmlns:a16="http://schemas.microsoft.com/office/drawing/2014/main" id="{A9D78F72-5A49-4B3C-9298-1F555FDF402C}"/>
+                <a16:creationId xmlns:a16="http://schemas.microsoft.com/office/drawing/2014/main" id="{B014CBE3-A609-4F77-A438-F1E5BFB5FDFB}"/>
               </a:ext>
             </a:extLst>
           </p:cNvPr>
@@ -2947,7 +3067,7 @@
           <p:cNvPr id="5" name="Date Placeholder 4">
             <a:extLst xmlns:a="http://schemas.openxmlformats.org/drawingml/2006/main">
               <a:ext uri="{FF2B5EF4-FFF2-40B4-BE49-F238E27FC236}">
-                <a16:creationId xmlns:a16="http://schemas.microsoft.com/office/drawing/2014/main" id="{5B147C51-A2E2-465D-B7D3-F05528DF0112}"/>
+                <a16:creationId xmlns:a16="http://schemas.microsoft.com/office/drawing/2014/main" id="{8F385371-870A-4D96-BB9B-B86FBB080C24}"/>
               </a:ext>
             </a:extLst>
           </p:cNvPr>
@@ -2974,7 +3094,7 @@
           <p:cNvPr id="6" name="Footer Placeholder 5">
             <a:extLst xmlns:a="http://schemas.openxmlformats.org/drawingml/2006/main">
               <a:ext uri="{FF2B5EF4-FFF2-40B4-BE49-F238E27FC236}">
-                <a16:creationId xmlns:a16="http://schemas.microsoft.com/office/drawing/2014/main" id="{34BA766E-2329-4774-AC90-F9AFD6D12527}"/>
+                <a16:creationId xmlns:a16="http://schemas.microsoft.com/office/drawing/2014/main" id="{4CD7132A-AF70-4609-96C8-E2F1252871DA}"/>
               </a:ext>
             </a:extLst>
           </p:cNvPr>
@@ -2997,7 +3117,7 @@
           <p:cNvPr id="7" name="Slide Number Placeholder 6">
             <a:extLst xmlns:a="http://schemas.openxmlformats.org/drawingml/2006/main">
               <a:ext uri="{FF2B5EF4-FFF2-40B4-BE49-F238E27FC236}">
-                <a16:creationId xmlns:a16="http://schemas.microsoft.com/office/drawing/2014/main" id="{084512CA-34A2-4BC7-9666-3928F71F5FB1}"/>
+                <a16:creationId xmlns:a16="http://schemas.microsoft.com/office/drawing/2014/main" id="{3124996E-D230-468F-995F-4E037FF4F4A9}"/>
               </a:ext>
             </a:extLst>
           </p:cNvPr>
@@ -3041,7 +3161,7 @@
           <p:cNvPr id="2" name="Title 1">
             <a:extLst xmlns:a="http://schemas.openxmlformats.org/drawingml/2006/main">
               <a:ext uri="{FF2B5EF4-FFF2-40B4-BE49-F238E27FC236}">
-                <a16:creationId xmlns:a16="http://schemas.microsoft.com/office/drawing/2014/main" id="{71E95CF6-67AE-4F4A-9C9C-021FE62D8F3E}"/>
+                <a16:creationId xmlns:a16="http://schemas.microsoft.com/office/drawing/2014/main" id="{CF47788D-DF45-427E-9796-FFB898B8CA54}"/>
               </a:ext>
             </a:extLst>
           </p:cNvPr>
@@ -3073,7 +3193,7 @@
           <p:cNvPr id="3" name="Text Placeholder 2">
             <a:extLst xmlns:a="http://schemas.openxmlformats.org/drawingml/2006/main">
               <a:ext uri="{FF2B5EF4-FFF2-40B4-BE49-F238E27FC236}">
-                <a16:creationId xmlns:a16="http://schemas.microsoft.com/office/drawing/2014/main" id="{16102D88-8127-4EEA-82EF-9B9CDC5D01A8}"/>
+                <a16:creationId xmlns:a16="http://schemas.microsoft.com/office/drawing/2014/main" id="{72B2D757-749E-435C-AEBE-9A1DD525C02C}"/>
               </a:ext>
             </a:extLst>
           </p:cNvPr>
@@ -3145,7 +3265,7 @@
           <p:cNvPr id="4" name="Content Placeholder 3">
             <a:extLst xmlns:a="http://schemas.openxmlformats.org/drawingml/2006/main">
               <a:ext uri="{FF2B5EF4-FFF2-40B4-BE49-F238E27FC236}">
-                <a16:creationId xmlns:a16="http://schemas.microsoft.com/office/drawing/2014/main" id="{0EF90C45-D02A-4798-ADC9-8360070A3DF7}"/>
+                <a16:creationId xmlns:a16="http://schemas.microsoft.com/office/drawing/2014/main" id="{88358095-3D67-4BF1-A236-CDCE43A7DE23}"/>
               </a:ext>
             </a:extLst>
           </p:cNvPr>
@@ -3249,7 +3369,7 @@
           <p:cNvPr id="5" name="Text Placeholder 4">
             <a:extLst xmlns:a="http://schemas.openxmlformats.org/drawingml/2006/main">
               <a:ext uri="{FF2B5EF4-FFF2-40B4-BE49-F238E27FC236}">
-                <a16:creationId xmlns:a16="http://schemas.microsoft.com/office/drawing/2014/main" id="{9096EE1B-3EAA-41E1-AD55-BB81EE64CDFC}"/>
+                <a16:creationId xmlns:a16="http://schemas.microsoft.com/office/drawing/2014/main" id="{450A7C63-52C7-407D-907C-DA5EFD80BDA0}"/>
               </a:ext>
             </a:extLst>
           </p:cNvPr>
@@ -3321,7 +3441,7 @@
           <p:cNvPr id="6" name="Content Placeholder 5">
             <a:extLst xmlns:a="http://schemas.openxmlformats.org/drawingml/2006/main">
               <a:ext uri="{FF2B5EF4-FFF2-40B4-BE49-F238E27FC236}">
-                <a16:creationId xmlns:a16="http://schemas.microsoft.com/office/drawing/2014/main" id="{56947215-205A-4A60-897E-D44BE1016501}"/>
+                <a16:creationId xmlns:a16="http://schemas.microsoft.com/office/drawing/2014/main" id="{8664B3CC-53D3-4140-9280-1FADF99C937B}"/>
               </a:ext>
             </a:extLst>
           </p:cNvPr>
@@ -3425,7 +3545,7 @@
           <p:cNvPr id="7" name="Date Placeholder 6">
             <a:extLst xmlns:a="http://schemas.openxmlformats.org/drawingml/2006/main">
               <a:ext uri="{FF2B5EF4-FFF2-40B4-BE49-F238E27FC236}">
-                <a16:creationId xmlns:a16="http://schemas.microsoft.com/office/drawing/2014/main" id="{E379DC67-5776-4B77-90DB-3CFDC88FDE1E}"/>
+                <a16:creationId xmlns:a16="http://schemas.microsoft.com/office/drawing/2014/main" id="{4C29595B-0C3A-47E0-A412-CE483C3A473F}"/>
               </a:ext>
             </a:extLst>
           </p:cNvPr>
@@ -3452,7 +3572,7 @@
           <p:cNvPr id="8" name="Footer Placeholder 7">
             <a:extLst xmlns:a="http://schemas.openxmlformats.org/drawingml/2006/main">
               <a:ext uri="{FF2B5EF4-FFF2-40B4-BE49-F238E27FC236}">
-                <a16:creationId xmlns:a16="http://schemas.microsoft.com/office/drawing/2014/main" id="{206C1CED-4C2E-4763-B808-4CB7FF8CE70C}"/>
+                <a16:creationId xmlns:a16="http://schemas.microsoft.com/office/drawing/2014/main" id="{6D396968-6A85-4901-BDF4-DC325370838F}"/>
               </a:ext>
             </a:extLst>
           </p:cNvPr>
@@ -3475,7 +3595,7 @@
           <p:cNvPr id="9" name="Slide Number Placeholder 8">
             <a:extLst xmlns:a="http://schemas.openxmlformats.org/drawingml/2006/main">
               <a:ext uri="{FF2B5EF4-FFF2-40B4-BE49-F238E27FC236}">
-                <a16:creationId xmlns:a16="http://schemas.microsoft.com/office/drawing/2014/main" id="{808AA510-9EAD-4D98-88B1-67BC746B981E}"/>
+                <a16:creationId xmlns:a16="http://schemas.microsoft.com/office/drawing/2014/main" id="{C98B4565-95F7-4696-BB39-A56D2B61DC3A}"/>
               </a:ext>
             </a:extLst>
           </p:cNvPr>
@@ -3519,7 +3639,7 @@
           <p:cNvPr id="2" name="Title 1">
             <a:extLst xmlns:a="http://schemas.openxmlformats.org/drawingml/2006/main">
               <a:ext uri="{FF2B5EF4-FFF2-40B4-BE49-F238E27FC236}">
-                <a16:creationId xmlns:a16="http://schemas.microsoft.com/office/drawing/2014/main" id="{94D30BBD-9076-4A58-81F9-B5AFDFE15BA3}"/>
+                <a16:creationId xmlns:a16="http://schemas.microsoft.com/office/drawing/2014/main" id="{7D2283B9-8B34-4F3B-9EC7-7E4ED8FEB46E}"/>
               </a:ext>
             </a:extLst>
           </p:cNvPr>
@@ -3546,7 +3666,7 @@
           <p:cNvPr id="3" name="Date Placeholder 2">
             <a:extLst xmlns:a="http://schemas.openxmlformats.org/drawingml/2006/main">
               <a:ext uri="{FF2B5EF4-FFF2-40B4-BE49-F238E27FC236}">
-                <a16:creationId xmlns:a16="http://schemas.microsoft.com/office/drawing/2014/main" id="{7AF66C8B-4FDD-4CBA-8AA3-330045970D38}"/>
+                <a16:creationId xmlns:a16="http://schemas.microsoft.com/office/drawing/2014/main" id="{51F7771F-5E5F-49FF-88F3-2DAE84F7BEA9}"/>
               </a:ext>
             </a:extLst>
           </p:cNvPr>
@@ -3573,7 +3693,7 @@
           <p:cNvPr id="4" name="Footer Placeholder 3">
             <a:extLst xmlns:a="http://schemas.openxmlformats.org/drawingml/2006/main">
               <a:ext uri="{FF2B5EF4-FFF2-40B4-BE49-F238E27FC236}">
-                <a16:creationId xmlns:a16="http://schemas.microsoft.com/office/drawing/2014/main" id="{6E39B9E1-D997-4EB9-AE60-87157D59BB2F}"/>
+                <a16:creationId xmlns:a16="http://schemas.microsoft.com/office/drawing/2014/main" id="{EE2330A6-2405-465D-8E09-0584DE317873}"/>
               </a:ext>
             </a:extLst>
           </p:cNvPr>
@@ -3596,7 +3716,7 @@
           <p:cNvPr id="5" name="Slide Number Placeholder 4">
             <a:extLst xmlns:a="http://schemas.openxmlformats.org/drawingml/2006/main">
               <a:ext uri="{FF2B5EF4-FFF2-40B4-BE49-F238E27FC236}">
-                <a16:creationId xmlns:a16="http://schemas.microsoft.com/office/drawing/2014/main" id="{88360BFB-59E2-45B0-BA53-311EE0C0B537}"/>
+                <a16:creationId xmlns:a16="http://schemas.microsoft.com/office/drawing/2014/main" id="{155C9B8D-11C3-474F-B799-0363EFCC9DE4}"/>
               </a:ext>
             </a:extLst>
           </p:cNvPr>
@@ -3640,7 +3760,7 @@
           <p:cNvPr id="2" name="Date Placeholder 1">
             <a:extLst xmlns:a="http://schemas.openxmlformats.org/drawingml/2006/main">
               <a:ext uri="{FF2B5EF4-FFF2-40B4-BE49-F238E27FC236}">
-                <a16:creationId xmlns:a16="http://schemas.microsoft.com/office/drawing/2014/main" id="{BCDFB27A-50A0-4584-A074-1C089CE0599C}"/>
+                <a16:creationId xmlns:a16="http://schemas.microsoft.com/office/drawing/2014/main" id="{71FD87FC-8D3E-47EF-9CDB-8C29B091C2C8}"/>
               </a:ext>
             </a:extLst>
           </p:cNvPr>
@@ -3667,7 +3787,7 @@
           <p:cNvPr id="3" name="Footer Placeholder 2">
             <a:extLst xmlns:a="http://schemas.openxmlformats.org/drawingml/2006/main">
               <a:ext uri="{FF2B5EF4-FFF2-40B4-BE49-F238E27FC236}">
-                <a16:creationId xmlns:a16="http://schemas.microsoft.com/office/drawing/2014/main" id="{CD6FF235-2518-492A-8751-B88F4C15D366}"/>
+                <a16:creationId xmlns:a16="http://schemas.microsoft.com/office/drawing/2014/main" id="{7869CC3E-2339-44D4-A995-6BFC12BF35F3}"/>
               </a:ext>
             </a:extLst>
           </p:cNvPr>
@@ -3690,7 +3810,7 @@
           <p:cNvPr id="4" name="Slide Number Placeholder 3">
             <a:extLst xmlns:a="http://schemas.openxmlformats.org/drawingml/2006/main">
               <a:ext uri="{FF2B5EF4-FFF2-40B4-BE49-F238E27FC236}">
-                <a16:creationId xmlns:a16="http://schemas.microsoft.com/office/drawing/2014/main" id="{4C252AE7-11BA-43E5-B4BB-0BF2DBCC795A}"/>
+                <a16:creationId xmlns:a16="http://schemas.microsoft.com/office/drawing/2014/main" id="{33612063-B4B9-4156-9EB8-70EC22AAA77A}"/>
               </a:ext>
             </a:extLst>
           </p:cNvPr>
@@ -3734,7 +3854,7 @@
           <p:cNvPr id="2" name="Title 1">
             <a:extLst xmlns:a="http://schemas.openxmlformats.org/drawingml/2006/main">
               <a:ext uri="{FF2B5EF4-FFF2-40B4-BE49-F238E27FC236}">
-                <a16:creationId xmlns:a16="http://schemas.microsoft.com/office/drawing/2014/main" id="{5C6CBD09-DFF3-4B69-836B-3C85589DBE4B}"/>
+                <a16:creationId xmlns:a16="http://schemas.microsoft.com/office/drawing/2014/main" id="{C929C21D-87A4-421D-BF38-03D7BFFF389E}"/>
               </a:ext>
             </a:extLst>
           </p:cNvPr>
@@ -3771,7 +3891,7 @@
           <p:cNvPr id="3" name="Content Placeholder 2">
             <a:extLst xmlns:a="http://schemas.openxmlformats.org/drawingml/2006/main">
               <a:ext uri="{FF2B5EF4-FFF2-40B4-BE49-F238E27FC236}">
-                <a16:creationId xmlns:a16="http://schemas.microsoft.com/office/drawing/2014/main" id="{6CEBF79C-D146-41DC-A053-1CB5A7D3CC52}"/>
+                <a16:creationId xmlns:a16="http://schemas.microsoft.com/office/drawing/2014/main" id="{2D6F32E6-2F1A-4D95-AE0B-25B3FF627629}"/>
               </a:ext>
             </a:extLst>
           </p:cNvPr>
@@ -3875,7 +3995,7 @@
           <p:cNvPr id="4" name="Text Placeholder 3">
             <a:extLst xmlns:a="http://schemas.openxmlformats.org/drawingml/2006/main">
               <a:ext uri="{FF2B5EF4-FFF2-40B4-BE49-F238E27FC236}">
-                <a16:creationId xmlns:a16="http://schemas.microsoft.com/office/drawing/2014/main" id="{F364E366-4771-4DF3-8D64-7C2C71C7DFE1}"/>
+                <a16:creationId xmlns:a16="http://schemas.microsoft.com/office/drawing/2014/main" id="{742367F9-1D6A-4393-BFC5-9CDDCFD151D9}"/>
               </a:ext>
             </a:extLst>
           </p:cNvPr>
@@ -3947,7 +4067,7 @@
           <p:cNvPr id="5" name="Date Placeholder 4">
             <a:extLst xmlns:a="http://schemas.openxmlformats.org/drawingml/2006/main">
               <a:ext uri="{FF2B5EF4-FFF2-40B4-BE49-F238E27FC236}">
-                <a16:creationId xmlns:a16="http://schemas.microsoft.com/office/drawing/2014/main" id="{A2E839BD-D55F-44AB-8DED-DD3FB1835588}"/>
+                <a16:creationId xmlns:a16="http://schemas.microsoft.com/office/drawing/2014/main" id="{9680876C-24DC-489F-9F07-03A4208FC5BA}"/>
               </a:ext>
             </a:extLst>
           </p:cNvPr>
@@ -3974,7 +4094,7 @@
           <p:cNvPr id="6" name="Footer Placeholder 5">
             <a:extLst xmlns:a="http://schemas.openxmlformats.org/drawingml/2006/main">
               <a:ext uri="{FF2B5EF4-FFF2-40B4-BE49-F238E27FC236}">
-                <a16:creationId xmlns:a16="http://schemas.microsoft.com/office/drawing/2014/main" id="{5677866D-FF43-4B86-A984-E3186E305B2F}"/>
+                <a16:creationId xmlns:a16="http://schemas.microsoft.com/office/drawing/2014/main" id="{B908F055-CBCC-45F9-A403-BE008A94FFD1}"/>
               </a:ext>
             </a:extLst>
           </p:cNvPr>
@@ -3997,7 +4117,7 @@
           <p:cNvPr id="7" name="Slide Number Placeholder 6">
             <a:extLst xmlns:a="http://schemas.openxmlformats.org/drawingml/2006/main">
               <a:ext uri="{FF2B5EF4-FFF2-40B4-BE49-F238E27FC236}">
-                <a16:creationId xmlns:a16="http://schemas.microsoft.com/office/drawing/2014/main" id="{748291BE-E81E-467A-A6F5-95B3CC79CC23}"/>
+                <a16:creationId xmlns:a16="http://schemas.microsoft.com/office/drawing/2014/main" id="{5BFABA7C-F15F-4270-B410-395D06764A08}"/>
               </a:ext>
             </a:extLst>
           </p:cNvPr>
@@ -4041,7 +4161,7 @@
           <p:cNvPr id="2" name="Title 1">
             <a:extLst xmlns:a="http://schemas.openxmlformats.org/drawingml/2006/main">
               <a:ext uri="{FF2B5EF4-FFF2-40B4-BE49-F238E27FC236}">
-                <a16:creationId xmlns:a16="http://schemas.microsoft.com/office/drawing/2014/main" id="{AFBCC81C-E8ED-4265-BABB-5AA1598FC5E8}"/>
+                <a16:creationId xmlns:a16="http://schemas.microsoft.com/office/drawing/2014/main" id="{86E603E7-FBF2-47B8-AB96-8D2C1549086C}"/>
               </a:ext>
             </a:extLst>
           </p:cNvPr>
@@ -4078,7 +4198,7 @@
           <p:cNvPr id="3" name="Picture Placeholder 2">
             <a:extLst xmlns:a="http://schemas.openxmlformats.org/drawingml/2006/main">
               <a:ext uri="{FF2B5EF4-FFF2-40B4-BE49-F238E27FC236}">
-                <a16:creationId xmlns:a16="http://schemas.microsoft.com/office/drawing/2014/main" id="{3A9F4D24-DCA3-47DE-9A4F-2A680A709608}"/>
+                <a16:creationId xmlns:a16="http://schemas.microsoft.com/office/drawing/2014/main" id="{DAC20781-4DB0-4216-B36C-C2C82F723E60}"/>
               </a:ext>
             </a:extLst>
           </p:cNvPr>
@@ -4143,7 +4263,7 @@
           <p:cNvPr id="4" name="Text Placeholder 3">
             <a:extLst xmlns:a="http://schemas.openxmlformats.org/drawingml/2006/main">
               <a:ext uri="{FF2B5EF4-FFF2-40B4-BE49-F238E27FC236}">
-                <a16:creationId xmlns:a16="http://schemas.microsoft.com/office/drawing/2014/main" id="{3F4D969F-CA1B-44AD-998D-61FC6189AB94}"/>
+                <a16:creationId xmlns:a16="http://schemas.microsoft.com/office/drawing/2014/main" id="{09A8CEA5-C7EA-4F55-A3AA-4DE1B84A5E13}"/>
               </a:ext>
             </a:extLst>
           </p:cNvPr>
@@ -4215,7 +4335,7 @@
           <p:cNvPr id="5" name="Date Placeholder 4">
             <a:extLst xmlns:a="http://schemas.openxmlformats.org/drawingml/2006/main">
               <a:ext uri="{FF2B5EF4-FFF2-40B4-BE49-F238E27FC236}">
-                <a16:creationId xmlns:a16="http://schemas.microsoft.com/office/drawing/2014/main" id="{C0ED9CB9-438B-4308-AEA2-E13002957544}"/>
+                <a16:creationId xmlns:a16="http://schemas.microsoft.com/office/drawing/2014/main" id="{7B8E57B8-048B-4768-84DB-86D677F4528B}"/>
               </a:ext>
             </a:extLst>
           </p:cNvPr>
@@ -4242,7 +4362,7 @@
           <p:cNvPr id="6" name="Footer Placeholder 5">
             <a:extLst xmlns:a="http://schemas.openxmlformats.org/drawingml/2006/main">
               <a:ext uri="{FF2B5EF4-FFF2-40B4-BE49-F238E27FC236}">
-                <a16:creationId xmlns:a16="http://schemas.microsoft.com/office/drawing/2014/main" id="{1B392355-38C3-41DD-9314-BC13629F68EF}"/>
+                <a16:creationId xmlns:a16="http://schemas.microsoft.com/office/drawing/2014/main" id="{6AD51FA5-33E3-42CF-A555-E00238ADC0F9}"/>
               </a:ext>
             </a:extLst>
           </p:cNvPr>
@@ -4265,7 +4385,7 @@
           <p:cNvPr id="7" name="Slide Number Placeholder 6">
             <a:extLst xmlns:a="http://schemas.openxmlformats.org/drawingml/2006/main">
               <a:ext uri="{FF2B5EF4-FFF2-40B4-BE49-F238E27FC236}">
-                <a16:creationId xmlns:a16="http://schemas.microsoft.com/office/drawing/2014/main" id="{6CD75D01-0967-4471-BDF4-CA79B87F9A81}"/>
+                <a16:creationId xmlns:a16="http://schemas.microsoft.com/office/drawing/2014/main" id="{D6449849-3B5B-45B7-9039-7C9F13B0EE33}"/>
               </a:ext>
             </a:extLst>
           </p:cNvPr>
@@ -4314,7 +4434,7 @@
           <p:cNvPr id="2" name="Title Placeholder 1">
             <a:extLst xmlns:a="http://schemas.openxmlformats.org/drawingml/2006/main">
               <a:ext uri="{FF2B5EF4-FFF2-40B4-BE49-F238E27FC236}">
-                <a16:creationId xmlns:a16="http://schemas.microsoft.com/office/drawing/2014/main" id="{CF02B2F6-326A-447F-9206-18056E829E54}"/>
+                <a16:creationId xmlns:a16="http://schemas.microsoft.com/office/drawing/2014/main" id="{78CC6D16-C278-41C5-932C-9010EE49C974}"/>
               </a:ext>
             </a:extLst>
           </p:cNvPr>
@@ -4351,7 +4471,7 @@
           <p:cNvPr id="3" name="Text Placeholder 2">
             <a:extLst xmlns:a="http://schemas.openxmlformats.org/drawingml/2006/main">
               <a:ext uri="{FF2B5EF4-FFF2-40B4-BE49-F238E27FC236}">
-                <a16:creationId xmlns:a16="http://schemas.microsoft.com/office/drawing/2014/main" id="{B66D276E-B9D4-42AA-A8F1-7C04972DF631}"/>
+                <a16:creationId xmlns:a16="http://schemas.microsoft.com/office/drawing/2014/main" id="{F68D8CC6-9A97-44C5-9633-BD11D9CD2A00}"/>
               </a:ext>
             </a:extLst>
           </p:cNvPr>
@@ -4423,7 +4543,7 @@
           <p:cNvPr id="4" name="Date Placeholder 3">
             <a:extLst xmlns:a="http://schemas.openxmlformats.org/drawingml/2006/main">
               <a:ext uri="{FF2B5EF4-FFF2-40B4-BE49-F238E27FC236}">
-                <a16:creationId xmlns:a16="http://schemas.microsoft.com/office/drawing/2014/main" id="{C2411B30-987D-4E4B-BCB1-41E80CAD9F73}"/>
+                <a16:creationId xmlns:a16="http://schemas.microsoft.com/office/drawing/2014/main" id="{D7FF4FB7-076C-48E7-83B6-2D1EBB80F0C5}"/>
               </a:ext>
             </a:extLst>
           </p:cNvPr>
@@ -4469,7 +4589,7 @@
           <p:cNvPr id="5" name="Footer Placeholder 4">
             <a:extLst xmlns:a="http://schemas.openxmlformats.org/drawingml/2006/main">
               <a:ext uri="{FF2B5EF4-FFF2-40B4-BE49-F238E27FC236}">
-                <a16:creationId xmlns:a16="http://schemas.microsoft.com/office/drawing/2014/main" id="{4365A289-9D6F-451A-9CA4-2A29F19BEA31}"/>
+                <a16:creationId xmlns:a16="http://schemas.microsoft.com/office/drawing/2014/main" id="{9D387471-A241-46AE-8C4F-8D81F0781119}"/>
               </a:ext>
             </a:extLst>
           </p:cNvPr>
@@ -4511,7 +4631,7 @@
           <p:cNvPr id="6" name="Slide Number Placeholder 5">
             <a:extLst xmlns:a="http://schemas.openxmlformats.org/drawingml/2006/main">
               <a:ext uri="{FF2B5EF4-FFF2-40B4-BE49-F238E27FC236}">
-                <a16:creationId xmlns:a16="http://schemas.microsoft.com/office/drawing/2014/main" id="{92A69ECF-B35A-417A-8B96-09725DCB3E1E}"/>
+                <a16:creationId xmlns:a16="http://schemas.microsoft.com/office/drawing/2014/main" id="{7E16E5E9-D507-41C9-8B1A-4CA494DC7DF3}"/>
               </a:ext>
             </a:extLst>
           </p:cNvPr>
@@ -4556,17 +4676,17 @@
   </p:cSld>
   <p:clrMap bg1="lt1" tx1="dk1" bg2="lt2" tx2="dk2" accent1="accent1" accent2="accent2" accent3="accent3" accent4="accent4" accent5="accent5" accent6="accent6" hlink="hlink" folHlink="folHlink"/>
   <p:sldLayoutIdLst>
-    <p:sldLayoutId xmlns:r="http://schemas.openxmlformats.org/officeDocument/2006/relationships" id="2147483649" r:id="R3bef32b8b74845bb"/>
-    <p:sldLayoutId xmlns:r="http://schemas.openxmlformats.org/officeDocument/2006/relationships" id="2147483650" r:id="Rdda00c96bd0146f2"/>
-    <p:sldLayoutId xmlns:r="http://schemas.openxmlformats.org/officeDocument/2006/relationships" id="2147483651" r:id="R347941bc160f43ad"/>
-    <p:sldLayoutId xmlns:r="http://schemas.openxmlformats.org/officeDocument/2006/relationships" id="2147483652" r:id="Rc7d79db4a35e4900"/>
-    <p:sldLayoutId xmlns:r="http://schemas.openxmlformats.org/officeDocument/2006/relationships" id="2147483653" r:id="R64deb1b2c8844652"/>
-    <p:sldLayoutId xmlns:r="http://schemas.openxmlformats.org/officeDocument/2006/relationships" id="2147483654" r:id="Rc483f7f322cc460a"/>
-    <p:sldLayoutId xmlns:r="http://schemas.openxmlformats.org/officeDocument/2006/relationships" id="2147483655" r:id="Rf915be265be14818"/>
-    <p:sldLayoutId xmlns:r="http://schemas.openxmlformats.org/officeDocument/2006/relationships" id="2147483656" r:id="R98a6b110b1334d8d"/>
-    <p:sldLayoutId xmlns:r="http://schemas.openxmlformats.org/officeDocument/2006/relationships" id="2147483657" r:id="Rd2adf64b8b1e464b"/>
-    <p:sldLayoutId xmlns:r="http://schemas.openxmlformats.org/officeDocument/2006/relationships" id="2147483658" r:id="Rfe3b8109930546a3"/>
-    <p:sldLayoutId xmlns:r="http://schemas.openxmlformats.org/officeDocument/2006/relationships" id="2147483659" r:id="Rc17bd2d3bd8048c0"/>
+    <p:sldLayoutId xmlns:r="http://schemas.openxmlformats.org/officeDocument/2006/relationships" id="2147483649" r:id="Re40ef8b789f541bc"/>
+    <p:sldLayoutId xmlns:r="http://schemas.openxmlformats.org/officeDocument/2006/relationships" id="2147483650" r:id="R5fc5c651e7a245f9"/>
+    <p:sldLayoutId xmlns:r="http://schemas.openxmlformats.org/officeDocument/2006/relationships" id="2147483651" r:id="R6bba52209abe4725"/>
+    <p:sldLayoutId xmlns:r="http://schemas.openxmlformats.org/officeDocument/2006/relationships" id="2147483652" r:id="Ra57d1cb767114526"/>
+    <p:sldLayoutId xmlns:r="http://schemas.openxmlformats.org/officeDocument/2006/relationships" id="2147483653" r:id="Rf47d1295b1f64fc4"/>
+    <p:sldLayoutId xmlns:r="http://schemas.openxmlformats.org/officeDocument/2006/relationships" id="2147483654" r:id="Rab47a1e1e3bb4669"/>
+    <p:sldLayoutId xmlns:r="http://schemas.openxmlformats.org/officeDocument/2006/relationships" id="2147483655" r:id="R2946844b692a41e7"/>
+    <p:sldLayoutId xmlns:r="http://schemas.openxmlformats.org/officeDocument/2006/relationships" id="2147483656" r:id="Rd470c7c969564741"/>
+    <p:sldLayoutId xmlns:r="http://schemas.openxmlformats.org/officeDocument/2006/relationships" id="2147483657" r:id="R34ef6c7ed9704387"/>
+    <p:sldLayoutId xmlns:r="http://schemas.openxmlformats.org/officeDocument/2006/relationships" id="2147483658" r:id="R39a1cb1f41244497"/>
+    <p:sldLayoutId xmlns:r="http://schemas.openxmlformats.org/officeDocument/2006/relationships" id="2147483659" r:id="Rf64766d6f2d940c7"/>
   </p:sldLayoutIdLst>
   <p:txStyles>
     <p:titleStyle>
@@ -5119,7 +5239,7 @@
           <p:cNvPr id="2" name="Rectangle 1">
             <a:extLst xmlns:a="http://schemas.openxmlformats.org/drawingml/2006/main">
               <a:ext uri="{FF2B5EF4-FFF2-40B4-BE49-F238E27FC236}">
-                <a16:creationId xmlns:a16="http://schemas.microsoft.com/office/drawing/2014/main" id="{2A891B4F-68E0-4A36-9F3C-D72D51DD6A0B}"/>
+                <a16:creationId xmlns:a16="http://schemas.microsoft.com/office/drawing/2014/main" id="{C8FC8441-FD2E-4C2E-937B-5D0766DB2F26}"/>
               </a:ext>
             </a:extLst>
           </p:cNvPr>
@@ -5174,7 +5294,7 @@
           <p:cNvPr id="3" name="TextBox 2">
             <a:extLst xmlns:a="http://schemas.openxmlformats.org/drawingml/2006/main">
               <a:ext uri="{FF2B5EF4-FFF2-40B4-BE49-F238E27FC236}">
-                <a16:creationId xmlns:a16="http://schemas.microsoft.com/office/drawing/2014/main" id="{DA554D5D-203E-4126-B734-8F81969E2C62}"/>
+                <a16:creationId xmlns:a16="http://schemas.microsoft.com/office/drawing/2014/main" id="{C578F2DD-B44B-4B5C-98AC-50B532041A57}"/>
               </a:ext>
             </a:extLst>
           </p:cNvPr>
@@ -5221,7 +5341,7 @@
           <p:cNvPr id="4" name="TextBox 3">
             <a:extLst xmlns:a="http://schemas.openxmlformats.org/drawingml/2006/main">
               <a:ext uri="{FF2B5EF4-FFF2-40B4-BE49-F238E27FC236}">
-                <a16:creationId xmlns:a16="http://schemas.microsoft.com/office/drawing/2014/main" id="{B6139A11-F2ED-4A82-A7D1-BB61A6A47680}"/>
+                <a16:creationId xmlns:a16="http://schemas.microsoft.com/office/drawing/2014/main" id="{AD43DC60-C37E-4965-8F07-D851A037EB56}"/>
               </a:ext>
             </a:extLst>
           </p:cNvPr>
@@ -5269,7 +5389,7 @@
           <p:cNvPr id="5" name="TextBox 4">
             <a:extLst xmlns:a="http://schemas.openxmlformats.org/drawingml/2006/main">
               <a:ext uri="{FF2B5EF4-FFF2-40B4-BE49-F238E27FC236}">
-                <a16:creationId xmlns:a16="http://schemas.microsoft.com/office/drawing/2014/main" id="{BEB50592-8D38-4BE9-804B-0F616001ECBF}"/>
+                <a16:creationId xmlns:a16="http://schemas.microsoft.com/office/drawing/2014/main" id="{A559CAD4-BDE7-4161-934E-9DAC50D04FFD}"/>
               </a:ext>
             </a:extLst>
           </p:cNvPr>
@@ -5316,7 +5436,7 @@
           <p:cNvPr id="6" name="Rectangle 5">
             <a:extLst xmlns:a="http://schemas.openxmlformats.org/drawingml/2006/main">
               <a:ext uri="{FF2B5EF4-FFF2-40B4-BE49-F238E27FC236}">
-                <a16:creationId xmlns:a16="http://schemas.microsoft.com/office/drawing/2014/main" id="{83FAA04A-D815-47B3-8358-B9069575385D}"/>
+                <a16:creationId xmlns:a16="http://schemas.microsoft.com/office/drawing/2014/main" id="{AFBF2722-366D-49C2-B489-CF00A92CEE49}"/>
               </a:ext>
             </a:extLst>
           </p:cNvPr>
@@ -5371,7 +5491,7 @@
           <p:cNvPr id="7" name="TextBox 6">
             <a:extLst xmlns:a="http://schemas.openxmlformats.org/drawingml/2006/main">
               <a:ext uri="{FF2B5EF4-FFF2-40B4-BE49-F238E27FC236}">
-                <a16:creationId xmlns:a16="http://schemas.microsoft.com/office/drawing/2014/main" id="{F4047921-38A1-4453-9E25-9C3A552CBB3A}"/>
+                <a16:creationId xmlns:a16="http://schemas.microsoft.com/office/drawing/2014/main" id="{BC216713-C1CF-4BD0-8841-35171156359C}"/>
               </a:ext>
             </a:extLst>
           </p:cNvPr>
@@ -5418,7 +5538,7 @@
           <p:cNvPr id="8" name="TextBox 7">
             <a:extLst xmlns:a="http://schemas.openxmlformats.org/drawingml/2006/main">
               <a:ext uri="{FF2B5EF4-FFF2-40B4-BE49-F238E27FC236}">
-                <a16:creationId xmlns:a16="http://schemas.microsoft.com/office/drawing/2014/main" id="{AAA40616-37E4-4231-BB6B-F938AD4D6F6C}"/>
+                <a16:creationId xmlns:a16="http://schemas.microsoft.com/office/drawing/2014/main" id="{47B58DA7-DE57-4DC7-A9B2-17E909E136DC}"/>
               </a:ext>
             </a:extLst>
           </p:cNvPr>
@@ -5455,7 +5575,7 @@
                 <a:ea typeface="Aptos"/>
                 <a:cs typeface="Aptos"/>
               </a:rPr>
-              <a:t>2026.07.26-25</a:t>
+              <a:t>2026.07.27-26</a:t>
             </a:r>
           </a:p>
         </p:txBody>
@@ -5465,7 +5585,7 @@
           <p:cNvPr id="9" name="TextBox 8">
             <a:extLst xmlns:a="http://schemas.openxmlformats.org/drawingml/2006/main">
               <a:ext uri="{FF2B5EF4-FFF2-40B4-BE49-F238E27FC236}">
-                <a16:creationId xmlns:a16="http://schemas.microsoft.com/office/drawing/2014/main" id="{48E45D38-00B5-4575-BAC8-947A13D5FCFD}"/>
+                <a16:creationId xmlns:a16="http://schemas.microsoft.com/office/drawing/2014/main" id="{389C0E70-7C4B-4978-B13E-781B3751B7C4}"/>
               </a:ext>
             </a:extLst>
           </p:cNvPr>
@@ -5502,7 +5622,7 @@
                 <a:ea typeface="Aptos"/>
                 <a:cs typeface="Aptos"/>
               </a:rPr>
-              <a:t>Päivitetty 2026-07-26</a:t>
+              <a:t>Päivitetty 2026-07-27</a:t>
             </a:r>
             <a:br>
               <a:rPr sz="1700" b="0">
@@ -5533,7 +5653,7 @@
           <p:cNvPr id="10" name="TextBox 9">
             <a:extLst xmlns:a="http://schemas.openxmlformats.org/drawingml/2006/main">
               <a:ext uri="{FF2B5EF4-FFF2-40B4-BE49-F238E27FC236}">
-                <a16:creationId xmlns:a16="http://schemas.microsoft.com/office/drawing/2014/main" id="{8FB9AB26-ED01-4290-BB1F-AC8DB9FF0296}"/>
+                <a16:creationId xmlns:a16="http://schemas.microsoft.com/office/drawing/2014/main" id="{C90AF6B6-FE8D-4568-8E4C-9E493CA252CC}"/>
               </a:ext>
             </a:extLst>
           </p:cNvPr>
@@ -5580,7 +5700,7 @@
           <p:cNvPr id="11" name="TextBox 10">
             <a:extLst xmlns:a="http://schemas.openxmlformats.org/drawingml/2006/main">
               <a:ext uri="{FF2B5EF4-FFF2-40B4-BE49-F238E27FC236}">
-                <a16:creationId xmlns:a16="http://schemas.microsoft.com/office/drawing/2014/main" id="{A1432AA0-CA82-4CED-BEA0-EB178C75FC5D}"/>
+                <a16:creationId xmlns:a16="http://schemas.microsoft.com/office/drawing/2014/main" id="{70567DB0-CDD9-470B-915E-82B3B9788618}"/>
               </a:ext>
             </a:extLst>
           </p:cNvPr>
@@ -5627,7 +5747,7 @@
           <p:cNvPr id="12" name="TextBox 11">
             <a:extLst xmlns:a="http://schemas.openxmlformats.org/drawingml/2006/main">
               <a:ext uri="{FF2B5EF4-FFF2-40B4-BE49-F238E27FC236}">
-                <a16:creationId xmlns:a16="http://schemas.microsoft.com/office/drawing/2014/main" id="{C929DCEB-6A5C-480E-BC21-BF458CE143CF}"/>
+                <a16:creationId xmlns:a16="http://schemas.microsoft.com/office/drawing/2014/main" id="{5EC29800-CE3D-40EB-9586-CFBCF12820E1}"/>
               </a:ext>
             </a:extLst>
           </p:cNvPr>
@@ -5672,7 +5792,7 @@
     </p:spTree>
     <p:extLst>
       <p:ext uri="{BB962C8B-B14F-4D97-AF65-F5344CB8AC3E}">
-        <p14:creationId xmlns:p14="http://schemas.microsoft.com/office/powerpoint/2010/main" val="118936829"/>
+        <p14:creationId xmlns:p14="http://schemas.microsoft.com/office/powerpoint/2010/main" val="1152698114"/>
       </p:ext>
     </p:extLst>
   </p:cSld>
@@ -5696,7 +5816,7 @@
           <p:cNvPr id="2" name="TextBox 1">
             <a:extLst xmlns:a="http://schemas.openxmlformats.org/drawingml/2006/main">
               <a:ext uri="{FF2B5EF4-FFF2-40B4-BE49-F238E27FC236}">
-                <a16:creationId xmlns:a16="http://schemas.microsoft.com/office/drawing/2014/main" id="{1060F2D9-5FC2-4EB1-8637-1D877FF42F71}"/>
+                <a16:creationId xmlns:a16="http://schemas.microsoft.com/office/drawing/2014/main" id="{AC201969-DB87-4C5F-8878-EB0BAA88B75A}"/>
               </a:ext>
             </a:extLst>
           </p:cNvPr>
@@ -5743,7 +5863,7 @@
           <p:cNvPr id="3" name="TextBox 2">
             <a:extLst xmlns:a="http://schemas.openxmlformats.org/drawingml/2006/main">
               <a:ext uri="{FF2B5EF4-FFF2-40B4-BE49-F238E27FC236}">
-                <a16:creationId xmlns:a16="http://schemas.microsoft.com/office/drawing/2014/main" id="{59888A64-6A16-40D9-8B02-F86CD4376F11}"/>
+                <a16:creationId xmlns:a16="http://schemas.microsoft.com/office/drawing/2014/main" id="{6AE19CDF-592D-4E0C-B780-15BD4C401E2B}"/>
               </a:ext>
             </a:extLst>
           </p:cNvPr>
@@ -5790,7 +5910,7 @@
           <p:cNvPr id="4" name="Rectangle 3">
             <a:extLst xmlns:a="http://schemas.openxmlformats.org/drawingml/2006/main">
               <a:ext uri="{FF2B5EF4-FFF2-40B4-BE49-F238E27FC236}">
-                <a16:creationId xmlns:a16="http://schemas.microsoft.com/office/drawing/2014/main" id="{015FCB71-0F57-41D3-9907-502A02F51043}"/>
+                <a16:creationId xmlns:a16="http://schemas.microsoft.com/office/drawing/2014/main" id="{DD8D070C-6491-45B7-BCBB-5988B439009A}"/>
               </a:ext>
             </a:extLst>
           </p:cNvPr>
@@ -5845,7 +5965,7 @@
           <p:cNvPr id="5" name="Rectangle 4">
             <a:extLst xmlns:a="http://schemas.openxmlformats.org/drawingml/2006/main">
               <a:ext uri="{FF2B5EF4-FFF2-40B4-BE49-F238E27FC236}">
-                <a16:creationId xmlns:a16="http://schemas.microsoft.com/office/drawing/2014/main" id="{8FF50850-DB29-472E-88B5-7FF80A7D002F}"/>
+                <a16:creationId xmlns:a16="http://schemas.microsoft.com/office/drawing/2014/main" id="{44D213AD-99E4-403A-9D14-2E0A36FD4468}"/>
               </a:ext>
             </a:extLst>
           </p:cNvPr>
@@ -5900,7 +6020,7 @@
           <p:cNvPr id="6" name="TextBox 5">
             <a:extLst xmlns:a="http://schemas.openxmlformats.org/drawingml/2006/main">
               <a:ext uri="{FF2B5EF4-FFF2-40B4-BE49-F238E27FC236}">
-                <a16:creationId xmlns:a16="http://schemas.microsoft.com/office/drawing/2014/main" id="{D591B238-1306-4B94-9430-3425D2CDDA1C}"/>
+                <a16:creationId xmlns:a16="http://schemas.microsoft.com/office/drawing/2014/main" id="{4F28D48C-174D-4AEB-8BA9-647506F023A3}"/>
               </a:ext>
             </a:extLst>
           </p:cNvPr>
@@ -5937,7 +6057,7 @@
                 <a:ea typeface="Aptos"/>
                 <a:cs typeface="Aptos"/>
               </a:rPr>
-              <a:t>Julkinen riippumaton evidenssikooste · 2026.07.26-25 · 2026-07-26 · Lähteet: EPO; Saksa — viralliset tuomiot; WIPO</a:t>
+              <a:t>Julkinen riippumaton evidenssikooste · 2026.07.27-26 · 2026-07-27 · Lähteet: EPO; Saksa — viralliset tuomiot; WIPO</a:t>
             </a:r>
           </a:p>
         </p:txBody>
@@ -5947,7 +6067,7 @@
           <p:cNvPr id="7" name="TextBox 6">
             <a:extLst xmlns:a="http://schemas.openxmlformats.org/drawingml/2006/main">
               <a:ext uri="{FF2B5EF4-FFF2-40B4-BE49-F238E27FC236}">
-                <a16:creationId xmlns:a16="http://schemas.microsoft.com/office/drawing/2014/main" id="{C0F6250B-ED53-4E83-AF96-6B17BF53F50B}"/>
+                <a16:creationId xmlns:a16="http://schemas.microsoft.com/office/drawing/2014/main" id="{8CF733E8-1320-4D5F-AB9A-7FC58446841F}"/>
               </a:ext>
             </a:extLst>
           </p:cNvPr>
@@ -5994,7 +6114,7 @@
           <p:cNvPr id="8" name="TextBox 7">
             <a:extLst xmlns:a="http://schemas.openxmlformats.org/drawingml/2006/main">
               <a:ext uri="{FF2B5EF4-FFF2-40B4-BE49-F238E27FC236}">
-                <a16:creationId xmlns:a16="http://schemas.microsoft.com/office/drawing/2014/main" id="{E84A64F6-C027-42BB-9EA1-784A8FFED853}"/>
+                <a16:creationId xmlns:a16="http://schemas.microsoft.com/office/drawing/2014/main" id="{480E301B-62A8-4C4B-ADA3-A64961DB4F40}"/>
               </a:ext>
             </a:extLst>
           </p:cNvPr>
@@ -6041,7 +6161,7 @@
           <p:cNvPr id="9" name="TextBox 8">
             <a:extLst xmlns:a="http://schemas.openxmlformats.org/drawingml/2006/main">
               <a:ext uri="{FF2B5EF4-FFF2-40B4-BE49-F238E27FC236}">
-                <a16:creationId xmlns:a16="http://schemas.microsoft.com/office/drawing/2014/main" id="{695092AC-C05A-47E2-8941-7743566FB893}"/>
+                <a16:creationId xmlns:a16="http://schemas.microsoft.com/office/drawing/2014/main" id="{D05DCBBA-ADF2-4CCE-80E1-B42661BA1036}"/>
               </a:ext>
             </a:extLst>
           </p:cNvPr>
@@ -6138,7 +6258,7 @@
           <p:cNvPr id="10" name="Rounded Rectangle 9">
             <a:extLst xmlns:a="http://schemas.openxmlformats.org/drawingml/2006/main">
               <a:ext uri="{FF2B5EF4-FFF2-40B4-BE49-F238E27FC236}">
-                <a16:creationId xmlns:a16="http://schemas.microsoft.com/office/drawing/2014/main" id="{F62CB24F-C983-45FF-B236-6F0B0FD80E6E}"/>
+                <a16:creationId xmlns:a16="http://schemas.microsoft.com/office/drawing/2014/main" id="{BD29D4B4-BE92-42C6-A20B-7628384942AB}"/>
               </a:ext>
             </a:extLst>
           </p:cNvPr>
@@ -6195,7 +6315,7 @@
           <p:cNvPr id="11" name="TextBox 10">
             <a:extLst xmlns:a="http://schemas.openxmlformats.org/drawingml/2006/main">
               <a:ext uri="{FF2B5EF4-FFF2-40B4-BE49-F238E27FC236}">
-                <a16:creationId xmlns:a16="http://schemas.microsoft.com/office/drawing/2014/main" id="{034815CA-3955-4953-987F-2900028DBEF6}"/>
+                <a16:creationId xmlns:a16="http://schemas.microsoft.com/office/drawing/2014/main" id="{5289E610-B112-4883-942E-AD4D27ADF8AC}"/>
               </a:ext>
             </a:extLst>
           </p:cNvPr>
@@ -6242,7 +6362,7 @@
           <p:cNvPr id="12" name="TextBox 11">
             <a:extLst xmlns:a="http://schemas.openxmlformats.org/drawingml/2006/main">
               <a:ext uri="{FF2B5EF4-FFF2-40B4-BE49-F238E27FC236}">
-                <a16:creationId xmlns:a16="http://schemas.microsoft.com/office/drawing/2014/main" id="{00E43CDE-2A67-4C9D-A003-93C1C6141E03}"/>
+                <a16:creationId xmlns:a16="http://schemas.microsoft.com/office/drawing/2014/main" id="{C9BA59F8-9E0B-4B19-B638-5EB9049626C9}"/>
               </a:ext>
             </a:extLst>
           </p:cNvPr>
@@ -6287,7 +6407,7 @@
     </p:spTree>
     <p:extLst>
       <p:ext uri="{BB962C8B-B14F-4D97-AF65-F5344CB8AC3E}">
-        <p14:creationId xmlns:p14="http://schemas.microsoft.com/office/powerpoint/2010/main" val="2097373423"/>
+        <p14:creationId xmlns:p14="http://schemas.microsoft.com/office/powerpoint/2010/main" val="342817461"/>
       </p:ext>
     </p:extLst>
   </p:cSld>
@@ -6311,7 +6431,7 @@
           <p:cNvPr id="2" name="TextBox 1">
             <a:extLst xmlns:a="http://schemas.openxmlformats.org/drawingml/2006/main">
               <a:ext uri="{FF2B5EF4-FFF2-40B4-BE49-F238E27FC236}">
-                <a16:creationId xmlns:a16="http://schemas.microsoft.com/office/drawing/2014/main" id="{2488D4B0-5D15-4444-AF3B-16C50D51087E}"/>
+                <a16:creationId xmlns:a16="http://schemas.microsoft.com/office/drawing/2014/main" id="{C29B8EC6-5903-4ADC-9BEA-7C1C8F7ABFBA}"/>
               </a:ext>
             </a:extLst>
           </p:cNvPr>
@@ -6358,7 +6478,7 @@
           <p:cNvPr id="3" name="TextBox 2">
             <a:extLst xmlns:a="http://schemas.openxmlformats.org/drawingml/2006/main">
               <a:ext uri="{FF2B5EF4-FFF2-40B4-BE49-F238E27FC236}">
-                <a16:creationId xmlns:a16="http://schemas.microsoft.com/office/drawing/2014/main" id="{4733EE8B-5E9D-4FF3-AD7D-B3449DA5A3C0}"/>
+                <a16:creationId xmlns:a16="http://schemas.microsoft.com/office/drawing/2014/main" id="{8E979EC8-01CD-4B0C-88EC-5CBBBFEE042B}"/>
               </a:ext>
             </a:extLst>
           </p:cNvPr>
@@ -6405,7 +6525,7 @@
           <p:cNvPr id="4" name="Rectangle 3">
             <a:extLst xmlns:a="http://schemas.openxmlformats.org/drawingml/2006/main">
               <a:ext uri="{FF2B5EF4-FFF2-40B4-BE49-F238E27FC236}">
-                <a16:creationId xmlns:a16="http://schemas.microsoft.com/office/drawing/2014/main" id="{54C7836D-90C7-4137-BF84-3F685BBA1C59}"/>
+                <a16:creationId xmlns:a16="http://schemas.microsoft.com/office/drawing/2014/main" id="{E50C02E6-A473-4F50-8F12-BED2867127F2}"/>
               </a:ext>
             </a:extLst>
           </p:cNvPr>
@@ -6460,7 +6580,7 @@
           <p:cNvPr id="5" name="Rectangle 4">
             <a:extLst xmlns:a="http://schemas.openxmlformats.org/drawingml/2006/main">
               <a:ext uri="{FF2B5EF4-FFF2-40B4-BE49-F238E27FC236}">
-                <a16:creationId xmlns:a16="http://schemas.microsoft.com/office/drawing/2014/main" id="{66A90AF2-485F-4042-8131-021E4D11E3DA}"/>
+                <a16:creationId xmlns:a16="http://schemas.microsoft.com/office/drawing/2014/main" id="{A178A37C-B5BC-40A0-9CDB-97CA3EE34DBF}"/>
               </a:ext>
             </a:extLst>
           </p:cNvPr>
@@ -6515,7 +6635,7 @@
           <p:cNvPr id="6" name="TextBox 5">
             <a:extLst xmlns:a="http://schemas.openxmlformats.org/drawingml/2006/main">
               <a:ext uri="{FF2B5EF4-FFF2-40B4-BE49-F238E27FC236}">
-                <a16:creationId xmlns:a16="http://schemas.microsoft.com/office/drawing/2014/main" id="{DF0A1951-4E4A-4844-9A2B-1277865D8F14}"/>
+                <a16:creationId xmlns:a16="http://schemas.microsoft.com/office/drawing/2014/main" id="{FA87E6AA-F48D-40AB-812D-A0C4E77A4E75}"/>
               </a:ext>
             </a:extLst>
           </p:cNvPr>
@@ -6552,7 +6672,7 @@
                 <a:ea typeface="Aptos"/>
                 <a:cs typeface="Aptos"/>
               </a:rPr>
-              <a:t>Julkinen riippumaton evidenssikooste · 2026.07.26-25 · 2026-07-26 · Lähteet: EPO Register; EP3032975B2; 8 Ni 18/24 (EP); 7 O 3341/24</a:t>
+              <a:t>Julkinen riippumaton evidenssikooste · 2026.07.27-26 · 2026-07-27 · Lähteet: EPO Register; EP3032975B2; 8 Ni 18/24 (EP); 7 O 3341/24</a:t>
             </a:r>
           </a:p>
         </p:txBody>
@@ -6562,7 +6682,7 @@
           <p:cNvPr id="7" name="TextBox 6">
             <a:extLst xmlns:a="http://schemas.openxmlformats.org/drawingml/2006/main">
               <a:ext uri="{FF2B5EF4-FFF2-40B4-BE49-F238E27FC236}">
-                <a16:creationId xmlns:a16="http://schemas.microsoft.com/office/drawing/2014/main" id="{D34BBB20-4511-41D4-A571-980D08DD409D}"/>
+                <a16:creationId xmlns:a16="http://schemas.microsoft.com/office/drawing/2014/main" id="{9C046C03-CEE6-40CD-AF21-0ED4D22362BD}"/>
               </a:ext>
             </a:extLst>
           </p:cNvPr>
@@ -6609,7 +6729,7 @@
           <p:cNvPr id="8" name="Rounded Rectangle 7">
             <a:extLst xmlns:a="http://schemas.openxmlformats.org/drawingml/2006/main">
               <a:ext uri="{FF2B5EF4-FFF2-40B4-BE49-F238E27FC236}">
-                <a16:creationId xmlns:a16="http://schemas.microsoft.com/office/drawing/2014/main" id="{D019C82F-3C7D-40C5-9FC4-5C5C8D785D1A}"/>
+                <a16:creationId xmlns:a16="http://schemas.microsoft.com/office/drawing/2014/main" id="{9325BA40-3E5B-45FC-86E2-E8D3C1152666}"/>
               </a:ext>
             </a:extLst>
           </p:cNvPr>
@@ -6666,7 +6786,7 @@
           <p:cNvPr id="9" name="TextBox 8">
             <a:extLst xmlns:a="http://schemas.openxmlformats.org/drawingml/2006/main">
               <a:ext uri="{FF2B5EF4-FFF2-40B4-BE49-F238E27FC236}">
-                <a16:creationId xmlns:a16="http://schemas.microsoft.com/office/drawing/2014/main" id="{AFCDEDCF-0B57-43EE-8406-E44CBE9C8DAA}"/>
+                <a16:creationId xmlns:a16="http://schemas.microsoft.com/office/drawing/2014/main" id="{DC7655B2-7A32-4F3D-A814-5E505E6B1171}"/>
               </a:ext>
             </a:extLst>
           </p:cNvPr>
@@ -6713,7 +6833,7 @@
           <p:cNvPr id="10" name="TextBox 9">
             <a:extLst xmlns:a="http://schemas.openxmlformats.org/drawingml/2006/main">
               <a:ext uri="{FF2B5EF4-FFF2-40B4-BE49-F238E27FC236}">
-                <a16:creationId xmlns:a16="http://schemas.microsoft.com/office/drawing/2014/main" id="{955B305D-C4AE-4604-847B-A16817F6E0F9}"/>
+                <a16:creationId xmlns:a16="http://schemas.microsoft.com/office/drawing/2014/main" id="{92C6A6C4-040D-422D-809D-DB9A36112B12}"/>
               </a:ext>
             </a:extLst>
           </p:cNvPr>
@@ -6760,7 +6880,7 @@
           <p:cNvPr id="11" name="Rounded Rectangle 10">
             <a:extLst xmlns:a="http://schemas.openxmlformats.org/drawingml/2006/main">
               <a:ext uri="{FF2B5EF4-FFF2-40B4-BE49-F238E27FC236}">
-                <a16:creationId xmlns:a16="http://schemas.microsoft.com/office/drawing/2014/main" id="{73A49292-415A-40CD-AA1C-C081C4EAF42A}"/>
+                <a16:creationId xmlns:a16="http://schemas.microsoft.com/office/drawing/2014/main" id="{06CFF339-D70D-4197-83F1-5924C19975C4}"/>
               </a:ext>
             </a:extLst>
           </p:cNvPr>
@@ -6817,7 +6937,7 @@
           <p:cNvPr id="12" name="TextBox 11">
             <a:extLst xmlns:a="http://schemas.openxmlformats.org/drawingml/2006/main">
               <a:ext uri="{FF2B5EF4-FFF2-40B4-BE49-F238E27FC236}">
-                <a16:creationId xmlns:a16="http://schemas.microsoft.com/office/drawing/2014/main" id="{8B367321-302F-4DB7-B4A3-7D57351B96E5}"/>
+                <a16:creationId xmlns:a16="http://schemas.microsoft.com/office/drawing/2014/main" id="{BA4475CF-4AB3-4776-B204-3B3F8051A4D9}"/>
               </a:ext>
             </a:extLst>
           </p:cNvPr>
@@ -6864,7 +6984,7 @@
           <p:cNvPr id="13" name="TextBox 12">
             <a:extLst xmlns:a="http://schemas.openxmlformats.org/drawingml/2006/main">
               <a:ext uri="{FF2B5EF4-FFF2-40B4-BE49-F238E27FC236}">
-                <a16:creationId xmlns:a16="http://schemas.microsoft.com/office/drawing/2014/main" id="{FE4A6940-5B48-458A-907B-47400FE366FC}"/>
+                <a16:creationId xmlns:a16="http://schemas.microsoft.com/office/drawing/2014/main" id="{717C50C6-A4FC-448C-A417-7137B531DECE}"/>
               </a:ext>
             </a:extLst>
           </p:cNvPr>
@@ -6911,7 +7031,7 @@
           <p:cNvPr id="14" name="Rounded Rectangle 13">
             <a:extLst xmlns:a="http://schemas.openxmlformats.org/drawingml/2006/main">
               <a:ext uri="{FF2B5EF4-FFF2-40B4-BE49-F238E27FC236}">
-                <a16:creationId xmlns:a16="http://schemas.microsoft.com/office/drawing/2014/main" id="{54A88110-EBD4-4232-ADBE-FB0B2D7DAEF7}"/>
+                <a16:creationId xmlns:a16="http://schemas.microsoft.com/office/drawing/2014/main" id="{AF5A1839-135B-473A-92CC-B55038661651}"/>
               </a:ext>
             </a:extLst>
           </p:cNvPr>
@@ -6968,7 +7088,7 @@
           <p:cNvPr id="15" name="TextBox 14">
             <a:extLst xmlns:a="http://schemas.openxmlformats.org/drawingml/2006/main">
               <a:ext uri="{FF2B5EF4-FFF2-40B4-BE49-F238E27FC236}">
-                <a16:creationId xmlns:a16="http://schemas.microsoft.com/office/drawing/2014/main" id="{56966EBC-7D8F-41F3-BD92-DECD25586A88}"/>
+                <a16:creationId xmlns:a16="http://schemas.microsoft.com/office/drawing/2014/main" id="{3488380E-E762-4FC0-A73B-B07690FD2278}"/>
               </a:ext>
             </a:extLst>
           </p:cNvPr>
@@ -7015,7 +7135,7 @@
           <p:cNvPr id="16" name="TextBox 15">
             <a:extLst xmlns:a="http://schemas.openxmlformats.org/drawingml/2006/main">
               <a:ext uri="{FF2B5EF4-FFF2-40B4-BE49-F238E27FC236}">
-                <a16:creationId xmlns:a16="http://schemas.microsoft.com/office/drawing/2014/main" id="{19D992B4-83B9-46AE-ADFB-F94C61967BCE}"/>
+                <a16:creationId xmlns:a16="http://schemas.microsoft.com/office/drawing/2014/main" id="{D944C8B7-39B0-4706-8F60-1C5B3A7FDD50}"/>
               </a:ext>
             </a:extLst>
           </p:cNvPr>
@@ -7062,7 +7182,7 @@
           <p:cNvPr id="17" name="TextBox 16">
             <a:extLst xmlns:a="http://schemas.openxmlformats.org/drawingml/2006/main">
               <a:ext uri="{FF2B5EF4-FFF2-40B4-BE49-F238E27FC236}">
-                <a16:creationId xmlns:a16="http://schemas.microsoft.com/office/drawing/2014/main" id="{1E8B6604-65E7-4DFD-B202-0BD496CB3881}"/>
+                <a16:creationId xmlns:a16="http://schemas.microsoft.com/office/drawing/2014/main" id="{CBDE9FE0-8142-4D34-88B5-A1FA1CCD9483}"/>
               </a:ext>
             </a:extLst>
           </p:cNvPr>
@@ -7109,7 +7229,7 @@
           <p:cNvPr id="18" name="Rounded Rectangle 17">
             <a:extLst xmlns:a="http://schemas.openxmlformats.org/drawingml/2006/main">
               <a:ext uri="{FF2B5EF4-FFF2-40B4-BE49-F238E27FC236}">
-                <a16:creationId xmlns:a16="http://schemas.microsoft.com/office/drawing/2014/main" id="{053CD1A2-C142-4FD0-AC3F-B0307D3F96AF}"/>
+                <a16:creationId xmlns:a16="http://schemas.microsoft.com/office/drawing/2014/main" id="{D6FACA26-5878-41BA-A7FF-F451F6176D6B}"/>
               </a:ext>
             </a:extLst>
           </p:cNvPr>
@@ -7166,7 +7286,7 @@
           <p:cNvPr id="19" name="TextBox 18">
             <a:extLst xmlns:a="http://schemas.openxmlformats.org/drawingml/2006/main">
               <a:ext uri="{FF2B5EF4-FFF2-40B4-BE49-F238E27FC236}">
-                <a16:creationId xmlns:a16="http://schemas.microsoft.com/office/drawing/2014/main" id="{7D318EFD-43D9-4BF0-AF49-EF1F5F2CA0DF}"/>
+                <a16:creationId xmlns:a16="http://schemas.microsoft.com/office/drawing/2014/main" id="{C74FAF0D-1718-4861-837F-BAEF939D6283}"/>
               </a:ext>
             </a:extLst>
           </p:cNvPr>
@@ -7213,7 +7333,7 @@
           <p:cNvPr id="20" name="TextBox 19">
             <a:extLst xmlns:a="http://schemas.openxmlformats.org/drawingml/2006/main">
               <a:ext uri="{FF2B5EF4-FFF2-40B4-BE49-F238E27FC236}">
-                <a16:creationId xmlns:a16="http://schemas.microsoft.com/office/drawing/2014/main" id="{CB4CABB0-7D93-4800-91BD-2288A3599CE5}"/>
+                <a16:creationId xmlns:a16="http://schemas.microsoft.com/office/drawing/2014/main" id="{8C99558E-11CD-4422-86BE-D4ECAC75646D}"/>
               </a:ext>
             </a:extLst>
           </p:cNvPr>
@@ -7258,7 +7378,7 @@
     </p:spTree>
     <p:extLst>
       <p:ext uri="{BB962C8B-B14F-4D97-AF65-F5344CB8AC3E}">
-        <p14:creationId xmlns:p14="http://schemas.microsoft.com/office/powerpoint/2010/main" val="1040272519"/>
+        <p14:creationId xmlns:p14="http://schemas.microsoft.com/office/powerpoint/2010/main" val="901025"/>
       </p:ext>
     </p:extLst>
   </p:cSld>
@@ -7282,7 +7402,7 @@
           <p:cNvPr id="2" name="TextBox 1">
             <a:extLst xmlns:a="http://schemas.openxmlformats.org/drawingml/2006/main">
               <a:ext uri="{FF2B5EF4-FFF2-40B4-BE49-F238E27FC236}">
-                <a16:creationId xmlns:a16="http://schemas.microsoft.com/office/drawing/2014/main" id="{56C67245-296B-489D-88F8-4510E275C268}"/>
+                <a16:creationId xmlns:a16="http://schemas.microsoft.com/office/drawing/2014/main" id="{2042F469-1B34-4F98-AE61-E612FA96D028}"/>
               </a:ext>
             </a:extLst>
           </p:cNvPr>
@@ -7329,7 +7449,7 @@
           <p:cNvPr id="3" name="TextBox 2">
             <a:extLst xmlns:a="http://schemas.openxmlformats.org/drawingml/2006/main">
               <a:ext uri="{FF2B5EF4-FFF2-40B4-BE49-F238E27FC236}">
-                <a16:creationId xmlns:a16="http://schemas.microsoft.com/office/drawing/2014/main" id="{69128FEF-7895-457E-94A8-0EC4057A9A07}"/>
+                <a16:creationId xmlns:a16="http://schemas.microsoft.com/office/drawing/2014/main" id="{DC5A6C79-15C2-4939-9D30-FECF19CC6A1E}"/>
               </a:ext>
             </a:extLst>
           </p:cNvPr>
@@ -7376,7 +7496,7 @@
           <p:cNvPr id="4" name="Rectangle 3">
             <a:extLst xmlns:a="http://schemas.openxmlformats.org/drawingml/2006/main">
               <a:ext uri="{FF2B5EF4-FFF2-40B4-BE49-F238E27FC236}">
-                <a16:creationId xmlns:a16="http://schemas.microsoft.com/office/drawing/2014/main" id="{AF2A3E95-6F0A-4846-8AC0-1FDC3ABAA72E}"/>
+                <a16:creationId xmlns:a16="http://schemas.microsoft.com/office/drawing/2014/main" id="{0EBA5D0A-F948-4EC2-BF6E-E40112168939}"/>
               </a:ext>
             </a:extLst>
           </p:cNvPr>
@@ -7431,7 +7551,7 @@
           <p:cNvPr id="5" name="Rectangle 4">
             <a:extLst xmlns:a="http://schemas.openxmlformats.org/drawingml/2006/main">
               <a:ext uri="{FF2B5EF4-FFF2-40B4-BE49-F238E27FC236}">
-                <a16:creationId xmlns:a16="http://schemas.microsoft.com/office/drawing/2014/main" id="{B906EC45-2166-4423-93FF-B00935D9EE27}"/>
+                <a16:creationId xmlns:a16="http://schemas.microsoft.com/office/drawing/2014/main" id="{58681F54-6F1A-41CB-8547-EE6D406C3223}"/>
               </a:ext>
             </a:extLst>
           </p:cNvPr>
@@ -7486,7 +7606,7 @@
           <p:cNvPr id="6" name="TextBox 5">
             <a:extLst xmlns:a="http://schemas.openxmlformats.org/drawingml/2006/main">
               <a:ext uri="{FF2B5EF4-FFF2-40B4-BE49-F238E27FC236}">
-                <a16:creationId xmlns:a16="http://schemas.microsoft.com/office/drawing/2014/main" id="{742125FE-A6EC-4D1F-B397-DEFDF0DE2654}"/>
+                <a16:creationId xmlns:a16="http://schemas.microsoft.com/office/drawing/2014/main" id="{EC774C99-F293-46C1-84BB-A1F3B4A5F85A}"/>
               </a:ext>
             </a:extLst>
           </p:cNvPr>
@@ -7523,7 +7643,7 @@
                 <a:ea typeface="Aptos"/>
                 <a:cs typeface="Aptos"/>
               </a:rPr>
-              <a:t>Julkinen riippumaton evidenssikooste · 2026.07.26-25 · 2026-07-26 · Lähteet: Statistics Canada; Health Canada; NZ Ministry of Health; European Commission; FHM; FTC</a:t>
+              <a:t>Julkinen riippumaton evidenssikooste · 2026.07.27-26 · 2026-07-27 · Lähteet: Statistics Canada; Health Canada; NZ Ministry of Health; European Commission; FHM; FTC</a:t>
             </a:r>
           </a:p>
         </p:txBody>
@@ -7533,7 +7653,7 @@
           <p:cNvPr id="7" name="TextBox 6">
             <a:extLst xmlns:a="http://schemas.openxmlformats.org/drawingml/2006/main">
               <a:ext uri="{FF2B5EF4-FFF2-40B4-BE49-F238E27FC236}">
-                <a16:creationId xmlns:a16="http://schemas.microsoft.com/office/drawing/2014/main" id="{74E6AB98-5DD0-419F-8069-4235FB9429CA}"/>
+                <a16:creationId xmlns:a16="http://schemas.microsoft.com/office/drawing/2014/main" id="{0B1016B3-B531-4656-AE4F-49918745742D}"/>
               </a:ext>
             </a:extLst>
           </p:cNvPr>
@@ -7580,7 +7700,7 @@
           <p:cNvPr id="8" name="Rounded Rectangle 7">
             <a:extLst xmlns:a="http://schemas.openxmlformats.org/drawingml/2006/main">
               <a:ext uri="{FF2B5EF4-FFF2-40B4-BE49-F238E27FC236}">
-                <a16:creationId xmlns:a16="http://schemas.microsoft.com/office/drawing/2014/main" id="{FE800F0F-8779-4DFE-A79B-8B2775A18B2D}"/>
+                <a16:creationId xmlns:a16="http://schemas.microsoft.com/office/drawing/2014/main" id="{B812EBAE-D3F3-4830-9B18-BC16399DF5E4}"/>
               </a:ext>
             </a:extLst>
           </p:cNvPr>
@@ -7637,7 +7757,7 @@
           <p:cNvPr id="9" name="TextBox 8">
             <a:extLst xmlns:a="http://schemas.openxmlformats.org/drawingml/2006/main">
               <a:ext uri="{FF2B5EF4-FFF2-40B4-BE49-F238E27FC236}">
-                <a16:creationId xmlns:a16="http://schemas.microsoft.com/office/drawing/2014/main" id="{59FBBB43-B4B0-4963-9EA5-46D0CFD27B3B}"/>
+                <a16:creationId xmlns:a16="http://schemas.microsoft.com/office/drawing/2014/main" id="{269A56F7-12AF-4B10-9B15-8569B9D732D6}"/>
               </a:ext>
             </a:extLst>
           </p:cNvPr>
@@ -7684,7 +7804,7 @@
           <p:cNvPr id="10" name="TextBox 9">
             <a:extLst xmlns:a="http://schemas.openxmlformats.org/drawingml/2006/main">
               <a:ext uri="{FF2B5EF4-FFF2-40B4-BE49-F238E27FC236}">
-                <a16:creationId xmlns:a16="http://schemas.microsoft.com/office/drawing/2014/main" id="{5529487F-8C0E-447A-8875-94B2BCBEBA07}"/>
+                <a16:creationId xmlns:a16="http://schemas.microsoft.com/office/drawing/2014/main" id="{FBE0E657-C8DA-4035-850C-1D8036940380}"/>
               </a:ext>
             </a:extLst>
           </p:cNvPr>
@@ -7731,7 +7851,7 @@
           <p:cNvPr id="11" name="Rounded Rectangle 10">
             <a:extLst xmlns:a="http://schemas.openxmlformats.org/drawingml/2006/main">
               <a:ext uri="{FF2B5EF4-FFF2-40B4-BE49-F238E27FC236}">
-                <a16:creationId xmlns:a16="http://schemas.microsoft.com/office/drawing/2014/main" id="{40D29C5D-4A30-4E96-BD1D-0475545BD6E2}"/>
+                <a16:creationId xmlns:a16="http://schemas.microsoft.com/office/drawing/2014/main" id="{D09038AA-C091-4F7C-8BDA-3DD07A2CD1BC}"/>
               </a:ext>
             </a:extLst>
           </p:cNvPr>
@@ -7788,7 +7908,7 @@
           <p:cNvPr id="12" name="TextBox 11">
             <a:extLst xmlns:a="http://schemas.openxmlformats.org/drawingml/2006/main">
               <a:ext uri="{FF2B5EF4-FFF2-40B4-BE49-F238E27FC236}">
-                <a16:creationId xmlns:a16="http://schemas.microsoft.com/office/drawing/2014/main" id="{AE91BF59-1A99-4CCE-954A-1F983648D33F}"/>
+                <a16:creationId xmlns:a16="http://schemas.microsoft.com/office/drawing/2014/main" id="{AB61D13A-0FA2-4D3E-8330-470A79CF757C}"/>
               </a:ext>
             </a:extLst>
           </p:cNvPr>
@@ -7835,7 +7955,7 @@
           <p:cNvPr id="13" name="TextBox 12">
             <a:extLst xmlns:a="http://schemas.openxmlformats.org/drawingml/2006/main">
               <a:ext uri="{FF2B5EF4-FFF2-40B4-BE49-F238E27FC236}">
-                <a16:creationId xmlns:a16="http://schemas.microsoft.com/office/drawing/2014/main" id="{DC4DF482-1E32-4F45-BAFD-10698D2C2779}"/>
+                <a16:creationId xmlns:a16="http://schemas.microsoft.com/office/drawing/2014/main" id="{74C1B8A7-769B-4561-A5F5-4FD6796AABAF}"/>
               </a:ext>
             </a:extLst>
           </p:cNvPr>
@@ -7882,7 +8002,7 @@
           <p:cNvPr id="14" name="Rounded Rectangle 13">
             <a:extLst xmlns:a="http://schemas.openxmlformats.org/drawingml/2006/main">
               <a:ext uri="{FF2B5EF4-FFF2-40B4-BE49-F238E27FC236}">
-                <a16:creationId xmlns:a16="http://schemas.microsoft.com/office/drawing/2014/main" id="{3D55FC65-58C7-463B-8950-57786131E314}"/>
+                <a16:creationId xmlns:a16="http://schemas.microsoft.com/office/drawing/2014/main" id="{4A55A83E-C540-4540-B0B4-CFC08655BF92}"/>
               </a:ext>
             </a:extLst>
           </p:cNvPr>
@@ -7939,7 +8059,7 @@
           <p:cNvPr id="15" name="TextBox 14">
             <a:extLst xmlns:a="http://schemas.openxmlformats.org/drawingml/2006/main">
               <a:ext uri="{FF2B5EF4-FFF2-40B4-BE49-F238E27FC236}">
-                <a16:creationId xmlns:a16="http://schemas.microsoft.com/office/drawing/2014/main" id="{4EEB73DA-A29D-4271-861B-2B623F600B12}"/>
+                <a16:creationId xmlns:a16="http://schemas.microsoft.com/office/drawing/2014/main" id="{5C6C290B-CC06-499F-9834-1E34A0356846}"/>
               </a:ext>
             </a:extLst>
           </p:cNvPr>
@@ -7986,7 +8106,7 @@
           <p:cNvPr id="16" name="TextBox 15">
             <a:extLst xmlns:a="http://schemas.openxmlformats.org/drawingml/2006/main">
               <a:ext uri="{FF2B5EF4-FFF2-40B4-BE49-F238E27FC236}">
-                <a16:creationId xmlns:a16="http://schemas.microsoft.com/office/drawing/2014/main" id="{ED8AEFE2-4D00-4A9A-9B99-C58F559DF1B4}"/>
+                <a16:creationId xmlns:a16="http://schemas.microsoft.com/office/drawing/2014/main" id="{0B29B35C-CCDB-49C5-B53C-AC97B9788D77}"/>
               </a:ext>
             </a:extLst>
           </p:cNvPr>
@@ -8033,7 +8153,7 @@
           <p:cNvPr id="17" name="TextBox 16">
             <a:extLst xmlns:a="http://schemas.openxmlformats.org/drawingml/2006/main">
               <a:ext uri="{FF2B5EF4-FFF2-40B4-BE49-F238E27FC236}">
-                <a16:creationId xmlns:a16="http://schemas.microsoft.com/office/drawing/2014/main" id="{85895BC1-AE9E-4428-9958-9D479576FD0C}"/>
+                <a16:creationId xmlns:a16="http://schemas.microsoft.com/office/drawing/2014/main" id="{7376BAA5-DB96-48D3-943B-527D37E1FE2B}"/>
               </a:ext>
             </a:extLst>
           </p:cNvPr>
@@ -8080,7 +8200,7 @@
           <p:cNvPr id="18" name="Rounded Rectangle 17">
             <a:extLst xmlns:a="http://schemas.openxmlformats.org/drawingml/2006/main">
               <a:ext uri="{FF2B5EF4-FFF2-40B4-BE49-F238E27FC236}">
-                <a16:creationId xmlns:a16="http://schemas.microsoft.com/office/drawing/2014/main" id="{918E3489-E77A-4117-A4E7-FF4981D2C999}"/>
+                <a16:creationId xmlns:a16="http://schemas.microsoft.com/office/drawing/2014/main" id="{014F7FFF-96FD-4F9B-8B73-6007E512F890}"/>
               </a:ext>
             </a:extLst>
           </p:cNvPr>
@@ -8137,7 +8257,7 @@
           <p:cNvPr id="19" name="TextBox 18">
             <a:extLst xmlns:a="http://schemas.openxmlformats.org/drawingml/2006/main">
               <a:ext uri="{FF2B5EF4-FFF2-40B4-BE49-F238E27FC236}">
-                <a16:creationId xmlns:a16="http://schemas.microsoft.com/office/drawing/2014/main" id="{C6487A17-6FAE-41B0-BF15-EE090E5FAEC4}"/>
+                <a16:creationId xmlns:a16="http://schemas.microsoft.com/office/drawing/2014/main" id="{6B23E624-1542-4603-B3A8-85DD96C16418}"/>
               </a:ext>
             </a:extLst>
           </p:cNvPr>
@@ -8184,7 +8304,7 @@
           <p:cNvPr id="20" name="TextBox 19">
             <a:extLst xmlns:a="http://schemas.openxmlformats.org/drawingml/2006/main">
               <a:ext uri="{FF2B5EF4-FFF2-40B4-BE49-F238E27FC236}">
-                <a16:creationId xmlns:a16="http://schemas.microsoft.com/office/drawing/2014/main" id="{DF6154F9-3EBE-40AF-B356-5DCC2C347938}"/>
+                <a16:creationId xmlns:a16="http://schemas.microsoft.com/office/drawing/2014/main" id="{C85B72DC-C384-438C-9C25-F65FFE360A6C}"/>
               </a:ext>
             </a:extLst>
           </p:cNvPr>
@@ -8221,7 +8341,7 @@
                 <a:ea typeface="Aptos"/>
                 <a:cs typeface="Aptos"/>
               </a:rPr>
-              <a:t>Kanada 2024 — retail 1,219160 mrd CAD (≈822,6 milj. EUR; ECB 2024); toimitukset 1,160754 mrd CAD (≈783,2 milj. EUR; ECB 2024); 7/10 (D5/D7/D10 avoinna). FTC 2021: 2,763 mrd USD (≈2,336 mrd EUR; ECB 2021), valmistajaraportointia. Ei summata.</a:t>
+              <a:t>Kanada 2024: retail 1,219160 mrd CAD (≈822,6 milj. EUR; ECB 2024); toimitukset 1,160754 mrd CAD (≈783,2 milj. EUR; ECB 2024). Kanada ja Uusi-Seelanti ovat 7/10 mutta eivät hyväksyttyjä. Puola on seuraava viranomaisdataohjelma. FTC 2021: 2,763 mrd USD (≈2,336 mrd EUR; ECB 2021). Ei summata.</a:t>
             </a:r>
           </a:p>
         </p:txBody>
@@ -8229,7 +8349,7 @@
     </p:spTree>
     <p:extLst>
       <p:ext uri="{BB962C8B-B14F-4D97-AF65-F5344CB8AC3E}">
-        <p14:creationId xmlns:p14="http://schemas.microsoft.com/office/powerpoint/2010/main" val="1526795823"/>
+        <p14:creationId xmlns:p14="http://schemas.microsoft.com/office/powerpoint/2010/main" val="1846812660"/>
       </p:ext>
     </p:extLst>
   </p:cSld>
@@ -8253,7 +8373,7 @@
           <p:cNvPr id="2" name="TextBox 1">
             <a:extLst xmlns:a="http://schemas.openxmlformats.org/drawingml/2006/main">
               <a:ext uri="{FF2B5EF4-FFF2-40B4-BE49-F238E27FC236}">
-                <a16:creationId xmlns:a16="http://schemas.microsoft.com/office/drawing/2014/main" id="{F09C1313-782E-4EDA-9EB2-D0B1575B4AC6}"/>
+                <a16:creationId xmlns:a16="http://schemas.microsoft.com/office/drawing/2014/main" id="{B5361164-91ED-4516-B62E-67677A0805BF}"/>
               </a:ext>
             </a:extLst>
           </p:cNvPr>
@@ -8300,7 +8420,7 @@
           <p:cNvPr id="3" name="TextBox 2">
             <a:extLst xmlns:a="http://schemas.openxmlformats.org/drawingml/2006/main">
               <a:ext uri="{FF2B5EF4-FFF2-40B4-BE49-F238E27FC236}">
-                <a16:creationId xmlns:a16="http://schemas.microsoft.com/office/drawing/2014/main" id="{4AF5FF88-A4A6-488D-B7FE-E046114915A3}"/>
+                <a16:creationId xmlns:a16="http://schemas.microsoft.com/office/drawing/2014/main" id="{273F35D5-E42A-4E7C-8237-8FB62923EAF1}"/>
               </a:ext>
             </a:extLst>
           </p:cNvPr>
@@ -8347,7 +8467,7 @@
           <p:cNvPr id="4" name="Rectangle 3">
             <a:extLst xmlns:a="http://schemas.openxmlformats.org/drawingml/2006/main">
               <a:ext uri="{FF2B5EF4-FFF2-40B4-BE49-F238E27FC236}">
-                <a16:creationId xmlns:a16="http://schemas.microsoft.com/office/drawing/2014/main" id="{4C0A9259-69FC-4C28-A14B-F9221D29FFC0}"/>
+                <a16:creationId xmlns:a16="http://schemas.microsoft.com/office/drawing/2014/main" id="{B7614F4A-7B6C-475F-BE25-A870AF17EF19}"/>
               </a:ext>
             </a:extLst>
           </p:cNvPr>
@@ -8402,7 +8522,7 @@
           <p:cNvPr id="5" name="Rectangle 4">
             <a:extLst xmlns:a="http://schemas.openxmlformats.org/drawingml/2006/main">
               <a:ext uri="{FF2B5EF4-FFF2-40B4-BE49-F238E27FC236}">
-                <a16:creationId xmlns:a16="http://schemas.microsoft.com/office/drawing/2014/main" id="{9319B507-4EAD-4454-A794-F8B094D625C8}"/>
+                <a16:creationId xmlns:a16="http://schemas.microsoft.com/office/drawing/2014/main" id="{AE2DF4D5-AAB9-49D1-8447-3F58F45A165D}"/>
               </a:ext>
             </a:extLst>
           </p:cNvPr>
@@ -8457,7 +8577,7 @@
           <p:cNvPr id="6" name="TextBox 5">
             <a:extLst xmlns:a="http://schemas.openxmlformats.org/drawingml/2006/main">
               <a:ext uri="{FF2B5EF4-FFF2-40B4-BE49-F238E27FC236}">
-                <a16:creationId xmlns:a16="http://schemas.microsoft.com/office/drawing/2014/main" id="{8F0084D1-96DD-4F55-89D1-5F0F6BEE7593}"/>
+                <a16:creationId xmlns:a16="http://schemas.microsoft.com/office/drawing/2014/main" id="{7FD09767-EF6C-4933-A540-C43111706583}"/>
               </a:ext>
             </a:extLst>
           </p:cNvPr>
@@ -8494,7 +8614,7 @@
                 <a:ea typeface="Aptos"/>
                 <a:cs typeface="Aptos"/>
               </a:rPr>
-              <a:t>Julkinen riippumaton evidenssikooste · 2026.07.26-25 · 2026-07-26 · Lähteet: Evidence Register; WIPO IP valuation</a:t>
+              <a:t>Julkinen riippumaton evidenssikooste · 2026.07.27-26 · 2026-07-27 · Lähteet: Evidence Register; WIPO IP valuation</a:t>
             </a:r>
           </a:p>
         </p:txBody>
@@ -8504,7 +8624,7 @@
           <p:cNvPr id="7" name="TextBox 6">
             <a:extLst xmlns:a="http://schemas.openxmlformats.org/drawingml/2006/main">
               <a:ext uri="{FF2B5EF4-FFF2-40B4-BE49-F238E27FC236}">
-                <a16:creationId xmlns:a16="http://schemas.microsoft.com/office/drawing/2014/main" id="{D64C118D-9718-4964-837B-81DFF55350A3}"/>
+                <a16:creationId xmlns:a16="http://schemas.microsoft.com/office/drawing/2014/main" id="{0E90B7A2-1594-4CF5-A0E0-3DD94343C7EE}"/>
               </a:ext>
             </a:extLst>
           </p:cNvPr>
@@ -8991,7 +9111,7 @@
           <p:cNvPr id="9" name="TextBox 8">
             <a:extLst xmlns:a="http://schemas.openxmlformats.org/drawingml/2006/main">
               <a:ext uri="{FF2B5EF4-FFF2-40B4-BE49-F238E27FC236}">
-                <a16:creationId xmlns:a16="http://schemas.microsoft.com/office/drawing/2014/main" id="{483E74A2-9B33-420F-893F-F9B84149480E}"/>
+                <a16:creationId xmlns:a16="http://schemas.microsoft.com/office/drawing/2014/main" id="{0141C191-D383-44A7-8524-0D7DAC8D640E}"/>
               </a:ext>
             </a:extLst>
           </p:cNvPr>
@@ -9036,7 +9156,7 @@
     </p:spTree>
     <p:extLst>
       <p:ext uri="{BB962C8B-B14F-4D97-AF65-F5344CB8AC3E}">
-        <p14:creationId xmlns:p14="http://schemas.microsoft.com/office/powerpoint/2010/main" val="1620704266"/>
+        <p14:creationId xmlns:p14="http://schemas.microsoft.com/office/powerpoint/2010/main" val="642244240"/>
       </p:ext>
     </p:extLst>
   </p:cSld>
@@ -9067,7 +9187,7 @@
           <p:cNvPr id="2" name="TextBox 1">
             <a:extLst xmlns:a="http://schemas.openxmlformats.org/drawingml/2006/main">
               <a:ext uri="{FF2B5EF4-FFF2-40B4-BE49-F238E27FC236}">
-                <a16:creationId xmlns:a16="http://schemas.microsoft.com/office/drawing/2014/main" id="{E1AE46C2-A5E9-40E0-B486-7C61B6884271}"/>
+                <a16:creationId xmlns:a16="http://schemas.microsoft.com/office/drawing/2014/main" id="{631C92D5-5009-4B6C-9723-0EB555348235}"/>
               </a:ext>
             </a:extLst>
           </p:cNvPr>
@@ -9114,7 +9234,7 @@
           <p:cNvPr id="3" name="TextBox 2">
             <a:extLst xmlns:a="http://schemas.openxmlformats.org/drawingml/2006/main">
               <a:ext uri="{FF2B5EF4-FFF2-40B4-BE49-F238E27FC236}">
-                <a16:creationId xmlns:a16="http://schemas.microsoft.com/office/drawing/2014/main" id="{EBCDA3C4-28C9-4D9A-9CA2-226CC55663D4}"/>
+                <a16:creationId xmlns:a16="http://schemas.microsoft.com/office/drawing/2014/main" id="{F1E8683A-C82E-435D-9249-42321520259B}"/>
               </a:ext>
             </a:extLst>
           </p:cNvPr>
@@ -9161,7 +9281,7 @@
           <p:cNvPr id="4" name="TextBox 3">
             <a:extLst xmlns:a="http://schemas.openxmlformats.org/drawingml/2006/main">
               <a:ext uri="{FF2B5EF4-FFF2-40B4-BE49-F238E27FC236}">
-                <a16:creationId xmlns:a16="http://schemas.microsoft.com/office/drawing/2014/main" id="{A7E46064-13EE-4639-8E7F-8181DC36350C}"/>
+                <a16:creationId xmlns:a16="http://schemas.microsoft.com/office/drawing/2014/main" id="{783707A1-FC30-4AD6-AAEE-1DC862D3A0EC}"/>
               </a:ext>
             </a:extLst>
           </p:cNvPr>
@@ -9280,7 +9400,7 @@
           <p:cNvPr id="5" name="TextBox 4">
             <a:extLst xmlns:a="http://schemas.openxmlformats.org/drawingml/2006/main">
               <a:ext uri="{FF2B5EF4-FFF2-40B4-BE49-F238E27FC236}">
-                <a16:creationId xmlns:a16="http://schemas.microsoft.com/office/drawing/2014/main" id="{EBFC3421-7183-4F60-A6B3-C777428C9C5F}"/>
+                <a16:creationId xmlns:a16="http://schemas.microsoft.com/office/drawing/2014/main" id="{8745873D-658A-4307-A2FC-918A13796350}"/>
               </a:ext>
             </a:extLst>
           </p:cNvPr>
@@ -9317,7 +9437,7 @@
                 <a:ea typeface="Aptos"/>
                 <a:cs typeface="Aptos"/>
               </a:rPr>
-              <a:t>Versio 2026.07.26-25 · 2026-07-26 · 6 / 6</a:t>
+              <a:t>Versio 2026.07.27-26 · 2026-07-27 · 6 / 6</a:t>
             </a:r>
           </a:p>
         </p:txBody>
@@ -9325,7 +9445,7 @@
     </p:spTree>
     <p:extLst>
       <p:ext uri="{BB962C8B-B14F-4D97-AF65-F5344CB8AC3E}">
-        <p14:creationId xmlns:p14="http://schemas.microsoft.com/office/powerpoint/2010/main" val="296789076"/>
+        <p14:creationId xmlns:p14="http://schemas.microsoft.com/office/powerpoint/2010/main" val="81999513"/>
       </p:ext>
     </p:extLst>
   </p:cSld>

--- a/site/downloads/pixan-bank-deck-short-fi.pptx
+++ b/site/downloads/pixan-bank-deck-short-fi.pptx
@@ -2,18 +2,18 @@
 <file path=ppt/presentation.xml><?xml version="1.0" encoding="utf-8"?>
 <p:presentation xmlns:p="http://schemas.openxmlformats.org/presentationml/2006/main">
   <p:sldMasterIdLst>
-    <p:sldMasterId xmlns:r="http://schemas.openxmlformats.org/officeDocument/2006/relationships" id="2147483648" r:id="R2ee08852562d475e"/>
+    <p:sldMasterId xmlns:r="http://schemas.openxmlformats.org/officeDocument/2006/relationships" id="2147483648" r:id="Rc363464989e940f6"/>
   </p:sldMasterIdLst>
   <p:notesMasterIdLst>
-    <p:notesMasterId xmlns:r="http://schemas.openxmlformats.org/officeDocument/2006/relationships" r:id="Rdc9201e913f246c6"/>
+    <p:notesMasterId xmlns:r="http://schemas.openxmlformats.org/officeDocument/2006/relationships" r:id="R6094310950444930"/>
   </p:notesMasterIdLst>
   <p:sldIdLst>
-    <p:sldId xmlns:r="http://schemas.openxmlformats.org/officeDocument/2006/relationships" id="256" r:id="R293d03ef4b0f4973"/>
-    <p:sldId xmlns:r="http://schemas.openxmlformats.org/officeDocument/2006/relationships" id="257" r:id="R7a2f45990af2488b"/>
-    <p:sldId xmlns:r="http://schemas.openxmlformats.org/officeDocument/2006/relationships" id="258" r:id="R443cdc8c21fe443c"/>
-    <p:sldId xmlns:r="http://schemas.openxmlformats.org/officeDocument/2006/relationships" id="259" r:id="R844286f1b812412f"/>
-    <p:sldId xmlns:r="http://schemas.openxmlformats.org/officeDocument/2006/relationships" id="260" r:id="R3489404a11d9463b"/>
-    <p:sldId xmlns:r="http://schemas.openxmlformats.org/officeDocument/2006/relationships" id="261" r:id="Rbd5a23c862bf44f4"/>
+    <p:sldId xmlns:r="http://schemas.openxmlformats.org/officeDocument/2006/relationships" id="256" r:id="Rfc1f489d44be436e"/>
+    <p:sldId xmlns:r="http://schemas.openxmlformats.org/officeDocument/2006/relationships" id="257" r:id="R83313cb0c2ee495e"/>
+    <p:sldId xmlns:r="http://schemas.openxmlformats.org/officeDocument/2006/relationships" id="258" r:id="Rcbdf8a1cc7114815"/>
+    <p:sldId xmlns:r="http://schemas.openxmlformats.org/officeDocument/2006/relationships" id="259" r:id="R78d69192ab6b4ded"/>
+    <p:sldId xmlns:r="http://schemas.openxmlformats.org/officeDocument/2006/relationships" id="260" r:id="Rd7dbbbb7c60d4969"/>
+    <p:sldId xmlns:r="http://schemas.openxmlformats.org/officeDocument/2006/relationships" id="261" r:id="R561dea0d95fc44d3"/>
   </p:sldIdLst>
   <p:sldSz cx="12191999" cy="6858000"/>
   <p:notesSz cx="6858000" cy="9144000"/>
@@ -540,6 +540,26 @@
           </a:p>
           <a:p xmlns:a="http://schemas.openxmlformats.org/drawingml/2006/main">
             <a:r>
+              <a:t>- https://datahelpdesk.worldbank.org/knowledgebase/articles/898581-api-basic-call-structures</a:t>
+            </a:r>
+          </a:p>
+          <a:p xmlns:a="http://schemas.openxmlformats.org/drawingml/2006/main">
+            <a:r>
+              <a:t>- https://www.who.int/data/gho/info/gho-odata-api</a:t>
+            </a:r>
+          </a:p>
+          <a:p xmlns:a="http://schemas.openxmlformats.org/drawingml/2006/main">
+            <a:r>
+              <a:t>- https://uncomtrade.org/docs/un-comtrade-api/</a:t>
+            </a:r>
+          </a:p>
+          <a:p xmlns:a="http://schemas.openxmlformats.org/drawingml/2006/main">
+            <a:r>
+              <a:t>- https://www.podatki.gov.pl/akcyza/stawki-podatkowe/</a:t>
+            </a:r>
+          </a:p>
+          <a:p xmlns:a="http://schemas.openxmlformats.org/drawingml/2006/main">
+            <a:r>
               <a:t>- https://www.gov.pl/web/chemical/notification-of-electronic-cigarettes-and-refill-containers</a:t>
             </a:r>
           </a:p>
@@ -760,6 +780,26 @@
           </a:p>
           <a:p xmlns:a="http://schemas.openxmlformats.org/drawingml/2006/main">
             <a:r>
+              <a:t>- https://datahelpdesk.worldbank.org/knowledgebase/articles/898581-api-basic-call-structures</a:t>
+            </a:r>
+          </a:p>
+          <a:p xmlns:a="http://schemas.openxmlformats.org/drawingml/2006/main">
+            <a:r>
+              <a:t>- https://www.who.int/data/gho/info/gho-odata-api</a:t>
+            </a:r>
+          </a:p>
+          <a:p xmlns:a="http://schemas.openxmlformats.org/drawingml/2006/main">
+            <a:r>
+              <a:t>- https://uncomtrade.org/docs/un-comtrade-api/</a:t>
+            </a:r>
+          </a:p>
+          <a:p xmlns:a="http://schemas.openxmlformats.org/drawingml/2006/main">
+            <a:r>
+              <a:t>- https://www.podatki.gov.pl/akcyza/stawki-podatkowe/</a:t>
+            </a:r>
+          </a:p>
+          <a:p xmlns:a="http://schemas.openxmlformats.org/drawingml/2006/main">
+            <a:r>
               <a:t>- https://www.gov.pl/web/chemical/notification-of-electronic-cigarettes-and-refill-containers</a:t>
             </a:r>
           </a:p>
@@ -980,6 +1020,26 @@
           </a:p>
           <a:p xmlns:a="http://schemas.openxmlformats.org/drawingml/2006/main">
             <a:r>
+              <a:t>- https://datahelpdesk.worldbank.org/knowledgebase/articles/898581-api-basic-call-structures</a:t>
+            </a:r>
+          </a:p>
+          <a:p xmlns:a="http://schemas.openxmlformats.org/drawingml/2006/main">
+            <a:r>
+              <a:t>- https://www.who.int/data/gho/info/gho-odata-api</a:t>
+            </a:r>
+          </a:p>
+          <a:p xmlns:a="http://schemas.openxmlformats.org/drawingml/2006/main">
+            <a:r>
+              <a:t>- https://uncomtrade.org/docs/un-comtrade-api/</a:t>
+            </a:r>
+          </a:p>
+          <a:p xmlns:a="http://schemas.openxmlformats.org/drawingml/2006/main">
+            <a:r>
+              <a:t>- https://www.podatki.gov.pl/akcyza/stawki-podatkowe/</a:t>
+            </a:r>
+          </a:p>
+          <a:p xmlns:a="http://schemas.openxmlformats.org/drawingml/2006/main">
+            <a:r>
               <a:t>- https://www.gov.pl/web/chemical/notification-of-electronic-cigarettes-and-refill-containers</a:t>
             </a:r>
           </a:p>
@@ -1200,6 +1260,26 @@
           </a:p>
           <a:p xmlns:a="http://schemas.openxmlformats.org/drawingml/2006/main">
             <a:r>
+              <a:t>- https://datahelpdesk.worldbank.org/knowledgebase/articles/898581-api-basic-call-structures</a:t>
+            </a:r>
+          </a:p>
+          <a:p xmlns:a="http://schemas.openxmlformats.org/drawingml/2006/main">
+            <a:r>
+              <a:t>- https://www.who.int/data/gho/info/gho-odata-api</a:t>
+            </a:r>
+          </a:p>
+          <a:p xmlns:a="http://schemas.openxmlformats.org/drawingml/2006/main">
+            <a:r>
+              <a:t>- https://uncomtrade.org/docs/un-comtrade-api/</a:t>
+            </a:r>
+          </a:p>
+          <a:p xmlns:a="http://schemas.openxmlformats.org/drawingml/2006/main">
+            <a:r>
+              <a:t>- https://www.podatki.gov.pl/akcyza/stawki-podatkowe/</a:t>
+            </a:r>
+          </a:p>
+          <a:p xmlns:a="http://schemas.openxmlformats.org/drawingml/2006/main">
+            <a:r>
               <a:t>- https://www.gov.pl/web/chemical/notification-of-electronic-cigarettes-and-refill-containers</a:t>
             </a:r>
           </a:p>
@@ -1420,6 +1500,26 @@
           </a:p>
           <a:p xmlns:a="http://schemas.openxmlformats.org/drawingml/2006/main">
             <a:r>
+              <a:t>- https://datahelpdesk.worldbank.org/knowledgebase/articles/898581-api-basic-call-structures</a:t>
+            </a:r>
+          </a:p>
+          <a:p xmlns:a="http://schemas.openxmlformats.org/drawingml/2006/main">
+            <a:r>
+              <a:t>- https://www.who.int/data/gho/info/gho-odata-api</a:t>
+            </a:r>
+          </a:p>
+          <a:p xmlns:a="http://schemas.openxmlformats.org/drawingml/2006/main">
+            <a:r>
+              <a:t>- https://uncomtrade.org/docs/un-comtrade-api/</a:t>
+            </a:r>
+          </a:p>
+          <a:p xmlns:a="http://schemas.openxmlformats.org/drawingml/2006/main">
+            <a:r>
+              <a:t>- https://www.podatki.gov.pl/akcyza/stawki-podatkowe/</a:t>
+            </a:r>
+          </a:p>
+          <a:p xmlns:a="http://schemas.openxmlformats.org/drawingml/2006/main">
+            <a:r>
               <a:t>- https://www.gov.pl/web/chemical/notification-of-electronic-cigarettes-and-refill-containers</a:t>
             </a:r>
           </a:p>
@@ -1640,6 +1740,26 @@
           </a:p>
           <a:p xmlns:a="http://schemas.openxmlformats.org/drawingml/2006/main">
             <a:r>
+              <a:t>- https://datahelpdesk.worldbank.org/knowledgebase/articles/898581-api-basic-call-structures</a:t>
+            </a:r>
+          </a:p>
+          <a:p xmlns:a="http://schemas.openxmlformats.org/drawingml/2006/main">
+            <a:r>
+              <a:t>- https://www.who.int/data/gho/info/gho-odata-api</a:t>
+            </a:r>
+          </a:p>
+          <a:p xmlns:a="http://schemas.openxmlformats.org/drawingml/2006/main">
+            <a:r>
+              <a:t>- https://uncomtrade.org/docs/un-comtrade-api/</a:t>
+            </a:r>
+          </a:p>
+          <a:p xmlns:a="http://schemas.openxmlformats.org/drawingml/2006/main">
+            <a:r>
+              <a:t>- https://www.podatki.gov.pl/akcyza/stawki-podatkowe/</a:t>
+            </a:r>
+          </a:p>
+          <a:p xmlns:a="http://schemas.openxmlformats.org/drawingml/2006/main">
+            <a:r>
               <a:t>- https://www.gov.pl/web/chemical/notification-of-electronic-cigarettes-and-refill-containers</a:t>
             </a:r>
           </a:p>
@@ -1767,7 +1887,7 @@
           <p:cNvPr id="2" name="Title 1">
             <a:extLst xmlns:a="http://schemas.openxmlformats.org/drawingml/2006/main">
               <a:ext uri="{FF2B5EF4-FFF2-40B4-BE49-F238E27FC236}">
-                <a16:creationId xmlns:a16="http://schemas.microsoft.com/office/drawing/2014/main" id="{B5FBE1A5-01F9-42FB-9054-3F9474062165}"/>
+                <a16:creationId xmlns:a16="http://schemas.microsoft.com/office/drawing/2014/main" id="{C9120D67-3647-47F4-82C3-75320F83E413}"/>
               </a:ext>
             </a:extLst>
           </p:cNvPr>
@@ -1799,7 +1919,7 @@
           <p:cNvPr id="3" name="Subtitle 2">
             <a:extLst xmlns:a="http://schemas.openxmlformats.org/drawingml/2006/main">
               <a:ext uri="{FF2B5EF4-FFF2-40B4-BE49-F238E27FC236}">
-                <a16:creationId xmlns:a16="http://schemas.microsoft.com/office/drawing/2014/main" id="{6719EEDD-0E40-47DD-85C9-5C64BBCF387E}"/>
+                <a16:creationId xmlns:a16="http://schemas.microsoft.com/office/drawing/2014/main" id="{FF954918-ABC6-49DC-81DF-0019E5352AD0}"/>
               </a:ext>
             </a:extLst>
           </p:cNvPr>
@@ -1922,7 +2042,7 @@
           <p:cNvPr id="4" name="Date Placeholder 3">
             <a:extLst xmlns:a="http://schemas.openxmlformats.org/drawingml/2006/main">
               <a:ext uri="{FF2B5EF4-FFF2-40B4-BE49-F238E27FC236}">
-                <a16:creationId xmlns:a16="http://schemas.microsoft.com/office/drawing/2014/main" id="{34233F86-F5D1-446A-92C9-55F6E1B233B2}"/>
+                <a16:creationId xmlns:a16="http://schemas.microsoft.com/office/drawing/2014/main" id="{AD061B5F-868D-445E-9D90-CE7F4942C2B5}"/>
               </a:ext>
             </a:extLst>
           </p:cNvPr>
@@ -1949,7 +2069,7 @@
           <p:cNvPr id="5" name="Footer Placeholder 4">
             <a:extLst xmlns:a="http://schemas.openxmlformats.org/drawingml/2006/main">
               <a:ext uri="{FF2B5EF4-FFF2-40B4-BE49-F238E27FC236}">
-                <a16:creationId xmlns:a16="http://schemas.microsoft.com/office/drawing/2014/main" id="{E03D4533-ECCE-421B-9C95-AB2754D5C714}"/>
+                <a16:creationId xmlns:a16="http://schemas.microsoft.com/office/drawing/2014/main" id="{55542651-11B7-4DCA-A973-F9DC323AF118}"/>
               </a:ext>
             </a:extLst>
           </p:cNvPr>
@@ -1972,7 +2092,7 @@
           <p:cNvPr id="6" name="Slide Number Placeholder 5">
             <a:extLst xmlns:a="http://schemas.openxmlformats.org/drawingml/2006/main">
               <a:ext uri="{FF2B5EF4-FFF2-40B4-BE49-F238E27FC236}">
-                <a16:creationId xmlns:a16="http://schemas.microsoft.com/office/drawing/2014/main" id="{E413FEBC-DCF5-4C25-9E38-60500D0CCCA6}"/>
+                <a16:creationId xmlns:a16="http://schemas.microsoft.com/office/drawing/2014/main" id="{CF196A42-9945-4BEA-97AA-1AE10075302B}"/>
               </a:ext>
             </a:extLst>
           </p:cNvPr>
@@ -2016,7 +2136,7 @@
           <p:cNvPr id="2" name="Title 1">
             <a:extLst xmlns:a="http://schemas.openxmlformats.org/drawingml/2006/main">
               <a:ext uri="{FF2B5EF4-FFF2-40B4-BE49-F238E27FC236}">
-                <a16:creationId xmlns:a16="http://schemas.microsoft.com/office/drawing/2014/main" id="{D06AA750-F80B-4A58-A584-054929068BB1}"/>
+                <a16:creationId xmlns:a16="http://schemas.microsoft.com/office/drawing/2014/main" id="{910D8FAD-EEC1-45A1-A720-C73DD47C4C24}"/>
               </a:ext>
             </a:extLst>
           </p:cNvPr>
@@ -2043,7 +2163,7 @@
           <p:cNvPr id="3" name="Vertical Text Placeholder 2">
             <a:extLst xmlns:a="http://schemas.openxmlformats.org/drawingml/2006/main">
               <a:ext uri="{FF2B5EF4-FFF2-40B4-BE49-F238E27FC236}">
-                <a16:creationId xmlns:a16="http://schemas.microsoft.com/office/drawing/2014/main" id="{F5F4CD04-F447-4182-AF69-5C76296C5765}"/>
+                <a16:creationId xmlns:a16="http://schemas.microsoft.com/office/drawing/2014/main" id="{7A741FAA-3599-44AA-A3D9-12CDA7C5CD22}"/>
               </a:ext>
             </a:extLst>
           </p:cNvPr>
@@ -2105,7 +2225,7 @@
           <p:cNvPr id="4" name="Date Placeholder 3">
             <a:extLst xmlns:a="http://schemas.openxmlformats.org/drawingml/2006/main">
               <a:ext uri="{FF2B5EF4-FFF2-40B4-BE49-F238E27FC236}">
-                <a16:creationId xmlns:a16="http://schemas.microsoft.com/office/drawing/2014/main" id="{AE577D3E-2B3C-4104-8375-2C8EC6413FC8}"/>
+                <a16:creationId xmlns:a16="http://schemas.microsoft.com/office/drawing/2014/main" id="{98FD35E8-FB3C-4838-B745-19BF833B05E9}"/>
               </a:ext>
             </a:extLst>
           </p:cNvPr>
@@ -2132,7 +2252,7 @@
           <p:cNvPr id="5" name="Footer Placeholder 4">
             <a:extLst xmlns:a="http://schemas.openxmlformats.org/drawingml/2006/main">
               <a:ext uri="{FF2B5EF4-FFF2-40B4-BE49-F238E27FC236}">
-                <a16:creationId xmlns:a16="http://schemas.microsoft.com/office/drawing/2014/main" id="{90616091-BEA7-4002-8CC8-145D7959DFC5}"/>
+                <a16:creationId xmlns:a16="http://schemas.microsoft.com/office/drawing/2014/main" id="{E925C1F0-B71B-4EE3-84AC-2E8A984F2985}"/>
               </a:ext>
             </a:extLst>
           </p:cNvPr>
@@ -2155,7 +2275,7 @@
           <p:cNvPr id="6" name="Slide Number Placeholder 5">
             <a:extLst xmlns:a="http://schemas.openxmlformats.org/drawingml/2006/main">
               <a:ext uri="{FF2B5EF4-FFF2-40B4-BE49-F238E27FC236}">
-                <a16:creationId xmlns:a16="http://schemas.microsoft.com/office/drawing/2014/main" id="{0867CF3A-9ECF-43F1-A498-6BF357457BB4}"/>
+                <a16:creationId xmlns:a16="http://schemas.microsoft.com/office/drawing/2014/main" id="{8D833ABF-8CB2-46BD-B65D-46DF36ACEB5D}"/>
               </a:ext>
             </a:extLst>
           </p:cNvPr>
@@ -2199,7 +2319,7 @@
           <p:cNvPr id="2" name="Vertical Title 1">
             <a:extLst xmlns:a="http://schemas.openxmlformats.org/drawingml/2006/main">
               <a:ext uri="{FF2B5EF4-FFF2-40B4-BE49-F238E27FC236}">
-                <a16:creationId xmlns:a16="http://schemas.microsoft.com/office/drawing/2014/main" id="{CE31897C-1E4A-4A5D-8D57-1B3DF947847B}"/>
+                <a16:creationId xmlns:a16="http://schemas.microsoft.com/office/drawing/2014/main" id="{543ABB0A-3D9B-4A1E-BAA3-C8657D10A979}"/>
               </a:ext>
             </a:extLst>
           </p:cNvPr>
@@ -2231,7 +2351,7 @@
           <p:cNvPr id="3" name="Vertical Text Placeholder 2">
             <a:extLst xmlns:a="http://schemas.openxmlformats.org/drawingml/2006/main">
               <a:ext uri="{FF2B5EF4-FFF2-40B4-BE49-F238E27FC236}">
-                <a16:creationId xmlns:a16="http://schemas.microsoft.com/office/drawing/2014/main" id="{20B6085C-3853-4D41-B830-FF71143C5B0B}"/>
+                <a16:creationId xmlns:a16="http://schemas.microsoft.com/office/drawing/2014/main" id="{733FAABB-9627-41E4-B662-29870E8A44EF}"/>
               </a:ext>
             </a:extLst>
           </p:cNvPr>
@@ -2298,7 +2418,7 @@
           <p:cNvPr id="4" name="Date Placeholder 3">
             <a:extLst xmlns:a="http://schemas.openxmlformats.org/drawingml/2006/main">
               <a:ext uri="{FF2B5EF4-FFF2-40B4-BE49-F238E27FC236}">
-                <a16:creationId xmlns:a16="http://schemas.microsoft.com/office/drawing/2014/main" id="{F224CE84-22B6-419C-B2FB-EF47A6792BFD}"/>
+                <a16:creationId xmlns:a16="http://schemas.microsoft.com/office/drawing/2014/main" id="{2056F306-6D22-4B4F-8F6B-F6E669A61370}"/>
               </a:ext>
             </a:extLst>
           </p:cNvPr>
@@ -2325,7 +2445,7 @@
           <p:cNvPr id="5" name="Footer Placeholder 4">
             <a:extLst xmlns:a="http://schemas.openxmlformats.org/drawingml/2006/main">
               <a:ext uri="{FF2B5EF4-FFF2-40B4-BE49-F238E27FC236}">
-                <a16:creationId xmlns:a16="http://schemas.microsoft.com/office/drawing/2014/main" id="{0244D28B-7F9E-419C-A03F-58F30EF32398}"/>
+                <a16:creationId xmlns:a16="http://schemas.microsoft.com/office/drawing/2014/main" id="{DA4FB706-D1D4-40C2-9154-83897FB4F011}"/>
               </a:ext>
             </a:extLst>
           </p:cNvPr>
@@ -2348,7 +2468,7 @@
           <p:cNvPr id="6" name="Slide Number Placeholder 5">
             <a:extLst xmlns:a="http://schemas.openxmlformats.org/drawingml/2006/main">
               <a:ext uri="{FF2B5EF4-FFF2-40B4-BE49-F238E27FC236}">
-                <a16:creationId xmlns:a16="http://schemas.microsoft.com/office/drawing/2014/main" id="{AC672792-90F9-46BF-9A23-760A27747E73}"/>
+                <a16:creationId xmlns:a16="http://schemas.microsoft.com/office/drawing/2014/main" id="{E4C74A1D-2895-4E69-B095-B40B5E20657C}"/>
               </a:ext>
             </a:extLst>
           </p:cNvPr>
@@ -2392,7 +2512,7 @@
           <p:cNvPr id="2" name="Title 1">
             <a:extLst xmlns:a="http://schemas.openxmlformats.org/drawingml/2006/main">
               <a:ext uri="{FF2B5EF4-FFF2-40B4-BE49-F238E27FC236}">
-                <a16:creationId xmlns:a16="http://schemas.microsoft.com/office/drawing/2014/main" id="{A61554F2-F665-4E2E-A474-169158918625}"/>
+                <a16:creationId xmlns:a16="http://schemas.microsoft.com/office/drawing/2014/main" id="{CFED2343-88D7-43E1-AD54-3A4567EB79D1}"/>
               </a:ext>
             </a:extLst>
           </p:cNvPr>
@@ -2419,7 +2539,7 @@
           <p:cNvPr id="3" name="Content Placeholder 2">
             <a:extLst xmlns:a="http://schemas.openxmlformats.org/drawingml/2006/main">
               <a:ext uri="{FF2B5EF4-FFF2-40B4-BE49-F238E27FC236}">
-                <a16:creationId xmlns:a16="http://schemas.microsoft.com/office/drawing/2014/main" id="{500E1AFD-3149-4CCC-825A-AFCC14488719}"/>
+                <a16:creationId xmlns:a16="http://schemas.microsoft.com/office/drawing/2014/main" id="{EF77A7F0-5956-4720-B116-253686EB0255}"/>
               </a:ext>
             </a:extLst>
           </p:cNvPr>
@@ -2481,7 +2601,7 @@
           <p:cNvPr id="4" name="Date Placeholder 3">
             <a:extLst xmlns:a="http://schemas.openxmlformats.org/drawingml/2006/main">
               <a:ext uri="{FF2B5EF4-FFF2-40B4-BE49-F238E27FC236}">
-                <a16:creationId xmlns:a16="http://schemas.microsoft.com/office/drawing/2014/main" id="{0CE18F6F-734F-48ED-B99B-E0CADF212AD5}"/>
+                <a16:creationId xmlns:a16="http://schemas.microsoft.com/office/drawing/2014/main" id="{0EB64D5F-06FC-4C6F-B008-7A1B7F3A491E}"/>
               </a:ext>
             </a:extLst>
           </p:cNvPr>
@@ -2508,7 +2628,7 @@
           <p:cNvPr id="5" name="Footer Placeholder 4">
             <a:extLst xmlns:a="http://schemas.openxmlformats.org/drawingml/2006/main">
               <a:ext uri="{FF2B5EF4-FFF2-40B4-BE49-F238E27FC236}">
-                <a16:creationId xmlns:a16="http://schemas.microsoft.com/office/drawing/2014/main" id="{087A22DC-D09B-4924-9FF5-ABA4816F6E5F}"/>
+                <a16:creationId xmlns:a16="http://schemas.microsoft.com/office/drawing/2014/main" id="{061FEC12-572D-4688-A200-96E65237596F}"/>
               </a:ext>
             </a:extLst>
           </p:cNvPr>
@@ -2531,7 +2651,7 @@
           <p:cNvPr id="6" name="Slide Number Placeholder 5">
             <a:extLst xmlns:a="http://schemas.openxmlformats.org/drawingml/2006/main">
               <a:ext uri="{FF2B5EF4-FFF2-40B4-BE49-F238E27FC236}">
-                <a16:creationId xmlns:a16="http://schemas.microsoft.com/office/drawing/2014/main" id="{AA2619C2-C467-4939-ABAC-87234229C2D8}"/>
+                <a16:creationId xmlns:a16="http://schemas.microsoft.com/office/drawing/2014/main" id="{28B4C4C8-EDF1-4B31-95F9-DB98B5723F51}"/>
               </a:ext>
             </a:extLst>
           </p:cNvPr>
@@ -2575,7 +2695,7 @@
           <p:cNvPr id="2" name="Title 1">
             <a:extLst xmlns:a="http://schemas.openxmlformats.org/drawingml/2006/main">
               <a:ext uri="{FF2B5EF4-FFF2-40B4-BE49-F238E27FC236}">
-                <a16:creationId xmlns:a16="http://schemas.microsoft.com/office/drawing/2014/main" id="{CC80C857-C29B-4BAE-8240-8B5198D98F08}"/>
+                <a16:creationId xmlns:a16="http://schemas.microsoft.com/office/drawing/2014/main" id="{E7BBA335-5E29-4071-847D-BCD029D53765}"/>
               </a:ext>
             </a:extLst>
           </p:cNvPr>
@@ -2612,7 +2732,7 @@
           <p:cNvPr id="3" name="Text Placeholder 2">
             <a:extLst xmlns:a="http://schemas.openxmlformats.org/drawingml/2006/main">
               <a:ext uri="{FF2B5EF4-FFF2-40B4-BE49-F238E27FC236}">
-                <a16:creationId xmlns:a16="http://schemas.microsoft.com/office/drawing/2014/main" id="{560A2DE8-4809-4702-AC8D-C561CDC785D9}"/>
+                <a16:creationId xmlns:a16="http://schemas.microsoft.com/office/drawing/2014/main" id="{33918F84-27EE-4148-A2DD-1CC509325E50}"/>
               </a:ext>
             </a:extLst>
           </p:cNvPr>
@@ -2738,7 +2858,7 @@
           <p:cNvPr id="4" name="Date Placeholder 3">
             <a:extLst xmlns:a="http://schemas.openxmlformats.org/drawingml/2006/main">
               <a:ext uri="{FF2B5EF4-FFF2-40B4-BE49-F238E27FC236}">
-                <a16:creationId xmlns:a16="http://schemas.microsoft.com/office/drawing/2014/main" id="{9346FA6D-115D-4ABE-9999-BC0D51AF3272}"/>
+                <a16:creationId xmlns:a16="http://schemas.microsoft.com/office/drawing/2014/main" id="{FA9DBC96-F099-452A-ACD4-B14E6D5CE59A}"/>
               </a:ext>
             </a:extLst>
           </p:cNvPr>
@@ -2765,7 +2885,7 @@
           <p:cNvPr id="5" name="Footer Placeholder 4">
             <a:extLst xmlns:a="http://schemas.openxmlformats.org/drawingml/2006/main">
               <a:ext uri="{FF2B5EF4-FFF2-40B4-BE49-F238E27FC236}">
-                <a16:creationId xmlns:a16="http://schemas.microsoft.com/office/drawing/2014/main" id="{CA756AB8-397F-404F-8308-5A06DDA1D7C6}"/>
+                <a16:creationId xmlns:a16="http://schemas.microsoft.com/office/drawing/2014/main" id="{85FA3579-76DF-48DB-A64E-4DDCF8F7050B}"/>
               </a:ext>
             </a:extLst>
           </p:cNvPr>
@@ -2788,7 +2908,7 @@
           <p:cNvPr id="6" name="Slide Number Placeholder 5">
             <a:extLst xmlns:a="http://schemas.openxmlformats.org/drawingml/2006/main">
               <a:ext uri="{FF2B5EF4-FFF2-40B4-BE49-F238E27FC236}">
-                <a16:creationId xmlns:a16="http://schemas.microsoft.com/office/drawing/2014/main" id="{D8E20D85-F700-4B8D-8815-3AB71E91D591}"/>
+                <a16:creationId xmlns:a16="http://schemas.microsoft.com/office/drawing/2014/main" id="{31A8A9B6-A275-443B-A749-477A0C03BC11}"/>
               </a:ext>
             </a:extLst>
           </p:cNvPr>
@@ -2832,7 +2952,7 @@
           <p:cNvPr id="2" name="Title 1">
             <a:extLst xmlns:a="http://schemas.openxmlformats.org/drawingml/2006/main">
               <a:ext uri="{FF2B5EF4-FFF2-40B4-BE49-F238E27FC236}">
-                <a16:creationId xmlns:a16="http://schemas.microsoft.com/office/drawing/2014/main" id="{8D577763-4D04-418A-9D51-54B8D875738E}"/>
+                <a16:creationId xmlns:a16="http://schemas.microsoft.com/office/drawing/2014/main" id="{D272524F-32A7-4A2C-92B6-99432168C1DF}"/>
               </a:ext>
             </a:extLst>
           </p:cNvPr>
@@ -2859,7 +2979,7 @@
           <p:cNvPr id="3" name="Content Placeholder 2">
             <a:extLst xmlns:a="http://schemas.openxmlformats.org/drawingml/2006/main">
               <a:ext uri="{FF2B5EF4-FFF2-40B4-BE49-F238E27FC236}">
-                <a16:creationId xmlns:a16="http://schemas.microsoft.com/office/drawing/2014/main" id="{9AE183A7-AC25-451B-B9C3-297DA1103C9E}"/>
+                <a16:creationId xmlns:a16="http://schemas.microsoft.com/office/drawing/2014/main" id="{296EBE94-DC39-4272-BCE5-05FDE8FDA72B}"/>
               </a:ext>
             </a:extLst>
           </p:cNvPr>
@@ -2963,7 +3083,7 @@
           <p:cNvPr id="4" name="Content Placeholder 3">
             <a:extLst xmlns:a="http://schemas.openxmlformats.org/drawingml/2006/main">
               <a:ext uri="{FF2B5EF4-FFF2-40B4-BE49-F238E27FC236}">
-                <a16:creationId xmlns:a16="http://schemas.microsoft.com/office/drawing/2014/main" id="{B014CBE3-A609-4F77-A438-F1E5BFB5FDFB}"/>
+                <a16:creationId xmlns:a16="http://schemas.microsoft.com/office/drawing/2014/main" id="{62C01C0F-0731-45CD-973A-2AAF22E86F91}"/>
               </a:ext>
             </a:extLst>
           </p:cNvPr>
@@ -3067,7 +3187,7 @@
           <p:cNvPr id="5" name="Date Placeholder 4">
             <a:extLst xmlns:a="http://schemas.openxmlformats.org/drawingml/2006/main">
               <a:ext uri="{FF2B5EF4-FFF2-40B4-BE49-F238E27FC236}">
-                <a16:creationId xmlns:a16="http://schemas.microsoft.com/office/drawing/2014/main" id="{8F385371-870A-4D96-BB9B-B86FBB080C24}"/>
+                <a16:creationId xmlns:a16="http://schemas.microsoft.com/office/drawing/2014/main" id="{85A19168-64E0-49EE-AE6B-8B76A871F102}"/>
               </a:ext>
             </a:extLst>
           </p:cNvPr>
@@ -3094,7 +3214,7 @@
           <p:cNvPr id="6" name="Footer Placeholder 5">
             <a:extLst xmlns:a="http://schemas.openxmlformats.org/drawingml/2006/main">
               <a:ext uri="{FF2B5EF4-FFF2-40B4-BE49-F238E27FC236}">
-                <a16:creationId xmlns:a16="http://schemas.microsoft.com/office/drawing/2014/main" id="{4CD7132A-AF70-4609-96C8-E2F1252871DA}"/>
+                <a16:creationId xmlns:a16="http://schemas.microsoft.com/office/drawing/2014/main" id="{9F3CE754-D5E4-4135-87F2-117CDD644BE4}"/>
               </a:ext>
             </a:extLst>
           </p:cNvPr>
@@ -3117,7 +3237,7 @@
           <p:cNvPr id="7" name="Slide Number Placeholder 6">
             <a:extLst xmlns:a="http://schemas.openxmlformats.org/drawingml/2006/main">
               <a:ext uri="{FF2B5EF4-FFF2-40B4-BE49-F238E27FC236}">
-                <a16:creationId xmlns:a16="http://schemas.microsoft.com/office/drawing/2014/main" id="{3124996E-D230-468F-995F-4E037FF4F4A9}"/>
+                <a16:creationId xmlns:a16="http://schemas.microsoft.com/office/drawing/2014/main" id="{9DEBF943-9A90-489A-8B19-BEFB537DB0C9}"/>
               </a:ext>
             </a:extLst>
           </p:cNvPr>
@@ -3161,7 +3281,7 @@
           <p:cNvPr id="2" name="Title 1">
             <a:extLst xmlns:a="http://schemas.openxmlformats.org/drawingml/2006/main">
               <a:ext uri="{FF2B5EF4-FFF2-40B4-BE49-F238E27FC236}">
-                <a16:creationId xmlns:a16="http://schemas.microsoft.com/office/drawing/2014/main" id="{CF47788D-DF45-427E-9796-FFB898B8CA54}"/>
+                <a16:creationId xmlns:a16="http://schemas.microsoft.com/office/drawing/2014/main" id="{8D6B05C3-F9F6-4B63-A305-E4B617AFEC90}"/>
               </a:ext>
             </a:extLst>
           </p:cNvPr>
@@ -3193,7 +3313,7 @@
           <p:cNvPr id="3" name="Text Placeholder 2">
             <a:extLst xmlns:a="http://schemas.openxmlformats.org/drawingml/2006/main">
               <a:ext uri="{FF2B5EF4-FFF2-40B4-BE49-F238E27FC236}">
-                <a16:creationId xmlns:a16="http://schemas.microsoft.com/office/drawing/2014/main" id="{72B2D757-749E-435C-AEBE-9A1DD525C02C}"/>
+                <a16:creationId xmlns:a16="http://schemas.microsoft.com/office/drawing/2014/main" id="{92D4BA99-C42D-4AA4-9406-4BF13892B97D}"/>
               </a:ext>
             </a:extLst>
           </p:cNvPr>
@@ -3265,7 +3385,7 @@
           <p:cNvPr id="4" name="Content Placeholder 3">
             <a:extLst xmlns:a="http://schemas.openxmlformats.org/drawingml/2006/main">
               <a:ext uri="{FF2B5EF4-FFF2-40B4-BE49-F238E27FC236}">
-                <a16:creationId xmlns:a16="http://schemas.microsoft.com/office/drawing/2014/main" id="{88358095-3D67-4BF1-A236-CDCE43A7DE23}"/>
+                <a16:creationId xmlns:a16="http://schemas.microsoft.com/office/drawing/2014/main" id="{C11A64D4-517C-4A5C-AB06-A377F31B9269}"/>
               </a:ext>
             </a:extLst>
           </p:cNvPr>
@@ -3369,7 +3489,7 @@
           <p:cNvPr id="5" name="Text Placeholder 4">
             <a:extLst xmlns:a="http://schemas.openxmlformats.org/drawingml/2006/main">
               <a:ext uri="{FF2B5EF4-FFF2-40B4-BE49-F238E27FC236}">
-                <a16:creationId xmlns:a16="http://schemas.microsoft.com/office/drawing/2014/main" id="{450A7C63-52C7-407D-907C-DA5EFD80BDA0}"/>
+                <a16:creationId xmlns:a16="http://schemas.microsoft.com/office/drawing/2014/main" id="{74D1E886-8430-456C-8B1E-5EC97A0B1F88}"/>
               </a:ext>
             </a:extLst>
           </p:cNvPr>
@@ -3441,7 +3561,7 @@
           <p:cNvPr id="6" name="Content Placeholder 5">
             <a:extLst xmlns:a="http://schemas.openxmlformats.org/drawingml/2006/main">
               <a:ext uri="{FF2B5EF4-FFF2-40B4-BE49-F238E27FC236}">
-                <a16:creationId xmlns:a16="http://schemas.microsoft.com/office/drawing/2014/main" id="{8664B3CC-53D3-4140-9280-1FADF99C937B}"/>
+                <a16:creationId xmlns:a16="http://schemas.microsoft.com/office/drawing/2014/main" id="{A3AD2823-A126-437D-9EB3-A72ECF044287}"/>
               </a:ext>
             </a:extLst>
           </p:cNvPr>
@@ -3545,7 +3665,7 @@
           <p:cNvPr id="7" name="Date Placeholder 6">
             <a:extLst xmlns:a="http://schemas.openxmlformats.org/drawingml/2006/main">
               <a:ext uri="{FF2B5EF4-FFF2-40B4-BE49-F238E27FC236}">
-                <a16:creationId xmlns:a16="http://schemas.microsoft.com/office/drawing/2014/main" id="{4C29595B-0C3A-47E0-A412-CE483C3A473F}"/>
+                <a16:creationId xmlns:a16="http://schemas.microsoft.com/office/drawing/2014/main" id="{5EED74A5-D387-48CD-8683-7E2482CEDC01}"/>
               </a:ext>
             </a:extLst>
           </p:cNvPr>
@@ -3572,7 +3692,7 @@
           <p:cNvPr id="8" name="Footer Placeholder 7">
             <a:extLst xmlns:a="http://schemas.openxmlformats.org/drawingml/2006/main">
               <a:ext uri="{FF2B5EF4-FFF2-40B4-BE49-F238E27FC236}">
-                <a16:creationId xmlns:a16="http://schemas.microsoft.com/office/drawing/2014/main" id="{6D396968-6A85-4901-BDF4-DC325370838F}"/>
+                <a16:creationId xmlns:a16="http://schemas.microsoft.com/office/drawing/2014/main" id="{7EB18915-C58B-4876-A872-27EAF923B0C7}"/>
               </a:ext>
             </a:extLst>
           </p:cNvPr>
@@ -3595,7 +3715,7 @@
           <p:cNvPr id="9" name="Slide Number Placeholder 8">
             <a:extLst xmlns:a="http://schemas.openxmlformats.org/drawingml/2006/main">
               <a:ext uri="{FF2B5EF4-FFF2-40B4-BE49-F238E27FC236}">
-                <a16:creationId xmlns:a16="http://schemas.microsoft.com/office/drawing/2014/main" id="{C98B4565-95F7-4696-BB39-A56D2B61DC3A}"/>
+                <a16:creationId xmlns:a16="http://schemas.microsoft.com/office/drawing/2014/main" id="{1D6290F4-6CBE-4A62-87EF-2F44D15BA316}"/>
               </a:ext>
             </a:extLst>
           </p:cNvPr>
@@ -3639,7 +3759,7 @@
           <p:cNvPr id="2" name="Title 1">
             <a:extLst xmlns:a="http://schemas.openxmlformats.org/drawingml/2006/main">
               <a:ext uri="{FF2B5EF4-FFF2-40B4-BE49-F238E27FC236}">
-                <a16:creationId xmlns:a16="http://schemas.microsoft.com/office/drawing/2014/main" id="{7D2283B9-8B34-4F3B-9EC7-7E4ED8FEB46E}"/>
+                <a16:creationId xmlns:a16="http://schemas.microsoft.com/office/drawing/2014/main" id="{C1E3C10F-4D10-4040-BF01-DFFA7058FF5D}"/>
               </a:ext>
             </a:extLst>
           </p:cNvPr>
@@ -3666,7 +3786,7 @@
           <p:cNvPr id="3" name="Date Placeholder 2">
             <a:extLst xmlns:a="http://schemas.openxmlformats.org/drawingml/2006/main">
               <a:ext uri="{FF2B5EF4-FFF2-40B4-BE49-F238E27FC236}">
-                <a16:creationId xmlns:a16="http://schemas.microsoft.com/office/drawing/2014/main" id="{51F7771F-5E5F-49FF-88F3-2DAE84F7BEA9}"/>
+                <a16:creationId xmlns:a16="http://schemas.microsoft.com/office/drawing/2014/main" id="{AEFC882F-C1DC-4987-92D2-E76204D89BFB}"/>
               </a:ext>
             </a:extLst>
           </p:cNvPr>
@@ -3693,7 +3813,7 @@
           <p:cNvPr id="4" name="Footer Placeholder 3">
             <a:extLst xmlns:a="http://schemas.openxmlformats.org/drawingml/2006/main">
               <a:ext uri="{FF2B5EF4-FFF2-40B4-BE49-F238E27FC236}">
-                <a16:creationId xmlns:a16="http://schemas.microsoft.com/office/drawing/2014/main" id="{EE2330A6-2405-465D-8E09-0584DE317873}"/>
+                <a16:creationId xmlns:a16="http://schemas.microsoft.com/office/drawing/2014/main" id="{62C49513-DFEA-4F19-A18C-7A4711EFC26D}"/>
               </a:ext>
             </a:extLst>
           </p:cNvPr>
@@ -3716,7 +3836,7 @@
           <p:cNvPr id="5" name="Slide Number Placeholder 4">
             <a:extLst xmlns:a="http://schemas.openxmlformats.org/drawingml/2006/main">
               <a:ext uri="{FF2B5EF4-FFF2-40B4-BE49-F238E27FC236}">
-                <a16:creationId xmlns:a16="http://schemas.microsoft.com/office/drawing/2014/main" id="{155C9B8D-11C3-474F-B799-0363EFCC9DE4}"/>
+                <a16:creationId xmlns:a16="http://schemas.microsoft.com/office/drawing/2014/main" id="{034D6379-0435-4071-B45F-D874EA59D6FF}"/>
               </a:ext>
             </a:extLst>
           </p:cNvPr>
@@ -3760,7 +3880,7 @@
           <p:cNvPr id="2" name="Date Placeholder 1">
             <a:extLst xmlns:a="http://schemas.openxmlformats.org/drawingml/2006/main">
               <a:ext uri="{FF2B5EF4-FFF2-40B4-BE49-F238E27FC236}">
-                <a16:creationId xmlns:a16="http://schemas.microsoft.com/office/drawing/2014/main" id="{71FD87FC-8D3E-47EF-9CDB-8C29B091C2C8}"/>
+                <a16:creationId xmlns:a16="http://schemas.microsoft.com/office/drawing/2014/main" id="{FED6F299-1BAB-49CB-B8E2-100D4630A44F}"/>
               </a:ext>
             </a:extLst>
           </p:cNvPr>
@@ -3787,7 +3907,7 @@
           <p:cNvPr id="3" name="Footer Placeholder 2">
             <a:extLst xmlns:a="http://schemas.openxmlformats.org/drawingml/2006/main">
               <a:ext uri="{FF2B5EF4-FFF2-40B4-BE49-F238E27FC236}">
-                <a16:creationId xmlns:a16="http://schemas.microsoft.com/office/drawing/2014/main" id="{7869CC3E-2339-44D4-A995-6BFC12BF35F3}"/>
+                <a16:creationId xmlns:a16="http://schemas.microsoft.com/office/drawing/2014/main" id="{4140D3A6-3DEF-4A66-B0D8-556CC9E4EE08}"/>
               </a:ext>
             </a:extLst>
           </p:cNvPr>
@@ -3810,7 +3930,7 @@
           <p:cNvPr id="4" name="Slide Number Placeholder 3">
             <a:extLst xmlns:a="http://schemas.openxmlformats.org/drawingml/2006/main">
               <a:ext uri="{FF2B5EF4-FFF2-40B4-BE49-F238E27FC236}">
-                <a16:creationId xmlns:a16="http://schemas.microsoft.com/office/drawing/2014/main" id="{33612063-B4B9-4156-9EB8-70EC22AAA77A}"/>
+                <a16:creationId xmlns:a16="http://schemas.microsoft.com/office/drawing/2014/main" id="{CA633137-2D3C-4501-95EB-2FEAC62DFB3F}"/>
               </a:ext>
             </a:extLst>
           </p:cNvPr>
@@ -3854,7 +3974,7 @@
           <p:cNvPr id="2" name="Title 1">
             <a:extLst xmlns:a="http://schemas.openxmlformats.org/drawingml/2006/main">
               <a:ext uri="{FF2B5EF4-FFF2-40B4-BE49-F238E27FC236}">
-                <a16:creationId xmlns:a16="http://schemas.microsoft.com/office/drawing/2014/main" id="{C929C21D-87A4-421D-BF38-03D7BFFF389E}"/>
+                <a16:creationId xmlns:a16="http://schemas.microsoft.com/office/drawing/2014/main" id="{3054883F-AA22-4296-80DD-7D8ED4BDA384}"/>
               </a:ext>
             </a:extLst>
           </p:cNvPr>
@@ -3891,7 +4011,7 @@
           <p:cNvPr id="3" name="Content Placeholder 2">
             <a:extLst xmlns:a="http://schemas.openxmlformats.org/drawingml/2006/main">
               <a:ext uri="{FF2B5EF4-FFF2-40B4-BE49-F238E27FC236}">
-                <a16:creationId xmlns:a16="http://schemas.microsoft.com/office/drawing/2014/main" id="{2D6F32E6-2F1A-4D95-AE0B-25B3FF627629}"/>
+                <a16:creationId xmlns:a16="http://schemas.microsoft.com/office/drawing/2014/main" id="{73C6E0C2-3A3D-494E-A636-3465A64EA741}"/>
               </a:ext>
             </a:extLst>
           </p:cNvPr>
@@ -3995,7 +4115,7 @@
           <p:cNvPr id="4" name="Text Placeholder 3">
             <a:extLst xmlns:a="http://schemas.openxmlformats.org/drawingml/2006/main">
               <a:ext uri="{FF2B5EF4-FFF2-40B4-BE49-F238E27FC236}">
-                <a16:creationId xmlns:a16="http://schemas.microsoft.com/office/drawing/2014/main" id="{742367F9-1D6A-4393-BFC5-9CDDCFD151D9}"/>
+                <a16:creationId xmlns:a16="http://schemas.microsoft.com/office/drawing/2014/main" id="{8BAAF2C6-3FA3-4C35-B37C-54E980BF4D6E}"/>
               </a:ext>
             </a:extLst>
           </p:cNvPr>
@@ -4067,7 +4187,7 @@
           <p:cNvPr id="5" name="Date Placeholder 4">
             <a:extLst xmlns:a="http://schemas.openxmlformats.org/drawingml/2006/main">
               <a:ext uri="{FF2B5EF4-FFF2-40B4-BE49-F238E27FC236}">
-                <a16:creationId xmlns:a16="http://schemas.microsoft.com/office/drawing/2014/main" id="{9680876C-24DC-489F-9F07-03A4208FC5BA}"/>
+                <a16:creationId xmlns:a16="http://schemas.microsoft.com/office/drawing/2014/main" id="{0A8C75A6-F048-42E5-BFE5-C6F2A7F3DD3B}"/>
               </a:ext>
             </a:extLst>
           </p:cNvPr>
@@ -4094,7 +4214,7 @@
           <p:cNvPr id="6" name="Footer Placeholder 5">
             <a:extLst xmlns:a="http://schemas.openxmlformats.org/drawingml/2006/main">
               <a:ext uri="{FF2B5EF4-FFF2-40B4-BE49-F238E27FC236}">
-                <a16:creationId xmlns:a16="http://schemas.microsoft.com/office/drawing/2014/main" id="{B908F055-CBCC-45F9-A403-BE008A94FFD1}"/>
+                <a16:creationId xmlns:a16="http://schemas.microsoft.com/office/drawing/2014/main" id="{33925BE3-3237-4C45-87D5-480AE09091D7}"/>
               </a:ext>
             </a:extLst>
           </p:cNvPr>
@@ -4117,7 +4237,7 @@
           <p:cNvPr id="7" name="Slide Number Placeholder 6">
             <a:extLst xmlns:a="http://schemas.openxmlformats.org/drawingml/2006/main">
               <a:ext uri="{FF2B5EF4-FFF2-40B4-BE49-F238E27FC236}">
-                <a16:creationId xmlns:a16="http://schemas.microsoft.com/office/drawing/2014/main" id="{5BFABA7C-F15F-4270-B410-395D06764A08}"/>
+                <a16:creationId xmlns:a16="http://schemas.microsoft.com/office/drawing/2014/main" id="{F4C08470-53EA-41D4-A73B-E6325D1F0DAD}"/>
               </a:ext>
             </a:extLst>
           </p:cNvPr>
@@ -4161,7 +4281,7 @@
           <p:cNvPr id="2" name="Title 1">
             <a:extLst xmlns:a="http://schemas.openxmlformats.org/drawingml/2006/main">
               <a:ext uri="{FF2B5EF4-FFF2-40B4-BE49-F238E27FC236}">
-                <a16:creationId xmlns:a16="http://schemas.microsoft.com/office/drawing/2014/main" id="{86E603E7-FBF2-47B8-AB96-8D2C1549086C}"/>
+                <a16:creationId xmlns:a16="http://schemas.microsoft.com/office/drawing/2014/main" id="{93BCB048-FBA8-4633-AE78-9485085FA378}"/>
               </a:ext>
             </a:extLst>
           </p:cNvPr>
@@ -4198,7 +4318,7 @@
           <p:cNvPr id="3" name="Picture Placeholder 2">
             <a:extLst xmlns:a="http://schemas.openxmlformats.org/drawingml/2006/main">
               <a:ext uri="{FF2B5EF4-FFF2-40B4-BE49-F238E27FC236}">
-                <a16:creationId xmlns:a16="http://schemas.microsoft.com/office/drawing/2014/main" id="{DAC20781-4DB0-4216-B36C-C2C82F723E60}"/>
+                <a16:creationId xmlns:a16="http://schemas.microsoft.com/office/drawing/2014/main" id="{BBC7262F-7B0F-4072-8284-863F07EE8D3D}"/>
               </a:ext>
             </a:extLst>
           </p:cNvPr>
@@ -4263,7 +4383,7 @@
           <p:cNvPr id="4" name="Text Placeholder 3">
             <a:extLst xmlns:a="http://schemas.openxmlformats.org/drawingml/2006/main">
               <a:ext uri="{FF2B5EF4-FFF2-40B4-BE49-F238E27FC236}">
-                <a16:creationId xmlns:a16="http://schemas.microsoft.com/office/drawing/2014/main" id="{09A8CEA5-C7EA-4F55-A3AA-4DE1B84A5E13}"/>
+                <a16:creationId xmlns:a16="http://schemas.microsoft.com/office/drawing/2014/main" id="{6642BBFB-ED46-4599-A8DE-5565602CE211}"/>
               </a:ext>
             </a:extLst>
           </p:cNvPr>
@@ -4335,7 +4455,7 @@
           <p:cNvPr id="5" name="Date Placeholder 4">
             <a:extLst xmlns:a="http://schemas.openxmlformats.org/drawingml/2006/main">
               <a:ext uri="{FF2B5EF4-FFF2-40B4-BE49-F238E27FC236}">
-                <a16:creationId xmlns:a16="http://schemas.microsoft.com/office/drawing/2014/main" id="{7B8E57B8-048B-4768-84DB-86D677F4528B}"/>
+                <a16:creationId xmlns:a16="http://schemas.microsoft.com/office/drawing/2014/main" id="{61618A02-CE41-4AAC-94BD-7AB18EB75EEB}"/>
               </a:ext>
             </a:extLst>
           </p:cNvPr>
@@ -4362,7 +4482,7 @@
           <p:cNvPr id="6" name="Footer Placeholder 5">
             <a:extLst xmlns:a="http://schemas.openxmlformats.org/drawingml/2006/main">
               <a:ext uri="{FF2B5EF4-FFF2-40B4-BE49-F238E27FC236}">
-                <a16:creationId xmlns:a16="http://schemas.microsoft.com/office/drawing/2014/main" id="{6AD51FA5-33E3-42CF-A555-E00238ADC0F9}"/>
+                <a16:creationId xmlns:a16="http://schemas.microsoft.com/office/drawing/2014/main" id="{33D0347C-AA23-4B92-9D25-F471983A2106}"/>
               </a:ext>
             </a:extLst>
           </p:cNvPr>
@@ -4385,7 +4505,7 @@
           <p:cNvPr id="7" name="Slide Number Placeholder 6">
             <a:extLst xmlns:a="http://schemas.openxmlformats.org/drawingml/2006/main">
               <a:ext uri="{FF2B5EF4-FFF2-40B4-BE49-F238E27FC236}">
-                <a16:creationId xmlns:a16="http://schemas.microsoft.com/office/drawing/2014/main" id="{D6449849-3B5B-45B7-9039-7C9F13B0EE33}"/>
+                <a16:creationId xmlns:a16="http://schemas.microsoft.com/office/drawing/2014/main" id="{43988015-20AD-4942-B718-9FC1A6C7B4BD}"/>
               </a:ext>
             </a:extLst>
           </p:cNvPr>
@@ -4434,7 +4554,7 @@
           <p:cNvPr id="2" name="Title Placeholder 1">
             <a:extLst xmlns:a="http://schemas.openxmlformats.org/drawingml/2006/main">
               <a:ext uri="{FF2B5EF4-FFF2-40B4-BE49-F238E27FC236}">
-                <a16:creationId xmlns:a16="http://schemas.microsoft.com/office/drawing/2014/main" id="{78CC6D16-C278-41C5-932C-9010EE49C974}"/>
+                <a16:creationId xmlns:a16="http://schemas.microsoft.com/office/drawing/2014/main" id="{B956733D-AAF5-415F-9E76-8673E9498EAE}"/>
               </a:ext>
             </a:extLst>
           </p:cNvPr>
@@ -4471,7 +4591,7 @@
           <p:cNvPr id="3" name="Text Placeholder 2">
             <a:extLst xmlns:a="http://schemas.openxmlformats.org/drawingml/2006/main">
               <a:ext uri="{FF2B5EF4-FFF2-40B4-BE49-F238E27FC236}">
-                <a16:creationId xmlns:a16="http://schemas.microsoft.com/office/drawing/2014/main" id="{F68D8CC6-9A97-44C5-9633-BD11D9CD2A00}"/>
+                <a16:creationId xmlns:a16="http://schemas.microsoft.com/office/drawing/2014/main" id="{195B82C2-0BFB-4F53-808E-DC6E40FF40E2}"/>
               </a:ext>
             </a:extLst>
           </p:cNvPr>
@@ -4543,7 +4663,7 @@
           <p:cNvPr id="4" name="Date Placeholder 3">
             <a:extLst xmlns:a="http://schemas.openxmlformats.org/drawingml/2006/main">
               <a:ext uri="{FF2B5EF4-FFF2-40B4-BE49-F238E27FC236}">
-                <a16:creationId xmlns:a16="http://schemas.microsoft.com/office/drawing/2014/main" id="{D7FF4FB7-076C-48E7-83B6-2D1EBB80F0C5}"/>
+                <a16:creationId xmlns:a16="http://schemas.microsoft.com/office/drawing/2014/main" id="{36DB41F5-093B-4C3C-8564-13700098049F}"/>
               </a:ext>
             </a:extLst>
           </p:cNvPr>
@@ -4589,7 +4709,7 @@
           <p:cNvPr id="5" name="Footer Placeholder 4">
             <a:extLst xmlns:a="http://schemas.openxmlformats.org/drawingml/2006/main">
               <a:ext uri="{FF2B5EF4-FFF2-40B4-BE49-F238E27FC236}">
-                <a16:creationId xmlns:a16="http://schemas.microsoft.com/office/drawing/2014/main" id="{9D387471-A241-46AE-8C4F-8D81F0781119}"/>
+                <a16:creationId xmlns:a16="http://schemas.microsoft.com/office/drawing/2014/main" id="{E4FD2DEB-09D8-44B9-B72F-902846E6CB3E}"/>
               </a:ext>
             </a:extLst>
           </p:cNvPr>
@@ -4631,7 +4751,7 @@
           <p:cNvPr id="6" name="Slide Number Placeholder 5">
             <a:extLst xmlns:a="http://schemas.openxmlformats.org/drawingml/2006/main">
               <a:ext uri="{FF2B5EF4-FFF2-40B4-BE49-F238E27FC236}">
-                <a16:creationId xmlns:a16="http://schemas.microsoft.com/office/drawing/2014/main" id="{7E16E5E9-D507-41C9-8B1A-4CA494DC7DF3}"/>
+                <a16:creationId xmlns:a16="http://schemas.microsoft.com/office/drawing/2014/main" id="{A5A618E3-3B6B-4ED8-94C7-5F8F22380C74}"/>
               </a:ext>
             </a:extLst>
           </p:cNvPr>
@@ -4676,17 +4796,17 @@
   </p:cSld>
   <p:clrMap bg1="lt1" tx1="dk1" bg2="lt2" tx2="dk2" accent1="accent1" accent2="accent2" accent3="accent3" accent4="accent4" accent5="accent5" accent6="accent6" hlink="hlink" folHlink="folHlink"/>
   <p:sldLayoutIdLst>
-    <p:sldLayoutId xmlns:r="http://schemas.openxmlformats.org/officeDocument/2006/relationships" id="2147483649" r:id="Re40ef8b789f541bc"/>
-    <p:sldLayoutId xmlns:r="http://schemas.openxmlformats.org/officeDocument/2006/relationships" id="2147483650" r:id="R5fc5c651e7a245f9"/>
-    <p:sldLayoutId xmlns:r="http://schemas.openxmlformats.org/officeDocument/2006/relationships" id="2147483651" r:id="R6bba52209abe4725"/>
-    <p:sldLayoutId xmlns:r="http://schemas.openxmlformats.org/officeDocument/2006/relationships" id="2147483652" r:id="Ra57d1cb767114526"/>
-    <p:sldLayoutId xmlns:r="http://schemas.openxmlformats.org/officeDocument/2006/relationships" id="2147483653" r:id="Rf47d1295b1f64fc4"/>
-    <p:sldLayoutId xmlns:r="http://schemas.openxmlformats.org/officeDocument/2006/relationships" id="2147483654" r:id="Rab47a1e1e3bb4669"/>
-    <p:sldLayoutId xmlns:r="http://schemas.openxmlformats.org/officeDocument/2006/relationships" id="2147483655" r:id="R2946844b692a41e7"/>
-    <p:sldLayoutId xmlns:r="http://schemas.openxmlformats.org/officeDocument/2006/relationships" id="2147483656" r:id="Rd470c7c969564741"/>
-    <p:sldLayoutId xmlns:r="http://schemas.openxmlformats.org/officeDocument/2006/relationships" id="2147483657" r:id="R34ef6c7ed9704387"/>
-    <p:sldLayoutId xmlns:r="http://schemas.openxmlformats.org/officeDocument/2006/relationships" id="2147483658" r:id="R39a1cb1f41244497"/>
-    <p:sldLayoutId xmlns:r="http://schemas.openxmlformats.org/officeDocument/2006/relationships" id="2147483659" r:id="Rf64766d6f2d940c7"/>
+    <p:sldLayoutId xmlns:r="http://schemas.openxmlformats.org/officeDocument/2006/relationships" id="2147483649" r:id="R72ee384667df4497"/>
+    <p:sldLayoutId xmlns:r="http://schemas.openxmlformats.org/officeDocument/2006/relationships" id="2147483650" r:id="R5c306ccc52df44c9"/>
+    <p:sldLayoutId xmlns:r="http://schemas.openxmlformats.org/officeDocument/2006/relationships" id="2147483651" r:id="R57110c74e619452a"/>
+    <p:sldLayoutId xmlns:r="http://schemas.openxmlformats.org/officeDocument/2006/relationships" id="2147483652" r:id="R5ba9c61ed0c44af9"/>
+    <p:sldLayoutId xmlns:r="http://schemas.openxmlformats.org/officeDocument/2006/relationships" id="2147483653" r:id="R7eab99552adb49a9"/>
+    <p:sldLayoutId xmlns:r="http://schemas.openxmlformats.org/officeDocument/2006/relationships" id="2147483654" r:id="R82f45bcb1e964032"/>
+    <p:sldLayoutId xmlns:r="http://schemas.openxmlformats.org/officeDocument/2006/relationships" id="2147483655" r:id="R2b5fd3d43bed4e34"/>
+    <p:sldLayoutId xmlns:r="http://schemas.openxmlformats.org/officeDocument/2006/relationships" id="2147483656" r:id="R2326b3df6ad542ed"/>
+    <p:sldLayoutId xmlns:r="http://schemas.openxmlformats.org/officeDocument/2006/relationships" id="2147483657" r:id="R8a61a50cd6834053"/>
+    <p:sldLayoutId xmlns:r="http://schemas.openxmlformats.org/officeDocument/2006/relationships" id="2147483658" r:id="Rf87076e0c1bc49e3"/>
+    <p:sldLayoutId xmlns:r="http://schemas.openxmlformats.org/officeDocument/2006/relationships" id="2147483659" r:id="R3ac35f3338924494"/>
   </p:sldLayoutIdLst>
   <p:txStyles>
     <p:titleStyle>
@@ -5239,7 +5359,7 @@
           <p:cNvPr id="2" name="Rectangle 1">
             <a:extLst xmlns:a="http://schemas.openxmlformats.org/drawingml/2006/main">
               <a:ext uri="{FF2B5EF4-FFF2-40B4-BE49-F238E27FC236}">
-                <a16:creationId xmlns:a16="http://schemas.microsoft.com/office/drawing/2014/main" id="{C8FC8441-FD2E-4C2E-937B-5D0766DB2F26}"/>
+                <a16:creationId xmlns:a16="http://schemas.microsoft.com/office/drawing/2014/main" id="{CFFE576E-C3AB-4F9F-9F7D-A15A071F33EC}"/>
               </a:ext>
             </a:extLst>
           </p:cNvPr>
@@ -5294,7 +5414,7 @@
           <p:cNvPr id="3" name="TextBox 2">
             <a:extLst xmlns:a="http://schemas.openxmlformats.org/drawingml/2006/main">
               <a:ext uri="{FF2B5EF4-FFF2-40B4-BE49-F238E27FC236}">
-                <a16:creationId xmlns:a16="http://schemas.microsoft.com/office/drawing/2014/main" id="{C578F2DD-B44B-4B5C-98AC-50B532041A57}"/>
+                <a16:creationId xmlns:a16="http://schemas.microsoft.com/office/drawing/2014/main" id="{37B40587-A021-4350-9B02-B1F717AD80D2}"/>
               </a:ext>
             </a:extLst>
           </p:cNvPr>
@@ -5341,7 +5461,7 @@
           <p:cNvPr id="4" name="TextBox 3">
             <a:extLst xmlns:a="http://schemas.openxmlformats.org/drawingml/2006/main">
               <a:ext uri="{FF2B5EF4-FFF2-40B4-BE49-F238E27FC236}">
-                <a16:creationId xmlns:a16="http://schemas.microsoft.com/office/drawing/2014/main" id="{AD43DC60-C37E-4965-8F07-D851A037EB56}"/>
+                <a16:creationId xmlns:a16="http://schemas.microsoft.com/office/drawing/2014/main" id="{59195A5B-A8F0-47C6-A0CD-43F7FE2E9C25}"/>
               </a:ext>
             </a:extLst>
           </p:cNvPr>
@@ -5389,7 +5509,7 @@
           <p:cNvPr id="5" name="TextBox 4">
             <a:extLst xmlns:a="http://schemas.openxmlformats.org/drawingml/2006/main">
               <a:ext uri="{FF2B5EF4-FFF2-40B4-BE49-F238E27FC236}">
-                <a16:creationId xmlns:a16="http://schemas.microsoft.com/office/drawing/2014/main" id="{A559CAD4-BDE7-4161-934E-9DAC50D04FFD}"/>
+                <a16:creationId xmlns:a16="http://schemas.microsoft.com/office/drawing/2014/main" id="{37666EE5-CFD6-4F0D-8D48-AF06BE794440}"/>
               </a:ext>
             </a:extLst>
           </p:cNvPr>
@@ -5436,7 +5556,7 @@
           <p:cNvPr id="6" name="Rectangle 5">
             <a:extLst xmlns:a="http://schemas.openxmlformats.org/drawingml/2006/main">
               <a:ext uri="{FF2B5EF4-FFF2-40B4-BE49-F238E27FC236}">
-                <a16:creationId xmlns:a16="http://schemas.microsoft.com/office/drawing/2014/main" id="{AFBF2722-366D-49C2-B489-CF00A92CEE49}"/>
+                <a16:creationId xmlns:a16="http://schemas.microsoft.com/office/drawing/2014/main" id="{B1467A48-1DC4-4283-A027-5A371B1ED59C}"/>
               </a:ext>
             </a:extLst>
           </p:cNvPr>
@@ -5491,7 +5611,7 @@
           <p:cNvPr id="7" name="TextBox 6">
             <a:extLst xmlns:a="http://schemas.openxmlformats.org/drawingml/2006/main">
               <a:ext uri="{FF2B5EF4-FFF2-40B4-BE49-F238E27FC236}">
-                <a16:creationId xmlns:a16="http://schemas.microsoft.com/office/drawing/2014/main" id="{BC216713-C1CF-4BD0-8841-35171156359C}"/>
+                <a16:creationId xmlns:a16="http://schemas.microsoft.com/office/drawing/2014/main" id="{FC8E5CB9-A8FF-4E93-80C1-2BFBE80E026E}"/>
               </a:ext>
             </a:extLst>
           </p:cNvPr>
@@ -5538,7 +5658,7 @@
           <p:cNvPr id="8" name="TextBox 7">
             <a:extLst xmlns:a="http://schemas.openxmlformats.org/drawingml/2006/main">
               <a:ext uri="{FF2B5EF4-FFF2-40B4-BE49-F238E27FC236}">
-                <a16:creationId xmlns:a16="http://schemas.microsoft.com/office/drawing/2014/main" id="{47B58DA7-DE57-4DC7-A9B2-17E909E136DC}"/>
+                <a16:creationId xmlns:a16="http://schemas.microsoft.com/office/drawing/2014/main" id="{B4790AF3-AA58-4E56-9E89-C6674E34E9E5}"/>
               </a:ext>
             </a:extLst>
           </p:cNvPr>
@@ -5575,7 +5695,7 @@
                 <a:ea typeface="Aptos"/>
                 <a:cs typeface="Aptos"/>
               </a:rPr>
-              <a:t>2026.07.27-26</a:t>
+              <a:t>2026.07.27-27</a:t>
             </a:r>
           </a:p>
         </p:txBody>
@@ -5585,7 +5705,7 @@
           <p:cNvPr id="9" name="TextBox 8">
             <a:extLst xmlns:a="http://schemas.openxmlformats.org/drawingml/2006/main">
               <a:ext uri="{FF2B5EF4-FFF2-40B4-BE49-F238E27FC236}">
-                <a16:creationId xmlns:a16="http://schemas.microsoft.com/office/drawing/2014/main" id="{389C0E70-7C4B-4978-B13E-781B3751B7C4}"/>
+                <a16:creationId xmlns:a16="http://schemas.microsoft.com/office/drawing/2014/main" id="{1F87A5DC-2659-438B-8F89-9A51979C00A9}"/>
               </a:ext>
             </a:extLst>
           </p:cNvPr>
@@ -5653,7 +5773,7 @@
           <p:cNvPr id="10" name="TextBox 9">
             <a:extLst xmlns:a="http://schemas.openxmlformats.org/drawingml/2006/main">
               <a:ext uri="{FF2B5EF4-FFF2-40B4-BE49-F238E27FC236}">
-                <a16:creationId xmlns:a16="http://schemas.microsoft.com/office/drawing/2014/main" id="{C90AF6B6-FE8D-4568-8E4C-9E493CA252CC}"/>
+                <a16:creationId xmlns:a16="http://schemas.microsoft.com/office/drawing/2014/main" id="{B8A46201-CB21-4A08-865B-F82001D7E2FC}"/>
               </a:ext>
             </a:extLst>
           </p:cNvPr>
@@ -5700,7 +5820,7 @@
           <p:cNvPr id="11" name="TextBox 10">
             <a:extLst xmlns:a="http://schemas.openxmlformats.org/drawingml/2006/main">
               <a:ext uri="{FF2B5EF4-FFF2-40B4-BE49-F238E27FC236}">
-                <a16:creationId xmlns:a16="http://schemas.microsoft.com/office/drawing/2014/main" id="{70567DB0-CDD9-470B-915E-82B3B9788618}"/>
+                <a16:creationId xmlns:a16="http://schemas.microsoft.com/office/drawing/2014/main" id="{499A9B80-1A8B-47B0-B3C0-12C9B3594E8F}"/>
               </a:ext>
             </a:extLst>
           </p:cNvPr>
@@ -5747,7 +5867,7 @@
           <p:cNvPr id="12" name="TextBox 11">
             <a:extLst xmlns:a="http://schemas.openxmlformats.org/drawingml/2006/main">
               <a:ext uri="{FF2B5EF4-FFF2-40B4-BE49-F238E27FC236}">
-                <a16:creationId xmlns:a16="http://schemas.microsoft.com/office/drawing/2014/main" id="{5EC29800-CE3D-40EB-9586-CFBCF12820E1}"/>
+                <a16:creationId xmlns:a16="http://schemas.microsoft.com/office/drawing/2014/main" id="{0A83575D-4A56-41AD-99E3-76A0A45F5BC3}"/>
               </a:ext>
             </a:extLst>
           </p:cNvPr>
@@ -5792,7 +5912,7 @@
     </p:spTree>
     <p:extLst>
       <p:ext uri="{BB962C8B-B14F-4D97-AF65-F5344CB8AC3E}">
-        <p14:creationId xmlns:p14="http://schemas.microsoft.com/office/powerpoint/2010/main" val="1152698114"/>
+        <p14:creationId xmlns:p14="http://schemas.microsoft.com/office/powerpoint/2010/main" val="1629875755"/>
       </p:ext>
     </p:extLst>
   </p:cSld>
@@ -5816,7 +5936,7 @@
           <p:cNvPr id="2" name="TextBox 1">
             <a:extLst xmlns:a="http://schemas.openxmlformats.org/drawingml/2006/main">
               <a:ext uri="{FF2B5EF4-FFF2-40B4-BE49-F238E27FC236}">
-                <a16:creationId xmlns:a16="http://schemas.microsoft.com/office/drawing/2014/main" id="{AC201969-DB87-4C5F-8878-EB0BAA88B75A}"/>
+                <a16:creationId xmlns:a16="http://schemas.microsoft.com/office/drawing/2014/main" id="{390C38C3-FA07-42F7-9D4E-D60982E11847}"/>
               </a:ext>
             </a:extLst>
           </p:cNvPr>
@@ -5863,7 +5983,7 @@
           <p:cNvPr id="3" name="TextBox 2">
             <a:extLst xmlns:a="http://schemas.openxmlformats.org/drawingml/2006/main">
               <a:ext uri="{FF2B5EF4-FFF2-40B4-BE49-F238E27FC236}">
-                <a16:creationId xmlns:a16="http://schemas.microsoft.com/office/drawing/2014/main" id="{6AE19CDF-592D-4E0C-B780-15BD4C401E2B}"/>
+                <a16:creationId xmlns:a16="http://schemas.microsoft.com/office/drawing/2014/main" id="{0C0798F2-91E1-49F3-9C84-429EA03382E8}"/>
               </a:ext>
             </a:extLst>
           </p:cNvPr>
@@ -5910,7 +6030,7 @@
           <p:cNvPr id="4" name="Rectangle 3">
             <a:extLst xmlns:a="http://schemas.openxmlformats.org/drawingml/2006/main">
               <a:ext uri="{FF2B5EF4-FFF2-40B4-BE49-F238E27FC236}">
-                <a16:creationId xmlns:a16="http://schemas.microsoft.com/office/drawing/2014/main" id="{DD8D070C-6491-45B7-BCBB-5988B439009A}"/>
+                <a16:creationId xmlns:a16="http://schemas.microsoft.com/office/drawing/2014/main" id="{2EC81997-92D5-4329-971C-A3009073B75C}"/>
               </a:ext>
             </a:extLst>
           </p:cNvPr>
@@ -5965,7 +6085,7 @@
           <p:cNvPr id="5" name="Rectangle 4">
             <a:extLst xmlns:a="http://schemas.openxmlformats.org/drawingml/2006/main">
               <a:ext uri="{FF2B5EF4-FFF2-40B4-BE49-F238E27FC236}">
-                <a16:creationId xmlns:a16="http://schemas.microsoft.com/office/drawing/2014/main" id="{44D213AD-99E4-403A-9D14-2E0A36FD4468}"/>
+                <a16:creationId xmlns:a16="http://schemas.microsoft.com/office/drawing/2014/main" id="{218F213E-EB72-40E7-A2D2-4A2BFFAD83EA}"/>
               </a:ext>
             </a:extLst>
           </p:cNvPr>
@@ -6020,7 +6140,7 @@
           <p:cNvPr id="6" name="TextBox 5">
             <a:extLst xmlns:a="http://schemas.openxmlformats.org/drawingml/2006/main">
               <a:ext uri="{FF2B5EF4-FFF2-40B4-BE49-F238E27FC236}">
-                <a16:creationId xmlns:a16="http://schemas.microsoft.com/office/drawing/2014/main" id="{4F28D48C-174D-4AEB-8BA9-647506F023A3}"/>
+                <a16:creationId xmlns:a16="http://schemas.microsoft.com/office/drawing/2014/main" id="{9A128F22-30FB-4454-952D-04F63E6DCFAF}"/>
               </a:ext>
             </a:extLst>
           </p:cNvPr>
@@ -6057,7 +6177,7 @@
                 <a:ea typeface="Aptos"/>
                 <a:cs typeface="Aptos"/>
               </a:rPr>
-              <a:t>Julkinen riippumaton evidenssikooste · 2026.07.27-26 · 2026-07-27 · Lähteet: EPO; Saksa — viralliset tuomiot; WIPO</a:t>
+              <a:t>Julkinen riippumaton evidenssikooste · 2026.07.27-27 · 2026-07-27 · Lähteet: EPO; Saksa — viralliset tuomiot; WIPO</a:t>
             </a:r>
           </a:p>
         </p:txBody>
@@ -6067,7 +6187,7 @@
           <p:cNvPr id="7" name="TextBox 6">
             <a:extLst xmlns:a="http://schemas.openxmlformats.org/drawingml/2006/main">
               <a:ext uri="{FF2B5EF4-FFF2-40B4-BE49-F238E27FC236}">
-                <a16:creationId xmlns:a16="http://schemas.microsoft.com/office/drawing/2014/main" id="{8CF733E8-1320-4D5F-AB9A-7FC58446841F}"/>
+                <a16:creationId xmlns:a16="http://schemas.microsoft.com/office/drawing/2014/main" id="{852FC345-AD2B-4FA3-A9E7-1B2039624382}"/>
               </a:ext>
             </a:extLst>
           </p:cNvPr>
@@ -6114,7 +6234,7 @@
           <p:cNvPr id="8" name="TextBox 7">
             <a:extLst xmlns:a="http://schemas.openxmlformats.org/drawingml/2006/main">
               <a:ext uri="{FF2B5EF4-FFF2-40B4-BE49-F238E27FC236}">
-                <a16:creationId xmlns:a16="http://schemas.microsoft.com/office/drawing/2014/main" id="{480E301B-62A8-4C4B-ADA3-A64961DB4F40}"/>
+                <a16:creationId xmlns:a16="http://schemas.microsoft.com/office/drawing/2014/main" id="{937A32AC-C051-428F-8F3A-A8062FA5F637}"/>
               </a:ext>
             </a:extLst>
           </p:cNvPr>
@@ -6161,7 +6281,7 @@
           <p:cNvPr id="9" name="TextBox 8">
             <a:extLst xmlns:a="http://schemas.openxmlformats.org/drawingml/2006/main">
               <a:ext uri="{FF2B5EF4-FFF2-40B4-BE49-F238E27FC236}">
-                <a16:creationId xmlns:a16="http://schemas.microsoft.com/office/drawing/2014/main" id="{D05DCBBA-ADF2-4CCE-80E1-B42661BA1036}"/>
+                <a16:creationId xmlns:a16="http://schemas.microsoft.com/office/drawing/2014/main" id="{C7AB0747-0841-4447-9B54-8E32D106C7FD}"/>
               </a:ext>
             </a:extLst>
           </p:cNvPr>
@@ -6258,7 +6378,7 @@
           <p:cNvPr id="10" name="Rounded Rectangle 9">
             <a:extLst xmlns:a="http://schemas.openxmlformats.org/drawingml/2006/main">
               <a:ext uri="{FF2B5EF4-FFF2-40B4-BE49-F238E27FC236}">
-                <a16:creationId xmlns:a16="http://schemas.microsoft.com/office/drawing/2014/main" id="{BD29D4B4-BE92-42C6-A20B-7628384942AB}"/>
+                <a16:creationId xmlns:a16="http://schemas.microsoft.com/office/drawing/2014/main" id="{7D6B3DE2-DF79-4D74-B83A-411F78D57387}"/>
               </a:ext>
             </a:extLst>
           </p:cNvPr>
@@ -6315,7 +6435,7 @@
           <p:cNvPr id="11" name="TextBox 10">
             <a:extLst xmlns:a="http://schemas.openxmlformats.org/drawingml/2006/main">
               <a:ext uri="{FF2B5EF4-FFF2-40B4-BE49-F238E27FC236}">
-                <a16:creationId xmlns:a16="http://schemas.microsoft.com/office/drawing/2014/main" id="{5289E610-B112-4883-942E-AD4D27ADF8AC}"/>
+                <a16:creationId xmlns:a16="http://schemas.microsoft.com/office/drawing/2014/main" id="{ADA71A9C-AD13-497C-838D-D3B4E9D27037}"/>
               </a:ext>
             </a:extLst>
           </p:cNvPr>
@@ -6362,7 +6482,7 @@
           <p:cNvPr id="12" name="TextBox 11">
             <a:extLst xmlns:a="http://schemas.openxmlformats.org/drawingml/2006/main">
               <a:ext uri="{FF2B5EF4-FFF2-40B4-BE49-F238E27FC236}">
-                <a16:creationId xmlns:a16="http://schemas.microsoft.com/office/drawing/2014/main" id="{C9BA59F8-9E0B-4B19-B638-5EB9049626C9}"/>
+                <a16:creationId xmlns:a16="http://schemas.microsoft.com/office/drawing/2014/main" id="{DCFD3F78-4301-46B8-8CAE-3C8556E71BE4}"/>
               </a:ext>
             </a:extLst>
           </p:cNvPr>
@@ -6407,7 +6527,7 @@
     </p:spTree>
     <p:extLst>
       <p:ext uri="{BB962C8B-B14F-4D97-AF65-F5344CB8AC3E}">
-        <p14:creationId xmlns:p14="http://schemas.microsoft.com/office/powerpoint/2010/main" val="342817461"/>
+        <p14:creationId xmlns:p14="http://schemas.microsoft.com/office/powerpoint/2010/main" val="1244208551"/>
       </p:ext>
     </p:extLst>
   </p:cSld>
@@ -6431,7 +6551,7 @@
           <p:cNvPr id="2" name="TextBox 1">
             <a:extLst xmlns:a="http://schemas.openxmlformats.org/drawingml/2006/main">
               <a:ext uri="{FF2B5EF4-FFF2-40B4-BE49-F238E27FC236}">
-                <a16:creationId xmlns:a16="http://schemas.microsoft.com/office/drawing/2014/main" id="{C29B8EC6-5903-4ADC-9BEA-7C1C8F7ABFBA}"/>
+                <a16:creationId xmlns:a16="http://schemas.microsoft.com/office/drawing/2014/main" id="{CAA33C1C-464F-4E97-A37A-E176A502841B}"/>
               </a:ext>
             </a:extLst>
           </p:cNvPr>
@@ -6478,7 +6598,7 @@
           <p:cNvPr id="3" name="TextBox 2">
             <a:extLst xmlns:a="http://schemas.openxmlformats.org/drawingml/2006/main">
               <a:ext uri="{FF2B5EF4-FFF2-40B4-BE49-F238E27FC236}">
-                <a16:creationId xmlns:a16="http://schemas.microsoft.com/office/drawing/2014/main" id="{8E979EC8-01CD-4B0C-88EC-5CBBBFEE042B}"/>
+                <a16:creationId xmlns:a16="http://schemas.microsoft.com/office/drawing/2014/main" id="{7995BABA-64CF-4144-A27F-2368A8FB2FE0}"/>
               </a:ext>
             </a:extLst>
           </p:cNvPr>
@@ -6525,7 +6645,7 @@
           <p:cNvPr id="4" name="Rectangle 3">
             <a:extLst xmlns:a="http://schemas.openxmlformats.org/drawingml/2006/main">
               <a:ext uri="{FF2B5EF4-FFF2-40B4-BE49-F238E27FC236}">
-                <a16:creationId xmlns:a16="http://schemas.microsoft.com/office/drawing/2014/main" id="{E50C02E6-A473-4F50-8F12-BED2867127F2}"/>
+                <a16:creationId xmlns:a16="http://schemas.microsoft.com/office/drawing/2014/main" id="{836CEB7B-AA8D-4B03-92AB-20CA854F0C79}"/>
               </a:ext>
             </a:extLst>
           </p:cNvPr>
@@ -6580,7 +6700,7 @@
           <p:cNvPr id="5" name="Rectangle 4">
             <a:extLst xmlns:a="http://schemas.openxmlformats.org/drawingml/2006/main">
               <a:ext uri="{FF2B5EF4-FFF2-40B4-BE49-F238E27FC236}">
-                <a16:creationId xmlns:a16="http://schemas.microsoft.com/office/drawing/2014/main" id="{A178A37C-B5BC-40A0-9CDB-97CA3EE34DBF}"/>
+                <a16:creationId xmlns:a16="http://schemas.microsoft.com/office/drawing/2014/main" id="{B91A0BFC-C5FC-47AE-8AD7-1666C6BB5821}"/>
               </a:ext>
             </a:extLst>
           </p:cNvPr>
@@ -6635,7 +6755,7 @@
           <p:cNvPr id="6" name="TextBox 5">
             <a:extLst xmlns:a="http://schemas.openxmlformats.org/drawingml/2006/main">
               <a:ext uri="{FF2B5EF4-FFF2-40B4-BE49-F238E27FC236}">
-                <a16:creationId xmlns:a16="http://schemas.microsoft.com/office/drawing/2014/main" id="{FA87E6AA-F48D-40AB-812D-A0C4E77A4E75}"/>
+                <a16:creationId xmlns:a16="http://schemas.microsoft.com/office/drawing/2014/main" id="{5CC321E9-4E9E-4ED0-9E4A-DD5A2BE2FFBA}"/>
               </a:ext>
             </a:extLst>
           </p:cNvPr>
@@ -6672,7 +6792,7 @@
                 <a:ea typeface="Aptos"/>
                 <a:cs typeface="Aptos"/>
               </a:rPr>
-              <a:t>Julkinen riippumaton evidenssikooste · 2026.07.27-26 · 2026-07-27 · Lähteet: EPO Register; EP3032975B2; 8 Ni 18/24 (EP); 7 O 3341/24</a:t>
+              <a:t>Julkinen riippumaton evidenssikooste · 2026.07.27-27 · 2026-07-27 · Lähteet: EPO Register; EP3032975B2; 8 Ni 18/24 (EP); 7 O 3341/24</a:t>
             </a:r>
           </a:p>
         </p:txBody>
@@ -6682,7 +6802,7 @@
           <p:cNvPr id="7" name="TextBox 6">
             <a:extLst xmlns:a="http://schemas.openxmlformats.org/drawingml/2006/main">
               <a:ext uri="{FF2B5EF4-FFF2-40B4-BE49-F238E27FC236}">
-                <a16:creationId xmlns:a16="http://schemas.microsoft.com/office/drawing/2014/main" id="{9C046C03-CEE6-40CD-AF21-0ED4D22362BD}"/>
+                <a16:creationId xmlns:a16="http://schemas.microsoft.com/office/drawing/2014/main" id="{ACF6F721-B4C2-4911-A030-9CAE4D49B535}"/>
               </a:ext>
             </a:extLst>
           </p:cNvPr>
@@ -6729,7 +6849,7 @@
           <p:cNvPr id="8" name="Rounded Rectangle 7">
             <a:extLst xmlns:a="http://schemas.openxmlformats.org/drawingml/2006/main">
               <a:ext uri="{FF2B5EF4-FFF2-40B4-BE49-F238E27FC236}">
-                <a16:creationId xmlns:a16="http://schemas.microsoft.com/office/drawing/2014/main" id="{9325BA40-3E5B-45FC-86E2-E8D3C1152666}"/>
+                <a16:creationId xmlns:a16="http://schemas.microsoft.com/office/drawing/2014/main" id="{C33FDADE-B05C-4231-BD8D-EB1E870BF967}"/>
               </a:ext>
             </a:extLst>
           </p:cNvPr>
@@ -6786,7 +6906,7 @@
           <p:cNvPr id="9" name="TextBox 8">
             <a:extLst xmlns:a="http://schemas.openxmlformats.org/drawingml/2006/main">
               <a:ext uri="{FF2B5EF4-FFF2-40B4-BE49-F238E27FC236}">
-                <a16:creationId xmlns:a16="http://schemas.microsoft.com/office/drawing/2014/main" id="{DC7655B2-7A32-4F3D-A814-5E505E6B1171}"/>
+                <a16:creationId xmlns:a16="http://schemas.microsoft.com/office/drawing/2014/main" id="{B4295722-62FC-4340-9C35-13416804A99F}"/>
               </a:ext>
             </a:extLst>
           </p:cNvPr>
@@ -6833,7 +6953,7 @@
           <p:cNvPr id="10" name="TextBox 9">
             <a:extLst xmlns:a="http://schemas.openxmlformats.org/drawingml/2006/main">
               <a:ext uri="{FF2B5EF4-FFF2-40B4-BE49-F238E27FC236}">
-                <a16:creationId xmlns:a16="http://schemas.microsoft.com/office/drawing/2014/main" id="{92C6A6C4-040D-422D-809D-DB9A36112B12}"/>
+                <a16:creationId xmlns:a16="http://schemas.microsoft.com/office/drawing/2014/main" id="{4F62B35E-4B48-4F4D-BC37-E0154D4D9065}"/>
               </a:ext>
             </a:extLst>
           </p:cNvPr>
@@ -6880,7 +7000,7 @@
           <p:cNvPr id="11" name="Rounded Rectangle 10">
             <a:extLst xmlns:a="http://schemas.openxmlformats.org/drawingml/2006/main">
               <a:ext uri="{FF2B5EF4-FFF2-40B4-BE49-F238E27FC236}">
-                <a16:creationId xmlns:a16="http://schemas.microsoft.com/office/drawing/2014/main" id="{06CFF339-D70D-4197-83F1-5924C19975C4}"/>
+                <a16:creationId xmlns:a16="http://schemas.microsoft.com/office/drawing/2014/main" id="{11613AE7-77AC-42BF-BA42-6E6F080C5D6D}"/>
               </a:ext>
             </a:extLst>
           </p:cNvPr>
@@ -6937,7 +7057,7 @@
           <p:cNvPr id="12" name="TextBox 11">
             <a:extLst xmlns:a="http://schemas.openxmlformats.org/drawingml/2006/main">
               <a:ext uri="{FF2B5EF4-FFF2-40B4-BE49-F238E27FC236}">
-                <a16:creationId xmlns:a16="http://schemas.microsoft.com/office/drawing/2014/main" id="{BA4475CF-4AB3-4776-B204-3B3F8051A4D9}"/>
+                <a16:creationId xmlns:a16="http://schemas.microsoft.com/office/drawing/2014/main" id="{0015B723-8B04-4D81-BD34-163545FB37E0}"/>
               </a:ext>
             </a:extLst>
           </p:cNvPr>
@@ -6984,7 +7104,7 @@
           <p:cNvPr id="13" name="TextBox 12">
             <a:extLst xmlns:a="http://schemas.openxmlformats.org/drawingml/2006/main">
               <a:ext uri="{FF2B5EF4-FFF2-40B4-BE49-F238E27FC236}">
-                <a16:creationId xmlns:a16="http://schemas.microsoft.com/office/drawing/2014/main" id="{717C50C6-A4FC-448C-A417-7137B531DECE}"/>
+                <a16:creationId xmlns:a16="http://schemas.microsoft.com/office/drawing/2014/main" id="{EF090850-F04D-410B-B213-662654A65041}"/>
               </a:ext>
             </a:extLst>
           </p:cNvPr>
@@ -7031,7 +7151,7 @@
           <p:cNvPr id="14" name="Rounded Rectangle 13">
             <a:extLst xmlns:a="http://schemas.openxmlformats.org/drawingml/2006/main">
               <a:ext uri="{FF2B5EF4-FFF2-40B4-BE49-F238E27FC236}">
-                <a16:creationId xmlns:a16="http://schemas.microsoft.com/office/drawing/2014/main" id="{AF5A1839-135B-473A-92CC-B55038661651}"/>
+                <a16:creationId xmlns:a16="http://schemas.microsoft.com/office/drawing/2014/main" id="{063AD1DE-35A9-419A-BF66-1CBE56FBCA91}"/>
               </a:ext>
             </a:extLst>
           </p:cNvPr>
@@ -7088,7 +7208,7 @@
           <p:cNvPr id="15" name="TextBox 14">
             <a:extLst xmlns:a="http://schemas.openxmlformats.org/drawingml/2006/main">
               <a:ext uri="{FF2B5EF4-FFF2-40B4-BE49-F238E27FC236}">
-                <a16:creationId xmlns:a16="http://schemas.microsoft.com/office/drawing/2014/main" id="{3488380E-E762-4FC0-A73B-B07690FD2278}"/>
+                <a16:creationId xmlns:a16="http://schemas.microsoft.com/office/drawing/2014/main" id="{5378D670-C724-48D8-9BFF-4A9EFE4C81BB}"/>
               </a:ext>
             </a:extLst>
           </p:cNvPr>
@@ -7135,7 +7255,7 @@
           <p:cNvPr id="16" name="TextBox 15">
             <a:extLst xmlns:a="http://schemas.openxmlformats.org/drawingml/2006/main">
               <a:ext uri="{FF2B5EF4-FFF2-40B4-BE49-F238E27FC236}">
-                <a16:creationId xmlns:a16="http://schemas.microsoft.com/office/drawing/2014/main" id="{D944C8B7-39B0-4706-8F60-1C5B3A7FDD50}"/>
+                <a16:creationId xmlns:a16="http://schemas.microsoft.com/office/drawing/2014/main" id="{75D9379E-0241-4EED-9D84-B6DF8E761AC9}"/>
               </a:ext>
             </a:extLst>
           </p:cNvPr>
@@ -7182,7 +7302,7 @@
           <p:cNvPr id="17" name="TextBox 16">
             <a:extLst xmlns:a="http://schemas.openxmlformats.org/drawingml/2006/main">
               <a:ext uri="{FF2B5EF4-FFF2-40B4-BE49-F238E27FC236}">
-                <a16:creationId xmlns:a16="http://schemas.microsoft.com/office/drawing/2014/main" id="{CBDE9FE0-8142-4D34-88B5-A1FA1CCD9483}"/>
+                <a16:creationId xmlns:a16="http://schemas.microsoft.com/office/drawing/2014/main" id="{ABFE479F-C965-4648-8FE5-8036EA559EC6}"/>
               </a:ext>
             </a:extLst>
           </p:cNvPr>
@@ -7229,7 +7349,7 @@
           <p:cNvPr id="18" name="Rounded Rectangle 17">
             <a:extLst xmlns:a="http://schemas.openxmlformats.org/drawingml/2006/main">
               <a:ext uri="{FF2B5EF4-FFF2-40B4-BE49-F238E27FC236}">
-                <a16:creationId xmlns:a16="http://schemas.microsoft.com/office/drawing/2014/main" id="{D6FACA26-5878-41BA-A7FF-F451F6176D6B}"/>
+                <a16:creationId xmlns:a16="http://schemas.microsoft.com/office/drawing/2014/main" id="{EC070523-8489-462A-95CF-0B57404FFEE0}"/>
               </a:ext>
             </a:extLst>
           </p:cNvPr>
@@ -7286,7 +7406,7 @@
           <p:cNvPr id="19" name="TextBox 18">
             <a:extLst xmlns:a="http://schemas.openxmlformats.org/drawingml/2006/main">
               <a:ext uri="{FF2B5EF4-FFF2-40B4-BE49-F238E27FC236}">
-                <a16:creationId xmlns:a16="http://schemas.microsoft.com/office/drawing/2014/main" id="{C74FAF0D-1718-4861-837F-BAEF939D6283}"/>
+                <a16:creationId xmlns:a16="http://schemas.microsoft.com/office/drawing/2014/main" id="{61C4809B-ECF7-41F5-B6A9-B91A8C429B7A}"/>
               </a:ext>
             </a:extLst>
           </p:cNvPr>
@@ -7333,7 +7453,7 @@
           <p:cNvPr id="20" name="TextBox 19">
             <a:extLst xmlns:a="http://schemas.openxmlformats.org/drawingml/2006/main">
               <a:ext uri="{FF2B5EF4-FFF2-40B4-BE49-F238E27FC236}">
-                <a16:creationId xmlns:a16="http://schemas.microsoft.com/office/drawing/2014/main" id="{8C99558E-11CD-4422-86BE-D4ECAC75646D}"/>
+                <a16:creationId xmlns:a16="http://schemas.microsoft.com/office/drawing/2014/main" id="{2E6529BA-D82C-4962-B4E7-976D396D27C8}"/>
               </a:ext>
             </a:extLst>
           </p:cNvPr>
@@ -7378,7 +7498,7 @@
     </p:spTree>
     <p:extLst>
       <p:ext uri="{BB962C8B-B14F-4D97-AF65-F5344CB8AC3E}">
-        <p14:creationId xmlns:p14="http://schemas.microsoft.com/office/powerpoint/2010/main" val="901025"/>
+        <p14:creationId xmlns:p14="http://schemas.microsoft.com/office/powerpoint/2010/main" val="2034344611"/>
       </p:ext>
     </p:extLst>
   </p:cSld>
@@ -7402,7 +7522,7 @@
           <p:cNvPr id="2" name="TextBox 1">
             <a:extLst xmlns:a="http://schemas.openxmlformats.org/drawingml/2006/main">
               <a:ext uri="{FF2B5EF4-FFF2-40B4-BE49-F238E27FC236}">
-                <a16:creationId xmlns:a16="http://schemas.microsoft.com/office/drawing/2014/main" id="{2042F469-1B34-4F98-AE61-E612FA96D028}"/>
+                <a16:creationId xmlns:a16="http://schemas.microsoft.com/office/drawing/2014/main" id="{30B6FCE6-F7AF-4B5C-8194-46133586262C}"/>
               </a:ext>
             </a:extLst>
           </p:cNvPr>
@@ -7449,7 +7569,7 @@
           <p:cNvPr id="3" name="TextBox 2">
             <a:extLst xmlns:a="http://schemas.openxmlformats.org/drawingml/2006/main">
               <a:ext uri="{FF2B5EF4-FFF2-40B4-BE49-F238E27FC236}">
-                <a16:creationId xmlns:a16="http://schemas.microsoft.com/office/drawing/2014/main" id="{DC5A6C79-15C2-4939-9D30-FECF19CC6A1E}"/>
+                <a16:creationId xmlns:a16="http://schemas.microsoft.com/office/drawing/2014/main" id="{9D52436C-FFC8-4449-A2C3-CCA7F6668415}"/>
               </a:ext>
             </a:extLst>
           </p:cNvPr>
@@ -7496,7 +7616,7 @@
           <p:cNvPr id="4" name="Rectangle 3">
             <a:extLst xmlns:a="http://schemas.openxmlformats.org/drawingml/2006/main">
               <a:ext uri="{FF2B5EF4-FFF2-40B4-BE49-F238E27FC236}">
-                <a16:creationId xmlns:a16="http://schemas.microsoft.com/office/drawing/2014/main" id="{0EBA5D0A-F948-4EC2-BF6E-E40112168939}"/>
+                <a16:creationId xmlns:a16="http://schemas.microsoft.com/office/drawing/2014/main" id="{2DE08FE5-ECB9-4A7D-BD7A-2552869F8A40}"/>
               </a:ext>
             </a:extLst>
           </p:cNvPr>
@@ -7551,7 +7671,7 @@
           <p:cNvPr id="5" name="Rectangle 4">
             <a:extLst xmlns:a="http://schemas.openxmlformats.org/drawingml/2006/main">
               <a:ext uri="{FF2B5EF4-FFF2-40B4-BE49-F238E27FC236}">
-                <a16:creationId xmlns:a16="http://schemas.microsoft.com/office/drawing/2014/main" id="{58681F54-6F1A-41CB-8547-EE6D406C3223}"/>
+                <a16:creationId xmlns:a16="http://schemas.microsoft.com/office/drawing/2014/main" id="{0659434A-DB1F-4061-A0B1-725953405AD8}"/>
               </a:ext>
             </a:extLst>
           </p:cNvPr>
@@ -7606,7 +7726,7 @@
           <p:cNvPr id="6" name="TextBox 5">
             <a:extLst xmlns:a="http://schemas.openxmlformats.org/drawingml/2006/main">
               <a:ext uri="{FF2B5EF4-FFF2-40B4-BE49-F238E27FC236}">
-                <a16:creationId xmlns:a16="http://schemas.microsoft.com/office/drawing/2014/main" id="{EC774C99-F293-46C1-84BB-A1F3B4A5F85A}"/>
+                <a16:creationId xmlns:a16="http://schemas.microsoft.com/office/drawing/2014/main" id="{EBD628D5-61D3-4C10-88F1-6F01B0DFF990}"/>
               </a:ext>
             </a:extLst>
           </p:cNvPr>
@@ -7643,7 +7763,7 @@
                 <a:ea typeface="Aptos"/>
                 <a:cs typeface="Aptos"/>
               </a:rPr>
-              <a:t>Julkinen riippumaton evidenssikooste · 2026.07.27-26 · 2026-07-27 · Lähteet: Statistics Canada; Health Canada; NZ Ministry of Health; European Commission; FHM; FTC</a:t>
+              <a:t>Julkinen riippumaton evidenssikooste · 2026.07.27-27 · 2026-07-27 · Lähteet: World Bank; Statistics Canada; Health Canada; NZ Ministry of Health; Sejm; FHM; FTC</a:t>
             </a:r>
           </a:p>
         </p:txBody>
@@ -7653,7 +7773,7 @@
           <p:cNvPr id="7" name="TextBox 6">
             <a:extLst xmlns:a="http://schemas.openxmlformats.org/drawingml/2006/main">
               <a:ext uri="{FF2B5EF4-FFF2-40B4-BE49-F238E27FC236}">
-                <a16:creationId xmlns:a16="http://schemas.microsoft.com/office/drawing/2014/main" id="{0B1016B3-B531-4656-AE4F-49918745742D}"/>
+                <a16:creationId xmlns:a16="http://schemas.microsoft.com/office/drawing/2014/main" id="{24345A14-0A5D-42A0-9A78-C88C612EE5EF}"/>
               </a:ext>
             </a:extLst>
           </p:cNvPr>
@@ -7700,7 +7820,7 @@
           <p:cNvPr id="8" name="Rounded Rectangle 7">
             <a:extLst xmlns:a="http://schemas.openxmlformats.org/drawingml/2006/main">
               <a:ext uri="{FF2B5EF4-FFF2-40B4-BE49-F238E27FC236}">
-                <a16:creationId xmlns:a16="http://schemas.microsoft.com/office/drawing/2014/main" id="{B812EBAE-D3F3-4830-9B18-BC16399DF5E4}"/>
+                <a16:creationId xmlns:a16="http://schemas.microsoft.com/office/drawing/2014/main" id="{A4CDB13F-F70A-4D94-9234-DB4EAD9BE77C}"/>
               </a:ext>
             </a:extLst>
           </p:cNvPr>
@@ -7757,7 +7877,7 @@
           <p:cNvPr id="9" name="TextBox 8">
             <a:extLst xmlns:a="http://schemas.openxmlformats.org/drawingml/2006/main">
               <a:ext uri="{FF2B5EF4-FFF2-40B4-BE49-F238E27FC236}">
-                <a16:creationId xmlns:a16="http://schemas.microsoft.com/office/drawing/2014/main" id="{269A56F7-12AF-4B10-9B15-8569B9D732D6}"/>
+                <a16:creationId xmlns:a16="http://schemas.microsoft.com/office/drawing/2014/main" id="{89A5265E-8461-4C15-BCDF-2495515E7457}"/>
               </a:ext>
             </a:extLst>
           </p:cNvPr>
@@ -7794,7 +7914,7 @@
                 <a:ea typeface="Aptos"/>
                 <a:cs typeface="Aptos"/>
               </a:rPr>
-              <a:t>34 + 36</a:t>
+              <a:t>195</a:t>
             </a:r>
           </a:p>
         </p:txBody>
@@ -7804,7 +7924,7 @@
           <p:cNvPr id="10" name="TextBox 9">
             <a:extLst xmlns:a="http://schemas.openxmlformats.org/drawingml/2006/main">
               <a:ext uri="{FF2B5EF4-FFF2-40B4-BE49-F238E27FC236}">
-                <a16:creationId xmlns:a16="http://schemas.microsoft.com/office/drawing/2014/main" id="{FBE0E657-C8DA-4035-850C-1D8036940380}"/>
+                <a16:creationId xmlns:a16="http://schemas.microsoft.com/office/drawing/2014/main" id="{796A35BC-9064-478C-A562-5E7198447841}"/>
               </a:ext>
             </a:extLst>
           </p:cNvPr>
@@ -7841,7 +7961,7 @@
                 <a:ea typeface="Aptos"/>
                 <a:cs typeface="Aptos"/>
               </a:rPr>
-              <a:t>34 markkinamittaria 7 maasta + 36 Ruotsin FHM-rekisterilukua; ei myyntiä</a:t>
+              <a:t>578 WB-havaintoa · 39 markkinamittaria</a:t>
             </a:r>
           </a:p>
         </p:txBody>
@@ -7851,7 +7971,7 @@
           <p:cNvPr id="11" name="Rounded Rectangle 10">
             <a:extLst xmlns:a="http://schemas.openxmlformats.org/drawingml/2006/main">
               <a:ext uri="{FF2B5EF4-FFF2-40B4-BE49-F238E27FC236}">
-                <a16:creationId xmlns:a16="http://schemas.microsoft.com/office/drawing/2014/main" id="{D09038AA-C091-4F7C-8BDA-3DD07A2CD1BC}"/>
+                <a16:creationId xmlns:a16="http://schemas.microsoft.com/office/drawing/2014/main" id="{5BFCA815-2F0E-452A-8774-A10F09B1D6BB}"/>
               </a:ext>
             </a:extLst>
           </p:cNvPr>
@@ -7908,7 +8028,7 @@
           <p:cNvPr id="12" name="TextBox 11">
             <a:extLst xmlns:a="http://schemas.openxmlformats.org/drawingml/2006/main">
               <a:ext uri="{FF2B5EF4-FFF2-40B4-BE49-F238E27FC236}">
-                <a16:creationId xmlns:a16="http://schemas.microsoft.com/office/drawing/2014/main" id="{AB61D13A-0FA2-4D3E-8330-470A79CF757C}"/>
+                <a16:creationId xmlns:a16="http://schemas.microsoft.com/office/drawing/2014/main" id="{6F6F087F-B4B2-491D-9B17-B5001B81A094}"/>
               </a:ext>
             </a:extLst>
           </p:cNvPr>
@@ -7955,7 +8075,7 @@
           <p:cNvPr id="13" name="TextBox 12">
             <a:extLst xmlns:a="http://schemas.openxmlformats.org/drawingml/2006/main">
               <a:ext uri="{FF2B5EF4-FFF2-40B4-BE49-F238E27FC236}">
-                <a16:creationId xmlns:a16="http://schemas.microsoft.com/office/drawing/2014/main" id="{74C1B8A7-769B-4561-A5F5-4FD6796AABAF}"/>
+                <a16:creationId xmlns:a16="http://schemas.microsoft.com/office/drawing/2014/main" id="{C7D1912B-B848-4D36-9C4F-F198D3A6CD8B}"/>
               </a:ext>
             </a:extLst>
           </p:cNvPr>
@@ -8002,7 +8122,7 @@
           <p:cNvPr id="14" name="Rounded Rectangle 13">
             <a:extLst xmlns:a="http://schemas.openxmlformats.org/drawingml/2006/main">
               <a:ext uri="{FF2B5EF4-FFF2-40B4-BE49-F238E27FC236}">
-                <a16:creationId xmlns:a16="http://schemas.microsoft.com/office/drawing/2014/main" id="{4A55A83E-C540-4540-B0B4-CFC08655BF92}"/>
+                <a16:creationId xmlns:a16="http://schemas.microsoft.com/office/drawing/2014/main" id="{AB7DD891-AD1F-42A5-9AA2-00990B535B8C}"/>
               </a:ext>
             </a:extLst>
           </p:cNvPr>
@@ -8059,7 +8179,7 @@
           <p:cNvPr id="15" name="TextBox 14">
             <a:extLst xmlns:a="http://schemas.openxmlformats.org/drawingml/2006/main">
               <a:ext uri="{FF2B5EF4-FFF2-40B4-BE49-F238E27FC236}">
-                <a16:creationId xmlns:a16="http://schemas.microsoft.com/office/drawing/2014/main" id="{5C6C290B-CC06-499F-9834-1E34A0356846}"/>
+                <a16:creationId xmlns:a16="http://schemas.microsoft.com/office/drawing/2014/main" id="{F0989AAD-C703-4B91-A5FC-861AA298E622}"/>
               </a:ext>
             </a:extLst>
           </p:cNvPr>
@@ -8106,7 +8226,7 @@
           <p:cNvPr id="16" name="TextBox 15">
             <a:extLst xmlns:a="http://schemas.openxmlformats.org/drawingml/2006/main">
               <a:ext uri="{FF2B5EF4-FFF2-40B4-BE49-F238E27FC236}">
-                <a16:creationId xmlns:a16="http://schemas.microsoft.com/office/drawing/2014/main" id="{0B29B35C-CCDB-49C5-B53C-AC97B9788D77}"/>
+                <a16:creationId xmlns:a16="http://schemas.microsoft.com/office/drawing/2014/main" id="{0B71F7B5-0D9A-45A3-8F8C-7160A0F15B73}"/>
               </a:ext>
             </a:extLst>
           </p:cNvPr>
@@ -8153,7 +8273,7 @@
           <p:cNvPr id="17" name="TextBox 16">
             <a:extLst xmlns:a="http://schemas.openxmlformats.org/drawingml/2006/main">
               <a:ext uri="{FF2B5EF4-FFF2-40B4-BE49-F238E27FC236}">
-                <a16:creationId xmlns:a16="http://schemas.microsoft.com/office/drawing/2014/main" id="{7376BAA5-DB96-48D3-943B-527D37E1FE2B}"/>
+                <a16:creationId xmlns:a16="http://schemas.microsoft.com/office/drawing/2014/main" id="{7CA73519-F99F-44D0-B52A-605D5E3C3A32}"/>
               </a:ext>
             </a:extLst>
           </p:cNvPr>
@@ -8200,7 +8320,7 @@
           <p:cNvPr id="18" name="Rounded Rectangle 17">
             <a:extLst xmlns:a="http://schemas.openxmlformats.org/drawingml/2006/main">
               <a:ext uri="{FF2B5EF4-FFF2-40B4-BE49-F238E27FC236}">
-                <a16:creationId xmlns:a16="http://schemas.microsoft.com/office/drawing/2014/main" id="{014F7FFF-96FD-4F9B-8B73-6007E512F890}"/>
+                <a16:creationId xmlns:a16="http://schemas.microsoft.com/office/drawing/2014/main" id="{26411FA8-7BAA-4CED-80C1-F52A1E131729}"/>
               </a:ext>
             </a:extLst>
           </p:cNvPr>
@@ -8257,7 +8377,7 @@
           <p:cNvPr id="19" name="TextBox 18">
             <a:extLst xmlns:a="http://schemas.openxmlformats.org/drawingml/2006/main">
               <a:ext uri="{FF2B5EF4-FFF2-40B4-BE49-F238E27FC236}">
-                <a16:creationId xmlns:a16="http://schemas.microsoft.com/office/drawing/2014/main" id="{6B23E624-1542-4603-B3A8-85DD96C16418}"/>
+                <a16:creationId xmlns:a16="http://schemas.microsoft.com/office/drawing/2014/main" id="{95E54F72-FD6C-4953-A126-E15EFA920293}"/>
               </a:ext>
             </a:extLst>
           </p:cNvPr>
@@ -8304,7 +8424,7 @@
           <p:cNvPr id="20" name="TextBox 19">
             <a:extLst xmlns:a="http://schemas.openxmlformats.org/drawingml/2006/main">
               <a:ext uri="{FF2B5EF4-FFF2-40B4-BE49-F238E27FC236}">
-                <a16:creationId xmlns:a16="http://schemas.microsoft.com/office/drawing/2014/main" id="{C85B72DC-C384-438C-9C25-F65FFE360A6C}"/>
+                <a16:creationId xmlns:a16="http://schemas.microsoft.com/office/drawing/2014/main" id="{33E4F237-AF5F-4EA2-AC5E-2C1C8DB75674}"/>
               </a:ext>
             </a:extLst>
           </p:cNvPr>
@@ -8341,7 +8461,7 @@
                 <a:ea typeface="Aptos"/>
                 <a:cs typeface="Aptos"/>
               </a:rPr>
-              <a:t>Kanada 2024: retail 1,219160 mrd CAD (≈822,6 milj. EUR; ECB 2024); toimitukset 1,160754 mrd CAD (≈783,2 milj. EUR; ECB 2024). Kanada ja Uusi-Seelanti ovat 7/10 mutta eivät hyväksyttyjä. Puola on seuraava viranomaisdataohjelma. FTC 2021: 2,763 mrd USD (≈2,336 mrd EUR; ECB 2021). Ei summata.</a:t>
+              <a:t>Pohja: 195/578 WB + 36 Ruotsin FHM; ei myyntiä. Puola 2020–23 virta; 2025 verosilta 4 382 500 laitetta / 62 500 sarjaa. Kanada 1,219160 mrd CAD (≈822,6 milj. EUR; ECB 2024); Health Canada -toimitukset 1,160754 mrd CAD (≈783,2 milj. EUR; ECB 2024); FTC 2,763 mrd USD (≈2,336 mrd EUR; ECB 2021). Euromonitor 0/6; donor 0/3.</a:t>
             </a:r>
           </a:p>
         </p:txBody>
@@ -8349,7 +8469,7 @@
     </p:spTree>
     <p:extLst>
       <p:ext uri="{BB962C8B-B14F-4D97-AF65-F5344CB8AC3E}">
-        <p14:creationId xmlns:p14="http://schemas.microsoft.com/office/powerpoint/2010/main" val="1846812660"/>
+        <p14:creationId xmlns:p14="http://schemas.microsoft.com/office/powerpoint/2010/main" val="700130613"/>
       </p:ext>
     </p:extLst>
   </p:cSld>
@@ -8373,7 +8493,7 @@
           <p:cNvPr id="2" name="TextBox 1">
             <a:extLst xmlns:a="http://schemas.openxmlformats.org/drawingml/2006/main">
               <a:ext uri="{FF2B5EF4-FFF2-40B4-BE49-F238E27FC236}">
-                <a16:creationId xmlns:a16="http://schemas.microsoft.com/office/drawing/2014/main" id="{B5361164-91ED-4516-B62E-67677A0805BF}"/>
+                <a16:creationId xmlns:a16="http://schemas.microsoft.com/office/drawing/2014/main" id="{4C4437B0-829A-4CCA-8D5B-6C468C97D578}"/>
               </a:ext>
             </a:extLst>
           </p:cNvPr>
@@ -8420,7 +8540,7 @@
           <p:cNvPr id="3" name="TextBox 2">
             <a:extLst xmlns:a="http://schemas.openxmlformats.org/drawingml/2006/main">
               <a:ext uri="{FF2B5EF4-FFF2-40B4-BE49-F238E27FC236}">
-                <a16:creationId xmlns:a16="http://schemas.microsoft.com/office/drawing/2014/main" id="{273F35D5-E42A-4E7C-8237-8FB62923EAF1}"/>
+                <a16:creationId xmlns:a16="http://schemas.microsoft.com/office/drawing/2014/main" id="{BC5EEEA4-89B5-4B64-B7AB-727B4C7B59BC}"/>
               </a:ext>
             </a:extLst>
           </p:cNvPr>
@@ -8467,7 +8587,7 @@
           <p:cNvPr id="4" name="Rectangle 3">
             <a:extLst xmlns:a="http://schemas.openxmlformats.org/drawingml/2006/main">
               <a:ext uri="{FF2B5EF4-FFF2-40B4-BE49-F238E27FC236}">
-                <a16:creationId xmlns:a16="http://schemas.microsoft.com/office/drawing/2014/main" id="{B7614F4A-7B6C-475F-BE25-A870AF17EF19}"/>
+                <a16:creationId xmlns:a16="http://schemas.microsoft.com/office/drawing/2014/main" id="{4C246986-5996-4CAD-9F87-AE134AAFF13D}"/>
               </a:ext>
             </a:extLst>
           </p:cNvPr>
@@ -8522,7 +8642,7 @@
           <p:cNvPr id="5" name="Rectangle 4">
             <a:extLst xmlns:a="http://schemas.openxmlformats.org/drawingml/2006/main">
               <a:ext uri="{FF2B5EF4-FFF2-40B4-BE49-F238E27FC236}">
-                <a16:creationId xmlns:a16="http://schemas.microsoft.com/office/drawing/2014/main" id="{AE2DF4D5-AAB9-49D1-8447-3F58F45A165D}"/>
+                <a16:creationId xmlns:a16="http://schemas.microsoft.com/office/drawing/2014/main" id="{CB62B16B-372A-450C-AC78-932D115235C2}"/>
               </a:ext>
             </a:extLst>
           </p:cNvPr>
@@ -8577,7 +8697,7 @@
           <p:cNvPr id="6" name="TextBox 5">
             <a:extLst xmlns:a="http://schemas.openxmlformats.org/drawingml/2006/main">
               <a:ext uri="{FF2B5EF4-FFF2-40B4-BE49-F238E27FC236}">
-                <a16:creationId xmlns:a16="http://schemas.microsoft.com/office/drawing/2014/main" id="{7FD09767-EF6C-4933-A540-C43111706583}"/>
+                <a16:creationId xmlns:a16="http://schemas.microsoft.com/office/drawing/2014/main" id="{E126E3B1-EBAE-455A-95D1-80049AF6A5A9}"/>
               </a:ext>
             </a:extLst>
           </p:cNvPr>
@@ -8614,7 +8734,7 @@
                 <a:ea typeface="Aptos"/>
                 <a:cs typeface="Aptos"/>
               </a:rPr>
-              <a:t>Julkinen riippumaton evidenssikooste · 2026.07.27-26 · 2026-07-27 · Lähteet: Evidence Register; WIPO IP valuation</a:t>
+              <a:t>Julkinen riippumaton evidenssikooste · 2026.07.27-27 · 2026-07-27 · Lähteet: Evidence Register; WIPO IP valuation</a:t>
             </a:r>
           </a:p>
         </p:txBody>
@@ -8624,7 +8744,7 @@
           <p:cNvPr id="7" name="TextBox 6">
             <a:extLst xmlns:a="http://schemas.openxmlformats.org/drawingml/2006/main">
               <a:ext uri="{FF2B5EF4-FFF2-40B4-BE49-F238E27FC236}">
-                <a16:creationId xmlns:a16="http://schemas.microsoft.com/office/drawing/2014/main" id="{0E90B7A2-1594-4CF5-A0E0-3DD94343C7EE}"/>
+                <a16:creationId xmlns:a16="http://schemas.microsoft.com/office/drawing/2014/main" id="{2B466DC3-A413-464F-94CB-07D3D2212EDC}"/>
               </a:ext>
             </a:extLst>
           </p:cNvPr>
@@ -9111,7 +9231,7 @@
           <p:cNvPr id="9" name="TextBox 8">
             <a:extLst xmlns:a="http://schemas.openxmlformats.org/drawingml/2006/main">
               <a:ext uri="{FF2B5EF4-FFF2-40B4-BE49-F238E27FC236}">
-                <a16:creationId xmlns:a16="http://schemas.microsoft.com/office/drawing/2014/main" id="{0141C191-D383-44A7-8524-0D7DAC8D640E}"/>
+                <a16:creationId xmlns:a16="http://schemas.microsoft.com/office/drawing/2014/main" id="{253F8FA5-4780-4DA0-A173-46A09F1A99A4}"/>
               </a:ext>
             </a:extLst>
           </p:cNvPr>
@@ -9156,7 +9276,7 @@
     </p:spTree>
     <p:extLst>
       <p:ext uri="{BB962C8B-B14F-4D97-AF65-F5344CB8AC3E}">
-        <p14:creationId xmlns:p14="http://schemas.microsoft.com/office/powerpoint/2010/main" val="642244240"/>
+        <p14:creationId xmlns:p14="http://schemas.microsoft.com/office/powerpoint/2010/main" val="596071910"/>
       </p:ext>
     </p:extLst>
   </p:cSld>
@@ -9187,7 +9307,7 @@
           <p:cNvPr id="2" name="TextBox 1">
             <a:extLst xmlns:a="http://schemas.openxmlformats.org/drawingml/2006/main">
               <a:ext uri="{FF2B5EF4-FFF2-40B4-BE49-F238E27FC236}">
-                <a16:creationId xmlns:a16="http://schemas.microsoft.com/office/drawing/2014/main" id="{631C92D5-5009-4B6C-9723-0EB555348235}"/>
+                <a16:creationId xmlns:a16="http://schemas.microsoft.com/office/drawing/2014/main" id="{101BF804-E7BF-48DA-B830-2BBAE50CB142}"/>
               </a:ext>
             </a:extLst>
           </p:cNvPr>
@@ -9234,7 +9354,7 @@
           <p:cNvPr id="3" name="TextBox 2">
             <a:extLst xmlns:a="http://schemas.openxmlformats.org/drawingml/2006/main">
               <a:ext uri="{FF2B5EF4-FFF2-40B4-BE49-F238E27FC236}">
-                <a16:creationId xmlns:a16="http://schemas.microsoft.com/office/drawing/2014/main" id="{F1E8683A-C82E-435D-9249-42321520259B}"/>
+                <a16:creationId xmlns:a16="http://schemas.microsoft.com/office/drawing/2014/main" id="{E70F7088-DC66-4C77-9FF1-2D8FB1F9A8C7}"/>
               </a:ext>
             </a:extLst>
           </p:cNvPr>
@@ -9281,7 +9401,7 @@
           <p:cNvPr id="4" name="TextBox 3">
             <a:extLst xmlns:a="http://schemas.openxmlformats.org/drawingml/2006/main">
               <a:ext uri="{FF2B5EF4-FFF2-40B4-BE49-F238E27FC236}">
-                <a16:creationId xmlns:a16="http://schemas.microsoft.com/office/drawing/2014/main" id="{783707A1-FC30-4AD6-AAEE-1DC862D3A0EC}"/>
+                <a16:creationId xmlns:a16="http://schemas.microsoft.com/office/drawing/2014/main" id="{37B01CD9-F1F1-4002-805B-79D82C5AE5B0}"/>
               </a:ext>
             </a:extLst>
           </p:cNvPr>
@@ -9400,7 +9520,7 @@
           <p:cNvPr id="5" name="TextBox 4">
             <a:extLst xmlns:a="http://schemas.openxmlformats.org/drawingml/2006/main">
               <a:ext uri="{FF2B5EF4-FFF2-40B4-BE49-F238E27FC236}">
-                <a16:creationId xmlns:a16="http://schemas.microsoft.com/office/drawing/2014/main" id="{8745873D-658A-4307-A2FC-918A13796350}"/>
+                <a16:creationId xmlns:a16="http://schemas.microsoft.com/office/drawing/2014/main" id="{9D2D01F6-A471-4B78-8449-24CCCED002D9}"/>
               </a:ext>
             </a:extLst>
           </p:cNvPr>
@@ -9437,7 +9557,7 @@
                 <a:ea typeface="Aptos"/>
                 <a:cs typeface="Aptos"/>
               </a:rPr>
-              <a:t>Versio 2026.07.27-26 · 2026-07-27 · 6 / 6</a:t>
+              <a:t>Versio 2026.07.27-27 · 2026-07-27 · 6 / 6</a:t>
             </a:r>
           </a:p>
         </p:txBody>
@@ -9445,7 +9565,7 @@
     </p:spTree>
     <p:extLst>
       <p:ext uri="{BB962C8B-B14F-4D97-AF65-F5344CB8AC3E}">
-        <p14:creationId xmlns:p14="http://schemas.microsoft.com/office/powerpoint/2010/main" val="81999513"/>
+        <p14:creationId xmlns:p14="http://schemas.microsoft.com/office/powerpoint/2010/main" val="1338644363"/>
       </p:ext>
     </p:extLst>
   </p:cSld>

--- a/site/downloads/pixan-bank-deck-short-fi.pptx
+++ b/site/downloads/pixan-bank-deck-short-fi.pptx
@@ -2,18 +2,18 @@
 <file path=ppt/presentation.xml><?xml version="1.0" encoding="utf-8"?>
 <p:presentation xmlns:p="http://schemas.openxmlformats.org/presentationml/2006/main">
   <p:sldMasterIdLst>
-    <p:sldMasterId xmlns:r="http://schemas.openxmlformats.org/officeDocument/2006/relationships" id="2147483648" r:id="Rc363464989e940f6"/>
+    <p:sldMasterId xmlns:r="http://schemas.openxmlformats.org/officeDocument/2006/relationships" id="2147483648" r:id="R63f922ad6881407c"/>
   </p:sldMasterIdLst>
   <p:notesMasterIdLst>
-    <p:notesMasterId xmlns:r="http://schemas.openxmlformats.org/officeDocument/2006/relationships" r:id="R6094310950444930"/>
+    <p:notesMasterId xmlns:r="http://schemas.openxmlformats.org/officeDocument/2006/relationships" r:id="R7b7c6e5e9aae4c11"/>
   </p:notesMasterIdLst>
   <p:sldIdLst>
-    <p:sldId xmlns:r="http://schemas.openxmlformats.org/officeDocument/2006/relationships" id="256" r:id="Rfc1f489d44be436e"/>
-    <p:sldId xmlns:r="http://schemas.openxmlformats.org/officeDocument/2006/relationships" id="257" r:id="R83313cb0c2ee495e"/>
-    <p:sldId xmlns:r="http://schemas.openxmlformats.org/officeDocument/2006/relationships" id="258" r:id="Rcbdf8a1cc7114815"/>
-    <p:sldId xmlns:r="http://schemas.openxmlformats.org/officeDocument/2006/relationships" id="259" r:id="R78d69192ab6b4ded"/>
-    <p:sldId xmlns:r="http://schemas.openxmlformats.org/officeDocument/2006/relationships" id="260" r:id="Rd7dbbbb7c60d4969"/>
-    <p:sldId xmlns:r="http://schemas.openxmlformats.org/officeDocument/2006/relationships" id="261" r:id="R561dea0d95fc44d3"/>
+    <p:sldId xmlns:r="http://schemas.openxmlformats.org/officeDocument/2006/relationships" id="256" r:id="R16d70326d98542c8"/>
+    <p:sldId xmlns:r="http://schemas.openxmlformats.org/officeDocument/2006/relationships" id="257" r:id="R7ad430a36d6d4b7d"/>
+    <p:sldId xmlns:r="http://schemas.openxmlformats.org/officeDocument/2006/relationships" id="258" r:id="R71f201429586428f"/>
+    <p:sldId xmlns:r="http://schemas.openxmlformats.org/officeDocument/2006/relationships" id="259" r:id="R4df5f17875f04877"/>
+    <p:sldId xmlns:r="http://schemas.openxmlformats.org/officeDocument/2006/relationships" id="260" r:id="Rb3ef7d9622964ce7"/>
+    <p:sldId xmlns:r="http://schemas.openxmlformats.org/officeDocument/2006/relationships" id="261" r:id="R4de3c44fa6a64f02"/>
   </p:sldIdLst>
   <p:sldSz cx="12191999" cy="6858000"/>
   <p:notesSz cx="6858000" cy="9144000"/>
@@ -1887,7 +1887,7 @@
           <p:cNvPr id="2" name="Title 1">
             <a:extLst xmlns:a="http://schemas.openxmlformats.org/drawingml/2006/main">
               <a:ext uri="{FF2B5EF4-FFF2-40B4-BE49-F238E27FC236}">
-                <a16:creationId xmlns:a16="http://schemas.microsoft.com/office/drawing/2014/main" id="{C9120D67-3647-47F4-82C3-75320F83E413}"/>
+                <a16:creationId xmlns:a16="http://schemas.microsoft.com/office/drawing/2014/main" id="{B9359E6C-8385-4472-9984-8A84B5628836}"/>
               </a:ext>
             </a:extLst>
           </p:cNvPr>
@@ -1919,7 +1919,7 @@
           <p:cNvPr id="3" name="Subtitle 2">
             <a:extLst xmlns:a="http://schemas.openxmlformats.org/drawingml/2006/main">
               <a:ext uri="{FF2B5EF4-FFF2-40B4-BE49-F238E27FC236}">
-                <a16:creationId xmlns:a16="http://schemas.microsoft.com/office/drawing/2014/main" id="{FF954918-ABC6-49DC-81DF-0019E5352AD0}"/>
+                <a16:creationId xmlns:a16="http://schemas.microsoft.com/office/drawing/2014/main" id="{C41ADB0C-EA3A-4EF3-9954-F77A4A445930}"/>
               </a:ext>
             </a:extLst>
           </p:cNvPr>
@@ -2042,7 +2042,7 @@
           <p:cNvPr id="4" name="Date Placeholder 3">
             <a:extLst xmlns:a="http://schemas.openxmlformats.org/drawingml/2006/main">
               <a:ext uri="{FF2B5EF4-FFF2-40B4-BE49-F238E27FC236}">
-                <a16:creationId xmlns:a16="http://schemas.microsoft.com/office/drawing/2014/main" id="{AD061B5F-868D-445E-9D90-CE7F4942C2B5}"/>
+                <a16:creationId xmlns:a16="http://schemas.microsoft.com/office/drawing/2014/main" id="{D1C111ED-CFB2-47D1-BE7B-6CF94D803FD1}"/>
               </a:ext>
             </a:extLst>
           </p:cNvPr>
@@ -2069,7 +2069,7 @@
           <p:cNvPr id="5" name="Footer Placeholder 4">
             <a:extLst xmlns:a="http://schemas.openxmlformats.org/drawingml/2006/main">
               <a:ext uri="{FF2B5EF4-FFF2-40B4-BE49-F238E27FC236}">
-                <a16:creationId xmlns:a16="http://schemas.microsoft.com/office/drawing/2014/main" id="{55542651-11B7-4DCA-A973-F9DC323AF118}"/>
+                <a16:creationId xmlns:a16="http://schemas.microsoft.com/office/drawing/2014/main" id="{0FD44ABD-506C-4F5E-BE58-C63C6A7326CD}"/>
               </a:ext>
             </a:extLst>
           </p:cNvPr>
@@ -2092,7 +2092,7 @@
           <p:cNvPr id="6" name="Slide Number Placeholder 5">
             <a:extLst xmlns:a="http://schemas.openxmlformats.org/drawingml/2006/main">
               <a:ext uri="{FF2B5EF4-FFF2-40B4-BE49-F238E27FC236}">
-                <a16:creationId xmlns:a16="http://schemas.microsoft.com/office/drawing/2014/main" id="{CF196A42-9945-4BEA-97AA-1AE10075302B}"/>
+                <a16:creationId xmlns:a16="http://schemas.microsoft.com/office/drawing/2014/main" id="{2E34A205-3A36-479A-8062-8C1345AC8054}"/>
               </a:ext>
             </a:extLst>
           </p:cNvPr>
@@ -2136,7 +2136,7 @@
           <p:cNvPr id="2" name="Title 1">
             <a:extLst xmlns:a="http://schemas.openxmlformats.org/drawingml/2006/main">
               <a:ext uri="{FF2B5EF4-FFF2-40B4-BE49-F238E27FC236}">
-                <a16:creationId xmlns:a16="http://schemas.microsoft.com/office/drawing/2014/main" id="{910D8FAD-EEC1-45A1-A720-C73DD47C4C24}"/>
+                <a16:creationId xmlns:a16="http://schemas.microsoft.com/office/drawing/2014/main" id="{BDFEB862-C619-4C6D-B9A4-063C190B1842}"/>
               </a:ext>
             </a:extLst>
           </p:cNvPr>
@@ -2163,7 +2163,7 @@
           <p:cNvPr id="3" name="Vertical Text Placeholder 2">
             <a:extLst xmlns:a="http://schemas.openxmlformats.org/drawingml/2006/main">
               <a:ext uri="{FF2B5EF4-FFF2-40B4-BE49-F238E27FC236}">
-                <a16:creationId xmlns:a16="http://schemas.microsoft.com/office/drawing/2014/main" id="{7A741FAA-3599-44AA-A3D9-12CDA7C5CD22}"/>
+                <a16:creationId xmlns:a16="http://schemas.microsoft.com/office/drawing/2014/main" id="{8166C160-B9EC-4FF9-9414-9118046F37B4}"/>
               </a:ext>
             </a:extLst>
           </p:cNvPr>
@@ -2225,7 +2225,7 @@
           <p:cNvPr id="4" name="Date Placeholder 3">
             <a:extLst xmlns:a="http://schemas.openxmlformats.org/drawingml/2006/main">
               <a:ext uri="{FF2B5EF4-FFF2-40B4-BE49-F238E27FC236}">
-                <a16:creationId xmlns:a16="http://schemas.microsoft.com/office/drawing/2014/main" id="{98FD35E8-FB3C-4838-B745-19BF833B05E9}"/>
+                <a16:creationId xmlns:a16="http://schemas.microsoft.com/office/drawing/2014/main" id="{EA7CAB1A-24F6-4BA4-BF4F-B4C91B146BA2}"/>
               </a:ext>
             </a:extLst>
           </p:cNvPr>
@@ -2252,7 +2252,7 @@
           <p:cNvPr id="5" name="Footer Placeholder 4">
             <a:extLst xmlns:a="http://schemas.openxmlformats.org/drawingml/2006/main">
               <a:ext uri="{FF2B5EF4-FFF2-40B4-BE49-F238E27FC236}">
-                <a16:creationId xmlns:a16="http://schemas.microsoft.com/office/drawing/2014/main" id="{E925C1F0-B71B-4EE3-84AC-2E8A984F2985}"/>
+                <a16:creationId xmlns:a16="http://schemas.microsoft.com/office/drawing/2014/main" id="{9A1281B9-819A-4674-BEE6-417ACD52E259}"/>
               </a:ext>
             </a:extLst>
           </p:cNvPr>
@@ -2275,7 +2275,7 @@
           <p:cNvPr id="6" name="Slide Number Placeholder 5">
             <a:extLst xmlns:a="http://schemas.openxmlformats.org/drawingml/2006/main">
               <a:ext uri="{FF2B5EF4-FFF2-40B4-BE49-F238E27FC236}">
-                <a16:creationId xmlns:a16="http://schemas.microsoft.com/office/drawing/2014/main" id="{8D833ABF-8CB2-46BD-B65D-46DF36ACEB5D}"/>
+                <a16:creationId xmlns:a16="http://schemas.microsoft.com/office/drawing/2014/main" id="{FD71F405-FA11-4A42-8111-BF2B09741869}"/>
               </a:ext>
             </a:extLst>
           </p:cNvPr>
@@ -2319,7 +2319,7 @@
           <p:cNvPr id="2" name="Vertical Title 1">
             <a:extLst xmlns:a="http://schemas.openxmlformats.org/drawingml/2006/main">
               <a:ext uri="{FF2B5EF4-FFF2-40B4-BE49-F238E27FC236}">
-                <a16:creationId xmlns:a16="http://schemas.microsoft.com/office/drawing/2014/main" id="{543ABB0A-3D9B-4A1E-BAA3-C8657D10A979}"/>
+                <a16:creationId xmlns:a16="http://schemas.microsoft.com/office/drawing/2014/main" id="{C12AC2F0-0E70-4547-B524-CD217FB3986C}"/>
               </a:ext>
             </a:extLst>
           </p:cNvPr>
@@ -2351,7 +2351,7 @@
           <p:cNvPr id="3" name="Vertical Text Placeholder 2">
             <a:extLst xmlns:a="http://schemas.openxmlformats.org/drawingml/2006/main">
               <a:ext uri="{FF2B5EF4-FFF2-40B4-BE49-F238E27FC236}">
-                <a16:creationId xmlns:a16="http://schemas.microsoft.com/office/drawing/2014/main" id="{733FAABB-9627-41E4-B662-29870E8A44EF}"/>
+                <a16:creationId xmlns:a16="http://schemas.microsoft.com/office/drawing/2014/main" id="{659B57B2-57A6-4DD6-A5C6-4629B1939F48}"/>
               </a:ext>
             </a:extLst>
           </p:cNvPr>
@@ -2418,7 +2418,7 @@
           <p:cNvPr id="4" name="Date Placeholder 3">
             <a:extLst xmlns:a="http://schemas.openxmlformats.org/drawingml/2006/main">
               <a:ext uri="{FF2B5EF4-FFF2-40B4-BE49-F238E27FC236}">
-                <a16:creationId xmlns:a16="http://schemas.microsoft.com/office/drawing/2014/main" id="{2056F306-6D22-4B4F-8F6B-F6E669A61370}"/>
+                <a16:creationId xmlns:a16="http://schemas.microsoft.com/office/drawing/2014/main" id="{AFBFD066-D574-4940-AF4D-17CE389F4303}"/>
               </a:ext>
             </a:extLst>
           </p:cNvPr>
@@ -2445,7 +2445,7 @@
           <p:cNvPr id="5" name="Footer Placeholder 4">
             <a:extLst xmlns:a="http://schemas.openxmlformats.org/drawingml/2006/main">
               <a:ext uri="{FF2B5EF4-FFF2-40B4-BE49-F238E27FC236}">
-                <a16:creationId xmlns:a16="http://schemas.microsoft.com/office/drawing/2014/main" id="{DA4FB706-D1D4-40C2-9154-83897FB4F011}"/>
+                <a16:creationId xmlns:a16="http://schemas.microsoft.com/office/drawing/2014/main" id="{350E6B2C-E047-43AC-A34D-424F42838FAA}"/>
               </a:ext>
             </a:extLst>
           </p:cNvPr>
@@ -2468,7 +2468,7 @@
           <p:cNvPr id="6" name="Slide Number Placeholder 5">
             <a:extLst xmlns:a="http://schemas.openxmlformats.org/drawingml/2006/main">
               <a:ext uri="{FF2B5EF4-FFF2-40B4-BE49-F238E27FC236}">
-                <a16:creationId xmlns:a16="http://schemas.microsoft.com/office/drawing/2014/main" id="{E4C74A1D-2895-4E69-B095-B40B5E20657C}"/>
+                <a16:creationId xmlns:a16="http://schemas.microsoft.com/office/drawing/2014/main" id="{ADF16A61-13A2-4457-BD4E-E0FDE6289920}"/>
               </a:ext>
             </a:extLst>
           </p:cNvPr>
@@ -2512,7 +2512,7 @@
           <p:cNvPr id="2" name="Title 1">
             <a:extLst xmlns:a="http://schemas.openxmlformats.org/drawingml/2006/main">
               <a:ext uri="{FF2B5EF4-FFF2-40B4-BE49-F238E27FC236}">
-                <a16:creationId xmlns:a16="http://schemas.microsoft.com/office/drawing/2014/main" id="{CFED2343-88D7-43E1-AD54-3A4567EB79D1}"/>
+                <a16:creationId xmlns:a16="http://schemas.microsoft.com/office/drawing/2014/main" id="{9841658D-7173-445A-BBB3-365F80DB001C}"/>
               </a:ext>
             </a:extLst>
           </p:cNvPr>
@@ -2539,7 +2539,7 @@
           <p:cNvPr id="3" name="Content Placeholder 2">
             <a:extLst xmlns:a="http://schemas.openxmlformats.org/drawingml/2006/main">
               <a:ext uri="{FF2B5EF4-FFF2-40B4-BE49-F238E27FC236}">
-                <a16:creationId xmlns:a16="http://schemas.microsoft.com/office/drawing/2014/main" id="{EF77A7F0-5956-4720-B116-253686EB0255}"/>
+                <a16:creationId xmlns:a16="http://schemas.microsoft.com/office/drawing/2014/main" id="{D7CF19DF-E321-42A1-965B-F3401DE17A45}"/>
               </a:ext>
             </a:extLst>
           </p:cNvPr>
@@ -2601,7 +2601,7 @@
           <p:cNvPr id="4" name="Date Placeholder 3">
             <a:extLst xmlns:a="http://schemas.openxmlformats.org/drawingml/2006/main">
               <a:ext uri="{FF2B5EF4-FFF2-40B4-BE49-F238E27FC236}">
-                <a16:creationId xmlns:a16="http://schemas.microsoft.com/office/drawing/2014/main" id="{0EB64D5F-06FC-4C6F-B008-7A1B7F3A491E}"/>
+                <a16:creationId xmlns:a16="http://schemas.microsoft.com/office/drawing/2014/main" id="{FE260344-895B-4DDA-A8AF-237A223083CC}"/>
               </a:ext>
             </a:extLst>
           </p:cNvPr>
@@ -2628,7 +2628,7 @@
           <p:cNvPr id="5" name="Footer Placeholder 4">
             <a:extLst xmlns:a="http://schemas.openxmlformats.org/drawingml/2006/main">
               <a:ext uri="{FF2B5EF4-FFF2-40B4-BE49-F238E27FC236}">
-                <a16:creationId xmlns:a16="http://schemas.microsoft.com/office/drawing/2014/main" id="{061FEC12-572D-4688-A200-96E65237596F}"/>
+                <a16:creationId xmlns:a16="http://schemas.microsoft.com/office/drawing/2014/main" id="{8D6C4A49-AEF2-4279-AF2A-1695920204B8}"/>
               </a:ext>
             </a:extLst>
           </p:cNvPr>
@@ -2651,7 +2651,7 @@
           <p:cNvPr id="6" name="Slide Number Placeholder 5">
             <a:extLst xmlns:a="http://schemas.openxmlformats.org/drawingml/2006/main">
               <a:ext uri="{FF2B5EF4-FFF2-40B4-BE49-F238E27FC236}">
-                <a16:creationId xmlns:a16="http://schemas.microsoft.com/office/drawing/2014/main" id="{28B4C4C8-EDF1-4B31-95F9-DB98B5723F51}"/>
+                <a16:creationId xmlns:a16="http://schemas.microsoft.com/office/drawing/2014/main" id="{A73FD0DD-C66A-4F61-8DD8-35BC9D01FFA9}"/>
               </a:ext>
             </a:extLst>
           </p:cNvPr>
@@ -2695,7 +2695,7 @@
           <p:cNvPr id="2" name="Title 1">
             <a:extLst xmlns:a="http://schemas.openxmlformats.org/drawingml/2006/main">
               <a:ext uri="{FF2B5EF4-FFF2-40B4-BE49-F238E27FC236}">
-                <a16:creationId xmlns:a16="http://schemas.microsoft.com/office/drawing/2014/main" id="{E7BBA335-5E29-4071-847D-BCD029D53765}"/>
+                <a16:creationId xmlns:a16="http://schemas.microsoft.com/office/drawing/2014/main" id="{EA8E8586-EF00-4850-AD5D-3EC39A204B36}"/>
               </a:ext>
             </a:extLst>
           </p:cNvPr>
@@ -2732,7 +2732,7 @@
           <p:cNvPr id="3" name="Text Placeholder 2">
             <a:extLst xmlns:a="http://schemas.openxmlformats.org/drawingml/2006/main">
               <a:ext uri="{FF2B5EF4-FFF2-40B4-BE49-F238E27FC236}">
-                <a16:creationId xmlns:a16="http://schemas.microsoft.com/office/drawing/2014/main" id="{33918F84-27EE-4148-A2DD-1CC509325E50}"/>
+                <a16:creationId xmlns:a16="http://schemas.microsoft.com/office/drawing/2014/main" id="{71CB9BD5-26DE-4E97-9644-41C0BB31F8C3}"/>
               </a:ext>
             </a:extLst>
           </p:cNvPr>
@@ -2858,7 +2858,7 @@
           <p:cNvPr id="4" name="Date Placeholder 3">
             <a:extLst xmlns:a="http://schemas.openxmlformats.org/drawingml/2006/main">
               <a:ext uri="{FF2B5EF4-FFF2-40B4-BE49-F238E27FC236}">
-                <a16:creationId xmlns:a16="http://schemas.microsoft.com/office/drawing/2014/main" id="{FA9DBC96-F099-452A-ACD4-B14E6D5CE59A}"/>
+                <a16:creationId xmlns:a16="http://schemas.microsoft.com/office/drawing/2014/main" id="{27590D92-C6BB-46CF-A4E8-59FEFBD819F2}"/>
               </a:ext>
             </a:extLst>
           </p:cNvPr>
@@ -2885,7 +2885,7 @@
           <p:cNvPr id="5" name="Footer Placeholder 4">
             <a:extLst xmlns:a="http://schemas.openxmlformats.org/drawingml/2006/main">
               <a:ext uri="{FF2B5EF4-FFF2-40B4-BE49-F238E27FC236}">
-                <a16:creationId xmlns:a16="http://schemas.microsoft.com/office/drawing/2014/main" id="{85FA3579-76DF-48DB-A64E-4DDCF8F7050B}"/>
+                <a16:creationId xmlns:a16="http://schemas.microsoft.com/office/drawing/2014/main" id="{8D19CFA7-DE3F-4139-A064-5DC43623F9C7}"/>
               </a:ext>
             </a:extLst>
           </p:cNvPr>
@@ -2908,7 +2908,7 @@
           <p:cNvPr id="6" name="Slide Number Placeholder 5">
             <a:extLst xmlns:a="http://schemas.openxmlformats.org/drawingml/2006/main">
               <a:ext uri="{FF2B5EF4-FFF2-40B4-BE49-F238E27FC236}">
-                <a16:creationId xmlns:a16="http://schemas.microsoft.com/office/drawing/2014/main" id="{31A8A9B6-A275-443B-A749-477A0C03BC11}"/>
+                <a16:creationId xmlns:a16="http://schemas.microsoft.com/office/drawing/2014/main" id="{4B900BEC-825E-4465-89AE-DF6429A57AEC}"/>
               </a:ext>
             </a:extLst>
           </p:cNvPr>
@@ -2952,7 +2952,7 @@
           <p:cNvPr id="2" name="Title 1">
             <a:extLst xmlns:a="http://schemas.openxmlformats.org/drawingml/2006/main">
               <a:ext uri="{FF2B5EF4-FFF2-40B4-BE49-F238E27FC236}">
-                <a16:creationId xmlns:a16="http://schemas.microsoft.com/office/drawing/2014/main" id="{D272524F-32A7-4A2C-92B6-99432168C1DF}"/>
+                <a16:creationId xmlns:a16="http://schemas.microsoft.com/office/drawing/2014/main" id="{08BBBED7-56C6-4425-BB53-D39008EC15AE}"/>
               </a:ext>
             </a:extLst>
           </p:cNvPr>
@@ -2979,7 +2979,7 @@
           <p:cNvPr id="3" name="Content Placeholder 2">
             <a:extLst xmlns:a="http://schemas.openxmlformats.org/drawingml/2006/main">
               <a:ext uri="{FF2B5EF4-FFF2-40B4-BE49-F238E27FC236}">
-                <a16:creationId xmlns:a16="http://schemas.microsoft.com/office/drawing/2014/main" id="{296EBE94-DC39-4272-BCE5-05FDE8FDA72B}"/>
+                <a16:creationId xmlns:a16="http://schemas.microsoft.com/office/drawing/2014/main" id="{FE70AB95-115A-40E2-A4CE-6DE4418008A0}"/>
               </a:ext>
             </a:extLst>
           </p:cNvPr>
@@ -3083,7 +3083,7 @@
           <p:cNvPr id="4" name="Content Placeholder 3">
             <a:extLst xmlns:a="http://schemas.openxmlformats.org/drawingml/2006/main">
               <a:ext uri="{FF2B5EF4-FFF2-40B4-BE49-F238E27FC236}">
-                <a16:creationId xmlns:a16="http://schemas.microsoft.com/office/drawing/2014/main" id="{62C01C0F-0731-45CD-973A-2AAF22E86F91}"/>
+                <a16:creationId xmlns:a16="http://schemas.microsoft.com/office/drawing/2014/main" id="{E37CABFF-DF35-4623-BA7B-6EE1743715B5}"/>
               </a:ext>
             </a:extLst>
           </p:cNvPr>
@@ -3187,7 +3187,7 @@
           <p:cNvPr id="5" name="Date Placeholder 4">
             <a:extLst xmlns:a="http://schemas.openxmlformats.org/drawingml/2006/main">
               <a:ext uri="{FF2B5EF4-FFF2-40B4-BE49-F238E27FC236}">
-                <a16:creationId xmlns:a16="http://schemas.microsoft.com/office/drawing/2014/main" id="{85A19168-64E0-49EE-AE6B-8B76A871F102}"/>
+                <a16:creationId xmlns:a16="http://schemas.microsoft.com/office/drawing/2014/main" id="{9ED3F313-5EFF-4F89-B80B-5E79F37BD5DE}"/>
               </a:ext>
             </a:extLst>
           </p:cNvPr>
@@ -3214,7 +3214,7 @@
           <p:cNvPr id="6" name="Footer Placeholder 5">
             <a:extLst xmlns:a="http://schemas.openxmlformats.org/drawingml/2006/main">
               <a:ext uri="{FF2B5EF4-FFF2-40B4-BE49-F238E27FC236}">
-                <a16:creationId xmlns:a16="http://schemas.microsoft.com/office/drawing/2014/main" id="{9F3CE754-D5E4-4135-87F2-117CDD644BE4}"/>
+                <a16:creationId xmlns:a16="http://schemas.microsoft.com/office/drawing/2014/main" id="{B0461597-B474-4A90-B1B5-E7824D1ACC35}"/>
               </a:ext>
             </a:extLst>
           </p:cNvPr>
@@ -3237,7 +3237,7 @@
           <p:cNvPr id="7" name="Slide Number Placeholder 6">
             <a:extLst xmlns:a="http://schemas.openxmlformats.org/drawingml/2006/main">
               <a:ext uri="{FF2B5EF4-FFF2-40B4-BE49-F238E27FC236}">
-                <a16:creationId xmlns:a16="http://schemas.microsoft.com/office/drawing/2014/main" id="{9DEBF943-9A90-489A-8B19-BEFB537DB0C9}"/>
+                <a16:creationId xmlns:a16="http://schemas.microsoft.com/office/drawing/2014/main" id="{49BE5091-A8D4-4A2F-9B14-2FEEDBC40906}"/>
               </a:ext>
             </a:extLst>
           </p:cNvPr>
@@ -3281,7 +3281,7 @@
           <p:cNvPr id="2" name="Title 1">
             <a:extLst xmlns:a="http://schemas.openxmlformats.org/drawingml/2006/main">
               <a:ext uri="{FF2B5EF4-FFF2-40B4-BE49-F238E27FC236}">
-                <a16:creationId xmlns:a16="http://schemas.microsoft.com/office/drawing/2014/main" id="{8D6B05C3-F9F6-4B63-A305-E4B617AFEC90}"/>
+                <a16:creationId xmlns:a16="http://schemas.microsoft.com/office/drawing/2014/main" id="{918CC12A-CFBE-4808-A889-DBF9330270C5}"/>
               </a:ext>
             </a:extLst>
           </p:cNvPr>
@@ -3313,7 +3313,7 @@
           <p:cNvPr id="3" name="Text Placeholder 2">
             <a:extLst xmlns:a="http://schemas.openxmlformats.org/drawingml/2006/main">
               <a:ext uri="{FF2B5EF4-FFF2-40B4-BE49-F238E27FC236}">
-                <a16:creationId xmlns:a16="http://schemas.microsoft.com/office/drawing/2014/main" id="{92D4BA99-C42D-4AA4-9406-4BF13892B97D}"/>
+                <a16:creationId xmlns:a16="http://schemas.microsoft.com/office/drawing/2014/main" id="{2A425F38-000F-40DE-B832-AFB475DA7EC5}"/>
               </a:ext>
             </a:extLst>
           </p:cNvPr>
@@ -3385,7 +3385,7 @@
           <p:cNvPr id="4" name="Content Placeholder 3">
             <a:extLst xmlns:a="http://schemas.openxmlformats.org/drawingml/2006/main">
               <a:ext uri="{FF2B5EF4-FFF2-40B4-BE49-F238E27FC236}">
-                <a16:creationId xmlns:a16="http://schemas.microsoft.com/office/drawing/2014/main" id="{C11A64D4-517C-4A5C-AB06-A377F31B9269}"/>
+                <a16:creationId xmlns:a16="http://schemas.microsoft.com/office/drawing/2014/main" id="{C52129F4-0B7A-43B9-A72D-EA639EED356E}"/>
               </a:ext>
             </a:extLst>
           </p:cNvPr>
@@ -3489,7 +3489,7 @@
           <p:cNvPr id="5" name="Text Placeholder 4">
             <a:extLst xmlns:a="http://schemas.openxmlformats.org/drawingml/2006/main">
               <a:ext uri="{FF2B5EF4-FFF2-40B4-BE49-F238E27FC236}">
-                <a16:creationId xmlns:a16="http://schemas.microsoft.com/office/drawing/2014/main" id="{74D1E886-8430-456C-8B1E-5EC97A0B1F88}"/>
+                <a16:creationId xmlns:a16="http://schemas.microsoft.com/office/drawing/2014/main" id="{B62DB5D9-629C-437A-82A4-CC24FA4F08BD}"/>
               </a:ext>
             </a:extLst>
           </p:cNvPr>
@@ -3561,7 +3561,7 @@
           <p:cNvPr id="6" name="Content Placeholder 5">
             <a:extLst xmlns:a="http://schemas.openxmlformats.org/drawingml/2006/main">
               <a:ext uri="{FF2B5EF4-FFF2-40B4-BE49-F238E27FC236}">
-                <a16:creationId xmlns:a16="http://schemas.microsoft.com/office/drawing/2014/main" id="{A3AD2823-A126-437D-9EB3-A72ECF044287}"/>
+                <a16:creationId xmlns:a16="http://schemas.microsoft.com/office/drawing/2014/main" id="{38434957-015E-4DF5-A9F8-2F771F044F43}"/>
               </a:ext>
             </a:extLst>
           </p:cNvPr>
@@ -3665,7 +3665,7 @@
           <p:cNvPr id="7" name="Date Placeholder 6">
             <a:extLst xmlns:a="http://schemas.openxmlformats.org/drawingml/2006/main">
               <a:ext uri="{FF2B5EF4-FFF2-40B4-BE49-F238E27FC236}">
-                <a16:creationId xmlns:a16="http://schemas.microsoft.com/office/drawing/2014/main" id="{5EED74A5-D387-48CD-8683-7E2482CEDC01}"/>
+                <a16:creationId xmlns:a16="http://schemas.microsoft.com/office/drawing/2014/main" id="{0144005F-6C0A-4DCC-B1F7-2C203C3668B7}"/>
               </a:ext>
             </a:extLst>
           </p:cNvPr>
@@ -3692,7 +3692,7 @@
           <p:cNvPr id="8" name="Footer Placeholder 7">
             <a:extLst xmlns:a="http://schemas.openxmlformats.org/drawingml/2006/main">
               <a:ext uri="{FF2B5EF4-FFF2-40B4-BE49-F238E27FC236}">
-                <a16:creationId xmlns:a16="http://schemas.microsoft.com/office/drawing/2014/main" id="{7EB18915-C58B-4876-A872-27EAF923B0C7}"/>
+                <a16:creationId xmlns:a16="http://schemas.microsoft.com/office/drawing/2014/main" id="{F89E5E9A-26CE-4F17-ADCF-13521DF918EA}"/>
               </a:ext>
             </a:extLst>
           </p:cNvPr>
@@ -3715,7 +3715,7 @@
           <p:cNvPr id="9" name="Slide Number Placeholder 8">
             <a:extLst xmlns:a="http://schemas.openxmlformats.org/drawingml/2006/main">
               <a:ext uri="{FF2B5EF4-FFF2-40B4-BE49-F238E27FC236}">
-                <a16:creationId xmlns:a16="http://schemas.microsoft.com/office/drawing/2014/main" id="{1D6290F4-6CBE-4A62-87EF-2F44D15BA316}"/>
+                <a16:creationId xmlns:a16="http://schemas.microsoft.com/office/drawing/2014/main" id="{046D2280-E426-46E9-A64B-CAA46EF72F52}"/>
               </a:ext>
             </a:extLst>
           </p:cNvPr>
@@ -3759,7 +3759,7 @@
           <p:cNvPr id="2" name="Title 1">
             <a:extLst xmlns:a="http://schemas.openxmlformats.org/drawingml/2006/main">
               <a:ext uri="{FF2B5EF4-FFF2-40B4-BE49-F238E27FC236}">
-                <a16:creationId xmlns:a16="http://schemas.microsoft.com/office/drawing/2014/main" id="{C1E3C10F-4D10-4040-BF01-DFFA7058FF5D}"/>
+                <a16:creationId xmlns:a16="http://schemas.microsoft.com/office/drawing/2014/main" id="{810F85C1-F86D-4FB4-8171-B4994F3EFB89}"/>
               </a:ext>
             </a:extLst>
           </p:cNvPr>
@@ -3786,7 +3786,7 @@
           <p:cNvPr id="3" name="Date Placeholder 2">
             <a:extLst xmlns:a="http://schemas.openxmlformats.org/drawingml/2006/main">
               <a:ext uri="{FF2B5EF4-FFF2-40B4-BE49-F238E27FC236}">
-                <a16:creationId xmlns:a16="http://schemas.microsoft.com/office/drawing/2014/main" id="{AEFC882F-C1DC-4987-92D2-E76204D89BFB}"/>
+                <a16:creationId xmlns:a16="http://schemas.microsoft.com/office/drawing/2014/main" id="{62B4796A-7645-40F0-85B9-424BC252B5E2}"/>
               </a:ext>
             </a:extLst>
           </p:cNvPr>
@@ -3813,7 +3813,7 @@
           <p:cNvPr id="4" name="Footer Placeholder 3">
             <a:extLst xmlns:a="http://schemas.openxmlformats.org/drawingml/2006/main">
               <a:ext uri="{FF2B5EF4-FFF2-40B4-BE49-F238E27FC236}">
-                <a16:creationId xmlns:a16="http://schemas.microsoft.com/office/drawing/2014/main" id="{62C49513-DFEA-4F19-A18C-7A4711EFC26D}"/>
+                <a16:creationId xmlns:a16="http://schemas.microsoft.com/office/drawing/2014/main" id="{A620B9F4-DD58-4B5A-9BF0-5806D71DCD4C}"/>
               </a:ext>
             </a:extLst>
           </p:cNvPr>
@@ -3836,7 +3836,7 @@
           <p:cNvPr id="5" name="Slide Number Placeholder 4">
             <a:extLst xmlns:a="http://schemas.openxmlformats.org/drawingml/2006/main">
               <a:ext uri="{FF2B5EF4-FFF2-40B4-BE49-F238E27FC236}">
-                <a16:creationId xmlns:a16="http://schemas.microsoft.com/office/drawing/2014/main" id="{034D6379-0435-4071-B45F-D874EA59D6FF}"/>
+                <a16:creationId xmlns:a16="http://schemas.microsoft.com/office/drawing/2014/main" id="{FF93B434-E464-4CFA-AE13-DA5D7B6D3F32}"/>
               </a:ext>
             </a:extLst>
           </p:cNvPr>
@@ -3880,7 +3880,7 @@
           <p:cNvPr id="2" name="Date Placeholder 1">
             <a:extLst xmlns:a="http://schemas.openxmlformats.org/drawingml/2006/main">
               <a:ext uri="{FF2B5EF4-FFF2-40B4-BE49-F238E27FC236}">
-                <a16:creationId xmlns:a16="http://schemas.microsoft.com/office/drawing/2014/main" id="{FED6F299-1BAB-49CB-B8E2-100D4630A44F}"/>
+                <a16:creationId xmlns:a16="http://schemas.microsoft.com/office/drawing/2014/main" id="{C6861321-968E-471F-B399-ED8610413EA5}"/>
               </a:ext>
             </a:extLst>
           </p:cNvPr>
@@ -3907,7 +3907,7 @@
           <p:cNvPr id="3" name="Footer Placeholder 2">
             <a:extLst xmlns:a="http://schemas.openxmlformats.org/drawingml/2006/main">
               <a:ext uri="{FF2B5EF4-FFF2-40B4-BE49-F238E27FC236}">
-                <a16:creationId xmlns:a16="http://schemas.microsoft.com/office/drawing/2014/main" id="{4140D3A6-3DEF-4A66-B0D8-556CC9E4EE08}"/>
+                <a16:creationId xmlns:a16="http://schemas.microsoft.com/office/drawing/2014/main" id="{12D72E40-5794-4524-9F6D-450EE367F3FE}"/>
               </a:ext>
             </a:extLst>
           </p:cNvPr>
@@ -3930,7 +3930,7 @@
           <p:cNvPr id="4" name="Slide Number Placeholder 3">
             <a:extLst xmlns:a="http://schemas.openxmlformats.org/drawingml/2006/main">
               <a:ext uri="{FF2B5EF4-FFF2-40B4-BE49-F238E27FC236}">
-                <a16:creationId xmlns:a16="http://schemas.microsoft.com/office/drawing/2014/main" id="{CA633137-2D3C-4501-95EB-2FEAC62DFB3F}"/>
+                <a16:creationId xmlns:a16="http://schemas.microsoft.com/office/drawing/2014/main" id="{E8BD8497-36FF-409E-87DF-183FB0EDF747}"/>
               </a:ext>
             </a:extLst>
           </p:cNvPr>
@@ -3974,7 +3974,7 @@
           <p:cNvPr id="2" name="Title 1">
             <a:extLst xmlns:a="http://schemas.openxmlformats.org/drawingml/2006/main">
               <a:ext uri="{FF2B5EF4-FFF2-40B4-BE49-F238E27FC236}">
-                <a16:creationId xmlns:a16="http://schemas.microsoft.com/office/drawing/2014/main" id="{3054883F-AA22-4296-80DD-7D8ED4BDA384}"/>
+                <a16:creationId xmlns:a16="http://schemas.microsoft.com/office/drawing/2014/main" id="{D07FFCC3-AE17-4A58-94AA-ADDE319A09F6}"/>
               </a:ext>
             </a:extLst>
           </p:cNvPr>
@@ -4011,7 +4011,7 @@
           <p:cNvPr id="3" name="Content Placeholder 2">
             <a:extLst xmlns:a="http://schemas.openxmlformats.org/drawingml/2006/main">
               <a:ext uri="{FF2B5EF4-FFF2-40B4-BE49-F238E27FC236}">
-                <a16:creationId xmlns:a16="http://schemas.microsoft.com/office/drawing/2014/main" id="{73C6E0C2-3A3D-494E-A636-3465A64EA741}"/>
+                <a16:creationId xmlns:a16="http://schemas.microsoft.com/office/drawing/2014/main" id="{373A6AC9-E090-40DD-A635-BFBDF82D5D08}"/>
               </a:ext>
             </a:extLst>
           </p:cNvPr>
@@ -4115,7 +4115,7 @@
           <p:cNvPr id="4" name="Text Placeholder 3">
             <a:extLst xmlns:a="http://schemas.openxmlformats.org/drawingml/2006/main">
               <a:ext uri="{FF2B5EF4-FFF2-40B4-BE49-F238E27FC236}">
-                <a16:creationId xmlns:a16="http://schemas.microsoft.com/office/drawing/2014/main" id="{8BAAF2C6-3FA3-4C35-B37C-54E980BF4D6E}"/>
+                <a16:creationId xmlns:a16="http://schemas.microsoft.com/office/drawing/2014/main" id="{6EF0243B-2103-49FF-9F5F-C61F58F75006}"/>
               </a:ext>
             </a:extLst>
           </p:cNvPr>
@@ -4187,7 +4187,7 @@
           <p:cNvPr id="5" name="Date Placeholder 4">
             <a:extLst xmlns:a="http://schemas.openxmlformats.org/drawingml/2006/main">
               <a:ext uri="{FF2B5EF4-FFF2-40B4-BE49-F238E27FC236}">
-                <a16:creationId xmlns:a16="http://schemas.microsoft.com/office/drawing/2014/main" id="{0A8C75A6-F048-42E5-BFE5-C6F2A7F3DD3B}"/>
+                <a16:creationId xmlns:a16="http://schemas.microsoft.com/office/drawing/2014/main" id="{309C4E94-8D74-4AB5-B5CE-85320E8BF809}"/>
               </a:ext>
             </a:extLst>
           </p:cNvPr>
@@ -4214,7 +4214,7 @@
           <p:cNvPr id="6" name="Footer Placeholder 5">
             <a:extLst xmlns:a="http://schemas.openxmlformats.org/drawingml/2006/main">
               <a:ext uri="{FF2B5EF4-FFF2-40B4-BE49-F238E27FC236}">
-                <a16:creationId xmlns:a16="http://schemas.microsoft.com/office/drawing/2014/main" id="{33925BE3-3237-4C45-87D5-480AE09091D7}"/>
+                <a16:creationId xmlns:a16="http://schemas.microsoft.com/office/drawing/2014/main" id="{C1791874-B13B-49D7-9286-3B00B496D91E}"/>
               </a:ext>
             </a:extLst>
           </p:cNvPr>
@@ -4237,7 +4237,7 @@
           <p:cNvPr id="7" name="Slide Number Placeholder 6">
             <a:extLst xmlns:a="http://schemas.openxmlformats.org/drawingml/2006/main">
               <a:ext uri="{FF2B5EF4-FFF2-40B4-BE49-F238E27FC236}">
-                <a16:creationId xmlns:a16="http://schemas.microsoft.com/office/drawing/2014/main" id="{F4C08470-53EA-41D4-A73B-E6325D1F0DAD}"/>
+                <a16:creationId xmlns:a16="http://schemas.microsoft.com/office/drawing/2014/main" id="{6C40383D-154C-4327-97BC-FEB1C8C99DF2}"/>
               </a:ext>
             </a:extLst>
           </p:cNvPr>
@@ -4281,7 +4281,7 @@
           <p:cNvPr id="2" name="Title 1">
             <a:extLst xmlns:a="http://schemas.openxmlformats.org/drawingml/2006/main">
               <a:ext uri="{FF2B5EF4-FFF2-40B4-BE49-F238E27FC236}">
-                <a16:creationId xmlns:a16="http://schemas.microsoft.com/office/drawing/2014/main" id="{93BCB048-FBA8-4633-AE78-9485085FA378}"/>
+                <a16:creationId xmlns:a16="http://schemas.microsoft.com/office/drawing/2014/main" id="{F541EF22-F161-418D-BDB5-52C3C92F7319}"/>
               </a:ext>
             </a:extLst>
           </p:cNvPr>
@@ -4318,7 +4318,7 @@
           <p:cNvPr id="3" name="Picture Placeholder 2">
             <a:extLst xmlns:a="http://schemas.openxmlformats.org/drawingml/2006/main">
               <a:ext uri="{FF2B5EF4-FFF2-40B4-BE49-F238E27FC236}">
-                <a16:creationId xmlns:a16="http://schemas.microsoft.com/office/drawing/2014/main" id="{BBC7262F-7B0F-4072-8284-863F07EE8D3D}"/>
+                <a16:creationId xmlns:a16="http://schemas.microsoft.com/office/drawing/2014/main" id="{DDC10795-BAAA-4D0E-94D3-1E5D49A99E4D}"/>
               </a:ext>
             </a:extLst>
           </p:cNvPr>
@@ -4383,7 +4383,7 @@
           <p:cNvPr id="4" name="Text Placeholder 3">
             <a:extLst xmlns:a="http://schemas.openxmlformats.org/drawingml/2006/main">
               <a:ext uri="{FF2B5EF4-FFF2-40B4-BE49-F238E27FC236}">
-                <a16:creationId xmlns:a16="http://schemas.microsoft.com/office/drawing/2014/main" id="{6642BBFB-ED46-4599-A8DE-5565602CE211}"/>
+                <a16:creationId xmlns:a16="http://schemas.microsoft.com/office/drawing/2014/main" id="{02F63EFA-0680-4163-8065-6A4AA81FEA6C}"/>
               </a:ext>
             </a:extLst>
           </p:cNvPr>
@@ -4455,7 +4455,7 @@
           <p:cNvPr id="5" name="Date Placeholder 4">
             <a:extLst xmlns:a="http://schemas.openxmlformats.org/drawingml/2006/main">
               <a:ext uri="{FF2B5EF4-FFF2-40B4-BE49-F238E27FC236}">
-                <a16:creationId xmlns:a16="http://schemas.microsoft.com/office/drawing/2014/main" id="{61618A02-CE41-4AAC-94BD-7AB18EB75EEB}"/>
+                <a16:creationId xmlns:a16="http://schemas.microsoft.com/office/drawing/2014/main" id="{4A44C1A5-FFA4-43A7-A7E9-3DE8CE8E697A}"/>
               </a:ext>
             </a:extLst>
           </p:cNvPr>
@@ -4482,7 +4482,7 @@
           <p:cNvPr id="6" name="Footer Placeholder 5">
             <a:extLst xmlns:a="http://schemas.openxmlformats.org/drawingml/2006/main">
               <a:ext uri="{FF2B5EF4-FFF2-40B4-BE49-F238E27FC236}">
-                <a16:creationId xmlns:a16="http://schemas.microsoft.com/office/drawing/2014/main" id="{33D0347C-AA23-4B92-9D25-F471983A2106}"/>
+                <a16:creationId xmlns:a16="http://schemas.microsoft.com/office/drawing/2014/main" id="{CCF59E35-A39B-48A8-B925-CE23B3698799}"/>
               </a:ext>
             </a:extLst>
           </p:cNvPr>
@@ -4505,7 +4505,7 @@
           <p:cNvPr id="7" name="Slide Number Placeholder 6">
             <a:extLst xmlns:a="http://schemas.openxmlformats.org/drawingml/2006/main">
               <a:ext uri="{FF2B5EF4-FFF2-40B4-BE49-F238E27FC236}">
-                <a16:creationId xmlns:a16="http://schemas.microsoft.com/office/drawing/2014/main" id="{43988015-20AD-4942-B718-9FC1A6C7B4BD}"/>
+                <a16:creationId xmlns:a16="http://schemas.microsoft.com/office/drawing/2014/main" id="{CB71887D-9E47-4D3B-A51A-C2AE17C25641}"/>
               </a:ext>
             </a:extLst>
           </p:cNvPr>
@@ -4554,7 +4554,7 @@
           <p:cNvPr id="2" name="Title Placeholder 1">
             <a:extLst xmlns:a="http://schemas.openxmlformats.org/drawingml/2006/main">
               <a:ext uri="{FF2B5EF4-FFF2-40B4-BE49-F238E27FC236}">
-                <a16:creationId xmlns:a16="http://schemas.microsoft.com/office/drawing/2014/main" id="{B956733D-AAF5-415F-9E76-8673E9498EAE}"/>
+                <a16:creationId xmlns:a16="http://schemas.microsoft.com/office/drawing/2014/main" id="{C76441A3-950E-456D-B83A-9828844A6E2F}"/>
               </a:ext>
             </a:extLst>
           </p:cNvPr>
@@ -4591,7 +4591,7 @@
           <p:cNvPr id="3" name="Text Placeholder 2">
             <a:extLst xmlns:a="http://schemas.openxmlformats.org/drawingml/2006/main">
               <a:ext uri="{FF2B5EF4-FFF2-40B4-BE49-F238E27FC236}">
-                <a16:creationId xmlns:a16="http://schemas.microsoft.com/office/drawing/2014/main" id="{195B82C2-0BFB-4F53-808E-DC6E40FF40E2}"/>
+                <a16:creationId xmlns:a16="http://schemas.microsoft.com/office/drawing/2014/main" id="{E827F8E7-4087-4C88-A50D-91927CEFF73D}"/>
               </a:ext>
             </a:extLst>
           </p:cNvPr>
@@ -4663,7 +4663,7 @@
           <p:cNvPr id="4" name="Date Placeholder 3">
             <a:extLst xmlns:a="http://schemas.openxmlformats.org/drawingml/2006/main">
               <a:ext uri="{FF2B5EF4-FFF2-40B4-BE49-F238E27FC236}">
-                <a16:creationId xmlns:a16="http://schemas.microsoft.com/office/drawing/2014/main" id="{36DB41F5-093B-4C3C-8564-13700098049F}"/>
+                <a16:creationId xmlns:a16="http://schemas.microsoft.com/office/drawing/2014/main" id="{9B02D621-D454-4000-AC95-9CEF012E8967}"/>
               </a:ext>
             </a:extLst>
           </p:cNvPr>
@@ -4709,7 +4709,7 @@
           <p:cNvPr id="5" name="Footer Placeholder 4">
             <a:extLst xmlns:a="http://schemas.openxmlformats.org/drawingml/2006/main">
               <a:ext uri="{FF2B5EF4-FFF2-40B4-BE49-F238E27FC236}">
-                <a16:creationId xmlns:a16="http://schemas.microsoft.com/office/drawing/2014/main" id="{E4FD2DEB-09D8-44B9-B72F-902846E6CB3E}"/>
+                <a16:creationId xmlns:a16="http://schemas.microsoft.com/office/drawing/2014/main" id="{05BB686D-0C9B-4101-BA0D-F280D1DB4474}"/>
               </a:ext>
             </a:extLst>
           </p:cNvPr>
@@ -4751,7 +4751,7 @@
           <p:cNvPr id="6" name="Slide Number Placeholder 5">
             <a:extLst xmlns:a="http://schemas.openxmlformats.org/drawingml/2006/main">
               <a:ext uri="{FF2B5EF4-FFF2-40B4-BE49-F238E27FC236}">
-                <a16:creationId xmlns:a16="http://schemas.microsoft.com/office/drawing/2014/main" id="{A5A618E3-3B6B-4ED8-94C7-5F8F22380C74}"/>
+                <a16:creationId xmlns:a16="http://schemas.microsoft.com/office/drawing/2014/main" id="{23B42F5D-96F8-46D6-9045-2FDBC530AFF1}"/>
               </a:ext>
             </a:extLst>
           </p:cNvPr>
@@ -4796,17 +4796,17 @@
   </p:cSld>
   <p:clrMap bg1="lt1" tx1="dk1" bg2="lt2" tx2="dk2" accent1="accent1" accent2="accent2" accent3="accent3" accent4="accent4" accent5="accent5" accent6="accent6" hlink="hlink" folHlink="folHlink"/>
   <p:sldLayoutIdLst>
-    <p:sldLayoutId xmlns:r="http://schemas.openxmlformats.org/officeDocument/2006/relationships" id="2147483649" r:id="R72ee384667df4497"/>
-    <p:sldLayoutId xmlns:r="http://schemas.openxmlformats.org/officeDocument/2006/relationships" id="2147483650" r:id="R5c306ccc52df44c9"/>
-    <p:sldLayoutId xmlns:r="http://schemas.openxmlformats.org/officeDocument/2006/relationships" id="2147483651" r:id="R57110c74e619452a"/>
-    <p:sldLayoutId xmlns:r="http://schemas.openxmlformats.org/officeDocument/2006/relationships" id="2147483652" r:id="R5ba9c61ed0c44af9"/>
-    <p:sldLayoutId xmlns:r="http://schemas.openxmlformats.org/officeDocument/2006/relationships" id="2147483653" r:id="R7eab99552adb49a9"/>
-    <p:sldLayoutId xmlns:r="http://schemas.openxmlformats.org/officeDocument/2006/relationships" id="2147483654" r:id="R82f45bcb1e964032"/>
-    <p:sldLayoutId xmlns:r="http://schemas.openxmlformats.org/officeDocument/2006/relationships" id="2147483655" r:id="R2b5fd3d43bed4e34"/>
-    <p:sldLayoutId xmlns:r="http://schemas.openxmlformats.org/officeDocument/2006/relationships" id="2147483656" r:id="R2326b3df6ad542ed"/>
-    <p:sldLayoutId xmlns:r="http://schemas.openxmlformats.org/officeDocument/2006/relationships" id="2147483657" r:id="R8a61a50cd6834053"/>
-    <p:sldLayoutId xmlns:r="http://schemas.openxmlformats.org/officeDocument/2006/relationships" id="2147483658" r:id="Rf87076e0c1bc49e3"/>
-    <p:sldLayoutId xmlns:r="http://schemas.openxmlformats.org/officeDocument/2006/relationships" id="2147483659" r:id="R3ac35f3338924494"/>
+    <p:sldLayoutId xmlns:r="http://schemas.openxmlformats.org/officeDocument/2006/relationships" id="2147483649" r:id="Re34a5855711949f3"/>
+    <p:sldLayoutId xmlns:r="http://schemas.openxmlformats.org/officeDocument/2006/relationships" id="2147483650" r:id="R3796bb5c40614b2d"/>
+    <p:sldLayoutId xmlns:r="http://schemas.openxmlformats.org/officeDocument/2006/relationships" id="2147483651" r:id="Rf394fe03a22b4dd9"/>
+    <p:sldLayoutId xmlns:r="http://schemas.openxmlformats.org/officeDocument/2006/relationships" id="2147483652" r:id="R510d5431fd8749e9"/>
+    <p:sldLayoutId xmlns:r="http://schemas.openxmlformats.org/officeDocument/2006/relationships" id="2147483653" r:id="Raea71bfed01a4677"/>
+    <p:sldLayoutId xmlns:r="http://schemas.openxmlformats.org/officeDocument/2006/relationships" id="2147483654" r:id="Rc3c98d2d9fc7477d"/>
+    <p:sldLayoutId xmlns:r="http://schemas.openxmlformats.org/officeDocument/2006/relationships" id="2147483655" r:id="Rda1afdb45af446eb"/>
+    <p:sldLayoutId xmlns:r="http://schemas.openxmlformats.org/officeDocument/2006/relationships" id="2147483656" r:id="R14f813245f774afa"/>
+    <p:sldLayoutId xmlns:r="http://schemas.openxmlformats.org/officeDocument/2006/relationships" id="2147483657" r:id="Rf6d66edb321c4765"/>
+    <p:sldLayoutId xmlns:r="http://schemas.openxmlformats.org/officeDocument/2006/relationships" id="2147483658" r:id="R2cb2d314f34f45af"/>
+    <p:sldLayoutId xmlns:r="http://schemas.openxmlformats.org/officeDocument/2006/relationships" id="2147483659" r:id="R32c2875b7799435a"/>
   </p:sldLayoutIdLst>
   <p:txStyles>
     <p:titleStyle>
@@ -5359,7 +5359,7 @@
           <p:cNvPr id="2" name="Rectangle 1">
             <a:extLst xmlns:a="http://schemas.openxmlformats.org/drawingml/2006/main">
               <a:ext uri="{FF2B5EF4-FFF2-40B4-BE49-F238E27FC236}">
-                <a16:creationId xmlns:a16="http://schemas.microsoft.com/office/drawing/2014/main" id="{CFFE576E-C3AB-4F9F-9F7D-A15A071F33EC}"/>
+                <a16:creationId xmlns:a16="http://schemas.microsoft.com/office/drawing/2014/main" id="{BF1AA31A-654B-47C4-AE2F-26AB3046215D}"/>
               </a:ext>
             </a:extLst>
           </p:cNvPr>
@@ -5414,7 +5414,7 @@
           <p:cNvPr id="3" name="TextBox 2">
             <a:extLst xmlns:a="http://schemas.openxmlformats.org/drawingml/2006/main">
               <a:ext uri="{FF2B5EF4-FFF2-40B4-BE49-F238E27FC236}">
-                <a16:creationId xmlns:a16="http://schemas.microsoft.com/office/drawing/2014/main" id="{37B40587-A021-4350-9B02-B1F717AD80D2}"/>
+                <a16:creationId xmlns:a16="http://schemas.microsoft.com/office/drawing/2014/main" id="{E2650A72-8FEE-4D24-8691-64C534D10C5A}"/>
               </a:ext>
             </a:extLst>
           </p:cNvPr>
@@ -5461,7 +5461,7 @@
           <p:cNvPr id="4" name="TextBox 3">
             <a:extLst xmlns:a="http://schemas.openxmlformats.org/drawingml/2006/main">
               <a:ext uri="{FF2B5EF4-FFF2-40B4-BE49-F238E27FC236}">
-                <a16:creationId xmlns:a16="http://schemas.microsoft.com/office/drawing/2014/main" id="{59195A5B-A8F0-47C6-A0CD-43F7FE2E9C25}"/>
+                <a16:creationId xmlns:a16="http://schemas.microsoft.com/office/drawing/2014/main" id="{F475B5F2-F672-4B7F-B21C-45C5E1FA0938}"/>
               </a:ext>
             </a:extLst>
           </p:cNvPr>
@@ -5509,7 +5509,7 @@
           <p:cNvPr id="5" name="TextBox 4">
             <a:extLst xmlns:a="http://schemas.openxmlformats.org/drawingml/2006/main">
               <a:ext uri="{FF2B5EF4-FFF2-40B4-BE49-F238E27FC236}">
-                <a16:creationId xmlns:a16="http://schemas.microsoft.com/office/drawing/2014/main" id="{37666EE5-CFD6-4F0D-8D48-AF06BE794440}"/>
+                <a16:creationId xmlns:a16="http://schemas.microsoft.com/office/drawing/2014/main" id="{F39E8090-6819-4033-B167-608D7499B246}"/>
               </a:ext>
             </a:extLst>
           </p:cNvPr>
@@ -5556,7 +5556,7 @@
           <p:cNvPr id="6" name="Rectangle 5">
             <a:extLst xmlns:a="http://schemas.openxmlformats.org/drawingml/2006/main">
               <a:ext uri="{FF2B5EF4-FFF2-40B4-BE49-F238E27FC236}">
-                <a16:creationId xmlns:a16="http://schemas.microsoft.com/office/drawing/2014/main" id="{B1467A48-1DC4-4283-A027-5A371B1ED59C}"/>
+                <a16:creationId xmlns:a16="http://schemas.microsoft.com/office/drawing/2014/main" id="{6299660C-9F53-48EB-8E5B-87724311AB56}"/>
               </a:ext>
             </a:extLst>
           </p:cNvPr>
@@ -5611,7 +5611,7 @@
           <p:cNvPr id="7" name="TextBox 6">
             <a:extLst xmlns:a="http://schemas.openxmlformats.org/drawingml/2006/main">
               <a:ext uri="{FF2B5EF4-FFF2-40B4-BE49-F238E27FC236}">
-                <a16:creationId xmlns:a16="http://schemas.microsoft.com/office/drawing/2014/main" id="{FC8E5CB9-A8FF-4E93-80C1-2BFBE80E026E}"/>
+                <a16:creationId xmlns:a16="http://schemas.microsoft.com/office/drawing/2014/main" id="{D7EC3393-5506-4802-9417-871D289C4D17}"/>
               </a:ext>
             </a:extLst>
           </p:cNvPr>
@@ -5658,7 +5658,7 @@
           <p:cNvPr id="8" name="TextBox 7">
             <a:extLst xmlns:a="http://schemas.openxmlformats.org/drawingml/2006/main">
               <a:ext uri="{FF2B5EF4-FFF2-40B4-BE49-F238E27FC236}">
-                <a16:creationId xmlns:a16="http://schemas.microsoft.com/office/drawing/2014/main" id="{B4790AF3-AA58-4E56-9E89-C6674E34E9E5}"/>
+                <a16:creationId xmlns:a16="http://schemas.microsoft.com/office/drawing/2014/main" id="{4179D144-F6F3-4399-8367-D9A2C35E4FEB}"/>
               </a:ext>
             </a:extLst>
           </p:cNvPr>
@@ -5695,7 +5695,7 @@
                 <a:ea typeface="Aptos"/>
                 <a:cs typeface="Aptos"/>
               </a:rPr>
-              <a:t>2026.07.27-27</a:t>
+              <a:t>2026.07.27-28</a:t>
             </a:r>
           </a:p>
         </p:txBody>
@@ -5705,7 +5705,7 @@
           <p:cNvPr id="9" name="TextBox 8">
             <a:extLst xmlns:a="http://schemas.openxmlformats.org/drawingml/2006/main">
               <a:ext uri="{FF2B5EF4-FFF2-40B4-BE49-F238E27FC236}">
-                <a16:creationId xmlns:a16="http://schemas.microsoft.com/office/drawing/2014/main" id="{1F87A5DC-2659-438B-8F89-9A51979C00A9}"/>
+                <a16:creationId xmlns:a16="http://schemas.microsoft.com/office/drawing/2014/main" id="{1A48679A-A398-4A51-ABB9-004972921DB4}"/>
               </a:ext>
             </a:extLst>
           </p:cNvPr>
@@ -5773,7 +5773,7 @@
           <p:cNvPr id="10" name="TextBox 9">
             <a:extLst xmlns:a="http://schemas.openxmlformats.org/drawingml/2006/main">
               <a:ext uri="{FF2B5EF4-FFF2-40B4-BE49-F238E27FC236}">
-                <a16:creationId xmlns:a16="http://schemas.microsoft.com/office/drawing/2014/main" id="{B8A46201-CB21-4A08-865B-F82001D7E2FC}"/>
+                <a16:creationId xmlns:a16="http://schemas.microsoft.com/office/drawing/2014/main" id="{F59DD49C-18FC-48CF-9588-D22A9364F6E3}"/>
               </a:ext>
             </a:extLst>
           </p:cNvPr>
@@ -5820,7 +5820,7 @@
           <p:cNvPr id="11" name="TextBox 10">
             <a:extLst xmlns:a="http://schemas.openxmlformats.org/drawingml/2006/main">
               <a:ext uri="{FF2B5EF4-FFF2-40B4-BE49-F238E27FC236}">
-                <a16:creationId xmlns:a16="http://schemas.microsoft.com/office/drawing/2014/main" id="{499A9B80-1A8B-47B0-B3C0-12C9B3594E8F}"/>
+                <a16:creationId xmlns:a16="http://schemas.microsoft.com/office/drawing/2014/main" id="{CEA2B152-7ABC-4027-B2E4-C4F6B8FF7CB6}"/>
               </a:ext>
             </a:extLst>
           </p:cNvPr>
@@ -5867,7 +5867,7 @@
           <p:cNvPr id="12" name="TextBox 11">
             <a:extLst xmlns:a="http://schemas.openxmlformats.org/drawingml/2006/main">
               <a:ext uri="{FF2B5EF4-FFF2-40B4-BE49-F238E27FC236}">
-                <a16:creationId xmlns:a16="http://schemas.microsoft.com/office/drawing/2014/main" id="{0A83575D-4A56-41AD-99E3-76A0A45F5BC3}"/>
+                <a16:creationId xmlns:a16="http://schemas.microsoft.com/office/drawing/2014/main" id="{0B7D33F8-F7F9-4618-816C-ED6B239C7D5D}"/>
               </a:ext>
             </a:extLst>
           </p:cNvPr>
@@ -5912,7 +5912,7 @@
     </p:spTree>
     <p:extLst>
       <p:ext uri="{BB962C8B-B14F-4D97-AF65-F5344CB8AC3E}">
-        <p14:creationId xmlns:p14="http://schemas.microsoft.com/office/powerpoint/2010/main" val="1629875755"/>
+        <p14:creationId xmlns:p14="http://schemas.microsoft.com/office/powerpoint/2010/main" val="1018006966"/>
       </p:ext>
     </p:extLst>
   </p:cSld>
@@ -5936,7 +5936,7 @@
           <p:cNvPr id="2" name="TextBox 1">
             <a:extLst xmlns:a="http://schemas.openxmlformats.org/drawingml/2006/main">
               <a:ext uri="{FF2B5EF4-FFF2-40B4-BE49-F238E27FC236}">
-                <a16:creationId xmlns:a16="http://schemas.microsoft.com/office/drawing/2014/main" id="{390C38C3-FA07-42F7-9D4E-D60982E11847}"/>
+                <a16:creationId xmlns:a16="http://schemas.microsoft.com/office/drawing/2014/main" id="{0B9B70F3-3C51-422D-8CF4-9E81BD4C600A}"/>
               </a:ext>
             </a:extLst>
           </p:cNvPr>
@@ -5983,7 +5983,7 @@
           <p:cNvPr id="3" name="TextBox 2">
             <a:extLst xmlns:a="http://schemas.openxmlformats.org/drawingml/2006/main">
               <a:ext uri="{FF2B5EF4-FFF2-40B4-BE49-F238E27FC236}">
-                <a16:creationId xmlns:a16="http://schemas.microsoft.com/office/drawing/2014/main" id="{0C0798F2-91E1-49F3-9C84-429EA03382E8}"/>
+                <a16:creationId xmlns:a16="http://schemas.microsoft.com/office/drawing/2014/main" id="{0F1CB047-E939-43F2-BB6D-A1142460F89C}"/>
               </a:ext>
             </a:extLst>
           </p:cNvPr>
@@ -6030,7 +6030,7 @@
           <p:cNvPr id="4" name="Rectangle 3">
             <a:extLst xmlns:a="http://schemas.openxmlformats.org/drawingml/2006/main">
               <a:ext uri="{FF2B5EF4-FFF2-40B4-BE49-F238E27FC236}">
-                <a16:creationId xmlns:a16="http://schemas.microsoft.com/office/drawing/2014/main" id="{2EC81997-92D5-4329-971C-A3009073B75C}"/>
+                <a16:creationId xmlns:a16="http://schemas.microsoft.com/office/drawing/2014/main" id="{59915FBD-F8E5-496D-84F2-E76364492DFD}"/>
               </a:ext>
             </a:extLst>
           </p:cNvPr>
@@ -6085,7 +6085,7 @@
           <p:cNvPr id="5" name="Rectangle 4">
             <a:extLst xmlns:a="http://schemas.openxmlformats.org/drawingml/2006/main">
               <a:ext uri="{FF2B5EF4-FFF2-40B4-BE49-F238E27FC236}">
-                <a16:creationId xmlns:a16="http://schemas.microsoft.com/office/drawing/2014/main" id="{218F213E-EB72-40E7-A2D2-4A2BFFAD83EA}"/>
+                <a16:creationId xmlns:a16="http://schemas.microsoft.com/office/drawing/2014/main" id="{AFC08D2E-ECC4-4130-844B-71E0EB22DA99}"/>
               </a:ext>
             </a:extLst>
           </p:cNvPr>
@@ -6140,7 +6140,7 @@
           <p:cNvPr id="6" name="TextBox 5">
             <a:extLst xmlns:a="http://schemas.openxmlformats.org/drawingml/2006/main">
               <a:ext uri="{FF2B5EF4-FFF2-40B4-BE49-F238E27FC236}">
-                <a16:creationId xmlns:a16="http://schemas.microsoft.com/office/drawing/2014/main" id="{9A128F22-30FB-4454-952D-04F63E6DCFAF}"/>
+                <a16:creationId xmlns:a16="http://schemas.microsoft.com/office/drawing/2014/main" id="{F67687B5-1110-40D4-B8A8-FC38A043B3E8}"/>
               </a:ext>
             </a:extLst>
           </p:cNvPr>
@@ -6177,7 +6177,7 @@
                 <a:ea typeface="Aptos"/>
                 <a:cs typeface="Aptos"/>
               </a:rPr>
-              <a:t>Julkinen riippumaton evidenssikooste · 2026.07.27-27 · 2026-07-27 · Lähteet: EPO; Saksa — viralliset tuomiot; WIPO</a:t>
+              <a:t>Julkinen riippumaton evidenssikooste · 2026.07.27-28 · 2026-07-27 · Lähteet: EPO; Saksa — viralliset tuomiot; WIPO</a:t>
             </a:r>
           </a:p>
         </p:txBody>
@@ -6187,7 +6187,7 @@
           <p:cNvPr id="7" name="TextBox 6">
             <a:extLst xmlns:a="http://schemas.openxmlformats.org/drawingml/2006/main">
               <a:ext uri="{FF2B5EF4-FFF2-40B4-BE49-F238E27FC236}">
-                <a16:creationId xmlns:a16="http://schemas.microsoft.com/office/drawing/2014/main" id="{852FC345-AD2B-4FA3-A9E7-1B2039624382}"/>
+                <a16:creationId xmlns:a16="http://schemas.microsoft.com/office/drawing/2014/main" id="{8DA02B9D-0D55-4DB0-B517-A05E1A05AD52}"/>
               </a:ext>
             </a:extLst>
           </p:cNvPr>
@@ -6234,7 +6234,7 @@
           <p:cNvPr id="8" name="TextBox 7">
             <a:extLst xmlns:a="http://schemas.openxmlformats.org/drawingml/2006/main">
               <a:ext uri="{FF2B5EF4-FFF2-40B4-BE49-F238E27FC236}">
-                <a16:creationId xmlns:a16="http://schemas.microsoft.com/office/drawing/2014/main" id="{937A32AC-C051-428F-8F3A-A8062FA5F637}"/>
+                <a16:creationId xmlns:a16="http://schemas.microsoft.com/office/drawing/2014/main" id="{E98F788C-2B59-4A35-AD10-AAEEF5E5FEB1}"/>
               </a:ext>
             </a:extLst>
           </p:cNvPr>
@@ -6281,7 +6281,7 @@
           <p:cNvPr id="9" name="TextBox 8">
             <a:extLst xmlns:a="http://schemas.openxmlformats.org/drawingml/2006/main">
               <a:ext uri="{FF2B5EF4-FFF2-40B4-BE49-F238E27FC236}">
-                <a16:creationId xmlns:a16="http://schemas.microsoft.com/office/drawing/2014/main" id="{C7AB0747-0841-4447-9B54-8E32D106C7FD}"/>
+                <a16:creationId xmlns:a16="http://schemas.microsoft.com/office/drawing/2014/main" id="{34DC0A67-9007-4882-9271-ABB0E7D1D10F}"/>
               </a:ext>
             </a:extLst>
           </p:cNvPr>
@@ -6378,7 +6378,7 @@
           <p:cNvPr id="10" name="Rounded Rectangle 9">
             <a:extLst xmlns:a="http://schemas.openxmlformats.org/drawingml/2006/main">
               <a:ext uri="{FF2B5EF4-FFF2-40B4-BE49-F238E27FC236}">
-                <a16:creationId xmlns:a16="http://schemas.microsoft.com/office/drawing/2014/main" id="{7D6B3DE2-DF79-4D74-B83A-411F78D57387}"/>
+                <a16:creationId xmlns:a16="http://schemas.microsoft.com/office/drawing/2014/main" id="{D4726D39-7463-4E98-9529-17CF41B79284}"/>
               </a:ext>
             </a:extLst>
           </p:cNvPr>
@@ -6435,7 +6435,7 @@
           <p:cNvPr id="11" name="TextBox 10">
             <a:extLst xmlns:a="http://schemas.openxmlformats.org/drawingml/2006/main">
               <a:ext uri="{FF2B5EF4-FFF2-40B4-BE49-F238E27FC236}">
-                <a16:creationId xmlns:a16="http://schemas.microsoft.com/office/drawing/2014/main" id="{ADA71A9C-AD13-497C-838D-D3B4E9D27037}"/>
+                <a16:creationId xmlns:a16="http://schemas.microsoft.com/office/drawing/2014/main" id="{7D91898F-9191-47C4-AFF5-9A18BE58AAC6}"/>
               </a:ext>
             </a:extLst>
           </p:cNvPr>
@@ -6482,7 +6482,7 @@
           <p:cNvPr id="12" name="TextBox 11">
             <a:extLst xmlns:a="http://schemas.openxmlformats.org/drawingml/2006/main">
               <a:ext uri="{FF2B5EF4-FFF2-40B4-BE49-F238E27FC236}">
-                <a16:creationId xmlns:a16="http://schemas.microsoft.com/office/drawing/2014/main" id="{DCFD3F78-4301-46B8-8CAE-3C8556E71BE4}"/>
+                <a16:creationId xmlns:a16="http://schemas.microsoft.com/office/drawing/2014/main" id="{A7D9C172-DBC8-406C-B141-F4A658EFF883}"/>
               </a:ext>
             </a:extLst>
           </p:cNvPr>
@@ -6527,7 +6527,7 @@
     </p:spTree>
     <p:extLst>
       <p:ext uri="{BB962C8B-B14F-4D97-AF65-F5344CB8AC3E}">
-        <p14:creationId xmlns:p14="http://schemas.microsoft.com/office/powerpoint/2010/main" val="1244208551"/>
+        <p14:creationId xmlns:p14="http://schemas.microsoft.com/office/powerpoint/2010/main" val="1333522639"/>
       </p:ext>
     </p:extLst>
   </p:cSld>
@@ -6551,7 +6551,7 @@
           <p:cNvPr id="2" name="TextBox 1">
             <a:extLst xmlns:a="http://schemas.openxmlformats.org/drawingml/2006/main">
               <a:ext uri="{FF2B5EF4-FFF2-40B4-BE49-F238E27FC236}">
-                <a16:creationId xmlns:a16="http://schemas.microsoft.com/office/drawing/2014/main" id="{CAA33C1C-464F-4E97-A37A-E176A502841B}"/>
+                <a16:creationId xmlns:a16="http://schemas.microsoft.com/office/drawing/2014/main" id="{8559B789-3582-4A63-A450-834537046D01}"/>
               </a:ext>
             </a:extLst>
           </p:cNvPr>
@@ -6598,7 +6598,7 @@
           <p:cNvPr id="3" name="TextBox 2">
             <a:extLst xmlns:a="http://schemas.openxmlformats.org/drawingml/2006/main">
               <a:ext uri="{FF2B5EF4-FFF2-40B4-BE49-F238E27FC236}">
-                <a16:creationId xmlns:a16="http://schemas.microsoft.com/office/drawing/2014/main" id="{7995BABA-64CF-4144-A27F-2368A8FB2FE0}"/>
+                <a16:creationId xmlns:a16="http://schemas.microsoft.com/office/drawing/2014/main" id="{14A7A66B-E7F5-4693-9564-9D0FCD08DB46}"/>
               </a:ext>
             </a:extLst>
           </p:cNvPr>
@@ -6645,7 +6645,7 @@
           <p:cNvPr id="4" name="Rectangle 3">
             <a:extLst xmlns:a="http://schemas.openxmlformats.org/drawingml/2006/main">
               <a:ext uri="{FF2B5EF4-FFF2-40B4-BE49-F238E27FC236}">
-                <a16:creationId xmlns:a16="http://schemas.microsoft.com/office/drawing/2014/main" id="{836CEB7B-AA8D-4B03-92AB-20CA854F0C79}"/>
+                <a16:creationId xmlns:a16="http://schemas.microsoft.com/office/drawing/2014/main" id="{38F8129F-9289-4524-B41D-4E65DF4CF557}"/>
               </a:ext>
             </a:extLst>
           </p:cNvPr>
@@ -6700,7 +6700,7 @@
           <p:cNvPr id="5" name="Rectangle 4">
             <a:extLst xmlns:a="http://schemas.openxmlformats.org/drawingml/2006/main">
               <a:ext uri="{FF2B5EF4-FFF2-40B4-BE49-F238E27FC236}">
-                <a16:creationId xmlns:a16="http://schemas.microsoft.com/office/drawing/2014/main" id="{B91A0BFC-C5FC-47AE-8AD7-1666C6BB5821}"/>
+                <a16:creationId xmlns:a16="http://schemas.microsoft.com/office/drawing/2014/main" id="{3AD8D2E2-3C38-453B-A167-0EE1611D9CE0}"/>
               </a:ext>
             </a:extLst>
           </p:cNvPr>
@@ -6755,7 +6755,7 @@
           <p:cNvPr id="6" name="TextBox 5">
             <a:extLst xmlns:a="http://schemas.openxmlformats.org/drawingml/2006/main">
               <a:ext uri="{FF2B5EF4-FFF2-40B4-BE49-F238E27FC236}">
-                <a16:creationId xmlns:a16="http://schemas.microsoft.com/office/drawing/2014/main" id="{5CC321E9-4E9E-4ED0-9E4A-DD5A2BE2FFBA}"/>
+                <a16:creationId xmlns:a16="http://schemas.microsoft.com/office/drawing/2014/main" id="{DAD10D34-421A-4227-9FCC-7C2F353EAE2F}"/>
               </a:ext>
             </a:extLst>
           </p:cNvPr>
@@ -6792,7 +6792,7 @@
                 <a:ea typeface="Aptos"/>
                 <a:cs typeface="Aptos"/>
               </a:rPr>
-              <a:t>Julkinen riippumaton evidenssikooste · 2026.07.27-27 · 2026-07-27 · Lähteet: EPO Register; EP3032975B2; 8 Ni 18/24 (EP); 7 O 3341/24</a:t>
+              <a:t>Julkinen riippumaton evidenssikooste · 2026.07.27-28 · 2026-07-27 · Lähteet: EPO Register; EP3032975B2; 8 Ni 18/24 (EP); 7 O 3341/24</a:t>
             </a:r>
           </a:p>
         </p:txBody>
@@ -6802,7 +6802,7 @@
           <p:cNvPr id="7" name="TextBox 6">
             <a:extLst xmlns:a="http://schemas.openxmlformats.org/drawingml/2006/main">
               <a:ext uri="{FF2B5EF4-FFF2-40B4-BE49-F238E27FC236}">
-                <a16:creationId xmlns:a16="http://schemas.microsoft.com/office/drawing/2014/main" id="{ACF6F721-B4C2-4911-A030-9CAE4D49B535}"/>
+                <a16:creationId xmlns:a16="http://schemas.microsoft.com/office/drawing/2014/main" id="{8FC94239-3715-4CBD-B5B9-E3042D4C5617}"/>
               </a:ext>
             </a:extLst>
           </p:cNvPr>
@@ -6849,7 +6849,7 @@
           <p:cNvPr id="8" name="Rounded Rectangle 7">
             <a:extLst xmlns:a="http://schemas.openxmlformats.org/drawingml/2006/main">
               <a:ext uri="{FF2B5EF4-FFF2-40B4-BE49-F238E27FC236}">
-                <a16:creationId xmlns:a16="http://schemas.microsoft.com/office/drawing/2014/main" id="{C33FDADE-B05C-4231-BD8D-EB1E870BF967}"/>
+                <a16:creationId xmlns:a16="http://schemas.microsoft.com/office/drawing/2014/main" id="{0DCCE076-48E5-455C-892F-4E9F4C82BE72}"/>
               </a:ext>
             </a:extLst>
           </p:cNvPr>
@@ -6906,7 +6906,7 @@
           <p:cNvPr id="9" name="TextBox 8">
             <a:extLst xmlns:a="http://schemas.openxmlformats.org/drawingml/2006/main">
               <a:ext uri="{FF2B5EF4-FFF2-40B4-BE49-F238E27FC236}">
-                <a16:creationId xmlns:a16="http://schemas.microsoft.com/office/drawing/2014/main" id="{B4295722-62FC-4340-9C35-13416804A99F}"/>
+                <a16:creationId xmlns:a16="http://schemas.microsoft.com/office/drawing/2014/main" id="{F5562F96-914F-4125-BC86-C6F1671BEA21}"/>
               </a:ext>
             </a:extLst>
           </p:cNvPr>
@@ -6953,7 +6953,7 @@
           <p:cNvPr id="10" name="TextBox 9">
             <a:extLst xmlns:a="http://schemas.openxmlformats.org/drawingml/2006/main">
               <a:ext uri="{FF2B5EF4-FFF2-40B4-BE49-F238E27FC236}">
-                <a16:creationId xmlns:a16="http://schemas.microsoft.com/office/drawing/2014/main" id="{4F62B35E-4B48-4F4D-BC37-E0154D4D9065}"/>
+                <a16:creationId xmlns:a16="http://schemas.microsoft.com/office/drawing/2014/main" id="{A354606C-BC4F-4F65-A40F-E843AA839743}"/>
               </a:ext>
             </a:extLst>
           </p:cNvPr>
@@ -7000,7 +7000,7 @@
           <p:cNvPr id="11" name="Rounded Rectangle 10">
             <a:extLst xmlns:a="http://schemas.openxmlformats.org/drawingml/2006/main">
               <a:ext uri="{FF2B5EF4-FFF2-40B4-BE49-F238E27FC236}">
-                <a16:creationId xmlns:a16="http://schemas.microsoft.com/office/drawing/2014/main" id="{11613AE7-77AC-42BF-BA42-6E6F080C5D6D}"/>
+                <a16:creationId xmlns:a16="http://schemas.microsoft.com/office/drawing/2014/main" id="{62440528-5F5C-42E6-AACA-BD6855265C55}"/>
               </a:ext>
             </a:extLst>
           </p:cNvPr>
@@ -7057,7 +7057,7 @@
           <p:cNvPr id="12" name="TextBox 11">
             <a:extLst xmlns:a="http://schemas.openxmlformats.org/drawingml/2006/main">
               <a:ext uri="{FF2B5EF4-FFF2-40B4-BE49-F238E27FC236}">
-                <a16:creationId xmlns:a16="http://schemas.microsoft.com/office/drawing/2014/main" id="{0015B723-8B04-4D81-BD34-163545FB37E0}"/>
+                <a16:creationId xmlns:a16="http://schemas.microsoft.com/office/drawing/2014/main" id="{3C92FD77-5841-4358-A154-D770D28C70BC}"/>
               </a:ext>
             </a:extLst>
           </p:cNvPr>
@@ -7104,7 +7104,7 @@
           <p:cNvPr id="13" name="TextBox 12">
             <a:extLst xmlns:a="http://schemas.openxmlformats.org/drawingml/2006/main">
               <a:ext uri="{FF2B5EF4-FFF2-40B4-BE49-F238E27FC236}">
-                <a16:creationId xmlns:a16="http://schemas.microsoft.com/office/drawing/2014/main" id="{EF090850-F04D-410B-B213-662654A65041}"/>
+                <a16:creationId xmlns:a16="http://schemas.microsoft.com/office/drawing/2014/main" id="{92DF24BA-DE82-403F-91E3-CD74A7E68356}"/>
               </a:ext>
             </a:extLst>
           </p:cNvPr>
@@ -7151,7 +7151,7 @@
           <p:cNvPr id="14" name="Rounded Rectangle 13">
             <a:extLst xmlns:a="http://schemas.openxmlformats.org/drawingml/2006/main">
               <a:ext uri="{FF2B5EF4-FFF2-40B4-BE49-F238E27FC236}">
-                <a16:creationId xmlns:a16="http://schemas.microsoft.com/office/drawing/2014/main" id="{063AD1DE-35A9-419A-BF66-1CBE56FBCA91}"/>
+                <a16:creationId xmlns:a16="http://schemas.microsoft.com/office/drawing/2014/main" id="{8A0946B8-3BC1-461D-B67D-49CD613EECA3}"/>
               </a:ext>
             </a:extLst>
           </p:cNvPr>
@@ -7208,7 +7208,7 @@
           <p:cNvPr id="15" name="TextBox 14">
             <a:extLst xmlns:a="http://schemas.openxmlformats.org/drawingml/2006/main">
               <a:ext uri="{FF2B5EF4-FFF2-40B4-BE49-F238E27FC236}">
-                <a16:creationId xmlns:a16="http://schemas.microsoft.com/office/drawing/2014/main" id="{5378D670-C724-48D8-9BFF-4A9EFE4C81BB}"/>
+                <a16:creationId xmlns:a16="http://schemas.microsoft.com/office/drawing/2014/main" id="{B4333E7F-FD55-4D8C-BB3F-C2017A77696F}"/>
               </a:ext>
             </a:extLst>
           </p:cNvPr>
@@ -7255,7 +7255,7 @@
           <p:cNvPr id="16" name="TextBox 15">
             <a:extLst xmlns:a="http://schemas.openxmlformats.org/drawingml/2006/main">
               <a:ext uri="{FF2B5EF4-FFF2-40B4-BE49-F238E27FC236}">
-                <a16:creationId xmlns:a16="http://schemas.microsoft.com/office/drawing/2014/main" id="{75D9379E-0241-4EED-9D84-B6DF8E761AC9}"/>
+                <a16:creationId xmlns:a16="http://schemas.microsoft.com/office/drawing/2014/main" id="{3E535F87-387B-422B-9F8B-65BB1461109D}"/>
               </a:ext>
             </a:extLst>
           </p:cNvPr>
@@ -7302,7 +7302,7 @@
           <p:cNvPr id="17" name="TextBox 16">
             <a:extLst xmlns:a="http://schemas.openxmlformats.org/drawingml/2006/main">
               <a:ext uri="{FF2B5EF4-FFF2-40B4-BE49-F238E27FC236}">
-                <a16:creationId xmlns:a16="http://schemas.microsoft.com/office/drawing/2014/main" id="{ABFE479F-C965-4648-8FE5-8036EA559EC6}"/>
+                <a16:creationId xmlns:a16="http://schemas.microsoft.com/office/drawing/2014/main" id="{FD255879-ADD5-4205-B65E-9701DCE2C8D7}"/>
               </a:ext>
             </a:extLst>
           </p:cNvPr>
@@ -7349,7 +7349,7 @@
           <p:cNvPr id="18" name="Rounded Rectangle 17">
             <a:extLst xmlns:a="http://schemas.openxmlformats.org/drawingml/2006/main">
               <a:ext uri="{FF2B5EF4-FFF2-40B4-BE49-F238E27FC236}">
-                <a16:creationId xmlns:a16="http://schemas.microsoft.com/office/drawing/2014/main" id="{EC070523-8489-462A-95CF-0B57404FFEE0}"/>
+                <a16:creationId xmlns:a16="http://schemas.microsoft.com/office/drawing/2014/main" id="{F453CBC6-56D9-4AF2-811E-38CA490501B7}"/>
               </a:ext>
             </a:extLst>
           </p:cNvPr>
@@ -7406,7 +7406,7 @@
           <p:cNvPr id="19" name="TextBox 18">
             <a:extLst xmlns:a="http://schemas.openxmlformats.org/drawingml/2006/main">
               <a:ext uri="{FF2B5EF4-FFF2-40B4-BE49-F238E27FC236}">
-                <a16:creationId xmlns:a16="http://schemas.microsoft.com/office/drawing/2014/main" id="{61C4809B-ECF7-41F5-B6A9-B91A8C429B7A}"/>
+                <a16:creationId xmlns:a16="http://schemas.microsoft.com/office/drawing/2014/main" id="{A2E625A5-FD31-4598-9E8B-9243B4EA904A}"/>
               </a:ext>
             </a:extLst>
           </p:cNvPr>
@@ -7453,7 +7453,7 @@
           <p:cNvPr id="20" name="TextBox 19">
             <a:extLst xmlns:a="http://schemas.openxmlformats.org/drawingml/2006/main">
               <a:ext uri="{FF2B5EF4-FFF2-40B4-BE49-F238E27FC236}">
-                <a16:creationId xmlns:a16="http://schemas.microsoft.com/office/drawing/2014/main" id="{2E6529BA-D82C-4962-B4E7-976D396D27C8}"/>
+                <a16:creationId xmlns:a16="http://schemas.microsoft.com/office/drawing/2014/main" id="{DD72239C-175D-4B36-9350-5A1C37470662}"/>
               </a:ext>
             </a:extLst>
           </p:cNvPr>
@@ -7498,7 +7498,7 @@
     </p:spTree>
     <p:extLst>
       <p:ext uri="{BB962C8B-B14F-4D97-AF65-F5344CB8AC3E}">
-        <p14:creationId xmlns:p14="http://schemas.microsoft.com/office/powerpoint/2010/main" val="2034344611"/>
+        <p14:creationId xmlns:p14="http://schemas.microsoft.com/office/powerpoint/2010/main" val="441847506"/>
       </p:ext>
     </p:extLst>
   </p:cSld>
@@ -7522,7 +7522,7 @@
           <p:cNvPr id="2" name="TextBox 1">
             <a:extLst xmlns:a="http://schemas.openxmlformats.org/drawingml/2006/main">
               <a:ext uri="{FF2B5EF4-FFF2-40B4-BE49-F238E27FC236}">
-                <a16:creationId xmlns:a16="http://schemas.microsoft.com/office/drawing/2014/main" id="{30B6FCE6-F7AF-4B5C-8194-46133586262C}"/>
+                <a16:creationId xmlns:a16="http://schemas.microsoft.com/office/drawing/2014/main" id="{A2B31D93-B4AC-4834-A88A-CD253382876E}"/>
               </a:ext>
             </a:extLst>
           </p:cNvPr>
@@ -7569,7 +7569,7 @@
           <p:cNvPr id="3" name="TextBox 2">
             <a:extLst xmlns:a="http://schemas.openxmlformats.org/drawingml/2006/main">
               <a:ext uri="{FF2B5EF4-FFF2-40B4-BE49-F238E27FC236}">
-                <a16:creationId xmlns:a16="http://schemas.microsoft.com/office/drawing/2014/main" id="{9D52436C-FFC8-4449-A2C3-CCA7F6668415}"/>
+                <a16:creationId xmlns:a16="http://schemas.microsoft.com/office/drawing/2014/main" id="{0477E2B2-ED4F-4743-BFDA-72E63FFDD5D8}"/>
               </a:ext>
             </a:extLst>
           </p:cNvPr>
@@ -7616,7 +7616,7 @@
           <p:cNvPr id="4" name="Rectangle 3">
             <a:extLst xmlns:a="http://schemas.openxmlformats.org/drawingml/2006/main">
               <a:ext uri="{FF2B5EF4-FFF2-40B4-BE49-F238E27FC236}">
-                <a16:creationId xmlns:a16="http://schemas.microsoft.com/office/drawing/2014/main" id="{2DE08FE5-ECB9-4A7D-BD7A-2552869F8A40}"/>
+                <a16:creationId xmlns:a16="http://schemas.microsoft.com/office/drawing/2014/main" id="{F132CCEE-0EBA-4651-A33C-FBEA949DFB2A}"/>
               </a:ext>
             </a:extLst>
           </p:cNvPr>
@@ -7671,7 +7671,7 @@
           <p:cNvPr id="5" name="Rectangle 4">
             <a:extLst xmlns:a="http://schemas.openxmlformats.org/drawingml/2006/main">
               <a:ext uri="{FF2B5EF4-FFF2-40B4-BE49-F238E27FC236}">
-                <a16:creationId xmlns:a16="http://schemas.microsoft.com/office/drawing/2014/main" id="{0659434A-DB1F-4061-A0B1-725953405AD8}"/>
+                <a16:creationId xmlns:a16="http://schemas.microsoft.com/office/drawing/2014/main" id="{2168D24E-A62B-436A-B5D9-6366ACF2485B}"/>
               </a:ext>
             </a:extLst>
           </p:cNvPr>
@@ -7726,7 +7726,7 @@
           <p:cNvPr id="6" name="TextBox 5">
             <a:extLst xmlns:a="http://schemas.openxmlformats.org/drawingml/2006/main">
               <a:ext uri="{FF2B5EF4-FFF2-40B4-BE49-F238E27FC236}">
-                <a16:creationId xmlns:a16="http://schemas.microsoft.com/office/drawing/2014/main" id="{EBD628D5-61D3-4C10-88F1-6F01B0DFF990}"/>
+                <a16:creationId xmlns:a16="http://schemas.microsoft.com/office/drawing/2014/main" id="{26F6FBB7-6055-4B57-B867-4C7A1C8ABA6E}"/>
               </a:ext>
             </a:extLst>
           </p:cNvPr>
@@ -7763,7 +7763,7 @@
                 <a:ea typeface="Aptos"/>
                 <a:cs typeface="Aptos"/>
               </a:rPr>
-              <a:t>Julkinen riippumaton evidenssikooste · 2026.07.27-27 · 2026-07-27 · Lähteet: World Bank; Statistics Canada; Health Canada; NZ Ministry of Health; Sejm; FHM; FTC</a:t>
+              <a:t>Julkinen riippumaton evidenssikooste · 2026.07.27-28 · 2026-07-27 · Lähteet: World Bank; Statistics Canada; Health Canada; NZ Ministry of Health; Sejm; FHM; FTC</a:t>
             </a:r>
           </a:p>
         </p:txBody>
@@ -7773,7 +7773,7 @@
           <p:cNvPr id="7" name="TextBox 6">
             <a:extLst xmlns:a="http://schemas.openxmlformats.org/drawingml/2006/main">
               <a:ext uri="{FF2B5EF4-FFF2-40B4-BE49-F238E27FC236}">
-                <a16:creationId xmlns:a16="http://schemas.microsoft.com/office/drawing/2014/main" id="{24345A14-0A5D-42A0-9A78-C88C612EE5EF}"/>
+                <a16:creationId xmlns:a16="http://schemas.microsoft.com/office/drawing/2014/main" id="{16285C28-CE04-4429-846A-787CB8E6B816}"/>
               </a:ext>
             </a:extLst>
           </p:cNvPr>
@@ -7820,7 +7820,7 @@
           <p:cNvPr id="8" name="Rounded Rectangle 7">
             <a:extLst xmlns:a="http://schemas.openxmlformats.org/drawingml/2006/main">
               <a:ext uri="{FF2B5EF4-FFF2-40B4-BE49-F238E27FC236}">
-                <a16:creationId xmlns:a16="http://schemas.microsoft.com/office/drawing/2014/main" id="{A4CDB13F-F70A-4D94-9234-DB4EAD9BE77C}"/>
+                <a16:creationId xmlns:a16="http://schemas.microsoft.com/office/drawing/2014/main" id="{E253F11A-B544-47BF-AA3E-18594C2FE5C8}"/>
               </a:ext>
             </a:extLst>
           </p:cNvPr>
@@ -7877,7 +7877,7 @@
           <p:cNvPr id="9" name="TextBox 8">
             <a:extLst xmlns:a="http://schemas.openxmlformats.org/drawingml/2006/main">
               <a:ext uri="{FF2B5EF4-FFF2-40B4-BE49-F238E27FC236}">
-                <a16:creationId xmlns:a16="http://schemas.microsoft.com/office/drawing/2014/main" id="{89A5265E-8461-4C15-BCDF-2495515E7457}"/>
+                <a16:creationId xmlns:a16="http://schemas.microsoft.com/office/drawing/2014/main" id="{1C309BE5-B650-4393-A5DC-EF1952FF885F}"/>
               </a:ext>
             </a:extLst>
           </p:cNvPr>
@@ -7924,7 +7924,7 @@
           <p:cNvPr id="10" name="TextBox 9">
             <a:extLst xmlns:a="http://schemas.openxmlformats.org/drawingml/2006/main">
               <a:ext uri="{FF2B5EF4-FFF2-40B4-BE49-F238E27FC236}">
-                <a16:creationId xmlns:a16="http://schemas.microsoft.com/office/drawing/2014/main" id="{796A35BC-9064-478C-A562-5E7198447841}"/>
+                <a16:creationId xmlns:a16="http://schemas.microsoft.com/office/drawing/2014/main" id="{7517A0BA-95AC-4519-95BC-F3B62B94D3BC}"/>
               </a:ext>
             </a:extLst>
           </p:cNvPr>
@@ -7971,7 +7971,7 @@
           <p:cNvPr id="11" name="Rounded Rectangle 10">
             <a:extLst xmlns:a="http://schemas.openxmlformats.org/drawingml/2006/main">
               <a:ext uri="{FF2B5EF4-FFF2-40B4-BE49-F238E27FC236}">
-                <a16:creationId xmlns:a16="http://schemas.microsoft.com/office/drawing/2014/main" id="{5BFCA815-2F0E-452A-8774-A10F09B1D6BB}"/>
+                <a16:creationId xmlns:a16="http://schemas.microsoft.com/office/drawing/2014/main" id="{188A9FAC-12C7-466F-9BA9-843E932ECFAB}"/>
               </a:ext>
             </a:extLst>
           </p:cNvPr>
@@ -8028,7 +8028,7 @@
           <p:cNvPr id="12" name="TextBox 11">
             <a:extLst xmlns:a="http://schemas.openxmlformats.org/drawingml/2006/main">
               <a:ext uri="{FF2B5EF4-FFF2-40B4-BE49-F238E27FC236}">
-                <a16:creationId xmlns:a16="http://schemas.microsoft.com/office/drawing/2014/main" id="{6F6F087F-B4B2-491D-9B17-B5001B81A094}"/>
+                <a16:creationId xmlns:a16="http://schemas.microsoft.com/office/drawing/2014/main" id="{D0403852-6F7A-40ED-B252-E57C426F556B}"/>
               </a:ext>
             </a:extLst>
           </p:cNvPr>
@@ -8075,7 +8075,7 @@
           <p:cNvPr id="13" name="TextBox 12">
             <a:extLst xmlns:a="http://schemas.openxmlformats.org/drawingml/2006/main">
               <a:ext uri="{FF2B5EF4-FFF2-40B4-BE49-F238E27FC236}">
-                <a16:creationId xmlns:a16="http://schemas.microsoft.com/office/drawing/2014/main" id="{C7D1912B-B848-4D36-9C4F-F198D3A6CD8B}"/>
+                <a16:creationId xmlns:a16="http://schemas.microsoft.com/office/drawing/2014/main" id="{7C788015-D77D-4B6D-8B56-023FC913C67D}"/>
               </a:ext>
             </a:extLst>
           </p:cNvPr>
@@ -8122,7 +8122,7 @@
           <p:cNvPr id="14" name="Rounded Rectangle 13">
             <a:extLst xmlns:a="http://schemas.openxmlformats.org/drawingml/2006/main">
               <a:ext uri="{FF2B5EF4-FFF2-40B4-BE49-F238E27FC236}">
-                <a16:creationId xmlns:a16="http://schemas.microsoft.com/office/drawing/2014/main" id="{AB7DD891-AD1F-42A5-9AA2-00990B535B8C}"/>
+                <a16:creationId xmlns:a16="http://schemas.microsoft.com/office/drawing/2014/main" id="{B4656433-CE5D-49E4-9740-000955DFAFD5}"/>
               </a:ext>
             </a:extLst>
           </p:cNvPr>
@@ -8179,7 +8179,7 @@
           <p:cNvPr id="15" name="TextBox 14">
             <a:extLst xmlns:a="http://schemas.openxmlformats.org/drawingml/2006/main">
               <a:ext uri="{FF2B5EF4-FFF2-40B4-BE49-F238E27FC236}">
-                <a16:creationId xmlns:a16="http://schemas.microsoft.com/office/drawing/2014/main" id="{F0989AAD-C703-4B91-A5FC-861AA298E622}"/>
+                <a16:creationId xmlns:a16="http://schemas.microsoft.com/office/drawing/2014/main" id="{92CD8092-8FED-48DD-8A5A-6258AED05658}"/>
               </a:ext>
             </a:extLst>
           </p:cNvPr>
@@ -8226,7 +8226,7 @@
           <p:cNvPr id="16" name="TextBox 15">
             <a:extLst xmlns:a="http://schemas.openxmlformats.org/drawingml/2006/main">
               <a:ext uri="{FF2B5EF4-FFF2-40B4-BE49-F238E27FC236}">
-                <a16:creationId xmlns:a16="http://schemas.microsoft.com/office/drawing/2014/main" id="{0B71F7B5-0D9A-45A3-8F8C-7160A0F15B73}"/>
+                <a16:creationId xmlns:a16="http://schemas.microsoft.com/office/drawing/2014/main" id="{A0F93F37-8695-4E8F-8DF0-639E6632E0B1}"/>
               </a:ext>
             </a:extLst>
           </p:cNvPr>
@@ -8273,7 +8273,7 @@
           <p:cNvPr id="17" name="TextBox 16">
             <a:extLst xmlns:a="http://schemas.openxmlformats.org/drawingml/2006/main">
               <a:ext uri="{FF2B5EF4-FFF2-40B4-BE49-F238E27FC236}">
-                <a16:creationId xmlns:a16="http://schemas.microsoft.com/office/drawing/2014/main" id="{7CA73519-F99F-44D0-B52A-605D5E3C3A32}"/>
+                <a16:creationId xmlns:a16="http://schemas.microsoft.com/office/drawing/2014/main" id="{93072665-9BC1-460C-8A58-E04D4AD2E2EE}"/>
               </a:ext>
             </a:extLst>
           </p:cNvPr>
@@ -8320,7 +8320,7 @@
           <p:cNvPr id="18" name="Rounded Rectangle 17">
             <a:extLst xmlns:a="http://schemas.openxmlformats.org/drawingml/2006/main">
               <a:ext uri="{FF2B5EF4-FFF2-40B4-BE49-F238E27FC236}">
-                <a16:creationId xmlns:a16="http://schemas.microsoft.com/office/drawing/2014/main" id="{26411FA8-7BAA-4CED-80C1-F52A1E131729}"/>
+                <a16:creationId xmlns:a16="http://schemas.microsoft.com/office/drawing/2014/main" id="{19D861F3-0187-4A3B-A3F7-D5E9E9F29F29}"/>
               </a:ext>
             </a:extLst>
           </p:cNvPr>
@@ -8377,7 +8377,7 @@
           <p:cNvPr id="19" name="TextBox 18">
             <a:extLst xmlns:a="http://schemas.openxmlformats.org/drawingml/2006/main">
               <a:ext uri="{FF2B5EF4-FFF2-40B4-BE49-F238E27FC236}">
-                <a16:creationId xmlns:a16="http://schemas.microsoft.com/office/drawing/2014/main" id="{95E54F72-FD6C-4953-A126-E15EFA920293}"/>
+                <a16:creationId xmlns:a16="http://schemas.microsoft.com/office/drawing/2014/main" id="{50079EE7-E359-4D03-BA99-DA623295B951}"/>
               </a:ext>
             </a:extLst>
           </p:cNvPr>
@@ -8424,7 +8424,7 @@
           <p:cNvPr id="20" name="TextBox 19">
             <a:extLst xmlns:a="http://schemas.openxmlformats.org/drawingml/2006/main">
               <a:ext uri="{FF2B5EF4-FFF2-40B4-BE49-F238E27FC236}">
-                <a16:creationId xmlns:a16="http://schemas.microsoft.com/office/drawing/2014/main" id="{33E4F237-AF5F-4EA2-AC5E-2C1C8DB75674}"/>
+                <a16:creationId xmlns:a16="http://schemas.microsoft.com/office/drawing/2014/main" id="{C9B98B39-AB62-4796-8421-B7F15AEC9347}"/>
               </a:ext>
             </a:extLst>
           </p:cNvPr>
@@ -8469,7 +8469,7 @@
     </p:spTree>
     <p:extLst>
       <p:ext uri="{BB962C8B-B14F-4D97-AF65-F5344CB8AC3E}">
-        <p14:creationId xmlns:p14="http://schemas.microsoft.com/office/powerpoint/2010/main" val="700130613"/>
+        <p14:creationId xmlns:p14="http://schemas.microsoft.com/office/powerpoint/2010/main" val="1864541043"/>
       </p:ext>
     </p:extLst>
   </p:cSld>
@@ -8493,7 +8493,7 @@
           <p:cNvPr id="2" name="TextBox 1">
             <a:extLst xmlns:a="http://schemas.openxmlformats.org/drawingml/2006/main">
               <a:ext uri="{FF2B5EF4-FFF2-40B4-BE49-F238E27FC236}">
-                <a16:creationId xmlns:a16="http://schemas.microsoft.com/office/drawing/2014/main" id="{4C4437B0-829A-4CCA-8D5B-6C468C97D578}"/>
+                <a16:creationId xmlns:a16="http://schemas.microsoft.com/office/drawing/2014/main" id="{EE394EF5-7344-47B8-AAD5-4F13C98C7705}"/>
               </a:ext>
             </a:extLst>
           </p:cNvPr>
@@ -8540,7 +8540,7 @@
           <p:cNvPr id="3" name="TextBox 2">
             <a:extLst xmlns:a="http://schemas.openxmlformats.org/drawingml/2006/main">
               <a:ext uri="{FF2B5EF4-FFF2-40B4-BE49-F238E27FC236}">
-                <a16:creationId xmlns:a16="http://schemas.microsoft.com/office/drawing/2014/main" id="{BC5EEEA4-89B5-4B64-B7AB-727B4C7B59BC}"/>
+                <a16:creationId xmlns:a16="http://schemas.microsoft.com/office/drawing/2014/main" id="{0A112944-66C4-4ABD-876C-0C2F36A465CA}"/>
               </a:ext>
             </a:extLst>
           </p:cNvPr>
@@ -8587,7 +8587,7 @@
           <p:cNvPr id="4" name="Rectangle 3">
             <a:extLst xmlns:a="http://schemas.openxmlformats.org/drawingml/2006/main">
               <a:ext uri="{FF2B5EF4-FFF2-40B4-BE49-F238E27FC236}">
-                <a16:creationId xmlns:a16="http://schemas.microsoft.com/office/drawing/2014/main" id="{4C246986-5996-4CAD-9F87-AE134AAFF13D}"/>
+                <a16:creationId xmlns:a16="http://schemas.microsoft.com/office/drawing/2014/main" id="{9CE7DE13-8177-4D49-A235-AC399BDC15F5}"/>
               </a:ext>
             </a:extLst>
           </p:cNvPr>
@@ -8642,7 +8642,7 @@
           <p:cNvPr id="5" name="Rectangle 4">
             <a:extLst xmlns:a="http://schemas.openxmlformats.org/drawingml/2006/main">
               <a:ext uri="{FF2B5EF4-FFF2-40B4-BE49-F238E27FC236}">
-                <a16:creationId xmlns:a16="http://schemas.microsoft.com/office/drawing/2014/main" id="{CB62B16B-372A-450C-AC78-932D115235C2}"/>
+                <a16:creationId xmlns:a16="http://schemas.microsoft.com/office/drawing/2014/main" id="{0CFA2911-8B41-44A6-9035-9CA71B883121}"/>
               </a:ext>
             </a:extLst>
           </p:cNvPr>
@@ -8697,7 +8697,7 @@
           <p:cNvPr id="6" name="TextBox 5">
             <a:extLst xmlns:a="http://schemas.openxmlformats.org/drawingml/2006/main">
               <a:ext uri="{FF2B5EF4-FFF2-40B4-BE49-F238E27FC236}">
-                <a16:creationId xmlns:a16="http://schemas.microsoft.com/office/drawing/2014/main" id="{E126E3B1-EBAE-455A-95D1-80049AF6A5A9}"/>
+                <a16:creationId xmlns:a16="http://schemas.microsoft.com/office/drawing/2014/main" id="{EEEC7529-0B76-4C15-A672-72C291E47FB0}"/>
               </a:ext>
             </a:extLst>
           </p:cNvPr>
@@ -8734,7 +8734,7 @@
                 <a:ea typeface="Aptos"/>
                 <a:cs typeface="Aptos"/>
               </a:rPr>
-              <a:t>Julkinen riippumaton evidenssikooste · 2026.07.27-27 · 2026-07-27 · Lähteet: Evidence Register; WIPO IP valuation</a:t>
+              <a:t>Julkinen riippumaton evidenssikooste · 2026.07.27-28 · 2026-07-27 · Lähteet: Evidence Register; WIPO IP valuation</a:t>
             </a:r>
           </a:p>
         </p:txBody>
@@ -8744,7 +8744,7 @@
           <p:cNvPr id="7" name="TextBox 6">
             <a:extLst xmlns:a="http://schemas.openxmlformats.org/drawingml/2006/main">
               <a:ext uri="{FF2B5EF4-FFF2-40B4-BE49-F238E27FC236}">
-                <a16:creationId xmlns:a16="http://schemas.microsoft.com/office/drawing/2014/main" id="{2B466DC3-A413-464F-94CB-07D3D2212EDC}"/>
+                <a16:creationId xmlns:a16="http://schemas.microsoft.com/office/drawing/2014/main" id="{54F13AF4-D158-46F0-9465-A15592375EAA}"/>
               </a:ext>
             </a:extLst>
           </p:cNvPr>
@@ -9231,7 +9231,7 @@
           <p:cNvPr id="9" name="TextBox 8">
             <a:extLst xmlns:a="http://schemas.openxmlformats.org/drawingml/2006/main">
               <a:ext uri="{FF2B5EF4-FFF2-40B4-BE49-F238E27FC236}">
-                <a16:creationId xmlns:a16="http://schemas.microsoft.com/office/drawing/2014/main" id="{253F8FA5-4780-4DA0-A173-46A09F1A99A4}"/>
+                <a16:creationId xmlns:a16="http://schemas.microsoft.com/office/drawing/2014/main" id="{D1582D07-61D2-4A58-8CB8-B69E776B62DD}"/>
               </a:ext>
             </a:extLst>
           </p:cNvPr>
@@ -9276,7 +9276,7 @@
     </p:spTree>
     <p:extLst>
       <p:ext uri="{BB962C8B-B14F-4D97-AF65-F5344CB8AC3E}">
-        <p14:creationId xmlns:p14="http://schemas.microsoft.com/office/powerpoint/2010/main" val="596071910"/>
+        <p14:creationId xmlns:p14="http://schemas.microsoft.com/office/powerpoint/2010/main" val="1193066340"/>
       </p:ext>
     </p:extLst>
   </p:cSld>
@@ -9307,7 +9307,7 @@
           <p:cNvPr id="2" name="TextBox 1">
             <a:extLst xmlns:a="http://schemas.openxmlformats.org/drawingml/2006/main">
               <a:ext uri="{FF2B5EF4-FFF2-40B4-BE49-F238E27FC236}">
-                <a16:creationId xmlns:a16="http://schemas.microsoft.com/office/drawing/2014/main" id="{101BF804-E7BF-48DA-B830-2BBAE50CB142}"/>
+                <a16:creationId xmlns:a16="http://schemas.microsoft.com/office/drawing/2014/main" id="{A545581A-92BC-4E59-AF0B-F11D22F2ED0E}"/>
               </a:ext>
             </a:extLst>
           </p:cNvPr>
@@ -9354,7 +9354,7 @@
           <p:cNvPr id="3" name="TextBox 2">
             <a:extLst xmlns:a="http://schemas.openxmlformats.org/drawingml/2006/main">
               <a:ext uri="{FF2B5EF4-FFF2-40B4-BE49-F238E27FC236}">
-                <a16:creationId xmlns:a16="http://schemas.microsoft.com/office/drawing/2014/main" id="{E70F7088-DC66-4C77-9FF1-2D8FB1F9A8C7}"/>
+                <a16:creationId xmlns:a16="http://schemas.microsoft.com/office/drawing/2014/main" id="{DB3B14AD-279A-4039-A4CC-4918D209092B}"/>
               </a:ext>
             </a:extLst>
           </p:cNvPr>
@@ -9401,7 +9401,7 @@
           <p:cNvPr id="4" name="TextBox 3">
             <a:extLst xmlns:a="http://schemas.openxmlformats.org/drawingml/2006/main">
               <a:ext uri="{FF2B5EF4-FFF2-40B4-BE49-F238E27FC236}">
-                <a16:creationId xmlns:a16="http://schemas.microsoft.com/office/drawing/2014/main" id="{37B01CD9-F1F1-4002-805B-79D82C5AE5B0}"/>
+                <a16:creationId xmlns:a16="http://schemas.microsoft.com/office/drawing/2014/main" id="{63A2A750-AD62-4324-BB5E-BB7142E2DECB}"/>
               </a:ext>
             </a:extLst>
           </p:cNvPr>
@@ -9520,7 +9520,7 @@
           <p:cNvPr id="5" name="TextBox 4">
             <a:extLst xmlns:a="http://schemas.openxmlformats.org/drawingml/2006/main">
               <a:ext uri="{FF2B5EF4-FFF2-40B4-BE49-F238E27FC236}">
-                <a16:creationId xmlns:a16="http://schemas.microsoft.com/office/drawing/2014/main" id="{9D2D01F6-A471-4B78-8449-24CCCED002D9}"/>
+                <a16:creationId xmlns:a16="http://schemas.microsoft.com/office/drawing/2014/main" id="{2FBC2B09-168D-49DA-9456-953310430A09}"/>
               </a:ext>
             </a:extLst>
           </p:cNvPr>
@@ -9557,7 +9557,7 @@
                 <a:ea typeface="Aptos"/>
                 <a:cs typeface="Aptos"/>
               </a:rPr>
-              <a:t>Versio 2026.07.27-27 · 2026-07-27 · 6 / 6</a:t>
+              <a:t>Versio 2026.07.27-28 · 2026-07-27 · 6 / 6</a:t>
             </a:r>
           </a:p>
         </p:txBody>
@@ -9565,7 +9565,7 @@
     </p:spTree>
     <p:extLst>
       <p:ext uri="{BB962C8B-B14F-4D97-AF65-F5344CB8AC3E}">
-        <p14:creationId xmlns:p14="http://schemas.microsoft.com/office/powerpoint/2010/main" val="1338644363"/>
+        <p14:creationId xmlns:p14="http://schemas.microsoft.com/office/powerpoint/2010/main" val="1377085427"/>
       </p:ext>
     </p:extLst>
   </p:cSld>

--- a/site/downloads/pixan-bank-deck-short-fi.pptx
+++ b/site/downloads/pixan-bank-deck-short-fi.pptx
@@ -2,18 +2,18 @@
 <file path=ppt/presentation.xml><?xml version="1.0" encoding="utf-8"?>
 <p:presentation xmlns:p="http://schemas.openxmlformats.org/presentationml/2006/main">
   <p:sldMasterIdLst>
-    <p:sldMasterId xmlns:r="http://schemas.openxmlformats.org/officeDocument/2006/relationships" id="2147483648" r:id="R63f922ad6881407c"/>
+    <p:sldMasterId xmlns:r="http://schemas.openxmlformats.org/officeDocument/2006/relationships" id="2147483648" r:id="R319e6dc5376e439c"/>
   </p:sldMasterIdLst>
   <p:notesMasterIdLst>
-    <p:notesMasterId xmlns:r="http://schemas.openxmlformats.org/officeDocument/2006/relationships" r:id="R7b7c6e5e9aae4c11"/>
+    <p:notesMasterId xmlns:r="http://schemas.openxmlformats.org/officeDocument/2006/relationships" r:id="Rea26c0fede624745"/>
   </p:notesMasterIdLst>
   <p:sldIdLst>
-    <p:sldId xmlns:r="http://schemas.openxmlformats.org/officeDocument/2006/relationships" id="256" r:id="R16d70326d98542c8"/>
-    <p:sldId xmlns:r="http://schemas.openxmlformats.org/officeDocument/2006/relationships" id="257" r:id="R7ad430a36d6d4b7d"/>
-    <p:sldId xmlns:r="http://schemas.openxmlformats.org/officeDocument/2006/relationships" id="258" r:id="R71f201429586428f"/>
-    <p:sldId xmlns:r="http://schemas.openxmlformats.org/officeDocument/2006/relationships" id="259" r:id="R4df5f17875f04877"/>
-    <p:sldId xmlns:r="http://schemas.openxmlformats.org/officeDocument/2006/relationships" id="260" r:id="Rb3ef7d9622964ce7"/>
-    <p:sldId xmlns:r="http://schemas.openxmlformats.org/officeDocument/2006/relationships" id="261" r:id="R4de3c44fa6a64f02"/>
+    <p:sldId xmlns:r="http://schemas.openxmlformats.org/officeDocument/2006/relationships" id="256" r:id="R055c60006fcd486e"/>
+    <p:sldId xmlns:r="http://schemas.openxmlformats.org/officeDocument/2006/relationships" id="257" r:id="R6d61932bace5404d"/>
+    <p:sldId xmlns:r="http://schemas.openxmlformats.org/officeDocument/2006/relationships" id="258" r:id="Re367eed5cff3455c"/>
+    <p:sldId xmlns:r="http://schemas.openxmlformats.org/officeDocument/2006/relationships" id="259" r:id="Rd668c7f69b33482e"/>
+    <p:sldId xmlns:r="http://schemas.openxmlformats.org/officeDocument/2006/relationships" id="260" r:id="R2266cfde119a4eb3"/>
+    <p:sldId xmlns:r="http://schemas.openxmlformats.org/officeDocument/2006/relationships" id="261" r:id="Re9d3951429854e8f"/>
   </p:sldIdLst>
   <p:sldSz cx="12191999" cy="6858000"/>
   <p:notesSz cx="6858000" cy="9144000"/>
@@ -1887,7 +1887,7 @@
           <p:cNvPr id="2" name="Title 1">
             <a:extLst xmlns:a="http://schemas.openxmlformats.org/drawingml/2006/main">
               <a:ext uri="{FF2B5EF4-FFF2-40B4-BE49-F238E27FC236}">
-                <a16:creationId xmlns:a16="http://schemas.microsoft.com/office/drawing/2014/main" id="{B9359E6C-8385-4472-9984-8A84B5628836}"/>
+                <a16:creationId xmlns:a16="http://schemas.microsoft.com/office/drawing/2014/main" id="{6D5AB22A-6787-4C19-AB5F-73DB36810971}"/>
               </a:ext>
             </a:extLst>
           </p:cNvPr>
@@ -1919,7 +1919,7 @@
           <p:cNvPr id="3" name="Subtitle 2">
             <a:extLst xmlns:a="http://schemas.openxmlformats.org/drawingml/2006/main">
               <a:ext uri="{FF2B5EF4-FFF2-40B4-BE49-F238E27FC236}">
-                <a16:creationId xmlns:a16="http://schemas.microsoft.com/office/drawing/2014/main" id="{C41ADB0C-EA3A-4EF3-9954-F77A4A445930}"/>
+                <a16:creationId xmlns:a16="http://schemas.microsoft.com/office/drawing/2014/main" id="{3DFEB15A-545E-4B86-A0D5-9CB056811B8B}"/>
               </a:ext>
             </a:extLst>
           </p:cNvPr>
@@ -2042,7 +2042,7 @@
           <p:cNvPr id="4" name="Date Placeholder 3">
             <a:extLst xmlns:a="http://schemas.openxmlformats.org/drawingml/2006/main">
               <a:ext uri="{FF2B5EF4-FFF2-40B4-BE49-F238E27FC236}">
-                <a16:creationId xmlns:a16="http://schemas.microsoft.com/office/drawing/2014/main" id="{D1C111ED-CFB2-47D1-BE7B-6CF94D803FD1}"/>
+                <a16:creationId xmlns:a16="http://schemas.microsoft.com/office/drawing/2014/main" id="{D7EF8F55-3F59-4DC1-81C8-24C80BF2C290}"/>
               </a:ext>
             </a:extLst>
           </p:cNvPr>
@@ -2069,7 +2069,7 @@
           <p:cNvPr id="5" name="Footer Placeholder 4">
             <a:extLst xmlns:a="http://schemas.openxmlformats.org/drawingml/2006/main">
               <a:ext uri="{FF2B5EF4-FFF2-40B4-BE49-F238E27FC236}">
-                <a16:creationId xmlns:a16="http://schemas.microsoft.com/office/drawing/2014/main" id="{0FD44ABD-506C-4F5E-BE58-C63C6A7326CD}"/>
+                <a16:creationId xmlns:a16="http://schemas.microsoft.com/office/drawing/2014/main" id="{189F3643-98E1-44E9-B356-E9425FE573CC}"/>
               </a:ext>
             </a:extLst>
           </p:cNvPr>
@@ -2092,7 +2092,7 @@
           <p:cNvPr id="6" name="Slide Number Placeholder 5">
             <a:extLst xmlns:a="http://schemas.openxmlformats.org/drawingml/2006/main">
               <a:ext uri="{FF2B5EF4-FFF2-40B4-BE49-F238E27FC236}">
-                <a16:creationId xmlns:a16="http://schemas.microsoft.com/office/drawing/2014/main" id="{2E34A205-3A36-479A-8062-8C1345AC8054}"/>
+                <a16:creationId xmlns:a16="http://schemas.microsoft.com/office/drawing/2014/main" id="{2C0FB390-CC72-416D-9842-568D91086AEE}"/>
               </a:ext>
             </a:extLst>
           </p:cNvPr>
@@ -2136,7 +2136,7 @@
           <p:cNvPr id="2" name="Title 1">
             <a:extLst xmlns:a="http://schemas.openxmlformats.org/drawingml/2006/main">
               <a:ext uri="{FF2B5EF4-FFF2-40B4-BE49-F238E27FC236}">
-                <a16:creationId xmlns:a16="http://schemas.microsoft.com/office/drawing/2014/main" id="{BDFEB862-C619-4C6D-B9A4-063C190B1842}"/>
+                <a16:creationId xmlns:a16="http://schemas.microsoft.com/office/drawing/2014/main" id="{CAB8E8A6-DC62-47BA-9BE6-A8CA2D486E0E}"/>
               </a:ext>
             </a:extLst>
           </p:cNvPr>
@@ -2163,7 +2163,7 @@
           <p:cNvPr id="3" name="Vertical Text Placeholder 2">
             <a:extLst xmlns:a="http://schemas.openxmlformats.org/drawingml/2006/main">
               <a:ext uri="{FF2B5EF4-FFF2-40B4-BE49-F238E27FC236}">
-                <a16:creationId xmlns:a16="http://schemas.microsoft.com/office/drawing/2014/main" id="{8166C160-B9EC-4FF9-9414-9118046F37B4}"/>
+                <a16:creationId xmlns:a16="http://schemas.microsoft.com/office/drawing/2014/main" id="{80AE251A-31B5-417B-BF56-BB3A419380EE}"/>
               </a:ext>
             </a:extLst>
           </p:cNvPr>
@@ -2225,7 +2225,7 @@
           <p:cNvPr id="4" name="Date Placeholder 3">
             <a:extLst xmlns:a="http://schemas.openxmlformats.org/drawingml/2006/main">
               <a:ext uri="{FF2B5EF4-FFF2-40B4-BE49-F238E27FC236}">
-                <a16:creationId xmlns:a16="http://schemas.microsoft.com/office/drawing/2014/main" id="{EA7CAB1A-24F6-4BA4-BF4F-B4C91B146BA2}"/>
+                <a16:creationId xmlns:a16="http://schemas.microsoft.com/office/drawing/2014/main" id="{A9DCBC0C-3AF8-4EB5-9AE8-63130479F3C1}"/>
               </a:ext>
             </a:extLst>
           </p:cNvPr>
@@ -2252,7 +2252,7 @@
           <p:cNvPr id="5" name="Footer Placeholder 4">
             <a:extLst xmlns:a="http://schemas.openxmlformats.org/drawingml/2006/main">
               <a:ext uri="{FF2B5EF4-FFF2-40B4-BE49-F238E27FC236}">
-                <a16:creationId xmlns:a16="http://schemas.microsoft.com/office/drawing/2014/main" id="{9A1281B9-819A-4674-BEE6-417ACD52E259}"/>
+                <a16:creationId xmlns:a16="http://schemas.microsoft.com/office/drawing/2014/main" id="{26AD5107-9C7F-4B6C-AF55-73A721CFB1BE}"/>
               </a:ext>
             </a:extLst>
           </p:cNvPr>
@@ -2275,7 +2275,7 @@
           <p:cNvPr id="6" name="Slide Number Placeholder 5">
             <a:extLst xmlns:a="http://schemas.openxmlformats.org/drawingml/2006/main">
               <a:ext uri="{FF2B5EF4-FFF2-40B4-BE49-F238E27FC236}">
-                <a16:creationId xmlns:a16="http://schemas.microsoft.com/office/drawing/2014/main" id="{FD71F405-FA11-4A42-8111-BF2B09741869}"/>
+                <a16:creationId xmlns:a16="http://schemas.microsoft.com/office/drawing/2014/main" id="{229857F6-8AF9-46DC-B24D-12B001D14C60}"/>
               </a:ext>
             </a:extLst>
           </p:cNvPr>
@@ -2319,7 +2319,7 @@
           <p:cNvPr id="2" name="Vertical Title 1">
             <a:extLst xmlns:a="http://schemas.openxmlformats.org/drawingml/2006/main">
               <a:ext uri="{FF2B5EF4-FFF2-40B4-BE49-F238E27FC236}">
-                <a16:creationId xmlns:a16="http://schemas.microsoft.com/office/drawing/2014/main" id="{C12AC2F0-0E70-4547-B524-CD217FB3986C}"/>
+                <a16:creationId xmlns:a16="http://schemas.microsoft.com/office/drawing/2014/main" id="{FB56921F-365D-476C-8FC2-6A13F33DF7F4}"/>
               </a:ext>
             </a:extLst>
           </p:cNvPr>
@@ -2351,7 +2351,7 @@
           <p:cNvPr id="3" name="Vertical Text Placeholder 2">
             <a:extLst xmlns:a="http://schemas.openxmlformats.org/drawingml/2006/main">
               <a:ext uri="{FF2B5EF4-FFF2-40B4-BE49-F238E27FC236}">
-                <a16:creationId xmlns:a16="http://schemas.microsoft.com/office/drawing/2014/main" id="{659B57B2-57A6-4DD6-A5C6-4629B1939F48}"/>
+                <a16:creationId xmlns:a16="http://schemas.microsoft.com/office/drawing/2014/main" id="{B8152308-B200-4419-8DD5-E89E6FC6D4E8}"/>
               </a:ext>
             </a:extLst>
           </p:cNvPr>
@@ -2418,7 +2418,7 @@
           <p:cNvPr id="4" name="Date Placeholder 3">
             <a:extLst xmlns:a="http://schemas.openxmlformats.org/drawingml/2006/main">
               <a:ext uri="{FF2B5EF4-FFF2-40B4-BE49-F238E27FC236}">
-                <a16:creationId xmlns:a16="http://schemas.microsoft.com/office/drawing/2014/main" id="{AFBFD066-D574-4940-AF4D-17CE389F4303}"/>
+                <a16:creationId xmlns:a16="http://schemas.microsoft.com/office/drawing/2014/main" id="{E9CEE790-BC85-48E6-8856-00B94ECF8864}"/>
               </a:ext>
             </a:extLst>
           </p:cNvPr>
@@ -2445,7 +2445,7 @@
           <p:cNvPr id="5" name="Footer Placeholder 4">
             <a:extLst xmlns:a="http://schemas.openxmlformats.org/drawingml/2006/main">
               <a:ext uri="{FF2B5EF4-FFF2-40B4-BE49-F238E27FC236}">
-                <a16:creationId xmlns:a16="http://schemas.microsoft.com/office/drawing/2014/main" id="{350E6B2C-E047-43AC-A34D-424F42838FAA}"/>
+                <a16:creationId xmlns:a16="http://schemas.microsoft.com/office/drawing/2014/main" id="{AF119129-F541-4CAA-9CED-680AA8F6D1B5}"/>
               </a:ext>
             </a:extLst>
           </p:cNvPr>
@@ -2468,7 +2468,7 @@
           <p:cNvPr id="6" name="Slide Number Placeholder 5">
             <a:extLst xmlns:a="http://schemas.openxmlformats.org/drawingml/2006/main">
               <a:ext uri="{FF2B5EF4-FFF2-40B4-BE49-F238E27FC236}">
-                <a16:creationId xmlns:a16="http://schemas.microsoft.com/office/drawing/2014/main" id="{ADF16A61-13A2-4457-BD4E-E0FDE6289920}"/>
+                <a16:creationId xmlns:a16="http://schemas.microsoft.com/office/drawing/2014/main" id="{75A78776-0FE4-4600-A0F2-E2904578200B}"/>
               </a:ext>
             </a:extLst>
           </p:cNvPr>
@@ -2512,7 +2512,7 @@
           <p:cNvPr id="2" name="Title 1">
             <a:extLst xmlns:a="http://schemas.openxmlformats.org/drawingml/2006/main">
               <a:ext uri="{FF2B5EF4-FFF2-40B4-BE49-F238E27FC236}">
-                <a16:creationId xmlns:a16="http://schemas.microsoft.com/office/drawing/2014/main" id="{9841658D-7173-445A-BBB3-365F80DB001C}"/>
+                <a16:creationId xmlns:a16="http://schemas.microsoft.com/office/drawing/2014/main" id="{7DABF76A-3630-4A6D-AFAF-F49F36047C1F}"/>
               </a:ext>
             </a:extLst>
           </p:cNvPr>
@@ -2539,7 +2539,7 @@
           <p:cNvPr id="3" name="Content Placeholder 2">
             <a:extLst xmlns:a="http://schemas.openxmlformats.org/drawingml/2006/main">
               <a:ext uri="{FF2B5EF4-FFF2-40B4-BE49-F238E27FC236}">
-                <a16:creationId xmlns:a16="http://schemas.microsoft.com/office/drawing/2014/main" id="{D7CF19DF-E321-42A1-965B-F3401DE17A45}"/>
+                <a16:creationId xmlns:a16="http://schemas.microsoft.com/office/drawing/2014/main" id="{CADEA7DF-4FA6-4E05-94E8-1370269E1874}"/>
               </a:ext>
             </a:extLst>
           </p:cNvPr>
@@ -2601,7 +2601,7 @@
           <p:cNvPr id="4" name="Date Placeholder 3">
             <a:extLst xmlns:a="http://schemas.openxmlformats.org/drawingml/2006/main">
               <a:ext uri="{FF2B5EF4-FFF2-40B4-BE49-F238E27FC236}">
-                <a16:creationId xmlns:a16="http://schemas.microsoft.com/office/drawing/2014/main" id="{FE260344-895B-4DDA-A8AF-237A223083CC}"/>
+                <a16:creationId xmlns:a16="http://schemas.microsoft.com/office/drawing/2014/main" id="{87D77BBE-5D4D-42BD-86A9-07A405CFAB46}"/>
               </a:ext>
             </a:extLst>
           </p:cNvPr>
@@ -2628,7 +2628,7 @@
           <p:cNvPr id="5" name="Footer Placeholder 4">
             <a:extLst xmlns:a="http://schemas.openxmlformats.org/drawingml/2006/main">
               <a:ext uri="{FF2B5EF4-FFF2-40B4-BE49-F238E27FC236}">
-                <a16:creationId xmlns:a16="http://schemas.microsoft.com/office/drawing/2014/main" id="{8D6C4A49-AEF2-4279-AF2A-1695920204B8}"/>
+                <a16:creationId xmlns:a16="http://schemas.microsoft.com/office/drawing/2014/main" id="{FD155073-7DC1-4AF1-A627-4189E42BC014}"/>
               </a:ext>
             </a:extLst>
           </p:cNvPr>
@@ -2651,7 +2651,7 @@
           <p:cNvPr id="6" name="Slide Number Placeholder 5">
             <a:extLst xmlns:a="http://schemas.openxmlformats.org/drawingml/2006/main">
               <a:ext uri="{FF2B5EF4-FFF2-40B4-BE49-F238E27FC236}">
-                <a16:creationId xmlns:a16="http://schemas.microsoft.com/office/drawing/2014/main" id="{A73FD0DD-C66A-4F61-8DD8-35BC9D01FFA9}"/>
+                <a16:creationId xmlns:a16="http://schemas.microsoft.com/office/drawing/2014/main" id="{D6BB3106-4DC7-49B4-92C9-3535F0F60D86}"/>
               </a:ext>
             </a:extLst>
           </p:cNvPr>
@@ -2695,7 +2695,7 @@
           <p:cNvPr id="2" name="Title 1">
             <a:extLst xmlns:a="http://schemas.openxmlformats.org/drawingml/2006/main">
               <a:ext uri="{FF2B5EF4-FFF2-40B4-BE49-F238E27FC236}">
-                <a16:creationId xmlns:a16="http://schemas.microsoft.com/office/drawing/2014/main" id="{EA8E8586-EF00-4850-AD5D-3EC39A204B36}"/>
+                <a16:creationId xmlns:a16="http://schemas.microsoft.com/office/drawing/2014/main" id="{5F5A7F1F-5E4E-4A4C-8937-5E19E9B5518E}"/>
               </a:ext>
             </a:extLst>
           </p:cNvPr>
@@ -2732,7 +2732,7 @@
           <p:cNvPr id="3" name="Text Placeholder 2">
             <a:extLst xmlns:a="http://schemas.openxmlformats.org/drawingml/2006/main">
               <a:ext uri="{FF2B5EF4-FFF2-40B4-BE49-F238E27FC236}">
-                <a16:creationId xmlns:a16="http://schemas.microsoft.com/office/drawing/2014/main" id="{71CB9BD5-26DE-4E97-9644-41C0BB31F8C3}"/>
+                <a16:creationId xmlns:a16="http://schemas.microsoft.com/office/drawing/2014/main" id="{7EBD181F-C17B-40B7-BEBC-6025C82707DA}"/>
               </a:ext>
             </a:extLst>
           </p:cNvPr>
@@ -2858,7 +2858,7 @@
           <p:cNvPr id="4" name="Date Placeholder 3">
             <a:extLst xmlns:a="http://schemas.openxmlformats.org/drawingml/2006/main">
               <a:ext uri="{FF2B5EF4-FFF2-40B4-BE49-F238E27FC236}">
-                <a16:creationId xmlns:a16="http://schemas.microsoft.com/office/drawing/2014/main" id="{27590D92-C6BB-46CF-A4E8-59FEFBD819F2}"/>
+                <a16:creationId xmlns:a16="http://schemas.microsoft.com/office/drawing/2014/main" id="{E6931F65-5818-483F-BC9C-F907B0BA33BC}"/>
               </a:ext>
             </a:extLst>
           </p:cNvPr>
@@ -2885,7 +2885,7 @@
           <p:cNvPr id="5" name="Footer Placeholder 4">
             <a:extLst xmlns:a="http://schemas.openxmlformats.org/drawingml/2006/main">
               <a:ext uri="{FF2B5EF4-FFF2-40B4-BE49-F238E27FC236}">
-                <a16:creationId xmlns:a16="http://schemas.microsoft.com/office/drawing/2014/main" id="{8D19CFA7-DE3F-4139-A064-5DC43623F9C7}"/>
+                <a16:creationId xmlns:a16="http://schemas.microsoft.com/office/drawing/2014/main" id="{870B80B7-E0F1-4599-AEFE-28562347AFF6}"/>
               </a:ext>
             </a:extLst>
           </p:cNvPr>
@@ -2908,7 +2908,7 @@
           <p:cNvPr id="6" name="Slide Number Placeholder 5">
             <a:extLst xmlns:a="http://schemas.openxmlformats.org/drawingml/2006/main">
               <a:ext uri="{FF2B5EF4-FFF2-40B4-BE49-F238E27FC236}">
-                <a16:creationId xmlns:a16="http://schemas.microsoft.com/office/drawing/2014/main" id="{4B900BEC-825E-4465-89AE-DF6429A57AEC}"/>
+                <a16:creationId xmlns:a16="http://schemas.microsoft.com/office/drawing/2014/main" id="{393EA6EE-79BA-48BE-B798-BD2C9ECB5547}"/>
               </a:ext>
             </a:extLst>
           </p:cNvPr>
@@ -2952,7 +2952,7 @@
           <p:cNvPr id="2" name="Title 1">
             <a:extLst xmlns:a="http://schemas.openxmlformats.org/drawingml/2006/main">
               <a:ext uri="{FF2B5EF4-FFF2-40B4-BE49-F238E27FC236}">
-                <a16:creationId xmlns:a16="http://schemas.microsoft.com/office/drawing/2014/main" id="{08BBBED7-56C6-4425-BB53-D39008EC15AE}"/>
+                <a16:creationId xmlns:a16="http://schemas.microsoft.com/office/drawing/2014/main" id="{5F04ED4D-9E27-45B4-A977-7D85C4CE4E88}"/>
               </a:ext>
             </a:extLst>
           </p:cNvPr>
@@ -2979,7 +2979,7 @@
           <p:cNvPr id="3" name="Content Placeholder 2">
             <a:extLst xmlns:a="http://schemas.openxmlformats.org/drawingml/2006/main">
               <a:ext uri="{FF2B5EF4-FFF2-40B4-BE49-F238E27FC236}">
-                <a16:creationId xmlns:a16="http://schemas.microsoft.com/office/drawing/2014/main" id="{FE70AB95-115A-40E2-A4CE-6DE4418008A0}"/>
+                <a16:creationId xmlns:a16="http://schemas.microsoft.com/office/drawing/2014/main" id="{BC498D6B-B4EE-49E0-859C-7A30E54F479D}"/>
               </a:ext>
             </a:extLst>
           </p:cNvPr>
@@ -3083,7 +3083,7 @@
           <p:cNvPr id="4" name="Content Placeholder 3">
             <a:extLst xmlns:a="http://schemas.openxmlformats.org/drawingml/2006/main">
               <a:ext uri="{FF2B5EF4-FFF2-40B4-BE49-F238E27FC236}">
-                <a16:creationId xmlns:a16="http://schemas.microsoft.com/office/drawing/2014/main" id="{E37CABFF-DF35-4623-BA7B-6EE1743715B5}"/>
+                <a16:creationId xmlns:a16="http://schemas.microsoft.com/office/drawing/2014/main" id="{0903699F-F825-40DB-A11E-04E45A0EF69D}"/>
               </a:ext>
             </a:extLst>
           </p:cNvPr>
@@ -3187,7 +3187,7 @@
           <p:cNvPr id="5" name="Date Placeholder 4">
             <a:extLst xmlns:a="http://schemas.openxmlformats.org/drawingml/2006/main">
               <a:ext uri="{FF2B5EF4-FFF2-40B4-BE49-F238E27FC236}">
-                <a16:creationId xmlns:a16="http://schemas.microsoft.com/office/drawing/2014/main" id="{9ED3F313-5EFF-4F89-B80B-5E79F37BD5DE}"/>
+                <a16:creationId xmlns:a16="http://schemas.microsoft.com/office/drawing/2014/main" id="{8CA0C253-DC17-49AA-9A47-B75300570F96}"/>
               </a:ext>
             </a:extLst>
           </p:cNvPr>
@@ -3214,7 +3214,7 @@
           <p:cNvPr id="6" name="Footer Placeholder 5">
             <a:extLst xmlns:a="http://schemas.openxmlformats.org/drawingml/2006/main">
               <a:ext uri="{FF2B5EF4-FFF2-40B4-BE49-F238E27FC236}">
-                <a16:creationId xmlns:a16="http://schemas.microsoft.com/office/drawing/2014/main" id="{B0461597-B474-4A90-B1B5-E7824D1ACC35}"/>
+                <a16:creationId xmlns:a16="http://schemas.microsoft.com/office/drawing/2014/main" id="{ACCE715D-8518-4947-90D3-588F620ED31C}"/>
               </a:ext>
             </a:extLst>
           </p:cNvPr>
@@ -3237,7 +3237,7 @@
           <p:cNvPr id="7" name="Slide Number Placeholder 6">
             <a:extLst xmlns:a="http://schemas.openxmlformats.org/drawingml/2006/main">
               <a:ext uri="{FF2B5EF4-FFF2-40B4-BE49-F238E27FC236}">
-                <a16:creationId xmlns:a16="http://schemas.microsoft.com/office/drawing/2014/main" id="{49BE5091-A8D4-4A2F-9B14-2FEEDBC40906}"/>
+                <a16:creationId xmlns:a16="http://schemas.microsoft.com/office/drawing/2014/main" id="{10B50668-A2D9-4B7E-B952-9ACDFBE9ABF0}"/>
               </a:ext>
             </a:extLst>
           </p:cNvPr>
@@ -3281,7 +3281,7 @@
           <p:cNvPr id="2" name="Title 1">
             <a:extLst xmlns:a="http://schemas.openxmlformats.org/drawingml/2006/main">
               <a:ext uri="{FF2B5EF4-FFF2-40B4-BE49-F238E27FC236}">
-                <a16:creationId xmlns:a16="http://schemas.microsoft.com/office/drawing/2014/main" id="{918CC12A-CFBE-4808-A889-DBF9330270C5}"/>
+                <a16:creationId xmlns:a16="http://schemas.microsoft.com/office/drawing/2014/main" id="{498B3DCA-EEBF-458E-9FC8-F229451EC67F}"/>
               </a:ext>
             </a:extLst>
           </p:cNvPr>
@@ -3313,7 +3313,7 @@
           <p:cNvPr id="3" name="Text Placeholder 2">
             <a:extLst xmlns:a="http://schemas.openxmlformats.org/drawingml/2006/main">
               <a:ext uri="{FF2B5EF4-FFF2-40B4-BE49-F238E27FC236}">
-                <a16:creationId xmlns:a16="http://schemas.microsoft.com/office/drawing/2014/main" id="{2A425F38-000F-40DE-B832-AFB475DA7EC5}"/>
+                <a16:creationId xmlns:a16="http://schemas.microsoft.com/office/drawing/2014/main" id="{88B838B2-64D4-4493-8DAD-EC5109D0A297}"/>
               </a:ext>
             </a:extLst>
           </p:cNvPr>
@@ -3385,7 +3385,7 @@
           <p:cNvPr id="4" name="Content Placeholder 3">
             <a:extLst xmlns:a="http://schemas.openxmlformats.org/drawingml/2006/main">
               <a:ext uri="{FF2B5EF4-FFF2-40B4-BE49-F238E27FC236}">
-                <a16:creationId xmlns:a16="http://schemas.microsoft.com/office/drawing/2014/main" id="{C52129F4-0B7A-43B9-A72D-EA639EED356E}"/>
+                <a16:creationId xmlns:a16="http://schemas.microsoft.com/office/drawing/2014/main" id="{E017A7F4-7FBC-4706-97CF-4BB804BA1487}"/>
               </a:ext>
             </a:extLst>
           </p:cNvPr>
@@ -3489,7 +3489,7 @@
           <p:cNvPr id="5" name="Text Placeholder 4">
             <a:extLst xmlns:a="http://schemas.openxmlformats.org/drawingml/2006/main">
               <a:ext uri="{FF2B5EF4-FFF2-40B4-BE49-F238E27FC236}">
-                <a16:creationId xmlns:a16="http://schemas.microsoft.com/office/drawing/2014/main" id="{B62DB5D9-629C-437A-82A4-CC24FA4F08BD}"/>
+                <a16:creationId xmlns:a16="http://schemas.microsoft.com/office/drawing/2014/main" id="{E0F0E051-D719-4278-AD26-5B0F101CC30E}"/>
               </a:ext>
             </a:extLst>
           </p:cNvPr>
@@ -3561,7 +3561,7 @@
           <p:cNvPr id="6" name="Content Placeholder 5">
             <a:extLst xmlns:a="http://schemas.openxmlformats.org/drawingml/2006/main">
               <a:ext uri="{FF2B5EF4-FFF2-40B4-BE49-F238E27FC236}">
-                <a16:creationId xmlns:a16="http://schemas.microsoft.com/office/drawing/2014/main" id="{38434957-015E-4DF5-A9F8-2F771F044F43}"/>
+                <a16:creationId xmlns:a16="http://schemas.microsoft.com/office/drawing/2014/main" id="{E20EB95F-1E0B-4ECF-9093-CCC478007961}"/>
               </a:ext>
             </a:extLst>
           </p:cNvPr>
@@ -3665,7 +3665,7 @@
           <p:cNvPr id="7" name="Date Placeholder 6">
             <a:extLst xmlns:a="http://schemas.openxmlformats.org/drawingml/2006/main">
               <a:ext uri="{FF2B5EF4-FFF2-40B4-BE49-F238E27FC236}">
-                <a16:creationId xmlns:a16="http://schemas.microsoft.com/office/drawing/2014/main" id="{0144005F-6C0A-4DCC-B1F7-2C203C3668B7}"/>
+                <a16:creationId xmlns:a16="http://schemas.microsoft.com/office/drawing/2014/main" id="{3DE0114B-1C76-4799-8748-7CC23DE04037}"/>
               </a:ext>
             </a:extLst>
           </p:cNvPr>
@@ -3692,7 +3692,7 @@
           <p:cNvPr id="8" name="Footer Placeholder 7">
             <a:extLst xmlns:a="http://schemas.openxmlformats.org/drawingml/2006/main">
               <a:ext uri="{FF2B5EF4-FFF2-40B4-BE49-F238E27FC236}">
-                <a16:creationId xmlns:a16="http://schemas.microsoft.com/office/drawing/2014/main" id="{F89E5E9A-26CE-4F17-ADCF-13521DF918EA}"/>
+                <a16:creationId xmlns:a16="http://schemas.microsoft.com/office/drawing/2014/main" id="{F430CEFC-1B0C-43C5-8A4B-1965D674A18B}"/>
               </a:ext>
             </a:extLst>
           </p:cNvPr>
@@ -3715,7 +3715,7 @@
           <p:cNvPr id="9" name="Slide Number Placeholder 8">
             <a:extLst xmlns:a="http://schemas.openxmlformats.org/drawingml/2006/main">
               <a:ext uri="{FF2B5EF4-FFF2-40B4-BE49-F238E27FC236}">
-                <a16:creationId xmlns:a16="http://schemas.microsoft.com/office/drawing/2014/main" id="{046D2280-E426-46E9-A64B-CAA46EF72F52}"/>
+                <a16:creationId xmlns:a16="http://schemas.microsoft.com/office/drawing/2014/main" id="{20AB261C-0C70-49B8-8FC1-355A6657FCCE}"/>
               </a:ext>
             </a:extLst>
           </p:cNvPr>
@@ -3759,7 +3759,7 @@
           <p:cNvPr id="2" name="Title 1">
             <a:extLst xmlns:a="http://schemas.openxmlformats.org/drawingml/2006/main">
               <a:ext uri="{FF2B5EF4-FFF2-40B4-BE49-F238E27FC236}">
-                <a16:creationId xmlns:a16="http://schemas.microsoft.com/office/drawing/2014/main" id="{810F85C1-F86D-4FB4-8171-B4994F3EFB89}"/>
+                <a16:creationId xmlns:a16="http://schemas.microsoft.com/office/drawing/2014/main" id="{EE16D25B-9BC4-4889-A612-D0C822CC7934}"/>
               </a:ext>
             </a:extLst>
           </p:cNvPr>
@@ -3786,7 +3786,7 @@
           <p:cNvPr id="3" name="Date Placeholder 2">
             <a:extLst xmlns:a="http://schemas.openxmlformats.org/drawingml/2006/main">
               <a:ext uri="{FF2B5EF4-FFF2-40B4-BE49-F238E27FC236}">
-                <a16:creationId xmlns:a16="http://schemas.microsoft.com/office/drawing/2014/main" id="{62B4796A-7645-40F0-85B9-424BC252B5E2}"/>
+                <a16:creationId xmlns:a16="http://schemas.microsoft.com/office/drawing/2014/main" id="{EB8D2F13-F2DF-43F4-A6C5-471F4AA01D39}"/>
               </a:ext>
             </a:extLst>
           </p:cNvPr>
@@ -3813,7 +3813,7 @@
           <p:cNvPr id="4" name="Footer Placeholder 3">
             <a:extLst xmlns:a="http://schemas.openxmlformats.org/drawingml/2006/main">
               <a:ext uri="{FF2B5EF4-FFF2-40B4-BE49-F238E27FC236}">
-                <a16:creationId xmlns:a16="http://schemas.microsoft.com/office/drawing/2014/main" id="{A620B9F4-DD58-4B5A-9BF0-5806D71DCD4C}"/>
+                <a16:creationId xmlns:a16="http://schemas.microsoft.com/office/drawing/2014/main" id="{E775A571-53AA-49EF-8702-12D282947B99}"/>
               </a:ext>
             </a:extLst>
           </p:cNvPr>
@@ -3836,7 +3836,7 @@
           <p:cNvPr id="5" name="Slide Number Placeholder 4">
             <a:extLst xmlns:a="http://schemas.openxmlformats.org/drawingml/2006/main">
               <a:ext uri="{FF2B5EF4-FFF2-40B4-BE49-F238E27FC236}">
-                <a16:creationId xmlns:a16="http://schemas.microsoft.com/office/drawing/2014/main" id="{FF93B434-E464-4CFA-AE13-DA5D7B6D3F32}"/>
+                <a16:creationId xmlns:a16="http://schemas.microsoft.com/office/drawing/2014/main" id="{EABA40EF-9E5C-4AC2-81C1-FA7A67C20997}"/>
               </a:ext>
             </a:extLst>
           </p:cNvPr>
@@ -3880,7 +3880,7 @@
           <p:cNvPr id="2" name="Date Placeholder 1">
             <a:extLst xmlns:a="http://schemas.openxmlformats.org/drawingml/2006/main">
               <a:ext uri="{FF2B5EF4-FFF2-40B4-BE49-F238E27FC236}">
-                <a16:creationId xmlns:a16="http://schemas.microsoft.com/office/drawing/2014/main" id="{C6861321-968E-471F-B399-ED8610413EA5}"/>
+                <a16:creationId xmlns:a16="http://schemas.microsoft.com/office/drawing/2014/main" id="{4094A690-02B4-4A83-B0A5-A906969D9C92}"/>
               </a:ext>
             </a:extLst>
           </p:cNvPr>
@@ -3907,7 +3907,7 @@
           <p:cNvPr id="3" name="Footer Placeholder 2">
             <a:extLst xmlns:a="http://schemas.openxmlformats.org/drawingml/2006/main">
               <a:ext uri="{FF2B5EF4-FFF2-40B4-BE49-F238E27FC236}">
-                <a16:creationId xmlns:a16="http://schemas.microsoft.com/office/drawing/2014/main" id="{12D72E40-5794-4524-9F6D-450EE367F3FE}"/>
+                <a16:creationId xmlns:a16="http://schemas.microsoft.com/office/drawing/2014/main" id="{57B9C898-77C9-4BCF-A4FB-9BAF1B381956}"/>
               </a:ext>
             </a:extLst>
           </p:cNvPr>
@@ -3930,7 +3930,7 @@
           <p:cNvPr id="4" name="Slide Number Placeholder 3">
             <a:extLst xmlns:a="http://schemas.openxmlformats.org/drawingml/2006/main">
               <a:ext uri="{FF2B5EF4-FFF2-40B4-BE49-F238E27FC236}">
-                <a16:creationId xmlns:a16="http://schemas.microsoft.com/office/drawing/2014/main" id="{E8BD8497-36FF-409E-87DF-183FB0EDF747}"/>
+                <a16:creationId xmlns:a16="http://schemas.microsoft.com/office/drawing/2014/main" id="{B7837C9E-F5C5-4D48-B2B0-904F7EA960D2}"/>
               </a:ext>
             </a:extLst>
           </p:cNvPr>
@@ -3974,7 +3974,7 @@
           <p:cNvPr id="2" name="Title 1">
             <a:extLst xmlns:a="http://schemas.openxmlformats.org/drawingml/2006/main">
               <a:ext uri="{FF2B5EF4-FFF2-40B4-BE49-F238E27FC236}">
-                <a16:creationId xmlns:a16="http://schemas.microsoft.com/office/drawing/2014/main" id="{D07FFCC3-AE17-4A58-94AA-ADDE319A09F6}"/>
+                <a16:creationId xmlns:a16="http://schemas.microsoft.com/office/drawing/2014/main" id="{EE71168D-5188-4B8F-8324-B6F8F4B16C30}"/>
               </a:ext>
             </a:extLst>
           </p:cNvPr>
@@ -4011,7 +4011,7 @@
           <p:cNvPr id="3" name="Content Placeholder 2">
             <a:extLst xmlns:a="http://schemas.openxmlformats.org/drawingml/2006/main">
               <a:ext uri="{FF2B5EF4-FFF2-40B4-BE49-F238E27FC236}">
-                <a16:creationId xmlns:a16="http://schemas.microsoft.com/office/drawing/2014/main" id="{373A6AC9-E090-40DD-A635-BFBDF82D5D08}"/>
+                <a16:creationId xmlns:a16="http://schemas.microsoft.com/office/drawing/2014/main" id="{C8EBE475-AC83-4CB4-B027-E69CA349DF53}"/>
               </a:ext>
             </a:extLst>
           </p:cNvPr>
@@ -4115,7 +4115,7 @@
           <p:cNvPr id="4" name="Text Placeholder 3">
             <a:extLst xmlns:a="http://schemas.openxmlformats.org/drawingml/2006/main">
               <a:ext uri="{FF2B5EF4-FFF2-40B4-BE49-F238E27FC236}">
-                <a16:creationId xmlns:a16="http://schemas.microsoft.com/office/drawing/2014/main" id="{6EF0243B-2103-49FF-9F5F-C61F58F75006}"/>
+                <a16:creationId xmlns:a16="http://schemas.microsoft.com/office/drawing/2014/main" id="{6E4B0F6C-375A-4B49-A823-A86BBB6B3ED9}"/>
               </a:ext>
             </a:extLst>
           </p:cNvPr>
@@ -4187,7 +4187,7 @@
           <p:cNvPr id="5" name="Date Placeholder 4">
             <a:extLst xmlns:a="http://schemas.openxmlformats.org/drawingml/2006/main">
               <a:ext uri="{FF2B5EF4-FFF2-40B4-BE49-F238E27FC236}">
-                <a16:creationId xmlns:a16="http://schemas.microsoft.com/office/drawing/2014/main" id="{309C4E94-8D74-4AB5-B5CE-85320E8BF809}"/>
+                <a16:creationId xmlns:a16="http://schemas.microsoft.com/office/drawing/2014/main" id="{C7CC408F-DCA5-401F-920C-25E49EB286D5}"/>
               </a:ext>
             </a:extLst>
           </p:cNvPr>
@@ -4214,7 +4214,7 @@
           <p:cNvPr id="6" name="Footer Placeholder 5">
             <a:extLst xmlns:a="http://schemas.openxmlformats.org/drawingml/2006/main">
               <a:ext uri="{FF2B5EF4-FFF2-40B4-BE49-F238E27FC236}">
-                <a16:creationId xmlns:a16="http://schemas.microsoft.com/office/drawing/2014/main" id="{C1791874-B13B-49D7-9286-3B00B496D91E}"/>
+                <a16:creationId xmlns:a16="http://schemas.microsoft.com/office/drawing/2014/main" id="{206FE1A3-9184-45F6-B2C6-38E61AC6755C}"/>
               </a:ext>
             </a:extLst>
           </p:cNvPr>
@@ -4237,7 +4237,7 @@
           <p:cNvPr id="7" name="Slide Number Placeholder 6">
             <a:extLst xmlns:a="http://schemas.openxmlformats.org/drawingml/2006/main">
               <a:ext uri="{FF2B5EF4-FFF2-40B4-BE49-F238E27FC236}">
-                <a16:creationId xmlns:a16="http://schemas.microsoft.com/office/drawing/2014/main" id="{6C40383D-154C-4327-97BC-FEB1C8C99DF2}"/>
+                <a16:creationId xmlns:a16="http://schemas.microsoft.com/office/drawing/2014/main" id="{D01F1D1C-0A3C-48CF-8B03-3505FF10FC46}"/>
               </a:ext>
             </a:extLst>
           </p:cNvPr>
@@ -4281,7 +4281,7 @@
           <p:cNvPr id="2" name="Title 1">
             <a:extLst xmlns:a="http://schemas.openxmlformats.org/drawingml/2006/main">
               <a:ext uri="{FF2B5EF4-FFF2-40B4-BE49-F238E27FC236}">
-                <a16:creationId xmlns:a16="http://schemas.microsoft.com/office/drawing/2014/main" id="{F541EF22-F161-418D-BDB5-52C3C92F7319}"/>
+                <a16:creationId xmlns:a16="http://schemas.microsoft.com/office/drawing/2014/main" id="{6C2EAB8A-1BFF-4337-B288-4DC8F398F33A}"/>
               </a:ext>
             </a:extLst>
           </p:cNvPr>
@@ -4318,7 +4318,7 @@
           <p:cNvPr id="3" name="Picture Placeholder 2">
             <a:extLst xmlns:a="http://schemas.openxmlformats.org/drawingml/2006/main">
               <a:ext uri="{FF2B5EF4-FFF2-40B4-BE49-F238E27FC236}">
-                <a16:creationId xmlns:a16="http://schemas.microsoft.com/office/drawing/2014/main" id="{DDC10795-BAAA-4D0E-94D3-1E5D49A99E4D}"/>
+                <a16:creationId xmlns:a16="http://schemas.microsoft.com/office/drawing/2014/main" id="{3B00B9E8-677B-4AC1-929E-98C3043A9205}"/>
               </a:ext>
             </a:extLst>
           </p:cNvPr>
@@ -4383,7 +4383,7 @@
           <p:cNvPr id="4" name="Text Placeholder 3">
             <a:extLst xmlns:a="http://schemas.openxmlformats.org/drawingml/2006/main">
               <a:ext uri="{FF2B5EF4-FFF2-40B4-BE49-F238E27FC236}">
-                <a16:creationId xmlns:a16="http://schemas.microsoft.com/office/drawing/2014/main" id="{02F63EFA-0680-4163-8065-6A4AA81FEA6C}"/>
+                <a16:creationId xmlns:a16="http://schemas.microsoft.com/office/drawing/2014/main" id="{E2B2086B-4208-49C2-AE39-AE41D08330FA}"/>
               </a:ext>
             </a:extLst>
           </p:cNvPr>
@@ -4455,7 +4455,7 @@
           <p:cNvPr id="5" name="Date Placeholder 4">
             <a:extLst xmlns:a="http://schemas.openxmlformats.org/drawingml/2006/main">
               <a:ext uri="{FF2B5EF4-FFF2-40B4-BE49-F238E27FC236}">
-                <a16:creationId xmlns:a16="http://schemas.microsoft.com/office/drawing/2014/main" id="{4A44C1A5-FFA4-43A7-A7E9-3DE8CE8E697A}"/>
+                <a16:creationId xmlns:a16="http://schemas.microsoft.com/office/drawing/2014/main" id="{32333FE9-265A-483C-AD56-64FE5BFA8535}"/>
               </a:ext>
             </a:extLst>
           </p:cNvPr>
@@ -4482,7 +4482,7 @@
           <p:cNvPr id="6" name="Footer Placeholder 5">
             <a:extLst xmlns:a="http://schemas.openxmlformats.org/drawingml/2006/main">
               <a:ext uri="{FF2B5EF4-FFF2-40B4-BE49-F238E27FC236}">
-                <a16:creationId xmlns:a16="http://schemas.microsoft.com/office/drawing/2014/main" id="{CCF59E35-A39B-48A8-B925-CE23B3698799}"/>
+                <a16:creationId xmlns:a16="http://schemas.microsoft.com/office/drawing/2014/main" id="{18B5970F-5116-41A1-8C47-22F8BAE50877}"/>
               </a:ext>
             </a:extLst>
           </p:cNvPr>
@@ -4505,7 +4505,7 @@
           <p:cNvPr id="7" name="Slide Number Placeholder 6">
             <a:extLst xmlns:a="http://schemas.openxmlformats.org/drawingml/2006/main">
               <a:ext uri="{FF2B5EF4-FFF2-40B4-BE49-F238E27FC236}">
-                <a16:creationId xmlns:a16="http://schemas.microsoft.com/office/drawing/2014/main" id="{CB71887D-9E47-4D3B-A51A-C2AE17C25641}"/>
+                <a16:creationId xmlns:a16="http://schemas.microsoft.com/office/drawing/2014/main" id="{9A5BE2F2-ABF8-4882-9584-0539C34F7B6C}"/>
               </a:ext>
             </a:extLst>
           </p:cNvPr>
@@ -4554,7 +4554,7 @@
           <p:cNvPr id="2" name="Title Placeholder 1">
             <a:extLst xmlns:a="http://schemas.openxmlformats.org/drawingml/2006/main">
               <a:ext uri="{FF2B5EF4-FFF2-40B4-BE49-F238E27FC236}">
-                <a16:creationId xmlns:a16="http://schemas.microsoft.com/office/drawing/2014/main" id="{C76441A3-950E-456D-B83A-9828844A6E2F}"/>
+                <a16:creationId xmlns:a16="http://schemas.microsoft.com/office/drawing/2014/main" id="{C4CFA039-3821-4F1F-9937-7922A0F1F8E0}"/>
               </a:ext>
             </a:extLst>
           </p:cNvPr>
@@ -4591,7 +4591,7 @@
           <p:cNvPr id="3" name="Text Placeholder 2">
             <a:extLst xmlns:a="http://schemas.openxmlformats.org/drawingml/2006/main">
               <a:ext uri="{FF2B5EF4-FFF2-40B4-BE49-F238E27FC236}">
-                <a16:creationId xmlns:a16="http://schemas.microsoft.com/office/drawing/2014/main" id="{E827F8E7-4087-4C88-A50D-91927CEFF73D}"/>
+                <a16:creationId xmlns:a16="http://schemas.microsoft.com/office/drawing/2014/main" id="{B03793AB-D811-4DD1-9C81-115ACDA14405}"/>
               </a:ext>
             </a:extLst>
           </p:cNvPr>
@@ -4663,7 +4663,7 @@
           <p:cNvPr id="4" name="Date Placeholder 3">
             <a:extLst xmlns:a="http://schemas.openxmlformats.org/drawingml/2006/main">
               <a:ext uri="{FF2B5EF4-FFF2-40B4-BE49-F238E27FC236}">
-                <a16:creationId xmlns:a16="http://schemas.microsoft.com/office/drawing/2014/main" id="{9B02D621-D454-4000-AC95-9CEF012E8967}"/>
+                <a16:creationId xmlns:a16="http://schemas.microsoft.com/office/drawing/2014/main" id="{91F3F6C4-FD95-4AA6-B247-99FB3AF174A2}"/>
               </a:ext>
             </a:extLst>
           </p:cNvPr>
@@ -4709,7 +4709,7 @@
           <p:cNvPr id="5" name="Footer Placeholder 4">
             <a:extLst xmlns:a="http://schemas.openxmlformats.org/drawingml/2006/main">
               <a:ext uri="{FF2B5EF4-FFF2-40B4-BE49-F238E27FC236}">
-                <a16:creationId xmlns:a16="http://schemas.microsoft.com/office/drawing/2014/main" id="{05BB686D-0C9B-4101-BA0D-F280D1DB4474}"/>
+                <a16:creationId xmlns:a16="http://schemas.microsoft.com/office/drawing/2014/main" id="{F8F58F7B-0C63-4C42-8509-A89A3914D6DD}"/>
               </a:ext>
             </a:extLst>
           </p:cNvPr>
@@ -4751,7 +4751,7 @@
           <p:cNvPr id="6" name="Slide Number Placeholder 5">
             <a:extLst xmlns:a="http://schemas.openxmlformats.org/drawingml/2006/main">
               <a:ext uri="{FF2B5EF4-FFF2-40B4-BE49-F238E27FC236}">
-                <a16:creationId xmlns:a16="http://schemas.microsoft.com/office/drawing/2014/main" id="{23B42F5D-96F8-46D6-9045-2FDBC530AFF1}"/>
+                <a16:creationId xmlns:a16="http://schemas.microsoft.com/office/drawing/2014/main" id="{7615E8BC-8578-4EE0-B324-2A7DCD718580}"/>
               </a:ext>
             </a:extLst>
           </p:cNvPr>
@@ -4796,17 +4796,17 @@
   </p:cSld>
   <p:clrMap bg1="lt1" tx1="dk1" bg2="lt2" tx2="dk2" accent1="accent1" accent2="accent2" accent3="accent3" accent4="accent4" accent5="accent5" accent6="accent6" hlink="hlink" folHlink="folHlink"/>
   <p:sldLayoutIdLst>
-    <p:sldLayoutId xmlns:r="http://schemas.openxmlformats.org/officeDocument/2006/relationships" id="2147483649" r:id="Re34a5855711949f3"/>
-    <p:sldLayoutId xmlns:r="http://schemas.openxmlformats.org/officeDocument/2006/relationships" id="2147483650" r:id="R3796bb5c40614b2d"/>
-    <p:sldLayoutId xmlns:r="http://schemas.openxmlformats.org/officeDocument/2006/relationships" id="2147483651" r:id="Rf394fe03a22b4dd9"/>
-    <p:sldLayoutId xmlns:r="http://schemas.openxmlformats.org/officeDocument/2006/relationships" id="2147483652" r:id="R510d5431fd8749e9"/>
-    <p:sldLayoutId xmlns:r="http://schemas.openxmlformats.org/officeDocument/2006/relationships" id="2147483653" r:id="Raea71bfed01a4677"/>
-    <p:sldLayoutId xmlns:r="http://schemas.openxmlformats.org/officeDocument/2006/relationships" id="2147483654" r:id="Rc3c98d2d9fc7477d"/>
-    <p:sldLayoutId xmlns:r="http://schemas.openxmlformats.org/officeDocument/2006/relationships" id="2147483655" r:id="Rda1afdb45af446eb"/>
-    <p:sldLayoutId xmlns:r="http://schemas.openxmlformats.org/officeDocument/2006/relationships" id="2147483656" r:id="R14f813245f774afa"/>
-    <p:sldLayoutId xmlns:r="http://schemas.openxmlformats.org/officeDocument/2006/relationships" id="2147483657" r:id="Rf6d66edb321c4765"/>
-    <p:sldLayoutId xmlns:r="http://schemas.openxmlformats.org/officeDocument/2006/relationships" id="2147483658" r:id="R2cb2d314f34f45af"/>
-    <p:sldLayoutId xmlns:r="http://schemas.openxmlformats.org/officeDocument/2006/relationships" id="2147483659" r:id="R32c2875b7799435a"/>
+    <p:sldLayoutId xmlns:r="http://schemas.openxmlformats.org/officeDocument/2006/relationships" id="2147483649" r:id="R44b710c4991644d8"/>
+    <p:sldLayoutId xmlns:r="http://schemas.openxmlformats.org/officeDocument/2006/relationships" id="2147483650" r:id="R64377f5cb9cc427d"/>
+    <p:sldLayoutId xmlns:r="http://schemas.openxmlformats.org/officeDocument/2006/relationships" id="2147483651" r:id="Rbfeaae1145544e77"/>
+    <p:sldLayoutId xmlns:r="http://schemas.openxmlformats.org/officeDocument/2006/relationships" id="2147483652" r:id="Rb4f618e15a5142e5"/>
+    <p:sldLayoutId xmlns:r="http://schemas.openxmlformats.org/officeDocument/2006/relationships" id="2147483653" r:id="R3868c44e4e974234"/>
+    <p:sldLayoutId xmlns:r="http://schemas.openxmlformats.org/officeDocument/2006/relationships" id="2147483654" r:id="Rd771a99da3ca466f"/>
+    <p:sldLayoutId xmlns:r="http://schemas.openxmlformats.org/officeDocument/2006/relationships" id="2147483655" r:id="Raf388aca9221411f"/>
+    <p:sldLayoutId xmlns:r="http://schemas.openxmlformats.org/officeDocument/2006/relationships" id="2147483656" r:id="Rdd4ba8d454b447dc"/>
+    <p:sldLayoutId xmlns:r="http://schemas.openxmlformats.org/officeDocument/2006/relationships" id="2147483657" r:id="R99abad4dd0db4967"/>
+    <p:sldLayoutId xmlns:r="http://schemas.openxmlformats.org/officeDocument/2006/relationships" id="2147483658" r:id="R70ece92ad32d432c"/>
+    <p:sldLayoutId xmlns:r="http://schemas.openxmlformats.org/officeDocument/2006/relationships" id="2147483659" r:id="R0f4e0f84780048eb"/>
   </p:sldLayoutIdLst>
   <p:txStyles>
     <p:titleStyle>
@@ -5359,7 +5359,7 @@
           <p:cNvPr id="2" name="Rectangle 1">
             <a:extLst xmlns:a="http://schemas.openxmlformats.org/drawingml/2006/main">
               <a:ext uri="{FF2B5EF4-FFF2-40B4-BE49-F238E27FC236}">
-                <a16:creationId xmlns:a16="http://schemas.microsoft.com/office/drawing/2014/main" id="{BF1AA31A-654B-47C4-AE2F-26AB3046215D}"/>
+                <a16:creationId xmlns:a16="http://schemas.microsoft.com/office/drawing/2014/main" id="{ABE58277-8385-4459-8838-524F152A640D}"/>
               </a:ext>
             </a:extLst>
           </p:cNvPr>
@@ -5414,7 +5414,7 @@
           <p:cNvPr id="3" name="TextBox 2">
             <a:extLst xmlns:a="http://schemas.openxmlformats.org/drawingml/2006/main">
               <a:ext uri="{FF2B5EF4-FFF2-40B4-BE49-F238E27FC236}">
-                <a16:creationId xmlns:a16="http://schemas.microsoft.com/office/drawing/2014/main" id="{E2650A72-8FEE-4D24-8691-64C534D10C5A}"/>
+                <a16:creationId xmlns:a16="http://schemas.microsoft.com/office/drawing/2014/main" id="{97CEA41A-5952-452E-8EAD-E216D92D01E7}"/>
               </a:ext>
             </a:extLst>
           </p:cNvPr>
@@ -5461,7 +5461,7 @@
           <p:cNvPr id="4" name="TextBox 3">
             <a:extLst xmlns:a="http://schemas.openxmlformats.org/drawingml/2006/main">
               <a:ext uri="{FF2B5EF4-FFF2-40B4-BE49-F238E27FC236}">
-                <a16:creationId xmlns:a16="http://schemas.microsoft.com/office/drawing/2014/main" id="{F475B5F2-F672-4B7F-B21C-45C5E1FA0938}"/>
+                <a16:creationId xmlns:a16="http://schemas.microsoft.com/office/drawing/2014/main" id="{7AD9D67F-D308-440E-9ACE-046EA4BDB6D9}"/>
               </a:ext>
             </a:extLst>
           </p:cNvPr>
@@ -5509,7 +5509,7 @@
           <p:cNvPr id="5" name="TextBox 4">
             <a:extLst xmlns:a="http://schemas.openxmlformats.org/drawingml/2006/main">
               <a:ext uri="{FF2B5EF4-FFF2-40B4-BE49-F238E27FC236}">
-                <a16:creationId xmlns:a16="http://schemas.microsoft.com/office/drawing/2014/main" id="{F39E8090-6819-4033-B167-608D7499B246}"/>
+                <a16:creationId xmlns:a16="http://schemas.microsoft.com/office/drawing/2014/main" id="{12E0DAD0-47E8-45A5-B6CA-D6F885D78421}"/>
               </a:ext>
             </a:extLst>
           </p:cNvPr>
@@ -5556,7 +5556,7 @@
           <p:cNvPr id="6" name="Rectangle 5">
             <a:extLst xmlns:a="http://schemas.openxmlformats.org/drawingml/2006/main">
               <a:ext uri="{FF2B5EF4-FFF2-40B4-BE49-F238E27FC236}">
-                <a16:creationId xmlns:a16="http://schemas.microsoft.com/office/drawing/2014/main" id="{6299660C-9F53-48EB-8E5B-87724311AB56}"/>
+                <a16:creationId xmlns:a16="http://schemas.microsoft.com/office/drawing/2014/main" id="{F8E81F04-1C12-452D-A59D-7AB4C219D7D8}"/>
               </a:ext>
             </a:extLst>
           </p:cNvPr>
@@ -5611,7 +5611,7 @@
           <p:cNvPr id="7" name="TextBox 6">
             <a:extLst xmlns:a="http://schemas.openxmlformats.org/drawingml/2006/main">
               <a:ext uri="{FF2B5EF4-FFF2-40B4-BE49-F238E27FC236}">
-                <a16:creationId xmlns:a16="http://schemas.microsoft.com/office/drawing/2014/main" id="{D7EC3393-5506-4802-9417-871D289C4D17}"/>
+                <a16:creationId xmlns:a16="http://schemas.microsoft.com/office/drawing/2014/main" id="{6E374586-8403-4F49-9C4A-1614FCC1CB97}"/>
               </a:ext>
             </a:extLst>
           </p:cNvPr>
@@ -5658,7 +5658,7 @@
           <p:cNvPr id="8" name="TextBox 7">
             <a:extLst xmlns:a="http://schemas.openxmlformats.org/drawingml/2006/main">
               <a:ext uri="{FF2B5EF4-FFF2-40B4-BE49-F238E27FC236}">
-                <a16:creationId xmlns:a16="http://schemas.microsoft.com/office/drawing/2014/main" id="{4179D144-F6F3-4399-8367-D9A2C35E4FEB}"/>
+                <a16:creationId xmlns:a16="http://schemas.microsoft.com/office/drawing/2014/main" id="{178182E8-EECE-474C-9F1A-4900BBD896BB}"/>
               </a:ext>
             </a:extLst>
           </p:cNvPr>
@@ -5695,7 +5695,7 @@
                 <a:ea typeface="Aptos"/>
                 <a:cs typeface="Aptos"/>
               </a:rPr>
-              <a:t>2026.07.27-28</a:t>
+              <a:t>2026.07.27-29</a:t>
             </a:r>
           </a:p>
         </p:txBody>
@@ -5705,7 +5705,7 @@
           <p:cNvPr id="9" name="TextBox 8">
             <a:extLst xmlns:a="http://schemas.openxmlformats.org/drawingml/2006/main">
               <a:ext uri="{FF2B5EF4-FFF2-40B4-BE49-F238E27FC236}">
-                <a16:creationId xmlns:a16="http://schemas.microsoft.com/office/drawing/2014/main" id="{1A48679A-A398-4A51-ABB9-004972921DB4}"/>
+                <a16:creationId xmlns:a16="http://schemas.microsoft.com/office/drawing/2014/main" id="{2D15D220-54D2-4C0B-9DAC-864C9E2B83AE}"/>
               </a:ext>
             </a:extLst>
           </p:cNvPr>
@@ -5773,7 +5773,7 @@
           <p:cNvPr id="10" name="TextBox 9">
             <a:extLst xmlns:a="http://schemas.openxmlformats.org/drawingml/2006/main">
               <a:ext uri="{FF2B5EF4-FFF2-40B4-BE49-F238E27FC236}">
-                <a16:creationId xmlns:a16="http://schemas.microsoft.com/office/drawing/2014/main" id="{F59DD49C-18FC-48CF-9588-D22A9364F6E3}"/>
+                <a16:creationId xmlns:a16="http://schemas.microsoft.com/office/drawing/2014/main" id="{62E04342-2011-490D-81D1-0F1B1724091F}"/>
               </a:ext>
             </a:extLst>
           </p:cNvPr>
@@ -5820,7 +5820,7 @@
           <p:cNvPr id="11" name="TextBox 10">
             <a:extLst xmlns:a="http://schemas.openxmlformats.org/drawingml/2006/main">
               <a:ext uri="{FF2B5EF4-FFF2-40B4-BE49-F238E27FC236}">
-                <a16:creationId xmlns:a16="http://schemas.microsoft.com/office/drawing/2014/main" id="{CEA2B152-7ABC-4027-B2E4-C4F6B8FF7CB6}"/>
+                <a16:creationId xmlns:a16="http://schemas.microsoft.com/office/drawing/2014/main" id="{C52980D2-4E63-47FA-95A3-F0E280A4A59F}"/>
               </a:ext>
             </a:extLst>
           </p:cNvPr>
@@ -5867,7 +5867,7 @@
           <p:cNvPr id="12" name="TextBox 11">
             <a:extLst xmlns:a="http://schemas.openxmlformats.org/drawingml/2006/main">
               <a:ext uri="{FF2B5EF4-FFF2-40B4-BE49-F238E27FC236}">
-                <a16:creationId xmlns:a16="http://schemas.microsoft.com/office/drawing/2014/main" id="{0B7D33F8-F7F9-4618-816C-ED6B239C7D5D}"/>
+                <a16:creationId xmlns:a16="http://schemas.microsoft.com/office/drawing/2014/main" id="{C5AD4FDB-4E2D-49F6-BCCA-203991622115}"/>
               </a:ext>
             </a:extLst>
           </p:cNvPr>
@@ -5912,7 +5912,7 @@
     </p:spTree>
     <p:extLst>
       <p:ext uri="{BB962C8B-B14F-4D97-AF65-F5344CB8AC3E}">
-        <p14:creationId xmlns:p14="http://schemas.microsoft.com/office/powerpoint/2010/main" val="1018006966"/>
+        <p14:creationId xmlns:p14="http://schemas.microsoft.com/office/powerpoint/2010/main" val="890641518"/>
       </p:ext>
     </p:extLst>
   </p:cSld>
@@ -5936,7 +5936,7 @@
           <p:cNvPr id="2" name="TextBox 1">
             <a:extLst xmlns:a="http://schemas.openxmlformats.org/drawingml/2006/main">
               <a:ext uri="{FF2B5EF4-FFF2-40B4-BE49-F238E27FC236}">
-                <a16:creationId xmlns:a16="http://schemas.microsoft.com/office/drawing/2014/main" id="{0B9B70F3-3C51-422D-8CF4-9E81BD4C600A}"/>
+                <a16:creationId xmlns:a16="http://schemas.microsoft.com/office/drawing/2014/main" id="{BDF083A0-3A91-41AD-8635-39536C1711F1}"/>
               </a:ext>
             </a:extLst>
           </p:cNvPr>
@@ -5983,7 +5983,7 @@
           <p:cNvPr id="3" name="TextBox 2">
             <a:extLst xmlns:a="http://schemas.openxmlformats.org/drawingml/2006/main">
               <a:ext uri="{FF2B5EF4-FFF2-40B4-BE49-F238E27FC236}">
-                <a16:creationId xmlns:a16="http://schemas.microsoft.com/office/drawing/2014/main" id="{0F1CB047-E939-43F2-BB6D-A1142460F89C}"/>
+                <a16:creationId xmlns:a16="http://schemas.microsoft.com/office/drawing/2014/main" id="{1FC9BFA3-E3D0-4444-9865-0544390D40EE}"/>
               </a:ext>
             </a:extLst>
           </p:cNvPr>
@@ -6030,7 +6030,7 @@
           <p:cNvPr id="4" name="Rectangle 3">
             <a:extLst xmlns:a="http://schemas.openxmlformats.org/drawingml/2006/main">
               <a:ext uri="{FF2B5EF4-FFF2-40B4-BE49-F238E27FC236}">
-                <a16:creationId xmlns:a16="http://schemas.microsoft.com/office/drawing/2014/main" id="{59915FBD-F8E5-496D-84F2-E76364492DFD}"/>
+                <a16:creationId xmlns:a16="http://schemas.microsoft.com/office/drawing/2014/main" id="{0F39260D-F248-4EE1-B6D0-66A3772F0372}"/>
               </a:ext>
             </a:extLst>
           </p:cNvPr>
@@ -6085,7 +6085,7 @@
           <p:cNvPr id="5" name="Rectangle 4">
             <a:extLst xmlns:a="http://schemas.openxmlformats.org/drawingml/2006/main">
               <a:ext uri="{FF2B5EF4-FFF2-40B4-BE49-F238E27FC236}">
-                <a16:creationId xmlns:a16="http://schemas.microsoft.com/office/drawing/2014/main" id="{AFC08D2E-ECC4-4130-844B-71E0EB22DA99}"/>
+                <a16:creationId xmlns:a16="http://schemas.microsoft.com/office/drawing/2014/main" id="{E49C3FBA-4919-44D6-9275-CD622B59885C}"/>
               </a:ext>
             </a:extLst>
           </p:cNvPr>
@@ -6140,7 +6140,7 @@
           <p:cNvPr id="6" name="TextBox 5">
             <a:extLst xmlns:a="http://schemas.openxmlformats.org/drawingml/2006/main">
               <a:ext uri="{FF2B5EF4-FFF2-40B4-BE49-F238E27FC236}">
-                <a16:creationId xmlns:a16="http://schemas.microsoft.com/office/drawing/2014/main" id="{F67687B5-1110-40D4-B8A8-FC38A043B3E8}"/>
+                <a16:creationId xmlns:a16="http://schemas.microsoft.com/office/drawing/2014/main" id="{6820DB74-361A-426E-A8A3-84983F955A2A}"/>
               </a:ext>
             </a:extLst>
           </p:cNvPr>
@@ -6177,7 +6177,7 @@
                 <a:ea typeface="Aptos"/>
                 <a:cs typeface="Aptos"/>
               </a:rPr>
-              <a:t>Julkinen riippumaton evidenssikooste · 2026.07.27-28 · 2026-07-27 · Lähteet: EPO; Saksa — viralliset tuomiot; WIPO</a:t>
+              <a:t>Julkinen riippumaton evidenssikooste · 2026.07.27-29 · 2026-07-27 · Lähteet: EPO; Saksa — viralliset tuomiot; WIPO</a:t>
             </a:r>
           </a:p>
         </p:txBody>
@@ -6187,7 +6187,7 @@
           <p:cNvPr id="7" name="TextBox 6">
             <a:extLst xmlns:a="http://schemas.openxmlformats.org/drawingml/2006/main">
               <a:ext uri="{FF2B5EF4-FFF2-40B4-BE49-F238E27FC236}">
-                <a16:creationId xmlns:a16="http://schemas.microsoft.com/office/drawing/2014/main" id="{8DA02B9D-0D55-4DB0-B517-A05E1A05AD52}"/>
+                <a16:creationId xmlns:a16="http://schemas.microsoft.com/office/drawing/2014/main" id="{28C68511-A4B0-4B60-ACF6-96C4FF05FFCD}"/>
               </a:ext>
             </a:extLst>
           </p:cNvPr>
@@ -6234,7 +6234,7 @@
           <p:cNvPr id="8" name="TextBox 7">
             <a:extLst xmlns:a="http://schemas.openxmlformats.org/drawingml/2006/main">
               <a:ext uri="{FF2B5EF4-FFF2-40B4-BE49-F238E27FC236}">
-                <a16:creationId xmlns:a16="http://schemas.microsoft.com/office/drawing/2014/main" id="{E98F788C-2B59-4A35-AD10-AAEEF5E5FEB1}"/>
+                <a16:creationId xmlns:a16="http://schemas.microsoft.com/office/drawing/2014/main" id="{DB43E7EE-2183-49BB-A22D-AED1C64DB02E}"/>
               </a:ext>
             </a:extLst>
           </p:cNvPr>
@@ -6281,7 +6281,7 @@
           <p:cNvPr id="9" name="TextBox 8">
             <a:extLst xmlns:a="http://schemas.openxmlformats.org/drawingml/2006/main">
               <a:ext uri="{FF2B5EF4-FFF2-40B4-BE49-F238E27FC236}">
-                <a16:creationId xmlns:a16="http://schemas.microsoft.com/office/drawing/2014/main" id="{34DC0A67-9007-4882-9271-ABB0E7D1D10F}"/>
+                <a16:creationId xmlns:a16="http://schemas.microsoft.com/office/drawing/2014/main" id="{310011EF-C06C-465E-AA1F-EA9FCE6775C0}"/>
               </a:ext>
             </a:extLst>
           </p:cNvPr>
@@ -6378,7 +6378,7 @@
           <p:cNvPr id="10" name="Rounded Rectangle 9">
             <a:extLst xmlns:a="http://schemas.openxmlformats.org/drawingml/2006/main">
               <a:ext uri="{FF2B5EF4-FFF2-40B4-BE49-F238E27FC236}">
-                <a16:creationId xmlns:a16="http://schemas.microsoft.com/office/drawing/2014/main" id="{D4726D39-7463-4E98-9529-17CF41B79284}"/>
+                <a16:creationId xmlns:a16="http://schemas.microsoft.com/office/drawing/2014/main" id="{C5D1B7BA-B10A-4DB0-A6AE-C9ADF3D249B1}"/>
               </a:ext>
             </a:extLst>
           </p:cNvPr>
@@ -6435,7 +6435,7 @@
           <p:cNvPr id="11" name="TextBox 10">
             <a:extLst xmlns:a="http://schemas.openxmlformats.org/drawingml/2006/main">
               <a:ext uri="{FF2B5EF4-FFF2-40B4-BE49-F238E27FC236}">
-                <a16:creationId xmlns:a16="http://schemas.microsoft.com/office/drawing/2014/main" id="{7D91898F-9191-47C4-AFF5-9A18BE58AAC6}"/>
+                <a16:creationId xmlns:a16="http://schemas.microsoft.com/office/drawing/2014/main" id="{2CF63742-4DF0-4A3E-B3BF-3A3E9BCEB2A0}"/>
               </a:ext>
             </a:extLst>
           </p:cNvPr>
@@ -6482,7 +6482,7 @@
           <p:cNvPr id="12" name="TextBox 11">
             <a:extLst xmlns:a="http://schemas.openxmlformats.org/drawingml/2006/main">
               <a:ext uri="{FF2B5EF4-FFF2-40B4-BE49-F238E27FC236}">
-                <a16:creationId xmlns:a16="http://schemas.microsoft.com/office/drawing/2014/main" id="{A7D9C172-DBC8-406C-B141-F4A658EFF883}"/>
+                <a16:creationId xmlns:a16="http://schemas.microsoft.com/office/drawing/2014/main" id="{68B32C25-9A63-42B8-BB95-2D061579C2CF}"/>
               </a:ext>
             </a:extLst>
           </p:cNvPr>
@@ -6527,7 +6527,7 @@
     </p:spTree>
     <p:extLst>
       <p:ext uri="{BB962C8B-B14F-4D97-AF65-F5344CB8AC3E}">
-        <p14:creationId xmlns:p14="http://schemas.microsoft.com/office/powerpoint/2010/main" val="1333522639"/>
+        <p14:creationId xmlns:p14="http://schemas.microsoft.com/office/powerpoint/2010/main" val="148688934"/>
       </p:ext>
     </p:extLst>
   </p:cSld>
@@ -6551,7 +6551,7 @@
           <p:cNvPr id="2" name="TextBox 1">
             <a:extLst xmlns:a="http://schemas.openxmlformats.org/drawingml/2006/main">
               <a:ext uri="{FF2B5EF4-FFF2-40B4-BE49-F238E27FC236}">
-                <a16:creationId xmlns:a16="http://schemas.microsoft.com/office/drawing/2014/main" id="{8559B789-3582-4A63-A450-834537046D01}"/>
+                <a16:creationId xmlns:a16="http://schemas.microsoft.com/office/drawing/2014/main" id="{93741F1F-ECB7-426C-AEB5-BC7A10E34A95}"/>
               </a:ext>
             </a:extLst>
           </p:cNvPr>
@@ -6598,7 +6598,7 @@
           <p:cNvPr id="3" name="TextBox 2">
             <a:extLst xmlns:a="http://schemas.openxmlformats.org/drawingml/2006/main">
               <a:ext uri="{FF2B5EF4-FFF2-40B4-BE49-F238E27FC236}">
-                <a16:creationId xmlns:a16="http://schemas.microsoft.com/office/drawing/2014/main" id="{14A7A66B-E7F5-4693-9564-9D0FCD08DB46}"/>
+                <a16:creationId xmlns:a16="http://schemas.microsoft.com/office/drawing/2014/main" id="{64DB1A09-771E-4E9D-BA01-A3F36CDD286A}"/>
               </a:ext>
             </a:extLst>
           </p:cNvPr>
@@ -6645,7 +6645,7 @@
           <p:cNvPr id="4" name="Rectangle 3">
             <a:extLst xmlns:a="http://schemas.openxmlformats.org/drawingml/2006/main">
               <a:ext uri="{FF2B5EF4-FFF2-40B4-BE49-F238E27FC236}">
-                <a16:creationId xmlns:a16="http://schemas.microsoft.com/office/drawing/2014/main" id="{38F8129F-9289-4524-B41D-4E65DF4CF557}"/>
+                <a16:creationId xmlns:a16="http://schemas.microsoft.com/office/drawing/2014/main" id="{5F55C901-E38B-4E6E-9D97-1AE472AD058E}"/>
               </a:ext>
             </a:extLst>
           </p:cNvPr>
@@ -6700,7 +6700,7 @@
           <p:cNvPr id="5" name="Rectangle 4">
             <a:extLst xmlns:a="http://schemas.openxmlformats.org/drawingml/2006/main">
               <a:ext uri="{FF2B5EF4-FFF2-40B4-BE49-F238E27FC236}">
-                <a16:creationId xmlns:a16="http://schemas.microsoft.com/office/drawing/2014/main" id="{3AD8D2E2-3C38-453B-A167-0EE1611D9CE0}"/>
+                <a16:creationId xmlns:a16="http://schemas.microsoft.com/office/drawing/2014/main" id="{3F1F7949-1D9E-402E-A899-1115CA6A037C}"/>
               </a:ext>
             </a:extLst>
           </p:cNvPr>
@@ -6755,7 +6755,7 @@
           <p:cNvPr id="6" name="TextBox 5">
             <a:extLst xmlns:a="http://schemas.openxmlformats.org/drawingml/2006/main">
               <a:ext uri="{FF2B5EF4-FFF2-40B4-BE49-F238E27FC236}">
-                <a16:creationId xmlns:a16="http://schemas.microsoft.com/office/drawing/2014/main" id="{DAD10D34-421A-4227-9FCC-7C2F353EAE2F}"/>
+                <a16:creationId xmlns:a16="http://schemas.microsoft.com/office/drawing/2014/main" id="{A234E384-C15D-4CB2-A6FC-AEC4490C08A4}"/>
               </a:ext>
             </a:extLst>
           </p:cNvPr>
@@ -6792,7 +6792,7 @@
                 <a:ea typeface="Aptos"/>
                 <a:cs typeface="Aptos"/>
               </a:rPr>
-              <a:t>Julkinen riippumaton evidenssikooste · 2026.07.27-28 · 2026-07-27 · Lähteet: EPO Register; EP3032975B2; 8 Ni 18/24 (EP); 7 O 3341/24</a:t>
+              <a:t>Julkinen riippumaton evidenssikooste · 2026.07.27-29 · 2026-07-27 · Lähteet: EPO Register; EP3032975B2; 8 Ni 18/24 (EP); 7 O 3341/24</a:t>
             </a:r>
           </a:p>
         </p:txBody>
@@ -6802,7 +6802,7 @@
           <p:cNvPr id="7" name="TextBox 6">
             <a:extLst xmlns:a="http://schemas.openxmlformats.org/drawingml/2006/main">
               <a:ext uri="{FF2B5EF4-FFF2-40B4-BE49-F238E27FC236}">
-                <a16:creationId xmlns:a16="http://schemas.microsoft.com/office/drawing/2014/main" id="{8FC94239-3715-4CBD-B5B9-E3042D4C5617}"/>
+                <a16:creationId xmlns:a16="http://schemas.microsoft.com/office/drawing/2014/main" id="{ADB766E9-F282-4624-A6F2-D53896F8E186}"/>
               </a:ext>
             </a:extLst>
           </p:cNvPr>
@@ -6849,7 +6849,7 @@
           <p:cNvPr id="8" name="Rounded Rectangle 7">
             <a:extLst xmlns:a="http://schemas.openxmlformats.org/drawingml/2006/main">
               <a:ext uri="{FF2B5EF4-FFF2-40B4-BE49-F238E27FC236}">
-                <a16:creationId xmlns:a16="http://schemas.microsoft.com/office/drawing/2014/main" id="{0DCCE076-48E5-455C-892F-4E9F4C82BE72}"/>
+                <a16:creationId xmlns:a16="http://schemas.microsoft.com/office/drawing/2014/main" id="{DD7DFAAA-936E-49C2-BCC1-2C673532E852}"/>
               </a:ext>
             </a:extLst>
           </p:cNvPr>
@@ -6906,7 +6906,7 @@
           <p:cNvPr id="9" name="TextBox 8">
             <a:extLst xmlns:a="http://schemas.openxmlformats.org/drawingml/2006/main">
               <a:ext uri="{FF2B5EF4-FFF2-40B4-BE49-F238E27FC236}">
-                <a16:creationId xmlns:a16="http://schemas.microsoft.com/office/drawing/2014/main" id="{F5562F96-914F-4125-BC86-C6F1671BEA21}"/>
+                <a16:creationId xmlns:a16="http://schemas.microsoft.com/office/drawing/2014/main" id="{1C6DA5A1-8254-491A-A324-73AD5A7A409A}"/>
               </a:ext>
             </a:extLst>
           </p:cNvPr>
@@ -6953,7 +6953,7 @@
           <p:cNvPr id="10" name="TextBox 9">
             <a:extLst xmlns:a="http://schemas.openxmlformats.org/drawingml/2006/main">
               <a:ext uri="{FF2B5EF4-FFF2-40B4-BE49-F238E27FC236}">
-                <a16:creationId xmlns:a16="http://schemas.microsoft.com/office/drawing/2014/main" id="{A354606C-BC4F-4F65-A40F-E843AA839743}"/>
+                <a16:creationId xmlns:a16="http://schemas.microsoft.com/office/drawing/2014/main" id="{2351C972-090E-4A26-8750-86486C0B5157}"/>
               </a:ext>
             </a:extLst>
           </p:cNvPr>
@@ -7000,7 +7000,7 @@
           <p:cNvPr id="11" name="Rounded Rectangle 10">
             <a:extLst xmlns:a="http://schemas.openxmlformats.org/drawingml/2006/main">
               <a:ext uri="{FF2B5EF4-FFF2-40B4-BE49-F238E27FC236}">
-                <a16:creationId xmlns:a16="http://schemas.microsoft.com/office/drawing/2014/main" id="{62440528-5F5C-42E6-AACA-BD6855265C55}"/>
+                <a16:creationId xmlns:a16="http://schemas.microsoft.com/office/drawing/2014/main" id="{17D2B538-8BB9-4C8D-85C1-46C0168424D3}"/>
               </a:ext>
             </a:extLst>
           </p:cNvPr>
@@ -7057,7 +7057,7 @@
           <p:cNvPr id="12" name="TextBox 11">
             <a:extLst xmlns:a="http://schemas.openxmlformats.org/drawingml/2006/main">
               <a:ext uri="{FF2B5EF4-FFF2-40B4-BE49-F238E27FC236}">
-                <a16:creationId xmlns:a16="http://schemas.microsoft.com/office/drawing/2014/main" id="{3C92FD77-5841-4358-A154-D770D28C70BC}"/>
+                <a16:creationId xmlns:a16="http://schemas.microsoft.com/office/drawing/2014/main" id="{33267A26-9879-4604-8B69-099F4ABE7327}"/>
               </a:ext>
             </a:extLst>
           </p:cNvPr>
@@ -7104,7 +7104,7 @@
           <p:cNvPr id="13" name="TextBox 12">
             <a:extLst xmlns:a="http://schemas.openxmlformats.org/drawingml/2006/main">
               <a:ext uri="{FF2B5EF4-FFF2-40B4-BE49-F238E27FC236}">
-                <a16:creationId xmlns:a16="http://schemas.microsoft.com/office/drawing/2014/main" id="{92DF24BA-DE82-403F-91E3-CD74A7E68356}"/>
+                <a16:creationId xmlns:a16="http://schemas.microsoft.com/office/drawing/2014/main" id="{745A99D7-7126-4A91-990F-33EE27B6CCC3}"/>
               </a:ext>
             </a:extLst>
           </p:cNvPr>
@@ -7151,7 +7151,7 @@
           <p:cNvPr id="14" name="Rounded Rectangle 13">
             <a:extLst xmlns:a="http://schemas.openxmlformats.org/drawingml/2006/main">
               <a:ext uri="{FF2B5EF4-FFF2-40B4-BE49-F238E27FC236}">
-                <a16:creationId xmlns:a16="http://schemas.microsoft.com/office/drawing/2014/main" id="{8A0946B8-3BC1-461D-B67D-49CD613EECA3}"/>
+                <a16:creationId xmlns:a16="http://schemas.microsoft.com/office/drawing/2014/main" id="{B79039D8-F7B8-41E5-9CF7-6C10DE461969}"/>
               </a:ext>
             </a:extLst>
           </p:cNvPr>
@@ -7208,7 +7208,7 @@
           <p:cNvPr id="15" name="TextBox 14">
             <a:extLst xmlns:a="http://schemas.openxmlformats.org/drawingml/2006/main">
               <a:ext uri="{FF2B5EF4-FFF2-40B4-BE49-F238E27FC236}">
-                <a16:creationId xmlns:a16="http://schemas.microsoft.com/office/drawing/2014/main" id="{B4333E7F-FD55-4D8C-BB3F-C2017A77696F}"/>
+                <a16:creationId xmlns:a16="http://schemas.microsoft.com/office/drawing/2014/main" id="{B846BC41-CE76-4D93-B13F-E56375D857B1}"/>
               </a:ext>
             </a:extLst>
           </p:cNvPr>
@@ -7255,7 +7255,7 @@
           <p:cNvPr id="16" name="TextBox 15">
             <a:extLst xmlns:a="http://schemas.openxmlformats.org/drawingml/2006/main">
               <a:ext uri="{FF2B5EF4-FFF2-40B4-BE49-F238E27FC236}">
-                <a16:creationId xmlns:a16="http://schemas.microsoft.com/office/drawing/2014/main" id="{3E535F87-387B-422B-9F8B-65BB1461109D}"/>
+                <a16:creationId xmlns:a16="http://schemas.microsoft.com/office/drawing/2014/main" id="{FBE8605A-E245-4EE8-B692-678C1E60A9B1}"/>
               </a:ext>
             </a:extLst>
           </p:cNvPr>
@@ -7302,7 +7302,7 @@
           <p:cNvPr id="17" name="TextBox 16">
             <a:extLst xmlns:a="http://schemas.openxmlformats.org/drawingml/2006/main">
               <a:ext uri="{FF2B5EF4-FFF2-40B4-BE49-F238E27FC236}">
-                <a16:creationId xmlns:a16="http://schemas.microsoft.com/office/drawing/2014/main" id="{FD255879-ADD5-4205-B65E-9701DCE2C8D7}"/>
+                <a16:creationId xmlns:a16="http://schemas.microsoft.com/office/drawing/2014/main" id="{3B4E7D46-D008-49E1-957D-9A48DDC2BC49}"/>
               </a:ext>
             </a:extLst>
           </p:cNvPr>
@@ -7349,7 +7349,7 @@
           <p:cNvPr id="18" name="Rounded Rectangle 17">
             <a:extLst xmlns:a="http://schemas.openxmlformats.org/drawingml/2006/main">
               <a:ext uri="{FF2B5EF4-FFF2-40B4-BE49-F238E27FC236}">
-                <a16:creationId xmlns:a16="http://schemas.microsoft.com/office/drawing/2014/main" id="{F453CBC6-56D9-4AF2-811E-38CA490501B7}"/>
+                <a16:creationId xmlns:a16="http://schemas.microsoft.com/office/drawing/2014/main" id="{813F8653-FDFD-4AD6-B8A1-3A11B28DE249}"/>
               </a:ext>
             </a:extLst>
           </p:cNvPr>
@@ -7406,7 +7406,7 @@
           <p:cNvPr id="19" name="TextBox 18">
             <a:extLst xmlns:a="http://schemas.openxmlformats.org/drawingml/2006/main">
               <a:ext uri="{FF2B5EF4-FFF2-40B4-BE49-F238E27FC236}">
-                <a16:creationId xmlns:a16="http://schemas.microsoft.com/office/drawing/2014/main" id="{A2E625A5-FD31-4598-9E8B-9243B4EA904A}"/>
+                <a16:creationId xmlns:a16="http://schemas.microsoft.com/office/drawing/2014/main" id="{EDC58597-3F66-47D4-B387-8F05D097D42E}"/>
               </a:ext>
             </a:extLst>
           </p:cNvPr>
@@ -7453,7 +7453,7 @@
           <p:cNvPr id="20" name="TextBox 19">
             <a:extLst xmlns:a="http://schemas.openxmlformats.org/drawingml/2006/main">
               <a:ext uri="{FF2B5EF4-FFF2-40B4-BE49-F238E27FC236}">
-                <a16:creationId xmlns:a16="http://schemas.microsoft.com/office/drawing/2014/main" id="{DD72239C-175D-4B36-9350-5A1C37470662}"/>
+                <a16:creationId xmlns:a16="http://schemas.microsoft.com/office/drawing/2014/main" id="{1F9AB5B8-69AF-403A-B008-EAC0969511EF}"/>
               </a:ext>
             </a:extLst>
           </p:cNvPr>
@@ -7498,7 +7498,7 @@
     </p:spTree>
     <p:extLst>
       <p:ext uri="{BB962C8B-B14F-4D97-AF65-F5344CB8AC3E}">
-        <p14:creationId xmlns:p14="http://schemas.microsoft.com/office/powerpoint/2010/main" val="441847506"/>
+        <p14:creationId xmlns:p14="http://schemas.microsoft.com/office/powerpoint/2010/main" val="595591740"/>
       </p:ext>
     </p:extLst>
   </p:cSld>
@@ -7522,7 +7522,7 @@
           <p:cNvPr id="2" name="TextBox 1">
             <a:extLst xmlns:a="http://schemas.openxmlformats.org/drawingml/2006/main">
               <a:ext uri="{FF2B5EF4-FFF2-40B4-BE49-F238E27FC236}">
-                <a16:creationId xmlns:a16="http://schemas.microsoft.com/office/drawing/2014/main" id="{A2B31D93-B4AC-4834-A88A-CD253382876E}"/>
+                <a16:creationId xmlns:a16="http://schemas.microsoft.com/office/drawing/2014/main" id="{53687421-5A62-4D84-908C-DBD8230EDDFC}"/>
               </a:ext>
             </a:extLst>
           </p:cNvPr>
@@ -7569,7 +7569,7 @@
           <p:cNvPr id="3" name="TextBox 2">
             <a:extLst xmlns:a="http://schemas.openxmlformats.org/drawingml/2006/main">
               <a:ext uri="{FF2B5EF4-FFF2-40B4-BE49-F238E27FC236}">
-                <a16:creationId xmlns:a16="http://schemas.microsoft.com/office/drawing/2014/main" id="{0477E2B2-ED4F-4743-BFDA-72E63FFDD5D8}"/>
+                <a16:creationId xmlns:a16="http://schemas.microsoft.com/office/drawing/2014/main" id="{4C270AFF-E63B-4411-B58C-294C40E3F748}"/>
               </a:ext>
             </a:extLst>
           </p:cNvPr>
@@ -7616,7 +7616,7 @@
           <p:cNvPr id="4" name="Rectangle 3">
             <a:extLst xmlns:a="http://schemas.openxmlformats.org/drawingml/2006/main">
               <a:ext uri="{FF2B5EF4-FFF2-40B4-BE49-F238E27FC236}">
-                <a16:creationId xmlns:a16="http://schemas.microsoft.com/office/drawing/2014/main" id="{F132CCEE-0EBA-4651-A33C-FBEA949DFB2A}"/>
+                <a16:creationId xmlns:a16="http://schemas.microsoft.com/office/drawing/2014/main" id="{7559A1EA-C1BF-47C0-985D-19F190DF090B}"/>
               </a:ext>
             </a:extLst>
           </p:cNvPr>
@@ -7671,7 +7671,7 @@
           <p:cNvPr id="5" name="Rectangle 4">
             <a:extLst xmlns:a="http://schemas.openxmlformats.org/drawingml/2006/main">
               <a:ext uri="{FF2B5EF4-FFF2-40B4-BE49-F238E27FC236}">
-                <a16:creationId xmlns:a16="http://schemas.microsoft.com/office/drawing/2014/main" id="{2168D24E-A62B-436A-B5D9-6366ACF2485B}"/>
+                <a16:creationId xmlns:a16="http://schemas.microsoft.com/office/drawing/2014/main" id="{241464BD-9010-4143-B2B0-AD076412FC29}"/>
               </a:ext>
             </a:extLst>
           </p:cNvPr>
@@ -7726,7 +7726,7 @@
           <p:cNvPr id="6" name="TextBox 5">
             <a:extLst xmlns:a="http://schemas.openxmlformats.org/drawingml/2006/main">
               <a:ext uri="{FF2B5EF4-FFF2-40B4-BE49-F238E27FC236}">
-                <a16:creationId xmlns:a16="http://schemas.microsoft.com/office/drawing/2014/main" id="{26F6FBB7-6055-4B57-B867-4C7A1C8ABA6E}"/>
+                <a16:creationId xmlns:a16="http://schemas.microsoft.com/office/drawing/2014/main" id="{A3B84842-8028-4C84-88BF-AF389D9120FD}"/>
               </a:ext>
             </a:extLst>
           </p:cNvPr>
@@ -7763,7 +7763,7 @@
                 <a:ea typeface="Aptos"/>
                 <a:cs typeface="Aptos"/>
               </a:rPr>
-              <a:t>Julkinen riippumaton evidenssikooste · 2026.07.27-28 · 2026-07-27 · Lähteet: World Bank; Statistics Canada; Health Canada; NZ Ministry of Health; Sejm; FHM; FTC</a:t>
+              <a:t>Julkinen riippumaton evidenssikooste · 2026.07.27-29 · 2026-07-27 · Lähteet: World Bank; Statistics Canada; Health Canada; NZ Ministry of Health; Sejm; FHM; FTC</a:t>
             </a:r>
           </a:p>
         </p:txBody>
@@ -7773,7 +7773,7 @@
           <p:cNvPr id="7" name="TextBox 6">
             <a:extLst xmlns:a="http://schemas.openxmlformats.org/drawingml/2006/main">
               <a:ext uri="{FF2B5EF4-FFF2-40B4-BE49-F238E27FC236}">
-                <a16:creationId xmlns:a16="http://schemas.microsoft.com/office/drawing/2014/main" id="{16285C28-CE04-4429-846A-787CB8E6B816}"/>
+                <a16:creationId xmlns:a16="http://schemas.microsoft.com/office/drawing/2014/main" id="{3E3637E2-6751-494E-89A2-E37265083306}"/>
               </a:ext>
             </a:extLst>
           </p:cNvPr>
@@ -7820,7 +7820,7 @@
           <p:cNvPr id="8" name="Rounded Rectangle 7">
             <a:extLst xmlns:a="http://schemas.openxmlformats.org/drawingml/2006/main">
               <a:ext uri="{FF2B5EF4-FFF2-40B4-BE49-F238E27FC236}">
-                <a16:creationId xmlns:a16="http://schemas.microsoft.com/office/drawing/2014/main" id="{E253F11A-B544-47BF-AA3E-18594C2FE5C8}"/>
+                <a16:creationId xmlns:a16="http://schemas.microsoft.com/office/drawing/2014/main" id="{76914BA6-52EC-4D6A-A5F9-6077FA066B69}"/>
               </a:ext>
             </a:extLst>
           </p:cNvPr>
@@ -7877,7 +7877,7 @@
           <p:cNvPr id="9" name="TextBox 8">
             <a:extLst xmlns:a="http://schemas.openxmlformats.org/drawingml/2006/main">
               <a:ext uri="{FF2B5EF4-FFF2-40B4-BE49-F238E27FC236}">
-                <a16:creationId xmlns:a16="http://schemas.microsoft.com/office/drawing/2014/main" id="{1C309BE5-B650-4393-A5DC-EF1952FF885F}"/>
+                <a16:creationId xmlns:a16="http://schemas.microsoft.com/office/drawing/2014/main" id="{F10F433A-976C-4079-BD6B-E2A6DBDC2C1E}"/>
               </a:ext>
             </a:extLst>
           </p:cNvPr>
@@ -7924,7 +7924,7 @@
           <p:cNvPr id="10" name="TextBox 9">
             <a:extLst xmlns:a="http://schemas.openxmlformats.org/drawingml/2006/main">
               <a:ext uri="{FF2B5EF4-FFF2-40B4-BE49-F238E27FC236}">
-                <a16:creationId xmlns:a16="http://schemas.microsoft.com/office/drawing/2014/main" id="{7517A0BA-95AC-4519-95BC-F3B62B94D3BC}"/>
+                <a16:creationId xmlns:a16="http://schemas.microsoft.com/office/drawing/2014/main" id="{CBFAB7EF-73EF-4630-BA84-AF73CA136F1F}"/>
               </a:ext>
             </a:extLst>
           </p:cNvPr>
@@ -7971,7 +7971,7 @@
           <p:cNvPr id="11" name="Rounded Rectangle 10">
             <a:extLst xmlns:a="http://schemas.openxmlformats.org/drawingml/2006/main">
               <a:ext uri="{FF2B5EF4-FFF2-40B4-BE49-F238E27FC236}">
-                <a16:creationId xmlns:a16="http://schemas.microsoft.com/office/drawing/2014/main" id="{188A9FAC-12C7-466F-9BA9-843E932ECFAB}"/>
+                <a16:creationId xmlns:a16="http://schemas.microsoft.com/office/drawing/2014/main" id="{07CAF114-2ED0-4E8B-ACB2-DE359D5F05E9}"/>
               </a:ext>
             </a:extLst>
           </p:cNvPr>
@@ -8028,7 +8028,7 @@
           <p:cNvPr id="12" name="TextBox 11">
             <a:extLst xmlns:a="http://schemas.openxmlformats.org/drawingml/2006/main">
               <a:ext uri="{FF2B5EF4-FFF2-40B4-BE49-F238E27FC236}">
-                <a16:creationId xmlns:a16="http://schemas.microsoft.com/office/drawing/2014/main" id="{D0403852-6F7A-40ED-B252-E57C426F556B}"/>
+                <a16:creationId xmlns:a16="http://schemas.microsoft.com/office/drawing/2014/main" id="{50705598-6633-4DBA-AED8-52CF49EB0967}"/>
               </a:ext>
             </a:extLst>
           </p:cNvPr>
@@ -8075,7 +8075,7 @@
           <p:cNvPr id="13" name="TextBox 12">
             <a:extLst xmlns:a="http://schemas.openxmlformats.org/drawingml/2006/main">
               <a:ext uri="{FF2B5EF4-FFF2-40B4-BE49-F238E27FC236}">
-                <a16:creationId xmlns:a16="http://schemas.microsoft.com/office/drawing/2014/main" id="{7C788015-D77D-4B6D-8B56-023FC913C67D}"/>
+                <a16:creationId xmlns:a16="http://schemas.microsoft.com/office/drawing/2014/main" id="{4DF13D56-3666-46F8-9888-D21EA478F0FE}"/>
               </a:ext>
             </a:extLst>
           </p:cNvPr>
@@ -8122,7 +8122,7 @@
           <p:cNvPr id="14" name="Rounded Rectangle 13">
             <a:extLst xmlns:a="http://schemas.openxmlformats.org/drawingml/2006/main">
               <a:ext uri="{FF2B5EF4-FFF2-40B4-BE49-F238E27FC236}">
-                <a16:creationId xmlns:a16="http://schemas.microsoft.com/office/drawing/2014/main" id="{B4656433-CE5D-49E4-9740-000955DFAFD5}"/>
+                <a16:creationId xmlns:a16="http://schemas.microsoft.com/office/drawing/2014/main" id="{8C6405BE-2EA2-4CB2-8392-D152F8B9801A}"/>
               </a:ext>
             </a:extLst>
           </p:cNvPr>
@@ -8179,7 +8179,7 @@
           <p:cNvPr id="15" name="TextBox 14">
             <a:extLst xmlns:a="http://schemas.openxmlformats.org/drawingml/2006/main">
               <a:ext uri="{FF2B5EF4-FFF2-40B4-BE49-F238E27FC236}">
-                <a16:creationId xmlns:a16="http://schemas.microsoft.com/office/drawing/2014/main" id="{92CD8092-8FED-48DD-8A5A-6258AED05658}"/>
+                <a16:creationId xmlns:a16="http://schemas.microsoft.com/office/drawing/2014/main" id="{E735F22D-A289-4386-B954-94A3A2B15E49}"/>
               </a:ext>
             </a:extLst>
           </p:cNvPr>
@@ -8226,7 +8226,7 @@
           <p:cNvPr id="16" name="TextBox 15">
             <a:extLst xmlns:a="http://schemas.openxmlformats.org/drawingml/2006/main">
               <a:ext uri="{FF2B5EF4-FFF2-40B4-BE49-F238E27FC236}">
-                <a16:creationId xmlns:a16="http://schemas.microsoft.com/office/drawing/2014/main" id="{A0F93F37-8695-4E8F-8DF0-639E6632E0B1}"/>
+                <a16:creationId xmlns:a16="http://schemas.microsoft.com/office/drawing/2014/main" id="{D78039C9-7311-4990-BDA7-77878E518EAD}"/>
               </a:ext>
             </a:extLst>
           </p:cNvPr>
@@ -8273,7 +8273,7 @@
           <p:cNvPr id="17" name="TextBox 16">
             <a:extLst xmlns:a="http://schemas.openxmlformats.org/drawingml/2006/main">
               <a:ext uri="{FF2B5EF4-FFF2-40B4-BE49-F238E27FC236}">
-                <a16:creationId xmlns:a16="http://schemas.microsoft.com/office/drawing/2014/main" id="{93072665-9BC1-460C-8A58-E04D4AD2E2EE}"/>
+                <a16:creationId xmlns:a16="http://schemas.microsoft.com/office/drawing/2014/main" id="{6F12F299-9A82-44E4-9797-ABC2D09B8F46}"/>
               </a:ext>
             </a:extLst>
           </p:cNvPr>
@@ -8320,7 +8320,7 @@
           <p:cNvPr id="18" name="Rounded Rectangle 17">
             <a:extLst xmlns:a="http://schemas.openxmlformats.org/drawingml/2006/main">
               <a:ext uri="{FF2B5EF4-FFF2-40B4-BE49-F238E27FC236}">
-                <a16:creationId xmlns:a16="http://schemas.microsoft.com/office/drawing/2014/main" id="{19D861F3-0187-4A3B-A3F7-D5E9E9F29F29}"/>
+                <a16:creationId xmlns:a16="http://schemas.microsoft.com/office/drawing/2014/main" id="{B9A56270-3AD7-4ADD-97CD-782E7654B475}"/>
               </a:ext>
             </a:extLst>
           </p:cNvPr>
@@ -8377,7 +8377,7 @@
           <p:cNvPr id="19" name="TextBox 18">
             <a:extLst xmlns:a="http://schemas.openxmlformats.org/drawingml/2006/main">
               <a:ext uri="{FF2B5EF4-FFF2-40B4-BE49-F238E27FC236}">
-                <a16:creationId xmlns:a16="http://schemas.microsoft.com/office/drawing/2014/main" id="{50079EE7-E359-4D03-BA99-DA623295B951}"/>
+                <a16:creationId xmlns:a16="http://schemas.microsoft.com/office/drawing/2014/main" id="{7F9CE851-5F0C-402C-9E4A-A5A78A4585BC}"/>
               </a:ext>
             </a:extLst>
           </p:cNvPr>
@@ -8424,7 +8424,7 @@
           <p:cNvPr id="20" name="TextBox 19">
             <a:extLst xmlns:a="http://schemas.openxmlformats.org/drawingml/2006/main">
               <a:ext uri="{FF2B5EF4-FFF2-40B4-BE49-F238E27FC236}">
-                <a16:creationId xmlns:a16="http://schemas.microsoft.com/office/drawing/2014/main" id="{C9B98B39-AB62-4796-8421-B7F15AEC9347}"/>
+                <a16:creationId xmlns:a16="http://schemas.microsoft.com/office/drawing/2014/main" id="{EBCE7651-DE15-441C-B213-6A280E0D12CB}"/>
               </a:ext>
             </a:extLst>
           </p:cNvPr>
@@ -8469,7 +8469,7 @@
     </p:spTree>
     <p:extLst>
       <p:ext uri="{BB962C8B-B14F-4D97-AF65-F5344CB8AC3E}">
-        <p14:creationId xmlns:p14="http://schemas.microsoft.com/office/powerpoint/2010/main" val="1864541043"/>
+        <p14:creationId xmlns:p14="http://schemas.microsoft.com/office/powerpoint/2010/main" val="1101065685"/>
       </p:ext>
     </p:extLst>
   </p:cSld>
@@ -8493,7 +8493,7 @@
           <p:cNvPr id="2" name="TextBox 1">
             <a:extLst xmlns:a="http://schemas.openxmlformats.org/drawingml/2006/main">
               <a:ext uri="{FF2B5EF4-FFF2-40B4-BE49-F238E27FC236}">
-                <a16:creationId xmlns:a16="http://schemas.microsoft.com/office/drawing/2014/main" id="{EE394EF5-7344-47B8-AAD5-4F13C98C7705}"/>
+                <a16:creationId xmlns:a16="http://schemas.microsoft.com/office/drawing/2014/main" id="{668447DF-9D4F-4666-878E-DBBFA43AADF3}"/>
               </a:ext>
             </a:extLst>
           </p:cNvPr>
@@ -8540,7 +8540,7 @@
           <p:cNvPr id="3" name="TextBox 2">
             <a:extLst xmlns:a="http://schemas.openxmlformats.org/drawingml/2006/main">
               <a:ext uri="{FF2B5EF4-FFF2-40B4-BE49-F238E27FC236}">
-                <a16:creationId xmlns:a16="http://schemas.microsoft.com/office/drawing/2014/main" id="{0A112944-66C4-4ABD-876C-0C2F36A465CA}"/>
+                <a16:creationId xmlns:a16="http://schemas.microsoft.com/office/drawing/2014/main" id="{13730509-0677-4BEF-B9B5-FD0A2DD572D9}"/>
               </a:ext>
             </a:extLst>
           </p:cNvPr>
@@ -8587,7 +8587,7 @@
           <p:cNvPr id="4" name="Rectangle 3">
             <a:extLst xmlns:a="http://schemas.openxmlformats.org/drawingml/2006/main">
               <a:ext uri="{FF2B5EF4-FFF2-40B4-BE49-F238E27FC236}">
-                <a16:creationId xmlns:a16="http://schemas.microsoft.com/office/drawing/2014/main" id="{9CE7DE13-8177-4D49-A235-AC399BDC15F5}"/>
+                <a16:creationId xmlns:a16="http://schemas.microsoft.com/office/drawing/2014/main" id="{2528F6CE-556C-4DE0-8ED5-10D225075E17}"/>
               </a:ext>
             </a:extLst>
           </p:cNvPr>
@@ -8642,7 +8642,7 @@
           <p:cNvPr id="5" name="Rectangle 4">
             <a:extLst xmlns:a="http://schemas.openxmlformats.org/drawingml/2006/main">
               <a:ext uri="{FF2B5EF4-FFF2-40B4-BE49-F238E27FC236}">
-                <a16:creationId xmlns:a16="http://schemas.microsoft.com/office/drawing/2014/main" id="{0CFA2911-8B41-44A6-9035-9CA71B883121}"/>
+                <a16:creationId xmlns:a16="http://schemas.microsoft.com/office/drawing/2014/main" id="{05AB662A-D990-4AB7-AB04-A9494B5FF46C}"/>
               </a:ext>
             </a:extLst>
           </p:cNvPr>
@@ -8697,7 +8697,7 @@
           <p:cNvPr id="6" name="TextBox 5">
             <a:extLst xmlns:a="http://schemas.openxmlformats.org/drawingml/2006/main">
               <a:ext uri="{FF2B5EF4-FFF2-40B4-BE49-F238E27FC236}">
-                <a16:creationId xmlns:a16="http://schemas.microsoft.com/office/drawing/2014/main" id="{EEEC7529-0B76-4C15-A672-72C291E47FB0}"/>
+                <a16:creationId xmlns:a16="http://schemas.microsoft.com/office/drawing/2014/main" id="{D407010B-3014-49FD-834A-E2B00EBDD562}"/>
               </a:ext>
             </a:extLst>
           </p:cNvPr>
@@ -8734,7 +8734,7 @@
                 <a:ea typeface="Aptos"/>
                 <a:cs typeface="Aptos"/>
               </a:rPr>
-              <a:t>Julkinen riippumaton evidenssikooste · 2026.07.27-28 · 2026-07-27 · Lähteet: Evidence Register; WIPO IP valuation</a:t>
+              <a:t>Julkinen riippumaton evidenssikooste · 2026.07.27-29 · 2026-07-27 · Lähteet: Evidence Register; WIPO IP valuation</a:t>
             </a:r>
           </a:p>
         </p:txBody>
@@ -8744,7 +8744,7 @@
           <p:cNvPr id="7" name="TextBox 6">
             <a:extLst xmlns:a="http://schemas.openxmlformats.org/drawingml/2006/main">
               <a:ext uri="{FF2B5EF4-FFF2-40B4-BE49-F238E27FC236}">
-                <a16:creationId xmlns:a16="http://schemas.microsoft.com/office/drawing/2014/main" id="{54F13AF4-D158-46F0-9465-A15592375EAA}"/>
+                <a16:creationId xmlns:a16="http://schemas.microsoft.com/office/drawing/2014/main" id="{462A8B40-6918-4BCD-A2D5-4B0094FA4B26}"/>
               </a:ext>
             </a:extLst>
           </p:cNvPr>
@@ -9231,7 +9231,7 @@
           <p:cNvPr id="9" name="TextBox 8">
             <a:extLst xmlns:a="http://schemas.openxmlformats.org/drawingml/2006/main">
               <a:ext uri="{FF2B5EF4-FFF2-40B4-BE49-F238E27FC236}">
-                <a16:creationId xmlns:a16="http://schemas.microsoft.com/office/drawing/2014/main" id="{D1582D07-61D2-4A58-8CB8-B69E776B62DD}"/>
+                <a16:creationId xmlns:a16="http://schemas.microsoft.com/office/drawing/2014/main" id="{E7700FD3-DA4E-40B8-8F46-BF1C9CFF7214}"/>
               </a:ext>
             </a:extLst>
           </p:cNvPr>
@@ -9276,7 +9276,7 @@
     </p:spTree>
     <p:extLst>
       <p:ext uri="{BB962C8B-B14F-4D97-AF65-F5344CB8AC3E}">
-        <p14:creationId xmlns:p14="http://schemas.microsoft.com/office/powerpoint/2010/main" val="1193066340"/>
+        <p14:creationId xmlns:p14="http://schemas.microsoft.com/office/powerpoint/2010/main" val="456852466"/>
       </p:ext>
     </p:extLst>
   </p:cSld>
@@ -9307,7 +9307,7 @@
           <p:cNvPr id="2" name="TextBox 1">
             <a:extLst xmlns:a="http://schemas.openxmlformats.org/drawingml/2006/main">
               <a:ext uri="{FF2B5EF4-FFF2-40B4-BE49-F238E27FC236}">
-                <a16:creationId xmlns:a16="http://schemas.microsoft.com/office/drawing/2014/main" id="{A545581A-92BC-4E59-AF0B-F11D22F2ED0E}"/>
+                <a16:creationId xmlns:a16="http://schemas.microsoft.com/office/drawing/2014/main" id="{0E6B5E52-55CB-4576-8898-9B6620F3DDE8}"/>
               </a:ext>
             </a:extLst>
           </p:cNvPr>
@@ -9354,7 +9354,7 @@
           <p:cNvPr id="3" name="TextBox 2">
             <a:extLst xmlns:a="http://schemas.openxmlformats.org/drawingml/2006/main">
               <a:ext uri="{FF2B5EF4-FFF2-40B4-BE49-F238E27FC236}">
-                <a16:creationId xmlns:a16="http://schemas.microsoft.com/office/drawing/2014/main" id="{DB3B14AD-279A-4039-A4CC-4918D209092B}"/>
+                <a16:creationId xmlns:a16="http://schemas.microsoft.com/office/drawing/2014/main" id="{73F688F2-203A-415A-9EC9-C79CA09C315A}"/>
               </a:ext>
             </a:extLst>
           </p:cNvPr>
@@ -9401,7 +9401,7 @@
           <p:cNvPr id="4" name="TextBox 3">
             <a:extLst xmlns:a="http://schemas.openxmlformats.org/drawingml/2006/main">
               <a:ext uri="{FF2B5EF4-FFF2-40B4-BE49-F238E27FC236}">
-                <a16:creationId xmlns:a16="http://schemas.microsoft.com/office/drawing/2014/main" id="{63A2A750-AD62-4324-BB5E-BB7142E2DECB}"/>
+                <a16:creationId xmlns:a16="http://schemas.microsoft.com/office/drawing/2014/main" id="{1AD4471A-7425-41A6-8A6B-D9544281E71A}"/>
               </a:ext>
             </a:extLst>
           </p:cNvPr>
@@ -9520,7 +9520,7 @@
           <p:cNvPr id="5" name="TextBox 4">
             <a:extLst xmlns:a="http://schemas.openxmlformats.org/drawingml/2006/main">
               <a:ext uri="{FF2B5EF4-FFF2-40B4-BE49-F238E27FC236}">
-                <a16:creationId xmlns:a16="http://schemas.microsoft.com/office/drawing/2014/main" id="{2FBC2B09-168D-49DA-9456-953310430A09}"/>
+                <a16:creationId xmlns:a16="http://schemas.microsoft.com/office/drawing/2014/main" id="{D5A4AB3E-AC41-4B09-97CC-FFC674702C86}"/>
               </a:ext>
             </a:extLst>
           </p:cNvPr>
@@ -9557,7 +9557,7 @@
                 <a:ea typeface="Aptos"/>
                 <a:cs typeface="Aptos"/>
               </a:rPr>
-              <a:t>Versio 2026.07.27-28 · 2026-07-27 · 6 / 6</a:t>
+              <a:t>Versio 2026.07.27-29 · 2026-07-27 · 6 / 6</a:t>
             </a:r>
           </a:p>
         </p:txBody>
@@ -9565,7 +9565,7 @@
     </p:spTree>
     <p:extLst>
       <p:ext uri="{BB962C8B-B14F-4D97-AF65-F5344CB8AC3E}">
-        <p14:creationId xmlns:p14="http://schemas.microsoft.com/office/powerpoint/2010/main" val="1377085427"/>
+        <p14:creationId xmlns:p14="http://schemas.microsoft.com/office/powerpoint/2010/main" val="1990807383"/>
       </p:ext>
     </p:extLst>
   </p:cSld>

--- a/site/downloads/pixan-bank-deck-short-fi.pptx
+++ b/site/downloads/pixan-bank-deck-short-fi.pptx
@@ -2,18 +2,18 @@
 <file path=ppt/presentation.xml><?xml version="1.0" encoding="utf-8"?>
 <p:presentation xmlns:p="http://schemas.openxmlformats.org/presentationml/2006/main">
   <p:sldMasterIdLst>
-    <p:sldMasterId xmlns:r="http://schemas.openxmlformats.org/officeDocument/2006/relationships" id="2147483648" r:id="R319e6dc5376e439c"/>
+    <p:sldMasterId xmlns:r="http://schemas.openxmlformats.org/officeDocument/2006/relationships" id="2147483648" r:id="Rf891b0528db34706"/>
   </p:sldMasterIdLst>
   <p:notesMasterIdLst>
-    <p:notesMasterId xmlns:r="http://schemas.openxmlformats.org/officeDocument/2006/relationships" r:id="Rea26c0fede624745"/>
+    <p:notesMasterId xmlns:r="http://schemas.openxmlformats.org/officeDocument/2006/relationships" r:id="Rccfc40a1af8a4894"/>
   </p:notesMasterIdLst>
   <p:sldIdLst>
-    <p:sldId xmlns:r="http://schemas.openxmlformats.org/officeDocument/2006/relationships" id="256" r:id="R055c60006fcd486e"/>
-    <p:sldId xmlns:r="http://schemas.openxmlformats.org/officeDocument/2006/relationships" id="257" r:id="R6d61932bace5404d"/>
-    <p:sldId xmlns:r="http://schemas.openxmlformats.org/officeDocument/2006/relationships" id="258" r:id="Re367eed5cff3455c"/>
-    <p:sldId xmlns:r="http://schemas.openxmlformats.org/officeDocument/2006/relationships" id="259" r:id="Rd668c7f69b33482e"/>
-    <p:sldId xmlns:r="http://schemas.openxmlformats.org/officeDocument/2006/relationships" id="260" r:id="R2266cfde119a4eb3"/>
-    <p:sldId xmlns:r="http://schemas.openxmlformats.org/officeDocument/2006/relationships" id="261" r:id="Re9d3951429854e8f"/>
+    <p:sldId xmlns:r="http://schemas.openxmlformats.org/officeDocument/2006/relationships" id="256" r:id="Ra4171ee4d2034816"/>
+    <p:sldId xmlns:r="http://schemas.openxmlformats.org/officeDocument/2006/relationships" id="257" r:id="Rb96d55806cbd42d4"/>
+    <p:sldId xmlns:r="http://schemas.openxmlformats.org/officeDocument/2006/relationships" id="258" r:id="R5555e0d5a708459d"/>
+    <p:sldId xmlns:r="http://schemas.openxmlformats.org/officeDocument/2006/relationships" id="259" r:id="Re6a2954829d34bcb"/>
+    <p:sldId xmlns:r="http://schemas.openxmlformats.org/officeDocument/2006/relationships" id="260" r:id="R14c2f25855b143eb"/>
+    <p:sldId xmlns:r="http://schemas.openxmlformats.org/officeDocument/2006/relationships" id="261" r:id="R1e1bfcda8b884bb2"/>
   </p:sldIdLst>
   <p:sldSz cx="12191999" cy="6858000"/>
   <p:notesSz cx="6858000" cy="9144000"/>
@@ -1887,7 +1887,7 @@
           <p:cNvPr id="2" name="Title 1">
             <a:extLst xmlns:a="http://schemas.openxmlformats.org/drawingml/2006/main">
               <a:ext uri="{FF2B5EF4-FFF2-40B4-BE49-F238E27FC236}">
-                <a16:creationId xmlns:a16="http://schemas.microsoft.com/office/drawing/2014/main" id="{6D5AB22A-6787-4C19-AB5F-73DB36810971}"/>
+                <a16:creationId xmlns:a16="http://schemas.microsoft.com/office/drawing/2014/main" id="{071807D7-A5BA-44AD-88F1-6044C8CF1AC0}"/>
               </a:ext>
             </a:extLst>
           </p:cNvPr>
@@ -1919,7 +1919,7 @@
           <p:cNvPr id="3" name="Subtitle 2">
             <a:extLst xmlns:a="http://schemas.openxmlformats.org/drawingml/2006/main">
               <a:ext uri="{FF2B5EF4-FFF2-40B4-BE49-F238E27FC236}">
-                <a16:creationId xmlns:a16="http://schemas.microsoft.com/office/drawing/2014/main" id="{3DFEB15A-545E-4B86-A0D5-9CB056811B8B}"/>
+                <a16:creationId xmlns:a16="http://schemas.microsoft.com/office/drawing/2014/main" id="{663760AC-1D53-45BE-A006-9F772C768769}"/>
               </a:ext>
             </a:extLst>
           </p:cNvPr>
@@ -2042,7 +2042,7 @@
           <p:cNvPr id="4" name="Date Placeholder 3">
             <a:extLst xmlns:a="http://schemas.openxmlformats.org/drawingml/2006/main">
               <a:ext uri="{FF2B5EF4-FFF2-40B4-BE49-F238E27FC236}">
-                <a16:creationId xmlns:a16="http://schemas.microsoft.com/office/drawing/2014/main" id="{D7EF8F55-3F59-4DC1-81C8-24C80BF2C290}"/>
+                <a16:creationId xmlns:a16="http://schemas.microsoft.com/office/drawing/2014/main" id="{07D6EF5B-747B-41CB-BA3B-74FF7CAE414D}"/>
               </a:ext>
             </a:extLst>
           </p:cNvPr>
@@ -2069,7 +2069,7 @@
           <p:cNvPr id="5" name="Footer Placeholder 4">
             <a:extLst xmlns:a="http://schemas.openxmlformats.org/drawingml/2006/main">
               <a:ext uri="{FF2B5EF4-FFF2-40B4-BE49-F238E27FC236}">
-                <a16:creationId xmlns:a16="http://schemas.microsoft.com/office/drawing/2014/main" id="{189F3643-98E1-44E9-B356-E9425FE573CC}"/>
+                <a16:creationId xmlns:a16="http://schemas.microsoft.com/office/drawing/2014/main" id="{50B9173D-7FAA-48F7-A684-62371669322E}"/>
               </a:ext>
             </a:extLst>
           </p:cNvPr>
@@ -2092,7 +2092,7 @@
           <p:cNvPr id="6" name="Slide Number Placeholder 5">
             <a:extLst xmlns:a="http://schemas.openxmlformats.org/drawingml/2006/main">
               <a:ext uri="{FF2B5EF4-FFF2-40B4-BE49-F238E27FC236}">
-                <a16:creationId xmlns:a16="http://schemas.microsoft.com/office/drawing/2014/main" id="{2C0FB390-CC72-416D-9842-568D91086AEE}"/>
+                <a16:creationId xmlns:a16="http://schemas.microsoft.com/office/drawing/2014/main" id="{BB0E3590-8480-4DC5-B40A-D68E38E1F162}"/>
               </a:ext>
             </a:extLst>
           </p:cNvPr>
@@ -2136,7 +2136,7 @@
           <p:cNvPr id="2" name="Title 1">
             <a:extLst xmlns:a="http://schemas.openxmlformats.org/drawingml/2006/main">
               <a:ext uri="{FF2B5EF4-FFF2-40B4-BE49-F238E27FC236}">
-                <a16:creationId xmlns:a16="http://schemas.microsoft.com/office/drawing/2014/main" id="{CAB8E8A6-DC62-47BA-9BE6-A8CA2D486E0E}"/>
+                <a16:creationId xmlns:a16="http://schemas.microsoft.com/office/drawing/2014/main" id="{D5A931D9-E2BC-40EF-979F-164C0B30F162}"/>
               </a:ext>
             </a:extLst>
           </p:cNvPr>
@@ -2163,7 +2163,7 @@
           <p:cNvPr id="3" name="Vertical Text Placeholder 2">
             <a:extLst xmlns:a="http://schemas.openxmlformats.org/drawingml/2006/main">
               <a:ext uri="{FF2B5EF4-FFF2-40B4-BE49-F238E27FC236}">
-                <a16:creationId xmlns:a16="http://schemas.microsoft.com/office/drawing/2014/main" id="{80AE251A-31B5-417B-BF56-BB3A419380EE}"/>
+                <a16:creationId xmlns:a16="http://schemas.microsoft.com/office/drawing/2014/main" id="{894CA3E4-C9D5-4B96-8785-E2307C4E8028}"/>
               </a:ext>
             </a:extLst>
           </p:cNvPr>
@@ -2225,7 +2225,7 @@
           <p:cNvPr id="4" name="Date Placeholder 3">
             <a:extLst xmlns:a="http://schemas.openxmlformats.org/drawingml/2006/main">
               <a:ext uri="{FF2B5EF4-FFF2-40B4-BE49-F238E27FC236}">
-                <a16:creationId xmlns:a16="http://schemas.microsoft.com/office/drawing/2014/main" id="{A9DCBC0C-3AF8-4EB5-9AE8-63130479F3C1}"/>
+                <a16:creationId xmlns:a16="http://schemas.microsoft.com/office/drawing/2014/main" id="{A6EE548C-63DA-4D04-BA48-71F6217B8DC0}"/>
               </a:ext>
             </a:extLst>
           </p:cNvPr>
@@ -2252,7 +2252,7 @@
           <p:cNvPr id="5" name="Footer Placeholder 4">
             <a:extLst xmlns:a="http://schemas.openxmlformats.org/drawingml/2006/main">
               <a:ext uri="{FF2B5EF4-FFF2-40B4-BE49-F238E27FC236}">
-                <a16:creationId xmlns:a16="http://schemas.microsoft.com/office/drawing/2014/main" id="{26AD5107-9C7F-4B6C-AF55-73A721CFB1BE}"/>
+                <a16:creationId xmlns:a16="http://schemas.microsoft.com/office/drawing/2014/main" id="{9BBFAE6E-ACC8-47EC-8D6A-ACEE6A560650}"/>
               </a:ext>
             </a:extLst>
           </p:cNvPr>
@@ -2275,7 +2275,7 @@
           <p:cNvPr id="6" name="Slide Number Placeholder 5">
             <a:extLst xmlns:a="http://schemas.openxmlformats.org/drawingml/2006/main">
               <a:ext uri="{FF2B5EF4-FFF2-40B4-BE49-F238E27FC236}">
-                <a16:creationId xmlns:a16="http://schemas.microsoft.com/office/drawing/2014/main" id="{229857F6-8AF9-46DC-B24D-12B001D14C60}"/>
+                <a16:creationId xmlns:a16="http://schemas.microsoft.com/office/drawing/2014/main" id="{BC9409BE-E4B3-4D26-9EF2-83DA3555E354}"/>
               </a:ext>
             </a:extLst>
           </p:cNvPr>
@@ -2319,7 +2319,7 @@
           <p:cNvPr id="2" name="Vertical Title 1">
             <a:extLst xmlns:a="http://schemas.openxmlformats.org/drawingml/2006/main">
               <a:ext uri="{FF2B5EF4-FFF2-40B4-BE49-F238E27FC236}">
-                <a16:creationId xmlns:a16="http://schemas.microsoft.com/office/drawing/2014/main" id="{FB56921F-365D-476C-8FC2-6A13F33DF7F4}"/>
+                <a16:creationId xmlns:a16="http://schemas.microsoft.com/office/drawing/2014/main" id="{A3CCCAF9-B702-42F9-B238-9695971C521C}"/>
               </a:ext>
             </a:extLst>
           </p:cNvPr>
@@ -2351,7 +2351,7 @@
           <p:cNvPr id="3" name="Vertical Text Placeholder 2">
             <a:extLst xmlns:a="http://schemas.openxmlformats.org/drawingml/2006/main">
               <a:ext uri="{FF2B5EF4-FFF2-40B4-BE49-F238E27FC236}">
-                <a16:creationId xmlns:a16="http://schemas.microsoft.com/office/drawing/2014/main" id="{B8152308-B200-4419-8DD5-E89E6FC6D4E8}"/>
+                <a16:creationId xmlns:a16="http://schemas.microsoft.com/office/drawing/2014/main" id="{106E2E11-1884-401F-87C7-ED1EB4CA296C}"/>
               </a:ext>
             </a:extLst>
           </p:cNvPr>
@@ -2418,7 +2418,7 @@
           <p:cNvPr id="4" name="Date Placeholder 3">
             <a:extLst xmlns:a="http://schemas.openxmlformats.org/drawingml/2006/main">
               <a:ext uri="{FF2B5EF4-FFF2-40B4-BE49-F238E27FC236}">
-                <a16:creationId xmlns:a16="http://schemas.microsoft.com/office/drawing/2014/main" id="{E9CEE790-BC85-48E6-8856-00B94ECF8864}"/>
+                <a16:creationId xmlns:a16="http://schemas.microsoft.com/office/drawing/2014/main" id="{08B28AA9-7C67-4F09-A337-1BF6D568F60E}"/>
               </a:ext>
             </a:extLst>
           </p:cNvPr>
@@ -2445,7 +2445,7 @@
           <p:cNvPr id="5" name="Footer Placeholder 4">
             <a:extLst xmlns:a="http://schemas.openxmlformats.org/drawingml/2006/main">
               <a:ext uri="{FF2B5EF4-FFF2-40B4-BE49-F238E27FC236}">
-                <a16:creationId xmlns:a16="http://schemas.microsoft.com/office/drawing/2014/main" id="{AF119129-F541-4CAA-9CED-680AA8F6D1B5}"/>
+                <a16:creationId xmlns:a16="http://schemas.microsoft.com/office/drawing/2014/main" id="{1EC14C34-00EE-44BE-9CB7-FCC443AD15F8}"/>
               </a:ext>
             </a:extLst>
           </p:cNvPr>
@@ -2468,7 +2468,7 @@
           <p:cNvPr id="6" name="Slide Number Placeholder 5">
             <a:extLst xmlns:a="http://schemas.openxmlformats.org/drawingml/2006/main">
               <a:ext uri="{FF2B5EF4-FFF2-40B4-BE49-F238E27FC236}">
-                <a16:creationId xmlns:a16="http://schemas.microsoft.com/office/drawing/2014/main" id="{75A78776-0FE4-4600-A0F2-E2904578200B}"/>
+                <a16:creationId xmlns:a16="http://schemas.microsoft.com/office/drawing/2014/main" id="{108351D0-4583-4D36-A81A-92AD61261C44}"/>
               </a:ext>
             </a:extLst>
           </p:cNvPr>
@@ -2512,7 +2512,7 @@
           <p:cNvPr id="2" name="Title 1">
             <a:extLst xmlns:a="http://schemas.openxmlformats.org/drawingml/2006/main">
               <a:ext uri="{FF2B5EF4-FFF2-40B4-BE49-F238E27FC236}">
-                <a16:creationId xmlns:a16="http://schemas.microsoft.com/office/drawing/2014/main" id="{7DABF76A-3630-4A6D-AFAF-F49F36047C1F}"/>
+                <a16:creationId xmlns:a16="http://schemas.microsoft.com/office/drawing/2014/main" id="{369F9C1A-2A59-405D-877D-23904D3C2F1C}"/>
               </a:ext>
             </a:extLst>
           </p:cNvPr>
@@ -2539,7 +2539,7 @@
           <p:cNvPr id="3" name="Content Placeholder 2">
             <a:extLst xmlns:a="http://schemas.openxmlformats.org/drawingml/2006/main">
               <a:ext uri="{FF2B5EF4-FFF2-40B4-BE49-F238E27FC236}">
-                <a16:creationId xmlns:a16="http://schemas.microsoft.com/office/drawing/2014/main" id="{CADEA7DF-4FA6-4E05-94E8-1370269E1874}"/>
+                <a16:creationId xmlns:a16="http://schemas.microsoft.com/office/drawing/2014/main" id="{C7DCBC0C-AB20-4E8B-B3D6-49E792215F86}"/>
               </a:ext>
             </a:extLst>
           </p:cNvPr>
@@ -2601,7 +2601,7 @@
           <p:cNvPr id="4" name="Date Placeholder 3">
             <a:extLst xmlns:a="http://schemas.openxmlformats.org/drawingml/2006/main">
               <a:ext uri="{FF2B5EF4-FFF2-40B4-BE49-F238E27FC236}">
-                <a16:creationId xmlns:a16="http://schemas.microsoft.com/office/drawing/2014/main" id="{87D77BBE-5D4D-42BD-86A9-07A405CFAB46}"/>
+                <a16:creationId xmlns:a16="http://schemas.microsoft.com/office/drawing/2014/main" id="{A1787C02-5F94-4196-AE36-EC9933543E94}"/>
               </a:ext>
             </a:extLst>
           </p:cNvPr>
@@ -2628,7 +2628,7 @@
           <p:cNvPr id="5" name="Footer Placeholder 4">
             <a:extLst xmlns:a="http://schemas.openxmlformats.org/drawingml/2006/main">
               <a:ext uri="{FF2B5EF4-FFF2-40B4-BE49-F238E27FC236}">
-                <a16:creationId xmlns:a16="http://schemas.microsoft.com/office/drawing/2014/main" id="{FD155073-7DC1-4AF1-A627-4189E42BC014}"/>
+                <a16:creationId xmlns:a16="http://schemas.microsoft.com/office/drawing/2014/main" id="{1245B4BC-4537-49C7-96AD-75F168CFF3A8}"/>
               </a:ext>
             </a:extLst>
           </p:cNvPr>
@@ -2651,7 +2651,7 @@
           <p:cNvPr id="6" name="Slide Number Placeholder 5">
             <a:extLst xmlns:a="http://schemas.openxmlformats.org/drawingml/2006/main">
               <a:ext uri="{FF2B5EF4-FFF2-40B4-BE49-F238E27FC236}">
-                <a16:creationId xmlns:a16="http://schemas.microsoft.com/office/drawing/2014/main" id="{D6BB3106-4DC7-49B4-92C9-3535F0F60D86}"/>
+                <a16:creationId xmlns:a16="http://schemas.microsoft.com/office/drawing/2014/main" id="{D4A2CB95-3B94-4850-A338-8F221151F27A}"/>
               </a:ext>
             </a:extLst>
           </p:cNvPr>
@@ -2695,7 +2695,7 @@
           <p:cNvPr id="2" name="Title 1">
             <a:extLst xmlns:a="http://schemas.openxmlformats.org/drawingml/2006/main">
               <a:ext uri="{FF2B5EF4-FFF2-40B4-BE49-F238E27FC236}">
-                <a16:creationId xmlns:a16="http://schemas.microsoft.com/office/drawing/2014/main" id="{5F5A7F1F-5E4E-4A4C-8937-5E19E9B5518E}"/>
+                <a16:creationId xmlns:a16="http://schemas.microsoft.com/office/drawing/2014/main" id="{7C5BBE3D-5945-4635-BC89-60B25D80FE7D}"/>
               </a:ext>
             </a:extLst>
           </p:cNvPr>
@@ -2732,7 +2732,7 @@
           <p:cNvPr id="3" name="Text Placeholder 2">
             <a:extLst xmlns:a="http://schemas.openxmlformats.org/drawingml/2006/main">
               <a:ext uri="{FF2B5EF4-FFF2-40B4-BE49-F238E27FC236}">
-                <a16:creationId xmlns:a16="http://schemas.microsoft.com/office/drawing/2014/main" id="{7EBD181F-C17B-40B7-BEBC-6025C82707DA}"/>
+                <a16:creationId xmlns:a16="http://schemas.microsoft.com/office/drawing/2014/main" id="{B4CA9DE1-F3AD-4617-88B4-A4D4280171C9}"/>
               </a:ext>
             </a:extLst>
           </p:cNvPr>
@@ -2858,7 +2858,7 @@
           <p:cNvPr id="4" name="Date Placeholder 3">
             <a:extLst xmlns:a="http://schemas.openxmlformats.org/drawingml/2006/main">
               <a:ext uri="{FF2B5EF4-FFF2-40B4-BE49-F238E27FC236}">
-                <a16:creationId xmlns:a16="http://schemas.microsoft.com/office/drawing/2014/main" id="{E6931F65-5818-483F-BC9C-F907B0BA33BC}"/>
+                <a16:creationId xmlns:a16="http://schemas.microsoft.com/office/drawing/2014/main" id="{2B72395B-5DDF-4222-817F-99B5A6B5F897}"/>
               </a:ext>
             </a:extLst>
           </p:cNvPr>
@@ -2885,7 +2885,7 @@
           <p:cNvPr id="5" name="Footer Placeholder 4">
             <a:extLst xmlns:a="http://schemas.openxmlformats.org/drawingml/2006/main">
               <a:ext uri="{FF2B5EF4-FFF2-40B4-BE49-F238E27FC236}">
-                <a16:creationId xmlns:a16="http://schemas.microsoft.com/office/drawing/2014/main" id="{870B80B7-E0F1-4599-AEFE-28562347AFF6}"/>
+                <a16:creationId xmlns:a16="http://schemas.microsoft.com/office/drawing/2014/main" id="{E6F34CD6-627B-4FB9-ACC2-25487B8CFA9D}"/>
               </a:ext>
             </a:extLst>
           </p:cNvPr>
@@ -2908,7 +2908,7 @@
           <p:cNvPr id="6" name="Slide Number Placeholder 5">
             <a:extLst xmlns:a="http://schemas.openxmlformats.org/drawingml/2006/main">
               <a:ext uri="{FF2B5EF4-FFF2-40B4-BE49-F238E27FC236}">
-                <a16:creationId xmlns:a16="http://schemas.microsoft.com/office/drawing/2014/main" id="{393EA6EE-79BA-48BE-B798-BD2C9ECB5547}"/>
+                <a16:creationId xmlns:a16="http://schemas.microsoft.com/office/drawing/2014/main" id="{923FFBC5-5915-42AA-B75C-15426C05D87C}"/>
               </a:ext>
             </a:extLst>
           </p:cNvPr>
@@ -2952,7 +2952,7 @@
           <p:cNvPr id="2" name="Title 1">
             <a:extLst xmlns:a="http://schemas.openxmlformats.org/drawingml/2006/main">
               <a:ext uri="{FF2B5EF4-FFF2-40B4-BE49-F238E27FC236}">
-                <a16:creationId xmlns:a16="http://schemas.microsoft.com/office/drawing/2014/main" id="{5F04ED4D-9E27-45B4-A977-7D85C4CE4E88}"/>
+                <a16:creationId xmlns:a16="http://schemas.microsoft.com/office/drawing/2014/main" id="{5C0718D0-E8D7-4F20-8481-6F9E766C6F84}"/>
               </a:ext>
             </a:extLst>
           </p:cNvPr>
@@ -2979,7 +2979,7 @@
           <p:cNvPr id="3" name="Content Placeholder 2">
             <a:extLst xmlns:a="http://schemas.openxmlformats.org/drawingml/2006/main">
               <a:ext uri="{FF2B5EF4-FFF2-40B4-BE49-F238E27FC236}">
-                <a16:creationId xmlns:a16="http://schemas.microsoft.com/office/drawing/2014/main" id="{BC498D6B-B4EE-49E0-859C-7A30E54F479D}"/>
+                <a16:creationId xmlns:a16="http://schemas.microsoft.com/office/drawing/2014/main" id="{A55BF3C2-1159-4FEB-B574-6A50F5E0958A}"/>
               </a:ext>
             </a:extLst>
           </p:cNvPr>
@@ -3083,7 +3083,7 @@
           <p:cNvPr id="4" name="Content Placeholder 3">
             <a:extLst xmlns:a="http://schemas.openxmlformats.org/drawingml/2006/main">
               <a:ext uri="{FF2B5EF4-FFF2-40B4-BE49-F238E27FC236}">
-                <a16:creationId xmlns:a16="http://schemas.microsoft.com/office/drawing/2014/main" id="{0903699F-F825-40DB-A11E-04E45A0EF69D}"/>
+                <a16:creationId xmlns:a16="http://schemas.microsoft.com/office/drawing/2014/main" id="{2009B731-AFA9-494F-80A3-BF385B5F558B}"/>
               </a:ext>
             </a:extLst>
           </p:cNvPr>
@@ -3187,7 +3187,7 @@
           <p:cNvPr id="5" name="Date Placeholder 4">
             <a:extLst xmlns:a="http://schemas.openxmlformats.org/drawingml/2006/main">
               <a:ext uri="{FF2B5EF4-FFF2-40B4-BE49-F238E27FC236}">
-                <a16:creationId xmlns:a16="http://schemas.microsoft.com/office/drawing/2014/main" id="{8CA0C253-DC17-49AA-9A47-B75300570F96}"/>
+                <a16:creationId xmlns:a16="http://schemas.microsoft.com/office/drawing/2014/main" id="{6CCC0E3C-9FC6-49E7-8243-299A9072CCCA}"/>
               </a:ext>
             </a:extLst>
           </p:cNvPr>
@@ -3214,7 +3214,7 @@
           <p:cNvPr id="6" name="Footer Placeholder 5">
             <a:extLst xmlns:a="http://schemas.openxmlformats.org/drawingml/2006/main">
               <a:ext uri="{FF2B5EF4-FFF2-40B4-BE49-F238E27FC236}">
-                <a16:creationId xmlns:a16="http://schemas.microsoft.com/office/drawing/2014/main" id="{ACCE715D-8518-4947-90D3-588F620ED31C}"/>
+                <a16:creationId xmlns:a16="http://schemas.microsoft.com/office/drawing/2014/main" id="{06A517CB-44ED-468D-A771-15E52CDE0942}"/>
               </a:ext>
             </a:extLst>
           </p:cNvPr>
@@ -3237,7 +3237,7 @@
           <p:cNvPr id="7" name="Slide Number Placeholder 6">
             <a:extLst xmlns:a="http://schemas.openxmlformats.org/drawingml/2006/main">
               <a:ext uri="{FF2B5EF4-FFF2-40B4-BE49-F238E27FC236}">
-                <a16:creationId xmlns:a16="http://schemas.microsoft.com/office/drawing/2014/main" id="{10B50668-A2D9-4B7E-B952-9ACDFBE9ABF0}"/>
+                <a16:creationId xmlns:a16="http://schemas.microsoft.com/office/drawing/2014/main" id="{E1684A19-CF14-4F7F-A1D0-C0E655A5B1B7}"/>
               </a:ext>
             </a:extLst>
           </p:cNvPr>
@@ -3281,7 +3281,7 @@
           <p:cNvPr id="2" name="Title 1">
             <a:extLst xmlns:a="http://schemas.openxmlformats.org/drawingml/2006/main">
               <a:ext uri="{FF2B5EF4-FFF2-40B4-BE49-F238E27FC236}">
-                <a16:creationId xmlns:a16="http://schemas.microsoft.com/office/drawing/2014/main" id="{498B3DCA-EEBF-458E-9FC8-F229451EC67F}"/>
+                <a16:creationId xmlns:a16="http://schemas.microsoft.com/office/drawing/2014/main" id="{04EA78C4-8533-4F7E-A95A-11F29D4C04E2}"/>
               </a:ext>
             </a:extLst>
           </p:cNvPr>
@@ -3313,7 +3313,7 @@
           <p:cNvPr id="3" name="Text Placeholder 2">
             <a:extLst xmlns:a="http://schemas.openxmlformats.org/drawingml/2006/main">
               <a:ext uri="{FF2B5EF4-FFF2-40B4-BE49-F238E27FC236}">
-                <a16:creationId xmlns:a16="http://schemas.microsoft.com/office/drawing/2014/main" id="{88B838B2-64D4-4493-8DAD-EC5109D0A297}"/>
+                <a16:creationId xmlns:a16="http://schemas.microsoft.com/office/drawing/2014/main" id="{63D212EA-4430-467E-AEA9-B6B1C2FB9617}"/>
               </a:ext>
             </a:extLst>
           </p:cNvPr>
@@ -3385,7 +3385,7 @@
           <p:cNvPr id="4" name="Content Placeholder 3">
             <a:extLst xmlns:a="http://schemas.openxmlformats.org/drawingml/2006/main">
               <a:ext uri="{FF2B5EF4-FFF2-40B4-BE49-F238E27FC236}">
-                <a16:creationId xmlns:a16="http://schemas.microsoft.com/office/drawing/2014/main" id="{E017A7F4-7FBC-4706-97CF-4BB804BA1487}"/>
+                <a16:creationId xmlns:a16="http://schemas.microsoft.com/office/drawing/2014/main" id="{2DABD036-48BC-49BB-BABA-FD54EB483063}"/>
               </a:ext>
             </a:extLst>
           </p:cNvPr>
@@ -3489,7 +3489,7 @@
           <p:cNvPr id="5" name="Text Placeholder 4">
             <a:extLst xmlns:a="http://schemas.openxmlformats.org/drawingml/2006/main">
               <a:ext uri="{FF2B5EF4-FFF2-40B4-BE49-F238E27FC236}">
-                <a16:creationId xmlns:a16="http://schemas.microsoft.com/office/drawing/2014/main" id="{E0F0E051-D719-4278-AD26-5B0F101CC30E}"/>
+                <a16:creationId xmlns:a16="http://schemas.microsoft.com/office/drawing/2014/main" id="{A802F8D8-6385-4E8D-B7B2-CFF17766FC43}"/>
               </a:ext>
             </a:extLst>
           </p:cNvPr>
@@ -3561,7 +3561,7 @@
           <p:cNvPr id="6" name="Content Placeholder 5">
             <a:extLst xmlns:a="http://schemas.openxmlformats.org/drawingml/2006/main">
               <a:ext uri="{FF2B5EF4-FFF2-40B4-BE49-F238E27FC236}">
-                <a16:creationId xmlns:a16="http://schemas.microsoft.com/office/drawing/2014/main" id="{E20EB95F-1E0B-4ECF-9093-CCC478007961}"/>
+                <a16:creationId xmlns:a16="http://schemas.microsoft.com/office/drawing/2014/main" id="{84DD0C5A-9DE7-4AA0-B8D2-2276EAF0B289}"/>
               </a:ext>
             </a:extLst>
           </p:cNvPr>
@@ -3665,7 +3665,7 @@
           <p:cNvPr id="7" name="Date Placeholder 6">
             <a:extLst xmlns:a="http://schemas.openxmlformats.org/drawingml/2006/main">
               <a:ext uri="{FF2B5EF4-FFF2-40B4-BE49-F238E27FC236}">
-                <a16:creationId xmlns:a16="http://schemas.microsoft.com/office/drawing/2014/main" id="{3DE0114B-1C76-4799-8748-7CC23DE04037}"/>
+                <a16:creationId xmlns:a16="http://schemas.microsoft.com/office/drawing/2014/main" id="{B1E85C94-FB57-4A45-B033-EB49E8FF83D9}"/>
               </a:ext>
             </a:extLst>
           </p:cNvPr>
@@ -3692,7 +3692,7 @@
           <p:cNvPr id="8" name="Footer Placeholder 7">
             <a:extLst xmlns:a="http://schemas.openxmlformats.org/drawingml/2006/main">
               <a:ext uri="{FF2B5EF4-FFF2-40B4-BE49-F238E27FC236}">
-                <a16:creationId xmlns:a16="http://schemas.microsoft.com/office/drawing/2014/main" id="{F430CEFC-1B0C-43C5-8A4B-1965D674A18B}"/>
+                <a16:creationId xmlns:a16="http://schemas.microsoft.com/office/drawing/2014/main" id="{2ABE33CE-60A3-4C24-B8DF-CD26A0729EC1}"/>
               </a:ext>
             </a:extLst>
           </p:cNvPr>
@@ -3715,7 +3715,7 @@
           <p:cNvPr id="9" name="Slide Number Placeholder 8">
             <a:extLst xmlns:a="http://schemas.openxmlformats.org/drawingml/2006/main">
               <a:ext uri="{FF2B5EF4-FFF2-40B4-BE49-F238E27FC236}">
-                <a16:creationId xmlns:a16="http://schemas.microsoft.com/office/drawing/2014/main" id="{20AB261C-0C70-49B8-8FC1-355A6657FCCE}"/>
+                <a16:creationId xmlns:a16="http://schemas.microsoft.com/office/drawing/2014/main" id="{E087F3AB-FCE1-4601-AA6A-2014131049FD}"/>
               </a:ext>
             </a:extLst>
           </p:cNvPr>
@@ -3759,7 +3759,7 @@
           <p:cNvPr id="2" name="Title 1">
             <a:extLst xmlns:a="http://schemas.openxmlformats.org/drawingml/2006/main">
               <a:ext uri="{FF2B5EF4-FFF2-40B4-BE49-F238E27FC236}">
-                <a16:creationId xmlns:a16="http://schemas.microsoft.com/office/drawing/2014/main" id="{EE16D25B-9BC4-4889-A612-D0C822CC7934}"/>
+                <a16:creationId xmlns:a16="http://schemas.microsoft.com/office/drawing/2014/main" id="{B82282EA-EEC0-4BC7-8C1B-FFAED3E2D9F6}"/>
               </a:ext>
             </a:extLst>
           </p:cNvPr>
@@ -3786,7 +3786,7 @@
           <p:cNvPr id="3" name="Date Placeholder 2">
             <a:extLst xmlns:a="http://schemas.openxmlformats.org/drawingml/2006/main">
               <a:ext uri="{FF2B5EF4-FFF2-40B4-BE49-F238E27FC236}">
-                <a16:creationId xmlns:a16="http://schemas.microsoft.com/office/drawing/2014/main" id="{EB8D2F13-F2DF-43F4-A6C5-471F4AA01D39}"/>
+                <a16:creationId xmlns:a16="http://schemas.microsoft.com/office/drawing/2014/main" id="{46E54949-B929-4579-B8EA-69BE009AA9B8}"/>
               </a:ext>
             </a:extLst>
           </p:cNvPr>
@@ -3813,7 +3813,7 @@
           <p:cNvPr id="4" name="Footer Placeholder 3">
             <a:extLst xmlns:a="http://schemas.openxmlformats.org/drawingml/2006/main">
               <a:ext uri="{FF2B5EF4-FFF2-40B4-BE49-F238E27FC236}">
-                <a16:creationId xmlns:a16="http://schemas.microsoft.com/office/drawing/2014/main" id="{E775A571-53AA-49EF-8702-12D282947B99}"/>
+                <a16:creationId xmlns:a16="http://schemas.microsoft.com/office/drawing/2014/main" id="{DD637F32-0030-42BA-99E2-E466D80136CA}"/>
               </a:ext>
             </a:extLst>
           </p:cNvPr>
@@ -3836,7 +3836,7 @@
           <p:cNvPr id="5" name="Slide Number Placeholder 4">
             <a:extLst xmlns:a="http://schemas.openxmlformats.org/drawingml/2006/main">
               <a:ext uri="{FF2B5EF4-FFF2-40B4-BE49-F238E27FC236}">
-                <a16:creationId xmlns:a16="http://schemas.microsoft.com/office/drawing/2014/main" id="{EABA40EF-9E5C-4AC2-81C1-FA7A67C20997}"/>
+                <a16:creationId xmlns:a16="http://schemas.microsoft.com/office/drawing/2014/main" id="{47547B20-D702-4713-8358-0F54D4A9F6DF}"/>
               </a:ext>
             </a:extLst>
           </p:cNvPr>
@@ -3880,7 +3880,7 @@
           <p:cNvPr id="2" name="Date Placeholder 1">
             <a:extLst xmlns:a="http://schemas.openxmlformats.org/drawingml/2006/main">
               <a:ext uri="{FF2B5EF4-FFF2-40B4-BE49-F238E27FC236}">
-                <a16:creationId xmlns:a16="http://schemas.microsoft.com/office/drawing/2014/main" id="{4094A690-02B4-4A83-B0A5-A906969D9C92}"/>
+                <a16:creationId xmlns:a16="http://schemas.microsoft.com/office/drawing/2014/main" id="{670CD360-4A16-4F10-80E5-9BA5DCDD16E6}"/>
               </a:ext>
             </a:extLst>
           </p:cNvPr>
@@ -3907,7 +3907,7 @@
           <p:cNvPr id="3" name="Footer Placeholder 2">
             <a:extLst xmlns:a="http://schemas.openxmlformats.org/drawingml/2006/main">
               <a:ext uri="{FF2B5EF4-FFF2-40B4-BE49-F238E27FC236}">
-                <a16:creationId xmlns:a16="http://schemas.microsoft.com/office/drawing/2014/main" id="{57B9C898-77C9-4BCF-A4FB-9BAF1B381956}"/>
+                <a16:creationId xmlns:a16="http://schemas.microsoft.com/office/drawing/2014/main" id="{92E205A4-8E4C-425E-9F23-576375C36746}"/>
               </a:ext>
             </a:extLst>
           </p:cNvPr>
@@ -3930,7 +3930,7 @@
           <p:cNvPr id="4" name="Slide Number Placeholder 3">
             <a:extLst xmlns:a="http://schemas.openxmlformats.org/drawingml/2006/main">
               <a:ext uri="{FF2B5EF4-FFF2-40B4-BE49-F238E27FC236}">
-                <a16:creationId xmlns:a16="http://schemas.microsoft.com/office/drawing/2014/main" id="{B7837C9E-F5C5-4D48-B2B0-904F7EA960D2}"/>
+                <a16:creationId xmlns:a16="http://schemas.microsoft.com/office/drawing/2014/main" id="{3BE4F31E-816C-4E13-A175-40ADE07D9F6A}"/>
               </a:ext>
             </a:extLst>
           </p:cNvPr>
@@ -3974,7 +3974,7 @@
           <p:cNvPr id="2" name="Title 1">
             <a:extLst xmlns:a="http://schemas.openxmlformats.org/drawingml/2006/main">
               <a:ext uri="{FF2B5EF4-FFF2-40B4-BE49-F238E27FC236}">
-                <a16:creationId xmlns:a16="http://schemas.microsoft.com/office/drawing/2014/main" id="{EE71168D-5188-4B8F-8324-B6F8F4B16C30}"/>
+                <a16:creationId xmlns:a16="http://schemas.microsoft.com/office/drawing/2014/main" id="{FBCCE0EB-65F1-436B-B9C0-CEBC5C4B89F1}"/>
               </a:ext>
             </a:extLst>
           </p:cNvPr>
@@ -4011,7 +4011,7 @@
           <p:cNvPr id="3" name="Content Placeholder 2">
             <a:extLst xmlns:a="http://schemas.openxmlformats.org/drawingml/2006/main">
               <a:ext uri="{FF2B5EF4-FFF2-40B4-BE49-F238E27FC236}">
-                <a16:creationId xmlns:a16="http://schemas.microsoft.com/office/drawing/2014/main" id="{C8EBE475-AC83-4CB4-B027-E69CA349DF53}"/>
+                <a16:creationId xmlns:a16="http://schemas.microsoft.com/office/drawing/2014/main" id="{769178E1-D0C8-4551-8AAB-B6069ED3BF11}"/>
               </a:ext>
             </a:extLst>
           </p:cNvPr>
@@ -4115,7 +4115,7 @@
           <p:cNvPr id="4" name="Text Placeholder 3">
             <a:extLst xmlns:a="http://schemas.openxmlformats.org/drawingml/2006/main">
               <a:ext uri="{FF2B5EF4-FFF2-40B4-BE49-F238E27FC236}">
-                <a16:creationId xmlns:a16="http://schemas.microsoft.com/office/drawing/2014/main" id="{6E4B0F6C-375A-4B49-A823-A86BBB6B3ED9}"/>
+                <a16:creationId xmlns:a16="http://schemas.microsoft.com/office/drawing/2014/main" id="{A3890994-6925-4100-8805-E6CD3DD8AE0C}"/>
               </a:ext>
             </a:extLst>
           </p:cNvPr>
@@ -4187,7 +4187,7 @@
           <p:cNvPr id="5" name="Date Placeholder 4">
             <a:extLst xmlns:a="http://schemas.openxmlformats.org/drawingml/2006/main">
               <a:ext uri="{FF2B5EF4-FFF2-40B4-BE49-F238E27FC236}">
-                <a16:creationId xmlns:a16="http://schemas.microsoft.com/office/drawing/2014/main" id="{C7CC408F-DCA5-401F-920C-25E49EB286D5}"/>
+                <a16:creationId xmlns:a16="http://schemas.microsoft.com/office/drawing/2014/main" id="{EB58C475-B6A0-4346-B115-8332D7FA09CB}"/>
               </a:ext>
             </a:extLst>
           </p:cNvPr>
@@ -4214,7 +4214,7 @@
           <p:cNvPr id="6" name="Footer Placeholder 5">
             <a:extLst xmlns:a="http://schemas.openxmlformats.org/drawingml/2006/main">
               <a:ext uri="{FF2B5EF4-FFF2-40B4-BE49-F238E27FC236}">
-                <a16:creationId xmlns:a16="http://schemas.microsoft.com/office/drawing/2014/main" id="{206FE1A3-9184-45F6-B2C6-38E61AC6755C}"/>
+                <a16:creationId xmlns:a16="http://schemas.microsoft.com/office/drawing/2014/main" id="{D7A579F5-69A9-4BF5-8BBE-E560BAEEC857}"/>
               </a:ext>
             </a:extLst>
           </p:cNvPr>
@@ -4237,7 +4237,7 @@
           <p:cNvPr id="7" name="Slide Number Placeholder 6">
             <a:extLst xmlns:a="http://schemas.openxmlformats.org/drawingml/2006/main">
               <a:ext uri="{FF2B5EF4-FFF2-40B4-BE49-F238E27FC236}">
-                <a16:creationId xmlns:a16="http://schemas.microsoft.com/office/drawing/2014/main" id="{D01F1D1C-0A3C-48CF-8B03-3505FF10FC46}"/>
+                <a16:creationId xmlns:a16="http://schemas.microsoft.com/office/drawing/2014/main" id="{905A2040-6B29-4129-8B92-3BE61DD83125}"/>
               </a:ext>
             </a:extLst>
           </p:cNvPr>
@@ -4281,7 +4281,7 @@
           <p:cNvPr id="2" name="Title 1">
             <a:extLst xmlns:a="http://schemas.openxmlformats.org/drawingml/2006/main">
               <a:ext uri="{FF2B5EF4-FFF2-40B4-BE49-F238E27FC236}">
-                <a16:creationId xmlns:a16="http://schemas.microsoft.com/office/drawing/2014/main" id="{6C2EAB8A-1BFF-4337-B288-4DC8F398F33A}"/>
+                <a16:creationId xmlns:a16="http://schemas.microsoft.com/office/drawing/2014/main" id="{6ED73E0D-CF4B-4439-9AD5-4268EAE70CF4}"/>
               </a:ext>
             </a:extLst>
           </p:cNvPr>
@@ -4318,7 +4318,7 @@
           <p:cNvPr id="3" name="Picture Placeholder 2">
             <a:extLst xmlns:a="http://schemas.openxmlformats.org/drawingml/2006/main">
               <a:ext uri="{FF2B5EF4-FFF2-40B4-BE49-F238E27FC236}">
-                <a16:creationId xmlns:a16="http://schemas.microsoft.com/office/drawing/2014/main" id="{3B00B9E8-677B-4AC1-929E-98C3043A9205}"/>
+                <a16:creationId xmlns:a16="http://schemas.microsoft.com/office/drawing/2014/main" id="{E0DF9B4E-F101-445D-B83E-81E2A9ED629E}"/>
               </a:ext>
             </a:extLst>
           </p:cNvPr>
@@ -4383,7 +4383,7 @@
           <p:cNvPr id="4" name="Text Placeholder 3">
             <a:extLst xmlns:a="http://schemas.openxmlformats.org/drawingml/2006/main">
               <a:ext uri="{FF2B5EF4-FFF2-40B4-BE49-F238E27FC236}">
-                <a16:creationId xmlns:a16="http://schemas.microsoft.com/office/drawing/2014/main" id="{E2B2086B-4208-49C2-AE39-AE41D08330FA}"/>
+                <a16:creationId xmlns:a16="http://schemas.microsoft.com/office/drawing/2014/main" id="{FD046CE0-D5E3-4AB1-8178-759FE111B078}"/>
               </a:ext>
             </a:extLst>
           </p:cNvPr>
@@ -4455,7 +4455,7 @@
           <p:cNvPr id="5" name="Date Placeholder 4">
             <a:extLst xmlns:a="http://schemas.openxmlformats.org/drawingml/2006/main">
               <a:ext uri="{FF2B5EF4-FFF2-40B4-BE49-F238E27FC236}">
-                <a16:creationId xmlns:a16="http://schemas.microsoft.com/office/drawing/2014/main" id="{32333FE9-265A-483C-AD56-64FE5BFA8535}"/>
+                <a16:creationId xmlns:a16="http://schemas.microsoft.com/office/drawing/2014/main" id="{34813885-8BB0-465E-AC4A-21A385902953}"/>
               </a:ext>
             </a:extLst>
           </p:cNvPr>
@@ -4482,7 +4482,7 @@
           <p:cNvPr id="6" name="Footer Placeholder 5">
             <a:extLst xmlns:a="http://schemas.openxmlformats.org/drawingml/2006/main">
               <a:ext uri="{FF2B5EF4-FFF2-40B4-BE49-F238E27FC236}">
-                <a16:creationId xmlns:a16="http://schemas.microsoft.com/office/drawing/2014/main" id="{18B5970F-5116-41A1-8C47-22F8BAE50877}"/>
+                <a16:creationId xmlns:a16="http://schemas.microsoft.com/office/drawing/2014/main" id="{6C292F6B-3A4B-4DCA-8D3B-7E75143A1B2E}"/>
               </a:ext>
             </a:extLst>
           </p:cNvPr>
@@ -4505,7 +4505,7 @@
           <p:cNvPr id="7" name="Slide Number Placeholder 6">
             <a:extLst xmlns:a="http://schemas.openxmlformats.org/drawingml/2006/main">
               <a:ext uri="{FF2B5EF4-FFF2-40B4-BE49-F238E27FC236}">
-                <a16:creationId xmlns:a16="http://schemas.microsoft.com/office/drawing/2014/main" id="{9A5BE2F2-ABF8-4882-9584-0539C34F7B6C}"/>
+                <a16:creationId xmlns:a16="http://schemas.microsoft.com/office/drawing/2014/main" id="{CAD8FD78-AAD3-4521-9904-B000AE40D093}"/>
               </a:ext>
             </a:extLst>
           </p:cNvPr>
@@ -4554,7 +4554,7 @@
           <p:cNvPr id="2" name="Title Placeholder 1">
             <a:extLst xmlns:a="http://schemas.openxmlformats.org/drawingml/2006/main">
               <a:ext uri="{FF2B5EF4-FFF2-40B4-BE49-F238E27FC236}">
-                <a16:creationId xmlns:a16="http://schemas.microsoft.com/office/drawing/2014/main" id="{C4CFA039-3821-4F1F-9937-7922A0F1F8E0}"/>
+                <a16:creationId xmlns:a16="http://schemas.microsoft.com/office/drawing/2014/main" id="{60B704CE-4EA7-44F5-A2F2-C1F321F235D0}"/>
               </a:ext>
             </a:extLst>
           </p:cNvPr>
@@ -4591,7 +4591,7 @@
           <p:cNvPr id="3" name="Text Placeholder 2">
             <a:extLst xmlns:a="http://schemas.openxmlformats.org/drawingml/2006/main">
               <a:ext uri="{FF2B5EF4-FFF2-40B4-BE49-F238E27FC236}">
-                <a16:creationId xmlns:a16="http://schemas.microsoft.com/office/drawing/2014/main" id="{B03793AB-D811-4DD1-9C81-115ACDA14405}"/>
+                <a16:creationId xmlns:a16="http://schemas.microsoft.com/office/drawing/2014/main" id="{602C9CA6-D155-411C-AD13-68A1FC65B7E6}"/>
               </a:ext>
             </a:extLst>
           </p:cNvPr>
@@ -4663,7 +4663,7 @@
           <p:cNvPr id="4" name="Date Placeholder 3">
             <a:extLst xmlns:a="http://schemas.openxmlformats.org/drawingml/2006/main">
               <a:ext uri="{FF2B5EF4-FFF2-40B4-BE49-F238E27FC236}">
-                <a16:creationId xmlns:a16="http://schemas.microsoft.com/office/drawing/2014/main" id="{91F3F6C4-FD95-4AA6-B247-99FB3AF174A2}"/>
+                <a16:creationId xmlns:a16="http://schemas.microsoft.com/office/drawing/2014/main" id="{A6E49E4C-20AE-4898-ADFA-F815140F1A22}"/>
               </a:ext>
             </a:extLst>
           </p:cNvPr>
@@ -4709,7 +4709,7 @@
           <p:cNvPr id="5" name="Footer Placeholder 4">
             <a:extLst xmlns:a="http://schemas.openxmlformats.org/drawingml/2006/main">
               <a:ext uri="{FF2B5EF4-FFF2-40B4-BE49-F238E27FC236}">
-                <a16:creationId xmlns:a16="http://schemas.microsoft.com/office/drawing/2014/main" id="{F8F58F7B-0C63-4C42-8509-A89A3914D6DD}"/>
+                <a16:creationId xmlns:a16="http://schemas.microsoft.com/office/drawing/2014/main" id="{5D8696B9-0FF4-4486-8B4B-943C93DA7E3B}"/>
               </a:ext>
             </a:extLst>
           </p:cNvPr>
@@ -4751,7 +4751,7 @@
           <p:cNvPr id="6" name="Slide Number Placeholder 5">
             <a:extLst xmlns:a="http://schemas.openxmlformats.org/drawingml/2006/main">
               <a:ext uri="{FF2B5EF4-FFF2-40B4-BE49-F238E27FC236}">
-                <a16:creationId xmlns:a16="http://schemas.microsoft.com/office/drawing/2014/main" id="{7615E8BC-8578-4EE0-B324-2A7DCD718580}"/>
+                <a16:creationId xmlns:a16="http://schemas.microsoft.com/office/drawing/2014/main" id="{B029E00E-43B0-4ABE-9FC8-BC60B048B6BD}"/>
               </a:ext>
             </a:extLst>
           </p:cNvPr>
@@ -4796,17 +4796,17 @@
   </p:cSld>
   <p:clrMap bg1="lt1" tx1="dk1" bg2="lt2" tx2="dk2" accent1="accent1" accent2="accent2" accent3="accent3" accent4="accent4" accent5="accent5" accent6="accent6" hlink="hlink" folHlink="folHlink"/>
   <p:sldLayoutIdLst>
-    <p:sldLayoutId xmlns:r="http://schemas.openxmlformats.org/officeDocument/2006/relationships" id="2147483649" r:id="R44b710c4991644d8"/>
-    <p:sldLayoutId xmlns:r="http://schemas.openxmlformats.org/officeDocument/2006/relationships" id="2147483650" r:id="R64377f5cb9cc427d"/>
-    <p:sldLayoutId xmlns:r="http://schemas.openxmlformats.org/officeDocument/2006/relationships" id="2147483651" r:id="Rbfeaae1145544e77"/>
-    <p:sldLayoutId xmlns:r="http://schemas.openxmlformats.org/officeDocument/2006/relationships" id="2147483652" r:id="Rb4f618e15a5142e5"/>
-    <p:sldLayoutId xmlns:r="http://schemas.openxmlformats.org/officeDocument/2006/relationships" id="2147483653" r:id="R3868c44e4e974234"/>
-    <p:sldLayoutId xmlns:r="http://schemas.openxmlformats.org/officeDocument/2006/relationships" id="2147483654" r:id="Rd771a99da3ca466f"/>
-    <p:sldLayoutId xmlns:r="http://schemas.openxmlformats.org/officeDocument/2006/relationships" id="2147483655" r:id="Raf388aca9221411f"/>
-    <p:sldLayoutId xmlns:r="http://schemas.openxmlformats.org/officeDocument/2006/relationships" id="2147483656" r:id="Rdd4ba8d454b447dc"/>
-    <p:sldLayoutId xmlns:r="http://schemas.openxmlformats.org/officeDocument/2006/relationships" id="2147483657" r:id="R99abad4dd0db4967"/>
-    <p:sldLayoutId xmlns:r="http://schemas.openxmlformats.org/officeDocument/2006/relationships" id="2147483658" r:id="R70ece92ad32d432c"/>
-    <p:sldLayoutId xmlns:r="http://schemas.openxmlformats.org/officeDocument/2006/relationships" id="2147483659" r:id="R0f4e0f84780048eb"/>
+    <p:sldLayoutId xmlns:r="http://schemas.openxmlformats.org/officeDocument/2006/relationships" id="2147483649" r:id="R3f40161963e04a82"/>
+    <p:sldLayoutId xmlns:r="http://schemas.openxmlformats.org/officeDocument/2006/relationships" id="2147483650" r:id="Re1a0057192a04125"/>
+    <p:sldLayoutId xmlns:r="http://schemas.openxmlformats.org/officeDocument/2006/relationships" id="2147483651" r:id="Ra2d48133d6dc4ab7"/>
+    <p:sldLayoutId xmlns:r="http://schemas.openxmlformats.org/officeDocument/2006/relationships" id="2147483652" r:id="R5560b8b4643446a3"/>
+    <p:sldLayoutId xmlns:r="http://schemas.openxmlformats.org/officeDocument/2006/relationships" id="2147483653" r:id="Rd022e81f8ff04206"/>
+    <p:sldLayoutId xmlns:r="http://schemas.openxmlformats.org/officeDocument/2006/relationships" id="2147483654" r:id="Reba5a9417bc64abe"/>
+    <p:sldLayoutId xmlns:r="http://schemas.openxmlformats.org/officeDocument/2006/relationships" id="2147483655" r:id="R71b6e898975b4f41"/>
+    <p:sldLayoutId xmlns:r="http://schemas.openxmlformats.org/officeDocument/2006/relationships" id="2147483656" r:id="R255ff7a1d89c4f3c"/>
+    <p:sldLayoutId xmlns:r="http://schemas.openxmlformats.org/officeDocument/2006/relationships" id="2147483657" r:id="R07f11848d2984c50"/>
+    <p:sldLayoutId xmlns:r="http://schemas.openxmlformats.org/officeDocument/2006/relationships" id="2147483658" r:id="R3a0443c831c54d19"/>
+    <p:sldLayoutId xmlns:r="http://schemas.openxmlformats.org/officeDocument/2006/relationships" id="2147483659" r:id="R078c3798e5914e4a"/>
   </p:sldLayoutIdLst>
   <p:txStyles>
     <p:titleStyle>
@@ -5359,7 +5359,7 @@
           <p:cNvPr id="2" name="Rectangle 1">
             <a:extLst xmlns:a="http://schemas.openxmlformats.org/drawingml/2006/main">
               <a:ext uri="{FF2B5EF4-FFF2-40B4-BE49-F238E27FC236}">
-                <a16:creationId xmlns:a16="http://schemas.microsoft.com/office/drawing/2014/main" id="{ABE58277-8385-4459-8838-524F152A640D}"/>
+                <a16:creationId xmlns:a16="http://schemas.microsoft.com/office/drawing/2014/main" id="{AF58786A-A2BB-4921-9E55-A9424BE26E8C}"/>
               </a:ext>
             </a:extLst>
           </p:cNvPr>
@@ -5414,7 +5414,7 @@
           <p:cNvPr id="3" name="TextBox 2">
             <a:extLst xmlns:a="http://schemas.openxmlformats.org/drawingml/2006/main">
               <a:ext uri="{FF2B5EF4-FFF2-40B4-BE49-F238E27FC236}">
-                <a16:creationId xmlns:a16="http://schemas.microsoft.com/office/drawing/2014/main" id="{97CEA41A-5952-452E-8EAD-E216D92D01E7}"/>
+                <a16:creationId xmlns:a16="http://schemas.microsoft.com/office/drawing/2014/main" id="{F16D6A16-1563-4851-8ED6-3BE528181BEE}"/>
               </a:ext>
             </a:extLst>
           </p:cNvPr>
@@ -5461,7 +5461,7 @@
           <p:cNvPr id="4" name="TextBox 3">
             <a:extLst xmlns:a="http://schemas.openxmlformats.org/drawingml/2006/main">
               <a:ext uri="{FF2B5EF4-FFF2-40B4-BE49-F238E27FC236}">
-                <a16:creationId xmlns:a16="http://schemas.microsoft.com/office/drawing/2014/main" id="{7AD9D67F-D308-440E-9ACE-046EA4BDB6D9}"/>
+                <a16:creationId xmlns:a16="http://schemas.microsoft.com/office/drawing/2014/main" id="{FEBA0398-C69B-4185-8A45-19D6343D7376}"/>
               </a:ext>
             </a:extLst>
           </p:cNvPr>
@@ -5509,7 +5509,7 @@
           <p:cNvPr id="5" name="TextBox 4">
             <a:extLst xmlns:a="http://schemas.openxmlformats.org/drawingml/2006/main">
               <a:ext uri="{FF2B5EF4-FFF2-40B4-BE49-F238E27FC236}">
-                <a16:creationId xmlns:a16="http://schemas.microsoft.com/office/drawing/2014/main" id="{12E0DAD0-47E8-45A5-B6CA-D6F885D78421}"/>
+                <a16:creationId xmlns:a16="http://schemas.microsoft.com/office/drawing/2014/main" id="{07DF4125-6E47-4053-8EA1-319DA01D442F}"/>
               </a:ext>
             </a:extLst>
           </p:cNvPr>
@@ -5556,7 +5556,7 @@
           <p:cNvPr id="6" name="Rectangle 5">
             <a:extLst xmlns:a="http://schemas.openxmlformats.org/drawingml/2006/main">
               <a:ext uri="{FF2B5EF4-FFF2-40B4-BE49-F238E27FC236}">
-                <a16:creationId xmlns:a16="http://schemas.microsoft.com/office/drawing/2014/main" id="{F8E81F04-1C12-452D-A59D-7AB4C219D7D8}"/>
+                <a16:creationId xmlns:a16="http://schemas.microsoft.com/office/drawing/2014/main" id="{4FBAD4C5-C30A-40D3-99D4-F2BE0A377906}"/>
               </a:ext>
             </a:extLst>
           </p:cNvPr>
@@ -5611,7 +5611,7 @@
           <p:cNvPr id="7" name="TextBox 6">
             <a:extLst xmlns:a="http://schemas.openxmlformats.org/drawingml/2006/main">
               <a:ext uri="{FF2B5EF4-FFF2-40B4-BE49-F238E27FC236}">
-                <a16:creationId xmlns:a16="http://schemas.microsoft.com/office/drawing/2014/main" id="{6E374586-8403-4F49-9C4A-1614FCC1CB97}"/>
+                <a16:creationId xmlns:a16="http://schemas.microsoft.com/office/drawing/2014/main" id="{3F98A473-3BA5-4E62-9BE0-E4D6F70E50D5}"/>
               </a:ext>
             </a:extLst>
           </p:cNvPr>
@@ -5658,7 +5658,7 @@
           <p:cNvPr id="8" name="TextBox 7">
             <a:extLst xmlns:a="http://schemas.openxmlformats.org/drawingml/2006/main">
               <a:ext uri="{FF2B5EF4-FFF2-40B4-BE49-F238E27FC236}">
-                <a16:creationId xmlns:a16="http://schemas.microsoft.com/office/drawing/2014/main" id="{178182E8-EECE-474C-9F1A-4900BBD896BB}"/>
+                <a16:creationId xmlns:a16="http://schemas.microsoft.com/office/drawing/2014/main" id="{6B282DFF-E335-44AE-A9F4-BD3908EDFE65}"/>
               </a:ext>
             </a:extLst>
           </p:cNvPr>
@@ -5705,7 +5705,7 @@
           <p:cNvPr id="9" name="TextBox 8">
             <a:extLst xmlns:a="http://schemas.openxmlformats.org/drawingml/2006/main">
               <a:ext uri="{FF2B5EF4-FFF2-40B4-BE49-F238E27FC236}">
-                <a16:creationId xmlns:a16="http://schemas.microsoft.com/office/drawing/2014/main" id="{2D15D220-54D2-4C0B-9DAC-864C9E2B83AE}"/>
+                <a16:creationId xmlns:a16="http://schemas.microsoft.com/office/drawing/2014/main" id="{0A1EE518-06A1-4086-80B5-49D0C1B6A702}"/>
               </a:ext>
             </a:extLst>
           </p:cNvPr>
@@ -5773,7 +5773,7 @@
           <p:cNvPr id="10" name="TextBox 9">
             <a:extLst xmlns:a="http://schemas.openxmlformats.org/drawingml/2006/main">
               <a:ext uri="{FF2B5EF4-FFF2-40B4-BE49-F238E27FC236}">
-                <a16:creationId xmlns:a16="http://schemas.microsoft.com/office/drawing/2014/main" id="{62E04342-2011-490D-81D1-0F1B1724091F}"/>
+                <a16:creationId xmlns:a16="http://schemas.microsoft.com/office/drawing/2014/main" id="{507EFAC1-3F1D-47FA-BB7A-21D6BCBA89E0}"/>
               </a:ext>
             </a:extLst>
           </p:cNvPr>
@@ -5820,7 +5820,7 @@
           <p:cNvPr id="11" name="TextBox 10">
             <a:extLst xmlns:a="http://schemas.openxmlformats.org/drawingml/2006/main">
               <a:ext uri="{FF2B5EF4-FFF2-40B4-BE49-F238E27FC236}">
-                <a16:creationId xmlns:a16="http://schemas.microsoft.com/office/drawing/2014/main" id="{C52980D2-4E63-47FA-95A3-F0E280A4A59F}"/>
+                <a16:creationId xmlns:a16="http://schemas.microsoft.com/office/drawing/2014/main" id="{267345D6-E76E-430B-8856-1249557104BB}"/>
               </a:ext>
             </a:extLst>
           </p:cNvPr>
@@ -5867,7 +5867,7 @@
           <p:cNvPr id="12" name="TextBox 11">
             <a:extLst xmlns:a="http://schemas.openxmlformats.org/drawingml/2006/main">
               <a:ext uri="{FF2B5EF4-FFF2-40B4-BE49-F238E27FC236}">
-                <a16:creationId xmlns:a16="http://schemas.microsoft.com/office/drawing/2014/main" id="{C5AD4FDB-4E2D-49F6-BCCA-203991622115}"/>
+                <a16:creationId xmlns:a16="http://schemas.microsoft.com/office/drawing/2014/main" id="{8F206651-948D-4BF6-9C8B-D117338A8BE4}"/>
               </a:ext>
             </a:extLst>
           </p:cNvPr>
@@ -5912,7 +5912,7 @@
     </p:spTree>
     <p:extLst>
       <p:ext uri="{BB962C8B-B14F-4D97-AF65-F5344CB8AC3E}">
-        <p14:creationId xmlns:p14="http://schemas.microsoft.com/office/powerpoint/2010/main" val="890641518"/>
+        <p14:creationId xmlns:p14="http://schemas.microsoft.com/office/powerpoint/2010/main" val="813462376"/>
       </p:ext>
     </p:extLst>
   </p:cSld>
@@ -5936,7 +5936,7 @@
           <p:cNvPr id="2" name="TextBox 1">
             <a:extLst xmlns:a="http://schemas.openxmlformats.org/drawingml/2006/main">
               <a:ext uri="{FF2B5EF4-FFF2-40B4-BE49-F238E27FC236}">
-                <a16:creationId xmlns:a16="http://schemas.microsoft.com/office/drawing/2014/main" id="{BDF083A0-3A91-41AD-8635-39536C1711F1}"/>
+                <a16:creationId xmlns:a16="http://schemas.microsoft.com/office/drawing/2014/main" id="{2848318B-2D58-470D-AD7C-E7FA688F5CD1}"/>
               </a:ext>
             </a:extLst>
           </p:cNvPr>
@@ -5983,7 +5983,7 @@
           <p:cNvPr id="3" name="TextBox 2">
             <a:extLst xmlns:a="http://schemas.openxmlformats.org/drawingml/2006/main">
               <a:ext uri="{FF2B5EF4-FFF2-40B4-BE49-F238E27FC236}">
-                <a16:creationId xmlns:a16="http://schemas.microsoft.com/office/drawing/2014/main" id="{1FC9BFA3-E3D0-4444-9865-0544390D40EE}"/>
+                <a16:creationId xmlns:a16="http://schemas.microsoft.com/office/drawing/2014/main" id="{A216D802-21E2-491F-B41C-90EA93C8782A}"/>
               </a:ext>
             </a:extLst>
           </p:cNvPr>
@@ -6030,7 +6030,7 @@
           <p:cNvPr id="4" name="Rectangle 3">
             <a:extLst xmlns:a="http://schemas.openxmlformats.org/drawingml/2006/main">
               <a:ext uri="{FF2B5EF4-FFF2-40B4-BE49-F238E27FC236}">
-                <a16:creationId xmlns:a16="http://schemas.microsoft.com/office/drawing/2014/main" id="{0F39260D-F248-4EE1-B6D0-66A3772F0372}"/>
+                <a16:creationId xmlns:a16="http://schemas.microsoft.com/office/drawing/2014/main" id="{6D195B96-2FEF-48D6-B5F6-E0E8EEEFC189}"/>
               </a:ext>
             </a:extLst>
           </p:cNvPr>
@@ -6085,7 +6085,7 @@
           <p:cNvPr id="5" name="Rectangle 4">
             <a:extLst xmlns:a="http://schemas.openxmlformats.org/drawingml/2006/main">
               <a:ext uri="{FF2B5EF4-FFF2-40B4-BE49-F238E27FC236}">
-                <a16:creationId xmlns:a16="http://schemas.microsoft.com/office/drawing/2014/main" id="{E49C3FBA-4919-44D6-9275-CD622B59885C}"/>
+                <a16:creationId xmlns:a16="http://schemas.microsoft.com/office/drawing/2014/main" id="{71969086-7A07-4B20-85D7-3D11230111E0}"/>
               </a:ext>
             </a:extLst>
           </p:cNvPr>
@@ -6140,7 +6140,7 @@
           <p:cNvPr id="6" name="TextBox 5">
             <a:extLst xmlns:a="http://schemas.openxmlformats.org/drawingml/2006/main">
               <a:ext uri="{FF2B5EF4-FFF2-40B4-BE49-F238E27FC236}">
-                <a16:creationId xmlns:a16="http://schemas.microsoft.com/office/drawing/2014/main" id="{6820DB74-361A-426E-A8A3-84983F955A2A}"/>
+                <a16:creationId xmlns:a16="http://schemas.microsoft.com/office/drawing/2014/main" id="{45A6781B-8957-4A5D-B2B5-FE6BE9FE6680}"/>
               </a:ext>
             </a:extLst>
           </p:cNvPr>
@@ -6187,7 +6187,7 @@
           <p:cNvPr id="7" name="TextBox 6">
             <a:extLst xmlns:a="http://schemas.openxmlformats.org/drawingml/2006/main">
               <a:ext uri="{FF2B5EF4-FFF2-40B4-BE49-F238E27FC236}">
-                <a16:creationId xmlns:a16="http://schemas.microsoft.com/office/drawing/2014/main" id="{28C68511-A4B0-4B60-ACF6-96C4FF05FFCD}"/>
+                <a16:creationId xmlns:a16="http://schemas.microsoft.com/office/drawing/2014/main" id="{A09A2201-DB0E-4875-A314-991770DF4C2A}"/>
               </a:ext>
             </a:extLst>
           </p:cNvPr>
@@ -6234,7 +6234,7 @@
           <p:cNvPr id="8" name="TextBox 7">
             <a:extLst xmlns:a="http://schemas.openxmlformats.org/drawingml/2006/main">
               <a:ext uri="{FF2B5EF4-FFF2-40B4-BE49-F238E27FC236}">
-                <a16:creationId xmlns:a16="http://schemas.microsoft.com/office/drawing/2014/main" id="{DB43E7EE-2183-49BB-A22D-AED1C64DB02E}"/>
+                <a16:creationId xmlns:a16="http://schemas.microsoft.com/office/drawing/2014/main" id="{A947DD42-E46B-4870-82FC-1A4B89ECF6B9}"/>
               </a:ext>
             </a:extLst>
           </p:cNvPr>
@@ -6281,7 +6281,7 @@
           <p:cNvPr id="9" name="TextBox 8">
             <a:extLst xmlns:a="http://schemas.openxmlformats.org/drawingml/2006/main">
               <a:ext uri="{FF2B5EF4-FFF2-40B4-BE49-F238E27FC236}">
-                <a16:creationId xmlns:a16="http://schemas.microsoft.com/office/drawing/2014/main" id="{310011EF-C06C-465E-AA1F-EA9FCE6775C0}"/>
+                <a16:creationId xmlns:a16="http://schemas.microsoft.com/office/drawing/2014/main" id="{439C6AC1-7082-42F7-BA45-AB3C1DA9C267}"/>
               </a:ext>
             </a:extLst>
           </p:cNvPr>
@@ -6378,7 +6378,7 @@
           <p:cNvPr id="10" name="Rounded Rectangle 9">
             <a:extLst xmlns:a="http://schemas.openxmlformats.org/drawingml/2006/main">
               <a:ext uri="{FF2B5EF4-FFF2-40B4-BE49-F238E27FC236}">
-                <a16:creationId xmlns:a16="http://schemas.microsoft.com/office/drawing/2014/main" id="{C5D1B7BA-B10A-4DB0-A6AE-C9ADF3D249B1}"/>
+                <a16:creationId xmlns:a16="http://schemas.microsoft.com/office/drawing/2014/main" id="{5BDC0990-716A-4640-B4F0-168DF589EC98}"/>
               </a:ext>
             </a:extLst>
           </p:cNvPr>
@@ -6435,7 +6435,7 @@
           <p:cNvPr id="11" name="TextBox 10">
             <a:extLst xmlns:a="http://schemas.openxmlformats.org/drawingml/2006/main">
               <a:ext uri="{FF2B5EF4-FFF2-40B4-BE49-F238E27FC236}">
-                <a16:creationId xmlns:a16="http://schemas.microsoft.com/office/drawing/2014/main" id="{2CF63742-4DF0-4A3E-B3BF-3A3E9BCEB2A0}"/>
+                <a16:creationId xmlns:a16="http://schemas.microsoft.com/office/drawing/2014/main" id="{96FFC8BF-733B-40CB-BDC1-1EA6FBB7F1CB}"/>
               </a:ext>
             </a:extLst>
           </p:cNvPr>
@@ -6482,7 +6482,7 @@
           <p:cNvPr id="12" name="TextBox 11">
             <a:extLst xmlns:a="http://schemas.openxmlformats.org/drawingml/2006/main">
               <a:ext uri="{FF2B5EF4-FFF2-40B4-BE49-F238E27FC236}">
-                <a16:creationId xmlns:a16="http://schemas.microsoft.com/office/drawing/2014/main" id="{68B32C25-9A63-42B8-BB95-2D061579C2CF}"/>
+                <a16:creationId xmlns:a16="http://schemas.microsoft.com/office/drawing/2014/main" id="{B65AB046-CE42-4FA1-897A-A717331B35B1}"/>
               </a:ext>
             </a:extLst>
           </p:cNvPr>
@@ -6527,7 +6527,7 @@
     </p:spTree>
     <p:extLst>
       <p:ext uri="{BB962C8B-B14F-4D97-AF65-F5344CB8AC3E}">
-        <p14:creationId xmlns:p14="http://schemas.microsoft.com/office/powerpoint/2010/main" val="148688934"/>
+        <p14:creationId xmlns:p14="http://schemas.microsoft.com/office/powerpoint/2010/main" val="1273787546"/>
       </p:ext>
     </p:extLst>
   </p:cSld>
@@ -6551,7 +6551,7 @@
           <p:cNvPr id="2" name="TextBox 1">
             <a:extLst xmlns:a="http://schemas.openxmlformats.org/drawingml/2006/main">
               <a:ext uri="{FF2B5EF4-FFF2-40B4-BE49-F238E27FC236}">
-                <a16:creationId xmlns:a16="http://schemas.microsoft.com/office/drawing/2014/main" id="{93741F1F-ECB7-426C-AEB5-BC7A10E34A95}"/>
+                <a16:creationId xmlns:a16="http://schemas.microsoft.com/office/drawing/2014/main" id="{42C8EAB4-E70D-440D-8429-E2A99172B041}"/>
               </a:ext>
             </a:extLst>
           </p:cNvPr>
@@ -6598,7 +6598,7 @@
           <p:cNvPr id="3" name="TextBox 2">
             <a:extLst xmlns:a="http://schemas.openxmlformats.org/drawingml/2006/main">
               <a:ext uri="{FF2B5EF4-FFF2-40B4-BE49-F238E27FC236}">
-                <a16:creationId xmlns:a16="http://schemas.microsoft.com/office/drawing/2014/main" id="{64DB1A09-771E-4E9D-BA01-A3F36CDD286A}"/>
+                <a16:creationId xmlns:a16="http://schemas.microsoft.com/office/drawing/2014/main" id="{D2CE23F2-1C36-40D4-AC5C-EB0E82D5E3B7}"/>
               </a:ext>
             </a:extLst>
           </p:cNvPr>
@@ -6645,7 +6645,7 @@
           <p:cNvPr id="4" name="Rectangle 3">
             <a:extLst xmlns:a="http://schemas.openxmlformats.org/drawingml/2006/main">
               <a:ext uri="{FF2B5EF4-FFF2-40B4-BE49-F238E27FC236}">
-                <a16:creationId xmlns:a16="http://schemas.microsoft.com/office/drawing/2014/main" id="{5F55C901-E38B-4E6E-9D97-1AE472AD058E}"/>
+                <a16:creationId xmlns:a16="http://schemas.microsoft.com/office/drawing/2014/main" id="{94FDB89C-2D58-46AC-9768-B6DA4CEB4A43}"/>
               </a:ext>
             </a:extLst>
           </p:cNvPr>
@@ -6700,7 +6700,7 @@
           <p:cNvPr id="5" name="Rectangle 4">
             <a:extLst xmlns:a="http://schemas.openxmlformats.org/drawingml/2006/main">
               <a:ext uri="{FF2B5EF4-FFF2-40B4-BE49-F238E27FC236}">
-                <a16:creationId xmlns:a16="http://schemas.microsoft.com/office/drawing/2014/main" id="{3F1F7949-1D9E-402E-A899-1115CA6A037C}"/>
+                <a16:creationId xmlns:a16="http://schemas.microsoft.com/office/drawing/2014/main" id="{5274ACF5-29E4-48BC-8FDF-EDF9BF621CD1}"/>
               </a:ext>
             </a:extLst>
           </p:cNvPr>
@@ -6755,7 +6755,7 @@
           <p:cNvPr id="6" name="TextBox 5">
             <a:extLst xmlns:a="http://schemas.openxmlformats.org/drawingml/2006/main">
               <a:ext uri="{FF2B5EF4-FFF2-40B4-BE49-F238E27FC236}">
-                <a16:creationId xmlns:a16="http://schemas.microsoft.com/office/drawing/2014/main" id="{A234E384-C15D-4CB2-A6FC-AEC4490C08A4}"/>
+                <a16:creationId xmlns:a16="http://schemas.microsoft.com/office/drawing/2014/main" id="{9F8F95DE-5519-4F28-919D-0252AD3602F5}"/>
               </a:ext>
             </a:extLst>
           </p:cNvPr>
@@ -6802,7 +6802,7 @@
           <p:cNvPr id="7" name="TextBox 6">
             <a:extLst xmlns:a="http://schemas.openxmlformats.org/drawingml/2006/main">
               <a:ext uri="{FF2B5EF4-FFF2-40B4-BE49-F238E27FC236}">
-                <a16:creationId xmlns:a16="http://schemas.microsoft.com/office/drawing/2014/main" id="{ADB766E9-F282-4624-A6F2-D53896F8E186}"/>
+                <a16:creationId xmlns:a16="http://schemas.microsoft.com/office/drawing/2014/main" id="{A3A02698-AD9D-42FA-AFE2-F5412B6C17AC}"/>
               </a:ext>
             </a:extLst>
           </p:cNvPr>
@@ -6849,7 +6849,7 @@
           <p:cNvPr id="8" name="Rounded Rectangle 7">
             <a:extLst xmlns:a="http://schemas.openxmlformats.org/drawingml/2006/main">
               <a:ext uri="{FF2B5EF4-FFF2-40B4-BE49-F238E27FC236}">
-                <a16:creationId xmlns:a16="http://schemas.microsoft.com/office/drawing/2014/main" id="{DD7DFAAA-936E-49C2-BCC1-2C673532E852}"/>
+                <a16:creationId xmlns:a16="http://schemas.microsoft.com/office/drawing/2014/main" id="{99952BDB-09FA-4139-9713-A010E88F280A}"/>
               </a:ext>
             </a:extLst>
           </p:cNvPr>
@@ -6906,7 +6906,7 @@
           <p:cNvPr id="9" name="TextBox 8">
             <a:extLst xmlns:a="http://schemas.openxmlformats.org/drawingml/2006/main">
               <a:ext uri="{FF2B5EF4-FFF2-40B4-BE49-F238E27FC236}">
-                <a16:creationId xmlns:a16="http://schemas.microsoft.com/office/drawing/2014/main" id="{1C6DA5A1-8254-491A-A324-73AD5A7A409A}"/>
+                <a16:creationId xmlns:a16="http://schemas.microsoft.com/office/drawing/2014/main" id="{7B80285D-4A1F-4DBC-BF10-4726AA709C1C}"/>
               </a:ext>
             </a:extLst>
           </p:cNvPr>
@@ -6953,7 +6953,7 @@
           <p:cNvPr id="10" name="TextBox 9">
             <a:extLst xmlns:a="http://schemas.openxmlformats.org/drawingml/2006/main">
               <a:ext uri="{FF2B5EF4-FFF2-40B4-BE49-F238E27FC236}">
-                <a16:creationId xmlns:a16="http://schemas.microsoft.com/office/drawing/2014/main" id="{2351C972-090E-4A26-8750-86486C0B5157}"/>
+                <a16:creationId xmlns:a16="http://schemas.microsoft.com/office/drawing/2014/main" id="{77F4ECEE-5234-4454-8E20-BD28C303AEDA}"/>
               </a:ext>
             </a:extLst>
           </p:cNvPr>
@@ -7000,7 +7000,7 @@
           <p:cNvPr id="11" name="Rounded Rectangle 10">
             <a:extLst xmlns:a="http://schemas.openxmlformats.org/drawingml/2006/main">
               <a:ext uri="{FF2B5EF4-FFF2-40B4-BE49-F238E27FC236}">
-                <a16:creationId xmlns:a16="http://schemas.microsoft.com/office/drawing/2014/main" id="{17D2B538-8BB9-4C8D-85C1-46C0168424D3}"/>
+                <a16:creationId xmlns:a16="http://schemas.microsoft.com/office/drawing/2014/main" id="{521C509E-C85E-469F-B362-74AF00FA8126}"/>
               </a:ext>
             </a:extLst>
           </p:cNvPr>
@@ -7057,7 +7057,7 @@
           <p:cNvPr id="12" name="TextBox 11">
             <a:extLst xmlns:a="http://schemas.openxmlformats.org/drawingml/2006/main">
               <a:ext uri="{FF2B5EF4-FFF2-40B4-BE49-F238E27FC236}">
-                <a16:creationId xmlns:a16="http://schemas.microsoft.com/office/drawing/2014/main" id="{33267A26-9879-4604-8B69-099F4ABE7327}"/>
+                <a16:creationId xmlns:a16="http://schemas.microsoft.com/office/drawing/2014/main" id="{455298BE-7ADD-4EC5-BD36-AE65A943D3A1}"/>
               </a:ext>
             </a:extLst>
           </p:cNvPr>
@@ -7104,7 +7104,7 @@
           <p:cNvPr id="13" name="TextBox 12">
             <a:extLst xmlns:a="http://schemas.openxmlformats.org/drawingml/2006/main">
               <a:ext uri="{FF2B5EF4-FFF2-40B4-BE49-F238E27FC236}">
-                <a16:creationId xmlns:a16="http://schemas.microsoft.com/office/drawing/2014/main" id="{745A99D7-7126-4A91-990F-33EE27B6CCC3}"/>
+                <a16:creationId xmlns:a16="http://schemas.microsoft.com/office/drawing/2014/main" id="{8201CFA4-C341-4C64-9BC2-FD7BBC3D3543}"/>
               </a:ext>
             </a:extLst>
           </p:cNvPr>
@@ -7151,7 +7151,7 @@
           <p:cNvPr id="14" name="Rounded Rectangle 13">
             <a:extLst xmlns:a="http://schemas.openxmlformats.org/drawingml/2006/main">
               <a:ext uri="{FF2B5EF4-FFF2-40B4-BE49-F238E27FC236}">
-                <a16:creationId xmlns:a16="http://schemas.microsoft.com/office/drawing/2014/main" id="{B79039D8-F7B8-41E5-9CF7-6C10DE461969}"/>
+                <a16:creationId xmlns:a16="http://schemas.microsoft.com/office/drawing/2014/main" id="{8902DE03-EB2B-403A-9BDF-79021E185217}"/>
               </a:ext>
             </a:extLst>
           </p:cNvPr>
@@ -7208,7 +7208,7 @@
           <p:cNvPr id="15" name="TextBox 14">
             <a:extLst xmlns:a="http://schemas.openxmlformats.org/drawingml/2006/main">
               <a:ext uri="{FF2B5EF4-FFF2-40B4-BE49-F238E27FC236}">
-                <a16:creationId xmlns:a16="http://schemas.microsoft.com/office/drawing/2014/main" id="{B846BC41-CE76-4D93-B13F-E56375D857B1}"/>
+                <a16:creationId xmlns:a16="http://schemas.microsoft.com/office/drawing/2014/main" id="{2A29E5B1-128A-466F-87EC-6E5C2D3927EC}"/>
               </a:ext>
             </a:extLst>
           </p:cNvPr>
@@ -7255,7 +7255,7 @@
           <p:cNvPr id="16" name="TextBox 15">
             <a:extLst xmlns:a="http://schemas.openxmlformats.org/drawingml/2006/main">
               <a:ext uri="{FF2B5EF4-FFF2-40B4-BE49-F238E27FC236}">
-                <a16:creationId xmlns:a16="http://schemas.microsoft.com/office/drawing/2014/main" id="{FBE8605A-E245-4EE8-B692-678C1E60A9B1}"/>
+                <a16:creationId xmlns:a16="http://schemas.microsoft.com/office/drawing/2014/main" id="{C2438E7C-A8C9-447E-8E9D-5EF23FA200A1}"/>
               </a:ext>
             </a:extLst>
           </p:cNvPr>
@@ -7302,7 +7302,7 @@
           <p:cNvPr id="17" name="TextBox 16">
             <a:extLst xmlns:a="http://schemas.openxmlformats.org/drawingml/2006/main">
               <a:ext uri="{FF2B5EF4-FFF2-40B4-BE49-F238E27FC236}">
-                <a16:creationId xmlns:a16="http://schemas.microsoft.com/office/drawing/2014/main" id="{3B4E7D46-D008-49E1-957D-9A48DDC2BC49}"/>
+                <a16:creationId xmlns:a16="http://schemas.microsoft.com/office/drawing/2014/main" id="{BA73BD3A-D789-4226-AFE5-3D6C519F030B}"/>
               </a:ext>
             </a:extLst>
           </p:cNvPr>
@@ -7349,7 +7349,7 @@
           <p:cNvPr id="18" name="Rounded Rectangle 17">
             <a:extLst xmlns:a="http://schemas.openxmlformats.org/drawingml/2006/main">
               <a:ext uri="{FF2B5EF4-FFF2-40B4-BE49-F238E27FC236}">
-                <a16:creationId xmlns:a16="http://schemas.microsoft.com/office/drawing/2014/main" id="{813F8653-FDFD-4AD6-B8A1-3A11B28DE249}"/>
+                <a16:creationId xmlns:a16="http://schemas.microsoft.com/office/drawing/2014/main" id="{CF478FE3-7589-4BB5-B221-2152DE47C33B}"/>
               </a:ext>
             </a:extLst>
           </p:cNvPr>
@@ -7406,7 +7406,7 @@
           <p:cNvPr id="19" name="TextBox 18">
             <a:extLst xmlns:a="http://schemas.openxmlformats.org/drawingml/2006/main">
               <a:ext uri="{FF2B5EF4-FFF2-40B4-BE49-F238E27FC236}">
-                <a16:creationId xmlns:a16="http://schemas.microsoft.com/office/drawing/2014/main" id="{EDC58597-3F66-47D4-B387-8F05D097D42E}"/>
+                <a16:creationId xmlns:a16="http://schemas.microsoft.com/office/drawing/2014/main" id="{8934583A-3F7C-4154-BB53-ED634E6B633B}"/>
               </a:ext>
             </a:extLst>
           </p:cNvPr>
@@ -7453,7 +7453,7 @@
           <p:cNvPr id="20" name="TextBox 19">
             <a:extLst xmlns:a="http://schemas.openxmlformats.org/drawingml/2006/main">
               <a:ext uri="{FF2B5EF4-FFF2-40B4-BE49-F238E27FC236}">
-                <a16:creationId xmlns:a16="http://schemas.microsoft.com/office/drawing/2014/main" id="{1F9AB5B8-69AF-403A-B008-EAC0969511EF}"/>
+                <a16:creationId xmlns:a16="http://schemas.microsoft.com/office/drawing/2014/main" id="{A8102184-6803-4CA5-9ACA-645CDA92BA7B}"/>
               </a:ext>
             </a:extLst>
           </p:cNvPr>
@@ -7498,7 +7498,7 @@
     </p:spTree>
     <p:extLst>
       <p:ext uri="{BB962C8B-B14F-4D97-AF65-F5344CB8AC3E}">
-        <p14:creationId xmlns:p14="http://schemas.microsoft.com/office/powerpoint/2010/main" val="595591740"/>
+        <p14:creationId xmlns:p14="http://schemas.microsoft.com/office/powerpoint/2010/main" val="838133396"/>
       </p:ext>
     </p:extLst>
   </p:cSld>
@@ -7522,7 +7522,7 @@
           <p:cNvPr id="2" name="TextBox 1">
             <a:extLst xmlns:a="http://schemas.openxmlformats.org/drawingml/2006/main">
               <a:ext uri="{FF2B5EF4-FFF2-40B4-BE49-F238E27FC236}">
-                <a16:creationId xmlns:a16="http://schemas.microsoft.com/office/drawing/2014/main" id="{53687421-5A62-4D84-908C-DBD8230EDDFC}"/>
+                <a16:creationId xmlns:a16="http://schemas.microsoft.com/office/drawing/2014/main" id="{AC455D1E-7606-4BAE-82D0-722CEF750905}"/>
               </a:ext>
             </a:extLst>
           </p:cNvPr>
@@ -7569,7 +7569,7 @@
           <p:cNvPr id="3" name="TextBox 2">
             <a:extLst xmlns:a="http://schemas.openxmlformats.org/drawingml/2006/main">
               <a:ext uri="{FF2B5EF4-FFF2-40B4-BE49-F238E27FC236}">
-                <a16:creationId xmlns:a16="http://schemas.microsoft.com/office/drawing/2014/main" id="{4C270AFF-E63B-4411-B58C-294C40E3F748}"/>
+                <a16:creationId xmlns:a16="http://schemas.microsoft.com/office/drawing/2014/main" id="{107CFEF0-6800-4E07-9373-9AD4AF3CEDED}"/>
               </a:ext>
             </a:extLst>
           </p:cNvPr>
@@ -7616,7 +7616,7 @@
           <p:cNvPr id="4" name="Rectangle 3">
             <a:extLst xmlns:a="http://schemas.openxmlformats.org/drawingml/2006/main">
               <a:ext uri="{FF2B5EF4-FFF2-40B4-BE49-F238E27FC236}">
-                <a16:creationId xmlns:a16="http://schemas.microsoft.com/office/drawing/2014/main" id="{7559A1EA-C1BF-47C0-985D-19F190DF090B}"/>
+                <a16:creationId xmlns:a16="http://schemas.microsoft.com/office/drawing/2014/main" id="{D9F71614-2CE0-4DF2-A577-F8B650935362}"/>
               </a:ext>
             </a:extLst>
           </p:cNvPr>
@@ -7671,7 +7671,7 @@
           <p:cNvPr id="5" name="Rectangle 4">
             <a:extLst xmlns:a="http://schemas.openxmlformats.org/drawingml/2006/main">
               <a:ext uri="{FF2B5EF4-FFF2-40B4-BE49-F238E27FC236}">
-                <a16:creationId xmlns:a16="http://schemas.microsoft.com/office/drawing/2014/main" id="{241464BD-9010-4143-B2B0-AD076412FC29}"/>
+                <a16:creationId xmlns:a16="http://schemas.microsoft.com/office/drawing/2014/main" id="{D0143BE9-48AC-42E8-9371-B65E9D4213F4}"/>
               </a:ext>
             </a:extLst>
           </p:cNvPr>
@@ -7726,7 +7726,7 @@
           <p:cNvPr id="6" name="TextBox 5">
             <a:extLst xmlns:a="http://schemas.openxmlformats.org/drawingml/2006/main">
               <a:ext uri="{FF2B5EF4-FFF2-40B4-BE49-F238E27FC236}">
-                <a16:creationId xmlns:a16="http://schemas.microsoft.com/office/drawing/2014/main" id="{A3B84842-8028-4C84-88BF-AF389D9120FD}"/>
+                <a16:creationId xmlns:a16="http://schemas.microsoft.com/office/drawing/2014/main" id="{1BE0E5BA-5C35-4607-AE73-7EA1B30B3366}"/>
               </a:ext>
             </a:extLst>
           </p:cNvPr>
@@ -7773,7 +7773,7 @@
           <p:cNvPr id="7" name="TextBox 6">
             <a:extLst xmlns:a="http://schemas.openxmlformats.org/drawingml/2006/main">
               <a:ext uri="{FF2B5EF4-FFF2-40B4-BE49-F238E27FC236}">
-                <a16:creationId xmlns:a16="http://schemas.microsoft.com/office/drawing/2014/main" id="{3E3637E2-6751-494E-89A2-E37265083306}"/>
+                <a16:creationId xmlns:a16="http://schemas.microsoft.com/office/drawing/2014/main" id="{2914A314-3CA1-4CF0-ABB8-EC2D43F77EC6}"/>
               </a:ext>
             </a:extLst>
           </p:cNvPr>
@@ -7820,7 +7820,7 @@
           <p:cNvPr id="8" name="Rounded Rectangle 7">
             <a:extLst xmlns:a="http://schemas.openxmlformats.org/drawingml/2006/main">
               <a:ext uri="{FF2B5EF4-FFF2-40B4-BE49-F238E27FC236}">
-                <a16:creationId xmlns:a16="http://schemas.microsoft.com/office/drawing/2014/main" id="{76914BA6-52EC-4D6A-A5F9-6077FA066B69}"/>
+                <a16:creationId xmlns:a16="http://schemas.microsoft.com/office/drawing/2014/main" id="{B73F52C2-D051-42DC-BA99-244E9C3EB7DA}"/>
               </a:ext>
             </a:extLst>
           </p:cNvPr>
@@ -7877,7 +7877,7 @@
           <p:cNvPr id="9" name="TextBox 8">
             <a:extLst xmlns:a="http://schemas.openxmlformats.org/drawingml/2006/main">
               <a:ext uri="{FF2B5EF4-FFF2-40B4-BE49-F238E27FC236}">
-                <a16:creationId xmlns:a16="http://schemas.microsoft.com/office/drawing/2014/main" id="{F10F433A-976C-4079-BD6B-E2A6DBDC2C1E}"/>
+                <a16:creationId xmlns:a16="http://schemas.microsoft.com/office/drawing/2014/main" id="{37B2A075-F927-406B-A6A1-8A99B0F2BCAE}"/>
               </a:ext>
             </a:extLst>
           </p:cNvPr>
@@ -7924,7 +7924,7 @@
           <p:cNvPr id="10" name="TextBox 9">
             <a:extLst xmlns:a="http://schemas.openxmlformats.org/drawingml/2006/main">
               <a:ext uri="{FF2B5EF4-FFF2-40B4-BE49-F238E27FC236}">
-                <a16:creationId xmlns:a16="http://schemas.microsoft.com/office/drawing/2014/main" id="{CBFAB7EF-73EF-4630-BA84-AF73CA136F1F}"/>
+                <a16:creationId xmlns:a16="http://schemas.microsoft.com/office/drawing/2014/main" id="{CBAABE31-3129-401D-84ED-177D310F1317}"/>
               </a:ext>
             </a:extLst>
           </p:cNvPr>
@@ -7971,7 +7971,7 @@
           <p:cNvPr id="11" name="Rounded Rectangle 10">
             <a:extLst xmlns:a="http://schemas.openxmlformats.org/drawingml/2006/main">
               <a:ext uri="{FF2B5EF4-FFF2-40B4-BE49-F238E27FC236}">
-                <a16:creationId xmlns:a16="http://schemas.microsoft.com/office/drawing/2014/main" id="{07CAF114-2ED0-4E8B-ACB2-DE359D5F05E9}"/>
+                <a16:creationId xmlns:a16="http://schemas.microsoft.com/office/drawing/2014/main" id="{C405090C-A518-4B44-90D7-61128CD5A91D}"/>
               </a:ext>
             </a:extLst>
           </p:cNvPr>
@@ -8028,7 +8028,7 @@
           <p:cNvPr id="12" name="TextBox 11">
             <a:extLst xmlns:a="http://schemas.openxmlformats.org/drawingml/2006/main">
               <a:ext uri="{FF2B5EF4-FFF2-40B4-BE49-F238E27FC236}">
-                <a16:creationId xmlns:a16="http://schemas.microsoft.com/office/drawing/2014/main" id="{50705598-6633-4DBA-AED8-52CF49EB0967}"/>
+                <a16:creationId xmlns:a16="http://schemas.microsoft.com/office/drawing/2014/main" id="{2BF319B6-C68E-4226-A9A4-6329165155B5}"/>
               </a:ext>
             </a:extLst>
           </p:cNvPr>
@@ -8075,7 +8075,7 @@
           <p:cNvPr id="13" name="TextBox 12">
             <a:extLst xmlns:a="http://schemas.openxmlformats.org/drawingml/2006/main">
               <a:ext uri="{FF2B5EF4-FFF2-40B4-BE49-F238E27FC236}">
-                <a16:creationId xmlns:a16="http://schemas.microsoft.com/office/drawing/2014/main" id="{4DF13D56-3666-46F8-9888-D21EA478F0FE}"/>
+                <a16:creationId xmlns:a16="http://schemas.microsoft.com/office/drawing/2014/main" id="{D2642E7A-83E3-401A-8D7C-B0AC3573DCA3}"/>
               </a:ext>
             </a:extLst>
           </p:cNvPr>
@@ -8122,7 +8122,7 @@
           <p:cNvPr id="14" name="Rounded Rectangle 13">
             <a:extLst xmlns:a="http://schemas.openxmlformats.org/drawingml/2006/main">
               <a:ext uri="{FF2B5EF4-FFF2-40B4-BE49-F238E27FC236}">
-                <a16:creationId xmlns:a16="http://schemas.microsoft.com/office/drawing/2014/main" id="{8C6405BE-2EA2-4CB2-8392-D152F8B9801A}"/>
+                <a16:creationId xmlns:a16="http://schemas.microsoft.com/office/drawing/2014/main" id="{2CA002FA-6424-4B38-B112-50C08EADE7D4}"/>
               </a:ext>
             </a:extLst>
           </p:cNvPr>
@@ -8179,7 +8179,7 @@
           <p:cNvPr id="15" name="TextBox 14">
             <a:extLst xmlns:a="http://schemas.openxmlformats.org/drawingml/2006/main">
               <a:ext uri="{FF2B5EF4-FFF2-40B4-BE49-F238E27FC236}">
-                <a16:creationId xmlns:a16="http://schemas.microsoft.com/office/drawing/2014/main" id="{E735F22D-A289-4386-B954-94A3A2B15E49}"/>
+                <a16:creationId xmlns:a16="http://schemas.microsoft.com/office/drawing/2014/main" id="{E0C9837E-CE56-4748-9C86-40F14A692340}"/>
               </a:ext>
             </a:extLst>
           </p:cNvPr>
@@ -8226,7 +8226,7 @@
           <p:cNvPr id="16" name="TextBox 15">
             <a:extLst xmlns:a="http://schemas.openxmlformats.org/drawingml/2006/main">
               <a:ext uri="{FF2B5EF4-FFF2-40B4-BE49-F238E27FC236}">
-                <a16:creationId xmlns:a16="http://schemas.microsoft.com/office/drawing/2014/main" id="{D78039C9-7311-4990-BDA7-77878E518EAD}"/>
+                <a16:creationId xmlns:a16="http://schemas.microsoft.com/office/drawing/2014/main" id="{12EC302D-FA4B-45BB-BA3C-BF0FF53DEC9B}"/>
               </a:ext>
             </a:extLst>
           </p:cNvPr>
@@ -8273,7 +8273,7 @@
           <p:cNvPr id="17" name="TextBox 16">
             <a:extLst xmlns:a="http://schemas.openxmlformats.org/drawingml/2006/main">
               <a:ext uri="{FF2B5EF4-FFF2-40B4-BE49-F238E27FC236}">
-                <a16:creationId xmlns:a16="http://schemas.microsoft.com/office/drawing/2014/main" id="{6F12F299-9A82-44E4-9797-ABC2D09B8F46}"/>
+                <a16:creationId xmlns:a16="http://schemas.microsoft.com/office/drawing/2014/main" id="{2B43C978-A1DA-438F-9695-E729CF64C609}"/>
               </a:ext>
             </a:extLst>
           </p:cNvPr>
@@ -8320,7 +8320,7 @@
           <p:cNvPr id="18" name="Rounded Rectangle 17">
             <a:extLst xmlns:a="http://schemas.openxmlformats.org/drawingml/2006/main">
               <a:ext uri="{FF2B5EF4-FFF2-40B4-BE49-F238E27FC236}">
-                <a16:creationId xmlns:a16="http://schemas.microsoft.com/office/drawing/2014/main" id="{B9A56270-3AD7-4ADD-97CD-782E7654B475}"/>
+                <a16:creationId xmlns:a16="http://schemas.microsoft.com/office/drawing/2014/main" id="{58D9C4EF-9880-4B3C-9A93-59C23FD6D9C1}"/>
               </a:ext>
             </a:extLst>
           </p:cNvPr>
@@ -8377,7 +8377,7 @@
           <p:cNvPr id="19" name="TextBox 18">
             <a:extLst xmlns:a="http://schemas.openxmlformats.org/drawingml/2006/main">
               <a:ext uri="{FF2B5EF4-FFF2-40B4-BE49-F238E27FC236}">
-                <a16:creationId xmlns:a16="http://schemas.microsoft.com/office/drawing/2014/main" id="{7F9CE851-5F0C-402C-9E4A-A5A78A4585BC}"/>
+                <a16:creationId xmlns:a16="http://schemas.microsoft.com/office/drawing/2014/main" id="{EC75BF3F-D5A3-4519-8F51-A9507A889266}"/>
               </a:ext>
             </a:extLst>
           </p:cNvPr>
@@ -8424,7 +8424,7 @@
           <p:cNvPr id="20" name="TextBox 19">
             <a:extLst xmlns:a="http://schemas.openxmlformats.org/drawingml/2006/main">
               <a:ext uri="{FF2B5EF4-FFF2-40B4-BE49-F238E27FC236}">
-                <a16:creationId xmlns:a16="http://schemas.microsoft.com/office/drawing/2014/main" id="{EBCE7651-DE15-441C-B213-6A280E0D12CB}"/>
+                <a16:creationId xmlns:a16="http://schemas.microsoft.com/office/drawing/2014/main" id="{40AE3C31-E22E-428C-80CA-65C94530602F}"/>
               </a:ext>
             </a:extLst>
           </p:cNvPr>
@@ -8469,7 +8469,7 @@
     </p:spTree>
     <p:extLst>
       <p:ext uri="{BB962C8B-B14F-4D97-AF65-F5344CB8AC3E}">
-        <p14:creationId xmlns:p14="http://schemas.microsoft.com/office/powerpoint/2010/main" val="1101065685"/>
+        <p14:creationId xmlns:p14="http://schemas.microsoft.com/office/powerpoint/2010/main" val="2014606595"/>
       </p:ext>
     </p:extLst>
   </p:cSld>
@@ -8493,7 +8493,7 @@
           <p:cNvPr id="2" name="TextBox 1">
             <a:extLst xmlns:a="http://schemas.openxmlformats.org/drawingml/2006/main">
               <a:ext uri="{FF2B5EF4-FFF2-40B4-BE49-F238E27FC236}">
-                <a16:creationId xmlns:a16="http://schemas.microsoft.com/office/drawing/2014/main" id="{668447DF-9D4F-4666-878E-DBBFA43AADF3}"/>
+                <a16:creationId xmlns:a16="http://schemas.microsoft.com/office/drawing/2014/main" id="{76E45300-7781-4BC9-82F6-44694290D53E}"/>
               </a:ext>
             </a:extLst>
           </p:cNvPr>
@@ -8540,7 +8540,7 @@
           <p:cNvPr id="3" name="TextBox 2">
             <a:extLst xmlns:a="http://schemas.openxmlformats.org/drawingml/2006/main">
               <a:ext uri="{FF2B5EF4-FFF2-40B4-BE49-F238E27FC236}">
-                <a16:creationId xmlns:a16="http://schemas.microsoft.com/office/drawing/2014/main" id="{13730509-0677-4BEF-B9B5-FD0A2DD572D9}"/>
+                <a16:creationId xmlns:a16="http://schemas.microsoft.com/office/drawing/2014/main" id="{94CD852B-2456-4C3D-82A7-BDB6362A99B6}"/>
               </a:ext>
             </a:extLst>
           </p:cNvPr>
@@ -8587,7 +8587,7 @@
           <p:cNvPr id="4" name="Rectangle 3">
             <a:extLst xmlns:a="http://schemas.openxmlformats.org/drawingml/2006/main">
               <a:ext uri="{FF2B5EF4-FFF2-40B4-BE49-F238E27FC236}">
-                <a16:creationId xmlns:a16="http://schemas.microsoft.com/office/drawing/2014/main" id="{2528F6CE-556C-4DE0-8ED5-10D225075E17}"/>
+                <a16:creationId xmlns:a16="http://schemas.microsoft.com/office/drawing/2014/main" id="{0C0EAF4E-C2A7-4CE5-AC48-7F0BF106BA09}"/>
               </a:ext>
             </a:extLst>
           </p:cNvPr>
@@ -8642,7 +8642,7 @@
           <p:cNvPr id="5" name="Rectangle 4">
             <a:extLst xmlns:a="http://schemas.openxmlformats.org/drawingml/2006/main">
               <a:ext uri="{FF2B5EF4-FFF2-40B4-BE49-F238E27FC236}">
-                <a16:creationId xmlns:a16="http://schemas.microsoft.com/office/drawing/2014/main" id="{05AB662A-D990-4AB7-AB04-A9494B5FF46C}"/>
+                <a16:creationId xmlns:a16="http://schemas.microsoft.com/office/drawing/2014/main" id="{D9F0EE22-90FF-4842-9A35-A194307593B6}"/>
               </a:ext>
             </a:extLst>
           </p:cNvPr>
@@ -8697,7 +8697,7 @@
           <p:cNvPr id="6" name="TextBox 5">
             <a:extLst xmlns:a="http://schemas.openxmlformats.org/drawingml/2006/main">
               <a:ext uri="{FF2B5EF4-FFF2-40B4-BE49-F238E27FC236}">
-                <a16:creationId xmlns:a16="http://schemas.microsoft.com/office/drawing/2014/main" id="{D407010B-3014-49FD-834A-E2B00EBDD562}"/>
+                <a16:creationId xmlns:a16="http://schemas.microsoft.com/office/drawing/2014/main" id="{BAEEE535-56C2-4753-9F6A-0EC0A2F68101}"/>
               </a:ext>
             </a:extLst>
           </p:cNvPr>
@@ -8744,7 +8744,7 @@
           <p:cNvPr id="7" name="TextBox 6">
             <a:extLst xmlns:a="http://schemas.openxmlformats.org/drawingml/2006/main">
               <a:ext uri="{FF2B5EF4-FFF2-40B4-BE49-F238E27FC236}">
-                <a16:creationId xmlns:a16="http://schemas.microsoft.com/office/drawing/2014/main" id="{462A8B40-6918-4BCD-A2D5-4B0094FA4B26}"/>
+                <a16:creationId xmlns:a16="http://schemas.microsoft.com/office/drawing/2014/main" id="{5DFDD64F-CD83-477A-BEB8-0E520AAD79DD}"/>
               </a:ext>
             </a:extLst>
           </p:cNvPr>
@@ -9231,7 +9231,7 @@
           <p:cNvPr id="9" name="TextBox 8">
             <a:extLst xmlns:a="http://schemas.openxmlformats.org/drawingml/2006/main">
               <a:ext uri="{FF2B5EF4-FFF2-40B4-BE49-F238E27FC236}">
-                <a16:creationId xmlns:a16="http://schemas.microsoft.com/office/drawing/2014/main" id="{E7700FD3-DA4E-40B8-8F46-BF1C9CFF7214}"/>
+                <a16:creationId xmlns:a16="http://schemas.microsoft.com/office/drawing/2014/main" id="{2805A10D-0449-4CB5-B3F5-8367CA7031C5}"/>
               </a:ext>
             </a:extLst>
           </p:cNvPr>
@@ -9276,7 +9276,7 @@
     </p:spTree>
     <p:extLst>
       <p:ext uri="{BB962C8B-B14F-4D97-AF65-F5344CB8AC3E}">
-        <p14:creationId xmlns:p14="http://schemas.microsoft.com/office/powerpoint/2010/main" val="456852466"/>
+        <p14:creationId xmlns:p14="http://schemas.microsoft.com/office/powerpoint/2010/main" val="738992331"/>
       </p:ext>
     </p:extLst>
   </p:cSld>
@@ -9307,7 +9307,7 @@
           <p:cNvPr id="2" name="TextBox 1">
             <a:extLst xmlns:a="http://schemas.openxmlformats.org/drawingml/2006/main">
               <a:ext uri="{FF2B5EF4-FFF2-40B4-BE49-F238E27FC236}">
-                <a16:creationId xmlns:a16="http://schemas.microsoft.com/office/drawing/2014/main" id="{0E6B5E52-55CB-4576-8898-9B6620F3DDE8}"/>
+                <a16:creationId xmlns:a16="http://schemas.microsoft.com/office/drawing/2014/main" id="{400C138A-DEB0-418B-96CA-986FBE78ED6E}"/>
               </a:ext>
             </a:extLst>
           </p:cNvPr>
@@ -9354,7 +9354,7 @@
           <p:cNvPr id="3" name="TextBox 2">
             <a:extLst xmlns:a="http://schemas.openxmlformats.org/drawingml/2006/main">
               <a:ext uri="{FF2B5EF4-FFF2-40B4-BE49-F238E27FC236}">
-                <a16:creationId xmlns:a16="http://schemas.microsoft.com/office/drawing/2014/main" id="{73F688F2-203A-415A-9EC9-C79CA09C315A}"/>
+                <a16:creationId xmlns:a16="http://schemas.microsoft.com/office/drawing/2014/main" id="{10139486-308B-4D6D-90FA-ED8CBC9C7291}"/>
               </a:ext>
             </a:extLst>
           </p:cNvPr>
@@ -9401,7 +9401,7 @@
           <p:cNvPr id="4" name="TextBox 3">
             <a:extLst xmlns:a="http://schemas.openxmlformats.org/drawingml/2006/main">
               <a:ext uri="{FF2B5EF4-FFF2-40B4-BE49-F238E27FC236}">
-                <a16:creationId xmlns:a16="http://schemas.microsoft.com/office/drawing/2014/main" id="{1AD4471A-7425-41A6-8A6B-D9544281E71A}"/>
+                <a16:creationId xmlns:a16="http://schemas.microsoft.com/office/drawing/2014/main" id="{EF656AA1-A7AB-481E-86E8-50FA62FA0F41}"/>
               </a:ext>
             </a:extLst>
           </p:cNvPr>
@@ -9520,7 +9520,7 @@
           <p:cNvPr id="5" name="TextBox 4">
             <a:extLst xmlns:a="http://schemas.openxmlformats.org/drawingml/2006/main">
               <a:ext uri="{FF2B5EF4-FFF2-40B4-BE49-F238E27FC236}">
-                <a16:creationId xmlns:a16="http://schemas.microsoft.com/office/drawing/2014/main" id="{D5A4AB3E-AC41-4B09-97CC-FFC674702C86}"/>
+                <a16:creationId xmlns:a16="http://schemas.microsoft.com/office/drawing/2014/main" id="{BB8BB205-708B-484F-811D-489556A14187}"/>
               </a:ext>
             </a:extLst>
           </p:cNvPr>
@@ -9565,7 +9565,7 @@
     </p:spTree>
     <p:extLst>
       <p:ext uri="{BB962C8B-B14F-4D97-AF65-F5344CB8AC3E}">
-        <p14:creationId xmlns:p14="http://schemas.microsoft.com/office/powerpoint/2010/main" val="1990807383"/>
+        <p14:creationId xmlns:p14="http://schemas.microsoft.com/office/powerpoint/2010/main" val="2096284752"/>
       </p:ext>
     </p:extLst>
   </p:cSld>

--- a/site/downloads/pixan-bank-deck-short-fi.pptx
+++ b/site/downloads/pixan-bank-deck-short-fi.pptx
@@ -2,18 +2,18 @@
 <file path=ppt/presentation.xml><?xml version="1.0" encoding="utf-8"?>
 <p:presentation xmlns:p="http://schemas.openxmlformats.org/presentationml/2006/main">
   <p:sldMasterIdLst>
-    <p:sldMasterId xmlns:r="http://schemas.openxmlformats.org/officeDocument/2006/relationships" id="2147483648" r:id="R63f922ad6881407c"/>
+    <p:sldMasterId xmlns:r="http://schemas.openxmlformats.org/officeDocument/2006/relationships" id="2147483648" r:id="Rf891b0528db34706"/>
   </p:sldMasterIdLst>
   <p:notesMasterIdLst>
-    <p:notesMasterId xmlns:r="http://schemas.openxmlformats.org/officeDocument/2006/relationships" r:id="R7b7c6e5e9aae4c11"/>
+    <p:notesMasterId xmlns:r="http://schemas.openxmlformats.org/officeDocument/2006/relationships" r:id="Rccfc40a1af8a4894"/>
   </p:notesMasterIdLst>
   <p:sldIdLst>
-    <p:sldId xmlns:r="http://schemas.openxmlformats.org/officeDocument/2006/relationships" id="256" r:id="R16d70326d98542c8"/>
-    <p:sldId xmlns:r="http://schemas.openxmlformats.org/officeDocument/2006/relationships" id="257" r:id="R7ad430a36d6d4b7d"/>
-    <p:sldId xmlns:r="http://schemas.openxmlformats.org/officeDocument/2006/relationships" id="258" r:id="R71f201429586428f"/>
-    <p:sldId xmlns:r="http://schemas.openxmlformats.org/officeDocument/2006/relationships" id="259" r:id="R4df5f17875f04877"/>
-    <p:sldId xmlns:r="http://schemas.openxmlformats.org/officeDocument/2006/relationships" id="260" r:id="Rb3ef7d9622964ce7"/>
-    <p:sldId xmlns:r="http://schemas.openxmlformats.org/officeDocument/2006/relationships" id="261" r:id="R4de3c44fa6a64f02"/>
+    <p:sldId xmlns:r="http://schemas.openxmlformats.org/officeDocument/2006/relationships" id="256" r:id="Ra4171ee4d2034816"/>
+    <p:sldId xmlns:r="http://schemas.openxmlformats.org/officeDocument/2006/relationships" id="257" r:id="Rb96d55806cbd42d4"/>
+    <p:sldId xmlns:r="http://schemas.openxmlformats.org/officeDocument/2006/relationships" id="258" r:id="R5555e0d5a708459d"/>
+    <p:sldId xmlns:r="http://schemas.openxmlformats.org/officeDocument/2006/relationships" id="259" r:id="Re6a2954829d34bcb"/>
+    <p:sldId xmlns:r="http://schemas.openxmlformats.org/officeDocument/2006/relationships" id="260" r:id="R14c2f25855b143eb"/>
+    <p:sldId xmlns:r="http://schemas.openxmlformats.org/officeDocument/2006/relationships" id="261" r:id="R1e1bfcda8b884bb2"/>
   </p:sldIdLst>
   <p:sldSz cx="12191999" cy="6858000"/>
   <p:notesSz cx="6858000" cy="9144000"/>
@@ -1887,7 +1887,7 @@
           <p:cNvPr id="2" name="Title 1">
             <a:extLst xmlns:a="http://schemas.openxmlformats.org/drawingml/2006/main">
               <a:ext uri="{FF2B5EF4-FFF2-40B4-BE49-F238E27FC236}">
-                <a16:creationId xmlns:a16="http://schemas.microsoft.com/office/drawing/2014/main" id="{B9359E6C-8385-4472-9984-8A84B5628836}"/>
+                <a16:creationId xmlns:a16="http://schemas.microsoft.com/office/drawing/2014/main" id="{071807D7-A5BA-44AD-88F1-6044C8CF1AC0}"/>
               </a:ext>
             </a:extLst>
           </p:cNvPr>
@@ -1919,7 +1919,7 @@
           <p:cNvPr id="3" name="Subtitle 2">
             <a:extLst xmlns:a="http://schemas.openxmlformats.org/drawingml/2006/main">
               <a:ext uri="{FF2B5EF4-FFF2-40B4-BE49-F238E27FC236}">
-                <a16:creationId xmlns:a16="http://schemas.microsoft.com/office/drawing/2014/main" id="{C41ADB0C-EA3A-4EF3-9954-F77A4A445930}"/>
+                <a16:creationId xmlns:a16="http://schemas.microsoft.com/office/drawing/2014/main" id="{663760AC-1D53-45BE-A006-9F772C768769}"/>
               </a:ext>
             </a:extLst>
           </p:cNvPr>
@@ -2042,7 +2042,7 @@
           <p:cNvPr id="4" name="Date Placeholder 3">
             <a:extLst xmlns:a="http://schemas.openxmlformats.org/drawingml/2006/main">
               <a:ext uri="{FF2B5EF4-FFF2-40B4-BE49-F238E27FC236}">
-                <a16:creationId xmlns:a16="http://schemas.microsoft.com/office/drawing/2014/main" id="{D1C111ED-CFB2-47D1-BE7B-6CF94D803FD1}"/>
+                <a16:creationId xmlns:a16="http://schemas.microsoft.com/office/drawing/2014/main" id="{07D6EF5B-747B-41CB-BA3B-74FF7CAE414D}"/>
               </a:ext>
             </a:extLst>
           </p:cNvPr>
@@ -2069,7 +2069,7 @@
           <p:cNvPr id="5" name="Footer Placeholder 4">
             <a:extLst xmlns:a="http://schemas.openxmlformats.org/drawingml/2006/main">
               <a:ext uri="{FF2B5EF4-FFF2-40B4-BE49-F238E27FC236}">
-                <a16:creationId xmlns:a16="http://schemas.microsoft.com/office/drawing/2014/main" id="{0FD44ABD-506C-4F5E-BE58-C63C6A7326CD}"/>
+                <a16:creationId xmlns:a16="http://schemas.microsoft.com/office/drawing/2014/main" id="{50B9173D-7FAA-48F7-A684-62371669322E}"/>
               </a:ext>
             </a:extLst>
           </p:cNvPr>
@@ -2092,7 +2092,7 @@
           <p:cNvPr id="6" name="Slide Number Placeholder 5">
             <a:extLst xmlns:a="http://schemas.openxmlformats.org/drawingml/2006/main">
               <a:ext uri="{FF2B5EF4-FFF2-40B4-BE49-F238E27FC236}">
-                <a16:creationId xmlns:a16="http://schemas.microsoft.com/office/drawing/2014/main" id="{2E34A205-3A36-479A-8062-8C1345AC8054}"/>
+                <a16:creationId xmlns:a16="http://schemas.microsoft.com/office/drawing/2014/main" id="{BB0E3590-8480-4DC5-B40A-D68E38E1F162}"/>
               </a:ext>
             </a:extLst>
           </p:cNvPr>
@@ -2136,7 +2136,7 @@
           <p:cNvPr id="2" name="Title 1">
             <a:extLst xmlns:a="http://schemas.openxmlformats.org/drawingml/2006/main">
               <a:ext uri="{FF2B5EF4-FFF2-40B4-BE49-F238E27FC236}">
-                <a16:creationId xmlns:a16="http://schemas.microsoft.com/office/drawing/2014/main" id="{BDFEB862-C619-4C6D-B9A4-063C190B1842}"/>
+                <a16:creationId xmlns:a16="http://schemas.microsoft.com/office/drawing/2014/main" id="{D5A931D9-E2BC-40EF-979F-164C0B30F162}"/>
               </a:ext>
             </a:extLst>
           </p:cNvPr>
@@ -2163,7 +2163,7 @@
           <p:cNvPr id="3" name="Vertical Text Placeholder 2">
             <a:extLst xmlns:a="http://schemas.openxmlformats.org/drawingml/2006/main">
               <a:ext uri="{FF2B5EF4-FFF2-40B4-BE49-F238E27FC236}">
-                <a16:creationId xmlns:a16="http://schemas.microsoft.com/office/drawing/2014/main" id="{8166C160-B9EC-4FF9-9414-9118046F37B4}"/>
+                <a16:creationId xmlns:a16="http://schemas.microsoft.com/office/drawing/2014/main" id="{894CA3E4-C9D5-4B96-8785-E2307C4E8028}"/>
               </a:ext>
             </a:extLst>
           </p:cNvPr>
@@ -2225,7 +2225,7 @@
           <p:cNvPr id="4" name="Date Placeholder 3">
             <a:extLst xmlns:a="http://schemas.openxmlformats.org/drawingml/2006/main">
               <a:ext uri="{FF2B5EF4-FFF2-40B4-BE49-F238E27FC236}">
-                <a16:creationId xmlns:a16="http://schemas.microsoft.com/office/drawing/2014/main" id="{EA7CAB1A-24F6-4BA4-BF4F-B4C91B146BA2}"/>
+                <a16:creationId xmlns:a16="http://schemas.microsoft.com/office/drawing/2014/main" id="{A6EE548C-63DA-4D04-BA48-71F6217B8DC0}"/>
               </a:ext>
             </a:extLst>
           </p:cNvPr>
@@ -2252,7 +2252,7 @@
           <p:cNvPr id="5" name="Footer Placeholder 4">
             <a:extLst xmlns:a="http://schemas.openxmlformats.org/drawingml/2006/main">
               <a:ext uri="{FF2B5EF4-FFF2-40B4-BE49-F238E27FC236}">
-                <a16:creationId xmlns:a16="http://schemas.microsoft.com/office/drawing/2014/main" id="{9A1281B9-819A-4674-BEE6-417ACD52E259}"/>
+                <a16:creationId xmlns:a16="http://schemas.microsoft.com/office/drawing/2014/main" id="{9BBFAE6E-ACC8-47EC-8D6A-ACEE6A560650}"/>
               </a:ext>
             </a:extLst>
           </p:cNvPr>
@@ -2275,7 +2275,7 @@
           <p:cNvPr id="6" name="Slide Number Placeholder 5">
             <a:extLst xmlns:a="http://schemas.openxmlformats.org/drawingml/2006/main">
               <a:ext uri="{FF2B5EF4-FFF2-40B4-BE49-F238E27FC236}">
-                <a16:creationId xmlns:a16="http://schemas.microsoft.com/office/drawing/2014/main" id="{FD71F405-FA11-4A42-8111-BF2B09741869}"/>
+                <a16:creationId xmlns:a16="http://schemas.microsoft.com/office/drawing/2014/main" id="{BC9409BE-E4B3-4D26-9EF2-83DA3555E354}"/>
               </a:ext>
             </a:extLst>
           </p:cNvPr>
@@ -2319,7 +2319,7 @@
           <p:cNvPr id="2" name="Vertical Title 1">
             <a:extLst xmlns:a="http://schemas.openxmlformats.org/drawingml/2006/main">
               <a:ext uri="{FF2B5EF4-FFF2-40B4-BE49-F238E27FC236}">
-                <a16:creationId xmlns:a16="http://schemas.microsoft.com/office/drawing/2014/main" id="{C12AC2F0-0E70-4547-B524-CD217FB3986C}"/>
+                <a16:creationId xmlns:a16="http://schemas.microsoft.com/office/drawing/2014/main" id="{A3CCCAF9-B702-42F9-B238-9695971C521C}"/>
               </a:ext>
             </a:extLst>
           </p:cNvPr>
@@ -2351,7 +2351,7 @@
           <p:cNvPr id="3" name="Vertical Text Placeholder 2">
             <a:extLst xmlns:a="http://schemas.openxmlformats.org/drawingml/2006/main">
               <a:ext uri="{FF2B5EF4-FFF2-40B4-BE49-F238E27FC236}">
-                <a16:creationId xmlns:a16="http://schemas.microsoft.com/office/drawing/2014/main" id="{659B57B2-57A6-4DD6-A5C6-4629B1939F48}"/>
+                <a16:creationId xmlns:a16="http://schemas.microsoft.com/office/drawing/2014/main" id="{106E2E11-1884-401F-87C7-ED1EB4CA296C}"/>
               </a:ext>
             </a:extLst>
           </p:cNvPr>
@@ -2418,7 +2418,7 @@
           <p:cNvPr id="4" name="Date Placeholder 3">
             <a:extLst xmlns:a="http://schemas.openxmlformats.org/drawingml/2006/main">
               <a:ext uri="{FF2B5EF4-FFF2-40B4-BE49-F238E27FC236}">
-                <a16:creationId xmlns:a16="http://schemas.microsoft.com/office/drawing/2014/main" id="{AFBFD066-D574-4940-AF4D-17CE389F4303}"/>
+                <a16:creationId xmlns:a16="http://schemas.microsoft.com/office/drawing/2014/main" id="{08B28AA9-7C67-4F09-A337-1BF6D568F60E}"/>
               </a:ext>
             </a:extLst>
           </p:cNvPr>
@@ -2445,7 +2445,7 @@
           <p:cNvPr id="5" name="Footer Placeholder 4">
             <a:extLst xmlns:a="http://schemas.openxmlformats.org/drawingml/2006/main">
               <a:ext uri="{FF2B5EF4-FFF2-40B4-BE49-F238E27FC236}">
-                <a16:creationId xmlns:a16="http://schemas.microsoft.com/office/drawing/2014/main" id="{350E6B2C-E047-43AC-A34D-424F42838FAA}"/>
+                <a16:creationId xmlns:a16="http://schemas.microsoft.com/office/drawing/2014/main" id="{1EC14C34-00EE-44BE-9CB7-FCC443AD15F8}"/>
               </a:ext>
             </a:extLst>
           </p:cNvPr>
@@ -2468,7 +2468,7 @@
           <p:cNvPr id="6" name="Slide Number Placeholder 5">
             <a:extLst xmlns:a="http://schemas.openxmlformats.org/drawingml/2006/main">
               <a:ext uri="{FF2B5EF4-FFF2-40B4-BE49-F238E27FC236}">
-                <a16:creationId xmlns:a16="http://schemas.microsoft.com/office/drawing/2014/main" id="{ADF16A61-13A2-4457-BD4E-E0FDE6289920}"/>
+                <a16:creationId xmlns:a16="http://schemas.microsoft.com/office/drawing/2014/main" id="{108351D0-4583-4D36-A81A-92AD61261C44}"/>
               </a:ext>
             </a:extLst>
           </p:cNvPr>
@@ -2512,7 +2512,7 @@
           <p:cNvPr id="2" name="Title 1">
             <a:extLst xmlns:a="http://schemas.openxmlformats.org/drawingml/2006/main">
               <a:ext uri="{FF2B5EF4-FFF2-40B4-BE49-F238E27FC236}">
-                <a16:creationId xmlns:a16="http://schemas.microsoft.com/office/drawing/2014/main" id="{9841658D-7173-445A-BBB3-365F80DB001C}"/>
+                <a16:creationId xmlns:a16="http://schemas.microsoft.com/office/drawing/2014/main" id="{369F9C1A-2A59-405D-877D-23904D3C2F1C}"/>
               </a:ext>
             </a:extLst>
           </p:cNvPr>
@@ -2539,7 +2539,7 @@
           <p:cNvPr id="3" name="Content Placeholder 2">
             <a:extLst xmlns:a="http://schemas.openxmlformats.org/drawingml/2006/main">
               <a:ext uri="{FF2B5EF4-FFF2-40B4-BE49-F238E27FC236}">
-                <a16:creationId xmlns:a16="http://schemas.microsoft.com/office/drawing/2014/main" id="{D7CF19DF-E321-42A1-965B-F3401DE17A45}"/>
+                <a16:creationId xmlns:a16="http://schemas.microsoft.com/office/drawing/2014/main" id="{C7DCBC0C-AB20-4E8B-B3D6-49E792215F86}"/>
               </a:ext>
             </a:extLst>
           </p:cNvPr>
@@ -2601,7 +2601,7 @@
           <p:cNvPr id="4" name="Date Placeholder 3">
             <a:extLst xmlns:a="http://schemas.openxmlformats.org/drawingml/2006/main">
               <a:ext uri="{FF2B5EF4-FFF2-40B4-BE49-F238E27FC236}">
-                <a16:creationId xmlns:a16="http://schemas.microsoft.com/office/drawing/2014/main" id="{FE260344-895B-4DDA-A8AF-237A223083CC}"/>
+                <a16:creationId xmlns:a16="http://schemas.microsoft.com/office/drawing/2014/main" id="{A1787C02-5F94-4196-AE36-EC9933543E94}"/>
               </a:ext>
             </a:extLst>
           </p:cNvPr>
@@ -2628,7 +2628,7 @@
           <p:cNvPr id="5" name="Footer Placeholder 4">
             <a:extLst xmlns:a="http://schemas.openxmlformats.org/drawingml/2006/main">
               <a:ext uri="{FF2B5EF4-FFF2-40B4-BE49-F238E27FC236}">
-                <a16:creationId xmlns:a16="http://schemas.microsoft.com/office/drawing/2014/main" id="{8D6C4A49-AEF2-4279-AF2A-1695920204B8}"/>
+                <a16:creationId xmlns:a16="http://schemas.microsoft.com/office/drawing/2014/main" id="{1245B4BC-4537-49C7-96AD-75F168CFF3A8}"/>
               </a:ext>
             </a:extLst>
           </p:cNvPr>
@@ -2651,7 +2651,7 @@
           <p:cNvPr id="6" name="Slide Number Placeholder 5">
             <a:extLst xmlns:a="http://schemas.openxmlformats.org/drawingml/2006/main">
               <a:ext uri="{FF2B5EF4-FFF2-40B4-BE49-F238E27FC236}">
-                <a16:creationId xmlns:a16="http://schemas.microsoft.com/office/drawing/2014/main" id="{A73FD0DD-C66A-4F61-8DD8-35BC9D01FFA9}"/>
+                <a16:creationId xmlns:a16="http://schemas.microsoft.com/office/drawing/2014/main" id="{D4A2CB95-3B94-4850-A338-8F221151F27A}"/>
               </a:ext>
             </a:extLst>
           </p:cNvPr>
@@ -2695,7 +2695,7 @@
           <p:cNvPr id="2" name="Title 1">
             <a:extLst xmlns:a="http://schemas.openxmlformats.org/drawingml/2006/main">
               <a:ext uri="{FF2B5EF4-FFF2-40B4-BE49-F238E27FC236}">
-                <a16:creationId xmlns:a16="http://schemas.microsoft.com/office/drawing/2014/main" id="{EA8E8586-EF00-4850-AD5D-3EC39A204B36}"/>
+                <a16:creationId xmlns:a16="http://schemas.microsoft.com/office/drawing/2014/main" id="{7C5BBE3D-5945-4635-BC89-60B25D80FE7D}"/>
               </a:ext>
             </a:extLst>
           </p:cNvPr>
@@ -2732,7 +2732,7 @@
           <p:cNvPr id="3" name="Text Placeholder 2">
             <a:extLst xmlns:a="http://schemas.openxmlformats.org/drawingml/2006/main">
               <a:ext uri="{FF2B5EF4-FFF2-40B4-BE49-F238E27FC236}">
-                <a16:creationId xmlns:a16="http://schemas.microsoft.com/office/drawing/2014/main" id="{71CB9BD5-26DE-4E97-9644-41C0BB31F8C3}"/>
+                <a16:creationId xmlns:a16="http://schemas.microsoft.com/office/drawing/2014/main" id="{B4CA9DE1-F3AD-4617-88B4-A4D4280171C9}"/>
               </a:ext>
             </a:extLst>
           </p:cNvPr>
@@ -2858,7 +2858,7 @@
           <p:cNvPr id="4" name="Date Placeholder 3">
             <a:extLst xmlns:a="http://schemas.openxmlformats.org/drawingml/2006/main">
               <a:ext uri="{FF2B5EF4-FFF2-40B4-BE49-F238E27FC236}">
-                <a16:creationId xmlns:a16="http://schemas.microsoft.com/office/drawing/2014/main" id="{27590D92-C6BB-46CF-A4E8-59FEFBD819F2}"/>
+                <a16:creationId xmlns:a16="http://schemas.microsoft.com/office/drawing/2014/main" id="{2B72395B-5DDF-4222-817F-99B5A6B5F897}"/>
               </a:ext>
             </a:extLst>
           </p:cNvPr>
@@ -2885,7 +2885,7 @@
           <p:cNvPr id="5" name="Footer Placeholder 4">
             <a:extLst xmlns:a="http://schemas.openxmlformats.org/drawingml/2006/main">
               <a:ext uri="{FF2B5EF4-FFF2-40B4-BE49-F238E27FC236}">
-                <a16:creationId xmlns:a16="http://schemas.microsoft.com/office/drawing/2014/main" id="{8D19CFA7-DE3F-4139-A064-5DC43623F9C7}"/>
+                <a16:creationId xmlns:a16="http://schemas.microsoft.com/office/drawing/2014/main" id="{E6F34CD6-627B-4FB9-ACC2-25487B8CFA9D}"/>
               </a:ext>
             </a:extLst>
           </p:cNvPr>
@@ -2908,7 +2908,7 @@
           <p:cNvPr id="6" name="Slide Number Placeholder 5">
             <a:extLst xmlns:a="http://schemas.openxmlformats.org/drawingml/2006/main">
               <a:ext uri="{FF2B5EF4-FFF2-40B4-BE49-F238E27FC236}">
-                <a16:creationId xmlns:a16="http://schemas.microsoft.com/office/drawing/2014/main" id="{4B900BEC-825E-4465-89AE-DF6429A57AEC}"/>
+                <a16:creationId xmlns:a16="http://schemas.microsoft.com/office/drawing/2014/main" id="{923FFBC5-5915-42AA-B75C-15426C05D87C}"/>
               </a:ext>
             </a:extLst>
           </p:cNvPr>
@@ -2952,7 +2952,7 @@
           <p:cNvPr id="2" name="Title 1">
             <a:extLst xmlns:a="http://schemas.openxmlformats.org/drawingml/2006/main">
               <a:ext uri="{FF2B5EF4-FFF2-40B4-BE49-F238E27FC236}">
-                <a16:creationId xmlns:a16="http://schemas.microsoft.com/office/drawing/2014/main" id="{08BBBED7-56C6-4425-BB53-D39008EC15AE}"/>
+                <a16:creationId xmlns:a16="http://schemas.microsoft.com/office/drawing/2014/main" id="{5C0718D0-E8D7-4F20-8481-6F9E766C6F84}"/>
               </a:ext>
             </a:extLst>
           </p:cNvPr>
@@ -2979,7 +2979,7 @@
           <p:cNvPr id="3" name="Content Placeholder 2">
             <a:extLst xmlns:a="http://schemas.openxmlformats.org/drawingml/2006/main">
               <a:ext uri="{FF2B5EF4-FFF2-40B4-BE49-F238E27FC236}">
-                <a16:creationId xmlns:a16="http://schemas.microsoft.com/office/drawing/2014/main" id="{FE70AB95-115A-40E2-A4CE-6DE4418008A0}"/>
+                <a16:creationId xmlns:a16="http://schemas.microsoft.com/office/drawing/2014/main" id="{A55BF3C2-1159-4FEB-B574-6A50F5E0958A}"/>
               </a:ext>
             </a:extLst>
           </p:cNvPr>
@@ -3083,7 +3083,7 @@
           <p:cNvPr id="4" name="Content Placeholder 3">
             <a:extLst xmlns:a="http://schemas.openxmlformats.org/drawingml/2006/main">
               <a:ext uri="{FF2B5EF4-FFF2-40B4-BE49-F238E27FC236}">
-                <a16:creationId xmlns:a16="http://schemas.microsoft.com/office/drawing/2014/main" id="{E37CABFF-DF35-4623-BA7B-6EE1743715B5}"/>
+                <a16:creationId xmlns:a16="http://schemas.microsoft.com/office/drawing/2014/main" id="{2009B731-AFA9-494F-80A3-BF385B5F558B}"/>
               </a:ext>
             </a:extLst>
           </p:cNvPr>
@@ -3187,7 +3187,7 @@
           <p:cNvPr id="5" name="Date Placeholder 4">
             <a:extLst xmlns:a="http://schemas.openxmlformats.org/drawingml/2006/main">
               <a:ext uri="{FF2B5EF4-FFF2-40B4-BE49-F238E27FC236}">
-                <a16:creationId xmlns:a16="http://schemas.microsoft.com/office/drawing/2014/main" id="{9ED3F313-5EFF-4F89-B80B-5E79F37BD5DE}"/>
+                <a16:creationId xmlns:a16="http://schemas.microsoft.com/office/drawing/2014/main" id="{6CCC0E3C-9FC6-49E7-8243-299A9072CCCA}"/>
               </a:ext>
             </a:extLst>
           </p:cNvPr>
@@ -3214,7 +3214,7 @@
           <p:cNvPr id="6" name="Footer Placeholder 5">
             <a:extLst xmlns:a="http://schemas.openxmlformats.org/drawingml/2006/main">
               <a:ext uri="{FF2B5EF4-FFF2-40B4-BE49-F238E27FC236}">
-                <a16:creationId xmlns:a16="http://schemas.microsoft.com/office/drawing/2014/main" id="{B0461597-B474-4A90-B1B5-E7824D1ACC35}"/>
+                <a16:creationId xmlns:a16="http://schemas.microsoft.com/office/drawing/2014/main" id="{06A517CB-44ED-468D-A771-15E52CDE0942}"/>
               </a:ext>
             </a:extLst>
           </p:cNvPr>
@@ -3237,7 +3237,7 @@
           <p:cNvPr id="7" name="Slide Number Placeholder 6">
             <a:extLst xmlns:a="http://schemas.openxmlformats.org/drawingml/2006/main">
               <a:ext uri="{FF2B5EF4-FFF2-40B4-BE49-F238E27FC236}">
-                <a16:creationId xmlns:a16="http://schemas.microsoft.com/office/drawing/2014/main" id="{49BE5091-A8D4-4A2F-9B14-2FEEDBC40906}"/>
+                <a16:creationId xmlns:a16="http://schemas.microsoft.com/office/drawing/2014/main" id="{E1684A19-CF14-4F7F-A1D0-C0E655A5B1B7}"/>
               </a:ext>
             </a:extLst>
           </p:cNvPr>
@@ -3281,7 +3281,7 @@
           <p:cNvPr id="2" name="Title 1">
             <a:extLst xmlns:a="http://schemas.openxmlformats.org/drawingml/2006/main">
               <a:ext uri="{FF2B5EF4-FFF2-40B4-BE49-F238E27FC236}">
-                <a16:creationId xmlns:a16="http://schemas.microsoft.com/office/drawing/2014/main" id="{918CC12A-CFBE-4808-A889-DBF9330270C5}"/>
+                <a16:creationId xmlns:a16="http://schemas.microsoft.com/office/drawing/2014/main" id="{04EA78C4-8533-4F7E-A95A-11F29D4C04E2}"/>
               </a:ext>
             </a:extLst>
           </p:cNvPr>
@@ -3313,7 +3313,7 @@
           <p:cNvPr id="3" name="Text Placeholder 2">
             <a:extLst xmlns:a="http://schemas.openxmlformats.org/drawingml/2006/main">
               <a:ext uri="{FF2B5EF4-FFF2-40B4-BE49-F238E27FC236}">
-                <a16:creationId xmlns:a16="http://schemas.microsoft.com/office/drawing/2014/main" id="{2A425F38-000F-40DE-B832-AFB475DA7EC5}"/>
+                <a16:creationId xmlns:a16="http://schemas.microsoft.com/office/drawing/2014/main" id="{63D212EA-4430-467E-AEA9-B6B1C2FB9617}"/>
               </a:ext>
             </a:extLst>
           </p:cNvPr>
@@ -3385,7 +3385,7 @@
           <p:cNvPr id="4" name="Content Placeholder 3">
             <a:extLst xmlns:a="http://schemas.openxmlformats.org/drawingml/2006/main">
               <a:ext uri="{FF2B5EF4-FFF2-40B4-BE49-F238E27FC236}">
-                <a16:creationId xmlns:a16="http://schemas.microsoft.com/office/drawing/2014/main" id="{C52129F4-0B7A-43B9-A72D-EA639EED356E}"/>
+                <a16:creationId xmlns:a16="http://schemas.microsoft.com/office/drawing/2014/main" id="{2DABD036-48BC-49BB-BABA-FD54EB483063}"/>
               </a:ext>
             </a:extLst>
           </p:cNvPr>
@@ -3489,7 +3489,7 @@
           <p:cNvPr id="5" name="Text Placeholder 4">
             <a:extLst xmlns:a="http://schemas.openxmlformats.org/drawingml/2006/main">
               <a:ext uri="{FF2B5EF4-FFF2-40B4-BE49-F238E27FC236}">
-                <a16:creationId xmlns:a16="http://schemas.microsoft.com/office/drawing/2014/main" id="{B62DB5D9-629C-437A-82A4-CC24FA4F08BD}"/>
+                <a16:creationId xmlns:a16="http://schemas.microsoft.com/office/drawing/2014/main" id="{A802F8D8-6385-4E8D-B7B2-CFF17766FC43}"/>
               </a:ext>
             </a:extLst>
           </p:cNvPr>
@@ -3561,7 +3561,7 @@
           <p:cNvPr id="6" name="Content Placeholder 5">
             <a:extLst xmlns:a="http://schemas.openxmlformats.org/drawingml/2006/main">
               <a:ext uri="{FF2B5EF4-FFF2-40B4-BE49-F238E27FC236}">
-                <a16:creationId xmlns:a16="http://schemas.microsoft.com/office/drawing/2014/main" id="{38434957-015E-4DF5-A9F8-2F771F044F43}"/>
+                <a16:creationId xmlns:a16="http://schemas.microsoft.com/office/drawing/2014/main" id="{84DD0C5A-9DE7-4AA0-B8D2-2276EAF0B289}"/>
               </a:ext>
             </a:extLst>
           </p:cNvPr>
@@ -3665,7 +3665,7 @@
           <p:cNvPr id="7" name="Date Placeholder 6">
             <a:extLst xmlns:a="http://schemas.openxmlformats.org/drawingml/2006/main">
               <a:ext uri="{FF2B5EF4-FFF2-40B4-BE49-F238E27FC236}">
-                <a16:creationId xmlns:a16="http://schemas.microsoft.com/office/drawing/2014/main" id="{0144005F-6C0A-4DCC-B1F7-2C203C3668B7}"/>
+                <a16:creationId xmlns:a16="http://schemas.microsoft.com/office/drawing/2014/main" id="{B1E85C94-FB57-4A45-B033-EB49E8FF83D9}"/>
               </a:ext>
             </a:extLst>
           </p:cNvPr>
@@ -3692,7 +3692,7 @@
           <p:cNvPr id="8" name="Footer Placeholder 7">
             <a:extLst xmlns:a="http://schemas.openxmlformats.org/drawingml/2006/main">
               <a:ext uri="{FF2B5EF4-FFF2-40B4-BE49-F238E27FC236}">
-                <a16:creationId xmlns:a16="http://schemas.microsoft.com/office/drawing/2014/main" id="{F89E5E9A-26CE-4F17-ADCF-13521DF918EA}"/>
+                <a16:creationId xmlns:a16="http://schemas.microsoft.com/office/drawing/2014/main" id="{2ABE33CE-60A3-4C24-B8DF-CD26A0729EC1}"/>
               </a:ext>
             </a:extLst>
           </p:cNvPr>
@@ -3715,7 +3715,7 @@
           <p:cNvPr id="9" name="Slide Number Placeholder 8">
             <a:extLst xmlns:a="http://schemas.openxmlformats.org/drawingml/2006/main">
               <a:ext uri="{FF2B5EF4-FFF2-40B4-BE49-F238E27FC236}">
-                <a16:creationId xmlns:a16="http://schemas.microsoft.com/office/drawing/2014/main" id="{046D2280-E426-46E9-A64B-CAA46EF72F52}"/>
+                <a16:creationId xmlns:a16="http://schemas.microsoft.com/office/drawing/2014/main" id="{E087F3AB-FCE1-4601-AA6A-2014131049FD}"/>
               </a:ext>
             </a:extLst>
           </p:cNvPr>
@@ -3759,7 +3759,7 @@
           <p:cNvPr id="2" name="Title 1">
             <a:extLst xmlns:a="http://schemas.openxmlformats.org/drawingml/2006/main">
               <a:ext uri="{FF2B5EF4-FFF2-40B4-BE49-F238E27FC236}">
-                <a16:creationId xmlns:a16="http://schemas.microsoft.com/office/drawing/2014/main" id="{810F85C1-F86D-4FB4-8171-B4994F3EFB89}"/>
+                <a16:creationId xmlns:a16="http://schemas.microsoft.com/office/drawing/2014/main" id="{B82282EA-EEC0-4BC7-8C1B-FFAED3E2D9F6}"/>
               </a:ext>
             </a:extLst>
           </p:cNvPr>
@@ -3786,7 +3786,7 @@
           <p:cNvPr id="3" name="Date Placeholder 2">
             <a:extLst xmlns:a="http://schemas.openxmlformats.org/drawingml/2006/main">
               <a:ext uri="{FF2B5EF4-FFF2-40B4-BE49-F238E27FC236}">
-                <a16:creationId xmlns:a16="http://schemas.microsoft.com/office/drawing/2014/main" id="{62B4796A-7645-40F0-85B9-424BC252B5E2}"/>
+                <a16:creationId xmlns:a16="http://schemas.microsoft.com/office/drawing/2014/main" id="{46E54949-B929-4579-B8EA-69BE009AA9B8}"/>
               </a:ext>
             </a:extLst>
           </p:cNvPr>
@@ -3813,7 +3813,7 @@
           <p:cNvPr id="4" name="Footer Placeholder 3">
             <a:extLst xmlns:a="http://schemas.openxmlformats.org/drawingml/2006/main">
               <a:ext uri="{FF2B5EF4-FFF2-40B4-BE49-F238E27FC236}">
-                <a16:creationId xmlns:a16="http://schemas.microsoft.com/office/drawing/2014/main" id="{A620B9F4-DD58-4B5A-9BF0-5806D71DCD4C}"/>
+                <a16:creationId xmlns:a16="http://schemas.microsoft.com/office/drawing/2014/main" id="{DD637F32-0030-42BA-99E2-E466D80136CA}"/>
               </a:ext>
             </a:extLst>
           </p:cNvPr>
@@ -3836,7 +3836,7 @@
           <p:cNvPr id="5" name="Slide Number Placeholder 4">
             <a:extLst xmlns:a="http://schemas.openxmlformats.org/drawingml/2006/main">
               <a:ext uri="{FF2B5EF4-FFF2-40B4-BE49-F238E27FC236}">
-                <a16:creationId xmlns:a16="http://schemas.microsoft.com/office/drawing/2014/main" id="{FF93B434-E464-4CFA-AE13-DA5D7B6D3F32}"/>
+                <a16:creationId xmlns:a16="http://schemas.microsoft.com/office/drawing/2014/main" id="{47547B20-D702-4713-8358-0F54D4A9F6DF}"/>
               </a:ext>
             </a:extLst>
           </p:cNvPr>
@@ -3880,7 +3880,7 @@
           <p:cNvPr id="2" name="Date Placeholder 1">
             <a:extLst xmlns:a="http://schemas.openxmlformats.org/drawingml/2006/main">
               <a:ext uri="{FF2B5EF4-FFF2-40B4-BE49-F238E27FC236}">
-                <a16:creationId xmlns:a16="http://schemas.microsoft.com/office/drawing/2014/main" id="{C6861321-968E-471F-B399-ED8610413EA5}"/>
+                <a16:creationId xmlns:a16="http://schemas.microsoft.com/office/drawing/2014/main" id="{670CD360-4A16-4F10-80E5-9BA5DCDD16E6}"/>
               </a:ext>
             </a:extLst>
           </p:cNvPr>
@@ -3907,7 +3907,7 @@
           <p:cNvPr id="3" name="Footer Placeholder 2">
             <a:extLst xmlns:a="http://schemas.openxmlformats.org/drawingml/2006/main">
               <a:ext uri="{FF2B5EF4-FFF2-40B4-BE49-F238E27FC236}">
-                <a16:creationId xmlns:a16="http://schemas.microsoft.com/office/drawing/2014/main" id="{12D72E40-5794-4524-9F6D-450EE367F3FE}"/>
+                <a16:creationId xmlns:a16="http://schemas.microsoft.com/office/drawing/2014/main" id="{92E205A4-8E4C-425E-9F23-576375C36746}"/>
               </a:ext>
             </a:extLst>
           </p:cNvPr>
@@ -3930,7 +3930,7 @@
           <p:cNvPr id="4" name="Slide Number Placeholder 3">
             <a:extLst xmlns:a="http://schemas.openxmlformats.org/drawingml/2006/main">
               <a:ext uri="{FF2B5EF4-FFF2-40B4-BE49-F238E27FC236}">
-                <a16:creationId xmlns:a16="http://schemas.microsoft.com/office/drawing/2014/main" id="{E8BD8497-36FF-409E-87DF-183FB0EDF747}"/>
+                <a16:creationId xmlns:a16="http://schemas.microsoft.com/office/drawing/2014/main" id="{3BE4F31E-816C-4E13-A175-40ADE07D9F6A}"/>
               </a:ext>
             </a:extLst>
           </p:cNvPr>
@@ -3974,7 +3974,7 @@
           <p:cNvPr id="2" name="Title 1">
             <a:extLst xmlns:a="http://schemas.openxmlformats.org/drawingml/2006/main">
               <a:ext uri="{FF2B5EF4-FFF2-40B4-BE49-F238E27FC236}">
-                <a16:creationId xmlns:a16="http://schemas.microsoft.com/office/drawing/2014/main" id="{D07FFCC3-AE17-4A58-94AA-ADDE319A09F6}"/>
+                <a16:creationId xmlns:a16="http://schemas.microsoft.com/office/drawing/2014/main" id="{FBCCE0EB-65F1-436B-B9C0-CEBC5C4B89F1}"/>
               </a:ext>
             </a:extLst>
           </p:cNvPr>
@@ -4011,7 +4011,7 @@
           <p:cNvPr id="3" name="Content Placeholder 2">
             <a:extLst xmlns:a="http://schemas.openxmlformats.org/drawingml/2006/main">
               <a:ext uri="{FF2B5EF4-FFF2-40B4-BE49-F238E27FC236}">
-                <a16:creationId xmlns:a16="http://schemas.microsoft.com/office/drawing/2014/main" id="{373A6AC9-E090-40DD-A635-BFBDF82D5D08}"/>
+                <a16:creationId xmlns:a16="http://schemas.microsoft.com/office/drawing/2014/main" id="{769178E1-D0C8-4551-8AAB-B6069ED3BF11}"/>
               </a:ext>
             </a:extLst>
           </p:cNvPr>
@@ -4115,7 +4115,7 @@
           <p:cNvPr id="4" name="Text Placeholder 3">
             <a:extLst xmlns:a="http://schemas.openxmlformats.org/drawingml/2006/main">
               <a:ext uri="{FF2B5EF4-FFF2-40B4-BE49-F238E27FC236}">
-                <a16:creationId xmlns:a16="http://schemas.microsoft.com/office/drawing/2014/main" id="{6EF0243B-2103-49FF-9F5F-C61F58F75006}"/>
+                <a16:creationId xmlns:a16="http://schemas.microsoft.com/office/drawing/2014/main" id="{A3890994-6925-4100-8805-E6CD3DD8AE0C}"/>
               </a:ext>
             </a:extLst>
           </p:cNvPr>
@@ -4187,7 +4187,7 @@
           <p:cNvPr id="5" name="Date Placeholder 4">
             <a:extLst xmlns:a="http://schemas.openxmlformats.org/drawingml/2006/main">
               <a:ext uri="{FF2B5EF4-FFF2-40B4-BE49-F238E27FC236}">
-                <a16:creationId xmlns:a16="http://schemas.microsoft.com/office/drawing/2014/main" id="{309C4E94-8D74-4AB5-B5CE-85320E8BF809}"/>
+                <a16:creationId xmlns:a16="http://schemas.microsoft.com/office/drawing/2014/main" id="{EB58C475-B6A0-4346-B115-8332D7FA09CB}"/>
               </a:ext>
             </a:extLst>
           </p:cNvPr>
@@ -4214,7 +4214,7 @@
           <p:cNvPr id="6" name="Footer Placeholder 5">
             <a:extLst xmlns:a="http://schemas.openxmlformats.org/drawingml/2006/main">
               <a:ext uri="{FF2B5EF4-FFF2-40B4-BE49-F238E27FC236}">
-                <a16:creationId xmlns:a16="http://schemas.microsoft.com/office/drawing/2014/main" id="{C1791874-B13B-49D7-9286-3B00B496D91E}"/>
+                <a16:creationId xmlns:a16="http://schemas.microsoft.com/office/drawing/2014/main" id="{D7A579F5-69A9-4BF5-8BBE-E560BAEEC857}"/>
               </a:ext>
             </a:extLst>
           </p:cNvPr>
@@ -4237,7 +4237,7 @@
           <p:cNvPr id="7" name="Slide Number Placeholder 6">
             <a:extLst xmlns:a="http://schemas.openxmlformats.org/drawingml/2006/main">
               <a:ext uri="{FF2B5EF4-FFF2-40B4-BE49-F238E27FC236}">
-                <a16:creationId xmlns:a16="http://schemas.microsoft.com/office/drawing/2014/main" id="{6C40383D-154C-4327-97BC-FEB1C8C99DF2}"/>
+                <a16:creationId xmlns:a16="http://schemas.microsoft.com/office/drawing/2014/main" id="{905A2040-6B29-4129-8B92-3BE61DD83125}"/>
               </a:ext>
             </a:extLst>
           </p:cNvPr>
@@ -4281,7 +4281,7 @@
           <p:cNvPr id="2" name="Title 1">
             <a:extLst xmlns:a="http://schemas.openxmlformats.org/drawingml/2006/main">
               <a:ext uri="{FF2B5EF4-FFF2-40B4-BE49-F238E27FC236}">
-                <a16:creationId xmlns:a16="http://schemas.microsoft.com/office/drawing/2014/main" id="{F541EF22-F161-418D-BDB5-52C3C92F7319}"/>
+                <a16:creationId xmlns:a16="http://schemas.microsoft.com/office/drawing/2014/main" id="{6ED73E0D-CF4B-4439-9AD5-4268EAE70CF4}"/>
               </a:ext>
             </a:extLst>
           </p:cNvPr>
@@ -4318,7 +4318,7 @@
           <p:cNvPr id="3" name="Picture Placeholder 2">
             <a:extLst xmlns:a="http://schemas.openxmlformats.org/drawingml/2006/main">
               <a:ext uri="{FF2B5EF4-FFF2-40B4-BE49-F238E27FC236}">
-                <a16:creationId xmlns:a16="http://schemas.microsoft.com/office/drawing/2014/main" id="{DDC10795-BAAA-4D0E-94D3-1E5D49A99E4D}"/>
+                <a16:creationId xmlns:a16="http://schemas.microsoft.com/office/drawing/2014/main" id="{E0DF9B4E-F101-445D-B83E-81E2A9ED629E}"/>
               </a:ext>
             </a:extLst>
           </p:cNvPr>
@@ -4383,7 +4383,7 @@
           <p:cNvPr id="4" name="Text Placeholder 3">
             <a:extLst xmlns:a="http://schemas.openxmlformats.org/drawingml/2006/main">
               <a:ext uri="{FF2B5EF4-FFF2-40B4-BE49-F238E27FC236}">
-                <a16:creationId xmlns:a16="http://schemas.microsoft.com/office/drawing/2014/main" id="{02F63EFA-0680-4163-8065-6A4AA81FEA6C}"/>
+                <a16:creationId xmlns:a16="http://schemas.microsoft.com/office/drawing/2014/main" id="{FD046CE0-D5E3-4AB1-8178-759FE111B078}"/>
               </a:ext>
             </a:extLst>
           </p:cNvPr>
@@ -4455,7 +4455,7 @@
           <p:cNvPr id="5" name="Date Placeholder 4">
             <a:extLst xmlns:a="http://schemas.openxmlformats.org/drawingml/2006/main">
               <a:ext uri="{FF2B5EF4-FFF2-40B4-BE49-F238E27FC236}">
-                <a16:creationId xmlns:a16="http://schemas.microsoft.com/office/drawing/2014/main" id="{4A44C1A5-FFA4-43A7-A7E9-3DE8CE8E697A}"/>
+                <a16:creationId xmlns:a16="http://schemas.microsoft.com/office/drawing/2014/main" id="{34813885-8BB0-465E-AC4A-21A385902953}"/>
               </a:ext>
             </a:extLst>
           </p:cNvPr>
@@ -4482,7 +4482,7 @@
           <p:cNvPr id="6" name="Footer Placeholder 5">
             <a:extLst xmlns:a="http://schemas.openxmlformats.org/drawingml/2006/main">
               <a:ext uri="{FF2B5EF4-FFF2-40B4-BE49-F238E27FC236}">
-                <a16:creationId xmlns:a16="http://schemas.microsoft.com/office/drawing/2014/main" id="{CCF59E35-A39B-48A8-B925-CE23B3698799}"/>
+                <a16:creationId xmlns:a16="http://schemas.microsoft.com/office/drawing/2014/main" id="{6C292F6B-3A4B-4DCA-8D3B-7E75143A1B2E}"/>
               </a:ext>
             </a:extLst>
           </p:cNvPr>
@@ -4505,7 +4505,7 @@
           <p:cNvPr id="7" name="Slide Number Placeholder 6">
             <a:extLst xmlns:a="http://schemas.openxmlformats.org/drawingml/2006/main">
               <a:ext uri="{FF2B5EF4-FFF2-40B4-BE49-F238E27FC236}">
-                <a16:creationId xmlns:a16="http://schemas.microsoft.com/office/drawing/2014/main" id="{CB71887D-9E47-4D3B-A51A-C2AE17C25641}"/>
+                <a16:creationId xmlns:a16="http://schemas.microsoft.com/office/drawing/2014/main" id="{CAD8FD78-AAD3-4521-9904-B000AE40D093}"/>
               </a:ext>
             </a:extLst>
           </p:cNvPr>
@@ -4554,7 +4554,7 @@
           <p:cNvPr id="2" name="Title Placeholder 1">
             <a:extLst xmlns:a="http://schemas.openxmlformats.org/drawingml/2006/main">
               <a:ext uri="{FF2B5EF4-FFF2-40B4-BE49-F238E27FC236}">
-                <a16:creationId xmlns:a16="http://schemas.microsoft.com/office/drawing/2014/main" id="{C76441A3-950E-456D-B83A-9828844A6E2F}"/>
+                <a16:creationId xmlns:a16="http://schemas.microsoft.com/office/drawing/2014/main" id="{60B704CE-4EA7-44F5-A2F2-C1F321F235D0}"/>
               </a:ext>
             </a:extLst>
           </p:cNvPr>
@@ -4591,7 +4591,7 @@
           <p:cNvPr id="3" name="Text Placeholder 2">
             <a:extLst xmlns:a="http://schemas.openxmlformats.org/drawingml/2006/main">
               <a:ext uri="{FF2B5EF4-FFF2-40B4-BE49-F238E27FC236}">
-                <a16:creationId xmlns:a16="http://schemas.microsoft.com/office/drawing/2014/main" id="{E827F8E7-4087-4C88-A50D-91927CEFF73D}"/>
+                <a16:creationId xmlns:a16="http://schemas.microsoft.com/office/drawing/2014/main" id="{602C9CA6-D155-411C-AD13-68A1FC65B7E6}"/>
               </a:ext>
             </a:extLst>
           </p:cNvPr>
@@ -4663,7 +4663,7 @@
           <p:cNvPr id="4" name="Date Placeholder 3">
             <a:extLst xmlns:a="http://schemas.openxmlformats.org/drawingml/2006/main">
               <a:ext uri="{FF2B5EF4-FFF2-40B4-BE49-F238E27FC236}">
-                <a16:creationId xmlns:a16="http://schemas.microsoft.com/office/drawing/2014/main" id="{9B02D621-D454-4000-AC95-9CEF012E8967}"/>
+                <a16:creationId xmlns:a16="http://schemas.microsoft.com/office/drawing/2014/main" id="{A6E49E4C-20AE-4898-ADFA-F815140F1A22}"/>
               </a:ext>
             </a:extLst>
           </p:cNvPr>
@@ -4709,7 +4709,7 @@
           <p:cNvPr id="5" name="Footer Placeholder 4">
             <a:extLst xmlns:a="http://schemas.openxmlformats.org/drawingml/2006/main">
               <a:ext uri="{FF2B5EF4-FFF2-40B4-BE49-F238E27FC236}">
-                <a16:creationId xmlns:a16="http://schemas.microsoft.com/office/drawing/2014/main" id="{05BB686D-0C9B-4101-BA0D-F280D1DB4474}"/>
+                <a16:creationId xmlns:a16="http://schemas.microsoft.com/office/drawing/2014/main" id="{5D8696B9-0FF4-4486-8B4B-943C93DA7E3B}"/>
               </a:ext>
             </a:extLst>
           </p:cNvPr>
@@ -4751,7 +4751,7 @@
           <p:cNvPr id="6" name="Slide Number Placeholder 5">
             <a:extLst xmlns:a="http://schemas.openxmlformats.org/drawingml/2006/main">
               <a:ext uri="{FF2B5EF4-FFF2-40B4-BE49-F238E27FC236}">
-                <a16:creationId xmlns:a16="http://schemas.microsoft.com/office/drawing/2014/main" id="{23B42F5D-96F8-46D6-9045-2FDBC530AFF1}"/>
+                <a16:creationId xmlns:a16="http://schemas.microsoft.com/office/drawing/2014/main" id="{B029E00E-43B0-4ABE-9FC8-BC60B048B6BD}"/>
               </a:ext>
             </a:extLst>
           </p:cNvPr>
@@ -4796,17 +4796,17 @@
   </p:cSld>
   <p:clrMap bg1="lt1" tx1="dk1" bg2="lt2" tx2="dk2" accent1="accent1" accent2="accent2" accent3="accent3" accent4="accent4" accent5="accent5" accent6="accent6" hlink="hlink" folHlink="folHlink"/>
   <p:sldLayoutIdLst>
-    <p:sldLayoutId xmlns:r="http://schemas.openxmlformats.org/officeDocument/2006/relationships" id="2147483649" r:id="Re34a5855711949f3"/>
-    <p:sldLayoutId xmlns:r="http://schemas.openxmlformats.org/officeDocument/2006/relationships" id="2147483650" r:id="R3796bb5c40614b2d"/>
-    <p:sldLayoutId xmlns:r="http://schemas.openxmlformats.org/officeDocument/2006/relationships" id="2147483651" r:id="Rf394fe03a22b4dd9"/>
-    <p:sldLayoutId xmlns:r="http://schemas.openxmlformats.org/officeDocument/2006/relationships" id="2147483652" r:id="R510d5431fd8749e9"/>
-    <p:sldLayoutId xmlns:r="http://schemas.openxmlformats.org/officeDocument/2006/relationships" id="2147483653" r:id="Raea71bfed01a4677"/>
-    <p:sldLayoutId xmlns:r="http://schemas.openxmlformats.org/officeDocument/2006/relationships" id="2147483654" r:id="Rc3c98d2d9fc7477d"/>
-    <p:sldLayoutId xmlns:r="http://schemas.openxmlformats.org/officeDocument/2006/relationships" id="2147483655" r:id="Rda1afdb45af446eb"/>
-    <p:sldLayoutId xmlns:r="http://schemas.openxmlformats.org/officeDocument/2006/relationships" id="2147483656" r:id="R14f813245f774afa"/>
-    <p:sldLayoutId xmlns:r="http://schemas.openxmlformats.org/officeDocument/2006/relationships" id="2147483657" r:id="Rf6d66edb321c4765"/>
-    <p:sldLayoutId xmlns:r="http://schemas.openxmlformats.org/officeDocument/2006/relationships" id="2147483658" r:id="R2cb2d314f34f45af"/>
-    <p:sldLayoutId xmlns:r="http://schemas.openxmlformats.org/officeDocument/2006/relationships" id="2147483659" r:id="R32c2875b7799435a"/>
+    <p:sldLayoutId xmlns:r="http://schemas.openxmlformats.org/officeDocument/2006/relationships" id="2147483649" r:id="R3f40161963e04a82"/>
+    <p:sldLayoutId xmlns:r="http://schemas.openxmlformats.org/officeDocument/2006/relationships" id="2147483650" r:id="Re1a0057192a04125"/>
+    <p:sldLayoutId xmlns:r="http://schemas.openxmlformats.org/officeDocument/2006/relationships" id="2147483651" r:id="Ra2d48133d6dc4ab7"/>
+    <p:sldLayoutId xmlns:r="http://schemas.openxmlformats.org/officeDocument/2006/relationships" id="2147483652" r:id="R5560b8b4643446a3"/>
+    <p:sldLayoutId xmlns:r="http://schemas.openxmlformats.org/officeDocument/2006/relationships" id="2147483653" r:id="Rd022e81f8ff04206"/>
+    <p:sldLayoutId xmlns:r="http://schemas.openxmlformats.org/officeDocument/2006/relationships" id="2147483654" r:id="Reba5a9417bc64abe"/>
+    <p:sldLayoutId xmlns:r="http://schemas.openxmlformats.org/officeDocument/2006/relationships" id="2147483655" r:id="R71b6e898975b4f41"/>
+    <p:sldLayoutId xmlns:r="http://schemas.openxmlformats.org/officeDocument/2006/relationships" id="2147483656" r:id="R255ff7a1d89c4f3c"/>
+    <p:sldLayoutId xmlns:r="http://schemas.openxmlformats.org/officeDocument/2006/relationships" id="2147483657" r:id="R07f11848d2984c50"/>
+    <p:sldLayoutId xmlns:r="http://schemas.openxmlformats.org/officeDocument/2006/relationships" id="2147483658" r:id="R3a0443c831c54d19"/>
+    <p:sldLayoutId xmlns:r="http://schemas.openxmlformats.org/officeDocument/2006/relationships" id="2147483659" r:id="R078c3798e5914e4a"/>
   </p:sldLayoutIdLst>
   <p:txStyles>
     <p:titleStyle>
@@ -5359,7 +5359,7 @@
           <p:cNvPr id="2" name="Rectangle 1">
             <a:extLst xmlns:a="http://schemas.openxmlformats.org/drawingml/2006/main">
               <a:ext uri="{FF2B5EF4-FFF2-40B4-BE49-F238E27FC236}">
-                <a16:creationId xmlns:a16="http://schemas.microsoft.com/office/drawing/2014/main" id="{BF1AA31A-654B-47C4-AE2F-26AB3046215D}"/>
+                <a16:creationId xmlns:a16="http://schemas.microsoft.com/office/drawing/2014/main" id="{AF58786A-A2BB-4921-9E55-A9424BE26E8C}"/>
               </a:ext>
             </a:extLst>
           </p:cNvPr>
@@ -5414,7 +5414,7 @@
           <p:cNvPr id="3" name="TextBox 2">
             <a:extLst xmlns:a="http://schemas.openxmlformats.org/drawingml/2006/main">
               <a:ext uri="{FF2B5EF4-FFF2-40B4-BE49-F238E27FC236}">
-                <a16:creationId xmlns:a16="http://schemas.microsoft.com/office/drawing/2014/main" id="{E2650A72-8FEE-4D24-8691-64C534D10C5A}"/>
+                <a16:creationId xmlns:a16="http://schemas.microsoft.com/office/drawing/2014/main" id="{F16D6A16-1563-4851-8ED6-3BE528181BEE}"/>
               </a:ext>
             </a:extLst>
           </p:cNvPr>
@@ -5461,7 +5461,7 @@
           <p:cNvPr id="4" name="TextBox 3">
             <a:extLst xmlns:a="http://schemas.openxmlformats.org/drawingml/2006/main">
               <a:ext uri="{FF2B5EF4-FFF2-40B4-BE49-F238E27FC236}">
-                <a16:creationId xmlns:a16="http://schemas.microsoft.com/office/drawing/2014/main" id="{F475B5F2-F672-4B7F-B21C-45C5E1FA0938}"/>
+                <a16:creationId xmlns:a16="http://schemas.microsoft.com/office/drawing/2014/main" id="{FEBA0398-C69B-4185-8A45-19D6343D7376}"/>
               </a:ext>
             </a:extLst>
           </p:cNvPr>
@@ -5509,7 +5509,7 @@
           <p:cNvPr id="5" name="TextBox 4">
             <a:extLst xmlns:a="http://schemas.openxmlformats.org/drawingml/2006/main">
               <a:ext uri="{FF2B5EF4-FFF2-40B4-BE49-F238E27FC236}">
-                <a16:creationId xmlns:a16="http://schemas.microsoft.com/office/drawing/2014/main" id="{F39E8090-6819-4033-B167-608D7499B246}"/>
+                <a16:creationId xmlns:a16="http://schemas.microsoft.com/office/drawing/2014/main" id="{07DF4125-6E47-4053-8EA1-319DA01D442F}"/>
               </a:ext>
             </a:extLst>
           </p:cNvPr>
@@ -5556,7 +5556,7 @@
           <p:cNvPr id="6" name="Rectangle 5">
             <a:extLst xmlns:a="http://schemas.openxmlformats.org/drawingml/2006/main">
               <a:ext uri="{FF2B5EF4-FFF2-40B4-BE49-F238E27FC236}">
-                <a16:creationId xmlns:a16="http://schemas.microsoft.com/office/drawing/2014/main" id="{6299660C-9F53-48EB-8E5B-87724311AB56}"/>
+                <a16:creationId xmlns:a16="http://schemas.microsoft.com/office/drawing/2014/main" id="{4FBAD4C5-C30A-40D3-99D4-F2BE0A377906}"/>
               </a:ext>
             </a:extLst>
           </p:cNvPr>
@@ -5611,7 +5611,7 @@
           <p:cNvPr id="7" name="TextBox 6">
             <a:extLst xmlns:a="http://schemas.openxmlformats.org/drawingml/2006/main">
               <a:ext uri="{FF2B5EF4-FFF2-40B4-BE49-F238E27FC236}">
-                <a16:creationId xmlns:a16="http://schemas.microsoft.com/office/drawing/2014/main" id="{D7EC3393-5506-4802-9417-871D289C4D17}"/>
+                <a16:creationId xmlns:a16="http://schemas.microsoft.com/office/drawing/2014/main" id="{3F98A473-3BA5-4E62-9BE0-E4D6F70E50D5}"/>
               </a:ext>
             </a:extLst>
           </p:cNvPr>
@@ -5658,7 +5658,7 @@
           <p:cNvPr id="8" name="TextBox 7">
             <a:extLst xmlns:a="http://schemas.openxmlformats.org/drawingml/2006/main">
               <a:ext uri="{FF2B5EF4-FFF2-40B4-BE49-F238E27FC236}">
-                <a16:creationId xmlns:a16="http://schemas.microsoft.com/office/drawing/2014/main" id="{4179D144-F6F3-4399-8367-D9A2C35E4FEB}"/>
+                <a16:creationId xmlns:a16="http://schemas.microsoft.com/office/drawing/2014/main" id="{6B282DFF-E335-44AE-A9F4-BD3908EDFE65}"/>
               </a:ext>
             </a:extLst>
           </p:cNvPr>
@@ -5695,7 +5695,7 @@
                 <a:ea typeface="Aptos"/>
                 <a:cs typeface="Aptos"/>
               </a:rPr>
-              <a:t>2026.07.27-28</a:t>
+              <a:t>2026.07.27-29</a:t>
             </a:r>
           </a:p>
         </p:txBody>
@@ -5705,7 +5705,7 @@
           <p:cNvPr id="9" name="TextBox 8">
             <a:extLst xmlns:a="http://schemas.openxmlformats.org/drawingml/2006/main">
               <a:ext uri="{FF2B5EF4-FFF2-40B4-BE49-F238E27FC236}">
-                <a16:creationId xmlns:a16="http://schemas.microsoft.com/office/drawing/2014/main" id="{1A48679A-A398-4A51-ABB9-004972921DB4}"/>
+                <a16:creationId xmlns:a16="http://schemas.microsoft.com/office/drawing/2014/main" id="{0A1EE518-06A1-4086-80B5-49D0C1B6A702}"/>
               </a:ext>
             </a:extLst>
           </p:cNvPr>
@@ -5773,7 +5773,7 @@
           <p:cNvPr id="10" name="TextBox 9">
             <a:extLst xmlns:a="http://schemas.openxmlformats.org/drawingml/2006/main">
               <a:ext uri="{FF2B5EF4-FFF2-40B4-BE49-F238E27FC236}">
-                <a16:creationId xmlns:a16="http://schemas.microsoft.com/office/drawing/2014/main" id="{F59DD49C-18FC-48CF-9588-D22A9364F6E3}"/>
+                <a16:creationId xmlns:a16="http://schemas.microsoft.com/office/drawing/2014/main" id="{507EFAC1-3F1D-47FA-BB7A-21D6BCBA89E0}"/>
               </a:ext>
             </a:extLst>
           </p:cNvPr>
@@ -5820,7 +5820,7 @@
           <p:cNvPr id="11" name="TextBox 10">
             <a:extLst xmlns:a="http://schemas.openxmlformats.org/drawingml/2006/main">
               <a:ext uri="{FF2B5EF4-FFF2-40B4-BE49-F238E27FC236}">
-                <a16:creationId xmlns:a16="http://schemas.microsoft.com/office/drawing/2014/main" id="{CEA2B152-7ABC-4027-B2E4-C4F6B8FF7CB6}"/>
+                <a16:creationId xmlns:a16="http://schemas.microsoft.com/office/drawing/2014/main" id="{267345D6-E76E-430B-8856-1249557104BB}"/>
               </a:ext>
             </a:extLst>
           </p:cNvPr>
@@ -5867,7 +5867,7 @@
           <p:cNvPr id="12" name="TextBox 11">
             <a:extLst xmlns:a="http://schemas.openxmlformats.org/drawingml/2006/main">
               <a:ext uri="{FF2B5EF4-FFF2-40B4-BE49-F238E27FC236}">
-                <a16:creationId xmlns:a16="http://schemas.microsoft.com/office/drawing/2014/main" id="{0B7D33F8-F7F9-4618-816C-ED6B239C7D5D}"/>
+                <a16:creationId xmlns:a16="http://schemas.microsoft.com/office/drawing/2014/main" id="{8F206651-948D-4BF6-9C8B-D117338A8BE4}"/>
               </a:ext>
             </a:extLst>
           </p:cNvPr>
@@ -5912,7 +5912,7 @@
     </p:spTree>
     <p:extLst>
       <p:ext uri="{BB962C8B-B14F-4D97-AF65-F5344CB8AC3E}">
-        <p14:creationId xmlns:p14="http://schemas.microsoft.com/office/powerpoint/2010/main" val="1018006966"/>
+        <p14:creationId xmlns:p14="http://schemas.microsoft.com/office/powerpoint/2010/main" val="813462376"/>
       </p:ext>
     </p:extLst>
   </p:cSld>
@@ -5936,7 +5936,7 @@
           <p:cNvPr id="2" name="TextBox 1">
             <a:extLst xmlns:a="http://schemas.openxmlformats.org/drawingml/2006/main">
               <a:ext uri="{FF2B5EF4-FFF2-40B4-BE49-F238E27FC236}">
-                <a16:creationId xmlns:a16="http://schemas.microsoft.com/office/drawing/2014/main" id="{0B9B70F3-3C51-422D-8CF4-9E81BD4C600A}"/>
+                <a16:creationId xmlns:a16="http://schemas.microsoft.com/office/drawing/2014/main" id="{2848318B-2D58-470D-AD7C-E7FA688F5CD1}"/>
               </a:ext>
             </a:extLst>
           </p:cNvPr>
@@ -5983,7 +5983,7 @@
           <p:cNvPr id="3" name="TextBox 2">
             <a:extLst xmlns:a="http://schemas.openxmlformats.org/drawingml/2006/main">
               <a:ext uri="{FF2B5EF4-FFF2-40B4-BE49-F238E27FC236}">
-                <a16:creationId xmlns:a16="http://schemas.microsoft.com/office/drawing/2014/main" id="{0F1CB047-E939-43F2-BB6D-A1142460F89C}"/>
+                <a16:creationId xmlns:a16="http://schemas.microsoft.com/office/drawing/2014/main" id="{A216D802-21E2-491F-B41C-90EA93C8782A}"/>
               </a:ext>
             </a:extLst>
           </p:cNvPr>
@@ -6030,7 +6030,7 @@
           <p:cNvPr id="4" name="Rectangle 3">
             <a:extLst xmlns:a="http://schemas.openxmlformats.org/drawingml/2006/main">
               <a:ext uri="{FF2B5EF4-FFF2-40B4-BE49-F238E27FC236}">
-                <a16:creationId xmlns:a16="http://schemas.microsoft.com/office/drawing/2014/main" id="{59915FBD-F8E5-496D-84F2-E76364492DFD}"/>
+                <a16:creationId xmlns:a16="http://schemas.microsoft.com/office/drawing/2014/main" id="{6D195B96-2FEF-48D6-B5F6-E0E8EEEFC189}"/>
               </a:ext>
             </a:extLst>
           </p:cNvPr>
@@ -6085,7 +6085,7 @@
           <p:cNvPr id="5" name="Rectangle 4">
             <a:extLst xmlns:a="http://schemas.openxmlformats.org/drawingml/2006/main">
               <a:ext uri="{FF2B5EF4-FFF2-40B4-BE49-F238E27FC236}">
-                <a16:creationId xmlns:a16="http://schemas.microsoft.com/office/drawing/2014/main" id="{AFC08D2E-ECC4-4130-844B-71E0EB22DA99}"/>
+                <a16:creationId xmlns:a16="http://schemas.microsoft.com/office/drawing/2014/main" id="{71969086-7A07-4B20-85D7-3D11230111E0}"/>
               </a:ext>
             </a:extLst>
           </p:cNvPr>
@@ -6140,7 +6140,7 @@
           <p:cNvPr id="6" name="TextBox 5">
             <a:extLst xmlns:a="http://schemas.openxmlformats.org/drawingml/2006/main">
               <a:ext uri="{FF2B5EF4-FFF2-40B4-BE49-F238E27FC236}">
-                <a16:creationId xmlns:a16="http://schemas.microsoft.com/office/drawing/2014/main" id="{F67687B5-1110-40D4-B8A8-FC38A043B3E8}"/>
+                <a16:creationId xmlns:a16="http://schemas.microsoft.com/office/drawing/2014/main" id="{45A6781B-8957-4A5D-B2B5-FE6BE9FE6680}"/>
               </a:ext>
             </a:extLst>
           </p:cNvPr>
@@ -6177,7 +6177,7 @@
                 <a:ea typeface="Aptos"/>
                 <a:cs typeface="Aptos"/>
               </a:rPr>
-              <a:t>Julkinen riippumaton evidenssikooste · 2026.07.27-28 · 2026-07-27 · Lähteet: EPO; Saksa — viralliset tuomiot; WIPO</a:t>
+              <a:t>Julkinen riippumaton evidenssikooste · 2026.07.27-29 · 2026-07-27 · Lähteet: EPO; Saksa — viralliset tuomiot; WIPO</a:t>
             </a:r>
           </a:p>
         </p:txBody>
@@ -6187,7 +6187,7 @@
           <p:cNvPr id="7" name="TextBox 6">
             <a:extLst xmlns:a="http://schemas.openxmlformats.org/drawingml/2006/main">
               <a:ext uri="{FF2B5EF4-FFF2-40B4-BE49-F238E27FC236}">
-                <a16:creationId xmlns:a16="http://schemas.microsoft.com/office/drawing/2014/main" id="{8DA02B9D-0D55-4DB0-B517-A05E1A05AD52}"/>
+                <a16:creationId xmlns:a16="http://schemas.microsoft.com/office/drawing/2014/main" id="{A09A2201-DB0E-4875-A314-991770DF4C2A}"/>
               </a:ext>
             </a:extLst>
           </p:cNvPr>
@@ -6234,7 +6234,7 @@
           <p:cNvPr id="8" name="TextBox 7">
             <a:extLst xmlns:a="http://schemas.openxmlformats.org/drawingml/2006/main">
               <a:ext uri="{FF2B5EF4-FFF2-40B4-BE49-F238E27FC236}">
-                <a16:creationId xmlns:a16="http://schemas.microsoft.com/office/drawing/2014/main" id="{E98F788C-2B59-4A35-AD10-AAEEF5E5FEB1}"/>
+                <a16:creationId xmlns:a16="http://schemas.microsoft.com/office/drawing/2014/main" id="{A947DD42-E46B-4870-82FC-1A4B89ECF6B9}"/>
               </a:ext>
             </a:extLst>
           </p:cNvPr>
@@ -6281,7 +6281,7 @@
           <p:cNvPr id="9" name="TextBox 8">
             <a:extLst xmlns:a="http://schemas.openxmlformats.org/drawingml/2006/main">
               <a:ext uri="{FF2B5EF4-FFF2-40B4-BE49-F238E27FC236}">
-                <a16:creationId xmlns:a16="http://schemas.microsoft.com/office/drawing/2014/main" id="{34DC0A67-9007-4882-9271-ABB0E7D1D10F}"/>
+                <a16:creationId xmlns:a16="http://schemas.microsoft.com/office/drawing/2014/main" id="{439C6AC1-7082-42F7-BA45-AB3C1DA9C267}"/>
               </a:ext>
             </a:extLst>
           </p:cNvPr>
@@ -6378,7 +6378,7 @@
           <p:cNvPr id="10" name="Rounded Rectangle 9">
             <a:extLst xmlns:a="http://schemas.openxmlformats.org/drawingml/2006/main">
               <a:ext uri="{FF2B5EF4-FFF2-40B4-BE49-F238E27FC236}">
-                <a16:creationId xmlns:a16="http://schemas.microsoft.com/office/drawing/2014/main" id="{D4726D39-7463-4E98-9529-17CF41B79284}"/>
+                <a16:creationId xmlns:a16="http://schemas.microsoft.com/office/drawing/2014/main" id="{5BDC0990-716A-4640-B4F0-168DF589EC98}"/>
               </a:ext>
             </a:extLst>
           </p:cNvPr>
@@ -6435,7 +6435,7 @@
           <p:cNvPr id="11" name="TextBox 10">
             <a:extLst xmlns:a="http://schemas.openxmlformats.org/drawingml/2006/main">
               <a:ext uri="{FF2B5EF4-FFF2-40B4-BE49-F238E27FC236}">
-                <a16:creationId xmlns:a16="http://schemas.microsoft.com/office/drawing/2014/main" id="{7D91898F-9191-47C4-AFF5-9A18BE58AAC6}"/>
+                <a16:creationId xmlns:a16="http://schemas.microsoft.com/office/drawing/2014/main" id="{96FFC8BF-733B-40CB-BDC1-1EA6FBB7F1CB}"/>
               </a:ext>
             </a:extLst>
           </p:cNvPr>
@@ -6482,7 +6482,7 @@
           <p:cNvPr id="12" name="TextBox 11">
             <a:extLst xmlns:a="http://schemas.openxmlformats.org/drawingml/2006/main">
               <a:ext uri="{FF2B5EF4-FFF2-40B4-BE49-F238E27FC236}">
-                <a16:creationId xmlns:a16="http://schemas.microsoft.com/office/drawing/2014/main" id="{A7D9C172-DBC8-406C-B141-F4A658EFF883}"/>
+                <a16:creationId xmlns:a16="http://schemas.microsoft.com/office/drawing/2014/main" id="{B65AB046-CE42-4FA1-897A-A717331B35B1}"/>
               </a:ext>
             </a:extLst>
           </p:cNvPr>
@@ -6527,7 +6527,7 @@
     </p:spTree>
     <p:extLst>
       <p:ext uri="{BB962C8B-B14F-4D97-AF65-F5344CB8AC3E}">
-        <p14:creationId xmlns:p14="http://schemas.microsoft.com/office/powerpoint/2010/main" val="1333522639"/>
+        <p14:creationId xmlns:p14="http://schemas.microsoft.com/office/powerpoint/2010/main" val="1273787546"/>
       </p:ext>
     </p:extLst>
   </p:cSld>
@@ -6551,7 +6551,7 @@
           <p:cNvPr id="2" name="TextBox 1">
             <a:extLst xmlns:a="http://schemas.openxmlformats.org/drawingml/2006/main">
               <a:ext uri="{FF2B5EF4-FFF2-40B4-BE49-F238E27FC236}">
-                <a16:creationId xmlns:a16="http://schemas.microsoft.com/office/drawing/2014/main" id="{8559B789-3582-4A63-A450-834537046D01}"/>
+                <a16:creationId xmlns:a16="http://schemas.microsoft.com/office/drawing/2014/main" id="{42C8EAB4-E70D-440D-8429-E2A99172B041}"/>
               </a:ext>
             </a:extLst>
           </p:cNvPr>
@@ -6598,7 +6598,7 @@
           <p:cNvPr id="3" name="TextBox 2">
             <a:extLst xmlns:a="http://schemas.openxmlformats.org/drawingml/2006/main">
               <a:ext uri="{FF2B5EF4-FFF2-40B4-BE49-F238E27FC236}">
-                <a16:creationId xmlns:a16="http://schemas.microsoft.com/office/drawing/2014/main" id="{14A7A66B-E7F5-4693-9564-9D0FCD08DB46}"/>
+                <a16:creationId xmlns:a16="http://schemas.microsoft.com/office/drawing/2014/main" id="{D2CE23F2-1C36-40D4-AC5C-EB0E82D5E3B7}"/>
               </a:ext>
             </a:extLst>
           </p:cNvPr>
@@ -6645,7 +6645,7 @@
           <p:cNvPr id="4" name="Rectangle 3">
             <a:extLst xmlns:a="http://schemas.openxmlformats.org/drawingml/2006/main">
               <a:ext uri="{FF2B5EF4-FFF2-40B4-BE49-F238E27FC236}">
-                <a16:creationId xmlns:a16="http://schemas.microsoft.com/office/drawing/2014/main" id="{38F8129F-9289-4524-B41D-4E65DF4CF557}"/>
+                <a16:creationId xmlns:a16="http://schemas.microsoft.com/office/drawing/2014/main" id="{94FDB89C-2D58-46AC-9768-B6DA4CEB4A43}"/>
               </a:ext>
             </a:extLst>
           </p:cNvPr>
@@ -6700,7 +6700,7 @@
           <p:cNvPr id="5" name="Rectangle 4">
             <a:extLst xmlns:a="http://schemas.openxmlformats.org/drawingml/2006/main">
               <a:ext uri="{FF2B5EF4-FFF2-40B4-BE49-F238E27FC236}">
-                <a16:creationId xmlns:a16="http://schemas.microsoft.com/office/drawing/2014/main" id="{3AD8D2E2-3C38-453B-A167-0EE1611D9CE0}"/>
+                <a16:creationId xmlns:a16="http://schemas.microsoft.com/office/drawing/2014/main" id="{5274ACF5-29E4-48BC-8FDF-EDF9BF621CD1}"/>
               </a:ext>
             </a:extLst>
           </p:cNvPr>
@@ -6755,7 +6755,7 @@
           <p:cNvPr id="6" name="TextBox 5">
             <a:extLst xmlns:a="http://schemas.openxmlformats.org/drawingml/2006/main">
               <a:ext uri="{FF2B5EF4-FFF2-40B4-BE49-F238E27FC236}">
-                <a16:creationId xmlns:a16="http://schemas.microsoft.com/office/drawing/2014/main" id="{DAD10D34-421A-4227-9FCC-7C2F353EAE2F}"/>
+                <a16:creationId xmlns:a16="http://schemas.microsoft.com/office/drawing/2014/main" id="{9F8F95DE-5519-4F28-919D-0252AD3602F5}"/>
               </a:ext>
             </a:extLst>
           </p:cNvPr>
@@ -6792,7 +6792,7 @@
                 <a:ea typeface="Aptos"/>
                 <a:cs typeface="Aptos"/>
               </a:rPr>
-              <a:t>Julkinen riippumaton evidenssikooste · 2026.07.27-28 · 2026-07-27 · Lähteet: EPO Register; EP3032975B2; 8 Ni 18/24 (EP); 7 O 3341/24</a:t>
+              <a:t>Julkinen riippumaton evidenssikooste · 2026.07.27-29 · 2026-07-27 · Lähteet: EPO Register; EP3032975B2; 8 Ni 18/24 (EP); 7 O 3341/24</a:t>
             </a:r>
           </a:p>
         </p:txBody>
@@ -6802,7 +6802,7 @@
           <p:cNvPr id="7" name="TextBox 6">
             <a:extLst xmlns:a="http://schemas.openxmlformats.org/drawingml/2006/main">
               <a:ext uri="{FF2B5EF4-FFF2-40B4-BE49-F238E27FC236}">
-                <a16:creationId xmlns:a16="http://schemas.microsoft.com/office/drawing/2014/main" id="{8FC94239-3715-4CBD-B5B9-E3042D4C5617}"/>
+                <a16:creationId xmlns:a16="http://schemas.microsoft.com/office/drawing/2014/main" id="{A3A02698-AD9D-42FA-AFE2-F5412B6C17AC}"/>
               </a:ext>
             </a:extLst>
           </p:cNvPr>
@@ -6849,7 +6849,7 @@
           <p:cNvPr id="8" name="Rounded Rectangle 7">
             <a:extLst xmlns:a="http://schemas.openxmlformats.org/drawingml/2006/main">
               <a:ext uri="{FF2B5EF4-FFF2-40B4-BE49-F238E27FC236}">
-                <a16:creationId xmlns:a16="http://schemas.microsoft.com/office/drawing/2014/main" id="{0DCCE076-48E5-455C-892F-4E9F4C82BE72}"/>
+                <a16:creationId xmlns:a16="http://schemas.microsoft.com/office/drawing/2014/main" id="{99952BDB-09FA-4139-9713-A010E88F280A}"/>
               </a:ext>
             </a:extLst>
           </p:cNvPr>
@@ -6906,7 +6906,7 @@
           <p:cNvPr id="9" name="TextBox 8">
             <a:extLst xmlns:a="http://schemas.openxmlformats.org/drawingml/2006/main">
               <a:ext uri="{FF2B5EF4-FFF2-40B4-BE49-F238E27FC236}">
-                <a16:creationId xmlns:a16="http://schemas.microsoft.com/office/drawing/2014/main" id="{F5562F96-914F-4125-BC86-C6F1671BEA21}"/>
+                <a16:creationId xmlns:a16="http://schemas.microsoft.com/office/drawing/2014/main" id="{7B80285D-4A1F-4DBC-BF10-4726AA709C1C}"/>
               </a:ext>
             </a:extLst>
           </p:cNvPr>
@@ -6953,7 +6953,7 @@
           <p:cNvPr id="10" name="TextBox 9">
             <a:extLst xmlns:a="http://schemas.openxmlformats.org/drawingml/2006/main">
               <a:ext uri="{FF2B5EF4-FFF2-40B4-BE49-F238E27FC236}">
-                <a16:creationId xmlns:a16="http://schemas.microsoft.com/office/drawing/2014/main" id="{A354606C-BC4F-4F65-A40F-E843AA839743}"/>
+                <a16:creationId xmlns:a16="http://schemas.microsoft.com/office/drawing/2014/main" id="{77F4ECEE-5234-4454-8E20-BD28C303AEDA}"/>
               </a:ext>
             </a:extLst>
           </p:cNvPr>
@@ -7000,7 +7000,7 @@
           <p:cNvPr id="11" name="Rounded Rectangle 10">
             <a:extLst xmlns:a="http://schemas.openxmlformats.org/drawingml/2006/main">
               <a:ext uri="{FF2B5EF4-FFF2-40B4-BE49-F238E27FC236}">
-                <a16:creationId xmlns:a16="http://schemas.microsoft.com/office/drawing/2014/main" id="{62440528-5F5C-42E6-AACA-BD6855265C55}"/>
+                <a16:creationId xmlns:a16="http://schemas.microsoft.com/office/drawing/2014/main" id="{521C509E-C85E-469F-B362-74AF00FA8126}"/>
               </a:ext>
             </a:extLst>
           </p:cNvPr>
@@ -7057,7 +7057,7 @@
           <p:cNvPr id="12" name="TextBox 11">
             <a:extLst xmlns:a="http://schemas.openxmlformats.org/drawingml/2006/main">
               <a:ext uri="{FF2B5EF4-FFF2-40B4-BE49-F238E27FC236}">
-                <a16:creationId xmlns:a16="http://schemas.microsoft.com/office/drawing/2014/main" id="{3C92FD77-5841-4358-A154-D770D28C70BC}"/>
+                <a16:creationId xmlns:a16="http://schemas.microsoft.com/office/drawing/2014/main" id="{455298BE-7ADD-4EC5-BD36-AE65A943D3A1}"/>
               </a:ext>
             </a:extLst>
           </p:cNvPr>
@@ -7104,7 +7104,7 @@
           <p:cNvPr id="13" name="TextBox 12">
             <a:extLst xmlns:a="http://schemas.openxmlformats.org/drawingml/2006/main">
               <a:ext uri="{FF2B5EF4-FFF2-40B4-BE49-F238E27FC236}">
-                <a16:creationId xmlns:a16="http://schemas.microsoft.com/office/drawing/2014/main" id="{92DF24BA-DE82-403F-91E3-CD74A7E68356}"/>
+                <a16:creationId xmlns:a16="http://schemas.microsoft.com/office/drawing/2014/main" id="{8201CFA4-C341-4C64-9BC2-FD7BBC3D3543}"/>
               </a:ext>
             </a:extLst>
           </p:cNvPr>
@@ -7151,7 +7151,7 @@
           <p:cNvPr id="14" name="Rounded Rectangle 13">
             <a:extLst xmlns:a="http://schemas.openxmlformats.org/drawingml/2006/main">
               <a:ext uri="{FF2B5EF4-FFF2-40B4-BE49-F238E27FC236}">
-                <a16:creationId xmlns:a16="http://schemas.microsoft.com/office/drawing/2014/main" id="{8A0946B8-3BC1-461D-B67D-49CD613EECA3}"/>
+                <a16:creationId xmlns:a16="http://schemas.microsoft.com/office/drawing/2014/main" id="{8902DE03-EB2B-403A-9BDF-79021E185217}"/>
               </a:ext>
             </a:extLst>
           </p:cNvPr>
@@ -7208,7 +7208,7 @@
           <p:cNvPr id="15" name="TextBox 14">
             <a:extLst xmlns:a="http://schemas.openxmlformats.org/drawingml/2006/main">
               <a:ext uri="{FF2B5EF4-FFF2-40B4-BE49-F238E27FC236}">
-                <a16:creationId xmlns:a16="http://schemas.microsoft.com/office/drawing/2014/main" id="{B4333E7F-FD55-4D8C-BB3F-C2017A77696F}"/>
+                <a16:creationId xmlns:a16="http://schemas.microsoft.com/office/drawing/2014/main" id="{2A29E5B1-128A-466F-87EC-6E5C2D3927EC}"/>
               </a:ext>
             </a:extLst>
           </p:cNvPr>
@@ -7255,7 +7255,7 @@
           <p:cNvPr id="16" name="TextBox 15">
             <a:extLst xmlns:a="http://schemas.openxmlformats.org/drawingml/2006/main">
               <a:ext uri="{FF2B5EF4-FFF2-40B4-BE49-F238E27FC236}">
-                <a16:creationId xmlns:a16="http://schemas.microsoft.com/office/drawing/2014/main" id="{3E535F87-387B-422B-9F8B-65BB1461109D}"/>
+                <a16:creationId xmlns:a16="http://schemas.microsoft.com/office/drawing/2014/main" id="{C2438E7C-A8C9-447E-8E9D-5EF23FA200A1}"/>
               </a:ext>
             </a:extLst>
           </p:cNvPr>
@@ -7302,7 +7302,7 @@
           <p:cNvPr id="17" name="TextBox 16">
             <a:extLst xmlns:a="http://schemas.openxmlformats.org/drawingml/2006/main">
               <a:ext uri="{FF2B5EF4-FFF2-40B4-BE49-F238E27FC236}">
-                <a16:creationId xmlns:a16="http://schemas.microsoft.com/office/drawing/2014/main" id="{FD255879-ADD5-4205-B65E-9701DCE2C8D7}"/>
+                <a16:creationId xmlns:a16="http://schemas.microsoft.com/office/drawing/2014/main" id="{BA73BD3A-D789-4226-AFE5-3D6C519F030B}"/>
               </a:ext>
             </a:extLst>
           </p:cNvPr>
@@ -7349,7 +7349,7 @@
           <p:cNvPr id="18" name="Rounded Rectangle 17">
             <a:extLst xmlns:a="http://schemas.openxmlformats.org/drawingml/2006/main">
               <a:ext uri="{FF2B5EF4-FFF2-40B4-BE49-F238E27FC236}">
-                <a16:creationId xmlns:a16="http://schemas.microsoft.com/office/drawing/2014/main" id="{F453CBC6-56D9-4AF2-811E-38CA490501B7}"/>
+                <a16:creationId xmlns:a16="http://schemas.microsoft.com/office/drawing/2014/main" id="{CF478FE3-7589-4BB5-B221-2152DE47C33B}"/>
               </a:ext>
             </a:extLst>
           </p:cNvPr>
@@ -7406,7 +7406,7 @@
           <p:cNvPr id="19" name="TextBox 18">
             <a:extLst xmlns:a="http://schemas.openxmlformats.org/drawingml/2006/main">
               <a:ext uri="{FF2B5EF4-FFF2-40B4-BE49-F238E27FC236}">
-                <a16:creationId xmlns:a16="http://schemas.microsoft.com/office/drawing/2014/main" id="{A2E625A5-FD31-4598-9E8B-9243B4EA904A}"/>
+                <a16:creationId xmlns:a16="http://schemas.microsoft.com/office/drawing/2014/main" id="{8934583A-3F7C-4154-BB53-ED634E6B633B}"/>
               </a:ext>
             </a:extLst>
           </p:cNvPr>
@@ -7453,7 +7453,7 @@
           <p:cNvPr id="20" name="TextBox 19">
             <a:extLst xmlns:a="http://schemas.openxmlformats.org/drawingml/2006/main">
               <a:ext uri="{FF2B5EF4-FFF2-40B4-BE49-F238E27FC236}">
-                <a16:creationId xmlns:a16="http://schemas.microsoft.com/office/drawing/2014/main" id="{DD72239C-175D-4B36-9350-5A1C37470662}"/>
+                <a16:creationId xmlns:a16="http://schemas.microsoft.com/office/drawing/2014/main" id="{A8102184-6803-4CA5-9ACA-645CDA92BA7B}"/>
               </a:ext>
             </a:extLst>
           </p:cNvPr>
@@ -7498,7 +7498,7 @@
     </p:spTree>
     <p:extLst>
       <p:ext uri="{BB962C8B-B14F-4D97-AF65-F5344CB8AC3E}">
-        <p14:creationId xmlns:p14="http://schemas.microsoft.com/office/powerpoint/2010/main" val="441847506"/>
+        <p14:creationId xmlns:p14="http://schemas.microsoft.com/office/powerpoint/2010/main" val="838133396"/>
       </p:ext>
     </p:extLst>
   </p:cSld>
@@ -7522,7 +7522,7 @@
           <p:cNvPr id="2" name="TextBox 1">
             <a:extLst xmlns:a="http://schemas.openxmlformats.org/drawingml/2006/main">
               <a:ext uri="{FF2B5EF4-FFF2-40B4-BE49-F238E27FC236}">
-                <a16:creationId xmlns:a16="http://schemas.microsoft.com/office/drawing/2014/main" id="{A2B31D93-B4AC-4834-A88A-CD253382876E}"/>
+                <a16:creationId xmlns:a16="http://schemas.microsoft.com/office/drawing/2014/main" id="{AC455D1E-7606-4BAE-82D0-722CEF750905}"/>
               </a:ext>
             </a:extLst>
           </p:cNvPr>
@@ -7569,7 +7569,7 @@
           <p:cNvPr id="3" name="TextBox 2">
             <a:extLst xmlns:a="http://schemas.openxmlformats.org/drawingml/2006/main">
               <a:ext uri="{FF2B5EF4-FFF2-40B4-BE49-F238E27FC236}">
-                <a16:creationId xmlns:a16="http://schemas.microsoft.com/office/drawing/2014/main" id="{0477E2B2-ED4F-4743-BFDA-72E63FFDD5D8}"/>
+                <a16:creationId xmlns:a16="http://schemas.microsoft.com/office/drawing/2014/main" id="{107CFEF0-6800-4E07-9373-9AD4AF3CEDED}"/>
               </a:ext>
             </a:extLst>
           </p:cNvPr>
@@ -7616,7 +7616,7 @@
           <p:cNvPr id="4" name="Rectangle 3">
             <a:extLst xmlns:a="http://schemas.openxmlformats.org/drawingml/2006/main">
               <a:ext uri="{FF2B5EF4-FFF2-40B4-BE49-F238E27FC236}">
-                <a16:creationId xmlns:a16="http://schemas.microsoft.com/office/drawing/2014/main" id="{F132CCEE-0EBA-4651-A33C-FBEA949DFB2A}"/>
+                <a16:creationId xmlns:a16="http://schemas.microsoft.com/office/drawing/2014/main" id="{D9F71614-2CE0-4DF2-A577-F8B650935362}"/>
               </a:ext>
             </a:extLst>
           </p:cNvPr>
@@ -7671,7 +7671,7 @@
           <p:cNvPr id="5" name="Rectangle 4">
             <a:extLst xmlns:a="http://schemas.openxmlformats.org/drawingml/2006/main">
               <a:ext uri="{FF2B5EF4-FFF2-40B4-BE49-F238E27FC236}">
-                <a16:creationId xmlns:a16="http://schemas.microsoft.com/office/drawing/2014/main" id="{2168D24E-A62B-436A-B5D9-6366ACF2485B}"/>
+                <a16:creationId xmlns:a16="http://schemas.microsoft.com/office/drawing/2014/main" id="{D0143BE9-48AC-42E8-9371-B65E9D4213F4}"/>
               </a:ext>
             </a:extLst>
           </p:cNvPr>
@@ -7726,7 +7726,7 @@
           <p:cNvPr id="6" name="TextBox 5">
             <a:extLst xmlns:a="http://schemas.openxmlformats.org/drawingml/2006/main">
               <a:ext uri="{FF2B5EF4-FFF2-40B4-BE49-F238E27FC236}">
-                <a16:creationId xmlns:a16="http://schemas.microsoft.com/office/drawing/2014/main" id="{26F6FBB7-6055-4B57-B867-4C7A1C8ABA6E}"/>
+                <a16:creationId xmlns:a16="http://schemas.microsoft.com/office/drawing/2014/main" id="{1BE0E5BA-5C35-4607-AE73-7EA1B30B3366}"/>
               </a:ext>
             </a:extLst>
           </p:cNvPr>
@@ -7763,7 +7763,7 @@
                 <a:ea typeface="Aptos"/>
                 <a:cs typeface="Aptos"/>
               </a:rPr>
-              <a:t>Julkinen riippumaton evidenssikooste · 2026.07.27-28 · 2026-07-27 · Lähteet: World Bank; Statistics Canada; Health Canada; NZ Ministry of Health; Sejm; FHM; FTC</a:t>
+              <a:t>Julkinen riippumaton evidenssikooste · 2026.07.27-29 · 2026-07-27 · Lähteet: World Bank; Statistics Canada; Health Canada; NZ Ministry of Health; Sejm; FHM; FTC</a:t>
             </a:r>
           </a:p>
         </p:txBody>
@@ -7773,7 +7773,7 @@
           <p:cNvPr id="7" name="TextBox 6">
             <a:extLst xmlns:a="http://schemas.openxmlformats.org/drawingml/2006/main">
               <a:ext uri="{FF2B5EF4-FFF2-40B4-BE49-F238E27FC236}">
-                <a16:creationId xmlns:a16="http://schemas.microsoft.com/office/drawing/2014/main" id="{16285C28-CE04-4429-846A-787CB8E6B816}"/>
+                <a16:creationId xmlns:a16="http://schemas.microsoft.com/office/drawing/2014/main" id="{2914A314-3CA1-4CF0-ABB8-EC2D43F77EC6}"/>
               </a:ext>
             </a:extLst>
           </p:cNvPr>
@@ -7820,7 +7820,7 @@
           <p:cNvPr id="8" name="Rounded Rectangle 7">
             <a:extLst xmlns:a="http://schemas.openxmlformats.org/drawingml/2006/main">
               <a:ext uri="{FF2B5EF4-FFF2-40B4-BE49-F238E27FC236}">
-                <a16:creationId xmlns:a16="http://schemas.microsoft.com/office/drawing/2014/main" id="{E253F11A-B544-47BF-AA3E-18594C2FE5C8}"/>
+                <a16:creationId xmlns:a16="http://schemas.microsoft.com/office/drawing/2014/main" id="{B73F52C2-D051-42DC-BA99-244E9C3EB7DA}"/>
               </a:ext>
             </a:extLst>
           </p:cNvPr>
@@ -7877,7 +7877,7 @@
           <p:cNvPr id="9" name="TextBox 8">
             <a:extLst xmlns:a="http://schemas.openxmlformats.org/drawingml/2006/main">
               <a:ext uri="{FF2B5EF4-FFF2-40B4-BE49-F238E27FC236}">
-                <a16:creationId xmlns:a16="http://schemas.microsoft.com/office/drawing/2014/main" id="{1C309BE5-B650-4393-A5DC-EF1952FF885F}"/>
+                <a16:creationId xmlns:a16="http://schemas.microsoft.com/office/drawing/2014/main" id="{37B2A075-F927-406B-A6A1-8A99B0F2BCAE}"/>
               </a:ext>
             </a:extLst>
           </p:cNvPr>
@@ -7924,7 +7924,7 @@
           <p:cNvPr id="10" name="TextBox 9">
             <a:extLst xmlns:a="http://schemas.openxmlformats.org/drawingml/2006/main">
               <a:ext uri="{FF2B5EF4-FFF2-40B4-BE49-F238E27FC236}">
-                <a16:creationId xmlns:a16="http://schemas.microsoft.com/office/drawing/2014/main" id="{7517A0BA-95AC-4519-95BC-F3B62B94D3BC}"/>
+                <a16:creationId xmlns:a16="http://schemas.microsoft.com/office/drawing/2014/main" id="{CBAABE31-3129-401D-84ED-177D310F1317}"/>
               </a:ext>
             </a:extLst>
           </p:cNvPr>
@@ -7971,7 +7971,7 @@
           <p:cNvPr id="11" name="Rounded Rectangle 10">
             <a:extLst xmlns:a="http://schemas.openxmlformats.org/drawingml/2006/main">
               <a:ext uri="{FF2B5EF4-FFF2-40B4-BE49-F238E27FC236}">
-                <a16:creationId xmlns:a16="http://schemas.microsoft.com/office/drawing/2014/main" id="{188A9FAC-12C7-466F-9BA9-843E932ECFAB}"/>
+                <a16:creationId xmlns:a16="http://schemas.microsoft.com/office/drawing/2014/main" id="{C405090C-A518-4B44-90D7-61128CD5A91D}"/>
               </a:ext>
             </a:extLst>
           </p:cNvPr>
@@ -8028,7 +8028,7 @@
           <p:cNvPr id="12" name="TextBox 11">
             <a:extLst xmlns:a="http://schemas.openxmlformats.org/drawingml/2006/main">
               <a:ext uri="{FF2B5EF4-FFF2-40B4-BE49-F238E27FC236}">
-                <a16:creationId xmlns:a16="http://schemas.microsoft.com/office/drawing/2014/main" id="{D0403852-6F7A-40ED-B252-E57C426F556B}"/>
+                <a16:creationId xmlns:a16="http://schemas.microsoft.com/office/drawing/2014/main" id="{2BF319B6-C68E-4226-A9A4-6329165155B5}"/>
               </a:ext>
             </a:extLst>
           </p:cNvPr>
@@ -8075,7 +8075,7 @@
           <p:cNvPr id="13" name="TextBox 12">
             <a:extLst xmlns:a="http://schemas.openxmlformats.org/drawingml/2006/main">
               <a:ext uri="{FF2B5EF4-FFF2-40B4-BE49-F238E27FC236}">
-                <a16:creationId xmlns:a16="http://schemas.microsoft.com/office/drawing/2014/main" id="{7C788015-D77D-4B6D-8B56-023FC913C67D}"/>
+                <a16:creationId xmlns:a16="http://schemas.microsoft.com/office/drawing/2014/main" id="{D2642E7A-83E3-401A-8D7C-B0AC3573DCA3}"/>
               </a:ext>
             </a:extLst>
           </p:cNvPr>
@@ -8122,7 +8122,7 @@
           <p:cNvPr id="14" name="Rounded Rectangle 13">
             <a:extLst xmlns:a="http://schemas.openxmlformats.org/drawingml/2006/main">
               <a:ext uri="{FF2B5EF4-FFF2-40B4-BE49-F238E27FC236}">
-                <a16:creationId xmlns:a16="http://schemas.microsoft.com/office/drawing/2014/main" id="{B4656433-CE5D-49E4-9740-000955DFAFD5}"/>
+                <a16:creationId xmlns:a16="http://schemas.microsoft.com/office/drawing/2014/main" id="{2CA002FA-6424-4B38-B112-50C08EADE7D4}"/>
               </a:ext>
             </a:extLst>
           </p:cNvPr>
@@ -8179,7 +8179,7 @@
           <p:cNvPr id="15" name="TextBox 14">
             <a:extLst xmlns:a="http://schemas.openxmlformats.org/drawingml/2006/main">
               <a:ext uri="{FF2B5EF4-FFF2-40B4-BE49-F238E27FC236}">
-                <a16:creationId xmlns:a16="http://schemas.microsoft.com/office/drawing/2014/main" id="{92CD8092-8FED-48DD-8A5A-6258AED05658}"/>
+                <a16:creationId xmlns:a16="http://schemas.microsoft.com/office/drawing/2014/main" id="{E0C9837E-CE56-4748-9C86-40F14A692340}"/>
               </a:ext>
             </a:extLst>
           </p:cNvPr>
@@ -8226,7 +8226,7 @@
           <p:cNvPr id="16" name="TextBox 15">
             <a:extLst xmlns:a="http://schemas.openxmlformats.org/drawingml/2006/main">
               <a:ext uri="{FF2B5EF4-FFF2-40B4-BE49-F238E27FC236}">
-                <a16:creationId xmlns:a16="http://schemas.microsoft.com/office/drawing/2014/main" id="{A0F93F37-8695-4E8F-8DF0-639E6632E0B1}"/>
+                <a16:creationId xmlns:a16="http://schemas.microsoft.com/office/drawing/2014/main" id="{12EC302D-FA4B-45BB-BA3C-BF0FF53DEC9B}"/>
               </a:ext>
             </a:extLst>
           </p:cNvPr>
@@ -8273,7 +8273,7 @@
           <p:cNvPr id="17" name="TextBox 16">
             <a:extLst xmlns:a="http://schemas.openxmlformats.org/drawingml/2006/main">
               <a:ext uri="{FF2B5EF4-FFF2-40B4-BE49-F238E27FC236}">
-                <a16:creationId xmlns:a16="http://schemas.microsoft.com/office/drawing/2014/main" id="{93072665-9BC1-460C-8A58-E04D4AD2E2EE}"/>
+                <a16:creationId xmlns:a16="http://schemas.microsoft.com/office/drawing/2014/main" id="{2B43C978-A1DA-438F-9695-E729CF64C609}"/>
               </a:ext>
             </a:extLst>
           </p:cNvPr>
@@ -8320,7 +8320,7 @@
           <p:cNvPr id="18" name="Rounded Rectangle 17">
             <a:extLst xmlns:a="http://schemas.openxmlformats.org/drawingml/2006/main">
               <a:ext uri="{FF2B5EF4-FFF2-40B4-BE49-F238E27FC236}">
-                <a16:creationId xmlns:a16="http://schemas.microsoft.com/office/drawing/2014/main" id="{19D861F3-0187-4A3B-A3F7-D5E9E9F29F29}"/>
+                <a16:creationId xmlns:a16="http://schemas.microsoft.com/office/drawing/2014/main" id="{58D9C4EF-9880-4B3C-9A93-59C23FD6D9C1}"/>
               </a:ext>
             </a:extLst>
           </p:cNvPr>
@@ -8377,7 +8377,7 @@
           <p:cNvPr id="19" name="TextBox 18">
             <a:extLst xmlns:a="http://schemas.openxmlformats.org/drawingml/2006/main">
               <a:ext uri="{FF2B5EF4-FFF2-40B4-BE49-F238E27FC236}">
-                <a16:creationId xmlns:a16="http://schemas.microsoft.com/office/drawing/2014/main" id="{50079EE7-E359-4D03-BA99-DA623295B951}"/>
+                <a16:creationId xmlns:a16="http://schemas.microsoft.com/office/drawing/2014/main" id="{EC75BF3F-D5A3-4519-8F51-A9507A889266}"/>
               </a:ext>
             </a:extLst>
           </p:cNvPr>
@@ -8424,7 +8424,7 @@
           <p:cNvPr id="20" name="TextBox 19">
             <a:extLst xmlns:a="http://schemas.openxmlformats.org/drawingml/2006/main">
               <a:ext uri="{FF2B5EF4-FFF2-40B4-BE49-F238E27FC236}">
-                <a16:creationId xmlns:a16="http://schemas.microsoft.com/office/drawing/2014/main" id="{C9B98B39-AB62-4796-8421-B7F15AEC9347}"/>
+                <a16:creationId xmlns:a16="http://schemas.microsoft.com/office/drawing/2014/main" id="{40AE3C31-E22E-428C-80CA-65C94530602F}"/>
               </a:ext>
             </a:extLst>
           </p:cNvPr>
@@ -8469,7 +8469,7 @@
     </p:spTree>
     <p:extLst>
       <p:ext uri="{BB962C8B-B14F-4D97-AF65-F5344CB8AC3E}">
-        <p14:creationId xmlns:p14="http://schemas.microsoft.com/office/powerpoint/2010/main" val="1864541043"/>
+        <p14:creationId xmlns:p14="http://schemas.microsoft.com/office/powerpoint/2010/main" val="2014606595"/>
       </p:ext>
     </p:extLst>
   </p:cSld>
@@ -8493,7 +8493,7 @@
           <p:cNvPr id="2" name="TextBox 1">
             <a:extLst xmlns:a="http://schemas.openxmlformats.org/drawingml/2006/main">
               <a:ext uri="{FF2B5EF4-FFF2-40B4-BE49-F238E27FC236}">
-                <a16:creationId xmlns:a16="http://schemas.microsoft.com/office/drawing/2014/main" id="{EE394EF5-7344-47B8-AAD5-4F13C98C7705}"/>
+                <a16:creationId xmlns:a16="http://schemas.microsoft.com/office/drawing/2014/main" id="{76E45300-7781-4BC9-82F6-44694290D53E}"/>
               </a:ext>
             </a:extLst>
           </p:cNvPr>
@@ -8540,7 +8540,7 @@
           <p:cNvPr id="3" name="TextBox 2">
             <a:extLst xmlns:a="http://schemas.openxmlformats.org/drawingml/2006/main">
               <a:ext uri="{FF2B5EF4-FFF2-40B4-BE49-F238E27FC236}">
-                <a16:creationId xmlns:a16="http://schemas.microsoft.com/office/drawing/2014/main" id="{0A112944-66C4-4ABD-876C-0C2F36A465CA}"/>
+                <a16:creationId xmlns:a16="http://schemas.microsoft.com/office/drawing/2014/main" id="{94CD852B-2456-4C3D-82A7-BDB6362A99B6}"/>
               </a:ext>
             </a:extLst>
           </p:cNvPr>
@@ -8587,7 +8587,7 @@
           <p:cNvPr id="4" name="Rectangle 3">
             <a:extLst xmlns:a="http://schemas.openxmlformats.org/drawingml/2006/main">
               <a:ext uri="{FF2B5EF4-FFF2-40B4-BE49-F238E27FC236}">
-                <a16:creationId xmlns:a16="http://schemas.microsoft.com/office/drawing/2014/main" id="{9CE7DE13-8177-4D49-A235-AC399BDC15F5}"/>
+                <a16:creationId xmlns:a16="http://schemas.microsoft.com/office/drawing/2014/main" id="{0C0EAF4E-C2A7-4CE5-AC48-7F0BF106BA09}"/>
               </a:ext>
             </a:extLst>
           </p:cNvPr>
@@ -8642,7 +8642,7 @@
           <p:cNvPr id="5" name="Rectangle 4">
             <a:extLst xmlns:a="http://schemas.openxmlformats.org/drawingml/2006/main">
               <a:ext uri="{FF2B5EF4-FFF2-40B4-BE49-F238E27FC236}">
-                <a16:creationId xmlns:a16="http://schemas.microsoft.com/office/drawing/2014/main" id="{0CFA2911-8B41-44A6-9035-9CA71B883121}"/>
+                <a16:creationId xmlns:a16="http://schemas.microsoft.com/office/drawing/2014/main" id="{D9F0EE22-90FF-4842-9A35-A194307593B6}"/>
               </a:ext>
             </a:extLst>
           </p:cNvPr>
@@ -8697,7 +8697,7 @@
           <p:cNvPr id="6" name="TextBox 5">
             <a:extLst xmlns:a="http://schemas.openxmlformats.org/drawingml/2006/main">
               <a:ext uri="{FF2B5EF4-FFF2-40B4-BE49-F238E27FC236}">
-                <a16:creationId xmlns:a16="http://schemas.microsoft.com/office/drawing/2014/main" id="{EEEC7529-0B76-4C15-A672-72C291E47FB0}"/>
+                <a16:creationId xmlns:a16="http://schemas.microsoft.com/office/drawing/2014/main" id="{BAEEE535-56C2-4753-9F6A-0EC0A2F68101}"/>
               </a:ext>
             </a:extLst>
           </p:cNvPr>
@@ -8734,7 +8734,7 @@
                 <a:ea typeface="Aptos"/>
                 <a:cs typeface="Aptos"/>
               </a:rPr>
-              <a:t>Julkinen riippumaton evidenssikooste · 2026.07.27-28 · 2026-07-27 · Lähteet: Evidence Register; WIPO IP valuation</a:t>
+              <a:t>Julkinen riippumaton evidenssikooste · 2026.07.27-29 · 2026-07-27 · Lähteet: Evidence Register; WIPO IP valuation</a:t>
             </a:r>
           </a:p>
         </p:txBody>
@@ -8744,7 +8744,7 @@
           <p:cNvPr id="7" name="TextBox 6">
             <a:extLst xmlns:a="http://schemas.openxmlformats.org/drawingml/2006/main">
               <a:ext uri="{FF2B5EF4-FFF2-40B4-BE49-F238E27FC236}">
-                <a16:creationId xmlns:a16="http://schemas.microsoft.com/office/drawing/2014/main" id="{54F13AF4-D158-46F0-9465-A15592375EAA}"/>
+                <a16:creationId xmlns:a16="http://schemas.microsoft.com/office/drawing/2014/main" id="{5DFDD64F-CD83-477A-BEB8-0E520AAD79DD}"/>
               </a:ext>
             </a:extLst>
           </p:cNvPr>
@@ -9231,7 +9231,7 @@
           <p:cNvPr id="9" name="TextBox 8">
             <a:extLst xmlns:a="http://schemas.openxmlformats.org/drawingml/2006/main">
               <a:ext uri="{FF2B5EF4-FFF2-40B4-BE49-F238E27FC236}">
-                <a16:creationId xmlns:a16="http://schemas.microsoft.com/office/drawing/2014/main" id="{D1582D07-61D2-4A58-8CB8-B69E776B62DD}"/>
+                <a16:creationId xmlns:a16="http://schemas.microsoft.com/office/drawing/2014/main" id="{2805A10D-0449-4CB5-B3F5-8367CA7031C5}"/>
               </a:ext>
             </a:extLst>
           </p:cNvPr>
@@ -9276,7 +9276,7 @@
     </p:spTree>
     <p:extLst>
       <p:ext uri="{BB962C8B-B14F-4D97-AF65-F5344CB8AC3E}">
-        <p14:creationId xmlns:p14="http://schemas.microsoft.com/office/powerpoint/2010/main" val="1193066340"/>
+        <p14:creationId xmlns:p14="http://schemas.microsoft.com/office/powerpoint/2010/main" val="738992331"/>
       </p:ext>
     </p:extLst>
   </p:cSld>
@@ -9307,7 +9307,7 @@
           <p:cNvPr id="2" name="TextBox 1">
             <a:extLst xmlns:a="http://schemas.openxmlformats.org/drawingml/2006/main">
               <a:ext uri="{FF2B5EF4-FFF2-40B4-BE49-F238E27FC236}">
-                <a16:creationId xmlns:a16="http://schemas.microsoft.com/office/drawing/2014/main" id="{A545581A-92BC-4E59-AF0B-F11D22F2ED0E}"/>
+                <a16:creationId xmlns:a16="http://schemas.microsoft.com/office/drawing/2014/main" id="{400C138A-DEB0-418B-96CA-986FBE78ED6E}"/>
               </a:ext>
             </a:extLst>
           </p:cNvPr>
@@ -9354,7 +9354,7 @@
           <p:cNvPr id="3" name="TextBox 2">
             <a:extLst xmlns:a="http://schemas.openxmlformats.org/drawingml/2006/main">
               <a:ext uri="{FF2B5EF4-FFF2-40B4-BE49-F238E27FC236}">
-                <a16:creationId xmlns:a16="http://schemas.microsoft.com/office/drawing/2014/main" id="{DB3B14AD-279A-4039-A4CC-4918D209092B}"/>
+                <a16:creationId xmlns:a16="http://schemas.microsoft.com/office/drawing/2014/main" id="{10139486-308B-4D6D-90FA-ED8CBC9C7291}"/>
               </a:ext>
             </a:extLst>
           </p:cNvPr>
@@ -9401,7 +9401,7 @@
           <p:cNvPr id="4" name="TextBox 3">
             <a:extLst xmlns:a="http://schemas.openxmlformats.org/drawingml/2006/main">
               <a:ext uri="{FF2B5EF4-FFF2-40B4-BE49-F238E27FC236}">
-                <a16:creationId xmlns:a16="http://schemas.microsoft.com/office/drawing/2014/main" id="{63A2A750-AD62-4324-BB5E-BB7142E2DECB}"/>
+                <a16:creationId xmlns:a16="http://schemas.microsoft.com/office/drawing/2014/main" id="{EF656AA1-A7AB-481E-86E8-50FA62FA0F41}"/>
               </a:ext>
             </a:extLst>
           </p:cNvPr>
@@ -9520,7 +9520,7 @@
           <p:cNvPr id="5" name="TextBox 4">
             <a:extLst xmlns:a="http://schemas.openxmlformats.org/drawingml/2006/main">
               <a:ext uri="{FF2B5EF4-FFF2-40B4-BE49-F238E27FC236}">
-                <a16:creationId xmlns:a16="http://schemas.microsoft.com/office/drawing/2014/main" id="{2FBC2B09-168D-49DA-9456-953310430A09}"/>
+                <a16:creationId xmlns:a16="http://schemas.microsoft.com/office/drawing/2014/main" id="{BB8BB205-708B-484F-811D-489556A14187}"/>
               </a:ext>
             </a:extLst>
           </p:cNvPr>
@@ -9557,7 +9557,7 @@
                 <a:ea typeface="Aptos"/>
                 <a:cs typeface="Aptos"/>
               </a:rPr>
-              <a:t>Versio 2026.07.27-28 · 2026-07-27 · 6 / 6</a:t>
+              <a:t>Versio 2026.07.27-29 · 2026-07-27 · 6 / 6</a:t>
             </a:r>
           </a:p>
         </p:txBody>
@@ -9565,7 +9565,7 @@
     </p:spTree>
     <p:extLst>
       <p:ext uri="{BB962C8B-B14F-4D97-AF65-F5344CB8AC3E}">
-        <p14:creationId xmlns:p14="http://schemas.microsoft.com/office/powerpoint/2010/main" val="1377085427"/>
+        <p14:creationId xmlns:p14="http://schemas.microsoft.com/office/powerpoint/2010/main" val="2096284752"/>
       </p:ext>
     </p:extLst>
   </p:cSld>

--- a/site/downloads/pixan-bank-deck-short-fi.pptx
+++ b/site/downloads/pixan-bank-deck-short-fi.pptx
@@ -2,18 +2,18 @@
 <file path=ppt/presentation.xml><?xml version="1.0" encoding="utf-8"?>
 <p:presentation xmlns:p="http://schemas.openxmlformats.org/presentationml/2006/main">
   <p:sldMasterIdLst>
-    <p:sldMasterId xmlns:r="http://schemas.openxmlformats.org/officeDocument/2006/relationships" id="2147483648" r:id="Rf891b0528db34706"/>
+    <p:sldMasterId xmlns:r="http://schemas.openxmlformats.org/officeDocument/2006/relationships" id="2147483648" r:id="R4ecdce04a7f340cd"/>
   </p:sldMasterIdLst>
   <p:notesMasterIdLst>
-    <p:notesMasterId xmlns:r="http://schemas.openxmlformats.org/officeDocument/2006/relationships" r:id="Rccfc40a1af8a4894"/>
+    <p:notesMasterId xmlns:r="http://schemas.openxmlformats.org/officeDocument/2006/relationships" r:id="R17d318c18693401a"/>
   </p:notesMasterIdLst>
   <p:sldIdLst>
-    <p:sldId xmlns:r="http://schemas.openxmlformats.org/officeDocument/2006/relationships" id="256" r:id="Ra4171ee4d2034816"/>
-    <p:sldId xmlns:r="http://schemas.openxmlformats.org/officeDocument/2006/relationships" id="257" r:id="Rb96d55806cbd42d4"/>
-    <p:sldId xmlns:r="http://schemas.openxmlformats.org/officeDocument/2006/relationships" id="258" r:id="R5555e0d5a708459d"/>
-    <p:sldId xmlns:r="http://schemas.openxmlformats.org/officeDocument/2006/relationships" id="259" r:id="Re6a2954829d34bcb"/>
-    <p:sldId xmlns:r="http://schemas.openxmlformats.org/officeDocument/2006/relationships" id="260" r:id="R14c2f25855b143eb"/>
-    <p:sldId xmlns:r="http://schemas.openxmlformats.org/officeDocument/2006/relationships" id="261" r:id="R1e1bfcda8b884bb2"/>
+    <p:sldId xmlns:r="http://schemas.openxmlformats.org/officeDocument/2006/relationships" id="256" r:id="R689ac238716649e2"/>
+    <p:sldId xmlns:r="http://schemas.openxmlformats.org/officeDocument/2006/relationships" id="257" r:id="R02f8c1e4b69a4bce"/>
+    <p:sldId xmlns:r="http://schemas.openxmlformats.org/officeDocument/2006/relationships" id="258" r:id="R12e6fb8f9647432f"/>
+    <p:sldId xmlns:r="http://schemas.openxmlformats.org/officeDocument/2006/relationships" id="259" r:id="R08244a0d828946f7"/>
+    <p:sldId xmlns:r="http://schemas.openxmlformats.org/officeDocument/2006/relationships" id="260" r:id="R042b0f30c29346d6"/>
+    <p:sldId xmlns:r="http://schemas.openxmlformats.org/officeDocument/2006/relationships" id="261" r:id="R948a7988f0ef4fd1"/>
   </p:sldIdLst>
   <p:sldSz cx="12191999" cy="6858000"/>
   <p:notesSz cx="6858000" cy="9144000"/>
@@ -1887,7 +1887,7 @@
           <p:cNvPr id="2" name="Title 1">
             <a:extLst xmlns:a="http://schemas.openxmlformats.org/drawingml/2006/main">
               <a:ext uri="{FF2B5EF4-FFF2-40B4-BE49-F238E27FC236}">
-                <a16:creationId xmlns:a16="http://schemas.microsoft.com/office/drawing/2014/main" id="{071807D7-A5BA-44AD-88F1-6044C8CF1AC0}"/>
+                <a16:creationId xmlns:a16="http://schemas.microsoft.com/office/drawing/2014/main" id="{C1D73D43-573E-43B8-AD02-C0E1DBF6C97D}"/>
               </a:ext>
             </a:extLst>
           </p:cNvPr>
@@ -1919,7 +1919,7 @@
           <p:cNvPr id="3" name="Subtitle 2">
             <a:extLst xmlns:a="http://schemas.openxmlformats.org/drawingml/2006/main">
               <a:ext uri="{FF2B5EF4-FFF2-40B4-BE49-F238E27FC236}">
-                <a16:creationId xmlns:a16="http://schemas.microsoft.com/office/drawing/2014/main" id="{663760AC-1D53-45BE-A006-9F772C768769}"/>
+                <a16:creationId xmlns:a16="http://schemas.microsoft.com/office/drawing/2014/main" id="{BBD8DFF1-77FB-46E6-8D97-651E92761E44}"/>
               </a:ext>
             </a:extLst>
           </p:cNvPr>
@@ -2042,7 +2042,7 @@
           <p:cNvPr id="4" name="Date Placeholder 3">
             <a:extLst xmlns:a="http://schemas.openxmlformats.org/drawingml/2006/main">
               <a:ext uri="{FF2B5EF4-FFF2-40B4-BE49-F238E27FC236}">
-                <a16:creationId xmlns:a16="http://schemas.microsoft.com/office/drawing/2014/main" id="{07D6EF5B-747B-41CB-BA3B-74FF7CAE414D}"/>
+                <a16:creationId xmlns:a16="http://schemas.microsoft.com/office/drawing/2014/main" id="{C11B5A17-8805-486E-ACC8-7567CDD8A945}"/>
               </a:ext>
             </a:extLst>
           </p:cNvPr>
@@ -2069,7 +2069,7 @@
           <p:cNvPr id="5" name="Footer Placeholder 4">
             <a:extLst xmlns:a="http://schemas.openxmlformats.org/drawingml/2006/main">
               <a:ext uri="{FF2B5EF4-FFF2-40B4-BE49-F238E27FC236}">
-                <a16:creationId xmlns:a16="http://schemas.microsoft.com/office/drawing/2014/main" id="{50B9173D-7FAA-48F7-A684-62371669322E}"/>
+                <a16:creationId xmlns:a16="http://schemas.microsoft.com/office/drawing/2014/main" id="{EF61654E-096E-490D-A1A4-B5949C7E0661}"/>
               </a:ext>
             </a:extLst>
           </p:cNvPr>
@@ -2092,7 +2092,7 @@
           <p:cNvPr id="6" name="Slide Number Placeholder 5">
             <a:extLst xmlns:a="http://schemas.openxmlformats.org/drawingml/2006/main">
               <a:ext uri="{FF2B5EF4-FFF2-40B4-BE49-F238E27FC236}">
-                <a16:creationId xmlns:a16="http://schemas.microsoft.com/office/drawing/2014/main" id="{BB0E3590-8480-4DC5-B40A-D68E38E1F162}"/>
+                <a16:creationId xmlns:a16="http://schemas.microsoft.com/office/drawing/2014/main" id="{C7C3DB82-05FB-4475-A91B-EE8991B7FE33}"/>
               </a:ext>
             </a:extLst>
           </p:cNvPr>
@@ -2136,7 +2136,7 @@
           <p:cNvPr id="2" name="Title 1">
             <a:extLst xmlns:a="http://schemas.openxmlformats.org/drawingml/2006/main">
               <a:ext uri="{FF2B5EF4-FFF2-40B4-BE49-F238E27FC236}">
-                <a16:creationId xmlns:a16="http://schemas.microsoft.com/office/drawing/2014/main" id="{D5A931D9-E2BC-40EF-979F-164C0B30F162}"/>
+                <a16:creationId xmlns:a16="http://schemas.microsoft.com/office/drawing/2014/main" id="{080D56B0-2810-4EF5-9B07-A349FF81DC6F}"/>
               </a:ext>
             </a:extLst>
           </p:cNvPr>
@@ -2163,7 +2163,7 @@
           <p:cNvPr id="3" name="Vertical Text Placeholder 2">
             <a:extLst xmlns:a="http://schemas.openxmlformats.org/drawingml/2006/main">
               <a:ext uri="{FF2B5EF4-FFF2-40B4-BE49-F238E27FC236}">
-                <a16:creationId xmlns:a16="http://schemas.microsoft.com/office/drawing/2014/main" id="{894CA3E4-C9D5-4B96-8785-E2307C4E8028}"/>
+                <a16:creationId xmlns:a16="http://schemas.microsoft.com/office/drawing/2014/main" id="{1BD6D37D-112F-4511-A378-60D6B6558042}"/>
               </a:ext>
             </a:extLst>
           </p:cNvPr>
@@ -2225,7 +2225,7 @@
           <p:cNvPr id="4" name="Date Placeholder 3">
             <a:extLst xmlns:a="http://schemas.openxmlformats.org/drawingml/2006/main">
               <a:ext uri="{FF2B5EF4-FFF2-40B4-BE49-F238E27FC236}">
-                <a16:creationId xmlns:a16="http://schemas.microsoft.com/office/drawing/2014/main" id="{A6EE548C-63DA-4D04-BA48-71F6217B8DC0}"/>
+                <a16:creationId xmlns:a16="http://schemas.microsoft.com/office/drawing/2014/main" id="{A1BF7C1A-4EED-493C-817B-E662C92EB63D}"/>
               </a:ext>
             </a:extLst>
           </p:cNvPr>
@@ -2252,7 +2252,7 @@
           <p:cNvPr id="5" name="Footer Placeholder 4">
             <a:extLst xmlns:a="http://schemas.openxmlformats.org/drawingml/2006/main">
               <a:ext uri="{FF2B5EF4-FFF2-40B4-BE49-F238E27FC236}">
-                <a16:creationId xmlns:a16="http://schemas.microsoft.com/office/drawing/2014/main" id="{9BBFAE6E-ACC8-47EC-8D6A-ACEE6A560650}"/>
+                <a16:creationId xmlns:a16="http://schemas.microsoft.com/office/drawing/2014/main" id="{521EFC45-7837-4571-9EC3-7826D074BB33}"/>
               </a:ext>
             </a:extLst>
           </p:cNvPr>
@@ -2275,7 +2275,7 @@
           <p:cNvPr id="6" name="Slide Number Placeholder 5">
             <a:extLst xmlns:a="http://schemas.openxmlformats.org/drawingml/2006/main">
               <a:ext uri="{FF2B5EF4-FFF2-40B4-BE49-F238E27FC236}">
-                <a16:creationId xmlns:a16="http://schemas.microsoft.com/office/drawing/2014/main" id="{BC9409BE-E4B3-4D26-9EF2-83DA3555E354}"/>
+                <a16:creationId xmlns:a16="http://schemas.microsoft.com/office/drawing/2014/main" id="{0B71DEDE-2289-48AE-9408-A8DBDFB8113F}"/>
               </a:ext>
             </a:extLst>
           </p:cNvPr>
@@ -2319,7 +2319,7 @@
           <p:cNvPr id="2" name="Vertical Title 1">
             <a:extLst xmlns:a="http://schemas.openxmlformats.org/drawingml/2006/main">
               <a:ext uri="{FF2B5EF4-FFF2-40B4-BE49-F238E27FC236}">
-                <a16:creationId xmlns:a16="http://schemas.microsoft.com/office/drawing/2014/main" id="{A3CCCAF9-B702-42F9-B238-9695971C521C}"/>
+                <a16:creationId xmlns:a16="http://schemas.microsoft.com/office/drawing/2014/main" id="{2FD12C23-7AC4-4A18-A0AC-AB76791DE900}"/>
               </a:ext>
             </a:extLst>
           </p:cNvPr>
@@ -2351,7 +2351,7 @@
           <p:cNvPr id="3" name="Vertical Text Placeholder 2">
             <a:extLst xmlns:a="http://schemas.openxmlformats.org/drawingml/2006/main">
               <a:ext uri="{FF2B5EF4-FFF2-40B4-BE49-F238E27FC236}">
-                <a16:creationId xmlns:a16="http://schemas.microsoft.com/office/drawing/2014/main" id="{106E2E11-1884-401F-87C7-ED1EB4CA296C}"/>
+                <a16:creationId xmlns:a16="http://schemas.microsoft.com/office/drawing/2014/main" id="{3C1EDD9C-C911-4375-BF57-C26027EF2B55}"/>
               </a:ext>
             </a:extLst>
           </p:cNvPr>
@@ -2418,7 +2418,7 @@
           <p:cNvPr id="4" name="Date Placeholder 3">
             <a:extLst xmlns:a="http://schemas.openxmlformats.org/drawingml/2006/main">
               <a:ext uri="{FF2B5EF4-FFF2-40B4-BE49-F238E27FC236}">
-                <a16:creationId xmlns:a16="http://schemas.microsoft.com/office/drawing/2014/main" id="{08B28AA9-7C67-4F09-A337-1BF6D568F60E}"/>
+                <a16:creationId xmlns:a16="http://schemas.microsoft.com/office/drawing/2014/main" id="{BC7A9DA7-C437-4B4A-8D62-2596B8F927DD}"/>
               </a:ext>
             </a:extLst>
           </p:cNvPr>
@@ -2445,7 +2445,7 @@
           <p:cNvPr id="5" name="Footer Placeholder 4">
             <a:extLst xmlns:a="http://schemas.openxmlformats.org/drawingml/2006/main">
               <a:ext uri="{FF2B5EF4-FFF2-40B4-BE49-F238E27FC236}">
-                <a16:creationId xmlns:a16="http://schemas.microsoft.com/office/drawing/2014/main" id="{1EC14C34-00EE-44BE-9CB7-FCC443AD15F8}"/>
+                <a16:creationId xmlns:a16="http://schemas.microsoft.com/office/drawing/2014/main" id="{53733C94-BB10-4B76-9F07-A352F136A932}"/>
               </a:ext>
             </a:extLst>
           </p:cNvPr>
@@ -2468,7 +2468,7 @@
           <p:cNvPr id="6" name="Slide Number Placeholder 5">
             <a:extLst xmlns:a="http://schemas.openxmlformats.org/drawingml/2006/main">
               <a:ext uri="{FF2B5EF4-FFF2-40B4-BE49-F238E27FC236}">
-                <a16:creationId xmlns:a16="http://schemas.microsoft.com/office/drawing/2014/main" id="{108351D0-4583-4D36-A81A-92AD61261C44}"/>
+                <a16:creationId xmlns:a16="http://schemas.microsoft.com/office/drawing/2014/main" id="{55E62C2D-71FF-420E-9716-0926931785D3}"/>
               </a:ext>
             </a:extLst>
           </p:cNvPr>
@@ -2512,7 +2512,7 @@
           <p:cNvPr id="2" name="Title 1">
             <a:extLst xmlns:a="http://schemas.openxmlformats.org/drawingml/2006/main">
               <a:ext uri="{FF2B5EF4-FFF2-40B4-BE49-F238E27FC236}">
-                <a16:creationId xmlns:a16="http://schemas.microsoft.com/office/drawing/2014/main" id="{369F9C1A-2A59-405D-877D-23904D3C2F1C}"/>
+                <a16:creationId xmlns:a16="http://schemas.microsoft.com/office/drawing/2014/main" id="{007E30BC-1893-4B50-8E5B-4B75878CE8B1}"/>
               </a:ext>
             </a:extLst>
           </p:cNvPr>
@@ -2539,7 +2539,7 @@
           <p:cNvPr id="3" name="Content Placeholder 2">
             <a:extLst xmlns:a="http://schemas.openxmlformats.org/drawingml/2006/main">
               <a:ext uri="{FF2B5EF4-FFF2-40B4-BE49-F238E27FC236}">
-                <a16:creationId xmlns:a16="http://schemas.microsoft.com/office/drawing/2014/main" id="{C7DCBC0C-AB20-4E8B-B3D6-49E792215F86}"/>
+                <a16:creationId xmlns:a16="http://schemas.microsoft.com/office/drawing/2014/main" id="{1336553D-3BA4-4765-8CC5-E25DB61566C5}"/>
               </a:ext>
             </a:extLst>
           </p:cNvPr>
@@ -2601,7 +2601,7 @@
           <p:cNvPr id="4" name="Date Placeholder 3">
             <a:extLst xmlns:a="http://schemas.openxmlformats.org/drawingml/2006/main">
               <a:ext uri="{FF2B5EF4-FFF2-40B4-BE49-F238E27FC236}">
-                <a16:creationId xmlns:a16="http://schemas.microsoft.com/office/drawing/2014/main" id="{A1787C02-5F94-4196-AE36-EC9933543E94}"/>
+                <a16:creationId xmlns:a16="http://schemas.microsoft.com/office/drawing/2014/main" id="{FAB26515-A8B9-4B89-9086-E13490499454}"/>
               </a:ext>
             </a:extLst>
           </p:cNvPr>
@@ -2628,7 +2628,7 @@
           <p:cNvPr id="5" name="Footer Placeholder 4">
             <a:extLst xmlns:a="http://schemas.openxmlformats.org/drawingml/2006/main">
               <a:ext uri="{FF2B5EF4-FFF2-40B4-BE49-F238E27FC236}">
-                <a16:creationId xmlns:a16="http://schemas.microsoft.com/office/drawing/2014/main" id="{1245B4BC-4537-49C7-96AD-75F168CFF3A8}"/>
+                <a16:creationId xmlns:a16="http://schemas.microsoft.com/office/drawing/2014/main" id="{47DD9792-C49D-428A-9374-7AFBC6F005E5}"/>
               </a:ext>
             </a:extLst>
           </p:cNvPr>
@@ -2651,7 +2651,7 @@
           <p:cNvPr id="6" name="Slide Number Placeholder 5">
             <a:extLst xmlns:a="http://schemas.openxmlformats.org/drawingml/2006/main">
               <a:ext uri="{FF2B5EF4-FFF2-40B4-BE49-F238E27FC236}">
-                <a16:creationId xmlns:a16="http://schemas.microsoft.com/office/drawing/2014/main" id="{D4A2CB95-3B94-4850-A338-8F221151F27A}"/>
+                <a16:creationId xmlns:a16="http://schemas.microsoft.com/office/drawing/2014/main" id="{0FC74AC0-D836-463D-9414-CCA1463AABB3}"/>
               </a:ext>
             </a:extLst>
           </p:cNvPr>
@@ -2695,7 +2695,7 @@
           <p:cNvPr id="2" name="Title 1">
             <a:extLst xmlns:a="http://schemas.openxmlformats.org/drawingml/2006/main">
               <a:ext uri="{FF2B5EF4-FFF2-40B4-BE49-F238E27FC236}">
-                <a16:creationId xmlns:a16="http://schemas.microsoft.com/office/drawing/2014/main" id="{7C5BBE3D-5945-4635-BC89-60B25D80FE7D}"/>
+                <a16:creationId xmlns:a16="http://schemas.microsoft.com/office/drawing/2014/main" id="{160389B9-8E00-455F-A8EF-329F81CCAA7B}"/>
               </a:ext>
             </a:extLst>
           </p:cNvPr>
@@ -2732,7 +2732,7 @@
           <p:cNvPr id="3" name="Text Placeholder 2">
             <a:extLst xmlns:a="http://schemas.openxmlformats.org/drawingml/2006/main">
               <a:ext uri="{FF2B5EF4-FFF2-40B4-BE49-F238E27FC236}">
-                <a16:creationId xmlns:a16="http://schemas.microsoft.com/office/drawing/2014/main" id="{B4CA9DE1-F3AD-4617-88B4-A4D4280171C9}"/>
+                <a16:creationId xmlns:a16="http://schemas.microsoft.com/office/drawing/2014/main" id="{4AB25DF2-02F2-4857-88DF-9D6F37898E91}"/>
               </a:ext>
             </a:extLst>
           </p:cNvPr>
@@ -2858,7 +2858,7 @@
           <p:cNvPr id="4" name="Date Placeholder 3">
             <a:extLst xmlns:a="http://schemas.openxmlformats.org/drawingml/2006/main">
               <a:ext uri="{FF2B5EF4-FFF2-40B4-BE49-F238E27FC236}">
-                <a16:creationId xmlns:a16="http://schemas.microsoft.com/office/drawing/2014/main" id="{2B72395B-5DDF-4222-817F-99B5A6B5F897}"/>
+                <a16:creationId xmlns:a16="http://schemas.microsoft.com/office/drawing/2014/main" id="{D433DFB7-AF1F-4C9D-A27D-DA78649D832E}"/>
               </a:ext>
             </a:extLst>
           </p:cNvPr>
@@ -2885,7 +2885,7 @@
           <p:cNvPr id="5" name="Footer Placeholder 4">
             <a:extLst xmlns:a="http://schemas.openxmlformats.org/drawingml/2006/main">
               <a:ext uri="{FF2B5EF4-FFF2-40B4-BE49-F238E27FC236}">
-                <a16:creationId xmlns:a16="http://schemas.microsoft.com/office/drawing/2014/main" id="{E6F34CD6-627B-4FB9-ACC2-25487B8CFA9D}"/>
+                <a16:creationId xmlns:a16="http://schemas.microsoft.com/office/drawing/2014/main" id="{D722EDF2-CBBA-4B6D-8B0E-70BA02C1E2CF}"/>
               </a:ext>
             </a:extLst>
           </p:cNvPr>
@@ -2908,7 +2908,7 @@
           <p:cNvPr id="6" name="Slide Number Placeholder 5">
             <a:extLst xmlns:a="http://schemas.openxmlformats.org/drawingml/2006/main">
               <a:ext uri="{FF2B5EF4-FFF2-40B4-BE49-F238E27FC236}">
-                <a16:creationId xmlns:a16="http://schemas.microsoft.com/office/drawing/2014/main" id="{923FFBC5-5915-42AA-B75C-15426C05D87C}"/>
+                <a16:creationId xmlns:a16="http://schemas.microsoft.com/office/drawing/2014/main" id="{082EE314-ACB9-4063-961D-AA500BB206E9}"/>
               </a:ext>
             </a:extLst>
           </p:cNvPr>
@@ -2952,7 +2952,7 @@
           <p:cNvPr id="2" name="Title 1">
             <a:extLst xmlns:a="http://schemas.openxmlformats.org/drawingml/2006/main">
               <a:ext uri="{FF2B5EF4-FFF2-40B4-BE49-F238E27FC236}">
-                <a16:creationId xmlns:a16="http://schemas.microsoft.com/office/drawing/2014/main" id="{5C0718D0-E8D7-4F20-8481-6F9E766C6F84}"/>
+                <a16:creationId xmlns:a16="http://schemas.microsoft.com/office/drawing/2014/main" id="{E68E370F-3587-45B6-A231-6A879428C996}"/>
               </a:ext>
             </a:extLst>
           </p:cNvPr>
@@ -2979,7 +2979,7 @@
           <p:cNvPr id="3" name="Content Placeholder 2">
             <a:extLst xmlns:a="http://schemas.openxmlformats.org/drawingml/2006/main">
               <a:ext uri="{FF2B5EF4-FFF2-40B4-BE49-F238E27FC236}">
-                <a16:creationId xmlns:a16="http://schemas.microsoft.com/office/drawing/2014/main" id="{A55BF3C2-1159-4FEB-B574-6A50F5E0958A}"/>
+                <a16:creationId xmlns:a16="http://schemas.microsoft.com/office/drawing/2014/main" id="{DE355C91-F930-43BE-9293-39894B4E2842}"/>
               </a:ext>
             </a:extLst>
           </p:cNvPr>
@@ -3083,7 +3083,7 @@
           <p:cNvPr id="4" name="Content Placeholder 3">
             <a:extLst xmlns:a="http://schemas.openxmlformats.org/drawingml/2006/main">
               <a:ext uri="{FF2B5EF4-FFF2-40B4-BE49-F238E27FC236}">
-                <a16:creationId xmlns:a16="http://schemas.microsoft.com/office/drawing/2014/main" id="{2009B731-AFA9-494F-80A3-BF385B5F558B}"/>
+                <a16:creationId xmlns:a16="http://schemas.microsoft.com/office/drawing/2014/main" id="{FA5FE3C7-B68E-405F-BA75-BD613C52F6FC}"/>
               </a:ext>
             </a:extLst>
           </p:cNvPr>
@@ -3187,7 +3187,7 @@
           <p:cNvPr id="5" name="Date Placeholder 4">
             <a:extLst xmlns:a="http://schemas.openxmlformats.org/drawingml/2006/main">
               <a:ext uri="{FF2B5EF4-FFF2-40B4-BE49-F238E27FC236}">
-                <a16:creationId xmlns:a16="http://schemas.microsoft.com/office/drawing/2014/main" id="{6CCC0E3C-9FC6-49E7-8243-299A9072CCCA}"/>
+                <a16:creationId xmlns:a16="http://schemas.microsoft.com/office/drawing/2014/main" id="{8122F147-8883-4777-8130-BDF644801E34}"/>
               </a:ext>
             </a:extLst>
           </p:cNvPr>
@@ -3214,7 +3214,7 @@
           <p:cNvPr id="6" name="Footer Placeholder 5">
             <a:extLst xmlns:a="http://schemas.openxmlformats.org/drawingml/2006/main">
               <a:ext uri="{FF2B5EF4-FFF2-40B4-BE49-F238E27FC236}">
-                <a16:creationId xmlns:a16="http://schemas.microsoft.com/office/drawing/2014/main" id="{06A517CB-44ED-468D-A771-15E52CDE0942}"/>
+                <a16:creationId xmlns:a16="http://schemas.microsoft.com/office/drawing/2014/main" id="{774BF4D4-4395-4777-A68C-CF748AC8F9F8}"/>
               </a:ext>
             </a:extLst>
           </p:cNvPr>
@@ -3237,7 +3237,7 @@
           <p:cNvPr id="7" name="Slide Number Placeholder 6">
             <a:extLst xmlns:a="http://schemas.openxmlformats.org/drawingml/2006/main">
               <a:ext uri="{FF2B5EF4-FFF2-40B4-BE49-F238E27FC236}">
-                <a16:creationId xmlns:a16="http://schemas.microsoft.com/office/drawing/2014/main" id="{E1684A19-CF14-4F7F-A1D0-C0E655A5B1B7}"/>
+                <a16:creationId xmlns:a16="http://schemas.microsoft.com/office/drawing/2014/main" id="{9C765971-D892-4E6D-94FF-3869E28F2C35}"/>
               </a:ext>
             </a:extLst>
           </p:cNvPr>
@@ -3281,7 +3281,7 @@
           <p:cNvPr id="2" name="Title 1">
             <a:extLst xmlns:a="http://schemas.openxmlformats.org/drawingml/2006/main">
               <a:ext uri="{FF2B5EF4-FFF2-40B4-BE49-F238E27FC236}">
-                <a16:creationId xmlns:a16="http://schemas.microsoft.com/office/drawing/2014/main" id="{04EA78C4-8533-4F7E-A95A-11F29D4C04E2}"/>
+                <a16:creationId xmlns:a16="http://schemas.microsoft.com/office/drawing/2014/main" id="{E1BF771F-C403-4B53-938C-8C743F9032BE}"/>
               </a:ext>
             </a:extLst>
           </p:cNvPr>
@@ -3313,7 +3313,7 @@
           <p:cNvPr id="3" name="Text Placeholder 2">
             <a:extLst xmlns:a="http://schemas.openxmlformats.org/drawingml/2006/main">
               <a:ext uri="{FF2B5EF4-FFF2-40B4-BE49-F238E27FC236}">
-                <a16:creationId xmlns:a16="http://schemas.microsoft.com/office/drawing/2014/main" id="{63D212EA-4430-467E-AEA9-B6B1C2FB9617}"/>
+                <a16:creationId xmlns:a16="http://schemas.microsoft.com/office/drawing/2014/main" id="{464AA318-49EF-461E-AA42-4191CD447A80}"/>
               </a:ext>
             </a:extLst>
           </p:cNvPr>
@@ -3385,7 +3385,7 @@
           <p:cNvPr id="4" name="Content Placeholder 3">
             <a:extLst xmlns:a="http://schemas.openxmlformats.org/drawingml/2006/main">
               <a:ext uri="{FF2B5EF4-FFF2-40B4-BE49-F238E27FC236}">
-                <a16:creationId xmlns:a16="http://schemas.microsoft.com/office/drawing/2014/main" id="{2DABD036-48BC-49BB-BABA-FD54EB483063}"/>
+                <a16:creationId xmlns:a16="http://schemas.microsoft.com/office/drawing/2014/main" id="{E0EAB7E3-E918-4904-87DF-7CA6D046C192}"/>
               </a:ext>
             </a:extLst>
           </p:cNvPr>
@@ -3489,7 +3489,7 @@
           <p:cNvPr id="5" name="Text Placeholder 4">
             <a:extLst xmlns:a="http://schemas.openxmlformats.org/drawingml/2006/main">
               <a:ext uri="{FF2B5EF4-FFF2-40B4-BE49-F238E27FC236}">
-                <a16:creationId xmlns:a16="http://schemas.microsoft.com/office/drawing/2014/main" id="{A802F8D8-6385-4E8D-B7B2-CFF17766FC43}"/>
+                <a16:creationId xmlns:a16="http://schemas.microsoft.com/office/drawing/2014/main" id="{CEDC125D-AFFF-4084-922F-0AD31E3594F8}"/>
               </a:ext>
             </a:extLst>
           </p:cNvPr>
@@ -3561,7 +3561,7 @@
           <p:cNvPr id="6" name="Content Placeholder 5">
             <a:extLst xmlns:a="http://schemas.openxmlformats.org/drawingml/2006/main">
               <a:ext uri="{FF2B5EF4-FFF2-40B4-BE49-F238E27FC236}">
-                <a16:creationId xmlns:a16="http://schemas.microsoft.com/office/drawing/2014/main" id="{84DD0C5A-9DE7-4AA0-B8D2-2276EAF0B289}"/>
+                <a16:creationId xmlns:a16="http://schemas.microsoft.com/office/drawing/2014/main" id="{51FB7860-A195-4C1D-878A-6F7636F3FC0C}"/>
               </a:ext>
             </a:extLst>
           </p:cNvPr>
@@ -3665,7 +3665,7 @@
           <p:cNvPr id="7" name="Date Placeholder 6">
             <a:extLst xmlns:a="http://schemas.openxmlformats.org/drawingml/2006/main">
               <a:ext uri="{FF2B5EF4-FFF2-40B4-BE49-F238E27FC236}">
-                <a16:creationId xmlns:a16="http://schemas.microsoft.com/office/drawing/2014/main" id="{B1E85C94-FB57-4A45-B033-EB49E8FF83D9}"/>
+                <a16:creationId xmlns:a16="http://schemas.microsoft.com/office/drawing/2014/main" id="{06BD67C2-5423-4FCB-BCC7-3C3A4BCEE8FD}"/>
               </a:ext>
             </a:extLst>
           </p:cNvPr>
@@ -3692,7 +3692,7 @@
           <p:cNvPr id="8" name="Footer Placeholder 7">
             <a:extLst xmlns:a="http://schemas.openxmlformats.org/drawingml/2006/main">
               <a:ext uri="{FF2B5EF4-FFF2-40B4-BE49-F238E27FC236}">
-                <a16:creationId xmlns:a16="http://schemas.microsoft.com/office/drawing/2014/main" id="{2ABE33CE-60A3-4C24-B8DF-CD26A0729EC1}"/>
+                <a16:creationId xmlns:a16="http://schemas.microsoft.com/office/drawing/2014/main" id="{B6AA4E0F-DD29-4FC5-AF4B-A0CED1FF6F25}"/>
               </a:ext>
             </a:extLst>
           </p:cNvPr>
@@ -3715,7 +3715,7 @@
           <p:cNvPr id="9" name="Slide Number Placeholder 8">
             <a:extLst xmlns:a="http://schemas.openxmlformats.org/drawingml/2006/main">
               <a:ext uri="{FF2B5EF4-FFF2-40B4-BE49-F238E27FC236}">
-                <a16:creationId xmlns:a16="http://schemas.microsoft.com/office/drawing/2014/main" id="{E087F3AB-FCE1-4601-AA6A-2014131049FD}"/>
+                <a16:creationId xmlns:a16="http://schemas.microsoft.com/office/drawing/2014/main" id="{5C2F07A7-BE3A-4387-8402-2BC93A4B902E}"/>
               </a:ext>
             </a:extLst>
           </p:cNvPr>
@@ -3759,7 +3759,7 @@
           <p:cNvPr id="2" name="Title 1">
             <a:extLst xmlns:a="http://schemas.openxmlformats.org/drawingml/2006/main">
               <a:ext uri="{FF2B5EF4-FFF2-40B4-BE49-F238E27FC236}">
-                <a16:creationId xmlns:a16="http://schemas.microsoft.com/office/drawing/2014/main" id="{B82282EA-EEC0-4BC7-8C1B-FFAED3E2D9F6}"/>
+                <a16:creationId xmlns:a16="http://schemas.microsoft.com/office/drawing/2014/main" id="{17708147-366A-4FB7-9798-A92A7E9C0D36}"/>
               </a:ext>
             </a:extLst>
           </p:cNvPr>
@@ -3786,7 +3786,7 @@
           <p:cNvPr id="3" name="Date Placeholder 2">
             <a:extLst xmlns:a="http://schemas.openxmlformats.org/drawingml/2006/main">
               <a:ext uri="{FF2B5EF4-FFF2-40B4-BE49-F238E27FC236}">
-                <a16:creationId xmlns:a16="http://schemas.microsoft.com/office/drawing/2014/main" id="{46E54949-B929-4579-B8EA-69BE009AA9B8}"/>
+                <a16:creationId xmlns:a16="http://schemas.microsoft.com/office/drawing/2014/main" id="{871F5CDF-292D-4F0A-8135-FC2634A779B7}"/>
               </a:ext>
             </a:extLst>
           </p:cNvPr>
@@ -3813,7 +3813,7 @@
           <p:cNvPr id="4" name="Footer Placeholder 3">
             <a:extLst xmlns:a="http://schemas.openxmlformats.org/drawingml/2006/main">
               <a:ext uri="{FF2B5EF4-FFF2-40B4-BE49-F238E27FC236}">
-                <a16:creationId xmlns:a16="http://schemas.microsoft.com/office/drawing/2014/main" id="{DD637F32-0030-42BA-99E2-E466D80136CA}"/>
+                <a16:creationId xmlns:a16="http://schemas.microsoft.com/office/drawing/2014/main" id="{20B45D1B-AFFA-4C13-A147-7809BE8B596B}"/>
               </a:ext>
             </a:extLst>
           </p:cNvPr>
@@ -3836,7 +3836,7 @@
           <p:cNvPr id="5" name="Slide Number Placeholder 4">
             <a:extLst xmlns:a="http://schemas.openxmlformats.org/drawingml/2006/main">
               <a:ext uri="{FF2B5EF4-FFF2-40B4-BE49-F238E27FC236}">
-                <a16:creationId xmlns:a16="http://schemas.microsoft.com/office/drawing/2014/main" id="{47547B20-D702-4713-8358-0F54D4A9F6DF}"/>
+                <a16:creationId xmlns:a16="http://schemas.microsoft.com/office/drawing/2014/main" id="{8F8B5352-2B8B-4BBA-88BF-4E40F51BAFFE}"/>
               </a:ext>
             </a:extLst>
           </p:cNvPr>
@@ -3880,7 +3880,7 @@
           <p:cNvPr id="2" name="Date Placeholder 1">
             <a:extLst xmlns:a="http://schemas.openxmlformats.org/drawingml/2006/main">
               <a:ext uri="{FF2B5EF4-FFF2-40B4-BE49-F238E27FC236}">
-                <a16:creationId xmlns:a16="http://schemas.microsoft.com/office/drawing/2014/main" id="{670CD360-4A16-4F10-80E5-9BA5DCDD16E6}"/>
+                <a16:creationId xmlns:a16="http://schemas.microsoft.com/office/drawing/2014/main" id="{D552D473-25D9-43E4-91E2-1CF6CA1E0C14}"/>
               </a:ext>
             </a:extLst>
           </p:cNvPr>
@@ -3907,7 +3907,7 @@
           <p:cNvPr id="3" name="Footer Placeholder 2">
             <a:extLst xmlns:a="http://schemas.openxmlformats.org/drawingml/2006/main">
               <a:ext uri="{FF2B5EF4-FFF2-40B4-BE49-F238E27FC236}">
-                <a16:creationId xmlns:a16="http://schemas.microsoft.com/office/drawing/2014/main" id="{92E205A4-8E4C-425E-9F23-576375C36746}"/>
+                <a16:creationId xmlns:a16="http://schemas.microsoft.com/office/drawing/2014/main" id="{3116C545-E400-4BEA-833F-2102320D75D9}"/>
               </a:ext>
             </a:extLst>
           </p:cNvPr>
@@ -3930,7 +3930,7 @@
           <p:cNvPr id="4" name="Slide Number Placeholder 3">
             <a:extLst xmlns:a="http://schemas.openxmlformats.org/drawingml/2006/main">
               <a:ext uri="{FF2B5EF4-FFF2-40B4-BE49-F238E27FC236}">
-                <a16:creationId xmlns:a16="http://schemas.microsoft.com/office/drawing/2014/main" id="{3BE4F31E-816C-4E13-A175-40ADE07D9F6A}"/>
+                <a16:creationId xmlns:a16="http://schemas.microsoft.com/office/drawing/2014/main" id="{94F1F0FC-5A20-4CA5-A8B9-FE33D942619E}"/>
               </a:ext>
             </a:extLst>
           </p:cNvPr>
@@ -3974,7 +3974,7 @@
           <p:cNvPr id="2" name="Title 1">
             <a:extLst xmlns:a="http://schemas.openxmlformats.org/drawingml/2006/main">
               <a:ext uri="{FF2B5EF4-FFF2-40B4-BE49-F238E27FC236}">
-                <a16:creationId xmlns:a16="http://schemas.microsoft.com/office/drawing/2014/main" id="{FBCCE0EB-65F1-436B-B9C0-CEBC5C4B89F1}"/>
+                <a16:creationId xmlns:a16="http://schemas.microsoft.com/office/drawing/2014/main" id="{B9DE9887-EFDB-48B0-AAB8-E40580F0B294}"/>
               </a:ext>
             </a:extLst>
           </p:cNvPr>
@@ -4011,7 +4011,7 @@
           <p:cNvPr id="3" name="Content Placeholder 2">
             <a:extLst xmlns:a="http://schemas.openxmlformats.org/drawingml/2006/main">
               <a:ext uri="{FF2B5EF4-FFF2-40B4-BE49-F238E27FC236}">
-                <a16:creationId xmlns:a16="http://schemas.microsoft.com/office/drawing/2014/main" id="{769178E1-D0C8-4551-8AAB-B6069ED3BF11}"/>
+                <a16:creationId xmlns:a16="http://schemas.microsoft.com/office/drawing/2014/main" id="{074977EA-FBD2-4445-A03D-DDFAB656B5AB}"/>
               </a:ext>
             </a:extLst>
           </p:cNvPr>
@@ -4115,7 +4115,7 @@
           <p:cNvPr id="4" name="Text Placeholder 3">
             <a:extLst xmlns:a="http://schemas.openxmlformats.org/drawingml/2006/main">
               <a:ext uri="{FF2B5EF4-FFF2-40B4-BE49-F238E27FC236}">
-                <a16:creationId xmlns:a16="http://schemas.microsoft.com/office/drawing/2014/main" id="{A3890994-6925-4100-8805-E6CD3DD8AE0C}"/>
+                <a16:creationId xmlns:a16="http://schemas.microsoft.com/office/drawing/2014/main" id="{1F292E71-DAB5-417F-A828-BE6A83D5D19F}"/>
               </a:ext>
             </a:extLst>
           </p:cNvPr>
@@ -4187,7 +4187,7 @@
           <p:cNvPr id="5" name="Date Placeholder 4">
             <a:extLst xmlns:a="http://schemas.openxmlformats.org/drawingml/2006/main">
               <a:ext uri="{FF2B5EF4-FFF2-40B4-BE49-F238E27FC236}">
-                <a16:creationId xmlns:a16="http://schemas.microsoft.com/office/drawing/2014/main" id="{EB58C475-B6A0-4346-B115-8332D7FA09CB}"/>
+                <a16:creationId xmlns:a16="http://schemas.microsoft.com/office/drawing/2014/main" id="{E0A4AFAC-4282-4BC1-86CE-8A25B0A3FB35}"/>
               </a:ext>
             </a:extLst>
           </p:cNvPr>
@@ -4214,7 +4214,7 @@
           <p:cNvPr id="6" name="Footer Placeholder 5">
             <a:extLst xmlns:a="http://schemas.openxmlformats.org/drawingml/2006/main">
               <a:ext uri="{FF2B5EF4-FFF2-40B4-BE49-F238E27FC236}">
-                <a16:creationId xmlns:a16="http://schemas.microsoft.com/office/drawing/2014/main" id="{D7A579F5-69A9-4BF5-8BBE-E560BAEEC857}"/>
+                <a16:creationId xmlns:a16="http://schemas.microsoft.com/office/drawing/2014/main" id="{C0075797-B635-4406-BACC-6149E649E36F}"/>
               </a:ext>
             </a:extLst>
           </p:cNvPr>
@@ -4237,7 +4237,7 @@
           <p:cNvPr id="7" name="Slide Number Placeholder 6">
             <a:extLst xmlns:a="http://schemas.openxmlformats.org/drawingml/2006/main">
               <a:ext uri="{FF2B5EF4-FFF2-40B4-BE49-F238E27FC236}">
-                <a16:creationId xmlns:a16="http://schemas.microsoft.com/office/drawing/2014/main" id="{905A2040-6B29-4129-8B92-3BE61DD83125}"/>
+                <a16:creationId xmlns:a16="http://schemas.microsoft.com/office/drawing/2014/main" id="{FA5BD007-E5BB-4D7E-8F35-E05C4BABAE11}"/>
               </a:ext>
             </a:extLst>
           </p:cNvPr>
@@ -4281,7 +4281,7 @@
           <p:cNvPr id="2" name="Title 1">
             <a:extLst xmlns:a="http://schemas.openxmlformats.org/drawingml/2006/main">
               <a:ext uri="{FF2B5EF4-FFF2-40B4-BE49-F238E27FC236}">
-                <a16:creationId xmlns:a16="http://schemas.microsoft.com/office/drawing/2014/main" id="{6ED73E0D-CF4B-4439-9AD5-4268EAE70CF4}"/>
+                <a16:creationId xmlns:a16="http://schemas.microsoft.com/office/drawing/2014/main" id="{56C133F7-3373-4726-A359-4E8D56A52E9A}"/>
               </a:ext>
             </a:extLst>
           </p:cNvPr>
@@ -4318,7 +4318,7 @@
           <p:cNvPr id="3" name="Picture Placeholder 2">
             <a:extLst xmlns:a="http://schemas.openxmlformats.org/drawingml/2006/main">
               <a:ext uri="{FF2B5EF4-FFF2-40B4-BE49-F238E27FC236}">
-                <a16:creationId xmlns:a16="http://schemas.microsoft.com/office/drawing/2014/main" id="{E0DF9B4E-F101-445D-B83E-81E2A9ED629E}"/>
+                <a16:creationId xmlns:a16="http://schemas.microsoft.com/office/drawing/2014/main" id="{C8996CD4-FBAE-45BB-8658-DD00247E6627}"/>
               </a:ext>
             </a:extLst>
           </p:cNvPr>
@@ -4383,7 +4383,7 @@
           <p:cNvPr id="4" name="Text Placeholder 3">
             <a:extLst xmlns:a="http://schemas.openxmlformats.org/drawingml/2006/main">
               <a:ext uri="{FF2B5EF4-FFF2-40B4-BE49-F238E27FC236}">
-                <a16:creationId xmlns:a16="http://schemas.microsoft.com/office/drawing/2014/main" id="{FD046CE0-D5E3-4AB1-8178-759FE111B078}"/>
+                <a16:creationId xmlns:a16="http://schemas.microsoft.com/office/drawing/2014/main" id="{247BE351-9992-404A-BD77-7BDD3C45298B}"/>
               </a:ext>
             </a:extLst>
           </p:cNvPr>
@@ -4455,7 +4455,7 @@
           <p:cNvPr id="5" name="Date Placeholder 4">
             <a:extLst xmlns:a="http://schemas.openxmlformats.org/drawingml/2006/main">
               <a:ext uri="{FF2B5EF4-FFF2-40B4-BE49-F238E27FC236}">
-                <a16:creationId xmlns:a16="http://schemas.microsoft.com/office/drawing/2014/main" id="{34813885-8BB0-465E-AC4A-21A385902953}"/>
+                <a16:creationId xmlns:a16="http://schemas.microsoft.com/office/drawing/2014/main" id="{1083D1B0-18BC-427F-8AD9-D5F350DF9FC6}"/>
               </a:ext>
             </a:extLst>
           </p:cNvPr>
@@ -4482,7 +4482,7 @@
           <p:cNvPr id="6" name="Footer Placeholder 5">
             <a:extLst xmlns:a="http://schemas.openxmlformats.org/drawingml/2006/main">
               <a:ext uri="{FF2B5EF4-FFF2-40B4-BE49-F238E27FC236}">
-                <a16:creationId xmlns:a16="http://schemas.microsoft.com/office/drawing/2014/main" id="{6C292F6B-3A4B-4DCA-8D3B-7E75143A1B2E}"/>
+                <a16:creationId xmlns:a16="http://schemas.microsoft.com/office/drawing/2014/main" id="{83F83985-8053-41E6-A8DE-D102547B03A5}"/>
               </a:ext>
             </a:extLst>
           </p:cNvPr>
@@ -4505,7 +4505,7 @@
           <p:cNvPr id="7" name="Slide Number Placeholder 6">
             <a:extLst xmlns:a="http://schemas.openxmlformats.org/drawingml/2006/main">
               <a:ext uri="{FF2B5EF4-FFF2-40B4-BE49-F238E27FC236}">
-                <a16:creationId xmlns:a16="http://schemas.microsoft.com/office/drawing/2014/main" id="{CAD8FD78-AAD3-4521-9904-B000AE40D093}"/>
+                <a16:creationId xmlns:a16="http://schemas.microsoft.com/office/drawing/2014/main" id="{D44ACAC2-563C-4B85-B752-E90AF6650679}"/>
               </a:ext>
             </a:extLst>
           </p:cNvPr>
@@ -4554,7 +4554,7 @@
           <p:cNvPr id="2" name="Title Placeholder 1">
             <a:extLst xmlns:a="http://schemas.openxmlformats.org/drawingml/2006/main">
               <a:ext uri="{FF2B5EF4-FFF2-40B4-BE49-F238E27FC236}">
-                <a16:creationId xmlns:a16="http://schemas.microsoft.com/office/drawing/2014/main" id="{60B704CE-4EA7-44F5-A2F2-C1F321F235D0}"/>
+                <a16:creationId xmlns:a16="http://schemas.microsoft.com/office/drawing/2014/main" id="{A0B8FCA1-782F-403F-A626-632620A60ED9}"/>
               </a:ext>
             </a:extLst>
           </p:cNvPr>
@@ -4591,7 +4591,7 @@
           <p:cNvPr id="3" name="Text Placeholder 2">
             <a:extLst xmlns:a="http://schemas.openxmlformats.org/drawingml/2006/main">
               <a:ext uri="{FF2B5EF4-FFF2-40B4-BE49-F238E27FC236}">
-                <a16:creationId xmlns:a16="http://schemas.microsoft.com/office/drawing/2014/main" id="{602C9CA6-D155-411C-AD13-68A1FC65B7E6}"/>
+                <a16:creationId xmlns:a16="http://schemas.microsoft.com/office/drawing/2014/main" id="{8C3177A3-466E-4DED-95CE-20CD0EA830D6}"/>
               </a:ext>
             </a:extLst>
           </p:cNvPr>
@@ -4663,7 +4663,7 @@
           <p:cNvPr id="4" name="Date Placeholder 3">
             <a:extLst xmlns:a="http://schemas.openxmlformats.org/drawingml/2006/main">
               <a:ext uri="{FF2B5EF4-FFF2-40B4-BE49-F238E27FC236}">
-                <a16:creationId xmlns:a16="http://schemas.microsoft.com/office/drawing/2014/main" id="{A6E49E4C-20AE-4898-ADFA-F815140F1A22}"/>
+                <a16:creationId xmlns:a16="http://schemas.microsoft.com/office/drawing/2014/main" id="{70157468-2B92-474D-8E38-77403DA6F9F5}"/>
               </a:ext>
             </a:extLst>
           </p:cNvPr>
@@ -4709,7 +4709,7 @@
           <p:cNvPr id="5" name="Footer Placeholder 4">
             <a:extLst xmlns:a="http://schemas.openxmlformats.org/drawingml/2006/main">
               <a:ext uri="{FF2B5EF4-FFF2-40B4-BE49-F238E27FC236}">
-                <a16:creationId xmlns:a16="http://schemas.microsoft.com/office/drawing/2014/main" id="{5D8696B9-0FF4-4486-8B4B-943C93DA7E3B}"/>
+                <a16:creationId xmlns:a16="http://schemas.microsoft.com/office/drawing/2014/main" id="{350D4321-316A-49BD-A449-894C58500771}"/>
               </a:ext>
             </a:extLst>
           </p:cNvPr>
@@ -4751,7 +4751,7 @@
           <p:cNvPr id="6" name="Slide Number Placeholder 5">
             <a:extLst xmlns:a="http://schemas.openxmlformats.org/drawingml/2006/main">
               <a:ext uri="{FF2B5EF4-FFF2-40B4-BE49-F238E27FC236}">
-                <a16:creationId xmlns:a16="http://schemas.microsoft.com/office/drawing/2014/main" id="{B029E00E-43B0-4ABE-9FC8-BC60B048B6BD}"/>
+                <a16:creationId xmlns:a16="http://schemas.microsoft.com/office/drawing/2014/main" id="{F40B7C01-D45E-42E6-9B5F-9D199ADA7340}"/>
               </a:ext>
             </a:extLst>
           </p:cNvPr>
@@ -4796,17 +4796,17 @@
   </p:cSld>
   <p:clrMap bg1="lt1" tx1="dk1" bg2="lt2" tx2="dk2" accent1="accent1" accent2="accent2" accent3="accent3" accent4="accent4" accent5="accent5" accent6="accent6" hlink="hlink" folHlink="folHlink"/>
   <p:sldLayoutIdLst>
-    <p:sldLayoutId xmlns:r="http://schemas.openxmlformats.org/officeDocument/2006/relationships" id="2147483649" r:id="R3f40161963e04a82"/>
-    <p:sldLayoutId xmlns:r="http://schemas.openxmlformats.org/officeDocument/2006/relationships" id="2147483650" r:id="Re1a0057192a04125"/>
-    <p:sldLayoutId xmlns:r="http://schemas.openxmlformats.org/officeDocument/2006/relationships" id="2147483651" r:id="Ra2d48133d6dc4ab7"/>
-    <p:sldLayoutId xmlns:r="http://schemas.openxmlformats.org/officeDocument/2006/relationships" id="2147483652" r:id="R5560b8b4643446a3"/>
-    <p:sldLayoutId xmlns:r="http://schemas.openxmlformats.org/officeDocument/2006/relationships" id="2147483653" r:id="Rd022e81f8ff04206"/>
-    <p:sldLayoutId xmlns:r="http://schemas.openxmlformats.org/officeDocument/2006/relationships" id="2147483654" r:id="Reba5a9417bc64abe"/>
-    <p:sldLayoutId xmlns:r="http://schemas.openxmlformats.org/officeDocument/2006/relationships" id="2147483655" r:id="R71b6e898975b4f41"/>
-    <p:sldLayoutId xmlns:r="http://schemas.openxmlformats.org/officeDocument/2006/relationships" id="2147483656" r:id="R255ff7a1d89c4f3c"/>
-    <p:sldLayoutId xmlns:r="http://schemas.openxmlformats.org/officeDocument/2006/relationships" id="2147483657" r:id="R07f11848d2984c50"/>
-    <p:sldLayoutId xmlns:r="http://schemas.openxmlformats.org/officeDocument/2006/relationships" id="2147483658" r:id="R3a0443c831c54d19"/>
-    <p:sldLayoutId xmlns:r="http://schemas.openxmlformats.org/officeDocument/2006/relationships" id="2147483659" r:id="R078c3798e5914e4a"/>
+    <p:sldLayoutId xmlns:r="http://schemas.openxmlformats.org/officeDocument/2006/relationships" id="2147483649" r:id="R876ae2240e15470b"/>
+    <p:sldLayoutId xmlns:r="http://schemas.openxmlformats.org/officeDocument/2006/relationships" id="2147483650" r:id="Rf1560fea54a74d83"/>
+    <p:sldLayoutId xmlns:r="http://schemas.openxmlformats.org/officeDocument/2006/relationships" id="2147483651" r:id="Rb09da4dd01d34a56"/>
+    <p:sldLayoutId xmlns:r="http://schemas.openxmlformats.org/officeDocument/2006/relationships" id="2147483652" r:id="Rf1c4a9d66b434478"/>
+    <p:sldLayoutId xmlns:r="http://schemas.openxmlformats.org/officeDocument/2006/relationships" id="2147483653" r:id="R670633802c934a08"/>
+    <p:sldLayoutId xmlns:r="http://schemas.openxmlformats.org/officeDocument/2006/relationships" id="2147483654" r:id="R46b5ef5e4542491c"/>
+    <p:sldLayoutId xmlns:r="http://schemas.openxmlformats.org/officeDocument/2006/relationships" id="2147483655" r:id="R281445a14b924131"/>
+    <p:sldLayoutId xmlns:r="http://schemas.openxmlformats.org/officeDocument/2006/relationships" id="2147483656" r:id="R833b39ebf63349a1"/>
+    <p:sldLayoutId xmlns:r="http://schemas.openxmlformats.org/officeDocument/2006/relationships" id="2147483657" r:id="Rd3247c68d5b14a8d"/>
+    <p:sldLayoutId xmlns:r="http://schemas.openxmlformats.org/officeDocument/2006/relationships" id="2147483658" r:id="R2bc44a4246ea4d67"/>
+    <p:sldLayoutId xmlns:r="http://schemas.openxmlformats.org/officeDocument/2006/relationships" id="2147483659" r:id="R2b764a53d0664a0a"/>
   </p:sldLayoutIdLst>
   <p:txStyles>
     <p:titleStyle>
@@ -5359,7 +5359,7 @@
           <p:cNvPr id="2" name="Rectangle 1">
             <a:extLst xmlns:a="http://schemas.openxmlformats.org/drawingml/2006/main">
               <a:ext uri="{FF2B5EF4-FFF2-40B4-BE49-F238E27FC236}">
-                <a16:creationId xmlns:a16="http://schemas.microsoft.com/office/drawing/2014/main" id="{AF58786A-A2BB-4921-9E55-A9424BE26E8C}"/>
+                <a16:creationId xmlns:a16="http://schemas.microsoft.com/office/drawing/2014/main" id="{8E8F0188-665E-405C-A7B4-F3E1B2B50D7C}"/>
               </a:ext>
             </a:extLst>
           </p:cNvPr>
@@ -5414,7 +5414,7 @@
           <p:cNvPr id="3" name="TextBox 2">
             <a:extLst xmlns:a="http://schemas.openxmlformats.org/drawingml/2006/main">
               <a:ext uri="{FF2B5EF4-FFF2-40B4-BE49-F238E27FC236}">
-                <a16:creationId xmlns:a16="http://schemas.microsoft.com/office/drawing/2014/main" id="{F16D6A16-1563-4851-8ED6-3BE528181BEE}"/>
+                <a16:creationId xmlns:a16="http://schemas.microsoft.com/office/drawing/2014/main" id="{E881E6F1-B5CB-47A5-AA1F-D40AB9C81EDF}"/>
               </a:ext>
             </a:extLst>
           </p:cNvPr>
@@ -5461,7 +5461,7 @@
           <p:cNvPr id="4" name="TextBox 3">
             <a:extLst xmlns:a="http://schemas.openxmlformats.org/drawingml/2006/main">
               <a:ext uri="{FF2B5EF4-FFF2-40B4-BE49-F238E27FC236}">
-                <a16:creationId xmlns:a16="http://schemas.microsoft.com/office/drawing/2014/main" id="{FEBA0398-C69B-4185-8A45-19D6343D7376}"/>
+                <a16:creationId xmlns:a16="http://schemas.microsoft.com/office/drawing/2014/main" id="{7E9737A0-692B-4D02-8B4C-2A09D53E6E78}"/>
               </a:ext>
             </a:extLst>
           </p:cNvPr>
@@ -5509,7 +5509,7 @@
           <p:cNvPr id="5" name="TextBox 4">
             <a:extLst xmlns:a="http://schemas.openxmlformats.org/drawingml/2006/main">
               <a:ext uri="{FF2B5EF4-FFF2-40B4-BE49-F238E27FC236}">
-                <a16:creationId xmlns:a16="http://schemas.microsoft.com/office/drawing/2014/main" id="{07DF4125-6E47-4053-8EA1-319DA01D442F}"/>
+                <a16:creationId xmlns:a16="http://schemas.microsoft.com/office/drawing/2014/main" id="{0AD2B9D7-484A-46FC-9320-8DC282F2AD14}"/>
               </a:ext>
             </a:extLst>
           </p:cNvPr>
@@ -5556,7 +5556,7 @@
           <p:cNvPr id="6" name="Rectangle 5">
             <a:extLst xmlns:a="http://schemas.openxmlformats.org/drawingml/2006/main">
               <a:ext uri="{FF2B5EF4-FFF2-40B4-BE49-F238E27FC236}">
-                <a16:creationId xmlns:a16="http://schemas.microsoft.com/office/drawing/2014/main" id="{4FBAD4C5-C30A-40D3-99D4-F2BE0A377906}"/>
+                <a16:creationId xmlns:a16="http://schemas.microsoft.com/office/drawing/2014/main" id="{A7852EFF-BCC4-43BD-ACA9-C2D33D8647BD}"/>
               </a:ext>
             </a:extLst>
           </p:cNvPr>
@@ -5611,7 +5611,7 @@
           <p:cNvPr id="7" name="TextBox 6">
             <a:extLst xmlns:a="http://schemas.openxmlformats.org/drawingml/2006/main">
               <a:ext uri="{FF2B5EF4-FFF2-40B4-BE49-F238E27FC236}">
-                <a16:creationId xmlns:a16="http://schemas.microsoft.com/office/drawing/2014/main" id="{3F98A473-3BA5-4E62-9BE0-E4D6F70E50D5}"/>
+                <a16:creationId xmlns:a16="http://schemas.microsoft.com/office/drawing/2014/main" id="{CA119601-9196-4B49-A144-F1B788E00079}"/>
               </a:ext>
             </a:extLst>
           </p:cNvPr>
@@ -5658,7 +5658,7 @@
           <p:cNvPr id="8" name="TextBox 7">
             <a:extLst xmlns:a="http://schemas.openxmlformats.org/drawingml/2006/main">
               <a:ext uri="{FF2B5EF4-FFF2-40B4-BE49-F238E27FC236}">
-                <a16:creationId xmlns:a16="http://schemas.microsoft.com/office/drawing/2014/main" id="{6B282DFF-E335-44AE-A9F4-BD3908EDFE65}"/>
+                <a16:creationId xmlns:a16="http://schemas.microsoft.com/office/drawing/2014/main" id="{84CBF447-7BBD-46C8-9B05-57CAF7E6B062}"/>
               </a:ext>
             </a:extLst>
           </p:cNvPr>
@@ -5695,7 +5695,7 @@
                 <a:ea typeface="Aptos"/>
                 <a:cs typeface="Aptos"/>
               </a:rPr>
-              <a:t>2026.07.27-29</a:t>
+              <a:t>2026.07.27-30</a:t>
             </a:r>
           </a:p>
         </p:txBody>
@@ -5705,7 +5705,7 @@
           <p:cNvPr id="9" name="TextBox 8">
             <a:extLst xmlns:a="http://schemas.openxmlformats.org/drawingml/2006/main">
               <a:ext uri="{FF2B5EF4-FFF2-40B4-BE49-F238E27FC236}">
-                <a16:creationId xmlns:a16="http://schemas.microsoft.com/office/drawing/2014/main" id="{0A1EE518-06A1-4086-80B5-49D0C1B6A702}"/>
+                <a16:creationId xmlns:a16="http://schemas.microsoft.com/office/drawing/2014/main" id="{09F47F66-6FC0-4BC5-8166-FD59BAA7AECD}"/>
               </a:ext>
             </a:extLst>
           </p:cNvPr>
@@ -5773,7 +5773,7 @@
           <p:cNvPr id="10" name="TextBox 9">
             <a:extLst xmlns:a="http://schemas.openxmlformats.org/drawingml/2006/main">
               <a:ext uri="{FF2B5EF4-FFF2-40B4-BE49-F238E27FC236}">
-                <a16:creationId xmlns:a16="http://schemas.microsoft.com/office/drawing/2014/main" id="{507EFAC1-3F1D-47FA-BB7A-21D6BCBA89E0}"/>
+                <a16:creationId xmlns:a16="http://schemas.microsoft.com/office/drawing/2014/main" id="{69EE3EBF-EE57-4CF0-A00B-5496CDD2CF14}"/>
               </a:ext>
             </a:extLst>
           </p:cNvPr>
@@ -5820,7 +5820,7 @@
           <p:cNvPr id="11" name="TextBox 10">
             <a:extLst xmlns:a="http://schemas.openxmlformats.org/drawingml/2006/main">
               <a:ext uri="{FF2B5EF4-FFF2-40B4-BE49-F238E27FC236}">
-                <a16:creationId xmlns:a16="http://schemas.microsoft.com/office/drawing/2014/main" id="{267345D6-E76E-430B-8856-1249557104BB}"/>
+                <a16:creationId xmlns:a16="http://schemas.microsoft.com/office/drawing/2014/main" id="{4D08F920-DEE2-42C6-950C-89CA59A73F80}"/>
               </a:ext>
             </a:extLst>
           </p:cNvPr>
@@ -5867,7 +5867,7 @@
           <p:cNvPr id="12" name="TextBox 11">
             <a:extLst xmlns:a="http://schemas.openxmlformats.org/drawingml/2006/main">
               <a:ext uri="{FF2B5EF4-FFF2-40B4-BE49-F238E27FC236}">
-                <a16:creationId xmlns:a16="http://schemas.microsoft.com/office/drawing/2014/main" id="{8F206651-948D-4BF6-9C8B-D117338A8BE4}"/>
+                <a16:creationId xmlns:a16="http://schemas.microsoft.com/office/drawing/2014/main" id="{B7B17406-FA5A-4EA8-A21D-40FBD95EE608}"/>
               </a:ext>
             </a:extLst>
           </p:cNvPr>
@@ -5912,7 +5912,7 @@
     </p:spTree>
     <p:extLst>
       <p:ext uri="{BB962C8B-B14F-4D97-AF65-F5344CB8AC3E}">
-        <p14:creationId xmlns:p14="http://schemas.microsoft.com/office/powerpoint/2010/main" val="813462376"/>
+        <p14:creationId xmlns:p14="http://schemas.microsoft.com/office/powerpoint/2010/main" val="355759634"/>
       </p:ext>
     </p:extLst>
   </p:cSld>
@@ -5936,7 +5936,7 @@
           <p:cNvPr id="2" name="TextBox 1">
             <a:extLst xmlns:a="http://schemas.openxmlformats.org/drawingml/2006/main">
               <a:ext uri="{FF2B5EF4-FFF2-40B4-BE49-F238E27FC236}">
-                <a16:creationId xmlns:a16="http://schemas.microsoft.com/office/drawing/2014/main" id="{2848318B-2D58-470D-AD7C-E7FA688F5CD1}"/>
+                <a16:creationId xmlns:a16="http://schemas.microsoft.com/office/drawing/2014/main" id="{8A3BC13A-8B19-4D55-BA03-F8846747CADB}"/>
               </a:ext>
             </a:extLst>
           </p:cNvPr>
@@ -5983,7 +5983,7 @@
           <p:cNvPr id="3" name="TextBox 2">
             <a:extLst xmlns:a="http://schemas.openxmlformats.org/drawingml/2006/main">
               <a:ext uri="{FF2B5EF4-FFF2-40B4-BE49-F238E27FC236}">
-                <a16:creationId xmlns:a16="http://schemas.microsoft.com/office/drawing/2014/main" id="{A216D802-21E2-491F-B41C-90EA93C8782A}"/>
+                <a16:creationId xmlns:a16="http://schemas.microsoft.com/office/drawing/2014/main" id="{34E46B47-2395-46A9-9CE5-380D4247CA7B}"/>
               </a:ext>
             </a:extLst>
           </p:cNvPr>
@@ -6030,7 +6030,7 @@
           <p:cNvPr id="4" name="Rectangle 3">
             <a:extLst xmlns:a="http://schemas.openxmlformats.org/drawingml/2006/main">
               <a:ext uri="{FF2B5EF4-FFF2-40B4-BE49-F238E27FC236}">
-                <a16:creationId xmlns:a16="http://schemas.microsoft.com/office/drawing/2014/main" id="{6D195B96-2FEF-48D6-B5F6-E0E8EEEFC189}"/>
+                <a16:creationId xmlns:a16="http://schemas.microsoft.com/office/drawing/2014/main" id="{C2D5A83D-1094-49E6-9266-3B02B474431A}"/>
               </a:ext>
             </a:extLst>
           </p:cNvPr>
@@ -6085,7 +6085,7 @@
           <p:cNvPr id="5" name="Rectangle 4">
             <a:extLst xmlns:a="http://schemas.openxmlformats.org/drawingml/2006/main">
               <a:ext uri="{FF2B5EF4-FFF2-40B4-BE49-F238E27FC236}">
-                <a16:creationId xmlns:a16="http://schemas.microsoft.com/office/drawing/2014/main" id="{71969086-7A07-4B20-85D7-3D11230111E0}"/>
+                <a16:creationId xmlns:a16="http://schemas.microsoft.com/office/drawing/2014/main" id="{99458EBD-6236-4C59-8DAD-C7B85D123561}"/>
               </a:ext>
             </a:extLst>
           </p:cNvPr>
@@ -6140,7 +6140,7 @@
           <p:cNvPr id="6" name="TextBox 5">
             <a:extLst xmlns:a="http://schemas.openxmlformats.org/drawingml/2006/main">
               <a:ext uri="{FF2B5EF4-FFF2-40B4-BE49-F238E27FC236}">
-                <a16:creationId xmlns:a16="http://schemas.microsoft.com/office/drawing/2014/main" id="{45A6781B-8957-4A5D-B2B5-FE6BE9FE6680}"/>
+                <a16:creationId xmlns:a16="http://schemas.microsoft.com/office/drawing/2014/main" id="{C095D922-B7A3-43EF-987F-C86CE20E7256}"/>
               </a:ext>
             </a:extLst>
           </p:cNvPr>
@@ -6177,7 +6177,7 @@
                 <a:ea typeface="Aptos"/>
                 <a:cs typeface="Aptos"/>
               </a:rPr>
-              <a:t>Julkinen riippumaton evidenssikooste · 2026.07.27-29 · 2026-07-27 · Lähteet: EPO; Saksa — viralliset tuomiot; WIPO</a:t>
+              <a:t>Julkinen riippumaton evidenssikooste · 2026.07.27-30 · 2026-07-27 · Lähteet: EPO; Saksa — viralliset tuomiot; WIPO</a:t>
             </a:r>
           </a:p>
         </p:txBody>
@@ -6187,7 +6187,7 @@
           <p:cNvPr id="7" name="TextBox 6">
             <a:extLst xmlns:a="http://schemas.openxmlformats.org/drawingml/2006/main">
               <a:ext uri="{FF2B5EF4-FFF2-40B4-BE49-F238E27FC236}">
-                <a16:creationId xmlns:a16="http://schemas.microsoft.com/office/drawing/2014/main" id="{A09A2201-DB0E-4875-A314-991770DF4C2A}"/>
+                <a16:creationId xmlns:a16="http://schemas.microsoft.com/office/drawing/2014/main" id="{E154AEF9-7928-4C8E-B80E-2E41CDFE9A79}"/>
               </a:ext>
             </a:extLst>
           </p:cNvPr>
@@ -6234,7 +6234,7 @@
           <p:cNvPr id="8" name="TextBox 7">
             <a:extLst xmlns:a="http://schemas.openxmlformats.org/drawingml/2006/main">
               <a:ext uri="{FF2B5EF4-FFF2-40B4-BE49-F238E27FC236}">
-                <a16:creationId xmlns:a16="http://schemas.microsoft.com/office/drawing/2014/main" id="{A947DD42-E46B-4870-82FC-1A4B89ECF6B9}"/>
+                <a16:creationId xmlns:a16="http://schemas.microsoft.com/office/drawing/2014/main" id="{4D37762B-B00B-4706-B631-037773CC2694}"/>
               </a:ext>
             </a:extLst>
           </p:cNvPr>
@@ -6281,7 +6281,7 @@
           <p:cNvPr id="9" name="TextBox 8">
             <a:extLst xmlns:a="http://schemas.openxmlformats.org/drawingml/2006/main">
               <a:ext uri="{FF2B5EF4-FFF2-40B4-BE49-F238E27FC236}">
-                <a16:creationId xmlns:a16="http://schemas.microsoft.com/office/drawing/2014/main" id="{439C6AC1-7082-42F7-BA45-AB3C1DA9C267}"/>
+                <a16:creationId xmlns:a16="http://schemas.microsoft.com/office/drawing/2014/main" id="{B130A65A-7E55-4C61-A6FB-326ED6B39038}"/>
               </a:ext>
             </a:extLst>
           </p:cNvPr>
@@ -6378,7 +6378,7 @@
           <p:cNvPr id="10" name="Rounded Rectangle 9">
             <a:extLst xmlns:a="http://schemas.openxmlformats.org/drawingml/2006/main">
               <a:ext uri="{FF2B5EF4-FFF2-40B4-BE49-F238E27FC236}">
-                <a16:creationId xmlns:a16="http://schemas.microsoft.com/office/drawing/2014/main" id="{5BDC0990-716A-4640-B4F0-168DF589EC98}"/>
+                <a16:creationId xmlns:a16="http://schemas.microsoft.com/office/drawing/2014/main" id="{9620B607-B832-43B5-9DD8-1150A243F878}"/>
               </a:ext>
             </a:extLst>
           </p:cNvPr>
@@ -6435,7 +6435,7 @@
           <p:cNvPr id="11" name="TextBox 10">
             <a:extLst xmlns:a="http://schemas.openxmlformats.org/drawingml/2006/main">
               <a:ext uri="{FF2B5EF4-FFF2-40B4-BE49-F238E27FC236}">
-                <a16:creationId xmlns:a16="http://schemas.microsoft.com/office/drawing/2014/main" id="{96FFC8BF-733B-40CB-BDC1-1EA6FBB7F1CB}"/>
+                <a16:creationId xmlns:a16="http://schemas.microsoft.com/office/drawing/2014/main" id="{548261C4-E48B-4B41-8F3D-2E549596D50E}"/>
               </a:ext>
             </a:extLst>
           </p:cNvPr>
@@ -6482,7 +6482,7 @@
           <p:cNvPr id="12" name="TextBox 11">
             <a:extLst xmlns:a="http://schemas.openxmlformats.org/drawingml/2006/main">
               <a:ext uri="{FF2B5EF4-FFF2-40B4-BE49-F238E27FC236}">
-                <a16:creationId xmlns:a16="http://schemas.microsoft.com/office/drawing/2014/main" id="{B65AB046-CE42-4FA1-897A-A717331B35B1}"/>
+                <a16:creationId xmlns:a16="http://schemas.microsoft.com/office/drawing/2014/main" id="{0CE8B1B4-3922-4735-A538-2C2AA195084E}"/>
               </a:ext>
             </a:extLst>
           </p:cNvPr>
@@ -6527,7 +6527,7 @@
     </p:spTree>
     <p:extLst>
       <p:ext uri="{BB962C8B-B14F-4D97-AF65-F5344CB8AC3E}">
-        <p14:creationId xmlns:p14="http://schemas.microsoft.com/office/powerpoint/2010/main" val="1273787546"/>
+        <p14:creationId xmlns:p14="http://schemas.microsoft.com/office/powerpoint/2010/main" val="1649560490"/>
       </p:ext>
     </p:extLst>
   </p:cSld>
@@ -6551,7 +6551,7 @@
           <p:cNvPr id="2" name="TextBox 1">
             <a:extLst xmlns:a="http://schemas.openxmlformats.org/drawingml/2006/main">
               <a:ext uri="{FF2B5EF4-FFF2-40B4-BE49-F238E27FC236}">
-                <a16:creationId xmlns:a16="http://schemas.microsoft.com/office/drawing/2014/main" id="{42C8EAB4-E70D-440D-8429-E2A99172B041}"/>
+                <a16:creationId xmlns:a16="http://schemas.microsoft.com/office/drawing/2014/main" id="{5BD619F7-0865-4EE2-8FBC-FD0DFE72FBC5}"/>
               </a:ext>
             </a:extLst>
           </p:cNvPr>
@@ -6598,7 +6598,7 @@
           <p:cNvPr id="3" name="TextBox 2">
             <a:extLst xmlns:a="http://schemas.openxmlformats.org/drawingml/2006/main">
               <a:ext uri="{FF2B5EF4-FFF2-40B4-BE49-F238E27FC236}">
-                <a16:creationId xmlns:a16="http://schemas.microsoft.com/office/drawing/2014/main" id="{D2CE23F2-1C36-40D4-AC5C-EB0E82D5E3B7}"/>
+                <a16:creationId xmlns:a16="http://schemas.microsoft.com/office/drawing/2014/main" id="{186FD0EE-4DE4-4262-8112-CDECABB043AA}"/>
               </a:ext>
             </a:extLst>
           </p:cNvPr>
@@ -6645,7 +6645,7 @@
           <p:cNvPr id="4" name="Rectangle 3">
             <a:extLst xmlns:a="http://schemas.openxmlformats.org/drawingml/2006/main">
               <a:ext uri="{FF2B5EF4-FFF2-40B4-BE49-F238E27FC236}">
-                <a16:creationId xmlns:a16="http://schemas.microsoft.com/office/drawing/2014/main" id="{94FDB89C-2D58-46AC-9768-B6DA4CEB4A43}"/>
+                <a16:creationId xmlns:a16="http://schemas.microsoft.com/office/drawing/2014/main" id="{372FDC93-965F-4E05-B831-29AF1C21C392}"/>
               </a:ext>
             </a:extLst>
           </p:cNvPr>
@@ -6700,7 +6700,7 @@
           <p:cNvPr id="5" name="Rectangle 4">
             <a:extLst xmlns:a="http://schemas.openxmlformats.org/drawingml/2006/main">
               <a:ext uri="{FF2B5EF4-FFF2-40B4-BE49-F238E27FC236}">
-                <a16:creationId xmlns:a16="http://schemas.microsoft.com/office/drawing/2014/main" id="{5274ACF5-29E4-48BC-8FDF-EDF9BF621CD1}"/>
+                <a16:creationId xmlns:a16="http://schemas.microsoft.com/office/drawing/2014/main" id="{5EEE61A0-94DF-4A2F-9734-5FA1ECD14425}"/>
               </a:ext>
             </a:extLst>
           </p:cNvPr>
@@ -6755,7 +6755,7 @@
           <p:cNvPr id="6" name="TextBox 5">
             <a:extLst xmlns:a="http://schemas.openxmlformats.org/drawingml/2006/main">
               <a:ext uri="{FF2B5EF4-FFF2-40B4-BE49-F238E27FC236}">
-                <a16:creationId xmlns:a16="http://schemas.microsoft.com/office/drawing/2014/main" id="{9F8F95DE-5519-4F28-919D-0252AD3602F5}"/>
+                <a16:creationId xmlns:a16="http://schemas.microsoft.com/office/drawing/2014/main" id="{7AEFAE26-83FB-4C1C-B5EA-8FDC381A0EAA}"/>
               </a:ext>
             </a:extLst>
           </p:cNvPr>
@@ -6792,7 +6792,7 @@
                 <a:ea typeface="Aptos"/>
                 <a:cs typeface="Aptos"/>
               </a:rPr>
-              <a:t>Julkinen riippumaton evidenssikooste · 2026.07.27-29 · 2026-07-27 · Lähteet: EPO Register; EP3032975B2; 8 Ni 18/24 (EP); 7 O 3341/24</a:t>
+              <a:t>Julkinen riippumaton evidenssikooste · 2026.07.27-30 · 2026-07-27 · Lähteet: EPO Register; EP3032975B2; 8 Ni 18/24 (EP); 7 O 3341/24</a:t>
             </a:r>
           </a:p>
         </p:txBody>
@@ -6802,7 +6802,7 @@
           <p:cNvPr id="7" name="TextBox 6">
             <a:extLst xmlns:a="http://schemas.openxmlformats.org/drawingml/2006/main">
               <a:ext uri="{FF2B5EF4-FFF2-40B4-BE49-F238E27FC236}">
-                <a16:creationId xmlns:a16="http://schemas.microsoft.com/office/drawing/2014/main" id="{A3A02698-AD9D-42FA-AFE2-F5412B6C17AC}"/>
+                <a16:creationId xmlns:a16="http://schemas.microsoft.com/office/drawing/2014/main" id="{CB6D3CE3-E20E-4DEE-8DAD-5F1344A4F77D}"/>
               </a:ext>
             </a:extLst>
           </p:cNvPr>
@@ -6849,7 +6849,7 @@
           <p:cNvPr id="8" name="Rounded Rectangle 7">
             <a:extLst xmlns:a="http://schemas.openxmlformats.org/drawingml/2006/main">
               <a:ext uri="{FF2B5EF4-FFF2-40B4-BE49-F238E27FC236}">
-                <a16:creationId xmlns:a16="http://schemas.microsoft.com/office/drawing/2014/main" id="{99952BDB-09FA-4139-9713-A010E88F280A}"/>
+                <a16:creationId xmlns:a16="http://schemas.microsoft.com/office/drawing/2014/main" id="{4C03D4F0-9671-4B6C-884F-29A40A58FFC4}"/>
               </a:ext>
             </a:extLst>
           </p:cNvPr>
@@ -6906,7 +6906,7 @@
           <p:cNvPr id="9" name="TextBox 8">
             <a:extLst xmlns:a="http://schemas.openxmlformats.org/drawingml/2006/main">
               <a:ext uri="{FF2B5EF4-FFF2-40B4-BE49-F238E27FC236}">
-                <a16:creationId xmlns:a16="http://schemas.microsoft.com/office/drawing/2014/main" id="{7B80285D-4A1F-4DBC-BF10-4726AA709C1C}"/>
+                <a16:creationId xmlns:a16="http://schemas.microsoft.com/office/drawing/2014/main" id="{F40E597E-8270-4C4A-8894-927FF6E52C6E}"/>
               </a:ext>
             </a:extLst>
           </p:cNvPr>
@@ -6953,7 +6953,7 @@
           <p:cNvPr id="10" name="TextBox 9">
             <a:extLst xmlns:a="http://schemas.openxmlformats.org/drawingml/2006/main">
               <a:ext uri="{FF2B5EF4-FFF2-40B4-BE49-F238E27FC236}">
-                <a16:creationId xmlns:a16="http://schemas.microsoft.com/office/drawing/2014/main" id="{77F4ECEE-5234-4454-8E20-BD28C303AEDA}"/>
+                <a16:creationId xmlns:a16="http://schemas.microsoft.com/office/drawing/2014/main" id="{B05C1D55-EFA8-4CE9-B884-571FB2D176D8}"/>
               </a:ext>
             </a:extLst>
           </p:cNvPr>
@@ -7000,7 +7000,7 @@
           <p:cNvPr id="11" name="Rounded Rectangle 10">
             <a:extLst xmlns:a="http://schemas.openxmlformats.org/drawingml/2006/main">
               <a:ext uri="{FF2B5EF4-FFF2-40B4-BE49-F238E27FC236}">
-                <a16:creationId xmlns:a16="http://schemas.microsoft.com/office/drawing/2014/main" id="{521C509E-C85E-469F-B362-74AF00FA8126}"/>
+                <a16:creationId xmlns:a16="http://schemas.microsoft.com/office/drawing/2014/main" id="{29B3BC9D-F9ED-47E8-99A6-CA66EAC06A8D}"/>
               </a:ext>
             </a:extLst>
           </p:cNvPr>
@@ -7057,7 +7057,7 @@
           <p:cNvPr id="12" name="TextBox 11">
             <a:extLst xmlns:a="http://schemas.openxmlformats.org/drawingml/2006/main">
               <a:ext uri="{FF2B5EF4-FFF2-40B4-BE49-F238E27FC236}">
-                <a16:creationId xmlns:a16="http://schemas.microsoft.com/office/drawing/2014/main" id="{455298BE-7ADD-4EC5-BD36-AE65A943D3A1}"/>
+                <a16:creationId xmlns:a16="http://schemas.microsoft.com/office/drawing/2014/main" id="{E0A1BEF1-3637-4F7F-B371-4B4D30FFFA5D}"/>
               </a:ext>
             </a:extLst>
           </p:cNvPr>
@@ -7104,7 +7104,7 @@
           <p:cNvPr id="13" name="TextBox 12">
             <a:extLst xmlns:a="http://schemas.openxmlformats.org/drawingml/2006/main">
               <a:ext uri="{FF2B5EF4-FFF2-40B4-BE49-F238E27FC236}">
-                <a16:creationId xmlns:a16="http://schemas.microsoft.com/office/drawing/2014/main" id="{8201CFA4-C341-4C64-9BC2-FD7BBC3D3543}"/>
+                <a16:creationId xmlns:a16="http://schemas.microsoft.com/office/drawing/2014/main" id="{77C9DCD7-D70D-45F7-8FDC-35B3D58ABE22}"/>
               </a:ext>
             </a:extLst>
           </p:cNvPr>
@@ -7151,7 +7151,7 @@
           <p:cNvPr id="14" name="Rounded Rectangle 13">
             <a:extLst xmlns:a="http://schemas.openxmlformats.org/drawingml/2006/main">
               <a:ext uri="{FF2B5EF4-FFF2-40B4-BE49-F238E27FC236}">
-                <a16:creationId xmlns:a16="http://schemas.microsoft.com/office/drawing/2014/main" id="{8902DE03-EB2B-403A-9BDF-79021E185217}"/>
+                <a16:creationId xmlns:a16="http://schemas.microsoft.com/office/drawing/2014/main" id="{05AB92D5-4F37-4141-A2E9-83CCD8F32672}"/>
               </a:ext>
             </a:extLst>
           </p:cNvPr>
@@ -7208,7 +7208,7 @@
           <p:cNvPr id="15" name="TextBox 14">
             <a:extLst xmlns:a="http://schemas.openxmlformats.org/drawingml/2006/main">
               <a:ext uri="{FF2B5EF4-FFF2-40B4-BE49-F238E27FC236}">
-                <a16:creationId xmlns:a16="http://schemas.microsoft.com/office/drawing/2014/main" id="{2A29E5B1-128A-466F-87EC-6E5C2D3927EC}"/>
+                <a16:creationId xmlns:a16="http://schemas.microsoft.com/office/drawing/2014/main" id="{23F3E74A-F036-4699-8A39-61BAE6F6AD7F}"/>
               </a:ext>
             </a:extLst>
           </p:cNvPr>
@@ -7255,7 +7255,7 @@
           <p:cNvPr id="16" name="TextBox 15">
             <a:extLst xmlns:a="http://schemas.openxmlformats.org/drawingml/2006/main">
               <a:ext uri="{FF2B5EF4-FFF2-40B4-BE49-F238E27FC236}">
-                <a16:creationId xmlns:a16="http://schemas.microsoft.com/office/drawing/2014/main" id="{C2438E7C-A8C9-447E-8E9D-5EF23FA200A1}"/>
+                <a16:creationId xmlns:a16="http://schemas.microsoft.com/office/drawing/2014/main" id="{CA08F74E-403E-49DB-9AE4-C24610F5C9E5}"/>
               </a:ext>
             </a:extLst>
           </p:cNvPr>
@@ -7302,7 +7302,7 @@
           <p:cNvPr id="17" name="TextBox 16">
             <a:extLst xmlns:a="http://schemas.openxmlformats.org/drawingml/2006/main">
               <a:ext uri="{FF2B5EF4-FFF2-40B4-BE49-F238E27FC236}">
-                <a16:creationId xmlns:a16="http://schemas.microsoft.com/office/drawing/2014/main" id="{BA73BD3A-D789-4226-AFE5-3D6C519F030B}"/>
+                <a16:creationId xmlns:a16="http://schemas.microsoft.com/office/drawing/2014/main" id="{4BE7986D-A725-4177-9479-66B321E0C65F}"/>
               </a:ext>
             </a:extLst>
           </p:cNvPr>
@@ -7349,7 +7349,7 @@
           <p:cNvPr id="18" name="Rounded Rectangle 17">
             <a:extLst xmlns:a="http://schemas.openxmlformats.org/drawingml/2006/main">
               <a:ext uri="{FF2B5EF4-FFF2-40B4-BE49-F238E27FC236}">
-                <a16:creationId xmlns:a16="http://schemas.microsoft.com/office/drawing/2014/main" id="{CF478FE3-7589-4BB5-B221-2152DE47C33B}"/>
+                <a16:creationId xmlns:a16="http://schemas.microsoft.com/office/drawing/2014/main" id="{A8AC81CE-720F-4530-932F-F8BE6EB6EDB4}"/>
               </a:ext>
             </a:extLst>
           </p:cNvPr>
@@ -7406,7 +7406,7 @@
           <p:cNvPr id="19" name="TextBox 18">
             <a:extLst xmlns:a="http://schemas.openxmlformats.org/drawingml/2006/main">
               <a:ext uri="{FF2B5EF4-FFF2-40B4-BE49-F238E27FC236}">
-                <a16:creationId xmlns:a16="http://schemas.microsoft.com/office/drawing/2014/main" id="{8934583A-3F7C-4154-BB53-ED634E6B633B}"/>
+                <a16:creationId xmlns:a16="http://schemas.microsoft.com/office/drawing/2014/main" id="{7E2FE90D-72FB-4007-96F0-9B54116F3580}"/>
               </a:ext>
             </a:extLst>
           </p:cNvPr>
@@ -7453,7 +7453,7 @@
           <p:cNvPr id="20" name="TextBox 19">
             <a:extLst xmlns:a="http://schemas.openxmlformats.org/drawingml/2006/main">
               <a:ext uri="{FF2B5EF4-FFF2-40B4-BE49-F238E27FC236}">
-                <a16:creationId xmlns:a16="http://schemas.microsoft.com/office/drawing/2014/main" id="{A8102184-6803-4CA5-9ACA-645CDA92BA7B}"/>
+                <a16:creationId xmlns:a16="http://schemas.microsoft.com/office/drawing/2014/main" id="{F8EFD569-12C9-4973-BB58-EA2A42890B59}"/>
               </a:ext>
             </a:extLst>
           </p:cNvPr>
@@ -7498,7 +7498,7 @@
     </p:spTree>
     <p:extLst>
       <p:ext uri="{BB962C8B-B14F-4D97-AF65-F5344CB8AC3E}">
-        <p14:creationId xmlns:p14="http://schemas.microsoft.com/office/powerpoint/2010/main" val="838133396"/>
+        <p14:creationId xmlns:p14="http://schemas.microsoft.com/office/powerpoint/2010/main" val="1908116236"/>
       </p:ext>
     </p:extLst>
   </p:cSld>
@@ -7522,7 +7522,7 @@
           <p:cNvPr id="2" name="TextBox 1">
             <a:extLst xmlns:a="http://schemas.openxmlformats.org/drawingml/2006/main">
               <a:ext uri="{FF2B5EF4-FFF2-40B4-BE49-F238E27FC236}">
-                <a16:creationId xmlns:a16="http://schemas.microsoft.com/office/drawing/2014/main" id="{AC455D1E-7606-4BAE-82D0-722CEF750905}"/>
+                <a16:creationId xmlns:a16="http://schemas.microsoft.com/office/drawing/2014/main" id="{BB852853-C456-464D-8122-83E4944F6FF8}"/>
               </a:ext>
             </a:extLst>
           </p:cNvPr>
@@ -7569,7 +7569,7 @@
           <p:cNvPr id="3" name="TextBox 2">
             <a:extLst xmlns:a="http://schemas.openxmlformats.org/drawingml/2006/main">
               <a:ext uri="{FF2B5EF4-FFF2-40B4-BE49-F238E27FC236}">
-                <a16:creationId xmlns:a16="http://schemas.microsoft.com/office/drawing/2014/main" id="{107CFEF0-6800-4E07-9373-9AD4AF3CEDED}"/>
+                <a16:creationId xmlns:a16="http://schemas.microsoft.com/office/drawing/2014/main" id="{1B988734-1E56-494A-9E79-B51448C4E28E}"/>
               </a:ext>
             </a:extLst>
           </p:cNvPr>
@@ -7616,7 +7616,7 @@
           <p:cNvPr id="4" name="Rectangle 3">
             <a:extLst xmlns:a="http://schemas.openxmlformats.org/drawingml/2006/main">
               <a:ext uri="{FF2B5EF4-FFF2-40B4-BE49-F238E27FC236}">
-                <a16:creationId xmlns:a16="http://schemas.microsoft.com/office/drawing/2014/main" id="{D9F71614-2CE0-4DF2-A577-F8B650935362}"/>
+                <a16:creationId xmlns:a16="http://schemas.microsoft.com/office/drawing/2014/main" id="{57F2A2CC-E547-40BA-BB95-8234B8996345}"/>
               </a:ext>
             </a:extLst>
           </p:cNvPr>
@@ -7671,7 +7671,7 @@
           <p:cNvPr id="5" name="Rectangle 4">
             <a:extLst xmlns:a="http://schemas.openxmlformats.org/drawingml/2006/main">
               <a:ext uri="{FF2B5EF4-FFF2-40B4-BE49-F238E27FC236}">
-                <a16:creationId xmlns:a16="http://schemas.microsoft.com/office/drawing/2014/main" id="{D0143BE9-48AC-42E8-9371-B65E9D4213F4}"/>
+                <a16:creationId xmlns:a16="http://schemas.microsoft.com/office/drawing/2014/main" id="{BBDF72F5-432E-4ADE-9E59-B545605D9405}"/>
               </a:ext>
             </a:extLst>
           </p:cNvPr>
@@ -7726,7 +7726,7 @@
           <p:cNvPr id="6" name="TextBox 5">
             <a:extLst xmlns:a="http://schemas.openxmlformats.org/drawingml/2006/main">
               <a:ext uri="{FF2B5EF4-FFF2-40B4-BE49-F238E27FC236}">
-                <a16:creationId xmlns:a16="http://schemas.microsoft.com/office/drawing/2014/main" id="{1BE0E5BA-5C35-4607-AE73-7EA1B30B3366}"/>
+                <a16:creationId xmlns:a16="http://schemas.microsoft.com/office/drawing/2014/main" id="{A247A774-6A55-4AC1-A02B-6B3B770292EC}"/>
               </a:ext>
             </a:extLst>
           </p:cNvPr>
@@ -7763,7 +7763,7 @@
                 <a:ea typeface="Aptos"/>
                 <a:cs typeface="Aptos"/>
               </a:rPr>
-              <a:t>Julkinen riippumaton evidenssikooste · 2026.07.27-29 · 2026-07-27 · Lähteet: World Bank; Statistics Canada; Health Canada; NZ Ministry of Health; Sejm; FHM; FTC</a:t>
+              <a:t>Julkinen riippumaton evidenssikooste · 2026.07.27-30 · 2026-07-27 · Lähteet: World Bank; Statistics Canada; Health Canada; NZ Ministry of Health; Sejm; FHM; FTC</a:t>
             </a:r>
           </a:p>
         </p:txBody>
@@ -7773,7 +7773,7 @@
           <p:cNvPr id="7" name="TextBox 6">
             <a:extLst xmlns:a="http://schemas.openxmlformats.org/drawingml/2006/main">
               <a:ext uri="{FF2B5EF4-FFF2-40B4-BE49-F238E27FC236}">
-                <a16:creationId xmlns:a16="http://schemas.microsoft.com/office/drawing/2014/main" id="{2914A314-3CA1-4CF0-ABB8-EC2D43F77EC6}"/>
+                <a16:creationId xmlns:a16="http://schemas.microsoft.com/office/drawing/2014/main" id="{9F0D7514-03D0-44AC-99D6-BDF6219939FA}"/>
               </a:ext>
             </a:extLst>
           </p:cNvPr>
@@ -7820,7 +7820,7 @@
           <p:cNvPr id="8" name="Rounded Rectangle 7">
             <a:extLst xmlns:a="http://schemas.openxmlformats.org/drawingml/2006/main">
               <a:ext uri="{FF2B5EF4-FFF2-40B4-BE49-F238E27FC236}">
-                <a16:creationId xmlns:a16="http://schemas.microsoft.com/office/drawing/2014/main" id="{B73F52C2-D051-42DC-BA99-244E9C3EB7DA}"/>
+                <a16:creationId xmlns:a16="http://schemas.microsoft.com/office/drawing/2014/main" id="{D1C4DF48-6716-4F65-9AEC-821963B8053C}"/>
               </a:ext>
             </a:extLst>
           </p:cNvPr>
@@ -7877,7 +7877,7 @@
           <p:cNvPr id="9" name="TextBox 8">
             <a:extLst xmlns:a="http://schemas.openxmlformats.org/drawingml/2006/main">
               <a:ext uri="{FF2B5EF4-FFF2-40B4-BE49-F238E27FC236}">
-                <a16:creationId xmlns:a16="http://schemas.microsoft.com/office/drawing/2014/main" id="{37B2A075-F927-406B-A6A1-8A99B0F2BCAE}"/>
+                <a16:creationId xmlns:a16="http://schemas.microsoft.com/office/drawing/2014/main" id="{CD250DBF-85CA-44B8-9707-98206456C788}"/>
               </a:ext>
             </a:extLst>
           </p:cNvPr>
@@ -7924,7 +7924,7 @@
           <p:cNvPr id="10" name="TextBox 9">
             <a:extLst xmlns:a="http://schemas.openxmlformats.org/drawingml/2006/main">
               <a:ext uri="{FF2B5EF4-FFF2-40B4-BE49-F238E27FC236}">
-                <a16:creationId xmlns:a16="http://schemas.microsoft.com/office/drawing/2014/main" id="{CBAABE31-3129-401D-84ED-177D310F1317}"/>
+                <a16:creationId xmlns:a16="http://schemas.microsoft.com/office/drawing/2014/main" id="{8768499C-6C97-41F7-A754-AA79FE047E36}"/>
               </a:ext>
             </a:extLst>
           </p:cNvPr>
@@ -7936,7 +7936,7 @@
         <p:spPr>
           <a:xfrm xmlns:a="http://schemas.openxmlformats.org/drawingml/2006/main">
             <a:off x="694944" y="2468879"/>
-            <a:ext cx="3203448" cy="499872"/>
+            <a:ext cx="3203448" cy="713232"/>
           </a:xfrm>
           <a:prstGeom xmlns:a="http://schemas.openxmlformats.org/drawingml/2006/main" prst="rect">
             <a:avLst/>
@@ -7945,7 +7945,7 @@
         </p:spPr>
         <p:txBody>
           <a:bodyPr xmlns:a="http://schemas.openxmlformats.org/drawingml/2006/main" wrap="square" lIns="36576" tIns="36576" rIns="36576" bIns="36576" anchor="t">
-            <a:spAutoFit/>
+            <a:normAutofit fontScale="100000"/>
           </a:bodyPr>
           <a:lstStyle xmlns:a="http://schemas.openxmlformats.org/drawingml/2006/main"/>
           <a:p xmlns:a="http://schemas.openxmlformats.org/drawingml/2006/main">
@@ -7953,7 +7953,7 @@
               <a:buNone/>
             </a:pPr>
             <a:r>
-              <a:rPr sz="1400" b="0">
+              <a:rPr sz="1200" b="0">
                 <a:solidFill>
                   <a:srgbClr val="5B6B75"/>
                 </a:solidFill>
@@ -7961,7 +7961,7 @@
                 <a:ea typeface="Aptos"/>
                 <a:cs typeface="Aptos"/>
               </a:rPr>
-              <a:t>578 WB-havaintoa · 39 markkinamittaria</a:t>
+              <a:t>578 WB-havaintoa · 39 markkinamittaria + 36 Ruotsin FHM-lukua</a:t>
             </a:r>
           </a:p>
         </p:txBody>
@@ -7971,7 +7971,7 @@
           <p:cNvPr id="11" name="Rounded Rectangle 10">
             <a:extLst xmlns:a="http://schemas.openxmlformats.org/drawingml/2006/main">
               <a:ext uri="{FF2B5EF4-FFF2-40B4-BE49-F238E27FC236}">
-                <a16:creationId xmlns:a16="http://schemas.microsoft.com/office/drawing/2014/main" id="{C405090C-A518-4B44-90D7-61128CD5A91D}"/>
+                <a16:creationId xmlns:a16="http://schemas.microsoft.com/office/drawing/2014/main" id="{B580A975-BADA-48F6-9D22-F899207E89B7}"/>
               </a:ext>
             </a:extLst>
           </p:cNvPr>
@@ -8028,7 +8028,7 @@
           <p:cNvPr id="12" name="TextBox 11">
             <a:extLst xmlns:a="http://schemas.openxmlformats.org/drawingml/2006/main">
               <a:ext uri="{FF2B5EF4-FFF2-40B4-BE49-F238E27FC236}">
-                <a16:creationId xmlns:a16="http://schemas.microsoft.com/office/drawing/2014/main" id="{2BF319B6-C68E-4226-A9A4-6329165155B5}"/>
+                <a16:creationId xmlns:a16="http://schemas.microsoft.com/office/drawing/2014/main" id="{601B223B-9EF4-43D8-BD75-F3B4AA7D13F2}"/>
               </a:ext>
             </a:extLst>
           </p:cNvPr>
@@ -8075,7 +8075,7 @@
           <p:cNvPr id="13" name="TextBox 12">
             <a:extLst xmlns:a="http://schemas.openxmlformats.org/drawingml/2006/main">
               <a:ext uri="{FF2B5EF4-FFF2-40B4-BE49-F238E27FC236}">
-                <a16:creationId xmlns:a16="http://schemas.microsoft.com/office/drawing/2014/main" id="{D2642E7A-83E3-401A-8D7C-B0AC3573DCA3}"/>
+                <a16:creationId xmlns:a16="http://schemas.microsoft.com/office/drawing/2014/main" id="{A0534559-92B2-4CFE-8CE7-EDFC56DEF39D}"/>
               </a:ext>
             </a:extLst>
           </p:cNvPr>
@@ -8122,7 +8122,7 @@
           <p:cNvPr id="14" name="Rounded Rectangle 13">
             <a:extLst xmlns:a="http://schemas.openxmlformats.org/drawingml/2006/main">
               <a:ext uri="{FF2B5EF4-FFF2-40B4-BE49-F238E27FC236}">
-                <a16:creationId xmlns:a16="http://schemas.microsoft.com/office/drawing/2014/main" id="{2CA002FA-6424-4B38-B112-50C08EADE7D4}"/>
+                <a16:creationId xmlns:a16="http://schemas.microsoft.com/office/drawing/2014/main" id="{CA7BA768-41E6-4CA1-B634-AFE1440FB2EA}"/>
               </a:ext>
             </a:extLst>
           </p:cNvPr>
@@ -8179,7 +8179,7 @@
           <p:cNvPr id="15" name="TextBox 14">
             <a:extLst xmlns:a="http://schemas.openxmlformats.org/drawingml/2006/main">
               <a:ext uri="{FF2B5EF4-FFF2-40B4-BE49-F238E27FC236}">
-                <a16:creationId xmlns:a16="http://schemas.microsoft.com/office/drawing/2014/main" id="{E0C9837E-CE56-4748-9C86-40F14A692340}"/>
+                <a16:creationId xmlns:a16="http://schemas.microsoft.com/office/drawing/2014/main" id="{17AC56C7-6364-4C27-9342-C3E736F67171}"/>
               </a:ext>
             </a:extLst>
           </p:cNvPr>
@@ -8226,7 +8226,7 @@
           <p:cNvPr id="16" name="TextBox 15">
             <a:extLst xmlns:a="http://schemas.openxmlformats.org/drawingml/2006/main">
               <a:ext uri="{FF2B5EF4-FFF2-40B4-BE49-F238E27FC236}">
-                <a16:creationId xmlns:a16="http://schemas.microsoft.com/office/drawing/2014/main" id="{12EC302D-FA4B-45BB-BA3C-BF0FF53DEC9B}"/>
+                <a16:creationId xmlns:a16="http://schemas.microsoft.com/office/drawing/2014/main" id="{006D511A-426E-4A7C-A442-3208F92C01FB}"/>
               </a:ext>
             </a:extLst>
           </p:cNvPr>
@@ -8273,7 +8273,7 @@
           <p:cNvPr id="17" name="TextBox 16">
             <a:extLst xmlns:a="http://schemas.openxmlformats.org/drawingml/2006/main">
               <a:ext uri="{FF2B5EF4-FFF2-40B4-BE49-F238E27FC236}">
-                <a16:creationId xmlns:a16="http://schemas.microsoft.com/office/drawing/2014/main" id="{2B43C978-A1DA-438F-9695-E729CF64C609}"/>
+                <a16:creationId xmlns:a16="http://schemas.microsoft.com/office/drawing/2014/main" id="{C4412EA5-D78C-4146-B590-EE89D13EE2E2}"/>
               </a:ext>
             </a:extLst>
           </p:cNvPr>
@@ -8320,7 +8320,7 @@
           <p:cNvPr id="18" name="Rounded Rectangle 17">
             <a:extLst xmlns:a="http://schemas.openxmlformats.org/drawingml/2006/main">
               <a:ext uri="{FF2B5EF4-FFF2-40B4-BE49-F238E27FC236}">
-                <a16:creationId xmlns:a16="http://schemas.microsoft.com/office/drawing/2014/main" id="{58D9C4EF-9880-4B3C-9A93-59C23FD6D9C1}"/>
+                <a16:creationId xmlns:a16="http://schemas.microsoft.com/office/drawing/2014/main" id="{76AC98A8-5B6B-454A-9DCA-A44BB961F8DA}"/>
               </a:ext>
             </a:extLst>
           </p:cNvPr>
@@ -8377,7 +8377,7 @@
           <p:cNvPr id="19" name="TextBox 18">
             <a:extLst xmlns:a="http://schemas.openxmlformats.org/drawingml/2006/main">
               <a:ext uri="{FF2B5EF4-FFF2-40B4-BE49-F238E27FC236}">
-                <a16:creationId xmlns:a16="http://schemas.microsoft.com/office/drawing/2014/main" id="{EC75BF3F-D5A3-4519-8F51-A9507A889266}"/>
+                <a16:creationId xmlns:a16="http://schemas.microsoft.com/office/drawing/2014/main" id="{38041C3F-A042-4FF7-A6FD-2309F4AB6638}"/>
               </a:ext>
             </a:extLst>
           </p:cNvPr>
@@ -8424,7 +8424,7 @@
           <p:cNvPr id="20" name="TextBox 19">
             <a:extLst xmlns:a="http://schemas.openxmlformats.org/drawingml/2006/main">
               <a:ext uri="{FF2B5EF4-FFF2-40B4-BE49-F238E27FC236}">
-                <a16:creationId xmlns:a16="http://schemas.microsoft.com/office/drawing/2014/main" id="{40AE3C31-E22E-428C-80CA-65C94530602F}"/>
+                <a16:creationId xmlns:a16="http://schemas.microsoft.com/office/drawing/2014/main" id="{B3450DAA-BE3C-4281-B76A-8606EF5EDA72}"/>
               </a:ext>
             </a:extLst>
           </p:cNvPr>
@@ -8461,7 +8461,7 @@
                 <a:ea typeface="Aptos"/>
                 <a:cs typeface="Aptos"/>
               </a:rPr>
-              <a:t>Pohja: 195/578 WB + 36 Ruotsin FHM; ei myyntiä. Puola 2020–23 virta; 2025 verosilta 4 382 500 laitetta / 62 500 sarjaa. Kanada 1,219160 mrd CAD (≈822,6 milj. EUR; ECB 2024); Health Canada -toimitukset 1,160754 mrd CAD (≈783,2 milj. EUR; ECB 2024); FTC 2,763 mrd USD (≈2,336 mrd EUR; ECB 2021). Euromonitor 0/6; donor 0/3.</a:t>
+              <a:t>Menetelmäkontrolli 23 / 5 / 15 / 152; ei myyntiä. Puola: verosilta 4 382 500 laitetta / 62 500 sarjaa. Kanada 1,219160 mrd CAD (≈822,6 milj. EUR; ECB 2024); Health Canada -toimitukset 1,160754 mrd CAD (≈783,2 milj. EUR; ECB 2024); FTC 2,763 mrd USD (≈2,336 mrd EUR; ECB 2021). Euromonitor 0/6; donor 0/3.</a:t>
             </a:r>
           </a:p>
         </p:txBody>
@@ -8469,7 +8469,7 @@
     </p:spTree>
     <p:extLst>
       <p:ext uri="{BB962C8B-B14F-4D97-AF65-F5344CB8AC3E}">
-        <p14:creationId xmlns:p14="http://schemas.microsoft.com/office/powerpoint/2010/main" val="2014606595"/>
+        <p14:creationId xmlns:p14="http://schemas.microsoft.com/office/powerpoint/2010/main" val="1920061634"/>
       </p:ext>
     </p:extLst>
   </p:cSld>
@@ -8493,7 +8493,7 @@
           <p:cNvPr id="2" name="TextBox 1">
             <a:extLst xmlns:a="http://schemas.openxmlformats.org/drawingml/2006/main">
               <a:ext uri="{FF2B5EF4-FFF2-40B4-BE49-F238E27FC236}">
-                <a16:creationId xmlns:a16="http://schemas.microsoft.com/office/drawing/2014/main" id="{76E45300-7781-4BC9-82F6-44694290D53E}"/>
+                <a16:creationId xmlns:a16="http://schemas.microsoft.com/office/drawing/2014/main" id="{A4E2C0DD-67C6-4099-83E6-E4E1E5CCC81B}"/>
               </a:ext>
             </a:extLst>
           </p:cNvPr>
@@ -8540,7 +8540,7 @@
           <p:cNvPr id="3" name="TextBox 2">
             <a:extLst xmlns:a="http://schemas.openxmlformats.org/drawingml/2006/main">
               <a:ext uri="{FF2B5EF4-FFF2-40B4-BE49-F238E27FC236}">
-                <a16:creationId xmlns:a16="http://schemas.microsoft.com/office/drawing/2014/main" id="{94CD852B-2456-4C3D-82A7-BDB6362A99B6}"/>
+                <a16:creationId xmlns:a16="http://schemas.microsoft.com/office/drawing/2014/main" id="{5E6640A9-4291-423F-A487-D49B0C3D152F}"/>
               </a:ext>
             </a:extLst>
           </p:cNvPr>
@@ -8587,7 +8587,7 @@
           <p:cNvPr id="4" name="Rectangle 3">
             <a:extLst xmlns:a="http://schemas.openxmlformats.org/drawingml/2006/main">
               <a:ext uri="{FF2B5EF4-FFF2-40B4-BE49-F238E27FC236}">
-                <a16:creationId xmlns:a16="http://schemas.microsoft.com/office/drawing/2014/main" id="{0C0EAF4E-C2A7-4CE5-AC48-7F0BF106BA09}"/>
+                <a16:creationId xmlns:a16="http://schemas.microsoft.com/office/drawing/2014/main" id="{4257710A-E318-42EF-BB1D-500186D81A92}"/>
               </a:ext>
             </a:extLst>
           </p:cNvPr>
@@ -8642,7 +8642,7 @@
           <p:cNvPr id="5" name="Rectangle 4">
             <a:extLst xmlns:a="http://schemas.openxmlformats.org/drawingml/2006/main">
               <a:ext uri="{FF2B5EF4-FFF2-40B4-BE49-F238E27FC236}">
-                <a16:creationId xmlns:a16="http://schemas.microsoft.com/office/drawing/2014/main" id="{D9F0EE22-90FF-4842-9A35-A194307593B6}"/>
+                <a16:creationId xmlns:a16="http://schemas.microsoft.com/office/drawing/2014/main" id="{B5A33C87-0B9A-4734-8B36-62ABDA2A26C3}"/>
               </a:ext>
             </a:extLst>
           </p:cNvPr>
@@ -8697,7 +8697,7 @@
           <p:cNvPr id="6" name="TextBox 5">
             <a:extLst xmlns:a="http://schemas.openxmlformats.org/drawingml/2006/main">
               <a:ext uri="{FF2B5EF4-FFF2-40B4-BE49-F238E27FC236}">
-                <a16:creationId xmlns:a16="http://schemas.microsoft.com/office/drawing/2014/main" id="{BAEEE535-56C2-4753-9F6A-0EC0A2F68101}"/>
+                <a16:creationId xmlns:a16="http://schemas.microsoft.com/office/drawing/2014/main" id="{6E9C3454-A1F3-4EE9-BA80-849441C2F1E3}"/>
               </a:ext>
             </a:extLst>
           </p:cNvPr>
@@ -8734,7 +8734,7 @@
                 <a:ea typeface="Aptos"/>
                 <a:cs typeface="Aptos"/>
               </a:rPr>
-              <a:t>Julkinen riippumaton evidenssikooste · 2026.07.27-29 · 2026-07-27 · Lähteet: Evidence Register; WIPO IP valuation</a:t>
+              <a:t>Julkinen riippumaton evidenssikooste · 2026.07.27-30 · 2026-07-27 · Lähteet: Evidence Register; WIPO IP valuation</a:t>
             </a:r>
           </a:p>
         </p:txBody>
@@ -8744,7 +8744,7 @@
           <p:cNvPr id="7" name="TextBox 6">
             <a:extLst xmlns:a="http://schemas.openxmlformats.org/drawingml/2006/main">
               <a:ext uri="{FF2B5EF4-FFF2-40B4-BE49-F238E27FC236}">
-                <a16:creationId xmlns:a16="http://schemas.microsoft.com/office/drawing/2014/main" id="{5DFDD64F-CD83-477A-BEB8-0E520AAD79DD}"/>
+                <a16:creationId xmlns:a16="http://schemas.microsoft.com/office/drawing/2014/main" id="{1327DF8E-CC8B-4816-AA10-A2858FAB168B}"/>
               </a:ext>
             </a:extLst>
           </p:cNvPr>
@@ -9231,7 +9231,7 @@
           <p:cNvPr id="9" name="TextBox 8">
             <a:extLst xmlns:a="http://schemas.openxmlformats.org/drawingml/2006/main">
               <a:ext uri="{FF2B5EF4-FFF2-40B4-BE49-F238E27FC236}">
-                <a16:creationId xmlns:a16="http://schemas.microsoft.com/office/drawing/2014/main" id="{2805A10D-0449-4CB5-B3F5-8367CA7031C5}"/>
+                <a16:creationId xmlns:a16="http://schemas.microsoft.com/office/drawing/2014/main" id="{F0A39F5B-8BA2-4245-9421-C382882892C9}"/>
               </a:ext>
             </a:extLst>
           </p:cNvPr>
@@ -9276,7 +9276,7 @@
     </p:spTree>
     <p:extLst>
       <p:ext uri="{BB962C8B-B14F-4D97-AF65-F5344CB8AC3E}">
-        <p14:creationId xmlns:p14="http://schemas.microsoft.com/office/powerpoint/2010/main" val="738992331"/>
+        <p14:creationId xmlns:p14="http://schemas.microsoft.com/office/powerpoint/2010/main" val="979589490"/>
       </p:ext>
     </p:extLst>
   </p:cSld>
@@ -9307,7 +9307,7 @@
           <p:cNvPr id="2" name="TextBox 1">
             <a:extLst xmlns:a="http://schemas.openxmlformats.org/drawingml/2006/main">
               <a:ext uri="{FF2B5EF4-FFF2-40B4-BE49-F238E27FC236}">
-                <a16:creationId xmlns:a16="http://schemas.microsoft.com/office/drawing/2014/main" id="{400C138A-DEB0-418B-96CA-986FBE78ED6E}"/>
+                <a16:creationId xmlns:a16="http://schemas.microsoft.com/office/drawing/2014/main" id="{3A5F5035-4987-412E-A75A-FB65D6F2F620}"/>
               </a:ext>
             </a:extLst>
           </p:cNvPr>
@@ -9354,7 +9354,7 @@
           <p:cNvPr id="3" name="TextBox 2">
             <a:extLst xmlns:a="http://schemas.openxmlformats.org/drawingml/2006/main">
               <a:ext uri="{FF2B5EF4-FFF2-40B4-BE49-F238E27FC236}">
-                <a16:creationId xmlns:a16="http://schemas.microsoft.com/office/drawing/2014/main" id="{10139486-308B-4D6D-90FA-ED8CBC9C7291}"/>
+                <a16:creationId xmlns:a16="http://schemas.microsoft.com/office/drawing/2014/main" id="{977059B3-6428-4463-994E-85317B5E46C0}"/>
               </a:ext>
             </a:extLst>
           </p:cNvPr>
@@ -9401,7 +9401,7 @@
           <p:cNvPr id="4" name="TextBox 3">
             <a:extLst xmlns:a="http://schemas.openxmlformats.org/drawingml/2006/main">
               <a:ext uri="{FF2B5EF4-FFF2-40B4-BE49-F238E27FC236}">
-                <a16:creationId xmlns:a16="http://schemas.microsoft.com/office/drawing/2014/main" id="{EF656AA1-A7AB-481E-86E8-50FA62FA0F41}"/>
+                <a16:creationId xmlns:a16="http://schemas.microsoft.com/office/drawing/2014/main" id="{9C7963AB-DE40-4587-BD74-085C82D9ED3C}"/>
               </a:ext>
             </a:extLst>
           </p:cNvPr>
@@ -9520,7 +9520,7 @@
           <p:cNvPr id="5" name="TextBox 4">
             <a:extLst xmlns:a="http://schemas.openxmlformats.org/drawingml/2006/main">
               <a:ext uri="{FF2B5EF4-FFF2-40B4-BE49-F238E27FC236}">
-                <a16:creationId xmlns:a16="http://schemas.microsoft.com/office/drawing/2014/main" id="{BB8BB205-708B-484F-811D-489556A14187}"/>
+                <a16:creationId xmlns:a16="http://schemas.microsoft.com/office/drawing/2014/main" id="{75CC2B1B-85E9-4197-9FCB-400B59C79C26}"/>
               </a:ext>
             </a:extLst>
           </p:cNvPr>
@@ -9557,7 +9557,7 @@
                 <a:ea typeface="Aptos"/>
                 <a:cs typeface="Aptos"/>
               </a:rPr>
-              <a:t>Versio 2026.07.27-29 · 2026-07-27 · 6 / 6</a:t>
+              <a:t>Versio 2026.07.27-30 · 2026-07-27 · 6 / 6</a:t>
             </a:r>
           </a:p>
         </p:txBody>
@@ -9565,7 +9565,7 @@
     </p:spTree>
     <p:extLst>
       <p:ext uri="{BB962C8B-B14F-4D97-AF65-F5344CB8AC3E}">
-        <p14:creationId xmlns:p14="http://schemas.microsoft.com/office/powerpoint/2010/main" val="2096284752"/>
+        <p14:creationId xmlns:p14="http://schemas.microsoft.com/office/powerpoint/2010/main" val="367374779"/>
       </p:ext>
     </p:extLst>
   </p:cSld>

--- a/site/downloads/pixan-bank-deck-short-fi.pptx
+++ b/site/downloads/pixan-bank-deck-short-fi.pptx
@@ -2,18 +2,18 @@
 <file path=ppt/presentation.xml><?xml version="1.0" encoding="utf-8"?>
 <p:presentation xmlns:p="http://schemas.openxmlformats.org/presentationml/2006/main">
   <p:sldMasterIdLst>
-    <p:sldMasterId xmlns:r="http://schemas.openxmlformats.org/officeDocument/2006/relationships" id="2147483648" r:id="R4ecdce04a7f340cd"/>
+    <p:sldMasterId xmlns:r="http://schemas.openxmlformats.org/officeDocument/2006/relationships" id="2147483648" r:id="R918b408898564834"/>
   </p:sldMasterIdLst>
   <p:notesMasterIdLst>
-    <p:notesMasterId xmlns:r="http://schemas.openxmlformats.org/officeDocument/2006/relationships" r:id="R17d318c18693401a"/>
+    <p:notesMasterId xmlns:r="http://schemas.openxmlformats.org/officeDocument/2006/relationships" r:id="Rcfebeef34e874d3f"/>
   </p:notesMasterIdLst>
   <p:sldIdLst>
-    <p:sldId xmlns:r="http://schemas.openxmlformats.org/officeDocument/2006/relationships" id="256" r:id="R689ac238716649e2"/>
-    <p:sldId xmlns:r="http://schemas.openxmlformats.org/officeDocument/2006/relationships" id="257" r:id="R02f8c1e4b69a4bce"/>
-    <p:sldId xmlns:r="http://schemas.openxmlformats.org/officeDocument/2006/relationships" id="258" r:id="R12e6fb8f9647432f"/>
-    <p:sldId xmlns:r="http://schemas.openxmlformats.org/officeDocument/2006/relationships" id="259" r:id="R08244a0d828946f7"/>
-    <p:sldId xmlns:r="http://schemas.openxmlformats.org/officeDocument/2006/relationships" id="260" r:id="R042b0f30c29346d6"/>
-    <p:sldId xmlns:r="http://schemas.openxmlformats.org/officeDocument/2006/relationships" id="261" r:id="R948a7988f0ef4fd1"/>
+    <p:sldId xmlns:r="http://schemas.openxmlformats.org/officeDocument/2006/relationships" id="256" r:id="R2c034e000bdb4ea7"/>
+    <p:sldId xmlns:r="http://schemas.openxmlformats.org/officeDocument/2006/relationships" id="257" r:id="R66f25c5cc35142e6"/>
+    <p:sldId xmlns:r="http://schemas.openxmlformats.org/officeDocument/2006/relationships" id="258" r:id="R42f247aa78664fd8"/>
+    <p:sldId xmlns:r="http://schemas.openxmlformats.org/officeDocument/2006/relationships" id="259" r:id="Rf56327ec338f43b6"/>
+    <p:sldId xmlns:r="http://schemas.openxmlformats.org/officeDocument/2006/relationships" id="260" r:id="Rcc2d653039fa4adf"/>
+    <p:sldId xmlns:r="http://schemas.openxmlformats.org/officeDocument/2006/relationships" id="261" r:id="R279be6a2e7f640a4"/>
   </p:sldIdLst>
   <p:sldSz cx="12191999" cy="6858000"/>
   <p:notesSz cx="6858000" cy="9144000"/>
@@ -580,6 +580,41 @@
           </a:p>
           <a:p xmlns:a="http://schemas.openxmlformats.org/drawingml/2006/main">
             <a:r>
+              <a:t>- https://www.ris.bka.gv.at/GeltendeFassung.wxe?Abfrage=Bundesnormen&amp;Gesetzesnummer=10010907</a:t>
+            </a:r>
+          </a:p>
+          <a:p xmlns:a="http://schemas.openxmlformats.org/drawingml/2006/main">
+            <a:r>
+              <a:t>- https://www.health.belgium.be/en/organisation-policy/legislation-policy-documents/e-cigarette-notification-eu-ceg-belgian-guidelines</a:t>
+            </a:r>
+          </a:p>
+          <a:p xmlns:a="http://schemas.openxmlformats.org/drawingml/2006/main">
+            <a:r>
+              <a:t>- https://www.lachambre.be/doc/CCRI/html/56/ic041x.html</a:t>
+            </a:r>
+          </a:p>
+          <a:p xmlns:a="http://schemas.openxmlformats.org/drawingml/2006/main">
+            <a:r>
+              <a:t>- https://www.bazg.admin.ch/dam/en/sd-web/GljEzThGISer/Tobacco%20tax.pdf</a:t>
+            </a:r>
+          </a:p>
+          <a:p xmlns:a="http://schemas.openxmlformats.org/drawingml/2006/main">
+            <a:r>
+              <a:t>- https://douanes.public.lu/fr/support/faq/e-liquides.html</a:t>
+            </a:r>
+          </a:p>
+          <a:p xmlns:a="http://schemas.openxmlformats.org/drawingml/2006/main">
+            <a:r>
+              <a:t>- https://www.helsedirektoratet.no/veiledere/tobakksskadeloven/e-sigaretter</a:t>
+            </a:r>
+          </a:p>
+          <a:p xmlns:a="http://schemas.openxmlformats.org/drawingml/2006/main">
+            <a:r>
+              <a:t>- https://www.adm.gov.it/portale/documents/20182/261920520/Libro+blu+2024+-+Relazione.pdf/e46989ce-b39f-a404-3b4b-2af3196cba43</a:t>
+            </a:r>
+          </a:p>
+          <a:p xmlns:a="http://schemas.openxmlformats.org/drawingml/2006/main">
+            <a:r>
               <a:t>- https://www.wipo.int/en/web/ip-financing</a:t>
             </a:r>
           </a:p>
@@ -820,6 +855,41 @@
           </a:p>
           <a:p xmlns:a="http://schemas.openxmlformats.org/drawingml/2006/main">
             <a:r>
+              <a:t>- https://www.ris.bka.gv.at/GeltendeFassung.wxe?Abfrage=Bundesnormen&amp;Gesetzesnummer=10010907</a:t>
+            </a:r>
+          </a:p>
+          <a:p xmlns:a="http://schemas.openxmlformats.org/drawingml/2006/main">
+            <a:r>
+              <a:t>- https://www.health.belgium.be/en/organisation-policy/legislation-policy-documents/e-cigarette-notification-eu-ceg-belgian-guidelines</a:t>
+            </a:r>
+          </a:p>
+          <a:p xmlns:a="http://schemas.openxmlformats.org/drawingml/2006/main">
+            <a:r>
+              <a:t>- https://www.lachambre.be/doc/CCRI/html/56/ic041x.html</a:t>
+            </a:r>
+          </a:p>
+          <a:p xmlns:a="http://schemas.openxmlformats.org/drawingml/2006/main">
+            <a:r>
+              <a:t>- https://www.bazg.admin.ch/dam/en/sd-web/GljEzThGISer/Tobacco%20tax.pdf</a:t>
+            </a:r>
+          </a:p>
+          <a:p xmlns:a="http://schemas.openxmlformats.org/drawingml/2006/main">
+            <a:r>
+              <a:t>- https://douanes.public.lu/fr/support/faq/e-liquides.html</a:t>
+            </a:r>
+          </a:p>
+          <a:p xmlns:a="http://schemas.openxmlformats.org/drawingml/2006/main">
+            <a:r>
+              <a:t>- https://www.helsedirektoratet.no/veiledere/tobakksskadeloven/e-sigaretter</a:t>
+            </a:r>
+          </a:p>
+          <a:p xmlns:a="http://schemas.openxmlformats.org/drawingml/2006/main">
+            <a:r>
+              <a:t>- https://www.adm.gov.it/portale/documents/20182/261920520/Libro+blu+2024+-+Relazione.pdf/e46989ce-b39f-a404-3b4b-2af3196cba43</a:t>
+            </a:r>
+          </a:p>
+          <a:p xmlns:a="http://schemas.openxmlformats.org/drawingml/2006/main">
+            <a:r>
               <a:t>- https://www.wipo.int/en/web/ip-financing</a:t>
             </a:r>
           </a:p>
@@ -1060,6 +1130,41 @@
           </a:p>
           <a:p xmlns:a="http://schemas.openxmlformats.org/drawingml/2006/main">
             <a:r>
+              <a:t>- https://www.ris.bka.gv.at/GeltendeFassung.wxe?Abfrage=Bundesnormen&amp;Gesetzesnummer=10010907</a:t>
+            </a:r>
+          </a:p>
+          <a:p xmlns:a="http://schemas.openxmlformats.org/drawingml/2006/main">
+            <a:r>
+              <a:t>- https://www.health.belgium.be/en/organisation-policy/legislation-policy-documents/e-cigarette-notification-eu-ceg-belgian-guidelines</a:t>
+            </a:r>
+          </a:p>
+          <a:p xmlns:a="http://schemas.openxmlformats.org/drawingml/2006/main">
+            <a:r>
+              <a:t>- https://www.lachambre.be/doc/CCRI/html/56/ic041x.html</a:t>
+            </a:r>
+          </a:p>
+          <a:p xmlns:a="http://schemas.openxmlformats.org/drawingml/2006/main">
+            <a:r>
+              <a:t>- https://www.bazg.admin.ch/dam/en/sd-web/GljEzThGISer/Tobacco%20tax.pdf</a:t>
+            </a:r>
+          </a:p>
+          <a:p xmlns:a="http://schemas.openxmlformats.org/drawingml/2006/main">
+            <a:r>
+              <a:t>- https://douanes.public.lu/fr/support/faq/e-liquides.html</a:t>
+            </a:r>
+          </a:p>
+          <a:p xmlns:a="http://schemas.openxmlformats.org/drawingml/2006/main">
+            <a:r>
+              <a:t>- https://www.helsedirektoratet.no/veiledere/tobakksskadeloven/e-sigaretter</a:t>
+            </a:r>
+          </a:p>
+          <a:p xmlns:a="http://schemas.openxmlformats.org/drawingml/2006/main">
+            <a:r>
+              <a:t>- https://www.adm.gov.it/portale/documents/20182/261920520/Libro+blu+2024+-+Relazione.pdf/e46989ce-b39f-a404-3b4b-2af3196cba43</a:t>
+            </a:r>
+          </a:p>
+          <a:p xmlns:a="http://schemas.openxmlformats.org/drawingml/2006/main">
+            <a:r>
               <a:t>- https://www.wipo.int/en/web/ip-financing</a:t>
             </a:r>
           </a:p>
@@ -1300,6 +1405,41 @@
           </a:p>
           <a:p xmlns:a="http://schemas.openxmlformats.org/drawingml/2006/main">
             <a:r>
+              <a:t>- https://www.ris.bka.gv.at/GeltendeFassung.wxe?Abfrage=Bundesnormen&amp;Gesetzesnummer=10010907</a:t>
+            </a:r>
+          </a:p>
+          <a:p xmlns:a="http://schemas.openxmlformats.org/drawingml/2006/main">
+            <a:r>
+              <a:t>- https://www.health.belgium.be/en/organisation-policy/legislation-policy-documents/e-cigarette-notification-eu-ceg-belgian-guidelines</a:t>
+            </a:r>
+          </a:p>
+          <a:p xmlns:a="http://schemas.openxmlformats.org/drawingml/2006/main">
+            <a:r>
+              <a:t>- https://www.lachambre.be/doc/CCRI/html/56/ic041x.html</a:t>
+            </a:r>
+          </a:p>
+          <a:p xmlns:a="http://schemas.openxmlformats.org/drawingml/2006/main">
+            <a:r>
+              <a:t>- https://www.bazg.admin.ch/dam/en/sd-web/GljEzThGISer/Tobacco%20tax.pdf</a:t>
+            </a:r>
+          </a:p>
+          <a:p xmlns:a="http://schemas.openxmlformats.org/drawingml/2006/main">
+            <a:r>
+              <a:t>- https://douanes.public.lu/fr/support/faq/e-liquides.html</a:t>
+            </a:r>
+          </a:p>
+          <a:p xmlns:a="http://schemas.openxmlformats.org/drawingml/2006/main">
+            <a:r>
+              <a:t>- https://www.helsedirektoratet.no/veiledere/tobakksskadeloven/e-sigaretter</a:t>
+            </a:r>
+          </a:p>
+          <a:p xmlns:a="http://schemas.openxmlformats.org/drawingml/2006/main">
+            <a:r>
+              <a:t>- https://www.adm.gov.it/portale/documents/20182/261920520/Libro+blu+2024+-+Relazione.pdf/e46989ce-b39f-a404-3b4b-2af3196cba43</a:t>
+            </a:r>
+          </a:p>
+          <a:p xmlns:a="http://schemas.openxmlformats.org/drawingml/2006/main">
+            <a:r>
               <a:t>- https://www.wipo.int/en/web/ip-financing</a:t>
             </a:r>
           </a:p>
@@ -1540,6 +1680,41 @@
           </a:p>
           <a:p xmlns:a="http://schemas.openxmlformats.org/drawingml/2006/main">
             <a:r>
+              <a:t>- https://www.ris.bka.gv.at/GeltendeFassung.wxe?Abfrage=Bundesnormen&amp;Gesetzesnummer=10010907</a:t>
+            </a:r>
+          </a:p>
+          <a:p xmlns:a="http://schemas.openxmlformats.org/drawingml/2006/main">
+            <a:r>
+              <a:t>- https://www.health.belgium.be/en/organisation-policy/legislation-policy-documents/e-cigarette-notification-eu-ceg-belgian-guidelines</a:t>
+            </a:r>
+          </a:p>
+          <a:p xmlns:a="http://schemas.openxmlformats.org/drawingml/2006/main">
+            <a:r>
+              <a:t>- https://www.lachambre.be/doc/CCRI/html/56/ic041x.html</a:t>
+            </a:r>
+          </a:p>
+          <a:p xmlns:a="http://schemas.openxmlformats.org/drawingml/2006/main">
+            <a:r>
+              <a:t>- https://www.bazg.admin.ch/dam/en/sd-web/GljEzThGISer/Tobacco%20tax.pdf</a:t>
+            </a:r>
+          </a:p>
+          <a:p xmlns:a="http://schemas.openxmlformats.org/drawingml/2006/main">
+            <a:r>
+              <a:t>- https://douanes.public.lu/fr/support/faq/e-liquides.html</a:t>
+            </a:r>
+          </a:p>
+          <a:p xmlns:a="http://schemas.openxmlformats.org/drawingml/2006/main">
+            <a:r>
+              <a:t>- https://www.helsedirektoratet.no/veiledere/tobakksskadeloven/e-sigaretter</a:t>
+            </a:r>
+          </a:p>
+          <a:p xmlns:a="http://schemas.openxmlformats.org/drawingml/2006/main">
+            <a:r>
+              <a:t>- https://www.adm.gov.it/portale/documents/20182/261920520/Libro+blu+2024+-+Relazione.pdf/e46989ce-b39f-a404-3b4b-2af3196cba43</a:t>
+            </a:r>
+          </a:p>
+          <a:p xmlns:a="http://schemas.openxmlformats.org/drawingml/2006/main">
+            <a:r>
               <a:t>- https://www.wipo.int/en/web/ip-financing</a:t>
             </a:r>
           </a:p>
@@ -1780,6 +1955,41 @@
           </a:p>
           <a:p xmlns:a="http://schemas.openxmlformats.org/drawingml/2006/main">
             <a:r>
+              <a:t>- https://www.ris.bka.gv.at/GeltendeFassung.wxe?Abfrage=Bundesnormen&amp;Gesetzesnummer=10010907</a:t>
+            </a:r>
+          </a:p>
+          <a:p xmlns:a="http://schemas.openxmlformats.org/drawingml/2006/main">
+            <a:r>
+              <a:t>- https://www.health.belgium.be/en/organisation-policy/legislation-policy-documents/e-cigarette-notification-eu-ceg-belgian-guidelines</a:t>
+            </a:r>
+          </a:p>
+          <a:p xmlns:a="http://schemas.openxmlformats.org/drawingml/2006/main">
+            <a:r>
+              <a:t>- https://www.lachambre.be/doc/CCRI/html/56/ic041x.html</a:t>
+            </a:r>
+          </a:p>
+          <a:p xmlns:a="http://schemas.openxmlformats.org/drawingml/2006/main">
+            <a:r>
+              <a:t>- https://www.bazg.admin.ch/dam/en/sd-web/GljEzThGISer/Tobacco%20tax.pdf</a:t>
+            </a:r>
+          </a:p>
+          <a:p xmlns:a="http://schemas.openxmlformats.org/drawingml/2006/main">
+            <a:r>
+              <a:t>- https://douanes.public.lu/fr/support/faq/e-liquides.html</a:t>
+            </a:r>
+          </a:p>
+          <a:p xmlns:a="http://schemas.openxmlformats.org/drawingml/2006/main">
+            <a:r>
+              <a:t>- https://www.helsedirektoratet.no/veiledere/tobakksskadeloven/e-sigaretter</a:t>
+            </a:r>
+          </a:p>
+          <a:p xmlns:a="http://schemas.openxmlformats.org/drawingml/2006/main">
+            <a:r>
+              <a:t>- https://www.adm.gov.it/portale/documents/20182/261920520/Libro+blu+2024+-+Relazione.pdf/e46989ce-b39f-a404-3b4b-2af3196cba43</a:t>
+            </a:r>
+          </a:p>
+          <a:p xmlns:a="http://schemas.openxmlformats.org/drawingml/2006/main">
+            <a:r>
               <a:t>- https://www.wipo.int/en/web/ip-financing</a:t>
             </a:r>
           </a:p>
@@ -1887,7 +2097,7 @@
           <p:cNvPr id="2" name="Title 1">
             <a:extLst xmlns:a="http://schemas.openxmlformats.org/drawingml/2006/main">
               <a:ext uri="{FF2B5EF4-FFF2-40B4-BE49-F238E27FC236}">
-                <a16:creationId xmlns:a16="http://schemas.microsoft.com/office/drawing/2014/main" id="{C1D73D43-573E-43B8-AD02-C0E1DBF6C97D}"/>
+                <a16:creationId xmlns:a16="http://schemas.microsoft.com/office/drawing/2014/main" id="{0DAFCEF1-99B9-4AC5-B088-282928FC7B4B}"/>
               </a:ext>
             </a:extLst>
           </p:cNvPr>
@@ -1919,7 +2129,7 @@
           <p:cNvPr id="3" name="Subtitle 2">
             <a:extLst xmlns:a="http://schemas.openxmlformats.org/drawingml/2006/main">
               <a:ext uri="{FF2B5EF4-FFF2-40B4-BE49-F238E27FC236}">
-                <a16:creationId xmlns:a16="http://schemas.microsoft.com/office/drawing/2014/main" id="{BBD8DFF1-77FB-46E6-8D97-651E92761E44}"/>
+                <a16:creationId xmlns:a16="http://schemas.microsoft.com/office/drawing/2014/main" id="{583440BB-8A76-464C-B1A7-A0E02047F26F}"/>
               </a:ext>
             </a:extLst>
           </p:cNvPr>
@@ -2042,7 +2252,7 @@
           <p:cNvPr id="4" name="Date Placeholder 3">
             <a:extLst xmlns:a="http://schemas.openxmlformats.org/drawingml/2006/main">
               <a:ext uri="{FF2B5EF4-FFF2-40B4-BE49-F238E27FC236}">
-                <a16:creationId xmlns:a16="http://schemas.microsoft.com/office/drawing/2014/main" id="{C11B5A17-8805-486E-ACC8-7567CDD8A945}"/>
+                <a16:creationId xmlns:a16="http://schemas.microsoft.com/office/drawing/2014/main" id="{D000BE9C-7777-4A33-8DC5-98F1B40059F9}"/>
               </a:ext>
             </a:extLst>
           </p:cNvPr>
@@ -2069,7 +2279,7 @@
           <p:cNvPr id="5" name="Footer Placeholder 4">
             <a:extLst xmlns:a="http://schemas.openxmlformats.org/drawingml/2006/main">
               <a:ext uri="{FF2B5EF4-FFF2-40B4-BE49-F238E27FC236}">
-                <a16:creationId xmlns:a16="http://schemas.microsoft.com/office/drawing/2014/main" id="{EF61654E-096E-490D-A1A4-B5949C7E0661}"/>
+                <a16:creationId xmlns:a16="http://schemas.microsoft.com/office/drawing/2014/main" id="{BA970C61-E34F-43A9-9147-0F591A5937F3}"/>
               </a:ext>
             </a:extLst>
           </p:cNvPr>
@@ -2092,7 +2302,7 @@
           <p:cNvPr id="6" name="Slide Number Placeholder 5">
             <a:extLst xmlns:a="http://schemas.openxmlformats.org/drawingml/2006/main">
               <a:ext uri="{FF2B5EF4-FFF2-40B4-BE49-F238E27FC236}">
-                <a16:creationId xmlns:a16="http://schemas.microsoft.com/office/drawing/2014/main" id="{C7C3DB82-05FB-4475-A91B-EE8991B7FE33}"/>
+                <a16:creationId xmlns:a16="http://schemas.microsoft.com/office/drawing/2014/main" id="{E81643FC-71E5-4052-9208-F3E18A7195EA}"/>
               </a:ext>
             </a:extLst>
           </p:cNvPr>
@@ -2136,7 +2346,7 @@
           <p:cNvPr id="2" name="Title 1">
             <a:extLst xmlns:a="http://schemas.openxmlformats.org/drawingml/2006/main">
               <a:ext uri="{FF2B5EF4-FFF2-40B4-BE49-F238E27FC236}">
-                <a16:creationId xmlns:a16="http://schemas.microsoft.com/office/drawing/2014/main" id="{080D56B0-2810-4EF5-9B07-A349FF81DC6F}"/>
+                <a16:creationId xmlns:a16="http://schemas.microsoft.com/office/drawing/2014/main" id="{78FE84AA-D96D-4327-8C46-31101B2F6A30}"/>
               </a:ext>
             </a:extLst>
           </p:cNvPr>
@@ -2163,7 +2373,7 @@
           <p:cNvPr id="3" name="Vertical Text Placeholder 2">
             <a:extLst xmlns:a="http://schemas.openxmlformats.org/drawingml/2006/main">
               <a:ext uri="{FF2B5EF4-FFF2-40B4-BE49-F238E27FC236}">
-                <a16:creationId xmlns:a16="http://schemas.microsoft.com/office/drawing/2014/main" id="{1BD6D37D-112F-4511-A378-60D6B6558042}"/>
+                <a16:creationId xmlns:a16="http://schemas.microsoft.com/office/drawing/2014/main" id="{9FE7CDF0-31CA-42CA-A7C6-C8E6AF78DBF9}"/>
               </a:ext>
             </a:extLst>
           </p:cNvPr>
@@ -2225,7 +2435,7 @@
           <p:cNvPr id="4" name="Date Placeholder 3">
             <a:extLst xmlns:a="http://schemas.openxmlformats.org/drawingml/2006/main">
               <a:ext uri="{FF2B5EF4-FFF2-40B4-BE49-F238E27FC236}">
-                <a16:creationId xmlns:a16="http://schemas.microsoft.com/office/drawing/2014/main" id="{A1BF7C1A-4EED-493C-817B-E662C92EB63D}"/>
+                <a16:creationId xmlns:a16="http://schemas.microsoft.com/office/drawing/2014/main" id="{81E97CE8-B028-4CD1-B177-F01EA5DCFDE8}"/>
               </a:ext>
             </a:extLst>
           </p:cNvPr>
@@ -2252,7 +2462,7 @@
           <p:cNvPr id="5" name="Footer Placeholder 4">
             <a:extLst xmlns:a="http://schemas.openxmlformats.org/drawingml/2006/main">
               <a:ext uri="{FF2B5EF4-FFF2-40B4-BE49-F238E27FC236}">
-                <a16:creationId xmlns:a16="http://schemas.microsoft.com/office/drawing/2014/main" id="{521EFC45-7837-4571-9EC3-7826D074BB33}"/>
+                <a16:creationId xmlns:a16="http://schemas.microsoft.com/office/drawing/2014/main" id="{628668A3-3D71-4CCE-9B6E-6C55DD70BB49}"/>
               </a:ext>
             </a:extLst>
           </p:cNvPr>
@@ -2275,7 +2485,7 @@
           <p:cNvPr id="6" name="Slide Number Placeholder 5">
             <a:extLst xmlns:a="http://schemas.openxmlformats.org/drawingml/2006/main">
               <a:ext uri="{FF2B5EF4-FFF2-40B4-BE49-F238E27FC236}">
-                <a16:creationId xmlns:a16="http://schemas.microsoft.com/office/drawing/2014/main" id="{0B71DEDE-2289-48AE-9408-A8DBDFB8113F}"/>
+                <a16:creationId xmlns:a16="http://schemas.microsoft.com/office/drawing/2014/main" id="{0D3EA11F-3FCC-47D1-8666-B5A2B94C2004}"/>
               </a:ext>
             </a:extLst>
           </p:cNvPr>
@@ -2319,7 +2529,7 @@
           <p:cNvPr id="2" name="Vertical Title 1">
             <a:extLst xmlns:a="http://schemas.openxmlformats.org/drawingml/2006/main">
               <a:ext uri="{FF2B5EF4-FFF2-40B4-BE49-F238E27FC236}">
-                <a16:creationId xmlns:a16="http://schemas.microsoft.com/office/drawing/2014/main" id="{2FD12C23-7AC4-4A18-A0AC-AB76791DE900}"/>
+                <a16:creationId xmlns:a16="http://schemas.microsoft.com/office/drawing/2014/main" id="{159424E1-729C-4446-ABCC-38864FACDED6}"/>
               </a:ext>
             </a:extLst>
           </p:cNvPr>
@@ -2351,7 +2561,7 @@
           <p:cNvPr id="3" name="Vertical Text Placeholder 2">
             <a:extLst xmlns:a="http://schemas.openxmlformats.org/drawingml/2006/main">
               <a:ext uri="{FF2B5EF4-FFF2-40B4-BE49-F238E27FC236}">
-                <a16:creationId xmlns:a16="http://schemas.microsoft.com/office/drawing/2014/main" id="{3C1EDD9C-C911-4375-BF57-C26027EF2B55}"/>
+                <a16:creationId xmlns:a16="http://schemas.microsoft.com/office/drawing/2014/main" id="{FE4CB8B5-8904-4D16-A299-6E352AE2691D}"/>
               </a:ext>
             </a:extLst>
           </p:cNvPr>
@@ -2418,7 +2628,7 @@
           <p:cNvPr id="4" name="Date Placeholder 3">
             <a:extLst xmlns:a="http://schemas.openxmlformats.org/drawingml/2006/main">
               <a:ext uri="{FF2B5EF4-FFF2-40B4-BE49-F238E27FC236}">
-                <a16:creationId xmlns:a16="http://schemas.microsoft.com/office/drawing/2014/main" id="{BC7A9DA7-C437-4B4A-8D62-2596B8F927DD}"/>
+                <a16:creationId xmlns:a16="http://schemas.microsoft.com/office/drawing/2014/main" id="{927EC175-5DD1-4A73-B753-90A8964E5D62}"/>
               </a:ext>
             </a:extLst>
           </p:cNvPr>
@@ -2445,7 +2655,7 @@
           <p:cNvPr id="5" name="Footer Placeholder 4">
             <a:extLst xmlns:a="http://schemas.openxmlformats.org/drawingml/2006/main">
               <a:ext uri="{FF2B5EF4-FFF2-40B4-BE49-F238E27FC236}">
-                <a16:creationId xmlns:a16="http://schemas.microsoft.com/office/drawing/2014/main" id="{53733C94-BB10-4B76-9F07-A352F136A932}"/>
+                <a16:creationId xmlns:a16="http://schemas.microsoft.com/office/drawing/2014/main" id="{4E0C53E6-FD08-4DE7-A994-823F50259D75}"/>
               </a:ext>
             </a:extLst>
           </p:cNvPr>
@@ -2468,7 +2678,7 @@
           <p:cNvPr id="6" name="Slide Number Placeholder 5">
             <a:extLst xmlns:a="http://schemas.openxmlformats.org/drawingml/2006/main">
               <a:ext uri="{FF2B5EF4-FFF2-40B4-BE49-F238E27FC236}">
-                <a16:creationId xmlns:a16="http://schemas.microsoft.com/office/drawing/2014/main" id="{55E62C2D-71FF-420E-9716-0926931785D3}"/>
+                <a16:creationId xmlns:a16="http://schemas.microsoft.com/office/drawing/2014/main" id="{ADD7F9AF-41CB-48B9-A669-480A7FF2569D}"/>
               </a:ext>
             </a:extLst>
           </p:cNvPr>
@@ -2512,7 +2722,7 @@
           <p:cNvPr id="2" name="Title 1">
             <a:extLst xmlns:a="http://schemas.openxmlformats.org/drawingml/2006/main">
               <a:ext uri="{FF2B5EF4-FFF2-40B4-BE49-F238E27FC236}">
-                <a16:creationId xmlns:a16="http://schemas.microsoft.com/office/drawing/2014/main" id="{007E30BC-1893-4B50-8E5B-4B75878CE8B1}"/>
+                <a16:creationId xmlns:a16="http://schemas.microsoft.com/office/drawing/2014/main" id="{FBE49BB0-D1F3-4F27-82F7-6322F5AFEE4C}"/>
               </a:ext>
             </a:extLst>
           </p:cNvPr>
@@ -2539,7 +2749,7 @@
           <p:cNvPr id="3" name="Content Placeholder 2">
             <a:extLst xmlns:a="http://schemas.openxmlformats.org/drawingml/2006/main">
               <a:ext uri="{FF2B5EF4-FFF2-40B4-BE49-F238E27FC236}">
-                <a16:creationId xmlns:a16="http://schemas.microsoft.com/office/drawing/2014/main" id="{1336553D-3BA4-4765-8CC5-E25DB61566C5}"/>
+                <a16:creationId xmlns:a16="http://schemas.microsoft.com/office/drawing/2014/main" id="{5AEB3456-9E62-4C50-BF34-8E21E038A726}"/>
               </a:ext>
             </a:extLst>
           </p:cNvPr>
@@ -2601,7 +2811,7 @@
           <p:cNvPr id="4" name="Date Placeholder 3">
             <a:extLst xmlns:a="http://schemas.openxmlformats.org/drawingml/2006/main">
               <a:ext uri="{FF2B5EF4-FFF2-40B4-BE49-F238E27FC236}">
-                <a16:creationId xmlns:a16="http://schemas.microsoft.com/office/drawing/2014/main" id="{FAB26515-A8B9-4B89-9086-E13490499454}"/>
+                <a16:creationId xmlns:a16="http://schemas.microsoft.com/office/drawing/2014/main" id="{D4A46E39-1267-42A8-888A-F1A13EABC269}"/>
               </a:ext>
             </a:extLst>
           </p:cNvPr>
@@ -2628,7 +2838,7 @@
           <p:cNvPr id="5" name="Footer Placeholder 4">
             <a:extLst xmlns:a="http://schemas.openxmlformats.org/drawingml/2006/main">
               <a:ext uri="{FF2B5EF4-FFF2-40B4-BE49-F238E27FC236}">
-                <a16:creationId xmlns:a16="http://schemas.microsoft.com/office/drawing/2014/main" id="{47DD9792-C49D-428A-9374-7AFBC6F005E5}"/>
+                <a16:creationId xmlns:a16="http://schemas.microsoft.com/office/drawing/2014/main" id="{F3234ADC-892D-4919-A5D0-310CADE434FA}"/>
               </a:ext>
             </a:extLst>
           </p:cNvPr>
@@ -2651,7 +2861,7 @@
           <p:cNvPr id="6" name="Slide Number Placeholder 5">
             <a:extLst xmlns:a="http://schemas.openxmlformats.org/drawingml/2006/main">
               <a:ext uri="{FF2B5EF4-FFF2-40B4-BE49-F238E27FC236}">
-                <a16:creationId xmlns:a16="http://schemas.microsoft.com/office/drawing/2014/main" id="{0FC74AC0-D836-463D-9414-CCA1463AABB3}"/>
+                <a16:creationId xmlns:a16="http://schemas.microsoft.com/office/drawing/2014/main" id="{034C9DF1-5C89-445B-8764-8BFCBBC187C7}"/>
               </a:ext>
             </a:extLst>
           </p:cNvPr>
@@ -2695,7 +2905,7 @@
           <p:cNvPr id="2" name="Title 1">
             <a:extLst xmlns:a="http://schemas.openxmlformats.org/drawingml/2006/main">
               <a:ext uri="{FF2B5EF4-FFF2-40B4-BE49-F238E27FC236}">
-                <a16:creationId xmlns:a16="http://schemas.microsoft.com/office/drawing/2014/main" id="{160389B9-8E00-455F-A8EF-329F81CCAA7B}"/>
+                <a16:creationId xmlns:a16="http://schemas.microsoft.com/office/drawing/2014/main" id="{9A8DD96D-E225-443F-9B0C-E8958D52E739}"/>
               </a:ext>
             </a:extLst>
           </p:cNvPr>
@@ -2732,7 +2942,7 @@
           <p:cNvPr id="3" name="Text Placeholder 2">
             <a:extLst xmlns:a="http://schemas.openxmlformats.org/drawingml/2006/main">
               <a:ext uri="{FF2B5EF4-FFF2-40B4-BE49-F238E27FC236}">
-                <a16:creationId xmlns:a16="http://schemas.microsoft.com/office/drawing/2014/main" id="{4AB25DF2-02F2-4857-88DF-9D6F37898E91}"/>
+                <a16:creationId xmlns:a16="http://schemas.microsoft.com/office/drawing/2014/main" id="{537BB3F6-24E3-464D-B645-E64098A157C9}"/>
               </a:ext>
             </a:extLst>
           </p:cNvPr>
@@ -2858,7 +3068,7 @@
           <p:cNvPr id="4" name="Date Placeholder 3">
             <a:extLst xmlns:a="http://schemas.openxmlformats.org/drawingml/2006/main">
               <a:ext uri="{FF2B5EF4-FFF2-40B4-BE49-F238E27FC236}">
-                <a16:creationId xmlns:a16="http://schemas.microsoft.com/office/drawing/2014/main" id="{D433DFB7-AF1F-4C9D-A27D-DA78649D832E}"/>
+                <a16:creationId xmlns:a16="http://schemas.microsoft.com/office/drawing/2014/main" id="{9BD0D172-44C8-40A7-9256-F94E86CCA93D}"/>
               </a:ext>
             </a:extLst>
           </p:cNvPr>
@@ -2885,7 +3095,7 @@
           <p:cNvPr id="5" name="Footer Placeholder 4">
             <a:extLst xmlns:a="http://schemas.openxmlformats.org/drawingml/2006/main">
               <a:ext uri="{FF2B5EF4-FFF2-40B4-BE49-F238E27FC236}">
-                <a16:creationId xmlns:a16="http://schemas.microsoft.com/office/drawing/2014/main" id="{D722EDF2-CBBA-4B6D-8B0E-70BA02C1E2CF}"/>
+                <a16:creationId xmlns:a16="http://schemas.microsoft.com/office/drawing/2014/main" id="{8590EB42-B30B-475B-BED8-1276DFF12CBB}"/>
               </a:ext>
             </a:extLst>
           </p:cNvPr>
@@ -2908,7 +3118,7 @@
           <p:cNvPr id="6" name="Slide Number Placeholder 5">
             <a:extLst xmlns:a="http://schemas.openxmlformats.org/drawingml/2006/main">
               <a:ext uri="{FF2B5EF4-FFF2-40B4-BE49-F238E27FC236}">
-                <a16:creationId xmlns:a16="http://schemas.microsoft.com/office/drawing/2014/main" id="{082EE314-ACB9-4063-961D-AA500BB206E9}"/>
+                <a16:creationId xmlns:a16="http://schemas.microsoft.com/office/drawing/2014/main" id="{4A9E872B-EA92-453A-A9B5-7898E96FA1B1}"/>
               </a:ext>
             </a:extLst>
           </p:cNvPr>
@@ -2952,7 +3162,7 @@
           <p:cNvPr id="2" name="Title 1">
             <a:extLst xmlns:a="http://schemas.openxmlformats.org/drawingml/2006/main">
               <a:ext uri="{FF2B5EF4-FFF2-40B4-BE49-F238E27FC236}">
-                <a16:creationId xmlns:a16="http://schemas.microsoft.com/office/drawing/2014/main" id="{E68E370F-3587-45B6-A231-6A879428C996}"/>
+                <a16:creationId xmlns:a16="http://schemas.microsoft.com/office/drawing/2014/main" id="{7CF29FA7-C2DE-4B02-968F-142ECE051E3E}"/>
               </a:ext>
             </a:extLst>
           </p:cNvPr>
@@ -2979,7 +3189,7 @@
           <p:cNvPr id="3" name="Content Placeholder 2">
             <a:extLst xmlns:a="http://schemas.openxmlformats.org/drawingml/2006/main">
               <a:ext uri="{FF2B5EF4-FFF2-40B4-BE49-F238E27FC236}">
-                <a16:creationId xmlns:a16="http://schemas.microsoft.com/office/drawing/2014/main" id="{DE355C91-F930-43BE-9293-39894B4E2842}"/>
+                <a16:creationId xmlns:a16="http://schemas.microsoft.com/office/drawing/2014/main" id="{0F95068C-4D1D-4262-98A1-900A3B5B47FA}"/>
               </a:ext>
             </a:extLst>
           </p:cNvPr>
@@ -3083,7 +3293,7 @@
           <p:cNvPr id="4" name="Content Placeholder 3">
             <a:extLst xmlns:a="http://schemas.openxmlformats.org/drawingml/2006/main">
               <a:ext uri="{FF2B5EF4-FFF2-40B4-BE49-F238E27FC236}">
-                <a16:creationId xmlns:a16="http://schemas.microsoft.com/office/drawing/2014/main" id="{FA5FE3C7-B68E-405F-BA75-BD613C52F6FC}"/>
+                <a16:creationId xmlns:a16="http://schemas.microsoft.com/office/drawing/2014/main" id="{375FC951-B695-4F00-9FE9-3A51C3FFF4E9}"/>
               </a:ext>
             </a:extLst>
           </p:cNvPr>
@@ -3187,7 +3397,7 @@
           <p:cNvPr id="5" name="Date Placeholder 4">
             <a:extLst xmlns:a="http://schemas.openxmlformats.org/drawingml/2006/main">
               <a:ext uri="{FF2B5EF4-FFF2-40B4-BE49-F238E27FC236}">
-                <a16:creationId xmlns:a16="http://schemas.microsoft.com/office/drawing/2014/main" id="{8122F147-8883-4777-8130-BDF644801E34}"/>
+                <a16:creationId xmlns:a16="http://schemas.microsoft.com/office/drawing/2014/main" id="{825B7B55-7343-49DE-9901-DF13413346C5}"/>
               </a:ext>
             </a:extLst>
           </p:cNvPr>
@@ -3214,7 +3424,7 @@
           <p:cNvPr id="6" name="Footer Placeholder 5">
             <a:extLst xmlns:a="http://schemas.openxmlformats.org/drawingml/2006/main">
               <a:ext uri="{FF2B5EF4-FFF2-40B4-BE49-F238E27FC236}">
-                <a16:creationId xmlns:a16="http://schemas.microsoft.com/office/drawing/2014/main" id="{774BF4D4-4395-4777-A68C-CF748AC8F9F8}"/>
+                <a16:creationId xmlns:a16="http://schemas.microsoft.com/office/drawing/2014/main" id="{8E608D6D-7590-4E91-BB4A-CFAEFCCCE8D7}"/>
               </a:ext>
             </a:extLst>
           </p:cNvPr>
@@ -3237,7 +3447,7 @@
           <p:cNvPr id="7" name="Slide Number Placeholder 6">
             <a:extLst xmlns:a="http://schemas.openxmlformats.org/drawingml/2006/main">
               <a:ext uri="{FF2B5EF4-FFF2-40B4-BE49-F238E27FC236}">
-                <a16:creationId xmlns:a16="http://schemas.microsoft.com/office/drawing/2014/main" id="{9C765971-D892-4E6D-94FF-3869E28F2C35}"/>
+                <a16:creationId xmlns:a16="http://schemas.microsoft.com/office/drawing/2014/main" id="{C5A9F54D-317F-4238-A52C-4F89900AD9D9}"/>
               </a:ext>
             </a:extLst>
           </p:cNvPr>
@@ -3281,7 +3491,7 @@
           <p:cNvPr id="2" name="Title 1">
             <a:extLst xmlns:a="http://schemas.openxmlformats.org/drawingml/2006/main">
               <a:ext uri="{FF2B5EF4-FFF2-40B4-BE49-F238E27FC236}">
-                <a16:creationId xmlns:a16="http://schemas.microsoft.com/office/drawing/2014/main" id="{E1BF771F-C403-4B53-938C-8C743F9032BE}"/>
+                <a16:creationId xmlns:a16="http://schemas.microsoft.com/office/drawing/2014/main" id="{C8EE2779-3EBA-41BA-86B6-B394E502DD83}"/>
               </a:ext>
             </a:extLst>
           </p:cNvPr>
@@ -3313,7 +3523,7 @@
           <p:cNvPr id="3" name="Text Placeholder 2">
             <a:extLst xmlns:a="http://schemas.openxmlformats.org/drawingml/2006/main">
               <a:ext uri="{FF2B5EF4-FFF2-40B4-BE49-F238E27FC236}">
-                <a16:creationId xmlns:a16="http://schemas.microsoft.com/office/drawing/2014/main" id="{464AA318-49EF-461E-AA42-4191CD447A80}"/>
+                <a16:creationId xmlns:a16="http://schemas.microsoft.com/office/drawing/2014/main" id="{7AA2CA47-97BF-4E1A-AA32-5F625A895EAF}"/>
               </a:ext>
             </a:extLst>
           </p:cNvPr>
@@ -3385,7 +3595,7 @@
           <p:cNvPr id="4" name="Content Placeholder 3">
             <a:extLst xmlns:a="http://schemas.openxmlformats.org/drawingml/2006/main">
               <a:ext uri="{FF2B5EF4-FFF2-40B4-BE49-F238E27FC236}">
-                <a16:creationId xmlns:a16="http://schemas.microsoft.com/office/drawing/2014/main" id="{E0EAB7E3-E918-4904-87DF-7CA6D046C192}"/>
+                <a16:creationId xmlns:a16="http://schemas.microsoft.com/office/drawing/2014/main" id="{19C07A90-60C0-4670-A58E-FC67EB8C7060}"/>
               </a:ext>
             </a:extLst>
           </p:cNvPr>
@@ -3489,7 +3699,7 @@
           <p:cNvPr id="5" name="Text Placeholder 4">
             <a:extLst xmlns:a="http://schemas.openxmlformats.org/drawingml/2006/main">
               <a:ext uri="{FF2B5EF4-FFF2-40B4-BE49-F238E27FC236}">
-                <a16:creationId xmlns:a16="http://schemas.microsoft.com/office/drawing/2014/main" id="{CEDC125D-AFFF-4084-922F-0AD31E3594F8}"/>
+                <a16:creationId xmlns:a16="http://schemas.microsoft.com/office/drawing/2014/main" id="{164D6684-4B3B-405E-B692-977EBD89BAA5}"/>
               </a:ext>
             </a:extLst>
           </p:cNvPr>
@@ -3561,7 +3771,7 @@
           <p:cNvPr id="6" name="Content Placeholder 5">
             <a:extLst xmlns:a="http://schemas.openxmlformats.org/drawingml/2006/main">
               <a:ext uri="{FF2B5EF4-FFF2-40B4-BE49-F238E27FC236}">
-                <a16:creationId xmlns:a16="http://schemas.microsoft.com/office/drawing/2014/main" id="{51FB7860-A195-4C1D-878A-6F7636F3FC0C}"/>
+                <a16:creationId xmlns:a16="http://schemas.microsoft.com/office/drawing/2014/main" id="{CA239364-90B9-4FDC-A0EB-6AC61697BDDF}"/>
               </a:ext>
             </a:extLst>
           </p:cNvPr>
@@ -3665,7 +3875,7 @@
           <p:cNvPr id="7" name="Date Placeholder 6">
             <a:extLst xmlns:a="http://schemas.openxmlformats.org/drawingml/2006/main">
               <a:ext uri="{FF2B5EF4-FFF2-40B4-BE49-F238E27FC236}">
-                <a16:creationId xmlns:a16="http://schemas.microsoft.com/office/drawing/2014/main" id="{06BD67C2-5423-4FCB-BCC7-3C3A4BCEE8FD}"/>
+                <a16:creationId xmlns:a16="http://schemas.microsoft.com/office/drawing/2014/main" id="{F6E03D89-5892-4724-99AC-25CF7E77B55C}"/>
               </a:ext>
             </a:extLst>
           </p:cNvPr>
@@ -3692,7 +3902,7 @@
           <p:cNvPr id="8" name="Footer Placeholder 7">
             <a:extLst xmlns:a="http://schemas.openxmlformats.org/drawingml/2006/main">
               <a:ext uri="{FF2B5EF4-FFF2-40B4-BE49-F238E27FC236}">
-                <a16:creationId xmlns:a16="http://schemas.microsoft.com/office/drawing/2014/main" id="{B6AA4E0F-DD29-4FC5-AF4B-A0CED1FF6F25}"/>
+                <a16:creationId xmlns:a16="http://schemas.microsoft.com/office/drawing/2014/main" id="{A38487DE-7E53-430A-B6AE-1FD16531449A}"/>
               </a:ext>
             </a:extLst>
           </p:cNvPr>
@@ -3715,7 +3925,7 @@
           <p:cNvPr id="9" name="Slide Number Placeholder 8">
             <a:extLst xmlns:a="http://schemas.openxmlformats.org/drawingml/2006/main">
               <a:ext uri="{FF2B5EF4-FFF2-40B4-BE49-F238E27FC236}">
-                <a16:creationId xmlns:a16="http://schemas.microsoft.com/office/drawing/2014/main" id="{5C2F07A7-BE3A-4387-8402-2BC93A4B902E}"/>
+                <a16:creationId xmlns:a16="http://schemas.microsoft.com/office/drawing/2014/main" id="{C9E544A9-D611-46B7-AE04-3778FF567343}"/>
               </a:ext>
             </a:extLst>
           </p:cNvPr>
@@ -3759,7 +3969,7 @@
           <p:cNvPr id="2" name="Title 1">
             <a:extLst xmlns:a="http://schemas.openxmlformats.org/drawingml/2006/main">
               <a:ext uri="{FF2B5EF4-FFF2-40B4-BE49-F238E27FC236}">
-                <a16:creationId xmlns:a16="http://schemas.microsoft.com/office/drawing/2014/main" id="{17708147-366A-4FB7-9798-A92A7E9C0D36}"/>
+                <a16:creationId xmlns:a16="http://schemas.microsoft.com/office/drawing/2014/main" id="{87EBEF95-2DE2-45BA-B0BB-E9DA2063BA61}"/>
               </a:ext>
             </a:extLst>
           </p:cNvPr>
@@ -3786,7 +3996,7 @@
           <p:cNvPr id="3" name="Date Placeholder 2">
             <a:extLst xmlns:a="http://schemas.openxmlformats.org/drawingml/2006/main">
               <a:ext uri="{FF2B5EF4-FFF2-40B4-BE49-F238E27FC236}">
-                <a16:creationId xmlns:a16="http://schemas.microsoft.com/office/drawing/2014/main" id="{871F5CDF-292D-4F0A-8135-FC2634A779B7}"/>
+                <a16:creationId xmlns:a16="http://schemas.microsoft.com/office/drawing/2014/main" id="{8B529450-10E4-46DB-BD00-51AD8311EA85}"/>
               </a:ext>
             </a:extLst>
           </p:cNvPr>
@@ -3813,7 +4023,7 @@
           <p:cNvPr id="4" name="Footer Placeholder 3">
             <a:extLst xmlns:a="http://schemas.openxmlformats.org/drawingml/2006/main">
               <a:ext uri="{FF2B5EF4-FFF2-40B4-BE49-F238E27FC236}">
-                <a16:creationId xmlns:a16="http://schemas.microsoft.com/office/drawing/2014/main" id="{20B45D1B-AFFA-4C13-A147-7809BE8B596B}"/>
+                <a16:creationId xmlns:a16="http://schemas.microsoft.com/office/drawing/2014/main" id="{4904CB6D-F8AA-47D7-8D07-F36143463BBC}"/>
               </a:ext>
             </a:extLst>
           </p:cNvPr>
@@ -3836,7 +4046,7 @@
           <p:cNvPr id="5" name="Slide Number Placeholder 4">
             <a:extLst xmlns:a="http://schemas.openxmlformats.org/drawingml/2006/main">
               <a:ext uri="{FF2B5EF4-FFF2-40B4-BE49-F238E27FC236}">
-                <a16:creationId xmlns:a16="http://schemas.microsoft.com/office/drawing/2014/main" id="{8F8B5352-2B8B-4BBA-88BF-4E40F51BAFFE}"/>
+                <a16:creationId xmlns:a16="http://schemas.microsoft.com/office/drawing/2014/main" id="{AD72170A-1C2B-42CF-8858-BA758F0D0B57}"/>
               </a:ext>
             </a:extLst>
           </p:cNvPr>
@@ -3880,7 +4090,7 @@
           <p:cNvPr id="2" name="Date Placeholder 1">
             <a:extLst xmlns:a="http://schemas.openxmlformats.org/drawingml/2006/main">
               <a:ext uri="{FF2B5EF4-FFF2-40B4-BE49-F238E27FC236}">
-                <a16:creationId xmlns:a16="http://schemas.microsoft.com/office/drawing/2014/main" id="{D552D473-25D9-43E4-91E2-1CF6CA1E0C14}"/>
+                <a16:creationId xmlns:a16="http://schemas.microsoft.com/office/drawing/2014/main" id="{D7CA4437-BE29-4CB7-83FE-BC0012F96B82}"/>
               </a:ext>
             </a:extLst>
           </p:cNvPr>
@@ -3907,7 +4117,7 @@
           <p:cNvPr id="3" name="Footer Placeholder 2">
             <a:extLst xmlns:a="http://schemas.openxmlformats.org/drawingml/2006/main">
               <a:ext uri="{FF2B5EF4-FFF2-40B4-BE49-F238E27FC236}">
-                <a16:creationId xmlns:a16="http://schemas.microsoft.com/office/drawing/2014/main" id="{3116C545-E400-4BEA-833F-2102320D75D9}"/>
+                <a16:creationId xmlns:a16="http://schemas.microsoft.com/office/drawing/2014/main" id="{B6465E62-CC10-4D7D-BACE-9E69657D9B7A}"/>
               </a:ext>
             </a:extLst>
           </p:cNvPr>
@@ -3930,7 +4140,7 @@
           <p:cNvPr id="4" name="Slide Number Placeholder 3">
             <a:extLst xmlns:a="http://schemas.openxmlformats.org/drawingml/2006/main">
               <a:ext uri="{FF2B5EF4-FFF2-40B4-BE49-F238E27FC236}">
-                <a16:creationId xmlns:a16="http://schemas.microsoft.com/office/drawing/2014/main" id="{94F1F0FC-5A20-4CA5-A8B9-FE33D942619E}"/>
+                <a16:creationId xmlns:a16="http://schemas.microsoft.com/office/drawing/2014/main" id="{8B1D7D19-5751-4702-BCB5-DA23F50316BB}"/>
               </a:ext>
             </a:extLst>
           </p:cNvPr>
@@ -3974,7 +4184,7 @@
           <p:cNvPr id="2" name="Title 1">
             <a:extLst xmlns:a="http://schemas.openxmlformats.org/drawingml/2006/main">
               <a:ext uri="{FF2B5EF4-FFF2-40B4-BE49-F238E27FC236}">
-                <a16:creationId xmlns:a16="http://schemas.microsoft.com/office/drawing/2014/main" id="{B9DE9887-EFDB-48B0-AAB8-E40580F0B294}"/>
+                <a16:creationId xmlns:a16="http://schemas.microsoft.com/office/drawing/2014/main" id="{4037EB12-5CA8-46BE-9919-7FEE98BC2E83}"/>
               </a:ext>
             </a:extLst>
           </p:cNvPr>
@@ -4011,7 +4221,7 @@
           <p:cNvPr id="3" name="Content Placeholder 2">
             <a:extLst xmlns:a="http://schemas.openxmlformats.org/drawingml/2006/main">
               <a:ext uri="{FF2B5EF4-FFF2-40B4-BE49-F238E27FC236}">
-                <a16:creationId xmlns:a16="http://schemas.microsoft.com/office/drawing/2014/main" id="{074977EA-FBD2-4445-A03D-DDFAB656B5AB}"/>
+                <a16:creationId xmlns:a16="http://schemas.microsoft.com/office/drawing/2014/main" id="{6EC652FB-D0A8-459F-BE73-9300866ADF29}"/>
               </a:ext>
             </a:extLst>
           </p:cNvPr>
@@ -4115,7 +4325,7 @@
           <p:cNvPr id="4" name="Text Placeholder 3">
             <a:extLst xmlns:a="http://schemas.openxmlformats.org/drawingml/2006/main">
               <a:ext uri="{FF2B5EF4-FFF2-40B4-BE49-F238E27FC236}">
-                <a16:creationId xmlns:a16="http://schemas.microsoft.com/office/drawing/2014/main" id="{1F292E71-DAB5-417F-A828-BE6A83D5D19F}"/>
+                <a16:creationId xmlns:a16="http://schemas.microsoft.com/office/drawing/2014/main" id="{109F0A54-086D-4077-AE59-6DAA30409C17}"/>
               </a:ext>
             </a:extLst>
           </p:cNvPr>
@@ -4187,7 +4397,7 @@
           <p:cNvPr id="5" name="Date Placeholder 4">
             <a:extLst xmlns:a="http://schemas.openxmlformats.org/drawingml/2006/main">
               <a:ext uri="{FF2B5EF4-FFF2-40B4-BE49-F238E27FC236}">
-                <a16:creationId xmlns:a16="http://schemas.microsoft.com/office/drawing/2014/main" id="{E0A4AFAC-4282-4BC1-86CE-8A25B0A3FB35}"/>
+                <a16:creationId xmlns:a16="http://schemas.microsoft.com/office/drawing/2014/main" id="{C09DF5DD-9982-4008-94A1-58F5149FB13F}"/>
               </a:ext>
             </a:extLst>
           </p:cNvPr>
@@ -4214,7 +4424,7 @@
           <p:cNvPr id="6" name="Footer Placeholder 5">
             <a:extLst xmlns:a="http://schemas.openxmlformats.org/drawingml/2006/main">
               <a:ext uri="{FF2B5EF4-FFF2-40B4-BE49-F238E27FC236}">
-                <a16:creationId xmlns:a16="http://schemas.microsoft.com/office/drawing/2014/main" id="{C0075797-B635-4406-BACC-6149E649E36F}"/>
+                <a16:creationId xmlns:a16="http://schemas.microsoft.com/office/drawing/2014/main" id="{35C71088-3F53-42A5-8CF6-864F594871A4}"/>
               </a:ext>
             </a:extLst>
           </p:cNvPr>
@@ -4237,7 +4447,7 @@
           <p:cNvPr id="7" name="Slide Number Placeholder 6">
             <a:extLst xmlns:a="http://schemas.openxmlformats.org/drawingml/2006/main">
               <a:ext uri="{FF2B5EF4-FFF2-40B4-BE49-F238E27FC236}">
-                <a16:creationId xmlns:a16="http://schemas.microsoft.com/office/drawing/2014/main" id="{FA5BD007-E5BB-4D7E-8F35-E05C4BABAE11}"/>
+                <a16:creationId xmlns:a16="http://schemas.microsoft.com/office/drawing/2014/main" id="{40A9EBF1-520D-4B57-A773-5CA272BF64F3}"/>
               </a:ext>
             </a:extLst>
           </p:cNvPr>
@@ -4281,7 +4491,7 @@
           <p:cNvPr id="2" name="Title 1">
             <a:extLst xmlns:a="http://schemas.openxmlformats.org/drawingml/2006/main">
               <a:ext uri="{FF2B5EF4-FFF2-40B4-BE49-F238E27FC236}">
-                <a16:creationId xmlns:a16="http://schemas.microsoft.com/office/drawing/2014/main" id="{56C133F7-3373-4726-A359-4E8D56A52E9A}"/>
+                <a16:creationId xmlns:a16="http://schemas.microsoft.com/office/drawing/2014/main" id="{2EECE3D0-B336-43B6-B211-347723020BEC}"/>
               </a:ext>
             </a:extLst>
           </p:cNvPr>
@@ -4318,7 +4528,7 @@
           <p:cNvPr id="3" name="Picture Placeholder 2">
             <a:extLst xmlns:a="http://schemas.openxmlformats.org/drawingml/2006/main">
               <a:ext uri="{FF2B5EF4-FFF2-40B4-BE49-F238E27FC236}">
-                <a16:creationId xmlns:a16="http://schemas.microsoft.com/office/drawing/2014/main" id="{C8996CD4-FBAE-45BB-8658-DD00247E6627}"/>
+                <a16:creationId xmlns:a16="http://schemas.microsoft.com/office/drawing/2014/main" id="{8857CF46-7ECC-46DD-AEDB-C2A46C418746}"/>
               </a:ext>
             </a:extLst>
           </p:cNvPr>
@@ -4383,7 +4593,7 @@
           <p:cNvPr id="4" name="Text Placeholder 3">
             <a:extLst xmlns:a="http://schemas.openxmlformats.org/drawingml/2006/main">
               <a:ext uri="{FF2B5EF4-FFF2-40B4-BE49-F238E27FC236}">
-                <a16:creationId xmlns:a16="http://schemas.microsoft.com/office/drawing/2014/main" id="{247BE351-9992-404A-BD77-7BDD3C45298B}"/>
+                <a16:creationId xmlns:a16="http://schemas.microsoft.com/office/drawing/2014/main" id="{E41D9325-A6F7-4525-A21D-0CB7A31D7BF3}"/>
               </a:ext>
             </a:extLst>
           </p:cNvPr>
@@ -4455,7 +4665,7 @@
           <p:cNvPr id="5" name="Date Placeholder 4">
             <a:extLst xmlns:a="http://schemas.openxmlformats.org/drawingml/2006/main">
               <a:ext uri="{FF2B5EF4-FFF2-40B4-BE49-F238E27FC236}">
-                <a16:creationId xmlns:a16="http://schemas.microsoft.com/office/drawing/2014/main" id="{1083D1B0-18BC-427F-8AD9-D5F350DF9FC6}"/>
+                <a16:creationId xmlns:a16="http://schemas.microsoft.com/office/drawing/2014/main" id="{999BCD24-4981-46B6-9B9D-1CA430E64DF5}"/>
               </a:ext>
             </a:extLst>
           </p:cNvPr>
@@ -4482,7 +4692,7 @@
           <p:cNvPr id="6" name="Footer Placeholder 5">
             <a:extLst xmlns:a="http://schemas.openxmlformats.org/drawingml/2006/main">
               <a:ext uri="{FF2B5EF4-FFF2-40B4-BE49-F238E27FC236}">
-                <a16:creationId xmlns:a16="http://schemas.microsoft.com/office/drawing/2014/main" id="{83F83985-8053-41E6-A8DE-D102547B03A5}"/>
+                <a16:creationId xmlns:a16="http://schemas.microsoft.com/office/drawing/2014/main" id="{FEC87063-9E2B-4777-B10D-137ED4ED17CD}"/>
               </a:ext>
             </a:extLst>
           </p:cNvPr>
@@ -4505,7 +4715,7 @@
           <p:cNvPr id="7" name="Slide Number Placeholder 6">
             <a:extLst xmlns:a="http://schemas.openxmlformats.org/drawingml/2006/main">
               <a:ext uri="{FF2B5EF4-FFF2-40B4-BE49-F238E27FC236}">
-                <a16:creationId xmlns:a16="http://schemas.microsoft.com/office/drawing/2014/main" id="{D44ACAC2-563C-4B85-B752-E90AF6650679}"/>
+                <a16:creationId xmlns:a16="http://schemas.microsoft.com/office/drawing/2014/main" id="{CA3D95A6-9B3C-4E0E-B6E6-4D347975DCA5}"/>
               </a:ext>
             </a:extLst>
           </p:cNvPr>
@@ -4554,7 +4764,7 @@
           <p:cNvPr id="2" name="Title Placeholder 1">
             <a:extLst xmlns:a="http://schemas.openxmlformats.org/drawingml/2006/main">
               <a:ext uri="{FF2B5EF4-FFF2-40B4-BE49-F238E27FC236}">
-                <a16:creationId xmlns:a16="http://schemas.microsoft.com/office/drawing/2014/main" id="{A0B8FCA1-782F-403F-A626-632620A60ED9}"/>
+                <a16:creationId xmlns:a16="http://schemas.microsoft.com/office/drawing/2014/main" id="{87C4B10D-EBC2-4478-B74F-B21D5AD025E1}"/>
               </a:ext>
             </a:extLst>
           </p:cNvPr>
@@ -4591,7 +4801,7 @@
           <p:cNvPr id="3" name="Text Placeholder 2">
             <a:extLst xmlns:a="http://schemas.openxmlformats.org/drawingml/2006/main">
               <a:ext uri="{FF2B5EF4-FFF2-40B4-BE49-F238E27FC236}">
-                <a16:creationId xmlns:a16="http://schemas.microsoft.com/office/drawing/2014/main" id="{8C3177A3-466E-4DED-95CE-20CD0EA830D6}"/>
+                <a16:creationId xmlns:a16="http://schemas.microsoft.com/office/drawing/2014/main" id="{7F48778E-F6E4-4472-9335-69BFA3D3CA19}"/>
               </a:ext>
             </a:extLst>
           </p:cNvPr>
@@ -4663,7 +4873,7 @@
           <p:cNvPr id="4" name="Date Placeholder 3">
             <a:extLst xmlns:a="http://schemas.openxmlformats.org/drawingml/2006/main">
               <a:ext uri="{FF2B5EF4-FFF2-40B4-BE49-F238E27FC236}">
-                <a16:creationId xmlns:a16="http://schemas.microsoft.com/office/drawing/2014/main" id="{70157468-2B92-474D-8E38-77403DA6F9F5}"/>
+                <a16:creationId xmlns:a16="http://schemas.microsoft.com/office/drawing/2014/main" id="{F8AF8758-B26F-40C5-8BEC-24ADC337D638}"/>
               </a:ext>
             </a:extLst>
           </p:cNvPr>
@@ -4709,7 +4919,7 @@
           <p:cNvPr id="5" name="Footer Placeholder 4">
             <a:extLst xmlns:a="http://schemas.openxmlformats.org/drawingml/2006/main">
               <a:ext uri="{FF2B5EF4-FFF2-40B4-BE49-F238E27FC236}">
-                <a16:creationId xmlns:a16="http://schemas.microsoft.com/office/drawing/2014/main" id="{350D4321-316A-49BD-A449-894C58500771}"/>
+                <a16:creationId xmlns:a16="http://schemas.microsoft.com/office/drawing/2014/main" id="{E5D1E60C-B127-4504-91F1-3B350F3EC1C5}"/>
               </a:ext>
             </a:extLst>
           </p:cNvPr>
@@ -4751,7 +4961,7 @@
           <p:cNvPr id="6" name="Slide Number Placeholder 5">
             <a:extLst xmlns:a="http://schemas.openxmlformats.org/drawingml/2006/main">
               <a:ext uri="{FF2B5EF4-FFF2-40B4-BE49-F238E27FC236}">
-                <a16:creationId xmlns:a16="http://schemas.microsoft.com/office/drawing/2014/main" id="{F40B7C01-D45E-42E6-9B5F-9D199ADA7340}"/>
+                <a16:creationId xmlns:a16="http://schemas.microsoft.com/office/drawing/2014/main" id="{C6C26992-1C98-41D3-9C69-B745C2B1747D}"/>
               </a:ext>
             </a:extLst>
           </p:cNvPr>
@@ -4796,17 +5006,17 @@
   </p:cSld>
   <p:clrMap bg1="lt1" tx1="dk1" bg2="lt2" tx2="dk2" accent1="accent1" accent2="accent2" accent3="accent3" accent4="accent4" accent5="accent5" accent6="accent6" hlink="hlink" folHlink="folHlink"/>
   <p:sldLayoutIdLst>
-    <p:sldLayoutId xmlns:r="http://schemas.openxmlformats.org/officeDocument/2006/relationships" id="2147483649" r:id="R876ae2240e15470b"/>
-    <p:sldLayoutId xmlns:r="http://schemas.openxmlformats.org/officeDocument/2006/relationships" id="2147483650" r:id="Rf1560fea54a74d83"/>
-    <p:sldLayoutId xmlns:r="http://schemas.openxmlformats.org/officeDocument/2006/relationships" id="2147483651" r:id="Rb09da4dd01d34a56"/>
-    <p:sldLayoutId xmlns:r="http://schemas.openxmlformats.org/officeDocument/2006/relationships" id="2147483652" r:id="Rf1c4a9d66b434478"/>
-    <p:sldLayoutId xmlns:r="http://schemas.openxmlformats.org/officeDocument/2006/relationships" id="2147483653" r:id="R670633802c934a08"/>
-    <p:sldLayoutId xmlns:r="http://schemas.openxmlformats.org/officeDocument/2006/relationships" id="2147483654" r:id="R46b5ef5e4542491c"/>
-    <p:sldLayoutId xmlns:r="http://schemas.openxmlformats.org/officeDocument/2006/relationships" id="2147483655" r:id="R281445a14b924131"/>
-    <p:sldLayoutId xmlns:r="http://schemas.openxmlformats.org/officeDocument/2006/relationships" id="2147483656" r:id="R833b39ebf63349a1"/>
-    <p:sldLayoutId xmlns:r="http://schemas.openxmlformats.org/officeDocument/2006/relationships" id="2147483657" r:id="Rd3247c68d5b14a8d"/>
-    <p:sldLayoutId xmlns:r="http://schemas.openxmlformats.org/officeDocument/2006/relationships" id="2147483658" r:id="R2bc44a4246ea4d67"/>
-    <p:sldLayoutId xmlns:r="http://schemas.openxmlformats.org/officeDocument/2006/relationships" id="2147483659" r:id="R2b764a53d0664a0a"/>
+    <p:sldLayoutId xmlns:r="http://schemas.openxmlformats.org/officeDocument/2006/relationships" id="2147483649" r:id="R737a9d0ae9a340d4"/>
+    <p:sldLayoutId xmlns:r="http://schemas.openxmlformats.org/officeDocument/2006/relationships" id="2147483650" r:id="R5d477f3ac1324322"/>
+    <p:sldLayoutId xmlns:r="http://schemas.openxmlformats.org/officeDocument/2006/relationships" id="2147483651" r:id="R5396a4647eee450e"/>
+    <p:sldLayoutId xmlns:r="http://schemas.openxmlformats.org/officeDocument/2006/relationships" id="2147483652" r:id="R586375f64c044463"/>
+    <p:sldLayoutId xmlns:r="http://schemas.openxmlformats.org/officeDocument/2006/relationships" id="2147483653" r:id="R4779feb48a08437c"/>
+    <p:sldLayoutId xmlns:r="http://schemas.openxmlformats.org/officeDocument/2006/relationships" id="2147483654" r:id="R711ea8129a874314"/>
+    <p:sldLayoutId xmlns:r="http://schemas.openxmlformats.org/officeDocument/2006/relationships" id="2147483655" r:id="R416e9e44371b4084"/>
+    <p:sldLayoutId xmlns:r="http://schemas.openxmlformats.org/officeDocument/2006/relationships" id="2147483656" r:id="R5c735c96d084467c"/>
+    <p:sldLayoutId xmlns:r="http://schemas.openxmlformats.org/officeDocument/2006/relationships" id="2147483657" r:id="Rf79af5bb10de4a9a"/>
+    <p:sldLayoutId xmlns:r="http://schemas.openxmlformats.org/officeDocument/2006/relationships" id="2147483658" r:id="R6ffb305ad3ba418b"/>
+    <p:sldLayoutId xmlns:r="http://schemas.openxmlformats.org/officeDocument/2006/relationships" id="2147483659" r:id="R916d6d4b2aa24923"/>
   </p:sldLayoutIdLst>
   <p:txStyles>
     <p:titleStyle>
@@ -5359,7 +5569,7 @@
           <p:cNvPr id="2" name="Rectangle 1">
             <a:extLst xmlns:a="http://schemas.openxmlformats.org/drawingml/2006/main">
               <a:ext uri="{FF2B5EF4-FFF2-40B4-BE49-F238E27FC236}">
-                <a16:creationId xmlns:a16="http://schemas.microsoft.com/office/drawing/2014/main" id="{8E8F0188-665E-405C-A7B4-F3E1B2B50D7C}"/>
+                <a16:creationId xmlns:a16="http://schemas.microsoft.com/office/drawing/2014/main" id="{CD422983-3445-41CB-8945-592E8763BCC8}"/>
               </a:ext>
             </a:extLst>
           </p:cNvPr>
@@ -5414,7 +5624,7 @@
           <p:cNvPr id="3" name="TextBox 2">
             <a:extLst xmlns:a="http://schemas.openxmlformats.org/drawingml/2006/main">
               <a:ext uri="{FF2B5EF4-FFF2-40B4-BE49-F238E27FC236}">
-                <a16:creationId xmlns:a16="http://schemas.microsoft.com/office/drawing/2014/main" id="{E881E6F1-B5CB-47A5-AA1F-D40AB9C81EDF}"/>
+                <a16:creationId xmlns:a16="http://schemas.microsoft.com/office/drawing/2014/main" id="{B22EB14B-D6F1-42CB-B8F0-70FAB4BBE040}"/>
               </a:ext>
             </a:extLst>
           </p:cNvPr>
@@ -5461,7 +5671,7 @@
           <p:cNvPr id="4" name="TextBox 3">
             <a:extLst xmlns:a="http://schemas.openxmlformats.org/drawingml/2006/main">
               <a:ext uri="{FF2B5EF4-FFF2-40B4-BE49-F238E27FC236}">
-                <a16:creationId xmlns:a16="http://schemas.microsoft.com/office/drawing/2014/main" id="{7E9737A0-692B-4D02-8B4C-2A09D53E6E78}"/>
+                <a16:creationId xmlns:a16="http://schemas.microsoft.com/office/drawing/2014/main" id="{A438A6BB-9319-48F6-A752-0463FB0D247E}"/>
               </a:ext>
             </a:extLst>
           </p:cNvPr>
@@ -5509,7 +5719,7 @@
           <p:cNvPr id="5" name="TextBox 4">
             <a:extLst xmlns:a="http://schemas.openxmlformats.org/drawingml/2006/main">
               <a:ext uri="{FF2B5EF4-FFF2-40B4-BE49-F238E27FC236}">
-                <a16:creationId xmlns:a16="http://schemas.microsoft.com/office/drawing/2014/main" id="{0AD2B9D7-484A-46FC-9320-8DC282F2AD14}"/>
+                <a16:creationId xmlns:a16="http://schemas.microsoft.com/office/drawing/2014/main" id="{B596C4BE-66E2-4297-9834-1E90FD7FA635}"/>
               </a:ext>
             </a:extLst>
           </p:cNvPr>
@@ -5556,7 +5766,7 @@
           <p:cNvPr id="6" name="Rectangle 5">
             <a:extLst xmlns:a="http://schemas.openxmlformats.org/drawingml/2006/main">
               <a:ext uri="{FF2B5EF4-FFF2-40B4-BE49-F238E27FC236}">
-                <a16:creationId xmlns:a16="http://schemas.microsoft.com/office/drawing/2014/main" id="{A7852EFF-BCC4-43BD-ACA9-C2D33D8647BD}"/>
+                <a16:creationId xmlns:a16="http://schemas.microsoft.com/office/drawing/2014/main" id="{CDA2F02F-C54D-4E6F-9B7F-0457289463AE}"/>
               </a:ext>
             </a:extLst>
           </p:cNvPr>
@@ -5611,7 +5821,7 @@
           <p:cNvPr id="7" name="TextBox 6">
             <a:extLst xmlns:a="http://schemas.openxmlformats.org/drawingml/2006/main">
               <a:ext uri="{FF2B5EF4-FFF2-40B4-BE49-F238E27FC236}">
-                <a16:creationId xmlns:a16="http://schemas.microsoft.com/office/drawing/2014/main" id="{CA119601-9196-4B49-A144-F1B788E00079}"/>
+                <a16:creationId xmlns:a16="http://schemas.microsoft.com/office/drawing/2014/main" id="{473FB9EB-7CDB-41D5-8626-C9802A880A72}"/>
               </a:ext>
             </a:extLst>
           </p:cNvPr>
@@ -5658,7 +5868,7 @@
           <p:cNvPr id="8" name="TextBox 7">
             <a:extLst xmlns:a="http://schemas.openxmlformats.org/drawingml/2006/main">
               <a:ext uri="{FF2B5EF4-FFF2-40B4-BE49-F238E27FC236}">
-                <a16:creationId xmlns:a16="http://schemas.microsoft.com/office/drawing/2014/main" id="{84CBF447-7BBD-46C8-9B05-57CAF7E6B062}"/>
+                <a16:creationId xmlns:a16="http://schemas.microsoft.com/office/drawing/2014/main" id="{09E1DEA8-D399-4462-89CF-6E2CBF65C222}"/>
               </a:ext>
             </a:extLst>
           </p:cNvPr>
@@ -5695,7 +5905,7 @@
                 <a:ea typeface="Aptos"/>
                 <a:cs typeface="Aptos"/>
               </a:rPr>
-              <a:t>2026.07.27-30</a:t>
+              <a:t>2026.07.28-32</a:t>
             </a:r>
           </a:p>
         </p:txBody>
@@ -5705,7 +5915,7 @@
           <p:cNvPr id="9" name="TextBox 8">
             <a:extLst xmlns:a="http://schemas.openxmlformats.org/drawingml/2006/main">
               <a:ext uri="{FF2B5EF4-FFF2-40B4-BE49-F238E27FC236}">
-                <a16:creationId xmlns:a16="http://schemas.microsoft.com/office/drawing/2014/main" id="{09F47F66-6FC0-4BC5-8166-FD59BAA7AECD}"/>
+                <a16:creationId xmlns:a16="http://schemas.microsoft.com/office/drawing/2014/main" id="{9334CAAC-63A3-4254-929B-A2F651CBD795}"/>
               </a:ext>
             </a:extLst>
           </p:cNvPr>
@@ -5742,7 +5952,7 @@
                 <a:ea typeface="Aptos"/>
                 <a:cs typeface="Aptos"/>
               </a:rPr>
-              <a:t>Päivitetty 2026-07-27</a:t>
+              <a:t>Päivitetty 2026-07-28</a:t>
             </a:r>
             <a:br>
               <a:rPr sz="1700" b="0">
@@ -5773,7 +5983,7 @@
           <p:cNvPr id="10" name="TextBox 9">
             <a:extLst xmlns:a="http://schemas.openxmlformats.org/drawingml/2006/main">
               <a:ext uri="{FF2B5EF4-FFF2-40B4-BE49-F238E27FC236}">
-                <a16:creationId xmlns:a16="http://schemas.microsoft.com/office/drawing/2014/main" id="{69EE3EBF-EE57-4CF0-A00B-5496CDD2CF14}"/>
+                <a16:creationId xmlns:a16="http://schemas.microsoft.com/office/drawing/2014/main" id="{2F86E4BA-D22A-4F72-8545-8D0DB4AC7C54}"/>
               </a:ext>
             </a:extLst>
           </p:cNvPr>
@@ -5820,7 +6030,7 @@
           <p:cNvPr id="11" name="TextBox 10">
             <a:extLst xmlns:a="http://schemas.openxmlformats.org/drawingml/2006/main">
               <a:ext uri="{FF2B5EF4-FFF2-40B4-BE49-F238E27FC236}">
-                <a16:creationId xmlns:a16="http://schemas.microsoft.com/office/drawing/2014/main" id="{4D08F920-DEE2-42C6-950C-89CA59A73F80}"/>
+                <a16:creationId xmlns:a16="http://schemas.microsoft.com/office/drawing/2014/main" id="{DDBC70A9-0F99-427C-9575-6519951ADB66}"/>
               </a:ext>
             </a:extLst>
           </p:cNvPr>
@@ -5867,7 +6077,7 @@
           <p:cNvPr id="12" name="TextBox 11">
             <a:extLst xmlns:a="http://schemas.openxmlformats.org/drawingml/2006/main">
               <a:ext uri="{FF2B5EF4-FFF2-40B4-BE49-F238E27FC236}">
-                <a16:creationId xmlns:a16="http://schemas.microsoft.com/office/drawing/2014/main" id="{B7B17406-FA5A-4EA8-A21D-40FBD95EE608}"/>
+                <a16:creationId xmlns:a16="http://schemas.microsoft.com/office/drawing/2014/main" id="{96B465B8-A008-4C53-9CD9-9C078D7C1B21}"/>
               </a:ext>
             </a:extLst>
           </p:cNvPr>
@@ -5912,7 +6122,7 @@
     </p:spTree>
     <p:extLst>
       <p:ext uri="{BB962C8B-B14F-4D97-AF65-F5344CB8AC3E}">
-        <p14:creationId xmlns:p14="http://schemas.microsoft.com/office/powerpoint/2010/main" val="355759634"/>
+        <p14:creationId xmlns:p14="http://schemas.microsoft.com/office/powerpoint/2010/main" val="2030681636"/>
       </p:ext>
     </p:extLst>
   </p:cSld>
@@ -5936,7 +6146,7 @@
           <p:cNvPr id="2" name="TextBox 1">
             <a:extLst xmlns:a="http://schemas.openxmlformats.org/drawingml/2006/main">
               <a:ext uri="{FF2B5EF4-FFF2-40B4-BE49-F238E27FC236}">
-                <a16:creationId xmlns:a16="http://schemas.microsoft.com/office/drawing/2014/main" id="{8A3BC13A-8B19-4D55-BA03-F8846747CADB}"/>
+                <a16:creationId xmlns:a16="http://schemas.microsoft.com/office/drawing/2014/main" id="{59BAFEE9-05A7-419B-88FB-9430BEBFF67D}"/>
               </a:ext>
             </a:extLst>
           </p:cNvPr>
@@ -5983,7 +6193,7 @@
           <p:cNvPr id="3" name="TextBox 2">
             <a:extLst xmlns:a="http://schemas.openxmlformats.org/drawingml/2006/main">
               <a:ext uri="{FF2B5EF4-FFF2-40B4-BE49-F238E27FC236}">
-                <a16:creationId xmlns:a16="http://schemas.microsoft.com/office/drawing/2014/main" id="{34E46B47-2395-46A9-9CE5-380D4247CA7B}"/>
+                <a16:creationId xmlns:a16="http://schemas.microsoft.com/office/drawing/2014/main" id="{2F4A0DD1-7964-4B90-8739-DCA846A6EA24}"/>
               </a:ext>
             </a:extLst>
           </p:cNvPr>
@@ -6030,7 +6240,7 @@
           <p:cNvPr id="4" name="Rectangle 3">
             <a:extLst xmlns:a="http://schemas.openxmlformats.org/drawingml/2006/main">
               <a:ext uri="{FF2B5EF4-FFF2-40B4-BE49-F238E27FC236}">
-                <a16:creationId xmlns:a16="http://schemas.microsoft.com/office/drawing/2014/main" id="{C2D5A83D-1094-49E6-9266-3B02B474431A}"/>
+                <a16:creationId xmlns:a16="http://schemas.microsoft.com/office/drawing/2014/main" id="{44BE3F97-9371-45F6-9AB8-6CAA6618DE3F}"/>
               </a:ext>
             </a:extLst>
           </p:cNvPr>
@@ -6085,7 +6295,7 @@
           <p:cNvPr id="5" name="Rectangle 4">
             <a:extLst xmlns:a="http://schemas.openxmlformats.org/drawingml/2006/main">
               <a:ext uri="{FF2B5EF4-FFF2-40B4-BE49-F238E27FC236}">
-                <a16:creationId xmlns:a16="http://schemas.microsoft.com/office/drawing/2014/main" id="{99458EBD-6236-4C59-8DAD-C7B85D123561}"/>
+                <a16:creationId xmlns:a16="http://schemas.microsoft.com/office/drawing/2014/main" id="{CF8146F9-7C1E-4437-AB60-AB2D234241FE}"/>
               </a:ext>
             </a:extLst>
           </p:cNvPr>
@@ -6140,7 +6350,7 @@
           <p:cNvPr id="6" name="TextBox 5">
             <a:extLst xmlns:a="http://schemas.openxmlformats.org/drawingml/2006/main">
               <a:ext uri="{FF2B5EF4-FFF2-40B4-BE49-F238E27FC236}">
-                <a16:creationId xmlns:a16="http://schemas.microsoft.com/office/drawing/2014/main" id="{C095D922-B7A3-43EF-987F-C86CE20E7256}"/>
+                <a16:creationId xmlns:a16="http://schemas.microsoft.com/office/drawing/2014/main" id="{36A49C0F-BE5F-4912-96F3-3C6186493E45}"/>
               </a:ext>
             </a:extLst>
           </p:cNvPr>
@@ -6177,7 +6387,7 @@
                 <a:ea typeface="Aptos"/>
                 <a:cs typeface="Aptos"/>
               </a:rPr>
-              <a:t>Julkinen riippumaton evidenssikooste · 2026.07.27-30 · 2026-07-27 · Lähteet: EPO; Saksa — viralliset tuomiot; WIPO</a:t>
+              <a:t>Julkinen riippumaton evidenssikooste · 2026.07.28-32 · 2026-07-28 · Lähteet: EPO; Saksa — viralliset tuomiot; WIPO</a:t>
             </a:r>
           </a:p>
         </p:txBody>
@@ -6187,7 +6397,7 @@
           <p:cNvPr id="7" name="TextBox 6">
             <a:extLst xmlns:a="http://schemas.openxmlformats.org/drawingml/2006/main">
               <a:ext uri="{FF2B5EF4-FFF2-40B4-BE49-F238E27FC236}">
-                <a16:creationId xmlns:a16="http://schemas.microsoft.com/office/drawing/2014/main" id="{E154AEF9-7928-4C8E-B80E-2E41CDFE9A79}"/>
+                <a16:creationId xmlns:a16="http://schemas.microsoft.com/office/drawing/2014/main" id="{C4FE2C20-B391-4679-8EE8-4FFAA36CF26A}"/>
               </a:ext>
             </a:extLst>
           </p:cNvPr>
@@ -6234,7 +6444,7 @@
           <p:cNvPr id="8" name="TextBox 7">
             <a:extLst xmlns:a="http://schemas.openxmlformats.org/drawingml/2006/main">
               <a:ext uri="{FF2B5EF4-FFF2-40B4-BE49-F238E27FC236}">
-                <a16:creationId xmlns:a16="http://schemas.microsoft.com/office/drawing/2014/main" id="{4D37762B-B00B-4706-B631-037773CC2694}"/>
+                <a16:creationId xmlns:a16="http://schemas.microsoft.com/office/drawing/2014/main" id="{99E2180C-AAB1-495E-83DE-B14539702DB6}"/>
               </a:ext>
             </a:extLst>
           </p:cNvPr>
@@ -6281,7 +6491,7 @@
           <p:cNvPr id="9" name="TextBox 8">
             <a:extLst xmlns:a="http://schemas.openxmlformats.org/drawingml/2006/main">
               <a:ext uri="{FF2B5EF4-FFF2-40B4-BE49-F238E27FC236}">
-                <a16:creationId xmlns:a16="http://schemas.microsoft.com/office/drawing/2014/main" id="{B130A65A-7E55-4C61-A6FB-326ED6B39038}"/>
+                <a16:creationId xmlns:a16="http://schemas.microsoft.com/office/drawing/2014/main" id="{77983CE0-FC8B-4D9B-BBD0-C3C1C34B4016}"/>
               </a:ext>
             </a:extLst>
           </p:cNvPr>
@@ -6378,7 +6588,7 @@
           <p:cNvPr id="10" name="Rounded Rectangle 9">
             <a:extLst xmlns:a="http://schemas.openxmlformats.org/drawingml/2006/main">
               <a:ext uri="{FF2B5EF4-FFF2-40B4-BE49-F238E27FC236}">
-                <a16:creationId xmlns:a16="http://schemas.microsoft.com/office/drawing/2014/main" id="{9620B607-B832-43B5-9DD8-1150A243F878}"/>
+                <a16:creationId xmlns:a16="http://schemas.microsoft.com/office/drawing/2014/main" id="{0C91E148-0D54-400C-872F-F3502EF8CF1E}"/>
               </a:ext>
             </a:extLst>
           </p:cNvPr>
@@ -6435,7 +6645,7 @@
           <p:cNvPr id="11" name="TextBox 10">
             <a:extLst xmlns:a="http://schemas.openxmlformats.org/drawingml/2006/main">
               <a:ext uri="{FF2B5EF4-FFF2-40B4-BE49-F238E27FC236}">
-                <a16:creationId xmlns:a16="http://schemas.microsoft.com/office/drawing/2014/main" id="{548261C4-E48B-4B41-8F3D-2E549596D50E}"/>
+                <a16:creationId xmlns:a16="http://schemas.microsoft.com/office/drawing/2014/main" id="{63445EC1-2DE1-4109-ADD3-5EC758FD5D32}"/>
               </a:ext>
             </a:extLst>
           </p:cNvPr>
@@ -6482,7 +6692,7 @@
           <p:cNvPr id="12" name="TextBox 11">
             <a:extLst xmlns:a="http://schemas.openxmlformats.org/drawingml/2006/main">
               <a:ext uri="{FF2B5EF4-FFF2-40B4-BE49-F238E27FC236}">
-                <a16:creationId xmlns:a16="http://schemas.microsoft.com/office/drawing/2014/main" id="{0CE8B1B4-3922-4735-A538-2C2AA195084E}"/>
+                <a16:creationId xmlns:a16="http://schemas.microsoft.com/office/drawing/2014/main" id="{49EA8B7B-0346-4594-B714-62F450A292F0}"/>
               </a:ext>
             </a:extLst>
           </p:cNvPr>
@@ -6527,7 +6737,7 @@
     </p:spTree>
     <p:extLst>
       <p:ext uri="{BB962C8B-B14F-4D97-AF65-F5344CB8AC3E}">
-        <p14:creationId xmlns:p14="http://schemas.microsoft.com/office/powerpoint/2010/main" val="1649560490"/>
+        <p14:creationId xmlns:p14="http://schemas.microsoft.com/office/powerpoint/2010/main" val="2119654007"/>
       </p:ext>
     </p:extLst>
   </p:cSld>
@@ -6551,7 +6761,7 @@
           <p:cNvPr id="2" name="TextBox 1">
             <a:extLst xmlns:a="http://schemas.openxmlformats.org/drawingml/2006/main">
               <a:ext uri="{FF2B5EF4-FFF2-40B4-BE49-F238E27FC236}">
-                <a16:creationId xmlns:a16="http://schemas.microsoft.com/office/drawing/2014/main" id="{5BD619F7-0865-4EE2-8FBC-FD0DFE72FBC5}"/>
+                <a16:creationId xmlns:a16="http://schemas.microsoft.com/office/drawing/2014/main" id="{2F6C83A0-B79F-435C-8B6D-9104A9CAA2CF}"/>
               </a:ext>
             </a:extLst>
           </p:cNvPr>
@@ -6598,7 +6808,7 @@
           <p:cNvPr id="3" name="TextBox 2">
             <a:extLst xmlns:a="http://schemas.openxmlformats.org/drawingml/2006/main">
               <a:ext uri="{FF2B5EF4-FFF2-40B4-BE49-F238E27FC236}">
-                <a16:creationId xmlns:a16="http://schemas.microsoft.com/office/drawing/2014/main" id="{186FD0EE-4DE4-4262-8112-CDECABB043AA}"/>
+                <a16:creationId xmlns:a16="http://schemas.microsoft.com/office/drawing/2014/main" id="{D0A8E6BF-C65A-4B2D-8C91-675A0EEC8FEE}"/>
               </a:ext>
             </a:extLst>
           </p:cNvPr>
@@ -6645,7 +6855,7 @@
           <p:cNvPr id="4" name="Rectangle 3">
             <a:extLst xmlns:a="http://schemas.openxmlformats.org/drawingml/2006/main">
               <a:ext uri="{FF2B5EF4-FFF2-40B4-BE49-F238E27FC236}">
-                <a16:creationId xmlns:a16="http://schemas.microsoft.com/office/drawing/2014/main" id="{372FDC93-965F-4E05-B831-29AF1C21C392}"/>
+                <a16:creationId xmlns:a16="http://schemas.microsoft.com/office/drawing/2014/main" id="{09C5CAF8-3DDD-4160-AEBF-5FF2E79B17C5}"/>
               </a:ext>
             </a:extLst>
           </p:cNvPr>
@@ -6700,7 +6910,7 @@
           <p:cNvPr id="5" name="Rectangle 4">
             <a:extLst xmlns:a="http://schemas.openxmlformats.org/drawingml/2006/main">
               <a:ext uri="{FF2B5EF4-FFF2-40B4-BE49-F238E27FC236}">
-                <a16:creationId xmlns:a16="http://schemas.microsoft.com/office/drawing/2014/main" id="{5EEE61A0-94DF-4A2F-9734-5FA1ECD14425}"/>
+                <a16:creationId xmlns:a16="http://schemas.microsoft.com/office/drawing/2014/main" id="{495ED8A4-A74C-4F07-92D6-4842A43120B7}"/>
               </a:ext>
             </a:extLst>
           </p:cNvPr>
@@ -6755,7 +6965,7 @@
           <p:cNvPr id="6" name="TextBox 5">
             <a:extLst xmlns:a="http://schemas.openxmlformats.org/drawingml/2006/main">
               <a:ext uri="{FF2B5EF4-FFF2-40B4-BE49-F238E27FC236}">
-                <a16:creationId xmlns:a16="http://schemas.microsoft.com/office/drawing/2014/main" id="{7AEFAE26-83FB-4C1C-B5EA-8FDC381A0EAA}"/>
+                <a16:creationId xmlns:a16="http://schemas.microsoft.com/office/drawing/2014/main" id="{F59768ED-AC3D-411B-88A2-C863F1189774}"/>
               </a:ext>
             </a:extLst>
           </p:cNvPr>
@@ -6792,7 +7002,7 @@
                 <a:ea typeface="Aptos"/>
                 <a:cs typeface="Aptos"/>
               </a:rPr>
-              <a:t>Julkinen riippumaton evidenssikooste · 2026.07.27-30 · 2026-07-27 · Lähteet: EPO Register; EP3032975B2; 8 Ni 18/24 (EP); 7 O 3341/24</a:t>
+              <a:t>Julkinen riippumaton evidenssikooste · 2026.07.28-32 · 2026-07-28 · Lähteet: EPO Register; EP3032975B2; 8 Ni 18/24 (EP); 7 O 3341/24</a:t>
             </a:r>
           </a:p>
         </p:txBody>
@@ -6802,7 +7012,7 @@
           <p:cNvPr id="7" name="TextBox 6">
             <a:extLst xmlns:a="http://schemas.openxmlformats.org/drawingml/2006/main">
               <a:ext uri="{FF2B5EF4-FFF2-40B4-BE49-F238E27FC236}">
-                <a16:creationId xmlns:a16="http://schemas.microsoft.com/office/drawing/2014/main" id="{CB6D3CE3-E20E-4DEE-8DAD-5F1344A4F77D}"/>
+                <a16:creationId xmlns:a16="http://schemas.microsoft.com/office/drawing/2014/main" id="{6512FA9A-8869-4570-A91E-9380808112BB}"/>
               </a:ext>
             </a:extLst>
           </p:cNvPr>
@@ -6849,7 +7059,7 @@
           <p:cNvPr id="8" name="Rounded Rectangle 7">
             <a:extLst xmlns:a="http://schemas.openxmlformats.org/drawingml/2006/main">
               <a:ext uri="{FF2B5EF4-FFF2-40B4-BE49-F238E27FC236}">
-                <a16:creationId xmlns:a16="http://schemas.microsoft.com/office/drawing/2014/main" id="{4C03D4F0-9671-4B6C-884F-29A40A58FFC4}"/>
+                <a16:creationId xmlns:a16="http://schemas.microsoft.com/office/drawing/2014/main" id="{109562AE-A7D0-4A06-B671-503DE79978D4}"/>
               </a:ext>
             </a:extLst>
           </p:cNvPr>
@@ -6906,7 +7116,7 @@
           <p:cNvPr id="9" name="TextBox 8">
             <a:extLst xmlns:a="http://schemas.openxmlformats.org/drawingml/2006/main">
               <a:ext uri="{FF2B5EF4-FFF2-40B4-BE49-F238E27FC236}">
-                <a16:creationId xmlns:a16="http://schemas.microsoft.com/office/drawing/2014/main" id="{F40E597E-8270-4C4A-8894-927FF6E52C6E}"/>
+                <a16:creationId xmlns:a16="http://schemas.microsoft.com/office/drawing/2014/main" id="{612AB426-C3DC-4152-B239-7432621AB141}"/>
               </a:ext>
             </a:extLst>
           </p:cNvPr>
@@ -6953,7 +7163,7 @@
           <p:cNvPr id="10" name="TextBox 9">
             <a:extLst xmlns:a="http://schemas.openxmlformats.org/drawingml/2006/main">
               <a:ext uri="{FF2B5EF4-FFF2-40B4-BE49-F238E27FC236}">
-                <a16:creationId xmlns:a16="http://schemas.microsoft.com/office/drawing/2014/main" id="{B05C1D55-EFA8-4CE9-B884-571FB2D176D8}"/>
+                <a16:creationId xmlns:a16="http://schemas.microsoft.com/office/drawing/2014/main" id="{4AEAFACF-18C8-4C7A-986A-10532D61B62E}"/>
               </a:ext>
             </a:extLst>
           </p:cNvPr>
@@ -7000,7 +7210,7 @@
           <p:cNvPr id="11" name="Rounded Rectangle 10">
             <a:extLst xmlns:a="http://schemas.openxmlformats.org/drawingml/2006/main">
               <a:ext uri="{FF2B5EF4-FFF2-40B4-BE49-F238E27FC236}">
-                <a16:creationId xmlns:a16="http://schemas.microsoft.com/office/drawing/2014/main" id="{29B3BC9D-F9ED-47E8-99A6-CA66EAC06A8D}"/>
+                <a16:creationId xmlns:a16="http://schemas.microsoft.com/office/drawing/2014/main" id="{44451AF1-A836-4707-BCFD-67117D29DA0C}"/>
               </a:ext>
             </a:extLst>
           </p:cNvPr>
@@ -7057,7 +7267,7 @@
           <p:cNvPr id="12" name="TextBox 11">
             <a:extLst xmlns:a="http://schemas.openxmlformats.org/drawingml/2006/main">
               <a:ext uri="{FF2B5EF4-FFF2-40B4-BE49-F238E27FC236}">
-                <a16:creationId xmlns:a16="http://schemas.microsoft.com/office/drawing/2014/main" id="{E0A1BEF1-3637-4F7F-B371-4B4D30FFFA5D}"/>
+                <a16:creationId xmlns:a16="http://schemas.microsoft.com/office/drawing/2014/main" id="{20F89819-7211-40D5-8E85-08A03A0B4280}"/>
               </a:ext>
             </a:extLst>
           </p:cNvPr>
@@ -7104,7 +7314,7 @@
           <p:cNvPr id="13" name="TextBox 12">
             <a:extLst xmlns:a="http://schemas.openxmlformats.org/drawingml/2006/main">
               <a:ext uri="{FF2B5EF4-FFF2-40B4-BE49-F238E27FC236}">
-                <a16:creationId xmlns:a16="http://schemas.microsoft.com/office/drawing/2014/main" id="{77C9DCD7-D70D-45F7-8FDC-35B3D58ABE22}"/>
+                <a16:creationId xmlns:a16="http://schemas.microsoft.com/office/drawing/2014/main" id="{62846530-9AEE-45CF-877F-E1349FCFBCC8}"/>
               </a:ext>
             </a:extLst>
           </p:cNvPr>
@@ -7151,7 +7361,7 @@
           <p:cNvPr id="14" name="Rounded Rectangle 13">
             <a:extLst xmlns:a="http://schemas.openxmlformats.org/drawingml/2006/main">
               <a:ext uri="{FF2B5EF4-FFF2-40B4-BE49-F238E27FC236}">
-                <a16:creationId xmlns:a16="http://schemas.microsoft.com/office/drawing/2014/main" id="{05AB92D5-4F37-4141-A2E9-83CCD8F32672}"/>
+                <a16:creationId xmlns:a16="http://schemas.microsoft.com/office/drawing/2014/main" id="{467DA162-52D1-4762-AAD0-F839DE9697D0}"/>
               </a:ext>
             </a:extLst>
           </p:cNvPr>
@@ -7208,7 +7418,7 @@
           <p:cNvPr id="15" name="TextBox 14">
             <a:extLst xmlns:a="http://schemas.openxmlformats.org/drawingml/2006/main">
               <a:ext uri="{FF2B5EF4-FFF2-40B4-BE49-F238E27FC236}">
-                <a16:creationId xmlns:a16="http://schemas.microsoft.com/office/drawing/2014/main" id="{23F3E74A-F036-4699-8A39-61BAE6F6AD7F}"/>
+                <a16:creationId xmlns:a16="http://schemas.microsoft.com/office/drawing/2014/main" id="{6C1F0100-2FFE-4E75-ABEB-661B982F8208}"/>
               </a:ext>
             </a:extLst>
           </p:cNvPr>
@@ -7255,7 +7465,7 @@
           <p:cNvPr id="16" name="TextBox 15">
             <a:extLst xmlns:a="http://schemas.openxmlformats.org/drawingml/2006/main">
               <a:ext uri="{FF2B5EF4-FFF2-40B4-BE49-F238E27FC236}">
-                <a16:creationId xmlns:a16="http://schemas.microsoft.com/office/drawing/2014/main" id="{CA08F74E-403E-49DB-9AE4-C24610F5C9E5}"/>
+                <a16:creationId xmlns:a16="http://schemas.microsoft.com/office/drawing/2014/main" id="{C633AA6D-E671-4646-9699-72C342DEBBCC}"/>
               </a:ext>
             </a:extLst>
           </p:cNvPr>
@@ -7302,7 +7512,7 @@
           <p:cNvPr id="17" name="TextBox 16">
             <a:extLst xmlns:a="http://schemas.openxmlformats.org/drawingml/2006/main">
               <a:ext uri="{FF2B5EF4-FFF2-40B4-BE49-F238E27FC236}">
-                <a16:creationId xmlns:a16="http://schemas.microsoft.com/office/drawing/2014/main" id="{4BE7986D-A725-4177-9479-66B321E0C65F}"/>
+                <a16:creationId xmlns:a16="http://schemas.microsoft.com/office/drawing/2014/main" id="{9E994285-5011-4819-A4F4-07973BD73FE2}"/>
               </a:ext>
             </a:extLst>
           </p:cNvPr>
@@ -7349,7 +7559,7 @@
           <p:cNvPr id="18" name="Rounded Rectangle 17">
             <a:extLst xmlns:a="http://schemas.openxmlformats.org/drawingml/2006/main">
               <a:ext uri="{FF2B5EF4-FFF2-40B4-BE49-F238E27FC236}">
-                <a16:creationId xmlns:a16="http://schemas.microsoft.com/office/drawing/2014/main" id="{A8AC81CE-720F-4530-932F-F8BE6EB6EDB4}"/>
+                <a16:creationId xmlns:a16="http://schemas.microsoft.com/office/drawing/2014/main" id="{4BA70374-DCC5-4012-8064-6C819A0D9305}"/>
               </a:ext>
             </a:extLst>
           </p:cNvPr>
@@ -7406,7 +7616,7 @@
           <p:cNvPr id="19" name="TextBox 18">
             <a:extLst xmlns:a="http://schemas.openxmlformats.org/drawingml/2006/main">
               <a:ext uri="{FF2B5EF4-FFF2-40B4-BE49-F238E27FC236}">
-                <a16:creationId xmlns:a16="http://schemas.microsoft.com/office/drawing/2014/main" id="{7E2FE90D-72FB-4007-96F0-9B54116F3580}"/>
+                <a16:creationId xmlns:a16="http://schemas.microsoft.com/office/drawing/2014/main" id="{086030F5-842F-4416-9478-CAB95F3B96EF}"/>
               </a:ext>
             </a:extLst>
           </p:cNvPr>
@@ -7453,7 +7663,7 @@
           <p:cNvPr id="20" name="TextBox 19">
             <a:extLst xmlns:a="http://schemas.openxmlformats.org/drawingml/2006/main">
               <a:ext uri="{FF2B5EF4-FFF2-40B4-BE49-F238E27FC236}">
-                <a16:creationId xmlns:a16="http://schemas.microsoft.com/office/drawing/2014/main" id="{F8EFD569-12C9-4973-BB58-EA2A42890B59}"/>
+                <a16:creationId xmlns:a16="http://schemas.microsoft.com/office/drawing/2014/main" id="{8CF2BBF0-1EC2-4E26-88DF-24CEC41D24EE}"/>
               </a:ext>
             </a:extLst>
           </p:cNvPr>
@@ -7498,7 +7708,7 @@
     </p:spTree>
     <p:extLst>
       <p:ext uri="{BB962C8B-B14F-4D97-AF65-F5344CB8AC3E}">
-        <p14:creationId xmlns:p14="http://schemas.microsoft.com/office/powerpoint/2010/main" val="1908116236"/>
+        <p14:creationId xmlns:p14="http://schemas.microsoft.com/office/powerpoint/2010/main" val="875648614"/>
       </p:ext>
     </p:extLst>
   </p:cSld>
@@ -7522,7 +7732,7 @@
           <p:cNvPr id="2" name="TextBox 1">
             <a:extLst xmlns:a="http://schemas.openxmlformats.org/drawingml/2006/main">
               <a:ext uri="{FF2B5EF4-FFF2-40B4-BE49-F238E27FC236}">
-                <a16:creationId xmlns:a16="http://schemas.microsoft.com/office/drawing/2014/main" id="{BB852853-C456-464D-8122-83E4944F6FF8}"/>
+                <a16:creationId xmlns:a16="http://schemas.microsoft.com/office/drawing/2014/main" id="{238D0577-EA02-4118-8D70-435CAF927F5F}"/>
               </a:ext>
             </a:extLst>
           </p:cNvPr>
@@ -7569,7 +7779,7 @@
           <p:cNvPr id="3" name="TextBox 2">
             <a:extLst xmlns:a="http://schemas.openxmlformats.org/drawingml/2006/main">
               <a:ext uri="{FF2B5EF4-FFF2-40B4-BE49-F238E27FC236}">
-                <a16:creationId xmlns:a16="http://schemas.microsoft.com/office/drawing/2014/main" id="{1B988734-1E56-494A-9E79-B51448C4E28E}"/>
+                <a16:creationId xmlns:a16="http://schemas.microsoft.com/office/drawing/2014/main" id="{98E239CA-A5D5-4C67-A4D3-946C8C6BD2CE}"/>
               </a:ext>
             </a:extLst>
           </p:cNvPr>
@@ -7616,7 +7826,7 @@
           <p:cNvPr id="4" name="Rectangle 3">
             <a:extLst xmlns:a="http://schemas.openxmlformats.org/drawingml/2006/main">
               <a:ext uri="{FF2B5EF4-FFF2-40B4-BE49-F238E27FC236}">
-                <a16:creationId xmlns:a16="http://schemas.microsoft.com/office/drawing/2014/main" id="{57F2A2CC-E547-40BA-BB95-8234B8996345}"/>
+                <a16:creationId xmlns:a16="http://schemas.microsoft.com/office/drawing/2014/main" id="{C5ACB92F-4C88-4B4A-BF05-2094D8E0B796}"/>
               </a:ext>
             </a:extLst>
           </p:cNvPr>
@@ -7671,7 +7881,7 @@
           <p:cNvPr id="5" name="Rectangle 4">
             <a:extLst xmlns:a="http://schemas.openxmlformats.org/drawingml/2006/main">
               <a:ext uri="{FF2B5EF4-FFF2-40B4-BE49-F238E27FC236}">
-                <a16:creationId xmlns:a16="http://schemas.microsoft.com/office/drawing/2014/main" id="{BBDF72F5-432E-4ADE-9E59-B545605D9405}"/>
+                <a16:creationId xmlns:a16="http://schemas.microsoft.com/office/drawing/2014/main" id="{AA2EFFF2-D912-40A3-9E8B-DE20522CAC59}"/>
               </a:ext>
             </a:extLst>
           </p:cNvPr>
@@ -7726,7 +7936,7 @@
           <p:cNvPr id="6" name="TextBox 5">
             <a:extLst xmlns:a="http://schemas.openxmlformats.org/drawingml/2006/main">
               <a:ext uri="{FF2B5EF4-FFF2-40B4-BE49-F238E27FC236}">
-                <a16:creationId xmlns:a16="http://schemas.microsoft.com/office/drawing/2014/main" id="{A247A774-6A55-4AC1-A02B-6B3B770292EC}"/>
+                <a16:creationId xmlns:a16="http://schemas.microsoft.com/office/drawing/2014/main" id="{0ACAB3F9-1857-4B58-806D-1AFFCE7C5EC1}"/>
               </a:ext>
             </a:extLst>
           </p:cNvPr>
@@ -7763,7 +7973,7 @@
                 <a:ea typeface="Aptos"/>
                 <a:cs typeface="Aptos"/>
               </a:rPr>
-              <a:t>Julkinen riippumaton evidenssikooste · 2026.07.27-30 · 2026-07-27 · Lähteet: World Bank; Statistics Canada; Health Canada; NZ Ministry of Health; Sejm; FHM; FTC</a:t>
+              <a:t>Julkinen riippumaton evidenssikooste · 2026.07.28-32 · 2026-07-28 · Lähteet: World Bank; Statistics Canada; Health Canada; NZ Ministry of Health; Sejm; FHM; FTC; ADM</a:t>
             </a:r>
           </a:p>
         </p:txBody>
@@ -7773,7 +7983,7 @@
           <p:cNvPr id="7" name="TextBox 6">
             <a:extLst xmlns:a="http://schemas.openxmlformats.org/drawingml/2006/main">
               <a:ext uri="{FF2B5EF4-FFF2-40B4-BE49-F238E27FC236}">
-                <a16:creationId xmlns:a16="http://schemas.microsoft.com/office/drawing/2014/main" id="{9F0D7514-03D0-44AC-99D6-BDF6219939FA}"/>
+                <a16:creationId xmlns:a16="http://schemas.microsoft.com/office/drawing/2014/main" id="{5A74AD3F-965E-44A7-BCFE-80953288DE8A}"/>
               </a:ext>
             </a:extLst>
           </p:cNvPr>
@@ -7820,7 +8030,7 @@
           <p:cNvPr id="8" name="Rounded Rectangle 7">
             <a:extLst xmlns:a="http://schemas.openxmlformats.org/drawingml/2006/main">
               <a:ext uri="{FF2B5EF4-FFF2-40B4-BE49-F238E27FC236}">
-                <a16:creationId xmlns:a16="http://schemas.microsoft.com/office/drawing/2014/main" id="{D1C4DF48-6716-4F65-9AEC-821963B8053C}"/>
+                <a16:creationId xmlns:a16="http://schemas.microsoft.com/office/drawing/2014/main" id="{D026A756-BCD6-47EF-9C6C-F56B0854E2CF}"/>
               </a:ext>
             </a:extLst>
           </p:cNvPr>
@@ -7877,7 +8087,7 @@
           <p:cNvPr id="9" name="TextBox 8">
             <a:extLst xmlns:a="http://schemas.openxmlformats.org/drawingml/2006/main">
               <a:ext uri="{FF2B5EF4-FFF2-40B4-BE49-F238E27FC236}">
-                <a16:creationId xmlns:a16="http://schemas.microsoft.com/office/drawing/2014/main" id="{CD250DBF-85CA-44B8-9707-98206456C788}"/>
+                <a16:creationId xmlns:a16="http://schemas.microsoft.com/office/drawing/2014/main" id="{686D918A-EE13-4849-B91B-276D4B33D674}"/>
               </a:ext>
             </a:extLst>
           </p:cNvPr>
@@ -7924,7 +8134,7 @@
           <p:cNvPr id="10" name="TextBox 9">
             <a:extLst xmlns:a="http://schemas.openxmlformats.org/drawingml/2006/main">
               <a:ext uri="{FF2B5EF4-FFF2-40B4-BE49-F238E27FC236}">
-                <a16:creationId xmlns:a16="http://schemas.microsoft.com/office/drawing/2014/main" id="{8768499C-6C97-41F7-A754-AA79FE047E36}"/>
+                <a16:creationId xmlns:a16="http://schemas.microsoft.com/office/drawing/2014/main" id="{6C2EA1C1-627E-4611-A7C3-D16758C3DBB7}"/>
               </a:ext>
             </a:extLst>
           </p:cNvPr>
@@ -7971,7 +8181,7 @@
           <p:cNvPr id="11" name="Rounded Rectangle 10">
             <a:extLst xmlns:a="http://schemas.openxmlformats.org/drawingml/2006/main">
               <a:ext uri="{FF2B5EF4-FFF2-40B4-BE49-F238E27FC236}">
-                <a16:creationId xmlns:a16="http://schemas.microsoft.com/office/drawing/2014/main" id="{B580A975-BADA-48F6-9D22-F899207E89B7}"/>
+                <a16:creationId xmlns:a16="http://schemas.microsoft.com/office/drawing/2014/main" id="{161B8EA4-9E7F-4D21-B84B-3A49EA79AF82}"/>
               </a:ext>
             </a:extLst>
           </p:cNvPr>
@@ -8028,7 +8238,7 @@
           <p:cNvPr id="12" name="TextBox 11">
             <a:extLst xmlns:a="http://schemas.openxmlformats.org/drawingml/2006/main">
               <a:ext uri="{FF2B5EF4-FFF2-40B4-BE49-F238E27FC236}">
-                <a16:creationId xmlns:a16="http://schemas.microsoft.com/office/drawing/2014/main" id="{601B223B-9EF4-43D8-BD75-F3B4AA7D13F2}"/>
+                <a16:creationId xmlns:a16="http://schemas.microsoft.com/office/drawing/2014/main" id="{DE1D846D-A8D6-4F00-B507-F4A2A81ACA5F}"/>
               </a:ext>
             </a:extLst>
           </p:cNvPr>
@@ -8075,7 +8285,7 @@
           <p:cNvPr id="13" name="TextBox 12">
             <a:extLst xmlns:a="http://schemas.openxmlformats.org/drawingml/2006/main">
               <a:ext uri="{FF2B5EF4-FFF2-40B4-BE49-F238E27FC236}">
-                <a16:creationId xmlns:a16="http://schemas.microsoft.com/office/drawing/2014/main" id="{A0534559-92B2-4CFE-8CE7-EDFC56DEF39D}"/>
+                <a16:creationId xmlns:a16="http://schemas.microsoft.com/office/drawing/2014/main" id="{7F73CB5B-F465-47D6-A9E4-263B4E7093D9}"/>
               </a:ext>
             </a:extLst>
           </p:cNvPr>
@@ -8122,7 +8332,7 @@
           <p:cNvPr id="14" name="Rounded Rectangle 13">
             <a:extLst xmlns:a="http://schemas.openxmlformats.org/drawingml/2006/main">
               <a:ext uri="{FF2B5EF4-FFF2-40B4-BE49-F238E27FC236}">
-                <a16:creationId xmlns:a16="http://schemas.microsoft.com/office/drawing/2014/main" id="{CA7BA768-41E6-4CA1-B634-AFE1440FB2EA}"/>
+                <a16:creationId xmlns:a16="http://schemas.microsoft.com/office/drawing/2014/main" id="{DD98C8ED-A305-43D5-9E27-9B1DD35D9D1E}"/>
               </a:ext>
             </a:extLst>
           </p:cNvPr>
@@ -8179,7 +8389,7 @@
           <p:cNvPr id="15" name="TextBox 14">
             <a:extLst xmlns:a="http://schemas.openxmlformats.org/drawingml/2006/main">
               <a:ext uri="{FF2B5EF4-FFF2-40B4-BE49-F238E27FC236}">
-                <a16:creationId xmlns:a16="http://schemas.microsoft.com/office/drawing/2014/main" id="{17AC56C7-6364-4C27-9342-C3E736F67171}"/>
+                <a16:creationId xmlns:a16="http://schemas.microsoft.com/office/drawing/2014/main" id="{039E23F5-4582-4D58-A785-0A755E281AF5}"/>
               </a:ext>
             </a:extLst>
           </p:cNvPr>
@@ -8226,7 +8436,7 @@
           <p:cNvPr id="16" name="TextBox 15">
             <a:extLst xmlns:a="http://schemas.openxmlformats.org/drawingml/2006/main">
               <a:ext uri="{FF2B5EF4-FFF2-40B4-BE49-F238E27FC236}">
-                <a16:creationId xmlns:a16="http://schemas.microsoft.com/office/drawing/2014/main" id="{006D511A-426E-4A7C-A442-3208F92C01FB}"/>
+                <a16:creationId xmlns:a16="http://schemas.microsoft.com/office/drawing/2014/main" id="{7C3E63BD-6316-44BA-B980-D7CEEE09ACE6}"/>
               </a:ext>
             </a:extLst>
           </p:cNvPr>
@@ -8273,7 +8483,7 @@
           <p:cNvPr id="17" name="TextBox 16">
             <a:extLst xmlns:a="http://schemas.openxmlformats.org/drawingml/2006/main">
               <a:ext uri="{FF2B5EF4-FFF2-40B4-BE49-F238E27FC236}">
-                <a16:creationId xmlns:a16="http://schemas.microsoft.com/office/drawing/2014/main" id="{C4412EA5-D78C-4146-B590-EE89D13EE2E2}"/>
+                <a16:creationId xmlns:a16="http://schemas.microsoft.com/office/drawing/2014/main" id="{18AB89C5-3859-47F2-A14A-6B7A22E9DC46}"/>
               </a:ext>
             </a:extLst>
           </p:cNvPr>
@@ -8320,7 +8530,7 @@
           <p:cNvPr id="18" name="Rounded Rectangle 17">
             <a:extLst xmlns:a="http://schemas.openxmlformats.org/drawingml/2006/main">
               <a:ext uri="{FF2B5EF4-FFF2-40B4-BE49-F238E27FC236}">
-                <a16:creationId xmlns:a16="http://schemas.microsoft.com/office/drawing/2014/main" id="{76AC98A8-5B6B-454A-9DCA-A44BB961F8DA}"/>
+                <a16:creationId xmlns:a16="http://schemas.microsoft.com/office/drawing/2014/main" id="{CE31993F-56ED-4B8C-B393-31AA76ABB262}"/>
               </a:ext>
             </a:extLst>
           </p:cNvPr>
@@ -8377,7 +8587,7 @@
           <p:cNvPr id="19" name="TextBox 18">
             <a:extLst xmlns:a="http://schemas.openxmlformats.org/drawingml/2006/main">
               <a:ext uri="{FF2B5EF4-FFF2-40B4-BE49-F238E27FC236}">
-                <a16:creationId xmlns:a16="http://schemas.microsoft.com/office/drawing/2014/main" id="{38041C3F-A042-4FF7-A6FD-2309F4AB6638}"/>
+                <a16:creationId xmlns:a16="http://schemas.microsoft.com/office/drawing/2014/main" id="{C8CD95C1-6A5E-4B0A-9AF3-6F564FE5957A}"/>
               </a:ext>
             </a:extLst>
           </p:cNvPr>
@@ -8424,7 +8634,7 @@
           <p:cNvPr id="20" name="TextBox 19">
             <a:extLst xmlns:a="http://schemas.openxmlformats.org/drawingml/2006/main">
               <a:ext uri="{FF2B5EF4-FFF2-40B4-BE49-F238E27FC236}">
-                <a16:creationId xmlns:a16="http://schemas.microsoft.com/office/drawing/2014/main" id="{B3450DAA-BE3C-4281-B76A-8606EF5EDA72}"/>
+                <a16:creationId xmlns:a16="http://schemas.microsoft.com/office/drawing/2014/main" id="{B95A1256-C26B-4DE7-A2DE-E2D40CD13FF8}"/>
               </a:ext>
             </a:extLst>
           </p:cNvPr>
@@ -8461,7 +8671,7 @@
                 <a:ea typeface="Aptos"/>
                 <a:cs typeface="Aptos"/>
               </a:rPr>
-              <a:t>Menetelmäkontrolli 23 / 5 / 15 / 152; ei myyntiä. Puola: verosilta 4 382 500 laitetta / 62 500 sarjaa. Kanada 1,219160 mrd CAD (≈822,6 milj. EUR; ECB 2024); Health Canada -toimitukset 1,160754 mrd CAD (≈783,2 milj. EUR; ECB 2024); FTC 2,763 mrd USD (≈2,336 mrd EUR; ECB 2021). Euromonitor 0/6; donor 0/3.</a:t>
+              <a:t>Menetelmäkontrolli 28 / 0 / 15 / 152; 5 uutta maasuunnitelmaa, ei myyntiä. Belgia ≈83 333 litraa (9 kk; ei retail); Italia 84,31 milj. EUR PLI-veroa (ei retail). Kanada retail 1,219160 mrd CAD (≈822,6 milj. EUR; ECB 2024) ja toimitukset 1,160754 mrd CAD (≈783,2 milj. EUR; ECB 2024); FTC 2,763 mrd USD (≈2,336 mrd EUR; ECB 2021). Donor 0/3.</a:t>
             </a:r>
           </a:p>
         </p:txBody>
@@ -8469,7 +8679,7 @@
     </p:spTree>
     <p:extLst>
       <p:ext uri="{BB962C8B-B14F-4D97-AF65-F5344CB8AC3E}">
-        <p14:creationId xmlns:p14="http://schemas.microsoft.com/office/powerpoint/2010/main" val="1920061634"/>
+        <p14:creationId xmlns:p14="http://schemas.microsoft.com/office/powerpoint/2010/main" val="1161443614"/>
       </p:ext>
     </p:extLst>
   </p:cSld>
@@ -8493,7 +8703,7 @@
           <p:cNvPr id="2" name="TextBox 1">
             <a:extLst xmlns:a="http://schemas.openxmlformats.org/drawingml/2006/main">
               <a:ext uri="{FF2B5EF4-FFF2-40B4-BE49-F238E27FC236}">
-                <a16:creationId xmlns:a16="http://schemas.microsoft.com/office/drawing/2014/main" id="{A4E2C0DD-67C6-4099-83E6-E4E1E5CCC81B}"/>
+                <a16:creationId xmlns:a16="http://schemas.microsoft.com/office/drawing/2014/main" id="{3B5293F4-9E80-4D7B-894C-19CC0D4689F3}"/>
               </a:ext>
             </a:extLst>
           </p:cNvPr>
@@ -8540,7 +8750,7 @@
           <p:cNvPr id="3" name="TextBox 2">
             <a:extLst xmlns:a="http://schemas.openxmlformats.org/drawingml/2006/main">
               <a:ext uri="{FF2B5EF4-FFF2-40B4-BE49-F238E27FC236}">
-                <a16:creationId xmlns:a16="http://schemas.microsoft.com/office/drawing/2014/main" id="{5E6640A9-4291-423F-A487-D49B0C3D152F}"/>
+                <a16:creationId xmlns:a16="http://schemas.microsoft.com/office/drawing/2014/main" id="{6B2BA502-A0CF-4F62-AD7F-0167BB98E4DF}"/>
               </a:ext>
             </a:extLst>
           </p:cNvPr>
@@ -8587,7 +8797,7 @@
           <p:cNvPr id="4" name="Rectangle 3">
             <a:extLst xmlns:a="http://schemas.openxmlformats.org/drawingml/2006/main">
               <a:ext uri="{FF2B5EF4-FFF2-40B4-BE49-F238E27FC236}">
-                <a16:creationId xmlns:a16="http://schemas.microsoft.com/office/drawing/2014/main" id="{4257710A-E318-42EF-BB1D-500186D81A92}"/>
+                <a16:creationId xmlns:a16="http://schemas.microsoft.com/office/drawing/2014/main" id="{D46727EF-FD28-4FE6-AA9A-867FE8A9D775}"/>
               </a:ext>
             </a:extLst>
           </p:cNvPr>
@@ -8642,7 +8852,7 @@
           <p:cNvPr id="5" name="Rectangle 4">
             <a:extLst xmlns:a="http://schemas.openxmlformats.org/drawingml/2006/main">
               <a:ext uri="{FF2B5EF4-FFF2-40B4-BE49-F238E27FC236}">
-                <a16:creationId xmlns:a16="http://schemas.microsoft.com/office/drawing/2014/main" id="{B5A33C87-0B9A-4734-8B36-62ABDA2A26C3}"/>
+                <a16:creationId xmlns:a16="http://schemas.microsoft.com/office/drawing/2014/main" id="{7EE55C27-AB33-4DC2-A78C-3474F3BFF188}"/>
               </a:ext>
             </a:extLst>
           </p:cNvPr>
@@ -8697,7 +8907,7 @@
           <p:cNvPr id="6" name="TextBox 5">
             <a:extLst xmlns:a="http://schemas.openxmlformats.org/drawingml/2006/main">
               <a:ext uri="{FF2B5EF4-FFF2-40B4-BE49-F238E27FC236}">
-                <a16:creationId xmlns:a16="http://schemas.microsoft.com/office/drawing/2014/main" id="{6E9C3454-A1F3-4EE9-BA80-849441C2F1E3}"/>
+                <a16:creationId xmlns:a16="http://schemas.microsoft.com/office/drawing/2014/main" id="{B7D0FA5D-BC22-40B3-9214-B16FBD757A49}"/>
               </a:ext>
             </a:extLst>
           </p:cNvPr>
@@ -8734,7 +8944,7 @@
                 <a:ea typeface="Aptos"/>
                 <a:cs typeface="Aptos"/>
               </a:rPr>
-              <a:t>Julkinen riippumaton evidenssikooste · 2026.07.27-30 · 2026-07-27 · Lähteet: Evidence Register; WIPO IP valuation</a:t>
+              <a:t>Julkinen riippumaton evidenssikooste · 2026.07.28-32 · 2026-07-28 · Lähteet: Evidence Register; WIPO IP valuation</a:t>
             </a:r>
           </a:p>
         </p:txBody>
@@ -8744,7 +8954,7 @@
           <p:cNvPr id="7" name="TextBox 6">
             <a:extLst xmlns:a="http://schemas.openxmlformats.org/drawingml/2006/main">
               <a:ext uri="{FF2B5EF4-FFF2-40B4-BE49-F238E27FC236}">
-                <a16:creationId xmlns:a16="http://schemas.microsoft.com/office/drawing/2014/main" id="{1327DF8E-CC8B-4816-AA10-A2858FAB168B}"/>
+                <a16:creationId xmlns:a16="http://schemas.microsoft.com/office/drawing/2014/main" id="{3ACB71BC-88A3-4E61-A490-8367CFE8D4AE}"/>
               </a:ext>
             </a:extLst>
           </p:cNvPr>
@@ -9231,7 +9441,7 @@
           <p:cNvPr id="9" name="TextBox 8">
             <a:extLst xmlns:a="http://schemas.openxmlformats.org/drawingml/2006/main">
               <a:ext uri="{FF2B5EF4-FFF2-40B4-BE49-F238E27FC236}">
-                <a16:creationId xmlns:a16="http://schemas.microsoft.com/office/drawing/2014/main" id="{F0A39F5B-8BA2-4245-9421-C382882892C9}"/>
+                <a16:creationId xmlns:a16="http://schemas.microsoft.com/office/drawing/2014/main" id="{B9B61A87-89EA-4D18-B440-F3B48D1E29E6}"/>
               </a:ext>
             </a:extLst>
           </p:cNvPr>
@@ -9276,7 +9486,7 @@
     </p:spTree>
     <p:extLst>
       <p:ext uri="{BB962C8B-B14F-4D97-AF65-F5344CB8AC3E}">
-        <p14:creationId xmlns:p14="http://schemas.microsoft.com/office/powerpoint/2010/main" val="979589490"/>
+        <p14:creationId xmlns:p14="http://schemas.microsoft.com/office/powerpoint/2010/main" val="1543604825"/>
       </p:ext>
     </p:extLst>
   </p:cSld>
@@ -9307,7 +9517,7 @@
           <p:cNvPr id="2" name="TextBox 1">
             <a:extLst xmlns:a="http://schemas.openxmlformats.org/drawingml/2006/main">
               <a:ext uri="{FF2B5EF4-FFF2-40B4-BE49-F238E27FC236}">
-                <a16:creationId xmlns:a16="http://schemas.microsoft.com/office/drawing/2014/main" id="{3A5F5035-4987-412E-A75A-FB65D6F2F620}"/>
+                <a16:creationId xmlns:a16="http://schemas.microsoft.com/office/drawing/2014/main" id="{156AA78B-FF3E-4F4A-995A-55B1EFF8F9AF}"/>
               </a:ext>
             </a:extLst>
           </p:cNvPr>
@@ -9354,7 +9564,7 @@
           <p:cNvPr id="3" name="TextBox 2">
             <a:extLst xmlns:a="http://schemas.openxmlformats.org/drawingml/2006/main">
               <a:ext uri="{FF2B5EF4-FFF2-40B4-BE49-F238E27FC236}">
-                <a16:creationId xmlns:a16="http://schemas.microsoft.com/office/drawing/2014/main" id="{977059B3-6428-4463-994E-85317B5E46C0}"/>
+                <a16:creationId xmlns:a16="http://schemas.microsoft.com/office/drawing/2014/main" id="{1828A9DD-7DD2-45CA-B107-CAD1CF4C3FF5}"/>
               </a:ext>
             </a:extLst>
           </p:cNvPr>
@@ -9401,7 +9611,7 @@
           <p:cNvPr id="4" name="TextBox 3">
             <a:extLst xmlns:a="http://schemas.openxmlformats.org/drawingml/2006/main">
               <a:ext uri="{FF2B5EF4-FFF2-40B4-BE49-F238E27FC236}">
-                <a16:creationId xmlns:a16="http://schemas.microsoft.com/office/drawing/2014/main" id="{9C7963AB-DE40-4587-BD74-085C82D9ED3C}"/>
+                <a16:creationId xmlns:a16="http://schemas.microsoft.com/office/drawing/2014/main" id="{BBE43660-B07A-4866-B268-EC00BDB7E97F}"/>
               </a:ext>
             </a:extLst>
           </p:cNvPr>
@@ -9520,7 +9730,7 @@
           <p:cNvPr id="5" name="TextBox 4">
             <a:extLst xmlns:a="http://schemas.openxmlformats.org/drawingml/2006/main">
               <a:ext uri="{FF2B5EF4-FFF2-40B4-BE49-F238E27FC236}">
-                <a16:creationId xmlns:a16="http://schemas.microsoft.com/office/drawing/2014/main" id="{75CC2B1B-85E9-4197-9FCB-400B59C79C26}"/>
+                <a16:creationId xmlns:a16="http://schemas.microsoft.com/office/drawing/2014/main" id="{2FBAB6FF-5E87-4E34-95D4-9871025F9F51}"/>
               </a:ext>
             </a:extLst>
           </p:cNvPr>
@@ -9557,7 +9767,7 @@
                 <a:ea typeface="Aptos"/>
                 <a:cs typeface="Aptos"/>
               </a:rPr>
-              <a:t>Versio 2026.07.27-30 · 2026-07-27 · 6 / 6</a:t>
+              <a:t>Versio 2026.07.28-32 · 2026-07-28 · 6 / 6</a:t>
             </a:r>
           </a:p>
         </p:txBody>
@@ -9565,7 +9775,7 @@
     </p:spTree>
     <p:extLst>
       <p:ext uri="{BB962C8B-B14F-4D97-AF65-F5344CB8AC3E}">
-        <p14:creationId xmlns:p14="http://schemas.microsoft.com/office/powerpoint/2010/main" val="367374779"/>
+        <p14:creationId xmlns:p14="http://schemas.microsoft.com/office/powerpoint/2010/main" val="1373556881"/>
       </p:ext>
     </p:extLst>
   </p:cSld>

--- a/site/downloads/pixan-bank-deck-short-fi.pptx
+++ b/site/downloads/pixan-bank-deck-short-fi.pptx
@@ -2,18 +2,18 @@
 <file path=ppt/presentation.xml><?xml version="1.0" encoding="utf-8"?>
 <p:presentation xmlns:p="http://schemas.openxmlformats.org/presentationml/2006/main">
   <p:sldMasterIdLst>
-    <p:sldMasterId xmlns:r="http://schemas.openxmlformats.org/officeDocument/2006/relationships" id="2147483648" r:id="R918b408898564834"/>
+    <p:sldMasterId xmlns:r="http://schemas.openxmlformats.org/officeDocument/2006/relationships" id="2147483648" r:id="R18d972b52e6b4bc7"/>
   </p:sldMasterIdLst>
   <p:notesMasterIdLst>
-    <p:notesMasterId xmlns:r="http://schemas.openxmlformats.org/officeDocument/2006/relationships" r:id="Rcfebeef34e874d3f"/>
+    <p:notesMasterId xmlns:r="http://schemas.openxmlformats.org/officeDocument/2006/relationships" r:id="R1ccd1305e76d4540"/>
   </p:notesMasterIdLst>
   <p:sldIdLst>
-    <p:sldId xmlns:r="http://schemas.openxmlformats.org/officeDocument/2006/relationships" id="256" r:id="R2c034e000bdb4ea7"/>
-    <p:sldId xmlns:r="http://schemas.openxmlformats.org/officeDocument/2006/relationships" id="257" r:id="R66f25c5cc35142e6"/>
-    <p:sldId xmlns:r="http://schemas.openxmlformats.org/officeDocument/2006/relationships" id="258" r:id="R42f247aa78664fd8"/>
-    <p:sldId xmlns:r="http://schemas.openxmlformats.org/officeDocument/2006/relationships" id="259" r:id="Rf56327ec338f43b6"/>
-    <p:sldId xmlns:r="http://schemas.openxmlformats.org/officeDocument/2006/relationships" id="260" r:id="Rcc2d653039fa4adf"/>
-    <p:sldId xmlns:r="http://schemas.openxmlformats.org/officeDocument/2006/relationships" id="261" r:id="R279be6a2e7f640a4"/>
+    <p:sldId xmlns:r="http://schemas.openxmlformats.org/officeDocument/2006/relationships" id="256" r:id="R0e10ce90345d481b"/>
+    <p:sldId xmlns:r="http://schemas.openxmlformats.org/officeDocument/2006/relationships" id="257" r:id="R9fd21dbc8af84963"/>
+    <p:sldId xmlns:r="http://schemas.openxmlformats.org/officeDocument/2006/relationships" id="258" r:id="R27bcec13bdfa4e01"/>
+    <p:sldId xmlns:r="http://schemas.openxmlformats.org/officeDocument/2006/relationships" id="259" r:id="R11ad6b5092d44486"/>
+    <p:sldId xmlns:r="http://schemas.openxmlformats.org/officeDocument/2006/relationships" id="260" r:id="R489ddcf1c59046dd"/>
+    <p:sldId xmlns:r="http://schemas.openxmlformats.org/officeDocument/2006/relationships" id="261" r:id="R1232c2a72319477f"/>
   </p:sldIdLst>
   <p:sldSz cx="12191999" cy="6858000"/>
   <p:notesSz cx="6858000" cy="9144000"/>
@@ -605,7 +605,22 @@
           </a:p>
           <a:p xmlns:a="http://schemas.openxmlformats.org/drawingml/2006/main">
             <a:r>
+              <a:t>- https://douanes.public.lu/dam-assets/fr/accises/signes-fiscaux/2024/s48/bareme-e-liquide-s48.pdf</a:t>
+            </a:r>
+          </a:p>
+          <a:p xmlns:a="http://schemas.openxmlformats.org/drawingml/2006/main">
+            <a:r>
               <a:t>- https://www.helsedirektoratet.no/veiledere/tobakksskadeloven/e-sigaretter</a:t>
+            </a:r>
+          </a:p>
+          <a:p xmlns:a="http://schemas.openxmlformats.org/drawingml/2006/main">
+            <a:r>
+              <a:t>- https://lekiosque.finances.gouv.fr/site_fr/NC8/Resultat_nc.asp?ot=1&amp;lanc=85434000</a:t>
+            </a:r>
+          </a:p>
+          <a:p xmlns:a="http://schemas.openxmlformats.org/drawingml/2006/main">
+            <a:r>
+              <a:t>- https://www.sik.dk/registre</a:t>
             </a:r>
           </a:p>
           <a:p xmlns:a="http://schemas.openxmlformats.org/drawingml/2006/main">
@@ -880,7 +895,22 @@
           </a:p>
           <a:p xmlns:a="http://schemas.openxmlformats.org/drawingml/2006/main">
             <a:r>
+              <a:t>- https://douanes.public.lu/dam-assets/fr/accises/signes-fiscaux/2024/s48/bareme-e-liquide-s48.pdf</a:t>
+            </a:r>
+          </a:p>
+          <a:p xmlns:a="http://schemas.openxmlformats.org/drawingml/2006/main">
+            <a:r>
               <a:t>- https://www.helsedirektoratet.no/veiledere/tobakksskadeloven/e-sigaretter</a:t>
+            </a:r>
+          </a:p>
+          <a:p xmlns:a="http://schemas.openxmlformats.org/drawingml/2006/main">
+            <a:r>
+              <a:t>- https://lekiosque.finances.gouv.fr/site_fr/NC8/Resultat_nc.asp?ot=1&amp;lanc=85434000</a:t>
+            </a:r>
+          </a:p>
+          <a:p xmlns:a="http://schemas.openxmlformats.org/drawingml/2006/main">
+            <a:r>
+              <a:t>- https://www.sik.dk/registre</a:t>
             </a:r>
           </a:p>
           <a:p xmlns:a="http://schemas.openxmlformats.org/drawingml/2006/main">
@@ -1155,7 +1185,22 @@
           </a:p>
           <a:p xmlns:a="http://schemas.openxmlformats.org/drawingml/2006/main">
             <a:r>
+              <a:t>- https://douanes.public.lu/dam-assets/fr/accises/signes-fiscaux/2024/s48/bareme-e-liquide-s48.pdf</a:t>
+            </a:r>
+          </a:p>
+          <a:p xmlns:a="http://schemas.openxmlformats.org/drawingml/2006/main">
+            <a:r>
               <a:t>- https://www.helsedirektoratet.no/veiledere/tobakksskadeloven/e-sigaretter</a:t>
+            </a:r>
+          </a:p>
+          <a:p xmlns:a="http://schemas.openxmlformats.org/drawingml/2006/main">
+            <a:r>
+              <a:t>- https://lekiosque.finances.gouv.fr/site_fr/NC8/Resultat_nc.asp?ot=1&amp;lanc=85434000</a:t>
+            </a:r>
+          </a:p>
+          <a:p xmlns:a="http://schemas.openxmlformats.org/drawingml/2006/main">
+            <a:r>
+              <a:t>- https://www.sik.dk/registre</a:t>
             </a:r>
           </a:p>
           <a:p xmlns:a="http://schemas.openxmlformats.org/drawingml/2006/main">
@@ -1430,7 +1475,22 @@
           </a:p>
           <a:p xmlns:a="http://schemas.openxmlformats.org/drawingml/2006/main">
             <a:r>
+              <a:t>- https://douanes.public.lu/dam-assets/fr/accises/signes-fiscaux/2024/s48/bareme-e-liquide-s48.pdf</a:t>
+            </a:r>
+          </a:p>
+          <a:p xmlns:a="http://schemas.openxmlformats.org/drawingml/2006/main">
+            <a:r>
               <a:t>- https://www.helsedirektoratet.no/veiledere/tobakksskadeloven/e-sigaretter</a:t>
+            </a:r>
+          </a:p>
+          <a:p xmlns:a="http://schemas.openxmlformats.org/drawingml/2006/main">
+            <a:r>
+              <a:t>- https://lekiosque.finances.gouv.fr/site_fr/NC8/Resultat_nc.asp?ot=1&amp;lanc=85434000</a:t>
+            </a:r>
+          </a:p>
+          <a:p xmlns:a="http://schemas.openxmlformats.org/drawingml/2006/main">
+            <a:r>
+              <a:t>- https://www.sik.dk/registre</a:t>
             </a:r>
           </a:p>
           <a:p xmlns:a="http://schemas.openxmlformats.org/drawingml/2006/main">
@@ -1705,7 +1765,22 @@
           </a:p>
           <a:p xmlns:a="http://schemas.openxmlformats.org/drawingml/2006/main">
             <a:r>
+              <a:t>- https://douanes.public.lu/dam-assets/fr/accises/signes-fiscaux/2024/s48/bareme-e-liquide-s48.pdf</a:t>
+            </a:r>
+          </a:p>
+          <a:p xmlns:a="http://schemas.openxmlformats.org/drawingml/2006/main">
+            <a:r>
               <a:t>- https://www.helsedirektoratet.no/veiledere/tobakksskadeloven/e-sigaretter</a:t>
+            </a:r>
+          </a:p>
+          <a:p xmlns:a="http://schemas.openxmlformats.org/drawingml/2006/main">
+            <a:r>
+              <a:t>- https://lekiosque.finances.gouv.fr/site_fr/NC8/Resultat_nc.asp?ot=1&amp;lanc=85434000</a:t>
+            </a:r>
+          </a:p>
+          <a:p xmlns:a="http://schemas.openxmlformats.org/drawingml/2006/main">
+            <a:r>
+              <a:t>- https://www.sik.dk/registre</a:t>
             </a:r>
           </a:p>
           <a:p xmlns:a="http://schemas.openxmlformats.org/drawingml/2006/main">
@@ -1980,7 +2055,22 @@
           </a:p>
           <a:p xmlns:a="http://schemas.openxmlformats.org/drawingml/2006/main">
             <a:r>
+              <a:t>- https://douanes.public.lu/dam-assets/fr/accises/signes-fiscaux/2024/s48/bareme-e-liquide-s48.pdf</a:t>
+            </a:r>
+          </a:p>
+          <a:p xmlns:a="http://schemas.openxmlformats.org/drawingml/2006/main">
+            <a:r>
               <a:t>- https://www.helsedirektoratet.no/veiledere/tobakksskadeloven/e-sigaretter</a:t>
+            </a:r>
+          </a:p>
+          <a:p xmlns:a="http://schemas.openxmlformats.org/drawingml/2006/main">
+            <a:r>
+              <a:t>- https://lekiosque.finances.gouv.fr/site_fr/NC8/Resultat_nc.asp?ot=1&amp;lanc=85434000</a:t>
+            </a:r>
+          </a:p>
+          <a:p xmlns:a="http://schemas.openxmlformats.org/drawingml/2006/main">
+            <a:r>
+              <a:t>- https://www.sik.dk/registre</a:t>
             </a:r>
           </a:p>
           <a:p xmlns:a="http://schemas.openxmlformats.org/drawingml/2006/main">
@@ -2097,7 +2187,7 @@
           <p:cNvPr id="2" name="Title 1">
             <a:extLst xmlns:a="http://schemas.openxmlformats.org/drawingml/2006/main">
               <a:ext uri="{FF2B5EF4-FFF2-40B4-BE49-F238E27FC236}">
-                <a16:creationId xmlns:a16="http://schemas.microsoft.com/office/drawing/2014/main" id="{0DAFCEF1-99B9-4AC5-B088-282928FC7B4B}"/>
+                <a16:creationId xmlns:a16="http://schemas.microsoft.com/office/drawing/2014/main" id="{94FA0B03-9F97-4772-AC4C-64909085EBAE}"/>
               </a:ext>
             </a:extLst>
           </p:cNvPr>
@@ -2129,7 +2219,7 @@
           <p:cNvPr id="3" name="Subtitle 2">
             <a:extLst xmlns:a="http://schemas.openxmlformats.org/drawingml/2006/main">
               <a:ext uri="{FF2B5EF4-FFF2-40B4-BE49-F238E27FC236}">
-                <a16:creationId xmlns:a16="http://schemas.microsoft.com/office/drawing/2014/main" id="{583440BB-8A76-464C-B1A7-A0E02047F26F}"/>
+                <a16:creationId xmlns:a16="http://schemas.microsoft.com/office/drawing/2014/main" id="{1EA45515-ABBD-4279-B4FC-6ADF2DCA1017}"/>
               </a:ext>
             </a:extLst>
           </p:cNvPr>
@@ -2252,7 +2342,7 @@
           <p:cNvPr id="4" name="Date Placeholder 3">
             <a:extLst xmlns:a="http://schemas.openxmlformats.org/drawingml/2006/main">
               <a:ext uri="{FF2B5EF4-FFF2-40B4-BE49-F238E27FC236}">
-                <a16:creationId xmlns:a16="http://schemas.microsoft.com/office/drawing/2014/main" id="{D000BE9C-7777-4A33-8DC5-98F1B40059F9}"/>
+                <a16:creationId xmlns:a16="http://schemas.microsoft.com/office/drawing/2014/main" id="{DBC13F5B-C6C1-4660-9878-64C8108ADE0B}"/>
               </a:ext>
             </a:extLst>
           </p:cNvPr>
@@ -2279,7 +2369,7 @@
           <p:cNvPr id="5" name="Footer Placeholder 4">
             <a:extLst xmlns:a="http://schemas.openxmlformats.org/drawingml/2006/main">
               <a:ext uri="{FF2B5EF4-FFF2-40B4-BE49-F238E27FC236}">
-                <a16:creationId xmlns:a16="http://schemas.microsoft.com/office/drawing/2014/main" id="{BA970C61-E34F-43A9-9147-0F591A5937F3}"/>
+                <a16:creationId xmlns:a16="http://schemas.microsoft.com/office/drawing/2014/main" id="{3E452D01-8FC5-4522-AE29-624D650010A2}"/>
               </a:ext>
             </a:extLst>
           </p:cNvPr>
@@ -2302,7 +2392,7 @@
           <p:cNvPr id="6" name="Slide Number Placeholder 5">
             <a:extLst xmlns:a="http://schemas.openxmlformats.org/drawingml/2006/main">
               <a:ext uri="{FF2B5EF4-FFF2-40B4-BE49-F238E27FC236}">
-                <a16:creationId xmlns:a16="http://schemas.microsoft.com/office/drawing/2014/main" id="{E81643FC-71E5-4052-9208-F3E18A7195EA}"/>
+                <a16:creationId xmlns:a16="http://schemas.microsoft.com/office/drawing/2014/main" id="{3A013645-3658-4CC2-B649-B8F5A2780D53}"/>
               </a:ext>
             </a:extLst>
           </p:cNvPr>
@@ -2346,7 +2436,7 @@
           <p:cNvPr id="2" name="Title 1">
             <a:extLst xmlns:a="http://schemas.openxmlformats.org/drawingml/2006/main">
               <a:ext uri="{FF2B5EF4-FFF2-40B4-BE49-F238E27FC236}">
-                <a16:creationId xmlns:a16="http://schemas.microsoft.com/office/drawing/2014/main" id="{78FE84AA-D96D-4327-8C46-31101B2F6A30}"/>
+                <a16:creationId xmlns:a16="http://schemas.microsoft.com/office/drawing/2014/main" id="{39BBA17E-37E9-4555-B7A1-1ECA8E1511ED}"/>
               </a:ext>
             </a:extLst>
           </p:cNvPr>
@@ -2373,7 +2463,7 @@
           <p:cNvPr id="3" name="Vertical Text Placeholder 2">
             <a:extLst xmlns:a="http://schemas.openxmlformats.org/drawingml/2006/main">
               <a:ext uri="{FF2B5EF4-FFF2-40B4-BE49-F238E27FC236}">
-                <a16:creationId xmlns:a16="http://schemas.microsoft.com/office/drawing/2014/main" id="{9FE7CDF0-31CA-42CA-A7C6-C8E6AF78DBF9}"/>
+                <a16:creationId xmlns:a16="http://schemas.microsoft.com/office/drawing/2014/main" id="{2F1649E7-4950-4B3B-B189-6514A0464BC9}"/>
               </a:ext>
             </a:extLst>
           </p:cNvPr>
@@ -2435,7 +2525,7 @@
           <p:cNvPr id="4" name="Date Placeholder 3">
             <a:extLst xmlns:a="http://schemas.openxmlformats.org/drawingml/2006/main">
               <a:ext uri="{FF2B5EF4-FFF2-40B4-BE49-F238E27FC236}">
-                <a16:creationId xmlns:a16="http://schemas.microsoft.com/office/drawing/2014/main" id="{81E97CE8-B028-4CD1-B177-F01EA5DCFDE8}"/>
+                <a16:creationId xmlns:a16="http://schemas.microsoft.com/office/drawing/2014/main" id="{BBAD8CFD-AD27-4374-A13E-070AA5DA1C62}"/>
               </a:ext>
             </a:extLst>
           </p:cNvPr>
@@ -2462,7 +2552,7 @@
           <p:cNvPr id="5" name="Footer Placeholder 4">
             <a:extLst xmlns:a="http://schemas.openxmlformats.org/drawingml/2006/main">
               <a:ext uri="{FF2B5EF4-FFF2-40B4-BE49-F238E27FC236}">
-                <a16:creationId xmlns:a16="http://schemas.microsoft.com/office/drawing/2014/main" id="{628668A3-3D71-4CCE-9B6E-6C55DD70BB49}"/>
+                <a16:creationId xmlns:a16="http://schemas.microsoft.com/office/drawing/2014/main" id="{DB063900-F422-42A1-8640-8F19903D9816}"/>
               </a:ext>
             </a:extLst>
           </p:cNvPr>
@@ -2485,7 +2575,7 @@
           <p:cNvPr id="6" name="Slide Number Placeholder 5">
             <a:extLst xmlns:a="http://schemas.openxmlformats.org/drawingml/2006/main">
               <a:ext uri="{FF2B5EF4-FFF2-40B4-BE49-F238E27FC236}">
-                <a16:creationId xmlns:a16="http://schemas.microsoft.com/office/drawing/2014/main" id="{0D3EA11F-3FCC-47D1-8666-B5A2B94C2004}"/>
+                <a16:creationId xmlns:a16="http://schemas.microsoft.com/office/drawing/2014/main" id="{25E9454E-7FC2-4E5F-856C-0A60E8A48DAA}"/>
               </a:ext>
             </a:extLst>
           </p:cNvPr>
@@ -2529,7 +2619,7 @@
           <p:cNvPr id="2" name="Vertical Title 1">
             <a:extLst xmlns:a="http://schemas.openxmlformats.org/drawingml/2006/main">
               <a:ext uri="{FF2B5EF4-FFF2-40B4-BE49-F238E27FC236}">
-                <a16:creationId xmlns:a16="http://schemas.microsoft.com/office/drawing/2014/main" id="{159424E1-729C-4446-ABCC-38864FACDED6}"/>
+                <a16:creationId xmlns:a16="http://schemas.microsoft.com/office/drawing/2014/main" id="{8F18F474-D129-4176-9ED7-7D220E5A1A70}"/>
               </a:ext>
             </a:extLst>
           </p:cNvPr>
@@ -2561,7 +2651,7 @@
           <p:cNvPr id="3" name="Vertical Text Placeholder 2">
             <a:extLst xmlns:a="http://schemas.openxmlformats.org/drawingml/2006/main">
               <a:ext uri="{FF2B5EF4-FFF2-40B4-BE49-F238E27FC236}">
-                <a16:creationId xmlns:a16="http://schemas.microsoft.com/office/drawing/2014/main" id="{FE4CB8B5-8904-4D16-A299-6E352AE2691D}"/>
+                <a16:creationId xmlns:a16="http://schemas.microsoft.com/office/drawing/2014/main" id="{05B62FFD-3207-4F3E-96EE-10480F4C9BE1}"/>
               </a:ext>
             </a:extLst>
           </p:cNvPr>
@@ -2628,7 +2718,7 @@
           <p:cNvPr id="4" name="Date Placeholder 3">
             <a:extLst xmlns:a="http://schemas.openxmlformats.org/drawingml/2006/main">
               <a:ext uri="{FF2B5EF4-FFF2-40B4-BE49-F238E27FC236}">
-                <a16:creationId xmlns:a16="http://schemas.microsoft.com/office/drawing/2014/main" id="{927EC175-5DD1-4A73-B753-90A8964E5D62}"/>
+                <a16:creationId xmlns:a16="http://schemas.microsoft.com/office/drawing/2014/main" id="{5032E25F-0D01-4AA5-ACB7-6C836A26BD58}"/>
               </a:ext>
             </a:extLst>
           </p:cNvPr>
@@ -2655,7 +2745,7 @@
           <p:cNvPr id="5" name="Footer Placeholder 4">
             <a:extLst xmlns:a="http://schemas.openxmlformats.org/drawingml/2006/main">
               <a:ext uri="{FF2B5EF4-FFF2-40B4-BE49-F238E27FC236}">
-                <a16:creationId xmlns:a16="http://schemas.microsoft.com/office/drawing/2014/main" id="{4E0C53E6-FD08-4DE7-A994-823F50259D75}"/>
+                <a16:creationId xmlns:a16="http://schemas.microsoft.com/office/drawing/2014/main" id="{6B5F81D9-954B-42BD-B7FF-D4DB62FC0C80}"/>
               </a:ext>
             </a:extLst>
           </p:cNvPr>
@@ -2678,7 +2768,7 @@
           <p:cNvPr id="6" name="Slide Number Placeholder 5">
             <a:extLst xmlns:a="http://schemas.openxmlformats.org/drawingml/2006/main">
               <a:ext uri="{FF2B5EF4-FFF2-40B4-BE49-F238E27FC236}">
-                <a16:creationId xmlns:a16="http://schemas.microsoft.com/office/drawing/2014/main" id="{ADD7F9AF-41CB-48B9-A669-480A7FF2569D}"/>
+                <a16:creationId xmlns:a16="http://schemas.microsoft.com/office/drawing/2014/main" id="{B2648410-9ABA-4764-B3FD-241F3ECE63E6}"/>
               </a:ext>
             </a:extLst>
           </p:cNvPr>
@@ -2722,7 +2812,7 @@
           <p:cNvPr id="2" name="Title 1">
             <a:extLst xmlns:a="http://schemas.openxmlformats.org/drawingml/2006/main">
               <a:ext uri="{FF2B5EF4-FFF2-40B4-BE49-F238E27FC236}">
-                <a16:creationId xmlns:a16="http://schemas.microsoft.com/office/drawing/2014/main" id="{FBE49BB0-D1F3-4F27-82F7-6322F5AFEE4C}"/>
+                <a16:creationId xmlns:a16="http://schemas.microsoft.com/office/drawing/2014/main" id="{08F4E5A3-0693-4815-A30B-E6EE2B778662}"/>
               </a:ext>
             </a:extLst>
           </p:cNvPr>
@@ -2749,7 +2839,7 @@
           <p:cNvPr id="3" name="Content Placeholder 2">
             <a:extLst xmlns:a="http://schemas.openxmlformats.org/drawingml/2006/main">
               <a:ext uri="{FF2B5EF4-FFF2-40B4-BE49-F238E27FC236}">
-                <a16:creationId xmlns:a16="http://schemas.microsoft.com/office/drawing/2014/main" id="{5AEB3456-9E62-4C50-BF34-8E21E038A726}"/>
+                <a16:creationId xmlns:a16="http://schemas.microsoft.com/office/drawing/2014/main" id="{6E50ECBD-4747-4BDD-9BA1-93E9288720F5}"/>
               </a:ext>
             </a:extLst>
           </p:cNvPr>
@@ -2811,7 +2901,7 @@
           <p:cNvPr id="4" name="Date Placeholder 3">
             <a:extLst xmlns:a="http://schemas.openxmlformats.org/drawingml/2006/main">
               <a:ext uri="{FF2B5EF4-FFF2-40B4-BE49-F238E27FC236}">
-                <a16:creationId xmlns:a16="http://schemas.microsoft.com/office/drawing/2014/main" id="{D4A46E39-1267-42A8-888A-F1A13EABC269}"/>
+                <a16:creationId xmlns:a16="http://schemas.microsoft.com/office/drawing/2014/main" id="{661D5B2E-FBAE-4476-B60C-D298156AADEB}"/>
               </a:ext>
             </a:extLst>
           </p:cNvPr>
@@ -2838,7 +2928,7 @@
           <p:cNvPr id="5" name="Footer Placeholder 4">
             <a:extLst xmlns:a="http://schemas.openxmlformats.org/drawingml/2006/main">
               <a:ext uri="{FF2B5EF4-FFF2-40B4-BE49-F238E27FC236}">
-                <a16:creationId xmlns:a16="http://schemas.microsoft.com/office/drawing/2014/main" id="{F3234ADC-892D-4919-A5D0-310CADE434FA}"/>
+                <a16:creationId xmlns:a16="http://schemas.microsoft.com/office/drawing/2014/main" id="{482D42B0-4011-424D-B481-0DEAE7AF3091}"/>
               </a:ext>
             </a:extLst>
           </p:cNvPr>
@@ -2861,7 +2951,7 @@
           <p:cNvPr id="6" name="Slide Number Placeholder 5">
             <a:extLst xmlns:a="http://schemas.openxmlformats.org/drawingml/2006/main">
               <a:ext uri="{FF2B5EF4-FFF2-40B4-BE49-F238E27FC236}">
-                <a16:creationId xmlns:a16="http://schemas.microsoft.com/office/drawing/2014/main" id="{034C9DF1-5C89-445B-8764-8BFCBBC187C7}"/>
+                <a16:creationId xmlns:a16="http://schemas.microsoft.com/office/drawing/2014/main" id="{324359A9-0B41-457E-B28D-414B95C22878}"/>
               </a:ext>
             </a:extLst>
           </p:cNvPr>
@@ -2905,7 +2995,7 @@
           <p:cNvPr id="2" name="Title 1">
             <a:extLst xmlns:a="http://schemas.openxmlformats.org/drawingml/2006/main">
               <a:ext uri="{FF2B5EF4-FFF2-40B4-BE49-F238E27FC236}">
-                <a16:creationId xmlns:a16="http://schemas.microsoft.com/office/drawing/2014/main" id="{9A8DD96D-E225-443F-9B0C-E8958D52E739}"/>
+                <a16:creationId xmlns:a16="http://schemas.microsoft.com/office/drawing/2014/main" id="{4DF3CC46-4B4A-49FD-AD1A-C6355543D2F6}"/>
               </a:ext>
             </a:extLst>
           </p:cNvPr>
@@ -2942,7 +3032,7 @@
           <p:cNvPr id="3" name="Text Placeholder 2">
             <a:extLst xmlns:a="http://schemas.openxmlformats.org/drawingml/2006/main">
               <a:ext uri="{FF2B5EF4-FFF2-40B4-BE49-F238E27FC236}">
-                <a16:creationId xmlns:a16="http://schemas.microsoft.com/office/drawing/2014/main" id="{537BB3F6-24E3-464D-B645-E64098A157C9}"/>
+                <a16:creationId xmlns:a16="http://schemas.microsoft.com/office/drawing/2014/main" id="{C4A457B9-29BA-4955-9FC2-2334AA18BC36}"/>
               </a:ext>
             </a:extLst>
           </p:cNvPr>
@@ -3068,7 +3158,7 @@
           <p:cNvPr id="4" name="Date Placeholder 3">
             <a:extLst xmlns:a="http://schemas.openxmlformats.org/drawingml/2006/main">
               <a:ext uri="{FF2B5EF4-FFF2-40B4-BE49-F238E27FC236}">
-                <a16:creationId xmlns:a16="http://schemas.microsoft.com/office/drawing/2014/main" id="{9BD0D172-44C8-40A7-9256-F94E86CCA93D}"/>
+                <a16:creationId xmlns:a16="http://schemas.microsoft.com/office/drawing/2014/main" id="{71412DCD-E885-47B6-AF6E-3F52651B241C}"/>
               </a:ext>
             </a:extLst>
           </p:cNvPr>
@@ -3095,7 +3185,7 @@
           <p:cNvPr id="5" name="Footer Placeholder 4">
             <a:extLst xmlns:a="http://schemas.openxmlformats.org/drawingml/2006/main">
               <a:ext uri="{FF2B5EF4-FFF2-40B4-BE49-F238E27FC236}">
-                <a16:creationId xmlns:a16="http://schemas.microsoft.com/office/drawing/2014/main" id="{8590EB42-B30B-475B-BED8-1276DFF12CBB}"/>
+                <a16:creationId xmlns:a16="http://schemas.microsoft.com/office/drawing/2014/main" id="{94C54292-2C4C-4DF3-AD88-15CA06017ADE}"/>
               </a:ext>
             </a:extLst>
           </p:cNvPr>
@@ -3118,7 +3208,7 @@
           <p:cNvPr id="6" name="Slide Number Placeholder 5">
             <a:extLst xmlns:a="http://schemas.openxmlformats.org/drawingml/2006/main">
               <a:ext uri="{FF2B5EF4-FFF2-40B4-BE49-F238E27FC236}">
-                <a16:creationId xmlns:a16="http://schemas.microsoft.com/office/drawing/2014/main" id="{4A9E872B-EA92-453A-A9B5-7898E96FA1B1}"/>
+                <a16:creationId xmlns:a16="http://schemas.microsoft.com/office/drawing/2014/main" id="{BCAB1004-F89D-4D9F-A13E-ED4AF11779D4}"/>
               </a:ext>
             </a:extLst>
           </p:cNvPr>
@@ -3162,7 +3252,7 @@
           <p:cNvPr id="2" name="Title 1">
             <a:extLst xmlns:a="http://schemas.openxmlformats.org/drawingml/2006/main">
               <a:ext uri="{FF2B5EF4-FFF2-40B4-BE49-F238E27FC236}">
-                <a16:creationId xmlns:a16="http://schemas.microsoft.com/office/drawing/2014/main" id="{7CF29FA7-C2DE-4B02-968F-142ECE051E3E}"/>
+                <a16:creationId xmlns:a16="http://schemas.microsoft.com/office/drawing/2014/main" id="{805CB91A-A2A0-40B1-92DF-9E53CBA0DE9A}"/>
               </a:ext>
             </a:extLst>
           </p:cNvPr>
@@ -3189,7 +3279,7 @@
           <p:cNvPr id="3" name="Content Placeholder 2">
             <a:extLst xmlns:a="http://schemas.openxmlformats.org/drawingml/2006/main">
               <a:ext uri="{FF2B5EF4-FFF2-40B4-BE49-F238E27FC236}">
-                <a16:creationId xmlns:a16="http://schemas.microsoft.com/office/drawing/2014/main" id="{0F95068C-4D1D-4262-98A1-900A3B5B47FA}"/>
+                <a16:creationId xmlns:a16="http://schemas.microsoft.com/office/drawing/2014/main" id="{3171EF21-2B6F-4926-A81B-2B544F0E1173}"/>
               </a:ext>
             </a:extLst>
           </p:cNvPr>
@@ -3293,7 +3383,7 @@
           <p:cNvPr id="4" name="Content Placeholder 3">
             <a:extLst xmlns:a="http://schemas.openxmlformats.org/drawingml/2006/main">
               <a:ext uri="{FF2B5EF4-FFF2-40B4-BE49-F238E27FC236}">
-                <a16:creationId xmlns:a16="http://schemas.microsoft.com/office/drawing/2014/main" id="{375FC951-B695-4F00-9FE9-3A51C3FFF4E9}"/>
+                <a16:creationId xmlns:a16="http://schemas.microsoft.com/office/drawing/2014/main" id="{27778B9D-8B8B-45E2-B728-75F70AB26F1D}"/>
               </a:ext>
             </a:extLst>
           </p:cNvPr>
@@ -3397,7 +3487,7 @@
           <p:cNvPr id="5" name="Date Placeholder 4">
             <a:extLst xmlns:a="http://schemas.openxmlformats.org/drawingml/2006/main">
               <a:ext uri="{FF2B5EF4-FFF2-40B4-BE49-F238E27FC236}">
-                <a16:creationId xmlns:a16="http://schemas.microsoft.com/office/drawing/2014/main" id="{825B7B55-7343-49DE-9901-DF13413346C5}"/>
+                <a16:creationId xmlns:a16="http://schemas.microsoft.com/office/drawing/2014/main" id="{04D56B9F-047D-4DB0-A334-B2901F25F9F9}"/>
               </a:ext>
             </a:extLst>
           </p:cNvPr>
@@ -3424,7 +3514,7 @@
           <p:cNvPr id="6" name="Footer Placeholder 5">
             <a:extLst xmlns:a="http://schemas.openxmlformats.org/drawingml/2006/main">
               <a:ext uri="{FF2B5EF4-FFF2-40B4-BE49-F238E27FC236}">
-                <a16:creationId xmlns:a16="http://schemas.microsoft.com/office/drawing/2014/main" id="{8E608D6D-7590-4E91-BB4A-CFAEFCCCE8D7}"/>
+                <a16:creationId xmlns:a16="http://schemas.microsoft.com/office/drawing/2014/main" id="{1BF186AA-4873-4C45-B9C1-AF776391F747}"/>
               </a:ext>
             </a:extLst>
           </p:cNvPr>
@@ -3447,7 +3537,7 @@
           <p:cNvPr id="7" name="Slide Number Placeholder 6">
             <a:extLst xmlns:a="http://schemas.openxmlformats.org/drawingml/2006/main">
               <a:ext uri="{FF2B5EF4-FFF2-40B4-BE49-F238E27FC236}">
-                <a16:creationId xmlns:a16="http://schemas.microsoft.com/office/drawing/2014/main" id="{C5A9F54D-317F-4238-A52C-4F89900AD9D9}"/>
+                <a16:creationId xmlns:a16="http://schemas.microsoft.com/office/drawing/2014/main" id="{186FE694-021F-412D-96F2-FECED8513779}"/>
               </a:ext>
             </a:extLst>
           </p:cNvPr>
@@ -3491,7 +3581,7 @@
           <p:cNvPr id="2" name="Title 1">
             <a:extLst xmlns:a="http://schemas.openxmlformats.org/drawingml/2006/main">
               <a:ext uri="{FF2B5EF4-FFF2-40B4-BE49-F238E27FC236}">
-                <a16:creationId xmlns:a16="http://schemas.microsoft.com/office/drawing/2014/main" id="{C8EE2779-3EBA-41BA-86B6-B394E502DD83}"/>
+                <a16:creationId xmlns:a16="http://schemas.microsoft.com/office/drawing/2014/main" id="{6D6C65D8-FF96-4DF6-A5B0-A15226AE4EA9}"/>
               </a:ext>
             </a:extLst>
           </p:cNvPr>
@@ -3523,7 +3613,7 @@
           <p:cNvPr id="3" name="Text Placeholder 2">
             <a:extLst xmlns:a="http://schemas.openxmlformats.org/drawingml/2006/main">
               <a:ext uri="{FF2B5EF4-FFF2-40B4-BE49-F238E27FC236}">
-                <a16:creationId xmlns:a16="http://schemas.microsoft.com/office/drawing/2014/main" id="{7AA2CA47-97BF-4E1A-AA32-5F625A895EAF}"/>
+                <a16:creationId xmlns:a16="http://schemas.microsoft.com/office/drawing/2014/main" id="{A51DE4F1-1AC4-447E-86D0-A10DB54A0B12}"/>
               </a:ext>
             </a:extLst>
           </p:cNvPr>
@@ -3595,7 +3685,7 @@
           <p:cNvPr id="4" name="Content Placeholder 3">
             <a:extLst xmlns:a="http://schemas.openxmlformats.org/drawingml/2006/main">
               <a:ext uri="{FF2B5EF4-FFF2-40B4-BE49-F238E27FC236}">
-                <a16:creationId xmlns:a16="http://schemas.microsoft.com/office/drawing/2014/main" id="{19C07A90-60C0-4670-A58E-FC67EB8C7060}"/>
+                <a16:creationId xmlns:a16="http://schemas.microsoft.com/office/drawing/2014/main" id="{AA9D28A0-4EC9-416E-8BD3-40C388CFDF8E}"/>
               </a:ext>
             </a:extLst>
           </p:cNvPr>
@@ -3699,7 +3789,7 @@
           <p:cNvPr id="5" name="Text Placeholder 4">
             <a:extLst xmlns:a="http://schemas.openxmlformats.org/drawingml/2006/main">
               <a:ext uri="{FF2B5EF4-FFF2-40B4-BE49-F238E27FC236}">
-                <a16:creationId xmlns:a16="http://schemas.microsoft.com/office/drawing/2014/main" id="{164D6684-4B3B-405E-B692-977EBD89BAA5}"/>
+                <a16:creationId xmlns:a16="http://schemas.microsoft.com/office/drawing/2014/main" id="{3957FC37-C929-4CC2-816E-869D02BCE940}"/>
               </a:ext>
             </a:extLst>
           </p:cNvPr>
@@ -3771,7 +3861,7 @@
           <p:cNvPr id="6" name="Content Placeholder 5">
             <a:extLst xmlns:a="http://schemas.openxmlformats.org/drawingml/2006/main">
               <a:ext uri="{FF2B5EF4-FFF2-40B4-BE49-F238E27FC236}">
-                <a16:creationId xmlns:a16="http://schemas.microsoft.com/office/drawing/2014/main" id="{CA239364-90B9-4FDC-A0EB-6AC61697BDDF}"/>
+                <a16:creationId xmlns:a16="http://schemas.microsoft.com/office/drawing/2014/main" id="{9916A398-E869-4F5E-A1F9-C9A46BADB78F}"/>
               </a:ext>
             </a:extLst>
           </p:cNvPr>
@@ -3875,7 +3965,7 @@
           <p:cNvPr id="7" name="Date Placeholder 6">
             <a:extLst xmlns:a="http://schemas.openxmlformats.org/drawingml/2006/main">
               <a:ext uri="{FF2B5EF4-FFF2-40B4-BE49-F238E27FC236}">
-                <a16:creationId xmlns:a16="http://schemas.microsoft.com/office/drawing/2014/main" id="{F6E03D89-5892-4724-99AC-25CF7E77B55C}"/>
+                <a16:creationId xmlns:a16="http://schemas.microsoft.com/office/drawing/2014/main" id="{9AC7D0CC-C3B9-4CBD-AAAC-E1BE9495C807}"/>
               </a:ext>
             </a:extLst>
           </p:cNvPr>
@@ -3902,7 +3992,7 @@
           <p:cNvPr id="8" name="Footer Placeholder 7">
             <a:extLst xmlns:a="http://schemas.openxmlformats.org/drawingml/2006/main">
               <a:ext uri="{FF2B5EF4-FFF2-40B4-BE49-F238E27FC236}">
-                <a16:creationId xmlns:a16="http://schemas.microsoft.com/office/drawing/2014/main" id="{A38487DE-7E53-430A-B6AE-1FD16531449A}"/>
+                <a16:creationId xmlns:a16="http://schemas.microsoft.com/office/drawing/2014/main" id="{A8B7F2E5-1244-421C-95C3-CAE635C23763}"/>
               </a:ext>
             </a:extLst>
           </p:cNvPr>
@@ -3925,7 +4015,7 @@
           <p:cNvPr id="9" name="Slide Number Placeholder 8">
             <a:extLst xmlns:a="http://schemas.openxmlformats.org/drawingml/2006/main">
               <a:ext uri="{FF2B5EF4-FFF2-40B4-BE49-F238E27FC236}">
-                <a16:creationId xmlns:a16="http://schemas.microsoft.com/office/drawing/2014/main" id="{C9E544A9-D611-46B7-AE04-3778FF567343}"/>
+                <a16:creationId xmlns:a16="http://schemas.microsoft.com/office/drawing/2014/main" id="{9B0D2C2D-FEE3-4DA7-A8A6-D30E1D13A5F8}"/>
               </a:ext>
             </a:extLst>
           </p:cNvPr>
@@ -3969,7 +4059,7 @@
           <p:cNvPr id="2" name="Title 1">
             <a:extLst xmlns:a="http://schemas.openxmlformats.org/drawingml/2006/main">
               <a:ext uri="{FF2B5EF4-FFF2-40B4-BE49-F238E27FC236}">
-                <a16:creationId xmlns:a16="http://schemas.microsoft.com/office/drawing/2014/main" id="{87EBEF95-2DE2-45BA-B0BB-E9DA2063BA61}"/>
+                <a16:creationId xmlns:a16="http://schemas.microsoft.com/office/drawing/2014/main" id="{014607B4-6AB7-4C5E-8923-4F0DE11D1958}"/>
               </a:ext>
             </a:extLst>
           </p:cNvPr>
@@ -3996,7 +4086,7 @@
           <p:cNvPr id="3" name="Date Placeholder 2">
             <a:extLst xmlns:a="http://schemas.openxmlformats.org/drawingml/2006/main">
               <a:ext uri="{FF2B5EF4-FFF2-40B4-BE49-F238E27FC236}">
-                <a16:creationId xmlns:a16="http://schemas.microsoft.com/office/drawing/2014/main" id="{8B529450-10E4-46DB-BD00-51AD8311EA85}"/>
+                <a16:creationId xmlns:a16="http://schemas.microsoft.com/office/drawing/2014/main" id="{851F3CD9-FF7C-4C81-A6D0-B6E4EE91B7E9}"/>
               </a:ext>
             </a:extLst>
           </p:cNvPr>
@@ -4023,7 +4113,7 @@
           <p:cNvPr id="4" name="Footer Placeholder 3">
             <a:extLst xmlns:a="http://schemas.openxmlformats.org/drawingml/2006/main">
               <a:ext uri="{FF2B5EF4-FFF2-40B4-BE49-F238E27FC236}">
-                <a16:creationId xmlns:a16="http://schemas.microsoft.com/office/drawing/2014/main" id="{4904CB6D-F8AA-47D7-8D07-F36143463BBC}"/>
+                <a16:creationId xmlns:a16="http://schemas.microsoft.com/office/drawing/2014/main" id="{ECFECEEA-65DA-452B-A1FE-2A2ED2BE28CC}"/>
               </a:ext>
             </a:extLst>
           </p:cNvPr>
@@ -4046,7 +4136,7 @@
           <p:cNvPr id="5" name="Slide Number Placeholder 4">
             <a:extLst xmlns:a="http://schemas.openxmlformats.org/drawingml/2006/main">
               <a:ext uri="{FF2B5EF4-FFF2-40B4-BE49-F238E27FC236}">
-                <a16:creationId xmlns:a16="http://schemas.microsoft.com/office/drawing/2014/main" id="{AD72170A-1C2B-42CF-8858-BA758F0D0B57}"/>
+                <a16:creationId xmlns:a16="http://schemas.microsoft.com/office/drawing/2014/main" id="{88F7D9BB-56A2-4027-8454-8A4F6F4FCB98}"/>
               </a:ext>
             </a:extLst>
           </p:cNvPr>
@@ -4090,7 +4180,7 @@
           <p:cNvPr id="2" name="Date Placeholder 1">
             <a:extLst xmlns:a="http://schemas.openxmlformats.org/drawingml/2006/main">
               <a:ext uri="{FF2B5EF4-FFF2-40B4-BE49-F238E27FC236}">
-                <a16:creationId xmlns:a16="http://schemas.microsoft.com/office/drawing/2014/main" id="{D7CA4437-BE29-4CB7-83FE-BC0012F96B82}"/>
+                <a16:creationId xmlns:a16="http://schemas.microsoft.com/office/drawing/2014/main" id="{0B3F67EA-9E0C-41AE-8CDD-7DE2B777DDEC}"/>
               </a:ext>
             </a:extLst>
           </p:cNvPr>
@@ -4117,7 +4207,7 @@
           <p:cNvPr id="3" name="Footer Placeholder 2">
             <a:extLst xmlns:a="http://schemas.openxmlformats.org/drawingml/2006/main">
               <a:ext uri="{FF2B5EF4-FFF2-40B4-BE49-F238E27FC236}">
-                <a16:creationId xmlns:a16="http://schemas.microsoft.com/office/drawing/2014/main" id="{B6465E62-CC10-4D7D-BACE-9E69657D9B7A}"/>
+                <a16:creationId xmlns:a16="http://schemas.microsoft.com/office/drawing/2014/main" id="{E94A1832-7EDA-4B7F-B75A-57B6D0E7D272}"/>
               </a:ext>
             </a:extLst>
           </p:cNvPr>
@@ -4140,7 +4230,7 @@
           <p:cNvPr id="4" name="Slide Number Placeholder 3">
             <a:extLst xmlns:a="http://schemas.openxmlformats.org/drawingml/2006/main">
               <a:ext uri="{FF2B5EF4-FFF2-40B4-BE49-F238E27FC236}">
-                <a16:creationId xmlns:a16="http://schemas.microsoft.com/office/drawing/2014/main" id="{8B1D7D19-5751-4702-BCB5-DA23F50316BB}"/>
+                <a16:creationId xmlns:a16="http://schemas.microsoft.com/office/drawing/2014/main" id="{E451E714-41AB-4C96-9230-B3BD82899B4D}"/>
               </a:ext>
             </a:extLst>
           </p:cNvPr>
@@ -4184,7 +4274,7 @@
           <p:cNvPr id="2" name="Title 1">
             <a:extLst xmlns:a="http://schemas.openxmlformats.org/drawingml/2006/main">
               <a:ext uri="{FF2B5EF4-FFF2-40B4-BE49-F238E27FC236}">
-                <a16:creationId xmlns:a16="http://schemas.microsoft.com/office/drawing/2014/main" id="{4037EB12-5CA8-46BE-9919-7FEE98BC2E83}"/>
+                <a16:creationId xmlns:a16="http://schemas.microsoft.com/office/drawing/2014/main" id="{F9612801-4E90-455F-BA1E-FA05DC2B308E}"/>
               </a:ext>
             </a:extLst>
           </p:cNvPr>
@@ -4221,7 +4311,7 @@
           <p:cNvPr id="3" name="Content Placeholder 2">
             <a:extLst xmlns:a="http://schemas.openxmlformats.org/drawingml/2006/main">
               <a:ext uri="{FF2B5EF4-FFF2-40B4-BE49-F238E27FC236}">
-                <a16:creationId xmlns:a16="http://schemas.microsoft.com/office/drawing/2014/main" id="{6EC652FB-D0A8-459F-BE73-9300866ADF29}"/>
+                <a16:creationId xmlns:a16="http://schemas.microsoft.com/office/drawing/2014/main" id="{8EF222A5-DBC4-4789-8EE3-B98DD9462F39}"/>
               </a:ext>
             </a:extLst>
           </p:cNvPr>
@@ -4325,7 +4415,7 @@
           <p:cNvPr id="4" name="Text Placeholder 3">
             <a:extLst xmlns:a="http://schemas.openxmlformats.org/drawingml/2006/main">
               <a:ext uri="{FF2B5EF4-FFF2-40B4-BE49-F238E27FC236}">
-                <a16:creationId xmlns:a16="http://schemas.microsoft.com/office/drawing/2014/main" id="{109F0A54-086D-4077-AE59-6DAA30409C17}"/>
+                <a16:creationId xmlns:a16="http://schemas.microsoft.com/office/drawing/2014/main" id="{0480F63F-7C3E-411D-A8FD-ECB5B967AA99}"/>
               </a:ext>
             </a:extLst>
           </p:cNvPr>
@@ -4397,7 +4487,7 @@
           <p:cNvPr id="5" name="Date Placeholder 4">
             <a:extLst xmlns:a="http://schemas.openxmlformats.org/drawingml/2006/main">
               <a:ext uri="{FF2B5EF4-FFF2-40B4-BE49-F238E27FC236}">
-                <a16:creationId xmlns:a16="http://schemas.microsoft.com/office/drawing/2014/main" id="{C09DF5DD-9982-4008-94A1-58F5149FB13F}"/>
+                <a16:creationId xmlns:a16="http://schemas.microsoft.com/office/drawing/2014/main" id="{E9786EA4-AB47-4AB6-89B6-57668572229C}"/>
               </a:ext>
             </a:extLst>
           </p:cNvPr>
@@ -4424,7 +4514,7 @@
           <p:cNvPr id="6" name="Footer Placeholder 5">
             <a:extLst xmlns:a="http://schemas.openxmlformats.org/drawingml/2006/main">
               <a:ext uri="{FF2B5EF4-FFF2-40B4-BE49-F238E27FC236}">
-                <a16:creationId xmlns:a16="http://schemas.microsoft.com/office/drawing/2014/main" id="{35C71088-3F53-42A5-8CF6-864F594871A4}"/>
+                <a16:creationId xmlns:a16="http://schemas.microsoft.com/office/drawing/2014/main" id="{CBDB8DB5-86BE-4F26-A0C5-76CAC8F717B6}"/>
               </a:ext>
             </a:extLst>
           </p:cNvPr>
@@ -4447,7 +4537,7 @@
           <p:cNvPr id="7" name="Slide Number Placeholder 6">
             <a:extLst xmlns:a="http://schemas.openxmlformats.org/drawingml/2006/main">
               <a:ext uri="{FF2B5EF4-FFF2-40B4-BE49-F238E27FC236}">
-                <a16:creationId xmlns:a16="http://schemas.microsoft.com/office/drawing/2014/main" id="{40A9EBF1-520D-4B57-A773-5CA272BF64F3}"/>
+                <a16:creationId xmlns:a16="http://schemas.microsoft.com/office/drawing/2014/main" id="{9AA6F5E2-BA11-40A5-B16F-11EDF3FB10A4}"/>
               </a:ext>
             </a:extLst>
           </p:cNvPr>
@@ -4491,7 +4581,7 @@
           <p:cNvPr id="2" name="Title 1">
             <a:extLst xmlns:a="http://schemas.openxmlformats.org/drawingml/2006/main">
               <a:ext uri="{FF2B5EF4-FFF2-40B4-BE49-F238E27FC236}">
-                <a16:creationId xmlns:a16="http://schemas.microsoft.com/office/drawing/2014/main" id="{2EECE3D0-B336-43B6-B211-347723020BEC}"/>
+                <a16:creationId xmlns:a16="http://schemas.microsoft.com/office/drawing/2014/main" id="{9F07E05B-A2C3-4783-BE72-ABB89BD22CCB}"/>
               </a:ext>
             </a:extLst>
           </p:cNvPr>
@@ -4528,7 +4618,7 @@
           <p:cNvPr id="3" name="Picture Placeholder 2">
             <a:extLst xmlns:a="http://schemas.openxmlformats.org/drawingml/2006/main">
               <a:ext uri="{FF2B5EF4-FFF2-40B4-BE49-F238E27FC236}">
-                <a16:creationId xmlns:a16="http://schemas.microsoft.com/office/drawing/2014/main" id="{8857CF46-7ECC-46DD-AEDB-C2A46C418746}"/>
+                <a16:creationId xmlns:a16="http://schemas.microsoft.com/office/drawing/2014/main" id="{E64AAA03-F367-47CA-911B-5EF4F8401CD5}"/>
               </a:ext>
             </a:extLst>
           </p:cNvPr>
@@ -4593,7 +4683,7 @@
           <p:cNvPr id="4" name="Text Placeholder 3">
             <a:extLst xmlns:a="http://schemas.openxmlformats.org/drawingml/2006/main">
               <a:ext uri="{FF2B5EF4-FFF2-40B4-BE49-F238E27FC236}">
-                <a16:creationId xmlns:a16="http://schemas.microsoft.com/office/drawing/2014/main" id="{E41D9325-A6F7-4525-A21D-0CB7A31D7BF3}"/>
+                <a16:creationId xmlns:a16="http://schemas.microsoft.com/office/drawing/2014/main" id="{56720294-6032-44FD-A5DD-91E1D8414144}"/>
               </a:ext>
             </a:extLst>
           </p:cNvPr>
@@ -4665,7 +4755,7 @@
           <p:cNvPr id="5" name="Date Placeholder 4">
             <a:extLst xmlns:a="http://schemas.openxmlformats.org/drawingml/2006/main">
               <a:ext uri="{FF2B5EF4-FFF2-40B4-BE49-F238E27FC236}">
-                <a16:creationId xmlns:a16="http://schemas.microsoft.com/office/drawing/2014/main" id="{999BCD24-4981-46B6-9B9D-1CA430E64DF5}"/>
+                <a16:creationId xmlns:a16="http://schemas.microsoft.com/office/drawing/2014/main" id="{C2288689-CA15-4400-AF9F-97FFDA75DBBE}"/>
               </a:ext>
             </a:extLst>
           </p:cNvPr>
@@ -4692,7 +4782,7 @@
           <p:cNvPr id="6" name="Footer Placeholder 5">
             <a:extLst xmlns:a="http://schemas.openxmlformats.org/drawingml/2006/main">
               <a:ext uri="{FF2B5EF4-FFF2-40B4-BE49-F238E27FC236}">
-                <a16:creationId xmlns:a16="http://schemas.microsoft.com/office/drawing/2014/main" id="{FEC87063-9E2B-4777-B10D-137ED4ED17CD}"/>
+                <a16:creationId xmlns:a16="http://schemas.microsoft.com/office/drawing/2014/main" id="{1EB32595-656D-427E-99CC-55CE4E7506E7}"/>
               </a:ext>
             </a:extLst>
           </p:cNvPr>
@@ -4715,7 +4805,7 @@
           <p:cNvPr id="7" name="Slide Number Placeholder 6">
             <a:extLst xmlns:a="http://schemas.openxmlformats.org/drawingml/2006/main">
               <a:ext uri="{FF2B5EF4-FFF2-40B4-BE49-F238E27FC236}">
-                <a16:creationId xmlns:a16="http://schemas.microsoft.com/office/drawing/2014/main" id="{CA3D95A6-9B3C-4E0E-B6E6-4D347975DCA5}"/>
+                <a16:creationId xmlns:a16="http://schemas.microsoft.com/office/drawing/2014/main" id="{D73A834E-DAC9-48E5-99EA-F424A0C52947}"/>
               </a:ext>
             </a:extLst>
           </p:cNvPr>
@@ -4764,7 +4854,7 @@
           <p:cNvPr id="2" name="Title Placeholder 1">
             <a:extLst xmlns:a="http://schemas.openxmlformats.org/drawingml/2006/main">
               <a:ext uri="{FF2B5EF4-FFF2-40B4-BE49-F238E27FC236}">
-                <a16:creationId xmlns:a16="http://schemas.microsoft.com/office/drawing/2014/main" id="{87C4B10D-EBC2-4478-B74F-B21D5AD025E1}"/>
+                <a16:creationId xmlns:a16="http://schemas.microsoft.com/office/drawing/2014/main" id="{FBA682E7-EF3F-4F1F-9B85-22477FBFF985}"/>
               </a:ext>
             </a:extLst>
           </p:cNvPr>
@@ -4801,7 +4891,7 @@
           <p:cNvPr id="3" name="Text Placeholder 2">
             <a:extLst xmlns:a="http://schemas.openxmlformats.org/drawingml/2006/main">
               <a:ext uri="{FF2B5EF4-FFF2-40B4-BE49-F238E27FC236}">
-                <a16:creationId xmlns:a16="http://schemas.microsoft.com/office/drawing/2014/main" id="{7F48778E-F6E4-4472-9335-69BFA3D3CA19}"/>
+                <a16:creationId xmlns:a16="http://schemas.microsoft.com/office/drawing/2014/main" id="{51718A49-AB0B-492E-B787-C9AD01DAD7D1}"/>
               </a:ext>
             </a:extLst>
           </p:cNvPr>
@@ -4873,7 +4963,7 @@
           <p:cNvPr id="4" name="Date Placeholder 3">
             <a:extLst xmlns:a="http://schemas.openxmlformats.org/drawingml/2006/main">
               <a:ext uri="{FF2B5EF4-FFF2-40B4-BE49-F238E27FC236}">
-                <a16:creationId xmlns:a16="http://schemas.microsoft.com/office/drawing/2014/main" id="{F8AF8758-B26F-40C5-8BEC-24ADC337D638}"/>
+                <a16:creationId xmlns:a16="http://schemas.microsoft.com/office/drawing/2014/main" id="{10851313-D3EB-445B-AD3F-F7FB26F421E6}"/>
               </a:ext>
             </a:extLst>
           </p:cNvPr>
@@ -4919,7 +5009,7 @@
           <p:cNvPr id="5" name="Footer Placeholder 4">
             <a:extLst xmlns:a="http://schemas.openxmlformats.org/drawingml/2006/main">
               <a:ext uri="{FF2B5EF4-FFF2-40B4-BE49-F238E27FC236}">
-                <a16:creationId xmlns:a16="http://schemas.microsoft.com/office/drawing/2014/main" id="{E5D1E60C-B127-4504-91F1-3B350F3EC1C5}"/>
+                <a16:creationId xmlns:a16="http://schemas.microsoft.com/office/drawing/2014/main" id="{4C5CC808-BEEC-4698-918D-5A0787D43FE6}"/>
               </a:ext>
             </a:extLst>
           </p:cNvPr>
@@ -4961,7 +5051,7 @@
           <p:cNvPr id="6" name="Slide Number Placeholder 5">
             <a:extLst xmlns:a="http://schemas.openxmlformats.org/drawingml/2006/main">
               <a:ext uri="{FF2B5EF4-FFF2-40B4-BE49-F238E27FC236}">
-                <a16:creationId xmlns:a16="http://schemas.microsoft.com/office/drawing/2014/main" id="{C6C26992-1C98-41D3-9C69-B745C2B1747D}"/>
+                <a16:creationId xmlns:a16="http://schemas.microsoft.com/office/drawing/2014/main" id="{E0059A60-DF7B-449A-9025-64A8FD544A33}"/>
               </a:ext>
             </a:extLst>
           </p:cNvPr>
@@ -5006,17 +5096,17 @@
   </p:cSld>
   <p:clrMap bg1="lt1" tx1="dk1" bg2="lt2" tx2="dk2" accent1="accent1" accent2="accent2" accent3="accent3" accent4="accent4" accent5="accent5" accent6="accent6" hlink="hlink" folHlink="folHlink"/>
   <p:sldLayoutIdLst>
-    <p:sldLayoutId xmlns:r="http://schemas.openxmlformats.org/officeDocument/2006/relationships" id="2147483649" r:id="R737a9d0ae9a340d4"/>
-    <p:sldLayoutId xmlns:r="http://schemas.openxmlformats.org/officeDocument/2006/relationships" id="2147483650" r:id="R5d477f3ac1324322"/>
-    <p:sldLayoutId xmlns:r="http://schemas.openxmlformats.org/officeDocument/2006/relationships" id="2147483651" r:id="R5396a4647eee450e"/>
-    <p:sldLayoutId xmlns:r="http://schemas.openxmlformats.org/officeDocument/2006/relationships" id="2147483652" r:id="R586375f64c044463"/>
-    <p:sldLayoutId xmlns:r="http://schemas.openxmlformats.org/officeDocument/2006/relationships" id="2147483653" r:id="R4779feb48a08437c"/>
-    <p:sldLayoutId xmlns:r="http://schemas.openxmlformats.org/officeDocument/2006/relationships" id="2147483654" r:id="R711ea8129a874314"/>
-    <p:sldLayoutId xmlns:r="http://schemas.openxmlformats.org/officeDocument/2006/relationships" id="2147483655" r:id="R416e9e44371b4084"/>
-    <p:sldLayoutId xmlns:r="http://schemas.openxmlformats.org/officeDocument/2006/relationships" id="2147483656" r:id="R5c735c96d084467c"/>
-    <p:sldLayoutId xmlns:r="http://schemas.openxmlformats.org/officeDocument/2006/relationships" id="2147483657" r:id="Rf79af5bb10de4a9a"/>
-    <p:sldLayoutId xmlns:r="http://schemas.openxmlformats.org/officeDocument/2006/relationships" id="2147483658" r:id="R6ffb305ad3ba418b"/>
-    <p:sldLayoutId xmlns:r="http://schemas.openxmlformats.org/officeDocument/2006/relationships" id="2147483659" r:id="R916d6d4b2aa24923"/>
+    <p:sldLayoutId xmlns:r="http://schemas.openxmlformats.org/officeDocument/2006/relationships" id="2147483649" r:id="R2d21439c05994744"/>
+    <p:sldLayoutId xmlns:r="http://schemas.openxmlformats.org/officeDocument/2006/relationships" id="2147483650" r:id="R6b1e32b93d9b4a9a"/>
+    <p:sldLayoutId xmlns:r="http://schemas.openxmlformats.org/officeDocument/2006/relationships" id="2147483651" r:id="R0670efe7c5384c80"/>
+    <p:sldLayoutId xmlns:r="http://schemas.openxmlformats.org/officeDocument/2006/relationships" id="2147483652" r:id="R73aa5b1e82f24f33"/>
+    <p:sldLayoutId xmlns:r="http://schemas.openxmlformats.org/officeDocument/2006/relationships" id="2147483653" r:id="Rc998432617f74b44"/>
+    <p:sldLayoutId xmlns:r="http://schemas.openxmlformats.org/officeDocument/2006/relationships" id="2147483654" r:id="R23162117ef664724"/>
+    <p:sldLayoutId xmlns:r="http://schemas.openxmlformats.org/officeDocument/2006/relationships" id="2147483655" r:id="R2e7c481d17424b9a"/>
+    <p:sldLayoutId xmlns:r="http://schemas.openxmlformats.org/officeDocument/2006/relationships" id="2147483656" r:id="R028c58a473314f76"/>
+    <p:sldLayoutId xmlns:r="http://schemas.openxmlformats.org/officeDocument/2006/relationships" id="2147483657" r:id="Rd26b4a2fbf1c407e"/>
+    <p:sldLayoutId xmlns:r="http://schemas.openxmlformats.org/officeDocument/2006/relationships" id="2147483658" r:id="R1f4fe2a1ed074aea"/>
+    <p:sldLayoutId xmlns:r="http://schemas.openxmlformats.org/officeDocument/2006/relationships" id="2147483659" r:id="R62c49c8e159f4d96"/>
   </p:sldLayoutIdLst>
   <p:txStyles>
     <p:titleStyle>
@@ -5569,7 +5659,7 @@
           <p:cNvPr id="2" name="Rectangle 1">
             <a:extLst xmlns:a="http://schemas.openxmlformats.org/drawingml/2006/main">
               <a:ext uri="{FF2B5EF4-FFF2-40B4-BE49-F238E27FC236}">
-                <a16:creationId xmlns:a16="http://schemas.microsoft.com/office/drawing/2014/main" id="{CD422983-3445-41CB-8945-592E8763BCC8}"/>
+                <a16:creationId xmlns:a16="http://schemas.microsoft.com/office/drawing/2014/main" id="{9F5173B1-35ED-4CE3-B8E7-06D96353DC75}"/>
               </a:ext>
             </a:extLst>
           </p:cNvPr>
@@ -5624,7 +5714,7 @@
           <p:cNvPr id="3" name="TextBox 2">
             <a:extLst xmlns:a="http://schemas.openxmlformats.org/drawingml/2006/main">
               <a:ext uri="{FF2B5EF4-FFF2-40B4-BE49-F238E27FC236}">
-                <a16:creationId xmlns:a16="http://schemas.microsoft.com/office/drawing/2014/main" id="{B22EB14B-D6F1-42CB-B8F0-70FAB4BBE040}"/>
+                <a16:creationId xmlns:a16="http://schemas.microsoft.com/office/drawing/2014/main" id="{AFCBD310-8DF1-47B0-95EF-6D302628AF36}"/>
               </a:ext>
             </a:extLst>
           </p:cNvPr>
@@ -5671,7 +5761,7 @@
           <p:cNvPr id="4" name="TextBox 3">
             <a:extLst xmlns:a="http://schemas.openxmlformats.org/drawingml/2006/main">
               <a:ext uri="{FF2B5EF4-FFF2-40B4-BE49-F238E27FC236}">
-                <a16:creationId xmlns:a16="http://schemas.microsoft.com/office/drawing/2014/main" id="{A438A6BB-9319-48F6-A752-0463FB0D247E}"/>
+                <a16:creationId xmlns:a16="http://schemas.microsoft.com/office/drawing/2014/main" id="{03CCFBE3-4E79-44D0-B6DD-D632AF41F643}"/>
               </a:ext>
             </a:extLst>
           </p:cNvPr>
@@ -5719,7 +5809,7 @@
           <p:cNvPr id="5" name="TextBox 4">
             <a:extLst xmlns:a="http://schemas.openxmlformats.org/drawingml/2006/main">
               <a:ext uri="{FF2B5EF4-FFF2-40B4-BE49-F238E27FC236}">
-                <a16:creationId xmlns:a16="http://schemas.microsoft.com/office/drawing/2014/main" id="{B596C4BE-66E2-4297-9834-1E90FD7FA635}"/>
+                <a16:creationId xmlns:a16="http://schemas.microsoft.com/office/drawing/2014/main" id="{1E713096-A3FC-443A-A583-C0F0899A75F3}"/>
               </a:ext>
             </a:extLst>
           </p:cNvPr>
@@ -5766,7 +5856,7 @@
           <p:cNvPr id="6" name="Rectangle 5">
             <a:extLst xmlns:a="http://schemas.openxmlformats.org/drawingml/2006/main">
               <a:ext uri="{FF2B5EF4-FFF2-40B4-BE49-F238E27FC236}">
-                <a16:creationId xmlns:a16="http://schemas.microsoft.com/office/drawing/2014/main" id="{CDA2F02F-C54D-4E6F-9B7F-0457289463AE}"/>
+                <a16:creationId xmlns:a16="http://schemas.microsoft.com/office/drawing/2014/main" id="{AC90BEEF-80EB-4955-A622-77CCBD47C655}"/>
               </a:ext>
             </a:extLst>
           </p:cNvPr>
@@ -5821,7 +5911,7 @@
           <p:cNvPr id="7" name="TextBox 6">
             <a:extLst xmlns:a="http://schemas.openxmlformats.org/drawingml/2006/main">
               <a:ext uri="{FF2B5EF4-FFF2-40B4-BE49-F238E27FC236}">
-                <a16:creationId xmlns:a16="http://schemas.microsoft.com/office/drawing/2014/main" id="{473FB9EB-7CDB-41D5-8626-C9802A880A72}"/>
+                <a16:creationId xmlns:a16="http://schemas.microsoft.com/office/drawing/2014/main" id="{E6CD5A7A-B80B-491C-A121-023515377FF7}"/>
               </a:ext>
             </a:extLst>
           </p:cNvPr>
@@ -5868,7 +5958,7 @@
           <p:cNvPr id="8" name="TextBox 7">
             <a:extLst xmlns:a="http://schemas.openxmlformats.org/drawingml/2006/main">
               <a:ext uri="{FF2B5EF4-FFF2-40B4-BE49-F238E27FC236}">
-                <a16:creationId xmlns:a16="http://schemas.microsoft.com/office/drawing/2014/main" id="{09E1DEA8-D399-4462-89CF-6E2CBF65C222}"/>
+                <a16:creationId xmlns:a16="http://schemas.microsoft.com/office/drawing/2014/main" id="{9E3C452A-D34A-4D9E-A6DD-945FD261092E}"/>
               </a:ext>
             </a:extLst>
           </p:cNvPr>
@@ -5905,7 +5995,7 @@
                 <a:ea typeface="Aptos"/>
                 <a:cs typeface="Aptos"/>
               </a:rPr>
-              <a:t>2026.07.28-32</a:t>
+              <a:t>2026.07.29-35</a:t>
             </a:r>
           </a:p>
         </p:txBody>
@@ -5915,7 +6005,7 @@
           <p:cNvPr id="9" name="TextBox 8">
             <a:extLst xmlns:a="http://schemas.openxmlformats.org/drawingml/2006/main">
               <a:ext uri="{FF2B5EF4-FFF2-40B4-BE49-F238E27FC236}">
-                <a16:creationId xmlns:a16="http://schemas.microsoft.com/office/drawing/2014/main" id="{9334CAAC-63A3-4254-929B-A2F651CBD795}"/>
+                <a16:creationId xmlns:a16="http://schemas.microsoft.com/office/drawing/2014/main" id="{24B6AB67-4209-462F-AAB5-9A4E4B64ABE2}"/>
               </a:ext>
             </a:extLst>
           </p:cNvPr>
@@ -5952,7 +6042,7 @@
                 <a:ea typeface="Aptos"/>
                 <a:cs typeface="Aptos"/>
               </a:rPr>
-              <a:t>Päivitetty 2026-07-28</a:t>
+              <a:t>Päivitetty 2026-07-29</a:t>
             </a:r>
             <a:br>
               <a:rPr sz="1700" b="0">
@@ -5983,7 +6073,7 @@
           <p:cNvPr id="10" name="TextBox 9">
             <a:extLst xmlns:a="http://schemas.openxmlformats.org/drawingml/2006/main">
               <a:ext uri="{FF2B5EF4-FFF2-40B4-BE49-F238E27FC236}">
-                <a16:creationId xmlns:a16="http://schemas.microsoft.com/office/drawing/2014/main" id="{2F86E4BA-D22A-4F72-8545-8D0DB4AC7C54}"/>
+                <a16:creationId xmlns:a16="http://schemas.microsoft.com/office/drawing/2014/main" id="{9EBCBB60-928B-40FB-B845-6ED7B9CCD8B9}"/>
               </a:ext>
             </a:extLst>
           </p:cNvPr>
@@ -6030,7 +6120,7 @@
           <p:cNvPr id="11" name="TextBox 10">
             <a:extLst xmlns:a="http://schemas.openxmlformats.org/drawingml/2006/main">
               <a:ext uri="{FF2B5EF4-FFF2-40B4-BE49-F238E27FC236}">
-                <a16:creationId xmlns:a16="http://schemas.microsoft.com/office/drawing/2014/main" id="{DDBC70A9-0F99-427C-9575-6519951ADB66}"/>
+                <a16:creationId xmlns:a16="http://schemas.microsoft.com/office/drawing/2014/main" id="{926EB3D2-71B9-437C-86F8-C1641D307892}"/>
               </a:ext>
             </a:extLst>
           </p:cNvPr>
@@ -6077,7 +6167,7 @@
           <p:cNvPr id="12" name="TextBox 11">
             <a:extLst xmlns:a="http://schemas.openxmlformats.org/drawingml/2006/main">
               <a:ext uri="{FF2B5EF4-FFF2-40B4-BE49-F238E27FC236}">
-                <a16:creationId xmlns:a16="http://schemas.microsoft.com/office/drawing/2014/main" id="{96B465B8-A008-4C53-9CD9-9C078D7C1B21}"/>
+                <a16:creationId xmlns:a16="http://schemas.microsoft.com/office/drawing/2014/main" id="{FA1D4563-0115-4F8A-B4CA-FD4F753E9EF2}"/>
               </a:ext>
             </a:extLst>
           </p:cNvPr>
@@ -6122,7 +6212,7 @@
     </p:spTree>
     <p:extLst>
       <p:ext uri="{BB962C8B-B14F-4D97-AF65-F5344CB8AC3E}">
-        <p14:creationId xmlns:p14="http://schemas.microsoft.com/office/powerpoint/2010/main" val="2030681636"/>
+        <p14:creationId xmlns:p14="http://schemas.microsoft.com/office/powerpoint/2010/main" val="1054279085"/>
       </p:ext>
     </p:extLst>
   </p:cSld>
@@ -6146,7 +6236,7 @@
           <p:cNvPr id="2" name="TextBox 1">
             <a:extLst xmlns:a="http://schemas.openxmlformats.org/drawingml/2006/main">
               <a:ext uri="{FF2B5EF4-FFF2-40B4-BE49-F238E27FC236}">
-                <a16:creationId xmlns:a16="http://schemas.microsoft.com/office/drawing/2014/main" id="{59BAFEE9-05A7-419B-88FB-9430BEBFF67D}"/>
+                <a16:creationId xmlns:a16="http://schemas.microsoft.com/office/drawing/2014/main" id="{886F23F1-524B-494F-8003-51E6F85C5E4C}"/>
               </a:ext>
             </a:extLst>
           </p:cNvPr>
@@ -6193,7 +6283,7 @@
           <p:cNvPr id="3" name="TextBox 2">
             <a:extLst xmlns:a="http://schemas.openxmlformats.org/drawingml/2006/main">
               <a:ext uri="{FF2B5EF4-FFF2-40B4-BE49-F238E27FC236}">
-                <a16:creationId xmlns:a16="http://schemas.microsoft.com/office/drawing/2014/main" id="{2F4A0DD1-7964-4B90-8739-DCA846A6EA24}"/>
+                <a16:creationId xmlns:a16="http://schemas.microsoft.com/office/drawing/2014/main" id="{F5AED33D-6D25-4FE3-B79E-B0416756E7E9}"/>
               </a:ext>
             </a:extLst>
           </p:cNvPr>
@@ -6240,7 +6330,7 @@
           <p:cNvPr id="4" name="Rectangle 3">
             <a:extLst xmlns:a="http://schemas.openxmlformats.org/drawingml/2006/main">
               <a:ext uri="{FF2B5EF4-FFF2-40B4-BE49-F238E27FC236}">
-                <a16:creationId xmlns:a16="http://schemas.microsoft.com/office/drawing/2014/main" id="{44BE3F97-9371-45F6-9AB8-6CAA6618DE3F}"/>
+                <a16:creationId xmlns:a16="http://schemas.microsoft.com/office/drawing/2014/main" id="{21587885-9551-40CD-9EB4-C5923BB8FF2E}"/>
               </a:ext>
             </a:extLst>
           </p:cNvPr>
@@ -6295,7 +6385,7 @@
           <p:cNvPr id="5" name="Rectangle 4">
             <a:extLst xmlns:a="http://schemas.openxmlformats.org/drawingml/2006/main">
               <a:ext uri="{FF2B5EF4-FFF2-40B4-BE49-F238E27FC236}">
-                <a16:creationId xmlns:a16="http://schemas.microsoft.com/office/drawing/2014/main" id="{CF8146F9-7C1E-4437-AB60-AB2D234241FE}"/>
+                <a16:creationId xmlns:a16="http://schemas.microsoft.com/office/drawing/2014/main" id="{5A194990-D7CF-46E3-B647-8F8E3BD45D1D}"/>
               </a:ext>
             </a:extLst>
           </p:cNvPr>
@@ -6350,7 +6440,7 @@
           <p:cNvPr id="6" name="TextBox 5">
             <a:extLst xmlns:a="http://schemas.openxmlformats.org/drawingml/2006/main">
               <a:ext uri="{FF2B5EF4-FFF2-40B4-BE49-F238E27FC236}">
-                <a16:creationId xmlns:a16="http://schemas.microsoft.com/office/drawing/2014/main" id="{36A49C0F-BE5F-4912-96F3-3C6186493E45}"/>
+                <a16:creationId xmlns:a16="http://schemas.microsoft.com/office/drawing/2014/main" id="{3CFB6869-1519-4237-AFD7-D9202E8C856B}"/>
               </a:ext>
             </a:extLst>
           </p:cNvPr>
@@ -6387,7 +6477,7 @@
                 <a:ea typeface="Aptos"/>
                 <a:cs typeface="Aptos"/>
               </a:rPr>
-              <a:t>Julkinen riippumaton evidenssikooste · 2026.07.28-32 · 2026-07-28 · Lähteet: EPO; Saksa — viralliset tuomiot; WIPO</a:t>
+              <a:t>Julkinen riippumaton evidenssikooste · 2026.07.29-35 · 2026-07-29 · Lähteet: EPO; Saksa — viralliset tuomiot; WIPO</a:t>
             </a:r>
           </a:p>
         </p:txBody>
@@ -6397,7 +6487,7 @@
           <p:cNvPr id="7" name="TextBox 6">
             <a:extLst xmlns:a="http://schemas.openxmlformats.org/drawingml/2006/main">
               <a:ext uri="{FF2B5EF4-FFF2-40B4-BE49-F238E27FC236}">
-                <a16:creationId xmlns:a16="http://schemas.microsoft.com/office/drawing/2014/main" id="{C4FE2C20-B391-4679-8EE8-4FFAA36CF26A}"/>
+                <a16:creationId xmlns:a16="http://schemas.microsoft.com/office/drawing/2014/main" id="{82079BE8-C998-4489-A684-C513B1FE590F}"/>
               </a:ext>
             </a:extLst>
           </p:cNvPr>
@@ -6444,7 +6534,7 @@
           <p:cNvPr id="8" name="TextBox 7">
             <a:extLst xmlns:a="http://schemas.openxmlformats.org/drawingml/2006/main">
               <a:ext uri="{FF2B5EF4-FFF2-40B4-BE49-F238E27FC236}">
-                <a16:creationId xmlns:a16="http://schemas.microsoft.com/office/drawing/2014/main" id="{99E2180C-AAB1-495E-83DE-B14539702DB6}"/>
+                <a16:creationId xmlns:a16="http://schemas.microsoft.com/office/drawing/2014/main" id="{62C1E0BA-2308-4CE7-AA11-E7CB460D3A04}"/>
               </a:ext>
             </a:extLst>
           </p:cNvPr>
@@ -6491,7 +6581,7 @@
           <p:cNvPr id="9" name="TextBox 8">
             <a:extLst xmlns:a="http://schemas.openxmlformats.org/drawingml/2006/main">
               <a:ext uri="{FF2B5EF4-FFF2-40B4-BE49-F238E27FC236}">
-                <a16:creationId xmlns:a16="http://schemas.microsoft.com/office/drawing/2014/main" id="{77983CE0-FC8B-4D9B-BBD0-C3C1C34B4016}"/>
+                <a16:creationId xmlns:a16="http://schemas.microsoft.com/office/drawing/2014/main" id="{F88A0B29-6AD8-4704-A02A-FC74C1794DE3}"/>
               </a:ext>
             </a:extLst>
           </p:cNvPr>
@@ -6588,7 +6678,7 @@
           <p:cNvPr id="10" name="Rounded Rectangle 9">
             <a:extLst xmlns:a="http://schemas.openxmlformats.org/drawingml/2006/main">
               <a:ext uri="{FF2B5EF4-FFF2-40B4-BE49-F238E27FC236}">
-                <a16:creationId xmlns:a16="http://schemas.microsoft.com/office/drawing/2014/main" id="{0C91E148-0D54-400C-872F-F3502EF8CF1E}"/>
+                <a16:creationId xmlns:a16="http://schemas.microsoft.com/office/drawing/2014/main" id="{A54CE897-9485-46F5-8ED7-CA877245546D}"/>
               </a:ext>
             </a:extLst>
           </p:cNvPr>
@@ -6645,7 +6735,7 @@
           <p:cNvPr id="11" name="TextBox 10">
             <a:extLst xmlns:a="http://schemas.openxmlformats.org/drawingml/2006/main">
               <a:ext uri="{FF2B5EF4-FFF2-40B4-BE49-F238E27FC236}">
-                <a16:creationId xmlns:a16="http://schemas.microsoft.com/office/drawing/2014/main" id="{63445EC1-2DE1-4109-ADD3-5EC758FD5D32}"/>
+                <a16:creationId xmlns:a16="http://schemas.microsoft.com/office/drawing/2014/main" id="{81C5ACD8-90D9-40CD-AB76-99F795EA19D0}"/>
               </a:ext>
             </a:extLst>
           </p:cNvPr>
@@ -6692,7 +6782,7 @@
           <p:cNvPr id="12" name="TextBox 11">
             <a:extLst xmlns:a="http://schemas.openxmlformats.org/drawingml/2006/main">
               <a:ext uri="{FF2B5EF4-FFF2-40B4-BE49-F238E27FC236}">
-                <a16:creationId xmlns:a16="http://schemas.microsoft.com/office/drawing/2014/main" id="{49EA8B7B-0346-4594-B714-62F450A292F0}"/>
+                <a16:creationId xmlns:a16="http://schemas.microsoft.com/office/drawing/2014/main" id="{0927616A-F26B-4EA8-B589-D8F6681B9E8E}"/>
               </a:ext>
             </a:extLst>
           </p:cNvPr>
@@ -6737,7 +6827,7 @@
     </p:spTree>
     <p:extLst>
       <p:ext uri="{BB962C8B-B14F-4D97-AF65-F5344CB8AC3E}">
-        <p14:creationId xmlns:p14="http://schemas.microsoft.com/office/powerpoint/2010/main" val="2119654007"/>
+        <p14:creationId xmlns:p14="http://schemas.microsoft.com/office/powerpoint/2010/main" val="1802320111"/>
       </p:ext>
     </p:extLst>
   </p:cSld>
@@ -6761,7 +6851,7 @@
           <p:cNvPr id="2" name="TextBox 1">
             <a:extLst xmlns:a="http://schemas.openxmlformats.org/drawingml/2006/main">
               <a:ext uri="{FF2B5EF4-FFF2-40B4-BE49-F238E27FC236}">
-                <a16:creationId xmlns:a16="http://schemas.microsoft.com/office/drawing/2014/main" id="{2F6C83A0-B79F-435C-8B6D-9104A9CAA2CF}"/>
+                <a16:creationId xmlns:a16="http://schemas.microsoft.com/office/drawing/2014/main" id="{B5A59BF5-ED28-48CD-A6E8-2E5E9B9A9FD2}"/>
               </a:ext>
             </a:extLst>
           </p:cNvPr>
@@ -6808,7 +6898,7 @@
           <p:cNvPr id="3" name="TextBox 2">
             <a:extLst xmlns:a="http://schemas.openxmlformats.org/drawingml/2006/main">
               <a:ext uri="{FF2B5EF4-FFF2-40B4-BE49-F238E27FC236}">
-                <a16:creationId xmlns:a16="http://schemas.microsoft.com/office/drawing/2014/main" id="{D0A8E6BF-C65A-4B2D-8C91-675A0EEC8FEE}"/>
+                <a16:creationId xmlns:a16="http://schemas.microsoft.com/office/drawing/2014/main" id="{DBB39FB9-63C4-4FA7-90B5-CCFAD2E807CA}"/>
               </a:ext>
             </a:extLst>
           </p:cNvPr>
@@ -6855,7 +6945,7 @@
           <p:cNvPr id="4" name="Rectangle 3">
             <a:extLst xmlns:a="http://schemas.openxmlformats.org/drawingml/2006/main">
               <a:ext uri="{FF2B5EF4-FFF2-40B4-BE49-F238E27FC236}">
-                <a16:creationId xmlns:a16="http://schemas.microsoft.com/office/drawing/2014/main" id="{09C5CAF8-3DDD-4160-AEBF-5FF2E79B17C5}"/>
+                <a16:creationId xmlns:a16="http://schemas.microsoft.com/office/drawing/2014/main" id="{6662FD2D-0144-472F-A25C-A2F04292AB35}"/>
               </a:ext>
             </a:extLst>
           </p:cNvPr>
@@ -6910,7 +7000,7 @@
           <p:cNvPr id="5" name="Rectangle 4">
             <a:extLst xmlns:a="http://schemas.openxmlformats.org/drawingml/2006/main">
               <a:ext uri="{FF2B5EF4-FFF2-40B4-BE49-F238E27FC236}">
-                <a16:creationId xmlns:a16="http://schemas.microsoft.com/office/drawing/2014/main" id="{495ED8A4-A74C-4F07-92D6-4842A43120B7}"/>
+                <a16:creationId xmlns:a16="http://schemas.microsoft.com/office/drawing/2014/main" id="{BBC1F6BB-24D1-4619-AC3F-3B521C9E7E7E}"/>
               </a:ext>
             </a:extLst>
           </p:cNvPr>
@@ -6965,7 +7055,7 @@
           <p:cNvPr id="6" name="TextBox 5">
             <a:extLst xmlns:a="http://schemas.openxmlformats.org/drawingml/2006/main">
               <a:ext uri="{FF2B5EF4-FFF2-40B4-BE49-F238E27FC236}">
-                <a16:creationId xmlns:a16="http://schemas.microsoft.com/office/drawing/2014/main" id="{F59768ED-AC3D-411B-88A2-C863F1189774}"/>
+                <a16:creationId xmlns:a16="http://schemas.microsoft.com/office/drawing/2014/main" id="{3C3643DC-CB13-4CB1-83AD-FBA494DE83E3}"/>
               </a:ext>
             </a:extLst>
           </p:cNvPr>
@@ -7002,7 +7092,7 @@
                 <a:ea typeface="Aptos"/>
                 <a:cs typeface="Aptos"/>
               </a:rPr>
-              <a:t>Julkinen riippumaton evidenssikooste · 2026.07.28-32 · 2026-07-28 · Lähteet: EPO Register; EP3032975B2; 8 Ni 18/24 (EP); 7 O 3341/24</a:t>
+              <a:t>Julkinen riippumaton evidenssikooste · 2026.07.29-35 · 2026-07-29 · Lähteet: EPO Register; EP3032975B2; 8 Ni 18/24 (EP); 7 O 3341/24</a:t>
             </a:r>
           </a:p>
         </p:txBody>
@@ -7012,7 +7102,7 @@
           <p:cNvPr id="7" name="TextBox 6">
             <a:extLst xmlns:a="http://schemas.openxmlformats.org/drawingml/2006/main">
               <a:ext uri="{FF2B5EF4-FFF2-40B4-BE49-F238E27FC236}">
-                <a16:creationId xmlns:a16="http://schemas.microsoft.com/office/drawing/2014/main" id="{6512FA9A-8869-4570-A91E-9380808112BB}"/>
+                <a16:creationId xmlns:a16="http://schemas.microsoft.com/office/drawing/2014/main" id="{B2DC471B-565E-4A6C-A2D2-024134805D2E}"/>
               </a:ext>
             </a:extLst>
           </p:cNvPr>
@@ -7059,7 +7149,7 @@
           <p:cNvPr id="8" name="Rounded Rectangle 7">
             <a:extLst xmlns:a="http://schemas.openxmlformats.org/drawingml/2006/main">
               <a:ext uri="{FF2B5EF4-FFF2-40B4-BE49-F238E27FC236}">
-                <a16:creationId xmlns:a16="http://schemas.microsoft.com/office/drawing/2014/main" id="{109562AE-A7D0-4A06-B671-503DE79978D4}"/>
+                <a16:creationId xmlns:a16="http://schemas.microsoft.com/office/drawing/2014/main" id="{D6597D18-8029-4FAD-8984-D377B71C70FD}"/>
               </a:ext>
             </a:extLst>
           </p:cNvPr>
@@ -7116,7 +7206,7 @@
           <p:cNvPr id="9" name="TextBox 8">
             <a:extLst xmlns:a="http://schemas.openxmlformats.org/drawingml/2006/main">
               <a:ext uri="{FF2B5EF4-FFF2-40B4-BE49-F238E27FC236}">
-                <a16:creationId xmlns:a16="http://schemas.microsoft.com/office/drawing/2014/main" id="{612AB426-C3DC-4152-B239-7432621AB141}"/>
+                <a16:creationId xmlns:a16="http://schemas.microsoft.com/office/drawing/2014/main" id="{8379B0F3-1F8F-42BD-92D9-DAC3B8CF25AF}"/>
               </a:ext>
             </a:extLst>
           </p:cNvPr>
@@ -7163,7 +7253,7 @@
           <p:cNvPr id="10" name="TextBox 9">
             <a:extLst xmlns:a="http://schemas.openxmlformats.org/drawingml/2006/main">
               <a:ext uri="{FF2B5EF4-FFF2-40B4-BE49-F238E27FC236}">
-                <a16:creationId xmlns:a16="http://schemas.microsoft.com/office/drawing/2014/main" id="{4AEAFACF-18C8-4C7A-986A-10532D61B62E}"/>
+                <a16:creationId xmlns:a16="http://schemas.microsoft.com/office/drawing/2014/main" id="{AE890163-0E36-4494-929B-A296D3A6C033}"/>
               </a:ext>
             </a:extLst>
           </p:cNvPr>
@@ -7210,7 +7300,7 @@
           <p:cNvPr id="11" name="Rounded Rectangle 10">
             <a:extLst xmlns:a="http://schemas.openxmlformats.org/drawingml/2006/main">
               <a:ext uri="{FF2B5EF4-FFF2-40B4-BE49-F238E27FC236}">
-                <a16:creationId xmlns:a16="http://schemas.microsoft.com/office/drawing/2014/main" id="{44451AF1-A836-4707-BCFD-67117D29DA0C}"/>
+                <a16:creationId xmlns:a16="http://schemas.microsoft.com/office/drawing/2014/main" id="{0F548C65-9163-4F01-AB47-B0DB369132AB}"/>
               </a:ext>
             </a:extLst>
           </p:cNvPr>
@@ -7267,7 +7357,7 @@
           <p:cNvPr id="12" name="TextBox 11">
             <a:extLst xmlns:a="http://schemas.openxmlformats.org/drawingml/2006/main">
               <a:ext uri="{FF2B5EF4-FFF2-40B4-BE49-F238E27FC236}">
-                <a16:creationId xmlns:a16="http://schemas.microsoft.com/office/drawing/2014/main" id="{20F89819-7211-40D5-8E85-08A03A0B4280}"/>
+                <a16:creationId xmlns:a16="http://schemas.microsoft.com/office/drawing/2014/main" id="{BBDE1F84-EB76-4B70-AB9D-17C214548B2A}"/>
               </a:ext>
             </a:extLst>
           </p:cNvPr>
@@ -7314,7 +7404,7 @@
           <p:cNvPr id="13" name="TextBox 12">
             <a:extLst xmlns:a="http://schemas.openxmlformats.org/drawingml/2006/main">
               <a:ext uri="{FF2B5EF4-FFF2-40B4-BE49-F238E27FC236}">
-                <a16:creationId xmlns:a16="http://schemas.microsoft.com/office/drawing/2014/main" id="{62846530-9AEE-45CF-877F-E1349FCFBCC8}"/>
+                <a16:creationId xmlns:a16="http://schemas.microsoft.com/office/drawing/2014/main" id="{F5B2AE6D-4451-4E1E-B972-0F0BBDC94C8E}"/>
               </a:ext>
             </a:extLst>
           </p:cNvPr>
@@ -7361,7 +7451,7 @@
           <p:cNvPr id="14" name="Rounded Rectangle 13">
             <a:extLst xmlns:a="http://schemas.openxmlformats.org/drawingml/2006/main">
               <a:ext uri="{FF2B5EF4-FFF2-40B4-BE49-F238E27FC236}">
-                <a16:creationId xmlns:a16="http://schemas.microsoft.com/office/drawing/2014/main" id="{467DA162-52D1-4762-AAD0-F839DE9697D0}"/>
+                <a16:creationId xmlns:a16="http://schemas.microsoft.com/office/drawing/2014/main" id="{F2270BA6-DAD2-4DE2-ABB7-2803CE77E116}"/>
               </a:ext>
             </a:extLst>
           </p:cNvPr>
@@ -7418,7 +7508,7 @@
           <p:cNvPr id="15" name="TextBox 14">
             <a:extLst xmlns:a="http://schemas.openxmlformats.org/drawingml/2006/main">
               <a:ext uri="{FF2B5EF4-FFF2-40B4-BE49-F238E27FC236}">
-                <a16:creationId xmlns:a16="http://schemas.microsoft.com/office/drawing/2014/main" id="{6C1F0100-2FFE-4E75-ABEB-661B982F8208}"/>
+                <a16:creationId xmlns:a16="http://schemas.microsoft.com/office/drawing/2014/main" id="{85E07061-22ED-44EE-B4C9-13AA41C7F5FA}"/>
               </a:ext>
             </a:extLst>
           </p:cNvPr>
@@ -7465,7 +7555,7 @@
           <p:cNvPr id="16" name="TextBox 15">
             <a:extLst xmlns:a="http://schemas.openxmlformats.org/drawingml/2006/main">
               <a:ext uri="{FF2B5EF4-FFF2-40B4-BE49-F238E27FC236}">
-                <a16:creationId xmlns:a16="http://schemas.microsoft.com/office/drawing/2014/main" id="{C633AA6D-E671-4646-9699-72C342DEBBCC}"/>
+                <a16:creationId xmlns:a16="http://schemas.microsoft.com/office/drawing/2014/main" id="{683BF430-6DAC-49B0-843B-7E694B7E01B3}"/>
               </a:ext>
             </a:extLst>
           </p:cNvPr>
@@ -7512,7 +7602,7 @@
           <p:cNvPr id="17" name="TextBox 16">
             <a:extLst xmlns:a="http://schemas.openxmlformats.org/drawingml/2006/main">
               <a:ext uri="{FF2B5EF4-FFF2-40B4-BE49-F238E27FC236}">
-                <a16:creationId xmlns:a16="http://schemas.microsoft.com/office/drawing/2014/main" id="{9E994285-5011-4819-A4F4-07973BD73FE2}"/>
+                <a16:creationId xmlns:a16="http://schemas.microsoft.com/office/drawing/2014/main" id="{C2A2426E-EB43-4A6A-B261-1E6EC98104A1}"/>
               </a:ext>
             </a:extLst>
           </p:cNvPr>
@@ -7559,7 +7649,7 @@
           <p:cNvPr id="18" name="Rounded Rectangle 17">
             <a:extLst xmlns:a="http://schemas.openxmlformats.org/drawingml/2006/main">
               <a:ext uri="{FF2B5EF4-FFF2-40B4-BE49-F238E27FC236}">
-                <a16:creationId xmlns:a16="http://schemas.microsoft.com/office/drawing/2014/main" id="{4BA70374-DCC5-4012-8064-6C819A0D9305}"/>
+                <a16:creationId xmlns:a16="http://schemas.microsoft.com/office/drawing/2014/main" id="{54A0F9AF-4D62-4473-96DA-56D292548857}"/>
               </a:ext>
             </a:extLst>
           </p:cNvPr>
@@ -7616,7 +7706,7 @@
           <p:cNvPr id="19" name="TextBox 18">
             <a:extLst xmlns:a="http://schemas.openxmlformats.org/drawingml/2006/main">
               <a:ext uri="{FF2B5EF4-FFF2-40B4-BE49-F238E27FC236}">
-                <a16:creationId xmlns:a16="http://schemas.microsoft.com/office/drawing/2014/main" id="{086030F5-842F-4416-9478-CAB95F3B96EF}"/>
+                <a16:creationId xmlns:a16="http://schemas.microsoft.com/office/drawing/2014/main" id="{B4BCBFF2-C62C-42BD-A60A-6C4BB9CB9E70}"/>
               </a:ext>
             </a:extLst>
           </p:cNvPr>
@@ -7663,7 +7753,7 @@
           <p:cNvPr id="20" name="TextBox 19">
             <a:extLst xmlns:a="http://schemas.openxmlformats.org/drawingml/2006/main">
               <a:ext uri="{FF2B5EF4-FFF2-40B4-BE49-F238E27FC236}">
-                <a16:creationId xmlns:a16="http://schemas.microsoft.com/office/drawing/2014/main" id="{8CF2BBF0-1EC2-4E26-88DF-24CEC41D24EE}"/>
+                <a16:creationId xmlns:a16="http://schemas.microsoft.com/office/drawing/2014/main" id="{184936CC-37EA-4027-B950-C6104BC0C6C4}"/>
               </a:ext>
             </a:extLst>
           </p:cNvPr>
@@ -7708,7 +7798,7 @@
     </p:spTree>
     <p:extLst>
       <p:ext uri="{BB962C8B-B14F-4D97-AF65-F5344CB8AC3E}">
-        <p14:creationId xmlns:p14="http://schemas.microsoft.com/office/powerpoint/2010/main" val="875648614"/>
+        <p14:creationId xmlns:p14="http://schemas.microsoft.com/office/powerpoint/2010/main" val="236704439"/>
       </p:ext>
     </p:extLst>
   </p:cSld>
@@ -7732,7 +7822,7 @@
           <p:cNvPr id="2" name="TextBox 1">
             <a:extLst xmlns:a="http://schemas.openxmlformats.org/drawingml/2006/main">
               <a:ext uri="{FF2B5EF4-FFF2-40B4-BE49-F238E27FC236}">
-                <a16:creationId xmlns:a16="http://schemas.microsoft.com/office/drawing/2014/main" id="{238D0577-EA02-4118-8D70-435CAF927F5F}"/>
+                <a16:creationId xmlns:a16="http://schemas.microsoft.com/office/drawing/2014/main" id="{FD3BDEB7-5D9C-4BB4-9BD4-C57919FE93EC}"/>
               </a:ext>
             </a:extLst>
           </p:cNvPr>
@@ -7779,7 +7869,7 @@
           <p:cNvPr id="3" name="TextBox 2">
             <a:extLst xmlns:a="http://schemas.openxmlformats.org/drawingml/2006/main">
               <a:ext uri="{FF2B5EF4-FFF2-40B4-BE49-F238E27FC236}">
-                <a16:creationId xmlns:a16="http://schemas.microsoft.com/office/drawing/2014/main" id="{98E239CA-A5D5-4C67-A4D3-946C8C6BD2CE}"/>
+                <a16:creationId xmlns:a16="http://schemas.microsoft.com/office/drawing/2014/main" id="{DCC3C838-74CF-4954-9E52-7E43B6BC65FE}"/>
               </a:ext>
             </a:extLst>
           </p:cNvPr>
@@ -7826,7 +7916,7 @@
           <p:cNvPr id="4" name="Rectangle 3">
             <a:extLst xmlns:a="http://schemas.openxmlformats.org/drawingml/2006/main">
               <a:ext uri="{FF2B5EF4-FFF2-40B4-BE49-F238E27FC236}">
-                <a16:creationId xmlns:a16="http://schemas.microsoft.com/office/drawing/2014/main" id="{C5ACB92F-4C88-4B4A-BF05-2094D8E0B796}"/>
+                <a16:creationId xmlns:a16="http://schemas.microsoft.com/office/drawing/2014/main" id="{7FC9C2D0-1529-4DB6-86A3-DA5AA40B63D9}"/>
               </a:ext>
             </a:extLst>
           </p:cNvPr>
@@ -7881,7 +7971,7 @@
           <p:cNvPr id="5" name="Rectangle 4">
             <a:extLst xmlns:a="http://schemas.openxmlformats.org/drawingml/2006/main">
               <a:ext uri="{FF2B5EF4-FFF2-40B4-BE49-F238E27FC236}">
-                <a16:creationId xmlns:a16="http://schemas.microsoft.com/office/drawing/2014/main" id="{AA2EFFF2-D912-40A3-9E8B-DE20522CAC59}"/>
+                <a16:creationId xmlns:a16="http://schemas.microsoft.com/office/drawing/2014/main" id="{89FBA4FC-9222-462E-913A-B0D582920BC4}"/>
               </a:ext>
             </a:extLst>
           </p:cNvPr>
@@ -7936,7 +8026,7 @@
           <p:cNvPr id="6" name="TextBox 5">
             <a:extLst xmlns:a="http://schemas.openxmlformats.org/drawingml/2006/main">
               <a:ext uri="{FF2B5EF4-FFF2-40B4-BE49-F238E27FC236}">
-                <a16:creationId xmlns:a16="http://schemas.microsoft.com/office/drawing/2014/main" id="{0ACAB3F9-1857-4B58-806D-1AFFCE7C5EC1}"/>
+                <a16:creationId xmlns:a16="http://schemas.microsoft.com/office/drawing/2014/main" id="{A5851057-F863-4678-A615-7474CA747E0F}"/>
               </a:ext>
             </a:extLst>
           </p:cNvPr>
@@ -7973,7 +8063,7 @@
                 <a:ea typeface="Aptos"/>
                 <a:cs typeface="Aptos"/>
               </a:rPr>
-              <a:t>Julkinen riippumaton evidenssikooste · 2026.07.28-32 · 2026-07-28 · Lähteet: World Bank; Statistics Canada; Health Canada; NZ Ministry of Health; Sejm; FHM; FTC; ADM</a:t>
+              <a:t>Julkinen riippumaton evidenssikooste · 2026.07.29-35 · 2026-07-29 · Lähteet: World Bank; Statistics Canada; Health Canada; NZ Ministry of Health; Sejm; FHM; FTC; ADM</a:t>
             </a:r>
           </a:p>
         </p:txBody>
@@ -7983,7 +8073,7 @@
           <p:cNvPr id="7" name="TextBox 6">
             <a:extLst xmlns:a="http://schemas.openxmlformats.org/drawingml/2006/main">
               <a:ext uri="{FF2B5EF4-FFF2-40B4-BE49-F238E27FC236}">
-                <a16:creationId xmlns:a16="http://schemas.microsoft.com/office/drawing/2014/main" id="{5A74AD3F-965E-44A7-BCFE-80953288DE8A}"/>
+                <a16:creationId xmlns:a16="http://schemas.microsoft.com/office/drawing/2014/main" id="{81C58041-5E71-4258-88F8-335BE498B9BE}"/>
               </a:ext>
             </a:extLst>
           </p:cNvPr>
@@ -8030,7 +8120,7 @@
           <p:cNvPr id="8" name="Rounded Rectangle 7">
             <a:extLst xmlns:a="http://schemas.openxmlformats.org/drawingml/2006/main">
               <a:ext uri="{FF2B5EF4-FFF2-40B4-BE49-F238E27FC236}">
-                <a16:creationId xmlns:a16="http://schemas.microsoft.com/office/drawing/2014/main" id="{D026A756-BCD6-47EF-9C6C-F56B0854E2CF}"/>
+                <a16:creationId xmlns:a16="http://schemas.microsoft.com/office/drawing/2014/main" id="{383AF0B9-C172-4BF9-8282-19EA60BA1328}"/>
               </a:ext>
             </a:extLst>
           </p:cNvPr>
@@ -8087,7 +8177,7 @@
           <p:cNvPr id="9" name="TextBox 8">
             <a:extLst xmlns:a="http://schemas.openxmlformats.org/drawingml/2006/main">
               <a:ext uri="{FF2B5EF4-FFF2-40B4-BE49-F238E27FC236}">
-                <a16:creationId xmlns:a16="http://schemas.microsoft.com/office/drawing/2014/main" id="{686D918A-EE13-4849-B91B-276D4B33D674}"/>
+                <a16:creationId xmlns:a16="http://schemas.microsoft.com/office/drawing/2014/main" id="{2C149969-28B6-4B05-A137-3640C00D7DC8}"/>
               </a:ext>
             </a:extLst>
           </p:cNvPr>
@@ -8134,7 +8224,7 @@
           <p:cNvPr id="10" name="TextBox 9">
             <a:extLst xmlns:a="http://schemas.openxmlformats.org/drawingml/2006/main">
               <a:ext uri="{FF2B5EF4-FFF2-40B4-BE49-F238E27FC236}">
-                <a16:creationId xmlns:a16="http://schemas.microsoft.com/office/drawing/2014/main" id="{6C2EA1C1-627E-4611-A7C3-D16758C3DBB7}"/>
+                <a16:creationId xmlns:a16="http://schemas.microsoft.com/office/drawing/2014/main" id="{94246259-5C9F-4DF7-9BE0-CF816D9AC044}"/>
               </a:ext>
             </a:extLst>
           </p:cNvPr>
@@ -8181,7 +8271,7 @@
           <p:cNvPr id="11" name="Rounded Rectangle 10">
             <a:extLst xmlns:a="http://schemas.openxmlformats.org/drawingml/2006/main">
               <a:ext uri="{FF2B5EF4-FFF2-40B4-BE49-F238E27FC236}">
-                <a16:creationId xmlns:a16="http://schemas.microsoft.com/office/drawing/2014/main" id="{161B8EA4-9E7F-4D21-B84B-3A49EA79AF82}"/>
+                <a16:creationId xmlns:a16="http://schemas.microsoft.com/office/drawing/2014/main" id="{9D3A4BA0-0FBD-4CAE-B8F3-7B4FCFA1741D}"/>
               </a:ext>
             </a:extLst>
           </p:cNvPr>
@@ -8238,7 +8328,7 @@
           <p:cNvPr id="12" name="TextBox 11">
             <a:extLst xmlns:a="http://schemas.openxmlformats.org/drawingml/2006/main">
               <a:ext uri="{FF2B5EF4-FFF2-40B4-BE49-F238E27FC236}">
-                <a16:creationId xmlns:a16="http://schemas.microsoft.com/office/drawing/2014/main" id="{DE1D846D-A8D6-4F00-B507-F4A2A81ACA5F}"/>
+                <a16:creationId xmlns:a16="http://schemas.microsoft.com/office/drawing/2014/main" id="{96A9C6FC-A750-4142-BC22-1B8E72EF42C4}"/>
               </a:ext>
             </a:extLst>
           </p:cNvPr>
@@ -8285,7 +8375,7 @@
           <p:cNvPr id="13" name="TextBox 12">
             <a:extLst xmlns:a="http://schemas.openxmlformats.org/drawingml/2006/main">
               <a:ext uri="{FF2B5EF4-FFF2-40B4-BE49-F238E27FC236}">
-                <a16:creationId xmlns:a16="http://schemas.microsoft.com/office/drawing/2014/main" id="{7F73CB5B-F465-47D6-A9E4-263B4E7093D9}"/>
+                <a16:creationId xmlns:a16="http://schemas.microsoft.com/office/drawing/2014/main" id="{AFF0D141-9943-43B0-81E4-FA9CD174931A}"/>
               </a:ext>
             </a:extLst>
           </p:cNvPr>
@@ -8332,7 +8422,7 @@
           <p:cNvPr id="14" name="Rounded Rectangle 13">
             <a:extLst xmlns:a="http://schemas.openxmlformats.org/drawingml/2006/main">
               <a:ext uri="{FF2B5EF4-FFF2-40B4-BE49-F238E27FC236}">
-                <a16:creationId xmlns:a16="http://schemas.microsoft.com/office/drawing/2014/main" id="{DD98C8ED-A305-43D5-9E27-9B1DD35D9D1E}"/>
+                <a16:creationId xmlns:a16="http://schemas.microsoft.com/office/drawing/2014/main" id="{4A944B50-F58A-4782-9AB4-398914837B4E}"/>
               </a:ext>
             </a:extLst>
           </p:cNvPr>
@@ -8389,7 +8479,7 @@
           <p:cNvPr id="15" name="TextBox 14">
             <a:extLst xmlns:a="http://schemas.openxmlformats.org/drawingml/2006/main">
               <a:ext uri="{FF2B5EF4-FFF2-40B4-BE49-F238E27FC236}">
-                <a16:creationId xmlns:a16="http://schemas.microsoft.com/office/drawing/2014/main" id="{039E23F5-4582-4D58-A785-0A755E281AF5}"/>
+                <a16:creationId xmlns:a16="http://schemas.microsoft.com/office/drawing/2014/main" id="{C2A11BC2-F50B-48C4-9EF7-DC3BC8B5CFE6}"/>
               </a:ext>
             </a:extLst>
           </p:cNvPr>
@@ -8436,7 +8526,7 @@
           <p:cNvPr id="16" name="TextBox 15">
             <a:extLst xmlns:a="http://schemas.openxmlformats.org/drawingml/2006/main">
               <a:ext uri="{FF2B5EF4-FFF2-40B4-BE49-F238E27FC236}">
-                <a16:creationId xmlns:a16="http://schemas.microsoft.com/office/drawing/2014/main" id="{7C3E63BD-6316-44BA-B980-D7CEEE09ACE6}"/>
+                <a16:creationId xmlns:a16="http://schemas.microsoft.com/office/drawing/2014/main" id="{8E06951D-7A1D-4C70-8C4E-713DA8D2EB07}"/>
               </a:ext>
             </a:extLst>
           </p:cNvPr>
@@ -8483,7 +8573,7 @@
           <p:cNvPr id="17" name="TextBox 16">
             <a:extLst xmlns:a="http://schemas.openxmlformats.org/drawingml/2006/main">
               <a:ext uri="{FF2B5EF4-FFF2-40B4-BE49-F238E27FC236}">
-                <a16:creationId xmlns:a16="http://schemas.microsoft.com/office/drawing/2014/main" id="{18AB89C5-3859-47F2-A14A-6B7A22E9DC46}"/>
+                <a16:creationId xmlns:a16="http://schemas.microsoft.com/office/drawing/2014/main" id="{1256BFD3-07D0-4E02-A102-AD1B554B5D03}"/>
               </a:ext>
             </a:extLst>
           </p:cNvPr>
@@ -8495,7 +8585,7 @@
         <p:spPr>
           <a:xfrm xmlns:a="http://schemas.openxmlformats.org/drawingml/2006/main">
             <a:off x="566928" y="3529584"/>
-            <a:ext cx="10927080" cy="835152"/>
+            <a:ext cx="10927080" cy="2740152"/>
           </a:xfrm>
           <a:prstGeom xmlns:a="http://schemas.openxmlformats.org/drawingml/2006/main" prst="rect">
             <a:avLst/>
@@ -8504,7 +8594,7 @@
         </p:spPr>
         <p:txBody>
           <a:bodyPr xmlns:a="http://schemas.openxmlformats.org/drawingml/2006/main" wrap="square" lIns="36576" tIns="36576" rIns="36576" bIns="36576" anchor="t">
-            <a:spAutoFit/>
+            <a:normAutofit fontScale="100000"/>
           </a:bodyPr>
           <a:lstStyle xmlns:a="http://schemas.openxmlformats.org/drawingml/2006/main"/>
           <a:p xmlns:a="http://schemas.openxmlformats.org/drawingml/2006/main">
@@ -8512,7 +8602,7 @@
               <a:buNone/>
             </a:pPr>
             <a:r>
-              <a:rPr sz="2500" b="1">
+              <a:rPr sz="1050" b="1">
                 <a:solidFill>
                   <a:srgbClr val="071A2B"/>
                 </a:solidFill>
@@ -8520,7 +8610,7 @@
                 <a:ea typeface="Aptos"/>
                 <a:cs typeface="Aptos"/>
               </a:rPr>
-              <a:t>Uusi-Seelanti läpäisee 7/10: D5 hylätty, D8 ja D10 avoinna. Ei hyväksytty; donor-portti 0/3.</a:t>
+              <a:t>Uusi-Seelanti 7/10: D5 hylätty, D8/D10 avoinna; donor 0/3. Viranomaisdelta 29.7.: Saksa pyysi rajauksen; mahdollisen maksun määräpäivä on 2026-08-11, eikä maksua ole hyväksytty. Ranska antoi tulliluokitus-, raja-arvo- ja kg-metadataa; reitti on vain tulliproxy. Tanska/Luxemburg: ei myyntidataa. Euromonitorin ehdollinen maksullinen Saksa-ote ei ole hyväksytty eikä aktivoitu; 0/6, EI PISTEYTETTY.</a:t>
             </a:r>
           </a:p>
         </p:txBody>
@@ -8530,7 +8620,7 @@
           <p:cNvPr id="18" name="Rounded Rectangle 17">
             <a:extLst xmlns:a="http://schemas.openxmlformats.org/drawingml/2006/main">
               <a:ext uri="{FF2B5EF4-FFF2-40B4-BE49-F238E27FC236}">
-                <a16:creationId xmlns:a16="http://schemas.microsoft.com/office/drawing/2014/main" id="{CE31993F-56ED-4B8C-B393-31AA76ABB262}"/>
+                <a16:creationId xmlns:a16="http://schemas.microsoft.com/office/drawing/2014/main" id="{E8EA3CAC-974B-45F2-95BD-2FAF311A9F3A}"/>
               </a:ext>
             </a:extLst>
           </p:cNvPr>
@@ -8587,7 +8677,7 @@
           <p:cNvPr id="19" name="TextBox 18">
             <a:extLst xmlns:a="http://schemas.openxmlformats.org/drawingml/2006/main">
               <a:ext uri="{FF2B5EF4-FFF2-40B4-BE49-F238E27FC236}">
-                <a16:creationId xmlns:a16="http://schemas.microsoft.com/office/drawing/2014/main" id="{C8CD95C1-6A5E-4B0A-9AF3-6F564FE5957A}"/>
+                <a16:creationId xmlns:a16="http://schemas.microsoft.com/office/drawing/2014/main" id="{1F72D13F-2355-49EA-B30A-4F94557641A0}"/>
               </a:ext>
             </a:extLst>
           </p:cNvPr>
@@ -8634,7 +8724,7 @@
           <p:cNvPr id="20" name="TextBox 19">
             <a:extLst xmlns:a="http://schemas.openxmlformats.org/drawingml/2006/main">
               <a:ext uri="{FF2B5EF4-FFF2-40B4-BE49-F238E27FC236}">
-                <a16:creationId xmlns:a16="http://schemas.microsoft.com/office/drawing/2014/main" id="{B95A1256-C26B-4DE7-A2DE-E2D40CD13FF8}"/>
+                <a16:creationId xmlns:a16="http://schemas.microsoft.com/office/drawing/2014/main" id="{A7D331E5-879A-4BD1-A79C-2CDD5569D6D6}"/>
               </a:ext>
             </a:extLst>
           </p:cNvPr>
@@ -8679,7 +8769,7 @@
     </p:spTree>
     <p:extLst>
       <p:ext uri="{BB962C8B-B14F-4D97-AF65-F5344CB8AC3E}">
-        <p14:creationId xmlns:p14="http://schemas.microsoft.com/office/powerpoint/2010/main" val="1161443614"/>
+        <p14:creationId xmlns:p14="http://schemas.microsoft.com/office/powerpoint/2010/main" val="2025723706"/>
       </p:ext>
     </p:extLst>
   </p:cSld>
@@ -8703,7 +8793,7 @@
           <p:cNvPr id="2" name="TextBox 1">
             <a:extLst xmlns:a="http://schemas.openxmlformats.org/drawingml/2006/main">
               <a:ext uri="{FF2B5EF4-FFF2-40B4-BE49-F238E27FC236}">
-                <a16:creationId xmlns:a16="http://schemas.microsoft.com/office/drawing/2014/main" id="{3B5293F4-9E80-4D7B-894C-19CC0D4689F3}"/>
+                <a16:creationId xmlns:a16="http://schemas.microsoft.com/office/drawing/2014/main" id="{BB5C2288-42C8-475C-846F-C32DF2EB01C9}"/>
               </a:ext>
             </a:extLst>
           </p:cNvPr>
@@ -8750,7 +8840,7 @@
           <p:cNvPr id="3" name="TextBox 2">
             <a:extLst xmlns:a="http://schemas.openxmlformats.org/drawingml/2006/main">
               <a:ext uri="{FF2B5EF4-FFF2-40B4-BE49-F238E27FC236}">
-                <a16:creationId xmlns:a16="http://schemas.microsoft.com/office/drawing/2014/main" id="{6B2BA502-A0CF-4F62-AD7F-0167BB98E4DF}"/>
+                <a16:creationId xmlns:a16="http://schemas.microsoft.com/office/drawing/2014/main" id="{FD049AA5-D1A7-4D84-BE25-EE7482F09E97}"/>
               </a:ext>
             </a:extLst>
           </p:cNvPr>
@@ -8797,7 +8887,7 @@
           <p:cNvPr id="4" name="Rectangle 3">
             <a:extLst xmlns:a="http://schemas.openxmlformats.org/drawingml/2006/main">
               <a:ext uri="{FF2B5EF4-FFF2-40B4-BE49-F238E27FC236}">
-                <a16:creationId xmlns:a16="http://schemas.microsoft.com/office/drawing/2014/main" id="{D46727EF-FD28-4FE6-AA9A-867FE8A9D775}"/>
+                <a16:creationId xmlns:a16="http://schemas.microsoft.com/office/drawing/2014/main" id="{C1D7E733-883C-47AE-8643-09CA879046AD}"/>
               </a:ext>
             </a:extLst>
           </p:cNvPr>
@@ -8852,7 +8942,7 @@
           <p:cNvPr id="5" name="Rectangle 4">
             <a:extLst xmlns:a="http://schemas.openxmlformats.org/drawingml/2006/main">
               <a:ext uri="{FF2B5EF4-FFF2-40B4-BE49-F238E27FC236}">
-                <a16:creationId xmlns:a16="http://schemas.microsoft.com/office/drawing/2014/main" id="{7EE55C27-AB33-4DC2-A78C-3474F3BFF188}"/>
+                <a16:creationId xmlns:a16="http://schemas.microsoft.com/office/drawing/2014/main" id="{DBBE6B90-CEBF-42E3-B1C0-E61650985A7C}"/>
               </a:ext>
             </a:extLst>
           </p:cNvPr>
@@ -8907,7 +8997,7 @@
           <p:cNvPr id="6" name="TextBox 5">
             <a:extLst xmlns:a="http://schemas.openxmlformats.org/drawingml/2006/main">
               <a:ext uri="{FF2B5EF4-FFF2-40B4-BE49-F238E27FC236}">
-                <a16:creationId xmlns:a16="http://schemas.microsoft.com/office/drawing/2014/main" id="{B7D0FA5D-BC22-40B3-9214-B16FBD757A49}"/>
+                <a16:creationId xmlns:a16="http://schemas.microsoft.com/office/drawing/2014/main" id="{2ED1D5B3-7FE3-4263-B1D5-8E3081985F42}"/>
               </a:ext>
             </a:extLst>
           </p:cNvPr>
@@ -8944,7 +9034,7 @@
                 <a:ea typeface="Aptos"/>
                 <a:cs typeface="Aptos"/>
               </a:rPr>
-              <a:t>Julkinen riippumaton evidenssikooste · 2026.07.28-32 · 2026-07-28 · Lähteet: Evidence Register; WIPO IP valuation</a:t>
+              <a:t>Julkinen riippumaton evidenssikooste · 2026.07.29-35 · 2026-07-29 · Lähteet: Evidence Register; WIPO IP valuation</a:t>
             </a:r>
           </a:p>
         </p:txBody>
@@ -8954,7 +9044,7 @@
           <p:cNvPr id="7" name="TextBox 6">
             <a:extLst xmlns:a="http://schemas.openxmlformats.org/drawingml/2006/main">
               <a:ext uri="{FF2B5EF4-FFF2-40B4-BE49-F238E27FC236}">
-                <a16:creationId xmlns:a16="http://schemas.microsoft.com/office/drawing/2014/main" id="{3ACB71BC-88A3-4E61-A490-8367CFE8D4AE}"/>
+                <a16:creationId xmlns:a16="http://schemas.microsoft.com/office/drawing/2014/main" id="{0459294F-2B0E-47D1-ABF1-1A36C1927AC6}"/>
               </a:ext>
             </a:extLst>
           </p:cNvPr>
@@ -9441,7 +9531,7 @@
           <p:cNvPr id="9" name="TextBox 8">
             <a:extLst xmlns:a="http://schemas.openxmlformats.org/drawingml/2006/main">
               <a:ext uri="{FF2B5EF4-FFF2-40B4-BE49-F238E27FC236}">
-                <a16:creationId xmlns:a16="http://schemas.microsoft.com/office/drawing/2014/main" id="{B9B61A87-89EA-4D18-B440-F3B48D1E29E6}"/>
+                <a16:creationId xmlns:a16="http://schemas.microsoft.com/office/drawing/2014/main" id="{BC2B8F62-DBD1-42E7-8F67-E48399D157B0}"/>
               </a:ext>
             </a:extLst>
           </p:cNvPr>
@@ -9486,7 +9576,7 @@
     </p:spTree>
     <p:extLst>
       <p:ext uri="{BB962C8B-B14F-4D97-AF65-F5344CB8AC3E}">
-        <p14:creationId xmlns:p14="http://schemas.microsoft.com/office/powerpoint/2010/main" val="1543604825"/>
+        <p14:creationId xmlns:p14="http://schemas.microsoft.com/office/powerpoint/2010/main" val="300705486"/>
       </p:ext>
     </p:extLst>
   </p:cSld>
@@ -9517,7 +9607,7 @@
           <p:cNvPr id="2" name="TextBox 1">
             <a:extLst xmlns:a="http://schemas.openxmlformats.org/drawingml/2006/main">
               <a:ext uri="{FF2B5EF4-FFF2-40B4-BE49-F238E27FC236}">
-                <a16:creationId xmlns:a16="http://schemas.microsoft.com/office/drawing/2014/main" id="{156AA78B-FF3E-4F4A-995A-55B1EFF8F9AF}"/>
+                <a16:creationId xmlns:a16="http://schemas.microsoft.com/office/drawing/2014/main" id="{C3F3982F-B781-4BB2-9603-0AB5D02BC181}"/>
               </a:ext>
             </a:extLst>
           </p:cNvPr>
@@ -9564,7 +9654,7 @@
           <p:cNvPr id="3" name="TextBox 2">
             <a:extLst xmlns:a="http://schemas.openxmlformats.org/drawingml/2006/main">
               <a:ext uri="{FF2B5EF4-FFF2-40B4-BE49-F238E27FC236}">
-                <a16:creationId xmlns:a16="http://schemas.microsoft.com/office/drawing/2014/main" id="{1828A9DD-7DD2-45CA-B107-CAD1CF4C3FF5}"/>
+                <a16:creationId xmlns:a16="http://schemas.microsoft.com/office/drawing/2014/main" id="{B08350E6-2440-4F85-8364-65A361B792C3}"/>
               </a:ext>
             </a:extLst>
           </p:cNvPr>
@@ -9611,7 +9701,7 @@
           <p:cNvPr id="4" name="TextBox 3">
             <a:extLst xmlns:a="http://schemas.openxmlformats.org/drawingml/2006/main">
               <a:ext uri="{FF2B5EF4-FFF2-40B4-BE49-F238E27FC236}">
-                <a16:creationId xmlns:a16="http://schemas.microsoft.com/office/drawing/2014/main" id="{BBE43660-B07A-4866-B268-EC00BDB7E97F}"/>
+                <a16:creationId xmlns:a16="http://schemas.microsoft.com/office/drawing/2014/main" id="{AE65DC05-0FC9-4FD6-8215-112115014B2D}"/>
               </a:ext>
             </a:extLst>
           </p:cNvPr>
@@ -9730,7 +9820,7 @@
           <p:cNvPr id="5" name="TextBox 4">
             <a:extLst xmlns:a="http://schemas.openxmlformats.org/drawingml/2006/main">
               <a:ext uri="{FF2B5EF4-FFF2-40B4-BE49-F238E27FC236}">
-                <a16:creationId xmlns:a16="http://schemas.microsoft.com/office/drawing/2014/main" id="{2FBAB6FF-5E87-4E34-95D4-9871025F9F51}"/>
+                <a16:creationId xmlns:a16="http://schemas.microsoft.com/office/drawing/2014/main" id="{DF59619D-E144-4F37-B88C-D876E3AF157E}"/>
               </a:ext>
             </a:extLst>
           </p:cNvPr>
@@ -9767,7 +9857,7 @@
                 <a:ea typeface="Aptos"/>
                 <a:cs typeface="Aptos"/>
               </a:rPr>
-              <a:t>Versio 2026.07.28-32 · 2026-07-28 · 6 / 6</a:t>
+              <a:t>Versio 2026.07.29-35 · 2026-07-29 · 6 / 6</a:t>
             </a:r>
           </a:p>
         </p:txBody>
@@ -9775,7 +9865,7 @@
     </p:spTree>
     <p:extLst>
       <p:ext uri="{BB962C8B-B14F-4D97-AF65-F5344CB8AC3E}">
-        <p14:creationId xmlns:p14="http://schemas.microsoft.com/office/powerpoint/2010/main" val="1373556881"/>
+        <p14:creationId xmlns:p14="http://schemas.microsoft.com/office/powerpoint/2010/main" val="1201973341"/>
       </p:ext>
     </p:extLst>
   </p:cSld>

--- a/site/downloads/pixan-bank-deck-short-fi.pptx
+++ b/site/downloads/pixan-bank-deck-short-fi.pptx
@@ -2,18 +2,18 @@
 <file path=ppt/presentation.xml><?xml version="1.0" encoding="utf-8"?>
 <p:presentation xmlns:p="http://schemas.openxmlformats.org/presentationml/2006/main">
   <p:sldMasterIdLst>
-    <p:sldMasterId xmlns:r="http://schemas.openxmlformats.org/officeDocument/2006/relationships" id="2147483648" r:id="R18d972b52e6b4bc7"/>
+    <p:sldMasterId xmlns:r="http://schemas.openxmlformats.org/officeDocument/2006/relationships" id="2147483648" r:id="Rbacd49c9436f4b64"/>
   </p:sldMasterIdLst>
   <p:notesMasterIdLst>
-    <p:notesMasterId xmlns:r="http://schemas.openxmlformats.org/officeDocument/2006/relationships" r:id="R1ccd1305e76d4540"/>
+    <p:notesMasterId xmlns:r="http://schemas.openxmlformats.org/officeDocument/2006/relationships" r:id="R10f7e2319c704a6b"/>
   </p:notesMasterIdLst>
   <p:sldIdLst>
-    <p:sldId xmlns:r="http://schemas.openxmlformats.org/officeDocument/2006/relationships" id="256" r:id="R0e10ce90345d481b"/>
-    <p:sldId xmlns:r="http://schemas.openxmlformats.org/officeDocument/2006/relationships" id="257" r:id="R9fd21dbc8af84963"/>
-    <p:sldId xmlns:r="http://schemas.openxmlformats.org/officeDocument/2006/relationships" id="258" r:id="R27bcec13bdfa4e01"/>
-    <p:sldId xmlns:r="http://schemas.openxmlformats.org/officeDocument/2006/relationships" id="259" r:id="R11ad6b5092d44486"/>
-    <p:sldId xmlns:r="http://schemas.openxmlformats.org/officeDocument/2006/relationships" id="260" r:id="R489ddcf1c59046dd"/>
-    <p:sldId xmlns:r="http://schemas.openxmlformats.org/officeDocument/2006/relationships" id="261" r:id="R1232c2a72319477f"/>
+    <p:sldId xmlns:r="http://schemas.openxmlformats.org/officeDocument/2006/relationships" id="256" r:id="Rf31584395ec04000"/>
+    <p:sldId xmlns:r="http://schemas.openxmlformats.org/officeDocument/2006/relationships" id="257" r:id="R47a38b821b1f4493"/>
+    <p:sldId xmlns:r="http://schemas.openxmlformats.org/officeDocument/2006/relationships" id="258" r:id="R3ffa6323ffcc4bed"/>
+    <p:sldId xmlns:r="http://schemas.openxmlformats.org/officeDocument/2006/relationships" id="259" r:id="R907f1670946a4b9d"/>
+    <p:sldId xmlns:r="http://schemas.openxmlformats.org/officeDocument/2006/relationships" id="260" r:id="Ra83230b09f164376"/>
+    <p:sldId xmlns:r="http://schemas.openxmlformats.org/officeDocument/2006/relationships" id="261" r:id="R597e0f12f0e9485a"/>
   </p:sldIdLst>
   <p:sldSz cx="12191999" cy="6858000"/>
   <p:notesSz cx="6858000" cy="9144000"/>
@@ -2187,7 +2187,7 @@
           <p:cNvPr id="2" name="Title 1">
             <a:extLst xmlns:a="http://schemas.openxmlformats.org/drawingml/2006/main">
               <a:ext uri="{FF2B5EF4-FFF2-40B4-BE49-F238E27FC236}">
-                <a16:creationId xmlns:a16="http://schemas.microsoft.com/office/drawing/2014/main" id="{94FA0B03-9F97-4772-AC4C-64909085EBAE}"/>
+                <a16:creationId xmlns:a16="http://schemas.microsoft.com/office/drawing/2014/main" id="{83705E5B-2DCF-43B6-9511-D81F31C0105C}"/>
               </a:ext>
             </a:extLst>
           </p:cNvPr>
@@ -2219,7 +2219,7 @@
           <p:cNvPr id="3" name="Subtitle 2">
             <a:extLst xmlns:a="http://schemas.openxmlformats.org/drawingml/2006/main">
               <a:ext uri="{FF2B5EF4-FFF2-40B4-BE49-F238E27FC236}">
-                <a16:creationId xmlns:a16="http://schemas.microsoft.com/office/drawing/2014/main" id="{1EA45515-ABBD-4279-B4FC-6ADF2DCA1017}"/>
+                <a16:creationId xmlns:a16="http://schemas.microsoft.com/office/drawing/2014/main" id="{DB0D6A8F-F340-4F8B-831F-1D111C10FF44}"/>
               </a:ext>
             </a:extLst>
           </p:cNvPr>
@@ -2342,7 +2342,7 @@
           <p:cNvPr id="4" name="Date Placeholder 3">
             <a:extLst xmlns:a="http://schemas.openxmlformats.org/drawingml/2006/main">
               <a:ext uri="{FF2B5EF4-FFF2-40B4-BE49-F238E27FC236}">
-                <a16:creationId xmlns:a16="http://schemas.microsoft.com/office/drawing/2014/main" id="{DBC13F5B-C6C1-4660-9878-64C8108ADE0B}"/>
+                <a16:creationId xmlns:a16="http://schemas.microsoft.com/office/drawing/2014/main" id="{D228D34B-BCB0-43E1-B0F6-CBCA7E8B8B8F}"/>
               </a:ext>
             </a:extLst>
           </p:cNvPr>
@@ -2369,7 +2369,7 @@
           <p:cNvPr id="5" name="Footer Placeholder 4">
             <a:extLst xmlns:a="http://schemas.openxmlformats.org/drawingml/2006/main">
               <a:ext uri="{FF2B5EF4-FFF2-40B4-BE49-F238E27FC236}">
-                <a16:creationId xmlns:a16="http://schemas.microsoft.com/office/drawing/2014/main" id="{3E452D01-8FC5-4522-AE29-624D650010A2}"/>
+                <a16:creationId xmlns:a16="http://schemas.microsoft.com/office/drawing/2014/main" id="{500C45E8-6578-418F-83B7-CF64C095EC61}"/>
               </a:ext>
             </a:extLst>
           </p:cNvPr>
@@ -2392,7 +2392,7 @@
           <p:cNvPr id="6" name="Slide Number Placeholder 5">
             <a:extLst xmlns:a="http://schemas.openxmlformats.org/drawingml/2006/main">
               <a:ext uri="{FF2B5EF4-FFF2-40B4-BE49-F238E27FC236}">
-                <a16:creationId xmlns:a16="http://schemas.microsoft.com/office/drawing/2014/main" id="{3A013645-3658-4CC2-B649-B8F5A2780D53}"/>
+                <a16:creationId xmlns:a16="http://schemas.microsoft.com/office/drawing/2014/main" id="{6883E524-C5D1-42A1-AAF7-4BA7DC0B792B}"/>
               </a:ext>
             </a:extLst>
           </p:cNvPr>
@@ -2436,7 +2436,7 @@
           <p:cNvPr id="2" name="Title 1">
             <a:extLst xmlns:a="http://schemas.openxmlformats.org/drawingml/2006/main">
               <a:ext uri="{FF2B5EF4-FFF2-40B4-BE49-F238E27FC236}">
-                <a16:creationId xmlns:a16="http://schemas.microsoft.com/office/drawing/2014/main" id="{39BBA17E-37E9-4555-B7A1-1ECA8E1511ED}"/>
+                <a16:creationId xmlns:a16="http://schemas.microsoft.com/office/drawing/2014/main" id="{C371C501-80DE-4F2A-B1F6-DB75D1AFA118}"/>
               </a:ext>
             </a:extLst>
           </p:cNvPr>
@@ -2463,7 +2463,7 @@
           <p:cNvPr id="3" name="Vertical Text Placeholder 2">
             <a:extLst xmlns:a="http://schemas.openxmlformats.org/drawingml/2006/main">
               <a:ext uri="{FF2B5EF4-FFF2-40B4-BE49-F238E27FC236}">
-                <a16:creationId xmlns:a16="http://schemas.microsoft.com/office/drawing/2014/main" id="{2F1649E7-4950-4B3B-B189-6514A0464BC9}"/>
+                <a16:creationId xmlns:a16="http://schemas.microsoft.com/office/drawing/2014/main" id="{4DE578B7-E13C-41B7-B28E-D37EFB6F0DAE}"/>
               </a:ext>
             </a:extLst>
           </p:cNvPr>
@@ -2525,7 +2525,7 @@
           <p:cNvPr id="4" name="Date Placeholder 3">
             <a:extLst xmlns:a="http://schemas.openxmlformats.org/drawingml/2006/main">
               <a:ext uri="{FF2B5EF4-FFF2-40B4-BE49-F238E27FC236}">
-                <a16:creationId xmlns:a16="http://schemas.microsoft.com/office/drawing/2014/main" id="{BBAD8CFD-AD27-4374-A13E-070AA5DA1C62}"/>
+                <a16:creationId xmlns:a16="http://schemas.microsoft.com/office/drawing/2014/main" id="{D2299887-B421-4279-8840-40329E00276D}"/>
               </a:ext>
             </a:extLst>
           </p:cNvPr>
@@ -2552,7 +2552,7 @@
           <p:cNvPr id="5" name="Footer Placeholder 4">
             <a:extLst xmlns:a="http://schemas.openxmlformats.org/drawingml/2006/main">
               <a:ext uri="{FF2B5EF4-FFF2-40B4-BE49-F238E27FC236}">
-                <a16:creationId xmlns:a16="http://schemas.microsoft.com/office/drawing/2014/main" id="{DB063900-F422-42A1-8640-8F19903D9816}"/>
+                <a16:creationId xmlns:a16="http://schemas.microsoft.com/office/drawing/2014/main" id="{36EF301E-76BB-4206-90AD-962445809841}"/>
               </a:ext>
             </a:extLst>
           </p:cNvPr>
@@ -2575,7 +2575,7 @@
           <p:cNvPr id="6" name="Slide Number Placeholder 5">
             <a:extLst xmlns:a="http://schemas.openxmlformats.org/drawingml/2006/main">
               <a:ext uri="{FF2B5EF4-FFF2-40B4-BE49-F238E27FC236}">
-                <a16:creationId xmlns:a16="http://schemas.microsoft.com/office/drawing/2014/main" id="{25E9454E-7FC2-4E5F-856C-0A60E8A48DAA}"/>
+                <a16:creationId xmlns:a16="http://schemas.microsoft.com/office/drawing/2014/main" id="{340BB3D9-00EF-411F-B167-83F6D7559E55}"/>
               </a:ext>
             </a:extLst>
           </p:cNvPr>
@@ -2619,7 +2619,7 @@
           <p:cNvPr id="2" name="Vertical Title 1">
             <a:extLst xmlns:a="http://schemas.openxmlformats.org/drawingml/2006/main">
               <a:ext uri="{FF2B5EF4-FFF2-40B4-BE49-F238E27FC236}">
-                <a16:creationId xmlns:a16="http://schemas.microsoft.com/office/drawing/2014/main" id="{8F18F474-D129-4176-9ED7-7D220E5A1A70}"/>
+                <a16:creationId xmlns:a16="http://schemas.microsoft.com/office/drawing/2014/main" id="{18F01E9C-B0EB-40F8-BB70-9978D2AC1AD7}"/>
               </a:ext>
             </a:extLst>
           </p:cNvPr>
@@ -2651,7 +2651,7 @@
           <p:cNvPr id="3" name="Vertical Text Placeholder 2">
             <a:extLst xmlns:a="http://schemas.openxmlformats.org/drawingml/2006/main">
               <a:ext uri="{FF2B5EF4-FFF2-40B4-BE49-F238E27FC236}">
-                <a16:creationId xmlns:a16="http://schemas.microsoft.com/office/drawing/2014/main" id="{05B62FFD-3207-4F3E-96EE-10480F4C9BE1}"/>
+                <a16:creationId xmlns:a16="http://schemas.microsoft.com/office/drawing/2014/main" id="{B515D168-FEE2-4BC9-B4C3-342AE3E8594E}"/>
               </a:ext>
             </a:extLst>
           </p:cNvPr>
@@ -2718,7 +2718,7 @@
           <p:cNvPr id="4" name="Date Placeholder 3">
             <a:extLst xmlns:a="http://schemas.openxmlformats.org/drawingml/2006/main">
               <a:ext uri="{FF2B5EF4-FFF2-40B4-BE49-F238E27FC236}">
-                <a16:creationId xmlns:a16="http://schemas.microsoft.com/office/drawing/2014/main" id="{5032E25F-0D01-4AA5-ACB7-6C836A26BD58}"/>
+                <a16:creationId xmlns:a16="http://schemas.microsoft.com/office/drawing/2014/main" id="{FD1229D4-EB91-4EFC-8DA6-FA137C7AEA6C}"/>
               </a:ext>
             </a:extLst>
           </p:cNvPr>
@@ -2745,7 +2745,7 @@
           <p:cNvPr id="5" name="Footer Placeholder 4">
             <a:extLst xmlns:a="http://schemas.openxmlformats.org/drawingml/2006/main">
               <a:ext uri="{FF2B5EF4-FFF2-40B4-BE49-F238E27FC236}">
-                <a16:creationId xmlns:a16="http://schemas.microsoft.com/office/drawing/2014/main" id="{6B5F81D9-954B-42BD-B7FF-D4DB62FC0C80}"/>
+                <a16:creationId xmlns:a16="http://schemas.microsoft.com/office/drawing/2014/main" id="{ED17D4F1-4EFC-4024-903F-66B1F13601AE}"/>
               </a:ext>
             </a:extLst>
           </p:cNvPr>
@@ -2768,7 +2768,7 @@
           <p:cNvPr id="6" name="Slide Number Placeholder 5">
             <a:extLst xmlns:a="http://schemas.openxmlformats.org/drawingml/2006/main">
               <a:ext uri="{FF2B5EF4-FFF2-40B4-BE49-F238E27FC236}">
-                <a16:creationId xmlns:a16="http://schemas.microsoft.com/office/drawing/2014/main" id="{B2648410-9ABA-4764-B3FD-241F3ECE63E6}"/>
+                <a16:creationId xmlns:a16="http://schemas.microsoft.com/office/drawing/2014/main" id="{5389BAFE-0A27-40CC-A8AD-C6CAEB25367D}"/>
               </a:ext>
             </a:extLst>
           </p:cNvPr>
@@ -2812,7 +2812,7 @@
           <p:cNvPr id="2" name="Title 1">
             <a:extLst xmlns:a="http://schemas.openxmlformats.org/drawingml/2006/main">
               <a:ext uri="{FF2B5EF4-FFF2-40B4-BE49-F238E27FC236}">
-                <a16:creationId xmlns:a16="http://schemas.microsoft.com/office/drawing/2014/main" id="{08F4E5A3-0693-4815-A30B-E6EE2B778662}"/>
+                <a16:creationId xmlns:a16="http://schemas.microsoft.com/office/drawing/2014/main" id="{3ABA95AB-2D48-47C8-A306-4E8235326433}"/>
               </a:ext>
             </a:extLst>
           </p:cNvPr>
@@ -2839,7 +2839,7 @@
           <p:cNvPr id="3" name="Content Placeholder 2">
             <a:extLst xmlns:a="http://schemas.openxmlformats.org/drawingml/2006/main">
               <a:ext uri="{FF2B5EF4-FFF2-40B4-BE49-F238E27FC236}">
-                <a16:creationId xmlns:a16="http://schemas.microsoft.com/office/drawing/2014/main" id="{6E50ECBD-4747-4BDD-9BA1-93E9288720F5}"/>
+                <a16:creationId xmlns:a16="http://schemas.microsoft.com/office/drawing/2014/main" id="{173B3E8D-A7C0-44D7-A48F-C0F9A707D4B3}"/>
               </a:ext>
             </a:extLst>
           </p:cNvPr>
@@ -2901,7 +2901,7 @@
           <p:cNvPr id="4" name="Date Placeholder 3">
             <a:extLst xmlns:a="http://schemas.openxmlformats.org/drawingml/2006/main">
               <a:ext uri="{FF2B5EF4-FFF2-40B4-BE49-F238E27FC236}">
-                <a16:creationId xmlns:a16="http://schemas.microsoft.com/office/drawing/2014/main" id="{661D5B2E-FBAE-4476-B60C-D298156AADEB}"/>
+                <a16:creationId xmlns:a16="http://schemas.microsoft.com/office/drawing/2014/main" id="{CC98B541-F848-48FA-A569-E217AC7D1756}"/>
               </a:ext>
             </a:extLst>
           </p:cNvPr>
@@ -2928,7 +2928,7 @@
           <p:cNvPr id="5" name="Footer Placeholder 4">
             <a:extLst xmlns:a="http://schemas.openxmlformats.org/drawingml/2006/main">
               <a:ext uri="{FF2B5EF4-FFF2-40B4-BE49-F238E27FC236}">
-                <a16:creationId xmlns:a16="http://schemas.microsoft.com/office/drawing/2014/main" id="{482D42B0-4011-424D-B481-0DEAE7AF3091}"/>
+                <a16:creationId xmlns:a16="http://schemas.microsoft.com/office/drawing/2014/main" id="{2FBA2D57-6B46-4811-B552-DB5FEC848AF7}"/>
               </a:ext>
             </a:extLst>
           </p:cNvPr>
@@ -2951,7 +2951,7 @@
           <p:cNvPr id="6" name="Slide Number Placeholder 5">
             <a:extLst xmlns:a="http://schemas.openxmlformats.org/drawingml/2006/main">
               <a:ext uri="{FF2B5EF4-FFF2-40B4-BE49-F238E27FC236}">
-                <a16:creationId xmlns:a16="http://schemas.microsoft.com/office/drawing/2014/main" id="{324359A9-0B41-457E-B28D-414B95C22878}"/>
+                <a16:creationId xmlns:a16="http://schemas.microsoft.com/office/drawing/2014/main" id="{C61DFF35-3583-4EA0-8982-06F0418E8E05}"/>
               </a:ext>
             </a:extLst>
           </p:cNvPr>
@@ -2995,7 +2995,7 @@
           <p:cNvPr id="2" name="Title 1">
             <a:extLst xmlns:a="http://schemas.openxmlformats.org/drawingml/2006/main">
               <a:ext uri="{FF2B5EF4-FFF2-40B4-BE49-F238E27FC236}">
-                <a16:creationId xmlns:a16="http://schemas.microsoft.com/office/drawing/2014/main" id="{4DF3CC46-4B4A-49FD-AD1A-C6355543D2F6}"/>
+                <a16:creationId xmlns:a16="http://schemas.microsoft.com/office/drawing/2014/main" id="{5DBD7859-8A44-440F-92B7-99EEC32A0DE0}"/>
               </a:ext>
             </a:extLst>
           </p:cNvPr>
@@ -3032,7 +3032,7 @@
           <p:cNvPr id="3" name="Text Placeholder 2">
             <a:extLst xmlns:a="http://schemas.openxmlformats.org/drawingml/2006/main">
               <a:ext uri="{FF2B5EF4-FFF2-40B4-BE49-F238E27FC236}">
-                <a16:creationId xmlns:a16="http://schemas.microsoft.com/office/drawing/2014/main" id="{C4A457B9-29BA-4955-9FC2-2334AA18BC36}"/>
+                <a16:creationId xmlns:a16="http://schemas.microsoft.com/office/drawing/2014/main" id="{B8E32608-791B-4F5C-93B0-10A641999FBD}"/>
               </a:ext>
             </a:extLst>
           </p:cNvPr>
@@ -3158,7 +3158,7 @@
           <p:cNvPr id="4" name="Date Placeholder 3">
             <a:extLst xmlns:a="http://schemas.openxmlformats.org/drawingml/2006/main">
               <a:ext uri="{FF2B5EF4-FFF2-40B4-BE49-F238E27FC236}">
-                <a16:creationId xmlns:a16="http://schemas.microsoft.com/office/drawing/2014/main" id="{71412DCD-E885-47B6-AF6E-3F52651B241C}"/>
+                <a16:creationId xmlns:a16="http://schemas.microsoft.com/office/drawing/2014/main" id="{127EB8A8-C6A8-4572-8BD6-B8EF3A5D55A7}"/>
               </a:ext>
             </a:extLst>
           </p:cNvPr>
@@ -3185,7 +3185,7 @@
           <p:cNvPr id="5" name="Footer Placeholder 4">
             <a:extLst xmlns:a="http://schemas.openxmlformats.org/drawingml/2006/main">
               <a:ext uri="{FF2B5EF4-FFF2-40B4-BE49-F238E27FC236}">
-                <a16:creationId xmlns:a16="http://schemas.microsoft.com/office/drawing/2014/main" id="{94C54292-2C4C-4DF3-AD88-15CA06017ADE}"/>
+                <a16:creationId xmlns:a16="http://schemas.microsoft.com/office/drawing/2014/main" id="{C23F9C2B-C1F0-45BD-AB1F-5F003240B936}"/>
               </a:ext>
             </a:extLst>
           </p:cNvPr>
@@ -3208,7 +3208,7 @@
           <p:cNvPr id="6" name="Slide Number Placeholder 5">
             <a:extLst xmlns:a="http://schemas.openxmlformats.org/drawingml/2006/main">
               <a:ext uri="{FF2B5EF4-FFF2-40B4-BE49-F238E27FC236}">
-                <a16:creationId xmlns:a16="http://schemas.microsoft.com/office/drawing/2014/main" id="{BCAB1004-F89D-4D9F-A13E-ED4AF11779D4}"/>
+                <a16:creationId xmlns:a16="http://schemas.microsoft.com/office/drawing/2014/main" id="{991C03EC-CA06-48B9-8D91-7324FEF17FC9}"/>
               </a:ext>
             </a:extLst>
           </p:cNvPr>
@@ -3252,7 +3252,7 @@
           <p:cNvPr id="2" name="Title 1">
             <a:extLst xmlns:a="http://schemas.openxmlformats.org/drawingml/2006/main">
               <a:ext uri="{FF2B5EF4-FFF2-40B4-BE49-F238E27FC236}">
-                <a16:creationId xmlns:a16="http://schemas.microsoft.com/office/drawing/2014/main" id="{805CB91A-A2A0-40B1-92DF-9E53CBA0DE9A}"/>
+                <a16:creationId xmlns:a16="http://schemas.microsoft.com/office/drawing/2014/main" id="{3F2571FA-2D55-4193-AF1F-C81F0B1F2AE7}"/>
               </a:ext>
             </a:extLst>
           </p:cNvPr>
@@ -3279,7 +3279,7 @@
           <p:cNvPr id="3" name="Content Placeholder 2">
             <a:extLst xmlns:a="http://schemas.openxmlformats.org/drawingml/2006/main">
               <a:ext uri="{FF2B5EF4-FFF2-40B4-BE49-F238E27FC236}">
-                <a16:creationId xmlns:a16="http://schemas.microsoft.com/office/drawing/2014/main" id="{3171EF21-2B6F-4926-A81B-2B544F0E1173}"/>
+                <a16:creationId xmlns:a16="http://schemas.microsoft.com/office/drawing/2014/main" id="{C251E751-44E8-4DA8-9026-742DE0CD594B}"/>
               </a:ext>
             </a:extLst>
           </p:cNvPr>
@@ -3383,7 +3383,7 @@
           <p:cNvPr id="4" name="Content Placeholder 3">
             <a:extLst xmlns:a="http://schemas.openxmlformats.org/drawingml/2006/main">
               <a:ext uri="{FF2B5EF4-FFF2-40B4-BE49-F238E27FC236}">
-                <a16:creationId xmlns:a16="http://schemas.microsoft.com/office/drawing/2014/main" id="{27778B9D-8B8B-45E2-B728-75F70AB26F1D}"/>
+                <a16:creationId xmlns:a16="http://schemas.microsoft.com/office/drawing/2014/main" id="{9D5D8C05-80A4-48C5-AADE-3CEC86F649BE}"/>
               </a:ext>
             </a:extLst>
           </p:cNvPr>
@@ -3487,7 +3487,7 @@
           <p:cNvPr id="5" name="Date Placeholder 4">
             <a:extLst xmlns:a="http://schemas.openxmlformats.org/drawingml/2006/main">
               <a:ext uri="{FF2B5EF4-FFF2-40B4-BE49-F238E27FC236}">
-                <a16:creationId xmlns:a16="http://schemas.microsoft.com/office/drawing/2014/main" id="{04D56B9F-047D-4DB0-A334-B2901F25F9F9}"/>
+                <a16:creationId xmlns:a16="http://schemas.microsoft.com/office/drawing/2014/main" id="{952156A4-D792-4C88-9B86-B7AD663B941C}"/>
               </a:ext>
             </a:extLst>
           </p:cNvPr>
@@ -3514,7 +3514,7 @@
           <p:cNvPr id="6" name="Footer Placeholder 5">
             <a:extLst xmlns:a="http://schemas.openxmlformats.org/drawingml/2006/main">
               <a:ext uri="{FF2B5EF4-FFF2-40B4-BE49-F238E27FC236}">
-                <a16:creationId xmlns:a16="http://schemas.microsoft.com/office/drawing/2014/main" id="{1BF186AA-4873-4C45-B9C1-AF776391F747}"/>
+                <a16:creationId xmlns:a16="http://schemas.microsoft.com/office/drawing/2014/main" id="{7461D495-C044-4E65-943E-C14CD66D29F3}"/>
               </a:ext>
             </a:extLst>
           </p:cNvPr>
@@ -3537,7 +3537,7 @@
           <p:cNvPr id="7" name="Slide Number Placeholder 6">
             <a:extLst xmlns:a="http://schemas.openxmlformats.org/drawingml/2006/main">
               <a:ext uri="{FF2B5EF4-FFF2-40B4-BE49-F238E27FC236}">
-                <a16:creationId xmlns:a16="http://schemas.microsoft.com/office/drawing/2014/main" id="{186FE694-021F-412D-96F2-FECED8513779}"/>
+                <a16:creationId xmlns:a16="http://schemas.microsoft.com/office/drawing/2014/main" id="{1C57C8BE-53BE-47E2-ADC1-61BBF8F7E060}"/>
               </a:ext>
             </a:extLst>
           </p:cNvPr>
@@ -3581,7 +3581,7 @@
           <p:cNvPr id="2" name="Title 1">
             <a:extLst xmlns:a="http://schemas.openxmlformats.org/drawingml/2006/main">
               <a:ext uri="{FF2B5EF4-FFF2-40B4-BE49-F238E27FC236}">
-                <a16:creationId xmlns:a16="http://schemas.microsoft.com/office/drawing/2014/main" id="{6D6C65D8-FF96-4DF6-A5B0-A15226AE4EA9}"/>
+                <a16:creationId xmlns:a16="http://schemas.microsoft.com/office/drawing/2014/main" id="{B4EBE32C-7602-486A-AF70-9D0E59DBF919}"/>
               </a:ext>
             </a:extLst>
           </p:cNvPr>
@@ -3613,7 +3613,7 @@
           <p:cNvPr id="3" name="Text Placeholder 2">
             <a:extLst xmlns:a="http://schemas.openxmlformats.org/drawingml/2006/main">
               <a:ext uri="{FF2B5EF4-FFF2-40B4-BE49-F238E27FC236}">
-                <a16:creationId xmlns:a16="http://schemas.microsoft.com/office/drawing/2014/main" id="{A51DE4F1-1AC4-447E-86D0-A10DB54A0B12}"/>
+                <a16:creationId xmlns:a16="http://schemas.microsoft.com/office/drawing/2014/main" id="{34930639-E2B1-42D5-A6C8-5552C006DF81}"/>
               </a:ext>
             </a:extLst>
           </p:cNvPr>
@@ -3685,7 +3685,7 @@
           <p:cNvPr id="4" name="Content Placeholder 3">
             <a:extLst xmlns:a="http://schemas.openxmlformats.org/drawingml/2006/main">
               <a:ext uri="{FF2B5EF4-FFF2-40B4-BE49-F238E27FC236}">
-                <a16:creationId xmlns:a16="http://schemas.microsoft.com/office/drawing/2014/main" id="{AA9D28A0-4EC9-416E-8BD3-40C388CFDF8E}"/>
+                <a16:creationId xmlns:a16="http://schemas.microsoft.com/office/drawing/2014/main" id="{24C98651-054E-47AA-A53C-7C70F9489C28}"/>
               </a:ext>
             </a:extLst>
           </p:cNvPr>
@@ -3789,7 +3789,7 @@
           <p:cNvPr id="5" name="Text Placeholder 4">
             <a:extLst xmlns:a="http://schemas.openxmlformats.org/drawingml/2006/main">
               <a:ext uri="{FF2B5EF4-FFF2-40B4-BE49-F238E27FC236}">
-                <a16:creationId xmlns:a16="http://schemas.microsoft.com/office/drawing/2014/main" id="{3957FC37-C929-4CC2-816E-869D02BCE940}"/>
+                <a16:creationId xmlns:a16="http://schemas.microsoft.com/office/drawing/2014/main" id="{0758C0BC-CB2E-4112-85D6-76FCD2C2EC63}"/>
               </a:ext>
             </a:extLst>
           </p:cNvPr>
@@ -3861,7 +3861,7 @@
           <p:cNvPr id="6" name="Content Placeholder 5">
             <a:extLst xmlns:a="http://schemas.openxmlformats.org/drawingml/2006/main">
               <a:ext uri="{FF2B5EF4-FFF2-40B4-BE49-F238E27FC236}">
-                <a16:creationId xmlns:a16="http://schemas.microsoft.com/office/drawing/2014/main" id="{9916A398-E869-4F5E-A1F9-C9A46BADB78F}"/>
+                <a16:creationId xmlns:a16="http://schemas.microsoft.com/office/drawing/2014/main" id="{86CD8248-A5B9-46C1-8184-E6CC82E3DCA3}"/>
               </a:ext>
             </a:extLst>
           </p:cNvPr>
@@ -3965,7 +3965,7 @@
           <p:cNvPr id="7" name="Date Placeholder 6">
             <a:extLst xmlns:a="http://schemas.openxmlformats.org/drawingml/2006/main">
               <a:ext uri="{FF2B5EF4-FFF2-40B4-BE49-F238E27FC236}">
-                <a16:creationId xmlns:a16="http://schemas.microsoft.com/office/drawing/2014/main" id="{9AC7D0CC-C3B9-4CBD-AAAC-E1BE9495C807}"/>
+                <a16:creationId xmlns:a16="http://schemas.microsoft.com/office/drawing/2014/main" id="{C1051D5D-8DDF-40B3-9A0C-8B696C54927E}"/>
               </a:ext>
             </a:extLst>
           </p:cNvPr>
@@ -3992,7 +3992,7 @@
           <p:cNvPr id="8" name="Footer Placeholder 7">
             <a:extLst xmlns:a="http://schemas.openxmlformats.org/drawingml/2006/main">
               <a:ext uri="{FF2B5EF4-FFF2-40B4-BE49-F238E27FC236}">
-                <a16:creationId xmlns:a16="http://schemas.microsoft.com/office/drawing/2014/main" id="{A8B7F2E5-1244-421C-95C3-CAE635C23763}"/>
+                <a16:creationId xmlns:a16="http://schemas.microsoft.com/office/drawing/2014/main" id="{0F34022C-AA32-4AC4-A3BF-E69C44F4B4D1}"/>
               </a:ext>
             </a:extLst>
           </p:cNvPr>
@@ -4015,7 +4015,7 @@
           <p:cNvPr id="9" name="Slide Number Placeholder 8">
             <a:extLst xmlns:a="http://schemas.openxmlformats.org/drawingml/2006/main">
               <a:ext uri="{FF2B5EF4-FFF2-40B4-BE49-F238E27FC236}">
-                <a16:creationId xmlns:a16="http://schemas.microsoft.com/office/drawing/2014/main" id="{9B0D2C2D-FEE3-4DA7-A8A6-D30E1D13A5F8}"/>
+                <a16:creationId xmlns:a16="http://schemas.microsoft.com/office/drawing/2014/main" id="{72F4005E-644A-481C-B973-16DF595361F2}"/>
               </a:ext>
             </a:extLst>
           </p:cNvPr>
@@ -4059,7 +4059,7 @@
           <p:cNvPr id="2" name="Title 1">
             <a:extLst xmlns:a="http://schemas.openxmlformats.org/drawingml/2006/main">
               <a:ext uri="{FF2B5EF4-FFF2-40B4-BE49-F238E27FC236}">
-                <a16:creationId xmlns:a16="http://schemas.microsoft.com/office/drawing/2014/main" id="{014607B4-6AB7-4C5E-8923-4F0DE11D1958}"/>
+                <a16:creationId xmlns:a16="http://schemas.microsoft.com/office/drawing/2014/main" id="{BEDBA655-DF88-4F0F-9125-F9C428124F8A}"/>
               </a:ext>
             </a:extLst>
           </p:cNvPr>
@@ -4086,7 +4086,7 @@
           <p:cNvPr id="3" name="Date Placeholder 2">
             <a:extLst xmlns:a="http://schemas.openxmlformats.org/drawingml/2006/main">
               <a:ext uri="{FF2B5EF4-FFF2-40B4-BE49-F238E27FC236}">
-                <a16:creationId xmlns:a16="http://schemas.microsoft.com/office/drawing/2014/main" id="{851F3CD9-FF7C-4C81-A6D0-B6E4EE91B7E9}"/>
+                <a16:creationId xmlns:a16="http://schemas.microsoft.com/office/drawing/2014/main" id="{B1201180-A62E-4700-B472-04660A0A8DAA}"/>
               </a:ext>
             </a:extLst>
           </p:cNvPr>
@@ -4113,7 +4113,7 @@
           <p:cNvPr id="4" name="Footer Placeholder 3">
             <a:extLst xmlns:a="http://schemas.openxmlformats.org/drawingml/2006/main">
               <a:ext uri="{FF2B5EF4-FFF2-40B4-BE49-F238E27FC236}">
-                <a16:creationId xmlns:a16="http://schemas.microsoft.com/office/drawing/2014/main" id="{ECFECEEA-65DA-452B-A1FE-2A2ED2BE28CC}"/>
+                <a16:creationId xmlns:a16="http://schemas.microsoft.com/office/drawing/2014/main" id="{022C40F2-FC5F-4D97-8786-9E5986B50370}"/>
               </a:ext>
             </a:extLst>
           </p:cNvPr>
@@ -4136,7 +4136,7 @@
           <p:cNvPr id="5" name="Slide Number Placeholder 4">
             <a:extLst xmlns:a="http://schemas.openxmlformats.org/drawingml/2006/main">
               <a:ext uri="{FF2B5EF4-FFF2-40B4-BE49-F238E27FC236}">
-                <a16:creationId xmlns:a16="http://schemas.microsoft.com/office/drawing/2014/main" id="{88F7D9BB-56A2-4027-8454-8A4F6F4FCB98}"/>
+                <a16:creationId xmlns:a16="http://schemas.microsoft.com/office/drawing/2014/main" id="{DA6FDDA4-CEF2-4927-99B6-0AC3D80F3832}"/>
               </a:ext>
             </a:extLst>
           </p:cNvPr>
@@ -4180,7 +4180,7 @@
           <p:cNvPr id="2" name="Date Placeholder 1">
             <a:extLst xmlns:a="http://schemas.openxmlformats.org/drawingml/2006/main">
               <a:ext uri="{FF2B5EF4-FFF2-40B4-BE49-F238E27FC236}">
-                <a16:creationId xmlns:a16="http://schemas.microsoft.com/office/drawing/2014/main" id="{0B3F67EA-9E0C-41AE-8CDD-7DE2B777DDEC}"/>
+                <a16:creationId xmlns:a16="http://schemas.microsoft.com/office/drawing/2014/main" id="{2DB68C71-651C-475A-A59E-898D90AD91D9}"/>
               </a:ext>
             </a:extLst>
           </p:cNvPr>
@@ -4207,7 +4207,7 @@
           <p:cNvPr id="3" name="Footer Placeholder 2">
             <a:extLst xmlns:a="http://schemas.openxmlformats.org/drawingml/2006/main">
               <a:ext uri="{FF2B5EF4-FFF2-40B4-BE49-F238E27FC236}">
-                <a16:creationId xmlns:a16="http://schemas.microsoft.com/office/drawing/2014/main" id="{E94A1832-7EDA-4B7F-B75A-57B6D0E7D272}"/>
+                <a16:creationId xmlns:a16="http://schemas.microsoft.com/office/drawing/2014/main" id="{54FE7B7E-67E8-436E-8110-2CE335EFDB12}"/>
               </a:ext>
             </a:extLst>
           </p:cNvPr>
@@ -4230,7 +4230,7 @@
           <p:cNvPr id="4" name="Slide Number Placeholder 3">
             <a:extLst xmlns:a="http://schemas.openxmlformats.org/drawingml/2006/main">
               <a:ext uri="{FF2B5EF4-FFF2-40B4-BE49-F238E27FC236}">
-                <a16:creationId xmlns:a16="http://schemas.microsoft.com/office/drawing/2014/main" id="{E451E714-41AB-4C96-9230-B3BD82899B4D}"/>
+                <a16:creationId xmlns:a16="http://schemas.microsoft.com/office/drawing/2014/main" id="{12038C08-5C33-4B9B-8156-AD7AF2459B88}"/>
               </a:ext>
             </a:extLst>
           </p:cNvPr>
@@ -4274,7 +4274,7 @@
           <p:cNvPr id="2" name="Title 1">
             <a:extLst xmlns:a="http://schemas.openxmlformats.org/drawingml/2006/main">
               <a:ext uri="{FF2B5EF4-FFF2-40B4-BE49-F238E27FC236}">
-                <a16:creationId xmlns:a16="http://schemas.microsoft.com/office/drawing/2014/main" id="{F9612801-4E90-455F-BA1E-FA05DC2B308E}"/>
+                <a16:creationId xmlns:a16="http://schemas.microsoft.com/office/drawing/2014/main" id="{1248E800-FC62-4F9F-BCD2-A16C0E550DE1}"/>
               </a:ext>
             </a:extLst>
           </p:cNvPr>
@@ -4311,7 +4311,7 @@
           <p:cNvPr id="3" name="Content Placeholder 2">
             <a:extLst xmlns:a="http://schemas.openxmlformats.org/drawingml/2006/main">
               <a:ext uri="{FF2B5EF4-FFF2-40B4-BE49-F238E27FC236}">
-                <a16:creationId xmlns:a16="http://schemas.microsoft.com/office/drawing/2014/main" id="{8EF222A5-DBC4-4789-8EE3-B98DD9462F39}"/>
+                <a16:creationId xmlns:a16="http://schemas.microsoft.com/office/drawing/2014/main" id="{B1346454-D204-48DF-B1EE-68C1B89CDCE2}"/>
               </a:ext>
             </a:extLst>
           </p:cNvPr>
@@ -4415,7 +4415,7 @@
           <p:cNvPr id="4" name="Text Placeholder 3">
             <a:extLst xmlns:a="http://schemas.openxmlformats.org/drawingml/2006/main">
               <a:ext uri="{FF2B5EF4-FFF2-40B4-BE49-F238E27FC236}">
-                <a16:creationId xmlns:a16="http://schemas.microsoft.com/office/drawing/2014/main" id="{0480F63F-7C3E-411D-A8FD-ECB5B967AA99}"/>
+                <a16:creationId xmlns:a16="http://schemas.microsoft.com/office/drawing/2014/main" id="{2CC42245-1547-414C-9F07-286A92BA5F6B}"/>
               </a:ext>
             </a:extLst>
           </p:cNvPr>
@@ -4487,7 +4487,7 @@
           <p:cNvPr id="5" name="Date Placeholder 4">
             <a:extLst xmlns:a="http://schemas.openxmlformats.org/drawingml/2006/main">
               <a:ext uri="{FF2B5EF4-FFF2-40B4-BE49-F238E27FC236}">
-                <a16:creationId xmlns:a16="http://schemas.microsoft.com/office/drawing/2014/main" id="{E9786EA4-AB47-4AB6-89B6-57668572229C}"/>
+                <a16:creationId xmlns:a16="http://schemas.microsoft.com/office/drawing/2014/main" id="{13F11701-3DBA-42CD-992C-232A7586FD72}"/>
               </a:ext>
             </a:extLst>
           </p:cNvPr>
@@ -4514,7 +4514,7 @@
           <p:cNvPr id="6" name="Footer Placeholder 5">
             <a:extLst xmlns:a="http://schemas.openxmlformats.org/drawingml/2006/main">
               <a:ext uri="{FF2B5EF4-FFF2-40B4-BE49-F238E27FC236}">
-                <a16:creationId xmlns:a16="http://schemas.microsoft.com/office/drawing/2014/main" id="{CBDB8DB5-86BE-4F26-A0C5-76CAC8F717B6}"/>
+                <a16:creationId xmlns:a16="http://schemas.microsoft.com/office/drawing/2014/main" id="{67F0BF5D-D498-46BF-96D5-BC0A6BD56D28}"/>
               </a:ext>
             </a:extLst>
           </p:cNvPr>
@@ -4537,7 +4537,7 @@
           <p:cNvPr id="7" name="Slide Number Placeholder 6">
             <a:extLst xmlns:a="http://schemas.openxmlformats.org/drawingml/2006/main">
               <a:ext uri="{FF2B5EF4-FFF2-40B4-BE49-F238E27FC236}">
-                <a16:creationId xmlns:a16="http://schemas.microsoft.com/office/drawing/2014/main" id="{9AA6F5E2-BA11-40A5-B16F-11EDF3FB10A4}"/>
+                <a16:creationId xmlns:a16="http://schemas.microsoft.com/office/drawing/2014/main" id="{7B077877-31A7-4972-8C03-B23AB7608FDB}"/>
               </a:ext>
             </a:extLst>
           </p:cNvPr>
@@ -4581,7 +4581,7 @@
           <p:cNvPr id="2" name="Title 1">
             <a:extLst xmlns:a="http://schemas.openxmlformats.org/drawingml/2006/main">
               <a:ext uri="{FF2B5EF4-FFF2-40B4-BE49-F238E27FC236}">
-                <a16:creationId xmlns:a16="http://schemas.microsoft.com/office/drawing/2014/main" id="{9F07E05B-A2C3-4783-BE72-ABB89BD22CCB}"/>
+                <a16:creationId xmlns:a16="http://schemas.microsoft.com/office/drawing/2014/main" id="{4CAB5B8F-F87B-4512-BF39-F144D316619E}"/>
               </a:ext>
             </a:extLst>
           </p:cNvPr>
@@ -4618,7 +4618,7 @@
           <p:cNvPr id="3" name="Picture Placeholder 2">
             <a:extLst xmlns:a="http://schemas.openxmlformats.org/drawingml/2006/main">
               <a:ext uri="{FF2B5EF4-FFF2-40B4-BE49-F238E27FC236}">
-                <a16:creationId xmlns:a16="http://schemas.microsoft.com/office/drawing/2014/main" id="{E64AAA03-F367-47CA-911B-5EF4F8401CD5}"/>
+                <a16:creationId xmlns:a16="http://schemas.microsoft.com/office/drawing/2014/main" id="{B9604382-D038-4BEA-A809-C0F6E4FAAC5C}"/>
               </a:ext>
             </a:extLst>
           </p:cNvPr>
@@ -4683,7 +4683,7 @@
           <p:cNvPr id="4" name="Text Placeholder 3">
             <a:extLst xmlns:a="http://schemas.openxmlformats.org/drawingml/2006/main">
               <a:ext uri="{FF2B5EF4-FFF2-40B4-BE49-F238E27FC236}">
-                <a16:creationId xmlns:a16="http://schemas.microsoft.com/office/drawing/2014/main" id="{56720294-6032-44FD-A5DD-91E1D8414144}"/>
+                <a16:creationId xmlns:a16="http://schemas.microsoft.com/office/drawing/2014/main" id="{4104D936-19AE-4AA3-893B-C44A82AEC9E5}"/>
               </a:ext>
             </a:extLst>
           </p:cNvPr>
@@ -4755,7 +4755,7 @@
           <p:cNvPr id="5" name="Date Placeholder 4">
             <a:extLst xmlns:a="http://schemas.openxmlformats.org/drawingml/2006/main">
               <a:ext uri="{FF2B5EF4-FFF2-40B4-BE49-F238E27FC236}">
-                <a16:creationId xmlns:a16="http://schemas.microsoft.com/office/drawing/2014/main" id="{C2288689-CA15-4400-AF9F-97FFDA75DBBE}"/>
+                <a16:creationId xmlns:a16="http://schemas.microsoft.com/office/drawing/2014/main" id="{2FA5184C-19A4-442B-859D-56B38F7CE7FF}"/>
               </a:ext>
             </a:extLst>
           </p:cNvPr>
@@ -4782,7 +4782,7 @@
           <p:cNvPr id="6" name="Footer Placeholder 5">
             <a:extLst xmlns:a="http://schemas.openxmlformats.org/drawingml/2006/main">
               <a:ext uri="{FF2B5EF4-FFF2-40B4-BE49-F238E27FC236}">
-                <a16:creationId xmlns:a16="http://schemas.microsoft.com/office/drawing/2014/main" id="{1EB32595-656D-427E-99CC-55CE4E7506E7}"/>
+                <a16:creationId xmlns:a16="http://schemas.microsoft.com/office/drawing/2014/main" id="{2AD96EB0-4317-4EAD-87F3-801D8DEA0670}"/>
               </a:ext>
             </a:extLst>
           </p:cNvPr>
@@ -4805,7 +4805,7 @@
           <p:cNvPr id="7" name="Slide Number Placeholder 6">
             <a:extLst xmlns:a="http://schemas.openxmlformats.org/drawingml/2006/main">
               <a:ext uri="{FF2B5EF4-FFF2-40B4-BE49-F238E27FC236}">
-                <a16:creationId xmlns:a16="http://schemas.microsoft.com/office/drawing/2014/main" id="{D73A834E-DAC9-48E5-99EA-F424A0C52947}"/>
+                <a16:creationId xmlns:a16="http://schemas.microsoft.com/office/drawing/2014/main" id="{F3A9954E-58CF-4159-A225-98C4ED08D8FC}"/>
               </a:ext>
             </a:extLst>
           </p:cNvPr>
@@ -4854,7 +4854,7 @@
           <p:cNvPr id="2" name="Title Placeholder 1">
             <a:extLst xmlns:a="http://schemas.openxmlformats.org/drawingml/2006/main">
               <a:ext uri="{FF2B5EF4-FFF2-40B4-BE49-F238E27FC236}">
-                <a16:creationId xmlns:a16="http://schemas.microsoft.com/office/drawing/2014/main" id="{FBA682E7-EF3F-4F1F-9B85-22477FBFF985}"/>
+                <a16:creationId xmlns:a16="http://schemas.microsoft.com/office/drawing/2014/main" id="{BB22A619-11F3-4444-8AC3-7F309A9A5E74}"/>
               </a:ext>
             </a:extLst>
           </p:cNvPr>
@@ -4891,7 +4891,7 @@
           <p:cNvPr id="3" name="Text Placeholder 2">
             <a:extLst xmlns:a="http://schemas.openxmlformats.org/drawingml/2006/main">
               <a:ext uri="{FF2B5EF4-FFF2-40B4-BE49-F238E27FC236}">
-                <a16:creationId xmlns:a16="http://schemas.microsoft.com/office/drawing/2014/main" id="{51718A49-AB0B-492E-B787-C9AD01DAD7D1}"/>
+                <a16:creationId xmlns:a16="http://schemas.microsoft.com/office/drawing/2014/main" id="{B234C8BF-B18A-4930-9DD4-AB26B16B0ACF}"/>
               </a:ext>
             </a:extLst>
           </p:cNvPr>
@@ -4963,7 +4963,7 @@
           <p:cNvPr id="4" name="Date Placeholder 3">
             <a:extLst xmlns:a="http://schemas.openxmlformats.org/drawingml/2006/main">
               <a:ext uri="{FF2B5EF4-FFF2-40B4-BE49-F238E27FC236}">
-                <a16:creationId xmlns:a16="http://schemas.microsoft.com/office/drawing/2014/main" id="{10851313-D3EB-445B-AD3F-F7FB26F421E6}"/>
+                <a16:creationId xmlns:a16="http://schemas.microsoft.com/office/drawing/2014/main" id="{0788E573-4FF0-43EE-9642-B09071802684}"/>
               </a:ext>
             </a:extLst>
           </p:cNvPr>
@@ -5009,7 +5009,7 @@
           <p:cNvPr id="5" name="Footer Placeholder 4">
             <a:extLst xmlns:a="http://schemas.openxmlformats.org/drawingml/2006/main">
               <a:ext uri="{FF2B5EF4-FFF2-40B4-BE49-F238E27FC236}">
-                <a16:creationId xmlns:a16="http://schemas.microsoft.com/office/drawing/2014/main" id="{4C5CC808-BEEC-4698-918D-5A0787D43FE6}"/>
+                <a16:creationId xmlns:a16="http://schemas.microsoft.com/office/drawing/2014/main" id="{F3318BF3-8240-424E-B8B6-225B2CD457C2}"/>
               </a:ext>
             </a:extLst>
           </p:cNvPr>
@@ -5051,7 +5051,7 @@
           <p:cNvPr id="6" name="Slide Number Placeholder 5">
             <a:extLst xmlns:a="http://schemas.openxmlformats.org/drawingml/2006/main">
               <a:ext uri="{FF2B5EF4-FFF2-40B4-BE49-F238E27FC236}">
-                <a16:creationId xmlns:a16="http://schemas.microsoft.com/office/drawing/2014/main" id="{E0059A60-DF7B-449A-9025-64A8FD544A33}"/>
+                <a16:creationId xmlns:a16="http://schemas.microsoft.com/office/drawing/2014/main" id="{6E6107AE-25C7-44C8-9EBD-CA3423056A93}"/>
               </a:ext>
             </a:extLst>
           </p:cNvPr>
@@ -5096,17 +5096,17 @@
   </p:cSld>
   <p:clrMap bg1="lt1" tx1="dk1" bg2="lt2" tx2="dk2" accent1="accent1" accent2="accent2" accent3="accent3" accent4="accent4" accent5="accent5" accent6="accent6" hlink="hlink" folHlink="folHlink"/>
   <p:sldLayoutIdLst>
-    <p:sldLayoutId xmlns:r="http://schemas.openxmlformats.org/officeDocument/2006/relationships" id="2147483649" r:id="R2d21439c05994744"/>
-    <p:sldLayoutId xmlns:r="http://schemas.openxmlformats.org/officeDocument/2006/relationships" id="2147483650" r:id="R6b1e32b93d9b4a9a"/>
-    <p:sldLayoutId xmlns:r="http://schemas.openxmlformats.org/officeDocument/2006/relationships" id="2147483651" r:id="R0670efe7c5384c80"/>
-    <p:sldLayoutId xmlns:r="http://schemas.openxmlformats.org/officeDocument/2006/relationships" id="2147483652" r:id="R73aa5b1e82f24f33"/>
-    <p:sldLayoutId xmlns:r="http://schemas.openxmlformats.org/officeDocument/2006/relationships" id="2147483653" r:id="Rc998432617f74b44"/>
-    <p:sldLayoutId xmlns:r="http://schemas.openxmlformats.org/officeDocument/2006/relationships" id="2147483654" r:id="R23162117ef664724"/>
-    <p:sldLayoutId xmlns:r="http://schemas.openxmlformats.org/officeDocument/2006/relationships" id="2147483655" r:id="R2e7c481d17424b9a"/>
-    <p:sldLayoutId xmlns:r="http://schemas.openxmlformats.org/officeDocument/2006/relationships" id="2147483656" r:id="R028c58a473314f76"/>
-    <p:sldLayoutId xmlns:r="http://schemas.openxmlformats.org/officeDocument/2006/relationships" id="2147483657" r:id="Rd26b4a2fbf1c407e"/>
-    <p:sldLayoutId xmlns:r="http://schemas.openxmlformats.org/officeDocument/2006/relationships" id="2147483658" r:id="R1f4fe2a1ed074aea"/>
-    <p:sldLayoutId xmlns:r="http://schemas.openxmlformats.org/officeDocument/2006/relationships" id="2147483659" r:id="R62c49c8e159f4d96"/>
+    <p:sldLayoutId xmlns:r="http://schemas.openxmlformats.org/officeDocument/2006/relationships" id="2147483649" r:id="R7de63a313fb44dcd"/>
+    <p:sldLayoutId xmlns:r="http://schemas.openxmlformats.org/officeDocument/2006/relationships" id="2147483650" r:id="R3b98ec53c129407b"/>
+    <p:sldLayoutId xmlns:r="http://schemas.openxmlformats.org/officeDocument/2006/relationships" id="2147483651" r:id="Rfdfb29c8d23b4e58"/>
+    <p:sldLayoutId xmlns:r="http://schemas.openxmlformats.org/officeDocument/2006/relationships" id="2147483652" r:id="R44ecfc53f4f64a34"/>
+    <p:sldLayoutId xmlns:r="http://schemas.openxmlformats.org/officeDocument/2006/relationships" id="2147483653" r:id="Rcd3f02ae791044ff"/>
+    <p:sldLayoutId xmlns:r="http://schemas.openxmlformats.org/officeDocument/2006/relationships" id="2147483654" r:id="R89526b29f5a74cbc"/>
+    <p:sldLayoutId xmlns:r="http://schemas.openxmlformats.org/officeDocument/2006/relationships" id="2147483655" r:id="Rf54ea4773d644144"/>
+    <p:sldLayoutId xmlns:r="http://schemas.openxmlformats.org/officeDocument/2006/relationships" id="2147483656" r:id="R73866badcf454742"/>
+    <p:sldLayoutId xmlns:r="http://schemas.openxmlformats.org/officeDocument/2006/relationships" id="2147483657" r:id="Rb647e1c6a3ee4475"/>
+    <p:sldLayoutId xmlns:r="http://schemas.openxmlformats.org/officeDocument/2006/relationships" id="2147483658" r:id="R6e9fc39988834d60"/>
+    <p:sldLayoutId xmlns:r="http://schemas.openxmlformats.org/officeDocument/2006/relationships" id="2147483659" r:id="Rdf5e6149b7d84d01"/>
   </p:sldLayoutIdLst>
   <p:txStyles>
     <p:titleStyle>
@@ -5659,7 +5659,7 @@
           <p:cNvPr id="2" name="Rectangle 1">
             <a:extLst xmlns:a="http://schemas.openxmlformats.org/drawingml/2006/main">
               <a:ext uri="{FF2B5EF4-FFF2-40B4-BE49-F238E27FC236}">
-                <a16:creationId xmlns:a16="http://schemas.microsoft.com/office/drawing/2014/main" id="{9F5173B1-35ED-4CE3-B8E7-06D96353DC75}"/>
+                <a16:creationId xmlns:a16="http://schemas.microsoft.com/office/drawing/2014/main" id="{07664F66-6050-410C-8829-3B4B86A48C7D}"/>
               </a:ext>
             </a:extLst>
           </p:cNvPr>
@@ -5714,7 +5714,7 @@
           <p:cNvPr id="3" name="TextBox 2">
             <a:extLst xmlns:a="http://schemas.openxmlformats.org/drawingml/2006/main">
               <a:ext uri="{FF2B5EF4-FFF2-40B4-BE49-F238E27FC236}">
-                <a16:creationId xmlns:a16="http://schemas.microsoft.com/office/drawing/2014/main" id="{AFCBD310-8DF1-47B0-95EF-6D302628AF36}"/>
+                <a16:creationId xmlns:a16="http://schemas.microsoft.com/office/drawing/2014/main" id="{258A88F0-FFEE-4679-B121-D0D6FFECC5B9}"/>
               </a:ext>
             </a:extLst>
           </p:cNvPr>
@@ -5761,7 +5761,7 @@
           <p:cNvPr id="4" name="TextBox 3">
             <a:extLst xmlns:a="http://schemas.openxmlformats.org/drawingml/2006/main">
               <a:ext uri="{FF2B5EF4-FFF2-40B4-BE49-F238E27FC236}">
-                <a16:creationId xmlns:a16="http://schemas.microsoft.com/office/drawing/2014/main" id="{03CCFBE3-4E79-44D0-B6DD-D632AF41F643}"/>
+                <a16:creationId xmlns:a16="http://schemas.microsoft.com/office/drawing/2014/main" id="{118AB0A0-107D-4EB2-BD55-8A09E568C741}"/>
               </a:ext>
             </a:extLst>
           </p:cNvPr>
@@ -5809,7 +5809,7 @@
           <p:cNvPr id="5" name="TextBox 4">
             <a:extLst xmlns:a="http://schemas.openxmlformats.org/drawingml/2006/main">
               <a:ext uri="{FF2B5EF4-FFF2-40B4-BE49-F238E27FC236}">
-                <a16:creationId xmlns:a16="http://schemas.microsoft.com/office/drawing/2014/main" id="{1E713096-A3FC-443A-A583-C0F0899A75F3}"/>
+                <a16:creationId xmlns:a16="http://schemas.microsoft.com/office/drawing/2014/main" id="{471F3F4A-42E2-40CD-A19D-D657B25FD43E}"/>
               </a:ext>
             </a:extLst>
           </p:cNvPr>
@@ -5856,7 +5856,7 @@
           <p:cNvPr id="6" name="Rectangle 5">
             <a:extLst xmlns:a="http://schemas.openxmlformats.org/drawingml/2006/main">
               <a:ext uri="{FF2B5EF4-FFF2-40B4-BE49-F238E27FC236}">
-                <a16:creationId xmlns:a16="http://schemas.microsoft.com/office/drawing/2014/main" id="{AC90BEEF-80EB-4955-A622-77CCBD47C655}"/>
+                <a16:creationId xmlns:a16="http://schemas.microsoft.com/office/drawing/2014/main" id="{7B8E0133-7DEC-418C-96BC-8BB4D657FBB8}"/>
               </a:ext>
             </a:extLst>
           </p:cNvPr>
@@ -5911,7 +5911,7 @@
           <p:cNvPr id="7" name="TextBox 6">
             <a:extLst xmlns:a="http://schemas.openxmlformats.org/drawingml/2006/main">
               <a:ext uri="{FF2B5EF4-FFF2-40B4-BE49-F238E27FC236}">
-                <a16:creationId xmlns:a16="http://schemas.microsoft.com/office/drawing/2014/main" id="{E6CD5A7A-B80B-491C-A121-023515377FF7}"/>
+                <a16:creationId xmlns:a16="http://schemas.microsoft.com/office/drawing/2014/main" id="{4A597FA9-59CA-4EAA-892C-19AA50185999}"/>
               </a:ext>
             </a:extLst>
           </p:cNvPr>
@@ -5958,7 +5958,7 @@
           <p:cNvPr id="8" name="TextBox 7">
             <a:extLst xmlns:a="http://schemas.openxmlformats.org/drawingml/2006/main">
               <a:ext uri="{FF2B5EF4-FFF2-40B4-BE49-F238E27FC236}">
-                <a16:creationId xmlns:a16="http://schemas.microsoft.com/office/drawing/2014/main" id="{9E3C452A-D34A-4D9E-A6DD-945FD261092E}"/>
+                <a16:creationId xmlns:a16="http://schemas.microsoft.com/office/drawing/2014/main" id="{18D91328-E034-433A-978E-929590AB66E9}"/>
               </a:ext>
             </a:extLst>
           </p:cNvPr>
@@ -5995,7 +5995,7 @@
                 <a:ea typeface="Aptos"/>
                 <a:cs typeface="Aptos"/>
               </a:rPr>
-              <a:t>2026.07.29-35</a:t>
+              <a:t>2026.07.30-36</a:t>
             </a:r>
           </a:p>
         </p:txBody>
@@ -6005,7 +6005,7 @@
           <p:cNvPr id="9" name="TextBox 8">
             <a:extLst xmlns:a="http://schemas.openxmlformats.org/drawingml/2006/main">
               <a:ext uri="{FF2B5EF4-FFF2-40B4-BE49-F238E27FC236}">
-                <a16:creationId xmlns:a16="http://schemas.microsoft.com/office/drawing/2014/main" id="{24B6AB67-4209-462F-AAB5-9A4E4B64ABE2}"/>
+                <a16:creationId xmlns:a16="http://schemas.microsoft.com/office/drawing/2014/main" id="{C4ADF142-38B9-42ED-BD0D-7697933C88BC}"/>
               </a:ext>
             </a:extLst>
           </p:cNvPr>
@@ -6042,7 +6042,7 @@
                 <a:ea typeface="Aptos"/>
                 <a:cs typeface="Aptos"/>
               </a:rPr>
-              <a:t>Päivitetty 2026-07-29</a:t>
+              <a:t>Päivitetty 2026-07-30</a:t>
             </a:r>
             <a:br>
               <a:rPr sz="1700" b="0">
@@ -6073,7 +6073,7 @@
           <p:cNvPr id="10" name="TextBox 9">
             <a:extLst xmlns:a="http://schemas.openxmlformats.org/drawingml/2006/main">
               <a:ext uri="{FF2B5EF4-FFF2-40B4-BE49-F238E27FC236}">
-                <a16:creationId xmlns:a16="http://schemas.microsoft.com/office/drawing/2014/main" id="{9EBCBB60-928B-40FB-B845-6ED7B9CCD8B9}"/>
+                <a16:creationId xmlns:a16="http://schemas.microsoft.com/office/drawing/2014/main" id="{CA281209-E800-4147-9EEB-048939788F21}"/>
               </a:ext>
             </a:extLst>
           </p:cNvPr>
@@ -6120,7 +6120,7 @@
           <p:cNvPr id="11" name="TextBox 10">
             <a:extLst xmlns:a="http://schemas.openxmlformats.org/drawingml/2006/main">
               <a:ext uri="{FF2B5EF4-FFF2-40B4-BE49-F238E27FC236}">
-                <a16:creationId xmlns:a16="http://schemas.microsoft.com/office/drawing/2014/main" id="{926EB3D2-71B9-437C-86F8-C1641D307892}"/>
+                <a16:creationId xmlns:a16="http://schemas.microsoft.com/office/drawing/2014/main" id="{F63580BC-0C10-4D3F-88AC-5F5ED5D40330}"/>
               </a:ext>
             </a:extLst>
           </p:cNvPr>
@@ -6167,7 +6167,7 @@
           <p:cNvPr id="12" name="TextBox 11">
             <a:extLst xmlns:a="http://schemas.openxmlformats.org/drawingml/2006/main">
               <a:ext uri="{FF2B5EF4-FFF2-40B4-BE49-F238E27FC236}">
-                <a16:creationId xmlns:a16="http://schemas.microsoft.com/office/drawing/2014/main" id="{FA1D4563-0115-4F8A-B4CA-FD4F753E9EF2}"/>
+                <a16:creationId xmlns:a16="http://schemas.microsoft.com/office/drawing/2014/main" id="{30F95430-639E-4F0D-B7C0-37B893736AE5}"/>
               </a:ext>
             </a:extLst>
           </p:cNvPr>
@@ -6212,7 +6212,7 @@
     </p:spTree>
     <p:extLst>
       <p:ext uri="{BB962C8B-B14F-4D97-AF65-F5344CB8AC3E}">
-        <p14:creationId xmlns:p14="http://schemas.microsoft.com/office/powerpoint/2010/main" val="1054279085"/>
+        <p14:creationId xmlns:p14="http://schemas.microsoft.com/office/powerpoint/2010/main" val="1933144937"/>
       </p:ext>
     </p:extLst>
   </p:cSld>
@@ -6236,7 +6236,7 @@
           <p:cNvPr id="2" name="TextBox 1">
             <a:extLst xmlns:a="http://schemas.openxmlformats.org/drawingml/2006/main">
               <a:ext uri="{FF2B5EF4-FFF2-40B4-BE49-F238E27FC236}">
-                <a16:creationId xmlns:a16="http://schemas.microsoft.com/office/drawing/2014/main" id="{886F23F1-524B-494F-8003-51E6F85C5E4C}"/>
+                <a16:creationId xmlns:a16="http://schemas.microsoft.com/office/drawing/2014/main" id="{6F046846-3009-40C1-980B-FDA50B3343F9}"/>
               </a:ext>
             </a:extLst>
           </p:cNvPr>
@@ -6283,7 +6283,7 @@
           <p:cNvPr id="3" name="TextBox 2">
             <a:extLst xmlns:a="http://schemas.openxmlformats.org/drawingml/2006/main">
               <a:ext uri="{FF2B5EF4-FFF2-40B4-BE49-F238E27FC236}">
-                <a16:creationId xmlns:a16="http://schemas.microsoft.com/office/drawing/2014/main" id="{F5AED33D-6D25-4FE3-B79E-B0416756E7E9}"/>
+                <a16:creationId xmlns:a16="http://schemas.microsoft.com/office/drawing/2014/main" id="{7DB00B56-0483-4F24-B661-523E7072F4BE}"/>
               </a:ext>
             </a:extLst>
           </p:cNvPr>
@@ -6330,7 +6330,7 @@
           <p:cNvPr id="4" name="Rectangle 3">
             <a:extLst xmlns:a="http://schemas.openxmlformats.org/drawingml/2006/main">
               <a:ext uri="{FF2B5EF4-FFF2-40B4-BE49-F238E27FC236}">
-                <a16:creationId xmlns:a16="http://schemas.microsoft.com/office/drawing/2014/main" id="{21587885-9551-40CD-9EB4-C5923BB8FF2E}"/>
+                <a16:creationId xmlns:a16="http://schemas.microsoft.com/office/drawing/2014/main" id="{24625681-A7C9-4E28-8995-2CDAC8F6398A}"/>
               </a:ext>
             </a:extLst>
           </p:cNvPr>
@@ -6385,7 +6385,7 @@
           <p:cNvPr id="5" name="Rectangle 4">
             <a:extLst xmlns:a="http://schemas.openxmlformats.org/drawingml/2006/main">
               <a:ext uri="{FF2B5EF4-FFF2-40B4-BE49-F238E27FC236}">
-                <a16:creationId xmlns:a16="http://schemas.microsoft.com/office/drawing/2014/main" id="{5A194990-D7CF-46E3-B647-8F8E3BD45D1D}"/>
+                <a16:creationId xmlns:a16="http://schemas.microsoft.com/office/drawing/2014/main" id="{92B1D24E-C4F2-4E5B-8C30-A72C07854778}"/>
               </a:ext>
             </a:extLst>
           </p:cNvPr>
@@ -6440,7 +6440,7 @@
           <p:cNvPr id="6" name="TextBox 5">
             <a:extLst xmlns:a="http://schemas.openxmlformats.org/drawingml/2006/main">
               <a:ext uri="{FF2B5EF4-FFF2-40B4-BE49-F238E27FC236}">
-                <a16:creationId xmlns:a16="http://schemas.microsoft.com/office/drawing/2014/main" id="{3CFB6869-1519-4237-AFD7-D9202E8C856B}"/>
+                <a16:creationId xmlns:a16="http://schemas.microsoft.com/office/drawing/2014/main" id="{78FEC5E4-3095-4B73-9E41-152A548C8A7B}"/>
               </a:ext>
             </a:extLst>
           </p:cNvPr>
@@ -6477,7 +6477,7 @@
                 <a:ea typeface="Aptos"/>
                 <a:cs typeface="Aptos"/>
               </a:rPr>
-              <a:t>Julkinen riippumaton evidenssikooste · 2026.07.29-35 · 2026-07-29 · Lähteet: EPO; Saksa — viralliset tuomiot; WIPO</a:t>
+              <a:t>Julkinen riippumaton evidenssikooste · 2026.07.30-36 · 2026-07-30 · Lähteet: EPO; Saksa — viralliset tuomiot; WIPO</a:t>
             </a:r>
           </a:p>
         </p:txBody>
@@ -6487,7 +6487,7 @@
           <p:cNvPr id="7" name="TextBox 6">
             <a:extLst xmlns:a="http://schemas.openxmlformats.org/drawingml/2006/main">
               <a:ext uri="{FF2B5EF4-FFF2-40B4-BE49-F238E27FC236}">
-                <a16:creationId xmlns:a16="http://schemas.microsoft.com/office/drawing/2014/main" id="{82079BE8-C998-4489-A684-C513B1FE590F}"/>
+                <a16:creationId xmlns:a16="http://schemas.microsoft.com/office/drawing/2014/main" id="{6902F898-66B6-46A2-B19C-7166651473C4}"/>
               </a:ext>
             </a:extLst>
           </p:cNvPr>
@@ -6534,7 +6534,7 @@
           <p:cNvPr id="8" name="TextBox 7">
             <a:extLst xmlns:a="http://schemas.openxmlformats.org/drawingml/2006/main">
               <a:ext uri="{FF2B5EF4-FFF2-40B4-BE49-F238E27FC236}">
-                <a16:creationId xmlns:a16="http://schemas.microsoft.com/office/drawing/2014/main" id="{62C1E0BA-2308-4CE7-AA11-E7CB460D3A04}"/>
+                <a16:creationId xmlns:a16="http://schemas.microsoft.com/office/drawing/2014/main" id="{E8F682F4-AF3F-4001-9D11-3C9E64F90D35}"/>
               </a:ext>
             </a:extLst>
           </p:cNvPr>
@@ -6581,7 +6581,7 @@
           <p:cNvPr id="9" name="TextBox 8">
             <a:extLst xmlns:a="http://schemas.openxmlformats.org/drawingml/2006/main">
               <a:ext uri="{FF2B5EF4-FFF2-40B4-BE49-F238E27FC236}">
-                <a16:creationId xmlns:a16="http://schemas.microsoft.com/office/drawing/2014/main" id="{F88A0B29-6AD8-4704-A02A-FC74C1794DE3}"/>
+                <a16:creationId xmlns:a16="http://schemas.microsoft.com/office/drawing/2014/main" id="{9EA23677-179F-41F5-A602-124EC37AA00D}"/>
               </a:ext>
             </a:extLst>
           </p:cNvPr>
@@ -6678,7 +6678,7 @@
           <p:cNvPr id="10" name="Rounded Rectangle 9">
             <a:extLst xmlns:a="http://schemas.openxmlformats.org/drawingml/2006/main">
               <a:ext uri="{FF2B5EF4-FFF2-40B4-BE49-F238E27FC236}">
-                <a16:creationId xmlns:a16="http://schemas.microsoft.com/office/drawing/2014/main" id="{A54CE897-9485-46F5-8ED7-CA877245546D}"/>
+                <a16:creationId xmlns:a16="http://schemas.microsoft.com/office/drawing/2014/main" id="{86E3E0AB-51E2-4B14-8DBE-74EF07D79DF1}"/>
               </a:ext>
             </a:extLst>
           </p:cNvPr>
@@ -6735,7 +6735,7 @@
           <p:cNvPr id="11" name="TextBox 10">
             <a:extLst xmlns:a="http://schemas.openxmlformats.org/drawingml/2006/main">
               <a:ext uri="{FF2B5EF4-FFF2-40B4-BE49-F238E27FC236}">
-                <a16:creationId xmlns:a16="http://schemas.microsoft.com/office/drawing/2014/main" id="{81C5ACD8-90D9-40CD-AB76-99F795EA19D0}"/>
+                <a16:creationId xmlns:a16="http://schemas.microsoft.com/office/drawing/2014/main" id="{8E3CB54D-D9AF-4D51-B5AB-AEF144A8C3AA}"/>
               </a:ext>
             </a:extLst>
           </p:cNvPr>
@@ -6782,7 +6782,7 @@
           <p:cNvPr id="12" name="TextBox 11">
             <a:extLst xmlns:a="http://schemas.openxmlformats.org/drawingml/2006/main">
               <a:ext uri="{FF2B5EF4-FFF2-40B4-BE49-F238E27FC236}">
-                <a16:creationId xmlns:a16="http://schemas.microsoft.com/office/drawing/2014/main" id="{0927616A-F26B-4EA8-B589-D8F6681B9E8E}"/>
+                <a16:creationId xmlns:a16="http://schemas.microsoft.com/office/drawing/2014/main" id="{F9433402-1B76-4406-90DC-43702F7DBD3E}"/>
               </a:ext>
             </a:extLst>
           </p:cNvPr>
@@ -6827,7 +6827,7 @@
     </p:spTree>
     <p:extLst>
       <p:ext uri="{BB962C8B-B14F-4D97-AF65-F5344CB8AC3E}">
-        <p14:creationId xmlns:p14="http://schemas.microsoft.com/office/powerpoint/2010/main" val="1802320111"/>
+        <p14:creationId xmlns:p14="http://schemas.microsoft.com/office/powerpoint/2010/main" val="1361539060"/>
       </p:ext>
     </p:extLst>
   </p:cSld>
@@ -6851,7 +6851,7 @@
           <p:cNvPr id="2" name="TextBox 1">
             <a:extLst xmlns:a="http://schemas.openxmlformats.org/drawingml/2006/main">
               <a:ext uri="{FF2B5EF4-FFF2-40B4-BE49-F238E27FC236}">
-                <a16:creationId xmlns:a16="http://schemas.microsoft.com/office/drawing/2014/main" id="{B5A59BF5-ED28-48CD-A6E8-2E5E9B9A9FD2}"/>
+                <a16:creationId xmlns:a16="http://schemas.microsoft.com/office/drawing/2014/main" id="{D3B975BE-7DE8-45AA-95FD-2342B0799A2E}"/>
               </a:ext>
             </a:extLst>
           </p:cNvPr>
@@ -6898,7 +6898,7 @@
           <p:cNvPr id="3" name="TextBox 2">
             <a:extLst xmlns:a="http://schemas.openxmlformats.org/drawingml/2006/main">
               <a:ext uri="{FF2B5EF4-FFF2-40B4-BE49-F238E27FC236}">
-                <a16:creationId xmlns:a16="http://schemas.microsoft.com/office/drawing/2014/main" id="{DBB39FB9-63C4-4FA7-90B5-CCFAD2E807CA}"/>
+                <a16:creationId xmlns:a16="http://schemas.microsoft.com/office/drawing/2014/main" id="{EFAA8DD8-4F53-4B84-90F1-BF3D4EA56BE8}"/>
               </a:ext>
             </a:extLst>
           </p:cNvPr>
@@ -6945,7 +6945,7 @@
           <p:cNvPr id="4" name="Rectangle 3">
             <a:extLst xmlns:a="http://schemas.openxmlformats.org/drawingml/2006/main">
               <a:ext uri="{FF2B5EF4-FFF2-40B4-BE49-F238E27FC236}">
-                <a16:creationId xmlns:a16="http://schemas.microsoft.com/office/drawing/2014/main" id="{6662FD2D-0144-472F-A25C-A2F04292AB35}"/>
+                <a16:creationId xmlns:a16="http://schemas.microsoft.com/office/drawing/2014/main" id="{98391E41-6E6C-43A2-9AB8-F5961974E79F}"/>
               </a:ext>
             </a:extLst>
           </p:cNvPr>
@@ -7000,7 +7000,7 @@
           <p:cNvPr id="5" name="Rectangle 4">
             <a:extLst xmlns:a="http://schemas.openxmlformats.org/drawingml/2006/main">
               <a:ext uri="{FF2B5EF4-FFF2-40B4-BE49-F238E27FC236}">
-                <a16:creationId xmlns:a16="http://schemas.microsoft.com/office/drawing/2014/main" id="{BBC1F6BB-24D1-4619-AC3F-3B521C9E7E7E}"/>
+                <a16:creationId xmlns:a16="http://schemas.microsoft.com/office/drawing/2014/main" id="{0DF536E5-A042-45AD-B6AC-4A90E07DDDE8}"/>
               </a:ext>
             </a:extLst>
           </p:cNvPr>
@@ -7055,7 +7055,7 @@
           <p:cNvPr id="6" name="TextBox 5">
             <a:extLst xmlns:a="http://schemas.openxmlformats.org/drawingml/2006/main">
               <a:ext uri="{FF2B5EF4-FFF2-40B4-BE49-F238E27FC236}">
-                <a16:creationId xmlns:a16="http://schemas.microsoft.com/office/drawing/2014/main" id="{3C3643DC-CB13-4CB1-83AD-FBA494DE83E3}"/>
+                <a16:creationId xmlns:a16="http://schemas.microsoft.com/office/drawing/2014/main" id="{730284C6-523F-4A5B-A315-57258A49FFF3}"/>
               </a:ext>
             </a:extLst>
           </p:cNvPr>
@@ -7092,7 +7092,7 @@
                 <a:ea typeface="Aptos"/>
                 <a:cs typeface="Aptos"/>
               </a:rPr>
-              <a:t>Julkinen riippumaton evidenssikooste · 2026.07.29-35 · 2026-07-29 · Lähteet: EPO Register; EP3032975B2; 8 Ni 18/24 (EP); 7 O 3341/24</a:t>
+              <a:t>Julkinen riippumaton evidenssikooste · 2026.07.30-36 · 2026-07-30 · Lähteet: EPO Register; EP3032975B2; 8 Ni 18/24 (EP); 7 O 3341/24</a:t>
             </a:r>
           </a:p>
         </p:txBody>
@@ -7102,7 +7102,7 @@
           <p:cNvPr id="7" name="TextBox 6">
             <a:extLst xmlns:a="http://schemas.openxmlformats.org/drawingml/2006/main">
               <a:ext uri="{FF2B5EF4-FFF2-40B4-BE49-F238E27FC236}">
-                <a16:creationId xmlns:a16="http://schemas.microsoft.com/office/drawing/2014/main" id="{B2DC471B-565E-4A6C-A2D2-024134805D2E}"/>
+                <a16:creationId xmlns:a16="http://schemas.microsoft.com/office/drawing/2014/main" id="{8E1FE3BC-B95E-4719-9A52-7B4093B7E725}"/>
               </a:ext>
             </a:extLst>
           </p:cNvPr>
@@ -7149,7 +7149,7 @@
           <p:cNvPr id="8" name="Rounded Rectangle 7">
             <a:extLst xmlns:a="http://schemas.openxmlformats.org/drawingml/2006/main">
               <a:ext uri="{FF2B5EF4-FFF2-40B4-BE49-F238E27FC236}">
-                <a16:creationId xmlns:a16="http://schemas.microsoft.com/office/drawing/2014/main" id="{D6597D18-8029-4FAD-8984-D377B71C70FD}"/>
+                <a16:creationId xmlns:a16="http://schemas.microsoft.com/office/drawing/2014/main" id="{F41ED8E2-BC96-45BE-B56D-40DF80574318}"/>
               </a:ext>
             </a:extLst>
           </p:cNvPr>
@@ -7206,7 +7206,7 @@
           <p:cNvPr id="9" name="TextBox 8">
             <a:extLst xmlns:a="http://schemas.openxmlformats.org/drawingml/2006/main">
               <a:ext uri="{FF2B5EF4-FFF2-40B4-BE49-F238E27FC236}">
-                <a16:creationId xmlns:a16="http://schemas.microsoft.com/office/drawing/2014/main" id="{8379B0F3-1F8F-42BD-92D9-DAC3B8CF25AF}"/>
+                <a16:creationId xmlns:a16="http://schemas.microsoft.com/office/drawing/2014/main" id="{5F4A7100-3897-44DE-AA9B-44B99944D67A}"/>
               </a:ext>
             </a:extLst>
           </p:cNvPr>
@@ -7253,7 +7253,7 @@
           <p:cNvPr id="10" name="TextBox 9">
             <a:extLst xmlns:a="http://schemas.openxmlformats.org/drawingml/2006/main">
               <a:ext uri="{FF2B5EF4-FFF2-40B4-BE49-F238E27FC236}">
-                <a16:creationId xmlns:a16="http://schemas.microsoft.com/office/drawing/2014/main" id="{AE890163-0E36-4494-929B-A296D3A6C033}"/>
+                <a16:creationId xmlns:a16="http://schemas.microsoft.com/office/drawing/2014/main" id="{EFB7F8BA-2A01-4A11-82A5-1E6119F08EA9}"/>
               </a:ext>
             </a:extLst>
           </p:cNvPr>
@@ -7300,7 +7300,7 @@
           <p:cNvPr id="11" name="Rounded Rectangle 10">
             <a:extLst xmlns:a="http://schemas.openxmlformats.org/drawingml/2006/main">
               <a:ext uri="{FF2B5EF4-FFF2-40B4-BE49-F238E27FC236}">
-                <a16:creationId xmlns:a16="http://schemas.microsoft.com/office/drawing/2014/main" id="{0F548C65-9163-4F01-AB47-B0DB369132AB}"/>
+                <a16:creationId xmlns:a16="http://schemas.microsoft.com/office/drawing/2014/main" id="{0A90137A-BF66-4FA4-936D-C60E9B285265}"/>
               </a:ext>
             </a:extLst>
           </p:cNvPr>
@@ -7357,7 +7357,7 @@
           <p:cNvPr id="12" name="TextBox 11">
             <a:extLst xmlns:a="http://schemas.openxmlformats.org/drawingml/2006/main">
               <a:ext uri="{FF2B5EF4-FFF2-40B4-BE49-F238E27FC236}">
-                <a16:creationId xmlns:a16="http://schemas.microsoft.com/office/drawing/2014/main" id="{BBDE1F84-EB76-4B70-AB9D-17C214548B2A}"/>
+                <a16:creationId xmlns:a16="http://schemas.microsoft.com/office/drawing/2014/main" id="{EF8D83F3-A706-49EF-B66B-A550976C1C81}"/>
               </a:ext>
             </a:extLst>
           </p:cNvPr>
@@ -7404,7 +7404,7 @@
           <p:cNvPr id="13" name="TextBox 12">
             <a:extLst xmlns:a="http://schemas.openxmlformats.org/drawingml/2006/main">
               <a:ext uri="{FF2B5EF4-FFF2-40B4-BE49-F238E27FC236}">
-                <a16:creationId xmlns:a16="http://schemas.microsoft.com/office/drawing/2014/main" id="{F5B2AE6D-4451-4E1E-B972-0F0BBDC94C8E}"/>
+                <a16:creationId xmlns:a16="http://schemas.microsoft.com/office/drawing/2014/main" id="{57CC2A4F-C57F-47E4-8684-131F80061A3B}"/>
               </a:ext>
             </a:extLst>
           </p:cNvPr>
@@ -7451,7 +7451,7 @@
           <p:cNvPr id="14" name="Rounded Rectangle 13">
             <a:extLst xmlns:a="http://schemas.openxmlformats.org/drawingml/2006/main">
               <a:ext uri="{FF2B5EF4-FFF2-40B4-BE49-F238E27FC236}">
-                <a16:creationId xmlns:a16="http://schemas.microsoft.com/office/drawing/2014/main" id="{F2270BA6-DAD2-4DE2-ABB7-2803CE77E116}"/>
+                <a16:creationId xmlns:a16="http://schemas.microsoft.com/office/drawing/2014/main" id="{20682516-3341-4D32-87D6-6734EF61AB49}"/>
               </a:ext>
             </a:extLst>
           </p:cNvPr>
@@ -7508,7 +7508,7 @@
           <p:cNvPr id="15" name="TextBox 14">
             <a:extLst xmlns:a="http://schemas.openxmlformats.org/drawingml/2006/main">
               <a:ext uri="{FF2B5EF4-FFF2-40B4-BE49-F238E27FC236}">
-                <a16:creationId xmlns:a16="http://schemas.microsoft.com/office/drawing/2014/main" id="{85E07061-22ED-44EE-B4C9-13AA41C7F5FA}"/>
+                <a16:creationId xmlns:a16="http://schemas.microsoft.com/office/drawing/2014/main" id="{78900AB0-0EDF-4E35-839C-D9C9E4F1E402}"/>
               </a:ext>
             </a:extLst>
           </p:cNvPr>
@@ -7555,7 +7555,7 @@
           <p:cNvPr id="16" name="TextBox 15">
             <a:extLst xmlns:a="http://schemas.openxmlformats.org/drawingml/2006/main">
               <a:ext uri="{FF2B5EF4-FFF2-40B4-BE49-F238E27FC236}">
-                <a16:creationId xmlns:a16="http://schemas.microsoft.com/office/drawing/2014/main" id="{683BF430-6DAC-49B0-843B-7E694B7E01B3}"/>
+                <a16:creationId xmlns:a16="http://schemas.microsoft.com/office/drawing/2014/main" id="{294C7FB7-6922-467E-9A07-3D0B5BE0C240}"/>
               </a:ext>
             </a:extLst>
           </p:cNvPr>
@@ -7602,7 +7602,7 @@
           <p:cNvPr id="17" name="TextBox 16">
             <a:extLst xmlns:a="http://schemas.openxmlformats.org/drawingml/2006/main">
               <a:ext uri="{FF2B5EF4-FFF2-40B4-BE49-F238E27FC236}">
-                <a16:creationId xmlns:a16="http://schemas.microsoft.com/office/drawing/2014/main" id="{C2A2426E-EB43-4A6A-B261-1E6EC98104A1}"/>
+                <a16:creationId xmlns:a16="http://schemas.microsoft.com/office/drawing/2014/main" id="{74918B2E-9DE2-418E-910E-D3EE1C449E7F}"/>
               </a:ext>
             </a:extLst>
           </p:cNvPr>
@@ -7649,7 +7649,7 @@
           <p:cNvPr id="18" name="Rounded Rectangle 17">
             <a:extLst xmlns:a="http://schemas.openxmlformats.org/drawingml/2006/main">
               <a:ext uri="{FF2B5EF4-FFF2-40B4-BE49-F238E27FC236}">
-                <a16:creationId xmlns:a16="http://schemas.microsoft.com/office/drawing/2014/main" id="{54A0F9AF-4D62-4473-96DA-56D292548857}"/>
+                <a16:creationId xmlns:a16="http://schemas.microsoft.com/office/drawing/2014/main" id="{FC7A7F45-B378-4AB7-BEBA-6FC7AC5F3A4E}"/>
               </a:ext>
             </a:extLst>
           </p:cNvPr>
@@ -7706,7 +7706,7 @@
           <p:cNvPr id="19" name="TextBox 18">
             <a:extLst xmlns:a="http://schemas.openxmlformats.org/drawingml/2006/main">
               <a:ext uri="{FF2B5EF4-FFF2-40B4-BE49-F238E27FC236}">
-                <a16:creationId xmlns:a16="http://schemas.microsoft.com/office/drawing/2014/main" id="{B4BCBFF2-C62C-42BD-A60A-6C4BB9CB9E70}"/>
+                <a16:creationId xmlns:a16="http://schemas.microsoft.com/office/drawing/2014/main" id="{441D2A6D-668E-4218-A549-74245035602B}"/>
               </a:ext>
             </a:extLst>
           </p:cNvPr>
@@ -7753,7 +7753,7 @@
           <p:cNvPr id="20" name="TextBox 19">
             <a:extLst xmlns:a="http://schemas.openxmlformats.org/drawingml/2006/main">
               <a:ext uri="{FF2B5EF4-FFF2-40B4-BE49-F238E27FC236}">
-                <a16:creationId xmlns:a16="http://schemas.microsoft.com/office/drawing/2014/main" id="{184936CC-37EA-4027-B950-C6104BC0C6C4}"/>
+                <a16:creationId xmlns:a16="http://schemas.microsoft.com/office/drawing/2014/main" id="{180A2EF0-7812-4EF6-8DBB-666DD03154B2}"/>
               </a:ext>
             </a:extLst>
           </p:cNvPr>
@@ -7798,7 +7798,7 @@
     </p:spTree>
     <p:extLst>
       <p:ext uri="{BB962C8B-B14F-4D97-AF65-F5344CB8AC3E}">
-        <p14:creationId xmlns:p14="http://schemas.microsoft.com/office/powerpoint/2010/main" val="236704439"/>
+        <p14:creationId xmlns:p14="http://schemas.microsoft.com/office/powerpoint/2010/main" val="1667185025"/>
       </p:ext>
     </p:extLst>
   </p:cSld>
@@ -7822,7 +7822,7 @@
           <p:cNvPr id="2" name="TextBox 1">
             <a:extLst xmlns:a="http://schemas.openxmlformats.org/drawingml/2006/main">
               <a:ext uri="{FF2B5EF4-FFF2-40B4-BE49-F238E27FC236}">
-                <a16:creationId xmlns:a16="http://schemas.microsoft.com/office/drawing/2014/main" id="{FD3BDEB7-5D9C-4BB4-9BD4-C57919FE93EC}"/>
+                <a16:creationId xmlns:a16="http://schemas.microsoft.com/office/drawing/2014/main" id="{EA95F2C8-535A-446B-A227-627F01B53292}"/>
               </a:ext>
             </a:extLst>
           </p:cNvPr>
@@ -7869,7 +7869,7 @@
           <p:cNvPr id="3" name="TextBox 2">
             <a:extLst xmlns:a="http://schemas.openxmlformats.org/drawingml/2006/main">
               <a:ext uri="{FF2B5EF4-FFF2-40B4-BE49-F238E27FC236}">
-                <a16:creationId xmlns:a16="http://schemas.microsoft.com/office/drawing/2014/main" id="{DCC3C838-74CF-4954-9E52-7E43B6BC65FE}"/>
+                <a16:creationId xmlns:a16="http://schemas.microsoft.com/office/drawing/2014/main" id="{5E305D05-7D18-454F-8F03-0902DF7D0A7D}"/>
               </a:ext>
             </a:extLst>
           </p:cNvPr>
@@ -7916,7 +7916,7 @@
           <p:cNvPr id="4" name="Rectangle 3">
             <a:extLst xmlns:a="http://schemas.openxmlformats.org/drawingml/2006/main">
               <a:ext uri="{FF2B5EF4-FFF2-40B4-BE49-F238E27FC236}">
-                <a16:creationId xmlns:a16="http://schemas.microsoft.com/office/drawing/2014/main" id="{7FC9C2D0-1529-4DB6-86A3-DA5AA40B63D9}"/>
+                <a16:creationId xmlns:a16="http://schemas.microsoft.com/office/drawing/2014/main" id="{BFAA1091-645A-4B97-96E1-08F2665FA704}"/>
               </a:ext>
             </a:extLst>
           </p:cNvPr>
@@ -7971,7 +7971,7 @@
           <p:cNvPr id="5" name="Rectangle 4">
             <a:extLst xmlns:a="http://schemas.openxmlformats.org/drawingml/2006/main">
               <a:ext uri="{FF2B5EF4-FFF2-40B4-BE49-F238E27FC236}">
-                <a16:creationId xmlns:a16="http://schemas.microsoft.com/office/drawing/2014/main" id="{89FBA4FC-9222-462E-913A-B0D582920BC4}"/>
+                <a16:creationId xmlns:a16="http://schemas.microsoft.com/office/drawing/2014/main" id="{78F83805-2608-48C4-9BFB-0AA5890EDBB6}"/>
               </a:ext>
             </a:extLst>
           </p:cNvPr>
@@ -8026,7 +8026,7 @@
           <p:cNvPr id="6" name="TextBox 5">
             <a:extLst xmlns:a="http://schemas.openxmlformats.org/drawingml/2006/main">
               <a:ext uri="{FF2B5EF4-FFF2-40B4-BE49-F238E27FC236}">
-                <a16:creationId xmlns:a16="http://schemas.microsoft.com/office/drawing/2014/main" id="{A5851057-F863-4678-A615-7474CA747E0F}"/>
+                <a16:creationId xmlns:a16="http://schemas.microsoft.com/office/drawing/2014/main" id="{0B4B38BD-2E90-4310-93A2-9581C042A8E1}"/>
               </a:ext>
             </a:extLst>
           </p:cNvPr>
@@ -8063,7 +8063,7 @@
                 <a:ea typeface="Aptos"/>
                 <a:cs typeface="Aptos"/>
               </a:rPr>
-              <a:t>Julkinen riippumaton evidenssikooste · 2026.07.29-35 · 2026-07-29 · Lähteet: World Bank; Statistics Canada; Health Canada; NZ Ministry of Health; Sejm; FHM; FTC; ADM</a:t>
+              <a:t>Julkinen riippumaton evidenssikooste · 2026.07.30-36 · 2026-07-30 · Lähteet: World Bank; Statistics Canada; Health Canada; NZ Ministry of Health; Sejm; FHM; FTC; ADM</a:t>
             </a:r>
           </a:p>
         </p:txBody>
@@ -8073,7 +8073,7 @@
           <p:cNvPr id="7" name="TextBox 6">
             <a:extLst xmlns:a="http://schemas.openxmlformats.org/drawingml/2006/main">
               <a:ext uri="{FF2B5EF4-FFF2-40B4-BE49-F238E27FC236}">
-                <a16:creationId xmlns:a16="http://schemas.microsoft.com/office/drawing/2014/main" id="{81C58041-5E71-4258-88F8-335BE498B9BE}"/>
+                <a16:creationId xmlns:a16="http://schemas.microsoft.com/office/drawing/2014/main" id="{7AF6FC75-C92E-4158-8ED3-7D9CA9DD529A}"/>
               </a:ext>
             </a:extLst>
           </p:cNvPr>
@@ -8120,7 +8120,7 @@
           <p:cNvPr id="8" name="Rounded Rectangle 7">
             <a:extLst xmlns:a="http://schemas.openxmlformats.org/drawingml/2006/main">
               <a:ext uri="{FF2B5EF4-FFF2-40B4-BE49-F238E27FC236}">
-                <a16:creationId xmlns:a16="http://schemas.microsoft.com/office/drawing/2014/main" id="{383AF0B9-C172-4BF9-8282-19EA60BA1328}"/>
+                <a16:creationId xmlns:a16="http://schemas.microsoft.com/office/drawing/2014/main" id="{B7A23CEA-6679-42E1-9C25-A8399F03E4FC}"/>
               </a:ext>
             </a:extLst>
           </p:cNvPr>
@@ -8177,7 +8177,7 @@
           <p:cNvPr id="9" name="TextBox 8">
             <a:extLst xmlns:a="http://schemas.openxmlformats.org/drawingml/2006/main">
               <a:ext uri="{FF2B5EF4-FFF2-40B4-BE49-F238E27FC236}">
-                <a16:creationId xmlns:a16="http://schemas.microsoft.com/office/drawing/2014/main" id="{2C149969-28B6-4B05-A137-3640C00D7DC8}"/>
+                <a16:creationId xmlns:a16="http://schemas.microsoft.com/office/drawing/2014/main" id="{1916D499-DCFF-44D8-95AF-F72B433BB5AC}"/>
               </a:ext>
             </a:extLst>
           </p:cNvPr>
@@ -8224,7 +8224,7 @@
           <p:cNvPr id="10" name="TextBox 9">
             <a:extLst xmlns:a="http://schemas.openxmlformats.org/drawingml/2006/main">
               <a:ext uri="{FF2B5EF4-FFF2-40B4-BE49-F238E27FC236}">
-                <a16:creationId xmlns:a16="http://schemas.microsoft.com/office/drawing/2014/main" id="{94246259-5C9F-4DF7-9BE0-CF816D9AC044}"/>
+                <a16:creationId xmlns:a16="http://schemas.microsoft.com/office/drawing/2014/main" id="{8EC78B23-1B83-4F61-BA93-CE8F6C17EBB6}"/>
               </a:ext>
             </a:extLst>
           </p:cNvPr>
@@ -8271,7 +8271,7 @@
           <p:cNvPr id="11" name="Rounded Rectangle 10">
             <a:extLst xmlns:a="http://schemas.openxmlformats.org/drawingml/2006/main">
               <a:ext uri="{FF2B5EF4-FFF2-40B4-BE49-F238E27FC236}">
-                <a16:creationId xmlns:a16="http://schemas.microsoft.com/office/drawing/2014/main" id="{9D3A4BA0-0FBD-4CAE-B8F3-7B4FCFA1741D}"/>
+                <a16:creationId xmlns:a16="http://schemas.microsoft.com/office/drawing/2014/main" id="{D42C7E38-E4EF-4382-BD07-A9224490A19F}"/>
               </a:ext>
             </a:extLst>
           </p:cNvPr>
@@ -8328,7 +8328,7 @@
           <p:cNvPr id="12" name="TextBox 11">
             <a:extLst xmlns:a="http://schemas.openxmlformats.org/drawingml/2006/main">
               <a:ext uri="{FF2B5EF4-FFF2-40B4-BE49-F238E27FC236}">
-                <a16:creationId xmlns:a16="http://schemas.microsoft.com/office/drawing/2014/main" id="{96A9C6FC-A750-4142-BC22-1B8E72EF42C4}"/>
+                <a16:creationId xmlns:a16="http://schemas.microsoft.com/office/drawing/2014/main" id="{6A5EFCDB-89CA-4769-953D-EA813AF94356}"/>
               </a:ext>
             </a:extLst>
           </p:cNvPr>
@@ -8375,7 +8375,7 @@
           <p:cNvPr id="13" name="TextBox 12">
             <a:extLst xmlns:a="http://schemas.openxmlformats.org/drawingml/2006/main">
               <a:ext uri="{FF2B5EF4-FFF2-40B4-BE49-F238E27FC236}">
-                <a16:creationId xmlns:a16="http://schemas.microsoft.com/office/drawing/2014/main" id="{AFF0D141-9943-43B0-81E4-FA9CD174931A}"/>
+                <a16:creationId xmlns:a16="http://schemas.microsoft.com/office/drawing/2014/main" id="{2A63D271-ECF6-4969-92C9-9F74B7F8281B}"/>
               </a:ext>
             </a:extLst>
           </p:cNvPr>
@@ -8422,7 +8422,7 @@
           <p:cNvPr id="14" name="Rounded Rectangle 13">
             <a:extLst xmlns:a="http://schemas.openxmlformats.org/drawingml/2006/main">
               <a:ext uri="{FF2B5EF4-FFF2-40B4-BE49-F238E27FC236}">
-                <a16:creationId xmlns:a16="http://schemas.microsoft.com/office/drawing/2014/main" id="{4A944B50-F58A-4782-9AB4-398914837B4E}"/>
+                <a16:creationId xmlns:a16="http://schemas.microsoft.com/office/drawing/2014/main" id="{64AEE293-B5C8-4319-AD0A-7813FA62228A}"/>
               </a:ext>
             </a:extLst>
           </p:cNvPr>
@@ -8479,7 +8479,7 @@
           <p:cNvPr id="15" name="TextBox 14">
             <a:extLst xmlns:a="http://schemas.openxmlformats.org/drawingml/2006/main">
               <a:ext uri="{FF2B5EF4-FFF2-40B4-BE49-F238E27FC236}">
-                <a16:creationId xmlns:a16="http://schemas.microsoft.com/office/drawing/2014/main" id="{C2A11BC2-F50B-48C4-9EF7-DC3BC8B5CFE6}"/>
+                <a16:creationId xmlns:a16="http://schemas.microsoft.com/office/drawing/2014/main" id="{49FE8856-7208-4283-BEF3-A7B7652F3FBA}"/>
               </a:ext>
             </a:extLst>
           </p:cNvPr>
@@ -8526,7 +8526,7 @@
           <p:cNvPr id="16" name="TextBox 15">
             <a:extLst xmlns:a="http://schemas.openxmlformats.org/drawingml/2006/main">
               <a:ext uri="{FF2B5EF4-FFF2-40B4-BE49-F238E27FC236}">
-                <a16:creationId xmlns:a16="http://schemas.microsoft.com/office/drawing/2014/main" id="{8E06951D-7A1D-4C70-8C4E-713DA8D2EB07}"/>
+                <a16:creationId xmlns:a16="http://schemas.microsoft.com/office/drawing/2014/main" id="{DBAC5F35-849D-42FD-A15D-F5582B837399}"/>
               </a:ext>
             </a:extLst>
           </p:cNvPr>
@@ -8573,7 +8573,7 @@
           <p:cNvPr id="17" name="TextBox 16">
             <a:extLst xmlns:a="http://schemas.openxmlformats.org/drawingml/2006/main">
               <a:ext uri="{FF2B5EF4-FFF2-40B4-BE49-F238E27FC236}">
-                <a16:creationId xmlns:a16="http://schemas.microsoft.com/office/drawing/2014/main" id="{1256BFD3-07D0-4E02-A102-AD1B554B5D03}"/>
+                <a16:creationId xmlns:a16="http://schemas.microsoft.com/office/drawing/2014/main" id="{7E8B5606-1134-4C73-9129-7C3ACAB54F01}"/>
               </a:ext>
             </a:extLst>
           </p:cNvPr>
@@ -8585,7 +8585,7 @@
         <p:spPr>
           <a:xfrm xmlns:a="http://schemas.openxmlformats.org/drawingml/2006/main">
             <a:off x="566928" y="3529584"/>
-            <a:ext cx="10927080" cy="2740152"/>
+            <a:ext cx="10927080" cy="2359152"/>
           </a:xfrm>
           <a:prstGeom xmlns:a="http://schemas.openxmlformats.org/drawingml/2006/main" prst="rect">
             <a:avLst/>
@@ -8610,7 +8610,7 @@
                 <a:ea typeface="Aptos"/>
                 <a:cs typeface="Aptos"/>
               </a:rPr>
-              <a:t>Uusi-Seelanti 7/10: D5 hylätty, D8/D10 avoinna; donor 0/3. Viranomaisdelta 29.7.: Saksa pyysi rajauksen; mahdollisen maksun määräpäivä on 2026-08-11, eikä maksua ole hyväksytty. Ranska antoi tulliluokitus-, raja-arvo- ja kg-metadataa; reitti on vain tulliproxy. Tanska/Luxemburg: ei myyntidataa. Euromonitorin ehdollinen maksullinen Saksa-ote ei ole hyväksytty eikä aktivoitu; 0/6, EI PISTEYTETTY.</a:t>
+              <a:t>Kanada 7/10: virallinen täsmennys sulkee GST/HST/PST/QST-verot pois, sisältää hintaan upotetut lisäverot eikä muuta lukuja; D5/D7/D10 ovat avoimia. Saksan rajatussa vastauksessa pyydettiin käsittelemään vain maksutta saatavia aineistoja; maksullinen työ estettiin ilman erillistä lupaa. Ranska on vain tulliproxy. Euromonitor pysyy pausella; 0/6, EI PISTEYTETTY eikä ostoa tai maksua ole valtuutettu.</a:t>
             </a:r>
           </a:p>
         </p:txBody>
@@ -8620,7 +8620,7 @@
           <p:cNvPr id="18" name="Rounded Rectangle 17">
             <a:extLst xmlns:a="http://schemas.openxmlformats.org/drawingml/2006/main">
               <a:ext uri="{FF2B5EF4-FFF2-40B4-BE49-F238E27FC236}">
-                <a16:creationId xmlns:a16="http://schemas.microsoft.com/office/drawing/2014/main" id="{E8EA3CAC-974B-45F2-95BD-2FAF311A9F3A}"/>
+                <a16:creationId xmlns:a16="http://schemas.microsoft.com/office/drawing/2014/main" id="{02822C0B-9CFC-4DE8-A08F-F4CBC65F4EEF}"/>
               </a:ext>
             </a:extLst>
           </p:cNvPr>
@@ -8677,7 +8677,7 @@
           <p:cNvPr id="19" name="TextBox 18">
             <a:extLst xmlns:a="http://schemas.openxmlformats.org/drawingml/2006/main">
               <a:ext uri="{FF2B5EF4-FFF2-40B4-BE49-F238E27FC236}">
-                <a16:creationId xmlns:a16="http://schemas.microsoft.com/office/drawing/2014/main" id="{1F72D13F-2355-49EA-B30A-4F94557641A0}"/>
+                <a16:creationId xmlns:a16="http://schemas.microsoft.com/office/drawing/2014/main" id="{ED38FF6F-95C9-4366-97E5-78F04A4CDD49}"/>
               </a:ext>
             </a:extLst>
           </p:cNvPr>
@@ -8724,7 +8724,7 @@
           <p:cNvPr id="20" name="TextBox 19">
             <a:extLst xmlns:a="http://schemas.openxmlformats.org/drawingml/2006/main">
               <a:ext uri="{FF2B5EF4-FFF2-40B4-BE49-F238E27FC236}">
-                <a16:creationId xmlns:a16="http://schemas.microsoft.com/office/drawing/2014/main" id="{A7D331E5-879A-4BD1-A79C-2CDD5569D6D6}"/>
+                <a16:creationId xmlns:a16="http://schemas.microsoft.com/office/drawing/2014/main" id="{17B7AFD6-17B7-4765-8A64-BB5918132E62}"/>
               </a:ext>
             </a:extLst>
           </p:cNvPr>
@@ -8769,7 +8769,7 @@
     </p:spTree>
     <p:extLst>
       <p:ext uri="{BB962C8B-B14F-4D97-AF65-F5344CB8AC3E}">
-        <p14:creationId xmlns:p14="http://schemas.microsoft.com/office/powerpoint/2010/main" val="2025723706"/>
+        <p14:creationId xmlns:p14="http://schemas.microsoft.com/office/powerpoint/2010/main" val="1749424563"/>
       </p:ext>
     </p:extLst>
   </p:cSld>
@@ -8793,7 +8793,7 @@
           <p:cNvPr id="2" name="TextBox 1">
             <a:extLst xmlns:a="http://schemas.openxmlformats.org/drawingml/2006/main">
               <a:ext uri="{FF2B5EF4-FFF2-40B4-BE49-F238E27FC236}">
-                <a16:creationId xmlns:a16="http://schemas.microsoft.com/office/drawing/2014/main" id="{BB5C2288-42C8-475C-846F-C32DF2EB01C9}"/>
+                <a16:creationId xmlns:a16="http://schemas.microsoft.com/office/drawing/2014/main" id="{CCFDF667-D7E7-4D7B-8E0F-3AE99A3AA06A}"/>
               </a:ext>
             </a:extLst>
           </p:cNvPr>
@@ -8840,7 +8840,7 @@
           <p:cNvPr id="3" name="TextBox 2">
             <a:extLst xmlns:a="http://schemas.openxmlformats.org/drawingml/2006/main">
               <a:ext uri="{FF2B5EF4-FFF2-40B4-BE49-F238E27FC236}">
-                <a16:creationId xmlns:a16="http://schemas.microsoft.com/office/drawing/2014/main" id="{FD049AA5-D1A7-4D84-BE25-EE7482F09E97}"/>
+                <a16:creationId xmlns:a16="http://schemas.microsoft.com/office/drawing/2014/main" id="{56BF297D-2EB1-4B57-B74E-58EAD968658C}"/>
               </a:ext>
             </a:extLst>
           </p:cNvPr>
@@ -8887,7 +8887,7 @@
           <p:cNvPr id="4" name="Rectangle 3">
             <a:extLst xmlns:a="http://schemas.openxmlformats.org/drawingml/2006/main">
               <a:ext uri="{FF2B5EF4-FFF2-40B4-BE49-F238E27FC236}">
-                <a16:creationId xmlns:a16="http://schemas.microsoft.com/office/drawing/2014/main" id="{C1D7E733-883C-47AE-8643-09CA879046AD}"/>
+                <a16:creationId xmlns:a16="http://schemas.microsoft.com/office/drawing/2014/main" id="{E1E45B97-C8CC-4A85-908B-3FF6C5EF232C}"/>
               </a:ext>
             </a:extLst>
           </p:cNvPr>
@@ -8942,7 +8942,7 @@
           <p:cNvPr id="5" name="Rectangle 4">
             <a:extLst xmlns:a="http://schemas.openxmlformats.org/drawingml/2006/main">
               <a:ext uri="{FF2B5EF4-FFF2-40B4-BE49-F238E27FC236}">
-                <a16:creationId xmlns:a16="http://schemas.microsoft.com/office/drawing/2014/main" id="{DBBE6B90-CEBF-42E3-B1C0-E61650985A7C}"/>
+                <a16:creationId xmlns:a16="http://schemas.microsoft.com/office/drawing/2014/main" id="{04AE5869-2935-4392-B085-92932768DD86}"/>
               </a:ext>
             </a:extLst>
           </p:cNvPr>
@@ -8997,7 +8997,7 @@
           <p:cNvPr id="6" name="TextBox 5">
             <a:extLst xmlns:a="http://schemas.openxmlformats.org/drawingml/2006/main">
               <a:ext uri="{FF2B5EF4-FFF2-40B4-BE49-F238E27FC236}">
-                <a16:creationId xmlns:a16="http://schemas.microsoft.com/office/drawing/2014/main" id="{2ED1D5B3-7FE3-4263-B1D5-8E3081985F42}"/>
+                <a16:creationId xmlns:a16="http://schemas.microsoft.com/office/drawing/2014/main" id="{40165F1F-83D7-4AC9-A767-D5835944354D}"/>
               </a:ext>
             </a:extLst>
           </p:cNvPr>
@@ -9034,7 +9034,7 @@
                 <a:ea typeface="Aptos"/>
                 <a:cs typeface="Aptos"/>
               </a:rPr>
-              <a:t>Julkinen riippumaton evidenssikooste · 2026.07.29-35 · 2026-07-29 · Lähteet: Evidence Register; WIPO IP valuation</a:t>
+              <a:t>Julkinen riippumaton evidenssikooste · 2026.07.30-36 · 2026-07-30 · Lähteet: Evidence Register; WIPO IP valuation</a:t>
             </a:r>
           </a:p>
         </p:txBody>
@@ -9044,7 +9044,7 @@
           <p:cNvPr id="7" name="TextBox 6">
             <a:extLst xmlns:a="http://schemas.openxmlformats.org/drawingml/2006/main">
               <a:ext uri="{FF2B5EF4-FFF2-40B4-BE49-F238E27FC236}">
-                <a16:creationId xmlns:a16="http://schemas.microsoft.com/office/drawing/2014/main" id="{0459294F-2B0E-47D1-ABF1-1A36C1927AC6}"/>
+                <a16:creationId xmlns:a16="http://schemas.microsoft.com/office/drawing/2014/main" id="{5D0ACD5D-D503-417C-8E95-DE4B3742BAF0}"/>
               </a:ext>
             </a:extLst>
           </p:cNvPr>
@@ -9531,7 +9531,7 @@
           <p:cNvPr id="9" name="TextBox 8">
             <a:extLst xmlns:a="http://schemas.openxmlformats.org/drawingml/2006/main">
               <a:ext uri="{FF2B5EF4-FFF2-40B4-BE49-F238E27FC236}">
-                <a16:creationId xmlns:a16="http://schemas.microsoft.com/office/drawing/2014/main" id="{BC2B8F62-DBD1-42E7-8F67-E48399D157B0}"/>
+                <a16:creationId xmlns:a16="http://schemas.microsoft.com/office/drawing/2014/main" id="{7D453844-0632-4193-9F5F-F22F91768D61}"/>
               </a:ext>
             </a:extLst>
           </p:cNvPr>
@@ -9576,7 +9576,7 @@
     </p:spTree>
     <p:extLst>
       <p:ext uri="{BB962C8B-B14F-4D97-AF65-F5344CB8AC3E}">
-        <p14:creationId xmlns:p14="http://schemas.microsoft.com/office/powerpoint/2010/main" val="300705486"/>
+        <p14:creationId xmlns:p14="http://schemas.microsoft.com/office/powerpoint/2010/main" val="1057483879"/>
       </p:ext>
     </p:extLst>
   </p:cSld>
@@ -9607,7 +9607,7 @@
           <p:cNvPr id="2" name="TextBox 1">
             <a:extLst xmlns:a="http://schemas.openxmlformats.org/drawingml/2006/main">
               <a:ext uri="{FF2B5EF4-FFF2-40B4-BE49-F238E27FC236}">
-                <a16:creationId xmlns:a16="http://schemas.microsoft.com/office/drawing/2014/main" id="{C3F3982F-B781-4BB2-9603-0AB5D02BC181}"/>
+                <a16:creationId xmlns:a16="http://schemas.microsoft.com/office/drawing/2014/main" id="{CC56FD71-6421-4DC3-88F5-1ED4536FCDA2}"/>
               </a:ext>
             </a:extLst>
           </p:cNvPr>
@@ -9654,7 +9654,7 @@
           <p:cNvPr id="3" name="TextBox 2">
             <a:extLst xmlns:a="http://schemas.openxmlformats.org/drawingml/2006/main">
               <a:ext uri="{FF2B5EF4-FFF2-40B4-BE49-F238E27FC236}">
-                <a16:creationId xmlns:a16="http://schemas.microsoft.com/office/drawing/2014/main" id="{B08350E6-2440-4F85-8364-65A361B792C3}"/>
+                <a16:creationId xmlns:a16="http://schemas.microsoft.com/office/drawing/2014/main" id="{05565515-05C7-4D65-89F2-C2907966F513}"/>
               </a:ext>
             </a:extLst>
           </p:cNvPr>
@@ -9701,7 +9701,7 @@
           <p:cNvPr id="4" name="TextBox 3">
             <a:extLst xmlns:a="http://schemas.openxmlformats.org/drawingml/2006/main">
               <a:ext uri="{FF2B5EF4-FFF2-40B4-BE49-F238E27FC236}">
-                <a16:creationId xmlns:a16="http://schemas.microsoft.com/office/drawing/2014/main" id="{AE65DC05-0FC9-4FD6-8215-112115014B2D}"/>
+                <a16:creationId xmlns:a16="http://schemas.microsoft.com/office/drawing/2014/main" id="{1751089D-AF25-4226-8A17-0A589DD00345}"/>
               </a:ext>
             </a:extLst>
           </p:cNvPr>
@@ -9820,7 +9820,7 @@
           <p:cNvPr id="5" name="TextBox 4">
             <a:extLst xmlns:a="http://schemas.openxmlformats.org/drawingml/2006/main">
               <a:ext uri="{FF2B5EF4-FFF2-40B4-BE49-F238E27FC236}">
-                <a16:creationId xmlns:a16="http://schemas.microsoft.com/office/drawing/2014/main" id="{DF59619D-E144-4F37-B88C-D876E3AF157E}"/>
+                <a16:creationId xmlns:a16="http://schemas.microsoft.com/office/drawing/2014/main" id="{67B8ED90-4795-4007-AE14-99CA78D1E62B}"/>
               </a:ext>
             </a:extLst>
           </p:cNvPr>
@@ -9857,7 +9857,7 @@
                 <a:ea typeface="Aptos"/>
                 <a:cs typeface="Aptos"/>
               </a:rPr>
-              <a:t>Versio 2026.07.29-35 · 2026-07-29 · 6 / 6</a:t>
+              <a:t>Versio 2026.07.30-36 · 2026-07-30 · 6 / 6</a:t>
             </a:r>
           </a:p>
         </p:txBody>
@@ -9865,7 +9865,7 @@
     </p:spTree>
     <p:extLst>
       <p:ext uri="{BB962C8B-B14F-4D97-AF65-F5344CB8AC3E}">
-        <p14:creationId xmlns:p14="http://schemas.microsoft.com/office/powerpoint/2010/main" val="1201973341"/>
+        <p14:creationId xmlns:p14="http://schemas.microsoft.com/office/powerpoint/2010/main" val="1382350857"/>
       </p:ext>
     </p:extLst>
   </p:cSld>

--- a/site/downloads/pixan-bank-deck-short-fi.pptx
+++ b/site/downloads/pixan-bank-deck-short-fi.pptx
@@ -2,18 +2,18 @@
 <file path=ppt/presentation.xml><?xml version="1.0" encoding="utf-8"?>
 <p:presentation xmlns:p="http://schemas.openxmlformats.org/presentationml/2006/main">
   <p:sldMasterIdLst>
-    <p:sldMasterId xmlns:r="http://schemas.openxmlformats.org/officeDocument/2006/relationships" id="2147483648" r:id="Rbacd49c9436f4b64"/>
+    <p:sldMasterId xmlns:r="http://schemas.openxmlformats.org/officeDocument/2006/relationships" id="2147483648" r:id="Ra86ad4623c7e4741"/>
   </p:sldMasterIdLst>
   <p:notesMasterIdLst>
-    <p:notesMasterId xmlns:r="http://schemas.openxmlformats.org/officeDocument/2006/relationships" r:id="R10f7e2319c704a6b"/>
+    <p:notesMasterId xmlns:r="http://schemas.openxmlformats.org/officeDocument/2006/relationships" r:id="Rfec92ceca9b04066"/>
   </p:notesMasterIdLst>
   <p:sldIdLst>
-    <p:sldId xmlns:r="http://schemas.openxmlformats.org/officeDocument/2006/relationships" id="256" r:id="Rf31584395ec04000"/>
-    <p:sldId xmlns:r="http://schemas.openxmlformats.org/officeDocument/2006/relationships" id="257" r:id="R47a38b821b1f4493"/>
-    <p:sldId xmlns:r="http://schemas.openxmlformats.org/officeDocument/2006/relationships" id="258" r:id="R3ffa6323ffcc4bed"/>
-    <p:sldId xmlns:r="http://schemas.openxmlformats.org/officeDocument/2006/relationships" id="259" r:id="R907f1670946a4b9d"/>
-    <p:sldId xmlns:r="http://schemas.openxmlformats.org/officeDocument/2006/relationships" id="260" r:id="Ra83230b09f164376"/>
-    <p:sldId xmlns:r="http://schemas.openxmlformats.org/officeDocument/2006/relationships" id="261" r:id="R597e0f12f0e9485a"/>
+    <p:sldId xmlns:r="http://schemas.openxmlformats.org/officeDocument/2006/relationships" id="256" r:id="R57b88774b42d4c99"/>
+    <p:sldId xmlns:r="http://schemas.openxmlformats.org/officeDocument/2006/relationships" id="257" r:id="R025b3771405d46ac"/>
+    <p:sldId xmlns:r="http://schemas.openxmlformats.org/officeDocument/2006/relationships" id="258" r:id="Rc1a99fd2707642eb"/>
+    <p:sldId xmlns:r="http://schemas.openxmlformats.org/officeDocument/2006/relationships" id="259" r:id="R50dc506979194a3b"/>
+    <p:sldId xmlns:r="http://schemas.openxmlformats.org/officeDocument/2006/relationships" id="260" r:id="R1524f90d1987402e"/>
+    <p:sldId xmlns:r="http://schemas.openxmlformats.org/officeDocument/2006/relationships" id="261" r:id="Rcc21154e789a4daa"/>
   </p:sldIdLst>
   <p:sldSz cx="12191999" cy="6858000"/>
   <p:notesSz cx="6858000" cy="9144000"/>
@@ -565,7 +565,32 @@
           </a:p>
           <a:p xmlns:a="http://schemas.openxmlformats.org/drawingml/2006/main">
             <a:r>
+              <a:t>- https://www.podatki.gov.pl/akcyza/komunikaty-w-zakresie-podatku-akcyzowego</a:t>
+            </a:r>
+          </a:p>
+          <a:p xmlns:a="http://schemas.openxmlformats.org/drawingml/2006/main">
+            <a:r>
+              <a:t>- https://api.sejm.gov.pl/eli/acts/DU/2025/698/text.pdf</a:t>
+            </a:r>
+          </a:p>
+          <a:p xmlns:a="http://schemas.openxmlformats.org/drawingml/2006/main">
+            <a:r>
+              <a:t>- https://api.sejm.gov.pl/sejm/term10/prints/1364/1364.pdf</a:t>
+            </a:r>
+          </a:p>
+          <a:p xmlns:a="http://schemas.openxmlformats.org/drawingml/2006/main">
+            <a:r>
               <a:t>- https://www.customs.govt.nz/about-us/news/important-notices-archive/important-notices-archive-2023/reminder-classification-of-vaping-devices-and-similar</a:t>
+            </a:r>
+          </a:p>
+          <a:p xmlns:a="http://schemas.openxmlformats.org/drawingml/2006/main">
+            <a:r>
+              <a:t>- https://www3.stats.govt.nz/HS10_by_Country/2024_Imports_HS10.zip</a:t>
+            </a:r>
+          </a:p>
+          <a:p xmlns:a="http://schemas.openxmlformats.org/drawingml/2006/main">
+            <a:r>
+              <a:t>- https://www3.stats.govt.nz/HS10_by_Country/2024_Exports_HS10.zip</a:t>
             </a:r>
           </a:p>
           <a:p xmlns:a="http://schemas.openxmlformats.org/drawingml/2006/main">
@@ -855,7 +880,32 @@
           </a:p>
           <a:p xmlns:a="http://schemas.openxmlformats.org/drawingml/2006/main">
             <a:r>
+              <a:t>- https://www.podatki.gov.pl/akcyza/komunikaty-w-zakresie-podatku-akcyzowego</a:t>
+            </a:r>
+          </a:p>
+          <a:p xmlns:a="http://schemas.openxmlformats.org/drawingml/2006/main">
+            <a:r>
+              <a:t>- https://api.sejm.gov.pl/eli/acts/DU/2025/698/text.pdf</a:t>
+            </a:r>
+          </a:p>
+          <a:p xmlns:a="http://schemas.openxmlformats.org/drawingml/2006/main">
+            <a:r>
+              <a:t>- https://api.sejm.gov.pl/sejm/term10/prints/1364/1364.pdf</a:t>
+            </a:r>
+          </a:p>
+          <a:p xmlns:a="http://schemas.openxmlformats.org/drawingml/2006/main">
+            <a:r>
               <a:t>- https://www.customs.govt.nz/about-us/news/important-notices-archive/important-notices-archive-2023/reminder-classification-of-vaping-devices-and-similar</a:t>
+            </a:r>
+          </a:p>
+          <a:p xmlns:a="http://schemas.openxmlformats.org/drawingml/2006/main">
+            <a:r>
+              <a:t>- https://www3.stats.govt.nz/HS10_by_Country/2024_Imports_HS10.zip</a:t>
+            </a:r>
+          </a:p>
+          <a:p xmlns:a="http://schemas.openxmlformats.org/drawingml/2006/main">
+            <a:r>
+              <a:t>- https://www3.stats.govt.nz/HS10_by_Country/2024_Exports_HS10.zip</a:t>
             </a:r>
           </a:p>
           <a:p xmlns:a="http://schemas.openxmlformats.org/drawingml/2006/main">
@@ -1145,7 +1195,32 @@
           </a:p>
           <a:p xmlns:a="http://schemas.openxmlformats.org/drawingml/2006/main">
             <a:r>
+              <a:t>- https://www.podatki.gov.pl/akcyza/komunikaty-w-zakresie-podatku-akcyzowego</a:t>
+            </a:r>
+          </a:p>
+          <a:p xmlns:a="http://schemas.openxmlformats.org/drawingml/2006/main">
+            <a:r>
+              <a:t>- https://api.sejm.gov.pl/eli/acts/DU/2025/698/text.pdf</a:t>
+            </a:r>
+          </a:p>
+          <a:p xmlns:a="http://schemas.openxmlformats.org/drawingml/2006/main">
+            <a:r>
+              <a:t>- https://api.sejm.gov.pl/sejm/term10/prints/1364/1364.pdf</a:t>
+            </a:r>
+          </a:p>
+          <a:p xmlns:a="http://schemas.openxmlformats.org/drawingml/2006/main">
+            <a:r>
               <a:t>- https://www.customs.govt.nz/about-us/news/important-notices-archive/important-notices-archive-2023/reminder-classification-of-vaping-devices-and-similar</a:t>
+            </a:r>
+          </a:p>
+          <a:p xmlns:a="http://schemas.openxmlformats.org/drawingml/2006/main">
+            <a:r>
+              <a:t>- https://www3.stats.govt.nz/HS10_by_Country/2024_Imports_HS10.zip</a:t>
+            </a:r>
+          </a:p>
+          <a:p xmlns:a="http://schemas.openxmlformats.org/drawingml/2006/main">
+            <a:r>
+              <a:t>- https://www3.stats.govt.nz/HS10_by_Country/2024_Exports_HS10.zip</a:t>
             </a:r>
           </a:p>
           <a:p xmlns:a="http://schemas.openxmlformats.org/drawingml/2006/main">
@@ -1435,7 +1510,32 @@
           </a:p>
           <a:p xmlns:a="http://schemas.openxmlformats.org/drawingml/2006/main">
             <a:r>
+              <a:t>- https://www.podatki.gov.pl/akcyza/komunikaty-w-zakresie-podatku-akcyzowego</a:t>
+            </a:r>
+          </a:p>
+          <a:p xmlns:a="http://schemas.openxmlformats.org/drawingml/2006/main">
+            <a:r>
+              <a:t>- https://api.sejm.gov.pl/eli/acts/DU/2025/698/text.pdf</a:t>
+            </a:r>
+          </a:p>
+          <a:p xmlns:a="http://schemas.openxmlformats.org/drawingml/2006/main">
+            <a:r>
+              <a:t>- https://api.sejm.gov.pl/sejm/term10/prints/1364/1364.pdf</a:t>
+            </a:r>
+          </a:p>
+          <a:p xmlns:a="http://schemas.openxmlformats.org/drawingml/2006/main">
+            <a:r>
               <a:t>- https://www.customs.govt.nz/about-us/news/important-notices-archive/important-notices-archive-2023/reminder-classification-of-vaping-devices-and-similar</a:t>
+            </a:r>
+          </a:p>
+          <a:p xmlns:a="http://schemas.openxmlformats.org/drawingml/2006/main">
+            <a:r>
+              <a:t>- https://www3.stats.govt.nz/HS10_by_Country/2024_Imports_HS10.zip</a:t>
+            </a:r>
+          </a:p>
+          <a:p xmlns:a="http://schemas.openxmlformats.org/drawingml/2006/main">
+            <a:r>
+              <a:t>- https://www3.stats.govt.nz/HS10_by_Country/2024_Exports_HS10.zip</a:t>
             </a:r>
           </a:p>
           <a:p xmlns:a="http://schemas.openxmlformats.org/drawingml/2006/main">
@@ -1725,7 +1825,32 @@
           </a:p>
           <a:p xmlns:a="http://schemas.openxmlformats.org/drawingml/2006/main">
             <a:r>
+              <a:t>- https://www.podatki.gov.pl/akcyza/komunikaty-w-zakresie-podatku-akcyzowego</a:t>
+            </a:r>
+          </a:p>
+          <a:p xmlns:a="http://schemas.openxmlformats.org/drawingml/2006/main">
+            <a:r>
+              <a:t>- https://api.sejm.gov.pl/eli/acts/DU/2025/698/text.pdf</a:t>
+            </a:r>
+          </a:p>
+          <a:p xmlns:a="http://schemas.openxmlformats.org/drawingml/2006/main">
+            <a:r>
+              <a:t>- https://api.sejm.gov.pl/sejm/term10/prints/1364/1364.pdf</a:t>
+            </a:r>
+          </a:p>
+          <a:p xmlns:a="http://schemas.openxmlformats.org/drawingml/2006/main">
+            <a:r>
               <a:t>- https://www.customs.govt.nz/about-us/news/important-notices-archive/important-notices-archive-2023/reminder-classification-of-vaping-devices-and-similar</a:t>
+            </a:r>
+          </a:p>
+          <a:p xmlns:a="http://schemas.openxmlformats.org/drawingml/2006/main">
+            <a:r>
+              <a:t>- https://www3.stats.govt.nz/HS10_by_Country/2024_Imports_HS10.zip</a:t>
+            </a:r>
+          </a:p>
+          <a:p xmlns:a="http://schemas.openxmlformats.org/drawingml/2006/main">
+            <a:r>
+              <a:t>- https://www3.stats.govt.nz/HS10_by_Country/2024_Exports_HS10.zip</a:t>
             </a:r>
           </a:p>
           <a:p xmlns:a="http://schemas.openxmlformats.org/drawingml/2006/main">
@@ -2015,7 +2140,32 @@
           </a:p>
           <a:p xmlns:a="http://schemas.openxmlformats.org/drawingml/2006/main">
             <a:r>
+              <a:t>- https://www.podatki.gov.pl/akcyza/komunikaty-w-zakresie-podatku-akcyzowego</a:t>
+            </a:r>
+          </a:p>
+          <a:p xmlns:a="http://schemas.openxmlformats.org/drawingml/2006/main">
+            <a:r>
+              <a:t>- https://api.sejm.gov.pl/eli/acts/DU/2025/698/text.pdf</a:t>
+            </a:r>
+          </a:p>
+          <a:p xmlns:a="http://schemas.openxmlformats.org/drawingml/2006/main">
+            <a:r>
+              <a:t>- https://api.sejm.gov.pl/sejm/term10/prints/1364/1364.pdf</a:t>
+            </a:r>
+          </a:p>
+          <a:p xmlns:a="http://schemas.openxmlformats.org/drawingml/2006/main">
+            <a:r>
               <a:t>- https://www.customs.govt.nz/about-us/news/important-notices-archive/important-notices-archive-2023/reminder-classification-of-vaping-devices-and-similar</a:t>
+            </a:r>
+          </a:p>
+          <a:p xmlns:a="http://schemas.openxmlformats.org/drawingml/2006/main">
+            <a:r>
+              <a:t>- https://www3.stats.govt.nz/HS10_by_Country/2024_Imports_HS10.zip</a:t>
+            </a:r>
+          </a:p>
+          <a:p xmlns:a="http://schemas.openxmlformats.org/drawingml/2006/main">
+            <a:r>
+              <a:t>- https://www3.stats.govt.nz/HS10_by_Country/2024_Exports_HS10.zip</a:t>
             </a:r>
           </a:p>
           <a:p xmlns:a="http://schemas.openxmlformats.org/drawingml/2006/main">
@@ -2187,7 +2337,7 @@
           <p:cNvPr id="2" name="Title 1">
             <a:extLst xmlns:a="http://schemas.openxmlformats.org/drawingml/2006/main">
               <a:ext uri="{FF2B5EF4-FFF2-40B4-BE49-F238E27FC236}">
-                <a16:creationId xmlns:a16="http://schemas.microsoft.com/office/drawing/2014/main" id="{83705E5B-2DCF-43B6-9511-D81F31C0105C}"/>
+                <a16:creationId xmlns:a16="http://schemas.microsoft.com/office/drawing/2014/main" id="{F47E46EB-07EB-473D-AA52-5B790DCA6E55}"/>
               </a:ext>
             </a:extLst>
           </p:cNvPr>
@@ -2219,7 +2369,7 @@
           <p:cNvPr id="3" name="Subtitle 2">
             <a:extLst xmlns:a="http://schemas.openxmlformats.org/drawingml/2006/main">
               <a:ext uri="{FF2B5EF4-FFF2-40B4-BE49-F238E27FC236}">
-                <a16:creationId xmlns:a16="http://schemas.microsoft.com/office/drawing/2014/main" id="{DB0D6A8F-F340-4F8B-831F-1D111C10FF44}"/>
+                <a16:creationId xmlns:a16="http://schemas.microsoft.com/office/drawing/2014/main" id="{E3800A42-5B39-4237-AAAC-D2BFBEF16F10}"/>
               </a:ext>
             </a:extLst>
           </p:cNvPr>
@@ -2342,7 +2492,7 @@
           <p:cNvPr id="4" name="Date Placeholder 3">
             <a:extLst xmlns:a="http://schemas.openxmlformats.org/drawingml/2006/main">
               <a:ext uri="{FF2B5EF4-FFF2-40B4-BE49-F238E27FC236}">
-                <a16:creationId xmlns:a16="http://schemas.microsoft.com/office/drawing/2014/main" id="{D228D34B-BCB0-43E1-B0F6-CBCA7E8B8B8F}"/>
+                <a16:creationId xmlns:a16="http://schemas.microsoft.com/office/drawing/2014/main" id="{B6B5136F-5A99-4BE7-BBD0-50A48A87C002}"/>
               </a:ext>
             </a:extLst>
           </p:cNvPr>
@@ -2369,7 +2519,7 @@
           <p:cNvPr id="5" name="Footer Placeholder 4">
             <a:extLst xmlns:a="http://schemas.openxmlformats.org/drawingml/2006/main">
               <a:ext uri="{FF2B5EF4-FFF2-40B4-BE49-F238E27FC236}">
-                <a16:creationId xmlns:a16="http://schemas.microsoft.com/office/drawing/2014/main" id="{500C45E8-6578-418F-83B7-CF64C095EC61}"/>
+                <a16:creationId xmlns:a16="http://schemas.microsoft.com/office/drawing/2014/main" id="{D714335D-5DD1-4BDA-B30F-8456C823DD16}"/>
               </a:ext>
             </a:extLst>
           </p:cNvPr>
@@ -2392,7 +2542,7 @@
           <p:cNvPr id="6" name="Slide Number Placeholder 5">
             <a:extLst xmlns:a="http://schemas.openxmlformats.org/drawingml/2006/main">
               <a:ext uri="{FF2B5EF4-FFF2-40B4-BE49-F238E27FC236}">
-                <a16:creationId xmlns:a16="http://schemas.microsoft.com/office/drawing/2014/main" id="{6883E524-C5D1-42A1-AAF7-4BA7DC0B792B}"/>
+                <a16:creationId xmlns:a16="http://schemas.microsoft.com/office/drawing/2014/main" id="{3F0E4494-E031-4B41-9AF0-BC8E5F647F74}"/>
               </a:ext>
             </a:extLst>
           </p:cNvPr>
@@ -2436,7 +2586,7 @@
           <p:cNvPr id="2" name="Title 1">
             <a:extLst xmlns:a="http://schemas.openxmlformats.org/drawingml/2006/main">
               <a:ext uri="{FF2B5EF4-FFF2-40B4-BE49-F238E27FC236}">
-                <a16:creationId xmlns:a16="http://schemas.microsoft.com/office/drawing/2014/main" id="{C371C501-80DE-4F2A-B1F6-DB75D1AFA118}"/>
+                <a16:creationId xmlns:a16="http://schemas.microsoft.com/office/drawing/2014/main" id="{63C4E1FB-41E5-4C70-BECD-83C79E42777B}"/>
               </a:ext>
             </a:extLst>
           </p:cNvPr>
@@ -2463,7 +2613,7 @@
           <p:cNvPr id="3" name="Vertical Text Placeholder 2">
             <a:extLst xmlns:a="http://schemas.openxmlformats.org/drawingml/2006/main">
               <a:ext uri="{FF2B5EF4-FFF2-40B4-BE49-F238E27FC236}">
-                <a16:creationId xmlns:a16="http://schemas.microsoft.com/office/drawing/2014/main" id="{4DE578B7-E13C-41B7-B28E-D37EFB6F0DAE}"/>
+                <a16:creationId xmlns:a16="http://schemas.microsoft.com/office/drawing/2014/main" id="{6767239C-6475-4668-9C03-930F10C3B734}"/>
               </a:ext>
             </a:extLst>
           </p:cNvPr>
@@ -2525,7 +2675,7 @@
           <p:cNvPr id="4" name="Date Placeholder 3">
             <a:extLst xmlns:a="http://schemas.openxmlformats.org/drawingml/2006/main">
               <a:ext uri="{FF2B5EF4-FFF2-40B4-BE49-F238E27FC236}">
-                <a16:creationId xmlns:a16="http://schemas.microsoft.com/office/drawing/2014/main" id="{D2299887-B421-4279-8840-40329E00276D}"/>
+                <a16:creationId xmlns:a16="http://schemas.microsoft.com/office/drawing/2014/main" id="{CBE75F19-EAE7-4CCE-BCA0-686B24B7E7B3}"/>
               </a:ext>
             </a:extLst>
           </p:cNvPr>
@@ -2552,7 +2702,7 @@
           <p:cNvPr id="5" name="Footer Placeholder 4">
             <a:extLst xmlns:a="http://schemas.openxmlformats.org/drawingml/2006/main">
               <a:ext uri="{FF2B5EF4-FFF2-40B4-BE49-F238E27FC236}">
-                <a16:creationId xmlns:a16="http://schemas.microsoft.com/office/drawing/2014/main" id="{36EF301E-76BB-4206-90AD-962445809841}"/>
+                <a16:creationId xmlns:a16="http://schemas.microsoft.com/office/drawing/2014/main" id="{A73F4A1D-6D6D-411D-9F22-DB3369001B74}"/>
               </a:ext>
             </a:extLst>
           </p:cNvPr>
@@ -2575,7 +2725,7 @@
           <p:cNvPr id="6" name="Slide Number Placeholder 5">
             <a:extLst xmlns:a="http://schemas.openxmlformats.org/drawingml/2006/main">
               <a:ext uri="{FF2B5EF4-FFF2-40B4-BE49-F238E27FC236}">
-                <a16:creationId xmlns:a16="http://schemas.microsoft.com/office/drawing/2014/main" id="{340BB3D9-00EF-411F-B167-83F6D7559E55}"/>
+                <a16:creationId xmlns:a16="http://schemas.microsoft.com/office/drawing/2014/main" id="{1CC594C0-F79E-4BDA-898E-E9F4F8B01D41}"/>
               </a:ext>
             </a:extLst>
           </p:cNvPr>
@@ -2619,7 +2769,7 @@
           <p:cNvPr id="2" name="Vertical Title 1">
             <a:extLst xmlns:a="http://schemas.openxmlformats.org/drawingml/2006/main">
               <a:ext uri="{FF2B5EF4-FFF2-40B4-BE49-F238E27FC236}">
-                <a16:creationId xmlns:a16="http://schemas.microsoft.com/office/drawing/2014/main" id="{18F01E9C-B0EB-40F8-BB70-9978D2AC1AD7}"/>
+                <a16:creationId xmlns:a16="http://schemas.microsoft.com/office/drawing/2014/main" id="{01042B39-FA8F-4755-8B2F-1E78090CDACE}"/>
               </a:ext>
             </a:extLst>
           </p:cNvPr>
@@ -2651,7 +2801,7 @@
           <p:cNvPr id="3" name="Vertical Text Placeholder 2">
             <a:extLst xmlns:a="http://schemas.openxmlformats.org/drawingml/2006/main">
               <a:ext uri="{FF2B5EF4-FFF2-40B4-BE49-F238E27FC236}">
-                <a16:creationId xmlns:a16="http://schemas.microsoft.com/office/drawing/2014/main" id="{B515D168-FEE2-4BC9-B4C3-342AE3E8594E}"/>
+                <a16:creationId xmlns:a16="http://schemas.microsoft.com/office/drawing/2014/main" id="{42116D62-1894-448F-B606-40EFA0849CD7}"/>
               </a:ext>
             </a:extLst>
           </p:cNvPr>
@@ -2718,7 +2868,7 @@
           <p:cNvPr id="4" name="Date Placeholder 3">
             <a:extLst xmlns:a="http://schemas.openxmlformats.org/drawingml/2006/main">
               <a:ext uri="{FF2B5EF4-FFF2-40B4-BE49-F238E27FC236}">
-                <a16:creationId xmlns:a16="http://schemas.microsoft.com/office/drawing/2014/main" id="{FD1229D4-EB91-4EFC-8DA6-FA137C7AEA6C}"/>
+                <a16:creationId xmlns:a16="http://schemas.microsoft.com/office/drawing/2014/main" id="{4AB9EF5A-2382-4E96-AFB4-32B26881834B}"/>
               </a:ext>
             </a:extLst>
           </p:cNvPr>
@@ -2745,7 +2895,7 @@
           <p:cNvPr id="5" name="Footer Placeholder 4">
             <a:extLst xmlns:a="http://schemas.openxmlformats.org/drawingml/2006/main">
               <a:ext uri="{FF2B5EF4-FFF2-40B4-BE49-F238E27FC236}">
-                <a16:creationId xmlns:a16="http://schemas.microsoft.com/office/drawing/2014/main" id="{ED17D4F1-4EFC-4024-903F-66B1F13601AE}"/>
+                <a16:creationId xmlns:a16="http://schemas.microsoft.com/office/drawing/2014/main" id="{07D7801B-5621-4FC6-9930-D208E29C2852}"/>
               </a:ext>
             </a:extLst>
           </p:cNvPr>
@@ -2768,7 +2918,7 @@
           <p:cNvPr id="6" name="Slide Number Placeholder 5">
             <a:extLst xmlns:a="http://schemas.openxmlformats.org/drawingml/2006/main">
               <a:ext uri="{FF2B5EF4-FFF2-40B4-BE49-F238E27FC236}">
-                <a16:creationId xmlns:a16="http://schemas.microsoft.com/office/drawing/2014/main" id="{5389BAFE-0A27-40CC-A8AD-C6CAEB25367D}"/>
+                <a16:creationId xmlns:a16="http://schemas.microsoft.com/office/drawing/2014/main" id="{4C52877A-36B1-4565-B96D-2F6227D07619}"/>
               </a:ext>
             </a:extLst>
           </p:cNvPr>
@@ -2812,7 +2962,7 @@
           <p:cNvPr id="2" name="Title 1">
             <a:extLst xmlns:a="http://schemas.openxmlformats.org/drawingml/2006/main">
               <a:ext uri="{FF2B5EF4-FFF2-40B4-BE49-F238E27FC236}">
-                <a16:creationId xmlns:a16="http://schemas.microsoft.com/office/drawing/2014/main" id="{3ABA95AB-2D48-47C8-A306-4E8235326433}"/>
+                <a16:creationId xmlns:a16="http://schemas.microsoft.com/office/drawing/2014/main" id="{773D2C51-591B-4956-A314-E03C1E19BCFE}"/>
               </a:ext>
             </a:extLst>
           </p:cNvPr>
@@ -2839,7 +2989,7 @@
           <p:cNvPr id="3" name="Content Placeholder 2">
             <a:extLst xmlns:a="http://schemas.openxmlformats.org/drawingml/2006/main">
               <a:ext uri="{FF2B5EF4-FFF2-40B4-BE49-F238E27FC236}">
-                <a16:creationId xmlns:a16="http://schemas.microsoft.com/office/drawing/2014/main" id="{173B3E8D-A7C0-44D7-A48F-C0F9A707D4B3}"/>
+                <a16:creationId xmlns:a16="http://schemas.microsoft.com/office/drawing/2014/main" id="{D66C4D9B-353A-4454-A127-09A042E89E9F}"/>
               </a:ext>
             </a:extLst>
           </p:cNvPr>
@@ -2901,7 +3051,7 @@
           <p:cNvPr id="4" name="Date Placeholder 3">
             <a:extLst xmlns:a="http://schemas.openxmlformats.org/drawingml/2006/main">
               <a:ext uri="{FF2B5EF4-FFF2-40B4-BE49-F238E27FC236}">
-                <a16:creationId xmlns:a16="http://schemas.microsoft.com/office/drawing/2014/main" id="{CC98B541-F848-48FA-A569-E217AC7D1756}"/>
+                <a16:creationId xmlns:a16="http://schemas.microsoft.com/office/drawing/2014/main" id="{D85364E7-4342-49A9-AD3C-94F61A54D8A8}"/>
               </a:ext>
             </a:extLst>
           </p:cNvPr>
@@ -2928,7 +3078,7 @@
           <p:cNvPr id="5" name="Footer Placeholder 4">
             <a:extLst xmlns:a="http://schemas.openxmlformats.org/drawingml/2006/main">
               <a:ext uri="{FF2B5EF4-FFF2-40B4-BE49-F238E27FC236}">
-                <a16:creationId xmlns:a16="http://schemas.microsoft.com/office/drawing/2014/main" id="{2FBA2D57-6B46-4811-B552-DB5FEC848AF7}"/>
+                <a16:creationId xmlns:a16="http://schemas.microsoft.com/office/drawing/2014/main" id="{95B30D96-4291-4A0C-91F3-46230957BDEA}"/>
               </a:ext>
             </a:extLst>
           </p:cNvPr>
@@ -2951,7 +3101,7 @@
           <p:cNvPr id="6" name="Slide Number Placeholder 5">
             <a:extLst xmlns:a="http://schemas.openxmlformats.org/drawingml/2006/main">
               <a:ext uri="{FF2B5EF4-FFF2-40B4-BE49-F238E27FC236}">
-                <a16:creationId xmlns:a16="http://schemas.microsoft.com/office/drawing/2014/main" id="{C61DFF35-3583-4EA0-8982-06F0418E8E05}"/>
+                <a16:creationId xmlns:a16="http://schemas.microsoft.com/office/drawing/2014/main" id="{44DBE54A-C7C0-40C1-90A4-CDCE93CDB344}"/>
               </a:ext>
             </a:extLst>
           </p:cNvPr>
@@ -2995,7 +3145,7 @@
           <p:cNvPr id="2" name="Title 1">
             <a:extLst xmlns:a="http://schemas.openxmlformats.org/drawingml/2006/main">
               <a:ext uri="{FF2B5EF4-FFF2-40B4-BE49-F238E27FC236}">
-                <a16:creationId xmlns:a16="http://schemas.microsoft.com/office/drawing/2014/main" id="{5DBD7859-8A44-440F-92B7-99EEC32A0DE0}"/>
+                <a16:creationId xmlns:a16="http://schemas.microsoft.com/office/drawing/2014/main" id="{7B33545C-5E6C-4044-A0AB-AF3AECBF3EBF}"/>
               </a:ext>
             </a:extLst>
           </p:cNvPr>
@@ -3032,7 +3182,7 @@
           <p:cNvPr id="3" name="Text Placeholder 2">
             <a:extLst xmlns:a="http://schemas.openxmlformats.org/drawingml/2006/main">
               <a:ext uri="{FF2B5EF4-FFF2-40B4-BE49-F238E27FC236}">
-                <a16:creationId xmlns:a16="http://schemas.microsoft.com/office/drawing/2014/main" id="{B8E32608-791B-4F5C-93B0-10A641999FBD}"/>
+                <a16:creationId xmlns:a16="http://schemas.microsoft.com/office/drawing/2014/main" id="{2B05ECF0-C42D-4A27-BFD2-A0AF5DE0A39F}"/>
               </a:ext>
             </a:extLst>
           </p:cNvPr>
@@ -3158,7 +3308,7 @@
           <p:cNvPr id="4" name="Date Placeholder 3">
             <a:extLst xmlns:a="http://schemas.openxmlformats.org/drawingml/2006/main">
               <a:ext uri="{FF2B5EF4-FFF2-40B4-BE49-F238E27FC236}">
-                <a16:creationId xmlns:a16="http://schemas.microsoft.com/office/drawing/2014/main" id="{127EB8A8-C6A8-4572-8BD6-B8EF3A5D55A7}"/>
+                <a16:creationId xmlns:a16="http://schemas.microsoft.com/office/drawing/2014/main" id="{E413FB45-4514-44B1-8852-C35EA5C9F2E8}"/>
               </a:ext>
             </a:extLst>
           </p:cNvPr>
@@ -3185,7 +3335,7 @@
           <p:cNvPr id="5" name="Footer Placeholder 4">
             <a:extLst xmlns:a="http://schemas.openxmlformats.org/drawingml/2006/main">
               <a:ext uri="{FF2B5EF4-FFF2-40B4-BE49-F238E27FC236}">
-                <a16:creationId xmlns:a16="http://schemas.microsoft.com/office/drawing/2014/main" id="{C23F9C2B-C1F0-45BD-AB1F-5F003240B936}"/>
+                <a16:creationId xmlns:a16="http://schemas.microsoft.com/office/drawing/2014/main" id="{519DE881-AEE0-4B3B-9B81-F57090DF44D8}"/>
               </a:ext>
             </a:extLst>
           </p:cNvPr>
@@ -3208,7 +3358,7 @@
           <p:cNvPr id="6" name="Slide Number Placeholder 5">
             <a:extLst xmlns:a="http://schemas.openxmlformats.org/drawingml/2006/main">
               <a:ext uri="{FF2B5EF4-FFF2-40B4-BE49-F238E27FC236}">
-                <a16:creationId xmlns:a16="http://schemas.microsoft.com/office/drawing/2014/main" id="{991C03EC-CA06-48B9-8D91-7324FEF17FC9}"/>
+                <a16:creationId xmlns:a16="http://schemas.microsoft.com/office/drawing/2014/main" id="{41DE6DD2-8F41-473C-AEFA-1F268FFBD4E7}"/>
               </a:ext>
             </a:extLst>
           </p:cNvPr>
@@ -3252,7 +3402,7 @@
           <p:cNvPr id="2" name="Title 1">
             <a:extLst xmlns:a="http://schemas.openxmlformats.org/drawingml/2006/main">
               <a:ext uri="{FF2B5EF4-FFF2-40B4-BE49-F238E27FC236}">
-                <a16:creationId xmlns:a16="http://schemas.microsoft.com/office/drawing/2014/main" id="{3F2571FA-2D55-4193-AF1F-C81F0B1F2AE7}"/>
+                <a16:creationId xmlns:a16="http://schemas.microsoft.com/office/drawing/2014/main" id="{7FCDE965-8721-4B4B-96DA-9A406181A624}"/>
               </a:ext>
             </a:extLst>
           </p:cNvPr>
@@ -3279,7 +3429,7 @@
           <p:cNvPr id="3" name="Content Placeholder 2">
             <a:extLst xmlns:a="http://schemas.openxmlformats.org/drawingml/2006/main">
               <a:ext uri="{FF2B5EF4-FFF2-40B4-BE49-F238E27FC236}">
-                <a16:creationId xmlns:a16="http://schemas.microsoft.com/office/drawing/2014/main" id="{C251E751-44E8-4DA8-9026-742DE0CD594B}"/>
+                <a16:creationId xmlns:a16="http://schemas.microsoft.com/office/drawing/2014/main" id="{B697586A-3616-4AD7-A08E-937286E06A07}"/>
               </a:ext>
             </a:extLst>
           </p:cNvPr>
@@ -3383,7 +3533,7 @@
           <p:cNvPr id="4" name="Content Placeholder 3">
             <a:extLst xmlns:a="http://schemas.openxmlformats.org/drawingml/2006/main">
               <a:ext uri="{FF2B5EF4-FFF2-40B4-BE49-F238E27FC236}">
-                <a16:creationId xmlns:a16="http://schemas.microsoft.com/office/drawing/2014/main" id="{9D5D8C05-80A4-48C5-AADE-3CEC86F649BE}"/>
+                <a16:creationId xmlns:a16="http://schemas.microsoft.com/office/drawing/2014/main" id="{EF1EE6BE-6DC5-4675-8EC9-166142E373E1}"/>
               </a:ext>
             </a:extLst>
           </p:cNvPr>
@@ -3487,7 +3637,7 @@
           <p:cNvPr id="5" name="Date Placeholder 4">
             <a:extLst xmlns:a="http://schemas.openxmlformats.org/drawingml/2006/main">
               <a:ext uri="{FF2B5EF4-FFF2-40B4-BE49-F238E27FC236}">
-                <a16:creationId xmlns:a16="http://schemas.microsoft.com/office/drawing/2014/main" id="{952156A4-D792-4C88-9B86-B7AD663B941C}"/>
+                <a16:creationId xmlns:a16="http://schemas.microsoft.com/office/drawing/2014/main" id="{37C2E6BB-B498-4378-9D22-1FC93E9B6F25}"/>
               </a:ext>
             </a:extLst>
           </p:cNvPr>
@@ -3514,7 +3664,7 @@
           <p:cNvPr id="6" name="Footer Placeholder 5">
             <a:extLst xmlns:a="http://schemas.openxmlformats.org/drawingml/2006/main">
               <a:ext uri="{FF2B5EF4-FFF2-40B4-BE49-F238E27FC236}">
-                <a16:creationId xmlns:a16="http://schemas.microsoft.com/office/drawing/2014/main" id="{7461D495-C044-4E65-943E-C14CD66D29F3}"/>
+                <a16:creationId xmlns:a16="http://schemas.microsoft.com/office/drawing/2014/main" id="{D9D1A957-5317-483E-B11A-A3449410024A}"/>
               </a:ext>
             </a:extLst>
           </p:cNvPr>
@@ -3537,7 +3687,7 @@
           <p:cNvPr id="7" name="Slide Number Placeholder 6">
             <a:extLst xmlns:a="http://schemas.openxmlformats.org/drawingml/2006/main">
               <a:ext uri="{FF2B5EF4-FFF2-40B4-BE49-F238E27FC236}">
-                <a16:creationId xmlns:a16="http://schemas.microsoft.com/office/drawing/2014/main" id="{1C57C8BE-53BE-47E2-ADC1-61BBF8F7E060}"/>
+                <a16:creationId xmlns:a16="http://schemas.microsoft.com/office/drawing/2014/main" id="{5E418BFD-4EC4-41F0-B6E4-9FAF7CB6E30E}"/>
               </a:ext>
             </a:extLst>
           </p:cNvPr>
@@ -3581,7 +3731,7 @@
           <p:cNvPr id="2" name="Title 1">
             <a:extLst xmlns:a="http://schemas.openxmlformats.org/drawingml/2006/main">
               <a:ext uri="{FF2B5EF4-FFF2-40B4-BE49-F238E27FC236}">
-                <a16:creationId xmlns:a16="http://schemas.microsoft.com/office/drawing/2014/main" id="{B4EBE32C-7602-486A-AF70-9D0E59DBF919}"/>
+                <a16:creationId xmlns:a16="http://schemas.microsoft.com/office/drawing/2014/main" id="{8A55A1F6-9D43-43DE-A9C4-35E33CCD4B95}"/>
               </a:ext>
             </a:extLst>
           </p:cNvPr>
@@ -3613,7 +3763,7 @@
           <p:cNvPr id="3" name="Text Placeholder 2">
             <a:extLst xmlns:a="http://schemas.openxmlformats.org/drawingml/2006/main">
               <a:ext uri="{FF2B5EF4-FFF2-40B4-BE49-F238E27FC236}">
-                <a16:creationId xmlns:a16="http://schemas.microsoft.com/office/drawing/2014/main" id="{34930639-E2B1-42D5-A6C8-5552C006DF81}"/>
+                <a16:creationId xmlns:a16="http://schemas.microsoft.com/office/drawing/2014/main" id="{30F72D5E-88F0-4651-99D9-53E07F0E1F72}"/>
               </a:ext>
             </a:extLst>
           </p:cNvPr>
@@ -3685,7 +3835,7 @@
           <p:cNvPr id="4" name="Content Placeholder 3">
             <a:extLst xmlns:a="http://schemas.openxmlformats.org/drawingml/2006/main">
               <a:ext uri="{FF2B5EF4-FFF2-40B4-BE49-F238E27FC236}">
-                <a16:creationId xmlns:a16="http://schemas.microsoft.com/office/drawing/2014/main" id="{24C98651-054E-47AA-A53C-7C70F9489C28}"/>
+                <a16:creationId xmlns:a16="http://schemas.microsoft.com/office/drawing/2014/main" id="{BB3E3E63-BE9F-416F-B80B-B40577BCF7CA}"/>
               </a:ext>
             </a:extLst>
           </p:cNvPr>
@@ -3789,7 +3939,7 @@
           <p:cNvPr id="5" name="Text Placeholder 4">
             <a:extLst xmlns:a="http://schemas.openxmlformats.org/drawingml/2006/main">
               <a:ext uri="{FF2B5EF4-FFF2-40B4-BE49-F238E27FC236}">
-                <a16:creationId xmlns:a16="http://schemas.microsoft.com/office/drawing/2014/main" id="{0758C0BC-CB2E-4112-85D6-76FCD2C2EC63}"/>
+                <a16:creationId xmlns:a16="http://schemas.microsoft.com/office/drawing/2014/main" id="{14971445-A9FF-4C47-BCFA-3E73357B22FD}"/>
               </a:ext>
             </a:extLst>
           </p:cNvPr>
@@ -3861,7 +4011,7 @@
           <p:cNvPr id="6" name="Content Placeholder 5">
             <a:extLst xmlns:a="http://schemas.openxmlformats.org/drawingml/2006/main">
               <a:ext uri="{FF2B5EF4-FFF2-40B4-BE49-F238E27FC236}">
-                <a16:creationId xmlns:a16="http://schemas.microsoft.com/office/drawing/2014/main" id="{86CD8248-A5B9-46C1-8184-E6CC82E3DCA3}"/>
+                <a16:creationId xmlns:a16="http://schemas.microsoft.com/office/drawing/2014/main" id="{EA393559-A5AC-4038-A788-2B8547F6522D}"/>
               </a:ext>
             </a:extLst>
           </p:cNvPr>
@@ -3965,7 +4115,7 @@
           <p:cNvPr id="7" name="Date Placeholder 6">
             <a:extLst xmlns:a="http://schemas.openxmlformats.org/drawingml/2006/main">
               <a:ext uri="{FF2B5EF4-FFF2-40B4-BE49-F238E27FC236}">
-                <a16:creationId xmlns:a16="http://schemas.microsoft.com/office/drawing/2014/main" id="{C1051D5D-8DDF-40B3-9A0C-8B696C54927E}"/>
+                <a16:creationId xmlns:a16="http://schemas.microsoft.com/office/drawing/2014/main" id="{72DAB087-4029-4FF1-AD01-C37B4B28C731}"/>
               </a:ext>
             </a:extLst>
           </p:cNvPr>
@@ -3992,7 +4142,7 @@
           <p:cNvPr id="8" name="Footer Placeholder 7">
             <a:extLst xmlns:a="http://schemas.openxmlformats.org/drawingml/2006/main">
               <a:ext uri="{FF2B5EF4-FFF2-40B4-BE49-F238E27FC236}">
-                <a16:creationId xmlns:a16="http://schemas.microsoft.com/office/drawing/2014/main" id="{0F34022C-AA32-4AC4-A3BF-E69C44F4B4D1}"/>
+                <a16:creationId xmlns:a16="http://schemas.microsoft.com/office/drawing/2014/main" id="{7FDC8AA4-1205-42F8-AB27-936066D79E0E}"/>
               </a:ext>
             </a:extLst>
           </p:cNvPr>
@@ -4015,7 +4165,7 @@
           <p:cNvPr id="9" name="Slide Number Placeholder 8">
             <a:extLst xmlns:a="http://schemas.openxmlformats.org/drawingml/2006/main">
               <a:ext uri="{FF2B5EF4-FFF2-40B4-BE49-F238E27FC236}">
-                <a16:creationId xmlns:a16="http://schemas.microsoft.com/office/drawing/2014/main" id="{72F4005E-644A-481C-B973-16DF595361F2}"/>
+                <a16:creationId xmlns:a16="http://schemas.microsoft.com/office/drawing/2014/main" id="{E0AF0009-9442-42DB-AFEA-86DD451B0D67}"/>
               </a:ext>
             </a:extLst>
           </p:cNvPr>
@@ -4059,7 +4209,7 @@
           <p:cNvPr id="2" name="Title 1">
             <a:extLst xmlns:a="http://schemas.openxmlformats.org/drawingml/2006/main">
               <a:ext uri="{FF2B5EF4-FFF2-40B4-BE49-F238E27FC236}">
-                <a16:creationId xmlns:a16="http://schemas.microsoft.com/office/drawing/2014/main" id="{BEDBA655-DF88-4F0F-9125-F9C428124F8A}"/>
+                <a16:creationId xmlns:a16="http://schemas.microsoft.com/office/drawing/2014/main" id="{F26BC09E-EF89-4FE7-8699-E5669E19B110}"/>
               </a:ext>
             </a:extLst>
           </p:cNvPr>
@@ -4086,7 +4236,7 @@
           <p:cNvPr id="3" name="Date Placeholder 2">
             <a:extLst xmlns:a="http://schemas.openxmlformats.org/drawingml/2006/main">
               <a:ext uri="{FF2B5EF4-FFF2-40B4-BE49-F238E27FC236}">
-                <a16:creationId xmlns:a16="http://schemas.microsoft.com/office/drawing/2014/main" id="{B1201180-A62E-4700-B472-04660A0A8DAA}"/>
+                <a16:creationId xmlns:a16="http://schemas.microsoft.com/office/drawing/2014/main" id="{0FF4A0AD-5A38-40EC-8C33-7434736E5AA4}"/>
               </a:ext>
             </a:extLst>
           </p:cNvPr>
@@ -4113,7 +4263,7 @@
           <p:cNvPr id="4" name="Footer Placeholder 3">
             <a:extLst xmlns:a="http://schemas.openxmlformats.org/drawingml/2006/main">
               <a:ext uri="{FF2B5EF4-FFF2-40B4-BE49-F238E27FC236}">
-                <a16:creationId xmlns:a16="http://schemas.microsoft.com/office/drawing/2014/main" id="{022C40F2-FC5F-4D97-8786-9E5986B50370}"/>
+                <a16:creationId xmlns:a16="http://schemas.microsoft.com/office/drawing/2014/main" id="{882E70B3-AEB8-4D45-A854-6E9F02FB1283}"/>
               </a:ext>
             </a:extLst>
           </p:cNvPr>
@@ -4136,7 +4286,7 @@
           <p:cNvPr id="5" name="Slide Number Placeholder 4">
             <a:extLst xmlns:a="http://schemas.openxmlformats.org/drawingml/2006/main">
               <a:ext uri="{FF2B5EF4-FFF2-40B4-BE49-F238E27FC236}">
-                <a16:creationId xmlns:a16="http://schemas.microsoft.com/office/drawing/2014/main" id="{DA6FDDA4-CEF2-4927-99B6-0AC3D80F3832}"/>
+                <a16:creationId xmlns:a16="http://schemas.microsoft.com/office/drawing/2014/main" id="{9CDA3EA8-6F25-459A-81F2-E495A54AC98B}"/>
               </a:ext>
             </a:extLst>
           </p:cNvPr>
@@ -4180,7 +4330,7 @@
           <p:cNvPr id="2" name="Date Placeholder 1">
             <a:extLst xmlns:a="http://schemas.openxmlformats.org/drawingml/2006/main">
               <a:ext uri="{FF2B5EF4-FFF2-40B4-BE49-F238E27FC236}">
-                <a16:creationId xmlns:a16="http://schemas.microsoft.com/office/drawing/2014/main" id="{2DB68C71-651C-475A-A59E-898D90AD91D9}"/>
+                <a16:creationId xmlns:a16="http://schemas.microsoft.com/office/drawing/2014/main" id="{8608896F-99FE-40CC-9C8C-E269506864A0}"/>
               </a:ext>
             </a:extLst>
           </p:cNvPr>
@@ -4207,7 +4357,7 @@
           <p:cNvPr id="3" name="Footer Placeholder 2">
             <a:extLst xmlns:a="http://schemas.openxmlformats.org/drawingml/2006/main">
               <a:ext uri="{FF2B5EF4-FFF2-40B4-BE49-F238E27FC236}">
-                <a16:creationId xmlns:a16="http://schemas.microsoft.com/office/drawing/2014/main" id="{54FE7B7E-67E8-436E-8110-2CE335EFDB12}"/>
+                <a16:creationId xmlns:a16="http://schemas.microsoft.com/office/drawing/2014/main" id="{27AFE579-3CCF-410C-A3C4-1A4B170FDE95}"/>
               </a:ext>
             </a:extLst>
           </p:cNvPr>
@@ -4230,7 +4380,7 @@
           <p:cNvPr id="4" name="Slide Number Placeholder 3">
             <a:extLst xmlns:a="http://schemas.openxmlformats.org/drawingml/2006/main">
               <a:ext uri="{FF2B5EF4-FFF2-40B4-BE49-F238E27FC236}">
-                <a16:creationId xmlns:a16="http://schemas.microsoft.com/office/drawing/2014/main" id="{12038C08-5C33-4B9B-8156-AD7AF2459B88}"/>
+                <a16:creationId xmlns:a16="http://schemas.microsoft.com/office/drawing/2014/main" id="{ABF740A2-97C3-468D-A24E-DD14F173E66F}"/>
               </a:ext>
             </a:extLst>
           </p:cNvPr>
@@ -4274,7 +4424,7 @@
           <p:cNvPr id="2" name="Title 1">
             <a:extLst xmlns:a="http://schemas.openxmlformats.org/drawingml/2006/main">
               <a:ext uri="{FF2B5EF4-FFF2-40B4-BE49-F238E27FC236}">
-                <a16:creationId xmlns:a16="http://schemas.microsoft.com/office/drawing/2014/main" id="{1248E800-FC62-4F9F-BCD2-A16C0E550DE1}"/>
+                <a16:creationId xmlns:a16="http://schemas.microsoft.com/office/drawing/2014/main" id="{3467EA71-C8A6-4E2F-9274-A216CBCB9C64}"/>
               </a:ext>
             </a:extLst>
           </p:cNvPr>
@@ -4311,7 +4461,7 @@
           <p:cNvPr id="3" name="Content Placeholder 2">
             <a:extLst xmlns:a="http://schemas.openxmlformats.org/drawingml/2006/main">
               <a:ext uri="{FF2B5EF4-FFF2-40B4-BE49-F238E27FC236}">
-                <a16:creationId xmlns:a16="http://schemas.microsoft.com/office/drawing/2014/main" id="{B1346454-D204-48DF-B1EE-68C1B89CDCE2}"/>
+                <a16:creationId xmlns:a16="http://schemas.microsoft.com/office/drawing/2014/main" id="{92623A25-48A9-44CB-8348-A1E17971D16B}"/>
               </a:ext>
             </a:extLst>
           </p:cNvPr>
@@ -4415,7 +4565,7 @@
           <p:cNvPr id="4" name="Text Placeholder 3">
             <a:extLst xmlns:a="http://schemas.openxmlformats.org/drawingml/2006/main">
               <a:ext uri="{FF2B5EF4-FFF2-40B4-BE49-F238E27FC236}">
-                <a16:creationId xmlns:a16="http://schemas.microsoft.com/office/drawing/2014/main" id="{2CC42245-1547-414C-9F07-286A92BA5F6B}"/>
+                <a16:creationId xmlns:a16="http://schemas.microsoft.com/office/drawing/2014/main" id="{A7EC341A-8855-44E3-88BD-3EE1ED4B025E}"/>
               </a:ext>
             </a:extLst>
           </p:cNvPr>
@@ -4487,7 +4637,7 @@
           <p:cNvPr id="5" name="Date Placeholder 4">
             <a:extLst xmlns:a="http://schemas.openxmlformats.org/drawingml/2006/main">
               <a:ext uri="{FF2B5EF4-FFF2-40B4-BE49-F238E27FC236}">
-                <a16:creationId xmlns:a16="http://schemas.microsoft.com/office/drawing/2014/main" id="{13F11701-3DBA-42CD-992C-232A7586FD72}"/>
+                <a16:creationId xmlns:a16="http://schemas.microsoft.com/office/drawing/2014/main" id="{4412998A-0D75-42BE-B5FE-3DD9ED1C22E5}"/>
               </a:ext>
             </a:extLst>
           </p:cNvPr>
@@ -4514,7 +4664,7 @@
           <p:cNvPr id="6" name="Footer Placeholder 5">
             <a:extLst xmlns:a="http://schemas.openxmlformats.org/drawingml/2006/main">
               <a:ext uri="{FF2B5EF4-FFF2-40B4-BE49-F238E27FC236}">
-                <a16:creationId xmlns:a16="http://schemas.microsoft.com/office/drawing/2014/main" id="{67F0BF5D-D498-46BF-96D5-BC0A6BD56D28}"/>
+                <a16:creationId xmlns:a16="http://schemas.microsoft.com/office/drawing/2014/main" id="{F006F799-8577-4857-A013-4E7CC3D64CD6}"/>
               </a:ext>
             </a:extLst>
           </p:cNvPr>
@@ -4537,7 +4687,7 @@
           <p:cNvPr id="7" name="Slide Number Placeholder 6">
             <a:extLst xmlns:a="http://schemas.openxmlformats.org/drawingml/2006/main">
               <a:ext uri="{FF2B5EF4-FFF2-40B4-BE49-F238E27FC236}">
-                <a16:creationId xmlns:a16="http://schemas.microsoft.com/office/drawing/2014/main" id="{7B077877-31A7-4972-8C03-B23AB7608FDB}"/>
+                <a16:creationId xmlns:a16="http://schemas.microsoft.com/office/drawing/2014/main" id="{4F154BE7-FCD4-4922-8FA8-8BC474020786}"/>
               </a:ext>
             </a:extLst>
           </p:cNvPr>
@@ -4581,7 +4731,7 @@
           <p:cNvPr id="2" name="Title 1">
             <a:extLst xmlns:a="http://schemas.openxmlformats.org/drawingml/2006/main">
               <a:ext uri="{FF2B5EF4-FFF2-40B4-BE49-F238E27FC236}">
-                <a16:creationId xmlns:a16="http://schemas.microsoft.com/office/drawing/2014/main" id="{4CAB5B8F-F87B-4512-BF39-F144D316619E}"/>
+                <a16:creationId xmlns:a16="http://schemas.microsoft.com/office/drawing/2014/main" id="{ED1A83EE-B1D7-47E7-A57E-1B6EA9F4C215}"/>
               </a:ext>
             </a:extLst>
           </p:cNvPr>
@@ -4618,7 +4768,7 @@
           <p:cNvPr id="3" name="Picture Placeholder 2">
             <a:extLst xmlns:a="http://schemas.openxmlformats.org/drawingml/2006/main">
               <a:ext uri="{FF2B5EF4-FFF2-40B4-BE49-F238E27FC236}">
-                <a16:creationId xmlns:a16="http://schemas.microsoft.com/office/drawing/2014/main" id="{B9604382-D038-4BEA-A809-C0F6E4FAAC5C}"/>
+                <a16:creationId xmlns:a16="http://schemas.microsoft.com/office/drawing/2014/main" id="{8B15C224-37D9-4922-A1DF-47D31B0C1E94}"/>
               </a:ext>
             </a:extLst>
           </p:cNvPr>
@@ -4683,7 +4833,7 @@
           <p:cNvPr id="4" name="Text Placeholder 3">
             <a:extLst xmlns:a="http://schemas.openxmlformats.org/drawingml/2006/main">
               <a:ext uri="{FF2B5EF4-FFF2-40B4-BE49-F238E27FC236}">
-                <a16:creationId xmlns:a16="http://schemas.microsoft.com/office/drawing/2014/main" id="{4104D936-19AE-4AA3-893B-C44A82AEC9E5}"/>
+                <a16:creationId xmlns:a16="http://schemas.microsoft.com/office/drawing/2014/main" id="{5B579529-0027-4731-A2FD-07F467A82007}"/>
               </a:ext>
             </a:extLst>
           </p:cNvPr>
@@ -4755,7 +4905,7 @@
           <p:cNvPr id="5" name="Date Placeholder 4">
             <a:extLst xmlns:a="http://schemas.openxmlformats.org/drawingml/2006/main">
               <a:ext uri="{FF2B5EF4-FFF2-40B4-BE49-F238E27FC236}">
-                <a16:creationId xmlns:a16="http://schemas.microsoft.com/office/drawing/2014/main" id="{2FA5184C-19A4-442B-859D-56B38F7CE7FF}"/>
+                <a16:creationId xmlns:a16="http://schemas.microsoft.com/office/drawing/2014/main" id="{080BF1C7-1875-453D-A3D7-6A38E856FA02}"/>
               </a:ext>
             </a:extLst>
           </p:cNvPr>
@@ -4782,7 +4932,7 @@
           <p:cNvPr id="6" name="Footer Placeholder 5">
             <a:extLst xmlns:a="http://schemas.openxmlformats.org/drawingml/2006/main">
               <a:ext uri="{FF2B5EF4-FFF2-40B4-BE49-F238E27FC236}">
-                <a16:creationId xmlns:a16="http://schemas.microsoft.com/office/drawing/2014/main" id="{2AD96EB0-4317-4EAD-87F3-801D8DEA0670}"/>
+                <a16:creationId xmlns:a16="http://schemas.microsoft.com/office/drawing/2014/main" id="{FFD8BBE2-04CF-4592-B99E-3225E7DA25A5}"/>
               </a:ext>
             </a:extLst>
           </p:cNvPr>
@@ -4805,7 +4955,7 @@
           <p:cNvPr id="7" name="Slide Number Placeholder 6">
             <a:extLst xmlns:a="http://schemas.openxmlformats.org/drawingml/2006/main">
               <a:ext uri="{FF2B5EF4-FFF2-40B4-BE49-F238E27FC236}">
-                <a16:creationId xmlns:a16="http://schemas.microsoft.com/office/drawing/2014/main" id="{F3A9954E-58CF-4159-A225-98C4ED08D8FC}"/>
+                <a16:creationId xmlns:a16="http://schemas.microsoft.com/office/drawing/2014/main" id="{B3DCE94B-A779-4936-A561-703CDDA8836C}"/>
               </a:ext>
             </a:extLst>
           </p:cNvPr>
@@ -4854,7 +5004,7 @@
           <p:cNvPr id="2" name="Title Placeholder 1">
             <a:extLst xmlns:a="http://schemas.openxmlformats.org/drawingml/2006/main">
               <a:ext uri="{FF2B5EF4-FFF2-40B4-BE49-F238E27FC236}">
-                <a16:creationId xmlns:a16="http://schemas.microsoft.com/office/drawing/2014/main" id="{BB22A619-11F3-4444-8AC3-7F309A9A5E74}"/>
+                <a16:creationId xmlns:a16="http://schemas.microsoft.com/office/drawing/2014/main" id="{7CB68002-6F8B-4FD1-93F8-40DDA6057056}"/>
               </a:ext>
             </a:extLst>
           </p:cNvPr>
@@ -4891,7 +5041,7 @@
           <p:cNvPr id="3" name="Text Placeholder 2">
             <a:extLst xmlns:a="http://schemas.openxmlformats.org/drawingml/2006/main">
               <a:ext uri="{FF2B5EF4-FFF2-40B4-BE49-F238E27FC236}">
-                <a16:creationId xmlns:a16="http://schemas.microsoft.com/office/drawing/2014/main" id="{B234C8BF-B18A-4930-9DD4-AB26B16B0ACF}"/>
+                <a16:creationId xmlns:a16="http://schemas.microsoft.com/office/drawing/2014/main" id="{FE089EC9-1619-4929-A2CF-79FBADED5B5B}"/>
               </a:ext>
             </a:extLst>
           </p:cNvPr>
@@ -4963,7 +5113,7 @@
           <p:cNvPr id="4" name="Date Placeholder 3">
             <a:extLst xmlns:a="http://schemas.openxmlformats.org/drawingml/2006/main">
               <a:ext uri="{FF2B5EF4-FFF2-40B4-BE49-F238E27FC236}">
-                <a16:creationId xmlns:a16="http://schemas.microsoft.com/office/drawing/2014/main" id="{0788E573-4FF0-43EE-9642-B09071802684}"/>
+                <a16:creationId xmlns:a16="http://schemas.microsoft.com/office/drawing/2014/main" id="{B515FA1D-AF2A-47D1-8330-BA2CF3C68056}"/>
               </a:ext>
             </a:extLst>
           </p:cNvPr>
@@ -5009,7 +5159,7 @@
           <p:cNvPr id="5" name="Footer Placeholder 4">
             <a:extLst xmlns:a="http://schemas.openxmlformats.org/drawingml/2006/main">
               <a:ext uri="{FF2B5EF4-FFF2-40B4-BE49-F238E27FC236}">
-                <a16:creationId xmlns:a16="http://schemas.microsoft.com/office/drawing/2014/main" id="{F3318BF3-8240-424E-B8B6-225B2CD457C2}"/>
+                <a16:creationId xmlns:a16="http://schemas.microsoft.com/office/drawing/2014/main" id="{847FC09D-9998-4A8C-90C0-8DF05652FEEC}"/>
               </a:ext>
             </a:extLst>
           </p:cNvPr>
@@ -5051,7 +5201,7 @@
           <p:cNvPr id="6" name="Slide Number Placeholder 5">
             <a:extLst xmlns:a="http://schemas.openxmlformats.org/drawingml/2006/main">
               <a:ext uri="{FF2B5EF4-FFF2-40B4-BE49-F238E27FC236}">
-                <a16:creationId xmlns:a16="http://schemas.microsoft.com/office/drawing/2014/main" id="{6E6107AE-25C7-44C8-9EBD-CA3423056A93}"/>
+                <a16:creationId xmlns:a16="http://schemas.microsoft.com/office/drawing/2014/main" id="{ED0D32E3-F6BA-4B8A-B4BC-D701920B0932}"/>
               </a:ext>
             </a:extLst>
           </p:cNvPr>
@@ -5096,17 +5246,17 @@
   </p:cSld>
   <p:clrMap bg1="lt1" tx1="dk1" bg2="lt2" tx2="dk2" accent1="accent1" accent2="accent2" accent3="accent3" accent4="accent4" accent5="accent5" accent6="accent6" hlink="hlink" folHlink="folHlink"/>
   <p:sldLayoutIdLst>
-    <p:sldLayoutId xmlns:r="http://schemas.openxmlformats.org/officeDocument/2006/relationships" id="2147483649" r:id="R7de63a313fb44dcd"/>
-    <p:sldLayoutId xmlns:r="http://schemas.openxmlformats.org/officeDocument/2006/relationships" id="2147483650" r:id="R3b98ec53c129407b"/>
-    <p:sldLayoutId xmlns:r="http://schemas.openxmlformats.org/officeDocument/2006/relationships" id="2147483651" r:id="Rfdfb29c8d23b4e58"/>
-    <p:sldLayoutId xmlns:r="http://schemas.openxmlformats.org/officeDocument/2006/relationships" id="2147483652" r:id="R44ecfc53f4f64a34"/>
-    <p:sldLayoutId xmlns:r="http://schemas.openxmlformats.org/officeDocument/2006/relationships" id="2147483653" r:id="Rcd3f02ae791044ff"/>
-    <p:sldLayoutId xmlns:r="http://schemas.openxmlformats.org/officeDocument/2006/relationships" id="2147483654" r:id="R89526b29f5a74cbc"/>
-    <p:sldLayoutId xmlns:r="http://schemas.openxmlformats.org/officeDocument/2006/relationships" id="2147483655" r:id="Rf54ea4773d644144"/>
-    <p:sldLayoutId xmlns:r="http://schemas.openxmlformats.org/officeDocument/2006/relationships" id="2147483656" r:id="R73866badcf454742"/>
-    <p:sldLayoutId xmlns:r="http://schemas.openxmlformats.org/officeDocument/2006/relationships" id="2147483657" r:id="Rb647e1c6a3ee4475"/>
-    <p:sldLayoutId xmlns:r="http://schemas.openxmlformats.org/officeDocument/2006/relationships" id="2147483658" r:id="R6e9fc39988834d60"/>
-    <p:sldLayoutId xmlns:r="http://schemas.openxmlformats.org/officeDocument/2006/relationships" id="2147483659" r:id="Rdf5e6149b7d84d01"/>
+    <p:sldLayoutId xmlns:r="http://schemas.openxmlformats.org/officeDocument/2006/relationships" id="2147483649" r:id="R968dbd620cb5423b"/>
+    <p:sldLayoutId xmlns:r="http://schemas.openxmlformats.org/officeDocument/2006/relationships" id="2147483650" r:id="R8bbd5451ac7d4490"/>
+    <p:sldLayoutId xmlns:r="http://schemas.openxmlformats.org/officeDocument/2006/relationships" id="2147483651" r:id="R79f154577f814f0d"/>
+    <p:sldLayoutId xmlns:r="http://schemas.openxmlformats.org/officeDocument/2006/relationships" id="2147483652" r:id="R7d131466689d433b"/>
+    <p:sldLayoutId xmlns:r="http://schemas.openxmlformats.org/officeDocument/2006/relationships" id="2147483653" r:id="R364a3a98c0a9496c"/>
+    <p:sldLayoutId xmlns:r="http://schemas.openxmlformats.org/officeDocument/2006/relationships" id="2147483654" r:id="R9b107e16e3a14489"/>
+    <p:sldLayoutId xmlns:r="http://schemas.openxmlformats.org/officeDocument/2006/relationships" id="2147483655" r:id="R8365d6f1512243ba"/>
+    <p:sldLayoutId xmlns:r="http://schemas.openxmlformats.org/officeDocument/2006/relationships" id="2147483656" r:id="Rb232700316c241ed"/>
+    <p:sldLayoutId xmlns:r="http://schemas.openxmlformats.org/officeDocument/2006/relationships" id="2147483657" r:id="R1153ad6d236441ad"/>
+    <p:sldLayoutId xmlns:r="http://schemas.openxmlformats.org/officeDocument/2006/relationships" id="2147483658" r:id="R9ae8c74c6f3449f3"/>
+    <p:sldLayoutId xmlns:r="http://schemas.openxmlformats.org/officeDocument/2006/relationships" id="2147483659" r:id="R7e3d925e300e426d"/>
   </p:sldLayoutIdLst>
   <p:txStyles>
     <p:titleStyle>
@@ -5659,7 +5809,7 @@
           <p:cNvPr id="2" name="Rectangle 1">
             <a:extLst xmlns:a="http://schemas.openxmlformats.org/drawingml/2006/main">
               <a:ext uri="{FF2B5EF4-FFF2-40B4-BE49-F238E27FC236}">
-                <a16:creationId xmlns:a16="http://schemas.microsoft.com/office/drawing/2014/main" id="{07664F66-6050-410C-8829-3B4B86A48C7D}"/>
+                <a16:creationId xmlns:a16="http://schemas.microsoft.com/office/drawing/2014/main" id="{F277A0F2-7FE2-4D4A-B405-6FFC81D0A933}"/>
               </a:ext>
             </a:extLst>
           </p:cNvPr>
@@ -5714,7 +5864,7 @@
           <p:cNvPr id="3" name="TextBox 2">
             <a:extLst xmlns:a="http://schemas.openxmlformats.org/drawingml/2006/main">
               <a:ext uri="{FF2B5EF4-FFF2-40B4-BE49-F238E27FC236}">
-                <a16:creationId xmlns:a16="http://schemas.microsoft.com/office/drawing/2014/main" id="{258A88F0-FFEE-4679-B121-D0D6FFECC5B9}"/>
+                <a16:creationId xmlns:a16="http://schemas.microsoft.com/office/drawing/2014/main" id="{7AB3E8D9-696C-42A0-A017-5E2C473B183A}"/>
               </a:ext>
             </a:extLst>
           </p:cNvPr>
@@ -5761,7 +5911,7 @@
           <p:cNvPr id="4" name="TextBox 3">
             <a:extLst xmlns:a="http://schemas.openxmlformats.org/drawingml/2006/main">
               <a:ext uri="{FF2B5EF4-FFF2-40B4-BE49-F238E27FC236}">
-                <a16:creationId xmlns:a16="http://schemas.microsoft.com/office/drawing/2014/main" id="{118AB0A0-107D-4EB2-BD55-8A09E568C741}"/>
+                <a16:creationId xmlns:a16="http://schemas.microsoft.com/office/drawing/2014/main" id="{96658B06-D479-4B2A-A83F-871D812B9F19}"/>
               </a:ext>
             </a:extLst>
           </p:cNvPr>
@@ -5809,7 +5959,7 @@
           <p:cNvPr id="5" name="TextBox 4">
             <a:extLst xmlns:a="http://schemas.openxmlformats.org/drawingml/2006/main">
               <a:ext uri="{FF2B5EF4-FFF2-40B4-BE49-F238E27FC236}">
-                <a16:creationId xmlns:a16="http://schemas.microsoft.com/office/drawing/2014/main" id="{471F3F4A-42E2-40CD-A19D-D657B25FD43E}"/>
+                <a16:creationId xmlns:a16="http://schemas.microsoft.com/office/drawing/2014/main" id="{DE645D7A-0BFD-4767-ADB6-1059E55AC5C5}"/>
               </a:ext>
             </a:extLst>
           </p:cNvPr>
@@ -5856,7 +6006,7 @@
           <p:cNvPr id="6" name="Rectangle 5">
             <a:extLst xmlns:a="http://schemas.openxmlformats.org/drawingml/2006/main">
               <a:ext uri="{FF2B5EF4-FFF2-40B4-BE49-F238E27FC236}">
-                <a16:creationId xmlns:a16="http://schemas.microsoft.com/office/drawing/2014/main" id="{7B8E0133-7DEC-418C-96BC-8BB4D657FBB8}"/>
+                <a16:creationId xmlns:a16="http://schemas.microsoft.com/office/drawing/2014/main" id="{627F6F16-F1C7-47FA-958E-093F9574251E}"/>
               </a:ext>
             </a:extLst>
           </p:cNvPr>
@@ -5911,7 +6061,7 @@
           <p:cNvPr id="7" name="TextBox 6">
             <a:extLst xmlns:a="http://schemas.openxmlformats.org/drawingml/2006/main">
               <a:ext uri="{FF2B5EF4-FFF2-40B4-BE49-F238E27FC236}">
-                <a16:creationId xmlns:a16="http://schemas.microsoft.com/office/drawing/2014/main" id="{4A597FA9-59CA-4EAA-892C-19AA50185999}"/>
+                <a16:creationId xmlns:a16="http://schemas.microsoft.com/office/drawing/2014/main" id="{D31B28CE-9E45-4D04-800D-5D3D1486E7BB}"/>
               </a:ext>
             </a:extLst>
           </p:cNvPr>
@@ -5958,7 +6108,7 @@
           <p:cNvPr id="8" name="TextBox 7">
             <a:extLst xmlns:a="http://schemas.openxmlformats.org/drawingml/2006/main">
               <a:ext uri="{FF2B5EF4-FFF2-40B4-BE49-F238E27FC236}">
-                <a16:creationId xmlns:a16="http://schemas.microsoft.com/office/drawing/2014/main" id="{18D91328-E034-433A-978E-929590AB66E9}"/>
+                <a16:creationId xmlns:a16="http://schemas.microsoft.com/office/drawing/2014/main" id="{5CC801E6-507D-4DE5-AF9A-B6F55640B0DF}"/>
               </a:ext>
             </a:extLst>
           </p:cNvPr>
@@ -5995,7 +6145,7 @@
                 <a:ea typeface="Aptos"/>
                 <a:cs typeface="Aptos"/>
               </a:rPr>
-              <a:t>2026.07.30-36</a:t>
+              <a:t>2026.07.31-37</a:t>
             </a:r>
           </a:p>
         </p:txBody>
@@ -6005,7 +6155,7 @@
           <p:cNvPr id="9" name="TextBox 8">
             <a:extLst xmlns:a="http://schemas.openxmlformats.org/drawingml/2006/main">
               <a:ext uri="{FF2B5EF4-FFF2-40B4-BE49-F238E27FC236}">
-                <a16:creationId xmlns:a16="http://schemas.microsoft.com/office/drawing/2014/main" id="{C4ADF142-38B9-42ED-BD0D-7697933C88BC}"/>
+                <a16:creationId xmlns:a16="http://schemas.microsoft.com/office/drawing/2014/main" id="{304A7130-6313-4E21-8DB2-55F26C770959}"/>
               </a:ext>
             </a:extLst>
           </p:cNvPr>
@@ -6042,7 +6192,7 @@
                 <a:ea typeface="Aptos"/>
                 <a:cs typeface="Aptos"/>
               </a:rPr>
-              <a:t>Päivitetty 2026-07-30</a:t>
+              <a:t>Päivitetty 2026-07-31</a:t>
             </a:r>
             <a:br>
               <a:rPr sz="1700" b="0">
@@ -6073,7 +6223,7 @@
           <p:cNvPr id="10" name="TextBox 9">
             <a:extLst xmlns:a="http://schemas.openxmlformats.org/drawingml/2006/main">
               <a:ext uri="{FF2B5EF4-FFF2-40B4-BE49-F238E27FC236}">
-                <a16:creationId xmlns:a16="http://schemas.microsoft.com/office/drawing/2014/main" id="{CA281209-E800-4147-9EEB-048939788F21}"/>
+                <a16:creationId xmlns:a16="http://schemas.microsoft.com/office/drawing/2014/main" id="{FC836318-EC1B-4B43-AED5-52FD51A4B174}"/>
               </a:ext>
             </a:extLst>
           </p:cNvPr>
@@ -6120,7 +6270,7 @@
           <p:cNvPr id="11" name="TextBox 10">
             <a:extLst xmlns:a="http://schemas.openxmlformats.org/drawingml/2006/main">
               <a:ext uri="{FF2B5EF4-FFF2-40B4-BE49-F238E27FC236}">
-                <a16:creationId xmlns:a16="http://schemas.microsoft.com/office/drawing/2014/main" id="{F63580BC-0C10-4D3F-88AC-5F5ED5D40330}"/>
+                <a16:creationId xmlns:a16="http://schemas.microsoft.com/office/drawing/2014/main" id="{F31766CC-8FB2-45BF-95F1-D13A96A14AEB}"/>
               </a:ext>
             </a:extLst>
           </p:cNvPr>
@@ -6167,7 +6317,7 @@
           <p:cNvPr id="12" name="TextBox 11">
             <a:extLst xmlns:a="http://schemas.openxmlformats.org/drawingml/2006/main">
               <a:ext uri="{FF2B5EF4-FFF2-40B4-BE49-F238E27FC236}">
-                <a16:creationId xmlns:a16="http://schemas.microsoft.com/office/drawing/2014/main" id="{30F95430-639E-4F0D-B7C0-37B893736AE5}"/>
+                <a16:creationId xmlns:a16="http://schemas.microsoft.com/office/drawing/2014/main" id="{E8F27FD1-45DD-40C6-918C-351622759434}"/>
               </a:ext>
             </a:extLst>
           </p:cNvPr>
@@ -6212,7 +6362,7 @@
     </p:spTree>
     <p:extLst>
       <p:ext uri="{BB962C8B-B14F-4D97-AF65-F5344CB8AC3E}">
-        <p14:creationId xmlns:p14="http://schemas.microsoft.com/office/powerpoint/2010/main" val="1933144937"/>
+        <p14:creationId xmlns:p14="http://schemas.microsoft.com/office/powerpoint/2010/main" val="1133472093"/>
       </p:ext>
     </p:extLst>
   </p:cSld>
@@ -6236,7 +6386,7 @@
           <p:cNvPr id="2" name="TextBox 1">
             <a:extLst xmlns:a="http://schemas.openxmlformats.org/drawingml/2006/main">
               <a:ext uri="{FF2B5EF4-FFF2-40B4-BE49-F238E27FC236}">
-                <a16:creationId xmlns:a16="http://schemas.microsoft.com/office/drawing/2014/main" id="{6F046846-3009-40C1-980B-FDA50B3343F9}"/>
+                <a16:creationId xmlns:a16="http://schemas.microsoft.com/office/drawing/2014/main" id="{1BF18FF7-AF89-4CC0-83D0-D03D00A9CED5}"/>
               </a:ext>
             </a:extLst>
           </p:cNvPr>
@@ -6283,7 +6433,7 @@
           <p:cNvPr id="3" name="TextBox 2">
             <a:extLst xmlns:a="http://schemas.openxmlformats.org/drawingml/2006/main">
               <a:ext uri="{FF2B5EF4-FFF2-40B4-BE49-F238E27FC236}">
-                <a16:creationId xmlns:a16="http://schemas.microsoft.com/office/drawing/2014/main" id="{7DB00B56-0483-4F24-B661-523E7072F4BE}"/>
+                <a16:creationId xmlns:a16="http://schemas.microsoft.com/office/drawing/2014/main" id="{E35C18CA-A0CF-42AD-B8CC-8C182A93E4F1}"/>
               </a:ext>
             </a:extLst>
           </p:cNvPr>
@@ -6330,7 +6480,7 @@
           <p:cNvPr id="4" name="Rectangle 3">
             <a:extLst xmlns:a="http://schemas.openxmlformats.org/drawingml/2006/main">
               <a:ext uri="{FF2B5EF4-FFF2-40B4-BE49-F238E27FC236}">
-                <a16:creationId xmlns:a16="http://schemas.microsoft.com/office/drawing/2014/main" id="{24625681-A7C9-4E28-8995-2CDAC8F6398A}"/>
+                <a16:creationId xmlns:a16="http://schemas.microsoft.com/office/drawing/2014/main" id="{D2637B60-2638-41B7-B52B-5FF5A97DF391}"/>
               </a:ext>
             </a:extLst>
           </p:cNvPr>
@@ -6385,7 +6535,7 @@
           <p:cNvPr id="5" name="Rectangle 4">
             <a:extLst xmlns:a="http://schemas.openxmlformats.org/drawingml/2006/main">
               <a:ext uri="{FF2B5EF4-FFF2-40B4-BE49-F238E27FC236}">
-                <a16:creationId xmlns:a16="http://schemas.microsoft.com/office/drawing/2014/main" id="{92B1D24E-C4F2-4E5B-8C30-A72C07854778}"/>
+                <a16:creationId xmlns:a16="http://schemas.microsoft.com/office/drawing/2014/main" id="{071D72C9-1B89-475B-809A-69FB82981BC6}"/>
               </a:ext>
             </a:extLst>
           </p:cNvPr>
@@ -6440,7 +6590,7 @@
           <p:cNvPr id="6" name="TextBox 5">
             <a:extLst xmlns:a="http://schemas.openxmlformats.org/drawingml/2006/main">
               <a:ext uri="{FF2B5EF4-FFF2-40B4-BE49-F238E27FC236}">
-                <a16:creationId xmlns:a16="http://schemas.microsoft.com/office/drawing/2014/main" id="{78FEC5E4-3095-4B73-9E41-152A548C8A7B}"/>
+                <a16:creationId xmlns:a16="http://schemas.microsoft.com/office/drawing/2014/main" id="{C5B58B5A-6AAE-464C-A83E-1332F3D95F67}"/>
               </a:ext>
             </a:extLst>
           </p:cNvPr>
@@ -6477,7 +6627,7 @@
                 <a:ea typeface="Aptos"/>
                 <a:cs typeface="Aptos"/>
               </a:rPr>
-              <a:t>Julkinen riippumaton evidenssikooste · 2026.07.30-36 · 2026-07-30 · Lähteet: EPO; Saksa — viralliset tuomiot; WIPO</a:t>
+              <a:t>Julkinen riippumaton evidenssikooste · 2026.07.31-37 · 2026-07-31 · Lähteet: EPO; Saksa — viralliset tuomiot; WIPO</a:t>
             </a:r>
           </a:p>
         </p:txBody>
@@ -6487,7 +6637,7 @@
           <p:cNvPr id="7" name="TextBox 6">
             <a:extLst xmlns:a="http://schemas.openxmlformats.org/drawingml/2006/main">
               <a:ext uri="{FF2B5EF4-FFF2-40B4-BE49-F238E27FC236}">
-                <a16:creationId xmlns:a16="http://schemas.microsoft.com/office/drawing/2014/main" id="{6902F898-66B6-46A2-B19C-7166651473C4}"/>
+                <a16:creationId xmlns:a16="http://schemas.microsoft.com/office/drawing/2014/main" id="{937318CC-1781-412C-B7CE-238A26879012}"/>
               </a:ext>
             </a:extLst>
           </p:cNvPr>
@@ -6534,7 +6684,7 @@
           <p:cNvPr id="8" name="TextBox 7">
             <a:extLst xmlns:a="http://schemas.openxmlformats.org/drawingml/2006/main">
               <a:ext uri="{FF2B5EF4-FFF2-40B4-BE49-F238E27FC236}">
-                <a16:creationId xmlns:a16="http://schemas.microsoft.com/office/drawing/2014/main" id="{E8F682F4-AF3F-4001-9D11-3C9E64F90D35}"/>
+                <a16:creationId xmlns:a16="http://schemas.microsoft.com/office/drawing/2014/main" id="{4133087A-7430-4439-89A9-2216849300A6}"/>
               </a:ext>
             </a:extLst>
           </p:cNvPr>
@@ -6581,7 +6731,7 @@
           <p:cNvPr id="9" name="TextBox 8">
             <a:extLst xmlns:a="http://schemas.openxmlformats.org/drawingml/2006/main">
               <a:ext uri="{FF2B5EF4-FFF2-40B4-BE49-F238E27FC236}">
-                <a16:creationId xmlns:a16="http://schemas.microsoft.com/office/drawing/2014/main" id="{9EA23677-179F-41F5-A602-124EC37AA00D}"/>
+                <a16:creationId xmlns:a16="http://schemas.microsoft.com/office/drawing/2014/main" id="{BF5ECF23-4DD3-4CF3-B0FA-F03EE4214FB6}"/>
               </a:ext>
             </a:extLst>
           </p:cNvPr>
@@ -6678,7 +6828,7 @@
           <p:cNvPr id="10" name="Rounded Rectangle 9">
             <a:extLst xmlns:a="http://schemas.openxmlformats.org/drawingml/2006/main">
               <a:ext uri="{FF2B5EF4-FFF2-40B4-BE49-F238E27FC236}">
-                <a16:creationId xmlns:a16="http://schemas.microsoft.com/office/drawing/2014/main" id="{86E3E0AB-51E2-4B14-8DBE-74EF07D79DF1}"/>
+                <a16:creationId xmlns:a16="http://schemas.microsoft.com/office/drawing/2014/main" id="{295B5BA3-4DA8-41A0-ACCA-06507F31ACDF}"/>
               </a:ext>
             </a:extLst>
           </p:cNvPr>
@@ -6735,7 +6885,7 @@
           <p:cNvPr id="11" name="TextBox 10">
             <a:extLst xmlns:a="http://schemas.openxmlformats.org/drawingml/2006/main">
               <a:ext uri="{FF2B5EF4-FFF2-40B4-BE49-F238E27FC236}">
-                <a16:creationId xmlns:a16="http://schemas.microsoft.com/office/drawing/2014/main" id="{8E3CB54D-D9AF-4D51-B5AB-AEF144A8C3AA}"/>
+                <a16:creationId xmlns:a16="http://schemas.microsoft.com/office/drawing/2014/main" id="{4FE6746C-DA5B-4A94-8D92-006325491919}"/>
               </a:ext>
             </a:extLst>
           </p:cNvPr>
@@ -6782,7 +6932,7 @@
           <p:cNvPr id="12" name="TextBox 11">
             <a:extLst xmlns:a="http://schemas.openxmlformats.org/drawingml/2006/main">
               <a:ext uri="{FF2B5EF4-FFF2-40B4-BE49-F238E27FC236}">
-                <a16:creationId xmlns:a16="http://schemas.microsoft.com/office/drawing/2014/main" id="{F9433402-1B76-4406-90DC-43702F7DBD3E}"/>
+                <a16:creationId xmlns:a16="http://schemas.microsoft.com/office/drawing/2014/main" id="{27AB524A-0516-4CEA-829A-3AC10725E1F0}"/>
               </a:ext>
             </a:extLst>
           </p:cNvPr>
@@ -6827,7 +6977,7 @@
     </p:spTree>
     <p:extLst>
       <p:ext uri="{BB962C8B-B14F-4D97-AF65-F5344CB8AC3E}">
-        <p14:creationId xmlns:p14="http://schemas.microsoft.com/office/powerpoint/2010/main" val="1361539060"/>
+        <p14:creationId xmlns:p14="http://schemas.microsoft.com/office/powerpoint/2010/main" val="1543827686"/>
       </p:ext>
     </p:extLst>
   </p:cSld>
@@ -6851,7 +7001,7 @@
           <p:cNvPr id="2" name="TextBox 1">
             <a:extLst xmlns:a="http://schemas.openxmlformats.org/drawingml/2006/main">
               <a:ext uri="{FF2B5EF4-FFF2-40B4-BE49-F238E27FC236}">
-                <a16:creationId xmlns:a16="http://schemas.microsoft.com/office/drawing/2014/main" id="{D3B975BE-7DE8-45AA-95FD-2342B0799A2E}"/>
+                <a16:creationId xmlns:a16="http://schemas.microsoft.com/office/drawing/2014/main" id="{E5BC33B4-1E8A-4C2E-A062-DA7594A94E4F}"/>
               </a:ext>
             </a:extLst>
           </p:cNvPr>
@@ -6898,7 +7048,7 @@
           <p:cNvPr id="3" name="TextBox 2">
             <a:extLst xmlns:a="http://schemas.openxmlformats.org/drawingml/2006/main">
               <a:ext uri="{FF2B5EF4-FFF2-40B4-BE49-F238E27FC236}">
-                <a16:creationId xmlns:a16="http://schemas.microsoft.com/office/drawing/2014/main" id="{EFAA8DD8-4F53-4B84-90F1-BF3D4EA56BE8}"/>
+                <a16:creationId xmlns:a16="http://schemas.microsoft.com/office/drawing/2014/main" id="{DF2D517C-807A-486A-B642-100A6706CA52}"/>
               </a:ext>
             </a:extLst>
           </p:cNvPr>
@@ -6945,7 +7095,7 @@
           <p:cNvPr id="4" name="Rectangle 3">
             <a:extLst xmlns:a="http://schemas.openxmlformats.org/drawingml/2006/main">
               <a:ext uri="{FF2B5EF4-FFF2-40B4-BE49-F238E27FC236}">
-                <a16:creationId xmlns:a16="http://schemas.microsoft.com/office/drawing/2014/main" id="{98391E41-6E6C-43A2-9AB8-F5961974E79F}"/>
+                <a16:creationId xmlns:a16="http://schemas.microsoft.com/office/drawing/2014/main" id="{D1073A9F-1F43-4C99-BE0C-902FBB52C5B2}"/>
               </a:ext>
             </a:extLst>
           </p:cNvPr>
@@ -7000,7 +7150,7 @@
           <p:cNvPr id="5" name="Rectangle 4">
             <a:extLst xmlns:a="http://schemas.openxmlformats.org/drawingml/2006/main">
               <a:ext uri="{FF2B5EF4-FFF2-40B4-BE49-F238E27FC236}">
-                <a16:creationId xmlns:a16="http://schemas.microsoft.com/office/drawing/2014/main" id="{0DF536E5-A042-45AD-B6AC-4A90E07DDDE8}"/>
+                <a16:creationId xmlns:a16="http://schemas.microsoft.com/office/drawing/2014/main" id="{3561842C-EF48-421E-8A16-6444AA48ED4B}"/>
               </a:ext>
             </a:extLst>
           </p:cNvPr>
@@ -7055,7 +7205,7 @@
           <p:cNvPr id="6" name="TextBox 5">
             <a:extLst xmlns:a="http://schemas.openxmlformats.org/drawingml/2006/main">
               <a:ext uri="{FF2B5EF4-FFF2-40B4-BE49-F238E27FC236}">
-                <a16:creationId xmlns:a16="http://schemas.microsoft.com/office/drawing/2014/main" id="{730284C6-523F-4A5B-A315-57258A49FFF3}"/>
+                <a16:creationId xmlns:a16="http://schemas.microsoft.com/office/drawing/2014/main" id="{6E43324F-F1A7-4E9D-825C-ABC36416E388}"/>
               </a:ext>
             </a:extLst>
           </p:cNvPr>
@@ -7092,7 +7242,7 @@
                 <a:ea typeface="Aptos"/>
                 <a:cs typeface="Aptos"/>
               </a:rPr>
-              <a:t>Julkinen riippumaton evidenssikooste · 2026.07.30-36 · 2026-07-30 · Lähteet: EPO Register; EP3032975B2; 8 Ni 18/24 (EP); 7 O 3341/24</a:t>
+              <a:t>Julkinen riippumaton evidenssikooste · 2026.07.31-37 · 2026-07-31 · Lähteet: EPO Register; EP3032975B2; 8 Ni 18/24 (EP); 7 O 3341/24</a:t>
             </a:r>
           </a:p>
         </p:txBody>
@@ -7102,7 +7252,7 @@
           <p:cNvPr id="7" name="TextBox 6">
             <a:extLst xmlns:a="http://schemas.openxmlformats.org/drawingml/2006/main">
               <a:ext uri="{FF2B5EF4-FFF2-40B4-BE49-F238E27FC236}">
-                <a16:creationId xmlns:a16="http://schemas.microsoft.com/office/drawing/2014/main" id="{8E1FE3BC-B95E-4719-9A52-7B4093B7E725}"/>
+                <a16:creationId xmlns:a16="http://schemas.microsoft.com/office/drawing/2014/main" id="{832D62DB-4754-4DF8-AE0F-8E1F2441714B}"/>
               </a:ext>
             </a:extLst>
           </p:cNvPr>
@@ -7149,7 +7299,7 @@
           <p:cNvPr id="8" name="Rounded Rectangle 7">
             <a:extLst xmlns:a="http://schemas.openxmlformats.org/drawingml/2006/main">
               <a:ext uri="{FF2B5EF4-FFF2-40B4-BE49-F238E27FC236}">
-                <a16:creationId xmlns:a16="http://schemas.microsoft.com/office/drawing/2014/main" id="{F41ED8E2-BC96-45BE-B56D-40DF80574318}"/>
+                <a16:creationId xmlns:a16="http://schemas.microsoft.com/office/drawing/2014/main" id="{3A79B7C4-EA89-4ABF-80B8-1A0DC9B96FD7}"/>
               </a:ext>
             </a:extLst>
           </p:cNvPr>
@@ -7206,7 +7356,7 @@
           <p:cNvPr id="9" name="TextBox 8">
             <a:extLst xmlns:a="http://schemas.openxmlformats.org/drawingml/2006/main">
               <a:ext uri="{FF2B5EF4-FFF2-40B4-BE49-F238E27FC236}">
-                <a16:creationId xmlns:a16="http://schemas.microsoft.com/office/drawing/2014/main" id="{5F4A7100-3897-44DE-AA9B-44B99944D67A}"/>
+                <a16:creationId xmlns:a16="http://schemas.microsoft.com/office/drawing/2014/main" id="{E4DC3174-0A99-429E-8848-031021139012}"/>
               </a:ext>
             </a:extLst>
           </p:cNvPr>
@@ -7253,7 +7403,7 @@
           <p:cNvPr id="10" name="TextBox 9">
             <a:extLst xmlns:a="http://schemas.openxmlformats.org/drawingml/2006/main">
               <a:ext uri="{FF2B5EF4-FFF2-40B4-BE49-F238E27FC236}">
-                <a16:creationId xmlns:a16="http://schemas.microsoft.com/office/drawing/2014/main" id="{EFB7F8BA-2A01-4A11-82A5-1E6119F08EA9}"/>
+                <a16:creationId xmlns:a16="http://schemas.microsoft.com/office/drawing/2014/main" id="{DABAE7C6-51D6-438B-8A68-E9B9B0AA381D}"/>
               </a:ext>
             </a:extLst>
           </p:cNvPr>
@@ -7300,7 +7450,7 @@
           <p:cNvPr id="11" name="Rounded Rectangle 10">
             <a:extLst xmlns:a="http://schemas.openxmlformats.org/drawingml/2006/main">
               <a:ext uri="{FF2B5EF4-FFF2-40B4-BE49-F238E27FC236}">
-                <a16:creationId xmlns:a16="http://schemas.microsoft.com/office/drawing/2014/main" id="{0A90137A-BF66-4FA4-936D-C60E9B285265}"/>
+                <a16:creationId xmlns:a16="http://schemas.microsoft.com/office/drawing/2014/main" id="{62A978B9-45FF-4706-B037-4C947B2092C2}"/>
               </a:ext>
             </a:extLst>
           </p:cNvPr>
@@ -7357,7 +7507,7 @@
           <p:cNvPr id="12" name="TextBox 11">
             <a:extLst xmlns:a="http://schemas.openxmlformats.org/drawingml/2006/main">
               <a:ext uri="{FF2B5EF4-FFF2-40B4-BE49-F238E27FC236}">
-                <a16:creationId xmlns:a16="http://schemas.microsoft.com/office/drawing/2014/main" id="{EF8D83F3-A706-49EF-B66B-A550976C1C81}"/>
+                <a16:creationId xmlns:a16="http://schemas.microsoft.com/office/drawing/2014/main" id="{42CB83F4-3629-461D-A793-350E1CAF6C62}"/>
               </a:ext>
             </a:extLst>
           </p:cNvPr>
@@ -7404,7 +7554,7 @@
           <p:cNvPr id="13" name="TextBox 12">
             <a:extLst xmlns:a="http://schemas.openxmlformats.org/drawingml/2006/main">
               <a:ext uri="{FF2B5EF4-FFF2-40B4-BE49-F238E27FC236}">
-                <a16:creationId xmlns:a16="http://schemas.microsoft.com/office/drawing/2014/main" id="{57CC2A4F-C57F-47E4-8684-131F80061A3B}"/>
+                <a16:creationId xmlns:a16="http://schemas.microsoft.com/office/drawing/2014/main" id="{CF237709-AF97-44B0-9FA4-F5E7CD9E06DC}"/>
               </a:ext>
             </a:extLst>
           </p:cNvPr>
@@ -7451,7 +7601,7 @@
           <p:cNvPr id="14" name="Rounded Rectangle 13">
             <a:extLst xmlns:a="http://schemas.openxmlformats.org/drawingml/2006/main">
               <a:ext uri="{FF2B5EF4-FFF2-40B4-BE49-F238E27FC236}">
-                <a16:creationId xmlns:a16="http://schemas.microsoft.com/office/drawing/2014/main" id="{20682516-3341-4D32-87D6-6734EF61AB49}"/>
+                <a16:creationId xmlns:a16="http://schemas.microsoft.com/office/drawing/2014/main" id="{4D4AE0B7-81AA-474B-807D-DA929C7A05F4}"/>
               </a:ext>
             </a:extLst>
           </p:cNvPr>
@@ -7508,7 +7658,7 @@
           <p:cNvPr id="15" name="TextBox 14">
             <a:extLst xmlns:a="http://schemas.openxmlformats.org/drawingml/2006/main">
               <a:ext uri="{FF2B5EF4-FFF2-40B4-BE49-F238E27FC236}">
-                <a16:creationId xmlns:a16="http://schemas.microsoft.com/office/drawing/2014/main" id="{78900AB0-0EDF-4E35-839C-D9C9E4F1E402}"/>
+                <a16:creationId xmlns:a16="http://schemas.microsoft.com/office/drawing/2014/main" id="{56A8CDFF-7331-4B1A-ADE4-A8102FD70722}"/>
               </a:ext>
             </a:extLst>
           </p:cNvPr>
@@ -7555,7 +7705,7 @@
           <p:cNvPr id="16" name="TextBox 15">
             <a:extLst xmlns:a="http://schemas.openxmlformats.org/drawingml/2006/main">
               <a:ext uri="{FF2B5EF4-FFF2-40B4-BE49-F238E27FC236}">
-                <a16:creationId xmlns:a16="http://schemas.microsoft.com/office/drawing/2014/main" id="{294C7FB7-6922-467E-9A07-3D0B5BE0C240}"/>
+                <a16:creationId xmlns:a16="http://schemas.microsoft.com/office/drawing/2014/main" id="{2EEC253E-989B-4F9E-AC20-EC566091681C}"/>
               </a:ext>
             </a:extLst>
           </p:cNvPr>
@@ -7602,7 +7752,7 @@
           <p:cNvPr id="17" name="TextBox 16">
             <a:extLst xmlns:a="http://schemas.openxmlformats.org/drawingml/2006/main">
               <a:ext uri="{FF2B5EF4-FFF2-40B4-BE49-F238E27FC236}">
-                <a16:creationId xmlns:a16="http://schemas.microsoft.com/office/drawing/2014/main" id="{74918B2E-9DE2-418E-910E-D3EE1C449E7F}"/>
+                <a16:creationId xmlns:a16="http://schemas.microsoft.com/office/drawing/2014/main" id="{6A911A7A-D159-487D-AB9A-B7255501B7FA}"/>
               </a:ext>
             </a:extLst>
           </p:cNvPr>
@@ -7649,7 +7799,7 @@
           <p:cNvPr id="18" name="Rounded Rectangle 17">
             <a:extLst xmlns:a="http://schemas.openxmlformats.org/drawingml/2006/main">
               <a:ext uri="{FF2B5EF4-FFF2-40B4-BE49-F238E27FC236}">
-                <a16:creationId xmlns:a16="http://schemas.microsoft.com/office/drawing/2014/main" id="{FC7A7F45-B378-4AB7-BEBA-6FC7AC5F3A4E}"/>
+                <a16:creationId xmlns:a16="http://schemas.microsoft.com/office/drawing/2014/main" id="{D95D7754-CFAF-48F1-8E83-469CF4905CD4}"/>
               </a:ext>
             </a:extLst>
           </p:cNvPr>
@@ -7706,7 +7856,7 @@
           <p:cNvPr id="19" name="TextBox 18">
             <a:extLst xmlns:a="http://schemas.openxmlformats.org/drawingml/2006/main">
               <a:ext uri="{FF2B5EF4-FFF2-40B4-BE49-F238E27FC236}">
-                <a16:creationId xmlns:a16="http://schemas.microsoft.com/office/drawing/2014/main" id="{441D2A6D-668E-4218-A549-74245035602B}"/>
+                <a16:creationId xmlns:a16="http://schemas.microsoft.com/office/drawing/2014/main" id="{B3BFE5E9-3E89-4EFC-B537-2E249E20F6B0}"/>
               </a:ext>
             </a:extLst>
           </p:cNvPr>
@@ -7753,7 +7903,7 @@
           <p:cNvPr id="20" name="TextBox 19">
             <a:extLst xmlns:a="http://schemas.openxmlformats.org/drawingml/2006/main">
               <a:ext uri="{FF2B5EF4-FFF2-40B4-BE49-F238E27FC236}">
-                <a16:creationId xmlns:a16="http://schemas.microsoft.com/office/drawing/2014/main" id="{180A2EF0-7812-4EF6-8DBB-666DD03154B2}"/>
+                <a16:creationId xmlns:a16="http://schemas.microsoft.com/office/drawing/2014/main" id="{1FF386D5-FF48-41B5-AAD5-3D96A62010BD}"/>
               </a:ext>
             </a:extLst>
           </p:cNvPr>
@@ -7798,7 +7948,7 @@
     </p:spTree>
     <p:extLst>
       <p:ext uri="{BB962C8B-B14F-4D97-AF65-F5344CB8AC3E}">
-        <p14:creationId xmlns:p14="http://schemas.microsoft.com/office/powerpoint/2010/main" val="1667185025"/>
+        <p14:creationId xmlns:p14="http://schemas.microsoft.com/office/powerpoint/2010/main" val="97556020"/>
       </p:ext>
     </p:extLst>
   </p:cSld>
@@ -7822,7 +7972,7 @@
           <p:cNvPr id="2" name="TextBox 1">
             <a:extLst xmlns:a="http://schemas.openxmlformats.org/drawingml/2006/main">
               <a:ext uri="{FF2B5EF4-FFF2-40B4-BE49-F238E27FC236}">
-                <a16:creationId xmlns:a16="http://schemas.microsoft.com/office/drawing/2014/main" id="{EA95F2C8-535A-446B-A227-627F01B53292}"/>
+                <a16:creationId xmlns:a16="http://schemas.microsoft.com/office/drawing/2014/main" id="{D04D04A2-13AB-4F51-952E-2F564CBA63E6}"/>
               </a:ext>
             </a:extLst>
           </p:cNvPr>
@@ -7869,7 +8019,7 @@
           <p:cNvPr id="3" name="TextBox 2">
             <a:extLst xmlns:a="http://schemas.openxmlformats.org/drawingml/2006/main">
               <a:ext uri="{FF2B5EF4-FFF2-40B4-BE49-F238E27FC236}">
-                <a16:creationId xmlns:a16="http://schemas.microsoft.com/office/drawing/2014/main" id="{5E305D05-7D18-454F-8F03-0902DF7D0A7D}"/>
+                <a16:creationId xmlns:a16="http://schemas.microsoft.com/office/drawing/2014/main" id="{AC6EBFF0-171F-4ED0-9C2E-FBF43651C0F1}"/>
               </a:ext>
             </a:extLst>
           </p:cNvPr>
@@ -7916,7 +8066,7 @@
           <p:cNvPr id="4" name="Rectangle 3">
             <a:extLst xmlns:a="http://schemas.openxmlformats.org/drawingml/2006/main">
               <a:ext uri="{FF2B5EF4-FFF2-40B4-BE49-F238E27FC236}">
-                <a16:creationId xmlns:a16="http://schemas.microsoft.com/office/drawing/2014/main" id="{BFAA1091-645A-4B97-96E1-08F2665FA704}"/>
+                <a16:creationId xmlns:a16="http://schemas.microsoft.com/office/drawing/2014/main" id="{31C32E16-518D-48C5-AB1A-1B9B830E36C1}"/>
               </a:ext>
             </a:extLst>
           </p:cNvPr>
@@ -7971,7 +8121,7 @@
           <p:cNvPr id="5" name="Rectangle 4">
             <a:extLst xmlns:a="http://schemas.openxmlformats.org/drawingml/2006/main">
               <a:ext uri="{FF2B5EF4-FFF2-40B4-BE49-F238E27FC236}">
-                <a16:creationId xmlns:a16="http://schemas.microsoft.com/office/drawing/2014/main" id="{78F83805-2608-48C4-9BFB-0AA5890EDBB6}"/>
+                <a16:creationId xmlns:a16="http://schemas.microsoft.com/office/drawing/2014/main" id="{8280B1C9-5F99-4D27-A413-58BAD89D7470}"/>
               </a:ext>
             </a:extLst>
           </p:cNvPr>
@@ -8026,7 +8176,7 @@
           <p:cNvPr id="6" name="TextBox 5">
             <a:extLst xmlns:a="http://schemas.openxmlformats.org/drawingml/2006/main">
               <a:ext uri="{FF2B5EF4-FFF2-40B4-BE49-F238E27FC236}">
-                <a16:creationId xmlns:a16="http://schemas.microsoft.com/office/drawing/2014/main" id="{0B4B38BD-2E90-4310-93A2-9581C042A8E1}"/>
+                <a16:creationId xmlns:a16="http://schemas.microsoft.com/office/drawing/2014/main" id="{F2F63187-1877-4CD1-932E-4D2BFD708203}"/>
               </a:ext>
             </a:extLst>
           </p:cNvPr>
@@ -8063,7 +8213,7 @@
                 <a:ea typeface="Aptos"/>
                 <a:cs typeface="Aptos"/>
               </a:rPr>
-              <a:t>Julkinen riippumaton evidenssikooste · 2026.07.30-36 · 2026-07-30 · Lähteet: World Bank; Statistics Canada; Health Canada; NZ Ministry of Health; Sejm; FHM; FTC; ADM</a:t>
+              <a:t>Julkinen riippumaton evidenssikooste · 2026.07.31-37 · 2026-07-31 · Lähteet: World Bank; Statistics Canada; Health Canada; NZ Ministry of Health; Sejm; FHM; FTC; ADM</a:t>
             </a:r>
           </a:p>
         </p:txBody>
@@ -8073,7 +8223,7 @@
           <p:cNvPr id="7" name="TextBox 6">
             <a:extLst xmlns:a="http://schemas.openxmlformats.org/drawingml/2006/main">
               <a:ext uri="{FF2B5EF4-FFF2-40B4-BE49-F238E27FC236}">
-                <a16:creationId xmlns:a16="http://schemas.microsoft.com/office/drawing/2014/main" id="{7AF6FC75-C92E-4158-8ED3-7D9CA9DD529A}"/>
+                <a16:creationId xmlns:a16="http://schemas.microsoft.com/office/drawing/2014/main" id="{D12244A1-FC23-4C88-A9D4-2FA4C4CFAAB5}"/>
               </a:ext>
             </a:extLst>
           </p:cNvPr>
@@ -8120,7 +8270,7 @@
           <p:cNvPr id="8" name="Rounded Rectangle 7">
             <a:extLst xmlns:a="http://schemas.openxmlformats.org/drawingml/2006/main">
               <a:ext uri="{FF2B5EF4-FFF2-40B4-BE49-F238E27FC236}">
-                <a16:creationId xmlns:a16="http://schemas.microsoft.com/office/drawing/2014/main" id="{B7A23CEA-6679-42E1-9C25-A8399F03E4FC}"/>
+                <a16:creationId xmlns:a16="http://schemas.microsoft.com/office/drawing/2014/main" id="{9E9B50A5-B8F8-467A-B065-F5EE64D454BE}"/>
               </a:ext>
             </a:extLst>
           </p:cNvPr>
@@ -8177,7 +8327,7 @@
           <p:cNvPr id="9" name="TextBox 8">
             <a:extLst xmlns:a="http://schemas.openxmlformats.org/drawingml/2006/main">
               <a:ext uri="{FF2B5EF4-FFF2-40B4-BE49-F238E27FC236}">
-                <a16:creationId xmlns:a16="http://schemas.microsoft.com/office/drawing/2014/main" id="{1916D499-DCFF-44D8-95AF-F72B433BB5AC}"/>
+                <a16:creationId xmlns:a16="http://schemas.microsoft.com/office/drawing/2014/main" id="{611D1467-8202-4A98-B32E-D01DA23F6649}"/>
               </a:ext>
             </a:extLst>
           </p:cNvPr>
@@ -8224,7 +8374,7 @@
           <p:cNvPr id="10" name="TextBox 9">
             <a:extLst xmlns:a="http://schemas.openxmlformats.org/drawingml/2006/main">
               <a:ext uri="{FF2B5EF4-FFF2-40B4-BE49-F238E27FC236}">
-                <a16:creationId xmlns:a16="http://schemas.microsoft.com/office/drawing/2014/main" id="{8EC78B23-1B83-4F61-BA93-CE8F6C17EBB6}"/>
+                <a16:creationId xmlns:a16="http://schemas.microsoft.com/office/drawing/2014/main" id="{C4EE95BB-C03C-4106-B7C8-68036AD3D35D}"/>
               </a:ext>
             </a:extLst>
           </p:cNvPr>
@@ -8271,7 +8421,7 @@
           <p:cNvPr id="11" name="Rounded Rectangle 10">
             <a:extLst xmlns:a="http://schemas.openxmlformats.org/drawingml/2006/main">
               <a:ext uri="{FF2B5EF4-FFF2-40B4-BE49-F238E27FC236}">
-                <a16:creationId xmlns:a16="http://schemas.microsoft.com/office/drawing/2014/main" id="{D42C7E38-E4EF-4382-BD07-A9224490A19F}"/>
+                <a16:creationId xmlns:a16="http://schemas.microsoft.com/office/drawing/2014/main" id="{03B6F6E6-EC5E-4145-86FC-CBCA3C087C51}"/>
               </a:ext>
             </a:extLst>
           </p:cNvPr>
@@ -8328,7 +8478,7 @@
           <p:cNvPr id="12" name="TextBox 11">
             <a:extLst xmlns:a="http://schemas.openxmlformats.org/drawingml/2006/main">
               <a:ext uri="{FF2B5EF4-FFF2-40B4-BE49-F238E27FC236}">
-                <a16:creationId xmlns:a16="http://schemas.microsoft.com/office/drawing/2014/main" id="{6A5EFCDB-89CA-4769-953D-EA813AF94356}"/>
+                <a16:creationId xmlns:a16="http://schemas.microsoft.com/office/drawing/2014/main" id="{BE0C063F-625A-4430-A455-8C1CE9E4FC5B}"/>
               </a:ext>
             </a:extLst>
           </p:cNvPr>
@@ -8375,7 +8525,7 @@
           <p:cNvPr id="13" name="TextBox 12">
             <a:extLst xmlns:a="http://schemas.openxmlformats.org/drawingml/2006/main">
               <a:ext uri="{FF2B5EF4-FFF2-40B4-BE49-F238E27FC236}">
-                <a16:creationId xmlns:a16="http://schemas.microsoft.com/office/drawing/2014/main" id="{2A63D271-ECF6-4969-92C9-9F74B7F8281B}"/>
+                <a16:creationId xmlns:a16="http://schemas.microsoft.com/office/drawing/2014/main" id="{E9B9D966-6FBA-46D4-A7AD-CAA64A3C4A38}"/>
               </a:ext>
             </a:extLst>
           </p:cNvPr>
@@ -8422,7 +8572,7 @@
           <p:cNvPr id="14" name="Rounded Rectangle 13">
             <a:extLst xmlns:a="http://schemas.openxmlformats.org/drawingml/2006/main">
               <a:ext uri="{FF2B5EF4-FFF2-40B4-BE49-F238E27FC236}">
-                <a16:creationId xmlns:a16="http://schemas.microsoft.com/office/drawing/2014/main" id="{64AEE293-B5C8-4319-AD0A-7813FA62228A}"/>
+                <a16:creationId xmlns:a16="http://schemas.microsoft.com/office/drawing/2014/main" id="{1F4EF6DB-7268-49E1-B1AD-6B5EEB962F08}"/>
               </a:ext>
             </a:extLst>
           </p:cNvPr>
@@ -8479,7 +8629,7 @@
           <p:cNvPr id="15" name="TextBox 14">
             <a:extLst xmlns:a="http://schemas.openxmlformats.org/drawingml/2006/main">
               <a:ext uri="{FF2B5EF4-FFF2-40B4-BE49-F238E27FC236}">
-                <a16:creationId xmlns:a16="http://schemas.microsoft.com/office/drawing/2014/main" id="{49FE8856-7208-4283-BEF3-A7B7652F3FBA}"/>
+                <a16:creationId xmlns:a16="http://schemas.microsoft.com/office/drawing/2014/main" id="{05B15A57-A4FC-4B29-858E-2F110694B3B2}"/>
               </a:ext>
             </a:extLst>
           </p:cNvPr>
@@ -8526,7 +8676,7 @@
           <p:cNvPr id="16" name="TextBox 15">
             <a:extLst xmlns:a="http://schemas.openxmlformats.org/drawingml/2006/main">
               <a:ext uri="{FF2B5EF4-FFF2-40B4-BE49-F238E27FC236}">
-                <a16:creationId xmlns:a16="http://schemas.microsoft.com/office/drawing/2014/main" id="{DBAC5F35-849D-42FD-A15D-F5582B837399}"/>
+                <a16:creationId xmlns:a16="http://schemas.microsoft.com/office/drawing/2014/main" id="{76CD8E1C-0CDB-4596-AF05-763F3633C813}"/>
               </a:ext>
             </a:extLst>
           </p:cNvPr>
@@ -8573,7 +8723,7 @@
           <p:cNvPr id="17" name="TextBox 16">
             <a:extLst xmlns:a="http://schemas.openxmlformats.org/drawingml/2006/main">
               <a:ext uri="{FF2B5EF4-FFF2-40B4-BE49-F238E27FC236}">
-                <a16:creationId xmlns:a16="http://schemas.microsoft.com/office/drawing/2014/main" id="{7E8B5606-1134-4C73-9129-7C3ACAB54F01}"/>
+                <a16:creationId xmlns:a16="http://schemas.microsoft.com/office/drawing/2014/main" id="{716E8EF2-1E32-4C76-A251-7AF74E720AB6}"/>
               </a:ext>
             </a:extLst>
           </p:cNvPr>
@@ -8585,7 +8735,7 @@
         <p:spPr>
           <a:xfrm xmlns:a="http://schemas.openxmlformats.org/drawingml/2006/main">
             <a:off x="566928" y="3529584"/>
-            <a:ext cx="10927080" cy="2359152"/>
+            <a:ext cx="10927080" cy="838200"/>
           </a:xfrm>
           <a:prstGeom xmlns:a="http://schemas.openxmlformats.org/drawingml/2006/main" prst="rect">
             <a:avLst/>
@@ -8602,7 +8752,7 @@
               <a:buNone/>
             </a:pPr>
             <a:r>
-              <a:rPr sz="1050" b="1">
+              <a:rPr sz="1200" b="1">
                 <a:solidFill>
                   <a:srgbClr val="071A2B"/>
                 </a:solidFill>
@@ -8610,7 +8760,7 @@
                 <a:ea typeface="Aptos"/>
                 <a:cs typeface="Aptos"/>
               </a:rPr>
-              <a:t>Kanada 7/10: virallinen täsmennys sulkee GST/HST/PST/QST-verot pois, sisältää hintaan upotetut lisäverot eikä muuta lukuja; D5/D7/D10 ovat avoimia. Saksan rajatussa vastauksessa pyydettiin käsittelemään vain maksutta saatavia aineistoja; maksullinen työ estettiin ilman erillistä lupaa. Ranska on vain tulliproxy. Euromonitor pysyy pausella; 0/6, EI PISTEYTETTY eikä ostoa tai maksua ole valtuutettu.</a:t>
+              <a:t>Kanada 7/10: D5/D7 hylätty, D8 läpäisty (GST/HST/PST/QST pois; lisäverot mukana), D10 avoin. Uuden-Seelannin 7.8. seuranta valmisteltu, ei lähetetty. Puolan verosilta koskee laajaa ryhmää. Euromonitor pausella 0/6, EI PISTEYTETTY; ei ostoa tai maksua.</a:t>
             </a:r>
           </a:p>
         </p:txBody>
@@ -8620,7 +8770,7 @@
           <p:cNvPr id="18" name="Rounded Rectangle 17">
             <a:extLst xmlns:a="http://schemas.openxmlformats.org/drawingml/2006/main">
               <a:ext uri="{FF2B5EF4-FFF2-40B4-BE49-F238E27FC236}">
-                <a16:creationId xmlns:a16="http://schemas.microsoft.com/office/drawing/2014/main" id="{02822C0B-9CFC-4DE8-A08F-F4CBC65F4EEF}"/>
+                <a16:creationId xmlns:a16="http://schemas.microsoft.com/office/drawing/2014/main" id="{F3F39AC5-AD2D-46B9-AA19-3016589FCCEB}"/>
               </a:ext>
             </a:extLst>
           </p:cNvPr>
@@ -8677,7 +8827,7 @@
           <p:cNvPr id="19" name="TextBox 18">
             <a:extLst xmlns:a="http://schemas.openxmlformats.org/drawingml/2006/main">
               <a:ext uri="{FF2B5EF4-FFF2-40B4-BE49-F238E27FC236}">
-                <a16:creationId xmlns:a16="http://schemas.microsoft.com/office/drawing/2014/main" id="{ED38FF6F-95C9-4366-97E5-78F04A4CDD49}"/>
+                <a16:creationId xmlns:a16="http://schemas.microsoft.com/office/drawing/2014/main" id="{B489DD3B-3EBD-4535-80AF-B79CC9D8B7E9}"/>
               </a:ext>
             </a:extLst>
           </p:cNvPr>
@@ -8724,7 +8874,7 @@
           <p:cNvPr id="20" name="TextBox 19">
             <a:extLst xmlns:a="http://schemas.openxmlformats.org/drawingml/2006/main">
               <a:ext uri="{FF2B5EF4-FFF2-40B4-BE49-F238E27FC236}">
-                <a16:creationId xmlns:a16="http://schemas.microsoft.com/office/drawing/2014/main" id="{17B7AFD6-17B7-4765-8A64-BB5918132E62}"/>
+                <a16:creationId xmlns:a16="http://schemas.microsoft.com/office/drawing/2014/main" id="{4A5ECC52-AC06-4753-A81C-2D265B54028D}"/>
               </a:ext>
             </a:extLst>
           </p:cNvPr>
@@ -8761,7 +8911,7 @@
                 <a:ea typeface="Aptos"/>
                 <a:cs typeface="Aptos"/>
               </a:rPr>
-              <a:t>Menetelmäkontrolli 28 / 0 / 15 / 152; 5 uutta maasuunnitelmaa, ei myyntiä. Belgia ≈83 333 litraa (9 kk; ei retail); Italia 84,31 milj. EUR PLI-veroa (ei retail). Kanada retail 1,219160 mrd CAD (≈822,6 milj. EUR; ECB 2024) ja toimitukset 1,160754 mrd CAD (≈783,2 milj. EUR; ECB 2024); FTC 2,763 mrd USD (≈2,336 mrd EUR; ECB 2021). Donor 0/3.</a:t>
+              <a:t>Menetelmäkontrolli 28 / 0 / 15 / 152. Kanada retail 1,219160 mrd CAD (≈822,6 milj. EUR; ECB 2024) ja toimitukset 1,160754 mrd CAD (≈783,2 milj. EUR; ECB 2024). Uusi-Seelanti 274,180 milj. NZD (≈153,3 milj. EUR; ECB 2024), 7/10. Puolan esiarviolla ei ole donor-pistemäärää: retail-arvo puuttuu. Donor 0/3.</a:t>
             </a:r>
           </a:p>
         </p:txBody>
@@ -8769,7 +8919,7 @@
     </p:spTree>
     <p:extLst>
       <p:ext uri="{BB962C8B-B14F-4D97-AF65-F5344CB8AC3E}">
-        <p14:creationId xmlns:p14="http://schemas.microsoft.com/office/powerpoint/2010/main" val="1749424563"/>
+        <p14:creationId xmlns:p14="http://schemas.microsoft.com/office/powerpoint/2010/main" val="736968164"/>
       </p:ext>
     </p:extLst>
   </p:cSld>
@@ -8793,7 +8943,7 @@
           <p:cNvPr id="2" name="TextBox 1">
             <a:extLst xmlns:a="http://schemas.openxmlformats.org/drawingml/2006/main">
               <a:ext uri="{FF2B5EF4-FFF2-40B4-BE49-F238E27FC236}">
-                <a16:creationId xmlns:a16="http://schemas.microsoft.com/office/drawing/2014/main" id="{CCFDF667-D7E7-4D7B-8E0F-3AE99A3AA06A}"/>
+                <a16:creationId xmlns:a16="http://schemas.microsoft.com/office/drawing/2014/main" id="{D5EB9869-BDB3-42F9-8733-FECA3FC029B4}"/>
               </a:ext>
             </a:extLst>
           </p:cNvPr>
@@ -8840,7 +8990,7 @@
           <p:cNvPr id="3" name="TextBox 2">
             <a:extLst xmlns:a="http://schemas.openxmlformats.org/drawingml/2006/main">
               <a:ext uri="{FF2B5EF4-FFF2-40B4-BE49-F238E27FC236}">
-                <a16:creationId xmlns:a16="http://schemas.microsoft.com/office/drawing/2014/main" id="{56BF297D-2EB1-4B57-B74E-58EAD968658C}"/>
+                <a16:creationId xmlns:a16="http://schemas.microsoft.com/office/drawing/2014/main" id="{57C31F02-996F-4B49-9B4A-0A62381588B4}"/>
               </a:ext>
             </a:extLst>
           </p:cNvPr>
@@ -8887,7 +9037,7 @@
           <p:cNvPr id="4" name="Rectangle 3">
             <a:extLst xmlns:a="http://schemas.openxmlformats.org/drawingml/2006/main">
               <a:ext uri="{FF2B5EF4-FFF2-40B4-BE49-F238E27FC236}">
-                <a16:creationId xmlns:a16="http://schemas.microsoft.com/office/drawing/2014/main" id="{E1E45B97-C8CC-4A85-908B-3FF6C5EF232C}"/>
+                <a16:creationId xmlns:a16="http://schemas.microsoft.com/office/drawing/2014/main" id="{45E15D12-E42A-4675-9494-49A70E81E08A}"/>
               </a:ext>
             </a:extLst>
           </p:cNvPr>
@@ -8942,7 +9092,7 @@
           <p:cNvPr id="5" name="Rectangle 4">
             <a:extLst xmlns:a="http://schemas.openxmlformats.org/drawingml/2006/main">
               <a:ext uri="{FF2B5EF4-FFF2-40B4-BE49-F238E27FC236}">
-                <a16:creationId xmlns:a16="http://schemas.microsoft.com/office/drawing/2014/main" id="{04AE5869-2935-4392-B085-92932768DD86}"/>
+                <a16:creationId xmlns:a16="http://schemas.microsoft.com/office/drawing/2014/main" id="{1A3F71AF-8BDE-4021-9DB8-64BECB1BC2F8}"/>
               </a:ext>
             </a:extLst>
           </p:cNvPr>
@@ -8997,7 +9147,7 @@
           <p:cNvPr id="6" name="TextBox 5">
             <a:extLst xmlns:a="http://schemas.openxmlformats.org/drawingml/2006/main">
               <a:ext uri="{FF2B5EF4-FFF2-40B4-BE49-F238E27FC236}">
-                <a16:creationId xmlns:a16="http://schemas.microsoft.com/office/drawing/2014/main" id="{40165F1F-83D7-4AC9-A767-D5835944354D}"/>
+                <a16:creationId xmlns:a16="http://schemas.microsoft.com/office/drawing/2014/main" id="{14F65C4D-68FB-48E6-BCC6-B9061D66DBE3}"/>
               </a:ext>
             </a:extLst>
           </p:cNvPr>
@@ -9034,7 +9184,7 @@
                 <a:ea typeface="Aptos"/>
                 <a:cs typeface="Aptos"/>
               </a:rPr>
-              <a:t>Julkinen riippumaton evidenssikooste · 2026.07.30-36 · 2026-07-30 · Lähteet: Evidence Register; WIPO IP valuation</a:t>
+              <a:t>Julkinen riippumaton evidenssikooste · 2026.07.31-37 · 2026-07-31 · Lähteet: Evidence Register; WIPO IP valuation</a:t>
             </a:r>
           </a:p>
         </p:txBody>
@@ -9044,7 +9194,7 @@
           <p:cNvPr id="7" name="TextBox 6">
             <a:extLst xmlns:a="http://schemas.openxmlformats.org/drawingml/2006/main">
               <a:ext uri="{FF2B5EF4-FFF2-40B4-BE49-F238E27FC236}">
-                <a16:creationId xmlns:a16="http://schemas.microsoft.com/office/drawing/2014/main" id="{5D0ACD5D-D503-417C-8E95-DE4B3742BAF0}"/>
+                <a16:creationId xmlns:a16="http://schemas.microsoft.com/office/drawing/2014/main" id="{4D18B9BD-B00E-44F6-B988-B8B6E9EBFB86}"/>
               </a:ext>
             </a:extLst>
           </p:cNvPr>
@@ -9531,7 +9681,7 @@
           <p:cNvPr id="9" name="TextBox 8">
             <a:extLst xmlns:a="http://schemas.openxmlformats.org/drawingml/2006/main">
               <a:ext uri="{FF2B5EF4-FFF2-40B4-BE49-F238E27FC236}">
-                <a16:creationId xmlns:a16="http://schemas.microsoft.com/office/drawing/2014/main" id="{7D453844-0632-4193-9F5F-F22F91768D61}"/>
+                <a16:creationId xmlns:a16="http://schemas.microsoft.com/office/drawing/2014/main" id="{312327BA-F6F0-41F2-9A1E-0152EA43694D}"/>
               </a:ext>
             </a:extLst>
           </p:cNvPr>
@@ -9576,7 +9726,7 @@
     </p:spTree>
     <p:extLst>
       <p:ext uri="{BB962C8B-B14F-4D97-AF65-F5344CB8AC3E}">
-        <p14:creationId xmlns:p14="http://schemas.microsoft.com/office/powerpoint/2010/main" val="1057483879"/>
+        <p14:creationId xmlns:p14="http://schemas.microsoft.com/office/powerpoint/2010/main" val="1312546239"/>
       </p:ext>
     </p:extLst>
   </p:cSld>
@@ -9607,7 +9757,7 @@
           <p:cNvPr id="2" name="TextBox 1">
             <a:extLst xmlns:a="http://schemas.openxmlformats.org/drawingml/2006/main">
               <a:ext uri="{FF2B5EF4-FFF2-40B4-BE49-F238E27FC236}">
-                <a16:creationId xmlns:a16="http://schemas.microsoft.com/office/drawing/2014/main" id="{CC56FD71-6421-4DC3-88F5-1ED4536FCDA2}"/>
+                <a16:creationId xmlns:a16="http://schemas.microsoft.com/office/drawing/2014/main" id="{3B63AE4E-9F56-4DF4-9DC4-2E2F26C53AD1}"/>
               </a:ext>
             </a:extLst>
           </p:cNvPr>
@@ -9654,7 +9804,7 @@
           <p:cNvPr id="3" name="TextBox 2">
             <a:extLst xmlns:a="http://schemas.openxmlformats.org/drawingml/2006/main">
               <a:ext uri="{FF2B5EF4-FFF2-40B4-BE49-F238E27FC236}">
-                <a16:creationId xmlns:a16="http://schemas.microsoft.com/office/drawing/2014/main" id="{05565515-05C7-4D65-89F2-C2907966F513}"/>
+                <a16:creationId xmlns:a16="http://schemas.microsoft.com/office/drawing/2014/main" id="{1E5A84DD-8DE2-4539-B90C-F25411B66A2A}"/>
               </a:ext>
             </a:extLst>
           </p:cNvPr>
@@ -9701,7 +9851,7 @@
           <p:cNvPr id="4" name="TextBox 3">
             <a:extLst xmlns:a="http://schemas.openxmlformats.org/drawingml/2006/main">
               <a:ext uri="{FF2B5EF4-FFF2-40B4-BE49-F238E27FC236}">
-                <a16:creationId xmlns:a16="http://schemas.microsoft.com/office/drawing/2014/main" id="{1751089D-AF25-4226-8A17-0A589DD00345}"/>
+                <a16:creationId xmlns:a16="http://schemas.microsoft.com/office/drawing/2014/main" id="{44D568A3-8BA0-454D-9375-94DCDCFB5AA2}"/>
               </a:ext>
             </a:extLst>
           </p:cNvPr>
@@ -9820,7 +9970,7 @@
           <p:cNvPr id="5" name="TextBox 4">
             <a:extLst xmlns:a="http://schemas.openxmlformats.org/drawingml/2006/main">
               <a:ext uri="{FF2B5EF4-FFF2-40B4-BE49-F238E27FC236}">
-                <a16:creationId xmlns:a16="http://schemas.microsoft.com/office/drawing/2014/main" id="{67B8ED90-4795-4007-AE14-99CA78D1E62B}"/>
+                <a16:creationId xmlns:a16="http://schemas.microsoft.com/office/drawing/2014/main" id="{6F4276FA-4F05-4597-BB10-3BB38BAEC495}"/>
               </a:ext>
             </a:extLst>
           </p:cNvPr>
@@ -9857,7 +10007,7 @@
                 <a:ea typeface="Aptos"/>
                 <a:cs typeface="Aptos"/>
               </a:rPr>
-              <a:t>Versio 2026.07.30-36 · 2026-07-30 · 6 / 6</a:t>
+              <a:t>Versio 2026.07.31-37 · 2026-07-31 · 6 / 6</a:t>
             </a:r>
           </a:p>
         </p:txBody>
@@ -9865,7 +10015,7 @@
     </p:spTree>
     <p:extLst>
       <p:ext uri="{BB962C8B-B14F-4D97-AF65-F5344CB8AC3E}">
-        <p14:creationId xmlns:p14="http://schemas.microsoft.com/office/powerpoint/2010/main" val="1382350857"/>
+        <p14:creationId xmlns:p14="http://schemas.microsoft.com/office/powerpoint/2010/main" val="681150618"/>
       </p:ext>
     </p:extLst>
   </p:cSld>

--- a/site/downloads/pixan-bank-deck-short-fi.pptx
+++ b/site/downloads/pixan-bank-deck-short-fi.pptx
@@ -2,18 +2,18 @@
 <file path=ppt/presentation.xml><?xml version="1.0" encoding="utf-8"?>
 <p:presentation xmlns:p="http://schemas.openxmlformats.org/presentationml/2006/main">
   <p:sldMasterIdLst>
-    <p:sldMasterId xmlns:r="http://schemas.openxmlformats.org/officeDocument/2006/relationships" id="2147483648" r:id="Ra86ad4623c7e4741"/>
+    <p:sldMasterId xmlns:r="http://schemas.openxmlformats.org/officeDocument/2006/relationships" id="2147483648" r:id="R446c6ac3be0e47f8"/>
   </p:sldMasterIdLst>
   <p:notesMasterIdLst>
-    <p:notesMasterId xmlns:r="http://schemas.openxmlformats.org/officeDocument/2006/relationships" r:id="Rfec92ceca9b04066"/>
+    <p:notesMasterId xmlns:r="http://schemas.openxmlformats.org/officeDocument/2006/relationships" r:id="R5df39f04eb084002"/>
   </p:notesMasterIdLst>
   <p:sldIdLst>
-    <p:sldId xmlns:r="http://schemas.openxmlformats.org/officeDocument/2006/relationships" id="256" r:id="R57b88774b42d4c99"/>
-    <p:sldId xmlns:r="http://schemas.openxmlformats.org/officeDocument/2006/relationships" id="257" r:id="R025b3771405d46ac"/>
-    <p:sldId xmlns:r="http://schemas.openxmlformats.org/officeDocument/2006/relationships" id="258" r:id="Rc1a99fd2707642eb"/>
-    <p:sldId xmlns:r="http://schemas.openxmlformats.org/officeDocument/2006/relationships" id="259" r:id="R50dc506979194a3b"/>
-    <p:sldId xmlns:r="http://schemas.openxmlformats.org/officeDocument/2006/relationships" id="260" r:id="R1524f90d1987402e"/>
-    <p:sldId xmlns:r="http://schemas.openxmlformats.org/officeDocument/2006/relationships" id="261" r:id="Rcc21154e789a4daa"/>
+    <p:sldId xmlns:r="http://schemas.openxmlformats.org/officeDocument/2006/relationships" id="256" r:id="R4352b92a48c34d69"/>
+    <p:sldId xmlns:r="http://schemas.openxmlformats.org/officeDocument/2006/relationships" id="257" r:id="R22222bbaf0b448df"/>
+    <p:sldId xmlns:r="http://schemas.openxmlformats.org/officeDocument/2006/relationships" id="258" r:id="Rf19f3a28bd2149e7"/>
+    <p:sldId xmlns:r="http://schemas.openxmlformats.org/officeDocument/2006/relationships" id="259" r:id="Ra8256451229d4555"/>
+    <p:sldId xmlns:r="http://schemas.openxmlformats.org/officeDocument/2006/relationships" id="260" r:id="R66d24c66683140fe"/>
+    <p:sldId xmlns:r="http://schemas.openxmlformats.org/officeDocument/2006/relationships" id="261" r:id="R9c63b0b438c14b85"/>
   </p:sldIdLst>
   <p:sldSz cx="12191999" cy="6858000"/>
   <p:notesSz cx="6858000" cy="9144000"/>
@@ -2337,7 +2337,7 @@
           <p:cNvPr id="2" name="Title 1">
             <a:extLst xmlns:a="http://schemas.openxmlformats.org/drawingml/2006/main">
               <a:ext uri="{FF2B5EF4-FFF2-40B4-BE49-F238E27FC236}">
-                <a16:creationId xmlns:a16="http://schemas.microsoft.com/office/drawing/2014/main" id="{F47E46EB-07EB-473D-AA52-5B790DCA6E55}"/>
+                <a16:creationId xmlns:a16="http://schemas.microsoft.com/office/drawing/2014/main" id="{38097BCA-2F9D-4978-B2F9-1FB1E56CA81C}"/>
               </a:ext>
             </a:extLst>
           </p:cNvPr>
@@ -2369,7 +2369,7 @@
           <p:cNvPr id="3" name="Subtitle 2">
             <a:extLst xmlns:a="http://schemas.openxmlformats.org/drawingml/2006/main">
               <a:ext uri="{FF2B5EF4-FFF2-40B4-BE49-F238E27FC236}">
-                <a16:creationId xmlns:a16="http://schemas.microsoft.com/office/drawing/2014/main" id="{E3800A42-5B39-4237-AAAC-D2BFBEF16F10}"/>
+                <a16:creationId xmlns:a16="http://schemas.microsoft.com/office/drawing/2014/main" id="{8B72CD4F-EF8E-4339-8652-8942BEADF724}"/>
               </a:ext>
             </a:extLst>
           </p:cNvPr>
@@ -2492,7 +2492,7 @@
           <p:cNvPr id="4" name="Date Placeholder 3">
             <a:extLst xmlns:a="http://schemas.openxmlformats.org/drawingml/2006/main">
               <a:ext uri="{FF2B5EF4-FFF2-40B4-BE49-F238E27FC236}">
-                <a16:creationId xmlns:a16="http://schemas.microsoft.com/office/drawing/2014/main" id="{B6B5136F-5A99-4BE7-BBD0-50A48A87C002}"/>
+                <a16:creationId xmlns:a16="http://schemas.microsoft.com/office/drawing/2014/main" id="{4F4CC2FB-E346-4D20-AE72-F078F5122CC1}"/>
               </a:ext>
             </a:extLst>
           </p:cNvPr>
@@ -2519,7 +2519,7 @@
           <p:cNvPr id="5" name="Footer Placeholder 4">
             <a:extLst xmlns:a="http://schemas.openxmlformats.org/drawingml/2006/main">
               <a:ext uri="{FF2B5EF4-FFF2-40B4-BE49-F238E27FC236}">
-                <a16:creationId xmlns:a16="http://schemas.microsoft.com/office/drawing/2014/main" id="{D714335D-5DD1-4BDA-B30F-8456C823DD16}"/>
+                <a16:creationId xmlns:a16="http://schemas.microsoft.com/office/drawing/2014/main" id="{CAE566A1-16A7-4AD6-9D57-F1C19E76F9FB}"/>
               </a:ext>
             </a:extLst>
           </p:cNvPr>
@@ -2542,7 +2542,7 @@
           <p:cNvPr id="6" name="Slide Number Placeholder 5">
             <a:extLst xmlns:a="http://schemas.openxmlformats.org/drawingml/2006/main">
               <a:ext uri="{FF2B5EF4-FFF2-40B4-BE49-F238E27FC236}">
-                <a16:creationId xmlns:a16="http://schemas.microsoft.com/office/drawing/2014/main" id="{3F0E4494-E031-4B41-9AF0-BC8E5F647F74}"/>
+                <a16:creationId xmlns:a16="http://schemas.microsoft.com/office/drawing/2014/main" id="{9AC3C5E2-9DE8-4451-BF26-3EA43EFFE7AA}"/>
               </a:ext>
             </a:extLst>
           </p:cNvPr>
@@ -2586,7 +2586,7 @@
           <p:cNvPr id="2" name="Title 1">
             <a:extLst xmlns:a="http://schemas.openxmlformats.org/drawingml/2006/main">
               <a:ext uri="{FF2B5EF4-FFF2-40B4-BE49-F238E27FC236}">
-                <a16:creationId xmlns:a16="http://schemas.microsoft.com/office/drawing/2014/main" id="{63C4E1FB-41E5-4C70-BECD-83C79E42777B}"/>
+                <a16:creationId xmlns:a16="http://schemas.microsoft.com/office/drawing/2014/main" id="{FAE6E3F0-8DD4-43EA-9763-1D522F19ED10}"/>
               </a:ext>
             </a:extLst>
           </p:cNvPr>
@@ -2613,7 +2613,7 @@
           <p:cNvPr id="3" name="Vertical Text Placeholder 2">
             <a:extLst xmlns:a="http://schemas.openxmlformats.org/drawingml/2006/main">
               <a:ext uri="{FF2B5EF4-FFF2-40B4-BE49-F238E27FC236}">
-                <a16:creationId xmlns:a16="http://schemas.microsoft.com/office/drawing/2014/main" id="{6767239C-6475-4668-9C03-930F10C3B734}"/>
+                <a16:creationId xmlns:a16="http://schemas.microsoft.com/office/drawing/2014/main" id="{2B0E24E2-332A-41AB-84E6-7B8492827BE3}"/>
               </a:ext>
             </a:extLst>
           </p:cNvPr>
@@ -2675,7 +2675,7 @@
           <p:cNvPr id="4" name="Date Placeholder 3">
             <a:extLst xmlns:a="http://schemas.openxmlformats.org/drawingml/2006/main">
               <a:ext uri="{FF2B5EF4-FFF2-40B4-BE49-F238E27FC236}">
-                <a16:creationId xmlns:a16="http://schemas.microsoft.com/office/drawing/2014/main" id="{CBE75F19-EAE7-4CCE-BCA0-686B24B7E7B3}"/>
+                <a16:creationId xmlns:a16="http://schemas.microsoft.com/office/drawing/2014/main" id="{C5C4B950-B981-4DA0-8438-9089619E1F01}"/>
               </a:ext>
             </a:extLst>
           </p:cNvPr>
@@ -2702,7 +2702,7 @@
           <p:cNvPr id="5" name="Footer Placeholder 4">
             <a:extLst xmlns:a="http://schemas.openxmlformats.org/drawingml/2006/main">
               <a:ext uri="{FF2B5EF4-FFF2-40B4-BE49-F238E27FC236}">
-                <a16:creationId xmlns:a16="http://schemas.microsoft.com/office/drawing/2014/main" id="{A73F4A1D-6D6D-411D-9F22-DB3369001B74}"/>
+                <a16:creationId xmlns:a16="http://schemas.microsoft.com/office/drawing/2014/main" id="{86488E06-9F86-4F65-84D2-7A593A956EC4}"/>
               </a:ext>
             </a:extLst>
           </p:cNvPr>
@@ -2725,7 +2725,7 @@
           <p:cNvPr id="6" name="Slide Number Placeholder 5">
             <a:extLst xmlns:a="http://schemas.openxmlformats.org/drawingml/2006/main">
               <a:ext uri="{FF2B5EF4-FFF2-40B4-BE49-F238E27FC236}">
-                <a16:creationId xmlns:a16="http://schemas.microsoft.com/office/drawing/2014/main" id="{1CC594C0-F79E-4BDA-898E-E9F4F8B01D41}"/>
+                <a16:creationId xmlns:a16="http://schemas.microsoft.com/office/drawing/2014/main" id="{0D55B8D6-33EE-4771-81CC-998307389D9C}"/>
               </a:ext>
             </a:extLst>
           </p:cNvPr>
@@ -2769,7 +2769,7 @@
           <p:cNvPr id="2" name="Vertical Title 1">
             <a:extLst xmlns:a="http://schemas.openxmlformats.org/drawingml/2006/main">
               <a:ext uri="{FF2B5EF4-FFF2-40B4-BE49-F238E27FC236}">
-                <a16:creationId xmlns:a16="http://schemas.microsoft.com/office/drawing/2014/main" id="{01042B39-FA8F-4755-8B2F-1E78090CDACE}"/>
+                <a16:creationId xmlns:a16="http://schemas.microsoft.com/office/drawing/2014/main" id="{282838FE-5A27-4EDC-919D-A578ABCFD132}"/>
               </a:ext>
             </a:extLst>
           </p:cNvPr>
@@ -2801,7 +2801,7 @@
           <p:cNvPr id="3" name="Vertical Text Placeholder 2">
             <a:extLst xmlns:a="http://schemas.openxmlformats.org/drawingml/2006/main">
               <a:ext uri="{FF2B5EF4-FFF2-40B4-BE49-F238E27FC236}">
-                <a16:creationId xmlns:a16="http://schemas.microsoft.com/office/drawing/2014/main" id="{42116D62-1894-448F-B606-40EFA0849CD7}"/>
+                <a16:creationId xmlns:a16="http://schemas.microsoft.com/office/drawing/2014/main" id="{F0D44262-7BA2-4ECB-A949-015F2070D76A}"/>
               </a:ext>
             </a:extLst>
           </p:cNvPr>
@@ -2868,7 +2868,7 @@
           <p:cNvPr id="4" name="Date Placeholder 3">
             <a:extLst xmlns:a="http://schemas.openxmlformats.org/drawingml/2006/main">
               <a:ext uri="{FF2B5EF4-FFF2-40B4-BE49-F238E27FC236}">
-                <a16:creationId xmlns:a16="http://schemas.microsoft.com/office/drawing/2014/main" id="{4AB9EF5A-2382-4E96-AFB4-32B26881834B}"/>
+                <a16:creationId xmlns:a16="http://schemas.microsoft.com/office/drawing/2014/main" id="{227A78D4-6597-4A0A-90D0-3441FE4E91FF}"/>
               </a:ext>
             </a:extLst>
           </p:cNvPr>
@@ -2895,7 +2895,7 @@
           <p:cNvPr id="5" name="Footer Placeholder 4">
             <a:extLst xmlns:a="http://schemas.openxmlformats.org/drawingml/2006/main">
               <a:ext uri="{FF2B5EF4-FFF2-40B4-BE49-F238E27FC236}">
-                <a16:creationId xmlns:a16="http://schemas.microsoft.com/office/drawing/2014/main" id="{07D7801B-5621-4FC6-9930-D208E29C2852}"/>
+                <a16:creationId xmlns:a16="http://schemas.microsoft.com/office/drawing/2014/main" id="{2D5D519C-82C7-4E4F-B4D3-02F08ECFB1E3}"/>
               </a:ext>
             </a:extLst>
           </p:cNvPr>
@@ -2918,7 +2918,7 @@
           <p:cNvPr id="6" name="Slide Number Placeholder 5">
             <a:extLst xmlns:a="http://schemas.openxmlformats.org/drawingml/2006/main">
               <a:ext uri="{FF2B5EF4-FFF2-40B4-BE49-F238E27FC236}">
-                <a16:creationId xmlns:a16="http://schemas.microsoft.com/office/drawing/2014/main" id="{4C52877A-36B1-4565-B96D-2F6227D07619}"/>
+                <a16:creationId xmlns:a16="http://schemas.microsoft.com/office/drawing/2014/main" id="{188A7DE1-EF4C-425C-B168-57ADC65CA490}"/>
               </a:ext>
             </a:extLst>
           </p:cNvPr>
@@ -2962,7 +2962,7 @@
           <p:cNvPr id="2" name="Title 1">
             <a:extLst xmlns:a="http://schemas.openxmlformats.org/drawingml/2006/main">
               <a:ext uri="{FF2B5EF4-FFF2-40B4-BE49-F238E27FC236}">
-                <a16:creationId xmlns:a16="http://schemas.microsoft.com/office/drawing/2014/main" id="{773D2C51-591B-4956-A314-E03C1E19BCFE}"/>
+                <a16:creationId xmlns:a16="http://schemas.microsoft.com/office/drawing/2014/main" id="{1EE862EE-BD5F-40DF-973A-649590D3E6D2}"/>
               </a:ext>
             </a:extLst>
           </p:cNvPr>
@@ -2989,7 +2989,7 @@
           <p:cNvPr id="3" name="Content Placeholder 2">
             <a:extLst xmlns:a="http://schemas.openxmlformats.org/drawingml/2006/main">
               <a:ext uri="{FF2B5EF4-FFF2-40B4-BE49-F238E27FC236}">
-                <a16:creationId xmlns:a16="http://schemas.microsoft.com/office/drawing/2014/main" id="{D66C4D9B-353A-4454-A127-09A042E89E9F}"/>
+                <a16:creationId xmlns:a16="http://schemas.microsoft.com/office/drawing/2014/main" id="{96B41689-814D-438A-A633-C9B9586A0871}"/>
               </a:ext>
             </a:extLst>
           </p:cNvPr>
@@ -3051,7 +3051,7 @@
           <p:cNvPr id="4" name="Date Placeholder 3">
             <a:extLst xmlns:a="http://schemas.openxmlformats.org/drawingml/2006/main">
               <a:ext uri="{FF2B5EF4-FFF2-40B4-BE49-F238E27FC236}">
-                <a16:creationId xmlns:a16="http://schemas.microsoft.com/office/drawing/2014/main" id="{D85364E7-4342-49A9-AD3C-94F61A54D8A8}"/>
+                <a16:creationId xmlns:a16="http://schemas.microsoft.com/office/drawing/2014/main" id="{EB1CA34D-0D8C-477F-8BA7-22E352D21BF2}"/>
               </a:ext>
             </a:extLst>
           </p:cNvPr>
@@ -3078,7 +3078,7 @@
           <p:cNvPr id="5" name="Footer Placeholder 4">
             <a:extLst xmlns:a="http://schemas.openxmlformats.org/drawingml/2006/main">
               <a:ext uri="{FF2B5EF4-FFF2-40B4-BE49-F238E27FC236}">
-                <a16:creationId xmlns:a16="http://schemas.microsoft.com/office/drawing/2014/main" id="{95B30D96-4291-4A0C-91F3-46230957BDEA}"/>
+                <a16:creationId xmlns:a16="http://schemas.microsoft.com/office/drawing/2014/main" id="{82982340-044A-4F11-9255-9B44BF096207}"/>
               </a:ext>
             </a:extLst>
           </p:cNvPr>
@@ -3101,7 +3101,7 @@
           <p:cNvPr id="6" name="Slide Number Placeholder 5">
             <a:extLst xmlns:a="http://schemas.openxmlformats.org/drawingml/2006/main">
               <a:ext uri="{FF2B5EF4-FFF2-40B4-BE49-F238E27FC236}">
-                <a16:creationId xmlns:a16="http://schemas.microsoft.com/office/drawing/2014/main" id="{44DBE54A-C7C0-40C1-90A4-CDCE93CDB344}"/>
+                <a16:creationId xmlns:a16="http://schemas.microsoft.com/office/drawing/2014/main" id="{FD070F60-E926-453E-A5E0-9157AEBF60DF}"/>
               </a:ext>
             </a:extLst>
           </p:cNvPr>
@@ -3145,7 +3145,7 @@
           <p:cNvPr id="2" name="Title 1">
             <a:extLst xmlns:a="http://schemas.openxmlformats.org/drawingml/2006/main">
               <a:ext uri="{FF2B5EF4-FFF2-40B4-BE49-F238E27FC236}">
-                <a16:creationId xmlns:a16="http://schemas.microsoft.com/office/drawing/2014/main" id="{7B33545C-5E6C-4044-A0AB-AF3AECBF3EBF}"/>
+                <a16:creationId xmlns:a16="http://schemas.microsoft.com/office/drawing/2014/main" id="{6EC26EF6-4D53-4B91-A13D-08C2945FFD75}"/>
               </a:ext>
             </a:extLst>
           </p:cNvPr>
@@ -3182,7 +3182,7 @@
           <p:cNvPr id="3" name="Text Placeholder 2">
             <a:extLst xmlns:a="http://schemas.openxmlformats.org/drawingml/2006/main">
               <a:ext uri="{FF2B5EF4-FFF2-40B4-BE49-F238E27FC236}">
-                <a16:creationId xmlns:a16="http://schemas.microsoft.com/office/drawing/2014/main" id="{2B05ECF0-C42D-4A27-BFD2-A0AF5DE0A39F}"/>
+                <a16:creationId xmlns:a16="http://schemas.microsoft.com/office/drawing/2014/main" id="{74F6CC04-DDE0-43F3-84EF-98973BC0A704}"/>
               </a:ext>
             </a:extLst>
           </p:cNvPr>
@@ -3308,7 +3308,7 @@
           <p:cNvPr id="4" name="Date Placeholder 3">
             <a:extLst xmlns:a="http://schemas.openxmlformats.org/drawingml/2006/main">
               <a:ext uri="{FF2B5EF4-FFF2-40B4-BE49-F238E27FC236}">
-                <a16:creationId xmlns:a16="http://schemas.microsoft.com/office/drawing/2014/main" id="{E413FB45-4514-44B1-8852-C35EA5C9F2E8}"/>
+                <a16:creationId xmlns:a16="http://schemas.microsoft.com/office/drawing/2014/main" id="{7AF3A196-BAB1-46E3-A899-8715DBCDDE9A}"/>
               </a:ext>
             </a:extLst>
           </p:cNvPr>
@@ -3335,7 +3335,7 @@
           <p:cNvPr id="5" name="Footer Placeholder 4">
             <a:extLst xmlns:a="http://schemas.openxmlformats.org/drawingml/2006/main">
               <a:ext uri="{FF2B5EF4-FFF2-40B4-BE49-F238E27FC236}">
-                <a16:creationId xmlns:a16="http://schemas.microsoft.com/office/drawing/2014/main" id="{519DE881-AEE0-4B3B-9B81-F57090DF44D8}"/>
+                <a16:creationId xmlns:a16="http://schemas.microsoft.com/office/drawing/2014/main" id="{3DBD4851-D91D-43D3-B10F-EBFFA1821A23}"/>
               </a:ext>
             </a:extLst>
           </p:cNvPr>
@@ -3358,7 +3358,7 @@
           <p:cNvPr id="6" name="Slide Number Placeholder 5">
             <a:extLst xmlns:a="http://schemas.openxmlformats.org/drawingml/2006/main">
               <a:ext uri="{FF2B5EF4-FFF2-40B4-BE49-F238E27FC236}">
-                <a16:creationId xmlns:a16="http://schemas.microsoft.com/office/drawing/2014/main" id="{41DE6DD2-8F41-473C-AEFA-1F268FFBD4E7}"/>
+                <a16:creationId xmlns:a16="http://schemas.microsoft.com/office/drawing/2014/main" id="{07FA6C85-10D2-444B-AFBC-ACD6F64A055A}"/>
               </a:ext>
             </a:extLst>
           </p:cNvPr>
@@ -3402,7 +3402,7 @@
           <p:cNvPr id="2" name="Title 1">
             <a:extLst xmlns:a="http://schemas.openxmlformats.org/drawingml/2006/main">
               <a:ext uri="{FF2B5EF4-FFF2-40B4-BE49-F238E27FC236}">
-                <a16:creationId xmlns:a16="http://schemas.microsoft.com/office/drawing/2014/main" id="{7FCDE965-8721-4B4B-96DA-9A406181A624}"/>
+                <a16:creationId xmlns:a16="http://schemas.microsoft.com/office/drawing/2014/main" id="{EAB17F75-549A-4F59-96B7-8030AD34B733}"/>
               </a:ext>
             </a:extLst>
           </p:cNvPr>
@@ -3429,7 +3429,7 @@
           <p:cNvPr id="3" name="Content Placeholder 2">
             <a:extLst xmlns:a="http://schemas.openxmlformats.org/drawingml/2006/main">
               <a:ext uri="{FF2B5EF4-FFF2-40B4-BE49-F238E27FC236}">
-                <a16:creationId xmlns:a16="http://schemas.microsoft.com/office/drawing/2014/main" id="{B697586A-3616-4AD7-A08E-937286E06A07}"/>
+                <a16:creationId xmlns:a16="http://schemas.microsoft.com/office/drawing/2014/main" id="{0972E730-AE5F-4C79-A82A-86B4E58B8F51}"/>
               </a:ext>
             </a:extLst>
           </p:cNvPr>
@@ -3533,7 +3533,7 @@
           <p:cNvPr id="4" name="Content Placeholder 3">
             <a:extLst xmlns:a="http://schemas.openxmlformats.org/drawingml/2006/main">
               <a:ext uri="{FF2B5EF4-FFF2-40B4-BE49-F238E27FC236}">
-                <a16:creationId xmlns:a16="http://schemas.microsoft.com/office/drawing/2014/main" id="{EF1EE6BE-6DC5-4675-8EC9-166142E373E1}"/>
+                <a16:creationId xmlns:a16="http://schemas.microsoft.com/office/drawing/2014/main" id="{688A0532-ED28-47DB-921C-B8048F1F1855}"/>
               </a:ext>
             </a:extLst>
           </p:cNvPr>
@@ -3637,7 +3637,7 @@
           <p:cNvPr id="5" name="Date Placeholder 4">
             <a:extLst xmlns:a="http://schemas.openxmlformats.org/drawingml/2006/main">
               <a:ext uri="{FF2B5EF4-FFF2-40B4-BE49-F238E27FC236}">
-                <a16:creationId xmlns:a16="http://schemas.microsoft.com/office/drawing/2014/main" id="{37C2E6BB-B498-4378-9D22-1FC93E9B6F25}"/>
+                <a16:creationId xmlns:a16="http://schemas.microsoft.com/office/drawing/2014/main" id="{1AB0EF09-0B2E-4A4A-8AEB-F75468F5006D}"/>
               </a:ext>
             </a:extLst>
           </p:cNvPr>
@@ -3664,7 +3664,7 @@
           <p:cNvPr id="6" name="Footer Placeholder 5">
             <a:extLst xmlns:a="http://schemas.openxmlformats.org/drawingml/2006/main">
               <a:ext uri="{FF2B5EF4-FFF2-40B4-BE49-F238E27FC236}">
-                <a16:creationId xmlns:a16="http://schemas.microsoft.com/office/drawing/2014/main" id="{D9D1A957-5317-483E-B11A-A3449410024A}"/>
+                <a16:creationId xmlns:a16="http://schemas.microsoft.com/office/drawing/2014/main" id="{DC131570-9267-4DBD-B87F-544B64192E9F}"/>
               </a:ext>
             </a:extLst>
           </p:cNvPr>
@@ -3687,7 +3687,7 @@
           <p:cNvPr id="7" name="Slide Number Placeholder 6">
             <a:extLst xmlns:a="http://schemas.openxmlformats.org/drawingml/2006/main">
               <a:ext uri="{FF2B5EF4-FFF2-40B4-BE49-F238E27FC236}">
-                <a16:creationId xmlns:a16="http://schemas.microsoft.com/office/drawing/2014/main" id="{5E418BFD-4EC4-41F0-B6E4-9FAF7CB6E30E}"/>
+                <a16:creationId xmlns:a16="http://schemas.microsoft.com/office/drawing/2014/main" id="{7DD29CD3-14AE-49DE-87C5-38B90BACFB9E}"/>
               </a:ext>
             </a:extLst>
           </p:cNvPr>
@@ -3731,7 +3731,7 @@
           <p:cNvPr id="2" name="Title 1">
             <a:extLst xmlns:a="http://schemas.openxmlformats.org/drawingml/2006/main">
               <a:ext uri="{FF2B5EF4-FFF2-40B4-BE49-F238E27FC236}">
-                <a16:creationId xmlns:a16="http://schemas.microsoft.com/office/drawing/2014/main" id="{8A55A1F6-9D43-43DE-A9C4-35E33CCD4B95}"/>
+                <a16:creationId xmlns:a16="http://schemas.microsoft.com/office/drawing/2014/main" id="{DCE6DC4E-2E9B-4028-8703-CF529DFE030A}"/>
               </a:ext>
             </a:extLst>
           </p:cNvPr>
@@ -3763,7 +3763,7 @@
           <p:cNvPr id="3" name="Text Placeholder 2">
             <a:extLst xmlns:a="http://schemas.openxmlformats.org/drawingml/2006/main">
               <a:ext uri="{FF2B5EF4-FFF2-40B4-BE49-F238E27FC236}">
-                <a16:creationId xmlns:a16="http://schemas.microsoft.com/office/drawing/2014/main" id="{30F72D5E-88F0-4651-99D9-53E07F0E1F72}"/>
+                <a16:creationId xmlns:a16="http://schemas.microsoft.com/office/drawing/2014/main" id="{877F28B8-16D3-4392-9562-B17F5102BA7B}"/>
               </a:ext>
             </a:extLst>
           </p:cNvPr>
@@ -3835,7 +3835,7 @@
           <p:cNvPr id="4" name="Content Placeholder 3">
             <a:extLst xmlns:a="http://schemas.openxmlformats.org/drawingml/2006/main">
               <a:ext uri="{FF2B5EF4-FFF2-40B4-BE49-F238E27FC236}">
-                <a16:creationId xmlns:a16="http://schemas.microsoft.com/office/drawing/2014/main" id="{BB3E3E63-BE9F-416F-B80B-B40577BCF7CA}"/>
+                <a16:creationId xmlns:a16="http://schemas.microsoft.com/office/drawing/2014/main" id="{1F978D1A-934B-4D68-9E92-DC009D167C0B}"/>
               </a:ext>
             </a:extLst>
           </p:cNvPr>
@@ -3939,7 +3939,7 @@
           <p:cNvPr id="5" name="Text Placeholder 4">
             <a:extLst xmlns:a="http://schemas.openxmlformats.org/drawingml/2006/main">
               <a:ext uri="{FF2B5EF4-FFF2-40B4-BE49-F238E27FC236}">
-                <a16:creationId xmlns:a16="http://schemas.microsoft.com/office/drawing/2014/main" id="{14971445-A9FF-4C47-BCFA-3E73357B22FD}"/>
+                <a16:creationId xmlns:a16="http://schemas.microsoft.com/office/drawing/2014/main" id="{87484ECE-DA0C-4478-8913-8902282C8BBE}"/>
               </a:ext>
             </a:extLst>
           </p:cNvPr>
@@ -4011,7 +4011,7 @@
           <p:cNvPr id="6" name="Content Placeholder 5">
             <a:extLst xmlns:a="http://schemas.openxmlformats.org/drawingml/2006/main">
               <a:ext uri="{FF2B5EF4-FFF2-40B4-BE49-F238E27FC236}">
-                <a16:creationId xmlns:a16="http://schemas.microsoft.com/office/drawing/2014/main" id="{EA393559-A5AC-4038-A788-2B8547F6522D}"/>
+                <a16:creationId xmlns:a16="http://schemas.microsoft.com/office/drawing/2014/main" id="{130E91C0-EB87-4242-A9AD-DBCE83A4F984}"/>
               </a:ext>
             </a:extLst>
           </p:cNvPr>
@@ -4115,7 +4115,7 @@
           <p:cNvPr id="7" name="Date Placeholder 6">
             <a:extLst xmlns:a="http://schemas.openxmlformats.org/drawingml/2006/main">
               <a:ext uri="{FF2B5EF4-FFF2-40B4-BE49-F238E27FC236}">
-                <a16:creationId xmlns:a16="http://schemas.microsoft.com/office/drawing/2014/main" id="{72DAB087-4029-4FF1-AD01-C37B4B28C731}"/>
+                <a16:creationId xmlns:a16="http://schemas.microsoft.com/office/drawing/2014/main" id="{1459BD2F-58F4-4EC3-A901-16D4D1DD36EB}"/>
               </a:ext>
             </a:extLst>
           </p:cNvPr>
@@ -4142,7 +4142,7 @@
           <p:cNvPr id="8" name="Footer Placeholder 7">
             <a:extLst xmlns:a="http://schemas.openxmlformats.org/drawingml/2006/main">
               <a:ext uri="{FF2B5EF4-FFF2-40B4-BE49-F238E27FC236}">
-                <a16:creationId xmlns:a16="http://schemas.microsoft.com/office/drawing/2014/main" id="{7FDC8AA4-1205-42F8-AB27-936066D79E0E}"/>
+                <a16:creationId xmlns:a16="http://schemas.microsoft.com/office/drawing/2014/main" id="{1347035E-2335-411E-995B-F54634DECB9F}"/>
               </a:ext>
             </a:extLst>
           </p:cNvPr>
@@ -4165,7 +4165,7 @@
           <p:cNvPr id="9" name="Slide Number Placeholder 8">
             <a:extLst xmlns:a="http://schemas.openxmlformats.org/drawingml/2006/main">
               <a:ext uri="{FF2B5EF4-FFF2-40B4-BE49-F238E27FC236}">
-                <a16:creationId xmlns:a16="http://schemas.microsoft.com/office/drawing/2014/main" id="{E0AF0009-9442-42DB-AFEA-86DD451B0D67}"/>
+                <a16:creationId xmlns:a16="http://schemas.microsoft.com/office/drawing/2014/main" id="{EBEAD58B-6BE3-40E5-AB24-0083310742EC}"/>
               </a:ext>
             </a:extLst>
           </p:cNvPr>
@@ -4209,7 +4209,7 @@
           <p:cNvPr id="2" name="Title 1">
             <a:extLst xmlns:a="http://schemas.openxmlformats.org/drawingml/2006/main">
               <a:ext uri="{FF2B5EF4-FFF2-40B4-BE49-F238E27FC236}">
-                <a16:creationId xmlns:a16="http://schemas.microsoft.com/office/drawing/2014/main" id="{F26BC09E-EF89-4FE7-8699-E5669E19B110}"/>
+                <a16:creationId xmlns:a16="http://schemas.microsoft.com/office/drawing/2014/main" id="{F3E1A584-7C7D-4221-9A78-FB31F99A59F1}"/>
               </a:ext>
             </a:extLst>
           </p:cNvPr>
@@ -4236,7 +4236,7 @@
           <p:cNvPr id="3" name="Date Placeholder 2">
             <a:extLst xmlns:a="http://schemas.openxmlformats.org/drawingml/2006/main">
               <a:ext uri="{FF2B5EF4-FFF2-40B4-BE49-F238E27FC236}">
-                <a16:creationId xmlns:a16="http://schemas.microsoft.com/office/drawing/2014/main" id="{0FF4A0AD-5A38-40EC-8C33-7434736E5AA4}"/>
+                <a16:creationId xmlns:a16="http://schemas.microsoft.com/office/drawing/2014/main" id="{6274405D-48BE-44A1-880B-88673512D7E0}"/>
               </a:ext>
             </a:extLst>
           </p:cNvPr>
@@ -4263,7 +4263,7 @@
           <p:cNvPr id="4" name="Footer Placeholder 3">
             <a:extLst xmlns:a="http://schemas.openxmlformats.org/drawingml/2006/main">
               <a:ext uri="{FF2B5EF4-FFF2-40B4-BE49-F238E27FC236}">
-                <a16:creationId xmlns:a16="http://schemas.microsoft.com/office/drawing/2014/main" id="{882E70B3-AEB8-4D45-A854-6E9F02FB1283}"/>
+                <a16:creationId xmlns:a16="http://schemas.microsoft.com/office/drawing/2014/main" id="{BCFE12AC-6E9C-448F-AEF3-7B10B384143D}"/>
               </a:ext>
             </a:extLst>
           </p:cNvPr>
@@ -4286,7 +4286,7 @@
           <p:cNvPr id="5" name="Slide Number Placeholder 4">
             <a:extLst xmlns:a="http://schemas.openxmlformats.org/drawingml/2006/main">
               <a:ext uri="{FF2B5EF4-FFF2-40B4-BE49-F238E27FC236}">
-                <a16:creationId xmlns:a16="http://schemas.microsoft.com/office/drawing/2014/main" id="{9CDA3EA8-6F25-459A-81F2-E495A54AC98B}"/>
+                <a16:creationId xmlns:a16="http://schemas.microsoft.com/office/drawing/2014/main" id="{4BE78E98-1387-4172-A63C-10383B204BAA}"/>
               </a:ext>
             </a:extLst>
           </p:cNvPr>
@@ -4330,7 +4330,7 @@
           <p:cNvPr id="2" name="Date Placeholder 1">
             <a:extLst xmlns:a="http://schemas.openxmlformats.org/drawingml/2006/main">
               <a:ext uri="{FF2B5EF4-FFF2-40B4-BE49-F238E27FC236}">
-                <a16:creationId xmlns:a16="http://schemas.microsoft.com/office/drawing/2014/main" id="{8608896F-99FE-40CC-9C8C-E269506864A0}"/>
+                <a16:creationId xmlns:a16="http://schemas.microsoft.com/office/drawing/2014/main" id="{F9410DAB-ED3F-4C01-ABF1-2E9621CA81BF}"/>
               </a:ext>
             </a:extLst>
           </p:cNvPr>
@@ -4357,7 +4357,7 @@
           <p:cNvPr id="3" name="Footer Placeholder 2">
             <a:extLst xmlns:a="http://schemas.openxmlformats.org/drawingml/2006/main">
               <a:ext uri="{FF2B5EF4-FFF2-40B4-BE49-F238E27FC236}">
-                <a16:creationId xmlns:a16="http://schemas.microsoft.com/office/drawing/2014/main" id="{27AFE579-3CCF-410C-A3C4-1A4B170FDE95}"/>
+                <a16:creationId xmlns:a16="http://schemas.microsoft.com/office/drawing/2014/main" id="{DABCFB72-D447-4B11-91D8-0B33515C0FDC}"/>
               </a:ext>
             </a:extLst>
           </p:cNvPr>
@@ -4380,7 +4380,7 @@
           <p:cNvPr id="4" name="Slide Number Placeholder 3">
             <a:extLst xmlns:a="http://schemas.openxmlformats.org/drawingml/2006/main">
               <a:ext uri="{FF2B5EF4-FFF2-40B4-BE49-F238E27FC236}">
-                <a16:creationId xmlns:a16="http://schemas.microsoft.com/office/drawing/2014/main" id="{ABF740A2-97C3-468D-A24E-DD14F173E66F}"/>
+                <a16:creationId xmlns:a16="http://schemas.microsoft.com/office/drawing/2014/main" id="{DD724D65-6501-48BE-92A3-6D3C55071DE9}"/>
               </a:ext>
             </a:extLst>
           </p:cNvPr>
@@ -4424,7 +4424,7 @@
           <p:cNvPr id="2" name="Title 1">
             <a:extLst xmlns:a="http://schemas.openxmlformats.org/drawingml/2006/main">
               <a:ext uri="{FF2B5EF4-FFF2-40B4-BE49-F238E27FC236}">
-                <a16:creationId xmlns:a16="http://schemas.microsoft.com/office/drawing/2014/main" id="{3467EA71-C8A6-4E2F-9274-A216CBCB9C64}"/>
+                <a16:creationId xmlns:a16="http://schemas.microsoft.com/office/drawing/2014/main" id="{4D9B7A66-E88B-49E0-8E08-06DB375F33A1}"/>
               </a:ext>
             </a:extLst>
           </p:cNvPr>
@@ -4461,7 +4461,7 @@
           <p:cNvPr id="3" name="Content Placeholder 2">
             <a:extLst xmlns:a="http://schemas.openxmlformats.org/drawingml/2006/main">
               <a:ext uri="{FF2B5EF4-FFF2-40B4-BE49-F238E27FC236}">
-                <a16:creationId xmlns:a16="http://schemas.microsoft.com/office/drawing/2014/main" id="{92623A25-48A9-44CB-8348-A1E17971D16B}"/>
+                <a16:creationId xmlns:a16="http://schemas.microsoft.com/office/drawing/2014/main" id="{C214DDA5-F30C-44E9-8ADF-960FD3FABC9B}"/>
               </a:ext>
             </a:extLst>
           </p:cNvPr>
@@ -4565,7 +4565,7 @@
           <p:cNvPr id="4" name="Text Placeholder 3">
             <a:extLst xmlns:a="http://schemas.openxmlformats.org/drawingml/2006/main">
               <a:ext uri="{FF2B5EF4-FFF2-40B4-BE49-F238E27FC236}">
-                <a16:creationId xmlns:a16="http://schemas.microsoft.com/office/drawing/2014/main" id="{A7EC341A-8855-44E3-88BD-3EE1ED4B025E}"/>
+                <a16:creationId xmlns:a16="http://schemas.microsoft.com/office/drawing/2014/main" id="{9C96479D-B37A-43A4-A007-3B5DC20557D2}"/>
               </a:ext>
             </a:extLst>
           </p:cNvPr>
@@ -4637,7 +4637,7 @@
           <p:cNvPr id="5" name="Date Placeholder 4">
             <a:extLst xmlns:a="http://schemas.openxmlformats.org/drawingml/2006/main">
               <a:ext uri="{FF2B5EF4-FFF2-40B4-BE49-F238E27FC236}">
-                <a16:creationId xmlns:a16="http://schemas.microsoft.com/office/drawing/2014/main" id="{4412998A-0D75-42BE-B5FE-3DD9ED1C22E5}"/>
+                <a16:creationId xmlns:a16="http://schemas.microsoft.com/office/drawing/2014/main" id="{C531A9F6-AA80-4E21-9BBB-9EEC3DEB0E46}"/>
               </a:ext>
             </a:extLst>
           </p:cNvPr>
@@ -4664,7 +4664,7 @@
           <p:cNvPr id="6" name="Footer Placeholder 5">
             <a:extLst xmlns:a="http://schemas.openxmlformats.org/drawingml/2006/main">
               <a:ext uri="{FF2B5EF4-FFF2-40B4-BE49-F238E27FC236}">
-                <a16:creationId xmlns:a16="http://schemas.microsoft.com/office/drawing/2014/main" id="{F006F799-8577-4857-A013-4E7CC3D64CD6}"/>
+                <a16:creationId xmlns:a16="http://schemas.microsoft.com/office/drawing/2014/main" id="{0234E982-B5C2-4113-8B24-0FE0220CB599}"/>
               </a:ext>
             </a:extLst>
           </p:cNvPr>
@@ -4687,7 +4687,7 @@
           <p:cNvPr id="7" name="Slide Number Placeholder 6">
             <a:extLst xmlns:a="http://schemas.openxmlformats.org/drawingml/2006/main">
               <a:ext uri="{FF2B5EF4-FFF2-40B4-BE49-F238E27FC236}">
-                <a16:creationId xmlns:a16="http://schemas.microsoft.com/office/drawing/2014/main" id="{4F154BE7-FCD4-4922-8FA8-8BC474020786}"/>
+                <a16:creationId xmlns:a16="http://schemas.microsoft.com/office/drawing/2014/main" id="{6BCFFA3C-5D3A-4D69-9B6C-A5C4938D72B4}"/>
               </a:ext>
             </a:extLst>
           </p:cNvPr>
@@ -4731,7 +4731,7 @@
           <p:cNvPr id="2" name="Title 1">
             <a:extLst xmlns:a="http://schemas.openxmlformats.org/drawingml/2006/main">
               <a:ext uri="{FF2B5EF4-FFF2-40B4-BE49-F238E27FC236}">
-                <a16:creationId xmlns:a16="http://schemas.microsoft.com/office/drawing/2014/main" id="{ED1A83EE-B1D7-47E7-A57E-1B6EA9F4C215}"/>
+                <a16:creationId xmlns:a16="http://schemas.microsoft.com/office/drawing/2014/main" id="{BD498750-1847-40B9-90CB-C948CAB3C1E0}"/>
               </a:ext>
             </a:extLst>
           </p:cNvPr>
@@ -4768,7 +4768,7 @@
           <p:cNvPr id="3" name="Picture Placeholder 2">
             <a:extLst xmlns:a="http://schemas.openxmlformats.org/drawingml/2006/main">
               <a:ext uri="{FF2B5EF4-FFF2-40B4-BE49-F238E27FC236}">
-                <a16:creationId xmlns:a16="http://schemas.microsoft.com/office/drawing/2014/main" id="{8B15C224-37D9-4922-A1DF-47D31B0C1E94}"/>
+                <a16:creationId xmlns:a16="http://schemas.microsoft.com/office/drawing/2014/main" id="{867A0B16-4CE3-432D-9E53-6FE42EBAFB9B}"/>
               </a:ext>
             </a:extLst>
           </p:cNvPr>
@@ -4833,7 +4833,7 @@
           <p:cNvPr id="4" name="Text Placeholder 3">
             <a:extLst xmlns:a="http://schemas.openxmlformats.org/drawingml/2006/main">
               <a:ext uri="{FF2B5EF4-FFF2-40B4-BE49-F238E27FC236}">
-                <a16:creationId xmlns:a16="http://schemas.microsoft.com/office/drawing/2014/main" id="{5B579529-0027-4731-A2FD-07F467A82007}"/>
+                <a16:creationId xmlns:a16="http://schemas.microsoft.com/office/drawing/2014/main" id="{C4A4B2AB-4CF2-404F-8733-83295DFE773C}"/>
               </a:ext>
             </a:extLst>
           </p:cNvPr>
@@ -4905,7 +4905,7 @@
           <p:cNvPr id="5" name="Date Placeholder 4">
             <a:extLst xmlns:a="http://schemas.openxmlformats.org/drawingml/2006/main">
               <a:ext uri="{FF2B5EF4-FFF2-40B4-BE49-F238E27FC236}">
-                <a16:creationId xmlns:a16="http://schemas.microsoft.com/office/drawing/2014/main" id="{080BF1C7-1875-453D-A3D7-6A38E856FA02}"/>
+                <a16:creationId xmlns:a16="http://schemas.microsoft.com/office/drawing/2014/main" id="{AA5ACF6A-2E81-45C7-BB9C-DB8CE4BC960A}"/>
               </a:ext>
             </a:extLst>
           </p:cNvPr>
@@ -4932,7 +4932,7 @@
           <p:cNvPr id="6" name="Footer Placeholder 5">
             <a:extLst xmlns:a="http://schemas.openxmlformats.org/drawingml/2006/main">
               <a:ext uri="{FF2B5EF4-FFF2-40B4-BE49-F238E27FC236}">
-                <a16:creationId xmlns:a16="http://schemas.microsoft.com/office/drawing/2014/main" id="{FFD8BBE2-04CF-4592-B99E-3225E7DA25A5}"/>
+                <a16:creationId xmlns:a16="http://schemas.microsoft.com/office/drawing/2014/main" id="{0F2EDD22-D8D4-47D0-94B4-1CCB5E60FF40}"/>
               </a:ext>
             </a:extLst>
           </p:cNvPr>
@@ -4955,7 +4955,7 @@
           <p:cNvPr id="7" name="Slide Number Placeholder 6">
             <a:extLst xmlns:a="http://schemas.openxmlformats.org/drawingml/2006/main">
               <a:ext uri="{FF2B5EF4-FFF2-40B4-BE49-F238E27FC236}">
-                <a16:creationId xmlns:a16="http://schemas.microsoft.com/office/drawing/2014/main" id="{B3DCE94B-A779-4936-A561-703CDDA8836C}"/>
+                <a16:creationId xmlns:a16="http://schemas.microsoft.com/office/drawing/2014/main" id="{C01206C7-5C60-4DE9-B872-BD0D93DC4394}"/>
               </a:ext>
             </a:extLst>
           </p:cNvPr>
@@ -5004,7 +5004,7 @@
           <p:cNvPr id="2" name="Title Placeholder 1">
             <a:extLst xmlns:a="http://schemas.openxmlformats.org/drawingml/2006/main">
               <a:ext uri="{FF2B5EF4-FFF2-40B4-BE49-F238E27FC236}">
-                <a16:creationId xmlns:a16="http://schemas.microsoft.com/office/drawing/2014/main" id="{7CB68002-6F8B-4FD1-93F8-40DDA6057056}"/>
+                <a16:creationId xmlns:a16="http://schemas.microsoft.com/office/drawing/2014/main" id="{7E0ED4C5-42A6-46BC-B3EB-CD87FDA602FF}"/>
               </a:ext>
             </a:extLst>
           </p:cNvPr>
@@ -5041,7 +5041,7 @@
           <p:cNvPr id="3" name="Text Placeholder 2">
             <a:extLst xmlns:a="http://schemas.openxmlformats.org/drawingml/2006/main">
               <a:ext uri="{FF2B5EF4-FFF2-40B4-BE49-F238E27FC236}">
-                <a16:creationId xmlns:a16="http://schemas.microsoft.com/office/drawing/2014/main" id="{FE089EC9-1619-4929-A2CF-79FBADED5B5B}"/>
+                <a16:creationId xmlns:a16="http://schemas.microsoft.com/office/drawing/2014/main" id="{599709A2-1361-49CA-96AA-506E3D56A02E}"/>
               </a:ext>
             </a:extLst>
           </p:cNvPr>
@@ -5113,7 +5113,7 @@
           <p:cNvPr id="4" name="Date Placeholder 3">
             <a:extLst xmlns:a="http://schemas.openxmlformats.org/drawingml/2006/main">
               <a:ext uri="{FF2B5EF4-FFF2-40B4-BE49-F238E27FC236}">
-                <a16:creationId xmlns:a16="http://schemas.microsoft.com/office/drawing/2014/main" id="{B515FA1D-AF2A-47D1-8330-BA2CF3C68056}"/>
+                <a16:creationId xmlns:a16="http://schemas.microsoft.com/office/drawing/2014/main" id="{588F6671-226C-4AB5-89D0-D9AB02245276}"/>
               </a:ext>
             </a:extLst>
           </p:cNvPr>
@@ -5159,7 +5159,7 @@
           <p:cNvPr id="5" name="Footer Placeholder 4">
             <a:extLst xmlns:a="http://schemas.openxmlformats.org/drawingml/2006/main">
               <a:ext uri="{FF2B5EF4-FFF2-40B4-BE49-F238E27FC236}">
-                <a16:creationId xmlns:a16="http://schemas.microsoft.com/office/drawing/2014/main" id="{847FC09D-9998-4A8C-90C0-8DF05652FEEC}"/>
+                <a16:creationId xmlns:a16="http://schemas.microsoft.com/office/drawing/2014/main" id="{48464BEC-6CEF-4EF2-B652-A732C559934C}"/>
               </a:ext>
             </a:extLst>
           </p:cNvPr>
@@ -5201,7 +5201,7 @@
           <p:cNvPr id="6" name="Slide Number Placeholder 5">
             <a:extLst xmlns:a="http://schemas.openxmlformats.org/drawingml/2006/main">
               <a:ext uri="{FF2B5EF4-FFF2-40B4-BE49-F238E27FC236}">
-                <a16:creationId xmlns:a16="http://schemas.microsoft.com/office/drawing/2014/main" id="{ED0D32E3-F6BA-4B8A-B4BC-D701920B0932}"/>
+                <a16:creationId xmlns:a16="http://schemas.microsoft.com/office/drawing/2014/main" id="{391BD268-8C51-458B-A8CC-3E420E80B0BF}"/>
               </a:ext>
             </a:extLst>
           </p:cNvPr>
@@ -5246,17 +5246,17 @@
   </p:cSld>
   <p:clrMap bg1="lt1" tx1="dk1" bg2="lt2" tx2="dk2" accent1="accent1" accent2="accent2" accent3="accent3" accent4="accent4" accent5="accent5" accent6="accent6" hlink="hlink" folHlink="folHlink"/>
   <p:sldLayoutIdLst>
-    <p:sldLayoutId xmlns:r="http://schemas.openxmlformats.org/officeDocument/2006/relationships" id="2147483649" r:id="R968dbd620cb5423b"/>
-    <p:sldLayoutId xmlns:r="http://schemas.openxmlformats.org/officeDocument/2006/relationships" id="2147483650" r:id="R8bbd5451ac7d4490"/>
-    <p:sldLayoutId xmlns:r="http://schemas.openxmlformats.org/officeDocument/2006/relationships" id="2147483651" r:id="R79f154577f814f0d"/>
-    <p:sldLayoutId xmlns:r="http://schemas.openxmlformats.org/officeDocument/2006/relationships" id="2147483652" r:id="R7d131466689d433b"/>
-    <p:sldLayoutId xmlns:r="http://schemas.openxmlformats.org/officeDocument/2006/relationships" id="2147483653" r:id="R364a3a98c0a9496c"/>
-    <p:sldLayoutId xmlns:r="http://schemas.openxmlformats.org/officeDocument/2006/relationships" id="2147483654" r:id="R9b107e16e3a14489"/>
-    <p:sldLayoutId xmlns:r="http://schemas.openxmlformats.org/officeDocument/2006/relationships" id="2147483655" r:id="R8365d6f1512243ba"/>
-    <p:sldLayoutId xmlns:r="http://schemas.openxmlformats.org/officeDocument/2006/relationships" id="2147483656" r:id="Rb232700316c241ed"/>
-    <p:sldLayoutId xmlns:r="http://schemas.openxmlformats.org/officeDocument/2006/relationships" id="2147483657" r:id="R1153ad6d236441ad"/>
-    <p:sldLayoutId xmlns:r="http://schemas.openxmlformats.org/officeDocument/2006/relationships" id="2147483658" r:id="R9ae8c74c6f3449f3"/>
-    <p:sldLayoutId xmlns:r="http://schemas.openxmlformats.org/officeDocument/2006/relationships" id="2147483659" r:id="R7e3d925e300e426d"/>
+    <p:sldLayoutId xmlns:r="http://schemas.openxmlformats.org/officeDocument/2006/relationships" id="2147483649" r:id="R088ec19becd74adf"/>
+    <p:sldLayoutId xmlns:r="http://schemas.openxmlformats.org/officeDocument/2006/relationships" id="2147483650" r:id="Rc66ec7f3c63445e8"/>
+    <p:sldLayoutId xmlns:r="http://schemas.openxmlformats.org/officeDocument/2006/relationships" id="2147483651" r:id="R4d2a7e7b5de14339"/>
+    <p:sldLayoutId xmlns:r="http://schemas.openxmlformats.org/officeDocument/2006/relationships" id="2147483652" r:id="Rb044936580224500"/>
+    <p:sldLayoutId xmlns:r="http://schemas.openxmlformats.org/officeDocument/2006/relationships" id="2147483653" r:id="R637d0833fde34d6c"/>
+    <p:sldLayoutId xmlns:r="http://schemas.openxmlformats.org/officeDocument/2006/relationships" id="2147483654" r:id="Rdcfe6e2d7c8348b3"/>
+    <p:sldLayoutId xmlns:r="http://schemas.openxmlformats.org/officeDocument/2006/relationships" id="2147483655" r:id="Ra8de87c78cfd44e5"/>
+    <p:sldLayoutId xmlns:r="http://schemas.openxmlformats.org/officeDocument/2006/relationships" id="2147483656" r:id="Rbba03d58da0e48dc"/>
+    <p:sldLayoutId xmlns:r="http://schemas.openxmlformats.org/officeDocument/2006/relationships" id="2147483657" r:id="Rf5eee41ba6144eec"/>
+    <p:sldLayoutId xmlns:r="http://schemas.openxmlformats.org/officeDocument/2006/relationships" id="2147483658" r:id="Rfbbe16d663d547e0"/>
+    <p:sldLayoutId xmlns:r="http://schemas.openxmlformats.org/officeDocument/2006/relationships" id="2147483659" r:id="Rc383898dd8df4641"/>
   </p:sldLayoutIdLst>
   <p:txStyles>
     <p:titleStyle>
@@ -5809,7 +5809,7 @@
           <p:cNvPr id="2" name="Rectangle 1">
             <a:extLst xmlns:a="http://schemas.openxmlformats.org/drawingml/2006/main">
               <a:ext uri="{FF2B5EF4-FFF2-40B4-BE49-F238E27FC236}">
-                <a16:creationId xmlns:a16="http://schemas.microsoft.com/office/drawing/2014/main" id="{F277A0F2-7FE2-4D4A-B405-6FFC81D0A933}"/>
+                <a16:creationId xmlns:a16="http://schemas.microsoft.com/office/drawing/2014/main" id="{01CFB269-68AF-466B-87A3-0BD3A697AED5}"/>
               </a:ext>
             </a:extLst>
           </p:cNvPr>
@@ -5864,7 +5864,7 @@
           <p:cNvPr id="3" name="TextBox 2">
             <a:extLst xmlns:a="http://schemas.openxmlformats.org/drawingml/2006/main">
               <a:ext uri="{FF2B5EF4-FFF2-40B4-BE49-F238E27FC236}">
-                <a16:creationId xmlns:a16="http://schemas.microsoft.com/office/drawing/2014/main" id="{7AB3E8D9-696C-42A0-A017-5E2C473B183A}"/>
+                <a16:creationId xmlns:a16="http://schemas.microsoft.com/office/drawing/2014/main" id="{E872F2E8-98B9-4E56-B04E-2FD06A853266}"/>
               </a:ext>
             </a:extLst>
           </p:cNvPr>
@@ -5911,7 +5911,7 @@
           <p:cNvPr id="4" name="TextBox 3">
             <a:extLst xmlns:a="http://schemas.openxmlformats.org/drawingml/2006/main">
               <a:ext uri="{FF2B5EF4-FFF2-40B4-BE49-F238E27FC236}">
-                <a16:creationId xmlns:a16="http://schemas.microsoft.com/office/drawing/2014/main" id="{96658B06-D479-4B2A-A83F-871D812B9F19}"/>
+                <a16:creationId xmlns:a16="http://schemas.microsoft.com/office/drawing/2014/main" id="{B854853E-96B8-48EF-8563-EC9047CE7B9E}"/>
               </a:ext>
             </a:extLst>
           </p:cNvPr>
@@ -5959,7 +5959,7 @@
           <p:cNvPr id="5" name="TextBox 4">
             <a:extLst xmlns:a="http://schemas.openxmlformats.org/drawingml/2006/main">
               <a:ext uri="{FF2B5EF4-FFF2-40B4-BE49-F238E27FC236}">
-                <a16:creationId xmlns:a16="http://schemas.microsoft.com/office/drawing/2014/main" id="{DE645D7A-0BFD-4767-ADB6-1059E55AC5C5}"/>
+                <a16:creationId xmlns:a16="http://schemas.microsoft.com/office/drawing/2014/main" id="{9A9152A0-27BB-42EB-9D63-2C191697D400}"/>
               </a:ext>
             </a:extLst>
           </p:cNvPr>
@@ -6006,7 +6006,7 @@
           <p:cNvPr id="6" name="Rectangle 5">
             <a:extLst xmlns:a="http://schemas.openxmlformats.org/drawingml/2006/main">
               <a:ext uri="{FF2B5EF4-FFF2-40B4-BE49-F238E27FC236}">
-                <a16:creationId xmlns:a16="http://schemas.microsoft.com/office/drawing/2014/main" id="{627F6F16-F1C7-47FA-958E-093F9574251E}"/>
+                <a16:creationId xmlns:a16="http://schemas.microsoft.com/office/drawing/2014/main" id="{C7A624FF-A0E6-4E3E-B66B-DC6172D71DA4}"/>
               </a:ext>
             </a:extLst>
           </p:cNvPr>
@@ -6061,7 +6061,7 @@
           <p:cNvPr id="7" name="TextBox 6">
             <a:extLst xmlns:a="http://schemas.openxmlformats.org/drawingml/2006/main">
               <a:ext uri="{FF2B5EF4-FFF2-40B4-BE49-F238E27FC236}">
-                <a16:creationId xmlns:a16="http://schemas.microsoft.com/office/drawing/2014/main" id="{D31B28CE-9E45-4D04-800D-5D3D1486E7BB}"/>
+                <a16:creationId xmlns:a16="http://schemas.microsoft.com/office/drawing/2014/main" id="{79884F63-EADC-4518-A4BB-324B8E71B1E8}"/>
               </a:ext>
             </a:extLst>
           </p:cNvPr>
@@ -6108,7 +6108,7 @@
           <p:cNvPr id="8" name="TextBox 7">
             <a:extLst xmlns:a="http://schemas.openxmlformats.org/drawingml/2006/main">
               <a:ext uri="{FF2B5EF4-FFF2-40B4-BE49-F238E27FC236}">
-                <a16:creationId xmlns:a16="http://schemas.microsoft.com/office/drawing/2014/main" id="{5CC801E6-507D-4DE5-AF9A-B6F55640B0DF}"/>
+                <a16:creationId xmlns:a16="http://schemas.microsoft.com/office/drawing/2014/main" id="{8A15AF1C-77A3-44DA-B126-65388DC0294E}"/>
               </a:ext>
             </a:extLst>
           </p:cNvPr>
@@ -6145,7 +6145,7 @@
                 <a:ea typeface="Aptos"/>
                 <a:cs typeface="Aptos"/>
               </a:rPr>
-              <a:t>2026.07.31-37</a:t>
+              <a:t>2026.08.02-41</a:t>
             </a:r>
           </a:p>
         </p:txBody>
@@ -6155,7 +6155,7 @@
           <p:cNvPr id="9" name="TextBox 8">
             <a:extLst xmlns:a="http://schemas.openxmlformats.org/drawingml/2006/main">
               <a:ext uri="{FF2B5EF4-FFF2-40B4-BE49-F238E27FC236}">
-                <a16:creationId xmlns:a16="http://schemas.microsoft.com/office/drawing/2014/main" id="{304A7130-6313-4E21-8DB2-55F26C770959}"/>
+                <a16:creationId xmlns:a16="http://schemas.microsoft.com/office/drawing/2014/main" id="{1831FB23-0B76-4D5B-9C9F-FC3DA4EE290A}"/>
               </a:ext>
             </a:extLst>
           </p:cNvPr>
@@ -6192,7 +6192,7 @@
                 <a:ea typeface="Aptos"/>
                 <a:cs typeface="Aptos"/>
               </a:rPr>
-              <a:t>Päivitetty 2026-07-31</a:t>
+              <a:t>Päivitetty 2026-08-02</a:t>
             </a:r>
             <a:br>
               <a:rPr sz="1700" b="0">
@@ -6223,7 +6223,7 @@
           <p:cNvPr id="10" name="TextBox 9">
             <a:extLst xmlns:a="http://schemas.openxmlformats.org/drawingml/2006/main">
               <a:ext uri="{FF2B5EF4-FFF2-40B4-BE49-F238E27FC236}">
-                <a16:creationId xmlns:a16="http://schemas.microsoft.com/office/drawing/2014/main" id="{FC836318-EC1B-4B43-AED5-52FD51A4B174}"/>
+                <a16:creationId xmlns:a16="http://schemas.microsoft.com/office/drawing/2014/main" id="{CCDF1F88-E89C-412D-A6C1-345A9EDF3C2A}"/>
               </a:ext>
             </a:extLst>
           </p:cNvPr>
@@ -6270,7 +6270,7 @@
           <p:cNvPr id="11" name="TextBox 10">
             <a:extLst xmlns:a="http://schemas.openxmlformats.org/drawingml/2006/main">
               <a:ext uri="{FF2B5EF4-FFF2-40B4-BE49-F238E27FC236}">
-                <a16:creationId xmlns:a16="http://schemas.microsoft.com/office/drawing/2014/main" id="{F31766CC-8FB2-45BF-95F1-D13A96A14AEB}"/>
+                <a16:creationId xmlns:a16="http://schemas.microsoft.com/office/drawing/2014/main" id="{06DD561A-134F-4F69-A22C-E62727F928B6}"/>
               </a:ext>
             </a:extLst>
           </p:cNvPr>
@@ -6317,7 +6317,7 @@
           <p:cNvPr id="12" name="TextBox 11">
             <a:extLst xmlns:a="http://schemas.openxmlformats.org/drawingml/2006/main">
               <a:ext uri="{FF2B5EF4-FFF2-40B4-BE49-F238E27FC236}">
-                <a16:creationId xmlns:a16="http://schemas.microsoft.com/office/drawing/2014/main" id="{E8F27FD1-45DD-40C6-918C-351622759434}"/>
+                <a16:creationId xmlns:a16="http://schemas.microsoft.com/office/drawing/2014/main" id="{221FAD6A-BB38-4663-87CF-F060900D1907}"/>
               </a:ext>
             </a:extLst>
           </p:cNvPr>
@@ -6362,7 +6362,7 @@
     </p:spTree>
     <p:extLst>
       <p:ext uri="{BB962C8B-B14F-4D97-AF65-F5344CB8AC3E}">
-        <p14:creationId xmlns:p14="http://schemas.microsoft.com/office/powerpoint/2010/main" val="1133472093"/>
+        <p14:creationId xmlns:p14="http://schemas.microsoft.com/office/powerpoint/2010/main" val="1249775649"/>
       </p:ext>
     </p:extLst>
   </p:cSld>
@@ -6386,7 +6386,7 @@
           <p:cNvPr id="2" name="TextBox 1">
             <a:extLst xmlns:a="http://schemas.openxmlformats.org/drawingml/2006/main">
               <a:ext uri="{FF2B5EF4-FFF2-40B4-BE49-F238E27FC236}">
-                <a16:creationId xmlns:a16="http://schemas.microsoft.com/office/drawing/2014/main" id="{1BF18FF7-AF89-4CC0-83D0-D03D00A9CED5}"/>
+                <a16:creationId xmlns:a16="http://schemas.microsoft.com/office/drawing/2014/main" id="{C332BE6D-3E36-4183-9E37-DC3FC5A83812}"/>
               </a:ext>
             </a:extLst>
           </p:cNvPr>
@@ -6433,7 +6433,7 @@
           <p:cNvPr id="3" name="TextBox 2">
             <a:extLst xmlns:a="http://schemas.openxmlformats.org/drawingml/2006/main">
               <a:ext uri="{FF2B5EF4-FFF2-40B4-BE49-F238E27FC236}">
-                <a16:creationId xmlns:a16="http://schemas.microsoft.com/office/drawing/2014/main" id="{E35C18CA-A0CF-42AD-B8CC-8C182A93E4F1}"/>
+                <a16:creationId xmlns:a16="http://schemas.microsoft.com/office/drawing/2014/main" id="{E77094C8-654A-44CD-8436-DC6FE523DF93}"/>
               </a:ext>
             </a:extLst>
           </p:cNvPr>
@@ -6480,7 +6480,7 @@
           <p:cNvPr id="4" name="Rectangle 3">
             <a:extLst xmlns:a="http://schemas.openxmlformats.org/drawingml/2006/main">
               <a:ext uri="{FF2B5EF4-FFF2-40B4-BE49-F238E27FC236}">
-                <a16:creationId xmlns:a16="http://schemas.microsoft.com/office/drawing/2014/main" id="{D2637B60-2638-41B7-B52B-5FF5A97DF391}"/>
+                <a16:creationId xmlns:a16="http://schemas.microsoft.com/office/drawing/2014/main" id="{AE29B307-5865-4CAB-8157-2D63F2B0C0B6}"/>
               </a:ext>
             </a:extLst>
           </p:cNvPr>
@@ -6535,7 +6535,7 @@
           <p:cNvPr id="5" name="Rectangle 4">
             <a:extLst xmlns:a="http://schemas.openxmlformats.org/drawingml/2006/main">
               <a:ext uri="{FF2B5EF4-FFF2-40B4-BE49-F238E27FC236}">
-                <a16:creationId xmlns:a16="http://schemas.microsoft.com/office/drawing/2014/main" id="{071D72C9-1B89-475B-809A-69FB82981BC6}"/>
+                <a16:creationId xmlns:a16="http://schemas.microsoft.com/office/drawing/2014/main" id="{BF07A6FA-67E6-425F-911C-2C7762EDEF09}"/>
               </a:ext>
             </a:extLst>
           </p:cNvPr>
@@ -6590,7 +6590,7 @@
           <p:cNvPr id="6" name="TextBox 5">
             <a:extLst xmlns:a="http://schemas.openxmlformats.org/drawingml/2006/main">
               <a:ext uri="{FF2B5EF4-FFF2-40B4-BE49-F238E27FC236}">
-                <a16:creationId xmlns:a16="http://schemas.microsoft.com/office/drawing/2014/main" id="{C5B58B5A-6AAE-464C-A83E-1332F3D95F67}"/>
+                <a16:creationId xmlns:a16="http://schemas.microsoft.com/office/drawing/2014/main" id="{A2F745CF-2A79-4418-98E4-3B4F823506DA}"/>
               </a:ext>
             </a:extLst>
           </p:cNvPr>
@@ -6627,7 +6627,7 @@
                 <a:ea typeface="Aptos"/>
                 <a:cs typeface="Aptos"/>
               </a:rPr>
-              <a:t>Julkinen riippumaton evidenssikooste · 2026.07.31-37 · 2026-07-31 · Lähteet: EPO; Saksa — viralliset tuomiot; WIPO</a:t>
+              <a:t>Julkinen riippumaton evidenssikooste · 2026.08.02-41 · 2026-08-02 · Lähteet: EPO; Saksa — viralliset tuomiot; WIPO</a:t>
             </a:r>
           </a:p>
         </p:txBody>
@@ -6637,7 +6637,7 @@
           <p:cNvPr id="7" name="TextBox 6">
             <a:extLst xmlns:a="http://schemas.openxmlformats.org/drawingml/2006/main">
               <a:ext uri="{FF2B5EF4-FFF2-40B4-BE49-F238E27FC236}">
-                <a16:creationId xmlns:a16="http://schemas.microsoft.com/office/drawing/2014/main" id="{937318CC-1781-412C-B7CE-238A26879012}"/>
+                <a16:creationId xmlns:a16="http://schemas.microsoft.com/office/drawing/2014/main" id="{989EA47F-5696-4E5E-AE0C-998621D9B45D}"/>
               </a:ext>
             </a:extLst>
           </p:cNvPr>
@@ -6684,7 +6684,7 @@
           <p:cNvPr id="8" name="TextBox 7">
             <a:extLst xmlns:a="http://schemas.openxmlformats.org/drawingml/2006/main">
               <a:ext uri="{FF2B5EF4-FFF2-40B4-BE49-F238E27FC236}">
-                <a16:creationId xmlns:a16="http://schemas.microsoft.com/office/drawing/2014/main" id="{4133087A-7430-4439-89A9-2216849300A6}"/>
+                <a16:creationId xmlns:a16="http://schemas.microsoft.com/office/drawing/2014/main" id="{8C42A4BA-75CA-41DB-B53E-8C7D78C81131}"/>
               </a:ext>
             </a:extLst>
           </p:cNvPr>
@@ -6731,7 +6731,7 @@
           <p:cNvPr id="9" name="TextBox 8">
             <a:extLst xmlns:a="http://schemas.openxmlformats.org/drawingml/2006/main">
               <a:ext uri="{FF2B5EF4-FFF2-40B4-BE49-F238E27FC236}">
-                <a16:creationId xmlns:a16="http://schemas.microsoft.com/office/drawing/2014/main" id="{BF5ECF23-4DD3-4CF3-B0FA-F03EE4214FB6}"/>
+                <a16:creationId xmlns:a16="http://schemas.microsoft.com/office/drawing/2014/main" id="{F3546EC0-2FA8-44BE-AB51-CD4028C3EE81}"/>
               </a:ext>
             </a:extLst>
           </p:cNvPr>
@@ -6828,7 +6828,7 @@
           <p:cNvPr id="10" name="Rounded Rectangle 9">
             <a:extLst xmlns:a="http://schemas.openxmlformats.org/drawingml/2006/main">
               <a:ext uri="{FF2B5EF4-FFF2-40B4-BE49-F238E27FC236}">
-                <a16:creationId xmlns:a16="http://schemas.microsoft.com/office/drawing/2014/main" id="{295B5BA3-4DA8-41A0-ACCA-06507F31ACDF}"/>
+                <a16:creationId xmlns:a16="http://schemas.microsoft.com/office/drawing/2014/main" id="{283E111D-CC47-42E3-8B76-26540A91CC81}"/>
               </a:ext>
             </a:extLst>
           </p:cNvPr>
@@ -6885,7 +6885,7 @@
           <p:cNvPr id="11" name="TextBox 10">
             <a:extLst xmlns:a="http://schemas.openxmlformats.org/drawingml/2006/main">
               <a:ext uri="{FF2B5EF4-FFF2-40B4-BE49-F238E27FC236}">
-                <a16:creationId xmlns:a16="http://schemas.microsoft.com/office/drawing/2014/main" id="{4FE6746C-DA5B-4A94-8D92-006325491919}"/>
+                <a16:creationId xmlns:a16="http://schemas.microsoft.com/office/drawing/2014/main" id="{99B521B2-EF30-4244-9F25-6226462B5A15}"/>
               </a:ext>
             </a:extLst>
           </p:cNvPr>
@@ -6932,7 +6932,7 @@
           <p:cNvPr id="12" name="TextBox 11">
             <a:extLst xmlns:a="http://schemas.openxmlformats.org/drawingml/2006/main">
               <a:ext uri="{FF2B5EF4-FFF2-40B4-BE49-F238E27FC236}">
-                <a16:creationId xmlns:a16="http://schemas.microsoft.com/office/drawing/2014/main" id="{27AB524A-0516-4CEA-829A-3AC10725E1F0}"/>
+                <a16:creationId xmlns:a16="http://schemas.microsoft.com/office/drawing/2014/main" id="{B97614C8-2AF5-4E17-91D9-60EF3BE347F7}"/>
               </a:ext>
             </a:extLst>
           </p:cNvPr>
@@ -6977,7 +6977,7 @@
     </p:spTree>
     <p:extLst>
       <p:ext uri="{BB962C8B-B14F-4D97-AF65-F5344CB8AC3E}">
-        <p14:creationId xmlns:p14="http://schemas.microsoft.com/office/powerpoint/2010/main" val="1543827686"/>
+        <p14:creationId xmlns:p14="http://schemas.microsoft.com/office/powerpoint/2010/main" val="132720041"/>
       </p:ext>
     </p:extLst>
   </p:cSld>
@@ -7001,7 +7001,7 @@
           <p:cNvPr id="2" name="TextBox 1">
             <a:extLst xmlns:a="http://schemas.openxmlformats.org/drawingml/2006/main">
               <a:ext uri="{FF2B5EF4-FFF2-40B4-BE49-F238E27FC236}">
-                <a16:creationId xmlns:a16="http://schemas.microsoft.com/office/drawing/2014/main" id="{E5BC33B4-1E8A-4C2E-A062-DA7594A94E4F}"/>
+                <a16:creationId xmlns:a16="http://schemas.microsoft.com/office/drawing/2014/main" id="{E245412F-0143-432D-B9F6-FE2F53A2607A}"/>
               </a:ext>
             </a:extLst>
           </p:cNvPr>
@@ -7048,7 +7048,7 @@
           <p:cNvPr id="3" name="TextBox 2">
             <a:extLst xmlns:a="http://schemas.openxmlformats.org/drawingml/2006/main">
               <a:ext uri="{FF2B5EF4-FFF2-40B4-BE49-F238E27FC236}">
-                <a16:creationId xmlns:a16="http://schemas.microsoft.com/office/drawing/2014/main" id="{DF2D517C-807A-486A-B642-100A6706CA52}"/>
+                <a16:creationId xmlns:a16="http://schemas.microsoft.com/office/drawing/2014/main" id="{4DA894B3-3ED4-45FA-9A23-06D576B6277D}"/>
               </a:ext>
             </a:extLst>
           </p:cNvPr>
@@ -7095,7 +7095,7 @@
           <p:cNvPr id="4" name="Rectangle 3">
             <a:extLst xmlns:a="http://schemas.openxmlformats.org/drawingml/2006/main">
               <a:ext uri="{FF2B5EF4-FFF2-40B4-BE49-F238E27FC236}">
-                <a16:creationId xmlns:a16="http://schemas.microsoft.com/office/drawing/2014/main" id="{D1073A9F-1F43-4C99-BE0C-902FBB52C5B2}"/>
+                <a16:creationId xmlns:a16="http://schemas.microsoft.com/office/drawing/2014/main" id="{CE6184B8-AD94-4699-A54A-8B6EABA2C97C}"/>
               </a:ext>
             </a:extLst>
           </p:cNvPr>
@@ -7150,7 +7150,7 @@
           <p:cNvPr id="5" name="Rectangle 4">
             <a:extLst xmlns:a="http://schemas.openxmlformats.org/drawingml/2006/main">
               <a:ext uri="{FF2B5EF4-FFF2-40B4-BE49-F238E27FC236}">
-                <a16:creationId xmlns:a16="http://schemas.microsoft.com/office/drawing/2014/main" id="{3561842C-EF48-421E-8A16-6444AA48ED4B}"/>
+                <a16:creationId xmlns:a16="http://schemas.microsoft.com/office/drawing/2014/main" id="{D02A1CE3-AD8B-48B4-8B62-C1F476F95F1B}"/>
               </a:ext>
             </a:extLst>
           </p:cNvPr>
@@ -7205,7 +7205,7 @@
           <p:cNvPr id="6" name="TextBox 5">
             <a:extLst xmlns:a="http://schemas.openxmlformats.org/drawingml/2006/main">
               <a:ext uri="{FF2B5EF4-FFF2-40B4-BE49-F238E27FC236}">
-                <a16:creationId xmlns:a16="http://schemas.microsoft.com/office/drawing/2014/main" id="{6E43324F-F1A7-4E9D-825C-ABC36416E388}"/>
+                <a16:creationId xmlns:a16="http://schemas.microsoft.com/office/drawing/2014/main" id="{719E54BA-7BF1-45F6-97A6-C82BEDD0EDB2}"/>
               </a:ext>
             </a:extLst>
           </p:cNvPr>
@@ -7242,7 +7242,7 @@
                 <a:ea typeface="Aptos"/>
                 <a:cs typeface="Aptos"/>
               </a:rPr>
-              <a:t>Julkinen riippumaton evidenssikooste · 2026.07.31-37 · 2026-07-31 · Lähteet: EPO Register; EP3032975B2; 8 Ni 18/24 (EP); 7 O 3341/24</a:t>
+              <a:t>Julkinen riippumaton evidenssikooste · 2026.08.02-41 · 2026-08-02 · Lähteet: EPO Register; EP3032975B2; 8 Ni 18/24 (EP); 7 O 3341/24</a:t>
             </a:r>
           </a:p>
         </p:txBody>
@@ -7252,7 +7252,7 @@
           <p:cNvPr id="7" name="TextBox 6">
             <a:extLst xmlns:a="http://schemas.openxmlformats.org/drawingml/2006/main">
               <a:ext uri="{FF2B5EF4-FFF2-40B4-BE49-F238E27FC236}">
-                <a16:creationId xmlns:a16="http://schemas.microsoft.com/office/drawing/2014/main" id="{832D62DB-4754-4DF8-AE0F-8E1F2441714B}"/>
+                <a16:creationId xmlns:a16="http://schemas.microsoft.com/office/drawing/2014/main" id="{CFAA54FB-0B01-4CB6-B010-5F627197162B}"/>
               </a:ext>
             </a:extLst>
           </p:cNvPr>
@@ -7299,7 +7299,7 @@
           <p:cNvPr id="8" name="Rounded Rectangle 7">
             <a:extLst xmlns:a="http://schemas.openxmlformats.org/drawingml/2006/main">
               <a:ext uri="{FF2B5EF4-FFF2-40B4-BE49-F238E27FC236}">
-                <a16:creationId xmlns:a16="http://schemas.microsoft.com/office/drawing/2014/main" id="{3A79B7C4-EA89-4ABF-80B8-1A0DC9B96FD7}"/>
+                <a16:creationId xmlns:a16="http://schemas.microsoft.com/office/drawing/2014/main" id="{6D3E7A53-D0BD-4944-AAA1-5DCCF0B11101}"/>
               </a:ext>
             </a:extLst>
           </p:cNvPr>
@@ -7356,7 +7356,7 @@
           <p:cNvPr id="9" name="TextBox 8">
             <a:extLst xmlns:a="http://schemas.openxmlformats.org/drawingml/2006/main">
               <a:ext uri="{FF2B5EF4-FFF2-40B4-BE49-F238E27FC236}">
-                <a16:creationId xmlns:a16="http://schemas.microsoft.com/office/drawing/2014/main" id="{E4DC3174-0A99-429E-8848-031021139012}"/>
+                <a16:creationId xmlns:a16="http://schemas.microsoft.com/office/drawing/2014/main" id="{7E2AF28D-2A3E-49B6-B3C7-9B19E68A3409}"/>
               </a:ext>
             </a:extLst>
           </p:cNvPr>
@@ -7403,7 +7403,7 @@
           <p:cNvPr id="10" name="TextBox 9">
             <a:extLst xmlns:a="http://schemas.openxmlformats.org/drawingml/2006/main">
               <a:ext uri="{FF2B5EF4-FFF2-40B4-BE49-F238E27FC236}">
-                <a16:creationId xmlns:a16="http://schemas.microsoft.com/office/drawing/2014/main" id="{DABAE7C6-51D6-438B-8A68-E9B9B0AA381D}"/>
+                <a16:creationId xmlns:a16="http://schemas.microsoft.com/office/drawing/2014/main" id="{AE5A4ADA-F674-4E7B-BC37-2790703E7847}"/>
               </a:ext>
             </a:extLst>
           </p:cNvPr>
@@ -7450,7 +7450,7 @@
           <p:cNvPr id="11" name="Rounded Rectangle 10">
             <a:extLst xmlns:a="http://schemas.openxmlformats.org/drawingml/2006/main">
               <a:ext uri="{FF2B5EF4-FFF2-40B4-BE49-F238E27FC236}">
-                <a16:creationId xmlns:a16="http://schemas.microsoft.com/office/drawing/2014/main" id="{62A978B9-45FF-4706-B037-4C947B2092C2}"/>
+                <a16:creationId xmlns:a16="http://schemas.microsoft.com/office/drawing/2014/main" id="{87C2F364-1B86-451C-BB01-A39C0A8BBD58}"/>
               </a:ext>
             </a:extLst>
           </p:cNvPr>
@@ -7507,7 +7507,7 @@
           <p:cNvPr id="12" name="TextBox 11">
             <a:extLst xmlns:a="http://schemas.openxmlformats.org/drawingml/2006/main">
               <a:ext uri="{FF2B5EF4-FFF2-40B4-BE49-F238E27FC236}">
-                <a16:creationId xmlns:a16="http://schemas.microsoft.com/office/drawing/2014/main" id="{42CB83F4-3629-461D-A793-350E1CAF6C62}"/>
+                <a16:creationId xmlns:a16="http://schemas.microsoft.com/office/drawing/2014/main" id="{6D17457A-2045-4CC4-A44A-60B8BDB03793}"/>
               </a:ext>
             </a:extLst>
           </p:cNvPr>
@@ -7554,7 +7554,7 @@
           <p:cNvPr id="13" name="TextBox 12">
             <a:extLst xmlns:a="http://schemas.openxmlformats.org/drawingml/2006/main">
               <a:ext uri="{FF2B5EF4-FFF2-40B4-BE49-F238E27FC236}">
-                <a16:creationId xmlns:a16="http://schemas.microsoft.com/office/drawing/2014/main" id="{CF237709-AF97-44B0-9FA4-F5E7CD9E06DC}"/>
+                <a16:creationId xmlns:a16="http://schemas.microsoft.com/office/drawing/2014/main" id="{CFB63D24-025E-4891-A1D4-32E9D04414F0}"/>
               </a:ext>
             </a:extLst>
           </p:cNvPr>
@@ -7601,7 +7601,7 @@
           <p:cNvPr id="14" name="Rounded Rectangle 13">
             <a:extLst xmlns:a="http://schemas.openxmlformats.org/drawingml/2006/main">
               <a:ext uri="{FF2B5EF4-FFF2-40B4-BE49-F238E27FC236}">
-                <a16:creationId xmlns:a16="http://schemas.microsoft.com/office/drawing/2014/main" id="{4D4AE0B7-81AA-474B-807D-DA929C7A05F4}"/>
+                <a16:creationId xmlns:a16="http://schemas.microsoft.com/office/drawing/2014/main" id="{8DD1C002-B0B1-4180-B3DE-6C05F03BA62A}"/>
               </a:ext>
             </a:extLst>
           </p:cNvPr>
@@ -7658,7 +7658,7 @@
           <p:cNvPr id="15" name="TextBox 14">
             <a:extLst xmlns:a="http://schemas.openxmlformats.org/drawingml/2006/main">
               <a:ext uri="{FF2B5EF4-FFF2-40B4-BE49-F238E27FC236}">
-                <a16:creationId xmlns:a16="http://schemas.microsoft.com/office/drawing/2014/main" id="{56A8CDFF-7331-4B1A-ADE4-A8102FD70722}"/>
+                <a16:creationId xmlns:a16="http://schemas.microsoft.com/office/drawing/2014/main" id="{C5698D63-A675-406F-9F16-2E28095B8897}"/>
               </a:ext>
             </a:extLst>
           </p:cNvPr>
@@ -7705,7 +7705,7 @@
           <p:cNvPr id="16" name="TextBox 15">
             <a:extLst xmlns:a="http://schemas.openxmlformats.org/drawingml/2006/main">
               <a:ext uri="{FF2B5EF4-FFF2-40B4-BE49-F238E27FC236}">
-                <a16:creationId xmlns:a16="http://schemas.microsoft.com/office/drawing/2014/main" id="{2EEC253E-989B-4F9E-AC20-EC566091681C}"/>
+                <a16:creationId xmlns:a16="http://schemas.microsoft.com/office/drawing/2014/main" id="{FDE4467A-D7CE-4797-AA79-E66292443FE5}"/>
               </a:ext>
             </a:extLst>
           </p:cNvPr>
@@ -7752,7 +7752,7 @@
           <p:cNvPr id="17" name="TextBox 16">
             <a:extLst xmlns:a="http://schemas.openxmlformats.org/drawingml/2006/main">
               <a:ext uri="{FF2B5EF4-FFF2-40B4-BE49-F238E27FC236}">
-                <a16:creationId xmlns:a16="http://schemas.microsoft.com/office/drawing/2014/main" id="{6A911A7A-D159-487D-AB9A-B7255501B7FA}"/>
+                <a16:creationId xmlns:a16="http://schemas.microsoft.com/office/drawing/2014/main" id="{08C05A75-F3DF-4BC0-A565-4FC6B4C05AD2}"/>
               </a:ext>
             </a:extLst>
           </p:cNvPr>
@@ -7799,7 +7799,7 @@
           <p:cNvPr id="18" name="Rounded Rectangle 17">
             <a:extLst xmlns:a="http://schemas.openxmlformats.org/drawingml/2006/main">
               <a:ext uri="{FF2B5EF4-FFF2-40B4-BE49-F238E27FC236}">
-                <a16:creationId xmlns:a16="http://schemas.microsoft.com/office/drawing/2014/main" id="{D95D7754-CFAF-48F1-8E83-469CF4905CD4}"/>
+                <a16:creationId xmlns:a16="http://schemas.microsoft.com/office/drawing/2014/main" id="{95B07C92-0093-4316-8180-A83E01BBCB97}"/>
               </a:ext>
             </a:extLst>
           </p:cNvPr>
@@ -7856,7 +7856,7 @@
           <p:cNvPr id="19" name="TextBox 18">
             <a:extLst xmlns:a="http://schemas.openxmlformats.org/drawingml/2006/main">
               <a:ext uri="{FF2B5EF4-FFF2-40B4-BE49-F238E27FC236}">
-                <a16:creationId xmlns:a16="http://schemas.microsoft.com/office/drawing/2014/main" id="{B3BFE5E9-3E89-4EFC-B537-2E249E20F6B0}"/>
+                <a16:creationId xmlns:a16="http://schemas.microsoft.com/office/drawing/2014/main" id="{9411A644-F459-4F71-837D-5FFFA46F292C}"/>
               </a:ext>
             </a:extLst>
           </p:cNvPr>
@@ -7903,7 +7903,7 @@
           <p:cNvPr id="20" name="TextBox 19">
             <a:extLst xmlns:a="http://schemas.openxmlformats.org/drawingml/2006/main">
               <a:ext uri="{FF2B5EF4-FFF2-40B4-BE49-F238E27FC236}">
-                <a16:creationId xmlns:a16="http://schemas.microsoft.com/office/drawing/2014/main" id="{1FF386D5-FF48-41B5-AAD5-3D96A62010BD}"/>
+                <a16:creationId xmlns:a16="http://schemas.microsoft.com/office/drawing/2014/main" id="{BDDB44DA-F571-4C9C-90E5-12F5F8B2026E}"/>
               </a:ext>
             </a:extLst>
           </p:cNvPr>
@@ -7948,7 +7948,7 @@
     </p:spTree>
     <p:extLst>
       <p:ext uri="{BB962C8B-B14F-4D97-AF65-F5344CB8AC3E}">
-        <p14:creationId xmlns:p14="http://schemas.microsoft.com/office/powerpoint/2010/main" val="97556020"/>
+        <p14:creationId xmlns:p14="http://schemas.microsoft.com/office/powerpoint/2010/main" val="972812776"/>
       </p:ext>
     </p:extLst>
   </p:cSld>
@@ -7972,7 +7972,7 @@
           <p:cNvPr id="2" name="TextBox 1">
             <a:extLst xmlns:a="http://schemas.openxmlformats.org/drawingml/2006/main">
               <a:ext uri="{FF2B5EF4-FFF2-40B4-BE49-F238E27FC236}">
-                <a16:creationId xmlns:a16="http://schemas.microsoft.com/office/drawing/2014/main" id="{D04D04A2-13AB-4F51-952E-2F564CBA63E6}"/>
+                <a16:creationId xmlns:a16="http://schemas.microsoft.com/office/drawing/2014/main" id="{D5C0F7AA-E3ED-473E-92A8-8229DD046AEE}"/>
               </a:ext>
             </a:extLst>
           </p:cNvPr>
@@ -8019,7 +8019,7 @@
           <p:cNvPr id="3" name="TextBox 2">
             <a:extLst xmlns:a="http://schemas.openxmlformats.org/drawingml/2006/main">
               <a:ext uri="{FF2B5EF4-FFF2-40B4-BE49-F238E27FC236}">
-                <a16:creationId xmlns:a16="http://schemas.microsoft.com/office/drawing/2014/main" id="{AC6EBFF0-171F-4ED0-9C2E-FBF43651C0F1}"/>
+                <a16:creationId xmlns:a16="http://schemas.microsoft.com/office/drawing/2014/main" id="{C7CA2990-E741-44EF-9E64-FB8E067DAF80}"/>
               </a:ext>
             </a:extLst>
           </p:cNvPr>
@@ -8066,7 +8066,7 @@
           <p:cNvPr id="4" name="Rectangle 3">
             <a:extLst xmlns:a="http://schemas.openxmlformats.org/drawingml/2006/main">
               <a:ext uri="{FF2B5EF4-FFF2-40B4-BE49-F238E27FC236}">
-                <a16:creationId xmlns:a16="http://schemas.microsoft.com/office/drawing/2014/main" id="{31C32E16-518D-48C5-AB1A-1B9B830E36C1}"/>
+                <a16:creationId xmlns:a16="http://schemas.microsoft.com/office/drawing/2014/main" id="{5BA29B41-D262-4D6F-BF05-995B09C4FC3F}"/>
               </a:ext>
             </a:extLst>
           </p:cNvPr>
@@ -8121,7 +8121,7 @@
           <p:cNvPr id="5" name="Rectangle 4">
             <a:extLst xmlns:a="http://schemas.openxmlformats.org/drawingml/2006/main">
               <a:ext uri="{FF2B5EF4-FFF2-40B4-BE49-F238E27FC236}">
-                <a16:creationId xmlns:a16="http://schemas.microsoft.com/office/drawing/2014/main" id="{8280B1C9-5F99-4D27-A413-58BAD89D7470}"/>
+                <a16:creationId xmlns:a16="http://schemas.microsoft.com/office/drawing/2014/main" id="{7BFCB130-8E7B-432D-9BB5-64CDC99AD79E}"/>
               </a:ext>
             </a:extLst>
           </p:cNvPr>
@@ -8176,7 +8176,7 @@
           <p:cNvPr id="6" name="TextBox 5">
             <a:extLst xmlns:a="http://schemas.openxmlformats.org/drawingml/2006/main">
               <a:ext uri="{FF2B5EF4-FFF2-40B4-BE49-F238E27FC236}">
-                <a16:creationId xmlns:a16="http://schemas.microsoft.com/office/drawing/2014/main" id="{F2F63187-1877-4CD1-932E-4D2BFD708203}"/>
+                <a16:creationId xmlns:a16="http://schemas.microsoft.com/office/drawing/2014/main" id="{216ED3E8-E642-415A-A3B6-81597EBE78FA}"/>
               </a:ext>
             </a:extLst>
           </p:cNvPr>
@@ -8213,7 +8213,7 @@
                 <a:ea typeface="Aptos"/>
                 <a:cs typeface="Aptos"/>
               </a:rPr>
-              <a:t>Julkinen riippumaton evidenssikooste · 2026.07.31-37 · 2026-07-31 · Lähteet: World Bank; Statistics Canada; Health Canada; NZ Ministry of Health; Sejm; FHM; FTC; ADM</a:t>
+              <a:t>Julkinen riippumaton evidenssikooste · 2026.08.02-41 · 2026-08-02 · Lähteet: World Bank; Statistics Canada; Health Canada; NZ Ministry of Health; Sejm; FHM; FTC; ADM</a:t>
             </a:r>
           </a:p>
         </p:txBody>
@@ -8223,7 +8223,7 @@
           <p:cNvPr id="7" name="TextBox 6">
             <a:extLst xmlns:a="http://schemas.openxmlformats.org/drawingml/2006/main">
               <a:ext uri="{FF2B5EF4-FFF2-40B4-BE49-F238E27FC236}">
-                <a16:creationId xmlns:a16="http://schemas.microsoft.com/office/drawing/2014/main" id="{D12244A1-FC23-4C88-A9D4-2FA4C4CFAAB5}"/>
+                <a16:creationId xmlns:a16="http://schemas.microsoft.com/office/drawing/2014/main" id="{0B9F98DB-37E9-43D1-B9AB-B75ACC4F0A86}"/>
               </a:ext>
             </a:extLst>
           </p:cNvPr>
@@ -8270,7 +8270,7 @@
           <p:cNvPr id="8" name="Rounded Rectangle 7">
             <a:extLst xmlns:a="http://schemas.openxmlformats.org/drawingml/2006/main">
               <a:ext uri="{FF2B5EF4-FFF2-40B4-BE49-F238E27FC236}">
-                <a16:creationId xmlns:a16="http://schemas.microsoft.com/office/drawing/2014/main" id="{9E9B50A5-B8F8-467A-B065-F5EE64D454BE}"/>
+                <a16:creationId xmlns:a16="http://schemas.microsoft.com/office/drawing/2014/main" id="{396A33F8-7713-4054-95E4-AF2081B52702}"/>
               </a:ext>
             </a:extLst>
           </p:cNvPr>
@@ -8327,7 +8327,7 @@
           <p:cNvPr id="9" name="TextBox 8">
             <a:extLst xmlns:a="http://schemas.openxmlformats.org/drawingml/2006/main">
               <a:ext uri="{FF2B5EF4-FFF2-40B4-BE49-F238E27FC236}">
-                <a16:creationId xmlns:a16="http://schemas.microsoft.com/office/drawing/2014/main" id="{611D1467-8202-4A98-B32E-D01DA23F6649}"/>
+                <a16:creationId xmlns:a16="http://schemas.microsoft.com/office/drawing/2014/main" id="{BEE3C1AF-59DA-4114-AEF7-7C09D30380AB}"/>
               </a:ext>
             </a:extLst>
           </p:cNvPr>
@@ -8374,7 +8374,7 @@
           <p:cNvPr id="10" name="TextBox 9">
             <a:extLst xmlns:a="http://schemas.openxmlformats.org/drawingml/2006/main">
               <a:ext uri="{FF2B5EF4-FFF2-40B4-BE49-F238E27FC236}">
-                <a16:creationId xmlns:a16="http://schemas.microsoft.com/office/drawing/2014/main" id="{C4EE95BB-C03C-4106-B7C8-68036AD3D35D}"/>
+                <a16:creationId xmlns:a16="http://schemas.microsoft.com/office/drawing/2014/main" id="{A3E14104-78B6-4EA4-98B4-C56DFC5B4057}"/>
               </a:ext>
             </a:extLst>
           </p:cNvPr>
@@ -8411,7 +8411,7 @@
                 <a:ea typeface="Aptos"/>
                 <a:cs typeface="Aptos"/>
               </a:rPr>
-              <a:t>578 WB-havaintoa · 39 markkinamittaria + 36 Ruotsin FHM-lukua</a:t>
+              <a:t>578 WB-havaintoa · 98 markkinamittaria + 36 Ruotsin FHM-lukua</a:t>
             </a:r>
           </a:p>
         </p:txBody>
@@ -8421,7 +8421,7 @@
           <p:cNvPr id="11" name="Rounded Rectangle 10">
             <a:extLst xmlns:a="http://schemas.openxmlformats.org/drawingml/2006/main">
               <a:ext uri="{FF2B5EF4-FFF2-40B4-BE49-F238E27FC236}">
-                <a16:creationId xmlns:a16="http://schemas.microsoft.com/office/drawing/2014/main" id="{03B6F6E6-EC5E-4145-86FC-CBCA3C087C51}"/>
+                <a16:creationId xmlns:a16="http://schemas.microsoft.com/office/drawing/2014/main" id="{2E0ACD05-BB6F-4FE9-B0D4-7BCC27D27DB7}"/>
               </a:ext>
             </a:extLst>
           </p:cNvPr>
@@ -8478,7 +8478,7 @@
           <p:cNvPr id="12" name="TextBox 11">
             <a:extLst xmlns:a="http://schemas.openxmlformats.org/drawingml/2006/main">
               <a:ext uri="{FF2B5EF4-FFF2-40B4-BE49-F238E27FC236}">
-                <a16:creationId xmlns:a16="http://schemas.microsoft.com/office/drawing/2014/main" id="{BE0C063F-625A-4430-A455-8C1CE9E4FC5B}"/>
+                <a16:creationId xmlns:a16="http://schemas.microsoft.com/office/drawing/2014/main" id="{C064C54B-D3CF-4D7E-A157-2FD6807A8ED7}"/>
               </a:ext>
             </a:extLst>
           </p:cNvPr>
@@ -8525,7 +8525,7 @@
           <p:cNvPr id="13" name="TextBox 12">
             <a:extLst xmlns:a="http://schemas.openxmlformats.org/drawingml/2006/main">
               <a:ext uri="{FF2B5EF4-FFF2-40B4-BE49-F238E27FC236}">
-                <a16:creationId xmlns:a16="http://schemas.microsoft.com/office/drawing/2014/main" id="{E9B9D966-6FBA-46D4-A7AD-CAA64A3C4A38}"/>
+                <a16:creationId xmlns:a16="http://schemas.microsoft.com/office/drawing/2014/main" id="{986EEBD3-1C82-445E-937B-AEF2D76E6D6B}"/>
               </a:ext>
             </a:extLst>
           </p:cNvPr>
@@ -8572,7 +8572,7 @@
           <p:cNvPr id="14" name="Rounded Rectangle 13">
             <a:extLst xmlns:a="http://schemas.openxmlformats.org/drawingml/2006/main">
               <a:ext uri="{FF2B5EF4-FFF2-40B4-BE49-F238E27FC236}">
-                <a16:creationId xmlns:a16="http://schemas.microsoft.com/office/drawing/2014/main" id="{1F4EF6DB-7268-49E1-B1AD-6B5EEB962F08}"/>
+                <a16:creationId xmlns:a16="http://schemas.microsoft.com/office/drawing/2014/main" id="{60BD2442-32B2-4483-924A-DCDB64FF7399}"/>
               </a:ext>
             </a:extLst>
           </p:cNvPr>
@@ -8629,7 +8629,7 @@
           <p:cNvPr id="15" name="TextBox 14">
             <a:extLst xmlns:a="http://schemas.openxmlformats.org/drawingml/2006/main">
               <a:ext uri="{FF2B5EF4-FFF2-40B4-BE49-F238E27FC236}">
-                <a16:creationId xmlns:a16="http://schemas.microsoft.com/office/drawing/2014/main" id="{05B15A57-A4FC-4B29-858E-2F110694B3B2}"/>
+                <a16:creationId xmlns:a16="http://schemas.microsoft.com/office/drawing/2014/main" id="{3A8F51CF-5855-4782-B861-909EE78189DE}"/>
               </a:ext>
             </a:extLst>
           </p:cNvPr>
@@ -8676,7 +8676,7 @@
           <p:cNvPr id="16" name="TextBox 15">
             <a:extLst xmlns:a="http://schemas.openxmlformats.org/drawingml/2006/main">
               <a:ext uri="{FF2B5EF4-FFF2-40B4-BE49-F238E27FC236}">
-                <a16:creationId xmlns:a16="http://schemas.microsoft.com/office/drawing/2014/main" id="{76CD8E1C-0CDB-4596-AF05-763F3633C813}"/>
+                <a16:creationId xmlns:a16="http://schemas.microsoft.com/office/drawing/2014/main" id="{367B9DDC-D86A-47A6-808A-C6520ACEBEAE}"/>
               </a:ext>
             </a:extLst>
           </p:cNvPr>
@@ -8723,7 +8723,7 @@
           <p:cNvPr id="17" name="TextBox 16">
             <a:extLst xmlns:a="http://schemas.openxmlformats.org/drawingml/2006/main">
               <a:ext uri="{FF2B5EF4-FFF2-40B4-BE49-F238E27FC236}">
-                <a16:creationId xmlns:a16="http://schemas.microsoft.com/office/drawing/2014/main" id="{716E8EF2-1E32-4C76-A251-7AF74E720AB6}"/>
+                <a16:creationId xmlns:a16="http://schemas.microsoft.com/office/drawing/2014/main" id="{EA83DF4A-4E12-49FA-BFA9-C81AE7DF6971}"/>
               </a:ext>
             </a:extLst>
           </p:cNvPr>
@@ -8760,7 +8760,7 @@
                 <a:ea typeface="Aptos"/>
                 <a:cs typeface="Aptos"/>
               </a:rPr>
-              <a:t>Kanada 7/10: D5/D7 hylätty, D8 läpäisty (GST/HST/PST/QST pois; lisäverot mukana), D10 avoin. Uuden-Seelannin 7.8. seuranta valmisteltu, ei lähetetty. Puolan verosilta koskee laajaa ryhmää. Euromonitor pausella 0/6, EI PISTEYTETTY; ei ostoa tai maksua.</a:t>
+              <a:t>Kanada 7/10: D5/D7 hylätty ja D10 avoin. NZ:n 183,371/197,070 milj. NZD nettorajaproxyt eivät ole retail-arvoja. Saksa DE-BLIND-1.0.0: EI PISTEYTETTY. Euromonitor pausella; ei ostoa tai maksua.</a:t>
             </a:r>
           </a:p>
         </p:txBody>
@@ -8770,7 +8770,7 @@
           <p:cNvPr id="18" name="Rounded Rectangle 17">
             <a:extLst xmlns:a="http://schemas.openxmlformats.org/drawingml/2006/main">
               <a:ext uri="{FF2B5EF4-FFF2-40B4-BE49-F238E27FC236}">
-                <a16:creationId xmlns:a16="http://schemas.microsoft.com/office/drawing/2014/main" id="{F3F39AC5-AD2D-46B9-AA19-3016589FCCEB}"/>
+                <a16:creationId xmlns:a16="http://schemas.microsoft.com/office/drawing/2014/main" id="{B6AF74D2-8CFF-4EAE-B986-5BDE5049A926}"/>
               </a:ext>
             </a:extLst>
           </p:cNvPr>
@@ -8827,7 +8827,7 @@
           <p:cNvPr id="19" name="TextBox 18">
             <a:extLst xmlns:a="http://schemas.openxmlformats.org/drawingml/2006/main">
               <a:ext uri="{FF2B5EF4-FFF2-40B4-BE49-F238E27FC236}">
-                <a16:creationId xmlns:a16="http://schemas.microsoft.com/office/drawing/2014/main" id="{B489DD3B-3EBD-4535-80AF-B79CC9D8B7E9}"/>
+                <a16:creationId xmlns:a16="http://schemas.microsoft.com/office/drawing/2014/main" id="{181DF1AF-72D5-42CA-951C-AAC3E91633F9}"/>
               </a:ext>
             </a:extLst>
           </p:cNvPr>
@@ -8874,7 +8874,7 @@
           <p:cNvPr id="20" name="TextBox 19">
             <a:extLst xmlns:a="http://schemas.openxmlformats.org/drawingml/2006/main">
               <a:ext uri="{FF2B5EF4-FFF2-40B4-BE49-F238E27FC236}">
-                <a16:creationId xmlns:a16="http://schemas.microsoft.com/office/drawing/2014/main" id="{4A5ECC52-AC06-4753-A81C-2D265B54028D}"/>
+                <a16:creationId xmlns:a16="http://schemas.microsoft.com/office/drawing/2014/main" id="{C29BF723-CEBE-498F-A00D-8AB988E45BE5}"/>
               </a:ext>
             </a:extLst>
           </p:cNvPr>
@@ -8911,7 +8911,7 @@
                 <a:ea typeface="Aptos"/>
                 <a:cs typeface="Aptos"/>
               </a:rPr>
-              <a:t>Menetelmäkontrolli 28 / 0 / 15 / 152. Kanada retail 1,219160 mrd CAD (≈822,6 milj. EUR; ECB 2024) ja toimitukset 1,160754 mrd CAD (≈783,2 milj. EUR; ECB 2024). Uusi-Seelanti 274,180 milj. NZD (≈153,3 milj. EUR; ECB 2024), 7/10. Puolan esiarviolla ei ole donor-pistemäärää: retail-arvo puuttuu. Donor 0/3.</a:t>
+              <a:t>Menetelmäkontrolli 28 / 0 / 15 / 152. Kanada retail 1,219160 mrd CAD (≈822,6 milj. EUR; ECB 2024) ja toimitukset 1,160754 mrd CAD (≈783,2 milj. EUR; ECB 2024). Uusi-Seelanti 274,180 milj. NZD (≈153,3 milj. EUR; ECB 2024), 7/10; tullisuhteet eivät ole katteita. Donor 0/3.</a:t>
             </a:r>
           </a:p>
         </p:txBody>
@@ -8919,7 +8919,7 @@
     </p:spTree>
     <p:extLst>
       <p:ext uri="{BB962C8B-B14F-4D97-AF65-F5344CB8AC3E}">
-        <p14:creationId xmlns:p14="http://schemas.microsoft.com/office/powerpoint/2010/main" val="736968164"/>
+        <p14:creationId xmlns:p14="http://schemas.microsoft.com/office/powerpoint/2010/main" val="89231990"/>
       </p:ext>
     </p:extLst>
   </p:cSld>
@@ -8943,7 +8943,7 @@
           <p:cNvPr id="2" name="TextBox 1">
             <a:extLst xmlns:a="http://schemas.openxmlformats.org/drawingml/2006/main">
               <a:ext uri="{FF2B5EF4-FFF2-40B4-BE49-F238E27FC236}">
-                <a16:creationId xmlns:a16="http://schemas.microsoft.com/office/drawing/2014/main" id="{D5EB9869-BDB3-42F9-8733-FECA3FC029B4}"/>
+                <a16:creationId xmlns:a16="http://schemas.microsoft.com/office/drawing/2014/main" id="{BAB2617C-1D89-4450-BF61-5F9A05260778}"/>
               </a:ext>
             </a:extLst>
           </p:cNvPr>
@@ -8990,7 +8990,7 @@
           <p:cNvPr id="3" name="TextBox 2">
             <a:extLst xmlns:a="http://schemas.openxmlformats.org/drawingml/2006/main">
               <a:ext uri="{FF2B5EF4-FFF2-40B4-BE49-F238E27FC236}">
-                <a16:creationId xmlns:a16="http://schemas.microsoft.com/office/drawing/2014/main" id="{57C31F02-996F-4B49-9B4A-0A62381588B4}"/>
+                <a16:creationId xmlns:a16="http://schemas.microsoft.com/office/drawing/2014/main" id="{A474096C-23F5-4FC0-ADEB-DFB7C7EBB2EA}"/>
               </a:ext>
             </a:extLst>
           </p:cNvPr>
@@ -9037,7 +9037,7 @@
           <p:cNvPr id="4" name="Rectangle 3">
             <a:extLst xmlns:a="http://schemas.openxmlformats.org/drawingml/2006/main">
               <a:ext uri="{FF2B5EF4-FFF2-40B4-BE49-F238E27FC236}">
-                <a16:creationId xmlns:a16="http://schemas.microsoft.com/office/drawing/2014/main" id="{45E15D12-E42A-4675-9494-49A70E81E08A}"/>
+                <a16:creationId xmlns:a16="http://schemas.microsoft.com/office/drawing/2014/main" id="{EA627E7E-1581-4B4E-9E48-D25ABED86C6E}"/>
               </a:ext>
             </a:extLst>
           </p:cNvPr>
@@ -9092,7 +9092,7 @@
           <p:cNvPr id="5" name="Rectangle 4">
             <a:extLst xmlns:a="http://schemas.openxmlformats.org/drawingml/2006/main">
               <a:ext uri="{FF2B5EF4-FFF2-40B4-BE49-F238E27FC236}">
-                <a16:creationId xmlns:a16="http://schemas.microsoft.com/office/drawing/2014/main" id="{1A3F71AF-8BDE-4021-9DB8-64BECB1BC2F8}"/>
+                <a16:creationId xmlns:a16="http://schemas.microsoft.com/office/drawing/2014/main" id="{90F1F761-353D-4D1C-8A56-3F6D46AE89BF}"/>
               </a:ext>
             </a:extLst>
           </p:cNvPr>
@@ -9147,7 +9147,7 @@
           <p:cNvPr id="6" name="TextBox 5">
             <a:extLst xmlns:a="http://schemas.openxmlformats.org/drawingml/2006/main">
               <a:ext uri="{FF2B5EF4-FFF2-40B4-BE49-F238E27FC236}">
-                <a16:creationId xmlns:a16="http://schemas.microsoft.com/office/drawing/2014/main" id="{14F65C4D-68FB-48E6-BCC6-B9061D66DBE3}"/>
+                <a16:creationId xmlns:a16="http://schemas.microsoft.com/office/drawing/2014/main" id="{95F2F50B-9B19-4996-B098-29DE3D709AB1}"/>
               </a:ext>
             </a:extLst>
           </p:cNvPr>
@@ -9184,7 +9184,7 @@
                 <a:ea typeface="Aptos"/>
                 <a:cs typeface="Aptos"/>
               </a:rPr>
-              <a:t>Julkinen riippumaton evidenssikooste · 2026.07.31-37 · 2026-07-31 · Lähteet: Evidence Register; WIPO IP valuation</a:t>
+              <a:t>Julkinen riippumaton evidenssikooste · 2026.08.02-41 · 2026-08-02 · Lähteet: Evidence Register; WIPO IP valuation</a:t>
             </a:r>
           </a:p>
         </p:txBody>
@@ -9194,7 +9194,7 @@
           <p:cNvPr id="7" name="TextBox 6">
             <a:extLst xmlns:a="http://schemas.openxmlformats.org/drawingml/2006/main">
               <a:ext uri="{FF2B5EF4-FFF2-40B4-BE49-F238E27FC236}">
-                <a16:creationId xmlns:a16="http://schemas.microsoft.com/office/drawing/2014/main" id="{4D18B9BD-B00E-44F6-B988-B8B6E9EBFB86}"/>
+                <a16:creationId xmlns:a16="http://schemas.microsoft.com/office/drawing/2014/main" id="{E08D3824-7C63-4E02-8192-367F09177DBC}"/>
               </a:ext>
             </a:extLst>
           </p:cNvPr>
@@ -9681,7 +9681,7 @@
           <p:cNvPr id="9" name="TextBox 8">
             <a:extLst xmlns:a="http://schemas.openxmlformats.org/drawingml/2006/main">
               <a:ext uri="{FF2B5EF4-FFF2-40B4-BE49-F238E27FC236}">
-                <a16:creationId xmlns:a16="http://schemas.microsoft.com/office/drawing/2014/main" id="{312327BA-F6F0-41F2-9A1E-0152EA43694D}"/>
+                <a16:creationId xmlns:a16="http://schemas.microsoft.com/office/drawing/2014/main" id="{A6F909F6-A167-4622-BC37-1106A5CCFA9A}"/>
               </a:ext>
             </a:extLst>
           </p:cNvPr>
@@ -9726,7 +9726,7 @@
     </p:spTree>
     <p:extLst>
       <p:ext uri="{BB962C8B-B14F-4D97-AF65-F5344CB8AC3E}">
-        <p14:creationId xmlns:p14="http://schemas.microsoft.com/office/powerpoint/2010/main" val="1312546239"/>
+        <p14:creationId xmlns:p14="http://schemas.microsoft.com/office/powerpoint/2010/main" val="1956251279"/>
       </p:ext>
     </p:extLst>
   </p:cSld>
@@ -9757,7 +9757,7 @@
           <p:cNvPr id="2" name="TextBox 1">
             <a:extLst xmlns:a="http://schemas.openxmlformats.org/drawingml/2006/main">
               <a:ext uri="{FF2B5EF4-FFF2-40B4-BE49-F238E27FC236}">
-                <a16:creationId xmlns:a16="http://schemas.microsoft.com/office/drawing/2014/main" id="{3B63AE4E-9F56-4DF4-9DC4-2E2F26C53AD1}"/>
+                <a16:creationId xmlns:a16="http://schemas.microsoft.com/office/drawing/2014/main" id="{C2B2DBC6-B503-47FD-B1F2-AB460A866250}"/>
               </a:ext>
             </a:extLst>
           </p:cNvPr>
@@ -9804,7 +9804,7 @@
           <p:cNvPr id="3" name="TextBox 2">
             <a:extLst xmlns:a="http://schemas.openxmlformats.org/drawingml/2006/main">
               <a:ext uri="{FF2B5EF4-FFF2-40B4-BE49-F238E27FC236}">
-                <a16:creationId xmlns:a16="http://schemas.microsoft.com/office/drawing/2014/main" id="{1E5A84DD-8DE2-4539-B90C-F25411B66A2A}"/>
+                <a16:creationId xmlns:a16="http://schemas.microsoft.com/office/drawing/2014/main" id="{E84CCEFD-BC9D-4BCB-B438-66FB2D7B24F3}"/>
               </a:ext>
             </a:extLst>
           </p:cNvPr>
@@ -9851,7 +9851,7 @@
           <p:cNvPr id="4" name="TextBox 3">
             <a:extLst xmlns:a="http://schemas.openxmlformats.org/drawingml/2006/main">
               <a:ext uri="{FF2B5EF4-FFF2-40B4-BE49-F238E27FC236}">
-                <a16:creationId xmlns:a16="http://schemas.microsoft.com/office/drawing/2014/main" id="{44D568A3-8BA0-454D-9375-94DCDCFB5AA2}"/>
+                <a16:creationId xmlns:a16="http://schemas.microsoft.com/office/drawing/2014/main" id="{01C1146B-4DCD-45B4-A5F0-E643A839761D}"/>
               </a:ext>
             </a:extLst>
           </p:cNvPr>
@@ -9970,7 +9970,7 @@
           <p:cNvPr id="5" name="TextBox 4">
             <a:extLst xmlns:a="http://schemas.openxmlformats.org/drawingml/2006/main">
               <a:ext uri="{FF2B5EF4-FFF2-40B4-BE49-F238E27FC236}">
-                <a16:creationId xmlns:a16="http://schemas.microsoft.com/office/drawing/2014/main" id="{6F4276FA-4F05-4597-BB10-3BB38BAEC495}"/>
+                <a16:creationId xmlns:a16="http://schemas.microsoft.com/office/drawing/2014/main" id="{836EC9E9-FC06-447B-9BDF-89BECBCDEB77}"/>
               </a:ext>
             </a:extLst>
           </p:cNvPr>
@@ -10007,7 +10007,7 @@
                 <a:ea typeface="Aptos"/>
                 <a:cs typeface="Aptos"/>
               </a:rPr>
-              <a:t>Versio 2026.07.31-37 · 2026-07-31 · 6 / 6</a:t>
+              <a:t>Versio 2026.08.02-41 · 2026-08-02 · 6 / 6</a:t>
             </a:r>
           </a:p>
         </p:txBody>
@@ -10015,7 +10015,7 @@
     </p:spTree>
     <p:extLst>
       <p:ext uri="{BB962C8B-B14F-4D97-AF65-F5344CB8AC3E}">
-        <p14:creationId xmlns:p14="http://schemas.microsoft.com/office/powerpoint/2010/main" val="681150618"/>
+        <p14:creationId xmlns:p14="http://schemas.microsoft.com/office/powerpoint/2010/main" val="1617594658"/>
       </p:ext>
     </p:extLst>
   </p:cSld>

--- a/site/downloads/pixan-bank-deck-short-fi.pptx
+++ b/site/downloads/pixan-bank-deck-short-fi.pptx
@@ -2,18 +2,18 @@
 <file path=ppt/presentation.xml><?xml version="1.0" encoding="utf-8"?>
 <p:presentation xmlns:p="http://schemas.openxmlformats.org/presentationml/2006/main">
   <p:sldMasterIdLst>
-    <p:sldMasterId xmlns:r="http://schemas.openxmlformats.org/officeDocument/2006/relationships" id="2147483648" r:id="R446c6ac3be0e47f8"/>
+    <p:sldMasterId xmlns:r="http://schemas.openxmlformats.org/officeDocument/2006/relationships" id="2147483648" r:id="R1d985b8016d14698"/>
   </p:sldMasterIdLst>
   <p:notesMasterIdLst>
-    <p:notesMasterId xmlns:r="http://schemas.openxmlformats.org/officeDocument/2006/relationships" r:id="R5df39f04eb084002"/>
+    <p:notesMasterId xmlns:r="http://schemas.openxmlformats.org/officeDocument/2006/relationships" r:id="Rd86ddc6546774a19"/>
   </p:notesMasterIdLst>
   <p:sldIdLst>
-    <p:sldId xmlns:r="http://schemas.openxmlformats.org/officeDocument/2006/relationships" id="256" r:id="R4352b92a48c34d69"/>
-    <p:sldId xmlns:r="http://schemas.openxmlformats.org/officeDocument/2006/relationships" id="257" r:id="R22222bbaf0b448df"/>
-    <p:sldId xmlns:r="http://schemas.openxmlformats.org/officeDocument/2006/relationships" id="258" r:id="Rf19f3a28bd2149e7"/>
-    <p:sldId xmlns:r="http://schemas.openxmlformats.org/officeDocument/2006/relationships" id="259" r:id="Ra8256451229d4555"/>
-    <p:sldId xmlns:r="http://schemas.openxmlformats.org/officeDocument/2006/relationships" id="260" r:id="R66d24c66683140fe"/>
-    <p:sldId xmlns:r="http://schemas.openxmlformats.org/officeDocument/2006/relationships" id="261" r:id="R9c63b0b438c14b85"/>
+    <p:sldId xmlns:r="http://schemas.openxmlformats.org/officeDocument/2006/relationships" id="256" r:id="R626bddc7f3c14c30"/>
+    <p:sldId xmlns:r="http://schemas.openxmlformats.org/officeDocument/2006/relationships" id="257" r:id="R776a086479b442eb"/>
+    <p:sldId xmlns:r="http://schemas.openxmlformats.org/officeDocument/2006/relationships" id="258" r:id="Raef92adc140a4847"/>
+    <p:sldId xmlns:r="http://schemas.openxmlformats.org/officeDocument/2006/relationships" id="259" r:id="R82b09a4efcf740d9"/>
+    <p:sldId xmlns:r="http://schemas.openxmlformats.org/officeDocument/2006/relationships" id="260" r:id="Rd718a3da1dad452f"/>
+    <p:sldId xmlns:r="http://schemas.openxmlformats.org/officeDocument/2006/relationships" id="261" r:id="Ra7e1cface16a4704"/>
   </p:sldIdLst>
   <p:sldSz cx="12191999" cy="6858000"/>
   <p:notesSz cx="6858000" cy="9144000"/>
@@ -2337,7 +2337,7 @@
           <p:cNvPr id="2" name="Title 1">
             <a:extLst xmlns:a="http://schemas.openxmlformats.org/drawingml/2006/main">
               <a:ext uri="{FF2B5EF4-FFF2-40B4-BE49-F238E27FC236}">
-                <a16:creationId xmlns:a16="http://schemas.microsoft.com/office/drawing/2014/main" id="{38097BCA-2F9D-4978-B2F9-1FB1E56CA81C}"/>
+                <a16:creationId xmlns:a16="http://schemas.microsoft.com/office/drawing/2014/main" id="{B39767D1-79CC-4BA4-896B-764799508B5B}"/>
               </a:ext>
             </a:extLst>
           </p:cNvPr>
@@ -2369,7 +2369,7 @@
           <p:cNvPr id="3" name="Subtitle 2">
             <a:extLst xmlns:a="http://schemas.openxmlformats.org/drawingml/2006/main">
               <a:ext uri="{FF2B5EF4-FFF2-40B4-BE49-F238E27FC236}">
-                <a16:creationId xmlns:a16="http://schemas.microsoft.com/office/drawing/2014/main" id="{8B72CD4F-EF8E-4339-8652-8942BEADF724}"/>
+                <a16:creationId xmlns:a16="http://schemas.microsoft.com/office/drawing/2014/main" id="{9F880659-5BD1-41B6-92EF-57CFB4352014}"/>
               </a:ext>
             </a:extLst>
           </p:cNvPr>
@@ -2492,7 +2492,7 @@
           <p:cNvPr id="4" name="Date Placeholder 3">
             <a:extLst xmlns:a="http://schemas.openxmlformats.org/drawingml/2006/main">
               <a:ext uri="{FF2B5EF4-FFF2-40B4-BE49-F238E27FC236}">
-                <a16:creationId xmlns:a16="http://schemas.microsoft.com/office/drawing/2014/main" id="{4F4CC2FB-E346-4D20-AE72-F078F5122CC1}"/>
+                <a16:creationId xmlns:a16="http://schemas.microsoft.com/office/drawing/2014/main" id="{9937753A-0DEF-4075-94DD-5B50EA3BA9F4}"/>
               </a:ext>
             </a:extLst>
           </p:cNvPr>
@@ -2519,7 +2519,7 @@
           <p:cNvPr id="5" name="Footer Placeholder 4">
             <a:extLst xmlns:a="http://schemas.openxmlformats.org/drawingml/2006/main">
               <a:ext uri="{FF2B5EF4-FFF2-40B4-BE49-F238E27FC236}">
-                <a16:creationId xmlns:a16="http://schemas.microsoft.com/office/drawing/2014/main" id="{CAE566A1-16A7-4AD6-9D57-F1C19E76F9FB}"/>
+                <a16:creationId xmlns:a16="http://schemas.microsoft.com/office/drawing/2014/main" id="{5996FC5A-FE7E-4E08-9ED0-4B489FA44815}"/>
               </a:ext>
             </a:extLst>
           </p:cNvPr>
@@ -2542,7 +2542,7 @@
           <p:cNvPr id="6" name="Slide Number Placeholder 5">
             <a:extLst xmlns:a="http://schemas.openxmlformats.org/drawingml/2006/main">
               <a:ext uri="{FF2B5EF4-FFF2-40B4-BE49-F238E27FC236}">
-                <a16:creationId xmlns:a16="http://schemas.microsoft.com/office/drawing/2014/main" id="{9AC3C5E2-9DE8-4451-BF26-3EA43EFFE7AA}"/>
+                <a16:creationId xmlns:a16="http://schemas.microsoft.com/office/drawing/2014/main" id="{CEB45428-F5CB-4F9F-8201-EDA4C2211B21}"/>
               </a:ext>
             </a:extLst>
           </p:cNvPr>
@@ -2586,7 +2586,7 @@
           <p:cNvPr id="2" name="Title 1">
             <a:extLst xmlns:a="http://schemas.openxmlformats.org/drawingml/2006/main">
               <a:ext uri="{FF2B5EF4-FFF2-40B4-BE49-F238E27FC236}">
-                <a16:creationId xmlns:a16="http://schemas.microsoft.com/office/drawing/2014/main" id="{FAE6E3F0-8DD4-43EA-9763-1D522F19ED10}"/>
+                <a16:creationId xmlns:a16="http://schemas.microsoft.com/office/drawing/2014/main" id="{B50684F3-1D57-4370-954D-F5A66BE108B1}"/>
               </a:ext>
             </a:extLst>
           </p:cNvPr>
@@ -2613,7 +2613,7 @@
           <p:cNvPr id="3" name="Vertical Text Placeholder 2">
             <a:extLst xmlns:a="http://schemas.openxmlformats.org/drawingml/2006/main">
               <a:ext uri="{FF2B5EF4-FFF2-40B4-BE49-F238E27FC236}">
-                <a16:creationId xmlns:a16="http://schemas.microsoft.com/office/drawing/2014/main" id="{2B0E24E2-332A-41AB-84E6-7B8492827BE3}"/>
+                <a16:creationId xmlns:a16="http://schemas.microsoft.com/office/drawing/2014/main" id="{A4823845-0CA4-4900-AB6C-8B5D97FC1BD2}"/>
               </a:ext>
             </a:extLst>
           </p:cNvPr>
@@ -2675,7 +2675,7 @@
           <p:cNvPr id="4" name="Date Placeholder 3">
             <a:extLst xmlns:a="http://schemas.openxmlformats.org/drawingml/2006/main">
               <a:ext uri="{FF2B5EF4-FFF2-40B4-BE49-F238E27FC236}">
-                <a16:creationId xmlns:a16="http://schemas.microsoft.com/office/drawing/2014/main" id="{C5C4B950-B981-4DA0-8438-9089619E1F01}"/>
+                <a16:creationId xmlns:a16="http://schemas.microsoft.com/office/drawing/2014/main" id="{7E3D04BE-4D86-4BB5-AD1C-BF39FC23810E}"/>
               </a:ext>
             </a:extLst>
           </p:cNvPr>
@@ -2702,7 +2702,7 @@
           <p:cNvPr id="5" name="Footer Placeholder 4">
             <a:extLst xmlns:a="http://schemas.openxmlformats.org/drawingml/2006/main">
               <a:ext uri="{FF2B5EF4-FFF2-40B4-BE49-F238E27FC236}">
-                <a16:creationId xmlns:a16="http://schemas.microsoft.com/office/drawing/2014/main" id="{86488E06-9F86-4F65-84D2-7A593A956EC4}"/>
+                <a16:creationId xmlns:a16="http://schemas.microsoft.com/office/drawing/2014/main" id="{76687F90-9BA8-4C44-857D-49C3FE6B75E7}"/>
               </a:ext>
             </a:extLst>
           </p:cNvPr>
@@ -2725,7 +2725,7 @@
           <p:cNvPr id="6" name="Slide Number Placeholder 5">
             <a:extLst xmlns:a="http://schemas.openxmlformats.org/drawingml/2006/main">
               <a:ext uri="{FF2B5EF4-FFF2-40B4-BE49-F238E27FC236}">
-                <a16:creationId xmlns:a16="http://schemas.microsoft.com/office/drawing/2014/main" id="{0D55B8D6-33EE-4771-81CC-998307389D9C}"/>
+                <a16:creationId xmlns:a16="http://schemas.microsoft.com/office/drawing/2014/main" id="{72A3CE3A-A11C-427B-B30A-B6BF82B667B6}"/>
               </a:ext>
             </a:extLst>
           </p:cNvPr>
@@ -2769,7 +2769,7 @@
           <p:cNvPr id="2" name="Vertical Title 1">
             <a:extLst xmlns:a="http://schemas.openxmlformats.org/drawingml/2006/main">
               <a:ext uri="{FF2B5EF4-FFF2-40B4-BE49-F238E27FC236}">
-                <a16:creationId xmlns:a16="http://schemas.microsoft.com/office/drawing/2014/main" id="{282838FE-5A27-4EDC-919D-A578ABCFD132}"/>
+                <a16:creationId xmlns:a16="http://schemas.microsoft.com/office/drawing/2014/main" id="{FF3EC075-18F5-43BE-A11D-6160B06620C8}"/>
               </a:ext>
             </a:extLst>
           </p:cNvPr>
@@ -2801,7 +2801,7 @@
           <p:cNvPr id="3" name="Vertical Text Placeholder 2">
             <a:extLst xmlns:a="http://schemas.openxmlformats.org/drawingml/2006/main">
               <a:ext uri="{FF2B5EF4-FFF2-40B4-BE49-F238E27FC236}">
-                <a16:creationId xmlns:a16="http://schemas.microsoft.com/office/drawing/2014/main" id="{F0D44262-7BA2-4ECB-A949-015F2070D76A}"/>
+                <a16:creationId xmlns:a16="http://schemas.microsoft.com/office/drawing/2014/main" id="{FF3D9E64-4FA6-47D4-93F9-849208B01EEA}"/>
               </a:ext>
             </a:extLst>
           </p:cNvPr>
@@ -2868,7 +2868,7 @@
           <p:cNvPr id="4" name="Date Placeholder 3">
             <a:extLst xmlns:a="http://schemas.openxmlformats.org/drawingml/2006/main">
               <a:ext uri="{FF2B5EF4-FFF2-40B4-BE49-F238E27FC236}">
-                <a16:creationId xmlns:a16="http://schemas.microsoft.com/office/drawing/2014/main" id="{227A78D4-6597-4A0A-90D0-3441FE4E91FF}"/>
+                <a16:creationId xmlns:a16="http://schemas.microsoft.com/office/drawing/2014/main" id="{353CF073-EE31-4332-8A06-96E1E9EE5B4D}"/>
               </a:ext>
             </a:extLst>
           </p:cNvPr>
@@ -2895,7 +2895,7 @@
           <p:cNvPr id="5" name="Footer Placeholder 4">
             <a:extLst xmlns:a="http://schemas.openxmlformats.org/drawingml/2006/main">
               <a:ext uri="{FF2B5EF4-FFF2-40B4-BE49-F238E27FC236}">
-                <a16:creationId xmlns:a16="http://schemas.microsoft.com/office/drawing/2014/main" id="{2D5D519C-82C7-4E4F-B4D3-02F08ECFB1E3}"/>
+                <a16:creationId xmlns:a16="http://schemas.microsoft.com/office/drawing/2014/main" id="{303564EC-AD59-42C2-95F7-E4A3C831A505}"/>
               </a:ext>
             </a:extLst>
           </p:cNvPr>
@@ -2918,7 +2918,7 @@
           <p:cNvPr id="6" name="Slide Number Placeholder 5">
             <a:extLst xmlns:a="http://schemas.openxmlformats.org/drawingml/2006/main">
               <a:ext uri="{FF2B5EF4-FFF2-40B4-BE49-F238E27FC236}">
-                <a16:creationId xmlns:a16="http://schemas.microsoft.com/office/drawing/2014/main" id="{188A7DE1-EF4C-425C-B168-57ADC65CA490}"/>
+                <a16:creationId xmlns:a16="http://schemas.microsoft.com/office/drawing/2014/main" id="{38FD8B06-C1B2-4AC2-AD55-2F07EEB8EA08}"/>
               </a:ext>
             </a:extLst>
           </p:cNvPr>
@@ -2962,7 +2962,7 @@
           <p:cNvPr id="2" name="Title 1">
             <a:extLst xmlns:a="http://schemas.openxmlformats.org/drawingml/2006/main">
               <a:ext uri="{FF2B5EF4-FFF2-40B4-BE49-F238E27FC236}">
-                <a16:creationId xmlns:a16="http://schemas.microsoft.com/office/drawing/2014/main" id="{1EE862EE-BD5F-40DF-973A-649590D3E6D2}"/>
+                <a16:creationId xmlns:a16="http://schemas.microsoft.com/office/drawing/2014/main" id="{3C35A392-1F99-4D1D-9500-F19710D5903C}"/>
               </a:ext>
             </a:extLst>
           </p:cNvPr>
@@ -2989,7 +2989,7 @@
           <p:cNvPr id="3" name="Content Placeholder 2">
             <a:extLst xmlns:a="http://schemas.openxmlformats.org/drawingml/2006/main">
               <a:ext uri="{FF2B5EF4-FFF2-40B4-BE49-F238E27FC236}">
-                <a16:creationId xmlns:a16="http://schemas.microsoft.com/office/drawing/2014/main" id="{96B41689-814D-438A-A633-C9B9586A0871}"/>
+                <a16:creationId xmlns:a16="http://schemas.microsoft.com/office/drawing/2014/main" id="{476D6E94-ED93-4475-A380-500FE75D2F2D}"/>
               </a:ext>
             </a:extLst>
           </p:cNvPr>
@@ -3051,7 +3051,7 @@
           <p:cNvPr id="4" name="Date Placeholder 3">
             <a:extLst xmlns:a="http://schemas.openxmlformats.org/drawingml/2006/main">
               <a:ext uri="{FF2B5EF4-FFF2-40B4-BE49-F238E27FC236}">
-                <a16:creationId xmlns:a16="http://schemas.microsoft.com/office/drawing/2014/main" id="{EB1CA34D-0D8C-477F-8BA7-22E352D21BF2}"/>
+                <a16:creationId xmlns:a16="http://schemas.microsoft.com/office/drawing/2014/main" id="{934E9273-4325-48CF-A6C7-C911F009A514}"/>
               </a:ext>
             </a:extLst>
           </p:cNvPr>
@@ -3078,7 +3078,7 @@
           <p:cNvPr id="5" name="Footer Placeholder 4">
             <a:extLst xmlns:a="http://schemas.openxmlformats.org/drawingml/2006/main">
               <a:ext uri="{FF2B5EF4-FFF2-40B4-BE49-F238E27FC236}">
-                <a16:creationId xmlns:a16="http://schemas.microsoft.com/office/drawing/2014/main" id="{82982340-044A-4F11-9255-9B44BF096207}"/>
+                <a16:creationId xmlns:a16="http://schemas.microsoft.com/office/drawing/2014/main" id="{19D91D71-1BA5-4B62-9CE8-F381AA420F16}"/>
               </a:ext>
             </a:extLst>
           </p:cNvPr>
@@ -3101,7 +3101,7 @@
           <p:cNvPr id="6" name="Slide Number Placeholder 5">
             <a:extLst xmlns:a="http://schemas.openxmlformats.org/drawingml/2006/main">
               <a:ext uri="{FF2B5EF4-FFF2-40B4-BE49-F238E27FC236}">
-                <a16:creationId xmlns:a16="http://schemas.microsoft.com/office/drawing/2014/main" id="{FD070F60-E926-453E-A5E0-9157AEBF60DF}"/>
+                <a16:creationId xmlns:a16="http://schemas.microsoft.com/office/drawing/2014/main" id="{61FE46EE-6A08-486E-B651-DB29F73EB2CB}"/>
               </a:ext>
             </a:extLst>
           </p:cNvPr>
@@ -3145,7 +3145,7 @@
           <p:cNvPr id="2" name="Title 1">
             <a:extLst xmlns:a="http://schemas.openxmlformats.org/drawingml/2006/main">
               <a:ext uri="{FF2B5EF4-FFF2-40B4-BE49-F238E27FC236}">
-                <a16:creationId xmlns:a16="http://schemas.microsoft.com/office/drawing/2014/main" id="{6EC26EF6-4D53-4B91-A13D-08C2945FFD75}"/>
+                <a16:creationId xmlns:a16="http://schemas.microsoft.com/office/drawing/2014/main" id="{90A07A30-026E-451C-B608-99940B94D8D5}"/>
               </a:ext>
             </a:extLst>
           </p:cNvPr>
@@ -3182,7 +3182,7 @@
           <p:cNvPr id="3" name="Text Placeholder 2">
             <a:extLst xmlns:a="http://schemas.openxmlformats.org/drawingml/2006/main">
               <a:ext uri="{FF2B5EF4-FFF2-40B4-BE49-F238E27FC236}">
-                <a16:creationId xmlns:a16="http://schemas.microsoft.com/office/drawing/2014/main" id="{74F6CC04-DDE0-43F3-84EF-98973BC0A704}"/>
+                <a16:creationId xmlns:a16="http://schemas.microsoft.com/office/drawing/2014/main" id="{080ED5FD-0E9D-40B8-B85C-9B9B2AEE53E4}"/>
               </a:ext>
             </a:extLst>
           </p:cNvPr>
@@ -3308,7 +3308,7 @@
           <p:cNvPr id="4" name="Date Placeholder 3">
             <a:extLst xmlns:a="http://schemas.openxmlformats.org/drawingml/2006/main">
               <a:ext uri="{FF2B5EF4-FFF2-40B4-BE49-F238E27FC236}">
-                <a16:creationId xmlns:a16="http://schemas.microsoft.com/office/drawing/2014/main" id="{7AF3A196-BAB1-46E3-A899-8715DBCDDE9A}"/>
+                <a16:creationId xmlns:a16="http://schemas.microsoft.com/office/drawing/2014/main" id="{1CA5DD92-FE18-4FBF-9AC4-6D9E9D149A98}"/>
               </a:ext>
             </a:extLst>
           </p:cNvPr>
@@ -3335,7 +3335,7 @@
           <p:cNvPr id="5" name="Footer Placeholder 4">
             <a:extLst xmlns:a="http://schemas.openxmlformats.org/drawingml/2006/main">
               <a:ext uri="{FF2B5EF4-FFF2-40B4-BE49-F238E27FC236}">
-                <a16:creationId xmlns:a16="http://schemas.microsoft.com/office/drawing/2014/main" id="{3DBD4851-D91D-43D3-B10F-EBFFA1821A23}"/>
+                <a16:creationId xmlns:a16="http://schemas.microsoft.com/office/drawing/2014/main" id="{DBE49D63-0CBB-4387-B9E4-25846DA13274}"/>
               </a:ext>
             </a:extLst>
           </p:cNvPr>
@@ -3358,7 +3358,7 @@
           <p:cNvPr id="6" name="Slide Number Placeholder 5">
             <a:extLst xmlns:a="http://schemas.openxmlformats.org/drawingml/2006/main">
               <a:ext uri="{FF2B5EF4-FFF2-40B4-BE49-F238E27FC236}">
-                <a16:creationId xmlns:a16="http://schemas.microsoft.com/office/drawing/2014/main" id="{07FA6C85-10D2-444B-AFBC-ACD6F64A055A}"/>
+                <a16:creationId xmlns:a16="http://schemas.microsoft.com/office/drawing/2014/main" id="{C6968B40-4A6D-4372-95D8-CDE9DB1979E4}"/>
               </a:ext>
             </a:extLst>
           </p:cNvPr>
@@ -3402,7 +3402,7 @@
           <p:cNvPr id="2" name="Title 1">
             <a:extLst xmlns:a="http://schemas.openxmlformats.org/drawingml/2006/main">
               <a:ext uri="{FF2B5EF4-FFF2-40B4-BE49-F238E27FC236}">
-                <a16:creationId xmlns:a16="http://schemas.microsoft.com/office/drawing/2014/main" id="{EAB17F75-549A-4F59-96B7-8030AD34B733}"/>
+                <a16:creationId xmlns:a16="http://schemas.microsoft.com/office/drawing/2014/main" id="{305842BD-0223-4130-A6C7-B657C40E4DC9}"/>
               </a:ext>
             </a:extLst>
           </p:cNvPr>
@@ -3429,7 +3429,7 @@
           <p:cNvPr id="3" name="Content Placeholder 2">
             <a:extLst xmlns:a="http://schemas.openxmlformats.org/drawingml/2006/main">
               <a:ext uri="{FF2B5EF4-FFF2-40B4-BE49-F238E27FC236}">
-                <a16:creationId xmlns:a16="http://schemas.microsoft.com/office/drawing/2014/main" id="{0972E730-AE5F-4C79-A82A-86B4E58B8F51}"/>
+                <a16:creationId xmlns:a16="http://schemas.microsoft.com/office/drawing/2014/main" id="{E559B403-7A19-4CA3-97CF-67D09EB0C72A}"/>
               </a:ext>
             </a:extLst>
           </p:cNvPr>
@@ -3533,7 +3533,7 @@
           <p:cNvPr id="4" name="Content Placeholder 3">
             <a:extLst xmlns:a="http://schemas.openxmlformats.org/drawingml/2006/main">
               <a:ext uri="{FF2B5EF4-FFF2-40B4-BE49-F238E27FC236}">
-                <a16:creationId xmlns:a16="http://schemas.microsoft.com/office/drawing/2014/main" id="{688A0532-ED28-47DB-921C-B8048F1F1855}"/>
+                <a16:creationId xmlns:a16="http://schemas.microsoft.com/office/drawing/2014/main" id="{069BDF68-B22D-49CB-827A-69E045C7E577}"/>
               </a:ext>
             </a:extLst>
           </p:cNvPr>
@@ -3637,7 +3637,7 @@
           <p:cNvPr id="5" name="Date Placeholder 4">
             <a:extLst xmlns:a="http://schemas.openxmlformats.org/drawingml/2006/main">
               <a:ext uri="{FF2B5EF4-FFF2-40B4-BE49-F238E27FC236}">
-                <a16:creationId xmlns:a16="http://schemas.microsoft.com/office/drawing/2014/main" id="{1AB0EF09-0B2E-4A4A-8AEB-F75468F5006D}"/>
+                <a16:creationId xmlns:a16="http://schemas.microsoft.com/office/drawing/2014/main" id="{7BDD9C25-65E1-47E8-B173-CB9DE73A94D8}"/>
               </a:ext>
             </a:extLst>
           </p:cNvPr>
@@ -3664,7 +3664,7 @@
           <p:cNvPr id="6" name="Footer Placeholder 5">
             <a:extLst xmlns:a="http://schemas.openxmlformats.org/drawingml/2006/main">
               <a:ext uri="{FF2B5EF4-FFF2-40B4-BE49-F238E27FC236}">
-                <a16:creationId xmlns:a16="http://schemas.microsoft.com/office/drawing/2014/main" id="{DC131570-9267-4DBD-B87F-544B64192E9F}"/>
+                <a16:creationId xmlns:a16="http://schemas.microsoft.com/office/drawing/2014/main" id="{D4E4A4B5-17E9-4E6C-A7BD-236C5E4FA01C}"/>
               </a:ext>
             </a:extLst>
           </p:cNvPr>
@@ -3687,7 +3687,7 @@
           <p:cNvPr id="7" name="Slide Number Placeholder 6">
             <a:extLst xmlns:a="http://schemas.openxmlformats.org/drawingml/2006/main">
               <a:ext uri="{FF2B5EF4-FFF2-40B4-BE49-F238E27FC236}">
-                <a16:creationId xmlns:a16="http://schemas.microsoft.com/office/drawing/2014/main" id="{7DD29CD3-14AE-49DE-87C5-38B90BACFB9E}"/>
+                <a16:creationId xmlns:a16="http://schemas.microsoft.com/office/drawing/2014/main" id="{94E735FE-131B-4FAA-98AB-29F07F19F296}"/>
               </a:ext>
             </a:extLst>
           </p:cNvPr>
@@ -3731,7 +3731,7 @@
           <p:cNvPr id="2" name="Title 1">
             <a:extLst xmlns:a="http://schemas.openxmlformats.org/drawingml/2006/main">
               <a:ext uri="{FF2B5EF4-FFF2-40B4-BE49-F238E27FC236}">
-                <a16:creationId xmlns:a16="http://schemas.microsoft.com/office/drawing/2014/main" id="{DCE6DC4E-2E9B-4028-8703-CF529DFE030A}"/>
+                <a16:creationId xmlns:a16="http://schemas.microsoft.com/office/drawing/2014/main" id="{A5ED7675-D251-46C1-8EE9-2127A841188F}"/>
               </a:ext>
             </a:extLst>
           </p:cNvPr>
@@ -3763,7 +3763,7 @@
           <p:cNvPr id="3" name="Text Placeholder 2">
             <a:extLst xmlns:a="http://schemas.openxmlformats.org/drawingml/2006/main">
               <a:ext uri="{FF2B5EF4-FFF2-40B4-BE49-F238E27FC236}">
-                <a16:creationId xmlns:a16="http://schemas.microsoft.com/office/drawing/2014/main" id="{877F28B8-16D3-4392-9562-B17F5102BA7B}"/>
+                <a16:creationId xmlns:a16="http://schemas.microsoft.com/office/drawing/2014/main" id="{231801CC-BC84-4E38-8B51-C46D205DCE81}"/>
               </a:ext>
             </a:extLst>
           </p:cNvPr>
@@ -3835,7 +3835,7 @@
           <p:cNvPr id="4" name="Content Placeholder 3">
             <a:extLst xmlns:a="http://schemas.openxmlformats.org/drawingml/2006/main">
               <a:ext uri="{FF2B5EF4-FFF2-40B4-BE49-F238E27FC236}">
-                <a16:creationId xmlns:a16="http://schemas.microsoft.com/office/drawing/2014/main" id="{1F978D1A-934B-4D68-9E92-DC009D167C0B}"/>
+                <a16:creationId xmlns:a16="http://schemas.microsoft.com/office/drawing/2014/main" id="{B24CF473-5471-4F50-83D2-E2544F056FFE}"/>
               </a:ext>
             </a:extLst>
           </p:cNvPr>
@@ -3939,7 +3939,7 @@
           <p:cNvPr id="5" name="Text Placeholder 4">
             <a:extLst xmlns:a="http://schemas.openxmlformats.org/drawingml/2006/main">
               <a:ext uri="{FF2B5EF4-FFF2-40B4-BE49-F238E27FC236}">
-                <a16:creationId xmlns:a16="http://schemas.microsoft.com/office/drawing/2014/main" id="{87484ECE-DA0C-4478-8913-8902282C8BBE}"/>
+                <a16:creationId xmlns:a16="http://schemas.microsoft.com/office/drawing/2014/main" id="{990212E0-096C-4349-9B1E-6E839D9324EF}"/>
               </a:ext>
             </a:extLst>
           </p:cNvPr>
@@ -4011,7 +4011,7 @@
           <p:cNvPr id="6" name="Content Placeholder 5">
             <a:extLst xmlns:a="http://schemas.openxmlformats.org/drawingml/2006/main">
               <a:ext uri="{FF2B5EF4-FFF2-40B4-BE49-F238E27FC236}">
-                <a16:creationId xmlns:a16="http://schemas.microsoft.com/office/drawing/2014/main" id="{130E91C0-EB87-4242-A9AD-DBCE83A4F984}"/>
+                <a16:creationId xmlns:a16="http://schemas.microsoft.com/office/drawing/2014/main" id="{6055E5FF-2CE4-4949-A4BA-E78692BCAC9F}"/>
               </a:ext>
             </a:extLst>
           </p:cNvPr>
@@ -4115,7 +4115,7 @@
           <p:cNvPr id="7" name="Date Placeholder 6">
             <a:extLst xmlns:a="http://schemas.openxmlformats.org/drawingml/2006/main">
               <a:ext uri="{FF2B5EF4-FFF2-40B4-BE49-F238E27FC236}">
-                <a16:creationId xmlns:a16="http://schemas.microsoft.com/office/drawing/2014/main" id="{1459BD2F-58F4-4EC3-A901-16D4D1DD36EB}"/>
+                <a16:creationId xmlns:a16="http://schemas.microsoft.com/office/drawing/2014/main" id="{AE22EF8E-976B-42C4-AFFB-C6BFD8F7ECBD}"/>
               </a:ext>
             </a:extLst>
           </p:cNvPr>
@@ -4142,7 +4142,7 @@
           <p:cNvPr id="8" name="Footer Placeholder 7">
             <a:extLst xmlns:a="http://schemas.openxmlformats.org/drawingml/2006/main">
               <a:ext uri="{FF2B5EF4-FFF2-40B4-BE49-F238E27FC236}">
-                <a16:creationId xmlns:a16="http://schemas.microsoft.com/office/drawing/2014/main" id="{1347035E-2335-411E-995B-F54634DECB9F}"/>
+                <a16:creationId xmlns:a16="http://schemas.microsoft.com/office/drawing/2014/main" id="{873A1112-903B-45BB-8376-F5E2F0088C20}"/>
               </a:ext>
             </a:extLst>
           </p:cNvPr>
@@ -4165,7 +4165,7 @@
           <p:cNvPr id="9" name="Slide Number Placeholder 8">
             <a:extLst xmlns:a="http://schemas.openxmlformats.org/drawingml/2006/main">
               <a:ext uri="{FF2B5EF4-FFF2-40B4-BE49-F238E27FC236}">
-                <a16:creationId xmlns:a16="http://schemas.microsoft.com/office/drawing/2014/main" id="{EBEAD58B-6BE3-40E5-AB24-0083310742EC}"/>
+                <a16:creationId xmlns:a16="http://schemas.microsoft.com/office/drawing/2014/main" id="{4F28CB07-7D89-45DF-B468-158A61568FAB}"/>
               </a:ext>
             </a:extLst>
           </p:cNvPr>
@@ -4209,7 +4209,7 @@
           <p:cNvPr id="2" name="Title 1">
             <a:extLst xmlns:a="http://schemas.openxmlformats.org/drawingml/2006/main">
               <a:ext uri="{FF2B5EF4-FFF2-40B4-BE49-F238E27FC236}">
-                <a16:creationId xmlns:a16="http://schemas.microsoft.com/office/drawing/2014/main" id="{F3E1A584-7C7D-4221-9A78-FB31F99A59F1}"/>
+                <a16:creationId xmlns:a16="http://schemas.microsoft.com/office/drawing/2014/main" id="{A34786E3-F3A5-4255-8303-B90D6F026280}"/>
               </a:ext>
             </a:extLst>
           </p:cNvPr>
@@ -4236,7 +4236,7 @@
           <p:cNvPr id="3" name="Date Placeholder 2">
             <a:extLst xmlns:a="http://schemas.openxmlformats.org/drawingml/2006/main">
               <a:ext uri="{FF2B5EF4-FFF2-40B4-BE49-F238E27FC236}">
-                <a16:creationId xmlns:a16="http://schemas.microsoft.com/office/drawing/2014/main" id="{6274405D-48BE-44A1-880B-88673512D7E0}"/>
+                <a16:creationId xmlns:a16="http://schemas.microsoft.com/office/drawing/2014/main" id="{E12AC0F2-3E37-4393-B911-A5C13A5EA651}"/>
               </a:ext>
             </a:extLst>
           </p:cNvPr>
@@ -4263,7 +4263,7 @@
           <p:cNvPr id="4" name="Footer Placeholder 3">
             <a:extLst xmlns:a="http://schemas.openxmlformats.org/drawingml/2006/main">
               <a:ext uri="{FF2B5EF4-FFF2-40B4-BE49-F238E27FC236}">
-                <a16:creationId xmlns:a16="http://schemas.microsoft.com/office/drawing/2014/main" id="{BCFE12AC-6E9C-448F-AEF3-7B10B384143D}"/>
+                <a16:creationId xmlns:a16="http://schemas.microsoft.com/office/drawing/2014/main" id="{BDF9E5E2-986B-4FFD-86FA-752C4704AAA8}"/>
               </a:ext>
             </a:extLst>
           </p:cNvPr>
@@ -4286,7 +4286,7 @@
           <p:cNvPr id="5" name="Slide Number Placeholder 4">
             <a:extLst xmlns:a="http://schemas.openxmlformats.org/drawingml/2006/main">
               <a:ext uri="{FF2B5EF4-FFF2-40B4-BE49-F238E27FC236}">
-                <a16:creationId xmlns:a16="http://schemas.microsoft.com/office/drawing/2014/main" id="{4BE78E98-1387-4172-A63C-10383B204BAA}"/>
+                <a16:creationId xmlns:a16="http://schemas.microsoft.com/office/drawing/2014/main" id="{F98E4F66-81D6-4F36-A666-301258E8DE84}"/>
               </a:ext>
             </a:extLst>
           </p:cNvPr>
@@ -4330,7 +4330,7 @@
           <p:cNvPr id="2" name="Date Placeholder 1">
             <a:extLst xmlns:a="http://schemas.openxmlformats.org/drawingml/2006/main">
               <a:ext uri="{FF2B5EF4-FFF2-40B4-BE49-F238E27FC236}">
-                <a16:creationId xmlns:a16="http://schemas.microsoft.com/office/drawing/2014/main" id="{F9410DAB-ED3F-4C01-ABF1-2E9621CA81BF}"/>
+                <a16:creationId xmlns:a16="http://schemas.microsoft.com/office/drawing/2014/main" id="{1A0B686E-E112-4104-8A66-5D38BA672615}"/>
               </a:ext>
             </a:extLst>
           </p:cNvPr>
@@ -4357,7 +4357,7 @@
           <p:cNvPr id="3" name="Footer Placeholder 2">
             <a:extLst xmlns:a="http://schemas.openxmlformats.org/drawingml/2006/main">
               <a:ext uri="{FF2B5EF4-FFF2-40B4-BE49-F238E27FC236}">
-                <a16:creationId xmlns:a16="http://schemas.microsoft.com/office/drawing/2014/main" id="{DABCFB72-D447-4B11-91D8-0B33515C0FDC}"/>
+                <a16:creationId xmlns:a16="http://schemas.microsoft.com/office/drawing/2014/main" id="{92CF92EB-39B9-45B7-8167-21A307B41534}"/>
               </a:ext>
             </a:extLst>
           </p:cNvPr>
@@ -4380,7 +4380,7 @@
           <p:cNvPr id="4" name="Slide Number Placeholder 3">
             <a:extLst xmlns:a="http://schemas.openxmlformats.org/drawingml/2006/main">
               <a:ext uri="{FF2B5EF4-FFF2-40B4-BE49-F238E27FC236}">
-                <a16:creationId xmlns:a16="http://schemas.microsoft.com/office/drawing/2014/main" id="{DD724D65-6501-48BE-92A3-6D3C55071DE9}"/>
+                <a16:creationId xmlns:a16="http://schemas.microsoft.com/office/drawing/2014/main" id="{735218E4-BC4E-4E3F-9F34-F4A000738927}"/>
               </a:ext>
             </a:extLst>
           </p:cNvPr>
@@ -4424,7 +4424,7 @@
           <p:cNvPr id="2" name="Title 1">
             <a:extLst xmlns:a="http://schemas.openxmlformats.org/drawingml/2006/main">
               <a:ext uri="{FF2B5EF4-FFF2-40B4-BE49-F238E27FC236}">
-                <a16:creationId xmlns:a16="http://schemas.microsoft.com/office/drawing/2014/main" id="{4D9B7A66-E88B-49E0-8E08-06DB375F33A1}"/>
+                <a16:creationId xmlns:a16="http://schemas.microsoft.com/office/drawing/2014/main" id="{446A327A-58CF-4081-B41A-83D7B5FD0090}"/>
               </a:ext>
             </a:extLst>
           </p:cNvPr>
@@ -4461,7 +4461,7 @@
           <p:cNvPr id="3" name="Content Placeholder 2">
             <a:extLst xmlns:a="http://schemas.openxmlformats.org/drawingml/2006/main">
               <a:ext uri="{FF2B5EF4-FFF2-40B4-BE49-F238E27FC236}">
-                <a16:creationId xmlns:a16="http://schemas.microsoft.com/office/drawing/2014/main" id="{C214DDA5-F30C-44E9-8ADF-960FD3FABC9B}"/>
+                <a16:creationId xmlns:a16="http://schemas.microsoft.com/office/drawing/2014/main" id="{3EC5C3F6-0622-434F-AA09-89D2B9C8448C}"/>
               </a:ext>
             </a:extLst>
           </p:cNvPr>
@@ -4565,7 +4565,7 @@
           <p:cNvPr id="4" name="Text Placeholder 3">
             <a:extLst xmlns:a="http://schemas.openxmlformats.org/drawingml/2006/main">
               <a:ext uri="{FF2B5EF4-FFF2-40B4-BE49-F238E27FC236}">
-                <a16:creationId xmlns:a16="http://schemas.microsoft.com/office/drawing/2014/main" id="{9C96479D-B37A-43A4-A007-3B5DC20557D2}"/>
+                <a16:creationId xmlns:a16="http://schemas.microsoft.com/office/drawing/2014/main" id="{5F64C720-DF30-4447-8058-D8555B4BD044}"/>
               </a:ext>
             </a:extLst>
           </p:cNvPr>
@@ -4637,7 +4637,7 @@
           <p:cNvPr id="5" name="Date Placeholder 4">
             <a:extLst xmlns:a="http://schemas.openxmlformats.org/drawingml/2006/main">
               <a:ext uri="{FF2B5EF4-FFF2-40B4-BE49-F238E27FC236}">
-                <a16:creationId xmlns:a16="http://schemas.microsoft.com/office/drawing/2014/main" id="{C531A9F6-AA80-4E21-9BBB-9EEC3DEB0E46}"/>
+                <a16:creationId xmlns:a16="http://schemas.microsoft.com/office/drawing/2014/main" id="{3C16B53C-3A07-43A3-893D-7B2EC7604D8C}"/>
               </a:ext>
             </a:extLst>
           </p:cNvPr>
@@ -4664,7 +4664,7 @@
           <p:cNvPr id="6" name="Footer Placeholder 5">
             <a:extLst xmlns:a="http://schemas.openxmlformats.org/drawingml/2006/main">
               <a:ext uri="{FF2B5EF4-FFF2-40B4-BE49-F238E27FC236}">
-                <a16:creationId xmlns:a16="http://schemas.microsoft.com/office/drawing/2014/main" id="{0234E982-B5C2-4113-8B24-0FE0220CB599}"/>
+                <a16:creationId xmlns:a16="http://schemas.microsoft.com/office/drawing/2014/main" id="{625081E9-DA77-4B6D-85D5-B8774E46512D}"/>
               </a:ext>
             </a:extLst>
           </p:cNvPr>
@@ -4687,7 +4687,7 @@
           <p:cNvPr id="7" name="Slide Number Placeholder 6">
             <a:extLst xmlns:a="http://schemas.openxmlformats.org/drawingml/2006/main">
               <a:ext uri="{FF2B5EF4-FFF2-40B4-BE49-F238E27FC236}">
-                <a16:creationId xmlns:a16="http://schemas.microsoft.com/office/drawing/2014/main" id="{6BCFFA3C-5D3A-4D69-9B6C-A5C4938D72B4}"/>
+                <a16:creationId xmlns:a16="http://schemas.microsoft.com/office/drawing/2014/main" id="{7E3120D8-A82E-4138-B653-CCCE6F37F7CF}"/>
               </a:ext>
             </a:extLst>
           </p:cNvPr>
@@ -4731,7 +4731,7 @@
           <p:cNvPr id="2" name="Title 1">
             <a:extLst xmlns:a="http://schemas.openxmlformats.org/drawingml/2006/main">
               <a:ext uri="{FF2B5EF4-FFF2-40B4-BE49-F238E27FC236}">
-                <a16:creationId xmlns:a16="http://schemas.microsoft.com/office/drawing/2014/main" id="{BD498750-1847-40B9-90CB-C948CAB3C1E0}"/>
+                <a16:creationId xmlns:a16="http://schemas.microsoft.com/office/drawing/2014/main" id="{8103BD5C-B0B3-4AEC-88EA-14DB118E635C}"/>
               </a:ext>
             </a:extLst>
           </p:cNvPr>
@@ -4768,7 +4768,7 @@
           <p:cNvPr id="3" name="Picture Placeholder 2">
             <a:extLst xmlns:a="http://schemas.openxmlformats.org/drawingml/2006/main">
               <a:ext uri="{FF2B5EF4-FFF2-40B4-BE49-F238E27FC236}">
-                <a16:creationId xmlns:a16="http://schemas.microsoft.com/office/drawing/2014/main" id="{867A0B16-4CE3-432D-9E53-6FE42EBAFB9B}"/>
+                <a16:creationId xmlns:a16="http://schemas.microsoft.com/office/drawing/2014/main" id="{59FA46E3-4A06-4F43-9002-E64502F17A0F}"/>
               </a:ext>
             </a:extLst>
           </p:cNvPr>
@@ -4833,7 +4833,7 @@
           <p:cNvPr id="4" name="Text Placeholder 3">
             <a:extLst xmlns:a="http://schemas.openxmlformats.org/drawingml/2006/main">
               <a:ext uri="{FF2B5EF4-FFF2-40B4-BE49-F238E27FC236}">
-                <a16:creationId xmlns:a16="http://schemas.microsoft.com/office/drawing/2014/main" id="{C4A4B2AB-4CF2-404F-8733-83295DFE773C}"/>
+                <a16:creationId xmlns:a16="http://schemas.microsoft.com/office/drawing/2014/main" id="{3E1BF926-3769-4FCF-8096-1BCF8D107B32}"/>
               </a:ext>
             </a:extLst>
           </p:cNvPr>
@@ -4905,7 +4905,7 @@
           <p:cNvPr id="5" name="Date Placeholder 4">
             <a:extLst xmlns:a="http://schemas.openxmlformats.org/drawingml/2006/main">
               <a:ext uri="{FF2B5EF4-FFF2-40B4-BE49-F238E27FC236}">
-                <a16:creationId xmlns:a16="http://schemas.microsoft.com/office/drawing/2014/main" id="{AA5ACF6A-2E81-45C7-BB9C-DB8CE4BC960A}"/>
+                <a16:creationId xmlns:a16="http://schemas.microsoft.com/office/drawing/2014/main" id="{7D2D6B48-33D8-49B2-B0B8-F458DFF773F4}"/>
               </a:ext>
             </a:extLst>
           </p:cNvPr>
@@ -4932,7 +4932,7 @@
           <p:cNvPr id="6" name="Footer Placeholder 5">
             <a:extLst xmlns:a="http://schemas.openxmlformats.org/drawingml/2006/main">
               <a:ext uri="{FF2B5EF4-FFF2-40B4-BE49-F238E27FC236}">
-                <a16:creationId xmlns:a16="http://schemas.microsoft.com/office/drawing/2014/main" id="{0F2EDD22-D8D4-47D0-94B4-1CCB5E60FF40}"/>
+                <a16:creationId xmlns:a16="http://schemas.microsoft.com/office/drawing/2014/main" id="{8C96BB21-DBD7-4314-990D-50A2A28D587B}"/>
               </a:ext>
             </a:extLst>
           </p:cNvPr>
@@ -4955,7 +4955,7 @@
           <p:cNvPr id="7" name="Slide Number Placeholder 6">
             <a:extLst xmlns:a="http://schemas.openxmlformats.org/drawingml/2006/main">
               <a:ext uri="{FF2B5EF4-FFF2-40B4-BE49-F238E27FC236}">
-                <a16:creationId xmlns:a16="http://schemas.microsoft.com/office/drawing/2014/main" id="{C01206C7-5C60-4DE9-B872-BD0D93DC4394}"/>
+                <a16:creationId xmlns:a16="http://schemas.microsoft.com/office/drawing/2014/main" id="{E7E73DE4-842F-4C54-99DE-3429561A09CF}"/>
               </a:ext>
             </a:extLst>
           </p:cNvPr>
@@ -5004,7 +5004,7 @@
           <p:cNvPr id="2" name="Title Placeholder 1">
             <a:extLst xmlns:a="http://schemas.openxmlformats.org/drawingml/2006/main">
               <a:ext uri="{FF2B5EF4-FFF2-40B4-BE49-F238E27FC236}">
-                <a16:creationId xmlns:a16="http://schemas.microsoft.com/office/drawing/2014/main" id="{7E0ED4C5-42A6-46BC-B3EB-CD87FDA602FF}"/>
+                <a16:creationId xmlns:a16="http://schemas.microsoft.com/office/drawing/2014/main" id="{03533A9B-26C2-494A-8DF0-CCCA471BCACE}"/>
               </a:ext>
             </a:extLst>
           </p:cNvPr>
@@ -5041,7 +5041,7 @@
           <p:cNvPr id="3" name="Text Placeholder 2">
             <a:extLst xmlns:a="http://schemas.openxmlformats.org/drawingml/2006/main">
               <a:ext uri="{FF2B5EF4-FFF2-40B4-BE49-F238E27FC236}">
-                <a16:creationId xmlns:a16="http://schemas.microsoft.com/office/drawing/2014/main" id="{599709A2-1361-49CA-96AA-506E3D56A02E}"/>
+                <a16:creationId xmlns:a16="http://schemas.microsoft.com/office/drawing/2014/main" id="{48612B5B-6EAC-4D71-8B03-E3697FA6F33E}"/>
               </a:ext>
             </a:extLst>
           </p:cNvPr>
@@ -5113,7 +5113,7 @@
           <p:cNvPr id="4" name="Date Placeholder 3">
             <a:extLst xmlns:a="http://schemas.openxmlformats.org/drawingml/2006/main">
               <a:ext uri="{FF2B5EF4-FFF2-40B4-BE49-F238E27FC236}">
-                <a16:creationId xmlns:a16="http://schemas.microsoft.com/office/drawing/2014/main" id="{588F6671-226C-4AB5-89D0-D9AB02245276}"/>
+                <a16:creationId xmlns:a16="http://schemas.microsoft.com/office/drawing/2014/main" id="{D2172275-7786-4918-98A6-5C9B346F6DE9}"/>
               </a:ext>
             </a:extLst>
           </p:cNvPr>
@@ -5159,7 +5159,7 @@
           <p:cNvPr id="5" name="Footer Placeholder 4">
             <a:extLst xmlns:a="http://schemas.openxmlformats.org/drawingml/2006/main">
               <a:ext uri="{FF2B5EF4-FFF2-40B4-BE49-F238E27FC236}">
-                <a16:creationId xmlns:a16="http://schemas.microsoft.com/office/drawing/2014/main" id="{48464BEC-6CEF-4EF2-B652-A732C559934C}"/>
+                <a16:creationId xmlns:a16="http://schemas.microsoft.com/office/drawing/2014/main" id="{DC5E0D39-72AA-41F1-A491-6877AFD37C09}"/>
               </a:ext>
             </a:extLst>
           </p:cNvPr>
@@ -5201,7 +5201,7 @@
           <p:cNvPr id="6" name="Slide Number Placeholder 5">
             <a:extLst xmlns:a="http://schemas.openxmlformats.org/drawingml/2006/main">
               <a:ext uri="{FF2B5EF4-FFF2-40B4-BE49-F238E27FC236}">
-                <a16:creationId xmlns:a16="http://schemas.microsoft.com/office/drawing/2014/main" id="{391BD268-8C51-458B-A8CC-3E420E80B0BF}"/>
+                <a16:creationId xmlns:a16="http://schemas.microsoft.com/office/drawing/2014/main" id="{3A013D17-AD46-41AC-9D87-9BD27D0784D9}"/>
               </a:ext>
             </a:extLst>
           </p:cNvPr>
@@ -5246,17 +5246,17 @@
   </p:cSld>
   <p:clrMap bg1="lt1" tx1="dk1" bg2="lt2" tx2="dk2" accent1="accent1" accent2="accent2" accent3="accent3" accent4="accent4" accent5="accent5" accent6="accent6" hlink="hlink" folHlink="folHlink"/>
   <p:sldLayoutIdLst>
-    <p:sldLayoutId xmlns:r="http://schemas.openxmlformats.org/officeDocument/2006/relationships" id="2147483649" r:id="R088ec19becd74adf"/>
-    <p:sldLayoutId xmlns:r="http://schemas.openxmlformats.org/officeDocument/2006/relationships" id="2147483650" r:id="Rc66ec7f3c63445e8"/>
-    <p:sldLayoutId xmlns:r="http://schemas.openxmlformats.org/officeDocument/2006/relationships" id="2147483651" r:id="R4d2a7e7b5de14339"/>
-    <p:sldLayoutId xmlns:r="http://schemas.openxmlformats.org/officeDocument/2006/relationships" id="2147483652" r:id="Rb044936580224500"/>
-    <p:sldLayoutId xmlns:r="http://schemas.openxmlformats.org/officeDocument/2006/relationships" id="2147483653" r:id="R637d0833fde34d6c"/>
-    <p:sldLayoutId xmlns:r="http://schemas.openxmlformats.org/officeDocument/2006/relationships" id="2147483654" r:id="Rdcfe6e2d7c8348b3"/>
-    <p:sldLayoutId xmlns:r="http://schemas.openxmlformats.org/officeDocument/2006/relationships" id="2147483655" r:id="Ra8de87c78cfd44e5"/>
-    <p:sldLayoutId xmlns:r="http://schemas.openxmlformats.org/officeDocument/2006/relationships" id="2147483656" r:id="Rbba03d58da0e48dc"/>
-    <p:sldLayoutId xmlns:r="http://schemas.openxmlformats.org/officeDocument/2006/relationships" id="2147483657" r:id="Rf5eee41ba6144eec"/>
-    <p:sldLayoutId xmlns:r="http://schemas.openxmlformats.org/officeDocument/2006/relationships" id="2147483658" r:id="Rfbbe16d663d547e0"/>
-    <p:sldLayoutId xmlns:r="http://schemas.openxmlformats.org/officeDocument/2006/relationships" id="2147483659" r:id="Rc383898dd8df4641"/>
+    <p:sldLayoutId xmlns:r="http://schemas.openxmlformats.org/officeDocument/2006/relationships" id="2147483649" r:id="R0bd2e2a8798b4626"/>
+    <p:sldLayoutId xmlns:r="http://schemas.openxmlformats.org/officeDocument/2006/relationships" id="2147483650" r:id="Rb8383a6823df4a9a"/>
+    <p:sldLayoutId xmlns:r="http://schemas.openxmlformats.org/officeDocument/2006/relationships" id="2147483651" r:id="Rca2a7a645fb745f6"/>
+    <p:sldLayoutId xmlns:r="http://schemas.openxmlformats.org/officeDocument/2006/relationships" id="2147483652" r:id="R41b0e0f8c0394d35"/>
+    <p:sldLayoutId xmlns:r="http://schemas.openxmlformats.org/officeDocument/2006/relationships" id="2147483653" r:id="Rddabc08044e8445d"/>
+    <p:sldLayoutId xmlns:r="http://schemas.openxmlformats.org/officeDocument/2006/relationships" id="2147483654" r:id="R4f99768d665641ea"/>
+    <p:sldLayoutId xmlns:r="http://schemas.openxmlformats.org/officeDocument/2006/relationships" id="2147483655" r:id="Rda16cfbc0740418a"/>
+    <p:sldLayoutId xmlns:r="http://schemas.openxmlformats.org/officeDocument/2006/relationships" id="2147483656" r:id="R2964d1ef63fc4f1b"/>
+    <p:sldLayoutId xmlns:r="http://schemas.openxmlformats.org/officeDocument/2006/relationships" id="2147483657" r:id="Rc283158694b84d8b"/>
+    <p:sldLayoutId xmlns:r="http://schemas.openxmlformats.org/officeDocument/2006/relationships" id="2147483658" r:id="Ra2325ef43c654b6e"/>
+    <p:sldLayoutId xmlns:r="http://schemas.openxmlformats.org/officeDocument/2006/relationships" id="2147483659" r:id="R1d88f9e596814b9f"/>
   </p:sldLayoutIdLst>
   <p:txStyles>
     <p:titleStyle>
@@ -5809,7 +5809,7 @@
           <p:cNvPr id="2" name="Rectangle 1">
             <a:extLst xmlns:a="http://schemas.openxmlformats.org/drawingml/2006/main">
               <a:ext uri="{FF2B5EF4-FFF2-40B4-BE49-F238E27FC236}">
-                <a16:creationId xmlns:a16="http://schemas.microsoft.com/office/drawing/2014/main" id="{01CFB269-68AF-466B-87A3-0BD3A697AED5}"/>
+                <a16:creationId xmlns:a16="http://schemas.microsoft.com/office/drawing/2014/main" id="{BAE52167-0725-4713-8CAB-44D8AF01D40C}"/>
               </a:ext>
             </a:extLst>
           </p:cNvPr>
@@ -5864,7 +5864,7 @@
           <p:cNvPr id="3" name="TextBox 2">
             <a:extLst xmlns:a="http://schemas.openxmlformats.org/drawingml/2006/main">
               <a:ext uri="{FF2B5EF4-FFF2-40B4-BE49-F238E27FC236}">
-                <a16:creationId xmlns:a16="http://schemas.microsoft.com/office/drawing/2014/main" id="{E872F2E8-98B9-4E56-B04E-2FD06A853266}"/>
+                <a16:creationId xmlns:a16="http://schemas.microsoft.com/office/drawing/2014/main" id="{70025CBE-D0BE-4585-B6EB-6D4D2DFB59A1}"/>
               </a:ext>
             </a:extLst>
           </p:cNvPr>
@@ -5911,7 +5911,7 @@
           <p:cNvPr id="4" name="TextBox 3">
             <a:extLst xmlns:a="http://schemas.openxmlformats.org/drawingml/2006/main">
               <a:ext uri="{FF2B5EF4-FFF2-40B4-BE49-F238E27FC236}">
-                <a16:creationId xmlns:a16="http://schemas.microsoft.com/office/drawing/2014/main" id="{B854853E-96B8-48EF-8563-EC9047CE7B9E}"/>
+                <a16:creationId xmlns:a16="http://schemas.microsoft.com/office/drawing/2014/main" id="{EC25C17B-6C00-419E-92A1-F00EDE9B24A1}"/>
               </a:ext>
             </a:extLst>
           </p:cNvPr>
@@ -5959,7 +5959,7 @@
           <p:cNvPr id="5" name="TextBox 4">
             <a:extLst xmlns:a="http://schemas.openxmlformats.org/drawingml/2006/main">
               <a:ext uri="{FF2B5EF4-FFF2-40B4-BE49-F238E27FC236}">
-                <a16:creationId xmlns:a16="http://schemas.microsoft.com/office/drawing/2014/main" id="{9A9152A0-27BB-42EB-9D63-2C191697D400}"/>
+                <a16:creationId xmlns:a16="http://schemas.microsoft.com/office/drawing/2014/main" id="{97A2487F-32CC-4419-A556-FE6CBF4ABCCE}"/>
               </a:ext>
             </a:extLst>
           </p:cNvPr>
@@ -6006,7 +6006,7 @@
           <p:cNvPr id="6" name="Rectangle 5">
             <a:extLst xmlns:a="http://schemas.openxmlformats.org/drawingml/2006/main">
               <a:ext uri="{FF2B5EF4-FFF2-40B4-BE49-F238E27FC236}">
-                <a16:creationId xmlns:a16="http://schemas.microsoft.com/office/drawing/2014/main" id="{C7A624FF-A0E6-4E3E-B66B-DC6172D71DA4}"/>
+                <a16:creationId xmlns:a16="http://schemas.microsoft.com/office/drawing/2014/main" id="{AB8A72E3-B37F-4967-8203-60DCB639DD3C}"/>
               </a:ext>
             </a:extLst>
           </p:cNvPr>
@@ -6061,7 +6061,7 @@
           <p:cNvPr id="7" name="TextBox 6">
             <a:extLst xmlns:a="http://schemas.openxmlformats.org/drawingml/2006/main">
               <a:ext uri="{FF2B5EF4-FFF2-40B4-BE49-F238E27FC236}">
-                <a16:creationId xmlns:a16="http://schemas.microsoft.com/office/drawing/2014/main" id="{79884F63-EADC-4518-A4BB-324B8E71B1E8}"/>
+                <a16:creationId xmlns:a16="http://schemas.microsoft.com/office/drawing/2014/main" id="{EA78F829-A841-4D80-9E91-6C136AB74C66}"/>
               </a:ext>
             </a:extLst>
           </p:cNvPr>
@@ -6108,7 +6108,7 @@
           <p:cNvPr id="8" name="TextBox 7">
             <a:extLst xmlns:a="http://schemas.openxmlformats.org/drawingml/2006/main">
               <a:ext uri="{FF2B5EF4-FFF2-40B4-BE49-F238E27FC236}">
-                <a16:creationId xmlns:a16="http://schemas.microsoft.com/office/drawing/2014/main" id="{8A15AF1C-77A3-44DA-B126-65388DC0294E}"/>
+                <a16:creationId xmlns:a16="http://schemas.microsoft.com/office/drawing/2014/main" id="{CA986928-AF2E-4E89-9421-32364569CCDF}"/>
               </a:ext>
             </a:extLst>
           </p:cNvPr>
@@ -6145,7 +6145,7 @@
                 <a:ea typeface="Aptos"/>
                 <a:cs typeface="Aptos"/>
               </a:rPr>
-              <a:t>2026.08.02-41</a:t>
+              <a:t>2026.08.03-43</a:t>
             </a:r>
           </a:p>
         </p:txBody>
@@ -6155,7 +6155,7 @@
           <p:cNvPr id="9" name="TextBox 8">
             <a:extLst xmlns:a="http://schemas.openxmlformats.org/drawingml/2006/main">
               <a:ext uri="{FF2B5EF4-FFF2-40B4-BE49-F238E27FC236}">
-                <a16:creationId xmlns:a16="http://schemas.microsoft.com/office/drawing/2014/main" id="{1831FB23-0B76-4D5B-9C9F-FC3DA4EE290A}"/>
+                <a16:creationId xmlns:a16="http://schemas.microsoft.com/office/drawing/2014/main" id="{A8DD8439-05E8-4148-BBDF-DDD2C9CA6420}"/>
               </a:ext>
             </a:extLst>
           </p:cNvPr>
@@ -6192,7 +6192,7 @@
                 <a:ea typeface="Aptos"/>
                 <a:cs typeface="Aptos"/>
               </a:rPr>
-              <a:t>Päivitetty 2026-08-02</a:t>
+              <a:t>Päivitetty 2026-08-03</a:t>
             </a:r>
             <a:br>
               <a:rPr sz="1700" b="0">
@@ -6223,7 +6223,7 @@
           <p:cNvPr id="10" name="TextBox 9">
             <a:extLst xmlns:a="http://schemas.openxmlformats.org/drawingml/2006/main">
               <a:ext uri="{FF2B5EF4-FFF2-40B4-BE49-F238E27FC236}">
-                <a16:creationId xmlns:a16="http://schemas.microsoft.com/office/drawing/2014/main" id="{CCDF1F88-E89C-412D-A6C1-345A9EDF3C2A}"/>
+                <a16:creationId xmlns:a16="http://schemas.microsoft.com/office/drawing/2014/main" id="{7A539B7E-4A18-43D1-9535-09611BA24F8D}"/>
               </a:ext>
             </a:extLst>
           </p:cNvPr>
@@ -6270,7 +6270,7 @@
           <p:cNvPr id="11" name="TextBox 10">
             <a:extLst xmlns:a="http://schemas.openxmlformats.org/drawingml/2006/main">
               <a:ext uri="{FF2B5EF4-FFF2-40B4-BE49-F238E27FC236}">
-                <a16:creationId xmlns:a16="http://schemas.microsoft.com/office/drawing/2014/main" id="{06DD561A-134F-4F69-A22C-E62727F928B6}"/>
+                <a16:creationId xmlns:a16="http://schemas.microsoft.com/office/drawing/2014/main" id="{1C1EE5CA-FEE5-4E7B-B7A8-7BDD5A894316}"/>
               </a:ext>
             </a:extLst>
           </p:cNvPr>
@@ -6317,7 +6317,7 @@
           <p:cNvPr id="12" name="TextBox 11">
             <a:extLst xmlns:a="http://schemas.openxmlformats.org/drawingml/2006/main">
               <a:ext uri="{FF2B5EF4-FFF2-40B4-BE49-F238E27FC236}">
-                <a16:creationId xmlns:a16="http://schemas.microsoft.com/office/drawing/2014/main" id="{221FAD6A-BB38-4663-87CF-F060900D1907}"/>
+                <a16:creationId xmlns:a16="http://schemas.microsoft.com/office/drawing/2014/main" id="{FDE9C108-F00A-49C2-BE09-9EB5B571646A}"/>
               </a:ext>
             </a:extLst>
           </p:cNvPr>
@@ -6362,7 +6362,7 @@
     </p:spTree>
     <p:extLst>
       <p:ext uri="{BB962C8B-B14F-4D97-AF65-F5344CB8AC3E}">
-        <p14:creationId xmlns:p14="http://schemas.microsoft.com/office/powerpoint/2010/main" val="1249775649"/>
+        <p14:creationId xmlns:p14="http://schemas.microsoft.com/office/powerpoint/2010/main" val="542874425"/>
       </p:ext>
     </p:extLst>
   </p:cSld>
@@ -6386,7 +6386,7 @@
           <p:cNvPr id="2" name="TextBox 1">
             <a:extLst xmlns:a="http://schemas.openxmlformats.org/drawingml/2006/main">
               <a:ext uri="{FF2B5EF4-FFF2-40B4-BE49-F238E27FC236}">
-                <a16:creationId xmlns:a16="http://schemas.microsoft.com/office/drawing/2014/main" id="{C332BE6D-3E36-4183-9E37-DC3FC5A83812}"/>
+                <a16:creationId xmlns:a16="http://schemas.microsoft.com/office/drawing/2014/main" id="{E3ECFC75-F6B0-4C71-8D50-DFAF133AD3CC}"/>
               </a:ext>
             </a:extLst>
           </p:cNvPr>
@@ -6433,7 +6433,7 @@
           <p:cNvPr id="3" name="TextBox 2">
             <a:extLst xmlns:a="http://schemas.openxmlformats.org/drawingml/2006/main">
               <a:ext uri="{FF2B5EF4-FFF2-40B4-BE49-F238E27FC236}">
-                <a16:creationId xmlns:a16="http://schemas.microsoft.com/office/drawing/2014/main" id="{E77094C8-654A-44CD-8436-DC6FE523DF93}"/>
+                <a16:creationId xmlns:a16="http://schemas.microsoft.com/office/drawing/2014/main" id="{DEAC39A4-4048-4DF8-9B6F-5E96C3621409}"/>
               </a:ext>
             </a:extLst>
           </p:cNvPr>
@@ -6480,7 +6480,7 @@
           <p:cNvPr id="4" name="Rectangle 3">
             <a:extLst xmlns:a="http://schemas.openxmlformats.org/drawingml/2006/main">
               <a:ext uri="{FF2B5EF4-FFF2-40B4-BE49-F238E27FC236}">
-                <a16:creationId xmlns:a16="http://schemas.microsoft.com/office/drawing/2014/main" id="{AE29B307-5865-4CAB-8157-2D63F2B0C0B6}"/>
+                <a16:creationId xmlns:a16="http://schemas.microsoft.com/office/drawing/2014/main" id="{942F81B3-713C-4845-A4C0-187635E99C50}"/>
               </a:ext>
             </a:extLst>
           </p:cNvPr>
@@ -6535,7 +6535,7 @@
           <p:cNvPr id="5" name="Rectangle 4">
             <a:extLst xmlns:a="http://schemas.openxmlformats.org/drawingml/2006/main">
               <a:ext uri="{FF2B5EF4-FFF2-40B4-BE49-F238E27FC236}">
-                <a16:creationId xmlns:a16="http://schemas.microsoft.com/office/drawing/2014/main" id="{BF07A6FA-67E6-425F-911C-2C7762EDEF09}"/>
+                <a16:creationId xmlns:a16="http://schemas.microsoft.com/office/drawing/2014/main" id="{A6462D34-AE40-4947-9834-140A8F22B561}"/>
               </a:ext>
             </a:extLst>
           </p:cNvPr>
@@ -6590,7 +6590,7 @@
           <p:cNvPr id="6" name="TextBox 5">
             <a:extLst xmlns:a="http://schemas.openxmlformats.org/drawingml/2006/main">
               <a:ext uri="{FF2B5EF4-FFF2-40B4-BE49-F238E27FC236}">
-                <a16:creationId xmlns:a16="http://schemas.microsoft.com/office/drawing/2014/main" id="{A2F745CF-2A79-4418-98E4-3B4F823506DA}"/>
+                <a16:creationId xmlns:a16="http://schemas.microsoft.com/office/drawing/2014/main" id="{1E30C0A4-0B32-4B24-95F0-FDADD7985581}"/>
               </a:ext>
             </a:extLst>
           </p:cNvPr>
@@ -6627,7 +6627,7 @@
                 <a:ea typeface="Aptos"/>
                 <a:cs typeface="Aptos"/>
               </a:rPr>
-              <a:t>Julkinen riippumaton evidenssikooste · 2026.08.02-41 · 2026-08-02 · Lähteet: EPO; Saksa — viralliset tuomiot; WIPO</a:t>
+              <a:t>Julkinen riippumaton evidenssikooste · 2026.08.03-43 · 2026-08-03 · Lähteet: EPO; Saksa — viralliset tuomiot; WIPO</a:t>
             </a:r>
           </a:p>
         </p:txBody>
@@ -6637,7 +6637,7 @@
           <p:cNvPr id="7" name="TextBox 6">
             <a:extLst xmlns:a="http://schemas.openxmlformats.org/drawingml/2006/main">
               <a:ext uri="{FF2B5EF4-FFF2-40B4-BE49-F238E27FC236}">
-                <a16:creationId xmlns:a16="http://schemas.microsoft.com/office/drawing/2014/main" id="{989EA47F-5696-4E5E-AE0C-998621D9B45D}"/>
+                <a16:creationId xmlns:a16="http://schemas.microsoft.com/office/drawing/2014/main" id="{67BD5498-5CD8-4E2B-89CA-D7660734E8A7}"/>
               </a:ext>
             </a:extLst>
           </p:cNvPr>
@@ -6684,7 +6684,7 @@
           <p:cNvPr id="8" name="TextBox 7">
             <a:extLst xmlns:a="http://schemas.openxmlformats.org/drawingml/2006/main">
               <a:ext uri="{FF2B5EF4-FFF2-40B4-BE49-F238E27FC236}">
-                <a16:creationId xmlns:a16="http://schemas.microsoft.com/office/drawing/2014/main" id="{8C42A4BA-75CA-41DB-B53E-8C7D78C81131}"/>
+                <a16:creationId xmlns:a16="http://schemas.microsoft.com/office/drawing/2014/main" id="{78C3253F-D5E9-4794-BFCA-61CA989490E2}"/>
               </a:ext>
             </a:extLst>
           </p:cNvPr>
@@ -6731,7 +6731,7 @@
           <p:cNvPr id="9" name="TextBox 8">
             <a:extLst xmlns:a="http://schemas.openxmlformats.org/drawingml/2006/main">
               <a:ext uri="{FF2B5EF4-FFF2-40B4-BE49-F238E27FC236}">
-                <a16:creationId xmlns:a16="http://schemas.microsoft.com/office/drawing/2014/main" id="{F3546EC0-2FA8-44BE-AB51-CD4028C3EE81}"/>
+                <a16:creationId xmlns:a16="http://schemas.microsoft.com/office/drawing/2014/main" id="{7AAE6062-EF18-4A8E-AAC0-E7BFAE6CA3A1}"/>
               </a:ext>
             </a:extLst>
           </p:cNvPr>
@@ -6828,7 +6828,7 @@
           <p:cNvPr id="10" name="Rounded Rectangle 9">
             <a:extLst xmlns:a="http://schemas.openxmlformats.org/drawingml/2006/main">
               <a:ext uri="{FF2B5EF4-FFF2-40B4-BE49-F238E27FC236}">
-                <a16:creationId xmlns:a16="http://schemas.microsoft.com/office/drawing/2014/main" id="{283E111D-CC47-42E3-8B76-26540A91CC81}"/>
+                <a16:creationId xmlns:a16="http://schemas.microsoft.com/office/drawing/2014/main" id="{E2346D9F-C908-4AB3-BD00-180A399624AF}"/>
               </a:ext>
             </a:extLst>
           </p:cNvPr>
@@ -6885,7 +6885,7 @@
           <p:cNvPr id="11" name="TextBox 10">
             <a:extLst xmlns:a="http://schemas.openxmlformats.org/drawingml/2006/main">
               <a:ext uri="{FF2B5EF4-FFF2-40B4-BE49-F238E27FC236}">
-                <a16:creationId xmlns:a16="http://schemas.microsoft.com/office/drawing/2014/main" id="{99B521B2-EF30-4244-9F25-6226462B5A15}"/>
+                <a16:creationId xmlns:a16="http://schemas.microsoft.com/office/drawing/2014/main" id="{0267A85B-B02A-4772-B973-E3A7BC4435B8}"/>
               </a:ext>
             </a:extLst>
           </p:cNvPr>
@@ -6932,7 +6932,7 @@
           <p:cNvPr id="12" name="TextBox 11">
             <a:extLst xmlns:a="http://schemas.openxmlformats.org/drawingml/2006/main">
               <a:ext uri="{FF2B5EF4-FFF2-40B4-BE49-F238E27FC236}">
-                <a16:creationId xmlns:a16="http://schemas.microsoft.com/office/drawing/2014/main" id="{B97614C8-2AF5-4E17-91D9-60EF3BE347F7}"/>
+                <a16:creationId xmlns:a16="http://schemas.microsoft.com/office/drawing/2014/main" id="{512FAC07-FDB3-4B0E-A9E6-56CEA28770DB}"/>
               </a:ext>
             </a:extLst>
           </p:cNvPr>
@@ -6977,7 +6977,7 @@
     </p:spTree>
     <p:extLst>
       <p:ext uri="{BB962C8B-B14F-4D97-AF65-F5344CB8AC3E}">
-        <p14:creationId xmlns:p14="http://schemas.microsoft.com/office/powerpoint/2010/main" val="132720041"/>
+        <p14:creationId xmlns:p14="http://schemas.microsoft.com/office/powerpoint/2010/main" val="2070673728"/>
       </p:ext>
     </p:extLst>
   </p:cSld>
@@ -7001,7 +7001,7 @@
           <p:cNvPr id="2" name="TextBox 1">
             <a:extLst xmlns:a="http://schemas.openxmlformats.org/drawingml/2006/main">
               <a:ext uri="{FF2B5EF4-FFF2-40B4-BE49-F238E27FC236}">
-                <a16:creationId xmlns:a16="http://schemas.microsoft.com/office/drawing/2014/main" id="{E245412F-0143-432D-B9F6-FE2F53A2607A}"/>
+                <a16:creationId xmlns:a16="http://schemas.microsoft.com/office/drawing/2014/main" id="{B55D5FF2-9075-4E7F-81C2-B54804C433F8}"/>
               </a:ext>
             </a:extLst>
           </p:cNvPr>
@@ -7048,7 +7048,7 @@
           <p:cNvPr id="3" name="TextBox 2">
             <a:extLst xmlns:a="http://schemas.openxmlformats.org/drawingml/2006/main">
               <a:ext uri="{FF2B5EF4-FFF2-40B4-BE49-F238E27FC236}">
-                <a16:creationId xmlns:a16="http://schemas.microsoft.com/office/drawing/2014/main" id="{4DA894B3-3ED4-45FA-9A23-06D576B6277D}"/>
+                <a16:creationId xmlns:a16="http://schemas.microsoft.com/office/drawing/2014/main" id="{17E81F21-3D59-4BA2-804D-D4F2E23C389C}"/>
               </a:ext>
             </a:extLst>
           </p:cNvPr>
@@ -7095,7 +7095,7 @@
           <p:cNvPr id="4" name="Rectangle 3">
             <a:extLst xmlns:a="http://schemas.openxmlformats.org/drawingml/2006/main">
               <a:ext uri="{FF2B5EF4-FFF2-40B4-BE49-F238E27FC236}">
-                <a16:creationId xmlns:a16="http://schemas.microsoft.com/office/drawing/2014/main" id="{CE6184B8-AD94-4699-A54A-8B6EABA2C97C}"/>
+                <a16:creationId xmlns:a16="http://schemas.microsoft.com/office/drawing/2014/main" id="{ED684827-B936-4BBA-9A7F-FFD66445058C}"/>
               </a:ext>
             </a:extLst>
           </p:cNvPr>
@@ -7150,7 +7150,7 @@
           <p:cNvPr id="5" name="Rectangle 4">
             <a:extLst xmlns:a="http://schemas.openxmlformats.org/drawingml/2006/main">
               <a:ext uri="{FF2B5EF4-FFF2-40B4-BE49-F238E27FC236}">
-                <a16:creationId xmlns:a16="http://schemas.microsoft.com/office/drawing/2014/main" id="{D02A1CE3-AD8B-48B4-8B62-C1F476F95F1B}"/>
+                <a16:creationId xmlns:a16="http://schemas.microsoft.com/office/drawing/2014/main" id="{0F926EA5-6ED0-4C8B-A067-EF46FBE892D6}"/>
               </a:ext>
             </a:extLst>
           </p:cNvPr>
@@ -7205,7 +7205,7 @@
           <p:cNvPr id="6" name="TextBox 5">
             <a:extLst xmlns:a="http://schemas.openxmlformats.org/drawingml/2006/main">
               <a:ext uri="{FF2B5EF4-FFF2-40B4-BE49-F238E27FC236}">
-                <a16:creationId xmlns:a16="http://schemas.microsoft.com/office/drawing/2014/main" id="{719E54BA-7BF1-45F6-97A6-C82BEDD0EDB2}"/>
+                <a16:creationId xmlns:a16="http://schemas.microsoft.com/office/drawing/2014/main" id="{E08E06A0-AB1A-4120-BA87-81DB936C4704}"/>
               </a:ext>
             </a:extLst>
           </p:cNvPr>
@@ -7242,7 +7242,7 @@
                 <a:ea typeface="Aptos"/>
                 <a:cs typeface="Aptos"/>
               </a:rPr>
-              <a:t>Julkinen riippumaton evidenssikooste · 2026.08.02-41 · 2026-08-02 · Lähteet: EPO Register; EP3032975B2; 8 Ni 18/24 (EP); 7 O 3341/24</a:t>
+              <a:t>Julkinen riippumaton evidenssikooste · 2026.08.03-43 · 2026-08-03 · Lähteet: EPO Register; EP3032975B2; 8 Ni 18/24 (EP); 7 O 3341/24</a:t>
             </a:r>
           </a:p>
         </p:txBody>
@@ -7252,7 +7252,7 @@
           <p:cNvPr id="7" name="TextBox 6">
             <a:extLst xmlns:a="http://schemas.openxmlformats.org/drawingml/2006/main">
               <a:ext uri="{FF2B5EF4-FFF2-40B4-BE49-F238E27FC236}">
-                <a16:creationId xmlns:a16="http://schemas.microsoft.com/office/drawing/2014/main" id="{CFAA54FB-0B01-4CB6-B010-5F627197162B}"/>
+                <a16:creationId xmlns:a16="http://schemas.microsoft.com/office/drawing/2014/main" id="{9871F0BD-28D0-4ABE-A6A2-7D89D01F7891}"/>
               </a:ext>
             </a:extLst>
           </p:cNvPr>
@@ -7299,7 +7299,7 @@
           <p:cNvPr id="8" name="Rounded Rectangle 7">
             <a:extLst xmlns:a="http://schemas.openxmlformats.org/drawingml/2006/main">
               <a:ext uri="{FF2B5EF4-FFF2-40B4-BE49-F238E27FC236}">
-                <a16:creationId xmlns:a16="http://schemas.microsoft.com/office/drawing/2014/main" id="{6D3E7A53-D0BD-4944-AAA1-5DCCF0B11101}"/>
+                <a16:creationId xmlns:a16="http://schemas.microsoft.com/office/drawing/2014/main" id="{27294AB7-5772-4D09-A69F-2073E7178688}"/>
               </a:ext>
             </a:extLst>
           </p:cNvPr>
@@ -7356,7 +7356,7 @@
           <p:cNvPr id="9" name="TextBox 8">
             <a:extLst xmlns:a="http://schemas.openxmlformats.org/drawingml/2006/main">
               <a:ext uri="{FF2B5EF4-FFF2-40B4-BE49-F238E27FC236}">
-                <a16:creationId xmlns:a16="http://schemas.microsoft.com/office/drawing/2014/main" id="{7E2AF28D-2A3E-49B6-B3C7-9B19E68A3409}"/>
+                <a16:creationId xmlns:a16="http://schemas.microsoft.com/office/drawing/2014/main" id="{E76D5082-DAD2-47B1-ADC2-B2597A3A2473}"/>
               </a:ext>
             </a:extLst>
           </p:cNvPr>
@@ -7403,7 +7403,7 @@
           <p:cNvPr id="10" name="TextBox 9">
             <a:extLst xmlns:a="http://schemas.openxmlformats.org/drawingml/2006/main">
               <a:ext uri="{FF2B5EF4-FFF2-40B4-BE49-F238E27FC236}">
-                <a16:creationId xmlns:a16="http://schemas.microsoft.com/office/drawing/2014/main" id="{AE5A4ADA-F674-4E7B-BC37-2790703E7847}"/>
+                <a16:creationId xmlns:a16="http://schemas.microsoft.com/office/drawing/2014/main" id="{298748B8-2A84-4A93-B783-13772D13D2B6}"/>
               </a:ext>
             </a:extLst>
           </p:cNvPr>
@@ -7450,7 +7450,7 @@
           <p:cNvPr id="11" name="Rounded Rectangle 10">
             <a:extLst xmlns:a="http://schemas.openxmlformats.org/drawingml/2006/main">
               <a:ext uri="{FF2B5EF4-FFF2-40B4-BE49-F238E27FC236}">
-                <a16:creationId xmlns:a16="http://schemas.microsoft.com/office/drawing/2014/main" id="{87C2F364-1B86-451C-BB01-A39C0A8BBD58}"/>
+                <a16:creationId xmlns:a16="http://schemas.microsoft.com/office/drawing/2014/main" id="{8D5534B0-60FC-448D-AD8D-E6B738D7C7EF}"/>
               </a:ext>
             </a:extLst>
           </p:cNvPr>
@@ -7507,7 +7507,7 @@
           <p:cNvPr id="12" name="TextBox 11">
             <a:extLst xmlns:a="http://schemas.openxmlformats.org/drawingml/2006/main">
               <a:ext uri="{FF2B5EF4-FFF2-40B4-BE49-F238E27FC236}">
-                <a16:creationId xmlns:a16="http://schemas.microsoft.com/office/drawing/2014/main" id="{6D17457A-2045-4CC4-A44A-60B8BDB03793}"/>
+                <a16:creationId xmlns:a16="http://schemas.microsoft.com/office/drawing/2014/main" id="{CF06DF1C-BE2D-4B15-BC52-A67AEBDE0C46}"/>
               </a:ext>
             </a:extLst>
           </p:cNvPr>
@@ -7554,7 +7554,7 @@
           <p:cNvPr id="13" name="TextBox 12">
             <a:extLst xmlns:a="http://schemas.openxmlformats.org/drawingml/2006/main">
               <a:ext uri="{FF2B5EF4-FFF2-40B4-BE49-F238E27FC236}">
-                <a16:creationId xmlns:a16="http://schemas.microsoft.com/office/drawing/2014/main" id="{CFB63D24-025E-4891-A1D4-32E9D04414F0}"/>
+                <a16:creationId xmlns:a16="http://schemas.microsoft.com/office/drawing/2014/main" id="{ED524C43-F40A-49FC-9D49-95816CCC29C6}"/>
               </a:ext>
             </a:extLst>
           </p:cNvPr>
@@ -7601,7 +7601,7 @@
           <p:cNvPr id="14" name="Rounded Rectangle 13">
             <a:extLst xmlns:a="http://schemas.openxmlformats.org/drawingml/2006/main">
               <a:ext uri="{FF2B5EF4-FFF2-40B4-BE49-F238E27FC236}">
-                <a16:creationId xmlns:a16="http://schemas.microsoft.com/office/drawing/2014/main" id="{8DD1C002-B0B1-4180-B3DE-6C05F03BA62A}"/>
+                <a16:creationId xmlns:a16="http://schemas.microsoft.com/office/drawing/2014/main" id="{34C8905B-81DE-47FC-B195-FA1FC59072FF}"/>
               </a:ext>
             </a:extLst>
           </p:cNvPr>
@@ -7658,7 +7658,7 @@
           <p:cNvPr id="15" name="TextBox 14">
             <a:extLst xmlns:a="http://schemas.openxmlformats.org/drawingml/2006/main">
               <a:ext uri="{FF2B5EF4-FFF2-40B4-BE49-F238E27FC236}">
-                <a16:creationId xmlns:a16="http://schemas.microsoft.com/office/drawing/2014/main" id="{C5698D63-A675-406F-9F16-2E28095B8897}"/>
+                <a16:creationId xmlns:a16="http://schemas.microsoft.com/office/drawing/2014/main" id="{E2D682FD-ED15-4ACD-B6E1-FE0345080944}"/>
               </a:ext>
             </a:extLst>
           </p:cNvPr>
@@ -7705,7 +7705,7 @@
           <p:cNvPr id="16" name="TextBox 15">
             <a:extLst xmlns:a="http://schemas.openxmlformats.org/drawingml/2006/main">
               <a:ext uri="{FF2B5EF4-FFF2-40B4-BE49-F238E27FC236}">
-                <a16:creationId xmlns:a16="http://schemas.microsoft.com/office/drawing/2014/main" id="{FDE4467A-D7CE-4797-AA79-E66292443FE5}"/>
+                <a16:creationId xmlns:a16="http://schemas.microsoft.com/office/drawing/2014/main" id="{6399BA5B-1829-4C8A-9E2A-8B2905D2CDE4}"/>
               </a:ext>
             </a:extLst>
           </p:cNvPr>
@@ -7752,7 +7752,7 @@
           <p:cNvPr id="17" name="TextBox 16">
             <a:extLst xmlns:a="http://schemas.openxmlformats.org/drawingml/2006/main">
               <a:ext uri="{FF2B5EF4-FFF2-40B4-BE49-F238E27FC236}">
-                <a16:creationId xmlns:a16="http://schemas.microsoft.com/office/drawing/2014/main" id="{08C05A75-F3DF-4BC0-A565-4FC6B4C05AD2}"/>
+                <a16:creationId xmlns:a16="http://schemas.microsoft.com/office/drawing/2014/main" id="{6B0E71AA-903A-4CE4-8E65-A35FE55AE21E}"/>
               </a:ext>
             </a:extLst>
           </p:cNvPr>
@@ -7799,7 +7799,7 @@
           <p:cNvPr id="18" name="Rounded Rectangle 17">
             <a:extLst xmlns:a="http://schemas.openxmlformats.org/drawingml/2006/main">
               <a:ext uri="{FF2B5EF4-FFF2-40B4-BE49-F238E27FC236}">
-                <a16:creationId xmlns:a16="http://schemas.microsoft.com/office/drawing/2014/main" id="{95B07C92-0093-4316-8180-A83E01BBCB97}"/>
+                <a16:creationId xmlns:a16="http://schemas.microsoft.com/office/drawing/2014/main" id="{3CAE5392-78E1-48BF-AD09-C5850AC91732}"/>
               </a:ext>
             </a:extLst>
           </p:cNvPr>
@@ -7856,7 +7856,7 @@
           <p:cNvPr id="19" name="TextBox 18">
             <a:extLst xmlns:a="http://schemas.openxmlformats.org/drawingml/2006/main">
               <a:ext uri="{FF2B5EF4-FFF2-40B4-BE49-F238E27FC236}">
-                <a16:creationId xmlns:a16="http://schemas.microsoft.com/office/drawing/2014/main" id="{9411A644-F459-4F71-837D-5FFFA46F292C}"/>
+                <a16:creationId xmlns:a16="http://schemas.microsoft.com/office/drawing/2014/main" id="{D9DD1ED0-6A97-4B48-88A1-B9303750D34D}"/>
               </a:ext>
             </a:extLst>
           </p:cNvPr>
@@ -7903,7 +7903,7 @@
           <p:cNvPr id="20" name="TextBox 19">
             <a:extLst xmlns:a="http://schemas.openxmlformats.org/drawingml/2006/main">
               <a:ext uri="{FF2B5EF4-FFF2-40B4-BE49-F238E27FC236}">
-                <a16:creationId xmlns:a16="http://schemas.microsoft.com/office/drawing/2014/main" id="{BDDB44DA-F571-4C9C-90E5-12F5F8B2026E}"/>
+                <a16:creationId xmlns:a16="http://schemas.microsoft.com/office/drawing/2014/main" id="{FD73FA5E-347F-4777-B30A-319064893693}"/>
               </a:ext>
             </a:extLst>
           </p:cNvPr>
@@ -7948,7 +7948,7 @@
     </p:spTree>
     <p:extLst>
       <p:ext uri="{BB962C8B-B14F-4D97-AF65-F5344CB8AC3E}">
-        <p14:creationId xmlns:p14="http://schemas.microsoft.com/office/powerpoint/2010/main" val="972812776"/>
+        <p14:creationId xmlns:p14="http://schemas.microsoft.com/office/powerpoint/2010/main" val="1772925028"/>
       </p:ext>
     </p:extLst>
   </p:cSld>
@@ -7972,7 +7972,7 @@
           <p:cNvPr id="2" name="TextBox 1">
             <a:extLst xmlns:a="http://schemas.openxmlformats.org/drawingml/2006/main">
               <a:ext uri="{FF2B5EF4-FFF2-40B4-BE49-F238E27FC236}">
-                <a16:creationId xmlns:a16="http://schemas.microsoft.com/office/drawing/2014/main" id="{D5C0F7AA-E3ED-473E-92A8-8229DD046AEE}"/>
+                <a16:creationId xmlns:a16="http://schemas.microsoft.com/office/drawing/2014/main" id="{BA6BBAEC-A653-46DC-B22D-6B80ED6CA3D5}"/>
               </a:ext>
             </a:extLst>
           </p:cNvPr>
@@ -8019,7 +8019,7 @@
           <p:cNvPr id="3" name="TextBox 2">
             <a:extLst xmlns:a="http://schemas.openxmlformats.org/drawingml/2006/main">
               <a:ext uri="{FF2B5EF4-FFF2-40B4-BE49-F238E27FC236}">
-                <a16:creationId xmlns:a16="http://schemas.microsoft.com/office/drawing/2014/main" id="{C7CA2990-E741-44EF-9E64-FB8E067DAF80}"/>
+                <a16:creationId xmlns:a16="http://schemas.microsoft.com/office/drawing/2014/main" id="{6097D5ED-BDFA-4A42-B7E8-A7B82C6490FF}"/>
               </a:ext>
             </a:extLst>
           </p:cNvPr>
@@ -8066,7 +8066,7 @@
           <p:cNvPr id="4" name="Rectangle 3">
             <a:extLst xmlns:a="http://schemas.openxmlformats.org/drawingml/2006/main">
               <a:ext uri="{FF2B5EF4-FFF2-40B4-BE49-F238E27FC236}">
-                <a16:creationId xmlns:a16="http://schemas.microsoft.com/office/drawing/2014/main" id="{5BA29B41-D262-4D6F-BF05-995B09C4FC3F}"/>
+                <a16:creationId xmlns:a16="http://schemas.microsoft.com/office/drawing/2014/main" id="{41A2C8F7-7C90-4A97-81C8-D4C3D112496F}"/>
               </a:ext>
             </a:extLst>
           </p:cNvPr>
@@ -8121,7 +8121,7 @@
           <p:cNvPr id="5" name="Rectangle 4">
             <a:extLst xmlns:a="http://schemas.openxmlformats.org/drawingml/2006/main">
               <a:ext uri="{FF2B5EF4-FFF2-40B4-BE49-F238E27FC236}">
-                <a16:creationId xmlns:a16="http://schemas.microsoft.com/office/drawing/2014/main" id="{7BFCB130-8E7B-432D-9BB5-64CDC99AD79E}"/>
+                <a16:creationId xmlns:a16="http://schemas.microsoft.com/office/drawing/2014/main" id="{F8CFB0EE-CFA1-45BD-B589-5F2A1F7F0B26}"/>
               </a:ext>
             </a:extLst>
           </p:cNvPr>
@@ -8176,7 +8176,7 @@
           <p:cNvPr id="6" name="TextBox 5">
             <a:extLst xmlns:a="http://schemas.openxmlformats.org/drawingml/2006/main">
               <a:ext uri="{FF2B5EF4-FFF2-40B4-BE49-F238E27FC236}">
-                <a16:creationId xmlns:a16="http://schemas.microsoft.com/office/drawing/2014/main" id="{216ED3E8-E642-415A-A3B6-81597EBE78FA}"/>
+                <a16:creationId xmlns:a16="http://schemas.microsoft.com/office/drawing/2014/main" id="{71CFEDBA-55BA-421E-9294-A8CBBE35F91F}"/>
               </a:ext>
             </a:extLst>
           </p:cNvPr>
@@ -8213,7 +8213,7 @@
                 <a:ea typeface="Aptos"/>
                 <a:cs typeface="Aptos"/>
               </a:rPr>
-              <a:t>Julkinen riippumaton evidenssikooste · 2026.08.02-41 · 2026-08-02 · Lähteet: World Bank; Statistics Canada; Health Canada; NZ Ministry of Health; Sejm; FHM; FTC; ADM</a:t>
+              <a:t>Julkinen riippumaton evidenssikooste · 2026.08.03-43 · 2026-08-03 · Lähteet: World Bank; Statistics Canada; Health Canada; NZ Ministry of Health; Sejm; FHM; FTC; ADM</a:t>
             </a:r>
           </a:p>
         </p:txBody>
@@ -8223,7 +8223,7 @@
           <p:cNvPr id="7" name="TextBox 6">
             <a:extLst xmlns:a="http://schemas.openxmlformats.org/drawingml/2006/main">
               <a:ext uri="{FF2B5EF4-FFF2-40B4-BE49-F238E27FC236}">
-                <a16:creationId xmlns:a16="http://schemas.microsoft.com/office/drawing/2014/main" id="{0B9F98DB-37E9-43D1-B9AB-B75ACC4F0A86}"/>
+                <a16:creationId xmlns:a16="http://schemas.microsoft.com/office/drawing/2014/main" id="{30E17460-D008-4C71-89ED-1FF17E41960D}"/>
               </a:ext>
             </a:extLst>
           </p:cNvPr>
@@ -8270,7 +8270,7 @@
           <p:cNvPr id="8" name="Rounded Rectangle 7">
             <a:extLst xmlns:a="http://schemas.openxmlformats.org/drawingml/2006/main">
               <a:ext uri="{FF2B5EF4-FFF2-40B4-BE49-F238E27FC236}">
-                <a16:creationId xmlns:a16="http://schemas.microsoft.com/office/drawing/2014/main" id="{396A33F8-7713-4054-95E4-AF2081B52702}"/>
+                <a16:creationId xmlns:a16="http://schemas.microsoft.com/office/drawing/2014/main" id="{9A611903-1D6C-4D77-916E-14FCA680472C}"/>
               </a:ext>
             </a:extLst>
           </p:cNvPr>
@@ -8327,7 +8327,7 @@
           <p:cNvPr id="9" name="TextBox 8">
             <a:extLst xmlns:a="http://schemas.openxmlformats.org/drawingml/2006/main">
               <a:ext uri="{FF2B5EF4-FFF2-40B4-BE49-F238E27FC236}">
-                <a16:creationId xmlns:a16="http://schemas.microsoft.com/office/drawing/2014/main" id="{BEE3C1AF-59DA-4114-AEF7-7C09D30380AB}"/>
+                <a16:creationId xmlns:a16="http://schemas.microsoft.com/office/drawing/2014/main" id="{7B65DDC1-B853-4E1C-A5E9-3697F26D8701}"/>
               </a:ext>
             </a:extLst>
           </p:cNvPr>
@@ -8374,7 +8374,7 @@
           <p:cNvPr id="10" name="TextBox 9">
             <a:extLst xmlns:a="http://schemas.openxmlformats.org/drawingml/2006/main">
               <a:ext uri="{FF2B5EF4-FFF2-40B4-BE49-F238E27FC236}">
-                <a16:creationId xmlns:a16="http://schemas.microsoft.com/office/drawing/2014/main" id="{A3E14104-78B6-4EA4-98B4-C56DFC5B4057}"/>
+                <a16:creationId xmlns:a16="http://schemas.microsoft.com/office/drawing/2014/main" id="{417FE203-69A3-4D40-8B74-990912B26E62}"/>
               </a:ext>
             </a:extLst>
           </p:cNvPr>
@@ -8411,7 +8411,7 @@
                 <a:ea typeface="Aptos"/>
                 <a:cs typeface="Aptos"/>
               </a:rPr>
-              <a:t>578 WB-havaintoa · 98 markkinamittaria + 36 Ruotsin FHM-lukua</a:t>
+              <a:t>578 WB-havaintoa · 116 markkinamittaria + 36 Ruotsin FHM-lukua</a:t>
             </a:r>
           </a:p>
         </p:txBody>
@@ -8421,7 +8421,7 @@
           <p:cNvPr id="11" name="Rounded Rectangle 10">
             <a:extLst xmlns:a="http://schemas.openxmlformats.org/drawingml/2006/main">
               <a:ext uri="{FF2B5EF4-FFF2-40B4-BE49-F238E27FC236}">
-                <a16:creationId xmlns:a16="http://schemas.microsoft.com/office/drawing/2014/main" id="{2E0ACD05-BB6F-4FE9-B0D4-7BCC27D27DB7}"/>
+                <a16:creationId xmlns:a16="http://schemas.microsoft.com/office/drawing/2014/main" id="{CA796A61-7DAE-4835-861F-275AD36D0E48}"/>
               </a:ext>
             </a:extLst>
           </p:cNvPr>
@@ -8478,7 +8478,7 @@
           <p:cNvPr id="12" name="TextBox 11">
             <a:extLst xmlns:a="http://schemas.openxmlformats.org/drawingml/2006/main">
               <a:ext uri="{FF2B5EF4-FFF2-40B4-BE49-F238E27FC236}">
-                <a16:creationId xmlns:a16="http://schemas.microsoft.com/office/drawing/2014/main" id="{C064C54B-D3CF-4D7E-A157-2FD6807A8ED7}"/>
+                <a16:creationId xmlns:a16="http://schemas.microsoft.com/office/drawing/2014/main" id="{F18C709E-B2BE-4AD3-AA9A-BEB67F5E66D2}"/>
               </a:ext>
             </a:extLst>
           </p:cNvPr>
@@ -8525,7 +8525,7 @@
           <p:cNvPr id="13" name="TextBox 12">
             <a:extLst xmlns:a="http://schemas.openxmlformats.org/drawingml/2006/main">
               <a:ext uri="{FF2B5EF4-FFF2-40B4-BE49-F238E27FC236}">
-                <a16:creationId xmlns:a16="http://schemas.microsoft.com/office/drawing/2014/main" id="{986EEBD3-1C82-445E-937B-AEF2D76E6D6B}"/>
+                <a16:creationId xmlns:a16="http://schemas.microsoft.com/office/drawing/2014/main" id="{49F24AC0-5CBF-4DF3-BD2E-009C18BE838B}"/>
               </a:ext>
             </a:extLst>
           </p:cNvPr>
@@ -8572,7 +8572,7 @@
           <p:cNvPr id="14" name="Rounded Rectangle 13">
             <a:extLst xmlns:a="http://schemas.openxmlformats.org/drawingml/2006/main">
               <a:ext uri="{FF2B5EF4-FFF2-40B4-BE49-F238E27FC236}">
-                <a16:creationId xmlns:a16="http://schemas.microsoft.com/office/drawing/2014/main" id="{60BD2442-32B2-4483-924A-DCDB64FF7399}"/>
+                <a16:creationId xmlns:a16="http://schemas.microsoft.com/office/drawing/2014/main" id="{BB369147-1DDD-4AED-BE3A-0DDB35F83C11}"/>
               </a:ext>
             </a:extLst>
           </p:cNvPr>
@@ -8629,7 +8629,7 @@
           <p:cNvPr id="15" name="TextBox 14">
             <a:extLst xmlns:a="http://schemas.openxmlformats.org/drawingml/2006/main">
               <a:ext uri="{FF2B5EF4-FFF2-40B4-BE49-F238E27FC236}">
-                <a16:creationId xmlns:a16="http://schemas.microsoft.com/office/drawing/2014/main" id="{3A8F51CF-5855-4782-B861-909EE78189DE}"/>
+                <a16:creationId xmlns:a16="http://schemas.microsoft.com/office/drawing/2014/main" id="{634B9F65-279C-44C7-9FC2-DD19248F2557}"/>
               </a:ext>
             </a:extLst>
           </p:cNvPr>
@@ -8676,7 +8676,7 @@
           <p:cNvPr id="16" name="TextBox 15">
             <a:extLst xmlns:a="http://schemas.openxmlformats.org/drawingml/2006/main">
               <a:ext uri="{FF2B5EF4-FFF2-40B4-BE49-F238E27FC236}">
-                <a16:creationId xmlns:a16="http://schemas.microsoft.com/office/drawing/2014/main" id="{367B9DDC-D86A-47A6-808A-C6520ACEBEAE}"/>
+                <a16:creationId xmlns:a16="http://schemas.microsoft.com/office/drawing/2014/main" id="{FE661942-9965-4210-8636-B3FFF90394FC}"/>
               </a:ext>
             </a:extLst>
           </p:cNvPr>
@@ -8723,7 +8723,7 @@
           <p:cNvPr id="17" name="TextBox 16">
             <a:extLst xmlns:a="http://schemas.openxmlformats.org/drawingml/2006/main">
               <a:ext uri="{FF2B5EF4-FFF2-40B4-BE49-F238E27FC236}">
-                <a16:creationId xmlns:a16="http://schemas.microsoft.com/office/drawing/2014/main" id="{EA83DF4A-4E12-49FA-BFA9-C81AE7DF6971}"/>
+                <a16:creationId xmlns:a16="http://schemas.microsoft.com/office/drawing/2014/main" id="{5E8D442C-C959-45F2-BE22-B64365523394}"/>
               </a:ext>
             </a:extLst>
           </p:cNvPr>
@@ -8760,7 +8760,7 @@
                 <a:ea typeface="Aptos"/>
                 <a:cs typeface="Aptos"/>
               </a:rPr>
-              <a:t>Kanada 7/10: D5/D7 hylätty ja D10 avoin. NZ:n 183,371/197,070 milj. NZD nettorajaproxyt eivät ole retail-arvoja. Saksa DE-BLIND-1.0.0: EI PISTEYTETTY. Euromonitor pausella; ei ostoa tai maksua.</a:t>
+              <a:t>Kanada 7/10; NZ:n rajaproxyt eivät ole retail-arvoja. Saksan yksityinen DE-BLIND-audit läpäisi vuosien 2023 ja 2024 vuosirajat sekä yhteisrajan; arvot salassa. Euromonitor 1/6, EI PISTEYTETTY; laajempi paketti HOLD.</a:t>
             </a:r>
           </a:p>
         </p:txBody>
@@ -8770,7 +8770,7 @@
           <p:cNvPr id="18" name="Rounded Rectangle 17">
             <a:extLst xmlns:a="http://schemas.openxmlformats.org/drawingml/2006/main">
               <a:ext uri="{FF2B5EF4-FFF2-40B4-BE49-F238E27FC236}">
-                <a16:creationId xmlns:a16="http://schemas.microsoft.com/office/drawing/2014/main" id="{B6AF74D2-8CFF-4EAE-B986-5BDE5049A926}"/>
+                <a16:creationId xmlns:a16="http://schemas.microsoft.com/office/drawing/2014/main" id="{5C499F5D-CDBF-41AF-94CB-D787F485D5E0}"/>
               </a:ext>
             </a:extLst>
           </p:cNvPr>
@@ -8827,7 +8827,7 @@
           <p:cNvPr id="19" name="TextBox 18">
             <a:extLst xmlns:a="http://schemas.openxmlformats.org/drawingml/2006/main">
               <a:ext uri="{FF2B5EF4-FFF2-40B4-BE49-F238E27FC236}">
-                <a16:creationId xmlns:a16="http://schemas.microsoft.com/office/drawing/2014/main" id="{181DF1AF-72D5-42CA-951C-AAC3E91633F9}"/>
+                <a16:creationId xmlns:a16="http://schemas.microsoft.com/office/drawing/2014/main" id="{66486416-4F89-4C82-8CBE-1862EB552107}"/>
               </a:ext>
             </a:extLst>
           </p:cNvPr>
@@ -8874,7 +8874,7 @@
           <p:cNvPr id="20" name="TextBox 19">
             <a:extLst xmlns:a="http://schemas.openxmlformats.org/drawingml/2006/main">
               <a:ext uri="{FF2B5EF4-FFF2-40B4-BE49-F238E27FC236}">
-                <a16:creationId xmlns:a16="http://schemas.microsoft.com/office/drawing/2014/main" id="{C29BF723-CEBE-498F-A00D-8AB988E45BE5}"/>
+                <a16:creationId xmlns:a16="http://schemas.microsoft.com/office/drawing/2014/main" id="{92FB8661-E0FD-4172-BEE5-7B97EE721A69}"/>
               </a:ext>
             </a:extLst>
           </p:cNvPr>
@@ -8919,7 +8919,7 @@
     </p:spTree>
     <p:extLst>
       <p:ext uri="{BB962C8B-B14F-4D97-AF65-F5344CB8AC3E}">
-        <p14:creationId xmlns:p14="http://schemas.microsoft.com/office/powerpoint/2010/main" val="89231990"/>
+        <p14:creationId xmlns:p14="http://schemas.microsoft.com/office/powerpoint/2010/main" val="446780176"/>
       </p:ext>
     </p:extLst>
   </p:cSld>
@@ -8943,7 +8943,7 @@
           <p:cNvPr id="2" name="TextBox 1">
             <a:extLst xmlns:a="http://schemas.openxmlformats.org/drawingml/2006/main">
               <a:ext uri="{FF2B5EF4-FFF2-40B4-BE49-F238E27FC236}">
-                <a16:creationId xmlns:a16="http://schemas.microsoft.com/office/drawing/2014/main" id="{BAB2617C-1D89-4450-BF61-5F9A05260778}"/>
+                <a16:creationId xmlns:a16="http://schemas.microsoft.com/office/drawing/2014/main" id="{2FE0391D-CCAA-4CB8-910F-1510F6DE4614}"/>
               </a:ext>
             </a:extLst>
           </p:cNvPr>
@@ -8990,7 +8990,7 @@
           <p:cNvPr id="3" name="TextBox 2">
             <a:extLst xmlns:a="http://schemas.openxmlformats.org/drawingml/2006/main">
               <a:ext uri="{FF2B5EF4-FFF2-40B4-BE49-F238E27FC236}">
-                <a16:creationId xmlns:a16="http://schemas.microsoft.com/office/drawing/2014/main" id="{A474096C-23F5-4FC0-ADEB-DFB7C7EBB2EA}"/>
+                <a16:creationId xmlns:a16="http://schemas.microsoft.com/office/drawing/2014/main" id="{E322613C-D838-4D28-B512-7E212CF8E6AF}"/>
               </a:ext>
             </a:extLst>
           </p:cNvPr>
@@ -9037,7 +9037,7 @@
           <p:cNvPr id="4" name="Rectangle 3">
             <a:extLst xmlns:a="http://schemas.openxmlformats.org/drawingml/2006/main">
               <a:ext uri="{FF2B5EF4-FFF2-40B4-BE49-F238E27FC236}">
-                <a16:creationId xmlns:a16="http://schemas.microsoft.com/office/drawing/2014/main" id="{EA627E7E-1581-4B4E-9E48-D25ABED86C6E}"/>
+                <a16:creationId xmlns:a16="http://schemas.microsoft.com/office/drawing/2014/main" id="{AF799ACF-D2D1-4186-9690-05B58FE37F38}"/>
               </a:ext>
             </a:extLst>
           </p:cNvPr>
@@ -9092,7 +9092,7 @@
           <p:cNvPr id="5" name="Rectangle 4">
             <a:extLst xmlns:a="http://schemas.openxmlformats.org/drawingml/2006/main">
               <a:ext uri="{FF2B5EF4-FFF2-40B4-BE49-F238E27FC236}">
-                <a16:creationId xmlns:a16="http://schemas.microsoft.com/office/drawing/2014/main" id="{90F1F761-353D-4D1C-8A56-3F6D46AE89BF}"/>
+                <a16:creationId xmlns:a16="http://schemas.microsoft.com/office/drawing/2014/main" id="{9FC87847-2E3B-49E6-A6D8-9BD338154BE0}"/>
               </a:ext>
             </a:extLst>
           </p:cNvPr>
@@ -9147,7 +9147,7 @@
           <p:cNvPr id="6" name="TextBox 5">
             <a:extLst xmlns:a="http://schemas.openxmlformats.org/drawingml/2006/main">
               <a:ext uri="{FF2B5EF4-FFF2-40B4-BE49-F238E27FC236}">
-                <a16:creationId xmlns:a16="http://schemas.microsoft.com/office/drawing/2014/main" id="{95F2F50B-9B19-4996-B098-29DE3D709AB1}"/>
+                <a16:creationId xmlns:a16="http://schemas.microsoft.com/office/drawing/2014/main" id="{C711B8E3-2F55-45E2-B1BE-8822FEAF604C}"/>
               </a:ext>
             </a:extLst>
           </p:cNvPr>
@@ -9184,7 +9184,7 @@
                 <a:ea typeface="Aptos"/>
                 <a:cs typeface="Aptos"/>
               </a:rPr>
-              <a:t>Julkinen riippumaton evidenssikooste · 2026.08.02-41 · 2026-08-02 · Lähteet: Evidence Register; WIPO IP valuation</a:t>
+              <a:t>Julkinen riippumaton evidenssikooste · 2026.08.03-43 · 2026-08-03 · Lähteet: Evidence Register; WIPO IP valuation</a:t>
             </a:r>
           </a:p>
         </p:txBody>
@@ -9194,7 +9194,7 @@
           <p:cNvPr id="7" name="TextBox 6">
             <a:extLst xmlns:a="http://schemas.openxmlformats.org/drawingml/2006/main">
               <a:ext uri="{FF2B5EF4-FFF2-40B4-BE49-F238E27FC236}">
-                <a16:creationId xmlns:a16="http://schemas.microsoft.com/office/drawing/2014/main" id="{E08D3824-7C63-4E02-8192-367F09177DBC}"/>
+                <a16:creationId xmlns:a16="http://schemas.microsoft.com/office/drawing/2014/main" id="{4FEE8DAF-408D-45EA-84D1-001FA4277C85}"/>
               </a:ext>
             </a:extLst>
           </p:cNvPr>
@@ -9681,7 +9681,7 @@
           <p:cNvPr id="9" name="TextBox 8">
             <a:extLst xmlns:a="http://schemas.openxmlformats.org/drawingml/2006/main">
               <a:ext uri="{FF2B5EF4-FFF2-40B4-BE49-F238E27FC236}">
-                <a16:creationId xmlns:a16="http://schemas.microsoft.com/office/drawing/2014/main" id="{A6F909F6-A167-4622-BC37-1106A5CCFA9A}"/>
+                <a16:creationId xmlns:a16="http://schemas.microsoft.com/office/drawing/2014/main" id="{B0C64B02-E23C-46C1-A1A2-1D3D4F9588BD}"/>
               </a:ext>
             </a:extLst>
           </p:cNvPr>
@@ -9726,7 +9726,7 @@
     </p:spTree>
     <p:extLst>
       <p:ext uri="{BB962C8B-B14F-4D97-AF65-F5344CB8AC3E}">
-        <p14:creationId xmlns:p14="http://schemas.microsoft.com/office/powerpoint/2010/main" val="1956251279"/>
+        <p14:creationId xmlns:p14="http://schemas.microsoft.com/office/powerpoint/2010/main" val="1703289132"/>
       </p:ext>
     </p:extLst>
   </p:cSld>
@@ -9757,7 +9757,7 @@
           <p:cNvPr id="2" name="TextBox 1">
             <a:extLst xmlns:a="http://schemas.openxmlformats.org/drawingml/2006/main">
               <a:ext uri="{FF2B5EF4-FFF2-40B4-BE49-F238E27FC236}">
-                <a16:creationId xmlns:a16="http://schemas.microsoft.com/office/drawing/2014/main" id="{C2B2DBC6-B503-47FD-B1F2-AB460A866250}"/>
+                <a16:creationId xmlns:a16="http://schemas.microsoft.com/office/drawing/2014/main" id="{19C300D3-FC27-4EE2-8032-AACA02CF1EA4}"/>
               </a:ext>
             </a:extLst>
           </p:cNvPr>
@@ -9804,7 +9804,7 @@
           <p:cNvPr id="3" name="TextBox 2">
             <a:extLst xmlns:a="http://schemas.openxmlformats.org/drawingml/2006/main">
               <a:ext uri="{FF2B5EF4-FFF2-40B4-BE49-F238E27FC236}">
-                <a16:creationId xmlns:a16="http://schemas.microsoft.com/office/drawing/2014/main" id="{E84CCEFD-BC9D-4BCB-B438-66FB2D7B24F3}"/>
+                <a16:creationId xmlns:a16="http://schemas.microsoft.com/office/drawing/2014/main" id="{FC4B85A2-E99A-4CF0-AD45-C3669ADB2E67}"/>
               </a:ext>
             </a:extLst>
           </p:cNvPr>
@@ -9851,7 +9851,7 @@
           <p:cNvPr id="4" name="TextBox 3">
             <a:extLst xmlns:a="http://schemas.openxmlformats.org/drawingml/2006/main">
               <a:ext uri="{FF2B5EF4-FFF2-40B4-BE49-F238E27FC236}">
-                <a16:creationId xmlns:a16="http://schemas.microsoft.com/office/drawing/2014/main" id="{01C1146B-4DCD-45B4-A5F0-E643A839761D}"/>
+                <a16:creationId xmlns:a16="http://schemas.microsoft.com/office/drawing/2014/main" id="{1D0EAEE9-B123-4BE2-933B-A5E27579DE89}"/>
               </a:ext>
             </a:extLst>
           </p:cNvPr>
@@ -9970,7 +9970,7 @@
           <p:cNvPr id="5" name="TextBox 4">
             <a:extLst xmlns:a="http://schemas.openxmlformats.org/drawingml/2006/main">
               <a:ext uri="{FF2B5EF4-FFF2-40B4-BE49-F238E27FC236}">
-                <a16:creationId xmlns:a16="http://schemas.microsoft.com/office/drawing/2014/main" id="{836EC9E9-FC06-447B-9BDF-89BECBCDEB77}"/>
+                <a16:creationId xmlns:a16="http://schemas.microsoft.com/office/drawing/2014/main" id="{2764952F-059D-404B-A2EF-B8F980B409A6}"/>
               </a:ext>
             </a:extLst>
           </p:cNvPr>
@@ -10007,7 +10007,7 @@
                 <a:ea typeface="Aptos"/>
                 <a:cs typeface="Aptos"/>
               </a:rPr>
-              <a:t>Versio 2026.08.02-41 · 2026-08-02 · 6 / 6</a:t>
+              <a:t>Versio 2026.08.03-43 · 2026-08-03 · 6 / 6</a:t>
             </a:r>
           </a:p>
         </p:txBody>
@@ -10015,7 +10015,7 @@
     </p:spTree>
     <p:extLst>
       <p:ext uri="{BB962C8B-B14F-4D97-AF65-F5344CB8AC3E}">
-        <p14:creationId xmlns:p14="http://schemas.microsoft.com/office/powerpoint/2010/main" val="1617594658"/>
+        <p14:creationId xmlns:p14="http://schemas.microsoft.com/office/powerpoint/2010/main" val="523971775"/>
       </p:ext>
     </p:extLst>
   </p:cSld>

--- a/site/downloads/pixan-bank-deck-short-fi.pptx
+++ b/site/downloads/pixan-bank-deck-short-fi.pptx
@@ -2,18 +2,18 @@
 <file path=ppt/presentation.xml><?xml version="1.0" encoding="utf-8"?>
 <p:presentation xmlns:p="http://schemas.openxmlformats.org/presentationml/2006/main">
   <p:sldMasterIdLst>
-    <p:sldMasterId xmlns:r="http://schemas.openxmlformats.org/officeDocument/2006/relationships" id="2147483648" r:id="R1d985b8016d14698"/>
+    <p:sldMasterId xmlns:r="http://schemas.openxmlformats.org/officeDocument/2006/relationships" id="2147483648" r:id="R3ec1ff36a0a944d2"/>
   </p:sldMasterIdLst>
   <p:notesMasterIdLst>
-    <p:notesMasterId xmlns:r="http://schemas.openxmlformats.org/officeDocument/2006/relationships" r:id="Rd86ddc6546774a19"/>
+    <p:notesMasterId xmlns:r="http://schemas.openxmlformats.org/officeDocument/2006/relationships" r:id="R6ba250ac5f3e42cc"/>
   </p:notesMasterIdLst>
   <p:sldIdLst>
-    <p:sldId xmlns:r="http://schemas.openxmlformats.org/officeDocument/2006/relationships" id="256" r:id="R626bddc7f3c14c30"/>
-    <p:sldId xmlns:r="http://schemas.openxmlformats.org/officeDocument/2006/relationships" id="257" r:id="R776a086479b442eb"/>
-    <p:sldId xmlns:r="http://schemas.openxmlformats.org/officeDocument/2006/relationships" id="258" r:id="Raef92adc140a4847"/>
-    <p:sldId xmlns:r="http://schemas.openxmlformats.org/officeDocument/2006/relationships" id="259" r:id="R82b09a4efcf740d9"/>
-    <p:sldId xmlns:r="http://schemas.openxmlformats.org/officeDocument/2006/relationships" id="260" r:id="Rd718a3da1dad452f"/>
-    <p:sldId xmlns:r="http://schemas.openxmlformats.org/officeDocument/2006/relationships" id="261" r:id="Ra7e1cface16a4704"/>
+    <p:sldId xmlns:r="http://schemas.openxmlformats.org/officeDocument/2006/relationships" id="256" r:id="Rd937c6526fc64edf"/>
+    <p:sldId xmlns:r="http://schemas.openxmlformats.org/officeDocument/2006/relationships" id="257" r:id="Ra3a0799d85334619"/>
+    <p:sldId xmlns:r="http://schemas.openxmlformats.org/officeDocument/2006/relationships" id="258" r:id="R2ebc4650d9914693"/>
+    <p:sldId xmlns:r="http://schemas.openxmlformats.org/officeDocument/2006/relationships" id="259" r:id="Rb4641877ae584165"/>
+    <p:sldId xmlns:r="http://schemas.openxmlformats.org/officeDocument/2006/relationships" id="260" r:id="R6d66d3f98eaa4217"/>
+    <p:sldId xmlns:r="http://schemas.openxmlformats.org/officeDocument/2006/relationships" id="261" r:id="R27687315c4b04bd4"/>
   </p:sldIdLst>
   <p:sldSz cx="12191999" cy="6858000"/>
   <p:notesSz cx="6858000" cy="9144000"/>
@@ -2337,7 +2337,7 @@
           <p:cNvPr id="2" name="Title 1">
             <a:extLst xmlns:a="http://schemas.openxmlformats.org/drawingml/2006/main">
               <a:ext uri="{FF2B5EF4-FFF2-40B4-BE49-F238E27FC236}">
-                <a16:creationId xmlns:a16="http://schemas.microsoft.com/office/drawing/2014/main" id="{B39767D1-79CC-4BA4-896B-764799508B5B}"/>
+                <a16:creationId xmlns:a16="http://schemas.microsoft.com/office/drawing/2014/main" id="{9CBB0B0F-3D41-4D3B-A8F1-651FF49A664F}"/>
               </a:ext>
             </a:extLst>
           </p:cNvPr>
@@ -2369,7 +2369,7 @@
           <p:cNvPr id="3" name="Subtitle 2">
             <a:extLst xmlns:a="http://schemas.openxmlformats.org/drawingml/2006/main">
               <a:ext uri="{FF2B5EF4-FFF2-40B4-BE49-F238E27FC236}">
-                <a16:creationId xmlns:a16="http://schemas.microsoft.com/office/drawing/2014/main" id="{9F880659-5BD1-41B6-92EF-57CFB4352014}"/>
+                <a16:creationId xmlns:a16="http://schemas.microsoft.com/office/drawing/2014/main" id="{B69C4E8D-A343-466F-A4F9-F95B0556E5F8}"/>
               </a:ext>
             </a:extLst>
           </p:cNvPr>
@@ -2492,7 +2492,7 @@
           <p:cNvPr id="4" name="Date Placeholder 3">
             <a:extLst xmlns:a="http://schemas.openxmlformats.org/drawingml/2006/main">
               <a:ext uri="{FF2B5EF4-FFF2-40B4-BE49-F238E27FC236}">
-                <a16:creationId xmlns:a16="http://schemas.microsoft.com/office/drawing/2014/main" id="{9937753A-0DEF-4075-94DD-5B50EA3BA9F4}"/>
+                <a16:creationId xmlns:a16="http://schemas.microsoft.com/office/drawing/2014/main" id="{88DD0D72-071A-4486-9EDD-8771A577A028}"/>
               </a:ext>
             </a:extLst>
           </p:cNvPr>
@@ -2519,7 +2519,7 @@
           <p:cNvPr id="5" name="Footer Placeholder 4">
             <a:extLst xmlns:a="http://schemas.openxmlformats.org/drawingml/2006/main">
               <a:ext uri="{FF2B5EF4-FFF2-40B4-BE49-F238E27FC236}">
-                <a16:creationId xmlns:a16="http://schemas.microsoft.com/office/drawing/2014/main" id="{5996FC5A-FE7E-4E08-9ED0-4B489FA44815}"/>
+                <a16:creationId xmlns:a16="http://schemas.microsoft.com/office/drawing/2014/main" id="{C0071B55-039A-4B6F-8911-AE0A1E3B2554}"/>
               </a:ext>
             </a:extLst>
           </p:cNvPr>
@@ -2542,7 +2542,7 @@
           <p:cNvPr id="6" name="Slide Number Placeholder 5">
             <a:extLst xmlns:a="http://schemas.openxmlformats.org/drawingml/2006/main">
               <a:ext uri="{FF2B5EF4-FFF2-40B4-BE49-F238E27FC236}">
-                <a16:creationId xmlns:a16="http://schemas.microsoft.com/office/drawing/2014/main" id="{CEB45428-F5CB-4F9F-8201-EDA4C2211B21}"/>
+                <a16:creationId xmlns:a16="http://schemas.microsoft.com/office/drawing/2014/main" id="{3FC28EDF-0763-4A75-82B2-49A8DEEE892E}"/>
               </a:ext>
             </a:extLst>
           </p:cNvPr>
@@ -2586,7 +2586,7 @@
           <p:cNvPr id="2" name="Title 1">
             <a:extLst xmlns:a="http://schemas.openxmlformats.org/drawingml/2006/main">
               <a:ext uri="{FF2B5EF4-FFF2-40B4-BE49-F238E27FC236}">
-                <a16:creationId xmlns:a16="http://schemas.microsoft.com/office/drawing/2014/main" id="{B50684F3-1D57-4370-954D-F5A66BE108B1}"/>
+                <a16:creationId xmlns:a16="http://schemas.microsoft.com/office/drawing/2014/main" id="{7C5B1B62-7F44-4D4A-AB50-D08F1F47103B}"/>
               </a:ext>
             </a:extLst>
           </p:cNvPr>
@@ -2613,7 +2613,7 @@
           <p:cNvPr id="3" name="Vertical Text Placeholder 2">
             <a:extLst xmlns:a="http://schemas.openxmlformats.org/drawingml/2006/main">
               <a:ext uri="{FF2B5EF4-FFF2-40B4-BE49-F238E27FC236}">
-                <a16:creationId xmlns:a16="http://schemas.microsoft.com/office/drawing/2014/main" id="{A4823845-0CA4-4900-AB6C-8B5D97FC1BD2}"/>
+                <a16:creationId xmlns:a16="http://schemas.microsoft.com/office/drawing/2014/main" id="{C6E2FD54-F657-4390-B4BF-F8B44B4934B7}"/>
               </a:ext>
             </a:extLst>
           </p:cNvPr>
@@ -2675,7 +2675,7 @@
           <p:cNvPr id="4" name="Date Placeholder 3">
             <a:extLst xmlns:a="http://schemas.openxmlformats.org/drawingml/2006/main">
               <a:ext uri="{FF2B5EF4-FFF2-40B4-BE49-F238E27FC236}">
-                <a16:creationId xmlns:a16="http://schemas.microsoft.com/office/drawing/2014/main" id="{7E3D04BE-4D86-4BB5-AD1C-BF39FC23810E}"/>
+                <a16:creationId xmlns:a16="http://schemas.microsoft.com/office/drawing/2014/main" id="{19B88748-C594-46FE-88D1-D1B4572E7DFF}"/>
               </a:ext>
             </a:extLst>
           </p:cNvPr>
@@ -2702,7 +2702,7 @@
           <p:cNvPr id="5" name="Footer Placeholder 4">
             <a:extLst xmlns:a="http://schemas.openxmlformats.org/drawingml/2006/main">
               <a:ext uri="{FF2B5EF4-FFF2-40B4-BE49-F238E27FC236}">
-                <a16:creationId xmlns:a16="http://schemas.microsoft.com/office/drawing/2014/main" id="{76687F90-9BA8-4C44-857D-49C3FE6B75E7}"/>
+                <a16:creationId xmlns:a16="http://schemas.microsoft.com/office/drawing/2014/main" id="{85964E97-F802-4D26-9834-2F803655B53E}"/>
               </a:ext>
             </a:extLst>
           </p:cNvPr>
@@ -2725,7 +2725,7 @@
           <p:cNvPr id="6" name="Slide Number Placeholder 5">
             <a:extLst xmlns:a="http://schemas.openxmlformats.org/drawingml/2006/main">
               <a:ext uri="{FF2B5EF4-FFF2-40B4-BE49-F238E27FC236}">
-                <a16:creationId xmlns:a16="http://schemas.microsoft.com/office/drawing/2014/main" id="{72A3CE3A-A11C-427B-B30A-B6BF82B667B6}"/>
+                <a16:creationId xmlns:a16="http://schemas.microsoft.com/office/drawing/2014/main" id="{342EFAD7-6663-47A9-8A70-56B3F0775A0F}"/>
               </a:ext>
             </a:extLst>
           </p:cNvPr>
@@ -2769,7 +2769,7 @@
           <p:cNvPr id="2" name="Vertical Title 1">
             <a:extLst xmlns:a="http://schemas.openxmlformats.org/drawingml/2006/main">
               <a:ext uri="{FF2B5EF4-FFF2-40B4-BE49-F238E27FC236}">
-                <a16:creationId xmlns:a16="http://schemas.microsoft.com/office/drawing/2014/main" id="{FF3EC075-18F5-43BE-A11D-6160B06620C8}"/>
+                <a16:creationId xmlns:a16="http://schemas.microsoft.com/office/drawing/2014/main" id="{CEE401CB-43B8-4EB5-9127-68B96E713527}"/>
               </a:ext>
             </a:extLst>
           </p:cNvPr>
@@ -2801,7 +2801,7 @@
           <p:cNvPr id="3" name="Vertical Text Placeholder 2">
             <a:extLst xmlns:a="http://schemas.openxmlformats.org/drawingml/2006/main">
               <a:ext uri="{FF2B5EF4-FFF2-40B4-BE49-F238E27FC236}">
-                <a16:creationId xmlns:a16="http://schemas.microsoft.com/office/drawing/2014/main" id="{FF3D9E64-4FA6-47D4-93F9-849208B01EEA}"/>
+                <a16:creationId xmlns:a16="http://schemas.microsoft.com/office/drawing/2014/main" id="{32850403-977D-4728-AA4F-7EB9AAB8C754}"/>
               </a:ext>
             </a:extLst>
           </p:cNvPr>
@@ -2868,7 +2868,7 @@
           <p:cNvPr id="4" name="Date Placeholder 3">
             <a:extLst xmlns:a="http://schemas.openxmlformats.org/drawingml/2006/main">
               <a:ext uri="{FF2B5EF4-FFF2-40B4-BE49-F238E27FC236}">
-                <a16:creationId xmlns:a16="http://schemas.microsoft.com/office/drawing/2014/main" id="{353CF073-EE31-4332-8A06-96E1E9EE5B4D}"/>
+                <a16:creationId xmlns:a16="http://schemas.microsoft.com/office/drawing/2014/main" id="{1889A5CF-B21F-4E39-8A8C-C60AA749946A}"/>
               </a:ext>
             </a:extLst>
           </p:cNvPr>
@@ -2895,7 +2895,7 @@
           <p:cNvPr id="5" name="Footer Placeholder 4">
             <a:extLst xmlns:a="http://schemas.openxmlformats.org/drawingml/2006/main">
               <a:ext uri="{FF2B5EF4-FFF2-40B4-BE49-F238E27FC236}">
-                <a16:creationId xmlns:a16="http://schemas.microsoft.com/office/drawing/2014/main" id="{303564EC-AD59-42C2-95F7-E4A3C831A505}"/>
+                <a16:creationId xmlns:a16="http://schemas.microsoft.com/office/drawing/2014/main" id="{BA4BAE2A-1410-4FAD-95AE-FC3EDB7628AF}"/>
               </a:ext>
             </a:extLst>
           </p:cNvPr>
@@ -2918,7 +2918,7 @@
           <p:cNvPr id="6" name="Slide Number Placeholder 5">
             <a:extLst xmlns:a="http://schemas.openxmlformats.org/drawingml/2006/main">
               <a:ext uri="{FF2B5EF4-FFF2-40B4-BE49-F238E27FC236}">
-                <a16:creationId xmlns:a16="http://schemas.microsoft.com/office/drawing/2014/main" id="{38FD8B06-C1B2-4AC2-AD55-2F07EEB8EA08}"/>
+                <a16:creationId xmlns:a16="http://schemas.microsoft.com/office/drawing/2014/main" id="{623EB921-DD93-4E19-BF4E-F9E05D2448E1}"/>
               </a:ext>
             </a:extLst>
           </p:cNvPr>
@@ -2962,7 +2962,7 @@
           <p:cNvPr id="2" name="Title 1">
             <a:extLst xmlns:a="http://schemas.openxmlformats.org/drawingml/2006/main">
               <a:ext uri="{FF2B5EF4-FFF2-40B4-BE49-F238E27FC236}">
-                <a16:creationId xmlns:a16="http://schemas.microsoft.com/office/drawing/2014/main" id="{3C35A392-1F99-4D1D-9500-F19710D5903C}"/>
+                <a16:creationId xmlns:a16="http://schemas.microsoft.com/office/drawing/2014/main" id="{71C32F73-020A-4D40-95E9-B746BB80E106}"/>
               </a:ext>
             </a:extLst>
           </p:cNvPr>
@@ -2989,7 +2989,7 @@
           <p:cNvPr id="3" name="Content Placeholder 2">
             <a:extLst xmlns:a="http://schemas.openxmlformats.org/drawingml/2006/main">
               <a:ext uri="{FF2B5EF4-FFF2-40B4-BE49-F238E27FC236}">
-                <a16:creationId xmlns:a16="http://schemas.microsoft.com/office/drawing/2014/main" id="{476D6E94-ED93-4475-A380-500FE75D2F2D}"/>
+                <a16:creationId xmlns:a16="http://schemas.microsoft.com/office/drawing/2014/main" id="{1787C394-11DB-4DEA-861C-8E40035F3622}"/>
               </a:ext>
             </a:extLst>
           </p:cNvPr>
@@ -3051,7 +3051,7 @@
           <p:cNvPr id="4" name="Date Placeholder 3">
             <a:extLst xmlns:a="http://schemas.openxmlformats.org/drawingml/2006/main">
               <a:ext uri="{FF2B5EF4-FFF2-40B4-BE49-F238E27FC236}">
-                <a16:creationId xmlns:a16="http://schemas.microsoft.com/office/drawing/2014/main" id="{934E9273-4325-48CF-A6C7-C911F009A514}"/>
+                <a16:creationId xmlns:a16="http://schemas.microsoft.com/office/drawing/2014/main" id="{AC0AEE79-9D94-4CA2-AC24-74C2CAA99A1F}"/>
               </a:ext>
             </a:extLst>
           </p:cNvPr>
@@ -3078,7 +3078,7 @@
           <p:cNvPr id="5" name="Footer Placeholder 4">
             <a:extLst xmlns:a="http://schemas.openxmlformats.org/drawingml/2006/main">
               <a:ext uri="{FF2B5EF4-FFF2-40B4-BE49-F238E27FC236}">
-                <a16:creationId xmlns:a16="http://schemas.microsoft.com/office/drawing/2014/main" id="{19D91D71-1BA5-4B62-9CE8-F381AA420F16}"/>
+                <a16:creationId xmlns:a16="http://schemas.microsoft.com/office/drawing/2014/main" id="{2DC9C980-C1FA-443A-8421-844D25B41D1D}"/>
               </a:ext>
             </a:extLst>
           </p:cNvPr>
@@ -3101,7 +3101,7 @@
           <p:cNvPr id="6" name="Slide Number Placeholder 5">
             <a:extLst xmlns:a="http://schemas.openxmlformats.org/drawingml/2006/main">
               <a:ext uri="{FF2B5EF4-FFF2-40B4-BE49-F238E27FC236}">
-                <a16:creationId xmlns:a16="http://schemas.microsoft.com/office/drawing/2014/main" id="{61FE46EE-6A08-486E-B651-DB29F73EB2CB}"/>
+                <a16:creationId xmlns:a16="http://schemas.microsoft.com/office/drawing/2014/main" id="{099464E4-4FC5-4A43-986B-51ED8C467EB5}"/>
               </a:ext>
             </a:extLst>
           </p:cNvPr>
@@ -3145,7 +3145,7 @@
           <p:cNvPr id="2" name="Title 1">
             <a:extLst xmlns:a="http://schemas.openxmlformats.org/drawingml/2006/main">
               <a:ext uri="{FF2B5EF4-FFF2-40B4-BE49-F238E27FC236}">
-                <a16:creationId xmlns:a16="http://schemas.microsoft.com/office/drawing/2014/main" id="{90A07A30-026E-451C-B608-99940B94D8D5}"/>
+                <a16:creationId xmlns:a16="http://schemas.microsoft.com/office/drawing/2014/main" id="{A46F86CE-11C9-453F-83ED-658EBB75CBDC}"/>
               </a:ext>
             </a:extLst>
           </p:cNvPr>
@@ -3182,7 +3182,7 @@
           <p:cNvPr id="3" name="Text Placeholder 2">
             <a:extLst xmlns:a="http://schemas.openxmlformats.org/drawingml/2006/main">
               <a:ext uri="{FF2B5EF4-FFF2-40B4-BE49-F238E27FC236}">
-                <a16:creationId xmlns:a16="http://schemas.microsoft.com/office/drawing/2014/main" id="{080ED5FD-0E9D-40B8-B85C-9B9B2AEE53E4}"/>
+                <a16:creationId xmlns:a16="http://schemas.microsoft.com/office/drawing/2014/main" id="{F5968181-6708-437D-AC8D-740A4E01096D}"/>
               </a:ext>
             </a:extLst>
           </p:cNvPr>
@@ -3308,7 +3308,7 @@
           <p:cNvPr id="4" name="Date Placeholder 3">
             <a:extLst xmlns:a="http://schemas.openxmlformats.org/drawingml/2006/main">
               <a:ext uri="{FF2B5EF4-FFF2-40B4-BE49-F238E27FC236}">
-                <a16:creationId xmlns:a16="http://schemas.microsoft.com/office/drawing/2014/main" id="{1CA5DD92-FE18-4FBF-9AC4-6D9E9D149A98}"/>
+                <a16:creationId xmlns:a16="http://schemas.microsoft.com/office/drawing/2014/main" id="{FB7D649C-98CB-4EFC-BA3A-222C810B9295}"/>
               </a:ext>
             </a:extLst>
           </p:cNvPr>
@@ -3335,7 +3335,7 @@
           <p:cNvPr id="5" name="Footer Placeholder 4">
             <a:extLst xmlns:a="http://schemas.openxmlformats.org/drawingml/2006/main">
               <a:ext uri="{FF2B5EF4-FFF2-40B4-BE49-F238E27FC236}">
-                <a16:creationId xmlns:a16="http://schemas.microsoft.com/office/drawing/2014/main" id="{DBE49D63-0CBB-4387-B9E4-25846DA13274}"/>
+                <a16:creationId xmlns:a16="http://schemas.microsoft.com/office/drawing/2014/main" id="{0B4D222F-A8B5-45D4-BBCB-D47C7AEA9128}"/>
               </a:ext>
             </a:extLst>
           </p:cNvPr>
@@ -3358,7 +3358,7 @@
           <p:cNvPr id="6" name="Slide Number Placeholder 5">
             <a:extLst xmlns:a="http://schemas.openxmlformats.org/drawingml/2006/main">
               <a:ext uri="{FF2B5EF4-FFF2-40B4-BE49-F238E27FC236}">
-                <a16:creationId xmlns:a16="http://schemas.microsoft.com/office/drawing/2014/main" id="{C6968B40-4A6D-4372-95D8-CDE9DB1979E4}"/>
+                <a16:creationId xmlns:a16="http://schemas.microsoft.com/office/drawing/2014/main" id="{C7EAF876-026E-412A-8439-74894C14CE61}"/>
               </a:ext>
             </a:extLst>
           </p:cNvPr>
@@ -3402,7 +3402,7 @@
           <p:cNvPr id="2" name="Title 1">
             <a:extLst xmlns:a="http://schemas.openxmlformats.org/drawingml/2006/main">
               <a:ext uri="{FF2B5EF4-FFF2-40B4-BE49-F238E27FC236}">
-                <a16:creationId xmlns:a16="http://schemas.microsoft.com/office/drawing/2014/main" id="{305842BD-0223-4130-A6C7-B657C40E4DC9}"/>
+                <a16:creationId xmlns:a16="http://schemas.microsoft.com/office/drawing/2014/main" id="{ED7FB6E4-CA88-4BAC-BB5E-927C58590DF5}"/>
               </a:ext>
             </a:extLst>
           </p:cNvPr>
@@ -3429,7 +3429,7 @@
           <p:cNvPr id="3" name="Content Placeholder 2">
             <a:extLst xmlns:a="http://schemas.openxmlformats.org/drawingml/2006/main">
               <a:ext uri="{FF2B5EF4-FFF2-40B4-BE49-F238E27FC236}">
-                <a16:creationId xmlns:a16="http://schemas.microsoft.com/office/drawing/2014/main" id="{E559B403-7A19-4CA3-97CF-67D09EB0C72A}"/>
+                <a16:creationId xmlns:a16="http://schemas.microsoft.com/office/drawing/2014/main" id="{AF600267-AE53-42D7-BFE9-511D5A63D7CE}"/>
               </a:ext>
             </a:extLst>
           </p:cNvPr>
@@ -3533,7 +3533,7 @@
           <p:cNvPr id="4" name="Content Placeholder 3">
             <a:extLst xmlns:a="http://schemas.openxmlformats.org/drawingml/2006/main">
               <a:ext uri="{FF2B5EF4-FFF2-40B4-BE49-F238E27FC236}">
-                <a16:creationId xmlns:a16="http://schemas.microsoft.com/office/drawing/2014/main" id="{069BDF68-B22D-49CB-827A-69E045C7E577}"/>
+                <a16:creationId xmlns:a16="http://schemas.microsoft.com/office/drawing/2014/main" id="{EC72847E-3CC8-4A3E-A0FA-08C41C7B5757}"/>
               </a:ext>
             </a:extLst>
           </p:cNvPr>
@@ -3637,7 +3637,7 @@
           <p:cNvPr id="5" name="Date Placeholder 4">
             <a:extLst xmlns:a="http://schemas.openxmlformats.org/drawingml/2006/main">
               <a:ext uri="{FF2B5EF4-FFF2-40B4-BE49-F238E27FC236}">
-                <a16:creationId xmlns:a16="http://schemas.microsoft.com/office/drawing/2014/main" id="{7BDD9C25-65E1-47E8-B173-CB9DE73A94D8}"/>
+                <a16:creationId xmlns:a16="http://schemas.microsoft.com/office/drawing/2014/main" id="{3588A588-3705-49F7-A5AC-272EC94FA323}"/>
               </a:ext>
             </a:extLst>
           </p:cNvPr>
@@ -3664,7 +3664,7 @@
           <p:cNvPr id="6" name="Footer Placeholder 5">
             <a:extLst xmlns:a="http://schemas.openxmlformats.org/drawingml/2006/main">
               <a:ext uri="{FF2B5EF4-FFF2-40B4-BE49-F238E27FC236}">
-                <a16:creationId xmlns:a16="http://schemas.microsoft.com/office/drawing/2014/main" id="{D4E4A4B5-17E9-4E6C-A7BD-236C5E4FA01C}"/>
+                <a16:creationId xmlns:a16="http://schemas.microsoft.com/office/drawing/2014/main" id="{057057B3-81DD-49BB-9FBB-F037E18C8CDF}"/>
               </a:ext>
             </a:extLst>
           </p:cNvPr>
@@ -3687,7 +3687,7 @@
           <p:cNvPr id="7" name="Slide Number Placeholder 6">
             <a:extLst xmlns:a="http://schemas.openxmlformats.org/drawingml/2006/main">
               <a:ext uri="{FF2B5EF4-FFF2-40B4-BE49-F238E27FC236}">
-                <a16:creationId xmlns:a16="http://schemas.microsoft.com/office/drawing/2014/main" id="{94E735FE-131B-4FAA-98AB-29F07F19F296}"/>
+                <a16:creationId xmlns:a16="http://schemas.microsoft.com/office/drawing/2014/main" id="{35E8AE02-773B-4D4A-BE52-7637ECFE7585}"/>
               </a:ext>
             </a:extLst>
           </p:cNvPr>
@@ -3731,7 +3731,7 @@
           <p:cNvPr id="2" name="Title 1">
             <a:extLst xmlns:a="http://schemas.openxmlformats.org/drawingml/2006/main">
               <a:ext uri="{FF2B5EF4-FFF2-40B4-BE49-F238E27FC236}">
-                <a16:creationId xmlns:a16="http://schemas.microsoft.com/office/drawing/2014/main" id="{A5ED7675-D251-46C1-8EE9-2127A841188F}"/>
+                <a16:creationId xmlns:a16="http://schemas.microsoft.com/office/drawing/2014/main" id="{82595BB5-9F05-4048-8B9A-4F3F33B433C4}"/>
               </a:ext>
             </a:extLst>
           </p:cNvPr>
@@ -3763,7 +3763,7 @@
           <p:cNvPr id="3" name="Text Placeholder 2">
             <a:extLst xmlns:a="http://schemas.openxmlformats.org/drawingml/2006/main">
               <a:ext uri="{FF2B5EF4-FFF2-40B4-BE49-F238E27FC236}">
-                <a16:creationId xmlns:a16="http://schemas.microsoft.com/office/drawing/2014/main" id="{231801CC-BC84-4E38-8B51-C46D205DCE81}"/>
+                <a16:creationId xmlns:a16="http://schemas.microsoft.com/office/drawing/2014/main" id="{C481F311-E9D4-47CB-9ABB-CC38AFDF4952}"/>
               </a:ext>
             </a:extLst>
           </p:cNvPr>
@@ -3835,7 +3835,7 @@
           <p:cNvPr id="4" name="Content Placeholder 3">
             <a:extLst xmlns:a="http://schemas.openxmlformats.org/drawingml/2006/main">
               <a:ext uri="{FF2B5EF4-FFF2-40B4-BE49-F238E27FC236}">
-                <a16:creationId xmlns:a16="http://schemas.microsoft.com/office/drawing/2014/main" id="{B24CF473-5471-4F50-83D2-E2544F056FFE}"/>
+                <a16:creationId xmlns:a16="http://schemas.microsoft.com/office/drawing/2014/main" id="{9D093146-D5F3-4F43-922F-199005A569F0}"/>
               </a:ext>
             </a:extLst>
           </p:cNvPr>
@@ -3939,7 +3939,7 @@
           <p:cNvPr id="5" name="Text Placeholder 4">
             <a:extLst xmlns:a="http://schemas.openxmlformats.org/drawingml/2006/main">
               <a:ext uri="{FF2B5EF4-FFF2-40B4-BE49-F238E27FC236}">
-                <a16:creationId xmlns:a16="http://schemas.microsoft.com/office/drawing/2014/main" id="{990212E0-096C-4349-9B1E-6E839D9324EF}"/>
+                <a16:creationId xmlns:a16="http://schemas.microsoft.com/office/drawing/2014/main" id="{BDB6A65F-1608-407D-B3DC-AB497956A450}"/>
               </a:ext>
             </a:extLst>
           </p:cNvPr>
@@ -4011,7 +4011,7 @@
           <p:cNvPr id="6" name="Content Placeholder 5">
             <a:extLst xmlns:a="http://schemas.openxmlformats.org/drawingml/2006/main">
               <a:ext uri="{FF2B5EF4-FFF2-40B4-BE49-F238E27FC236}">
-                <a16:creationId xmlns:a16="http://schemas.microsoft.com/office/drawing/2014/main" id="{6055E5FF-2CE4-4949-A4BA-E78692BCAC9F}"/>
+                <a16:creationId xmlns:a16="http://schemas.microsoft.com/office/drawing/2014/main" id="{8D3D9616-721A-495E-93CA-0810202E85DD}"/>
               </a:ext>
             </a:extLst>
           </p:cNvPr>
@@ -4115,7 +4115,7 @@
           <p:cNvPr id="7" name="Date Placeholder 6">
             <a:extLst xmlns:a="http://schemas.openxmlformats.org/drawingml/2006/main">
               <a:ext uri="{FF2B5EF4-FFF2-40B4-BE49-F238E27FC236}">
-                <a16:creationId xmlns:a16="http://schemas.microsoft.com/office/drawing/2014/main" id="{AE22EF8E-976B-42C4-AFFB-C6BFD8F7ECBD}"/>
+                <a16:creationId xmlns:a16="http://schemas.microsoft.com/office/drawing/2014/main" id="{230FE205-59C1-47B1-B309-A5B83A354F27}"/>
               </a:ext>
             </a:extLst>
           </p:cNvPr>
@@ -4142,7 +4142,7 @@
           <p:cNvPr id="8" name="Footer Placeholder 7">
             <a:extLst xmlns:a="http://schemas.openxmlformats.org/drawingml/2006/main">
               <a:ext uri="{FF2B5EF4-FFF2-40B4-BE49-F238E27FC236}">
-                <a16:creationId xmlns:a16="http://schemas.microsoft.com/office/drawing/2014/main" id="{873A1112-903B-45BB-8376-F5E2F0088C20}"/>
+                <a16:creationId xmlns:a16="http://schemas.microsoft.com/office/drawing/2014/main" id="{FFAAB32F-9568-43C2-82D7-A5929BE0FB10}"/>
               </a:ext>
             </a:extLst>
           </p:cNvPr>
@@ -4165,7 +4165,7 @@
           <p:cNvPr id="9" name="Slide Number Placeholder 8">
             <a:extLst xmlns:a="http://schemas.openxmlformats.org/drawingml/2006/main">
               <a:ext uri="{FF2B5EF4-FFF2-40B4-BE49-F238E27FC236}">
-                <a16:creationId xmlns:a16="http://schemas.microsoft.com/office/drawing/2014/main" id="{4F28CB07-7D89-45DF-B468-158A61568FAB}"/>
+                <a16:creationId xmlns:a16="http://schemas.microsoft.com/office/drawing/2014/main" id="{FBC1B78E-AE8F-40A4-8802-291C237868A9}"/>
               </a:ext>
             </a:extLst>
           </p:cNvPr>
@@ -4209,7 +4209,7 @@
           <p:cNvPr id="2" name="Title 1">
             <a:extLst xmlns:a="http://schemas.openxmlformats.org/drawingml/2006/main">
               <a:ext uri="{FF2B5EF4-FFF2-40B4-BE49-F238E27FC236}">
-                <a16:creationId xmlns:a16="http://schemas.microsoft.com/office/drawing/2014/main" id="{A34786E3-F3A5-4255-8303-B90D6F026280}"/>
+                <a16:creationId xmlns:a16="http://schemas.microsoft.com/office/drawing/2014/main" id="{BDB4D049-4405-4B73-893C-3F34C77EF47E}"/>
               </a:ext>
             </a:extLst>
           </p:cNvPr>
@@ -4236,7 +4236,7 @@
           <p:cNvPr id="3" name="Date Placeholder 2">
             <a:extLst xmlns:a="http://schemas.openxmlformats.org/drawingml/2006/main">
               <a:ext uri="{FF2B5EF4-FFF2-40B4-BE49-F238E27FC236}">
-                <a16:creationId xmlns:a16="http://schemas.microsoft.com/office/drawing/2014/main" id="{E12AC0F2-3E37-4393-B911-A5C13A5EA651}"/>
+                <a16:creationId xmlns:a16="http://schemas.microsoft.com/office/drawing/2014/main" id="{B1CA887A-E4C7-4206-8EC3-3464A2DCF9B9}"/>
               </a:ext>
             </a:extLst>
           </p:cNvPr>
@@ -4263,7 +4263,7 @@
           <p:cNvPr id="4" name="Footer Placeholder 3">
             <a:extLst xmlns:a="http://schemas.openxmlformats.org/drawingml/2006/main">
               <a:ext uri="{FF2B5EF4-FFF2-40B4-BE49-F238E27FC236}">
-                <a16:creationId xmlns:a16="http://schemas.microsoft.com/office/drawing/2014/main" id="{BDF9E5E2-986B-4FFD-86FA-752C4704AAA8}"/>
+                <a16:creationId xmlns:a16="http://schemas.microsoft.com/office/drawing/2014/main" id="{F8FE28B5-2DD0-48A2-A169-F9CF762C052C}"/>
               </a:ext>
             </a:extLst>
           </p:cNvPr>
@@ -4286,7 +4286,7 @@
           <p:cNvPr id="5" name="Slide Number Placeholder 4">
             <a:extLst xmlns:a="http://schemas.openxmlformats.org/drawingml/2006/main">
               <a:ext uri="{FF2B5EF4-FFF2-40B4-BE49-F238E27FC236}">
-                <a16:creationId xmlns:a16="http://schemas.microsoft.com/office/drawing/2014/main" id="{F98E4F66-81D6-4F36-A666-301258E8DE84}"/>
+                <a16:creationId xmlns:a16="http://schemas.microsoft.com/office/drawing/2014/main" id="{85F77A28-D9DE-455E-9918-DCA6A5E163F0}"/>
               </a:ext>
             </a:extLst>
           </p:cNvPr>
@@ -4330,7 +4330,7 @@
           <p:cNvPr id="2" name="Date Placeholder 1">
             <a:extLst xmlns:a="http://schemas.openxmlformats.org/drawingml/2006/main">
               <a:ext uri="{FF2B5EF4-FFF2-40B4-BE49-F238E27FC236}">
-                <a16:creationId xmlns:a16="http://schemas.microsoft.com/office/drawing/2014/main" id="{1A0B686E-E112-4104-8A66-5D38BA672615}"/>
+                <a16:creationId xmlns:a16="http://schemas.microsoft.com/office/drawing/2014/main" id="{52FA939A-3455-4F09-8CDD-511C61290D93}"/>
               </a:ext>
             </a:extLst>
           </p:cNvPr>
@@ -4357,7 +4357,7 @@
           <p:cNvPr id="3" name="Footer Placeholder 2">
             <a:extLst xmlns:a="http://schemas.openxmlformats.org/drawingml/2006/main">
               <a:ext uri="{FF2B5EF4-FFF2-40B4-BE49-F238E27FC236}">
-                <a16:creationId xmlns:a16="http://schemas.microsoft.com/office/drawing/2014/main" id="{92CF92EB-39B9-45B7-8167-21A307B41534}"/>
+                <a16:creationId xmlns:a16="http://schemas.microsoft.com/office/drawing/2014/main" id="{E298E94C-7952-4457-BB3B-F60E2BD3F271}"/>
               </a:ext>
             </a:extLst>
           </p:cNvPr>
@@ -4380,7 +4380,7 @@
           <p:cNvPr id="4" name="Slide Number Placeholder 3">
             <a:extLst xmlns:a="http://schemas.openxmlformats.org/drawingml/2006/main">
               <a:ext uri="{FF2B5EF4-FFF2-40B4-BE49-F238E27FC236}">
-                <a16:creationId xmlns:a16="http://schemas.microsoft.com/office/drawing/2014/main" id="{735218E4-BC4E-4E3F-9F34-F4A000738927}"/>
+                <a16:creationId xmlns:a16="http://schemas.microsoft.com/office/drawing/2014/main" id="{39518B8D-3986-493B-92ED-9B77CC6C163A}"/>
               </a:ext>
             </a:extLst>
           </p:cNvPr>
@@ -4424,7 +4424,7 @@
           <p:cNvPr id="2" name="Title 1">
             <a:extLst xmlns:a="http://schemas.openxmlformats.org/drawingml/2006/main">
               <a:ext uri="{FF2B5EF4-FFF2-40B4-BE49-F238E27FC236}">
-                <a16:creationId xmlns:a16="http://schemas.microsoft.com/office/drawing/2014/main" id="{446A327A-58CF-4081-B41A-83D7B5FD0090}"/>
+                <a16:creationId xmlns:a16="http://schemas.microsoft.com/office/drawing/2014/main" id="{82C8BC37-DD2B-4B56-90B6-98D81092EDF8}"/>
               </a:ext>
             </a:extLst>
           </p:cNvPr>
@@ -4461,7 +4461,7 @@
           <p:cNvPr id="3" name="Content Placeholder 2">
             <a:extLst xmlns:a="http://schemas.openxmlformats.org/drawingml/2006/main">
               <a:ext uri="{FF2B5EF4-FFF2-40B4-BE49-F238E27FC236}">
-                <a16:creationId xmlns:a16="http://schemas.microsoft.com/office/drawing/2014/main" id="{3EC5C3F6-0622-434F-AA09-89D2B9C8448C}"/>
+                <a16:creationId xmlns:a16="http://schemas.microsoft.com/office/drawing/2014/main" id="{1EDA5CB5-5C35-4931-9B4B-69971E8A2A9A}"/>
               </a:ext>
             </a:extLst>
           </p:cNvPr>
@@ -4565,7 +4565,7 @@
           <p:cNvPr id="4" name="Text Placeholder 3">
             <a:extLst xmlns:a="http://schemas.openxmlformats.org/drawingml/2006/main">
               <a:ext uri="{FF2B5EF4-FFF2-40B4-BE49-F238E27FC236}">
-                <a16:creationId xmlns:a16="http://schemas.microsoft.com/office/drawing/2014/main" id="{5F64C720-DF30-4447-8058-D8555B4BD044}"/>
+                <a16:creationId xmlns:a16="http://schemas.microsoft.com/office/drawing/2014/main" id="{04E29216-52B6-446D-AD80-8575A9EAA965}"/>
               </a:ext>
             </a:extLst>
           </p:cNvPr>
@@ -4637,7 +4637,7 @@
           <p:cNvPr id="5" name="Date Placeholder 4">
             <a:extLst xmlns:a="http://schemas.openxmlformats.org/drawingml/2006/main">
               <a:ext uri="{FF2B5EF4-FFF2-40B4-BE49-F238E27FC236}">
-                <a16:creationId xmlns:a16="http://schemas.microsoft.com/office/drawing/2014/main" id="{3C16B53C-3A07-43A3-893D-7B2EC7604D8C}"/>
+                <a16:creationId xmlns:a16="http://schemas.microsoft.com/office/drawing/2014/main" id="{66A7B0C4-D76B-43B5-AD93-7B322C34BB93}"/>
               </a:ext>
             </a:extLst>
           </p:cNvPr>
@@ -4664,7 +4664,7 @@
           <p:cNvPr id="6" name="Footer Placeholder 5">
             <a:extLst xmlns:a="http://schemas.openxmlformats.org/drawingml/2006/main">
               <a:ext uri="{FF2B5EF4-FFF2-40B4-BE49-F238E27FC236}">
-                <a16:creationId xmlns:a16="http://schemas.microsoft.com/office/drawing/2014/main" id="{625081E9-DA77-4B6D-85D5-B8774E46512D}"/>
+                <a16:creationId xmlns:a16="http://schemas.microsoft.com/office/drawing/2014/main" id="{2B6359C8-7224-41C1-B79B-F8F20C17263B}"/>
               </a:ext>
             </a:extLst>
           </p:cNvPr>
@@ -4687,7 +4687,7 @@
           <p:cNvPr id="7" name="Slide Number Placeholder 6">
             <a:extLst xmlns:a="http://schemas.openxmlformats.org/drawingml/2006/main">
               <a:ext uri="{FF2B5EF4-FFF2-40B4-BE49-F238E27FC236}">
-                <a16:creationId xmlns:a16="http://schemas.microsoft.com/office/drawing/2014/main" id="{7E3120D8-A82E-4138-B653-CCCE6F37F7CF}"/>
+                <a16:creationId xmlns:a16="http://schemas.microsoft.com/office/drawing/2014/main" id="{78E7AEDC-BA19-4CBC-B707-62136BB55EE4}"/>
               </a:ext>
             </a:extLst>
           </p:cNvPr>
@@ -4731,7 +4731,7 @@
           <p:cNvPr id="2" name="Title 1">
             <a:extLst xmlns:a="http://schemas.openxmlformats.org/drawingml/2006/main">
               <a:ext uri="{FF2B5EF4-FFF2-40B4-BE49-F238E27FC236}">
-                <a16:creationId xmlns:a16="http://schemas.microsoft.com/office/drawing/2014/main" id="{8103BD5C-B0B3-4AEC-88EA-14DB118E635C}"/>
+                <a16:creationId xmlns:a16="http://schemas.microsoft.com/office/drawing/2014/main" id="{B6ABBD9B-2A9C-4590-BF00-307F7C4FD99E}"/>
               </a:ext>
             </a:extLst>
           </p:cNvPr>
@@ -4768,7 +4768,7 @@
           <p:cNvPr id="3" name="Picture Placeholder 2">
             <a:extLst xmlns:a="http://schemas.openxmlformats.org/drawingml/2006/main">
               <a:ext uri="{FF2B5EF4-FFF2-40B4-BE49-F238E27FC236}">
-                <a16:creationId xmlns:a16="http://schemas.microsoft.com/office/drawing/2014/main" id="{59FA46E3-4A06-4F43-9002-E64502F17A0F}"/>
+                <a16:creationId xmlns:a16="http://schemas.microsoft.com/office/drawing/2014/main" id="{51D62C67-C69A-412F-8963-83AD07C179F4}"/>
               </a:ext>
             </a:extLst>
           </p:cNvPr>
@@ -4833,7 +4833,7 @@
           <p:cNvPr id="4" name="Text Placeholder 3">
             <a:extLst xmlns:a="http://schemas.openxmlformats.org/drawingml/2006/main">
               <a:ext uri="{FF2B5EF4-FFF2-40B4-BE49-F238E27FC236}">
-                <a16:creationId xmlns:a16="http://schemas.microsoft.com/office/drawing/2014/main" id="{3E1BF926-3769-4FCF-8096-1BCF8D107B32}"/>
+                <a16:creationId xmlns:a16="http://schemas.microsoft.com/office/drawing/2014/main" id="{F934433C-4670-4DA1-9EDE-810D9796858A}"/>
               </a:ext>
             </a:extLst>
           </p:cNvPr>
@@ -4905,7 +4905,7 @@
           <p:cNvPr id="5" name="Date Placeholder 4">
             <a:extLst xmlns:a="http://schemas.openxmlformats.org/drawingml/2006/main">
               <a:ext uri="{FF2B5EF4-FFF2-40B4-BE49-F238E27FC236}">
-                <a16:creationId xmlns:a16="http://schemas.microsoft.com/office/drawing/2014/main" id="{7D2D6B48-33D8-49B2-B0B8-F458DFF773F4}"/>
+                <a16:creationId xmlns:a16="http://schemas.microsoft.com/office/drawing/2014/main" id="{CC7269C3-A6C2-4322-97C6-E050AF1048FC}"/>
               </a:ext>
             </a:extLst>
           </p:cNvPr>
@@ -4932,7 +4932,7 @@
           <p:cNvPr id="6" name="Footer Placeholder 5">
             <a:extLst xmlns:a="http://schemas.openxmlformats.org/drawingml/2006/main">
               <a:ext uri="{FF2B5EF4-FFF2-40B4-BE49-F238E27FC236}">
-                <a16:creationId xmlns:a16="http://schemas.microsoft.com/office/drawing/2014/main" id="{8C96BB21-DBD7-4314-990D-50A2A28D587B}"/>
+                <a16:creationId xmlns:a16="http://schemas.microsoft.com/office/drawing/2014/main" id="{4408A034-728A-4FEB-8E21-CF76A026864B}"/>
               </a:ext>
             </a:extLst>
           </p:cNvPr>
@@ -4955,7 +4955,7 @@
           <p:cNvPr id="7" name="Slide Number Placeholder 6">
             <a:extLst xmlns:a="http://schemas.openxmlformats.org/drawingml/2006/main">
               <a:ext uri="{FF2B5EF4-FFF2-40B4-BE49-F238E27FC236}">
-                <a16:creationId xmlns:a16="http://schemas.microsoft.com/office/drawing/2014/main" id="{E7E73DE4-842F-4C54-99DE-3429561A09CF}"/>
+                <a16:creationId xmlns:a16="http://schemas.microsoft.com/office/drawing/2014/main" id="{7EAD9B20-D8D3-4C84-933D-E46F0D0D62A5}"/>
               </a:ext>
             </a:extLst>
           </p:cNvPr>
@@ -5004,7 +5004,7 @@
           <p:cNvPr id="2" name="Title Placeholder 1">
             <a:extLst xmlns:a="http://schemas.openxmlformats.org/drawingml/2006/main">
               <a:ext uri="{FF2B5EF4-FFF2-40B4-BE49-F238E27FC236}">
-                <a16:creationId xmlns:a16="http://schemas.microsoft.com/office/drawing/2014/main" id="{03533A9B-26C2-494A-8DF0-CCCA471BCACE}"/>
+                <a16:creationId xmlns:a16="http://schemas.microsoft.com/office/drawing/2014/main" id="{6DA727A7-A2DC-42A2-B059-9207167A0021}"/>
               </a:ext>
             </a:extLst>
           </p:cNvPr>
@@ -5041,7 +5041,7 @@
           <p:cNvPr id="3" name="Text Placeholder 2">
             <a:extLst xmlns:a="http://schemas.openxmlformats.org/drawingml/2006/main">
               <a:ext uri="{FF2B5EF4-FFF2-40B4-BE49-F238E27FC236}">
-                <a16:creationId xmlns:a16="http://schemas.microsoft.com/office/drawing/2014/main" id="{48612B5B-6EAC-4D71-8B03-E3697FA6F33E}"/>
+                <a16:creationId xmlns:a16="http://schemas.microsoft.com/office/drawing/2014/main" id="{523EE68D-7C35-429B-B1BB-5002CCA5B751}"/>
               </a:ext>
             </a:extLst>
           </p:cNvPr>
@@ -5113,7 +5113,7 @@
           <p:cNvPr id="4" name="Date Placeholder 3">
             <a:extLst xmlns:a="http://schemas.openxmlformats.org/drawingml/2006/main">
               <a:ext uri="{FF2B5EF4-FFF2-40B4-BE49-F238E27FC236}">
-                <a16:creationId xmlns:a16="http://schemas.microsoft.com/office/drawing/2014/main" id="{D2172275-7786-4918-98A6-5C9B346F6DE9}"/>
+                <a16:creationId xmlns:a16="http://schemas.microsoft.com/office/drawing/2014/main" id="{6C7D41D9-D63F-41FD-8234-6BE19E7234B2}"/>
               </a:ext>
             </a:extLst>
           </p:cNvPr>
@@ -5159,7 +5159,7 @@
           <p:cNvPr id="5" name="Footer Placeholder 4">
             <a:extLst xmlns:a="http://schemas.openxmlformats.org/drawingml/2006/main">
               <a:ext uri="{FF2B5EF4-FFF2-40B4-BE49-F238E27FC236}">
-                <a16:creationId xmlns:a16="http://schemas.microsoft.com/office/drawing/2014/main" id="{DC5E0D39-72AA-41F1-A491-6877AFD37C09}"/>
+                <a16:creationId xmlns:a16="http://schemas.microsoft.com/office/drawing/2014/main" id="{04D57040-07C0-43F0-BA90-69B3E23DD360}"/>
               </a:ext>
             </a:extLst>
           </p:cNvPr>
@@ -5201,7 +5201,7 @@
           <p:cNvPr id="6" name="Slide Number Placeholder 5">
             <a:extLst xmlns:a="http://schemas.openxmlformats.org/drawingml/2006/main">
               <a:ext uri="{FF2B5EF4-FFF2-40B4-BE49-F238E27FC236}">
-                <a16:creationId xmlns:a16="http://schemas.microsoft.com/office/drawing/2014/main" id="{3A013D17-AD46-41AC-9D87-9BD27D0784D9}"/>
+                <a16:creationId xmlns:a16="http://schemas.microsoft.com/office/drawing/2014/main" id="{BF3A89A6-5F3B-4F60-BD2A-6B412E634BF3}"/>
               </a:ext>
             </a:extLst>
           </p:cNvPr>
@@ -5246,17 +5246,17 @@
   </p:cSld>
   <p:clrMap bg1="lt1" tx1="dk1" bg2="lt2" tx2="dk2" accent1="accent1" accent2="accent2" accent3="accent3" accent4="accent4" accent5="accent5" accent6="accent6" hlink="hlink" folHlink="folHlink"/>
   <p:sldLayoutIdLst>
-    <p:sldLayoutId xmlns:r="http://schemas.openxmlformats.org/officeDocument/2006/relationships" id="2147483649" r:id="R0bd2e2a8798b4626"/>
-    <p:sldLayoutId xmlns:r="http://schemas.openxmlformats.org/officeDocument/2006/relationships" id="2147483650" r:id="Rb8383a6823df4a9a"/>
-    <p:sldLayoutId xmlns:r="http://schemas.openxmlformats.org/officeDocument/2006/relationships" id="2147483651" r:id="Rca2a7a645fb745f6"/>
-    <p:sldLayoutId xmlns:r="http://schemas.openxmlformats.org/officeDocument/2006/relationships" id="2147483652" r:id="R41b0e0f8c0394d35"/>
-    <p:sldLayoutId xmlns:r="http://schemas.openxmlformats.org/officeDocument/2006/relationships" id="2147483653" r:id="Rddabc08044e8445d"/>
-    <p:sldLayoutId xmlns:r="http://schemas.openxmlformats.org/officeDocument/2006/relationships" id="2147483654" r:id="R4f99768d665641ea"/>
-    <p:sldLayoutId xmlns:r="http://schemas.openxmlformats.org/officeDocument/2006/relationships" id="2147483655" r:id="Rda16cfbc0740418a"/>
-    <p:sldLayoutId xmlns:r="http://schemas.openxmlformats.org/officeDocument/2006/relationships" id="2147483656" r:id="R2964d1ef63fc4f1b"/>
-    <p:sldLayoutId xmlns:r="http://schemas.openxmlformats.org/officeDocument/2006/relationships" id="2147483657" r:id="Rc283158694b84d8b"/>
-    <p:sldLayoutId xmlns:r="http://schemas.openxmlformats.org/officeDocument/2006/relationships" id="2147483658" r:id="Ra2325ef43c654b6e"/>
-    <p:sldLayoutId xmlns:r="http://schemas.openxmlformats.org/officeDocument/2006/relationships" id="2147483659" r:id="R1d88f9e596814b9f"/>
+    <p:sldLayoutId xmlns:r="http://schemas.openxmlformats.org/officeDocument/2006/relationships" id="2147483649" r:id="Rb0186a9981604758"/>
+    <p:sldLayoutId xmlns:r="http://schemas.openxmlformats.org/officeDocument/2006/relationships" id="2147483650" r:id="R6710bfe5c53f4f2f"/>
+    <p:sldLayoutId xmlns:r="http://schemas.openxmlformats.org/officeDocument/2006/relationships" id="2147483651" r:id="Raa74ef1985454d6c"/>
+    <p:sldLayoutId xmlns:r="http://schemas.openxmlformats.org/officeDocument/2006/relationships" id="2147483652" r:id="R6dfcb4422e37400b"/>
+    <p:sldLayoutId xmlns:r="http://schemas.openxmlformats.org/officeDocument/2006/relationships" id="2147483653" r:id="Rf4da700f2c054ea6"/>
+    <p:sldLayoutId xmlns:r="http://schemas.openxmlformats.org/officeDocument/2006/relationships" id="2147483654" r:id="R9e5055e438be4284"/>
+    <p:sldLayoutId xmlns:r="http://schemas.openxmlformats.org/officeDocument/2006/relationships" id="2147483655" r:id="R75bfe9a2c1a442a0"/>
+    <p:sldLayoutId xmlns:r="http://schemas.openxmlformats.org/officeDocument/2006/relationships" id="2147483656" r:id="Ref289043ac6349b3"/>
+    <p:sldLayoutId xmlns:r="http://schemas.openxmlformats.org/officeDocument/2006/relationships" id="2147483657" r:id="R2ba20051d35e40d6"/>
+    <p:sldLayoutId xmlns:r="http://schemas.openxmlformats.org/officeDocument/2006/relationships" id="2147483658" r:id="Rf57cb067f2c646c9"/>
+    <p:sldLayoutId xmlns:r="http://schemas.openxmlformats.org/officeDocument/2006/relationships" id="2147483659" r:id="R17be2e8f509f4a39"/>
   </p:sldLayoutIdLst>
   <p:txStyles>
     <p:titleStyle>
@@ -5809,7 +5809,7 @@
           <p:cNvPr id="2" name="Rectangle 1">
             <a:extLst xmlns:a="http://schemas.openxmlformats.org/drawingml/2006/main">
               <a:ext uri="{FF2B5EF4-FFF2-40B4-BE49-F238E27FC236}">
-                <a16:creationId xmlns:a16="http://schemas.microsoft.com/office/drawing/2014/main" id="{BAE52167-0725-4713-8CAB-44D8AF01D40C}"/>
+                <a16:creationId xmlns:a16="http://schemas.microsoft.com/office/drawing/2014/main" id="{6D4219B3-D7DD-4C3D-A0D0-75B4B0FCC8A4}"/>
               </a:ext>
             </a:extLst>
           </p:cNvPr>
@@ -5864,7 +5864,7 @@
           <p:cNvPr id="3" name="TextBox 2">
             <a:extLst xmlns:a="http://schemas.openxmlformats.org/drawingml/2006/main">
               <a:ext uri="{FF2B5EF4-FFF2-40B4-BE49-F238E27FC236}">
-                <a16:creationId xmlns:a16="http://schemas.microsoft.com/office/drawing/2014/main" id="{70025CBE-D0BE-4585-B6EB-6D4D2DFB59A1}"/>
+                <a16:creationId xmlns:a16="http://schemas.microsoft.com/office/drawing/2014/main" id="{461A587A-BFEB-4B08-B851-A2F41D179F15}"/>
               </a:ext>
             </a:extLst>
           </p:cNvPr>
@@ -5911,7 +5911,7 @@
           <p:cNvPr id="4" name="TextBox 3">
             <a:extLst xmlns:a="http://schemas.openxmlformats.org/drawingml/2006/main">
               <a:ext uri="{FF2B5EF4-FFF2-40B4-BE49-F238E27FC236}">
-                <a16:creationId xmlns:a16="http://schemas.microsoft.com/office/drawing/2014/main" id="{EC25C17B-6C00-419E-92A1-F00EDE9B24A1}"/>
+                <a16:creationId xmlns:a16="http://schemas.microsoft.com/office/drawing/2014/main" id="{EE978E36-A784-4621-B489-6E7EE5B9619A}"/>
               </a:ext>
             </a:extLst>
           </p:cNvPr>
@@ -5948,8 +5948,28 @@
                 <a:ea typeface="Aptos"/>
                 <a:cs typeface="Aptos"/>
               </a:rPr>
-              <a:t>Patentista pankkikelpoiseksi
-todistelupaketiksi</a:t>
+              <a:t>Puolustettavissa oleva patentin arvo</a:t>
+            </a:r>
+            <a:br>
+              <a:rPr sz="4000" b="1">
+                <a:solidFill>
+                  <a:srgbClr val="FFFFFF"/>
+                </a:solidFill>
+                <a:latin typeface="Aptos"/>
+                <a:ea typeface="Aptos"/>
+                <a:cs typeface="Aptos"/>
+              </a:rPr>
+            </a:br>
+            <a:r>
+              <a:rPr sz="4000" b="1">
+                <a:solidFill>
+                  <a:srgbClr val="FFFFFF"/>
+                </a:solidFill>
+                <a:latin typeface="Aptos"/>
+                <a:ea typeface="Aptos"/>
+                <a:cs typeface="Aptos"/>
+              </a:rPr>
+              <a:t>näyttöporttien kautta</a:t>
             </a:r>
           </a:p>
         </p:txBody>
@@ -5959,7 +5979,7 @@
           <p:cNvPr id="5" name="TextBox 4">
             <a:extLst xmlns:a="http://schemas.openxmlformats.org/drawingml/2006/main">
               <a:ext uri="{FF2B5EF4-FFF2-40B4-BE49-F238E27FC236}">
-                <a16:creationId xmlns:a16="http://schemas.microsoft.com/office/drawing/2014/main" id="{97A2487F-32CC-4419-A556-FE6CBF4ABCCE}"/>
+                <a16:creationId xmlns:a16="http://schemas.microsoft.com/office/drawing/2014/main" id="{BBD9C3FA-29B0-4CD8-8A94-B8109CE1E752}"/>
               </a:ext>
             </a:extLst>
           </p:cNvPr>
@@ -5996,7 +6016,7 @@
                 <a:ea typeface="Aptos"/>
                 <a:cs typeface="Aptos"/>
               </a:rPr>
-              <a:t>Suppea päätöksenteon tiivistelmä</a:t>
+              <a:t>Riippumaton julkinen päätöstiivistelmä</a:t>
             </a:r>
           </a:p>
         </p:txBody>
@@ -6006,7 +6026,7 @@
           <p:cNvPr id="6" name="Rectangle 5">
             <a:extLst xmlns:a="http://schemas.openxmlformats.org/drawingml/2006/main">
               <a:ext uri="{FF2B5EF4-FFF2-40B4-BE49-F238E27FC236}">
-                <a16:creationId xmlns:a16="http://schemas.microsoft.com/office/drawing/2014/main" id="{AB8A72E3-B37F-4967-8203-60DCB639DD3C}"/>
+                <a16:creationId xmlns:a16="http://schemas.microsoft.com/office/drawing/2014/main" id="{651EDC64-0842-4F3B-AB57-E0F79ECB20CA}"/>
               </a:ext>
             </a:extLst>
           </p:cNvPr>
@@ -6061,7 +6081,7 @@
           <p:cNvPr id="7" name="TextBox 6">
             <a:extLst xmlns:a="http://schemas.openxmlformats.org/drawingml/2006/main">
               <a:ext uri="{FF2B5EF4-FFF2-40B4-BE49-F238E27FC236}">
-                <a16:creationId xmlns:a16="http://schemas.microsoft.com/office/drawing/2014/main" id="{EA78F829-A841-4D80-9E91-6C136AB74C66}"/>
+                <a16:creationId xmlns:a16="http://schemas.microsoft.com/office/drawing/2014/main" id="{5734B81B-0A8F-451D-9047-9B5BBC54763A}"/>
               </a:ext>
             </a:extLst>
           </p:cNvPr>
@@ -6108,7 +6128,7 @@
           <p:cNvPr id="8" name="TextBox 7">
             <a:extLst xmlns:a="http://schemas.openxmlformats.org/drawingml/2006/main">
               <a:ext uri="{FF2B5EF4-FFF2-40B4-BE49-F238E27FC236}">
-                <a16:creationId xmlns:a16="http://schemas.microsoft.com/office/drawing/2014/main" id="{CA986928-AF2E-4E89-9421-32364569CCDF}"/>
+                <a16:creationId xmlns:a16="http://schemas.microsoft.com/office/drawing/2014/main" id="{65C159F8-7BB1-405B-B294-3195251777A0}"/>
               </a:ext>
             </a:extLst>
           </p:cNvPr>
@@ -6145,7 +6165,7 @@
                 <a:ea typeface="Aptos"/>
                 <a:cs typeface="Aptos"/>
               </a:rPr>
-              <a:t>2026.08.03-43</a:t>
+              <a:t>2026.08.03-44</a:t>
             </a:r>
           </a:p>
         </p:txBody>
@@ -6155,7 +6175,7 @@
           <p:cNvPr id="9" name="TextBox 8">
             <a:extLst xmlns:a="http://schemas.openxmlformats.org/drawingml/2006/main">
               <a:ext uri="{FF2B5EF4-FFF2-40B4-BE49-F238E27FC236}">
-                <a16:creationId xmlns:a16="http://schemas.microsoft.com/office/drawing/2014/main" id="{A8DD8439-05E8-4148-BBDF-DDD2C9CA6420}"/>
+                <a16:creationId xmlns:a16="http://schemas.microsoft.com/office/drawing/2014/main" id="{21BADCDF-0369-40F2-8B2E-9B7058494A83}"/>
               </a:ext>
             </a:extLst>
           </p:cNvPr>
@@ -6223,7 +6243,7 @@
           <p:cNvPr id="10" name="TextBox 9">
             <a:extLst xmlns:a="http://schemas.openxmlformats.org/drawingml/2006/main">
               <a:ext uri="{FF2B5EF4-FFF2-40B4-BE49-F238E27FC236}">
-                <a16:creationId xmlns:a16="http://schemas.microsoft.com/office/drawing/2014/main" id="{7A539B7E-4A18-43D1-9535-09611BA24F8D}"/>
+                <a16:creationId xmlns:a16="http://schemas.microsoft.com/office/drawing/2014/main" id="{7519B391-9059-49EC-93AA-82C2694FC94C}"/>
               </a:ext>
             </a:extLst>
           </p:cNvPr>
@@ -6270,7 +6290,7 @@
           <p:cNvPr id="11" name="TextBox 10">
             <a:extLst xmlns:a="http://schemas.openxmlformats.org/drawingml/2006/main">
               <a:ext uri="{FF2B5EF4-FFF2-40B4-BE49-F238E27FC236}">
-                <a16:creationId xmlns:a16="http://schemas.microsoft.com/office/drawing/2014/main" id="{1C1EE5CA-FEE5-4E7B-B7A8-7BDD5A894316}"/>
+                <a16:creationId xmlns:a16="http://schemas.microsoft.com/office/drawing/2014/main" id="{17F7B18C-4795-4801-A6C4-05A0CC4E25F1}"/>
               </a:ext>
             </a:extLst>
           </p:cNvPr>
@@ -6317,7 +6337,7 @@
           <p:cNvPr id="12" name="TextBox 11">
             <a:extLst xmlns:a="http://schemas.openxmlformats.org/drawingml/2006/main">
               <a:ext uri="{FF2B5EF4-FFF2-40B4-BE49-F238E27FC236}">
-                <a16:creationId xmlns:a16="http://schemas.microsoft.com/office/drawing/2014/main" id="{FDE9C108-F00A-49C2-BE09-9EB5B571646A}"/>
+                <a16:creationId xmlns:a16="http://schemas.microsoft.com/office/drawing/2014/main" id="{370E54BD-2651-4877-9E18-5195E6A909D0}"/>
               </a:ext>
             </a:extLst>
           </p:cNvPr>
@@ -6362,7 +6382,7 @@
     </p:spTree>
     <p:extLst>
       <p:ext uri="{BB962C8B-B14F-4D97-AF65-F5344CB8AC3E}">
-        <p14:creationId xmlns:p14="http://schemas.microsoft.com/office/powerpoint/2010/main" val="542874425"/>
+        <p14:creationId xmlns:p14="http://schemas.microsoft.com/office/powerpoint/2010/main" val="1694885912"/>
       </p:ext>
     </p:extLst>
   </p:cSld>
@@ -6386,7 +6406,7 @@
           <p:cNvPr id="2" name="TextBox 1">
             <a:extLst xmlns:a="http://schemas.openxmlformats.org/drawingml/2006/main">
               <a:ext uri="{FF2B5EF4-FFF2-40B4-BE49-F238E27FC236}">
-                <a16:creationId xmlns:a16="http://schemas.microsoft.com/office/drawing/2014/main" id="{E3ECFC75-F6B0-4C71-8D50-DFAF133AD3CC}"/>
+                <a16:creationId xmlns:a16="http://schemas.microsoft.com/office/drawing/2014/main" id="{72F1F3E6-444A-4602-94C7-CD742528C57C}"/>
               </a:ext>
             </a:extLst>
           </p:cNvPr>
@@ -6433,7 +6453,7 @@
           <p:cNvPr id="3" name="TextBox 2">
             <a:extLst xmlns:a="http://schemas.openxmlformats.org/drawingml/2006/main">
               <a:ext uri="{FF2B5EF4-FFF2-40B4-BE49-F238E27FC236}">
-                <a16:creationId xmlns:a16="http://schemas.microsoft.com/office/drawing/2014/main" id="{DEAC39A4-4048-4DF8-9B6F-5E96C3621409}"/>
+                <a16:creationId xmlns:a16="http://schemas.microsoft.com/office/drawing/2014/main" id="{B24F8F66-3A1A-4265-ABFB-16BDA9852370}"/>
               </a:ext>
             </a:extLst>
           </p:cNvPr>
@@ -6470,7 +6490,7 @@
                 <a:ea typeface="Aptos"/>
                 <a:cs typeface="Aptos"/>
               </a:rPr>
-              <a:t>Rahoitusteesi perustuu näyttöön</a:t>
+              <a:t>Rahoitusteesi: arvoa ei ole vielä laskettu</a:t>
             </a:r>
           </a:p>
         </p:txBody>
@@ -6480,7 +6500,7 @@
           <p:cNvPr id="4" name="Rectangle 3">
             <a:extLst xmlns:a="http://schemas.openxmlformats.org/drawingml/2006/main">
               <a:ext uri="{FF2B5EF4-FFF2-40B4-BE49-F238E27FC236}">
-                <a16:creationId xmlns:a16="http://schemas.microsoft.com/office/drawing/2014/main" id="{942F81B3-713C-4845-A4C0-187635E99C50}"/>
+                <a16:creationId xmlns:a16="http://schemas.microsoft.com/office/drawing/2014/main" id="{B72F35E4-3C9A-411E-8CA8-EF4C1E82B676}"/>
               </a:ext>
             </a:extLst>
           </p:cNvPr>
@@ -6535,7 +6555,7 @@
           <p:cNvPr id="5" name="Rectangle 4">
             <a:extLst xmlns:a="http://schemas.openxmlformats.org/drawingml/2006/main">
               <a:ext uri="{FF2B5EF4-FFF2-40B4-BE49-F238E27FC236}">
-                <a16:creationId xmlns:a16="http://schemas.microsoft.com/office/drawing/2014/main" id="{A6462D34-AE40-4947-9834-140A8F22B561}"/>
+                <a16:creationId xmlns:a16="http://schemas.microsoft.com/office/drawing/2014/main" id="{E1C903C0-2A4E-4ACF-8441-1C32DBA31884}"/>
               </a:ext>
             </a:extLst>
           </p:cNvPr>
@@ -6590,7 +6610,7 @@
           <p:cNvPr id="6" name="TextBox 5">
             <a:extLst xmlns:a="http://schemas.openxmlformats.org/drawingml/2006/main">
               <a:ext uri="{FF2B5EF4-FFF2-40B4-BE49-F238E27FC236}">
-                <a16:creationId xmlns:a16="http://schemas.microsoft.com/office/drawing/2014/main" id="{1E30C0A4-0B32-4B24-95F0-FDADD7985581}"/>
+                <a16:creationId xmlns:a16="http://schemas.microsoft.com/office/drawing/2014/main" id="{EBE3A216-17E2-427F-9BD2-3FC7B67B10D6}"/>
               </a:ext>
             </a:extLst>
           </p:cNvPr>
@@ -6627,7 +6647,7 @@
                 <a:ea typeface="Aptos"/>
                 <a:cs typeface="Aptos"/>
               </a:rPr>
-              <a:t>Julkinen riippumaton evidenssikooste · 2026.08.03-43 · 2026-08-03 · Lähteet: EPO; Saksa — viralliset tuomiot; WIPO</a:t>
+              <a:t>Julkinen riippumaton evidenssikooste · 2026.08.03-44 · 2026-08-03 · Lähteet: EPO; Saksa — viralliset tuomiot; WIPO</a:t>
             </a:r>
           </a:p>
         </p:txBody>
@@ -6637,7 +6657,7 @@
           <p:cNvPr id="7" name="TextBox 6">
             <a:extLst xmlns:a="http://schemas.openxmlformats.org/drawingml/2006/main">
               <a:ext uri="{FF2B5EF4-FFF2-40B4-BE49-F238E27FC236}">
-                <a16:creationId xmlns:a16="http://schemas.microsoft.com/office/drawing/2014/main" id="{67BD5498-5CD8-4E2B-89CA-D7660734E8A7}"/>
+                <a16:creationId xmlns:a16="http://schemas.microsoft.com/office/drawing/2014/main" id="{8048B76B-D925-43D5-A13A-0D61978ACD2D}"/>
               </a:ext>
             </a:extLst>
           </p:cNvPr>
@@ -6684,7 +6704,7 @@
           <p:cNvPr id="8" name="TextBox 7">
             <a:extLst xmlns:a="http://schemas.openxmlformats.org/drawingml/2006/main">
               <a:ext uri="{FF2B5EF4-FFF2-40B4-BE49-F238E27FC236}">
-                <a16:creationId xmlns:a16="http://schemas.microsoft.com/office/drawing/2014/main" id="{78C3253F-D5E9-4794-BFCA-61CA989490E2}"/>
+                <a16:creationId xmlns:a16="http://schemas.microsoft.com/office/drawing/2014/main" id="{CD14656C-D11D-45BD-81AC-508B56CDE2DF}"/>
               </a:ext>
             </a:extLst>
           </p:cNvPr>
@@ -6721,7 +6741,7 @@
                 <a:ea typeface="Aptos"/>
                 <a:cs typeface="Aptos"/>
               </a:rPr>
-              <a:t>Patentilla on dokumentoitu tekninen ydin ja merkittävää virallista oikeusnäyttöä, mutta vakuusarvo ei ole vielä todistettu.</a:t>
+              <a:t>Tavoite on arvioida puolustettavissa oleva patentin arvon vaihteluväli — ei nimetä suurinta mahdollista markkinalukua.</a:t>
             </a:r>
           </a:p>
         </p:txBody>
@@ -6731,7 +6751,7 @@
           <p:cNvPr id="9" name="TextBox 8">
             <a:extLst xmlns:a="http://schemas.openxmlformats.org/drawingml/2006/main">
               <a:ext uri="{FF2B5EF4-FFF2-40B4-BE49-F238E27FC236}">
-                <a16:creationId xmlns:a16="http://schemas.microsoft.com/office/drawing/2014/main" id="{7AAE6062-EF18-4A8E-AAC0-E7BFAE6CA3A1}"/>
+                <a16:creationId xmlns:a16="http://schemas.microsoft.com/office/drawing/2014/main" id="{98BF346B-67F3-4656-B5E1-1CAB825E7C58}"/>
               </a:ext>
             </a:extLst>
           </p:cNvPr>
@@ -6774,7 +6794,7 @@
               </a:defRPr>
             </a:pPr>
             <a:r>
-              <a:t>•  EPO-rekisteri: patentti pysytetty muutettuna väitemenettelyn jälkeen; B2-patenttijulkaisu julkaistu. EP3032975B2 sisältää 9 vaatimusta.</a:t>
+              <a:t>•  Seitsemän perustekohtaista, ei-yhteenlaskettavaa arvotulosta ovat null/NOT_COMPUTED; kaikki seitsemän arvonmääritysporttia ovat OPEN.</a:t>
             </a:r>
           </a:p>
           <a:p xmlns:a="http://schemas.openxmlformats.org/drawingml/2006/main">
@@ -6796,7 +6816,7 @@
               </a:defRPr>
             </a:pPr>
             <a:r>
-              <a:t>•  Saksa: kaksi virallista ratkaisua; lopullisuus- ja aluerajat säilyvät.</a:t>
+              <a:t>•  Markkinaevidenssi on vain syöte: markkinan koko ei ole patentin arvo eikä puuttuva evidenssi ole nolla.</a:t>
             </a:r>
           </a:p>
           <a:p xmlns:a="http://schemas.openxmlformats.org/drawingml/2006/main">
@@ -6818,7 +6838,7 @@
               </a:defRPr>
             </a:pPr>
             <a:r>
-              <a:t>•  Rahoituskelpoisuus syntyy, kun oikeudet, claim chartit, kassavirta ja riippumaton arvonmääritys sidotaan yhteen.</a:t>
+              <a:t>•  Saksan ratkaisu on vain mahdollinen tapauskohtainen evidenssi ratkaistulle tuotteelle ja vaatimukselle; siirto vaatii uuden asiantuntija-arvion.</a:t>
             </a:r>
           </a:p>
         </p:txBody>
@@ -6828,7 +6848,7 @@
           <p:cNvPr id="10" name="Rounded Rectangle 9">
             <a:extLst xmlns:a="http://schemas.openxmlformats.org/drawingml/2006/main">
               <a:ext uri="{FF2B5EF4-FFF2-40B4-BE49-F238E27FC236}">
-                <a16:creationId xmlns:a16="http://schemas.microsoft.com/office/drawing/2014/main" id="{E2346D9F-C908-4AB3-BD00-180A399624AF}"/>
+                <a16:creationId xmlns:a16="http://schemas.microsoft.com/office/drawing/2014/main" id="{D8178C52-452E-4D0F-845C-AD37AD16697D}"/>
               </a:ext>
             </a:extLst>
           </p:cNvPr>
@@ -6885,7 +6905,7 @@
           <p:cNvPr id="11" name="TextBox 10">
             <a:extLst xmlns:a="http://schemas.openxmlformats.org/drawingml/2006/main">
               <a:ext uri="{FF2B5EF4-FFF2-40B4-BE49-F238E27FC236}">
-                <a16:creationId xmlns:a16="http://schemas.microsoft.com/office/drawing/2014/main" id="{0267A85B-B02A-4772-B973-E3A7BC4435B8}"/>
+                <a16:creationId xmlns:a16="http://schemas.microsoft.com/office/drawing/2014/main" id="{463833B1-A67E-4ED5-803B-78CDBFAF8C67}"/>
               </a:ext>
             </a:extLst>
           </p:cNvPr>
@@ -6932,7 +6952,7 @@
           <p:cNvPr id="12" name="TextBox 11">
             <a:extLst xmlns:a="http://schemas.openxmlformats.org/drawingml/2006/main">
               <a:ext uri="{FF2B5EF4-FFF2-40B4-BE49-F238E27FC236}">
-                <a16:creationId xmlns:a16="http://schemas.microsoft.com/office/drawing/2014/main" id="{512FAC07-FDB3-4B0E-A9E6-56CEA28770DB}"/>
+                <a16:creationId xmlns:a16="http://schemas.microsoft.com/office/drawing/2014/main" id="{4301EE0F-BA33-4F98-B8DF-015AE2BFD6E5}"/>
               </a:ext>
             </a:extLst>
           </p:cNvPr>
@@ -6969,7 +6989,7 @@
                 <a:ea typeface="Aptos"/>
                 <a:cs typeface="Aptos"/>
               </a:rPr>
-              <a:t>Nykyinen aineisto tukee jatkodiligenceä. Se ei vielä yksin tue tiettyä lainamäärää, osakearvoa tai patentin vakuusarvoa.</a:t>
+              <a:t>Nykyinen evidenssi tukee jatkotarkastusta, ei vielä tiettyä patenttiarvoa, lainamäärää tai osakearvoa.</a:t>
             </a:r>
           </a:p>
         </p:txBody>
@@ -6977,7 +6997,7 @@
     </p:spTree>
     <p:extLst>
       <p:ext uri="{BB962C8B-B14F-4D97-AF65-F5344CB8AC3E}">
-        <p14:creationId xmlns:p14="http://schemas.microsoft.com/office/powerpoint/2010/main" val="2070673728"/>
+        <p14:creationId xmlns:p14="http://schemas.microsoft.com/office/powerpoint/2010/main" val="537710859"/>
       </p:ext>
     </p:extLst>
   </p:cSld>
@@ -7001,7 +7021,7 @@
           <p:cNvPr id="2" name="TextBox 1">
             <a:extLst xmlns:a="http://schemas.openxmlformats.org/drawingml/2006/main">
               <a:ext uri="{FF2B5EF4-FFF2-40B4-BE49-F238E27FC236}">
-                <a16:creationId xmlns:a16="http://schemas.microsoft.com/office/drawing/2014/main" id="{B55D5FF2-9075-4E7F-81C2-B54804C433F8}"/>
+                <a16:creationId xmlns:a16="http://schemas.microsoft.com/office/drawing/2014/main" id="{C1E1DC29-524C-42B5-84C0-3E352ED1A6FB}"/>
               </a:ext>
             </a:extLst>
           </p:cNvPr>
@@ -7048,7 +7068,7 @@
           <p:cNvPr id="3" name="TextBox 2">
             <a:extLst xmlns:a="http://schemas.openxmlformats.org/drawingml/2006/main">
               <a:ext uri="{FF2B5EF4-FFF2-40B4-BE49-F238E27FC236}">
-                <a16:creationId xmlns:a16="http://schemas.microsoft.com/office/drawing/2014/main" id="{17E81F21-3D59-4BA2-804D-D4F2E23C389C}"/>
+                <a16:creationId xmlns:a16="http://schemas.microsoft.com/office/drawing/2014/main" id="{093858DD-D9FD-4B00-BA28-6050B20E3F4A}"/>
               </a:ext>
             </a:extLst>
           </p:cNvPr>
@@ -7060,7 +7080,7 @@
         <p:spPr>
           <a:xfrm xmlns:a="http://schemas.openxmlformats.org/drawingml/2006/main">
             <a:off x="502920" y="621792"/>
-            <a:ext cx="11109960" cy="548640"/>
+            <a:ext cx="11109960" cy="591312"/>
           </a:xfrm>
           <a:prstGeom xmlns:a="http://schemas.openxmlformats.org/drawingml/2006/main" prst="rect">
             <a:avLst/>
@@ -7085,7 +7105,7 @@
                 <a:ea typeface="Aptos"/>
                 <a:cs typeface="Aptos"/>
               </a:rPr>
-              <a:t>Patenttihistoria antaa vahvan mutta rajatun ankkurin</a:t>
+              <a:t>Saksan näyttö kalibroi — se ei globalisoi</a:t>
             </a:r>
           </a:p>
         </p:txBody>
@@ -7095,7 +7115,7 @@
           <p:cNvPr id="4" name="Rectangle 3">
             <a:extLst xmlns:a="http://schemas.openxmlformats.org/drawingml/2006/main">
               <a:ext uri="{FF2B5EF4-FFF2-40B4-BE49-F238E27FC236}">
-                <a16:creationId xmlns:a16="http://schemas.microsoft.com/office/drawing/2014/main" id="{ED684827-B936-4BBA-9A7F-FFD66445058C}"/>
+                <a16:creationId xmlns:a16="http://schemas.microsoft.com/office/drawing/2014/main" id="{03187CF4-1295-49BB-B87C-3865FD91F285}"/>
               </a:ext>
             </a:extLst>
           </p:cNvPr>
@@ -7150,7 +7170,7 @@
           <p:cNvPr id="5" name="Rectangle 4">
             <a:extLst xmlns:a="http://schemas.openxmlformats.org/drawingml/2006/main">
               <a:ext uri="{FF2B5EF4-FFF2-40B4-BE49-F238E27FC236}">
-                <a16:creationId xmlns:a16="http://schemas.microsoft.com/office/drawing/2014/main" id="{0F926EA5-6ED0-4C8B-A067-EF46FBE892D6}"/>
+                <a16:creationId xmlns:a16="http://schemas.microsoft.com/office/drawing/2014/main" id="{19516AF7-E741-4AA5-9041-EEA3DC3553FF}"/>
               </a:ext>
             </a:extLst>
           </p:cNvPr>
@@ -7205,7 +7225,7 @@
           <p:cNvPr id="6" name="TextBox 5">
             <a:extLst xmlns:a="http://schemas.openxmlformats.org/drawingml/2006/main">
               <a:ext uri="{FF2B5EF4-FFF2-40B4-BE49-F238E27FC236}">
-                <a16:creationId xmlns:a16="http://schemas.microsoft.com/office/drawing/2014/main" id="{E08E06A0-AB1A-4120-BA87-81DB936C4704}"/>
+                <a16:creationId xmlns:a16="http://schemas.microsoft.com/office/drawing/2014/main" id="{88CA92BD-8499-4571-A23F-EE3EDBAEE9C7}"/>
               </a:ext>
             </a:extLst>
           </p:cNvPr>
@@ -7242,7 +7262,7 @@
                 <a:ea typeface="Aptos"/>
                 <a:cs typeface="Aptos"/>
               </a:rPr>
-              <a:t>Julkinen riippumaton evidenssikooste · 2026.08.03-43 · 2026-08-03 · Lähteet: EPO Register; EP3032975B2; 8 Ni 18/24 (EP); 7 O 3341/24</a:t>
+              <a:t>Julkinen riippumaton evidenssikooste · 2026.08.03-44 · 2026-08-03 · Lähteet: EPO Register; EP3032975B2; 8 Ni 18/24 (EP); 7 O 3341/24</a:t>
             </a:r>
           </a:p>
         </p:txBody>
@@ -7252,7 +7272,7 @@
           <p:cNvPr id="7" name="TextBox 6">
             <a:extLst xmlns:a="http://schemas.openxmlformats.org/drawingml/2006/main">
               <a:ext uri="{FF2B5EF4-FFF2-40B4-BE49-F238E27FC236}">
-                <a16:creationId xmlns:a16="http://schemas.microsoft.com/office/drawing/2014/main" id="{9871F0BD-28D0-4ABE-A6A2-7D89D01F7891}"/>
+                <a16:creationId xmlns:a16="http://schemas.microsoft.com/office/drawing/2014/main" id="{12C421D2-0ED7-418B-9FFE-EDAD636FDB9F}"/>
               </a:ext>
             </a:extLst>
           </p:cNvPr>
@@ -7299,7 +7319,7 @@
           <p:cNvPr id="8" name="Rounded Rectangle 7">
             <a:extLst xmlns:a="http://schemas.openxmlformats.org/drawingml/2006/main">
               <a:ext uri="{FF2B5EF4-FFF2-40B4-BE49-F238E27FC236}">
-                <a16:creationId xmlns:a16="http://schemas.microsoft.com/office/drawing/2014/main" id="{27294AB7-5772-4D09-A69F-2073E7178688}"/>
+                <a16:creationId xmlns:a16="http://schemas.microsoft.com/office/drawing/2014/main" id="{0DAD932B-DFA3-4E30-9D6F-D8B78A934715}"/>
               </a:ext>
             </a:extLst>
           </p:cNvPr>
@@ -7356,7 +7376,7 @@
           <p:cNvPr id="9" name="TextBox 8">
             <a:extLst xmlns:a="http://schemas.openxmlformats.org/drawingml/2006/main">
               <a:ext uri="{FF2B5EF4-FFF2-40B4-BE49-F238E27FC236}">
-                <a16:creationId xmlns:a16="http://schemas.microsoft.com/office/drawing/2014/main" id="{E76D5082-DAD2-47B1-ADC2-B2597A3A2473}"/>
+                <a16:creationId xmlns:a16="http://schemas.microsoft.com/office/drawing/2014/main" id="{C4C62987-93E9-4B58-90FE-DFA1F43BFCAB}"/>
               </a:ext>
             </a:extLst>
           </p:cNvPr>
@@ -7403,7 +7423,7 @@
           <p:cNvPr id="10" name="TextBox 9">
             <a:extLst xmlns:a="http://schemas.openxmlformats.org/drawingml/2006/main">
               <a:ext uri="{FF2B5EF4-FFF2-40B4-BE49-F238E27FC236}">
-                <a16:creationId xmlns:a16="http://schemas.microsoft.com/office/drawing/2014/main" id="{298748B8-2A84-4A93-B783-13772D13D2B6}"/>
+                <a16:creationId xmlns:a16="http://schemas.microsoft.com/office/drawing/2014/main" id="{E9B062B7-8EEE-4505-BBE3-CDEAD796540B}"/>
               </a:ext>
             </a:extLst>
           </p:cNvPr>
@@ -7450,7 +7470,7 @@
           <p:cNvPr id="11" name="Rounded Rectangle 10">
             <a:extLst xmlns:a="http://schemas.openxmlformats.org/drawingml/2006/main">
               <a:ext uri="{FF2B5EF4-FFF2-40B4-BE49-F238E27FC236}">
-                <a16:creationId xmlns:a16="http://schemas.microsoft.com/office/drawing/2014/main" id="{8D5534B0-60FC-448D-AD8D-E6B738D7C7EF}"/>
+                <a16:creationId xmlns:a16="http://schemas.microsoft.com/office/drawing/2014/main" id="{F3A8D1A4-9784-4010-958D-C468AEC50D3B}"/>
               </a:ext>
             </a:extLst>
           </p:cNvPr>
@@ -7507,7 +7527,7 @@
           <p:cNvPr id="12" name="TextBox 11">
             <a:extLst xmlns:a="http://schemas.openxmlformats.org/drawingml/2006/main">
               <a:ext uri="{FF2B5EF4-FFF2-40B4-BE49-F238E27FC236}">
-                <a16:creationId xmlns:a16="http://schemas.microsoft.com/office/drawing/2014/main" id="{CF06DF1C-BE2D-4B15-BC52-A67AEBDE0C46}"/>
+                <a16:creationId xmlns:a16="http://schemas.microsoft.com/office/drawing/2014/main" id="{00AB2CFB-F156-4F36-B839-87F587773F28}"/>
               </a:ext>
             </a:extLst>
           </p:cNvPr>
@@ -7554,7 +7574,7 @@
           <p:cNvPr id="13" name="TextBox 12">
             <a:extLst xmlns:a="http://schemas.openxmlformats.org/drawingml/2006/main">
               <a:ext uri="{FF2B5EF4-FFF2-40B4-BE49-F238E27FC236}">
-                <a16:creationId xmlns:a16="http://schemas.microsoft.com/office/drawing/2014/main" id="{ED524C43-F40A-49FC-9D49-95816CCC29C6}"/>
+                <a16:creationId xmlns:a16="http://schemas.microsoft.com/office/drawing/2014/main" id="{DEF958F4-C6BA-45E3-A85C-C6D4E905825E}"/>
               </a:ext>
             </a:extLst>
           </p:cNvPr>
@@ -7601,7 +7621,7 @@
           <p:cNvPr id="14" name="Rounded Rectangle 13">
             <a:extLst xmlns:a="http://schemas.openxmlformats.org/drawingml/2006/main">
               <a:ext uri="{FF2B5EF4-FFF2-40B4-BE49-F238E27FC236}">
-                <a16:creationId xmlns:a16="http://schemas.microsoft.com/office/drawing/2014/main" id="{34C8905B-81DE-47FC-B195-FA1FC59072FF}"/>
+                <a16:creationId xmlns:a16="http://schemas.microsoft.com/office/drawing/2014/main" id="{AA239DB9-0AF4-41BA-B48B-ED3618B9076F}"/>
               </a:ext>
             </a:extLst>
           </p:cNvPr>
@@ -7658,7 +7678,7 @@
           <p:cNvPr id="15" name="TextBox 14">
             <a:extLst xmlns:a="http://schemas.openxmlformats.org/drawingml/2006/main">
               <a:ext uri="{FF2B5EF4-FFF2-40B4-BE49-F238E27FC236}">
-                <a16:creationId xmlns:a16="http://schemas.microsoft.com/office/drawing/2014/main" id="{E2D682FD-ED15-4ACD-B6E1-FE0345080944}"/>
+                <a16:creationId xmlns:a16="http://schemas.microsoft.com/office/drawing/2014/main" id="{BCC145F1-F346-4B92-AF6A-86C778692D6A}"/>
               </a:ext>
             </a:extLst>
           </p:cNvPr>
@@ -7705,7 +7725,7 @@
           <p:cNvPr id="16" name="TextBox 15">
             <a:extLst xmlns:a="http://schemas.openxmlformats.org/drawingml/2006/main">
               <a:ext uri="{FF2B5EF4-FFF2-40B4-BE49-F238E27FC236}">
-                <a16:creationId xmlns:a16="http://schemas.microsoft.com/office/drawing/2014/main" id="{6399BA5B-1829-4C8A-9E2A-8B2905D2CDE4}"/>
+                <a16:creationId xmlns:a16="http://schemas.microsoft.com/office/drawing/2014/main" id="{52793B46-DE79-4C48-A3BA-A863789247DC}"/>
               </a:ext>
             </a:extLst>
           </p:cNvPr>
@@ -7752,7 +7772,7 @@
           <p:cNvPr id="17" name="TextBox 16">
             <a:extLst xmlns:a="http://schemas.openxmlformats.org/drawingml/2006/main">
               <a:ext uri="{FF2B5EF4-FFF2-40B4-BE49-F238E27FC236}">
-                <a16:creationId xmlns:a16="http://schemas.microsoft.com/office/drawing/2014/main" id="{6B0E71AA-903A-4CE4-8E65-A35FE55AE21E}"/>
+                <a16:creationId xmlns:a16="http://schemas.microsoft.com/office/drawing/2014/main" id="{38B6797B-5516-41F7-B56C-37EEB15B0693}"/>
               </a:ext>
             </a:extLst>
           </p:cNvPr>
@@ -7764,7 +7784,7 @@
         <p:spPr>
           <a:xfrm xmlns:a="http://schemas.openxmlformats.org/drawingml/2006/main">
             <a:off x="566928" y="3529584"/>
-            <a:ext cx="10927080" cy="786384"/>
+            <a:ext cx="10927080" cy="835152"/>
           </a:xfrm>
           <a:prstGeom xmlns:a="http://schemas.openxmlformats.org/drawingml/2006/main" prst="rect">
             <a:avLst/>
@@ -7789,7 +7809,7 @@
                 <a:ea typeface="Aptos"/>
                 <a:cs typeface="Aptos"/>
               </a:rPr>
-              <a:t>Todistettu oikeusnäyttö on arvokasta vain maakohtaisen voimassaolo- ja tuotekytkennän kanssa.</a:t>
+              <a:t>Oikeusnäyttö on arvokasta vain maakohtaisen oikeuden, tuotevertailun ja paikallisen teon kanssa.</a:t>
             </a:r>
           </a:p>
         </p:txBody>
@@ -7799,7 +7819,7 @@
           <p:cNvPr id="18" name="Rounded Rectangle 17">
             <a:extLst xmlns:a="http://schemas.openxmlformats.org/drawingml/2006/main">
               <a:ext uri="{FF2B5EF4-FFF2-40B4-BE49-F238E27FC236}">
-                <a16:creationId xmlns:a16="http://schemas.microsoft.com/office/drawing/2014/main" id="{3CAE5392-78E1-48BF-AD09-C5850AC91732}"/>
+                <a16:creationId xmlns:a16="http://schemas.microsoft.com/office/drawing/2014/main" id="{121CAE85-7FE7-43FE-9702-721A20325D1D}"/>
               </a:ext>
             </a:extLst>
           </p:cNvPr>
@@ -7856,7 +7876,7 @@
           <p:cNvPr id="19" name="TextBox 18">
             <a:extLst xmlns:a="http://schemas.openxmlformats.org/drawingml/2006/main">
               <a:ext uri="{FF2B5EF4-FFF2-40B4-BE49-F238E27FC236}">
-                <a16:creationId xmlns:a16="http://schemas.microsoft.com/office/drawing/2014/main" id="{D9DD1ED0-6A97-4B48-88A1-B9303750D34D}"/>
+                <a16:creationId xmlns:a16="http://schemas.microsoft.com/office/drawing/2014/main" id="{06958774-5217-4D4C-A986-48BE0A92430D}"/>
               </a:ext>
             </a:extLst>
           </p:cNvPr>
@@ -7903,7 +7923,7 @@
           <p:cNvPr id="20" name="TextBox 19">
             <a:extLst xmlns:a="http://schemas.openxmlformats.org/drawingml/2006/main">
               <a:ext uri="{FF2B5EF4-FFF2-40B4-BE49-F238E27FC236}">
-                <a16:creationId xmlns:a16="http://schemas.microsoft.com/office/drawing/2014/main" id="{FD73FA5E-347F-4777-B30A-319064893693}"/>
+                <a16:creationId xmlns:a16="http://schemas.microsoft.com/office/drawing/2014/main" id="{27F7DE84-9587-4486-8E69-54F8BD76CA15}"/>
               </a:ext>
             </a:extLst>
           </p:cNvPr>
@@ -7915,7 +7935,7 @@
         <p:spPr>
           <a:xfrm xmlns:a="http://schemas.openxmlformats.org/drawingml/2006/main">
             <a:off x="731520" y="5038344"/>
-            <a:ext cx="10597896" cy="521207"/>
+            <a:ext cx="10597896" cy="530352"/>
           </a:xfrm>
           <a:prstGeom xmlns:a="http://schemas.openxmlformats.org/drawingml/2006/main" prst="rect">
             <a:avLst/>
@@ -7940,7 +7960,7 @@
                 <a:ea typeface="Aptos"/>
                 <a:cs typeface="Aptos"/>
               </a:rPr>
-              <a:t>Kirjattu haltija, prioriteetti ja EPO:n keskitetty lopputulos ovat vahvistettavissa. Koko perheen nykyinen kansallinen tila, rasitteet ja täytäntöönpano vaativat lisänäyttöä.</a:t>
+              <a:t>Oikeudet ovat alueellisia. Tavanomaiset PCT-/EP-laajennusajat ovat umpeutuneet; puuttuvien maiden poikkeusreitti vaatii maakohtaisen asiantuntija-arvion.</a:t>
             </a:r>
           </a:p>
         </p:txBody>
@@ -7948,7 +7968,7 @@
     </p:spTree>
     <p:extLst>
       <p:ext uri="{BB962C8B-B14F-4D97-AF65-F5344CB8AC3E}">
-        <p14:creationId xmlns:p14="http://schemas.microsoft.com/office/powerpoint/2010/main" val="1772925028"/>
+        <p14:creationId xmlns:p14="http://schemas.microsoft.com/office/powerpoint/2010/main" val="1453100838"/>
       </p:ext>
     </p:extLst>
   </p:cSld>
@@ -7972,7 +7992,7 @@
           <p:cNvPr id="2" name="TextBox 1">
             <a:extLst xmlns:a="http://schemas.openxmlformats.org/drawingml/2006/main">
               <a:ext uri="{FF2B5EF4-FFF2-40B4-BE49-F238E27FC236}">
-                <a16:creationId xmlns:a16="http://schemas.microsoft.com/office/drawing/2014/main" id="{BA6BBAEC-A653-46DC-B22D-6B80ED6CA3D5}"/>
+                <a16:creationId xmlns:a16="http://schemas.microsoft.com/office/drawing/2014/main" id="{1D81C84E-3132-4742-BBFC-4FB525882126}"/>
               </a:ext>
             </a:extLst>
           </p:cNvPr>
@@ -8019,7 +8039,7 @@
           <p:cNvPr id="3" name="TextBox 2">
             <a:extLst xmlns:a="http://schemas.openxmlformats.org/drawingml/2006/main">
               <a:ext uri="{FF2B5EF4-FFF2-40B4-BE49-F238E27FC236}">
-                <a16:creationId xmlns:a16="http://schemas.microsoft.com/office/drawing/2014/main" id="{6097D5ED-BDFA-4A42-B7E8-A7B82C6490FF}"/>
+                <a16:creationId xmlns:a16="http://schemas.microsoft.com/office/drawing/2014/main" id="{6B3A9CE1-2136-48F6-99B9-2D43B692EC2A}"/>
               </a:ext>
             </a:extLst>
           </p:cNvPr>
@@ -8056,7 +8076,7 @@
                 <a:ea typeface="Aptos"/>
                 <a:cs typeface="Aptos"/>
               </a:rPr>
-              <a:t>Globaali markkina-arvo ei ole vielä tuettu</a:t>
+              <a:t>Seitsemän askelta erillisiin arvotuloksiin</a:t>
             </a:r>
           </a:p>
         </p:txBody>
@@ -8066,7 +8086,7 @@
           <p:cNvPr id="4" name="Rectangle 3">
             <a:extLst xmlns:a="http://schemas.openxmlformats.org/drawingml/2006/main">
               <a:ext uri="{FF2B5EF4-FFF2-40B4-BE49-F238E27FC236}">
-                <a16:creationId xmlns:a16="http://schemas.microsoft.com/office/drawing/2014/main" id="{41A2C8F7-7C90-4A97-81C8-D4C3D112496F}"/>
+                <a16:creationId xmlns:a16="http://schemas.microsoft.com/office/drawing/2014/main" id="{7095FEE0-BA8A-40AC-A955-4A51DB70D1B0}"/>
               </a:ext>
             </a:extLst>
           </p:cNvPr>
@@ -8121,7 +8141,7 @@
           <p:cNvPr id="5" name="Rectangle 4">
             <a:extLst xmlns:a="http://schemas.openxmlformats.org/drawingml/2006/main">
               <a:ext uri="{FF2B5EF4-FFF2-40B4-BE49-F238E27FC236}">
-                <a16:creationId xmlns:a16="http://schemas.microsoft.com/office/drawing/2014/main" id="{F8CFB0EE-CFA1-45BD-B589-5F2A1F7F0B26}"/>
+                <a16:creationId xmlns:a16="http://schemas.microsoft.com/office/drawing/2014/main" id="{93F764C1-2700-4B24-A5CC-B6E1C5BD0E25}"/>
               </a:ext>
             </a:extLst>
           </p:cNvPr>
@@ -8176,7 +8196,7 @@
           <p:cNvPr id="6" name="TextBox 5">
             <a:extLst xmlns:a="http://schemas.openxmlformats.org/drawingml/2006/main">
               <a:ext uri="{FF2B5EF4-FFF2-40B4-BE49-F238E27FC236}">
-                <a16:creationId xmlns:a16="http://schemas.microsoft.com/office/drawing/2014/main" id="{71CFEDBA-55BA-421E-9294-A8CBBE35F91F}"/>
+                <a16:creationId xmlns:a16="http://schemas.microsoft.com/office/drawing/2014/main" id="{E5D4CD49-59F0-4023-81B8-E767B084FA31}"/>
               </a:ext>
             </a:extLst>
           </p:cNvPr>
@@ -8213,7 +8233,7 @@
                 <a:ea typeface="Aptos"/>
                 <a:cs typeface="Aptos"/>
               </a:rPr>
-              <a:t>Julkinen riippumaton evidenssikooste · 2026.08.03-43 · 2026-08-03 · Lähteet: World Bank; Statistics Canada; Health Canada; NZ Ministry of Health; Sejm; FHM; FTC; ADM</a:t>
+              <a:t>Riippumaton julkinen evidenssikooste · ei Pixan Oy:n virallinen kanta · 2026.08.03-44 · 2026-08-03</a:t>
             </a:r>
           </a:p>
         </p:txBody>
@@ -8223,7 +8243,7 @@
           <p:cNvPr id="7" name="TextBox 6">
             <a:extLst xmlns:a="http://schemas.openxmlformats.org/drawingml/2006/main">
               <a:ext uri="{FF2B5EF4-FFF2-40B4-BE49-F238E27FC236}">
-                <a16:creationId xmlns:a16="http://schemas.microsoft.com/office/drawing/2014/main" id="{30E17460-D008-4C71-89ED-1FF17E41960D}"/>
+                <a16:creationId xmlns:a16="http://schemas.microsoft.com/office/drawing/2014/main" id="{EBA5744E-0459-478B-A6C2-ADC092E4A335}"/>
               </a:ext>
             </a:extLst>
           </p:cNvPr>
@@ -8270,7 +8290,7 @@
           <p:cNvPr id="8" name="Rounded Rectangle 7">
             <a:extLst xmlns:a="http://schemas.openxmlformats.org/drawingml/2006/main">
               <a:ext uri="{FF2B5EF4-FFF2-40B4-BE49-F238E27FC236}">
-                <a16:creationId xmlns:a16="http://schemas.microsoft.com/office/drawing/2014/main" id="{9A611903-1D6C-4D77-916E-14FCA680472C}"/>
+                <a16:creationId xmlns:a16="http://schemas.microsoft.com/office/drawing/2014/main" id="{4C491B2B-68E4-4F86-899B-B896A6ED1716}"/>
               </a:ext>
             </a:extLst>
           </p:cNvPr>
@@ -8327,7 +8347,7 @@
           <p:cNvPr id="9" name="TextBox 8">
             <a:extLst xmlns:a="http://schemas.openxmlformats.org/drawingml/2006/main">
               <a:ext uri="{FF2B5EF4-FFF2-40B4-BE49-F238E27FC236}">
-                <a16:creationId xmlns:a16="http://schemas.microsoft.com/office/drawing/2014/main" id="{7B65DDC1-B853-4E1C-A5E9-3697F26D8701}"/>
+                <a16:creationId xmlns:a16="http://schemas.microsoft.com/office/drawing/2014/main" id="{5314927A-BAD9-46A7-B72E-08F8BC1FFFE2}"/>
               </a:ext>
             </a:extLst>
           </p:cNvPr>
@@ -8364,7 +8384,7 @@
                 <a:ea typeface="Aptos"/>
                 <a:cs typeface="Aptos"/>
               </a:rPr>
-              <a:t>195</a:t>
+              <a:t>7</a:t>
             </a:r>
           </a:p>
         </p:txBody>
@@ -8374,7 +8394,7 @@
           <p:cNvPr id="10" name="TextBox 9">
             <a:extLst xmlns:a="http://schemas.openxmlformats.org/drawingml/2006/main">
               <a:ext uri="{FF2B5EF4-FFF2-40B4-BE49-F238E27FC236}">
-                <a16:creationId xmlns:a16="http://schemas.microsoft.com/office/drawing/2014/main" id="{417FE203-69A3-4D40-8B74-990912B26E62}"/>
+                <a16:creationId xmlns:a16="http://schemas.microsoft.com/office/drawing/2014/main" id="{C9B9C01F-560C-45DB-9812-5EF0009B0133}"/>
               </a:ext>
             </a:extLst>
           </p:cNvPr>
@@ -8386,7 +8406,7 @@
         <p:spPr>
           <a:xfrm xmlns:a="http://schemas.openxmlformats.org/drawingml/2006/main">
             <a:off x="694944" y="2468879"/>
-            <a:ext cx="3203448" cy="713232"/>
+            <a:ext cx="3203448" cy="499872"/>
           </a:xfrm>
           <a:prstGeom xmlns:a="http://schemas.openxmlformats.org/drawingml/2006/main" prst="rect">
             <a:avLst/>
@@ -8411,7 +8431,7 @@
                 <a:ea typeface="Aptos"/>
                 <a:cs typeface="Aptos"/>
               </a:rPr>
-              <a:t>578 WB-havaintoa · 116 markkinamittaria + 36 Ruotsin FHM-lukua</a:t>
+              <a:t>pakollista porttia · kaikki OPEN · lopullinen arvo NOT_COMPUTED</a:t>
             </a:r>
           </a:p>
         </p:txBody>
@@ -8421,7 +8441,7 @@
           <p:cNvPr id="11" name="Rounded Rectangle 10">
             <a:extLst xmlns:a="http://schemas.openxmlformats.org/drawingml/2006/main">
               <a:ext uri="{FF2B5EF4-FFF2-40B4-BE49-F238E27FC236}">
-                <a16:creationId xmlns:a16="http://schemas.microsoft.com/office/drawing/2014/main" id="{CA796A61-7DAE-4835-861F-275AD36D0E48}"/>
+                <a16:creationId xmlns:a16="http://schemas.microsoft.com/office/drawing/2014/main" id="{3043A5B0-D6C1-4217-8FBB-E4E10A70F457}"/>
               </a:ext>
             </a:extLst>
           </p:cNvPr>
@@ -8478,7 +8498,7 @@
           <p:cNvPr id="12" name="TextBox 11">
             <a:extLst xmlns:a="http://schemas.openxmlformats.org/drawingml/2006/main">
               <a:ext uri="{FF2B5EF4-FFF2-40B4-BE49-F238E27FC236}">
-                <a16:creationId xmlns:a16="http://schemas.microsoft.com/office/drawing/2014/main" id="{F18C709E-B2BE-4AD3-AA9A-BEB67F5E66D2}"/>
+                <a16:creationId xmlns:a16="http://schemas.microsoft.com/office/drawing/2014/main" id="{85E10B87-D359-4742-9C1C-212A71AF4176}"/>
               </a:ext>
             </a:extLst>
           </p:cNvPr>
@@ -8515,7 +8535,7 @@
                 <a:ea typeface="Aptos"/>
                 <a:cs typeface="Aptos"/>
               </a:rPr>
-              <a:t>274,180 milj. NZD</a:t>
+              <a:t>NOT_COMPUTED</a:t>
             </a:r>
           </a:p>
         </p:txBody>
@@ -8525,7 +8545,7 @@
           <p:cNvPr id="13" name="TextBox 12">
             <a:extLst xmlns:a="http://schemas.openxmlformats.org/drawingml/2006/main">
               <a:ext uri="{FF2B5EF4-FFF2-40B4-BE49-F238E27FC236}">
-                <a16:creationId xmlns:a16="http://schemas.microsoft.com/office/drawing/2014/main" id="{49F24AC0-5CBF-4DF3-BD2E-009C18BE838B}"/>
+                <a16:creationId xmlns:a16="http://schemas.microsoft.com/office/drawing/2014/main" id="{2C34D870-00EF-4367-AE5C-E8314F8743D6}"/>
               </a:ext>
             </a:extLst>
           </p:cNvPr>
@@ -8537,7 +8557,7 @@
         <p:spPr>
           <a:xfrm xmlns:a="http://schemas.openxmlformats.org/drawingml/2006/main">
             <a:off x="4483608" y="2468879"/>
-            <a:ext cx="3203448" cy="499872"/>
+            <a:ext cx="3203448" cy="438912"/>
           </a:xfrm>
           <a:prstGeom xmlns:a="http://schemas.openxmlformats.org/drawingml/2006/main" prst="rect">
             <a:avLst/>
@@ -8562,7 +8582,7 @@
                 <a:ea typeface="Aptos"/>
                 <a:cs typeface="Aptos"/>
               </a:rPr>
-              <a:t>tunnistettu AIS/AVP-summa · ≈153,3 milj. EUR</a:t>
+              <a:t>kaikki seitsemän arvotulosta = null</a:t>
             </a:r>
           </a:p>
         </p:txBody>
@@ -8572,7 +8592,7 @@
           <p:cNvPr id="14" name="Rounded Rectangle 13">
             <a:extLst xmlns:a="http://schemas.openxmlformats.org/drawingml/2006/main">
               <a:ext uri="{FF2B5EF4-FFF2-40B4-BE49-F238E27FC236}">
-                <a16:creationId xmlns:a16="http://schemas.microsoft.com/office/drawing/2014/main" id="{BB369147-1DDD-4AED-BE3A-0DDB35F83C11}"/>
+                <a16:creationId xmlns:a16="http://schemas.microsoft.com/office/drawing/2014/main" id="{C35E3408-EFE2-43EB-8EBA-5A836755E163}"/>
               </a:ext>
             </a:extLst>
           </p:cNvPr>
@@ -8629,7 +8649,7 @@
           <p:cNvPr id="15" name="TextBox 14">
             <a:extLst xmlns:a="http://schemas.openxmlformats.org/drawingml/2006/main">
               <a:ext uri="{FF2B5EF4-FFF2-40B4-BE49-F238E27FC236}">
-                <a16:creationId xmlns:a16="http://schemas.microsoft.com/office/drawing/2014/main" id="{634B9F65-279C-44C7-9FC2-DD19248F2557}"/>
+                <a16:creationId xmlns:a16="http://schemas.microsoft.com/office/drawing/2014/main" id="{03841A71-016A-482D-9765-B8EF5B1FCA5E}"/>
               </a:ext>
             </a:extLst>
           </p:cNvPr>
@@ -8676,7 +8696,7 @@
           <p:cNvPr id="16" name="TextBox 15">
             <a:extLst xmlns:a="http://schemas.openxmlformats.org/drawingml/2006/main">
               <a:ext uri="{FF2B5EF4-FFF2-40B4-BE49-F238E27FC236}">
-                <a16:creationId xmlns:a16="http://schemas.microsoft.com/office/drawing/2014/main" id="{FE661942-9965-4210-8636-B3FFF90394FC}"/>
+                <a16:creationId xmlns:a16="http://schemas.microsoft.com/office/drawing/2014/main" id="{83A32E8A-1E93-4BAF-B3FE-2B1ACD80996E}"/>
               </a:ext>
             </a:extLst>
           </p:cNvPr>
@@ -8723,7 +8743,7 @@
           <p:cNvPr id="17" name="TextBox 16">
             <a:extLst xmlns:a="http://schemas.openxmlformats.org/drawingml/2006/main">
               <a:ext uri="{FF2B5EF4-FFF2-40B4-BE49-F238E27FC236}">
-                <a16:creationId xmlns:a16="http://schemas.microsoft.com/office/drawing/2014/main" id="{5E8D442C-C959-45F2-BE22-B64365523394}"/>
+                <a16:creationId xmlns:a16="http://schemas.microsoft.com/office/drawing/2014/main" id="{E11A491A-EA70-4192-894E-0A79790FB6C3}"/>
               </a:ext>
             </a:extLst>
           </p:cNvPr>
@@ -8760,7 +8780,7 @@
                 <a:ea typeface="Aptos"/>
                 <a:cs typeface="Aptos"/>
               </a:rPr>
-              <a:t>Kanada 7/10; NZ:n rajaproxyt eivät ole retail-arvoja. Saksan yksityinen DE-BLIND-audit läpäisi vuosien 2023 ja 2024 vuosirajat sekä yhteisrajan; arvot salassa. Euromonitor 1/6, EI PISTEYTETTY; laajempi paketti HOLD.</a:t>
+              <a:t>Markkinaevidenssi → rajausavainten täsmäytys → katettu myynti → reittikohtainen taloudellinen hyöty → painotetut päivätyt kassavirrat → nykyarvo/oikaisut → erillinen ei-yhteenlaskettava tulos.</a:t>
             </a:r>
           </a:p>
         </p:txBody>
@@ -8770,7 +8790,7 @@
           <p:cNvPr id="18" name="Rounded Rectangle 17">
             <a:extLst xmlns:a="http://schemas.openxmlformats.org/drawingml/2006/main">
               <a:ext uri="{FF2B5EF4-FFF2-40B4-BE49-F238E27FC236}">
-                <a16:creationId xmlns:a16="http://schemas.microsoft.com/office/drawing/2014/main" id="{5C499F5D-CDBF-41AF-94CB-D787F485D5E0}"/>
+                <a16:creationId xmlns:a16="http://schemas.microsoft.com/office/drawing/2014/main" id="{7662424B-EB74-467C-9A55-30729855D9B8}"/>
               </a:ext>
             </a:extLst>
           </p:cNvPr>
@@ -8827,7 +8847,7 @@
           <p:cNvPr id="19" name="TextBox 18">
             <a:extLst xmlns:a="http://schemas.openxmlformats.org/drawingml/2006/main">
               <a:ext uri="{FF2B5EF4-FFF2-40B4-BE49-F238E27FC236}">
-                <a16:creationId xmlns:a16="http://schemas.microsoft.com/office/drawing/2014/main" id="{66486416-4F89-4C82-8CBE-1862EB552107}"/>
+                <a16:creationId xmlns:a16="http://schemas.microsoft.com/office/drawing/2014/main" id="{7869DC40-312C-4922-B3C2-3581898D45C0}"/>
               </a:ext>
             </a:extLst>
           </p:cNvPr>
@@ -8874,7 +8894,7 @@
           <p:cNvPr id="20" name="TextBox 19">
             <a:extLst xmlns:a="http://schemas.openxmlformats.org/drawingml/2006/main">
               <a:ext uri="{FF2B5EF4-FFF2-40B4-BE49-F238E27FC236}">
-                <a16:creationId xmlns:a16="http://schemas.microsoft.com/office/drawing/2014/main" id="{92FB8661-E0FD-4172-BEE5-7B97EE721A69}"/>
+                <a16:creationId xmlns:a16="http://schemas.microsoft.com/office/drawing/2014/main" id="{69E4728B-583D-4CF8-81BE-D190B43405DC}"/>
               </a:ext>
             </a:extLst>
           </p:cNvPr>
@@ -8886,7 +8906,7 @@
         <p:spPr>
           <a:xfrm xmlns:a="http://schemas.openxmlformats.org/drawingml/2006/main">
             <a:off x="731520" y="5038344"/>
-            <a:ext cx="10597896" cy="758952"/>
+            <a:ext cx="10597896" cy="530352"/>
           </a:xfrm>
           <a:prstGeom xmlns:a="http://schemas.openxmlformats.org/drawingml/2006/main" prst="rect">
             <a:avLst/>
@@ -8911,7 +8931,7 @@
                 <a:ea typeface="Aptos"/>
                 <a:cs typeface="Aptos"/>
               </a:rPr>
-              <a:t>Menetelmäkontrolli 28 / 0 / 15 / 152. Kanada retail 1,219160 mrd CAD (≈822,6 milj. EUR; ECB 2024) ja toimitukset 1,160754 mrd CAD (≈783,2 milj. EUR; ECB 2024). Uusi-Seelanti 274,180 milj. NZD (≈153,3 milj. EUR; ECB 2024), 7/10; tullisuhteet eivät ole katteita. Donor 0/3.</a:t>
+              <a:t>Lisensointi ei vaadi loukkausmyyntiä; vain menneen täytäntöönpanon haara vaatii. Puuttuva ei ole nolla. Donor 0/3 on evidenssivalmiuden syöte, ei lopputavoite.</a:t>
             </a:r>
           </a:p>
         </p:txBody>
@@ -8919,7 +8939,7 @@
     </p:spTree>
     <p:extLst>
       <p:ext uri="{BB962C8B-B14F-4D97-AF65-F5344CB8AC3E}">
-        <p14:creationId xmlns:p14="http://schemas.microsoft.com/office/powerpoint/2010/main" val="446780176"/>
+        <p14:creationId xmlns:p14="http://schemas.microsoft.com/office/powerpoint/2010/main" val="1022409108"/>
       </p:ext>
     </p:extLst>
   </p:cSld>
@@ -8943,7 +8963,7 @@
           <p:cNvPr id="2" name="TextBox 1">
             <a:extLst xmlns:a="http://schemas.openxmlformats.org/drawingml/2006/main">
               <a:ext uri="{FF2B5EF4-FFF2-40B4-BE49-F238E27FC236}">
-                <a16:creationId xmlns:a16="http://schemas.microsoft.com/office/drawing/2014/main" id="{2FE0391D-CCAA-4CB8-910F-1510F6DE4614}"/>
+                <a16:creationId xmlns:a16="http://schemas.microsoft.com/office/drawing/2014/main" id="{BEB42231-5C66-4A74-8D8A-45B8CD63E506}"/>
               </a:ext>
             </a:extLst>
           </p:cNvPr>
@@ -8990,7 +9010,7 @@
           <p:cNvPr id="3" name="TextBox 2">
             <a:extLst xmlns:a="http://schemas.openxmlformats.org/drawingml/2006/main">
               <a:ext uri="{FF2B5EF4-FFF2-40B4-BE49-F238E27FC236}">
-                <a16:creationId xmlns:a16="http://schemas.microsoft.com/office/drawing/2014/main" id="{E322613C-D838-4D28-B512-7E212CF8E6AF}"/>
+                <a16:creationId xmlns:a16="http://schemas.microsoft.com/office/drawing/2014/main" id="{4783D2E5-61F4-42C3-9BED-AEC2A9D4C47E}"/>
               </a:ext>
             </a:extLst>
           </p:cNvPr>
@@ -9027,7 +9047,7 @@
                 <a:ea typeface="Aptos"/>
                 <a:cs typeface="Aptos"/>
               </a:rPr>
-              <a:t>Puutteet ovat rajattavissa konkreettiseksi työohjelmaksi</a:t>
+              <a:t>Seitsemän avointa porttia määrittävät työohjelman</a:t>
             </a:r>
           </a:p>
         </p:txBody>
@@ -9037,7 +9057,7 @@
           <p:cNvPr id="4" name="Rectangle 3">
             <a:extLst xmlns:a="http://schemas.openxmlformats.org/drawingml/2006/main">
               <a:ext uri="{FF2B5EF4-FFF2-40B4-BE49-F238E27FC236}">
-                <a16:creationId xmlns:a16="http://schemas.microsoft.com/office/drawing/2014/main" id="{AF799ACF-D2D1-4186-9690-05B58FE37F38}"/>
+                <a16:creationId xmlns:a16="http://schemas.microsoft.com/office/drawing/2014/main" id="{F6930739-2C29-475C-B767-38CE116CD8A8}"/>
               </a:ext>
             </a:extLst>
           </p:cNvPr>
@@ -9092,7 +9112,7 @@
           <p:cNvPr id="5" name="Rectangle 4">
             <a:extLst xmlns:a="http://schemas.openxmlformats.org/drawingml/2006/main">
               <a:ext uri="{FF2B5EF4-FFF2-40B4-BE49-F238E27FC236}">
-                <a16:creationId xmlns:a16="http://schemas.microsoft.com/office/drawing/2014/main" id="{9FC87847-2E3B-49E6-A6D8-9BD338154BE0}"/>
+                <a16:creationId xmlns:a16="http://schemas.microsoft.com/office/drawing/2014/main" id="{4607061B-F4C8-4CC7-BF3B-BB9433158B9E}"/>
               </a:ext>
             </a:extLst>
           </p:cNvPr>
@@ -9147,7 +9167,7 @@
           <p:cNvPr id="6" name="TextBox 5">
             <a:extLst xmlns:a="http://schemas.openxmlformats.org/drawingml/2006/main">
               <a:ext uri="{FF2B5EF4-FFF2-40B4-BE49-F238E27FC236}">
-                <a16:creationId xmlns:a16="http://schemas.microsoft.com/office/drawing/2014/main" id="{C711B8E3-2F55-45E2-B1BE-8822FEAF604C}"/>
+                <a16:creationId xmlns:a16="http://schemas.microsoft.com/office/drawing/2014/main" id="{E3D01808-D1BD-4981-89E9-2FEB5032E953}"/>
               </a:ext>
             </a:extLst>
           </p:cNvPr>
@@ -9184,7 +9204,7 @@
                 <a:ea typeface="Aptos"/>
                 <a:cs typeface="Aptos"/>
               </a:rPr>
-              <a:t>Julkinen riippumaton evidenssikooste · 2026.08.03-43 · 2026-08-03 · Lähteet: Evidence Register; WIPO IP valuation</a:t>
+              <a:t>Julkinen riippumaton evidenssikooste · 2026.08.03-44 · 2026-08-03 · Lähteet: Evidence Register; WIPO IP valuation</a:t>
             </a:r>
           </a:p>
         </p:txBody>
@@ -9194,7 +9214,7 @@
           <p:cNvPr id="7" name="TextBox 6">
             <a:extLst xmlns:a="http://schemas.openxmlformats.org/drawingml/2006/main">
               <a:ext uri="{FF2B5EF4-FFF2-40B4-BE49-F238E27FC236}">
-                <a16:creationId xmlns:a16="http://schemas.microsoft.com/office/drawing/2014/main" id="{4FEE8DAF-408D-45EA-84D1-001FA4277C85}"/>
+                <a16:creationId xmlns:a16="http://schemas.microsoft.com/office/drawing/2014/main" id="{A697BB23-5238-4E44-B87F-5B4A285B73E1}"/>
               </a:ext>
             </a:extLst>
           </p:cNvPr>
@@ -9681,7 +9701,7 @@
           <p:cNvPr id="9" name="TextBox 8">
             <a:extLst xmlns:a="http://schemas.openxmlformats.org/drawingml/2006/main">
               <a:ext uri="{FF2B5EF4-FFF2-40B4-BE49-F238E27FC236}">
-                <a16:creationId xmlns:a16="http://schemas.microsoft.com/office/drawing/2014/main" id="{B0C64B02-E23C-46C1-A1A2-1D3D4F9588BD}"/>
+                <a16:creationId xmlns:a16="http://schemas.microsoft.com/office/drawing/2014/main" id="{26552105-ACAB-4672-BD94-9389218A7B1F}"/>
               </a:ext>
             </a:extLst>
           </p:cNvPr>
@@ -9693,7 +9713,7 @@
         <p:spPr>
           <a:xfrm xmlns:a="http://schemas.openxmlformats.org/drawingml/2006/main">
             <a:off x="603504" y="5660136"/>
-            <a:ext cx="10881360" cy="502920"/>
+            <a:ext cx="10881360" cy="591312"/>
           </a:xfrm>
           <a:prstGeom xmlns:a="http://schemas.openxmlformats.org/drawingml/2006/main" prst="rect">
             <a:avLst/>
@@ -9718,7 +9738,7 @@
                 <a:ea typeface="Aptos"/>
                 <a:cs typeface="Aptos"/>
               </a:rPr>
-              <a:t>Pankkikelpoisuus paranee eniten, kun nämä neljä aukkoa suljetaan ennen arvokeskustelua.</a:t>
+              <a:t>Lukitse peruste/kohde, oikeudet, vaatimusvertailu, katettu myynti, talous, kassavirta ja riskit ennen tuloskohtaista laskentaa.</a:t>
             </a:r>
           </a:p>
         </p:txBody>
@@ -9726,7 +9746,7 @@
     </p:spTree>
     <p:extLst>
       <p:ext uri="{BB962C8B-B14F-4D97-AF65-F5344CB8AC3E}">
-        <p14:creationId xmlns:p14="http://schemas.microsoft.com/office/powerpoint/2010/main" val="1703289132"/>
+        <p14:creationId xmlns:p14="http://schemas.microsoft.com/office/powerpoint/2010/main" val="1110228559"/>
       </p:ext>
     </p:extLst>
   </p:cSld>
@@ -9757,7 +9777,7 @@
           <p:cNvPr id="2" name="TextBox 1">
             <a:extLst xmlns:a="http://schemas.openxmlformats.org/drawingml/2006/main">
               <a:ext uri="{FF2B5EF4-FFF2-40B4-BE49-F238E27FC236}">
-                <a16:creationId xmlns:a16="http://schemas.microsoft.com/office/drawing/2014/main" id="{19C300D3-FC27-4EE2-8032-AACA02CF1EA4}"/>
+                <a16:creationId xmlns:a16="http://schemas.microsoft.com/office/drawing/2014/main" id="{E9D2962C-5452-4140-BF96-43EEB87F4D83}"/>
               </a:ext>
             </a:extLst>
           </p:cNvPr>
@@ -9804,7 +9824,7 @@
           <p:cNvPr id="3" name="TextBox 2">
             <a:extLst xmlns:a="http://schemas.openxmlformats.org/drawingml/2006/main">
               <a:ext uri="{FF2B5EF4-FFF2-40B4-BE49-F238E27FC236}">
-                <a16:creationId xmlns:a16="http://schemas.microsoft.com/office/drawing/2014/main" id="{FC4B85A2-E99A-4CF0-AD45-C3669ADB2E67}"/>
+                <a16:creationId xmlns:a16="http://schemas.microsoft.com/office/drawing/2014/main" id="{DD640F73-A84C-4390-99D7-02E16EB2A9CB}"/>
               </a:ext>
             </a:extLst>
           </p:cNvPr>
@@ -9816,7 +9836,7 @@
         <p:spPr>
           <a:xfrm xmlns:a="http://schemas.openxmlformats.org/drawingml/2006/main">
             <a:off x="566928" y="1005840"/>
-            <a:ext cx="10881360" cy="914400"/>
+            <a:ext cx="10881360" cy="1261872"/>
           </a:xfrm>
           <a:prstGeom xmlns:a="http://schemas.openxmlformats.org/drawingml/2006/main" prst="rect">
             <a:avLst/>
@@ -9841,7 +9861,7 @@
                 <a:ea typeface="Aptos"/>
                 <a:cs typeface="Aptos"/>
               </a:rPr>
-              <a:t>Ehdollinen eteneminen: 90 päivän diligence ennen rahoituspäätöstä</a:t>
+              <a:t>Ehdollinen eteneminen: sulje portit ennen arvopäätöstä</a:t>
             </a:r>
           </a:p>
         </p:txBody>
@@ -9851,7 +9871,7 @@
           <p:cNvPr id="4" name="TextBox 3">
             <a:extLst xmlns:a="http://schemas.openxmlformats.org/drawingml/2006/main">
               <a:ext uri="{FF2B5EF4-FFF2-40B4-BE49-F238E27FC236}">
-                <a16:creationId xmlns:a16="http://schemas.microsoft.com/office/drawing/2014/main" id="{1D0EAEE9-B123-4BE2-933B-A5E27579DE89}"/>
+                <a16:creationId xmlns:a16="http://schemas.microsoft.com/office/drawing/2014/main" id="{B772E55E-D08D-476E-9D41-54109DF3CD4E}"/>
               </a:ext>
             </a:extLst>
           </p:cNvPr>
@@ -9894,7 +9914,7 @@
               </a:defRPr>
             </a:pPr>
             <a:r>
-              <a:t>•  0–30 päivää: omistus-, rasite-, maksu- ja oikeusmatriisi.</a:t>
+              <a:t>•  Peruste ja kohde: oikeudet, alueet, käyttötarkoitus, markkinaosapuoli-/omistajaperuste sekä brutto/netto/verot.</a:t>
             </a:r>
           </a:p>
           <a:p xmlns:a="http://schemas.openxmlformats.org/drawingml/2006/main">
@@ -9916,7 +9936,7 @@
               </a:defRPr>
             </a:pPr>
             <a:r>
-              <a:t>•  31–60 päivää: priorisoidut claim chartit, markkinamyynnin rajaus ja vastapuolidata.</a:t>
+              <a:t>•  Oikeudet, tuote ja katettu myynti: Boolean-/aikamaskit, mitattu SKU-kohdistus ja asiantuntijan vaatimusvertailun tila.</a:t>
             </a:r>
           </a:p>
           <a:p xmlns:a="http://schemas.openxmlformats.org/drawingml/2006/main">
@@ -9938,7 +9958,7 @@
               </a:defRPr>
             </a:pPr>
             <a:r>
-              <a:t>•  61–90 päivää: riippumaton arvonmääritys, kassavirtaskenaariot ja rahoitusehdot.</a:t>
+              <a:t>•  Neljä haaraa: RFR/oma käyttö, lisensointi, mennyt täytäntöönpano ja strateginen optio; vain täytäntöönpano vaatii loukkausmyyntiä.</a:t>
             </a:r>
           </a:p>
           <a:p xmlns:a="http://schemas.openxmlformats.org/drawingml/2006/main">
@@ -9960,7 +9980,7 @@
               </a:defRPr>
             </a:pPr>
             <a:r>
-              <a:t>•  Päätösportti: vain vahvistettuun oikeuteen ja takaisinmaksulähteeseen perustuva rakenne.</a:t>
+              <a:t>•  Painotetut päivätyt kassavirrat, yhden kerran riskikohdistus ja vakuudelle erillinen realisaatiotapaus; tuloksia ei summata.</a:t>
             </a:r>
           </a:p>
         </p:txBody>
@@ -9970,7 +9990,7 @@
           <p:cNvPr id="5" name="TextBox 4">
             <a:extLst xmlns:a="http://schemas.openxmlformats.org/drawingml/2006/main">
               <a:ext uri="{FF2B5EF4-FFF2-40B4-BE49-F238E27FC236}">
-                <a16:creationId xmlns:a16="http://schemas.microsoft.com/office/drawing/2014/main" id="{2764952F-059D-404B-A2EF-B8F980B409A6}"/>
+                <a16:creationId xmlns:a16="http://schemas.microsoft.com/office/drawing/2014/main" id="{33CF076B-1C5B-45AE-8F20-8E3C6921512A}"/>
               </a:ext>
             </a:extLst>
           </p:cNvPr>
@@ -10007,7 +10027,7 @@
                 <a:ea typeface="Aptos"/>
                 <a:cs typeface="Aptos"/>
               </a:rPr>
-              <a:t>Versio 2026.08.03-43 · 2026-08-03 · 6 / 6</a:t>
+              <a:t>Versio 2026.08.03-44 · 2026-08-03 · 6 / 6</a:t>
             </a:r>
           </a:p>
         </p:txBody>
@@ -10015,7 +10035,7 @@
     </p:spTree>
     <p:extLst>
       <p:ext uri="{BB962C8B-B14F-4D97-AF65-F5344CB8AC3E}">
-        <p14:creationId xmlns:p14="http://schemas.microsoft.com/office/powerpoint/2010/main" val="523971775"/>
+        <p14:creationId xmlns:p14="http://schemas.microsoft.com/office/powerpoint/2010/main" val="60063994"/>
       </p:ext>
     </p:extLst>
   </p:cSld>
